--- a/docs/decks/L05.pptx
+++ b/docs/decks/L05.pptx
@@ -16601,9 +16601,14 @@
             </a:avLst>
           </a:prstGeom>
           <a:solidFill>
-            <a:srgbClr val="ECEBFB"/>
+            <a:srgbClr val="FFFFFF"/>
           </a:solidFill>
-          <a:ln/>
+          <a:ln w="12700">
+            <a:solidFill>
+              <a:srgbClr val="E4E6EC"/>
+            </a:solidFill>
+            <a:prstDash val="solid"/>
+          </a:ln>
         </p:spPr>
       </p:sp>
       <p:sp>
@@ -16621,7 +16626,7 @@
             <a:avLst/>
           </a:prstGeom>
           <a:solidFill>
-            <a:srgbClr val="4038C4"/>
+            <a:srgbClr val="1B1D23"/>
           </a:solidFill>
           <a:ln/>
         </p:spPr>
@@ -16653,7 +16658,7 @@
             <a:r>
               <a:rPr lang="en-US" sz="1200" b="1" dirty="0">
                 <a:solidFill>
-                  <a:srgbClr val="ECEBFB"/>
+                  <a:srgbClr val="FFFFFF"/>
                 </a:solidFill>
                 <a:latin typeface="Courier New" pitchFamily="34" charset="0"/>
                 <a:ea typeface="Courier New" pitchFamily="34" charset="-122"/>
@@ -16692,7 +16697,7 @@
             <a:r>
               <a:rPr lang="en-US" sz="1450" b="1" dirty="0">
                 <a:solidFill>
-                  <a:srgbClr val="4038C4"/>
+                  <a:srgbClr val="1B1D23"/>
                 </a:solidFill>
                 <a:latin typeface="Calibri" pitchFamily="34" charset="0"/>
                 <a:ea typeface="Calibri" pitchFamily="34" charset="-122"/>
@@ -16721,9 +16726,14 @@
             </a:avLst>
           </a:prstGeom>
           <a:solidFill>
-            <a:srgbClr val="ECEBFB"/>
+            <a:srgbClr val="FFFFFF"/>
           </a:solidFill>
-          <a:ln/>
+          <a:ln w="12700">
+            <a:solidFill>
+              <a:srgbClr val="E4E6EC"/>
+            </a:solidFill>
+            <a:prstDash val="solid"/>
+          </a:ln>
         </p:spPr>
       </p:sp>
       <p:sp>
@@ -16741,7 +16751,7 @@
             <a:avLst/>
           </a:prstGeom>
           <a:solidFill>
-            <a:srgbClr val="4038C4"/>
+            <a:srgbClr val="1B1D23"/>
           </a:solidFill>
           <a:ln/>
         </p:spPr>
@@ -16773,7 +16783,7 @@
             <a:r>
               <a:rPr lang="en-US" sz="1200" b="1" dirty="0">
                 <a:solidFill>
-                  <a:srgbClr val="ECEBFB"/>
+                  <a:srgbClr val="FFFFFF"/>
                 </a:solidFill>
                 <a:latin typeface="Courier New" pitchFamily="34" charset="0"/>
                 <a:ea typeface="Courier New" pitchFamily="34" charset="-122"/>
@@ -16812,7 +16822,7 @@
             <a:r>
               <a:rPr lang="en-US" sz="1450" b="1" dirty="0">
                 <a:solidFill>
-                  <a:srgbClr val="4038C4"/>
+                  <a:srgbClr val="1B1D23"/>
                 </a:solidFill>
                 <a:latin typeface="Calibri" pitchFamily="34" charset="0"/>
                 <a:ea typeface="Calibri" pitchFamily="34" charset="-122"/>
@@ -16841,9 +16851,14 @@
             </a:avLst>
           </a:prstGeom>
           <a:solidFill>
-            <a:srgbClr val="ECEBFB"/>
+            <a:srgbClr val="FFFFFF"/>
           </a:solidFill>
-          <a:ln/>
+          <a:ln w="12700">
+            <a:solidFill>
+              <a:srgbClr val="E4E6EC"/>
+            </a:solidFill>
+            <a:prstDash val="solid"/>
+          </a:ln>
         </p:spPr>
       </p:sp>
       <p:sp>
@@ -16861,7 +16876,7 @@
             <a:avLst/>
           </a:prstGeom>
           <a:solidFill>
-            <a:srgbClr val="4038C4"/>
+            <a:srgbClr val="1B1D23"/>
           </a:solidFill>
           <a:ln/>
         </p:spPr>
@@ -16893,7 +16908,7 @@
             <a:r>
               <a:rPr lang="en-US" sz="1200" b="1" dirty="0">
                 <a:solidFill>
-                  <a:srgbClr val="ECEBFB"/>
+                  <a:srgbClr val="FFFFFF"/>
                 </a:solidFill>
                 <a:latin typeface="Courier New" pitchFamily="34" charset="0"/>
                 <a:ea typeface="Courier New" pitchFamily="34" charset="-122"/>
@@ -16932,7 +16947,7 @@
             <a:r>
               <a:rPr lang="en-US" sz="1450" b="1" dirty="0">
                 <a:solidFill>
-                  <a:srgbClr val="4038C4"/>
+                  <a:srgbClr val="1B1D23"/>
                 </a:solidFill>
                 <a:latin typeface="Calibri" pitchFamily="34" charset="0"/>
                 <a:ea typeface="Calibri" pitchFamily="34" charset="-122"/>
@@ -16961,9 +16976,14 @@
             </a:avLst>
           </a:prstGeom>
           <a:solidFill>
-            <a:srgbClr val="ECEBFB"/>
+            <a:srgbClr val="FFFFFF"/>
           </a:solidFill>
-          <a:ln/>
+          <a:ln w="12700">
+            <a:solidFill>
+              <a:srgbClr val="E4E6EC"/>
+            </a:solidFill>
+            <a:prstDash val="solid"/>
+          </a:ln>
         </p:spPr>
       </p:sp>
       <p:sp>
@@ -16981,7 +17001,7 @@
             <a:avLst/>
           </a:prstGeom>
           <a:solidFill>
-            <a:srgbClr val="4038C4"/>
+            <a:srgbClr val="1B1D23"/>
           </a:solidFill>
           <a:ln/>
         </p:spPr>
@@ -17013,7 +17033,7 @@
             <a:r>
               <a:rPr lang="en-US" sz="1200" b="1" dirty="0">
                 <a:solidFill>
-                  <a:srgbClr val="ECEBFB"/>
+                  <a:srgbClr val="FFFFFF"/>
                 </a:solidFill>
                 <a:latin typeface="Courier New" pitchFamily="34" charset="0"/>
                 <a:ea typeface="Courier New" pitchFamily="34" charset="-122"/>
@@ -17052,7 +17072,7 @@
             <a:r>
               <a:rPr lang="en-US" sz="1450" b="1" dirty="0">
                 <a:solidFill>
-                  <a:srgbClr val="4038C4"/>
+                  <a:srgbClr val="1B1D23"/>
                 </a:solidFill>
                 <a:latin typeface="Calibri" pitchFamily="34" charset="0"/>
                 <a:ea typeface="Calibri" pitchFamily="34" charset="-122"/>
@@ -17081,9 +17101,14 @@
             </a:avLst>
           </a:prstGeom>
           <a:solidFill>
-            <a:srgbClr val="ECEBFB"/>
+            <a:srgbClr val="FFFFFF"/>
           </a:solidFill>
-          <a:ln/>
+          <a:ln w="12700">
+            <a:solidFill>
+              <a:srgbClr val="E4E6EC"/>
+            </a:solidFill>
+            <a:prstDash val="solid"/>
+          </a:ln>
         </p:spPr>
       </p:sp>
       <p:sp>
@@ -17101,7 +17126,7 @@
             <a:avLst/>
           </a:prstGeom>
           <a:solidFill>
-            <a:srgbClr val="4038C4"/>
+            <a:srgbClr val="1B1D23"/>
           </a:solidFill>
           <a:ln/>
         </p:spPr>
@@ -17133,7 +17158,7 @@
             <a:r>
               <a:rPr lang="en-US" sz="1200" b="1" dirty="0">
                 <a:solidFill>
-                  <a:srgbClr val="ECEBFB"/>
+                  <a:srgbClr val="FFFFFF"/>
                 </a:solidFill>
                 <a:latin typeface="Courier New" pitchFamily="34" charset="0"/>
                 <a:ea typeface="Courier New" pitchFamily="34" charset="-122"/>
@@ -17172,7 +17197,7 @@
             <a:r>
               <a:rPr lang="en-US" sz="1450" b="1" dirty="0">
                 <a:solidFill>
-                  <a:srgbClr val="4038C4"/>
+                  <a:srgbClr val="1B1D23"/>
                 </a:solidFill>
                 <a:latin typeface="Calibri" pitchFamily="34" charset="0"/>
                 <a:ea typeface="Calibri" pitchFamily="34" charset="-122"/>

--- a/docs/decks/L05.pptx
+++ b/docs/decks/L05.pptx
@@ -20587,9 +20587,14 @@
             </a:avLst>
           </a:prstGeom>
           <a:solidFill>
-            <a:srgbClr val="141018"/>
+            <a:srgbClr val="F5F4FA"/>
           </a:solidFill>
-          <a:ln/>
+          <a:ln w="12700">
+            <a:solidFill>
+              <a:srgbClr val="E6E7EC"/>
+            </a:solidFill>
+            <a:prstDash val="solid"/>
+          </a:ln>
         </p:spPr>
       </p:sp>
       <p:sp>
@@ -20622,7 +20627,7 @@
             <a:r>
               <a:rPr lang="en-US" sz="1300" dirty="0">
                 <a:solidFill>
-                  <a:srgbClr val="ECE8F6"/>
+                  <a:srgbClr val="23262F"/>
                 </a:solidFill>
                 <a:latin typeface="Courier New" pitchFamily="34" charset="0"/>
                 <a:ea typeface="Courier New" pitchFamily="34" charset="-122"/>
@@ -20639,7 +20644,7 @@
             <a:r>
               <a:rPr lang="en-US" sz="1300" dirty="0">
                 <a:solidFill>
-                  <a:srgbClr val="C3E88D"/>
+                  <a:srgbClr val="177245"/>
                 </a:solidFill>
                 <a:latin typeface="Courier New" pitchFamily="34" charset="0"/>
                 <a:ea typeface="Courier New" pitchFamily="34" charset="-122"/>
@@ -20656,7 +20661,7 @@
             <a:r>
               <a:rPr lang="en-US" sz="1300" dirty="0">
                 <a:solidFill>
-                  <a:srgbClr val="ECE8F6"/>
+                  <a:srgbClr val="23262F"/>
                 </a:solidFill>
                 <a:latin typeface="Courier New" pitchFamily="34" charset="0"/>
                 <a:ea typeface="Courier New" pitchFamily="34" charset="-122"/>
@@ -22015,9 +22020,14 @@
             </a:avLst>
           </a:prstGeom>
           <a:solidFill>
-            <a:srgbClr val="141018"/>
+            <a:srgbClr val="F5F4FA"/>
           </a:solidFill>
-          <a:ln/>
+          <a:ln w="12700">
+            <a:solidFill>
+              <a:srgbClr val="E6E7EC"/>
+            </a:solidFill>
+            <a:prstDash val="solid"/>
+          </a:ln>
         </p:spPr>
       </p:sp>
       <p:sp>
@@ -22050,7 +22060,7 @@
             <a:r>
               <a:rPr lang="en-US" sz="1150" dirty="0">
                 <a:solidFill>
-                  <a:srgbClr val="6A7385"/>
+                  <a:srgbClr val="8A7FA6"/>
                 </a:solidFill>
                 <a:latin typeface="Courier New" pitchFamily="34" charset="0"/>
                 <a:ea typeface="Courier New" pitchFamily="34" charset="-122"/>
@@ -22070,7 +22080,7 @@
             <a:r>
               <a:rPr lang="en-US" sz="1150" dirty="0">
                 <a:solidFill>
-                  <a:srgbClr val="82AAFF"/>
+                  <a:srgbClr val="5A05F4"/>
                 </a:solidFill>
                 <a:latin typeface="Courier New" pitchFamily="34" charset="0"/>
                 <a:ea typeface="Courier New" pitchFamily="34" charset="-122"/>
@@ -22090,7 +22100,7 @@
             <a:r>
               <a:rPr lang="en-US" sz="1150" dirty="0">
                 <a:solidFill>
-                  <a:srgbClr val="ECE8F6"/>
+                  <a:srgbClr val="23262F"/>
                 </a:solidFill>
                 <a:latin typeface="Courier New" pitchFamily="34" charset="0"/>
                 <a:ea typeface="Courier New" pitchFamily="34" charset="-122"/>
@@ -22110,7 +22120,7 @@
             <a:r>
               <a:rPr lang="en-US" sz="1150" dirty="0">
                 <a:solidFill>
-                  <a:srgbClr val="C3E88D"/>
+                  <a:srgbClr val="177245"/>
                 </a:solidFill>
                 <a:latin typeface="Courier New" pitchFamily="34" charset="0"/>
                 <a:ea typeface="Courier New" pitchFamily="34" charset="-122"/>
@@ -22130,7 +22140,7 @@
             <a:r>
               <a:rPr lang="en-US" sz="1150" dirty="0">
                 <a:solidFill>
-                  <a:srgbClr val="82AAFF"/>
+                  <a:srgbClr val="5A05F4"/>
                 </a:solidFill>
                 <a:latin typeface="Courier New" pitchFamily="34" charset="0"/>
                 <a:ea typeface="Courier New" pitchFamily="34" charset="-122"/>
@@ -22150,7 +22160,7 @@
             <a:r>
               <a:rPr lang="en-US" sz="1150" dirty="0">
                 <a:solidFill>
-                  <a:srgbClr val="F78C6C"/>
+                  <a:srgbClr val="B45309"/>
                 </a:solidFill>
                 <a:latin typeface="Courier New" pitchFamily="34" charset="0"/>
                 <a:ea typeface="Courier New" pitchFamily="34" charset="-122"/>
@@ -22170,7 +22180,7 @@
             <a:r>
               <a:rPr lang="en-US" sz="1150" dirty="0">
                 <a:solidFill>
-                  <a:srgbClr val="6A7385"/>
+                  <a:srgbClr val="8A7FA6"/>
                 </a:solidFill>
                 <a:latin typeface="Courier New" pitchFamily="34" charset="0"/>
                 <a:ea typeface="Courier New" pitchFamily="34" charset="-122"/>
@@ -22190,7 +22200,7 @@
             <a:r>
               <a:rPr lang="en-US" sz="1150" dirty="0">
                 <a:solidFill>
-                  <a:srgbClr val="ECE8F6"/>
+                  <a:srgbClr val="23262F"/>
                 </a:solidFill>
                 <a:latin typeface="Courier New" pitchFamily="34" charset="0"/>
                 <a:ea typeface="Courier New" pitchFamily="34" charset="-122"/>
@@ -22210,7 +22220,7 @@
             <a:r>
               <a:rPr lang="en-US" sz="1150" dirty="0">
                 <a:solidFill>
-                  <a:srgbClr val="82AAFF"/>
+                  <a:srgbClr val="5A05F4"/>
                 </a:solidFill>
                 <a:latin typeface="Courier New" pitchFamily="34" charset="0"/>
                 <a:ea typeface="Courier New" pitchFamily="34" charset="-122"/>

--- a/docs/decks/L05.pptx
+++ b/docs/decks/L05.pptx
@@ -525,7 +525,7 @@
           <a:p>
             <a:r>
               <a:rPr lang="en-US" dirty="0"/>
-              <a:t/>
+              <a:t>Вітаю на п'ятому уроці — першому уроці тижня «Кеш + tools». Минулого тижня ви навчилися бачити гроші в кожному рядку лога і маршрутизувати запити між моделями. Сьогодні додаємо третій механізм контуру вартості — кеш. Ідея проста: найшвидша і найдешевша відповідь — та, по яку взагалі не треба йти в модель. Але простота оманлива: кеш — це механізм із наслідками для коректності. Тому сьогодні ми не лише обгорнемо виклик моделі кешем, а й зберемо ключ, який не бреше після зміни промпта, увімкнемо лічильники hit/miss з першої ж хвилини — і чесно проведемо межу: що кешувати можна, що заборонено, і чому «не кешувати» — теж інженерне рішення. Наприкінці — опційний блок про semantic cache: що він дає і що приходить у комплекті. А в лабораторній ви побачите економію на власні очі — виміряну, а не заявлену.</a:t>
             </a:r>
             <a:endParaRPr lang="en-US" dirty="0"/>
           </a:p>
@@ -613,7 +613,7 @@
           <a:p>
             <a:r>
               <a:rPr lang="en-US" dirty="0"/>
-              <a:t/>
+              <a:t>Про що цей код мовчить, але про що варто пам'ятати. Перше: словник у пам'яті росте необмежено — кожне нове унікальне питання додає запис назавжди. На нашому трафіку це неважливо; на проді кеш без стелі розміру — це повільний витік пам'яті, тому дорослі реалізації додають ліміт записів і витіснення найдавніше використаних — LRU. Це, до речі, ще один аргумент на користь винесеного сховища з блоку 07 — там ці політики вже вбудовані. Друге: два одночасні misses на той самий ключ. Обидва запити не знайдуть запису, обидва підуть у модель, обидва заплатять, і другий результат перезапише перший у кеші. Чи це баг? Ні — це усвідомлений компроміс: ми двічі заплатили за одну відповідь, але нікого не змусили чекати і не ускладнили код блокуваннями. На великому трафіку з дорогими запитами ця «дірка» має ім'я — thundering herd, коли по одному холодному ключу одночасно б'ють сотні запитів, — і рішення: лок на ключ або «запит-лідер». На нашому масштабі ліки були б дорожчі за хворобу. Знати про компроміс — обов'язково; лікувати — коли цифри скажуть.</a:t>
             </a:r>
             <a:endParaRPr lang="en-US" dirty="0"/>
           </a:p>
@@ -701,7 +701,7 @@
           <a:p>
             <a:r>
               <a:rPr lang="en-US" dirty="0"/>
-              <a:t/>
+              <a:t>Два лічильники дають першу похідну метрику курсу — hit ratio: частку запитів, які обійшлися без моделі. З неї випливають одразу три операційні цифри. Зекономлені виклики — просто кількість хітів. Помножте на середню вартість miss-запиту з лога — отримаєте економію в доларах, порахованих, а не заявлених. Latency до і після — хіт відповідає приблизно за нуль мілісекунд проти сотень мілісекунд походу в модель. Для користувача це найвідчутніший ефект. І профіль трафіку — низький hit ratio на трафіку підтримки — привід подивитися в лог: або питання справді унікальні, або ключ занадто чутливий до дрібниць формулювання. Сьогодні лічильники живуть у пам'яті: побачити їх наживо можна дебагером, а простіше — перевірити код і дочекатися консолі тижня 5, коли вони поїдуть у /observability і стануть плиткою Cache-hit. Порядок знову той самий: механізм і метрика — разом, вітрина — коли з'явиться шар вітрини. І лайфхак: перш ніж вмикати кеш, витягніть із лога топ повторюваних повідомлень. Якщо топ-10 питань — це 60% запитів, кеш окупиться в перший же день; якщо всі запити унікальні — почніть з іншого механізму.</a:t>
             </a:r>
             <a:endParaRPr lang="en-US" dirty="0"/>
           </a:p>
@@ -789,7 +789,7 @@
           <a:p>
             <a:r>
               <a:rPr lang="en-US" dirty="0"/>
-              <a:t/>
+              <a:t>Сучасний доважок до вимірювання: провайдерський кеш префікса — той, що з уроку 4, — теж перестав бути «чорною скринькою»: у полі usage сьогодні приходить частка токенів, обслужених із кешу провайдера. Тобто у вас з'являється дві метрики кешу замість однієї: ваш hit ratio — запити, що взагалі не пішли в модель, — і провайдерський: токени, що обійшлися дешевше всередині виклику. Дивитися варто на обидві: буває, що ваш кеш майже не влучає, а рахунок усе одно нижчий за очікуваний — просто тому, що системний промпт стабільний і провайдер кешує його сам. І ще одне: hit ratio — це метрика, у якої є здорові межі в обидва боки. Нуль означає, що кеш мертвий вантаж. Але і підозріло високий відсоток — привід придивитися: можливо, ви кешуєте те, що кешувати не можна, і рекордна цифра куплена ціною застарілих чи чужих відповідей. Метрика без розуміння меж — теж віра, просто з цифрою. З практики — два рішення з реальної агентної платформи, які показують обидва боки цієї медалі. Перше: усередині одного запуску агента службові виклики — дистиляція контексту, план пошуку по пам'яті — повторювалися по кілька разів; завели run-кеш із правилом «дистилюй раз, шукай раз на запуск» — і множник зайвих викликів зник. Класичний кеш, доданий по цифрах. Друге, дзеркальне: в іншому сервісі тієї ж платформи персистентний кеш свідомо прибрали — шар не виправдовував свого існування, а складність і ризик застарілих даних лишалися. «Не кешувати» — теж інженерне рішення, і ухвалюється воно тими самими цифрами, що й «кешувати».</a:t>
             </a:r>
             <a:endParaRPr lang="en-US" dirty="0"/>
           </a:p>
@@ -877,7 +877,7 @@
           <a:p>
             <a:r>
               <a:rPr lang="en-US" dirty="0"/>
-              <a:t/>
+              <a:t>Побічний ефект кешу, про який згадують рідко, а він найцікавіший. З уроку 1 ми знаємо: та сама модель на той самий вхід відповідає щоразу трохи інакше. Кеш це вимикає: перший запит зафіксував відповідь, і всі наступні однакові запити отримують рівно її. У вашій недетермінованій системі з'явився острівець повної передбачуваності. Це справжня цінність, і не лише в грошах: двоє клієнтів із тим самим питанням не отримають суперечливих інструкцій, а оператор, який передивляє діалоги, бачить стабільну поведінку, а не варіації. Кеш — найдешевший спосіб зменшити «розкид» у поведінці системи, коли він вам шкодить. Але ця сама властивість має другий бік: кеш консервує помилку. Модель один раз відповіла невдало — і тепер ця конкретна невдача роздається всім, хто спитає так само, поки не закінчиться TTL. Без кешу погана відповідь була б випадковою; з кешем вона стає систематичною. І в звітності це виглядає підступно добре: hit ratio високий, вартість низька, latency чудова — а якість просіла, бо в кеші лежить сміття. Звідси принцип: не кешуйте те, у чому не впевнені. Фільтр перед записом: відповідь дійшла нормально, не є заглушкою деградації, не є відмовою фільтра безпеки — цей механізм на тижні 4, — і не порожня. Сьогодні умова — status == 200 &amp;&amp; toolCall == null; наступного тижня, коли виклик виїде в окрему функцію і з'явиться fallback, вона доросте до ok &amp;&amp; status == 200 &amp;&amp; toolCall == null — межа переживає новий шар, не змінюючи сенсу. У реальній системі додається ще finish_reason == "stop", щоб не законсервувати обрізану відповідь: наш mock таких не віддає, тому в контурі курсу перевірка була б мертвою, але в проді вона обов'язкова. І так: відповідь-помилку теж можна кешувати — але свідомо і коротко, з окремим, у рази меншим TTL. Це називають негативним кешуванням: воно береже провайдера від лавини однакових невдалих запитів.</a:t>
             </a:r>
             <a:endParaRPr lang="en-US" dirty="0"/>
           </a:p>
@@ -965,7 +965,7 @@
           <a:p>
             <a:r>
               <a:rPr lang="en-US" dirty="0"/>
-              <a:t/>
+              <a:t>Найтиповіша пастка консервації — кешувати заглушку деградації. Уявіть: провайдер лежав дві хвилини, за цей час десяток запитів отримав ввічливе «тимчасові проблеми, спробуйте згодом», і ці заглушки чесно поїхали в кеш. Провайдер піднявся — а система ще годину роздає «тимчасові проблеми» тим, хто питає те саме. Інцидент закінчився, а користувачі його ще бачать. Тому в контурі, який ми будуємо, є правило: те, що народилося у fallback-гілці — це урок 7, — у кеш не потрапляє ніколи. Звідси випливає річ, яку варто мати ще до першого інциденту: спосіб скинути кеш. Не «перезапустити сервіс», а керована операція. Мінімум, який закриває більшість випадків, — версія в ключі кешу, і вона у вас уже є: активна версія промпта — частина ключа, зміна промпта автоматично робить старі записи недосяжними. Наступний рівень — окремий службовий «епох»-номер у ключі, який ви збільшуєте вручну: одна зміна значення — і весь кеш логічно порожній, без жодного видалення. І запишіть цей крок у сценарій інциденту — це урок 12: «після відновлення провайдера — скинути кеш, якщо в період збою могли записатися заглушки». Це рівно той пункт, який під час першого справжнього інциденту не згадає ніхто, а користувачі побачать наслідки.</a:t>
             </a:r>
             <a:endParaRPr lang="en-US" dirty="0"/>
           </a:p>
@@ -1053,7 +1053,7 @@
           <a:p>
             <a:r>
               <a:rPr lang="en-US" dirty="0"/>
-              <a:t/>
+              <a:t>Жорсткий TTL змушує вибирати: короткий — і кеш майже не влучає; довгий — і ви роздаєте застаріле. Але є третій варіант, який у вебі давно стандарт, а в LLM-системах чомусь рідко згадують: віддати старе одразу і оновити у фоні. Запис у кеші має два строки: «свіжий до» і «придатний до». Поки він свіжий — віддаємо як є. Коли свіжість вийшла, а придатність ще ні — усе одно віддаємо старе, і паралельно робимо один виклик моделі, щоб оновити запис. Користувач отримує відповідь за мілісекунди, а наступний уже бачить нову. Для LLM це вигідніше, ніж для звичайного API, з двох причин. По-перше, ціна miss'а тут не «зайвий запит до бази», а секунди очікування і реальні гроші. По-друге, «застаріла» відповідь на типове питання підтримки майже завжди прийнятна: інструкція зі скидання пароля не псується за годину. Виграш видно одразу в двох метриках: hit ratio росте, а p95 перестає стрибати на кожному протуханні популярного ключа. Ціна рішення — складність: потрібен фоновий виклик і захист від того, щоб десять одночасних запитів не пішли оновлювати той самий ключ — це та сама лавина з блоку 04, тільки на оновленні. Тому в обов'язковій доріжці курсу ми лишаємо простий TTL, а цей патерн проговорюємо як наступний крок — і як приклад того, що «кеш» узагалі-то має більше станів, ніж «є / нема». І типова помилка поруч: один TTL на все. Відповідь на «як скинути пароль» може жити добу — інструкція не змінюється. Відповідь зі статусом конкретного замовлення не має права жити й хвилини: вона застаріває раніше, ніж ви її прочитаєте. TTL — це властивість класу запиту, а не налаштування кеша.</a:t>
             </a:r>
             <a:endParaRPr lang="en-US" dirty="0"/>
           </a:p>
@@ -1141,7 +1141,7 @@
           <a:p>
             <a:r>
               <a:rPr lang="en-US" dirty="0"/>
-              <a:t/>
+              <a:t>«У комп'ютерних науках є дві найважчі задачі: інвалідація кешу і найменування» — жарт старий, бо правдивий. Наш мінімальний набір інвалідації складається з двох механізмів. Перший — зміна промпта: вже працює, безкоштовно, через ключ. Найнебезпечніший сценарій застарівання закритий архітектурно, ми його розібрали в блоці 03. Другий — TTL: відповіді старіють за часом. У нашому in-memory кеші його поки немає: записи живуть до рестарту сервісу. Для навчального контуру це чесний компроміс; додати TTL — опційна частина ДЗ тижня 3. Відповідь «як у проді» звучить так: винесене сховище — Redis уже лежить у compose під профілем advanced — з TTL на кожному записі. Винесений кеш переживає рестарти і ділиться між репліками сервісу, але приносить мережевий хоп і власні режими відмови. Класична драбина: почніть із процесної пам'яті, переходьте на винесене сховище, коли реплік стане більше однієї. І типова помилка: інвалідація «вручну і потім» — кеш чистять рестартом сервісу, коли хтось помітив дивну відповідь. Це означає, що межа свіжості вашої системи — «коли хтось помітить». TTL і промпт-у-ключі коштують годину роботи і прибирають цілий клас «привидів» назавжди.</a:t>
             </a:r>
             <a:endParaRPr lang="en-US" dirty="0"/>
           </a:p>
@@ -1229,7 +1229,7 @@
           <a:p>
             <a:r>
               <a:rPr lang="en-US" dirty="0"/>
-              <a:t/>
+              <a:t>Це опційний блок. Точний збіг ключа не зловить пару «Як скинути пароль?» і «забув пароль, що робити?» — а для людини це те саме питання. Semantic cache порівнює не рядки, а embedding'и: запит перетворюється на вектор, шукається найближчий збережений, і якщо схожість вища за поріг — віддається його відповідь. Звучить як строго краща версія кешу — але подивіться, що приходить у комплекті. Поріг схожості — новий операційний параметр: занизький — кеш майже не влучає; зависокий — хибні влучання: «як змінити пароль» і «як змінити тариф» ближчі у векторному просторі, ніж хотілося б, і користувач отримує впевнену відповідь не на своє питання. Вартість embedding-викликів: кожен запит тепер потребує векторизації. Дешевше за генерацію, але не безкоштовно — і має падати у ваш cost-облік: правило з минулого уроку — рахується все. І окреме сховище: векторний пошук потребує відповідної бази, її деплою, моніторингу і бекапів. Тому в курсі semantic cache — опційна доріжка: Redis з advanced-профілю плюс порівняння за схожістю, опційна частина ДЗ тижня 3. Порядок рішень завжди однаковий: спершу виміряйте, скільки дає точний кеш на вашому трафіку. Часто виявляється, що люди формулюють часті питання одноманітніше, ніж здається, — і точного кешу досить.</a:t>
             </a:r>
             <a:endParaRPr lang="en-US" dirty="0"/>
           </a:p>
@@ -1317,7 +1317,7 @@
           <a:p>
             <a:r>
               <a:rPr lang="en-US" dirty="0"/>
-              <a:t/>
+              <a:t>Перш ніж перейти до екрана — що саме ви зараз побачите і навіщо. Кадр перший: те саме питання двічі. Перший запит іде в модель — сотні мілісекунд; другий віддається з кешу — latency_ms менше 50. Кадр другий: доказ у лозі. Два рядки, але другий — з нульовими токенами: виклику моделі не було. Оце і є економія — виміряна, а не заявлена. Кадр третій: rollback-тест ключа. Закешована відповідь є; робимо rollback промпта — і кеш не віддає стару відповідь: іде новий виклик. Промпт у ключі працює. Кадр четвертий: «Де моє замовлення #10482?» — і перевірка, що така відповідь у кеш не потрапляє: межа з блоку 02 тримається. Навіщо це все: побачити кожне з трьох рішень уроку — метрику, ключ і межу — живими, на реальному лозі, а не на слайді. [Ведучому: прогрівний запит перед демо робіть СЛУЖБОВИМ повідомленням, яке в демо не бере участі, — якщо прогріти демо-питанням, воно потрапить у кеш, і кадр «вдруге майже миттєво» зламається: перший запит теж буде з кешу. І друге, підступніше: до готовності gateway запити падають тихо — status=0 у лозі, нульові токени, відповідь за одиниці мілісекунд. На око це нерозрізненне з кеш-хітом — відрізняє тільки status у лозі. Після підняття стека дочекайтеся готовності gateway (health-ендпоінт або ~30 секунд) і лише потім грійте та показуйте.]</a:t>
             </a:r>
             <a:endParaRPr lang="en-US" dirty="0"/>
           </a:p>
@@ -1405,7 +1405,7 @@
           <a:p>
             <a:r>
               <a:rPr lang="en-US" dirty="0"/>
-              <a:t/>
+              <a:t>Частина перша: обгорнути виклик. Ключ, пошук у кеші; hit віддає збережене, miss іде в модель і зберігає — умови збереження з блоку 04: успішна відповідь без tool-виклику. Лічильники hits/misses — у тому самому діфі, це і є measure-first. Частина друга: побачити ефект руками. Те саме питання двічі: перший запит — сотні мілісекунд, другий — приблизно нуль. У лозі два рядки, але другий — з нульовими токенами: виклику моделі не було. Оце і є економія — виміряна, а не заявлена. Частина третя: довести, що промпт у ключі працює. Закешувати відповідь, зробити rollback промпта на «поганий» v1 — це механіка уроку 2 — і спитати знову. Кеш не віддає стару відповідь — іде новий, чесно поганий, виклик. Подумки видаліть промпт із ключа і проговоріть, який баг ви щойно уникли. Частина четверта: промацати межі. Спитати «Де моє замовлення #10482?» і проговорити, чому таку відповідь кешувати не можна: персональний стан, tool-виклик. Переконайтеся, що у вашій реалізації відповіді з tool-викликом у кеш не потрапляють — на наступному уроці ця межа запрацює по-справжньому. І опційна п'ята: TTL. Додати до записів час створення і термін життя; прострочений запис — це miss. Це заготовка під опційну частину ДЗ тижня 3. [Ведучому: якщо повторюєте демо після перезапуску стека — пам'ятайте про тихі падіння до готовності gateway: status=0 і нульові токени виглядають як кеш-хіт, перевіряйте status у лозі.]</a:t>
             </a:r>
             <a:endParaRPr lang="en-US" dirty="0"/>
           </a:p>
@@ -1493,7 +1493,7 @@
           <a:p>
             <a:r>
               <a:rPr lang="en-US" dirty="0"/>
-              <a:t/>
+              <a:t>Домовимось про результат уроку — конкретними діями. Після сьогоднішнього заняття ви зможете: обгорнути виклик моделі кешем так, щоб hit віддавав збережене, а miss ішов у модель і зберігав результат; зібрати ключ кешу, який не бреше, — модель, промпт і повідомлення, — і пояснити, чому саме текст промпта в ключі обов'язковий; увімкнути лічильники hit/miss в одному діфі з кешем і сказати, які три операційні цифри випливають із hit ratio; довести rollback-експериментом, що зміна промпта автоматично інвалідує кеш — без жодного коду інвалідації; провести межу кешування: назвати, які відповіді кешувати заборонено і чому це питання коректності, а не продуктивності; і пояснити, коли варто дивитися в бік semantic cache — і які три речі приходять із ним у комплекті. Кожен пункт ви перевірите руками ще сьогодні — у лабораторній.</a:t>
             </a:r>
             <a:endParaRPr lang="en-US" dirty="0"/>
           </a:p>
@@ -1581,7 +1581,7 @@
           <a:p>
             <a:r>
               <a:rPr lang="en-US" dirty="0"/>
-              <a:t/>
+              <a:t>Зафіксуємо, що ми щойно побачили — і що це доводить. Перше: економія виміряна, а не заявлена. Другий рядок у лозі — з нульовими токенами і нульовою вартістю: виклику моделі не було, і це видно не «на відчуттях», а в даних. Правило measure-first виконано буквально: механізм і його метрика з'явилися в одному діфі. Друге: ключ не бреше. Після rollback промпта кеш не віддав стару відповідь — пішов новий виклик. Інвалідація спрацювала автоматично, без жодного коду: коректність вбудована в саму адресацію. Той самий rollback без промпта в ключі означав би годину роздачі старої поведінки. Третє: межа кешування тримається. Персональне питання про замовлення в кеш не потрапило — і на наступному уроці, коли з'являться справжні tool-виклики, цей предикат почне працювати по-справжньому. Разом ці три картинки — весь урок у трьох кадрах: метрика, ключ, межа. Кеш став механізмом, а не талісманом.</a:t>
             </a:r>
             <a:endParaRPr lang="en-US" dirty="0"/>
           </a:p>
@@ -1669,7 +1669,7 @@
           <a:p>
             <a:r>
               <a:rPr lang="en-US" dirty="0"/>
-              <a:t/>
+              <a:t>Перш ніж розійтися — чесна перевірка обов'язкової доріжки, без оцінок. Чотири пункти. Перший: повторний запит віддається з кешу — приблизно нуль мілісекунд — і не породжує виклик моделі; ви бачили це в лозі другим рядком із нульовими токенами. Другий: лічильники hit і miss інкрементуються в різних гілках, і це видно в діфі коду. Плитка з цими числами оживе на тижні 5 — сьогодні достатньо, що цифра чесна за конструкцією. Третій: можете пояснити, чому промпт — частина ключа і який баг це прибирає. Якщо завагалися — перечитайте сценарій rollback у блоці 03: «полагодили, а працює по-старому». І четвертий: знаєте, які відповіді кешувати заборонено — персональні, tool-результати, швидкозмінний стан — і чому це питання коректності, а не продуктивності. Якщо всі чотири — «так», ви готові до наступного уроку. Де завагалися — туди і повертайтеся; питання — у канал потоку або на Q&amp;A.</a:t>
             </a:r>
             <a:endParaRPr lang="en-US" dirty="0"/>
           </a:p>
@@ -1757,7 +1757,7 @@
           <a:p>
             <a:r>
               <a:rPr lang="en-US" dirty="0"/>
-              <a:t/>
+              <a:t>Чотири способи зіпсувати собі тиждень кешування — усі перевірені чужими граблями. Кеш без лічильника: «здається, допомагає» — це не метрика. Механізм без цифри неможливо ні захистити перед командою, ні вимкнути обґрунтовано — саме тому в цьому уроці лічильники народилися в одному діфі з кешем. Ключ без версії промпта: стара поведінка переживає rollback, і розслідування «чому воно досі відповідає по-старому» з'їдає день. Ви сьогодні бачили в лабі, як промпт у ключі прибирає цей клас багів безкоштовно. Кешувати персональні відповіді й результати tool-викликів: перше — витік чужих даних між користувачами, друге — впевнена брехня про застарілий стан зовнішньої системи. Це межа з блоку 02: заборона сильніша за будь-який аргумент про частоту чи ціну. І нарешті — починати з semantic cache, не виміривши точний: ви берете на борт складність, окреме сховище і хибні влучання в обмін на приріст, якого ще не порахували. Порядок завжди той самий: спершу цифри точного кешу, потім рішення.</a:t>
             </a:r>
             <a:endParaRPr lang="en-US" dirty="0"/>
           </a:p>
@@ -1845,7 +1845,7 @@
           <a:p>
             <a:r>
               <a:rPr lang="en-US" dirty="0"/>
-              <a:t/>
+              <a:t>Обов'язково до наступного уроку — без здачі. Перше: закріпити лабу — повторний запит віддається за приблизно нуль мілісекунд, лічильники ростуть. Друге: перевірити на своєму стеку rollback-експеримент — третій крок лабораторної: промпт у ключі рятує від роздачі старої поведінки. І третє: сформулювати для себе список «що в моїй системі кешувати заборонено» — це той список, який у проді пишеться до кешу, а не після інциденту. Опційно: TTL для записів кешу — час створення плюс термін життя, прострочений запис стає miss'ом; і подивитися на Redis у профілі advanced — це місце для винесеного кешу, коли реплік стане більше однієї. І про ДЗ тижня: воно здається після наступного уроку. ДЗ тижня 3 об'єднує кеш та інструменти: сьогоднішня частина вже у вас в руках, після наступного уроку додадуться tool-виклики з таймаутом та ідемпотентністю — і тиждень здається одним PR. Критерії приймання будуть у файлі ДЗ після наступного уроку.</a:t>
             </a:r>
             <a:endParaRPr lang="en-US" dirty="0"/>
           </a:p>
@@ -1933,7 +1933,7 @@
           <a:p>
             <a:r>
               <a:rPr lang="en-US" dirty="0"/>
-              <a:t/>
+              <a:t>Підсумуємо. Найдешевший і найшвидший запит — той, якого не було: кеш прибирає виклик цілком, і це єдиний механізм контуру вартості, що заодно ріже latency. Але з'являється він разом із метрикою, а не після неї: два лічильники в тому самому діфі, що й гілка hit/miss, — бо механізм без цифри неможливо ні захистити перед командою, ні вимкнути обґрунтовано. Ключ кешу — не оптимізація, а контракт коректності: модель, системний промпт і повідомлення разом; промпт у ключі означає, що зміна версії автоматично робить старі записи недосяжними, і найнебезпечніший сценарій закритий архітектурно, без окремого механізму інвалідації. Межу ми провели по природі відповіді, а не по зручності: персональне, результати інструментів і швидкозмінні дані не кешуються ніколи — тут кеш перестає економити і починає роздавати чужі або мертві відповіді. І TTL — властивість класу запиту, а не глобальне налаштування: «як скинути пароль» може жити добу, статус замовлення не має права жити й хвилини. Наступний урок — tool calls. Досі бот тільки говорив, і найгірше, що він міг, — відповісти неправильно. Наступного разу він почне діяти: виклики інструментів, зовнішні інтеграції, реальні наслідки. Дія потребує схеми, таймаута та ідемпотентності — а незворотна дія ще й людини, яка скаже «так». До зустрічі.</a:t>
             </a:r>
             <a:endParaRPr lang="en-US" dirty="0"/>
           </a:p>
@@ -2021,7 +2021,7 @@
           <a:p>
             <a:r>
               <a:rPr lang="en-US" dirty="0"/>
-              <a:t/>
+              <a:t>Маршрут такий. Спершу проблема: повтори у трафіку підтримки — це подвійний податок, грошима і часом, і правило уроку — measure-first: метрика народжується разом із механізмом. Далі межі: що кешувати можна, а що заборонено — і чому межа проходить по природі відповіді, а не по її ціні. Потім найважливіше рішення уроку — ключ кешу як контракт коректності: чому текст промпта мусить бути частиною ключа. Після цього розтин коду: словник у пам'яті, гілка miss, три операційні рішення в кількох рядках. Блок п'ять — метрика: hit ratio і три цифри, які з нього випливають. Блок шість — найцікавіший побічний ефект: кеш робить систему детермінованою, і це двосічно. Сьомий — інвалідація: промпт-у-ключі плюс TTL, і драбина від процесної пам'яті до Redis. Восьмий, опційний, — semantic cache. Потім лабораторна на чотири обов'язкові частини, антипатерни і домашнє завдання.</a:t>
             </a:r>
             <a:endParaRPr lang="en-US" dirty="0"/>
           </a:p>
@@ -2109,7 +2109,7 @@
           <a:p>
             <a:r>
               <a:rPr lang="en-US" dirty="0"/>
-              <a:t/>
+              <a:t>Домовимось про шість слів. Hit і miss — влучання і промах: hit означає, що відповідь знайшлася в кеші й у модель ми не пішли. Hit ratio — частка запитів, які обійшлися без моделі; це головна метрика уроку. Ключ кешу — рядок, за яким ми шукаємо збережену відповідь; сьогодні побачимо, що він є контрактом коректності, а не технічною дрібницею. TTL — час життя запису: скільки відповідь вважається придатною. Інвалідація — вихід записів з обігу, коли вони більше не відповідають дійсності; у нас вона станеться автоматично через промпт у ключі. І semantic cache — кеш, який шукає не точний збіг, а схоже за змістом питання; це опційна частина уроку, і в комплекті з ним приходить своя ціна. Далі кожне побачимо в коді.</a:t>
             </a:r>
             <a:endParaRPr lang="en-US" dirty="0"/>
           </a:p>
@@ -2197,7 +2197,7 @@
           <a:p>
             <a:r>
               <a:rPr lang="en-US" dirty="0"/>
-              <a:t/>
+              <a:t>У трафіку підтримки повно повторів. «Як скинути пароль?» прилітає сотні разів на день майже однаковими словами — і без кешу ви щоразу платите двічі. Грошима: минулий урок якраз навчив бачити їх у кожному рядку лога. І часом очікування користувача: однакове питання, однакова відповідь, а токени і сотні мілісекунд — щоразу нові. Але з кешем є пастка, у яку заходить більшість команд: його вмикають — і не міряють. «Ну, кеш же є, значить економимо». Скільки? На яких запитах? А чи не віддаємо ми застарілі відповіді після зміни промпта? Без цифр ці питання повисають у повітрі, і кеш перетворюється з механізму на талісман. Тому в цьому уроці правило measure-first: лічильники hit і miss з'являються разом із кешем — в один урок і в один діф. Не «спершу заведемо, потім якось поміряємо»: миттю, коли з'являється механізм, з'являється і його метрика. Навіщо цей шар взагалі: кеш — третій механізм контуру вартості після routing і cost-обліку, і єдиний, що заодно ріже latency. А ще це перший механізм курсу з власною метрикою ефективності — hit ratio. На тижні 5 вона стане плиткою консолі; сьогодні — двома лічильниками.</a:t>
             </a:r>
             <a:endParaRPr lang="en-US" dirty="0"/>
           </a:p>
@@ -2285,7 +2285,7 @@
           <a:p>
             <a:r>
               <a:rPr lang="en-US" dirty="0"/>
-              <a:t/>
+              <a:t>Перш ніж писати код, треба провести межу, бо кеш — це механізм із наслідками для коректності. Ідеальний кандидат — відповідь детермінована, тобто на це питання завжди відповідаємо так, і не-персональна — однакова для всіх. «Як скинути пароль?», «Які у вас тарифи?» — класика. А ось що кешувати заборонено. Персональні відповіді: «Де моє замовлення?» — у кожного своє; закешували відповідь одного користувача — віддали її іншому, і це вже не баг продуктивності, а інцидент із чужими даними. Результати tool-викликів: відповідь зібрана зі стану зовнішньої системи в конкретну мить — статус замовлення, залишок на складі; за годину вона бреше. І все, що залежить від швидкозмінного стану: ціни під час розпродажу, статус інциденту, наявність місць — свіжість тут і є продуктом. Зверніть увагу: межа проходить не по «дорогих» чи «частих» запитах, а по природі відповіді. Часте і дороге — аргумент кешувати; персональне і мінливе — заборона, яка сильніша за будь-який аргумент. І термінологічна страховка: наш сьогоднішній кеш — це кеш відповідей у сервісі. Він не те саме, що провайдерський кеш префікса промпта з минулого уроку: той здешевлює вхідні токени всередині виклику і вмикається на боці провайдера. Рівні різні й чудово складаються: провайдерський робить кожен miss дешевшим, наш — прибирає повторні виклики цілком.</a:t>
             </a:r>
             <a:endParaRPr lang="en-US" dirty="0"/>
           </a:p>
@@ -2373,7 +2373,7 @@
           <a:p>
             <a:r>
               <a:rPr lang="en-US" dirty="0"/>
-              <a:t/>
+              <a:t>Ключ у нашому кеші — конкатенація трьох речей: модель, текст system-промпта і повідомлення користувача. Повідомлення в ключі — очевидно. Модель — теж зрозуміло: mini і strong відповідають по-різному, змішувати їхні відповіді не можна. А от третій компонент — сам текст system-промпта — це найважливіше рішення сьогоднішнього уроку. Уявіть, що промпта в ключі немає. Ви закешували сотню відповідей, потім зробили promote нової версії промпта — а кеш продовжує віддавати відповіді, згенеровані старою. Або дзеркальний сценарій, ще підступніший: активна версія виявилася поганою, ви зробили rollback, регресію полагодили — а користувачі ще годину бачать закешовану стару поведінку. «Полагодили, а воно працює по-старому» — це класичний слід кешу з неповним ключем. Промпт у ключі робить інвалідацію автоматичною: нова версія — інший текст — інші ключі — старі записи просто перестають знаходитись. Жодного коду інвалідації писати не треба; коректність вбудована в саму адресацію. З практики: найдорожчий випуск із ключа я бачив не в промпті, а в тенанті. У мультитенантних системах — а платформа, яку я супроводжую, саме така: кредентіали, дозволи й дані ізольовані по тенантах — кеш, ключований лише «модель + промпт + текст», гарантує аварію: два клієнти з однаковим питанням отримають одну відповідь, зібрану з чужих даних. Це вже не «менше влучань», це витік між клієнтами. Тому там у ключі поруч стоїть ідентифікатор тенанта, а часто й версія деплою — і тільки після цього кеш взагалі вмикають.</a:t>
             </a:r>
             <a:endParaRPr lang="en-US" dirty="0"/>
           </a:p>
@@ -2461,7 +2461,7 @@
           <a:p>
             <a:r>
               <a:rPr lang="en-US" dirty="0"/>
-              <a:t/>
+              <a:t>Окрема тема — нормалізація повідомлення в ключі. Спокуса очевидна: привести до нижнього регістру, прибрати пунктуацію, стиснути пробіли — і hit ratio виросте, бо «Як скинути пароль?» і «як скинути пароль» стануть одним записом. Але дивіться, що ви насправді робите. Прибрати зайві пробіли — безпечно. Нижній регістр — майже завжди правда: два тексти справді заслуговують однакової відповіді. А от видалена пунктуація — вже не завжди: «не працює. оплата пройшла» і «не працює оплата, пройшла» — це два різні звернення, а після нормалізації вони стануть одним ключем і однією відповіддю. Агресивніша нормалізація — це рішення про еквівалентність: ви стверджуєте, що два різні тексти заслуговують однакової відповіді. Правило те саме, що з ключем: нормалізація — частина контракту коректності, і кожен її крок має бути свідомим. Помітьте зв'язок із метрикою: нормалізація — найдешевший спосіб підняти hit ratio, і саме тому вона найнебезпечніша. Цифра росте, а коректність тихо їде. Коли в блоці 05 говоритимемо про здорові межі hit ratio — це один зі способів «купити» рекордну цифру не тією ціною.</a:t>
             </a:r>
             <a:endParaRPr lang="en-US" dirty="0"/>
           </a:p>
@@ -2549,7 +2549,7 @@
           <a:p>
             <a:r>
               <a:rPr lang="en-US" dirty="0"/>
-              <a:t/>
+              <a:t>Механізм — навмисно найпростіший з робочих: словник у пам'яті сервісу і два лічильники поруч. А в /chat виклик моделі перестає бути безумовним — він стає гілкою «miss»: знайшли запис — віддаємо збережене і інкрементуємо CacheHits; не знайшли — інкрементуємо CacheMisses, ідемо в модель, як раніше, і зберігаємо результат. Три операційні рішення зашиті в ці рядки. Перше: зберігаємо тільки успішні відповіді — status == 200. Закешована помилка означала б, що збій провайдера «залипає» у системі і відтворюється навіть після його одужання. Друге: лічильники інкрементуються атомарно і всередині відповідних гілок — цифра чесна за конструкцією, її неможливо забути оновити. Третє: кеш-хіт усе одно пише рядок у лог — із нульовими токенами і нульовою вартістю. Економія не зникає з видимості, а стає в ній видимою: рядок є, грошей немає. І придивіться до другої половини умови збереження: toolCall == null — відповіді з tool-викликами в кеш не потрапляють. Це та сама межа з блоку 02, виражена одним предикатом. Сьогодні поле toolCall у вас ще завжди порожнє, тож умова спрацьовує «вхолосту» — а на наступному уроці, коли з'являться інструменти, вона почне працювати по-справжньому. Закладати межу до появи ризику — правильний порядок.</a:t>
             </a:r>
             <a:endParaRPr lang="en-US" dirty="0"/>
           </a:p>
@@ -3861,7 +3861,7 @@
       </p:pic>
       <p:sp>
         <p:nvSpPr>
-          <p:cNvPr id="7" name="Shape 4"/>
+          <p:cNvPr id="8" name="Shape 4"/>
           <p:cNvSpPr/>
           <p:nvPr/>
         </p:nvSpPr>
@@ -3883,7 +3883,7 @@
       </p:sp>
       <p:sp>
         <p:nvSpPr>
-          <p:cNvPr id="8" name="Shape 5"/>
+          <p:cNvPr id="9" name="Shape 5"/>
           <p:cNvSpPr/>
           <p:nvPr/>
         </p:nvSpPr>
@@ -3903,7 +3903,7 @@
       </p:sp>
       <p:sp>
         <p:nvSpPr>
-          <p:cNvPr id="9" name="Text 6"/>
+          <p:cNvPr id="10" name="Text 6"/>
           <p:cNvSpPr/>
           <p:nvPr/>
         </p:nvSpPr>
@@ -3942,7 +3942,7 @@
       </p:sp>
       <p:sp>
         <p:nvSpPr>
-          <p:cNvPr id="10" name="Text 7"/>
+          <p:cNvPr id="11" name="Text 7"/>
           <p:cNvSpPr/>
           <p:nvPr/>
         </p:nvSpPr>
@@ -3981,7 +3981,7 @@
       </p:sp>
       <p:sp>
         <p:nvSpPr>
-          <p:cNvPr id="11" name="Text 8"/>
+          <p:cNvPr id="12" name="Text 8"/>
           <p:cNvSpPr/>
           <p:nvPr/>
         </p:nvSpPr>
@@ -4023,7 +4023,7 @@
       </p:sp>
       <p:sp>
         <p:nvSpPr>
-          <p:cNvPr id="12" name="Shape 9"/>
+          <p:cNvPr id="13" name="Shape 9"/>
           <p:cNvSpPr/>
           <p:nvPr/>
         </p:nvSpPr>
@@ -4045,7 +4045,7 @@
       </p:sp>
       <p:sp>
         <p:nvSpPr>
-          <p:cNvPr id="13" name="Shape 10"/>
+          <p:cNvPr id="14" name="Shape 10"/>
           <p:cNvSpPr/>
           <p:nvPr/>
         </p:nvSpPr>
@@ -4065,7 +4065,7 @@
       </p:sp>
       <p:sp>
         <p:nvSpPr>
-          <p:cNvPr id="14" name="Text 11"/>
+          <p:cNvPr id="15" name="Text 11"/>
           <p:cNvSpPr/>
           <p:nvPr/>
         </p:nvSpPr>
@@ -4104,7 +4104,7 @@
       </p:sp>
       <p:sp>
         <p:nvSpPr>
-          <p:cNvPr id="15" name="Text 12"/>
+          <p:cNvPr id="16" name="Text 12"/>
           <p:cNvSpPr/>
           <p:nvPr/>
         </p:nvSpPr>
@@ -4143,7 +4143,7 @@
       </p:sp>
       <p:sp>
         <p:nvSpPr>
-          <p:cNvPr id="16" name="Text 13"/>
+          <p:cNvPr id="17" name="Text 13"/>
           <p:cNvSpPr/>
           <p:nvPr/>
         </p:nvSpPr>
@@ -4185,7 +4185,7 @@
       </p:sp>
       <p:sp>
         <p:nvSpPr>
-          <p:cNvPr id="17" name="Shape 14"/>
+          <p:cNvPr id="18" name="Shape 14"/>
           <p:cNvSpPr/>
           <p:nvPr/>
         </p:nvSpPr>
@@ -4207,7 +4207,7 @@
       </p:sp>
       <p:sp>
         <p:nvSpPr>
-          <p:cNvPr id="18" name="Shape 15"/>
+          <p:cNvPr id="19" name="Shape 15"/>
           <p:cNvSpPr/>
           <p:nvPr/>
         </p:nvSpPr>
@@ -4227,7 +4227,7 @@
       </p:sp>
       <p:sp>
         <p:nvSpPr>
-          <p:cNvPr id="19" name="Text 16"/>
+          <p:cNvPr id="20" name="Text 16"/>
           <p:cNvSpPr/>
           <p:nvPr/>
         </p:nvSpPr>
@@ -4266,7 +4266,7 @@
       </p:sp>
       <p:sp>
         <p:nvSpPr>
-          <p:cNvPr id="20" name="Text 17"/>
+          <p:cNvPr id="21" name="Text 17"/>
           <p:cNvSpPr/>
           <p:nvPr/>
         </p:nvSpPr>
@@ -4305,7 +4305,7 @@
       </p:sp>
       <p:sp>
         <p:nvSpPr>
-          <p:cNvPr id="21" name="Text 18"/>
+          <p:cNvPr id="22" name="Text 18"/>
           <p:cNvSpPr/>
           <p:nvPr/>
         </p:nvSpPr>
@@ -4347,7 +4347,7 @@
       </p:sp>
       <p:sp>
         <p:nvSpPr>
-          <p:cNvPr id="22" name="Shape 19"/>
+          <p:cNvPr id="23" name="Shape 19"/>
           <p:cNvSpPr/>
           <p:nvPr/>
         </p:nvSpPr>
@@ -4369,7 +4369,7 @@
       </p:sp>
       <p:sp>
         <p:nvSpPr>
-          <p:cNvPr id="23" name="Text 20"/>
+          <p:cNvPr id="24" name="Text 20"/>
           <p:cNvSpPr/>
           <p:nvPr/>
         </p:nvSpPr>
@@ -4575,7 +4575,7 @@
         </p:nvSpPr>
         <p:spPr>
           <a:xfrm>
-            <a:off x="1280160" y="1024128"/>
+            <a:off x="1280160" y="1193140"/>
             <a:ext cx="777240" cy="256032"/>
           </a:xfrm>
           <a:prstGeom prst="roundRect">
@@ -4597,7 +4597,7 @@
         </p:nvSpPr>
         <p:spPr>
           <a:xfrm>
-            <a:off x="1280160" y="1024128"/>
+            <a:off x="1280160" y="1193140"/>
             <a:ext cx="777240" cy="256032"/>
           </a:xfrm>
           <a:prstGeom prst="rect">
@@ -4654,7 +4654,7 @@
       </p:pic>
       <p:sp>
         <p:nvSpPr>
-          <p:cNvPr id="7" name="Shape 4"/>
+          <p:cNvPr id="8" name="Shape 4"/>
           <p:cNvSpPr/>
           <p:nvPr/>
         </p:nvSpPr>
@@ -4676,7 +4676,7 @@
       </p:sp>
       <p:sp>
         <p:nvSpPr>
-          <p:cNvPr id="8" name="Text 5"/>
+          <p:cNvPr id="9" name="Text 5"/>
           <p:cNvSpPr/>
           <p:nvPr/>
         </p:nvSpPr>
@@ -4715,7 +4715,7 @@
       </p:sp>
       <p:sp>
         <p:nvSpPr>
-          <p:cNvPr id="9" name="Text 6"/>
+          <p:cNvPr id="10" name="Text 6"/>
           <p:cNvSpPr/>
           <p:nvPr/>
         </p:nvSpPr>
@@ -4754,7 +4754,7 @@
       </p:sp>
       <p:sp>
         <p:nvSpPr>
-          <p:cNvPr id="10" name="Shape 7"/>
+          <p:cNvPr id="11" name="Shape 7"/>
           <p:cNvSpPr/>
           <p:nvPr/>
         </p:nvSpPr>
@@ -4781,7 +4781,7 @@
       </p:sp>
       <p:sp>
         <p:nvSpPr>
-          <p:cNvPr id="11" name="Text 8"/>
+          <p:cNvPr id="12" name="Text 8"/>
           <p:cNvSpPr/>
           <p:nvPr/>
         </p:nvSpPr>
@@ -4820,7 +4820,7 @@
       </p:sp>
       <p:sp>
         <p:nvSpPr>
-          <p:cNvPr id="12" name="Text 9"/>
+          <p:cNvPr id="13" name="Text 9"/>
           <p:cNvSpPr/>
           <p:nvPr/>
         </p:nvSpPr>
@@ -4862,7 +4862,7 @@
       </p:sp>
       <p:sp>
         <p:nvSpPr>
-          <p:cNvPr id="13" name="Shape 10"/>
+          <p:cNvPr id="14" name="Shape 10"/>
           <p:cNvSpPr/>
           <p:nvPr/>
         </p:nvSpPr>
@@ -4889,7 +4889,7 @@
       </p:sp>
       <p:sp>
         <p:nvSpPr>
-          <p:cNvPr id="14" name="Text 11"/>
+          <p:cNvPr id="15" name="Text 11"/>
           <p:cNvSpPr/>
           <p:nvPr/>
         </p:nvSpPr>
@@ -4928,7 +4928,7 @@
       </p:sp>
       <p:sp>
         <p:nvSpPr>
-          <p:cNvPr id="15" name="Text 12"/>
+          <p:cNvPr id="16" name="Text 12"/>
           <p:cNvSpPr/>
           <p:nvPr/>
         </p:nvSpPr>
@@ -4970,7 +4970,7 @@
       </p:sp>
       <p:sp>
         <p:nvSpPr>
-          <p:cNvPr id="16" name="Shape 13"/>
+          <p:cNvPr id="17" name="Shape 13"/>
           <p:cNvSpPr/>
           <p:nvPr/>
         </p:nvSpPr>
@@ -4997,7 +4997,7 @@
       </p:sp>
       <p:sp>
         <p:nvSpPr>
-          <p:cNvPr id="17" name="Text 14"/>
+          <p:cNvPr id="18" name="Text 14"/>
           <p:cNvSpPr/>
           <p:nvPr/>
         </p:nvSpPr>
@@ -5036,7 +5036,7 @@
       </p:sp>
       <p:sp>
         <p:nvSpPr>
-          <p:cNvPr id="18" name="Text 15"/>
+          <p:cNvPr id="19" name="Text 15"/>
           <p:cNvSpPr/>
           <p:nvPr/>
         </p:nvSpPr>
@@ -5078,7 +5078,7 @@
       </p:sp>
       <p:sp>
         <p:nvSpPr>
-          <p:cNvPr id="19" name="Shape 16"/>
+          <p:cNvPr id="20" name="Shape 16"/>
           <p:cNvSpPr/>
           <p:nvPr/>
         </p:nvSpPr>
@@ -5100,7 +5100,7 @@
       </p:sp>
       <p:sp>
         <p:nvSpPr>
-          <p:cNvPr id="20" name="Text 17"/>
+          <p:cNvPr id="21" name="Text 17"/>
           <p:cNvSpPr/>
           <p:nvPr/>
         </p:nvSpPr>
@@ -5139,7 +5139,7 @@
       </p:sp>
       <p:sp>
         <p:nvSpPr>
-          <p:cNvPr id="21" name="Text 18"/>
+          <p:cNvPr id="22" name="Text 18"/>
           <p:cNvSpPr/>
           <p:nvPr/>
         </p:nvSpPr>
@@ -5173,7 +5173,7 @@
                 <a:ea typeface="Montserrat" pitchFamily="34" charset="-122"/>
                 <a:cs typeface="Montserrat" pitchFamily="34" charset="-120"/>
               </a:rPr>
-              <a:t>Механізм і метрика — разом; вітрина — коли з'явиться шар вітрини: на тижні 5 лічильники стануть плиткою Cache-hit.</a:t>
+              <a:t>Механізм і метрика — разом; на тижні 5 лічильники стануть плиткою Cache-hit.</a:t>
             </a:r>
             <a:endParaRPr lang="en-US" sz="1300" dirty="0"/>
           </a:p>
@@ -5181,7 +5181,7 @@
       </p:sp>
       <p:sp>
         <p:nvSpPr>
-          <p:cNvPr id="22" name="Shape 19"/>
+          <p:cNvPr id="23" name="Shape 19"/>
           <p:cNvSpPr/>
           <p:nvPr/>
         </p:nvSpPr>
@@ -5208,7 +5208,7 @@
       </p:sp>
       <p:sp>
         <p:nvSpPr>
-          <p:cNvPr id="23" name="Text 20"/>
+          <p:cNvPr id="24" name="Text 20"/>
           <p:cNvSpPr/>
           <p:nvPr/>
         </p:nvSpPr>
@@ -5247,7 +5247,7 @@
       </p:sp>
       <p:sp>
         <p:nvSpPr>
-          <p:cNvPr id="24" name="Text 21"/>
+          <p:cNvPr id="25" name="Text 21"/>
           <p:cNvSpPr/>
           <p:nvPr/>
         </p:nvSpPr>
@@ -5281,7 +5281,7 @@
                 <a:ea typeface="Montserrat" pitchFamily="34" charset="-122"/>
                 <a:cs typeface="Montserrat" pitchFamily="34" charset="-120"/>
               </a:rPr>
-              <a:t>Перш ніж вмикати кеш — витягніть із лога топ повторюваних питань. Топ-10 це 60% трафіку? Окупиться першого ж дня.</a:t>
+              <a:t>Перед кешем витягніть із лога топ повторів: топ-10 це 60% трафіку?</a:t>
             </a:r>
             <a:endParaRPr lang="en-US" sz="1300" dirty="0"/>
           </a:p>
@@ -5453,7 +5453,7 @@
         </p:nvSpPr>
         <p:spPr>
           <a:xfrm>
-            <a:off x="1280160" y="1024128"/>
+            <a:off x="1280160" y="1193140"/>
             <a:ext cx="777240" cy="256032"/>
           </a:xfrm>
           <a:prstGeom prst="roundRect">
@@ -5475,7 +5475,7 @@
         </p:nvSpPr>
         <p:spPr>
           <a:xfrm>
-            <a:off x="1280160" y="1024128"/>
+            <a:off x="1280160" y="1193140"/>
             <a:ext cx="777240" cy="256032"/>
           </a:xfrm>
           <a:prstGeom prst="rect">
@@ -5545,7 +5545,7 @@
           </p:nvPr>
         </p:nvGraphicFramePr>
         <p:xfrm>
-          <a:off x="566928" y="1737360"/>
+          <a:off x="566928" y="1645920"/>
           <a:ext cx="11064240" cy="914400"/>
         </p:xfrm>
         <a:graphic>
@@ -6181,7 +6181,7 @@
       </p:graphicFrame>
       <p:sp>
         <p:nvSpPr>
-          <p:cNvPr id="8" name="Shape 4"/>
+          <p:cNvPr id="9" name="Shape 4"/>
           <p:cNvSpPr/>
           <p:nvPr/>
         </p:nvSpPr>
@@ -6203,7 +6203,7 @@
       </p:sp>
       <p:sp>
         <p:nvSpPr>
-          <p:cNvPr id="9" name="Text 5"/>
+          <p:cNvPr id="10" name="Text 5"/>
           <p:cNvSpPr/>
           <p:nvPr/>
         </p:nvSpPr>
@@ -6242,7 +6242,7 @@
       </p:sp>
       <p:sp>
         <p:nvSpPr>
-          <p:cNvPr id="10" name="Text 6"/>
+          <p:cNvPr id="11" name="Text 6"/>
           <p:cNvSpPr/>
           <p:nvPr/>
         </p:nvSpPr>
@@ -6276,7 +6276,7 @@
                 <a:ea typeface="Montserrat" pitchFamily="34" charset="-122"/>
                 <a:cs typeface="Montserrat" pitchFamily="34" charset="-120"/>
               </a:rPr>
-              <a:t>шар є, ефекту немає: або питання справді унікальні, або ключ надто чутливий до формулювання</a:t>
+              <a:t>шар є, ефекту немає: унікальні питання або надто чутливий ключ</a:t>
             </a:r>
             <a:endParaRPr lang="en-US" sz="1200" dirty="0"/>
           </a:p>
@@ -6284,7 +6284,7 @@
       </p:sp>
       <p:sp>
         <p:nvSpPr>
-          <p:cNvPr id="11" name="Shape 7"/>
+          <p:cNvPr id="12" name="Shape 7"/>
           <p:cNvSpPr/>
           <p:nvPr/>
         </p:nvSpPr>
@@ -6306,7 +6306,7 @@
       </p:sp>
       <p:sp>
         <p:nvSpPr>
-          <p:cNvPr id="12" name="Text 8"/>
+          <p:cNvPr id="13" name="Text 8"/>
           <p:cNvSpPr/>
           <p:nvPr/>
         </p:nvSpPr>
@@ -6345,7 +6345,7 @@
       </p:sp>
       <p:sp>
         <p:nvSpPr>
-          <p:cNvPr id="13" name="Text 9"/>
+          <p:cNvPr id="14" name="Text 9"/>
           <p:cNvSpPr/>
           <p:nvPr/>
         </p:nvSpPr>
@@ -6379,7 +6379,7 @@
                 <a:ea typeface="Montserrat" pitchFamily="34" charset="-122"/>
                 <a:cs typeface="Montserrat" pitchFamily="34" charset="-120"/>
               </a:rPr>
-              <a:t>рекордна цифра буває куплена ціною застарілих або чужих відповідей: перевірте, що саме потрапляє в кеш</a:t>
+              <a:t>рекордна цифра куплена застарілими або чужими відповідями</a:t>
             </a:r>
             <a:endParaRPr lang="en-US" sz="1200" dirty="0"/>
           </a:p>
@@ -6387,7 +6387,7 @@
       </p:sp>
       <p:sp>
         <p:nvSpPr>
-          <p:cNvPr id="14" name="Shape 10"/>
+          <p:cNvPr id="15" name="Shape 10"/>
           <p:cNvSpPr/>
           <p:nvPr/>
         </p:nvSpPr>
@@ -6409,7 +6409,7 @@
       </p:sp>
       <p:sp>
         <p:nvSpPr>
-          <p:cNvPr id="15" name="Text 11"/>
+          <p:cNvPr id="16" name="Text 11"/>
           <p:cNvSpPr/>
           <p:nvPr/>
         </p:nvSpPr>
@@ -6448,7 +6448,7 @@
       </p:sp>
       <p:sp>
         <p:nvSpPr>
-          <p:cNvPr id="16" name="Text 12"/>
+          <p:cNvPr id="17" name="Text 12"/>
           <p:cNvSpPr/>
           <p:nvPr/>
         </p:nvSpPr>
@@ -6482,7 +6482,7 @@
                 <a:ea typeface="Montserrat" pitchFamily="34" charset="-122"/>
                 <a:cs typeface="Montserrat" pitchFamily="34" charset="-120"/>
               </a:rPr>
-              <a:t>«Не кешувати» — теж інженерне рішення, і ухвалюється воно тими самими цифрами, що й «кешувати». Метрика без розуміння меж — та сама віра, просто з цифрою.</a:t>
+              <a:t>«Не кешувати» — теж інженерне рішення, і ухвалюють його ті самі цифри.</a:t>
             </a:r>
             <a:endParaRPr lang="en-US" sz="1300" dirty="0"/>
           </a:p>
@@ -6654,7 +6654,7 @@
         </p:nvSpPr>
         <p:spPr>
           <a:xfrm>
-            <a:off x="1280160" y="1024128"/>
+            <a:off x="1280160" y="1193140"/>
             <a:ext cx="777240" cy="256032"/>
           </a:xfrm>
           <a:prstGeom prst="roundRect">
@@ -6676,7 +6676,7 @@
         </p:nvSpPr>
         <p:spPr>
           <a:xfrm>
-            <a:off x="1280160" y="1024128"/>
+            <a:off x="1280160" y="1193140"/>
             <a:ext cx="777240" cy="256032"/>
           </a:xfrm>
           <a:prstGeom prst="rect">
@@ -6733,7 +6733,7 @@
       </p:pic>
       <p:sp>
         <p:nvSpPr>
-          <p:cNvPr id="7" name="Shape 4"/>
+          <p:cNvPr id="8" name="Shape 4"/>
           <p:cNvSpPr/>
           <p:nvPr/>
         </p:nvSpPr>
@@ -6755,7 +6755,7 @@
       </p:sp>
       <p:sp>
         <p:nvSpPr>
-          <p:cNvPr id="8" name="Text 5"/>
+          <p:cNvPr id="9" name="Text 5"/>
           <p:cNvSpPr/>
           <p:nvPr/>
         </p:nvSpPr>
@@ -6794,7 +6794,7 @@
       </p:sp>
       <p:sp>
         <p:nvSpPr>
-          <p:cNvPr id="9" name="Text 6"/>
+          <p:cNvPr id="10" name="Text 6"/>
           <p:cNvSpPr/>
           <p:nvPr/>
         </p:nvSpPr>
@@ -6836,7 +6836,7 @@
       </p:sp>
       <p:sp>
         <p:nvSpPr>
-          <p:cNvPr id="10" name="Shape 7"/>
+          <p:cNvPr id="11" name="Shape 7"/>
           <p:cNvSpPr/>
           <p:nvPr/>
         </p:nvSpPr>
@@ -6858,7 +6858,7 @@
       </p:sp>
       <p:sp>
         <p:nvSpPr>
-          <p:cNvPr id="11" name="Text 8"/>
+          <p:cNvPr id="12" name="Text 8"/>
           <p:cNvSpPr/>
           <p:nvPr/>
         </p:nvSpPr>
@@ -6897,7 +6897,7 @@
       </p:sp>
       <p:sp>
         <p:nvSpPr>
-          <p:cNvPr id="12" name="Text 9"/>
+          <p:cNvPr id="13" name="Text 9"/>
           <p:cNvSpPr/>
           <p:nvPr/>
         </p:nvSpPr>
@@ -6931,7 +6931,7 @@
                 <a:ea typeface="Montserrat" pitchFamily="34" charset="-122"/>
                 <a:cs typeface="Montserrat" pitchFamily="34" charset="-120"/>
               </a:rPr>
-              <a:t>одна невдала відповідь роздається всім до кінця TTL: без кешу вона випадкова, з кешем — систематична</a:t>
+              <a:t>без кешу невдала відповідь випадкова, з кешем — систематична</a:t>
             </a:r>
             <a:endParaRPr lang="en-US" sz="1200" dirty="0"/>
           </a:p>
@@ -6939,7 +6939,7 @@
       </p:sp>
       <p:sp>
         <p:nvSpPr>
-          <p:cNvPr id="13" name="Shape 10"/>
+          <p:cNvPr id="14" name="Shape 10"/>
           <p:cNvSpPr/>
           <p:nvPr/>
         </p:nvSpPr>
@@ -6961,7 +6961,7 @@
       </p:sp>
       <p:sp>
         <p:nvSpPr>
-          <p:cNvPr id="14" name="Text 11"/>
+          <p:cNvPr id="15" name="Text 11"/>
           <p:cNvSpPr/>
           <p:nvPr/>
         </p:nvSpPr>
@@ -7000,7 +7000,7 @@
       </p:sp>
       <p:sp>
         <p:nvSpPr>
-          <p:cNvPr id="15" name="Text 12"/>
+          <p:cNvPr id="16" name="Text 12"/>
           <p:cNvSpPr/>
           <p:nvPr/>
         </p:nvSpPr>
@@ -7034,7 +7034,7 @@
                 <a:ea typeface="Montserrat" pitchFamily="34" charset="-122"/>
                 <a:cs typeface="Montserrat" pitchFamily="34" charset="-120"/>
               </a:rPr>
-              <a:t>Фільтр перед записом: відповідь дійшла нормально, не заглушка деградації, не відмова фільтра безпеки, не порожня. Сьогодні це status == 200.</a:t>
+              <a:t>Пишемо в кеш лише повноцінну відповідь: сьогодні це status == 200.</a:t>
             </a:r>
             <a:endParaRPr lang="en-US" sz="1300" dirty="0"/>
           </a:p>
@@ -7042,7 +7042,7 @@
       </p:sp>
       <p:sp>
         <p:nvSpPr>
-          <p:cNvPr id="16" name="Shape 13"/>
+          <p:cNvPr id="17" name="Shape 13"/>
           <p:cNvSpPr/>
           <p:nvPr/>
         </p:nvSpPr>
@@ -7064,7 +7064,7 @@
       </p:sp>
       <p:sp>
         <p:nvSpPr>
-          <p:cNvPr id="17" name="Text 14"/>
+          <p:cNvPr id="18" name="Text 14"/>
           <p:cNvSpPr/>
           <p:nvPr/>
         </p:nvSpPr>
@@ -7270,7 +7270,7 @@
         </p:nvSpPr>
         <p:spPr>
           <a:xfrm>
-            <a:off x="1280160" y="1024128"/>
+            <a:off x="1280160" y="1193140"/>
             <a:ext cx="777240" cy="256032"/>
           </a:xfrm>
           <a:prstGeom prst="roundRect">
@@ -7292,7 +7292,7 @@
         </p:nvSpPr>
         <p:spPr>
           <a:xfrm>
-            <a:off x="1280160" y="1024128"/>
+            <a:off x="1280160" y="1193140"/>
             <a:ext cx="777240" cy="256032"/>
           </a:xfrm>
           <a:prstGeom prst="rect">
@@ -7349,7 +7349,7 @@
       </p:pic>
       <p:sp>
         <p:nvSpPr>
-          <p:cNvPr id="7" name="Shape 4"/>
+          <p:cNvPr id="8" name="Shape 4"/>
           <p:cNvSpPr/>
           <p:nvPr/>
         </p:nvSpPr>
@@ -7371,7 +7371,7 @@
       </p:sp>
       <p:sp>
         <p:nvSpPr>
-          <p:cNvPr id="8" name="Text 5"/>
+          <p:cNvPr id="9" name="Text 5"/>
           <p:cNvSpPr/>
           <p:nvPr/>
         </p:nvSpPr>
@@ -7410,7 +7410,7 @@
       </p:sp>
       <p:sp>
         <p:nvSpPr>
-          <p:cNvPr id="9" name="Shape 6"/>
+          <p:cNvPr id="10" name="Shape 6"/>
           <p:cNvSpPr/>
           <p:nvPr/>
         </p:nvSpPr>
@@ -7433,7 +7433,7 @@
       </p:sp>
       <p:sp>
         <p:nvSpPr>
-          <p:cNvPr id="10" name="Shape 7"/>
+          <p:cNvPr id="11" name="Shape 7"/>
           <p:cNvSpPr/>
           <p:nvPr/>
         </p:nvSpPr>
@@ -7453,7 +7453,7 @@
       </p:sp>
       <p:sp>
         <p:nvSpPr>
-          <p:cNvPr id="11" name="Shape 8"/>
+          <p:cNvPr id="12" name="Shape 8"/>
           <p:cNvSpPr/>
           <p:nvPr/>
         </p:nvSpPr>
@@ -7475,7 +7475,7 @@
       </p:sp>
       <p:sp>
         <p:nvSpPr>
-          <p:cNvPr id="12" name="Text 9"/>
+          <p:cNvPr id="13" name="Text 9"/>
           <p:cNvSpPr/>
           <p:nvPr/>
         </p:nvSpPr>
@@ -7514,7 +7514,7 @@
       </p:sp>
       <p:sp>
         <p:nvSpPr>
-          <p:cNvPr id="13" name="Shape 10"/>
+          <p:cNvPr id="14" name="Shape 10"/>
           <p:cNvSpPr/>
           <p:nvPr/>
         </p:nvSpPr>
@@ -7537,7 +7537,7 @@
       </p:sp>
       <p:sp>
         <p:nvSpPr>
-          <p:cNvPr id="14" name="Shape 11"/>
+          <p:cNvPr id="15" name="Shape 11"/>
           <p:cNvSpPr/>
           <p:nvPr/>
         </p:nvSpPr>
@@ -7557,7 +7557,7 @@
       </p:sp>
       <p:sp>
         <p:nvSpPr>
-          <p:cNvPr id="15" name="Shape 12"/>
+          <p:cNvPr id="16" name="Shape 12"/>
           <p:cNvSpPr/>
           <p:nvPr/>
         </p:nvSpPr>
@@ -7579,7 +7579,7 @@
       </p:sp>
       <p:sp>
         <p:nvSpPr>
-          <p:cNvPr id="16" name="Text 13"/>
+          <p:cNvPr id="17" name="Text 13"/>
           <p:cNvSpPr/>
           <p:nvPr/>
         </p:nvSpPr>
@@ -7618,7 +7618,7 @@
       </p:sp>
       <p:sp>
         <p:nvSpPr>
-          <p:cNvPr id="17" name="Shape 14"/>
+          <p:cNvPr id="18" name="Shape 14"/>
           <p:cNvSpPr/>
           <p:nvPr/>
         </p:nvSpPr>
@@ -7641,7 +7641,7 @@
       </p:sp>
       <p:sp>
         <p:nvSpPr>
-          <p:cNvPr id="18" name="Shape 15"/>
+          <p:cNvPr id="19" name="Shape 15"/>
           <p:cNvSpPr/>
           <p:nvPr/>
         </p:nvSpPr>
@@ -7661,7 +7661,7 @@
       </p:sp>
       <p:sp>
         <p:nvSpPr>
-          <p:cNvPr id="19" name="Shape 16"/>
+          <p:cNvPr id="20" name="Shape 16"/>
           <p:cNvSpPr/>
           <p:nvPr/>
         </p:nvSpPr>
@@ -7683,7 +7683,7 @@
       </p:sp>
       <p:sp>
         <p:nvSpPr>
-          <p:cNvPr id="20" name="Text 17"/>
+          <p:cNvPr id="21" name="Text 17"/>
           <p:cNvSpPr/>
           <p:nvPr/>
         </p:nvSpPr>
@@ -7722,7 +7722,7 @@
       </p:sp>
       <p:sp>
         <p:nvSpPr>
-          <p:cNvPr id="21" name="Shape 18"/>
+          <p:cNvPr id="22" name="Shape 18"/>
           <p:cNvSpPr/>
           <p:nvPr/>
         </p:nvSpPr>
@@ -7745,7 +7745,7 @@
       </p:sp>
       <p:sp>
         <p:nvSpPr>
-          <p:cNvPr id="22" name="Shape 19"/>
+          <p:cNvPr id="23" name="Shape 19"/>
           <p:cNvSpPr/>
           <p:nvPr/>
         </p:nvSpPr>
@@ -7765,7 +7765,7 @@
       </p:sp>
       <p:sp>
         <p:nvSpPr>
-          <p:cNvPr id="23" name="Shape 20"/>
+          <p:cNvPr id="24" name="Shape 20"/>
           <p:cNvSpPr/>
           <p:nvPr/>
         </p:nvSpPr>
@@ -7787,7 +7787,7 @@
       </p:sp>
       <p:sp>
         <p:nvSpPr>
-          <p:cNvPr id="24" name="Text 21"/>
+          <p:cNvPr id="25" name="Text 21"/>
           <p:cNvSpPr/>
           <p:nvPr/>
         </p:nvSpPr>
@@ -7826,7 +7826,7 @@
       </p:sp>
       <p:sp>
         <p:nvSpPr>
-          <p:cNvPr id="25" name="Shape 22"/>
+          <p:cNvPr id="26" name="Shape 22"/>
           <p:cNvSpPr/>
           <p:nvPr/>
         </p:nvSpPr>
@@ -7848,7 +7848,7 @@
       </p:sp>
       <p:sp>
         <p:nvSpPr>
-          <p:cNvPr id="26" name="Text 23"/>
+          <p:cNvPr id="27" name="Text 23"/>
           <p:cNvSpPr/>
           <p:nvPr/>
         </p:nvSpPr>
@@ -7887,7 +7887,7 @@
       </p:sp>
       <p:sp>
         <p:nvSpPr>
-          <p:cNvPr id="27" name="Text 24"/>
+          <p:cNvPr id="28" name="Text 24"/>
           <p:cNvSpPr/>
           <p:nvPr/>
         </p:nvSpPr>
@@ -7929,7 +7929,7 @@
       </p:sp>
       <p:sp>
         <p:nvSpPr>
-          <p:cNvPr id="28" name="Shape 25"/>
+          <p:cNvPr id="29" name="Shape 25"/>
           <p:cNvSpPr/>
           <p:nvPr/>
         </p:nvSpPr>
@@ -7951,7 +7951,7 @@
       </p:sp>
       <p:sp>
         <p:nvSpPr>
-          <p:cNvPr id="29" name="Text 26"/>
+          <p:cNvPr id="30" name="Text 26"/>
           <p:cNvSpPr/>
           <p:nvPr/>
         </p:nvSpPr>
@@ -7990,7 +7990,7 @@
       </p:sp>
       <p:sp>
         <p:nvSpPr>
-          <p:cNvPr id="30" name="Text 27"/>
+          <p:cNvPr id="31" name="Text 27"/>
           <p:cNvSpPr/>
           <p:nvPr/>
         </p:nvSpPr>
@@ -8032,7 +8032,7 @@
       </p:sp>
       <p:sp>
         <p:nvSpPr>
-          <p:cNvPr id="31" name="Shape 28"/>
+          <p:cNvPr id="32" name="Shape 28"/>
           <p:cNvSpPr/>
           <p:nvPr/>
         </p:nvSpPr>
@@ -8059,7 +8059,7 @@
       </p:sp>
       <p:sp>
         <p:nvSpPr>
-          <p:cNvPr id="32" name="Text 29"/>
+          <p:cNvPr id="33" name="Text 29"/>
           <p:cNvSpPr/>
           <p:nvPr/>
         </p:nvSpPr>
@@ -8098,7 +8098,7 @@
       </p:sp>
       <p:sp>
         <p:nvSpPr>
-          <p:cNvPr id="33" name="Text 30"/>
+          <p:cNvPr id="34" name="Text 30"/>
           <p:cNvSpPr/>
           <p:nvPr/>
         </p:nvSpPr>
@@ -8304,7 +8304,7 @@
         </p:nvSpPr>
         <p:spPr>
           <a:xfrm>
-            <a:off x="1280160" y="1024128"/>
+            <a:off x="1280160" y="1193140"/>
             <a:ext cx="777240" cy="256032"/>
           </a:xfrm>
           <a:prstGeom prst="roundRect">
@@ -8326,7 +8326,7 @@
         </p:nvSpPr>
         <p:spPr>
           <a:xfrm>
-            <a:off x="1280160" y="1024128"/>
+            <a:off x="1280160" y="1193140"/>
             <a:ext cx="777240" cy="256032"/>
           </a:xfrm>
           <a:prstGeom prst="rect">
@@ -8383,7 +8383,7 @@
       </p:pic>
       <p:sp>
         <p:nvSpPr>
-          <p:cNvPr id="7" name="Shape 4"/>
+          <p:cNvPr id="8" name="Shape 4"/>
           <p:cNvSpPr/>
           <p:nvPr/>
         </p:nvSpPr>
@@ -8405,7 +8405,7 @@
       </p:sp>
       <p:sp>
         <p:nvSpPr>
-          <p:cNvPr id="8" name="Text 5"/>
+          <p:cNvPr id="9" name="Text 5"/>
           <p:cNvSpPr/>
           <p:nvPr/>
         </p:nvSpPr>
@@ -8444,7 +8444,7 @@
       </p:sp>
       <p:sp>
         <p:nvSpPr>
-          <p:cNvPr id="9" name="Text 6"/>
+          <p:cNvPr id="10" name="Text 6"/>
           <p:cNvSpPr/>
           <p:nvPr/>
         </p:nvSpPr>
@@ -8486,7 +8486,7 @@
       </p:sp>
       <p:sp>
         <p:nvSpPr>
-          <p:cNvPr id="10" name="Shape 7"/>
+          <p:cNvPr id="11" name="Shape 7"/>
           <p:cNvSpPr/>
           <p:nvPr/>
         </p:nvSpPr>
@@ -8508,7 +8508,7 @@
       </p:sp>
       <p:sp>
         <p:nvSpPr>
-          <p:cNvPr id="11" name="Text 8"/>
+          <p:cNvPr id="12" name="Text 8"/>
           <p:cNvSpPr/>
           <p:nvPr/>
         </p:nvSpPr>
@@ -8547,7 +8547,7 @@
       </p:sp>
       <p:sp>
         <p:nvSpPr>
-          <p:cNvPr id="12" name="Text 9"/>
+          <p:cNvPr id="13" name="Text 9"/>
           <p:cNvSpPr/>
           <p:nvPr/>
         </p:nvSpPr>
@@ -8589,7 +8589,7 @@
       </p:sp>
       <p:sp>
         <p:nvSpPr>
-          <p:cNvPr id="13" name="Shape 10"/>
+          <p:cNvPr id="14" name="Shape 10"/>
           <p:cNvSpPr/>
           <p:nvPr/>
         </p:nvSpPr>
@@ -8611,7 +8611,7 @@
       </p:sp>
       <p:sp>
         <p:nvSpPr>
-          <p:cNvPr id="14" name="Text 11"/>
+          <p:cNvPr id="15" name="Text 11"/>
           <p:cNvSpPr/>
           <p:nvPr/>
         </p:nvSpPr>
@@ -8650,7 +8650,7 @@
       </p:sp>
       <p:sp>
         <p:nvSpPr>
-          <p:cNvPr id="15" name="Text 12"/>
+          <p:cNvPr id="16" name="Text 12"/>
           <p:cNvSpPr/>
           <p:nvPr/>
         </p:nvSpPr>
@@ -8684,7 +8684,7 @@
                 <a:ea typeface="Montserrat" pitchFamily="34" charset="-122"/>
                 <a:cs typeface="Montserrat" pitchFamily="34" charset="-120"/>
               </a:rPr>
-              <a:t>ціна miss'а — секунди очікування і реальні гроші, а «застаріла» інструкція не псується за годину. Виграш: hit ratio росте, p95 не стрибає.</a:t>
+              <a:t>Miss коштує секунди й гроші, а «застаріла» інструкція не псується за годину.</a:t>
             </a:r>
             <a:endParaRPr lang="en-US" sz="1300" dirty="0"/>
           </a:p>
@@ -8692,7 +8692,7 @@
       </p:sp>
       <p:sp>
         <p:nvSpPr>
-          <p:cNvPr id="16" name="Shape 13"/>
+          <p:cNvPr id="17" name="Shape 13"/>
           <p:cNvSpPr/>
           <p:nvPr/>
         </p:nvSpPr>
@@ -8714,7 +8714,7 @@
       </p:sp>
       <p:sp>
         <p:nvSpPr>
-          <p:cNvPr id="17" name="Text 14"/>
+          <p:cNvPr id="18" name="Text 14"/>
           <p:cNvSpPr/>
           <p:nvPr/>
         </p:nvSpPr>
@@ -8753,7 +8753,7 @@
       </p:sp>
       <p:sp>
         <p:nvSpPr>
-          <p:cNvPr id="18" name="Text 15"/>
+          <p:cNvPr id="19" name="Text 15"/>
           <p:cNvSpPr/>
           <p:nvPr/>
         </p:nvSpPr>
@@ -8787,7 +8787,7 @@
                 <a:ea typeface="Montserrat" pitchFamily="34" charset="-122"/>
                 <a:cs typeface="Montserrat" pitchFamily="34" charset="-120"/>
               </a:rPr>
-              <a:t>«Як скинути пароль» може жити добу; статус замовлення — не має права жити й хвилини. TTL — властивість класу запиту, а не налаштування кеша.</a:t>
+              <a:t>TTL — властивість класу запиту: пароль може жити добу, статус замовлення — ні.</a:t>
             </a:r>
             <a:endParaRPr lang="en-US" sz="1300" dirty="0"/>
           </a:p>
@@ -9038,7 +9038,7 @@
       </p:pic>
       <p:sp>
         <p:nvSpPr>
-          <p:cNvPr id="7" name="Shape 4"/>
+          <p:cNvPr id="8" name="Shape 4"/>
           <p:cNvSpPr/>
           <p:nvPr/>
         </p:nvSpPr>
@@ -9060,7 +9060,7 @@
       </p:sp>
       <p:sp>
         <p:nvSpPr>
-          <p:cNvPr id="8" name="Text 5"/>
+          <p:cNvPr id="9" name="Text 5"/>
           <p:cNvSpPr/>
           <p:nvPr/>
         </p:nvSpPr>
@@ -9099,7 +9099,7 @@
       </p:sp>
       <p:sp>
         <p:nvSpPr>
-          <p:cNvPr id="9" name="Shape 6"/>
+          <p:cNvPr id="10" name="Shape 6"/>
           <p:cNvSpPr/>
           <p:nvPr/>
         </p:nvSpPr>
@@ -9122,7 +9122,7 @@
       </p:sp>
       <p:sp>
         <p:nvSpPr>
-          <p:cNvPr id="10" name="Shape 7"/>
+          <p:cNvPr id="11" name="Shape 7"/>
           <p:cNvSpPr/>
           <p:nvPr/>
         </p:nvSpPr>
@@ -9142,7 +9142,7 @@
       </p:sp>
       <p:sp>
         <p:nvSpPr>
-          <p:cNvPr id="11" name="Shape 8"/>
+          <p:cNvPr id="12" name="Shape 8"/>
           <p:cNvSpPr/>
           <p:nvPr/>
         </p:nvSpPr>
@@ -9164,7 +9164,7 @@
       </p:sp>
       <p:sp>
         <p:nvSpPr>
-          <p:cNvPr id="12" name="Text 9"/>
+          <p:cNvPr id="13" name="Text 9"/>
           <p:cNvSpPr/>
           <p:nvPr/>
         </p:nvSpPr>
@@ -9203,7 +9203,7 @@
       </p:sp>
       <p:sp>
         <p:nvSpPr>
-          <p:cNvPr id="13" name="Shape 10"/>
+          <p:cNvPr id="14" name="Shape 10"/>
           <p:cNvSpPr/>
           <p:nvPr/>
         </p:nvSpPr>
@@ -9230,7 +9230,7 @@
       </p:sp>
       <p:sp>
         <p:nvSpPr>
-          <p:cNvPr id="14" name="Text 11"/>
+          <p:cNvPr id="15" name="Text 11"/>
           <p:cNvSpPr/>
           <p:nvPr/>
         </p:nvSpPr>
@@ -9269,7 +9269,7 @@
       </p:sp>
       <p:sp>
         <p:nvSpPr>
-          <p:cNvPr id="15" name="Text 12"/>
+          <p:cNvPr id="16" name="Text 12"/>
           <p:cNvSpPr/>
           <p:nvPr/>
         </p:nvSpPr>
@@ -9311,7 +9311,7 @@
       </p:sp>
       <p:sp>
         <p:nvSpPr>
-          <p:cNvPr id="16" name="Shape 13"/>
+          <p:cNvPr id="17" name="Shape 13"/>
           <p:cNvSpPr/>
           <p:nvPr/>
         </p:nvSpPr>
@@ -9333,7 +9333,7 @@
       </p:sp>
       <p:sp>
         <p:nvSpPr>
-          <p:cNvPr id="17" name="Text 14"/>
+          <p:cNvPr id="18" name="Text 14"/>
           <p:cNvSpPr/>
           <p:nvPr/>
         </p:nvSpPr>
@@ -9372,7 +9372,7 @@
       </p:sp>
       <p:sp>
         <p:nvSpPr>
-          <p:cNvPr id="18" name="Text 15"/>
+          <p:cNvPr id="19" name="Text 15"/>
           <p:cNvSpPr/>
           <p:nvPr/>
         </p:nvSpPr>
@@ -9414,7 +9414,7 @@
       </p:sp>
       <p:sp>
         <p:nvSpPr>
-          <p:cNvPr id="19" name="Shape 16"/>
+          <p:cNvPr id="20" name="Shape 16"/>
           <p:cNvSpPr/>
           <p:nvPr/>
         </p:nvSpPr>
@@ -9436,7 +9436,7 @@
       </p:sp>
       <p:sp>
         <p:nvSpPr>
-          <p:cNvPr id="20" name="Text 17"/>
+          <p:cNvPr id="21" name="Text 17"/>
           <p:cNvSpPr/>
           <p:nvPr/>
         </p:nvSpPr>
@@ -9475,7 +9475,7 @@
       </p:sp>
       <p:sp>
         <p:nvSpPr>
-          <p:cNvPr id="21" name="Text 18"/>
+          <p:cNvPr id="22" name="Text 18"/>
           <p:cNvSpPr/>
           <p:nvPr/>
         </p:nvSpPr>
@@ -9681,7 +9681,7 @@
         </p:nvSpPr>
         <p:spPr>
           <a:xfrm>
-            <a:off x="1280160" y="1024128"/>
+            <a:off x="1280160" y="1193140"/>
             <a:ext cx="777240" cy="256032"/>
           </a:xfrm>
           <a:prstGeom prst="roundRect">
@@ -9703,7 +9703,7 @@
         </p:nvSpPr>
         <p:spPr>
           <a:xfrm>
-            <a:off x="1280160" y="1024128"/>
+            <a:off x="1280160" y="1193140"/>
             <a:ext cx="777240" cy="256032"/>
           </a:xfrm>
           <a:prstGeom prst="rect">
@@ -9742,7 +9742,7 @@
         </p:nvSpPr>
         <p:spPr>
           <a:xfrm>
-            <a:off x="2167128" y="1024128"/>
+            <a:off x="2167128" y="1193140"/>
             <a:ext cx="864108" cy="256032"/>
           </a:xfrm>
           <a:prstGeom prst="roundRect">
@@ -9764,7 +9764,7 @@
         </p:nvSpPr>
         <p:spPr>
           <a:xfrm>
-            <a:off x="2167128" y="1024128"/>
+            <a:off x="2167128" y="1193140"/>
             <a:ext cx="864108" cy="256032"/>
           </a:xfrm>
           <a:prstGeom prst="rect">
@@ -9821,7 +9821,7 @@
       </p:pic>
       <p:sp>
         <p:nvSpPr>
-          <p:cNvPr id="9" name="Shape 6"/>
+          <p:cNvPr id="10" name="Shape 6"/>
           <p:cNvSpPr/>
           <p:nvPr/>
         </p:nvSpPr>
@@ -9843,7 +9843,7 @@
       </p:sp>
       <p:sp>
         <p:nvSpPr>
-          <p:cNvPr id="10" name="Shape 7"/>
+          <p:cNvPr id="11" name="Shape 7"/>
           <p:cNvSpPr/>
           <p:nvPr/>
         </p:nvSpPr>
@@ -9863,7 +9863,7 @@
       </p:sp>
       <p:sp>
         <p:nvSpPr>
-          <p:cNvPr id="11" name="Text 8"/>
+          <p:cNvPr id="12" name="Text 8"/>
           <p:cNvSpPr/>
           <p:nvPr/>
         </p:nvSpPr>
@@ -9902,7 +9902,7 @@
       </p:sp>
       <p:sp>
         <p:nvSpPr>
-          <p:cNvPr id="12" name="Text 9"/>
+          <p:cNvPr id="13" name="Text 9"/>
           <p:cNvSpPr/>
           <p:nvPr/>
         </p:nvSpPr>
@@ -9941,7 +9941,7 @@
       </p:sp>
       <p:sp>
         <p:nvSpPr>
-          <p:cNvPr id="13" name="Text 10"/>
+          <p:cNvPr id="14" name="Text 10"/>
           <p:cNvSpPr/>
           <p:nvPr/>
         </p:nvSpPr>
@@ -9983,7 +9983,7 @@
       </p:sp>
       <p:sp>
         <p:nvSpPr>
-          <p:cNvPr id="14" name="Shape 11"/>
+          <p:cNvPr id="15" name="Shape 11"/>
           <p:cNvSpPr/>
           <p:nvPr/>
         </p:nvSpPr>
@@ -10005,7 +10005,7 @@
       </p:sp>
       <p:sp>
         <p:nvSpPr>
-          <p:cNvPr id="15" name="Shape 12"/>
+          <p:cNvPr id="16" name="Shape 12"/>
           <p:cNvSpPr/>
           <p:nvPr/>
         </p:nvSpPr>
@@ -10025,7 +10025,7 @@
       </p:sp>
       <p:sp>
         <p:nvSpPr>
-          <p:cNvPr id="16" name="Text 13"/>
+          <p:cNvPr id="17" name="Text 13"/>
           <p:cNvSpPr/>
           <p:nvPr/>
         </p:nvSpPr>
@@ -10064,7 +10064,7 @@
       </p:sp>
       <p:sp>
         <p:nvSpPr>
-          <p:cNvPr id="17" name="Text 14"/>
+          <p:cNvPr id="18" name="Text 14"/>
           <p:cNvSpPr/>
           <p:nvPr/>
         </p:nvSpPr>
@@ -10103,7 +10103,7 @@
       </p:sp>
       <p:sp>
         <p:nvSpPr>
-          <p:cNvPr id="18" name="Text 15"/>
+          <p:cNvPr id="19" name="Text 15"/>
           <p:cNvSpPr/>
           <p:nvPr/>
         </p:nvSpPr>
@@ -10145,7 +10145,7 @@
       </p:sp>
       <p:sp>
         <p:nvSpPr>
-          <p:cNvPr id="19" name="Shape 16"/>
+          <p:cNvPr id="20" name="Shape 16"/>
           <p:cNvSpPr/>
           <p:nvPr/>
         </p:nvSpPr>
@@ -10167,7 +10167,7 @@
       </p:sp>
       <p:sp>
         <p:nvSpPr>
-          <p:cNvPr id="20" name="Shape 17"/>
+          <p:cNvPr id="21" name="Shape 17"/>
           <p:cNvSpPr/>
           <p:nvPr/>
         </p:nvSpPr>
@@ -10187,7 +10187,7 @@
       </p:sp>
       <p:sp>
         <p:nvSpPr>
-          <p:cNvPr id="21" name="Text 18"/>
+          <p:cNvPr id="22" name="Text 18"/>
           <p:cNvSpPr/>
           <p:nvPr/>
         </p:nvSpPr>
@@ -10226,7 +10226,7 @@
       </p:sp>
       <p:sp>
         <p:nvSpPr>
-          <p:cNvPr id="22" name="Text 19"/>
+          <p:cNvPr id="23" name="Text 19"/>
           <p:cNvSpPr/>
           <p:nvPr/>
         </p:nvSpPr>
@@ -10265,7 +10265,7 @@
       </p:sp>
       <p:sp>
         <p:nvSpPr>
-          <p:cNvPr id="23" name="Text 20"/>
+          <p:cNvPr id="24" name="Text 20"/>
           <p:cNvSpPr/>
           <p:nvPr/>
         </p:nvSpPr>
@@ -10307,7 +10307,7 @@
       </p:sp>
       <p:sp>
         <p:nvSpPr>
-          <p:cNvPr id="24" name="Shape 21"/>
+          <p:cNvPr id="25" name="Shape 21"/>
           <p:cNvSpPr/>
           <p:nvPr/>
         </p:nvSpPr>
@@ -10329,7 +10329,7 @@
       </p:sp>
       <p:sp>
         <p:nvSpPr>
-          <p:cNvPr id="25" name="Text 22"/>
+          <p:cNvPr id="26" name="Text 22"/>
           <p:cNvSpPr/>
           <p:nvPr/>
         </p:nvSpPr>
@@ -10368,7 +10368,7 @@
       </p:sp>
       <p:sp>
         <p:nvSpPr>
-          <p:cNvPr id="26" name="Text 23"/>
+          <p:cNvPr id="27" name="Text 23"/>
           <p:cNvSpPr/>
           <p:nvPr/>
         </p:nvSpPr>
@@ -10614,7 +10614,7 @@
       </p:pic>
       <p:sp>
         <p:nvSpPr>
-          <p:cNvPr id="6" name="Shape 3"/>
+          <p:cNvPr id="7" name="Shape 3"/>
           <p:cNvSpPr/>
           <p:nvPr/>
         </p:nvSpPr>
@@ -10636,7 +10636,7 @@
       </p:sp>
       <p:sp>
         <p:nvSpPr>
-          <p:cNvPr id="7" name="Shape 4"/>
+          <p:cNvPr id="8" name="Shape 4"/>
           <p:cNvSpPr/>
           <p:nvPr/>
         </p:nvSpPr>
@@ -10656,7 +10656,7 @@
       </p:sp>
       <p:sp>
         <p:nvSpPr>
-          <p:cNvPr id="8" name="Text 5"/>
+          <p:cNvPr id="9" name="Text 5"/>
           <p:cNvSpPr/>
           <p:nvPr/>
         </p:nvSpPr>
@@ -10695,7 +10695,7 @@
       </p:sp>
       <p:sp>
         <p:nvSpPr>
-          <p:cNvPr id="9" name="Text 6"/>
+          <p:cNvPr id="10" name="Text 6"/>
           <p:cNvSpPr/>
           <p:nvPr/>
         </p:nvSpPr>
@@ -10734,7 +10734,7 @@
       </p:sp>
       <p:sp>
         <p:nvSpPr>
-          <p:cNvPr id="10" name="Text 7"/>
+          <p:cNvPr id="11" name="Text 7"/>
           <p:cNvSpPr/>
           <p:nvPr/>
         </p:nvSpPr>
@@ -10776,7 +10776,7 @@
       </p:sp>
       <p:sp>
         <p:nvSpPr>
-          <p:cNvPr id="11" name="Shape 8"/>
+          <p:cNvPr id="12" name="Shape 8"/>
           <p:cNvSpPr/>
           <p:nvPr/>
         </p:nvSpPr>
@@ -10798,7 +10798,7 @@
       </p:sp>
       <p:sp>
         <p:nvSpPr>
-          <p:cNvPr id="12" name="Shape 9"/>
+          <p:cNvPr id="13" name="Shape 9"/>
           <p:cNvSpPr/>
           <p:nvPr/>
         </p:nvSpPr>
@@ -10818,7 +10818,7 @@
       </p:sp>
       <p:sp>
         <p:nvSpPr>
-          <p:cNvPr id="13" name="Text 10"/>
+          <p:cNvPr id="14" name="Text 10"/>
           <p:cNvSpPr/>
           <p:nvPr/>
         </p:nvSpPr>
@@ -10857,7 +10857,7 @@
       </p:sp>
       <p:sp>
         <p:nvSpPr>
-          <p:cNvPr id="14" name="Text 11"/>
+          <p:cNvPr id="15" name="Text 11"/>
           <p:cNvSpPr/>
           <p:nvPr/>
         </p:nvSpPr>
@@ -10896,7 +10896,7 @@
       </p:sp>
       <p:sp>
         <p:nvSpPr>
-          <p:cNvPr id="15" name="Text 12"/>
+          <p:cNvPr id="16" name="Text 12"/>
           <p:cNvSpPr/>
           <p:nvPr/>
         </p:nvSpPr>
@@ -10938,7 +10938,7 @@
       </p:sp>
       <p:sp>
         <p:nvSpPr>
-          <p:cNvPr id="16" name="Shape 13"/>
+          <p:cNvPr id="17" name="Shape 13"/>
           <p:cNvSpPr/>
           <p:nvPr/>
         </p:nvSpPr>
@@ -10960,7 +10960,7 @@
       </p:sp>
       <p:sp>
         <p:nvSpPr>
-          <p:cNvPr id="17" name="Shape 14"/>
+          <p:cNvPr id="18" name="Shape 14"/>
           <p:cNvSpPr/>
           <p:nvPr/>
         </p:nvSpPr>
@@ -10980,7 +10980,7 @@
       </p:sp>
       <p:sp>
         <p:nvSpPr>
-          <p:cNvPr id="18" name="Text 15"/>
+          <p:cNvPr id="19" name="Text 15"/>
           <p:cNvSpPr/>
           <p:nvPr/>
         </p:nvSpPr>
@@ -11019,7 +11019,7 @@
       </p:sp>
       <p:sp>
         <p:nvSpPr>
-          <p:cNvPr id="19" name="Text 16"/>
+          <p:cNvPr id="20" name="Text 16"/>
           <p:cNvSpPr/>
           <p:nvPr/>
         </p:nvSpPr>
@@ -11058,7 +11058,7 @@
       </p:sp>
       <p:sp>
         <p:nvSpPr>
-          <p:cNvPr id="20" name="Text 17"/>
+          <p:cNvPr id="21" name="Text 17"/>
           <p:cNvSpPr/>
           <p:nvPr/>
         </p:nvSpPr>
@@ -11100,7 +11100,7 @@
       </p:sp>
       <p:sp>
         <p:nvSpPr>
-          <p:cNvPr id="21" name="Shape 18"/>
+          <p:cNvPr id="22" name="Shape 18"/>
           <p:cNvSpPr/>
           <p:nvPr/>
         </p:nvSpPr>
@@ -11122,7 +11122,7 @@
       </p:sp>
       <p:sp>
         <p:nvSpPr>
-          <p:cNvPr id="22" name="Shape 19"/>
+          <p:cNvPr id="23" name="Shape 19"/>
           <p:cNvSpPr/>
           <p:nvPr/>
         </p:nvSpPr>
@@ -11142,7 +11142,7 @@
       </p:sp>
       <p:sp>
         <p:nvSpPr>
-          <p:cNvPr id="23" name="Text 20"/>
+          <p:cNvPr id="24" name="Text 20"/>
           <p:cNvSpPr/>
           <p:nvPr/>
         </p:nvSpPr>
@@ -11181,7 +11181,7 @@
       </p:sp>
       <p:sp>
         <p:nvSpPr>
-          <p:cNvPr id="24" name="Text 21"/>
+          <p:cNvPr id="25" name="Text 21"/>
           <p:cNvSpPr/>
           <p:nvPr/>
         </p:nvSpPr>
@@ -11220,7 +11220,7 @@
       </p:sp>
       <p:sp>
         <p:nvSpPr>
-          <p:cNvPr id="25" name="Text 22"/>
+          <p:cNvPr id="26" name="Text 22"/>
           <p:cNvSpPr/>
           <p:nvPr/>
         </p:nvSpPr>
@@ -11262,7 +11262,7 @@
       </p:sp>
       <p:sp>
         <p:nvSpPr>
-          <p:cNvPr id="26" name="Shape 23"/>
+          <p:cNvPr id="27" name="Shape 23"/>
           <p:cNvSpPr/>
           <p:nvPr/>
         </p:nvSpPr>
@@ -11284,7 +11284,7 @@
       </p:sp>
       <p:sp>
         <p:nvSpPr>
-          <p:cNvPr id="27" name="Text 24"/>
+          <p:cNvPr id="28" name="Text 24"/>
           <p:cNvSpPr/>
           <p:nvPr/>
         </p:nvSpPr>
@@ -11323,7 +11323,7 @@
       </p:sp>
       <p:sp>
         <p:nvSpPr>
-          <p:cNvPr id="28" name="Text 25"/>
+          <p:cNvPr id="29" name="Text 25"/>
           <p:cNvSpPr/>
           <p:nvPr/>
         </p:nvSpPr>
@@ -11569,7 +11569,7 @@
       </p:pic>
       <p:sp>
         <p:nvSpPr>
-          <p:cNvPr id="6" name="Shape 3"/>
+          <p:cNvPr id="7" name="Shape 3"/>
           <p:cNvSpPr/>
           <p:nvPr/>
         </p:nvSpPr>
@@ -11589,7 +11589,7 @@
       </p:sp>
       <p:sp>
         <p:nvSpPr>
-          <p:cNvPr id="7" name="Text 4"/>
+          <p:cNvPr id="8" name="Text 4"/>
           <p:cNvSpPr/>
           <p:nvPr/>
         </p:nvSpPr>
@@ -11628,7 +11628,7 @@
       </p:sp>
       <p:sp>
         <p:nvSpPr>
-          <p:cNvPr id="8" name="Text 5"/>
+          <p:cNvPr id="9" name="Text 5"/>
           <p:cNvSpPr/>
           <p:nvPr/>
         </p:nvSpPr>
@@ -11681,7 +11681,7 @@
       </p:sp>
       <p:sp>
         <p:nvSpPr>
-          <p:cNvPr id="9" name="Shape 6"/>
+          <p:cNvPr id="10" name="Shape 6"/>
           <p:cNvSpPr/>
           <p:nvPr/>
         </p:nvSpPr>
@@ -11701,7 +11701,7 @@
       </p:sp>
       <p:sp>
         <p:nvSpPr>
-          <p:cNvPr id="10" name="Text 7"/>
+          <p:cNvPr id="11" name="Text 7"/>
           <p:cNvSpPr/>
           <p:nvPr/>
         </p:nvSpPr>
@@ -11740,7 +11740,7 @@
       </p:sp>
       <p:sp>
         <p:nvSpPr>
-          <p:cNvPr id="11" name="Text 8"/>
+          <p:cNvPr id="12" name="Text 8"/>
           <p:cNvSpPr/>
           <p:nvPr/>
         </p:nvSpPr>
@@ -11793,7 +11793,7 @@
       </p:sp>
       <p:sp>
         <p:nvSpPr>
-          <p:cNvPr id="12" name="Shape 9"/>
+          <p:cNvPr id="13" name="Shape 9"/>
           <p:cNvSpPr/>
           <p:nvPr/>
         </p:nvSpPr>
@@ -11813,7 +11813,7 @@
       </p:sp>
       <p:sp>
         <p:nvSpPr>
-          <p:cNvPr id="13" name="Text 10"/>
+          <p:cNvPr id="14" name="Text 10"/>
           <p:cNvSpPr/>
           <p:nvPr/>
         </p:nvSpPr>
@@ -11852,7 +11852,7 @@
       </p:sp>
       <p:sp>
         <p:nvSpPr>
-          <p:cNvPr id="14" name="Text 11"/>
+          <p:cNvPr id="15" name="Text 11"/>
           <p:cNvSpPr/>
           <p:nvPr/>
         </p:nvSpPr>
@@ -11905,7 +11905,7 @@
       </p:sp>
       <p:sp>
         <p:nvSpPr>
-          <p:cNvPr id="15" name="Shape 12"/>
+          <p:cNvPr id="16" name="Shape 12"/>
           <p:cNvSpPr/>
           <p:nvPr/>
         </p:nvSpPr>
@@ -11925,7 +11925,7 @@
       </p:sp>
       <p:sp>
         <p:nvSpPr>
-          <p:cNvPr id="16" name="Text 13"/>
+          <p:cNvPr id="17" name="Text 13"/>
           <p:cNvSpPr/>
           <p:nvPr/>
         </p:nvSpPr>
@@ -11964,7 +11964,7 @@
       </p:sp>
       <p:sp>
         <p:nvSpPr>
-          <p:cNvPr id="17" name="Text 14"/>
+          <p:cNvPr id="18" name="Text 14"/>
           <p:cNvSpPr/>
           <p:nvPr/>
         </p:nvSpPr>
@@ -12017,7 +12017,7 @@
       </p:sp>
       <p:sp>
         <p:nvSpPr>
-          <p:cNvPr id="18" name="Shape 15"/>
+          <p:cNvPr id="19" name="Shape 15"/>
           <p:cNvSpPr/>
           <p:nvPr/>
         </p:nvSpPr>
@@ -12037,7 +12037,7 @@
       </p:sp>
       <p:sp>
         <p:nvSpPr>
-          <p:cNvPr id="19" name="Text 16"/>
+          <p:cNvPr id="20" name="Text 16"/>
           <p:cNvSpPr/>
           <p:nvPr/>
         </p:nvSpPr>
@@ -12076,7 +12076,7 @@
       </p:sp>
       <p:sp>
         <p:nvSpPr>
-          <p:cNvPr id="20" name="Text 17"/>
+          <p:cNvPr id="21" name="Text 17"/>
           <p:cNvSpPr/>
           <p:nvPr/>
         </p:nvSpPr>
@@ -12375,7 +12375,7 @@
       </p:pic>
       <p:sp>
         <p:nvSpPr>
-          <p:cNvPr id="7" name="Shape 4"/>
+          <p:cNvPr id="8" name="Shape 4"/>
           <p:cNvSpPr/>
           <p:nvPr/>
         </p:nvSpPr>
@@ -12402,7 +12402,7 @@
       </p:sp>
       <p:sp>
         <p:nvSpPr>
-          <p:cNvPr id="8" name="Shape 5"/>
+          <p:cNvPr id="9" name="Shape 5"/>
           <p:cNvSpPr/>
           <p:nvPr/>
         </p:nvSpPr>
@@ -12422,7 +12422,7 @@
       </p:sp>
       <p:sp>
         <p:nvSpPr>
-          <p:cNvPr id="9" name="Text 6"/>
+          <p:cNvPr id="10" name="Text 6"/>
           <p:cNvSpPr/>
           <p:nvPr/>
         </p:nvSpPr>
@@ -12461,7 +12461,7 @@
       </p:sp>
       <p:sp>
         <p:nvSpPr>
-          <p:cNvPr id="10" name="Text 7"/>
+          <p:cNvPr id="11" name="Text 7"/>
           <p:cNvSpPr/>
           <p:nvPr/>
         </p:nvSpPr>
@@ -12500,7 +12500,7 @@
       </p:sp>
       <p:sp>
         <p:nvSpPr>
-          <p:cNvPr id="11" name="Text 8"/>
+          <p:cNvPr id="12" name="Text 8"/>
           <p:cNvSpPr/>
           <p:nvPr/>
         </p:nvSpPr>
@@ -12542,7 +12542,7 @@
       </p:sp>
       <p:sp>
         <p:nvSpPr>
-          <p:cNvPr id="12" name="Shape 9"/>
+          <p:cNvPr id="13" name="Shape 9"/>
           <p:cNvSpPr/>
           <p:nvPr/>
         </p:nvSpPr>
@@ -12569,7 +12569,7 @@
       </p:sp>
       <p:sp>
         <p:nvSpPr>
-          <p:cNvPr id="13" name="Shape 10"/>
+          <p:cNvPr id="14" name="Shape 10"/>
           <p:cNvSpPr/>
           <p:nvPr/>
         </p:nvSpPr>
@@ -12589,7 +12589,7 @@
       </p:sp>
       <p:sp>
         <p:nvSpPr>
-          <p:cNvPr id="14" name="Text 11"/>
+          <p:cNvPr id="15" name="Text 11"/>
           <p:cNvSpPr/>
           <p:nvPr/>
         </p:nvSpPr>
@@ -12628,7 +12628,7 @@
       </p:sp>
       <p:sp>
         <p:nvSpPr>
-          <p:cNvPr id="15" name="Text 12"/>
+          <p:cNvPr id="16" name="Text 12"/>
           <p:cNvSpPr/>
           <p:nvPr/>
         </p:nvSpPr>
@@ -12667,7 +12667,7 @@
       </p:sp>
       <p:sp>
         <p:nvSpPr>
-          <p:cNvPr id="16" name="Text 13"/>
+          <p:cNvPr id="17" name="Text 13"/>
           <p:cNvSpPr/>
           <p:nvPr/>
         </p:nvSpPr>
@@ -12709,7 +12709,7 @@
       </p:sp>
       <p:sp>
         <p:nvSpPr>
-          <p:cNvPr id="17" name="Shape 14"/>
+          <p:cNvPr id="18" name="Shape 14"/>
           <p:cNvSpPr/>
           <p:nvPr/>
         </p:nvSpPr>
@@ -12736,7 +12736,7 @@
       </p:sp>
       <p:sp>
         <p:nvSpPr>
-          <p:cNvPr id="18" name="Shape 15"/>
+          <p:cNvPr id="19" name="Shape 15"/>
           <p:cNvSpPr/>
           <p:nvPr/>
         </p:nvSpPr>
@@ -12756,7 +12756,7 @@
       </p:sp>
       <p:sp>
         <p:nvSpPr>
-          <p:cNvPr id="19" name="Text 16"/>
+          <p:cNvPr id="20" name="Text 16"/>
           <p:cNvSpPr/>
           <p:nvPr/>
         </p:nvSpPr>
@@ -12795,7 +12795,7 @@
       </p:sp>
       <p:sp>
         <p:nvSpPr>
-          <p:cNvPr id="20" name="Text 17"/>
+          <p:cNvPr id="21" name="Text 17"/>
           <p:cNvSpPr/>
           <p:nvPr/>
         </p:nvSpPr>
@@ -12834,7 +12834,7 @@
       </p:sp>
       <p:sp>
         <p:nvSpPr>
-          <p:cNvPr id="21" name="Text 18"/>
+          <p:cNvPr id="22" name="Text 18"/>
           <p:cNvSpPr/>
           <p:nvPr/>
         </p:nvSpPr>
@@ -12876,7 +12876,7 @@
       </p:sp>
       <p:sp>
         <p:nvSpPr>
-          <p:cNvPr id="22" name="Shape 19"/>
+          <p:cNvPr id="23" name="Shape 19"/>
           <p:cNvSpPr/>
           <p:nvPr/>
         </p:nvSpPr>
@@ -12903,7 +12903,7 @@
       </p:sp>
       <p:sp>
         <p:nvSpPr>
-          <p:cNvPr id="23" name="Shape 20"/>
+          <p:cNvPr id="24" name="Shape 20"/>
           <p:cNvSpPr/>
           <p:nvPr/>
         </p:nvSpPr>
@@ -12923,7 +12923,7 @@
       </p:sp>
       <p:sp>
         <p:nvSpPr>
-          <p:cNvPr id="24" name="Text 21"/>
+          <p:cNvPr id="25" name="Text 21"/>
           <p:cNvSpPr/>
           <p:nvPr/>
         </p:nvSpPr>
@@ -12962,7 +12962,7 @@
       </p:sp>
       <p:sp>
         <p:nvSpPr>
-          <p:cNvPr id="25" name="Text 22"/>
+          <p:cNvPr id="26" name="Text 22"/>
           <p:cNvSpPr/>
           <p:nvPr/>
         </p:nvSpPr>
@@ -13001,7 +13001,7 @@
       </p:sp>
       <p:sp>
         <p:nvSpPr>
-          <p:cNvPr id="26" name="Text 23"/>
+          <p:cNvPr id="27" name="Text 23"/>
           <p:cNvSpPr/>
           <p:nvPr/>
         </p:nvSpPr>
@@ -13043,7 +13043,7 @@
       </p:sp>
       <p:sp>
         <p:nvSpPr>
-          <p:cNvPr id="27" name="Shape 24"/>
+          <p:cNvPr id="28" name="Shape 24"/>
           <p:cNvSpPr/>
           <p:nvPr/>
         </p:nvSpPr>
@@ -13070,7 +13070,7 @@
       </p:sp>
       <p:sp>
         <p:nvSpPr>
-          <p:cNvPr id="28" name="Shape 25"/>
+          <p:cNvPr id="29" name="Shape 25"/>
           <p:cNvSpPr/>
           <p:nvPr/>
         </p:nvSpPr>
@@ -13090,7 +13090,7 @@
       </p:sp>
       <p:sp>
         <p:nvSpPr>
-          <p:cNvPr id="29" name="Text 26"/>
+          <p:cNvPr id="30" name="Text 26"/>
           <p:cNvSpPr/>
           <p:nvPr/>
         </p:nvSpPr>
@@ -13129,7 +13129,7 @@
       </p:sp>
       <p:sp>
         <p:nvSpPr>
-          <p:cNvPr id="30" name="Text 27"/>
+          <p:cNvPr id="31" name="Text 27"/>
           <p:cNvSpPr/>
           <p:nvPr/>
         </p:nvSpPr>
@@ -13168,7 +13168,7 @@
       </p:sp>
       <p:sp>
         <p:nvSpPr>
-          <p:cNvPr id="31" name="Text 28"/>
+          <p:cNvPr id="32" name="Text 28"/>
           <p:cNvSpPr/>
           <p:nvPr/>
         </p:nvSpPr>
@@ -13414,7 +13414,7 @@
       </p:pic>
       <p:sp>
         <p:nvSpPr>
-          <p:cNvPr id="6" name="Shape 3"/>
+          <p:cNvPr id="7" name="Shape 3"/>
           <p:cNvSpPr/>
           <p:nvPr/>
         </p:nvSpPr>
@@ -13436,7 +13436,7 @@
       </p:sp>
       <p:sp>
         <p:nvSpPr>
-          <p:cNvPr id="7" name="Text 4"/>
+          <p:cNvPr id="8" name="Text 4"/>
           <p:cNvSpPr/>
           <p:nvPr/>
         </p:nvSpPr>
@@ -13475,7 +13475,7 @@
       </p:sp>
       <p:sp>
         <p:nvSpPr>
-          <p:cNvPr id="8" name="Text 5"/>
+          <p:cNvPr id="9" name="Text 5"/>
           <p:cNvSpPr/>
           <p:nvPr/>
         </p:nvSpPr>
@@ -13517,7 +13517,7 @@
       </p:sp>
       <p:sp>
         <p:nvSpPr>
-          <p:cNvPr id="9" name="Shape 6"/>
+          <p:cNvPr id="10" name="Shape 6"/>
           <p:cNvSpPr/>
           <p:nvPr/>
         </p:nvSpPr>
@@ -13539,7 +13539,7 @@
       </p:sp>
       <p:sp>
         <p:nvSpPr>
-          <p:cNvPr id="10" name="Text 7"/>
+          <p:cNvPr id="11" name="Text 7"/>
           <p:cNvSpPr/>
           <p:nvPr/>
         </p:nvSpPr>
@@ -13578,7 +13578,7 @@
       </p:sp>
       <p:sp>
         <p:nvSpPr>
-          <p:cNvPr id="11" name="Text 8"/>
+          <p:cNvPr id="12" name="Text 8"/>
           <p:cNvSpPr/>
           <p:nvPr/>
         </p:nvSpPr>
@@ -13620,7 +13620,7 @@
       </p:sp>
       <p:sp>
         <p:nvSpPr>
-          <p:cNvPr id="12" name="Shape 9"/>
+          <p:cNvPr id="13" name="Shape 9"/>
           <p:cNvSpPr/>
           <p:nvPr/>
         </p:nvSpPr>
@@ -13642,7 +13642,7 @@
       </p:sp>
       <p:sp>
         <p:nvSpPr>
-          <p:cNvPr id="13" name="Text 10"/>
+          <p:cNvPr id="14" name="Text 10"/>
           <p:cNvSpPr/>
           <p:nvPr/>
         </p:nvSpPr>
@@ -13681,7 +13681,7 @@
       </p:sp>
       <p:sp>
         <p:nvSpPr>
-          <p:cNvPr id="14" name="Text 11"/>
+          <p:cNvPr id="15" name="Text 11"/>
           <p:cNvSpPr/>
           <p:nvPr/>
         </p:nvSpPr>
@@ -13723,7 +13723,7 @@
       </p:sp>
       <p:sp>
         <p:nvSpPr>
-          <p:cNvPr id="15" name="Shape 12"/>
+          <p:cNvPr id="16" name="Shape 12"/>
           <p:cNvSpPr/>
           <p:nvPr/>
         </p:nvSpPr>
@@ -13750,7 +13750,7 @@
       </p:sp>
       <p:sp>
         <p:nvSpPr>
-          <p:cNvPr id="16" name="Text 13"/>
+          <p:cNvPr id="17" name="Text 13"/>
           <p:cNvSpPr/>
           <p:nvPr/>
         </p:nvSpPr>
@@ -13996,7 +13996,7 @@
       </p:pic>
       <p:sp>
         <p:nvSpPr>
-          <p:cNvPr id="6" name="Shape 3"/>
+          <p:cNvPr id="7" name="Shape 3"/>
           <p:cNvSpPr/>
           <p:nvPr/>
         </p:nvSpPr>
@@ -14023,7 +14023,7 @@
       </p:sp>
       <p:sp>
         <p:nvSpPr>
-          <p:cNvPr id="7" name="Shape 4"/>
+          <p:cNvPr id="8" name="Shape 4"/>
           <p:cNvSpPr/>
           <p:nvPr/>
         </p:nvSpPr>
@@ -14050,14 +14050,54 @@
       </p:sp>
       <p:sp>
         <p:nvSpPr>
-          <p:cNvPr id="8" name="Text 5"/>
-          <p:cNvSpPr/>
-          <p:nvPr/>
-        </p:nvSpPr>
-        <p:spPr>
-          <a:xfrm>
-            <a:off x="978408" y="2157984"/>
-            <a:ext cx="256032" cy="256032"/>
+          <p:cNvPr id="9" name="Shape 5"/>
+          <p:cNvSpPr/>
+          <p:nvPr/>
+        </p:nvSpPr>
+        <p:spPr>
+          <a:xfrm rot="2700000">
+            <a:off x="1041227" y="2297430"/>
+            <a:ext cx="58156" cy="27432"/>
+          </a:xfrm>
+          <a:prstGeom prst="rect">
+            <a:avLst/>
+          </a:prstGeom>
+          <a:solidFill>
+            <a:srgbClr val="5A05F4"/>
+          </a:solidFill>
+          <a:ln/>
+        </p:spPr>
+      </p:sp>
+      <p:sp>
+        <p:nvSpPr>
+          <p:cNvPr id="10" name="Shape 6"/>
+          <p:cNvSpPr/>
+          <p:nvPr/>
+        </p:nvSpPr>
+        <p:spPr>
+          <a:xfrm rot="-3000000">
+            <a:off x="1069025" y="2271370"/>
+            <a:ext cx="121432" cy="27432"/>
+          </a:xfrm>
+          <a:prstGeom prst="rect">
+            <a:avLst/>
+          </a:prstGeom>
+          <a:solidFill>
+            <a:srgbClr val="5A05F4"/>
+          </a:solidFill>
+          <a:ln/>
+        </p:spPr>
+      </p:sp>
+      <p:sp>
+        <p:nvSpPr>
+          <p:cNvPr id="11" name="Text 7"/>
+          <p:cNvSpPr/>
+          <p:nvPr/>
+        </p:nvSpPr>
+        <p:spPr>
+          <a:xfrm>
+            <a:off x="1362456" y="2103120"/>
+            <a:ext cx="4617720" cy="384048"/>
           </a:xfrm>
           <a:prstGeom prst="rect">
             <a:avLst/>
@@ -14069,57 +14109,18 @@
           <a:bodyPr wrap="square" lIns="0" tIns="0" rIns="0" bIns="0" rtlCol="0" anchor="ctr"/>
           <a:lstStyle/>
           <a:p>
-            <a:pPr algn="ctr" indent="0" marL="0">
-              <a:buNone/>
-            </a:pPr>
-            <a:r>
-              <a:rPr lang="en-US" sz="1000" b="1" dirty="0">
-                <a:solidFill>
-                  <a:srgbClr val="5A05F4"/>
+            <a:pPr indent="0" marL="0">
+              <a:buNone/>
+            </a:pPr>
+            <a:r>
+              <a:rPr lang="en-US" sz="1250" dirty="0">
+                <a:solidFill>
+                  <a:srgbClr val="111318"/>
                 </a:solidFill>
                 <a:latin typeface="Montserrat" pitchFamily="34" charset="0"/>
                 <a:ea typeface="Montserrat" pitchFamily="34" charset="-122"/>
                 <a:cs typeface="Montserrat" pitchFamily="34" charset="-120"/>
               </a:rPr>
-              <a:t>✓</a:t>
-            </a:r>
-            <a:endParaRPr lang="en-US" sz="1000" dirty="0"/>
-          </a:p>
-        </p:txBody>
-      </p:sp>
-      <p:sp>
-        <p:nvSpPr>
-          <p:cNvPr id="9" name="Text 6"/>
-          <p:cNvSpPr/>
-          <p:nvPr/>
-        </p:nvSpPr>
-        <p:spPr>
-          <a:xfrm>
-            <a:off x="1362456" y="2103120"/>
-            <a:ext cx="4617720" cy="384048"/>
-          </a:xfrm>
-          <a:prstGeom prst="rect">
-            <a:avLst/>
-          </a:prstGeom>
-          <a:noFill/>
-          <a:ln/>
-        </p:spPr>
-        <p:txBody>
-          <a:bodyPr wrap="square" lIns="0" tIns="0" rIns="0" bIns="0" rtlCol="0" anchor="ctr"/>
-          <a:lstStyle/>
-          <a:p>
-            <a:pPr indent="0" marL="0">
-              <a:buNone/>
-            </a:pPr>
-            <a:r>
-              <a:rPr lang="en-US" sz="1250" dirty="0">
-                <a:solidFill>
-                  <a:srgbClr val="111318"/>
-                </a:solidFill>
-                <a:latin typeface="Montserrat" pitchFamily="34" charset="0"/>
-                <a:ea typeface="Montserrat" pitchFamily="34" charset="-122"/>
-                <a:cs typeface="Montserrat" pitchFamily="34" charset="-120"/>
-              </a:rPr>
               <a:t>повторний запит відповідає ~миттєво</a:t>
             </a:r>
             <a:endParaRPr lang="en-US" sz="1250" dirty="0"/>
@@ -14128,7 +14129,7 @@
       </p:sp>
       <p:sp>
         <p:nvSpPr>
-          <p:cNvPr id="10" name="Shape 7"/>
+          <p:cNvPr id="12" name="Shape 8"/>
           <p:cNvSpPr/>
           <p:nvPr/>
         </p:nvSpPr>
@@ -14155,14 +14156,54 @@
       </p:sp>
       <p:sp>
         <p:nvSpPr>
-          <p:cNvPr id="11" name="Text 8"/>
-          <p:cNvSpPr/>
-          <p:nvPr/>
-        </p:nvSpPr>
-        <p:spPr>
-          <a:xfrm>
-            <a:off x="978408" y="2724912"/>
-            <a:ext cx="256032" cy="256032"/>
+          <p:cNvPr id="13" name="Shape 9"/>
+          <p:cNvSpPr/>
+          <p:nvPr/>
+        </p:nvSpPr>
+        <p:spPr>
+          <a:xfrm rot="2700000">
+            <a:off x="1041227" y="2864358"/>
+            <a:ext cx="58156" cy="27432"/>
+          </a:xfrm>
+          <a:prstGeom prst="rect">
+            <a:avLst/>
+          </a:prstGeom>
+          <a:solidFill>
+            <a:srgbClr val="5A05F4"/>
+          </a:solidFill>
+          <a:ln/>
+        </p:spPr>
+      </p:sp>
+      <p:sp>
+        <p:nvSpPr>
+          <p:cNvPr id="14" name="Shape 10"/>
+          <p:cNvSpPr/>
+          <p:nvPr/>
+        </p:nvSpPr>
+        <p:spPr>
+          <a:xfrm rot="-3000000">
+            <a:off x="1069025" y="2838298"/>
+            <a:ext cx="121432" cy="27432"/>
+          </a:xfrm>
+          <a:prstGeom prst="rect">
+            <a:avLst/>
+          </a:prstGeom>
+          <a:solidFill>
+            <a:srgbClr val="5A05F4"/>
+          </a:solidFill>
+          <a:ln/>
+        </p:spPr>
+      </p:sp>
+      <p:sp>
+        <p:nvSpPr>
+          <p:cNvPr id="15" name="Text 11"/>
+          <p:cNvSpPr/>
+          <p:nvPr/>
+        </p:nvSpPr>
+        <p:spPr>
+          <a:xfrm>
+            <a:off x="1362456" y="2670048"/>
+            <a:ext cx="4617720" cy="384048"/>
           </a:xfrm>
           <a:prstGeom prst="rect">
             <a:avLst/>
@@ -14174,57 +14215,18 @@
           <a:bodyPr wrap="square" lIns="0" tIns="0" rIns="0" bIns="0" rtlCol="0" anchor="ctr"/>
           <a:lstStyle/>
           <a:p>
-            <a:pPr algn="ctr" indent="0" marL="0">
-              <a:buNone/>
-            </a:pPr>
-            <a:r>
-              <a:rPr lang="en-US" sz="1000" b="1" dirty="0">
-                <a:solidFill>
-                  <a:srgbClr val="5A05F4"/>
+            <a:pPr indent="0" marL="0">
+              <a:buNone/>
+            </a:pPr>
+            <a:r>
+              <a:rPr lang="en-US" sz="1250" dirty="0">
+                <a:solidFill>
+                  <a:srgbClr val="111318"/>
                 </a:solidFill>
                 <a:latin typeface="Montserrat" pitchFamily="34" charset="0"/>
                 <a:ea typeface="Montserrat" pitchFamily="34" charset="-122"/>
                 <a:cs typeface="Montserrat" pitchFamily="34" charset="-120"/>
               </a:rPr>
-              <a:t>✓</a:t>
-            </a:r>
-            <a:endParaRPr lang="en-US" sz="1000" dirty="0"/>
-          </a:p>
-        </p:txBody>
-      </p:sp>
-      <p:sp>
-        <p:nvSpPr>
-          <p:cNvPr id="12" name="Text 9"/>
-          <p:cNvSpPr/>
-          <p:nvPr/>
-        </p:nvSpPr>
-        <p:spPr>
-          <a:xfrm>
-            <a:off x="1362456" y="2670048"/>
-            <a:ext cx="4617720" cy="384048"/>
-          </a:xfrm>
-          <a:prstGeom prst="rect">
-            <a:avLst/>
-          </a:prstGeom>
-          <a:noFill/>
-          <a:ln/>
-        </p:spPr>
-        <p:txBody>
-          <a:bodyPr wrap="square" lIns="0" tIns="0" rIns="0" bIns="0" rtlCol="0" anchor="ctr"/>
-          <a:lstStyle/>
-          <a:p>
-            <a:pPr indent="0" marL="0">
-              <a:buNone/>
-            </a:pPr>
-            <a:r>
-              <a:rPr lang="en-US" sz="1250" dirty="0">
-                <a:solidFill>
-                  <a:srgbClr val="111318"/>
-                </a:solidFill>
-                <a:latin typeface="Montserrat" pitchFamily="34" charset="0"/>
-                <a:ea typeface="Montserrat" pitchFamily="34" charset="-122"/>
-                <a:cs typeface="Montserrat" pitchFamily="34" charset="-120"/>
-              </a:rPr>
               <a:t>лічильники hit/miss ростуть правильно</a:t>
             </a:r>
             <a:endParaRPr lang="en-US" sz="1250" dirty="0"/>
@@ -14233,7 +14235,7 @@
       </p:sp>
       <p:sp>
         <p:nvSpPr>
-          <p:cNvPr id="13" name="Shape 10"/>
+          <p:cNvPr id="16" name="Shape 12"/>
           <p:cNvSpPr/>
           <p:nvPr/>
         </p:nvSpPr>
@@ -14260,14 +14262,54 @@
       </p:sp>
       <p:sp>
         <p:nvSpPr>
-          <p:cNvPr id="14" name="Text 11"/>
-          <p:cNvSpPr/>
-          <p:nvPr/>
-        </p:nvSpPr>
-        <p:spPr>
-          <a:xfrm>
-            <a:off x="6144768" y="2157984"/>
-            <a:ext cx="256032" cy="256032"/>
+          <p:cNvPr id="17" name="Shape 13"/>
+          <p:cNvSpPr/>
+          <p:nvPr/>
+        </p:nvSpPr>
+        <p:spPr>
+          <a:xfrm rot="2700000">
+            <a:off x="6207587" y="2297430"/>
+            <a:ext cx="58156" cy="27432"/>
+          </a:xfrm>
+          <a:prstGeom prst="rect">
+            <a:avLst/>
+          </a:prstGeom>
+          <a:solidFill>
+            <a:srgbClr val="5A05F4"/>
+          </a:solidFill>
+          <a:ln/>
+        </p:spPr>
+      </p:sp>
+      <p:sp>
+        <p:nvSpPr>
+          <p:cNvPr id="18" name="Shape 14"/>
+          <p:cNvSpPr/>
+          <p:nvPr/>
+        </p:nvSpPr>
+        <p:spPr>
+          <a:xfrm rot="-3000000">
+            <a:off x="6235385" y="2271370"/>
+            <a:ext cx="121432" cy="27432"/>
+          </a:xfrm>
+          <a:prstGeom prst="rect">
+            <a:avLst/>
+          </a:prstGeom>
+          <a:solidFill>
+            <a:srgbClr val="5A05F4"/>
+          </a:solidFill>
+          <a:ln/>
+        </p:spPr>
+      </p:sp>
+      <p:sp>
+        <p:nvSpPr>
+          <p:cNvPr id="19" name="Text 15"/>
+          <p:cNvSpPr/>
+          <p:nvPr/>
+        </p:nvSpPr>
+        <p:spPr>
+          <a:xfrm>
+            <a:off x="6528816" y="2103120"/>
+            <a:ext cx="4617720" cy="384048"/>
           </a:xfrm>
           <a:prstGeom prst="rect">
             <a:avLst/>
@@ -14279,57 +14321,18 @@
           <a:bodyPr wrap="square" lIns="0" tIns="0" rIns="0" bIns="0" rtlCol="0" anchor="ctr"/>
           <a:lstStyle/>
           <a:p>
-            <a:pPr algn="ctr" indent="0" marL="0">
-              <a:buNone/>
-            </a:pPr>
-            <a:r>
-              <a:rPr lang="en-US" sz="1000" b="1" dirty="0">
-                <a:solidFill>
-                  <a:srgbClr val="5A05F4"/>
+            <a:pPr indent="0" marL="0">
+              <a:buNone/>
+            </a:pPr>
+            <a:r>
+              <a:rPr lang="en-US" sz="1250" dirty="0">
+                <a:solidFill>
+                  <a:srgbClr val="111318"/>
                 </a:solidFill>
                 <a:latin typeface="Montserrat" pitchFamily="34" charset="0"/>
                 <a:ea typeface="Montserrat" pitchFamily="34" charset="-122"/>
                 <a:cs typeface="Montserrat" pitchFamily="34" charset="-120"/>
               </a:rPr>
-              <a:t>✓</a:t>
-            </a:r>
-            <a:endParaRPr lang="en-US" sz="1000" dirty="0"/>
-          </a:p>
-        </p:txBody>
-      </p:sp>
-      <p:sp>
-        <p:nvSpPr>
-          <p:cNvPr id="15" name="Text 12"/>
-          <p:cNvSpPr/>
-          <p:nvPr/>
-        </p:nvSpPr>
-        <p:spPr>
-          <a:xfrm>
-            <a:off x="6528816" y="2103120"/>
-            <a:ext cx="4617720" cy="384048"/>
-          </a:xfrm>
-          <a:prstGeom prst="rect">
-            <a:avLst/>
-          </a:prstGeom>
-          <a:noFill/>
-          <a:ln/>
-        </p:spPr>
-        <p:txBody>
-          <a:bodyPr wrap="square" lIns="0" tIns="0" rIns="0" bIns="0" rtlCol="0" anchor="ctr"/>
-          <a:lstStyle/>
-          <a:p>
-            <a:pPr indent="0" marL="0">
-              <a:buNone/>
-            </a:pPr>
-            <a:r>
-              <a:rPr lang="en-US" sz="1250" dirty="0">
-                <a:solidFill>
-                  <a:srgbClr val="111318"/>
-                </a:solidFill>
-                <a:latin typeface="Montserrat" pitchFamily="34" charset="0"/>
-                <a:ea typeface="Montserrat" pitchFamily="34" charset="-122"/>
-                <a:cs typeface="Montserrat" pitchFamily="34" charset="-120"/>
-              </a:rPr>
               <a:t>зміна версії промпта інвалідує кеш</a:t>
             </a:r>
             <a:endParaRPr lang="en-US" sz="1250" dirty="0"/>
@@ -14338,7 +14341,7 @@
       </p:sp>
       <p:sp>
         <p:nvSpPr>
-          <p:cNvPr id="16" name="Shape 13"/>
+          <p:cNvPr id="20" name="Shape 16"/>
           <p:cNvSpPr/>
           <p:nvPr/>
         </p:nvSpPr>
@@ -14365,14 +14368,54 @@
       </p:sp>
       <p:sp>
         <p:nvSpPr>
-          <p:cNvPr id="17" name="Text 14"/>
-          <p:cNvSpPr/>
-          <p:nvPr/>
-        </p:nvSpPr>
-        <p:spPr>
-          <a:xfrm>
-            <a:off x="6144768" y="2724912"/>
-            <a:ext cx="256032" cy="256032"/>
+          <p:cNvPr id="21" name="Shape 17"/>
+          <p:cNvSpPr/>
+          <p:nvPr/>
+        </p:nvSpPr>
+        <p:spPr>
+          <a:xfrm rot="2700000">
+            <a:off x="6207587" y="2864358"/>
+            <a:ext cx="58156" cy="27432"/>
+          </a:xfrm>
+          <a:prstGeom prst="rect">
+            <a:avLst/>
+          </a:prstGeom>
+          <a:solidFill>
+            <a:srgbClr val="5A05F4"/>
+          </a:solidFill>
+          <a:ln/>
+        </p:spPr>
+      </p:sp>
+      <p:sp>
+        <p:nvSpPr>
+          <p:cNvPr id="22" name="Shape 18"/>
+          <p:cNvSpPr/>
+          <p:nvPr/>
+        </p:nvSpPr>
+        <p:spPr>
+          <a:xfrm rot="-3000000">
+            <a:off x="6235385" y="2838298"/>
+            <a:ext cx="121432" cy="27432"/>
+          </a:xfrm>
+          <a:prstGeom prst="rect">
+            <a:avLst/>
+          </a:prstGeom>
+          <a:solidFill>
+            <a:srgbClr val="5A05F4"/>
+          </a:solidFill>
+          <a:ln/>
+        </p:spPr>
+      </p:sp>
+      <p:sp>
+        <p:nvSpPr>
+          <p:cNvPr id="23" name="Text 19"/>
+          <p:cNvSpPr/>
+          <p:nvPr/>
+        </p:nvSpPr>
+        <p:spPr>
+          <a:xfrm>
+            <a:off x="6528816" y="2670048"/>
+            <a:ext cx="4617720" cy="384048"/>
           </a:xfrm>
           <a:prstGeom prst="rect">
             <a:avLst/>
@@ -14384,57 +14427,18 @@
           <a:bodyPr wrap="square" lIns="0" tIns="0" rIns="0" bIns="0" rtlCol="0" anchor="ctr"/>
           <a:lstStyle/>
           <a:p>
-            <a:pPr algn="ctr" indent="0" marL="0">
-              <a:buNone/>
-            </a:pPr>
-            <a:r>
-              <a:rPr lang="en-US" sz="1000" b="1" dirty="0">
-                <a:solidFill>
-                  <a:srgbClr val="5A05F4"/>
+            <a:pPr indent="0" marL="0">
+              <a:buNone/>
+            </a:pPr>
+            <a:r>
+              <a:rPr lang="en-US" sz="1250" dirty="0">
+                <a:solidFill>
+                  <a:srgbClr val="111318"/>
                 </a:solidFill>
                 <a:latin typeface="Montserrat" pitchFamily="34" charset="0"/>
                 <a:ea typeface="Montserrat" pitchFamily="34" charset="-122"/>
                 <a:cs typeface="Montserrat" pitchFamily="34" charset="-120"/>
               </a:rPr>
-              <a:t>✓</a:t>
-            </a:r>
-            <a:endParaRPr lang="en-US" sz="1000" dirty="0"/>
-          </a:p>
-        </p:txBody>
-      </p:sp>
-      <p:sp>
-        <p:nvSpPr>
-          <p:cNvPr id="18" name="Text 15"/>
-          <p:cNvSpPr/>
-          <p:nvPr/>
-        </p:nvSpPr>
-        <p:spPr>
-          <a:xfrm>
-            <a:off x="6528816" y="2670048"/>
-            <a:ext cx="4617720" cy="384048"/>
-          </a:xfrm>
-          <a:prstGeom prst="rect">
-            <a:avLst/>
-          </a:prstGeom>
-          <a:noFill/>
-          <a:ln/>
-        </p:spPr>
-        <p:txBody>
-          <a:bodyPr wrap="square" lIns="0" tIns="0" rIns="0" bIns="0" rtlCol="0" anchor="ctr"/>
-          <a:lstStyle/>
-          <a:p>
-            <a:pPr indent="0" marL="0">
-              <a:buNone/>
-            </a:pPr>
-            <a:r>
-              <a:rPr lang="en-US" sz="1250" dirty="0">
-                <a:solidFill>
-                  <a:srgbClr val="111318"/>
-                </a:solidFill>
-                <a:latin typeface="Montserrat" pitchFamily="34" charset="0"/>
-                <a:ea typeface="Montserrat" pitchFamily="34" charset="-122"/>
-                <a:cs typeface="Montserrat" pitchFamily="34" charset="-120"/>
-              </a:rPr>
               <a:t>назву, що кешувати заборонено — і чому</a:t>
             </a:r>
             <a:endParaRPr lang="en-US" sz="1250" dirty="0"/>
@@ -14443,7 +14447,7 @@
       </p:sp>
       <p:sp>
         <p:nvSpPr>
-          <p:cNvPr id="19" name="Text 16"/>
+          <p:cNvPr id="24" name="Text 20"/>
           <p:cNvSpPr/>
           <p:nvPr/>
         </p:nvSpPr>
@@ -14686,7 +14690,7 @@
       </p:pic>
       <p:sp>
         <p:nvSpPr>
-          <p:cNvPr id="6" name="Shape 3"/>
+          <p:cNvPr id="7" name="Shape 3"/>
           <p:cNvSpPr/>
           <p:nvPr/>
         </p:nvSpPr>
@@ -14713,7 +14717,7 @@
       </p:sp>
       <p:sp>
         <p:nvSpPr>
-          <p:cNvPr id="7" name="Shape 4"/>
+          <p:cNvPr id="8" name="Shape 4"/>
           <p:cNvSpPr/>
           <p:nvPr/>
         </p:nvSpPr>
@@ -14733,14 +14737,54 @@
       </p:sp>
       <p:sp>
         <p:nvSpPr>
-          <p:cNvPr id="8" name="Text 5"/>
-          <p:cNvSpPr/>
-          <p:nvPr/>
-        </p:nvSpPr>
-        <p:spPr>
-          <a:xfrm>
-            <a:off x="768096" y="2020824"/>
-            <a:ext cx="384048" cy="384048"/>
+          <p:cNvPr id="9" name="Shape 5"/>
+          <p:cNvSpPr/>
+          <p:nvPr/>
+        </p:nvSpPr>
+        <p:spPr>
+          <a:xfrm rot="2700000">
+            <a:off x="871789" y="2197102"/>
+            <a:ext cx="176662" cy="31492"/>
+          </a:xfrm>
+          <a:prstGeom prst="rect">
+            <a:avLst/>
+          </a:prstGeom>
+          <a:solidFill>
+            <a:srgbClr val="C62A2A"/>
+          </a:solidFill>
+          <a:ln/>
+        </p:spPr>
+      </p:sp>
+      <p:sp>
+        <p:nvSpPr>
+          <p:cNvPr id="10" name="Shape 6"/>
+          <p:cNvSpPr/>
+          <p:nvPr/>
+        </p:nvSpPr>
+        <p:spPr>
+          <a:xfrm rot="-2700000">
+            <a:off x="871789" y="2197102"/>
+            <a:ext cx="176662" cy="31492"/>
+          </a:xfrm>
+          <a:prstGeom prst="rect">
+            <a:avLst/>
+          </a:prstGeom>
+          <a:solidFill>
+            <a:srgbClr val="C62A2A"/>
+          </a:solidFill>
+          <a:ln/>
+        </p:spPr>
+      </p:sp>
+      <p:sp>
+        <p:nvSpPr>
+          <p:cNvPr id="11" name="Text 7"/>
+          <p:cNvSpPr/>
+          <p:nvPr/>
+        </p:nvSpPr>
+        <p:spPr>
+          <a:xfrm>
+            <a:off x="1298448" y="1828800"/>
+            <a:ext cx="10149840" cy="777240"/>
           </a:xfrm>
           <a:prstGeom prst="rect">
             <a:avLst/>
@@ -14752,71 +14796,32 @@
           <a:bodyPr wrap="square" lIns="0" tIns="0" rIns="0" bIns="0" rtlCol="0" anchor="ctr"/>
           <a:lstStyle/>
           <a:p>
-            <a:pPr algn="ctr" indent="0" marL="0">
-              <a:buNone/>
-            </a:pPr>
-            <a:r>
-              <a:rPr lang="en-US" sz="1300" b="1" dirty="0">
-                <a:solidFill>
-                  <a:srgbClr val="C62A2A"/>
+            <a:pPr indent="0" marL="0">
+              <a:buNone/>
+            </a:pPr>
+            <a:r>
+              <a:rPr lang="en-US" sz="1350" b="1" dirty="0">
+                <a:solidFill>
+                  <a:srgbClr val="111318"/>
                 </a:solidFill>
                 <a:latin typeface="Montserrat" pitchFamily="34" charset="0"/>
                 <a:ea typeface="Montserrat" pitchFamily="34" charset="-122"/>
                 <a:cs typeface="Montserrat" pitchFamily="34" charset="-120"/>
               </a:rPr>
-              <a:t>✕</a:t>
-            </a:r>
-            <a:endParaRPr lang="en-US" sz="1300" dirty="0"/>
-          </a:p>
-        </p:txBody>
-      </p:sp>
-      <p:sp>
-        <p:nvSpPr>
-          <p:cNvPr id="9" name="Text 6"/>
-          <p:cNvSpPr/>
-          <p:nvPr/>
-        </p:nvSpPr>
-        <p:spPr>
-          <a:xfrm>
-            <a:off x="1298448" y="1828800"/>
-            <a:ext cx="10149840" cy="777240"/>
-          </a:xfrm>
-          <a:prstGeom prst="rect">
-            <a:avLst/>
-          </a:prstGeom>
-          <a:noFill/>
-          <a:ln/>
-        </p:spPr>
-        <p:txBody>
-          <a:bodyPr wrap="square" lIns="0" tIns="0" rIns="0" bIns="0" rtlCol="0" anchor="ctr"/>
-          <a:lstStyle/>
-          <a:p>
-            <a:pPr indent="0" marL="0">
-              <a:buNone/>
-            </a:pPr>
-            <a:r>
-              <a:rPr lang="en-US" sz="1350" b="1" dirty="0">
-                <a:solidFill>
-                  <a:srgbClr val="111318"/>
+              <a:t>Кеш без лічильників   </a:t>
+            </a:r>
+            <a:pPr indent="0" marL="0">
+              <a:buNone/>
+            </a:pPr>
+            <a:r>
+              <a:rPr lang="en-US" sz="1200" dirty="0">
+                <a:solidFill>
+                  <a:srgbClr val="555B66"/>
                 </a:solidFill>
                 <a:latin typeface="Montserrat" pitchFamily="34" charset="0"/>
                 <a:ea typeface="Montserrat" pitchFamily="34" charset="-122"/>
                 <a:cs typeface="Montserrat" pitchFamily="34" charset="-120"/>
               </a:rPr>
-              <a:t>Кеш без лічильників   </a:t>
-            </a:r>
-            <a:pPr indent="0" marL="0">
-              <a:buNone/>
-            </a:pPr>
-            <a:r>
-              <a:rPr lang="en-US" sz="1200" dirty="0">
-                <a:solidFill>
-                  <a:srgbClr val="555B66"/>
-                </a:solidFill>
-                <a:latin typeface="Montserrat" pitchFamily="34" charset="0"/>
-                <a:ea typeface="Montserrat" pitchFamily="34" charset="-122"/>
-                <a:cs typeface="Montserrat" pitchFamily="34" charset="-120"/>
-              </a:rPr>
               <a:t>«начебто економимо» — цифри немає, рішення теж</a:t>
             </a:r>
             <a:endParaRPr lang="en-US" sz="1350" dirty="0"/>
@@ -14825,7 +14830,7 @@
       </p:sp>
       <p:sp>
         <p:nvSpPr>
-          <p:cNvPr id="10" name="Shape 7"/>
+          <p:cNvPr id="12" name="Shape 8"/>
           <p:cNvSpPr/>
           <p:nvPr/>
         </p:nvSpPr>
@@ -14852,7 +14857,7 @@
       </p:sp>
       <p:sp>
         <p:nvSpPr>
-          <p:cNvPr id="11" name="Shape 8"/>
+          <p:cNvPr id="13" name="Shape 9"/>
           <p:cNvSpPr/>
           <p:nvPr/>
         </p:nvSpPr>
@@ -14872,14 +14877,54 @@
       </p:sp>
       <p:sp>
         <p:nvSpPr>
-          <p:cNvPr id="12" name="Text 9"/>
-          <p:cNvSpPr/>
-          <p:nvPr/>
-        </p:nvSpPr>
-        <p:spPr>
-          <a:xfrm>
-            <a:off x="768096" y="2935224"/>
-            <a:ext cx="384048" cy="384048"/>
+          <p:cNvPr id="14" name="Shape 10"/>
+          <p:cNvSpPr/>
+          <p:nvPr/>
+        </p:nvSpPr>
+        <p:spPr>
+          <a:xfrm rot="2700000">
+            <a:off x="871789" y="3111502"/>
+            <a:ext cx="176662" cy="31492"/>
+          </a:xfrm>
+          <a:prstGeom prst="rect">
+            <a:avLst/>
+          </a:prstGeom>
+          <a:solidFill>
+            <a:srgbClr val="C62A2A"/>
+          </a:solidFill>
+          <a:ln/>
+        </p:spPr>
+      </p:sp>
+      <p:sp>
+        <p:nvSpPr>
+          <p:cNvPr id="15" name="Shape 11"/>
+          <p:cNvSpPr/>
+          <p:nvPr/>
+        </p:nvSpPr>
+        <p:spPr>
+          <a:xfrm rot="-2700000">
+            <a:off x="871789" y="3111502"/>
+            <a:ext cx="176662" cy="31492"/>
+          </a:xfrm>
+          <a:prstGeom prst="rect">
+            <a:avLst/>
+          </a:prstGeom>
+          <a:solidFill>
+            <a:srgbClr val="C62A2A"/>
+          </a:solidFill>
+          <a:ln/>
+        </p:spPr>
+      </p:sp>
+      <p:sp>
+        <p:nvSpPr>
+          <p:cNvPr id="16" name="Text 12"/>
+          <p:cNvSpPr/>
+          <p:nvPr/>
+        </p:nvSpPr>
+        <p:spPr>
+          <a:xfrm>
+            <a:off x="1298448" y="2743200"/>
+            <a:ext cx="10149840" cy="777240"/>
           </a:xfrm>
           <a:prstGeom prst="rect">
             <a:avLst/>
@@ -14891,71 +14936,32 @@
           <a:bodyPr wrap="square" lIns="0" tIns="0" rIns="0" bIns="0" rtlCol="0" anchor="ctr"/>
           <a:lstStyle/>
           <a:p>
-            <a:pPr algn="ctr" indent="0" marL="0">
-              <a:buNone/>
-            </a:pPr>
-            <a:r>
-              <a:rPr lang="en-US" sz="1300" b="1" dirty="0">
-                <a:solidFill>
-                  <a:srgbClr val="C62A2A"/>
+            <a:pPr indent="0" marL="0">
+              <a:buNone/>
+            </a:pPr>
+            <a:r>
+              <a:rPr lang="en-US" sz="1350" b="1" dirty="0">
+                <a:solidFill>
+                  <a:srgbClr val="111318"/>
                 </a:solidFill>
                 <a:latin typeface="Montserrat" pitchFamily="34" charset="0"/>
                 <a:ea typeface="Montserrat" pitchFamily="34" charset="-122"/>
                 <a:cs typeface="Montserrat" pitchFamily="34" charset="-120"/>
               </a:rPr>
-              <a:t>✕</a:t>
-            </a:r>
-            <a:endParaRPr lang="en-US" sz="1300" dirty="0"/>
-          </a:p>
-        </p:txBody>
-      </p:sp>
-      <p:sp>
-        <p:nvSpPr>
-          <p:cNvPr id="13" name="Text 10"/>
-          <p:cNvSpPr/>
-          <p:nvPr/>
-        </p:nvSpPr>
-        <p:spPr>
-          <a:xfrm>
-            <a:off x="1298448" y="2743200"/>
-            <a:ext cx="10149840" cy="777240"/>
-          </a:xfrm>
-          <a:prstGeom prst="rect">
-            <a:avLst/>
-          </a:prstGeom>
-          <a:noFill/>
-          <a:ln/>
-        </p:spPr>
-        <p:txBody>
-          <a:bodyPr wrap="square" lIns="0" tIns="0" rIns="0" bIns="0" rtlCol="0" anchor="ctr"/>
-          <a:lstStyle/>
-          <a:p>
-            <a:pPr indent="0" marL="0">
-              <a:buNone/>
-            </a:pPr>
-            <a:r>
-              <a:rPr lang="en-US" sz="1350" b="1" dirty="0">
-                <a:solidFill>
-                  <a:srgbClr val="111318"/>
+              <a:t>Промпт поза ключем   </a:t>
+            </a:r>
+            <a:pPr indent="0" marL="0">
+              <a:buNone/>
+            </a:pPr>
+            <a:r>
+              <a:rPr lang="en-US" sz="1200" dirty="0">
+                <a:solidFill>
+                  <a:srgbClr val="555B66"/>
                 </a:solidFill>
                 <a:latin typeface="Montserrat" pitchFamily="34" charset="0"/>
                 <a:ea typeface="Montserrat" pitchFamily="34" charset="-122"/>
                 <a:cs typeface="Montserrat" pitchFamily="34" charset="-120"/>
               </a:rPr>
-              <a:t>Промпт поза ключем   </a:t>
-            </a:r>
-            <a:pPr indent="0" marL="0">
-              <a:buNone/>
-            </a:pPr>
-            <a:r>
-              <a:rPr lang="en-US" sz="1200" dirty="0">
-                <a:solidFill>
-                  <a:srgbClr val="555B66"/>
-                </a:solidFill>
-                <a:latin typeface="Montserrat" pitchFamily="34" charset="0"/>
-                <a:ea typeface="Montserrat" pitchFamily="34" charset="-122"/>
-                <a:cs typeface="Montserrat" pitchFamily="34" charset="-120"/>
-              </a:rPr>
               <a:t>rollback полагодив регресію, а користувачі бачать стару поведінку</a:t>
             </a:r>
             <a:endParaRPr lang="en-US" sz="1350" dirty="0"/>
@@ -14964,7 +14970,7 @@
       </p:sp>
       <p:sp>
         <p:nvSpPr>
-          <p:cNvPr id="14" name="Shape 11"/>
+          <p:cNvPr id="17" name="Shape 13"/>
           <p:cNvSpPr/>
           <p:nvPr/>
         </p:nvSpPr>
@@ -14991,7 +14997,7 @@
       </p:sp>
       <p:sp>
         <p:nvSpPr>
-          <p:cNvPr id="15" name="Shape 12"/>
+          <p:cNvPr id="18" name="Shape 14"/>
           <p:cNvSpPr/>
           <p:nvPr/>
         </p:nvSpPr>
@@ -15011,14 +15017,54 @@
       </p:sp>
       <p:sp>
         <p:nvSpPr>
-          <p:cNvPr id="16" name="Text 13"/>
-          <p:cNvSpPr/>
-          <p:nvPr/>
-        </p:nvSpPr>
-        <p:spPr>
-          <a:xfrm>
-            <a:off x="768096" y="3849624"/>
-            <a:ext cx="384048" cy="384048"/>
+          <p:cNvPr id="19" name="Shape 15"/>
+          <p:cNvSpPr/>
+          <p:nvPr/>
+        </p:nvSpPr>
+        <p:spPr>
+          <a:xfrm rot="2700000">
+            <a:off x="871789" y="4025902"/>
+            <a:ext cx="176662" cy="31492"/>
+          </a:xfrm>
+          <a:prstGeom prst="rect">
+            <a:avLst/>
+          </a:prstGeom>
+          <a:solidFill>
+            <a:srgbClr val="C62A2A"/>
+          </a:solidFill>
+          <a:ln/>
+        </p:spPr>
+      </p:sp>
+      <p:sp>
+        <p:nvSpPr>
+          <p:cNvPr id="20" name="Shape 16"/>
+          <p:cNvSpPr/>
+          <p:nvPr/>
+        </p:nvSpPr>
+        <p:spPr>
+          <a:xfrm rot="-2700000">
+            <a:off x="871789" y="4025902"/>
+            <a:ext cx="176662" cy="31492"/>
+          </a:xfrm>
+          <a:prstGeom prst="rect">
+            <a:avLst/>
+          </a:prstGeom>
+          <a:solidFill>
+            <a:srgbClr val="C62A2A"/>
+          </a:solidFill>
+          <a:ln/>
+        </p:spPr>
+      </p:sp>
+      <p:sp>
+        <p:nvSpPr>
+          <p:cNvPr id="21" name="Text 17"/>
+          <p:cNvSpPr/>
+          <p:nvPr/>
+        </p:nvSpPr>
+        <p:spPr>
+          <a:xfrm>
+            <a:off x="1298448" y="3657600"/>
+            <a:ext cx="10149840" cy="777240"/>
           </a:xfrm>
           <a:prstGeom prst="rect">
             <a:avLst/>
@@ -15030,71 +15076,32 @@
           <a:bodyPr wrap="square" lIns="0" tIns="0" rIns="0" bIns="0" rtlCol="0" anchor="ctr"/>
           <a:lstStyle/>
           <a:p>
-            <a:pPr algn="ctr" indent="0" marL="0">
-              <a:buNone/>
-            </a:pPr>
-            <a:r>
-              <a:rPr lang="en-US" sz="1300" b="1" dirty="0">
-                <a:solidFill>
-                  <a:srgbClr val="C62A2A"/>
+            <a:pPr indent="0" marL="0">
+              <a:buNone/>
+            </a:pPr>
+            <a:r>
+              <a:rPr lang="en-US" sz="1350" b="1" dirty="0">
+                <a:solidFill>
+                  <a:srgbClr val="111318"/>
                 </a:solidFill>
                 <a:latin typeface="Montserrat" pitchFamily="34" charset="0"/>
                 <a:ea typeface="Montserrat" pitchFamily="34" charset="-122"/>
                 <a:cs typeface="Montserrat" pitchFamily="34" charset="-120"/>
               </a:rPr>
-              <a:t>✕</a:t>
-            </a:r>
-            <a:endParaRPr lang="en-US" sz="1300" dirty="0"/>
-          </a:p>
-        </p:txBody>
-      </p:sp>
-      <p:sp>
-        <p:nvSpPr>
-          <p:cNvPr id="17" name="Text 14"/>
-          <p:cNvSpPr/>
-          <p:nvPr/>
-        </p:nvSpPr>
-        <p:spPr>
-          <a:xfrm>
-            <a:off x="1298448" y="3657600"/>
-            <a:ext cx="10149840" cy="777240"/>
-          </a:xfrm>
-          <a:prstGeom prst="rect">
-            <a:avLst/>
-          </a:prstGeom>
-          <a:noFill/>
-          <a:ln/>
-        </p:spPr>
-        <p:txBody>
-          <a:bodyPr wrap="square" lIns="0" tIns="0" rIns="0" bIns="0" rtlCol="0" anchor="ctr"/>
-          <a:lstStyle/>
-          <a:p>
-            <a:pPr indent="0" marL="0">
-              <a:buNone/>
-            </a:pPr>
-            <a:r>
-              <a:rPr lang="en-US" sz="1350" b="1" dirty="0">
-                <a:solidFill>
-                  <a:srgbClr val="111318"/>
+              <a:t>Кешувати персональні відповіді   </a:t>
+            </a:r>
+            <a:pPr indent="0" marL="0">
+              <a:buNone/>
+            </a:pPr>
+            <a:r>
+              <a:rPr lang="en-US" sz="1200" dirty="0">
+                <a:solidFill>
+                  <a:srgbClr val="555B66"/>
                 </a:solidFill>
                 <a:latin typeface="Montserrat" pitchFamily="34" charset="0"/>
                 <a:ea typeface="Montserrat" pitchFamily="34" charset="-122"/>
                 <a:cs typeface="Montserrat" pitchFamily="34" charset="-120"/>
               </a:rPr>
-              <a:t>Кешувати персональні відповіді   </a:t>
-            </a:r>
-            <a:pPr indent="0" marL="0">
-              <a:buNone/>
-            </a:pPr>
-            <a:r>
-              <a:rPr lang="en-US" sz="1200" dirty="0">
-                <a:solidFill>
-                  <a:srgbClr val="555B66"/>
-                </a:solidFill>
-                <a:latin typeface="Montserrat" pitchFamily="34" charset="0"/>
-                <a:ea typeface="Montserrat" pitchFamily="34" charset="-122"/>
-                <a:cs typeface="Montserrat" pitchFamily="34" charset="-120"/>
-              </a:rPr>
               <a:t>це не продуктивність, це чужі дані в чужих руках</a:t>
             </a:r>
             <a:endParaRPr lang="en-US" sz="1350" dirty="0"/>
@@ -15103,7 +15110,7 @@
       </p:sp>
       <p:sp>
         <p:nvSpPr>
-          <p:cNvPr id="18" name="Shape 15"/>
+          <p:cNvPr id="22" name="Shape 18"/>
           <p:cNvSpPr/>
           <p:nvPr/>
         </p:nvSpPr>
@@ -15130,7 +15137,7 @@
       </p:sp>
       <p:sp>
         <p:nvSpPr>
-          <p:cNvPr id="19" name="Shape 16"/>
+          <p:cNvPr id="23" name="Shape 19"/>
           <p:cNvSpPr/>
           <p:nvPr/>
         </p:nvSpPr>
@@ -15150,46 +15157,47 @@
       </p:sp>
       <p:sp>
         <p:nvSpPr>
-          <p:cNvPr id="20" name="Text 17"/>
-          <p:cNvSpPr/>
-          <p:nvPr/>
-        </p:nvSpPr>
-        <p:spPr>
-          <a:xfrm>
-            <a:off x="768096" y="4764024"/>
-            <a:ext cx="384048" cy="384048"/>
-          </a:xfrm>
-          <a:prstGeom prst="rect">
-            <a:avLst/>
-          </a:prstGeom>
-          <a:noFill/>
-          <a:ln/>
-        </p:spPr>
-        <p:txBody>
-          <a:bodyPr wrap="square" lIns="0" tIns="0" rIns="0" bIns="0" rtlCol="0" anchor="ctr"/>
-          <a:lstStyle/>
-          <a:p>
-            <a:pPr algn="ctr" indent="0" marL="0">
-              <a:buNone/>
-            </a:pPr>
-            <a:r>
-              <a:rPr lang="en-US" sz="1300" b="1" dirty="0">
-                <a:solidFill>
-                  <a:srgbClr val="C62A2A"/>
-                </a:solidFill>
-                <a:latin typeface="Montserrat" pitchFamily="34" charset="0"/>
-                <a:ea typeface="Montserrat" pitchFamily="34" charset="-122"/>
-                <a:cs typeface="Montserrat" pitchFamily="34" charset="-120"/>
-              </a:rPr>
-              <a:t>✕</a:t>
-            </a:r>
-            <a:endParaRPr lang="en-US" sz="1300" dirty="0"/>
-          </a:p>
-        </p:txBody>
-      </p:sp>
-      <p:sp>
-        <p:nvSpPr>
-          <p:cNvPr id="21" name="Text 18"/>
+          <p:cNvPr id="24" name="Shape 20"/>
+          <p:cNvSpPr/>
+          <p:nvPr/>
+        </p:nvSpPr>
+        <p:spPr>
+          <a:xfrm rot="2700000">
+            <a:off x="871789" y="4940302"/>
+            <a:ext cx="176662" cy="31492"/>
+          </a:xfrm>
+          <a:prstGeom prst="rect">
+            <a:avLst/>
+          </a:prstGeom>
+          <a:solidFill>
+            <a:srgbClr val="C62A2A"/>
+          </a:solidFill>
+          <a:ln/>
+        </p:spPr>
+      </p:sp>
+      <p:sp>
+        <p:nvSpPr>
+          <p:cNvPr id="25" name="Shape 21"/>
+          <p:cNvSpPr/>
+          <p:nvPr/>
+        </p:nvSpPr>
+        <p:spPr>
+          <a:xfrm rot="-2700000">
+            <a:off x="871789" y="4940302"/>
+            <a:ext cx="176662" cy="31492"/>
+          </a:xfrm>
+          <a:prstGeom prst="rect">
+            <a:avLst/>
+          </a:prstGeom>
+          <a:solidFill>
+            <a:srgbClr val="C62A2A"/>
+          </a:solidFill>
+          <a:ln/>
+        </p:spPr>
+      </p:sp>
+      <p:sp>
+        <p:nvSpPr>
+          <p:cNvPr id="26" name="Text 22"/>
           <p:cNvSpPr/>
           <p:nvPr/>
         </p:nvSpPr>
@@ -15446,7 +15454,7 @@
       </p:pic>
       <p:sp>
         <p:nvSpPr>
-          <p:cNvPr id="6" name="Shape 3"/>
+          <p:cNvPr id="7" name="Shape 3"/>
           <p:cNvSpPr/>
           <p:nvPr/>
         </p:nvSpPr>
@@ -15473,7 +15481,7 @@
       </p:sp>
       <p:sp>
         <p:nvSpPr>
-          <p:cNvPr id="7" name="Text 4"/>
+          <p:cNvPr id="8" name="Text 4"/>
           <p:cNvSpPr/>
           <p:nvPr/>
         </p:nvSpPr>
@@ -15512,7 +15520,7 @@
       </p:sp>
       <p:sp>
         <p:nvSpPr>
-          <p:cNvPr id="8" name="Text 5"/>
+          <p:cNvPr id="9" name="Text 5"/>
           <p:cNvSpPr/>
           <p:nvPr/>
         </p:nvSpPr>
@@ -15612,7 +15620,7 @@
       </p:sp>
       <p:sp>
         <p:nvSpPr>
-          <p:cNvPr id="9" name="Shape 6"/>
+          <p:cNvPr id="10" name="Shape 6"/>
           <p:cNvSpPr/>
           <p:nvPr/>
         </p:nvSpPr>
@@ -15634,7 +15642,7 @@
       </p:sp>
       <p:sp>
         <p:nvSpPr>
-          <p:cNvPr id="10" name="Text 7"/>
+          <p:cNvPr id="11" name="Text 7"/>
           <p:cNvSpPr/>
           <p:nvPr/>
         </p:nvSpPr>
@@ -15673,7 +15681,7 @@
       </p:sp>
       <p:sp>
         <p:nvSpPr>
-          <p:cNvPr id="11" name="Text 8"/>
+          <p:cNvPr id="12" name="Text 8"/>
           <p:cNvSpPr/>
           <p:nvPr/>
         </p:nvSpPr>
@@ -15744,7 +15752,7 @@
       </p:sp>
       <p:sp>
         <p:nvSpPr>
-          <p:cNvPr id="12" name="Shape 9"/>
+          <p:cNvPr id="13" name="Shape 9"/>
           <p:cNvSpPr/>
           <p:nvPr/>
         </p:nvSpPr>
@@ -15771,7 +15779,7 @@
       </p:sp>
       <p:sp>
         <p:nvSpPr>
-          <p:cNvPr id="13" name="Text 10"/>
+          <p:cNvPr id="14" name="Text 10"/>
           <p:cNvSpPr/>
           <p:nvPr/>
         </p:nvSpPr>
@@ -15810,7 +15818,7 @@
       </p:sp>
       <p:sp>
         <p:nvSpPr>
-          <p:cNvPr id="14" name="Text 11"/>
+          <p:cNvPr id="15" name="Text 11"/>
           <p:cNvSpPr/>
           <p:nvPr/>
         </p:nvSpPr>
@@ -16576,7 +16584,7 @@
       </p:pic>
       <p:sp>
         <p:nvSpPr>
-          <p:cNvPr id="6" name="Shape 3"/>
+          <p:cNvPr id="7" name="Shape 3"/>
           <p:cNvSpPr/>
           <p:nvPr/>
         </p:nvSpPr>
@@ -16603,7 +16611,7 @@
       </p:sp>
       <p:sp>
         <p:nvSpPr>
-          <p:cNvPr id="7" name="Shape 4"/>
+          <p:cNvPr id="8" name="Shape 4"/>
           <p:cNvSpPr/>
           <p:nvPr/>
         </p:nvSpPr>
@@ -16623,7 +16631,7 @@
       </p:sp>
       <p:sp>
         <p:nvSpPr>
-          <p:cNvPr id="8" name="Text 5"/>
+          <p:cNvPr id="9" name="Text 5"/>
           <p:cNvSpPr/>
           <p:nvPr/>
         </p:nvSpPr>
@@ -16662,7 +16670,7 @@
       </p:sp>
       <p:sp>
         <p:nvSpPr>
-          <p:cNvPr id="9" name="Text 6"/>
+          <p:cNvPr id="10" name="Text 6"/>
           <p:cNvSpPr/>
           <p:nvPr/>
         </p:nvSpPr>
@@ -16701,7 +16709,7 @@
       </p:sp>
       <p:sp>
         <p:nvSpPr>
-          <p:cNvPr id="10" name="Shape 7"/>
+          <p:cNvPr id="11" name="Shape 7"/>
           <p:cNvSpPr/>
           <p:nvPr/>
         </p:nvSpPr>
@@ -16728,7 +16736,7 @@
       </p:sp>
       <p:sp>
         <p:nvSpPr>
-          <p:cNvPr id="11" name="Shape 8"/>
+          <p:cNvPr id="12" name="Shape 8"/>
           <p:cNvSpPr/>
           <p:nvPr/>
         </p:nvSpPr>
@@ -16748,7 +16756,7 @@
       </p:sp>
       <p:sp>
         <p:nvSpPr>
-          <p:cNvPr id="12" name="Text 9"/>
+          <p:cNvPr id="13" name="Text 9"/>
           <p:cNvSpPr/>
           <p:nvPr/>
         </p:nvSpPr>
@@ -16787,7 +16795,7 @@
       </p:sp>
       <p:sp>
         <p:nvSpPr>
-          <p:cNvPr id="13" name="Text 10"/>
+          <p:cNvPr id="14" name="Text 10"/>
           <p:cNvSpPr/>
           <p:nvPr/>
         </p:nvSpPr>
@@ -16826,7 +16834,7 @@
       </p:sp>
       <p:sp>
         <p:nvSpPr>
-          <p:cNvPr id="14" name="Shape 11"/>
+          <p:cNvPr id="15" name="Shape 11"/>
           <p:cNvSpPr/>
           <p:nvPr/>
         </p:nvSpPr>
@@ -16853,7 +16861,7 @@
       </p:sp>
       <p:sp>
         <p:nvSpPr>
-          <p:cNvPr id="15" name="Shape 12"/>
+          <p:cNvPr id="16" name="Shape 12"/>
           <p:cNvSpPr/>
           <p:nvPr/>
         </p:nvSpPr>
@@ -16873,7 +16881,7 @@
       </p:sp>
       <p:sp>
         <p:nvSpPr>
-          <p:cNvPr id="16" name="Text 13"/>
+          <p:cNvPr id="17" name="Text 13"/>
           <p:cNvSpPr/>
           <p:nvPr/>
         </p:nvSpPr>
@@ -16912,7 +16920,7 @@
       </p:sp>
       <p:sp>
         <p:nvSpPr>
-          <p:cNvPr id="17" name="Text 14"/>
+          <p:cNvPr id="18" name="Text 14"/>
           <p:cNvSpPr/>
           <p:nvPr/>
         </p:nvSpPr>
@@ -16951,7 +16959,7 @@
       </p:sp>
       <p:sp>
         <p:nvSpPr>
-          <p:cNvPr id="18" name="Shape 15"/>
+          <p:cNvPr id="19" name="Shape 15"/>
           <p:cNvSpPr/>
           <p:nvPr/>
         </p:nvSpPr>
@@ -16978,7 +16986,7 @@
       </p:sp>
       <p:sp>
         <p:nvSpPr>
-          <p:cNvPr id="19" name="Shape 16"/>
+          <p:cNvPr id="20" name="Shape 16"/>
           <p:cNvSpPr/>
           <p:nvPr/>
         </p:nvSpPr>
@@ -16998,7 +17006,7 @@
       </p:sp>
       <p:sp>
         <p:nvSpPr>
-          <p:cNvPr id="20" name="Text 17"/>
+          <p:cNvPr id="21" name="Text 17"/>
           <p:cNvSpPr/>
           <p:nvPr/>
         </p:nvSpPr>
@@ -17037,7 +17045,7 @@
       </p:sp>
       <p:sp>
         <p:nvSpPr>
-          <p:cNvPr id="21" name="Text 18"/>
+          <p:cNvPr id="22" name="Text 18"/>
           <p:cNvSpPr/>
           <p:nvPr/>
         </p:nvSpPr>
@@ -17076,7 +17084,7 @@
       </p:sp>
       <p:sp>
         <p:nvSpPr>
-          <p:cNvPr id="22" name="Shape 19"/>
+          <p:cNvPr id="23" name="Shape 19"/>
           <p:cNvSpPr/>
           <p:nvPr/>
         </p:nvSpPr>
@@ -17103,7 +17111,7 @@
       </p:sp>
       <p:sp>
         <p:nvSpPr>
-          <p:cNvPr id="23" name="Shape 20"/>
+          <p:cNvPr id="24" name="Shape 20"/>
           <p:cNvSpPr/>
           <p:nvPr/>
         </p:nvSpPr>
@@ -17123,7 +17131,7 @@
       </p:sp>
       <p:sp>
         <p:nvSpPr>
-          <p:cNvPr id="24" name="Text 21"/>
+          <p:cNvPr id="25" name="Text 21"/>
           <p:cNvSpPr/>
           <p:nvPr/>
         </p:nvSpPr>
@@ -17162,7 +17170,7 @@
       </p:sp>
       <p:sp>
         <p:nvSpPr>
-          <p:cNvPr id="25" name="Text 22"/>
+          <p:cNvPr id="26" name="Text 22"/>
           <p:cNvSpPr/>
           <p:nvPr/>
         </p:nvSpPr>
@@ -17201,7 +17209,7 @@
       </p:sp>
       <p:sp>
         <p:nvSpPr>
-          <p:cNvPr id="26" name="Shape 23"/>
+          <p:cNvPr id="27" name="Shape 23"/>
           <p:cNvSpPr/>
           <p:nvPr/>
         </p:nvSpPr>
@@ -17228,7 +17236,7 @@
       </p:sp>
       <p:sp>
         <p:nvSpPr>
-          <p:cNvPr id="27" name="Shape 24"/>
+          <p:cNvPr id="28" name="Shape 24"/>
           <p:cNvSpPr/>
           <p:nvPr/>
         </p:nvSpPr>
@@ -17248,7 +17256,7 @@
       </p:sp>
       <p:sp>
         <p:nvSpPr>
-          <p:cNvPr id="28" name="Text 25"/>
+          <p:cNvPr id="29" name="Text 25"/>
           <p:cNvSpPr/>
           <p:nvPr/>
         </p:nvSpPr>
@@ -17287,7 +17295,7 @@
       </p:sp>
       <p:sp>
         <p:nvSpPr>
-          <p:cNvPr id="29" name="Text 26"/>
+          <p:cNvPr id="30" name="Text 26"/>
           <p:cNvSpPr/>
           <p:nvPr/>
         </p:nvSpPr>
@@ -17326,7 +17334,7 @@
       </p:sp>
       <p:sp>
         <p:nvSpPr>
-          <p:cNvPr id="30" name="Shape 27"/>
+          <p:cNvPr id="31" name="Shape 27"/>
           <p:cNvSpPr/>
           <p:nvPr/>
         </p:nvSpPr>
@@ -17353,7 +17361,7 @@
       </p:sp>
       <p:sp>
         <p:nvSpPr>
-          <p:cNvPr id="31" name="Shape 28"/>
+          <p:cNvPr id="32" name="Shape 28"/>
           <p:cNvSpPr/>
           <p:nvPr/>
         </p:nvSpPr>
@@ -17373,7 +17381,7 @@
       </p:sp>
       <p:sp>
         <p:nvSpPr>
-          <p:cNvPr id="32" name="Text 29"/>
+          <p:cNvPr id="33" name="Text 29"/>
           <p:cNvSpPr/>
           <p:nvPr/>
         </p:nvSpPr>
@@ -17412,7 +17420,7 @@
       </p:sp>
       <p:sp>
         <p:nvSpPr>
-          <p:cNvPr id="33" name="Text 30"/>
+          <p:cNvPr id="34" name="Text 30"/>
           <p:cNvSpPr/>
           <p:nvPr/>
         </p:nvSpPr>
@@ -17451,7 +17459,7 @@
       </p:sp>
       <p:sp>
         <p:nvSpPr>
-          <p:cNvPr id="34" name="Shape 31"/>
+          <p:cNvPr id="35" name="Shape 31"/>
           <p:cNvSpPr/>
           <p:nvPr/>
         </p:nvSpPr>
@@ -17473,7 +17481,7 @@
       </p:sp>
       <p:sp>
         <p:nvSpPr>
-          <p:cNvPr id="35" name="Shape 32"/>
+          <p:cNvPr id="36" name="Shape 32"/>
           <p:cNvSpPr/>
           <p:nvPr/>
         </p:nvSpPr>
@@ -17493,7 +17501,7 @@
       </p:sp>
       <p:sp>
         <p:nvSpPr>
-          <p:cNvPr id="36" name="Text 33"/>
+          <p:cNvPr id="37" name="Text 33"/>
           <p:cNvSpPr/>
           <p:nvPr/>
         </p:nvSpPr>
@@ -17532,7 +17540,7 @@
       </p:sp>
       <p:sp>
         <p:nvSpPr>
-          <p:cNvPr id="37" name="Text 34"/>
+          <p:cNvPr id="38" name="Text 34"/>
           <p:cNvSpPr/>
           <p:nvPr/>
         </p:nvSpPr>
@@ -17571,7 +17579,7 @@
       </p:sp>
       <p:sp>
         <p:nvSpPr>
-          <p:cNvPr id="38" name="Shape 35"/>
+          <p:cNvPr id="39" name="Shape 35"/>
           <p:cNvSpPr/>
           <p:nvPr/>
         </p:nvSpPr>
@@ -17598,7 +17606,7 @@
       </p:sp>
       <p:sp>
         <p:nvSpPr>
-          <p:cNvPr id="39" name="Shape 36"/>
+          <p:cNvPr id="40" name="Shape 36"/>
           <p:cNvSpPr/>
           <p:nvPr/>
         </p:nvSpPr>
@@ -17618,7 +17626,7 @@
       </p:sp>
       <p:sp>
         <p:nvSpPr>
-          <p:cNvPr id="40" name="Text 37"/>
+          <p:cNvPr id="41" name="Text 37"/>
           <p:cNvSpPr/>
           <p:nvPr/>
         </p:nvSpPr>
@@ -17657,7 +17665,7 @@
       </p:sp>
       <p:sp>
         <p:nvSpPr>
-          <p:cNvPr id="41" name="Text 38"/>
+          <p:cNvPr id="42" name="Text 38"/>
           <p:cNvSpPr/>
           <p:nvPr/>
         </p:nvSpPr>
@@ -17696,7 +17704,7 @@
       </p:sp>
       <p:sp>
         <p:nvSpPr>
-          <p:cNvPr id="42" name="Shape 39"/>
+          <p:cNvPr id="43" name="Shape 39"/>
           <p:cNvSpPr/>
           <p:nvPr/>
         </p:nvSpPr>
@@ -17723,7 +17731,7 @@
       </p:sp>
       <p:sp>
         <p:nvSpPr>
-          <p:cNvPr id="43" name="Shape 40"/>
+          <p:cNvPr id="44" name="Shape 40"/>
           <p:cNvSpPr/>
           <p:nvPr/>
         </p:nvSpPr>
@@ -17743,7 +17751,7 @@
       </p:sp>
       <p:sp>
         <p:nvSpPr>
-          <p:cNvPr id="44" name="Text 41"/>
+          <p:cNvPr id="45" name="Text 41"/>
           <p:cNvSpPr/>
           <p:nvPr/>
         </p:nvSpPr>
@@ -17782,7 +17790,7 @@
       </p:sp>
       <p:sp>
         <p:nvSpPr>
-          <p:cNvPr id="45" name="Text 42"/>
+          <p:cNvPr id="46" name="Text 42"/>
           <p:cNvSpPr/>
           <p:nvPr/>
         </p:nvSpPr>
@@ -17821,7 +17829,7 @@
       </p:sp>
       <p:sp>
         <p:nvSpPr>
-          <p:cNvPr id="46" name="Shape 43"/>
+          <p:cNvPr id="47" name="Shape 43"/>
           <p:cNvSpPr/>
           <p:nvPr/>
         </p:nvSpPr>
@@ -17848,7 +17856,7 @@
       </p:sp>
       <p:sp>
         <p:nvSpPr>
-          <p:cNvPr id="47" name="Text 44"/>
+          <p:cNvPr id="48" name="Text 44"/>
           <p:cNvSpPr/>
           <p:nvPr/>
         </p:nvSpPr>
@@ -18136,7 +18144,7 @@
       </p:pic>
       <p:sp>
         <p:nvSpPr>
-          <p:cNvPr id="7" name="Shape 4"/>
+          <p:cNvPr id="8" name="Shape 4"/>
           <p:cNvSpPr/>
           <p:nvPr/>
         </p:nvSpPr>
@@ -18163,7 +18171,7 @@
       </p:sp>
       <p:sp>
         <p:nvSpPr>
-          <p:cNvPr id="8" name="Text 5"/>
+          <p:cNvPr id="9" name="Text 5"/>
           <p:cNvSpPr/>
           <p:nvPr/>
         </p:nvSpPr>
@@ -18202,7 +18210,7 @@
       </p:sp>
       <p:sp>
         <p:nvSpPr>
-          <p:cNvPr id="9" name="Text 6"/>
+          <p:cNvPr id="10" name="Text 6"/>
           <p:cNvSpPr/>
           <p:nvPr/>
         </p:nvSpPr>
@@ -18244,7 +18252,7 @@
       </p:sp>
       <p:sp>
         <p:nvSpPr>
-          <p:cNvPr id="10" name="Shape 7"/>
+          <p:cNvPr id="11" name="Shape 7"/>
           <p:cNvSpPr/>
           <p:nvPr/>
         </p:nvSpPr>
@@ -18271,7 +18279,7 @@
       </p:sp>
       <p:sp>
         <p:nvSpPr>
-          <p:cNvPr id="11" name="Text 8"/>
+          <p:cNvPr id="12" name="Text 8"/>
           <p:cNvSpPr/>
           <p:nvPr/>
         </p:nvSpPr>
@@ -18310,7 +18318,7 @@
       </p:sp>
       <p:sp>
         <p:nvSpPr>
-          <p:cNvPr id="12" name="Text 9"/>
+          <p:cNvPr id="13" name="Text 9"/>
           <p:cNvSpPr/>
           <p:nvPr/>
         </p:nvSpPr>
@@ -18352,7 +18360,7 @@
       </p:sp>
       <p:sp>
         <p:nvSpPr>
-          <p:cNvPr id="13" name="Shape 10"/>
+          <p:cNvPr id="14" name="Shape 10"/>
           <p:cNvSpPr/>
           <p:nvPr/>
         </p:nvSpPr>
@@ -18379,7 +18387,7 @@
       </p:sp>
       <p:sp>
         <p:nvSpPr>
-          <p:cNvPr id="14" name="Text 11"/>
+          <p:cNvPr id="15" name="Text 11"/>
           <p:cNvSpPr/>
           <p:nvPr/>
         </p:nvSpPr>
@@ -18418,7 +18426,7 @@
       </p:sp>
       <p:sp>
         <p:nvSpPr>
-          <p:cNvPr id="15" name="Text 12"/>
+          <p:cNvPr id="16" name="Text 12"/>
           <p:cNvSpPr/>
           <p:nvPr/>
         </p:nvSpPr>
@@ -18460,7 +18468,7 @@
       </p:sp>
       <p:sp>
         <p:nvSpPr>
-          <p:cNvPr id="16" name="Shape 13"/>
+          <p:cNvPr id="17" name="Shape 13"/>
           <p:cNvSpPr/>
           <p:nvPr/>
         </p:nvSpPr>
@@ -18487,7 +18495,7 @@
       </p:sp>
       <p:sp>
         <p:nvSpPr>
-          <p:cNvPr id="17" name="Text 14"/>
+          <p:cNvPr id="18" name="Text 14"/>
           <p:cNvSpPr/>
           <p:nvPr/>
         </p:nvSpPr>
@@ -18526,7 +18534,7 @@
       </p:sp>
       <p:sp>
         <p:nvSpPr>
-          <p:cNvPr id="18" name="Text 15"/>
+          <p:cNvPr id="19" name="Text 15"/>
           <p:cNvSpPr/>
           <p:nvPr/>
         </p:nvSpPr>
@@ -18568,7 +18576,7 @@
       </p:sp>
       <p:sp>
         <p:nvSpPr>
-          <p:cNvPr id="19" name="Shape 16"/>
+          <p:cNvPr id="20" name="Shape 16"/>
           <p:cNvSpPr/>
           <p:nvPr/>
         </p:nvSpPr>
@@ -18595,7 +18603,7 @@
       </p:sp>
       <p:sp>
         <p:nvSpPr>
-          <p:cNvPr id="20" name="Text 17"/>
+          <p:cNvPr id="21" name="Text 17"/>
           <p:cNvSpPr/>
           <p:nvPr/>
         </p:nvSpPr>
@@ -18634,7 +18642,7 @@
       </p:sp>
       <p:sp>
         <p:nvSpPr>
-          <p:cNvPr id="21" name="Text 18"/>
+          <p:cNvPr id="22" name="Text 18"/>
           <p:cNvSpPr/>
           <p:nvPr/>
         </p:nvSpPr>
@@ -18676,7 +18684,7 @@
       </p:sp>
       <p:sp>
         <p:nvSpPr>
-          <p:cNvPr id="22" name="Shape 19"/>
+          <p:cNvPr id="23" name="Shape 19"/>
           <p:cNvSpPr/>
           <p:nvPr/>
         </p:nvSpPr>
@@ -18703,7 +18711,7 @@
       </p:sp>
       <p:sp>
         <p:nvSpPr>
-          <p:cNvPr id="23" name="Text 20"/>
+          <p:cNvPr id="24" name="Text 20"/>
           <p:cNvSpPr/>
           <p:nvPr/>
         </p:nvSpPr>
@@ -18742,7 +18750,7 @@
       </p:sp>
       <p:sp>
         <p:nvSpPr>
-          <p:cNvPr id="24" name="Text 21"/>
+          <p:cNvPr id="25" name="Text 21"/>
           <p:cNvSpPr/>
           <p:nvPr/>
         </p:nvSpPr>
@@ -18784,7 +18792,7 @@
       </p:sp>
       <p:sp>
         <p:nvSpPr>
-          <p:cNvPr id="25" name="Shape 22"/>
+          <p:cNvPr id="26" name="Shape 22"/>
           <p:cNvSpPr/>
           <p:nvPr/>
         </p:nvSpPr>
@@ -18811,7 +18819,7 @@
       </p:sp>
       <p:sp>
         <p:nvSpPr>
-          <p:cNvPr id="26" name="Text 23"/>
+          <p:cNvPr id="27" name="Text 23"/>
           <p:cNvSpPr/>
           <p:nvPr/>
         </p:nvSpPr>
@@ -19096,7 +19104,7 @@
       </p:pic>
       <p:sp>
         <p:nvSpPr>
-          <p:cNvPr id="7" name="Shape 4"/>
+          <p:cNvPr id="8" name="Shape 4"/>
           <p:cNvSpPr/>
           <p:nvPr/>
         </p:nvSpPr>
@@ -19118,7 +19126,7 @@
       </p:sp>
       <p:sp>
         <p:nvSpPr>
-          <p:cNvPr id="8" name="Text 5"/>
+          <p:cNvPr id="9" name="Text 5"/>
           <p:cNvSpPr/>
           <p:nvPr/>
         </p:nvSpPr>
@@ -19157,7 +19165,7 @@
       </p:sp>
       <p:sp>
         <p:nvSpPr>
-          <p:cNvPr id="9" name="Text 6"/>
+          <p:cNvPr id="10" name="Text 6"/>
           <p:cNvSpPr/>
           <p:nvPr/>
         </p:nvSpPr>
@@ -19196,7 +19204,7 @@
       </p:sp>
       <p:sp>
         <p:nvSpPr>
-          <p:cNvPr id="10" name="Shape 7"/>
+          <p:cNvPr id="11" name="Shape 7"/>
           <p:cNvSpPr/>
           <p:nvPr/>
         </p:nvSpPr>
@@ -19218,7 +19226,7 @@
       </p:sp>
       <p:sp>
         <p:nvSpPr>
-          <p:cNvPr id="11" name="Text 8"/>
+          <p:cNvPr id="12" name="Text 8"/>
           <p:cNvSpPr/>
           <p:nvPr/>
         </p:nvSpPr>
@@ -19257,7 +19265,7 @@
       </p:sp>
       <p:sp>
         <p:nvSpPr>
-          <p:cNvPr id="12" name="Text 9"/>
+          <p:cNvPr id="13" name="Text 9"/>
           <p:cNvSpPr/>
           <p:nvPr/>
         </p:nvSpPr>
@@ -19296,7 +19304,7 @@
       </p:sp>
       <p:sp>
         <p:nvSpPr>
-          <p:cNvPr id="13" name="Shape 10"/>
+          <p:cNvPr id="14" name="Shape 10"/>
           <p:cNvSpPr/>
           <p:nvPr/>
         </p:nvSpPr>
@@ -19318,7 +19326,7 @@
       </p:sp>
       <p:sp>
         <p:nvSpPr>
-          <p:cNvPr id="14" name="Text 11"/>
+          <p:cNvPr id="15" name="Text 11"/>
           <p:cNvSpPr/>
           <p:nvPr/>
         </p:nvSpPr>
@@ -19357,7 +19365,7 @@
       </p:sp>
       <p:sp>
         <p:nvSpPr>
-          <p:cNvPr id="15" name="Text 12"/>
+          <p:cNvPr id="16" name="Text 12"/>
           <p:cNvSpPr/>
           <p:nvPr/>
         </p:nvSpPr>
@@ -19391,7 +19399,7 @@
                 <a:ea typeface="Montserrat" pitchFamily="34" charset="-122"/>
                 <a:cs typeface="Montserrat" pitchFamily="34" charset="-120"/>
               </a:rPr>
-              <a:t>«Ну, кеш же є, значить економимо». Скільки? На яких запитах? Чи не віддаємо застаріле після зміни промпта? Без цифр кеш — талісман, а не механізм.</a:t>
+              <a:t>«Кеш же є, значить економимо». Скільки? На яких запитах? Без цифр — талісман.</a:t>
             </a:r>
             <a:endParaRPr lang="en-US" sz="1300" dirty="0"/>
           </a:p>
@@ -19399,7 +19407,7 @@
       </p:sp>
       <p:sp>
         <p:nvSpPr>
-          <p:cNvPr id="16" name="Shape 13"/>
+          <p:cNvPr id="17" name="Shape 13"/>
           <p:cNvSpPr/>
           <p:nvPr/>
         </p:nvSpPr>
@@ -19421,7 +19429,7 @@
       </p:sp>
       <p:sp>
         <p:nvSpPr>
-          <p:cNvPr id="17" name="Text 14"/>
+          <p:cNvPr id="18" name="Text 14"/>
           <p:cNvSpPr/>
           <p:nvPr/>
         </p:nvSpPr>
@@ -19460,7 +19468,7 @@
       </p:sp>
       <p:sp>
         <p:nvSpPr>
-          <p:cNvPr id="18" name="Text 15"/>
+          <p:cNvPr id="19" name="Text 15"/>
           <p:cNvSpPr/>
           <p:nvPr/>
         </p:nvSpPr>
@@ -19494,7 +19502,7 @@
                 <a:ea typeface="Montserrat" pitchFamily="34" charset="-122"/>
                 <a:cs typeface="Montserrat" pitchFamily="34" charset="-120"/>
               </a:rPr>
-              <a:t>Лічильники hit/miss з'являються разом із кешем: в один урок і в один діф. Кеш без метрики — віра, а не інженерія.</a:t>
+              <a:t>Лічильники hit/miss — в один урок і в один діф із кешем. Інакше це віра.</a:t>
             </a:r>
             <a:endParaRPr lang="en-US" sz="1300" dirty="0"/>
           </a:p>
@@ -19666,7 +19674,7 @@
         </p:nvSpPr>
         <p:spPr>
           <a:xfrm>
-            <a:off x="1280160" y="1024128"/>
+            <a:off x="1280160" y="1193140"/>
             <a:ext cx="777240" cy="256032"/>
           </a:xfrm>
           <a:prstGeom prst="roundRect">
@@ -19688,7 +19696,7 @@
         </p:nvSpPr>
         <p:spPr>
           <a:xfrm>
-            <a:off x="1280160" y="1024128"/>
+            <a:off x="1280160" y="1193140"/>
             <a:ext cx="777240" cy="256032"/>
           </a:xfrm>
           <a:prstGeom prst="rect">
@@ -19745,7 +19753,7 @@
       </p:pic>
       <p:sp>
         <p:nvSpPr>
-          <p:cNvPr id="7" name="Shape 4"/>
+          <p:cNvPr id="8" name="Shape 4"/>
           <p:cNvSpPr/>
           <p:nvPr/>
         </p:nvSpPr>
@@ -19767,7 +19775,7 @@
       </p:sp>
       <p:sp>
         <p:nvSpPr>
-          <p:cNvPr id="8" name="Text 5"/>
+          <p:cNvPr id="9" name="Text 5"/>
           <p:cNvSpPr/>
           <p:nvPr/>
         </p:nvSpPr>
@@ -19806,7 +19814,7 @@
       </p:sp>
       <p:sp>
         <p:nvSpPr>
-          <p:cNvPr id="9" name="Text 6"/>
+          <p:cNvPr id="10" name="Text 6"/>
           <p:cNvSpPr/>
           <p:nvPr/>
         </p:nvSpPr>
@@ -19840,7 +19848,7 @@
                 <a:ea typeface="Montserrat" pitchFamily="34" charset="-122"/>
                 <a:cs typeface="Montserrat" pitchFamily="34" charset="-120"/>
               </a:rPr>
-              <a:t>детермінована (завжди відповідаємо так) і не-персональна: «Як скинути пароль?», «Які у вас тарифи?»</a:t>
+              <a:t>детермінована і не-персональна: «Як скинути пароль?», «Які тарифи?»</a:t>
             </a:r>
             <a:endParaRPr lang="en-US" sz="1200" dirty="0"/>
           </a:p>
@@ -19848,7 +19856,7 @@
       </p:sp>
       <p:sp>
         <p:nvSpPr>
-          <p:cNvPr id="10" name="Shape 7"/>
+          <p:cNvPr id="11" name="Shape 7"/>
           <p:cNvSpPr/>
           <p:nvPr/>
         </p:nvSpPr>
@@ -19870,7 +19878,7 @@
       </p:sp>
       <p:sp>
         <p:nvSpPr>
-          <p:cNvPr id="11" name="Text 8"/>
+          <p:cNvPr id="12" name="Text 8"/>
           <p:cNvSpPr/>
           <p:nvPr/>
         </p:nvSpPr>
@@ -19909,7 +19917,7 @@
       </p:sp>
       <p:sp>
         <p:nvSpPr>
-          <p:cNvPr id="12" name="Text 9"/>
+          <p:cNvPr id="13" name="Text 9"/>
           <p:cNvSpPr/>
           <p:nvPr/>
         </p:nvSpPr>
@@ -19951,7 +19959,7 @@
       </p:sp>
       <p:sp>
         <p:nvSpPr>
-          <p:cNvPr id="13" name="Shape 10"/>
+          <p:cNvPr id="14" name="Shape 10"/>
           <p:cNvSpPr/>
           <p:nvPr/>
         </p:nvSpPr>
@@ -19973,7 +19981,7 @@
       </p:sp>
       <p:sp>
         <p:nvSpPr>
-          <p:cNvPr id="14" name="Text 11"/>
+          <p:cNvPr id="15" name="Text 11"/>
           <p:cNvSpPr/>
           <p:nvPr/>
         </p:nvSpPr>
@@ -20012,7 +20020,7 @@
       </p:sp>
       <p:sp>
         <p:nvSpPr>
-          <p:cNvPr id="15" name="Text 12"/>
+          <p:cNvPr id="16" name="Text 12"/>
           <p:cNvSpPr/>
           <p:nvPr/>
         </p:nvSpPr>
@@ -20054,7 +20062,7 @@
       </p:sp>
       <p:sp>
         <p:nvSpPr>
-          <p:cNvPr id="16" name="Shape 13"/>
+          <p:cNvPr id="17" name="Shape 13"/>
           <p:cNvSpPr/>
           <p:nvPr/>
         </p:nvSpPr>
@@ -20076,7 +20084,7 @@
       </p:sp>
       <p:sp>
         <p:nvSpPr>
-          <p:cNvPr id="17" name="Text 14"/>
+          <p:cNvPr id="18" name="Text 14"/>
           <p:cNvSpPr/>
           <p:nvPr/>
         </p:nvSpPr>
@@ -20115,7 +20123,7 @@
       </p:sp>
       <p:sp>
         <p:nvSpPr>
-          <p:cNvPr id="18" name="Text 15"/>
+          <p:cNvPr id="19" name="Text 15"/>
           <p:cNvSpPr/>
           <p:nvPr/>
         </p:nvSpPr>
@@ -20157,7 +20165,7 @@
       </p:sp>
       <p:sp>
         <p:nvSpPr>
-          <p:cNvPr id="19" name="Shape 16"/>
+          <p:cNvPr id="20" name="Shape 16"/>
           <p:cNvSpPr/>
           <p:nvPr/>
         </p:nvSpPr>
@@ -20179,7 +20187,7 @@
       </p:sp>
       <p:sp>
         <p:nvSpPr>
-          <p:cNvPr id="20" name="Text 17"/>
+          <p:cNvPr id="21" name="Text 17"/>
           <p:cNvSpPr/>
           <p:nvPr/>
         </p:nvSpPr>
@@ -20218,7 +20226,7 @@
       </p:sp>
       <p:sp>
         <p:nvSpPr>
-          <p:cNvPr id="21" name="Text 18"/>
+          <p:cNvPr id="22" name="Text 18"/>
           <p:cNvSpPr/>
           <p:nvPr/>
         </p:nvSpPr>
@@ -20252,7 +20260,7 @@
                 <a:ea typeface="Montserrat" pitchFamily="34" charset="-122"/>
                 <a:cs typeface="Montserrat" pitchFamily="34" charset="-120"/>
               </a:rPr>
-              <a:t>Наш кеш прибирає виклик цілком. Кеш префікса у провайдера (урок 4) здешевлює виклик зсередини. Вони складаються.</a:t>
+              <a:t>Наш кеш прибирає виклик; кеш префікса здешевлює його зсередини. Складаються.</a:t>
             </a:r>
             <a:endParaRPr lang="en-US" sz="1300" dirty="0"/>
           </a:p>
@@ -20260,7 +20268,7 @@
       </p:sp>
       <p:sp>
         <p:nvSpPr>
-          <p:cNvPr id="22" name="Shape 19"/>
+          <p:cNvPr id="23" name="Shape 19"/>
           <p:cNvSpPr/>
           <p:nvPr/>
         </p:nvSpPr>
@@ -20287,7 +20295,7 @@
       </p:sp>
       <p:sp>
         <p:nvSpPr>
-          <p:cNvPr id="23" name="Text 20"/>
+          <p:cNvPr id="24" name="Text 20"/>
           <p:cNvSpPr/>
           <p:nvPr/>
         </p:nvSpPr>
@@ -20493,7 +20501,7 @@
         </p:nvSpPr>
         <p:spPr>
           <a:xfrm>
-            <a:off x="1280160" y="1024128"/>
+            <a:off x="1280160" y="1193140"/>
             <a:ext cx="777240" cy="256032"/>
           </a:xfrm>
           <a:prstGeom prst="roundRect">
@@ -20515,7 +20523,7 @@
         </p:nvSpPr>
         <p:spPr>
           <a:xfrm>
-            <a:off x="1280160" y="1024128"/>
+            <a:off x="1280160" y="1193140"/>
             <a:ext cx="777240" cy="256032"/>
           </a:xfrm>
           <a:prstGeom prst="rect">
@@ -20572,7 +20580,7 @@
       </p:pic>
       <p:sp>
         <p:nvSpPr>
-          <p:cNvPr id="7" name="Shape 4"/>
+          <p:cNvPr id="8" name="Shape 4"/>
           <p:cNvSpPr/>
           <p:nvPr/>
         </p:nvSpPr>
@@ -20599,7 +20607,7 @@
       </p:sp>
       <p:sp>
         <p:nvSpPr>
-          <p:cNvPr id="8" name="Text 5"/>
+          <p:cNvPr id="9" name="Text 5"/>
           <p:cNvSpPr/>
           <p:nvPr/>
         </p:nvSpPr>
@@ -20675,7 +20683,7 @@
       </p:sp>
       <p:sp>
         <p:nvSpPr>
-          <p:cNvPr id="9" name="Shape 6"/>
+          <p:cNvPr id="10" name="Shape 6"/>
           <p:cNvSpPr/>
           <p:nvPr/>
         </p:nvSpPr>
@@ -20697,7 +20705,7 @@
       </p:sp>
       <p:sp>
         <p:nvSpPr>
-          <p:cNvPr id="10" name="Text 7"/>
+          <p:cNvPr id="11" name="Text 7"/>
           <p:cNvSpPr/>
           <p:nvPr/>
         </p:nvSpPr>
@@ -20736,7 +20744,7 @@
       </p:sp>
       <p:sp>
         <p:nvSpPr>
-          <p:cNvPr id="11" name="Shape 8"/>
+          <p:cNvPr id="12" name="Shape 8"/>
           <p:cNvSpPr/>
           <p:nvPr/>
         </p:nvSpPr>
@@ -20759,7 +20767,7 @@
       </p:sp>
       <p:sp>
         <p:nvSpPr>
-          <p:cNvPr id="12" name="Shape 9"/>
+          <p:cNvPr id="13" name="Shape 9"/>
           <p:cNvSpPr/>
           <p:nvPr/>
         </p:nvSpPr>
@@ -20779,7 +20787,7 @@
       </p:sp>
       <p:sp>
         <p:nvSpPr>
-          <p:cNvPr id="13" name="Shape 10"/>
+          <p:cNvPr id="14" name="Shape 10"/>
           <p:cNvSpPr/>
           <p:nvPr/>
         </p:nvSpPr>
@@ -20801,7 +20809,7 @@
       </p:sp>
       <p:sp>
         <p:nvSpPr>
-          <p:cNvPr id="14" name="Text 11"/>
+          <p:cNvPr id="15" name="Text 11"/>
           <p:cNvSpPr/>
           <p:nvPr/>
         </p:nvSpPr>
@@ -20840,7 +20848,7 @@
       </p:sp>
       <p:sp>
         <p:nvSpPr>
-          <p:cNvPr id="15" name="Shape 12"/>
+          <p:cNvPr id="16" name="Shape 12"/>
           <p:cNvSpPr/>
           <p:nvPr/>
         </p:nvSpPr>
@@ -20863,7 +20871,7 @@
       </p:sp>
       <p:sp>
         <p:nvSpPr>
-          <p:cNvPr id="16" name="Shape 13"/>
+          <p:cNvPr id="17" name="Shape 13"/>
           <p:cNvSpPr/>
           <p:nvPr/>
         </p:nvSpPr>
@@ -20883,7 +20891,7 @@
       </p:sp>
       <p:sp>
         <p:nvSpPr>
-          <p:cNvPr id="17" name="Shape 14"/>
+          <p:cNvPr id="18" name="Shape 14"/>
           <p:cNvSpPr/>
           <p:nvPr/>
         </p:nvSpPr>
@@ -20905,7 +20913,7 @@
       </p:sp>
       <p:sp>
         <p:nvSpPr>
-          <p:cNvPr id="18" name="Text 15"/>
+          <p:cNvPr id="19" name="Text 15"/>
           <p:cNvSpPr/>
           <p:nvPr/>
         </p:nvSpPr>
@@ -20944,7 +20952,7 @@
       </p:sp>
       <p:sp>
         <p:nvSpPr>
-          <p:cNvPr id="19" name="Shape 16"/>
+          <p:cNvPr id="20" name="Shape 16"/>
           <p:cNvSpPr/>
           <p:nvPr/>
         </p:nvSpPr>
@@ -20966,7 +20974,7 @@
       </p:sp>
       <p:sp>
         <p:nvSpPr>
-          <p:cNvPr id="20" name="Text 17"/>
+          <p:cNvPr id="21" name="Text 17"/>
           <p:cNvSpPr/>
           <p:nvPr/>
         </p:nvSpPr>
@@ -21005,7 +21013,7 @@
       </p:sp>
       <p:sp>
         <p:nvSpPr>
-          <p:cNvPr id="21" name="Text 18"/>
+          <p:cNvPr id="22" name="Text 18"/>
           <p:cNvSpPr/>
           <p:nvPr/>
         </p:nvSpPr>
@@ -21039,7 +21047,7 @@
                 <a:ea typeface="Montserrat" pitchFamily="34" charset="-122"/>
                 <a:cs typeface="Montserrat" pitchFamily="34" charset="-120"/>
               </a:rPr>
-              <a:t>Promote нової версії — кеш далі віддає відповіді старої. Дзеркально і підступніше: rollback полагодив регресію, а користувачі ще годину бачать стару поведінку.</a:t>
+              <a:t>Promote — кеш ще віддає старе; rollback полагодив, а користувач бачить старе.</a:t>
             </a:r>
             <a:endParaRPr lang="en-US" sz="1300" dirty="0"/>
           </a:p>
@@ -21047,7 +21055,7 @@
       </p:sp>
       <p:sp>
         <p:nvSpPr>
-          <p:cNvPr id="22" name="Shape 19"/>
+          <p:cNvPr id="23" name="Shape 19"/>
           <p:cNvSpPr/>
           <p:nvPr/>
         </p:nvSpPr>
@@ -21069,7 +21077,7 @@
       </p:sp>
       <p:sp>
         <p:nvSpPr>
-          <p:cNvPr id="23" name="Text 20"/>
+          <p:cNvPr id="24" name="Text 20"/>
           <p:cNvSpPr/>
           <p:nvPr/>
         </p:nvSpPr>
@@ -21103,7 +21111,7 @@
                 <a:ea typeface="Montserrat" pitchFamily="34" charset="-122"/>
                 <a:cs typeface="Montserrat" pitchFamily="34" charset="-120"/>
               </a:rPr>
-              <a:t>Промпт у ключі → інвалідація автоматична: змінили версію — старі записи стали недосяжними самі.</a:t>
+              <a:t>Промпт у ключі → інвалідація автоматична: нова версія, нові записи.</a:t>
             </a:r>
             <a:endParaRPr lang="en-US" sz="1300" dirty="0"/>
           </a:p>
@@ -21275,7 +21283,7 @@
         </p:nvSpPr>
         <p:spPr>
           <a:xfrm>
-            <a:off x="1280160" y="1024128"/>
+            <a:off x="1280160" y="1193140"/>
             <a:ext cx="777240" cy="256032"/>
           </a:xfrm>
           <a:prstGeom prst="roundRect">
@@ -21297,7 +21305,7 @@
         </p:nvSpPr>
         <p:spPr>
           <a:xfrm>
-            <a:off x="1280160" y="1024128"/>
+            <a:off x="1280160" y="1193140"/>
             <a:ext cx="777240" cy="256032"/>
           </a:xfrm>
           <a:prstGeom prst="rect">
@@ -21354,7 +21362,7 @@
       </p:pic>
       <p:sp>
         <p:nvSpPr>
-          <p:cNvPr id="7" name="Shape 4"/>
+          <p:cNvPr id="8" name="Shape 4"/>
           <p:cNvSpPr/>
           <p:nvPr/>
         </p:nvSpPr>
@@ -21376,7 +21384,7 @@
       </p:sp>
       <p:sp>
         <p:nvSpPr>
-          <p:cNvPr id="8" name="Text 5"/>
+          <p:cNvPr id="9" name="Text 5"/>
           <p:cNvSpPr/>
           <p:nvPr/>
         </p:nvSpPr>
@@ -21415,7 +21423,7 @@
       </p:sp>
       <p:sp>
         <p:nvSpPr>
-          <p:cNvPr id="9" name="Text 6"/>
+          <p:cNvPr id="10" name="Text 6"/>
           <p:cNvSpPr/>
           <p:nvPr/>
         </p:nvSpPr>
@@ -21454,7 +21462,7 @@
       </p:sp>
       <p:sp>
         <p:nvSpPr>
-          <p:cNvPr id="10" name="Shape 7"/>
+          <p:cNvPr id="11" name="Shape 7"/>
           <p:cNvSpPr/>
           <p:nvPr/>
         </p:nvSpPr>
@@ -21481,7 +21489,7 @@
       </p:sp>
       <p:sp>
         <p:nvSpPr>
-          <p:cNvPr id="11" name="Text 8"/>
+          <p:cNvPr id="12" name="Text 8"/>
           <p:cNvSpPr/>
           <p:nvPr/>
         </p:nvSpPr>
@@ -21520,7 +21528,7 @@
       </p:sp>
       <p:sp>
         <p:nvSpPr>
-          <p:cNvPr id="12" name="Text 9"/>
+          <p:cNvPr id="13" name="Text 9"/>
           <p:cNvSpPr/>
           <p:nvPr/>
         </p:nvSpPr>
@@ -21559,7 +21567,7 @@
       </p:sp>
       <p:sp>
         <p:nvSpPr>
-          <p:cNvPr id="13" name="Shape 10"/>
+          <p:cNvPr id="14" name="Shape 10"/>
           <p:cNvSpPr/>
           <p:nvPr/>
         </p:nvSpPr>
@@ -21581,7 +21589,7 @@
       </p:sp>
       <p:sp>
         <p:nvSpPr>
-          <p:cNvPr id="14" name="Text 11"/>
+          <p:cNvPr id="15" name="Text 11"/>
           <p:cNvSpPr/>
           <p:nvPr/>
         </p:nvSpPr>
@@ -21620,7 +21628,7 @@
       </p:sp>
       <p:sp>
         <p:nvSpPr>
-          <p:cNvPr id="15" name="Text 12"/>
+          <p:cNvPr id="16" name="Text 12"/>
           <p:cNvSpPr/>
           <p:nvPr/>
         </p:nvSpPr>
@@ -21659,7 +21667,7 @@
       </p:sp>
       <p:sp>
         <p:nvSpPr>
-          <p:cNvPr id="16" name="Shape 13"/>
+          <p:cNvPr id="17" name="Shape 13"/>
           <p:cNvSpPr/>
           <p:nvPr/>
         </p:nvSpPr>
@@ -21681,7 +21689,7 @@
       </p:sp>
       <p:sp>
         <p:nvSpPr>
-          <p:cNvPr id="17" name="Text 14"/>
+          <p:cNvPr id="18" name="Text 14"/>
           <p:cNvSpPr/>
           <p:nvPr/>
         </p:nvSpPr>
@@ -21720,7 +21728,7 @@
       </p:sp>
       <p:sp>
         <p:nvSpPr>
-          <p:cNvPr id="18" name="Text 15"/>
+          <p:cNvPr id="19" name="Text 15"/>
           <p:cNvSpPr/>
           <p:nvPr/>
         </p:nvSpPr>
@@ -21926,7 +21934,7 @@
         </p:nvSpPr>
         <p:spPr>
           <a:xfrm>
-            <a:off x="1280160" y="1024128"/>
+            <a:off x="1280160" y="1193140"/>
             <a:ext cx="777240" cy="256032"/>
           </a:xfrm>
           <a:prstGeom prst="roundRect">
@@ -21948,7 +21956,7 @@
         </p:nvSpPr>
         <p:spPr>
           <a:xfrm>
-            <a:off x="1280160" y="1024128"/>
+            <a:off x="1280160" y="1193140"/>
             <a:ext cx="777240" cy="256032"/>
           </a:xfrm>
           <a:prstGeom prst="rect">
@@ -22005,7 +22013,7 @@
       </p:pic>
       <p:sp>
         <p:nvSpPr>
-          <p:cNvPr id="7" name="Shape 4"/>
+          <p:cNvPr id="8" name="Shape 4"/>
           <p:cNvSpPr/>
           <p:nvPr/>
         </p:nvSpPr>
@@ -22032,7 +22040,7 @@
       </p:sp>
       <p:sp>
         <p:nvSpPr>
-          <p:cNvPr id="8" name="Text 5"/>
+          <p:cNvPr id="9" name="Text 5"/>
           <p:cNvSpPr/>
           <p:nvPr/>
         </p:nvSpPr>
@@ -22234,7 +22242,7 @@
       </p:sp>
       <p:sp>
         <p:nvSpPr>
-          <p:cNvPr id="9" name="Shape 6"/>
+          <p:cNvPr id="10" name="Shape 6"/>
           <p:cNvSpPr/>
           <p:nvPr/>
         </p:nvSpPr>
@@ -22256,7 +22264,7 @@
       </p:sp>
       <p:sp>
         <p:nvSpPr>
-          <p:cNvPr id="10" name="Shape 7"/>
+          <p:cNvPr id="11" name="Shape 7"/>
           <p:cNvSpPr/>
           <p:nvPr/>
         </p:nvSpPr>
@@ -22276,7 +22284,7 @@
       </p:sp>
       <p:sp>
         <p:nvSpPr>
-          <p:cNvPr id="11" name="Text 8"/>
+          <p:cNvPr id="12" name="Text 8"/>
           <p:cNvSpPr/>
           <p:nvPr/>
         </p:nvSpPr>
@@ -22315,7 +22323,7 @@
       </p:sp>
       <p:sp>
         <p:nvSpPr>
-          <p:cNvPr id="12" name="Text 9"/>
+          <p:cNvPr id="13" name="Text 9"/>
           <p:cNvSpPr/>
           <p:nvPr/>
         </p:nvSpPr>
@@ -22354,7 +22362,7 @@
       </p:sp>
       <p:sp>
         <p:nvSpPr>
-          <p:cNvPr id="13" name="Text 10"/>
+          <p:cNvPr id="14" name="Text 10"/>
           <p:cNvSpPr/>
           <p:nvPr/>
         </p:nvSpPr>
@@ -22396,7 +22404,7 @@
       </p:sp>
       <p:sp>
         <p:nvSpPr>
-          <p:cNvPr id="14" name="Shape 11"/>
+          <p:cNvPr id="15" name="Shape 11"/>
           <p:cNvSpPr/>
           <p:nvPr/>
         </p:nvSpPr>
@@ -22418,7 +22426,7 @@
       </p:sp>
       <p:sp>
         <p:nvSpPr>
-          <p:cNvPr id="15" name="Shape 12"/>
+          <p:cNvPr id="16" name="Shape 12"/>
           <p:cNvSpPr/>
           <p:nvPr/>
         </p:nvSpPr>
@@ -22438,7 +22446,7 @@
       </p:sp>
       <p:sp>
         <p:nvSpPr>
-          <p:cNvPr id="16" name="Text 13"/>
+          <p:cNvPr id="17" name="Text 13"/>
           <p:cNvSpPr/>
           <p:nvPr/>
         </p:nvSpPr>
@@ -22477,7 +22485,7 @@
       </p:sp>
       <p:sp>
         <p:nvSpPr>
-          <p:cNvPr id="17" name="Text 14"/>
+          <p:cNvPr id="18" name="Text 14"/>
           <p:cNvSpPr/>
           <p:nvPr/>
         </p:nvSpPr>
@@ -22516,7 +22524,7 @@
       </p:sp>
       <p:sp>
         <p:nvSpPr>
-          <p:cNvPr id="18" name="Text 15"/>
+          <p:cNvPr id="19" name="Text 15"/>
           <p:cNvSpPr/>
           <p:nvPr/>
         </p:nvSpPr>
@@ -22558,7 +22566,7 @@
       </p:sp>
       <p:sp>
         <p:nvSpPr>
-          <p:cNvPr id="19" name="Shape 16"/>
+          <p:cNvPr id="20" name="Shape 16"/>
           <p:cNvSpPr/>
           <p:nvPr/>
         </p:nvSpPr>
@@ -22580,7 +22588,7 @@
       </p:sp>
       <p:sp>
         <p:nvSpPr>
-          <p:cNvPr id="20" name="Shape 17"/>
+          <p:cNvPr id="21" name="Shape 17"/>
           <p:cNvSpPr/>
           <p:nvPr/>
         </p:nvSpPr>
@@ -22600,7 +22608,7 @@
       </p:sp>
       <p:sp>
         <p:nvSpPr>
-          <p:cNvPr id="21" name="Text 18"/>
+          <p:cNvPr id="22" name="Text 18"/>
           <p:cNvSpPr/>
           <p:nvPr/>
         </p:nvSpPr>
@@ -22639,7 +22647,7 @@
       </p:sp>
       <p:sp>
         <p:nvSpPr>
-          <p:cNvPr id="22" name="Text 19"/>
+          <p:cNvPr id="23" name="Text 19"/>
           <p:cNvSpPr/>
           <p:nvPr/>
         </p:nvSpPr>
@@ -22678,7 +22686,7 @@
       </p:sp>
       <p:sp>
         <p:nvSpPr>
-          <p:cNvPr id="23" name="Text 20"/>
+          <p:cNvPr id="24" name="Text 20"/>
           <p:cNvSpPr/>
           <p:nvPr/>
         </p:nvSpPr>

--- a/docs/decks/L05.pptx
+++ b/docs/decks/L05.pptx
@@ -525,7 +525,7 @@
           <a:p>
             <a:r>
               <a:rPr lang="en-US" dirty="0"/>
-              <a:t>Вітаю на п'ятому уроці — першому уроці тижня «Кеш + tools». Минулого тижня ви навчилися бачити гроші в кожному рядку лога і маршрутизувати запити між моделями. Сьогодні додаємо третій механізм контуру вартості — кеш. Ідея проста: найшвидша і найдешевша відповідь — та, по яку взагалі не треба йти в модель. Але простота оманлива: кеш — це механізм із наслідками для коректності. Тому сьогодні ми не лише обгорнемо виклик моделі кешем, а й зберемо ключ, який не бреше після зміни промпта, увімкнемо лічильники hit/miss з першої ж хвилини — і чесно проведемо межу: що кешувати можна, що заборонено, і чому «не кешувати» — теж інженерне рішення. Наприкінці — опційний блок про semantic cache: що він дає і що приходить у комплекті. А в лабораторній ви побачите економію на власні очі — виміряну, а не заявлену.</a:t>
+              <a:t/>
             </a:r>
             <a:endParaRPr lang="en-US" dirty="0"/>
           </a:p>
@@ -613,7 +613,7 @@
           <a:p>
             <a:r>
               <a:rPr lang="en-US" dirty="0"/>
-              <a:t>Про що цей код мовчить, але про що варто пам'ятати. Перше: словник у пам'яті росте необмежено — кожне нове унікальне питання додає запис назавжди. На нашому трафіку це неважливо; на проді кеш без стелі розміру — це повільний витік пам'яті, тому дорослі реалізації додають ліміт записів і витіснення найдавніше використаних — LRU. Це, до речі, ще один аргумент на користь винесеного сховища з блоку 07 — там ці політики вже вбудовані. Друге: два одночасні misses на той самий ключ. Обидва запити не знайдуть запису, обидва підуть у модель, обидва заплатять, і другий результат перезапише перший у кеші. Чи це баг? Ні — це усвідомлений компроміс: ми двічі заплатили за одну відповідь, але нікого не змусили чекати і не ускладнили код блокуваннями. На великому трафіку з дорогими запитами ця «дірка» має ім'я — thundering herd, коли по одному холодному ключу одночасно б'ють сотні запитів, — і рішення: лок на ключ або «запит-лідер». На нашому масштабі ліки були б дорожчі за хворобу. Знати про компроміс — обов'язково; лікувати — коли цифри скажуть.</a:t>
+              <a:t/>
             </a:r>
             <a:endParaRPr lang="en-US" dirty="0"/>
           </a:p>
@@ -701,7 +701,7 @@
           <a:p>
             <a:r>
               <a:rPr lang="en-US" dirty="0"/>
-              <a:t>Два лічильники дають першу похідну метрику курсу — hit ratio: частку запитів, які обійшлися без моделі. З неї випливають одразу три операційні цифри. Зекономлені виклики — просто кількість хітів. Помножте на середню вартість miss-запиту з лога — отримаєте економію в доларах, порахованих, а не заявлених. Latency до і після — хіт відповідає приблизно за нуль мілісекунд проти сотень мілісекунд походу в модель. Для користувача це найвідчутніший ефект. І профіль трафіку — низький hit ratio на трафіку підтримки — привід подивитися в лог: або питання справді унікальні, або ключ занадто чутливий до дрібниць формулювання. Сьогодні лічильники живуть у пам'яті: побачити їх наживо можна дебагером, а простіше — перевірити код і дочекатися консолі тижня 5, коли вони поїдуть у /observability і стануть плиткою Cache-hit. Порядок знову той самий: механізм і метрика — разом, вітрина — коли з'явиться шар вітрини. І лайфхак: перш ніж вмикати кеш, витягніть із лога топ повторюваних повідомлень. Якщо топ-10 питань — це 60% запитів, кеш окупиться в перший же день; якщо всі запити унікальні — почніть з іншого механізму.</a:t>
+              <a:t/>
             </a:r>
             <a:endParaRPr lang="en-US" dirty="0"/>
           </a:p>
@@ -789,7 +789,7 @@
           <a:p>
             <a:r>
               <a:rPr lang="en-US" dirty="0"/>
-              <a:t>Сучасний доважок до вимірювання: провайдерський кеш префікса — той, що з уроку 4, — теж перестав бути «чорною скринькою»: у полі usage сьогодні приходить частка токенів, обслужених із кешу провайдера. Тобто у вас з'являється дві метрики кешу замість однієї: ваш hit ratio — запити, що взагалі не пішли в модель, — і провайдерський: токени, що обійшлися дешевше всередині виклику. Дивитися варто на обидві: буває, що ваш кеш майже не влучає, а рахунок усе одно нижчий за очікуваний — просто тому, що системний промпт стабільний і провайдер кешує його сам. І ще одне: hit ratio — це метрика, у якої є здорові межі в обидва боки. Нуль означає, що кеш мертвий вантаж. Але і підозріло високий відсоток — привід придивитися: можливо, ви кешуєте те, що кешувати не можна, і рекордна цифра куплена ціною застарілих чи чужих відповідей. Метрика без розуміння меж — теж віра, просто з цифрою. З практики — два рішення з реальної агентної платформи, які показують обидва боки цієї медалі. Перше: усередині одного запуску агента службові виклики — дистиляція контексту, план пошуку по пам'яті — повторювалися по кілька разів; завели run-кеш із правилом «дистилюй раз, шукай раз на запуск» — і множник зайвих викликів зник. Класичний кеш, доданий по цифрах. Друге, дзеркальне: в іншому сервісі тієї ж платформи персистентний кеш свідомо прибрали — шар не виправдовував свого існування, а складність і ризик застарілих даних лишалися. «Не кешувати» — теж інженерне рішення, і ухвалюється воно тими самими цифрами, що й «кешувати».</a:t>
+              <a:t/>
             </a:r>
             <a:endParaRPr lang="en-US" dirty="0"/>
           </a:p>
@@ -877,7 +877,7 @@
           <a:p>
             <a:r>
               <a:rPr lang="en-US" dirty="0"/>
-              <a:t>Побічний ефект кешу, про який згадують рідко, а він найцікавіший. З уроку 1 ми знаємо: та сама модель на той самий вхід відповідає щоразу трохи інакше. Кеш це вимикає: перший запит зафіксував відповідь, і всі наступні однакові запити отримують рівно її. У вашій недетермінованій системі з'явився острівець повної передбачуваності. Це справжня цінність, і не лише в грошах: двоє клієнтів із тим самим питанням не отримають суперечливих інструкцій, а оператор, який передивляє діалоги, бачить стабільну поведінку, а не варіації. Кеш — найдешевший спосіб зменшити «розкид» у поведінці системи, коли він вам шкодить. Але ця сама властивість має другий бік: кеш консервує помилку. Модель один раз відповіла невдало — і тепер ця конкретна невдача роздається всім, хто спитає так само, поки не закінчиться TTL. Без кешу погана відповідь була б випадковою; з кешем вона стає систематичною. І в звітності це виглядає підступно добре: hit ratio високий, вартість низька, latency чудова — а якість просіла, бо в кеші лежить сміття. Звідси принцип: не кешуйте те, у чому не впевнені. Фільтр перед записом: відповідь дійшла нормально, не є заглушкою деградації, не є відмовою фільтра безпеки — цей механізм на тижні 4, — і не порожня. Сьогодні умова — status == 200 &amp;&amp; toolCall == null; наступного тижня, коли виклик виїде в окрему функцію і з'явиться fallback, вона доросте до ok &amp;&amp; status == 200 &amp;&amp; toolCall == null — межа переживає новий шар, не змінюючи сенсу. У реальній системі додається ще finish_reason == "stop", щоб не законсервувати обрізану відповідь: наш mock таких не віддає, тому в контурі курсу перевірка була б мертвою, але в проді вона обов'язкова. І так: відповідь-помилку теж можна кешувати — але свідомо і коротко, з окремим, у рази меншим TTL. Це називають негативним кешуванням: воно береже провайдера від лавини однакових невдалих запитів.</a:t>
+              <a:t/>
             </a:r>
             <a:endParaRPr lang="en-US" dirty="0"/>
           </a:p>
@@ -965,7 +965,7 @@
           <a:p>
             <a:r>
               <a:rPr lang="en-US" dirty="0"/>
-              <a:t>Найтиповіша пастка консервації — кешувати заглушку деградації. Уявіть: провайдер лежав дві хвилини, за цей час десяток запитів отримав ввічливе «тимчасові проблеми, спробуйте згодом», і ці заглушки чесно поїхали в кеш. Провайдер піднявся — а система ще годину роздає «тимчасові проблеми» тим, хто питає те саме. Інцидент закінчився, а користувачі його ще бачать. Тому в контурі, який ми будуємо, є правило: те, що народилося у fallback-гілці — це урок 7, — у кеш не потрапляє ніколи. Звідси випливає річ, яку варто мати ще до першого інциденту: спосіб скинути кеш. Не «перезапустити сервіс», а керована операція. Мінімум, який закриває більшість випадків, — версія в ключі кешу, і вона у вас уже є: активна версія промпта — частина ключа, зміна промпта автоматично робить старі записи недосяжними. Наступний рівень — окремий службовий «епох»-номер у ключі, який ви збільшуєте вручну: одна зміна значення — і весь кеш логічно порожній, без жодного видалення. І запишіть цей крок у сценарій інциденту — це урок 12: «після відновлення провайдера — скинути кеш, якщо в період збою могли записатися заглушки». Це рівно той пункт, який під час першого справжнього інциденту не згадає ніхто, а користувачі побачать наслідки.</a:t>
+              <a:t/>
             </a:r>
             <a:endParaRPr lang="en-US" dirty="0"/>
           </a:p>
@@ -1053,7 +1053,7 @@
           <a:p>
             <a:r>
               <a:rPr lang="en-US" dirty="0"/>
-              <a:t>Жорсткий TTL змушує вибирати: короткий — і кеш майже не влучає; довгий — і ви роздаєте застаріле. Але є третій варіант, який у вебі давно стандарт, а в LLM-системах чомусь рідко згадують: віддати старе одразу і оновити у фоні. Запис у кеші має два строки: «свіжий до» і «придатний до». Поки він свіжий — віддаємо як є. Коли свіжість вийшла, а придатність ще ні — усе одно віддаємо старе, і паралельно робимо один виклик моделі, щоб оновити запис. Користувач отримує відповідь за мілісекунди, а наступний уже бачить нову. Для LLM це вигідніше, ніж для звичайного API, з двох причин. По-перше, ціна miss'а тут не «зайвий запит до бази», а секунди очікування і реальні гроші. По-друге, «застаріла» відповідь на типове питання підтримки майже завжди прийнятна: інструкція зі скидання пароля не псується за годину. Виграш видно одразу в двох метриках: hit ratio росте, а p95 перестає стрибати на кожному протуханні популярного ключа. Ціна рішення — складність: потрібен фоновий виклик і захист від того, щоб десять одночасних запитів не пішли оновлювати той самий ключ — це та сама лавина з блоку 04, тільки на оновленні. Тому в обов'язковій доріжці курсу ми лишаємо простий TTL, а цей патерн проговорюємо як наступний крок — і як приклад того, що «кеш» узагалі-то має більше станів, ніж «є / нема». І типова помилка поруч: один TTL на все. Відповідь на «як скинути пароль» може жити добу — інструкція не змінюється. Відповідь зі статусом конкретного замовлення не має права жити й хвилини: вона застаріває раніше, ніж ви її прочитаєте. TTL — це властивість класу запиту, а не налаштування кеша.</a:t>
+              <a:t/>
             </a:r>
             <a:endParaRPr lang="en-US" dirty="0"/>
           </a:p>
@@ -1141,7 +1141,7 @@
           <a:p>
             <a:r>
               <a:rPr lang="en-US" dirty="0"/>
-              <a:t>«У комп'ютерних науках є дві найважчі задачі: інвалідація кешу і найменування» — жарт старий, бо правдивий. Наш мінімальний набір інвалідації складається з двох механізмів. Перший — зміна промпта: вже працює, безкоштовно, через ключ. Найнебезпечніший сценарій застарівання закритий архітектурно, ми його розібрали в блоці 03. Другий — TTL: відповіді старіють за часом. У нашому in-memory кеші його поки немає: записи живуть до рестарту сервісу. Для навчального контуру це чесний компроміс; додати TTL — опційна частина ДЗ тижня 3. Відповідь «як у проді» звучить так: винесене сховище — Redis уже лежить у compose під профілем advanced — з TTL на кожному записі. Винесений кеш переживає рестарти і ділиться між репліками сервісу, але приносить мережевий хоп і власні режими відмови. Класична драбина: почніть із процесної пам'яті, переходьте на винесене сховище, коли реплік стане більше однієї. І типова помилка: інвалідація «вручну і потім» — кеш чистять рестартом сервісу, коли хтось помітив дивну відповідь. Це означає, що межа свіжості вашої системи — «коли хтось помітить». TTL і промпт-у-ключі коштують годину роботи і прибирають цілий клас «привидів» назавжди.</a:t>
+              <a:t/>
             </a:r>
             <a:endParaRPr lang="en-US" dirty="0"/>
           </a:p>
@@ -1229,7 +1229,7 @@
           <a:p>
             <a:r>
               <a:rPr lang="en-US" dirty="0"/>
-              <a:t>Це опційний блок. Точний збіг ключа не зловить пару «Як скинути пароль?» і «забув пароль, що робити?» — а для людини це те саме питання. Semantic cache порівнює не рядки, а embedding'и: запит перетворюється на вектор, шукається найближчий збережений, і якщо схожість вища за поріг — віддається його відповідь. Звучить як строго краща версія кешу — але подивіться, що приходить у комплекті. Поріг схожості — новий операційний параметр: занизький — кеш майже не влучає; зависокий — хибні влучання: «як змінити пароль» і «як змінити тариф» ближчі у векторному просторі, ніж хотілося б, і користувач отримує впевнену відповідь не на своє питання. Вартість embedding-викликів: кожен запит тепер потребує векторизації. Дешевше за генерацію, але не безкоштовно — і має падати у ваш cost-облік: правило з минулого уроку — рахується все. І окреме сховище: векторний пошук потребує відповідної бази, її деплою, моніторингу і бекапів. Тому в курсі semantic cache — опційна доріжка: Redis з advanced-профілю плюс порівняння за схожістю, опційна частина ДЗ тижня 3. Порядок рішень завжди однаковий: спершу виміряйте, скільки дає точний кеш на вашому трафіку. Часто виявляється, що люди формулюють часті питання одноманітніше, ніж здається, — і точного кешу досить.</a:t>
+              <a:t/>
             </a:r>
             <a:endParaRPr lang="en-US" dirty="0"/>
           </a:p>
@@ -1317,7 +1317,7 @@
           <a:p>
             <a:r>
               <a:rPr lang="en-US" dirty="0"/>
-              <a:t>Перш ніж перейти до екрана — що саме ви зараз побачите і навіщо. Кадр перший: те саме питання двічі. Перший запит іде в модель — сотні мілісекунд; другий віддається з кешу — latency_ms менше 50. Кадр другий: доказ у лозі. Два рядки, але другий — з нульовими токенами: виклику моделі не було. Оце і є економія — виміряна, а не заявлена. Кадр третій: rollback-тест ключа. Закешована відповідь є; робимо rollback промпта — і кеш не віддає стару відповідь: іде новий виклик. Промпт у ключі працює. Кадр четвертий: «Де моє замовлення #10482?» — і перевірка, що така відповідь у кеш не потрапляє: межа з блоку 02 тримається. Навіщо це все: побачити кожне з трьох рішень уроку — метрику, ключ і межу — живими, на реальному лозі, а не на слайді. [Ведучому: прогрівний запит перед демо робіть СЛУЖБОВИМ повідомленням, яке в демо не бере участі, — якщо прогріти демо-питанням, воно потрапить у кеш, і кадр «вдруге майже миттєво» зламається: перший запит теж буде з кешу. І друге, підступніше: до готовності gateway запити падають тихо — status=0 у лозі, нульові токени, відповідь за одиниці мілісекунд. На око це нерозрізненне з кеш-хітом — відрізняє тільки status у лозі. Після підняття стека дочекайтеся готовності gateway (health-ендпоінт або ~30 секунд) і лише потім грійте та показуйте.]</a:t>
+              <a:t/>
             </a:r>
             <a:endParaRPr lang="en-US" dirty="0"/>
           </a:p>
@@ -1405,7 +1405,7 @@
           <a:p>
             <a:r>
               <a:rPr lang="en-US" dirty="0"/>
-              <a:t>Частина перша: обгорнути виклик. Ключ, пошук у кеші; hit віддає збережене, miss іде в модель і зберігає — умови збереження з блоку 04: успішна відповідь без tool-виклику. Лічильники hits/misses — у тому самому діфі, це і є measure-first. Частина друга: побачити ефект руками. Те саме питання двічі: перший запит — сотні мілісекунд, другий — приблизно нуль. У лозі два рядки, але другий — з нульовими токенами: виклику моделі не було. Оце і є економія — виміряна, а не заявлена. Частина третя: довести, що промпт у ключі працює. Закешувати відповідь, зробити rollback промпта на «поганий» v1 — це механіка уроку 2 — і спитати знову. Кеш не віддає стару відповідь — іде новий, чесно поганий, виклик. Подумки видаліть промпт із ключа і проговоріть, який баг ви щойно уникли. Частина четверта: промацати межі. Спитати «Де моє замовлення #10482?» і проговорити, чому таку відповідь кешувати не можна: персональний стан, tool-виклик. Переконайтеся, що у вашій реалізації відповіді з tool-викликом у кеш не потрапляють — на наступному уроці ця межа запрацює по-справжньому. І опційна п'ята: TTL. Додати до записів час створення і термін життя; прострочений запис — це miss. Це заготовка під опційну частину ДЗ тижня 3. [Ведучому: якщо повторюєте демо після перезапуску стека — пам'ятайте про тихі падіння до готовності gateway: status=0 і нульові токени виглядають як кеш-хіт, перевіряйте status у лозі.]</a:t>
+              <a:t/>
             </a:r>
             <a:endParaRPr lang="en-US" dirty="0"/>
           </a:p>
@@ -1493,7 +1493,7 @@
           <a:p>
             <a:r>
               <a:rPr lang="en-US" dirty="0"/>
-              <a:t>Домовимось про результат уроку — конкретними діями. Після сьогоднішнього заняття ви зможете: обгорнути виклик моделі кешем так, щоб hit віддавав збережене, а miss ішов у модель і зберігав результат; зібрати ключ кешу, який не бреше, — модель, промпт і повідомлення, — і пояснити, чому саме текст промпта в ключі обов'язковий; увімкнути лічильники hit/miss в одному діфі з кешем і сказати, які три операційні цифри випливають із hit ratio; довести rollback-експериментом, що зміна промпта автоматично інвалідує кеш — без жодного коду інвалідації; провести межу кешування: назвати, які відповіді кешувати заборонено і чому це питання коректності, а не продуктивності; і пояснити, коли варто дивитися в бік semantic cache — і які три речі приходять із ним у комплекті. Кожен пункт ви перевірите руками ще сьогодні — у лабораторній.</a:t>
+              <a:t/>
             </a:r>
             <a:endParaRPr lang="en-US" dirty="0"/>
           </a:p>
@@ -1581,7 +1581,7 @@
           <a:p>
             <a:r>
               <a:rPr lang="en-US" dirty="0"/>
-              <a:t>Зафіксуємо, що ми щойно побачили — і що це доводить. Перше: економія виміряна, а не заявлена. Другий рядок у лозі — з нульовими токенами і нульовою вартістю: виклику моделі не було, і це видно не «на відчуттях», а в даних. Правило measure-first виконано буквально: механізм і його метрика з'явилися в одному діфі. Друге: ключ не бреше. Після rollback промпта кеш не віддав стару відповідь — пішов новий виклик. Інвалідація спрацювала автоматично, без жодного коду: коректність вбудована в саму адресацію. Той самий rollback без промпта в ключі означав би годину роздачі старої поведінки. Третє: межа кешування тримається. Персональне питання про замовлення в кеш не потрапило — і на наступному уроці, коли з'являться справжні tool-виклики, цей предикат почне працювати по-справжньому. Разом ці три картинки — весь урок у трьох кадрах: метрика, ключ, межа. Кеш став механізмом, а не талісманом.</a:t>
+              <a:t/>
             </a:r>
             <a:endParaRPr lang="en-US" dirty="0"/>
           </a:p>
@@ -1669,7 +1669,7 @@
           <a:p>
             <a:r>
               <a:rPr lang="en-US" dirty="0"/>
-              <a:t>Перш ніж розійтися — чесна перевірка обов'язкової доріжки, без оцінок. Чотири пункти. Перший: повторний запит віддається з кешу — приблизно нуль мілісекунд — і не породжує виклик моделі; ви бачили це в лозі другим рядком із нульовими токенами. Другий: лічильники hit і miss інкрементуються в різних гілках, і це видно в діфі коду. Плитка з цими числами оживе на тижні 5 — сьогодні достатньо, що цифра чесна за конструкцією. Третій: можете пояснити, чому промпт — частина ключа і який баг це прибирає. Якщо завагалися — перечитайте сценарій rollback у блоці 03: «полагодили, а працює по-старому». І четвертий: знаєте, які відповіді кешувати заборонено — персональні, tool-результати, швидкозмінний стан — і чому це питання коректності, а не продуктивності. Якщо всі чотири — «так», ви готові до наступного уроку. Де завагалися — туди і повертайтеся; питання — у канал потоку або на Q&amp;A.</a:t>
+              <a:t/>
             </a:r>
             <a:endParaRPr lang="en-US" dirty="0"/>
           </a:p>
@@ -1757,7 +1757,7 @@
           <a:p>
             <a:r>
               <a:rPr lang="en-US" dirty="0"/>
-              <a:t>Чотири способи зіпсувати собі тиждень кешування — усі перевірені чужими граблями. Кеш без лічильника: «здається, допомагає» — це не метрика. Механізм без цифри неможливо ні захистити перед командою, ні вимкнути обґрунтовано — саме тому в цьому уроці лічильники народилися в одному діфі з кешем. Ключ без версії промпта: стара поведінка переживає rollback, і розслідування «чому воно досі відповідає по-старому» з'їдає день. Ви сьогодні бачили в лабі, як промпт у ключі прибирає цей клас багів безкоштовно. Кешувати персональні відповіді й результати tool-викликів: перше — витік чужих даних між користувачами, друге — впевнена брехня про застарілий стан зовнішньої системи. Це межа з блоку 02: заборона сильніша за будь-який аргумент про частоту чи ціну. І нарешті — починати з semantic cache, не виміривши точний: ви берете на борт складність, окреме сховище і хибні влучання в обмін на приріст, якого ще не порахували. Порядок завжди той самий: спершу цифри точного кешу, потім рішення.</a:t>
+              <a:t/>
             </a:r>
             <a:endParaRPr lang="en-US" dirty="0"/>
           </a:p>
@@ -1845,7 +1845,7 @@
           <a:p>
             <a:r>
               <a:rPr lang="en-US" dirty="0"/>
-              <a:t>Обов'язково до наступного уроку — без здачі. Перше: закріпити лабу — повторний запит віддається за приблизно нуль мілісекунд, лічильники ростуть. Друге: перевірити на своєму стеку rollback-експеримент — третій крок лабораторної: промпт у ключі рятує від роздачі старої поведінки. І третє: сформулювати для себе список «що в моїй системі кешувати заборонено» — це той список, який у проді пишеться до кешу, а не після інциденту. Опційно: TTL для записів кешу — час створення плюс термін життя, прострочений запис стає miss'ом; і подивитися на Redis у профілі advanced — це місце для винесеного кешу, коли реплік стане більше однієї. І про ДЗ тижня: воно здається після наступного уроку. ДЗ тижня 3 об'єднує кеш та інструменти: сьогоднішня частина вже у вас в руках, після наступного уроку додадуться tool-виклики з таймаутом та ідемпотентністю — і тиждень здається одним PR. Критерії приймання будуть у файлі ДЗ після наступного уроку.</a:t>
+              <a:t/>
             </a:r>
             <a:endParaRPr lang="en-US" dirty="0"/>
           </a:p>
@@ -1933,7 +1933,7 @@
           <a:p>
             <a:r>
               <a:rPr lang="en-US" dirty="0"/>
-              <a:t>Підсумуємо. Найдешевший і найшвидший запит — той, якого не було: кеш прибирає виклик цілком, і це єдиний механізм контуру вартості, що заодно ріже latency. Але з'являється він разом із метрикою, а не після неї: два лічильники в тому самому діфі, що й гілка hit/miss, — бо механізм без цифри неможливо ні захистити перед командою, ні вимкнути обґрунтовано. Ключ кешу — не оптимізація, а контракт коректності: модель, системний промпт і повідомлення разом; промпт у ключі означає, що зміна версії автоматично робить старі записи недосяжними, і найнебезпечніший сценарій закритий архітектурно, без окремого механізму інвалідації. Межу ми провели по природі відповіді, а не по зручності: персональне, результати інструментів і швидкозмінні дані не кешуються ніколи — тут кеш перестає економити і починає роздавати чужі або мертві відповіді. І TTL — властивість класу запиту, а не глобальне налаштування: «як скинути пароль» може жити добу, статус замовлення не має права жити й хвилини. Наступний урок — tool calls. Досі бот тільки говорив, і найгірше, що він міг, — відповісти неправильно. Наступного разу він почне діяти: виклики інструментів, зовнішні інтеграції, реальні наслідки. Дія потребує схеми, таймаута та ідемпотентності — а незворотна дія ще й людини, яка скаже «так». До зустрічі.</a:t>
+              <a:t/>
             </a:r>
             <a:endParaRPr lang="en-US" dirty="0"/>
           </a:p>
@@ -2021,7 +2021,7 @@
           <a:p>
             <a:r>
               <a:rPr lang="en-US" dirty="0"/>
-              <a:t>Маршрут такий. Спершу проблема: повтори у трафіку підтримки — це подвійний податок, грошима і часом, і правило уроку — measure-first: метрика народжується разом із механізмом. Далі межі: що кешувати можна, а що заборонено — і чому межа проходить по природі відповіді, а не по її ціні. Потім найважливіше рішення уроку — ключ кешу як контракт коректності: чому текст промпта мусить бути частиною ключа. Після цього розтин коду: словник у пам'яті, гілка miss, три операційні рішення в кількох рядках. Блок п'ять — метрика: hit ratio і три цифри, які з нього випливають. Блок шість — найцікавіший побічний ефект: кеш робить систему детермінованою, і це двосічно. Сьомий — інвалідація: промпт-у-ключі плюс TTL, і драбина від процесної пам'яті до Redis. Восьмий, опційний, — semantic cache. Потім лабораторна на чотири обов'язкові частини, антипатерни і домашнє завдання.</a:t>
+              <a:t/>
             </a:r>
             <a:endParaRPr lang="en-US" dirty="0"/>
           </a:p>
@@ -2109,7 +2109,7 @@
           <a:p>
             <a:r>
               <a:rPr lang="en-US" dirty="0"/>
-              <a:t>Домовимось про шість слів. Hit і miss — влучання і промах: hit означає, що відповідь знайшлася в кеші й у модель ми не пішли. Hit ratio — частка запитів, які обійшлися без моделі; це головна метрика уроку. Ключ кешу — рядок, за яким ми шукаємо збережену відповідь; сьогодні побачимо, що він є контрактом коректності, а не технічною дрібницею. TTL — час життя запису: скільки відповідь вважається придатною. Інвалідація — вихід записів з обігу, коли вони більше не відповідають дійсності; у нас вона станеться автоматично через промпт у ключі. І semantic cache — кеш, який шукає не точний збіг, а схоже за змістом питання; це опційна частина уроку, і в комплекті з ним приходить своя ціна. Далі кожне побачимо в коді.</a:t>
+              <a:t/>
             </a:r>
             <a:endParaRPr lang="en-US" dirty="0"/>
           </a:p>
@@ -2197,7 +2197,7 @@
           <a:p>
             <a:r>
               <a:rPr lang="en-US" dirty="0"/>
-              <a:t>У трафіку підтримки повно повторів. «Як скинути пароль?» прилітає сотні разів на день майже однаковими словами — і без кешу ви щоразу платите двічі. Грошима: минулий урок якраз навчив бачити їх у кожному рядку лога. І часом очікування користувача: однакове питання, однакова відповідь, а токени і сотні мілісекунд — щоразу нові. Але з кешем є пастка, у яку заходить більшість команд: його вмикають — і не міряють. «Ну, кеш же є, значить економимо». Скільки? На яких запитах? А чи не віддаємо ми застарілі відповіді після зміни промпта? Без цифр ці питання повисають у повітрі, і кеш перетворюється з механізму на талісман. Тому в цьому уроці правило measure-first: лічильники hit і miss з'являються разом із кешем — в один урок і в один діф. Не «спершу заведемо, потім якось поміряємо»: миттю, коли з'являється механізм, з'являється і його метрика. Навіщо цей шар взагалі: кеш — третій механізм контуру вартості після routing і cost-обліку, і єдиний, що заодно ріже latency. А ще це перший механізм курсу з власною метрикою ефективності — hit ratio. На тижні 5 вона стане плиткою консолі; сьогодні — двома лічильниками.</a:t>
+              <a:t/>
             </a:r>
             <a:endParaRPr lang="en-US" dirty="0"/>
           </a:p>
@@ -2285,7 +2285,7 @@
           <a:p>
             <a:r>
               <a:rPr lang="en-US" dirty="0"/>
-              <a:t>Перш ніж писати код, треба провести межу, бо кеш — це механізм із наслідками для коректності. Ідеальний кандидат — відповідь детермінована, тобто на це питання завжди відповідаємо так, і не-персональна — однакова для всіх. «Як скинути пароль?», «Які у вас тарифи?» — класика. А ось що кешувати заборонено. Персональні відповіді: «Де моє замовлення?» — у кожного своє; закешували відповідь одного користувача — віддали її іншому, і це вже не баг продуктивності, а інцидент із чужими даними. Результати tool-викликів: відповідь зібрана зі стану зовнішньої системи в конкретну мить — статус замовлення, залишок на складі; за годину вона бреше. І все, що залежить від швидкозмінного стану: ціни під час розпродажу, статус інциденту, наявність місць — свіжість тут і є продуктом. Зверніть увагу: межа проходить не по «дорогих» чи «частих» запитах, а по природі відповіді. Часте і дороге — аргумент кешувати; персональне і мінливе — заборона, яка сильніша за будь-який аргумент. І термінологічна страховка: наш сьогоднішній кеш — це кеш відповідей у сервісі. Він не те саме, що провайдерський кеш префікса промпта з минулого уроку: той здешевлює вхідні токени всередині виклику і вмикається на боці провайдера. Рівні різні й чудово складаються: провайдерський робить кожен miss дешевшим, наш — прибирає повторні виклики цілком.</a:t>
+              <a:t/>
             </a:r>
             <a:endParaRPr lang="en-US" dirty="0"/>
           </a:p>
@@ -2373,7 +2373,7 @@
           <a:p>
             <a:r>
               <a:rPr lang="en-US" dirty="0"/>
-              <a:t>Ключ у нашому кеші — конкатенація трьох речей: модель, текст system-промпта і повідомлення користувача. Повідомлення в ключі — очевидно. Модель — теж зрозуміло: mini і strong відповідають по-різному, змішувати їхні відповіді не можна. А от третій компонент — сам текст system-промпта — це найважливіше рішення сьогоднішнього уроку. Уявіть, що промпта в ключі немає. Ви закешували сотню відповідей, потім зробили promote нової версії промпта — а кеш продовжує віддавати відповіді, згенеровані старою. Або дзеркальний сценарій, ще підступніший: активна версія виявилася поганою, ви зробили rollback, регресію полагодили — а користувачі ще годину бачать закешовану стару поведінку. «Полагодили, а воно працює по-старому» — це класичний слід кешу з неповним ключем. Промпт у ключі робить інвалідацію автоматичною: нова версія — інший текст — інші ключі — старі записи просто перестають знаходитись. Жодного коду інвалідації писати не треба; коректність вбудована в саму адресацію. З практики: найдорожчий випуск із ключа я бачив не в промпті, а в тенанті. У мультитенантних системах — а платформа, яку я супроводжую, саме така: кредентіали, дозволи й дані ізольовані по тенантах — кеш, ключований лише «модель + промпт + текст», гарантує аварію: два клієнти з однаковим питанням отримають одну відповідь, зібрану з чужих даних. Це вже не «менше влучань», це витік між клієнтами. Тому там у ключі поруч стоїть ідентифікатор тенанта, а часто й версія деплою — і тільки після цього кеш взагалі вмикають.</a:t>
+              <a:t/>
             </a:r>
             <a:endParaRPr lang="en-US" dirty="0"/>
           </a:p>
@@ -2461,7 +2461,7 @@
           <a:p>
             <a:r>
               <a:rPr lang="en-US" dirty="0"/>
-              <a:t>Окрема тема — нормалізація повідомлення в ключі. Спокуса очевидна: привести до нижнього регістру, прибрати пунктуацію, стиснути пробіли — і hit ratio виросте, бо «Як скинути пароль?» і «як скинути пароль» стануть одним записом. Але дивіться, що ви насправді робите. Прибрати зайві пробіли — безпечно. Нижній регістр — майже завжди правда: два тексти справді заслуговують однакової відповіді. А от видалена пунктуація — вже не завжди: «не працює. оплата пройшла» і «не працює оплата, пройшла» — це два різні звернення, а після нормалізації вони стануть одним ключем і однією відповіддю. Агресивніша нормалізація — це рішення про еквівалентність: ви стверджуєте, що два різні тексти заслуговують однакової відповіді. Правило те саме, що з ключем: нормалізація — частина контракту коректності, і кожен її крок має бути свідомим. Помітьте зв'язок із метрикою: нормалізація — найдешевший спосіб підняти hit ratio, і саме тому вона найнебезпечніша. Цифра росте, а коректність тихо їде. Коли в блоці 05 говоритимемо про здорові межі hit ratio — це один зі способів «купити» рекордну цифру не тією ціною.</a:t>
+              <a:t/>
             </a:r>
             <a:endParaRPr lang="en-US" dirty="0"/>
           </a:p>
@@ -2549,7 +2549,7 @@
           <a:p>
             <a:r>
               <a:rPr lang="en-US" dirty="0"/>
-              <a:t>Механізм — навмисно найпростіший з робочих: словник у пам'яті сервісу і два лічильники поруч. А в /chat виклик моделі перестає бути безумовним — він стає гілкою «miss»: знайшли запис — віддаємо збережене і інкрементуємо CacheHits; не знайшли — інкрементуємо CacheMisses, ідемо в модель, як раніше, і зберігаємо результат. Три операційні рішення зашиті в ці рядки. Перше: зберігаємо тільки успішні відповіді — status == 200. Закешована помилка означала б, що збій провайдера «залипає» у системі і відтворюється навіть після його одужання. Друге: лічильники інкрементуються атомарно і всередині відповідних гілок — цифра чесна за конструкцією, її неможливо забути оновити. Третє: кеш-хіт усе одно пише рядок у лог — із нульовими токенами і нульовою вартістю. Економія не зникає з видимості, а стає в ній видимою: рядок є, грошей немає. І придивіться до другої половини умови збереження: toolCall == null — відповіді з tool-викликами в кеш не потрапляють. Це та сама межа з блоку 02, виражена одним предикатом. Сьогодні поле toolCall у вас ще завжди порожнє, тож умова спрацьовує «вхолосту» — а на наступному уроці, коли з'являться інструменти, вона почне працювати по-справжньому. Закладати межу до появи ризику — правильний порядок.</a:t>
+              <a:t/>
             </a:r>
             <a:endParaRPr lang="en-US" dirty="0"/>
           </a:p>
@@ -3861,7 +3861,7 @@
       </p:pic>
       <p:sp>
         <p:nvSpPr>
-          <p:cNvPr id="8" name="Shape 4"/>
+          <p:cNvPr id="7" name="Shape 4"/>
           <p:cNvSpPr/>
           <p:nvPr/>
         </p:nvSpPr>
@@ -3883,7 +3883,7 @@
       </p:sp>
       <p:sp>
         <p:nvSpPr>
-          <p:cNvPr id="9" name="Shape 5"/>
+          <p:cNvPr id="8" name="Shape 5"/>
           <p:cNvSpPr/>
           <p:nvPr/>
         </p:nvSpPr>
@@ -3903,7 +3903,7 @@
       </p:sp>
       <p:sp>
         <p:nvSpPr>
-          <p:cNvPr id="10" name="Text 6"/>
+          <p:cNvPr id="9" name="Text 6"/>
           <p:cNvSpPr/>
           <p:nvPr/>
         </p:nvSpPr>
@@ -3942,7 +3942,7 @@
       </p:sp>
       <p:sp>
         <p:nvSpPr>
-          <p:cNvPr id="11" name="Text 7"/>
+          <p:cNvPr id="10" name="Text 7"/>
           <p:cNvSpPr/>
           <p:nvPr/>
         </p:nvSpPr>
@@ -3981,7 +3981,7 @@
       </p:sp>
       <p:sp>
         <p:nvSpPr>
-          <p:cNvPr id="12" name="Text 8"/>
+          <p:cNvPr id="11" name="Text 8"/>
           <p:cNvSpPr/>
           <p:nvPr/>
         </p:nvSpPr>
@@ -4023,7 +4023,7 @@
       </p:sp>
       <p:sp>
         <p:nvSpPr>
-          <p:cNvPr id="13" name="Shape 9"/>
+          <p:cNvPr id="12" name="Shape 9"/>
           <p:cNvSpPr/>
           <p:nvPr/>
         </p:nvSpPr>
@@ -4045,7 +4045,7 @@
       </p:sp>
       <p:sp>
         <p:nvSpPr>
-          <p:cNvPr id="14" name="Shape 10"/>
+          <p:cNvPr id="13" name="Shape 10"/>
           <p:cNvSpPr/>
           <p:nvPr/>
         </p:nvSpPr>
@@ -4065,7 +4065,7 @@
       </p:sp>
       <p:sp>
         <p:nvSpPr>
-          <p:cNvPr id="15" name="Text 11"/>
+          <p:cNvPr id="14" name="Text 11"/>
           <p:cNvSpPr/>
           <p:nvPr/>
         </p:nvSpPr>
@@ -4104,7 +4104,7 @@
       </p:sp>
       <p:sp>
         <p:nvSpPr>
-          <p:cNvPr id="16" name="Text 12"/>
+          <p:cNvPr id="15" name="Text 12"/>
           <p:cNvSpPr/>
           <p:nvPr/>
         </p:nvSpPr>
@@ -4143,7 +4143,7 @@
       </p:sp>
       <p:sp>
         <p:nvSpPr>
-          <p:cNvPr id="17" name="Text 13"/>
+          <p:cNvPr id="16" name="Text 13"/>
           <p:cNvSpPr/>
           <p:nvPr/>
         </p:nvSpPr>
@@ -4185,7 +4185,7 @@
       </p:sp>
       <p:sp>
         <p:nvSpPr>
-          <p:cNvPr id="18" name="Shape 14"/>
+          <p:cNvPr id="17" name="Shape 14"/>
           <p:cNvSpPr/>
           <p:nvPr/>
         </p:nvSpPr>
@@ -4207,7 +4207,7 @@
       </p:sp>
       <p:sp>
         <p:nvSpPr>
-          <p:cNvPr id="19" name="Shape 15"/>
+          <p:cNvPr id="18" name="Shape 15"/>
           <p:cNvSpPr/>
           <p:nvPr/>
         </p:nvSpPr>
@@ -4227,7 +4227,7 @@
       </p:sp>
       <p:sp>
         <p:nvSpPr>
-          <p:cNvPr id="20" name="Text 16"/>
+          <p:cNvPr id="19" name="Text 16"/>
           <p:cNvSpPr/>
           <p:nvPr/>
         </p:nvSpPr>
@@ -4266,7 +4266,7 @@
       </p:sp>
       <p:sp>
         <p:nvSpPr>
-          <p:cNvPr id="21" name="Text 17"/>
+          <p:cNvPr id="20" name="Text 17"/>
           <p:cNvSpPr/>
           <p:nvPr/>
         </p:nvSpPr>
@@ -4305,7 +4305,7 @@
       </p:sp>
       <p:sp>
         <p:nvSpPr>
-          <p:cNvPr id="22" name="Text 18"/>
+          <p:cNvPr id="21" name="Text 18"/>
           <p:cNvSpPr/>
           <p:nvPr/>
         </p:nvSpPr>
@@ -4347,7 +4347,7 @@
       </p:sp>
       <p:sp>
         <p:nvSpPr>
-          <p:cNvPr id="23" name="Shape 19"/>
+          <p:cNvPr id="22" name="Shape 19"/>
           <p:cNvSpPr/>
           <p:nvPr/>
         </p:nvSpPr>
@@ -4369,7 +4369,7 @@
       </p:sp>
       <p:sp>
         <p:nvSpPr>
-          <p:cNvPr id="24" name="Text 20"/>
+          <p:cNvPr id="23" name="Text 20"/>
           <p:cNvSpPr/>
           <p:nvPr/>
         </p:nvSpPr>
@@ -4654,7 +4654,7 @@
       </p:pic>
       <p:sp>
         <p:nvSpPr>
-          <p:cNvPr id="8" name="Shape 4"/>
+          <p:cNvPr id="7" name="Shape 4"/>
           <p:cNvSpPr/>
           <p:nvPr/>
         </p:nvSpPr>
@@ -4676,7 +4676,7 @@
       </p:sp>
       <p:sp>
         <p:nvSpPr>
-          <p:cNvPr id="9" name="Text 5"/>
+          <p:cNvPr id="8" name="Text 5"/>
           <p:cNvSpPr/>
           <p:nvPr/>
         </p:nvSpPr>
@@ -4715,7 +4715,7 @@
       </p:sp>
       <p:sp>
         <p:nvSpPr>
-          <p:cNvPr id="10" name="Text 6"/>
+          <p:cNvPr id="9" name="Text 6"/>
           <p:cNvSpPr/>
           <p:nvPr/>
         </p:nvSpPr>
@@ -4754,7 +4754,7 @@
       </p:sp>
       <p:sp>
         <p:nvSpPr>
-          <p:cNvPr id="11" name="Shape 7"/>
+          <p:cNvPr id="10" name="Shape 7"/>
           <p:cNvSpPr/>
           <p:nvPr/>
         </p:nvSpPr>
@@ -4781,7 +4781,7 @@
       </p:sp>
       <p:sp>
         <p:nvSpPr>
-          <p:cNvPr id="12" name="Text 8"/>
+          <p:cNvPr id="11" name="Text 8"/>
           <p:cNvSpPr/>
           <p:nvPr/>
         </p:nvSpPr>
@@ -4820,7 +4820,7 @@
       </p:sp>
       <p:sp>
         <p:nvSpPr>
-          <p:cNvPr id="13" name="Text 9"/>
+          <p:cNvPr id="12" name="Text 9"/>
           <p:cNvSpPr/>
           <p:nvPr/>
         </p:nvSpPr>
@@ -4862,7 +4862,7 @@
       </p:sp>
       <p:sp>
         <p:nvSpPr>
-          <p:cNvPr id="14" name="Shape 10"/>
+          <p:cNvPr id="13" name="Shape 10"/>
           <p:cNvSpPr/>
           <p:nvPr/>
         </p:nvSpPr>
@@ -4889,7 +4889,7 @@
       </p:sp>
       <p:sp>
         <p:nvSpPr>
-          <p:cNvPr id="15" name="Text 11"/>
+          <p:cNvPr id="14" name="Text 11"/>
           <p:cNvSpPr/>
           <p:nvPr/>
         </p:nvSpPr>
@@ -4928,7 +4928,7 @@
       </p:sp>
       <p:sp>
         <p:nvSpPr>
-          <p:cNvPr id="16" name="Text 12"/>
+          <p:cNvPr id="15" name="Text 12"/>
           <p:cNvSpPr/>
           <p:nvPr/>
         </p:nvSpPr>
@@ -4970,7 +4970,7 @@
       </p:sp>
       <p:sp>
         <p:nvSpPr>
-          <p:cNvPr id="17" name="Shape 13"/>
+          <p:cNvPr id="16" name="Shape 13"/>
           <p:cNvSpPr/>
           <p:nvPr/>
         </p:nvSpPr>
@@ -4997,7 +4997,7 @@
       </p:sp>
       <p:sp>
         <p:nvSpPr>
-          <p:cNvPr id="18" name="Text 14"/>
+          <p:cNvPr id="17" name="Text 14"/>
           <p:cNvSpPr/>
           <p:nvPr/>
         </p:nvSpPr>
@@ -5036,7 +5036,7 @@
       </p:sp>
       <p:sp>
         <p:nvSpPr>
-          <p:cNvPr id="19" name="Text 15"/>
+          <p:cNvPr id="18" name="Text 15"/>
           <p:cNvSpPr/>
           <p:nvPr/>
         </p:nvSpPr>
@@ -5078,7 +5078,7 @@
       </p:sp>
       <p:sp>
         <p:nvSpPr>
-          <p:cNvPr id="20" name="Shape 16"/>
+          <p:cNvPr id="19" name="Shape 16"/>
           <p:cNvSpPr/>
           <p:nvPr/>
         </p:nvSpPr>
@@ -5100,7 +5100,7 @@
       </p:sp>
       <p:sp>
         <p:nvSpPr>
-          <p:cNvPr id="21" name="Text 17"/>
+          <p:cNvPr id="20" name="Text 17"/>
           <p:cNvSpPr/>
           <p:nvPr/>
         </p:nvSpPr>
@@ -5139,7 +5139,7 @@
       </p:sp>
       <p:sp>
         <p:nvSpPr>
-          <p:cNvPr id="22" name="Text 18"/>
+          <p:cNvPr id="21" name="Text 18"/>
           <p:cNvSpPr/>
           <p:nvPr/>
         </p:nvSpPr>
@@ -5181,7 +5181,7 @@
       </p:sp>
       <p:sp>
         <p:nvSpPr>
-          <p:cNvPr id="23" name="Shape 19"/>
+          <p:cNvPr id="22" name="Shape 19"/>
           <p:cNvSpPr/>
           <p:nvPr/>
         </p:nvSpPr>
@@ -5208,7 +5208,7 @@
       </p:sp>
       <p:sp>
         <p:nvSpPr>
-          <p:cNvPr id="24" name="Text 20"/>
+          <p:cNvPr id="23" name="Text 20"/>
           <p:cNvSpPr/>
           <p:nvPr/>
         </p:nvSpPr>
@@ -5247,7 +5247,7 @@
       </p:sp>
       <p:sp>
         <p:nvSpPr>
-          <p:cNvPr id="25" name="Text 21"/>
+          <p:cNvPr id="24" name="Text 21"/>
           <p:cNvSpPr/>
           <p:nvPr/>
         </p:nvSpPr>
@@ -6181,7 +6181,7 @@
       </p:graphicFrame>
       <p:sp>
         <p:nvSpPr>
-          <p:cNvPr id="9" name="Shape 4"/>
+          <p:cNvPr id="8" name="Shape 4"/>
           <p:cNvSpPr/>
           <p:nvPr/>
         </p:nvSpPr>
@@ -6203,7 +6203,7 @@
       </p:sp>
       <p:sp>
         <p:nvSpPr>
-          <p:cNvPr id="10" name="Text 5"/>
+          <p:cNvPr id="9" name="Text 5"/>
           <p:cNvSpPr/>
           <p:nvPr/>
         </p:nvSpPr>
@@ -6242,7 +6242,7 @@
       </p:sp>
       <p:sp>
         <p:nvSpPr>
-          <p:cNvPr id="11" name="Text 6"/>
+          <p:cNvPr id="10" name="Text 6"/>
           <p:cNvSpPr/>
           <p:nvPr/>
         </p:nvSpPr>
@@ -6284,7 +6284,7 @@
       </p:sp>
       <p:sp>
         <p:nvSpPr>
-          <p:cNvPr id="12" name="Shape 7"/>
+          <p:cNvPr id="11" name="Shape 7"/>
           <p:cNvSpPr/>
           <p:nvPr/>
         </p:nvSpPr>
@@ -6306,7 +6306,7 @@
       </p:sp>
       <p:sp>
         <p:nvSpPr>
-          <p:cNvPr id="13" name="Text 8"/>
+          <p:cNvPr id="12" name="Text 8"/>
           <p:cNvSpPr/>
           <p:nvPr/>
         </p:nvSpPr>
@@ -6345,7 +6345,7 @@
       </p:sp>
       <p:sp>
         <p:nvSpPr>
-          <p:cNvPr id="14" name="Text 9"/>
+          <p:cNvPr id="13" name="Text 9"/>
           <p:cNvSpPr/>
           <p:nvPr/>
         </p:nvSpPr>
@@ -6387,7 +6387,7 @@
       </p:sp>
       <p:sp>
         <p:nvSpPr>
-          <p:cNvPr id="15" name="Shape 10"/>
+          <p:cNvPr id="14" name="Shape 10"/>
           <p:cNvSpPr/>
           <p:nvPr/>
         </p:nvSpPr>
@@ -6409,7 +6409,7 @@
       </p:sp>
       <p:sp>
         <p:nvSpPr>
-          <p:cNvPr id="16" name="Text 11"/>
+          <p:cNvPr id="15" name="Text 11"/>
           <p:cNvSpPr/>
           <p:nvPr/>
         </p:nvSpPr>
@@ -6448,7 +6448,7 @@
       </p:sp>
       <p:sp>
         <p:nvSpPr>
-          <p:cNvPr id="17" name="Text 12"/>
+          <p:cNvPr id="16" name="Text 12"/>
           <p:cNvSpPr/>
           <p:nvPr/>
         </p:nvSpPr>
@@ -6733,7 +6733,7 @@
       </p:pic>
       <p:sp>
         <p:nvSpPr>
-          <p:cNvPr id="8" name="Shape 4"/>
+          <p:cNvPr id="7" name="Shape 4"/>
           <p:cNvSpPr/>
           <p:nvPr/>
         </p:nvSpPr>
@@ -6755,7 +6755,7 @@
       </p:sp>
       <p:sp>
         <p:nvSpPr>
-          <p:cNvPr id="9" name="Text 5"/>
+          <p:cNvPr id="8" name="Text 5"/>
           <p:cNvSpPr/>
           <p:nvPr/>
         </p:nvSpPr>
@@ -6794,7 +6794,7 @@
       </p:sp>
       <p:sp>
         <p:nvSpPr>
-          <p:cNvPr id="10" name="Text 6"/>
+          <p:cNvPr id="9" name="Text 6"/>
           <p:cNvSpPr/>
           <p:nvPr/>
         </p:nvSpPr>
@@ -6836,7 +6836,7 @@
       </p:sp>
       <p:sp>
         <p:nvSpPr>
-          <p:cNvPr id="11" name="Shape 7"/>
+          <p:cNvPr id="10" name="Shape 7"/>
           <p:cNvSpPr/>
           <p:nvPr/>
         </p:nvSpPr>
@@ -6858,7 +6858,7 @@
       </p:sp>
       <p:sp>
         <p:nvSpPr>
-          <p:cNvPr id="12" name="Text 8"/>
+          <p:cNvPr id="11" name="Text 8"/>
           <p:cNvSpPr/>
           <p:nvPr/>
         </p:nvSpPr>
@@ -6897,7 +6897,7 @@
       </p:sp>
       <p:sp>
         <p:nvSpPr>
-          <p:cNvPr id="13" name="Text 9"/>
+          <p:cNvPr id="12" name="Text 9"/>
           <p:cNvSpPr/>
           <p:nvPr/>
         </p:nvSpPr>
@@ -6939,7 +6939,7 @@
       </p:sp>
       <p:sp>
         <p:nvSpPr>
-          <p:cNvPr id="14" name="Shape 10"/>
+          <p:cNvPr id="13" name="Shape 10"/>
           <p:cNvSpPr/>
           <p:nvPr/>
         </p:nvSpPr>
@@ -6961,7 +6961,7 @@
       </p:sp>
       <p:sp>
         <p:nvSpPr>
-          <p:cNvPr id="15" name="Text 11"/>
+          <p:cNvPr id="14" name="Text 11"/>
           <p:cNvSpPr/>
           <p:nvPr/>
         </p:nvSpPr>
@@ -7000,7 +7000,7 @@
       </p:sp>
       <p:sp>
         <p:nvSpPr>
-          <p:cNvPr id="16" name="Text 12"/>
+          <p:cNvPr id="15" name="Text 12"/>
           <p:cNvSpPr/>
           <p:nvPr/>
         </p:nvSpPr>
@@ -7042,7 +7042,7 @@
       </p:sp>
       <p:sp>
         <p:nvSpPr>
-          <p:cNvPr id="17" name="Shape 13"/>
+          <p:cNvPr id="16" name="Shape 13"/>
           <p:cNvSpPr/>
           <p:nvPr/>
         </p:nvSpPr>
@@ -7064,7 +7064,7 @@
       </p:sp>
       <p:sp>
         <p:nvSpPr>
-          <p:cNvPr id="18" name="Text 14"/>
+          <p:cNvPr id="17" name="Text 14"/>
           <p:cNvSpPr/>
           <p:nvPr/>
         </p:nvSpPr>
@@ -7349,7 +7349,7 @@
       </p:pic>
       <p:sp>
         <p:nvSpPr>
-          <p:cNvPr id="8" name="Shape 4"/>
+          <p:cNvPr id="7" name="Shape 4"/>
           <p:cNvSpPr/>
           <p:nvPr/>
         </p:nvSpPr>
@@ -7371,7 +7371,7 @@
       </p:sp>
       <p:sp>
         <p:nvSpPr>
-          <p:cNvPr id="9" name="Text 5"/>
+          <p:cNvPr id="8" name="Text 5"/>
           <p:cNvSpPr/>
           <p:nvPr/>
         </p:nvSpPr>
@@ -7410,7 +7410,7 @@
       </p:sp>
       <p:sp>
         <p:nvSpPr>
-          <p:cNvPr id="10" name="Shape 6"/>
+          <p:cNvPr id="9" name="Shape 6"/>
           <p:cNvSpPr/>
           <p:nvPr/>
         </p:nvSpPr>
@@ -7433,7 +7433,7 @@
       </p:sp>
       <p:sp>
         <p:nvSpPr>
-          <p:cNvPr id="11" name="Shape 7"/>
+          <p:cNvPr id="10" name="Shape 7"/>
           <p:cNvSpPr/>
           <p:nvPr/>
         </p:nvSpPr>
@@ -7453,7 +7453,7 @@
       </p:sp>
       <p:sp>
         <p:nvSpPr>
-          <p:cNvPr id="12" name="Shape 8"/>
+          <p:cNvPr id="11" name="Shape 8"/>
           <p:cNvSpPr/>
           <p:nvPr/>
         </p:nvSpPr>
@@ -7475,7 +7475,7 @@
       </p:sp>
       <p:sp>
         <p:nvSpPr>
-          <p:cNvPr id="13" name="Text 9"/>
+          <p:cNvPr id="12" name="Text 9"/>
           <p:cNvSpPr/>
           <p:nvPr/>
         </p:nvSpPr>
@@ -7514,7 +7514,7 @@
       </p:sp>
       <p:sp>
         <p:nvSpPr>
-          <p:cNvPr id="14" name="Shape 10"/>
+          <p:cNvPr id="13" name="Shape 10"/>
           <p:cNvSpPr/>
           <p:nvPr/>
         </p:nvSpPr>
@@ -7537,7 +7537,7 @@
       </p:sp>
       <p:sp>
         <p:nvSpPr>
-          <p:cNvPr id="15" name="Shape 11"/>
+          <p:cNvPr id="14" name="Shape 11"/>
           <p:cNvSpPr/>
           <p:nvPr/>
         </p:nvSpPr>
@@ -7557,7 +7557,7 @@
       </p:sp>
       <p:sp>
         <p:nvSpPr>
-          <p:cNvPr id="16" name="Shape 12"/>
+          <p:cNvPr id="15" name="Shape 12"/>
           <p:cNvSpPr/>
           <p:nvPr/>
         </p:nvSpPr>
@@ -7579,7 +7579,7 @@
       </p:sp>
       <p:sp>
         <p:nvSpPr>
-          <p:cNvPr id="17" name="Text 13"/>
+          <p:cNvPr id="16" name="Text 13"/>
           <p:cNvSpPr/>
           <p:nvPr/>
         </p:nvSpPr>
@@ -7618,7 +7618,7 @@
       </p:sp>
       <p:sp>
         <p:nvSpPr>
-          <p:cNvPr id="18" name="Shape 14"/>
+          <p:cNvPr id="17" name="Shape 14"/>
           <p:cNvSpPr/>
           <p:nvPr/>
         </p:nvSpPr>
@@ -7641,7 +7641,7 @@
       </p:sp>
       <p:sp>
         <p:nvSpPr>
-          <p:cNvPr id="19" name="Shape 15"/>
+          <p:cNvPr id="18" name="Shape 15"/>
           <p:cNvSpPr/>
           <p:nvPr/>
         </p:nvSpPr>
@@ -7661,7 +7661,7 @@
       </p:sp>
       <p:sp>
         <p:nvSpPr>
-          <p:cNvPr id="20" name="Shape 16"/>
+          <p:cNvPr id="19" name="Shape 16"/>
           <p:cNvSpPr/>
           <p:nvPr/>
         </p:nvSpPr>
@@ -7683,7 +7683,7 @@
       </p:sp>
       <p:sp>
         <p:nvSpPr>
-          <p:cNvPr id="21" name="Text 17"/>
+          <p:cNvPr id="20" name="Text 17"/>
           <p:cNvSpPr/>
           <p:nvPr/>
         </p:nvSpPr>
@@ -7722,7 +7722,7 @@
       </p:sp>
       <p:sp>
         <p:nvSpPr>
-          <p:cNvPr id="22" name="Shape 18"/>
+          <p:cNvPr id="21" name="Shape 18"/>
           <p:cNvSpPr/>
           <p:nvPr/>
         </p:nvSpPr>
@@ -7745,7 +7745,7 @@
       </p:sp>
       <p:sp>
         <p:nvSpPr>
-          <p:cNvPr id="23" name="Shape 19"/>
+          <p:cNvPr id="22" name="Shape 19"/>
           <p:cNvSpPr/>
           <p:nvPr/>
         </p:nvSpPr>
@@ -7765,7 +7765,7 @@
       </p:sp>
       <p:sp>
         <p:nvSpPr>
-          <p:cNvPr id="24" name="Shape 20"/>
+          <p:cNvPr id="23" name="Shape 20"/>
           <p:cNvSpPr/>
           <p:nvPr/>
         </p:nvSpPr>
@@ -7787,7 +7787,7 @@
       </p:sp>
       <p:sp>
         <p:nvSpPr>
-          <p:cNvPr id="25" name="Text 21"/>
+          <p:cNvPr id="24" name="Text 21"/>
           <p:cNvSpPr/>
           <p:nvPr/>
         </p:nvSpPr>
@@ -7826,7 +7826,7 @@
       </p:sp>
       <p:sp>
         <p:nvSpPr>
-          <p:cNvPr id="26" name="Shape 22"/>
+          <p:cNvPr id="25" name="Shape 22"/>
           <p:cNvSpPr/>
           <p:nvPr/>
         </p:nvSpPr>
@@ -7848,7 +7848,7 @@
       </p:sp>
       <p:sp>
         <p:nvSpPr>
-          <p:cNvPr id="27" name="Text 23"/>
+          <p:cNvPr id="26" name="Text 23"/>
           <p:cNvSpPr/>
           <p:nvPr/>
         </p:nvSpPr>
@@ -7887,7 +7887,7 @@
       </p:sp>
       <p:sp>
         <p:nvSpPr>
-          <p:cNvPr id="28" name="Text 24"/>
+          <p:cNvPr id="27" name="Text 24"/>
           <p:cNvSpPr/>
           <p:nvPr/>
         </p:nvSpPr>
@@ -7929,7 +7929,7 @@
       </p:sp>
       <p:sp>
         <p:nvSpPr>
-          <p:cNvPr id="29" name="Shape 25"/>
+          <p:cNvPr id="28" name="Shape 25"/>
           <p:cNvSpPr/>
           <p:nvPr/>
         </p:nvSpPr>
@@ -7951,7 +7951,7 @@
       </p:sp>
       <p:sp>
         <p:nvSpPr>
-          <p:cNvPr id="30" name="Text 26"/>
+          <p:cNvPr id="29" name="Text 26"/>
           <p:cNvSpPr/>
           <p:nvPr/>
         </p:nvSpPr>
@@ -7990,7 +7990,7 @@
       </p:sp>
       <p:sp>
         <p:nvSpPr>
-          <p:cNvPr id="31" name="Text 27"/>
+          <p:cNvPr id="30" name="Text 27"/>
           <p:cNvSpPr/>
           <p:nvPr/>
         </p:nvSpPr>
@@ -8032,7 +8032,7 @@
       </p:sp>
       <p:sp>
         <p:nvSpPr>
-          <p:cNvPr id="32" name="Shape 28"/>
+          <p:cNvPr id="31" name="Shape 28"/>
           <p:cNvSpPr/>
           <p:nvPr/>
         </p:nvSpPr>
@@ -8059,7 +8059,7 @@
       </p:sp>
       <p:sp>
         <p:nvSpPr>
-          <p:cNvPr id="33" name="Text 29"/>
+          <p:cNvPr id="32" name="Text 29"/>
           <p:cNvSpPr/>
           <p:nvPr/>
         </p:nvSpPr>
@@ -8098,7 +8098,7 @@
       </p:sp>
       <p:sp>
         <p:nvSpPr>
-          <p:cNvPr id="34" name="Text 30"/>
+          <p:cNvPr id="33" name="Text 30"/>
           <p:cNvSpPr/>
           <p:nvPr/>
         </p:nvSpPr>
@@ -8383,7 +8383,7 @@
       </p:pic>
       <p:sp>
         <p:nvSpPr>
-          <p:cNvPr id="8" name="Shape 4"/>
+          <p:cNvPr id="7" name="Shape 4"/>
           <p:cNvSpPr/>
           <p:nvPr/>
         </p:nvSpPr>
@@ -8405,7 +8405,7 @@
       </p:sp>
       <p:sp>
         <p:nvSpPr>
-          <p:cNvPr id="9" name="Text 5"/>
+          <p:cNvPr id="8" name="Text 5"/>
           <p:cNvSpPr/>
           <p:nvPr/>
         </p:nvSpPr>
@@ -8444,7 +8444,7 @@
       </p:sp>
       <p:sp>
         <p:nvSpPr>
-          <p:cNvPr id="10" name="Text 6"/>
+          <p:cNvPr id="9" name="Text 6"/>
           <p:cNvSpPr/>
           <p:nvPr/>
         </p:nvSpPr>
@@ -8486,7 +8486,7 @@
       </p:sp>
       <p:sp>
         <p:nvSpPr>
-          <p:cNvPr id="11" name="Shape 7"/>
+          <p:cNvPr id="10" name="Shape 7"/>
           <p:cNvSpPr/>
           <p:nvPr/>
         </p:nvSpPr>
@@ -8508,7 +8508,7 @@
       </p:sp>
       <p:sp>
         <p:nvSpPr>
-          <p:cNvPr id="12" name="Text 8"/>
+          <p:cNvPr id="11" name="Text 8"/>
           <p:cNvSpPr/>
           <p:nvPr/>
         </p:nvSpPr>
@@ -8547,7 +8547,7 @@
       </p:sp>
       <p:sp>
         <p:nvSpPr>
-          <p:cNvPr id="13" name="Text 9"/>
+          <p:cNvPr id="12" name="Text 9"/>
           <p:cNvSpPr/>
           <p:nvPr/>
         </p:nvSpPr>
@@ -8589,7 +8589,7 @@
       </p:sp>
       <p:sp>
         <p:nvSpPr>
-          <p:cNvPr id="14" name="Shape 10"/>
+          <p:cNvPr id="13" name="Shape 10"/>
           <p:cNvSpPr/>
           <p:nvPr/>
         </p:nvSpPr>
@@ -8611,7 +8611,7 @@
       </p:sp>
       <p:sp>
         <p:nvSpPr>
-          <p:cNvPr id="15" name="Text 11"/>
+          <p:cNvPr id="14" name="Text 11"/>
           <p:cNvSpPr/>
           <p:nvPr/>
         </p:nvSpPr>
@@ -8650,7 +8650,7 @@
       </p:sp>
       <p:sp>
         <p:nvSpPr>
-          <p:cNvPr id="16" name="Text 12"/>
+          <p:cNvPr id="15" name="Text 12"/>
           <p:cNvSpPr/>
           <p:nvPr/>
         </p:nvSpPr>
@@ -8692,7 +8692,7 @@
       </p:sp>
       <p:sp>
         <p:nvSpPr>
-          <p:cNvPr id="17" name="Shape 13"/>
+          <p:cNvPr id="16" name="Shape 13"/>
           <p:cNvSpPr/>
           <p:nvPr/>
         </p:nvSpPr>
@@ -8714,7 +8714,7 @@
       </p:sp>
       <p:sp>
         <p:nvSpPr>
-          <p:cNvPr id="18" name="Text 14"/>
+          <p:cNvPr id="17" name="Text 14"/>
           <p:cNvSpPr/>
           <p:nvPr/>
         </p:nvSpPr>
@@ -8753,7 +8753,7 @@
       </p:sp>
       <p:sp>
         <p:nvSpPr>
-          <p:cNvPr id="19" name="Text 15"/>
+          <p:cNvPr id="18" name="Text 15"/>
           <p:cNvSpPr/>
           <p:nvPr/>
         </p:nvSpPr>
@@ -9038,7 +9038,7 @@
       </p:pic>
       <p:sp>
         <p:nvSpPr>
-          <p:cNvPr id="8" name="Shape 4"/>
+          <p:cNvPr id="7" name="Shape 4"/>
           <p:cNvSpPr/>
           <p:nvPr/>
         </p:nvSpPr>
@@ -9060,7 +9060,7 @@
       </p:sp>
       <p:sp>
         <p:nvSpPr>
-          <p:cNvPr id="9" name="Text 5"/>
+          <p:cNvPr id="8" name="Text 5"/>
           <p:cNvSpPr/>
           <p:nvPr/>
         </p:nvSpPr>
@@ -9099,7 +9099,7 @@
       </p:sp>
       <p:sp>
         <p:nvSpPr>
-          <p:cNvPr id="10" name="Shape 6"/>
+          <p:cNvPr id="9" name="Shape 6"/>
           <p:cNvSpPr/>
           <p:nvPr/>
         </p:nvSpPr>
@@ -9122,7 +9122,7 @@
       </p:sp>
       <p:sp>
         <p:nvSpPr>
-          <p:cNvPr id="11" name="Shape 7"/>
+          <p:cNvPr id="10" name="Shape 7"/>
           <p:cNvSpPr/>
           <p:nvPr/>
         </p:nvSpPr>
@@ -9142,7 +9142,7 @@
       </p:sp>
       <p:sp>
         <p:nvSpPr>
-          <p:cNvPr id="12" name="Shape 8"/>
+          <p:cNvPr id="11" name="Shape 8"/>
           <p:cNvSpPr/>
           <p:nvPr/>
         </p:nvSpPr>
@@ -9164,7 +9164,7 @@
       </p:sp>
       <p:sp>
         <p:nvSpPr>
-          <p:cNvPr id="13" name="Text 9"/>
+          <p:cNvPr id="12" name="Text 9"/>
           <p:cNvSpPr/>
           <p:nvPr/>
         </p:nvSpPr>
@@ -9203,7 +9203,7 @@
       </p:sp>
       <p:sp>
         <p:nvSpPr>
-          <p:cNvPr id="14" name="Shape 10"/>
+          <p:cNvPr id="13" name="Shape 10"/>
           <p:cNvSpPr/>
           <p:nvPr/>
         </p:nvSpPr>
@@ -9230,7 +9230,7 @@
       </p:sp>
       <p:sp>
         <p:nvSpPr>
-          <p:cNvPr id="15" name="Text 11"/>
+          <p:cNvPr id="14" name="Text 11"/>
           <p:cNvSpPr/>
           <p:nvPr/>
         </p:nvSpPr>
@@ -9269,7 +9269,7 @@
       </p:sp>
       <p:sp>
         <p:nvSpPr>
-          <p:cNvPr id="16" name="Text 12"/>
+          <p:cNvPr id="15" name="Text 12"/>
           <p:cNvSpPr/>
           <p:nvPr/>
         </p:nvSpPr>
@@ -9311,7 +9311,7 @@
       </p:sp>
       <p:sp>
         <p:nvSpPr>
-          <p:cNvPr id="17" name="Shape 13"/>
+          <p:cNvPr id="16" name="Shape 13"/>
           <p:cNvSpPr/>
           <p:nvPr/>
         </p:nvSpPr>
@@ -9333,7 +9333,7 @@
       </p:sp>
       <p:sp>
         <p:nvSpPr>
-          <p:cNvPr id="18" name="Text 14"/>
+          <p:cNvPr id="17" name="Text 14"/>
           <p:cNvSpPr/>
           <p:nvPr/>
         </p:nvSpPr>
@@ -9372,7 +9372,7 @@
       </p:sp>
       <p:sp>
         <p:nvSpPr>
-          <p:cNvPr id="19" name="Text 15"/>
+          <p:cNvPr id="18" name="Text 15"/>
           <p:cNvSpPr/>
           <p:nvPr/>
         </p:nvSpPr>
@@ -9414,7 +9414,7 @@
       </p:sp>
       <p:sp>
         <p:nvSpPr>
-          <p:cNvPr id="20" name="Shape 16"/>
+          <p:cNvPr id="19" name="Shape 16"/>
           <p:cNvSpPr/>
           <p:nvPr/>
         </p:nvSpPr>
@@ -9436,7 +9436,7 @@
       </p:sp>
       <p:sp>
         <p:nvSpPr>
-          <p:cNvPr id="21" name="Text 17"/>
+          <p:cNvPr id="20" name="Text 17"/>
           <p:cNvSpPr/>
           <p:nvPr/>
         </p:nvSpPr>
@@ -9475,7 +9475,7 @@
       </p:sp>
       <p:sp>
         <p:nvSpPr>
-          <p:cNvPr id="22" name="Text 18"/>
+          <p:cNvPr id="21" name="Text 18"/>
           <p:cNvSpPr/>
           <p:nvPr/>
         </p:nvSpPr>
@@ -9821,7 +9821,7 @@
       </p:pic>
       <p:sp>
         <p:nvSpPr>
-          <p:cNvPr id="10" name="Shape 6"/>
+          <p:cNvPr id="9" name="Shape 6"/>
           <p:cNvSpPr/>
           <p:nvPr/>
         </p:nvSpPr>
@@ -9843,7 +9843,7 @@
       </p:sp>
       <p:sp>
         <p:nvSpPr>
-          <p:cNvPr id="11" name="Shape 7"/>
+          <p:cNvPr id="10" name="Shape 7"/>
           <p:cNvSpPr/>
           <p:nvPr/>
         </p:nvSpPr>
@@ -9863,7 +9863,7 @@
       </p:sp>
       <p:sp>
         <p:nvSpPr>
-          <p:cNvPr id="12" name="Text 8"/>
+          <p:cNvPr id="11" name="Text 8"/>
           <p:cNvSpPr/>
           <p:nvPr/>
         </p:nvSpPr>
@@ -9902,7 +9902,7 @@
       </p:sp>
       <p:sp>
         <p:nvSpPr>
-          <p:cNvPr id="13" name="Text 9"/>
+          <p:cNvPr id="12" name="Text 9"/>
           <p:cNvSpPr/>
           <p:nvPr/>
         </p:nvSpPr>
@@ -9941,7 +9941,7 @@
       </p:sp>
       <p:sp>
         <p:nvSpPr>
-          <p:cNvPr id="14" name="Text 10"/>
+          <p:cNvPr id="13" name="Text 10"/>
           <p:cNvSpPr/>
           <p:nvPr/>
         </p:nvSpPr>
@@ -9983,7 +9983,7 @@
       </p:sp>
       <p:sp>
         <p:nvSpPr>
-          <p:cNvPr id="15" name="Shape 11"/>
+          <p:cNvPr id="14" name="Shape 11"/>
           <p:cNvSpPr/>
           <p:nvPr/>
         </p:nvSpPr>
@@ -10005,7 +10005,7 @@
       </p:sp>
       <p:sp>
         <p:nvSpPr>
-          <p:cNvPr id="16" name="Shape 12"/>
+          <p:cNvPr id="15" name="Shape 12"/>
           <p:cNvSpPr/>
           <p:nvPr/>
         </p:nvSpPr>
@@ -10025,7 +10025,7 @@
       </p:sp>
       <p:sp>
         <p:nvSpPr>
-          <p:cNvPr id="17" name="Text 13"/>
+          <p:cNvPr id="16" name="Text 13"/>
           <p:cNvSpPr/>
           <p:nvPr/>
         </p:nvSpPr>
@@ -10064,7 +10064,7 @@
       </p:sp>
       <p:sp>
         <p:nvSpPr>
-          <p:cNvPr id="18" name="Text 14"/>
+          <p:cNvPr id="17" name="Text 14"/>
           <p:cNvSpPr/>
           <p:nvPr/>
         </p:nvSpPr>
@@ -10103,7 +10103,7 @@
       </p:sp>
       <p:sp>
         <p:nvSpPr>
-          <p:cNvPr id="19" name="Text 15"/>
+          <p:cNvPr id="18" name="Text 15"/>
           <p:cNvSpPr/>
           <p:nvPr/>
         </p:nvSpPr>
@@ -10145,7 +10145,7 @@
       </p:sp>
       <p:sp>
         <p:nvSpPr>
-          <p:cNvPr id="20" name="Shape 16"/>
+          <p:cNvPr id="19" name="Shape 16"/>
           <p:cNvSpPr/>
           <p:nvPr/>
         </p:nvSpPr>
@@ -10167,7 +10167,7 @@
       </p:sp>
       <p:sp>
         <p:nvSpPr>
-          <p:cNvPr id="21" name="Shape 17"/>
+          <p:cNvPr id="20" name="Shape 17"/>
           <p:cNvSpPr/>
           <p:nvPr/>
         </p:nvSpPr>
@@ -10187,7 +10187,7 @@
       </p:sp>
       <p:sp>
         <p:nvSpPr>
-          <p:cNvPr id="22" name="Text 18"/>
+          <p:cNvPr id="21" name="Text 18"/>
           <p:cNvSpPr/>
           <p:nvPr/>
         </p:nvSpPr>
@@ -10226,7 +10226,7 @@
       </p:sp>
       <p:sp>
         <p:nvSpPr>
-          <p:cNvPr id="23" name="Text 19"/>
+          <p:cNvPr id="22" name="Text 19"/>
           <p:cNvSpPr/>
           <p:nvPr/>
         </p:nvSpPr>
@@ -10265,7 +10265,7 @@
       </p:sp>
       <p:sp>
         <p:nvSpPr>
-          <p:cNvPr id="24" name="Text 20"/>
+          <p:cNvPr id="23" name="Text 20"/>
           <p:cNvSpPr/>
           <p:nvPr/>
         </p:nvSpPr>
@@ -10307,7 +10307,7 @@
       </p:sp>
       <p:sp>
         <p:nvSpPr>
-          <p:cNvPr id="25" name="Shape 21"/>
+          <p:cNvPr id="24" name="Shape 21"/>
           <p:cNvSpPr/>
           <p:nvPr/>
         </p:nvSpPr>
@@ -10329,7 +10329,7 @@
       </p:sp>
       <p:sp>
         <p:nvSpPr>
-          <p:cNvPr id="26" name="Text 22"/>
+          <p:cNvPr id="25" name="Text 22"/>
           <p:cNvSpPr/>
           <p:nvPr/>
         </p:nvSpPr>
@@ -10368,7 +10368,7 @@
       </p:sp>
       <p:sp>
         <p:nvSpPr>
-          <p:cNvPr id="27" name="Text 23"/>
+          <p:cNvPr id="26" name="Text 23"/>
           <p:cNvSpPr/>
           <p:nvPr/>
         </p:nvSpPr>
@@ -10614,7 +10614,7 @@
       </p:pic>
       <p:sp>
         <p:nvSpPr>
-          <p:cNvPr id="7" name="Shape 3"/>
+          <p:cNvPr id="6" name="Shape 3"/>
           <p:cNvSpPr/>
           <p:nvPr/>
         </p:nvSpPr>
@@ -10636,7 +10636,7 @@
       </p:sp>
       <p:sp>
         <p:nvSpPr>
-          <p:cNvPr id="8" name="Shape 4"/>
+          <p:cNvPr id="7" name="Shape 4"/>
           <p:cNvSpPr/>
           <p:nvPr/>
         </p:nvSpPr>
@@ -10656,7 +10656,7 @@
       </p:sp>
       <p:sp>
         <p:nvSpPr>
-          <p:cNvPr id="9" name="Text 5"/>
+          <p:cNvPr id="8" name="Text 5"/>
           <p:cNvSpPr/>
           <p:nvPr/>
         </p:nvSpPr>
@@ -10695,7 +10695,7 @@
       </p:sp>
       <p:sp>
         <p:nvSpPr>
-          <p:cNvPr id="10" name="Text 6"/>
+          <p:cNvPr id="9" name="Text 6"/>
           <p:cNvSpPr/>
           <p:nvPr/>
         </p:nvSpPr>
@@ -10734,7 +10734,7 @@
       </p:sp>
       <p:sp>
         <p:nvSpPr>
-          <p:cNvPr id="11" name="Text 7"/>
+          <p:cNvPr id="10" name="Text 7"/>
           <p:cNvSpPr/>
           <p:nvPr/>
         </p:nvSpPr>
@@ -10776,7 +10776,7 @@
       </p:sp>
       <p:sp>
         <p:nvSpPr>
-          <p:cNvPr id="12" name="Shape 8"/>
+          <p:cNvPr id="11" name="Shape 8"/>
           <p:cNvSpPr/>
           <p:nvPr/>
         </p:nvSpPr>
@@ -10798,7 +10798,7 @@
       </p:sp>
       <p:sp>
         <p:nvSpPr>
-          <p:cNvPr id="13" name="Shape 9"/>
+          <p:cNvPr id="12" name="Shape 9"/>
           <p:cNvSpPr/>
           <p:nvPr/>
         </p:nvSpPr>
@@ -10818,7 +10818,7 @@
       </p:sp>
       <p:sp>
         <p:nvSpPr>
-          <p:cNvPr id="14" name="Text 10"/>
+          <p:cNvPr id="13" name="Text 10"/>
           <p:cNvSpPr/>
           <p:nvPr/>
         </p:nvSpPr>
@@ -10857,7 +10857,7 @@
       </p:sp>
       <p:sp>
         <p:nvSpPr>
-          <p:cNvPr id="15" name="Text 11"/>
+          <p:cNvPr id="14" name="Text 11"/>
           <p:cNvSpPr/>
           <p:nvPr/>
         </p:nvSpPr>
@@ -10896,7 +10896,7 @@
       </p:sp>
       <p:sp>
         <p:nvSpPr>
-          <p:cNvPr id="16" name="Text 12"/>
+          <p:cNvPr id="15" name="Text 12"/>
           <p:cNvSpPr/>
           <p:nvPr/>
         </p:nvSpPr>
@@ -10938,7 +10938,7 @@
       </p:sp>
       <p:sp>
         <p:nvSpPr>
-          <p:cNvPr id="17" name="Shape 13"/>
+          <p:cNvPr id="16" name="Shape 13"/>
           <p:cNvSpPr/>
           <p:nvPr/>
         </p:nvSpPr>
@@ -10960,7 +10960,7 @@
       </p:sp>
       <p:sp>
         <p:nvSpPr>
-          <p:cNvPr id="18" name="Shape 14"/>
+          <p:cNvPr id="17" name="Shape 14"/>
           <p:cNvSpPr/>
           <p:nvPr/>
         </p:nvSpPr>
@@ -10980,7 +10980,7 @@
       </p:sp>
       <p:sp>
         <p:nvSpPr>
-          <p:cNvPr id="19" name="Text 15"/>
+          <p:cNvPr id="18" name="Text 15"/>
           <p:cNvSpPr/>
           <p:nvPr/>
         </p:nvSpPr>
@@ -11019,7 +11019,7 @@
       </p:sp>
       <p:sp>
         <p:nvSpPr>
-          <p:cNvPr id="20" name="Text 16"/>
+          <p:cNvPr id="19" name="Text 16"/>
           <p:cNvSpPr/>
           <p:nvPr/>
         </p:nvSpPr>
@@ -11058,7 +11058,7 @@
       </p:sp>
       <p:sp>
         <p:nvSpPr>
-          <p:cNvPr id="21" name="Text 17"/>
+          <p:cNvPr id="20" name="Text 17"/>
           <p:cNvSpPr/>
           <p:nvPr/>
         </p:nvSpPr>
@@ -11100,7 +11100,7 @@
       </p:sp>
       <p:sp>
         <p:nvSpPr>
-          <p:cNvPr id="22" name="Shape 18"/>
+          <p:cNvPr id="21" name="Shape 18"/>
           <p:cNvSpPr/>
           <p:nvPr/>
         </p:nvSpPr>
@@ -11122,7 +11122,7 @@
       </p:sp>
       <p:sp>
         <p:nvSpPr>
-          <p:cNvPr id="23" name="Shape 19"/>
+          <p:cNvPr id="22" name="Shape 19"/>
           <p:cNvSpPr/>
           <p:nvPr/>
         </p:nvSpPr>
@@ -11142,7 +11142,7 @@
       </p:sp>
       <p:sp>
         <p:nvSpPr>
-          <p:cNvPr id="24" name="Text 20"/>
+          <p:cNvPr id="23" name="Text 20"/>
           <p:cNvSpPr/>
           <p:nvPr/>
         </p:nvSpPr>
@@ -11181,7 +11181,7 @@
       </p:sp>
       <p:sp>
         <p:nvSpPr>
-          <p:cNvPr id="25" name="Text 21"/>
+          <p:cNvPr id="24" name="Text 21"/>
           <p:cNvSpPr/>
           <p:nvPr/>
         </p:nvSpPr>
@@ -11220,7 +11220,7 @@
       </p:sp>
       <p:sp>
         <p:nvSpPr>
-          <p:cNvPr id="26" name="Text 22"/>
+          <p:cNvPr id="25" name="Text 22"/>
           <p:cNvSpPr/>
           <p:nvPr/>
         </p:nvSpPr>
@@ -11262,7 +11262,7 @@
       </p:sp>
       <p:sp>
         <p:nvSpPr>
-          <p:cNvPr id="27" name="Shape 23"/>
+          <p:cNvPr id="26" name="Shape 23"/>
           <p:cNvSpPr/>
           <p:nvPr/>
         </p:nvSpPr>
@@ -11284,7 +11284,7 @@
       </p:sp>
       <p:sp>
         <p:nvSpPr>
-          <p:cNvPr id="28" name="Text 24"/>
+          <p:cNvPr id="27" name="Text 24"/>
           <p:cNvSpPr/>
           <p:nvPr/>
         </p:nvSpPr>
@@ -11323,7 +11323,7 @@
       </p:sp>
       <p:sp>
         <p:nvSpPr>
-          <p:cNvPr id="29" name="Text 25"/>
+          <p:cNvPr id="28" name="Text 25"/>
           <p:cNvSpPr/>
           <p:nvPr/>
         </p:nvSpPr>
@@ -11569,7 +11569,7 @@
       </p:pic>
       <p:sp>
         <p:nvSpPr>
-          <p:cNvPr id="7" name="Shape 3"/>
+          <p:cNvPr id="6" name="Shape 3"/>
           <p:cNvSpPr/>
           <p:nvPr/>
         </p:nvSpPr>
@@ -11589,7 +11589,7 @@
       </p:sp>
       <p:sp>
         <p:nvSpPr>
-          <p:cNvPr id="8" name="Text 4"/>
+          <p:cNvPr id="7" name="Text 4"/>
           <p:cNvSpPr/>
           <p:nvPr/>
         </p:nvSpPr>
@@ -11628,7 +11628,7 @@
       </p:sp>
       <p:sp>
         <p:nvSpPr>
-          <p:cNvPr id="9" name="Text 5"/>
+          <p:cNvPr id="8" name="Text 5"/>
           <p:cNvSpPr/>
           <p:nvPr/>
         </p:nvSpPr>
@@ -11681,7 +11681,7 @@
       </p:sp>
       <p:sp>
         <p:nvSpPr>
-          <p:cNvPr id="10" name="Shape 6"/>
+          <p:cNvPr id="9" name="Shape 6"/>
           <p:cNvSpPr/>
           <p:nvPr/>
         </p:nvSpPr>
@@ -11701,7 +11701,7 @@
       </p:sp>
       <p:sp>
         <p:nvSpPr>
-          <p:cNvPr id="11" name="Text 7"/>
+          <p:cNvPr id="10" name="Text 7"/>
           <p:cNvSpPr/>
           <p:nvPr/>
         </p:nvSpPr>
@@ -11740,7 +11740,7 @@
       </p:sp>
       <p:sp>
         <p:nvSpPr>
-          <p:cNvPr id="12" name="Text 8"/>
+          <p:cNvPr id="11" name="Text 8"/>
           <p:cNvSpPr/>
           <p:nvPr/>
         </p:nvSpPr>
@@ -11793,7 +11793,7 @@
       </p:sp>
       <p:sp>
         <p:nvSpPr>
-          <p:cNvPr id="13" name="Shape 9"/>
+          <p:cNvPr id="12" name="Shape 9"/>
           <p:cNvSpPr/>
           <p:nvPr/>
         </p:nvSpPr>
@@ -11813,7 +11813,7 @@
       </p:sp>
       <p:sp>
         <p:nvSpPr>
-          <p:cNvPr id="14" name="Text 10"/>
+          <p:cNvPr id="13" name="Text 10"/>
           <p:cNvSpPr/>
           <p:nvPr/>
         </p:nvSpPr>
@@ -11852,7 +11852,7 @@
       </p:sp>
       <p:sp>
         <p:nvSpPr>
-          <p:cNvPr id="15" name="Text 11"/>
+          <p:cNvPr id="14" name="Text 11"/>
           <p:cNvSpPr/>
           <p:nvPr/>
         </p:nvSpPr>
@@ -11905,7 +11905,7 @@
       </p:sp>
       <p:sp>
         <p:nvSpPr>
-          <p:cNvPr id="16" name="Shape 12"/>
+          <p:cNvPr id="15" name="Shape 12"/>
           <p:cNvSpPr/>
           <p:nvPr/>
         </p:nvSpPr>
@@ -11925,7 +11925,7 @@
       </p:sp>
       <p:sp>
         <p:nvSpPr>
-          <p:cNvPr id="17" name="Text 13"/>
+          <p:cNvPr id="16" name="Text 13"/>
           <p:cNvSpPr/>
           <p:nvPr/>
         </p:nvSpPr>
@@ -11964,7 +11964,7 @@
       </p:sp>
       <p:sp>
         <p:nvSpPr>
-          <p:cNvPr id="18" name="Text 14"/>
+          <p:cNvPr id="17" name="Text 14"/>
           <p:cNvSpPr/>
           <p:nvPr/>
         </p:nvSpPr>
@@ -12017,7 +12017,7 @@
       </p:sp>
       <p:sp>
         <p:nvSpPr>
-          <p:cNvPr id="19" name="Shape 15"/>
+          <p:cNvPr id="18" name="Shape 15"/>
           <p:cNvSpPr/>
           <p:nvPr/>
         </p:nvSpPr>
@@ -12037,7 +12037,7 @@
       </p:sp>
       <p:sp>
         <p:nvSpPr>
-          <p:cNvPr id="20" name="Text 16"/>
+          <p:cNvPr id="19" name="Text 16"/>
           <p:cNvSpPr/>
           <p:nvPr/>
         </p:nvSpPr>
@@ -12076,7 +12076,7 @@
       </p:sp>
       <p:sp>
         <p:nvSpPr>
-          <p:cNvPr id="21" name="Text 17"/>
+          <p:cNvPr id="20" name="Text 17"/>
           <p:cNvSpPr/>
           <p:nvPr/>
         </p:nvSpPr>
@@ -12375,7 +12375,7 @@
       </p:pic>
       <p:sp>
         <p:nvSpPr>
-          <p:cNvPr id="8" name="Shape 4"/>
+          <p:cNvPr id="7" name="Shape 4"/>
           <p:cNvSpPr/>
           <p:nvPr/>
         </p:nvSpPr>
@@ -12402,7 +12402,7 @@
       </p:sp>
       <p:sp>
         <p:nvSpPr>
-          <p:cNvPr id="9" name="Shape 5"/>
+          <p:cNvPr id="8" name="Shape 5"/>
           <p:cNvSpPr/>
           <p:nvPr/>
         </p:nvSpPr>
@@ -12422,7 +12422,7 @@
       </p:sp>
       <p:sp>
         <p:nvSpPr>
-          <p:cNvPr id="10" name="Text 6"/>
+          <p:cNvPr id="9" name="Text 6"/>
           <p:cNvSpPr/>
           <p:nvPr/>
         </p:nvSpPr>
@@ -12461,7 +12461,7 @@
       </p:sp>
       <p:sp>
         <p:nvSpPr>
-          <p:cNvPr id="11" name="Text 7"/>
+          <p:cNvPr id="10" name="Text 7"/>
           <p:cNvSpPr/>
           <p:nvPr/>
         </p:nvSpPr>
@@ -12500,7 +12500,7 @@
       </p:sp>
       <p:sp>
         <p:nvSpPr>
-          <p:cNvPr id="12" name="Text 8"/>
+          <p:cNvPr id="11" name="Text 8"/>
           <p:cNvSpPr/>
           <p:nvPr/>
         </p:nvSpPr>
@@ -12542,7 +12542,7 @@
       </p:sp>
       <p:sp>
         <p:nvSpPr>
-          <p:cNvPr id="13" name="Shape 9"/>
+          <p:cNvPr id="12" name="Shape 9"/>
           <p:cNvSpPr/>
           <p:nvPr/>
         </p:nvSpPr>
@@ -12569,7 +12569,7 @@
       </p:sp>
       <p:sp>
         <p:nvSpPr>
-          <p:cNvPr id="14" name="Shape 10"/>
+          <p:cNvPr id="13" name="Shape 10"/>
           <p:cNvSpPr/>
           <p:nvPr/>
         </p:nvSpPr>
@@ -12589,7 +12589,7 @@
       </p:sp>
       <p:sp>
         <p:nvSpPr>
-          <p:cNvPr id="15" name="Text 11"/>
+          <p:cNvPr id="14" name="Text 11"/>
           <p:cNvSpPr/>
           <p:nvPr/>
         </p:nvSpPr>
@@ -12628,7 +12628,7 @@
       </p:sp>
       <p:sp>
         <p:nvSpPr>
-          <p:cNvPr id="16" name="Text 12"/>
+          <p:cNvPr id="15" name="Text 12"/>
           <p:cNvSpPr/>
           <p:nvPr/>
         </p:nvSpPr>
@@ -12667,7 +12667,7 @@
       </p:sp>
       <p:sp>
         <p:nvSpPr>
-          <p:cNvPr id="17" name="Text 13"/>
+          <p:cNvPr id="16" name="Text 13"/>
           <p:cNvSpPr/>
           <p:nvPr/>
         </p:nvSpPr>
@@ -12709,7 +12709,7 @@
       </p:sp>
       <p:sp>
         <p:nvSpPr>
-          <p:cNvPr id="18" name="Shape 14"/>
+          <p:cNvPr id="17" name="Shape 14"/>
           <p:cNvSpPr/>
           <p:nvPr/>
         </p:nvSpPr>
@@ -12736,7 +12736,7 @@
       </p:sp>
       <p:sp>
         <p:nvSpPr>
-          <p:cNvPr id="19" name="Shape 15"/>
+          <p:cNvPr id="18" name="Shape 15"/>
           <p:cNvSpPr/>
           <p:nvPr/>
         </p:nvSpPr>
@@ -12756,7 +12756,7 @@
       </p:sp>
       <p:sp>
         <p:nvSpPr>
-          <p:cNvPr id="20" name="Text 16"/>
+          <p:cNvPr id="19" name="Text 16"/>
           <p:cNvSpPr/>
           <p:nvPr/>
         </p:nvSpPr>
@@ -12795,7 +12795,7 @@
       </p:sp>
       <p:sp>
         <p:nvSpPr>
-          <p:cNvPr id="21" name="Text 17"/>
+          <p:cNvPr id="20" name="Text 17"/>
           <p:cNvSpPr/>
           <p:nvPr/>
         </p:nvSpPr>
@@ -12834,7 +12834,7 @@
       </p:sp>
       <p:sp>
         <p:nvSpPr>
-          <p:cNvPr id="22" name="Text 18"/>
+          <p:cNvPr id="21" name="Text 18"/>
           <p:cNvSpPr/>
           <p:nvPr/>
         </p:nvSpPr>
@@ -12876,7 +12876,7 @@
       </p:sp>
       <p:sp>
         <p:nvSpPr>
-          <p:cNvPr id="23" name="Shape 19"/>
+          <p:cNvPr id="22" name="Shape 19"/>
           <p:cNvSpPr/>
           <p:nvPr/>
         </p:nvSpPr>
@@ -12903,7 +12903,7 @@
       </p:sp>
       <p:sp>
         <p:nvSpPr>
-          <p:cNvPr id="24" name="Shape 20"/>
+          <p:cNvPr id="23" name="Shape 20"/>
           <p:cNvSpPr/>
           <p:nvPr/>
         </p:nvSpPr>
@@ -12923,7 +12923,7 @@
       </p:sp>
       <p:sp>
         <p:nvSpPr>
-          <p:cNvPr id="25" name="Text 21"/>
+          <p:cNvPr id="24" name="Text 21"/>
           <p:cNvSpPr/>
           <p:nvPr/>
         </p:nvSpPr>
@@ -12962,7 +12962,7 @@
       </p:sp>
       <p:sp>
         <p:nvSpPr>
-          <p:cNvPr id="26" name="Text 22"/>
+          <p:cNvPr id="25" name="Text 22"/>
           <p:cNvSpPr/>
           <p:nvPr/>
         </p:nvSpPr>
@@ -13001,7 +13001,7 @@
       </p:sp>
       <p:sp>
         <p:nvSpPr>
-          <p:cNvPr id="27" name="Text 23"/>
+          <p:cNvPr id="26" name="Text 23"/>
           <p:cNvSpPr/>
           <p:nvPr/>
         </p:nvSpPr>
@@ -13043,7 +13043,7 @@
       </p:sp>
       <p:sp>
         <p:nvSpPr>
-          <p:cNvPr id="28" name="Shape 24"/>
+          <p:cNvPr id="27" name="Shape 24"/>
           <p:cNvSpPr/>
           <p:nvPr/>
         </p:nvSpPr>
@@ -13070,7 +13070,7 @@
       </p:sp>
       <p:sp>
         <p:nvSpPr>
-          <p:cNvPr id="29" name="Shape 25"/>
+          <p:cNvPr id="28" name="Shape 25"/>
           <p:cNvSpPr/>
           <p:nvPr/>
         </p:nvSpPr>
@@ -13090,7 +13090,7 @@
       </p:sp>
       <p:sp>
         <p:nvSpPr>
-          <p:cNvPr id="30" name="Text 26"/>
+          <p:cNvPr id="29" name="Text 26"/>
           <p:cNvSpPr/>
           <p:nvPr/>
         </p:nvSpPr>
@@ -13129,7 +13129,7 @@
       </p:sp>
       <p:sp>
         <p:nvSpPr>
-          <p:cNvPr id="31" name="Text 27"/>
+          <p:cNvPr id="30" name="Text 27"/>
           <p:cNvSpPr/>
           <p:nvPr/>
         </p:nvSpPr>
@@ -13168,7 +13168,7 @@
       </p:sp>
       <p:sp>
         <p:nvSpPr>
-          <p:cNvPr id="32" name="Text 28"/>
+          <p:cNvPr id="31" name="Text 28"/>
           <p:cNvSpPr/>
           <p:nvPr/>
         </p:nvSpPr>
@@ -13414,7 +13414,7 @@
       </p:pic>
       <p:sp>
         <p:nvSpPr>
-          <p:cNvPr id="7" name="Shape 3"/>
+          <p:cNvPr id="6" name="Shape 3"/>
           <p:cNvSpPr/>
           <p:nvPr/>
         </p:nvSpPr>
@@ -13436,7 +13436,7 @@
       </p:sp>
       <p:sp>
         <p:nvSpPr>
-          <p:cNvPr id="8" name="Text 4"/>
+          <p:cNvPr id="7" name="Text 4"/>
           <p:cNvSpPr/>
           <p:nvPr/>
         </p:nvSpPr>
@@ -13475,7 +13475,7 @@
       </p:sp>
       <p:sp>
         <p:nvSpPr>
-          <p:cNvPr id="9" name="Text 5"/>
+          <p:cNvPr id="8" name="Text 5"/>
           <p:cNvSpPr/>
           <p:nvPr/>
         </p:nvSpPr>
@@ -13517,7 +13517,7 @@
       </p:sp>
       <p:sp>
         <p:nvSpPr>
-          <p:cNvPr id="10" name="Shape 6"/>
+          <p:cNvPr id="9" name="Shape 6"/>
           <p:cNvSpPr/>
           <p:nvPr/>
         </p:nvSpPr>
@@ -13539,7 +13539,7 @@
       </p:sp>
       <p:sp>
         <p:nvSpPr>
-          <p:cNvPr id="11" name="Text 7"/>
+          <p:cNvPr id="10" name="Text 7"/>
           <p:cNvSpPr/>
           <p:nvPr/>
         </p:nvSpPr>
@@ -13578,7 +13578,7 @@
       </p:sp>
       <p:sp>
         <p:nvSpPr>
-          <p:cNvPr id="12" name="Text 8"/>
+          <p:cNvPr id="11" name="Text 8"/>
           <p:cNvSpPr/>
           <p:nvPr/>
         </p:nvSpPr>
@@ -13620,7 +13620,7 @@
       </p:sp>
       <p:sp>
         <p:nvSpPr>
-          <p:cNvPr id="13" name="Shape 9"/>
+          <p:cNvPr id="12" name="Shape 9"/>
           <p:cNvSpPr/>
           <p:nvPr/>
         </p:nvSpPr>
@@ -13642,7 +13642,7 @@
       </p:sp>
       <p:sp>
         <p:nvSpPr>
-          <p:cNvPr id="14" name="Text 10"/>
+          <p:cNvPr id="13" name="Text 10"/>
           <p:cNvSpPr/>
           <p:nvPr/>
         </p:nvSpPr>
@@ -13681,7 +13681,7 @@
       </p:sp>
       <p:sp>
         <p:nvSpPr>
-          <p:cNvPr id="15" name="Text 11"/>
+          <p:cNvPr id="14" name="Text 11"/>
           <p:cNvSpPr/>
           <p:nvPr/>
         </p:nvSpPr>
@@ -13723,7 +13723,7 @@
       </p:sp>
       <p:sp>
         <p:nvSpPr>
-          <p:cNvPr id="16" name="Shape 12"/>
+          <p:cNvPr id="15" name="Shape 12"/>
           <p:cNvSpPr/>
           <p:nvPr/>
         </p:nvSpPr>
@@ -13750,7 +13750,7 @@
       </p:sp>
       <p:sp>
         <p:nvSpPr>
-          <p:cNvPr id="17" name="Text 13"/>
+          <p:cNvPr id="16" name="Text 13"/>
           <p:cNvSpPr/>
           <p:nvPr/>
         </p:nvSpPr>
@@ -13996,7 +13996,7 @@
       </p:pic>
       <p:sp>
         <p:nvSpPr>
-          <p:cNvPr id="7" name="Shape 3"/>
+          <p:cNvPr id="6" name="Shape 3"/>
           <p:cNvSpPr/>
           <p:nvPr/>
         </p:nvSpPr>
@@ -14023,7 +14023,7 @@
       </p:sp>
       <p:sp>
         <p:nvSpPr>
-          <p:cNvPr id="8" name="Shape 4"/>
+          <p:cNvPr id="7" name="Shape 4"/>
           <p:cNvSpPr/>
           <p:nvPr/>
         </p:nvSpPr>
@@ -14050,7 +14050,7 @@
       </p:sp>
       <p:sp>
         <p:nvSpPr>
-          <p:cNvPr id="9" name="Shape 5"/>
+          <p:cNvPr id="8" name="Shape 5"/>
           <p:cNvSpPr/>
           <p:nvPr/>
         </p:nvSpPr>
@@ -14070,7 +14070,7 @@
       </p:sp>
       <p:sp>
         <p:nvSpPr>
-          <p:cNvPr id="10" name="Shape 6"/>
+          <p:cNvPr id="9" name="Shape 6"/>
           <p:cNvSpPr/>
           <p:nvPr/>
         </p:nvSpPr>
@@ -14090,7 +14090,7 @@
       </p:sp>
       <p:sp>
         <p:nvSpPr>
-          <p:cNvPr id="11" name="Text 7"/>
+          <p:cNvPr id="10" name="Text 7"/>
           <p:cNvSpPr/>
           <p:nvPr/>
         </p:nvSpPr>
@@ -14129,7 +14129,7 @@
       </p:sp>
       <p:sp>
         <p:nvSpPr>
-          <p:cNvPr id="12" name="Shape 8"/>
+          <p:cNvPr id="11" name="Shape 8"/>
           <p:cNvSpPr/>
           <p:nvPr/>
         </p:nvSpPr>
@@ -14156,7 +14156,7 @@
       </p:sp>
       <p:sp>
         <p:nvSpPr>
-          <p:cNvPr id="13" name="Shape 9"/>
+          <p:cNvPr id="12" name="Shape 9"/>
           <p:cNvSpPr/>
           <p:nvPr/>
         </p:nvSpPr>
@@ -14176,7 +14176,7 @@
       </p:sp>
       <p:sp>
         <p:nvSpPr>
-          <p:cNvPr id="14" name="Shape 10"/>
+          <p:cNvPr id="13" name="Shape 10"/>
           <p:cNvSpPr/>
           <p:nvPr/>
         </p:nvSpPr>
@@ -14196,7 +14196,7 @@
       </p:sp>
       <p:sp>
         <p:nvSpPr>
-          <p:cNvPr id="15" name="Text 11"/>
+          <p:cNvPr id="14" name="Text 11"/>
           <p:cNvSpPr/>
           <p:nvPr/>
         </p:nvSpPr>
@@ -14235,7 +14235,7 @@
       </p:sp>
       <p:sp>
         <p:nvSpPr>
-          <p:cNvPr id="16" name="Shape 12"/>
+          <p:cNvPr id="15" name="Shape 12"/>
           <p:cNvSpPr/>
           <p:nvPr/>
         </p:nvSpPr>
@@ -14262,7 +14262,7 @@
       </p:sp>
       <p:sp>
         <p:nvSpPr>
-          <p:cNvPr id="17" name="Shape 13"/>
+          <p:cNvPr id="16" name="Shape 13"/>
           <p:cNvSpPr/>
           <p:nvPr/>
         </p:nvSpPr>
@@ -14282,7 +14282,7 @@
       </p:sp>
       <p:sp>
         <p:nvSpPr>
-          <p:cNvPr id="18" name="Shape 14"/>
+          <p:cNvPr id="17" name="Shape 14"/>
           <p:cNvSpPr/>
           <p:nvPr/>
         </p:nvSpPr>
@@ -14302,7 +14302,7 @@
       </p:sp>
       <p:sp>
         <p:nvSpPr>
-          <p:cNvPr id="19" name="Text 15"/>
+          <p:cNvPr id="18" name="Text 15"/>
           <p:cNvSpPr/>
           <p:nvPr/>
         </p:nvSpPr>
@@ -14341,7 +14341,7 @@
       </p:sp>
       <p:sp>
         <p:nvSpPr>
-          <p:cNvPr id="20" name="Shape 16"/>
+          <p:cNvPr id="19" name="Shape 16"/>
           <p:cNvSpPr/>
           <p:nvPr/>
         </p:nvSpPr>
@@ -14368,7 +14368,7 @@
       </p:sp>
       <p:sp>
         <p:nvSpPr>
-          <p:cNvPr id="21" name="Shape 17"/>
+          <p:cNvPr id="20" name="Shape 17"/>
           <p:cNvSpPr/>
           <p:nvPr/>
         </p:nvSpPr>
@@ -14388,7 +14388,7 @@
       </p:sp>
       <p:sp>
         <p:nvSpPr>
-          <p:cNvPr id="22" name="Shape 18"/>
+          <p:cNvPr id="21" name="Shape 18"/>
           <p:cNvSpPr/>
           <p:nvPr/>
         </p:nvSpPr>
@@ -14408,7 +14408,7 @@
       </p:sp>
       <p:sp>
         <p:nvSpPr>
-          <p:cNvPr id="23" name="Text 19"/>
+          <p:cNvPr id="22" name="Text 19"/>
           <p:cNvSpPr/>
           <p:nvPr/>
         </p:nvSpPr>
@@ -14447,7 +14447,7 @@
       </p:sp>
       <p:sp>
         <p:nvSpPr>
-          <p:cNvPr id="24" name="Text 20"/>
+          <p:cNvPr id="23" name="Text 20"/>
           <p:cNvSpPr/>
           <p:nvPr/>
         </p:nvSpPr>
@@ -14690,7 +14690,7 @@
       </p:pic>
       <p:sp>
         <p:nvSpPr>
-          <p:cNvPr id="7" name="Shape 3"/>
+          <p:cNvPr id="6" name="Shape 3"/>
           <p:cNvSpPr/>
           <p:nvPr/>
         </p:nvSpPr>
@@ -14717,7 +14717,7 @@
       </p:sp>
       <p:sp>
         <p:nvSpPr>
-          <p:cNvPr id="8" name="Shape 4"/>
+          <p:cNvPr id="7" name="Shape 4"/>
           <p:cNvSpPr/>
           <p:nvPr/>
         </p:nvSpPr>
@@ -14737,7 +14737,7 @@
       </p:sp>
       <p:sp>
         <p:nvSpPr>
-          <p:cNvPr id="9" name="Shape 5"/>
+          <p:cNvPr id="8" name="Shape 5"/>
           <p:cNvSpPr/>
           <p:nvPr/>
         </p:nvSpPr>
@@ -14757,7 +14757,7 @@
       </p:sp>
       <p:sp>
         <p:nvSpPr>
-          <p:cNvPr id="10" name="Shape 6"/>
+          <p:cNvPr id="9" name="Shape 6"/>
           <p:cNvSpPr/>
           <p:nvPr/>
         </p:nvSpPr>
@@ -14777,7 +14777,7 @@
       </p:sp>
       <p:sp>
         <p:nvSpPr>
-          <p:cNvPr id="11" name="Text 7"/>
+          <p:cNvPr id="10" name="Text 7"/>
           <p:cNvSpPr/>
           <p:nvPr/>
         </p:nvSpPr>
@@ -14830,7 +14830,7 @@
       </p:sp>
       <p:sp>
         <p:nvSpPr>
-          <p:cNvPr id="12" name="Shape 8"/>
+          <p:cNvPr id="11" name="Shape 8"/>
           <p:cNvSpPr/>
           <p:nvPr/>
         </p:nvSpPr>
@@ -14857,7 +14857,7 @@
       </p:sp>
       <p:sp>
         <p:nvSpPr>
-          <p:cNvPr id="13" name="Shape 9"/>
+          <p:cNvPr id="12" name="Shape 9"/>
           <p:cNvSpPr/>
           <p:nvPr/>
         </p:nvSpPr>
@@ -14877,7 +14877,7 @@
       </p:sp>
       <p:sp>
         <p:nvSpPr>
-          <p:cNvPr id="14" name="Shape 10"/>
+          <p:cNvPr id="13" name="Shape 10"/>
           <p:cNvSpPr/>
           <p:nvPr/>
         </p:nvSpPr>
@@ -14897,7 +14897,7 @@
       </p:sp>
       <p:sp>
         <p:nvSpPr>
-          <p:cNvPr id="15" name="Shape 11"/>
+          <p:cNvPr id="14" name="Shape 11"/>
           <p:cNvSpPr/>
           <p:nvPr/>
         </p:nvSpPr>
@@ -14917,7 +14917,7 @@
       </p:sp>
       <p:sp>
         <p:nvSpPr>
-          <p:cNvPr id="16" name="Text 12"/>
+          <p:cNvPr id="15" name="Text 12"/>
           <p:cNvSpPr/>
           <p:nvPr/>
         </p:nvSpPr>
@@ -14970,7 +14970,7 @@
       </p:sp>
       <p:sp>
         <p:nvSpPr>
-          <p:cNvPr id="17" name="Shape 13"/>
+          <p:cNvPr id="16" name="Shape 13"/>
           <p:cNvSpPr/>
           <p:nvPr/>
         </p:nvSpPr>
@@ -14997,7 +14997,7 @@
       </p:sp>
       <p:sp>
         <p:nvSpPr>
-          <p:cNvPr id="18" name="Shape 14"/>
+          <p:cNvPr id="17" name="Shape 14"/>
           <p:cNvSpPr/>
           <p:nvPr/>
         </p:nvSpPr>
@@ -15017,7 +15017,7 @@
       </p:sp>
       <p:sp>
         <p:nvSpPr>
-          <p:cNvPr id="19" name="Shape 15"/>
+          <p:cNvPr id="18" name="Shape 15"/>
           <p:cNvSpPr/>
           <p:nvPr/>
         </p:nvSpPr>
@@ -15037,7 +15037,7 @@
       </p:sp>
       <p:sp>
         <p:nvSpPr>
-          <p:cNvPr id="20" name="Shape 16"/>
+          <p:cNvPr id="19" name="Shape 16"/>
           <p:cNvSpPr/>
           <p:nvPr/>
         </p:nvSpPr>
@@ -15057,7 +15057,7 @@
       </p:sp>
       <p:sp>
         <p:nvSpPr>
-          <p:cNvPr id="21" name="Text 17"/>
+          <p:cNvPr id="20" name="Text 17"/>
           <p:cNvSpPr/>
           <p:nvPr/>
         </p:nvSpPr>
@@ -15110,7 +15110,7 @@
       </p:sp>
       <p:sp>
         <p:nvSpPr>
-          <p:cNvPr id="22" name="Shape 18"/>
+          <p:cNvPr id="21" name="Shape 18"/>
           <p:cNvSpPr/>
           <p:nvPr/>
         </p:nvSpPr>
@@ -15137,7 +15137,7 @@
       </p:sp>
       <p:sp>
         <p:nvSpPr>
-          <p:cNvPr id="23" name="Shape 19"/>
+          <p:cNvPr id="22" name="Shape 19"/>
           <p:cNvSpPr/>
           <p:nvPr/>
         </p:nvSpPr>
@@ -15157,7 +15157,7 @@
       </p:sp>
       <p:sp>
         <p:nvSpPr>
-          <p:cNvPr id="24" name="Shape 20"/>
+          <p:cNvPr id="23" name="Shape 20"/>
           <p:cNvSpPr/>
           <p:nvPr/>
         </p:nvSpPr>
@@ -15177,7 +15177,7 @@
       </p:sp>
       <p:sp>
         <p:nvSpPr>
-          <p:cNvPr id="25" name="Shape 21"/>
+          <p:cNvPr id="24" name="Shape 21"/>
           <p:cNvSpPr/>
           <p:nvPr/>
         </p:nvSpPr>
@@ -15197,7 +15197,7 @@
       </p:sp>
       <p:sp>
         <p:nvSpPr>
-          <p:cNvPr id="26" name="Text 22"/>
+          <p:cNvPr id="25" name="Text 22"/>
           <p:cNvSpPr/>
           <p:nvPr/>
         </p:nvSpPr>
@@ -15454,7 +15454,7 @@
       </p:pic>
       <p:sp>
         <p:nvSpPr>
-          <p:cNvPr id="7" name="Shape 3"/>
+          <p:cNvPr id="6" name="Shape 3"/>
           <p:cNvSpPr/>
           <p:nvPr/>
         </p:nvSpPr>
@@ -15481,7 +15481,7 @@
       </p:sp>
       <p:sp>
         <p:nvSpPr>
-          <p:cNvPr id="8" name="Text 4"/>
+          <p:cNvPr id="7" name="Text 4"/>
           <p:cNvSpPr/>
           <p:nvPr/>
         </p:nvSpPr>
@@ -15520,7 +15520,7 @@
       </p:sp>
       <p:sp>
         <p:nvSpPr>
-          <p:cNvPr id="9" name="Text 5"/>
+          <p:cNvPr id="8" name="Text 5"/>
           <p:cNvSpPr/>
           <p:nvPr/>
         </p:nvSpPr>
@@ -15620,7 +15620,7 @@
       </p:sp>
       <p:sp>
         <p:nvSpPr>
-          <p:cNvPr id="10" name="Shape 6"/>
+          <p:cNvPr id="9" name="Shape 6"/>
           <p:cNvSpPr/>
           <p:nvPr/>
         </p:nvSpPr>
@@ -15642,7 +15642,7 @@
       </p:sp>
       <p:sp>
         <p:nvSpPr>
-          <p:cNvPr id="11" name="Text 7"/>
+          <p:cNvPr id="10" name="Text 7"/>
           <p:cNvSpPr/>
           <p:nvPr/>
         </p:nvSpPr>
@@ -15681,7 +15681,7 @@
       </p:sp>
       <p:sp>
         <p:nvSpPr>
-          <p:cNvPr id="12" name="Text 8"/>
+          <p:cNvPr id="11" name="Text 8"/>
           <p:cNvSpPr/>
           <p:nvPr/>
         </p:nvSpPr>
@@ -15752,7 +15752,7 @@
       </p:sp>
       <p:sp>
         <p:nvSpPr>
-          <p:cNvPr id="13" name="Shape 9"/>
+          <p:cNvPr id="12" name="Shape 9"/>
           <p:cNvSpPr/>
           <p:nvPr/>
         </p:nvSpPr>
@@ -15779,7 +15779,7 @@
       </p:sp>
       <p:sp>
         <p:nvSpPr>
-          <p:cNvPr id="14" name="Text 10"/>
+          <p:cNvPr id="13" name="Text 10"/>
           <p:cNvSpPr/>
           <p:nvPr/>
         </p:nvSpPr>
@@ -15818,7 +15818,7 @@
       </p:sp>
       <p:sp>
         <p:nvSpPr>
-          <p:cNvPr id="15" name="Text 11"/>
+          <p:cNvPr id="14" name="Text 11"/>
           <p:cNvSpPr/>
           <p:nvPr/>
         </p:nvSpPr>
@@ -16584,7 +16584,7 @@
       </p:pic>
       <p:sp>
         <p:nvSpPr>
-          <p:cNvPr id="7" name="Shape 3"/>
+          <p:cNvPr id="6" name="Shape 3"/>
           <p:cNvSpPr/>
           <p:nvPr/>
         </p:nvSpPr>
@@ -16611,7 +16611,7 @@
       </p:sp>
       <p:sp>
         <p:nvSpPr>
-          <p:cNvPr id="8" name="Shape 4"/>
+          <p:cNvPr id="7" name="Shape 4"/>
           <p:cNvSpPr/>
           <p:nvPr/>
         </p:nvSpPr>
@@ -16631,7 +16631,7 @@
       </p:sp>
       <p:sp>
         <p:nvSpPr>
-          <p:cNvPr id="9" name="Text 5"/>
+          <p:cNvPr id="8" name="Text 5"/>
           <p:cNvSpPr/>
           <p:nvPr/>
         </p:nvSpPr>
@@ -16670,7 +16670,7 @@
       </p:sp>
       <p:sp>
         <p:nvSpPr>
-          <p:cNvPr id="10" name="Text 6"/>
+          <p:cNvPr id="9" name="Text 6"/>
           <p:cNvSpPr/>
           <p:nvPr/>
         </p:nvSpPr>
@@ -16709,7 +16709,7 @@
       </p:sp>
       <p:sp>
         <p:nvSpPr>
-          <p:cNvPr id="11" name="Shape 7"/>
+          <p:cNvPr id="10" name="Shape 7"/>
           <p:cNvSpPr/>
           <p:nvPr/>
         </p:nvSpPr>
@@ -16736,7 +16736,7 @@
       </p:sp>
       <p:sp>
         <p:nvSpPr>
-          <p:cNvPr id="12" name="Shape 8"/>
+          <p:cNvPr id="11" name="Shape 8"/>
           <p:cNvSpPr/>
           <p:nvPr/>
         </p:nvSpPr>
@@ -16756,7 +16756,7 @@
       </p:sp>
       <p:sp>
         <p:nvSpPr>
-          <p:cNvPr id="13" name="Text 9"/>
+          <p:cNvPr id="12" name="Text 9"/>
           <p:cNvSpPr/>
           <p:nvPr/>
         </p:nvSpPr>
@@ -16795,7 +16795,7 @@
       </p:sp>
       <p:sp>
         <p:nvSpPr>
-          <p:cNvPr id="14" name="Text 10"/>
+          <p:cNvPr id="13" name="Text 10"/>
           <p:cNvSpPr/>
           <p:nvPr/>
         </p:nvSpPr>
@@ -16834,7 +16834,7 @@
       </p:sp>
       <p:sp>
         <p:nvSpPr>
-          <p:cNvPr id="15" name="Shape 11"/>
+          <p:cNvPr id="14" name="Shape 11"/>
           <p:cNvSpPr/>
           <p:nvPr/>
         </p:nvSpPr>
@@ -16861,7 +16861,7 @@
       </p:sp>
       <p:sp>
         <p:nvSpPr>
-          <p:cNvPr id="16" name="Shape 12"/>
+          <p:cNvPr id="15" name="Shape 12"/>
           <p:cNvSpPr/>
           <p:nvPr/>
         </p:nvSpPr>
@@ -16881,7 +16881,7 @@
       </p:sp>
       <p:sp>
         <p:nvSpPr>
-          <p:cNvPr id="17" name="Text 13"/>
+          <p:cNvPr id="16" name="Text 13"/>
           <p:cNvSpPr/>
           <p:nvPr/>
         </p:nvSpPr>
@@ -16920,7 +16920,7 @@
       </p:sp>
       <p:sp>
         <p:nvSpPr>
-          <p:cNvPr id="18" name="Text 14"/>
+          <p:cNvPr id="17" name="Text 14"/>
           <p:cNvSpPr/>
           <p:nvPr/>
         </p:nvSpPr>
@@ -16959,7 +16959,7 @@
       </p:sp>
       <p:sp>
         <p:nvSpPr>
-          <p:cNvPr id="19" name="Shape 15"/>
+          <p:cNvPr id="18" name="Shape 15"/>
           <p:cNvSpPr/>
           <p:nvPr/>
         </p:nvSpPr>
@@ -16986,7 +16986,7 @@
       </p:sp>
       <p:sp>
         <p:nvSpPr>
-          <p:cNvPr id="20" name="Shape 16"/>
+          <p:cNvPr id="19" name="Shape 16"/>
           <p:cNvSpPr/>
           <p:nvPr/>
         </p:nvSpPr>
@@ -17006,7 +17006,7 @@
       </p:sp>
       <p:sp>
         <p:nvSpPr>
-          <p:cNvPr id="21" name="Text 17"/>
+          <p:cNvPr id="20" name="Text 17"/>
           <p:cNvSpPr/>
           <p:nvPr/>
         </p:nvSpPr>
@@ -17045,7 +17045,7 @@
       </p:sp>
       <p:sp>
         <p:nvSpPr>
-          <p:cNvPr id="22" name="Text 18"/>
+          <p:cNvPr id="21" name="Text 18"/>
           <p:cNvSpPr/>
           <p:nvPr/>
         </p:nvSpPr>
@@ -17084,7 +17084,7 @@
       </p:sp>
       <p:sp>
         <p:nvSpPr>
-          <p:cNvPr id="23" name="Shape 19"/>
+          <p:cNvPr id="22" name="Shape 19"/>
           <p:cNvSpPr/>
           <p:nvPr/>
         </p:nvSpPr>
@@ -17111,7 +17111,7 @@
       </p:sp>
       <p:sp>
         <p:nvSpPr>
-          <p:cNvPr id="24" name="Shape 20"/>
+          <p:cNvPr id="23" name="Shape 20"/>
           <p:cNvSpPr/>
           <p:nvPr/>
         </p:nvSpPr>
@@ -17131,7 +17131,7 @@
       </p:sp>
       <p:sp>
         <p:nvSpPr>
-          <p:cNvPr id="25" name="Text 21"/>
+          <p:cNvPr id="24" name="Text 21"/>
           <p:cNvSpPr/>
           <p:nvPr/>
         </p:nvSpPr>
@@ -17170,7 +17170,7 @@
       </p:sp>
       <p:sp>
         <p:nvSpPr>
-          <p:cNvPr id="26" name="Text 22"/>
+          <p:cNvPr id="25" name="Text 22"/>
           <p:cNvSpPr/>
           <p:nvPr/>
         </p:nvSpPr>
@@ -17209,7 +17209,7 @@
       </p:sp>
       <p:sp>
         <p:nvSpPr>
-          <p:cNvPr id="27" name="Shape 23"/>
+          <p:cNvPr id="26" name="Shape 23"/>
           <p:cNvSpPr/>
           <p:nvPr/>
         </p:nvSpPr>
@@ -17236,7 +17236,7 @@
       </p:sp>
       <p:sp>
         <p:nvSpPr>
-          <p:cNvPr id="28" name="Shape 24"/>
+          <p:cNvPr id="27" name="Shape 24"/>
           <p:cNvSpPr/>
           <p:nvPr/>
         </p:nvSpPr>
@@ -17256,7 +17256,7 @@
       </p:sp>
       <p:sp>
         <p:nvSpPr>
-          <p:cNvPr id="29" name="Text 25"/>
+          <p:cNvPr id="28" name="Text 25"/>
           <p:cNvSpPr/>
           <p:nvPr/>
         </p:nvSpPr>
@@ -17295,7 +17295,7 @@
       </p:sp>
       <p:sp>
         <p:nvSpPr>
-          <p:cNvPr id="30" name="Text 26"/>
+          <p:cNvPr id="29" name="Text 26"/>
           <p:cNvSpPr/>
           <p:nvPr/>
         </p:nvSpPr>
@@ -17334,7 +17334,7 @@
       </p:sp>
       <p:sp>
         <p:nvSpPr>
-          <p:cNvPr id="31" name="Shape 27"/>
+          <p:cNvPr id="30" name="Shape 27"/>
           <p:cNvSpPr/>
           <p:nvPr/>
         </p:nvSpPr>
@@ -17361,7 +17361,7 @@
       </p:sp>
       <p:sp>
         <p:nvSpPr>
-          <p:cNvPr id="32" name="Shape 28"/>
+          <p:cNvPr id="31" name="Shape 28"/>
           <p:cNvSpPr/>
           <p:nvPr/>
         </p:nvSpPr>
@@ -17381,7 +17381,7 @@
       </p:sp>
       <p:sp>
         <p:nvSpPr>
-          <p:cNvPr id="33" name="Text 29"/>
+          <p:cNvPr id="32" name="Text 29"/>
           <p:cNvSpPr/>
           <p:nvPr/>
         </p:nvSpPr>
@@ -17420,7 +17420,7 @@
       </p:sp>
       <p:sp>
         <p:nvSpPr>
-          <p:cNvPr id="34" name="Text 30"/>
+          <p:cNvPr id="33" name="Text 30"/>
           <p:cNvSpPr/>
           <p:nvPr/>
         </p:nvSpPr>
@@ -17459,7 +17459,7 @@
       </p:sp>
       <p:sp>
         <p:nvSpPr>
-          <p:cNvPr id="35" name="Shape 31"/>
+          <p:cNvPr id="34" name="Shape 31"/>
           <p:cNvSpPr/>
           <p:nvPr/>
         </p:nvSpPr>
@@ -17481,7 +17481,7 @@
       </p:sp>
       <p:sp>
         <p:nvSpPr>
-          <p:cNvPr id="36" name="Shape 32"/>
+          <p:cNvPr id="35" name="Shape 32"/>
           <p:cNvSpPr/>
           <p:nvPr/>
         </p:nvSpPr>
@@ -17501,7 +17501,7 @@
       </p:sp>
       <p:sp>
         <p:nvSpPr>
-          <p:cNvPr id="37" name="Text 33"/>
+          <p:cNvPr id="36" name="Text 33"/>
           <p:cNvSpPr/>
           <p:nvPr/>
         </p:nvSpPr>
@@ -17540,7 +17540,7 @@
       </p:sp>
       <p:sp>
         <p:nvSpPr>
-          <p:cNvPr id="38" name="Text 34"/>
+          <p:cNvPr id="37" name="Text 34"/>
           <p:cNvSpPr/>
           <p:nvPr/>
         </p:nvSpPr>
@@ -17579,7 +17579,7 @@
       </p:sp>
       <p:sp>
         <p:nvSpPr>
-          <p:cNvPr id="39" name="Shape 35"/>
+          <p:cNvPr id="38" name="Shape 35"/>
           <p:cNvSpPr/>
           <p:nvPr/>
         </p:nvSpPr>
@@ -17606,7 +17606,7 @@
       </p:sp>
       <p:sp>
         <p:nvSpPr>
-          <p:cNvPr id="40" name="Shape 36"/>
+          <p:cNvPr id="39" name="Shape 36"/>
           <p:cNvSpPr/>
           <p:nvPr/>
         </p:nvSpPr>
@@ -17626,7 +17626,7 @@
       </p:sp>
       <p:sp>
         <p:nvSpPr>
-          <p:cNvPr id="41" name="Text 37"/>
+          <p:cNvPr id="40" name="Text 37"/>
           <p:cNvSpPr/>
           <p:nvPr/>
         </p:nvSpPr>
@@ -17665,7 +17665,7 @@
       </p:sp>
       <p:sp>
         <p:nvSpPr>
-          <p:cNvPr id="42" name="Text 38"/>
+          <p:cNvPr id="41" name="Text 38"/>
           <p:cNvSpPr/>
           <p:nvPr/>
         </p:nvSpPr>
@@ -17704,7 +17704,7 @@
       </p:sp>
       <p:sp>
         <p:nvSpPr>
-          <p:cNvPr id="43" name="Shape 39"/>
+          <p:cNvPr id="42" name="Shape 39"/>
           <p:cNvSpPr/>
           <p:nvPr/>
         </p:nvSpPr>
@@ -17731,7 +17731,7 @@
       </p:sp>
       <p:sp>
         <p:nvSpPr>
-          <p:cNvPr id="44" name="Shape 40"/>
+          <p:cNvPr id="43" name="Shape 40"/>
           <p:cNvSpPr/>
           <p:nvPr/>
         </p:nvSpPr>
@@ -17751,7 +17751,7 @@
       </p:sp>
       <p:sp>
         <p:nvSpPr>
-          <p:cNvPr id="45" name="Text 41"/>
+          <p:cNvPr id="44" name="Text 41"/>
           <p:cNvSpPr/>
           <p:nvPr/>
         </p:nvSpPr>
@@ -17790,7 +17790,7 @@
       </p:sp>
       <p:sp>
         <p:nvSpPr>
-          <p:cNvPr id="46" name="Text 42"/>
+          <p:cNvPr id="45" name="Text 42"/>
           <p:cNvSpPr/>
           <p:nvPr/>
         </p:nvSpPr>
@@ -17829,7 +17829,7 @@
       </p:sp>
       <p:sp>
         <p:nvSpPr>
-          <p:cNvPr id="47" name="Shape 43"/>
+          <p:cNvPr id="46" name="Shape 43"/>
           <p:cNvSpPr/>
           <p:nvPr/>
         </p:nvSpPr>
@@ -17856,7 +17856,7 @@
       </p:sp>
       <p:sp>
         <p:nvSpPr>
-          <p:cNvPr id="48" name="Text 44"/>
+          <p:cNvPr id="47" name="Text 44"/>
           <p:cNvSpPr/>
           <p:nvPr/>
         </p:nvSpPr>
@@ -18144,7 +18144,7 @@
       </p:pic>
       <p:sp>
         <p:nvSpPr>
-          <p:cNvPr id="8" name="Shape 4"/>
+          <p:cNvPr id="7" name="Shape 4"/>
           <p:cNvSpPr/>
           <p:nvPr/>
         </p:nvSpPr>
@@ -18171,7 +18171,7 @@
       </p:sp>
       <p:sp>
         <p:nvSpPr>
-          <p:cNvPr id="9" name="Text 5"/>
+          <p:cNvPr id="8" name="Text 5"/>
           <p:cNvSpPr/>
           <p:nvPr/>
         </p:nvSpPr>
@@ -18210,7 +18210,7 @@
       </p:sp>
       <p:sp>
         <p:nvSpPr>
-          <p:cNvPr id="10" name="Text 6"/>
+          <p:cNvPr id="9" name="Text 6"/>
           <p:cNvSpPr/>
           <p:nvPr/>
         </p:nvSpPr>
@@ -18252,7 +18252,7 @@
       </p:sp>
       <p:sp>
         <p:nvSpPr>
-          <p:cNvPr id="11" name="Shape 7"/>
+          <p:cNvPr id="10" name="Shape 7"/>
           <p:cNvSpPr/>
           <p:nvPr/>
         </p:nvSpPr>
@@ -18279,7 +18279,7 @@
       </p:sp>
       <p:sp>
         <p:nvSpPr>
-          <p:cNvPr id="12" name="Text 8"/>
+          <p:cNvPr id="11" name="Text 8"/>
           <p:cNvSpPr/>
           <p:nvPr/>
         </p:nvSpPr>
@@ -18318,7 +18318,7 @@
       </p:sp>
       <p:sp>
         <p:nvSpPr>
-          <p:cNvPr id="13" name="Text 9"/>
+          <p:cNvPr id="12" name="Text 9"/>
           <p:cNvSpPr/>
           <p:nvPr/>
         </p:nvSpPr>
@@ -18360,7 +18360,7 @@
       </p:sp>
       <p:sp>
         <p:nvSpPr>
-          <p:cNvPr id="14" name="Shape 10"/>
+          <p:cNvPr id="13" name="Shape 10"/>
           <p:cNvSpPr/>
           <p:nvPr/>
         </p:nvSpPr>
@@ -18387,7 +18387,7 @@
       </p:sp>
       <p:sp>
         <p:nvSpPr>
-          <p:cNvPr id="15" name="Text 11"/>
+          <p:cNvPr id="14" name="Text 11"/>
           <p:cNvSpPr/>
           <p:nvPr/>
         </p:nvSpPr>
@@ -18426,7 +18426,7 @@
       </p:sp>
       <p:sp>
         <p:nvSpPr>
-          <p:cNvPr id="16" name="Text 12"/>
+          <p:cNvPr id="15" name="Text 12"/>
           <p:cNvSpPr/>
           <p:nvPr/>
         </p:nvSpPr>
@@ -18468,7 +18468,7 @@
       </p:sp>
       <p:sp>
         <p:nvSpPr>
-          <p:cNvPr id="17" name="Shape 13"/>
+          <p:cNvPr id="16" name="Shape 13"/>
           <p:cNvSpPr/>
           <p:nvPr/>
         </p:nvSpPr>
@@ -18495,7 +18495,7 @@
       </p:sp>
       <p:sp>
         <p:nvSpPr>
-          <p:cNvPr id="18" name="Text 14"/>
+          <p:cNvPr id="17" name="Text 14"/>
           <p:cNvSpPr/>
           <p:nvPr/>
         </p:nvSpPr>
@@ -18534,7 +18534,7 @@
       </p:sp>
       <p:sp>
         <p:nvSpPr>
-          <p:cNvPr id="19" name="Text 15"/>
+          <p:cNvPr id="18" name="Text 15"/>
           <p:cNvSpPr/>
           <p:nvPr/>
         </p:nvSpPr>
@@ -18576,7 +18576,7 @@
       </p:sp>
       <p:sp>
         <p:nvSpPr>
-          <p:cNvPr id="20" name="Shape 16"/>
+          <p:cNvPr id="19" name="Shape 16"/>
           <p:cNvSpPr/>
           <p:nvPr/>
         </p:nvSpPr>
@@ -18603,7 +18603,7 @@
       </p:sp>
       <p:sp>
         <p:nvSpPr>
-          <p:cNvPr id="21" name="Text 17"/>
+          <p:cNvPr id="20" name="Text 17"/>
           <p:cNvSpPr/>
           <p:nvPr/>
         </p:nvSpPr>
@@ -18642,7 +18642,7 @@
       </p:sp>
       <p:sp>
         <p:nvSpPr>
-          <p:cNvPr id="22" name="Text 18"/>
+          <p:cNvPr id="21" name="Text 18"/>
           <p:cNvSpPr/>
           <p:nvPr/>
         </p:nvSpPr>
@@ -18684,7 +18684,7 @@
       </p:sp>
       <p:sp>
         <p:nvSpPr>
-          <p:cNvPr id="23" name="Shape 19"/>
+          <p:cNvPr id="22" name="Shape 19"/>
           <p:cNvSpPr/>
           <p:nvPr/>
         </p:nvSpPr>
@@ -18711,7 +18711,7 @@
       </p:sp>
       <p:sp>
         <p:nvSpPr>
-          <p:cNvPr id="24" name="Text 20"/>
+          <p:cNvPr id="23" name="Text 20"/>
           <p:cNvSpPr/>
           <p:nvPr/>
         </p:nvSpPr>
@@ -18750,7 +18750,7 @@
       </p:sp>
       <p:sp>
         <p:nvSpPr>
-          <p:cNvPr id="25" name="Text 21"/>
+          <p:cNvPr id="24" name="Text 21"/>
           <p:cNvSpPr/>
           <p:nvPr/>
         </p:nvSpPr>
@@ -18792,7 +18792,7 @@
       </p:sp>
       <p:sp>
         <p:nvSpPr>
-          <p:cNvPr id="26" name="Shape 22"/>
+          <p:cNvPr id="25" name="Shape 22"/>
           <p:cNvSpPr/>
           <p:nvPr/>
         </p:nvSpPr>
@@ -18819,7 +18819,7 @@
       </p:sp>
       <p:sp>
         <p:nvSpPr>
-          <p:cNvPr id="27" name="Text 23"/>
+          <p:cNvPr id="26" name="Text 23"/>
           <p:cNvSpPr/>
           <p:nvPr/>
         </p:nvSpPr>
@@ -19104,7 +19104,7 @@
       </p:pic>
       <p:sp>
         <p:nvSpPr>
-          <p:cNvPr id="8" name="Shape 4"/>
+          <p:cNvPr id="7" name="Shape 4"/>
           <p:cNvSpPr/>
           <p:nvPr/>
         </p:nvSpPr>
@@ -19126,7 +19126,7 @@
       </p:sp>
       <p:sp>
         <p:nvSpPr>
-          <p:cNvPr id="9" name="Text 5"/>
+          <p:cNvPr id="8" name="Text 5"/>
           <p:cNvSpPr/>
           <p:nvPr/>
         </p:nvSpPr>
@@ -19165,7 +19165,7 @@
       </p:sp>
       <p:sp>
         <p:nvSpPr>
-          <p:cNvPr id="10" name="Text 6"/>
+          <p:cNvPr id="9" name="Text 6"/>
           <p:cNvSpPr/>
           <p:nvPr/>
         </p:nvSpPr>
@@ -19204,7 +19204,7 @@
       </p:sp>
       <p:sp>
         <p:nvSpPr>
-          <p:cNvPr id="11" name="Shape 7"/>
+          <p:cNvPr id="10" name="Shape 7"/>
           <p:cNvSpPr/>
           <p:nvPr/>
         </p:nvSpPr>
@@ -19226,7 +19226,7 @@
       </p:sp>
       <p:sp>
         <p:nvSpPr>
-          <p:cNvPr id="12" name="Text 8"/>
+          <p:cNvPr id="11" name="Text 8"/>
           <p:cNvSpPr/>
           <p:nvPr/>
         </p:nvSpPr>
@@ -19265,7 +19265,7 @@
       </p:sp>
       <p:sp>
         <p:nvSpPr>
-          <p:cNvPr id="13" name="Text 9"/>
+          <p:cNvPr id="12" name="Text 9"/>
           <p:cNvSpPr/>
           <p:nvPr/>
         </p:nvSpPr>
@@ -19304,7 +19304,7 @@
       </p:sp>
       <p:sp>
         <p:nvSpPr>
-          <p:cNvPr id="14" name="Shape 10"/>
+          <p:cNvPr id="13" name="Shape 10"/>
           <p:cNvSpPr/>
           <p:nvPr/>
         </p:nvSpPr>
@@ -19326,7 +19326,7 @@
       </p:sp>
       <p:sp>
         <p:nvSpPr>
-          <p:cNvPr id="15" name="Text 11"/>
+          <p:cNvPr id="14" name="Text 11"/>
           <p:cNvSpPr/>
           <p:nvPr/>
         </p:nvSpPr>
@@ -19365,7 +19365,7 @@
       </p:sp>
       <p:sp>
         <p:nvSpPr>
-          <p:cNvPr id="16" name="Text 12"/>
+          <p:cNvPr id="15" name="Text 12"/>
           <p:cNvSpPr/>
           <p:nvPr/>
         </p:nvSpPr>
@@ -19407,7 +19407,7 @@
       </p:sp>
       <p:sp>
         <p:nvSpPr>
-          <p:cNvPr id="17" name="Shape 13"/>
+          <p:cNvPr id="16" name="Shape 13"/>
           <p:cNvSpPr/>
           <p:nvPr/>
         </p:nvSpPr>
@@ -19429,7 +19429,7 @@
       </p:sp>
       <p:sp>
         <p:nvSpPr>
-          <p:cNvPr id="18" name="Text 14"/>
+          <p:cNvPr id="17" name="Text 14"/>
           <p:cNvSpPr/>
           <p:nvPr/>
         </p:nvSpPr>
@@ -19468,7 +19468,7 @@
       </p:sp>
       <p:sp>
         <p:nvSpPr>
-          <p:cNvPr id="19" name="Text 15"/>
+          <p:cNvPr id="18" name="Text 15"/>
           <p:cNvSpPr/>
           <p:nvPr/>
         </p:nvSpPr>
@@ -19753,7 +19753,7 @@
       </p:pic>
       <p:sp>
         <p:nvSpPr>
-          <p:cNvPr id="8" name="Shape 4"/>
+          <p:cNvPr id="7" name="Shape 4"/>
           <p:cNvSpPr/>
           <p:nvPr/>
         </p:nvSpPr>
@@ -19775,7 +19775,7 @@
       </p:sp>
       <p:sp>
         <p:nvSpPr>
-          <p:cNvPr id="9" name="Text 5"/>
+          <p:cNvPr id="8" name="Text 5"/>
           <p:cNvSpPr/>
           <p:nvPr/>
         </p:nvSpPr>
@@ -19814,7 +19814,7 @@
       </p:sp>
       <p:sp>
         <p:nvSpPr>
-          <p:cNvPr id="10" name="Text 6"/>
+          <p:cNvPr id="9" name="Text 6"/>
           <p:cNvSpPr/>
           <p:nvPr/>
         </p:nvSpPr>
@@ -19856,7 +19856,7 @@
       </p:sp>
       <p:sp>
         <p:nvSpPr>
-          <p:cNvPr id="11" name="Shape 7"/>
+          <p:cNvPr id="10" name="Shape 7"/>
           <p:cNvSpPr/>
           <p:nvPr/>
         </p:nvSpPr>
@@ -19878,7 +19878,7 @@
       </p:sp>
       <p:sp>
         <p:nvSpPr>
-          <p:cNvPr id="12" name="Text 8"/>
+          <p:cNvPr id="11" name="Text 8"/>
           <p:cNvSpPr/>
           <p:nvPr/>
         </p:nvSpPr>
@@ -19917,7 +19917,7 @@
       </p:sp>
       <p:sp>
         <p:nvSpPr>
-          <p:cNvPr id="13" name="Text 9"/>
+          <p:cNvPr id="12" name="Text 9"/>
           <p:cNvSpPr/>
           <p:nvPr/>
         </p:nvSpPr>
@@ -19959,7 +19959,7 @@
       </p:sp>
       <p:sp>
         <p:nvSpPr>
-          <p:cNvPr id="14" name="Shape 10"/>
+          <p:cNvPr id="13" name="Shape 10"/>
           <p:cNvSpPr/>
           <p:nvPr/>
         </p:nvSpPr>
@@ -19981,7 +19981,7 @@
       </p:sp>
       <p:sp>
         <p:nvSpPr>
-          <p:cNvPr id="15" name="Text 11"/>
+          <p:cNvPr id="14" name="Text 11"/>
           <p:cNvSpPr/>
           <p:nvPr/>
         </p:nvSpPr>
@@ -20020,7 +20020,7 @@
       </p:sp>
       <p:sp>
         <p:nvSpPr>
-          <p:cNvPr id="16" name="Text 12"/>
+          <p:cNvPr id="15" name="Text 12"/>
           <p:cNvSpPr/>
           <p:nvPr/>
         </p:nvSpPr>
@@ -20062,7 +20062,7 @@
       </p:sp>
       <p:sp>
         <p:nvSpPr>
-          <p:cNvPr id="17" name="Shape 13"/>
+          <p:cNvPr id="16" name="Shape 13"/>
           <p:cNvSpPr/>
           <p:nvPr/>
         </p:nvSpPr>
@@ -20084,7 +20084,7 @@
       </p:sp>
       <p:sp>
         <p:nvSpPr>
-          <p:cNvPr id="18" name="Text 14"/>
+          <p:cNvPr id="17" name="Text 14"/>
           <p:cNvSpPr/>
           <p:nvPr/>
         </p:nvSpPr>
@@ -20123,7 +20123,7 @@
       </p:sp>
       <p:sp>
         <p:nvSpPr>
-          <p:cNvPr id="19" name="Text 15"/>
+          <p:cNvPr id="18" name="Text 15"/>
           <p:cNvSpPr/>
           <p:nvPr/>
         </p:nvSpPr>
@@ -20165,7 +20165,7 @@
       </p:sp>
       <p:sp>
         <p:nvSpPr>
-          <p:cNvPr id="20" name="Shape 16"/>
+          <p:cNvPr id="19" name="Shape 16"/>
           <p:cNvSpPr/>
           <p:nvPr/>
         </p:nvSpPr>
@@ -20187,7 +20187,7 @@
       </p:sp>
       <p:sp>
         <p:nvSpPr>
-          <p:cNvPr id="21" name="Text 17"/>
+          <p:cNvPr id="20" name="Text 17"/>
           <p:cNvSpPr/>
           <p:nvPr/>
         </p:nvSpPr>
@@ -20226,7 +20226,7 @@
       </p:sp>
       <p:sp>
         <p:nvSpPr>
-          <p:cNvPr id="22" name="Text 18"/>
+          <p:cNvPr id="21" name="Text 18"/>
           <p:cNvSpPr/>
           <p:nvPr/>
         </p:nvSpPr>
@@ -20268,7 +20268,7 @@
       </p:sp>
       <p:sp>
         <p:nvSpPr>
-          <p:cNvPr id="23" name="Shape 19"/>
+          <p:cNvPr id="22" name="Shape 19"/>
           <p:cNvSpPr/>
           <p:nvPr/>
         </p:nvSpPr>
@@ -20295,7 +20295,7 @@
       </p:sp>
       <p:sp>
         <p:nvSpPr>
-          <p:cNvPr id="24" name="Text 20"/>
+          <p:cNvPr id="23" name="Text 20"/>
           <p:cNvSpPr/>
           <p:nvPr/>
         </p:nvSpPr>
@@ -20580,7 +20580,7 @@
       </p:pic>
       <p:sp>
         <p:nvSpPr>
-          <p:cNvPr id="8" name="Shape 4"/>
+          <p:cNvPr id="7" name="Shape 4"/>
           <p:cNvSpPr/>
           <p:nvPr/>
         </p:nvSpPr>
@@ -20607,7 +20607,7 @@
       </p:sp>
       <p:sp>
         <p:nvSpPr>
-          <p:cNvPr id="9" name="Text 5"/>
+          <p:cNvPr id="8" name="Text 5"/>
           <p:cNvSpPr/>
           <p:nvPr/>
         </p:nvSpPr>
@@ -20683,7 +20683,7 @@
       </p:sp>
       <p:sp>
         <p:nvSpPr>
-          <p:cNvPr id="10" name="Shape 6"/>
+          <p:cNvPr id="9" name="Shape 6"/>
           <p:cNvSpPr/>
           <p:nvPr/>
         </p:nvSpPr>
@@ -20705,7 +20705,7 @@
       </p:sp>
       <p:sp>
         <p:nvSpPr>
-          <p:cNvPr id="11" name="Text 7"/>
+          <p:cNvPr id="10" name="Text 7"/>
           <p:cNvSpPr/>
           <p:nvPr/>
         </p:nvSpPr>
@@ -20744,7 +20744,7 @@
       </p:sp>
       <p:sp>
         <p:nvSpPr>
-          <p:cNvPr id="12" name="Shape 8"/>
+          <p:cNvPr id="11" name="Shape 8"/>
           <p:cNvSpPr/>
           <p:nvPr/>
         </p:nvSpPr>
@@ -20767,7 +20767,7 @@
       </p:sp>
       <p:sp>
         <p:nvSpPr>
-          <p:cNvPr id="13" name="Shape 9"/>
+          <p:cNvPr id="12" name="Shape 9"/>
           <p:cNvSpPr/>
           <p:nvPr/>
         </p:nvSpPr>
@@ -20787,7 +20787,7 @@
       </p:sp>
       <p:sp>
         <p:nvSpPr>
-          <p:cNvPr id="14" name="Shape 10"/>
+          <p:cNvPr id="13" name="Shape 10"/>
           <p:cNvSpPr/>
           <p:nvPr/>
         </p:nvSpPr>
@@ -20809,7 +20809,7 @@
       </p:sp>
       <p:sp>
         <p:nvSpPr>
-          <p:cNvPr id="15" name="Text 11"/>
+          <p:cNvPr id="14" name="Text 11"/>
           <p:cNvSpPr/>
           <p:nvPr/>
         </p:nvSpPr>
@@ -20848,7 +20848,7 @@
       </p:sp>
       <p:sp>
         <p:nvSpPr>
-          <p:cNvPr id="16" name="Shape 12"/>
+          <p:cNvPr id="15" name="Shape 12"/>
           <p:cNvSpPr/>
           <p:nvPr/>
         </p:nvSpPr>
@@ -20871,7 +20871,7 @@
       </p:sp>
       <p:sp>
         <p:nvSpPr>
-          <p:cNvPr id="17" name="Shape 13"/>
+          <p:cNvPr id="16" name="Shape 13"/>
           <p:cNvSpPr/>
           <p:nvPr/>
         </p:nvSpPr>
@@ -20891,7 +20891,7 @@
       </p:sp>
       <p:sp>
         <p:nvSpPr>
-          <p:cNvPr id="18" name="Shape 14"/>
+          <p:cNvPr id="17" name="Shape 14"/>
           <p:cNvSpPr/>
           <p:nvPr/>
         </p:nvSpPr>
@@ -20913,7 +20913,7 @@
       </p:sp>
       <p:sp>
         <p:nvSpPr>
-          <p:cNvPr id="19" name="Text 15"/>
+          <p:cNvPr id="18" name="Text 15"/>
           <p:cNvSpPr/>
           <p:nvPr/>
         </p:nvSpPr>
@@ -20952,7 +20952,7 @@
       </p:sp>
       <p:sp>
         <p:nvSpPr>
-          <p:cNvPr id="20" name="Shape 16"/>
+          <p:cNvPr id="19" name="Shape 16"/>
           <p:cNvSpPr/>
           <p:nvPr/>
         </p:nvSpPr>
@@ -20974,7 +20974,7 @@
       </p:sp>
       <p:sp>
         <p:nvSpPr>
-          <p:cNvPr id="21" name="Text 17"/>
+          <p:cNvPr id="20" name="Text 17"/>
           <p:cNvSpPr/>
           <p:nvPr/>
         </p:nvSpPr>
@@ -21013,7 +21013,7 @@
       </p:sp>
       <p:sp>
         <p:nvSpPr>
-          <p:cNvPr id="22" name="Text 18"/>
+          <p:cNvPr id="21" name="Text 18"/>
           <p:cNvSpPr/>
           <p:nvPr/>
         </p:nvSpPr>
@@ -21055,7 +21055,7 @@
       </p:sp>
       <p:sp>
         <p:nvSpPr>
-          <p:cNvPr id="23" name="Shape 19"/>
+          <p:cNvPr id="22" name="Shape 19"/>
           <p:cNvSpPr/>
           <p:nvPr/>
         </p:nvSpPr>
@@ -21077,7 +21077,7 @@
       </p:sp>
       <p:sp>
         <p:nvSpPr>
-          <p:cNvPr id="24" name="Text 20"/>
+          <p:cNvPr id="23" name="Text 20"/>
           <p:cNvSpPr/>
           <p:nvPr/>
         </p:nvSpPr>
@@ -21362,7 +21362,7 @@
       </p:pic>
       <p:sp>
         <p:nvSpPr>
-          <p:cNvPr id="8" name="Shape 4"/>
+          <p:cNvPr id="7" name="Shape 4"/>
           <p:cNvSpPr/>
           <p:nvPr/>
         </p:nvSpPr>
@@ -21384,7 +21384,7 @@
       </p:sp>
       <p:sp>
         <p:nvSpPr>
-          <p:cNvPr id="9" name="Text 5"/>
+          <p:cNvPr id="8" name="Text 5"/>
           <p:cNvSpPr/>
           <p:nvPr/>
         </p:nvSpPr>
@@ -21423,7 +21423,7 @@
       </p:sp>
       <p:sp>
         <p:nvSpPr>
-          <p:cNvPr id="10" name="Text 6"/>
+          <p:cNvPr id="9" name="Text 6"/>
           <p:cNvSpPr/>
           <p:nvPr/>
         </p:nvSpPr>
@@ -21462,7 +21462,7 @@
       </p:sp>
       <p:sp>
         <p:nvSpPr>
-          <p:cNvPr id="11" name="Shape 7"/>
+          <p:cNvPr id="10" name="Shape 7"/>
           <p:cNvSpPr/>
           <p:nvPr/>
         </p:nvSpPr>
@@ -21489,7 +21489,7 @@
       </p:sp>
       <p:sp>
         <p:nvSpPr>
-          <p:cNvPr id="12" name="Text 8"/>
+          <p:cNvPr id="11" name="Text 8"/>
           <p:cNvSpPr/>
           <p:nvPr/>
         </p:nvSpPr>
@@ -21528,7 +21528,7 @@
       </p:sp>
       <p:sp>
         <p:nvSpPr>
-          <p:cNvPr id="13" name="Text 9"/>
+          <p:cNvPr id="12" name="Text 9"/>
           <p:cNvSpPr/>
           <p:nvPr/>
         </p:nvSpPr>
@@ -21567,7 +21567,7 @@
       </p:sp>
       <p:sp>
         <p:nvSpPr>
-          <p:cNvPr id="14" name="Shape 10"/>
+          <p:cNvPr id="13" name="Shape 10"/>
           <p:cNvSpPr/>
           <p:nvPr/>
         </p:nvSpPr>
@@ -21589,7 +21589,7 @@
       </p:sp>
       <p:sp>
         <p:nvSpPr>
-          <p:cNvPr id="15" name="Text 11"/>
+          <p:cNvPr id="14" name="Text 11"/>
           <p:cNvSpPr/>
           <p:nvPr/>
         </p:nvSpPr>
@@ -21628,7 +21628,7 @@
       </p:sp>
       <p:sp>
         <p:nvSpPr>
-          <p:cNvPr id="16" name="Text 12"/>
+          <p:cNvPr id="15" name="Text 12"/>
           <p:cNvSpPr/>
           <p:nvPr/>
         </p:nvSpPr>
@@ -21667,7 +21667,7 @@
       </p:sp>
       <p:sp>
         <p:nvSpPr>
-          <p:cNvPr id="17" name="Shape 13"/>
+          <p:cNvPr id="16" name="Shape 13"/>
           <p:cNvSpPr/>
           <p:nvPr/>
         </p:nvSpPr>
@@ -21689,7 +21689,7 @@
       </p:sp>
       <p:sp>
         <p:nvSpPr>
-          <p:cNvPr id="18" name="Text 14"/>
+          <p:cNvPr id="17" name="Text 14"/>
           <p:cNvSpPr/>
           <p:nvPr/>
         </p:nvSpPr>
@@ -21728,7 +21728,7 @@
       </p:sp>
       <p:sp>
         <p:nvSpPr>
-          <p:cNvPr id="19" name="Text 15"/>
+          <p:cNvPr id="18" name="Text 15"/>
           <p:cNvSpPr/>
           <p:nvPr/>
         </p:nvSpPr>
@@ -22013,7 +22013,7 @@
       </p:pic>
       <p:sp>
         <p:nvSpPr>
-          <p:cNvPr id="8" name="Shape 4"/>
+          <p:cNvPr id="7" name="Shape 4"/>
           <p:cNvSpPr/>
           <p:nvPr/>
         </p:nvSpPr>
@@ -22040,7 +22040,7 @@
       </p:sp>
       <p:sp>
         <p:nvSpPr>
-          <p:cNvPr id="9" name="Text 5"/>
+          <p:cNvPr id="8" name="Text 5"/>
           <p:cNvSpPr/>
           <p:nvPr/>
         </p:nvSpPr>
@@ -22242,7 +22242,7 @@
       </p:sp>
       <p:sp>
         <p:nvSpPr>
-          <p:cNvPr id="10" name="Shape 6"/>
+          <p:cNvPr id="9" name="Shape 6"/>
           <p:cNvSpPr/>
           <p:nvPr/>
         </p:nvSpPr>
@@ -22264,7 +22264,7 @@
       </p:sp>
       <p:sp>
         <p:nvSpPr>
-          <p:cNvPr id="11" name="Shape 7"/>
+          <p:cNvPr id="10" name="Shape 7"/>
           <p:cNvSpPr/>
           <p:nvPr/>
         </p:nvSpPr>
@@ -22284,7 +22284,7 @@
       </p:sp>
       <p:sp>
         <p:nvSpPr>
-          <p:cNvPr id="12" name="Text 8"/>
+          <p:cNvPr id="11" name="Text 8"/>
           <p:cNvSpPr/>
           <p:nvPr/>
         </p:nvSpPr>
@@ -22323,7 +22323,7 @@
       </p:sp>
       <p:sp>
         <p:nvSpPr>
-          <p:cNvPr id="13" name="Text 9"/>
+          <p:cNvPr id="12" name="Text 9"/>
           <p:cNvSpPr/>
           <p:nvPr/>
         </p:nvSpPr>
@@ -22362,7 +22362,7 @@
       </p:sp>
       <p:sp>
         <p:nvSpPr>
-          <p:cNvPr id="14" name="Text 10"/>
+          <p:cNvPr id="13" name="Text 10"/>
           <p:cNvSpPr/>
           <p:nvPr/>
         </p:nvSpPr>
@@ -22404,7 +22404,7 @@
       </p:sp>
       <p:sp>
         <p:nvSpPr>
-          <p:cNvPr id="15" name="Shape 11"/>
+          <p:cNvPr id="14" name="Shape 11"/>
           <p:cNvSpPr/>
           <p:nvPr/>
         </p:nvSpPr>
@@ -22426,7 +22426,7 @@
       </p:sp>
       <p:sp>
         <p:nvSpPr>
-          <p:cNvPr id="16" name="Shape 12"/>
+          <p:cNvPr id="15" name="Shape 12"/>
           <p:cNvSpPr/>
           <p:nvPr/>
         </p:nvSpPr>
@@ -22446,7 +22446,7 @@
       </p:sp>
       <p:sp>
         <p:nvSpPr>
-          <p:cNvPr id="17" name="Text 13"/>
+          <p:cNvPr id="16" name="Text 13"/>
           <p:cNvSpPr/>
           <p:nvPr/>
         </p:nvSpPr>
@@ -22485,7 +22485,7 @@
       </p:sp>
       <p:sp>
         <p:nvSpPr>
-          <p:cNvPr id="18" name="Text 14"/>
+          <p:cNvPr id="17" name="Text 14"/>
           <p:cNvSpPr/>
           <p:nvPr/>
         </p:nvSpPr>
@@ -22524,7 +22524,7 @@
       </p:sp>
       <p:sp>
         <p:nvSpPr>
-          <p:cNvPr id="19" name="Text 15"/>
+          <p:cNvPr id="18" name="Text 15"/>
           <p:cNvSpPr/>
           <p:nvPr/>
         </p:nvSpPr>
@@ -22566,7 +22566,7 @@
       </p:sp>
       <p:sp>
         <p:nvSpPr>
-          <p:cNvPr id="20" name="Shape 16"/>
+          <p:cNvPr id="19" name="Shape 16"/>
           <p:cNvSpPr/>
           <p:nvPr/>
         </p:nvSpPr>
@@ -22588,7 +22588,7 @@
       </p:sp>
       <p:sp>
         <p:nvSpPr>
-          <p:cNvPr id="21" name="Shape 17"/>
+          <p:cNvPr id="20" name="Shape 17"/>
           <p:cNvSpPr/>
           <p:nvPr/>
         </p:nvSpPr>
@@ -22608,7 +22608,7 @@
       </p:sp>
       <p:sp>
         <p:nvSpPr>
-          <p:cNvPr id="22" name="Text 18"/>
+          <p:cNvPr id="21" name="Text 18"/>
           <p:cNvSpPr/>
           <p:nvPr/>
         </p:nvSpPr>
@@ -22647,7 +22647,7 @@
       </p:sp>
       <p:sp>
         <p:nvSpPr>
-          <p:cNvPr id="23" name="Text 19"/>
+          <p:cNvPr id="22" name="Text 19"/>
           <p:cNvSpPr/>
           <p:nvPr/>
         </p:nvSpPr>
@@ -22686,7 +22686,7 @@
       </p:sp>
       <p:sp>
         <p:nvSpPr>
-          <p:cNvPr id="24" name="Text 20"/>
+          <p:cNvPr id="23" name="Text 20"/>
           <p:cNvSpPr/>
           <p:nvPr/>
         </p:nvSpPr>

--- a/docs/decks/L05.pptx
+++ b/docs/decks/L05.pptx
@@ -8390,11 +8390,11 @@
         <p:spPr>
           <a:xfrm>
             <a:off x="566928" y="1783080"/>
-            <a:ext cx="5349240" cy="1554480"/>
+            <a:ext cx="5349240" cy="1325880"/>
           </a:xfrm>
           <a:prstGeom prst="roundRect">
             <a:avLst>
-              <a:gd name="adj" fmla="val 7059"/>
+              <a:gd name="adj" fmla="val 8276"/>
             </a:avLst>
           </a:prstGeom>
           <a:solidFill>
@@ -8451,7 +8451,7 @@
         <p:spPr>
           <a:xfrm>
             <a:off x="768096" y="2468880"/>
-            <a:ext cx="4946904" cy="713232"/>
+            <a:ext cx="4946904" cy="484632"/>
           </a:xfrm>
           <a:prstGeom prst="rect">
             <a:avLst/>
@@ -8493,11 +8493,11 @@
         <p:spPr>
           <a:xfrm>
             <a:off x="6281928" y="1783080"/>
-            <a:ext cx="5349240" cy="1554480"/>
+            <a:ext cx="5349240" cy="1325880"/>
           </a:xfrm>
           <a:prstGeom prst="roundRect">
             <a:avLst>
-              <a:gd name="adj" fmla="val 7059"/>
+              <a:gd name="adj" fmla="val 8276"/>
             </a:avLst>
           </a:prstGeom>
           <a:solidFill>
@@ -8554,7 +8554,7 @@
         <p:spPr>
           <a:xfrm>
             <a:off x="6483096" y="2468880"/>
-            <a:ext cx="4946904" cy="713232"/>
+            <a:ext cx="4946904" cy="484632"/>
           </a:xfrm>
           <a:prstGeom prst="rect">
             <a:avLst/>
@@ -8581,7 +8581,7 @@
                 <a:ea typeface="Montserrat" pitchFamily="34" charset="-122"/>
                 <a:cs typeface="Montserrat" pitchFamily="34" charset="-120"/>
               </a:rPr>
-              <a:t>«свіжий до» — віддаємо як є; далі віддаємо старе + фоновий виклик оновлює запис</a:t>
+              <a:t>«свіжий до» — віддаємо як є; далі старе + фоновий виклик оновлює запис</a:t>
             </a:r>
             <a:endParaRPr lang="en-US" sz="1200" dirty="0"/>
           </a:p>
@@ -8595,12 +8595,276 @@
         </p:nvSpPr>
         <p:spPr>
           <a:xfrm>
-            <a:off x="566928" y="3566160"/>
-            <a:ext cx="11064240" cy="1005840"/>
+            <a:off x="566928" y="3310128"/>
+            <a:ext cx="3706978" cy="475488"/>
           </a:xfrm>
           <a:prstGeom prst="roundRect">
             <a:avLst>
-              <a:gd name="adj" fmla="val 10909"/>
+              <a:gd name="adj" fmla="val 13462"/>
+            </a:avLst>
+          </a:prstGeom>
+          <a:solidFill>
+            <a:srgbClr val="E9F4EF"/>
+          </a:solidFill>
+          <a:ln/>
+        </p:spPr>
+      </p:sp>
+      <p:sp>
+        <p:nvSpPr>
+          <p:cNvPr id="14" name="Text 11"/>
+          <p:cNvSpPr/>
+          <p:nvPr/>
+        </p:nvSpPr>
+        <p:spPr>
+          <a:xfrm>
+            <a:off x="713232" y="3310128"/>
+            <a:ext cx="3414370" cy="475488"/>
+          </a:xfrm>
+          <a:prstGeom prst="rect">
+            <a:avLst/>
+          </a:prstGeom>
+          <a:noFill/>
+          <a:ln/>
+        </p:spPr>
+        <p:txBody>
+          <a:bodyPr wrap="square" lIns="0" tIns="0" rIns="0" bIns="0" rtlCol="0" anchor="ctr"/>
+          <a:lstStyle/>
+          <a:p>
+            <a:pPr indent="0" marL="0">
+              <a:buNone/>
+            </a:pPr>
+            <a:r>
+              <a:rPr lang="en-US" sz="1100" b="1" dirty="0">
+                <a:solidFill>
+                  <a:srgbClr val="1B8A5A"/>
+                </a:solidFill>
+                <a:latin typeface="Montserrat" pitchFamily="34" charset="0"/>
+                <a:ea typeface="Montserrat" pitchFamily="34" charset="-122"/>
+                <a:cs typeface="Montserrat" pitchFamily="34" charset="-120"/>
+              </a:rPr>
+              <a:t>свіжий  </a:t>
+            </a:r>
+            <a:pPr indent="0" marL="0">
+              <a:buNone/>
+            </a:pPr>
+            <a:r>
+              <a:rPr lang="en-US" sz="1100" dirty="0">
+                <a:solidFill>
+                  <a:srgbClr val="555B66"/>
+                </a:solidFill>
+                <a:latin typeface="Montserrat" pitchFamily="34" charset="0"/>
+                <a:ea typeface="Montserrat" pitchFamily="34" charset="-122"/>
+                <a:cs typeface="Montserrat" pitchFamily="34" charset="-120"/>
+              </a:rPr>
+              <a:t>віддаємо як є</a:t>
+            </a:r>
+            <a:endParaRPr lang="en-US" sz="1100" dirty="0"/>
+          </a:p>
+        </p:txBody>
+      </p:sp>
+      <p:sp>
+        <p:nvSpPr>
+          <p:cNvPr id="15" name="Shape 12"/>
+          <p:cNvSpPr/>
+          <p:nvPr/>
+        </p:nvSpPr>
+        <p:spPr>
+          <a:xfrm>
+            <a:off x="4328770" y="3310128"/>
+            <a:ext cx="4370832" cy="475488"/>
+          </a:xfrm>
+          <a:prstGeom prst="roundRect">
+            <a:avLst>
+              <a:gd name="adj" fmla="val 13462"/>
+            </a:avLst>
+          </a:prstGeom>
+          <a:solidFill>
+            <a:srgbClr val="F8F0E2"/>
+          </a:solidFill>
+          <a:ln/>
+        </p:spPr>
+      </p:sp>
+      <p:sp>
+        <p:nvSpPr>
+          <p:cNvPr id="16" name="Text 13"/>
+          <p:cNvSpPr/>
+          <p:nvPr/>
+        </p:nvSpPr>
+        <p:spPr>
+          <a:xfrm>
+            <a:off x="4475074" y="3310128"/>
+            <a:ext cx="4078224" cy="475488"/>
+          </a:xfrm>
+          <a:prstGeom prst="rect">
+            <a:avLst/>
+          </a:prstGeom>
+          <a:noFill/>
+          <a:ln/>
+        </p:spPr>
+        <p:txBody>
+          <a:bodyPr wrap="square" lIns="0" tIns="0" rIns="0" bIns="0" rtlCol="0" anchor="ctr"/>
+          <a:lstStyle/>
+          <a:p>
+            <a:pPr indent="0" marL="0">
+              <a:buNone/>
+            </a:pPr>
+            <a:r>
+              <a:rPr lang="en-US" sz="1100" b="1" dirty="0">
+                <a:solidFill>
+                  <a:srgbClr val="9A5B12"/>
+                </a:solidFill>
+                <a:latin typeface="Montserrat" pitchFamily="34" charset="0"/>
+                <a:ea typeface="Montserrat" pitchFamily="34" charset="-122"/>
+                <a:cs typeface="Montserrat" pitchFamily="34" charset="-120"/>
+              </a:rPr>
+              <a:t>застарілий  </a:t>
+            </a:r>
+            <a:pPr indent="0" marL="0">
+              <a:buNone/>
+            </a:pPr>
+            <a:r>
+              <a:rPr lang="en-US" sz="1100" dirty="0">
+                <a:solidFill>
+                  <a:srgbClr val="555B66"/>
+                </a:solidFill>
+                <a:latin typeface="Montserrat" pitchFamily="34" charset="0"/>
+                <a:ea typeface="Montserrat" pitchFamily="34" charset="-122"/>
+                <a:cs typeface="Montserrat" pitchFamily="34" charset="-120"/>
+              </a:rPr>
+              <a:t>віддаємо старе + фоновий рефреш</a:t>
+            </a:r>
+            <a:endParaRPr lang="en-US" sz="1100" dirty="0"/>
+          </a:p>
+        </p:txBody>
+      </p:sp>
+      <p:sp>
+        <p:nvSpPr>
+          <p:cNvPr id="17" name="Shape 14"/>
+          <p:cNvSpPr/>
+          <p:nvPr/>
+        </p:nvSpPr>
+        <p:spPr>
+          <a:xfrm>
+            <a:off x="8754466" y="3310128"/>
+            <a:ext cx="2821838" cy="475488"/>
+          </a:xfrm>
+          <a:prstGeom prst="roundRect">
+            <a:avLst>
+              <a:gd name="adj" fmla="val 13462"/>
+            </a:avLst>
+          </a:prstGeom>
+          <a:solidFill>
+            <a:srgbClr val="FBE9E9"/>
+          </a:solidFill>
+          <a:ln/>
+        </p:spPr>
+      </p:sp>
+      <p:sp>
+        <p:nvSpPr>
+          <p:cNvPr id="18" name="Text 15"/>
+          <p:cNvSpPr/>
+          <p:nvPr/>
+        </p:nvSpPr>
+        <p:spPr>
+          <a:xfrm>
+            <a:off x="8900770" y="3310128"/>
+            <a:ext cx="2529230" cy="475488"/>
+          </a:xfrm>
+          <a:prstGeom prst="rect">
+            <a:avLst/>
+          </a:prstGeom>
+          <a:noFill/>
+          <a:ln/>
+        </p:spPr>
+        <p:txBody>
+          <a:bodyPr wrap="square" lIns="0" tIns="0" rIns="0" bIns="0" rtlCol="0" anchor="ctr"/>
+          <a:lstStyle/>
+          <a:p>
+            <a:pPr indent="0" marL="0">
+              <a:buNone/>
+            </a:pPr>
+            <a:r>
+              <a:rPr lang="en-US" sz="1100" b="1" dirty="0">
+                <a:solidFill>
+                  <a:srgbClr val="C62A2A"/>
+                </a:solidFill>
+                <a:latin typeface="Montserrat" pitchFamily="34" charset="0"/>
+                <a:ea typeface="Montserrat" pitchFamily="34" charset="-122"/>
+                <a:cs typeface="Montserrat" pitchFamily="34" charset="-120"/>
+              </a:rPr>
+              <a:t>прострочений  </a:t>
+            </a:r>
+            <a:pPr indent="0" marL="0">
+              <a:buNone/>
+            </a:pPr>
+            <a:r>
+              <a:rPr lang="en-US" sz="1100" dirty="0">
+                <a:solidFill>
+                  <a:srgbClr val="555B66"/>
+                </a:solidFill>
+                <a:latin typeface="Montserrat" pitchFamily="34" charset="0"/>
+                <a:ea typeface="Montserrat" pitchFamily="34" charset="-122"/>
+                <a:cs typeface="Montserrat" pitchFamily="34" charset="-120"/>
+              </a:rPr>
+              <a:t>miss — ідемо в модель</a:t>
+            </a:r>
+            <a:endParaRPr lang="en-US" sz="1100" dirty="0"/>
+          </a:p>
+        </p:txBody>
+      </p:sp>
+      <p:sp>
+        <p:nvSpPr>
+          <p:cNvPr id="19" name="Text 16"/>
+          <p:cNvSpPr/>
+          <p:nvPr/>
+        </p:nvSpPr>
+        <p:spPr>
+          <a:xfrm>
+            <a:off x="566928" y="3822192"/>
+            <a:ext cx="3657600" cy="201168"/>
+          </a:xfrm>
+          <a:prstGeom prst="rect">
+            <a:avLst/>
+          </a:prstGeom>
+          <a:noFill/>
+          <a:ln/>
+        </p:spPr>
+        <p:txBody>
+          <a:bodyPr wrap="square" lIns="0" tIns="0" rIns="0" bIns="0" rtlCol="0" anchor="ctr"/>
+          <a:lstStyle/>
+          <a:p>
+            <a:pPr indent="0" marL="0">
+              <a:buNone/>
+            </a:pPr>
+            <a:r>
+              <a:rPr lang="en-US" sz="850" spc="100" kern="0" dirty="0">
+                <a:solidFill>
+                  <a:srgbClr val="9AA1AD"/>
+                </a:solidFill>
+                <a:latin typeface="Courier New" pitchFamily="34" charset="0"/>
+                <a:ea typeface="Courier New" pitchFamily="34" charset="-122"/>
+                <a:cs typeface="Courier New" pitchFamily="34" charset="-120"/>
+              </a:rPr>
+              <a:t>час життя запису →</a:t>
+            </a:r>
+            <a:endParaRPr lang="en-US" sz="850" dirty="0"/>
+          </a:p>
+        </p:txBody>
+      </p:sp>
+      <p:sp>
+        <p:nvSpPr>
+          <p:cNvPr id="20" name="Shape 17"/>
+          <p:cNvSpPr/>
+          <p:nvPr/>
+        </p:nvSpPr>
+        <p:spPr>
+          <a:xfrm>
+            <a:off x="566928" y="4187952"/>
+            <a:ext cx="11064240" cy="822960"/>
+          </a:xfrm>
+          <a:prstGeom prst="roundRect">
+            <a:avLst>
+              <a:gd name="adj" fmla="val 13333"/>
             </a:avLst>
           </a:prstGeom>
           <a:solidFill>
@@ -8611,13 +8875,13 @@
       </p:sp>
       <p:sp>
         <p:nvSpPr>
-          <p:cNvPr id="14" name="Text 11"/>
-          <p:cNvSpPr/>
-          <p:nvPr/>
-        </p:nvSpPr>
-        <p:spPr>
-          <a:xfrm>
-            <a:off x="786384" y="3694176"/>
+          <p:cNvPr id="21" name="Text 18"/>
+          <p:cNvSpPr/>
+          <p:nvPr/>
+        </p:nvSpPr>
+        <p:spPr>
+          <a:xfrm>
+            <a:off x="786384" y="4315968"/>
             <a:ext cx="10625328" cy="219456"/>
           </a:xfrm>
           <a:prstGeom prst="rect">
@@ -8650,14 +8914,14 @@
       </p:sp>
       <p:sp>
         <p:nvSpPr>
-          <p:cNvPr id="15" name="Text 12"/>
-          <p:cNvSpPr/>
-          <p:nvPr/>
-        </p:nvSpPr>
-        <p:spPr>
-          <a:xfrm>
-            <a:off x="786384" y="3950208"/>
-            <a:ext cx="10625328" cy="493776"/>
+          <p:cNvPr id="22" name="Text 19"/>
+          <p:cNvSpPr/>
+          <p:nvPr/>
+        </p:nvSpPr>
+        <p:spPr>
+          <a:xfrm>
+            <a:off x="786384" y="4572000"/>
+            <a:ext cx="10625328" cy="310896"/>
           </a:xfrm>
           <a:prstGeom prst="rect">
             <a:avLst/>
@@ -8692,18 +8956,18 @@
       </p:sp>
       <p:sp>
         <p:nvSpPr>
-          <p:cNvPr id="16" name="Shape 13"/>
-          <p:cNvSpPr/>
-          <p:nvPr/>
-        </p:nvSpPr>
-        <p:spPr>
-          <a:xfrm>
-            <a:off x="566928" y="4709160"/>
-            <a:ext cx="11064240" cy="1143000"/>
+          <p:cNvPr id="23" name="Shape 20"/>
+          <p:cNvSpPr/>
+          <p:nvPr/>
+        </p:nvSpPr>
+        <p:spPr>
+          <a:xfrm>
+            <a:off x="566928" y="5166360"/>
+            <a:ext cx="11064240" cy="914400"/>
           </a:xfrm>
           <a:prstGeom prst="roundRect">
             <a:avLst>
-              <a:gd name="adj" fmla="val 9600"/>
+              <a:gd name="adj" fmla="val 12000"/>
             </a:avLst>
           </a:prstGeom>
           <a:solidFill>
@@ -8714,13 +8978,13 @@
       </p:sp>
       <p:sp>
         <p:nvSpPr>
-          <p:cNvPr id="17" name="Text 14"/>
-          <p:cNvSpPr/>
-          <p:nvPr/>
-        </p:nvSpPr>
-        <p:spPr>
-          <a:xfrm>
-            <a:off x="786384" y="4837176"/>
+          <p:cNvPr id="24" name="Text 21"/>
+          <p:cNvSpPr/>
+          <p:nvPr/>
+        </p:nvSpPr>
+        <p:spPr>
+          <a:xfrm>
+            <a:off x="786384" y="5294376"/>
             <a:ext cx="10625328" cy="219456"/>
           </a:xfrm>
           <a:prstGeom prst="rect">
@@ -8753,14 +9017,14 @@
       </p:sp>
       <p:sp>
         <p:nvSpPr>
-          <p:cNvPr id="18" name="Text 15"/>
-          <p:cNvSpPr/>
-          <p:nvPr/>
-        </p:nvSpPr>
-        <p:spPr>
-          <a:xfrm>
-            <a:off x="786384" y="5093208"/>
-            <a:ext cx="10625328" cy="630936"/>
+          <p:cNvPr id="25" name="Text 22"/>
+          <p:cNvSpPr/>
+          <p:nvPr/>
+        </p:nvSpPr>
+        <p:spPr>
+          <a:xfrm>
+            <a:off x="786384" y="5550408"/>
+            <a:ext cx="10625328" cy="402336"/>
           </a:xfrm>
           <a:prstGeom prst="rect">
             <a:avLst/>

--- a/docs/decks/L05.pptx
+++ b/docs/decks/L05.pptx
@@ -19568,18 +19568,257 @@
       </p:sp>
       <p:sp>
         <p:nvSpPr>
-          <p:cNvPr id="13" name="Shape 10"/>
-          <p:cNvSpPr/>
-          <p:nvPr/>
-        </p:nvSpPr>
-        <p:spPr>
-          <a:xfrm>
-            <a:off x="566928" y="3337560"/>
-            <a:ext cx="11064240" cy="1051560"/>
+          <p:cNvPr id="13" name="Text 10"/>
+          <p:cNvSpPr/>
+          <p:nvPr/>
+        </p:nvSpPr>
+        <p:spPr>
+          <a:xfrm>
+            <a:off x="566928" y="3255264"/>
+            <a:ext cx="11064240" cy="219456"/>
+          </a:xfrm>
+          <a:prstGeom prst="rect">
+            <a:avLst/>
+          </a:prstGeom>
+          <a:noFill/>
+          <a:ln/>
+        </p:spPr>
+        <p:txBody>
+          <a:bodyPr wrap="square" lIns="0" tIns="0" rIns="0" bIns="0" rtlCol="0" anchor="ctr"/>
+          <a:lstStyle/>
+          <a:p>
+            <a:pPr indent="0" marL="0">
+              <a:buNone/>
+            </a:pPr>
+            <a:r>
+              <a:rPr lang="en-US" sz="900" b="1" spc="150" kern="0" dirty="0">
+                <a:solidFill>
+                  <a:srgbClr val="9AA1AD"/>
+                </a:solidFill>
+                <a:latin typeface="Courier New" pitchFamily="34" charset="0"/>
+                <a:ea typeface="Courier New" pitchFamily="34" charset="-122"/>
+                <a:cs typeface="Courier New" pitchFamily="34" charset="-120"/>
+              </a:rPr>
+              <a:t>сто однакових питань за день</a:t>
+            </a:r>
+            <a:endParaRPr lang="en-US" sz="900" dirty="0"/>
+          </a:p>
+        </p:txBody>
+      </p:sp>
+      <p:sp>
+        <p:nvSpPr>
+          <p:cNvPr id="14" name="Text 11"/>
+          <p:cNvSpPr/>
+          <p:nvPr/>
+        </p:nvSpPr>
+        <p:spPr>
+          <a:xfrm>
+            <a:off x="566928" y="3511296"/>
+            <a:ext cx="1938528" cy="402336"/>
+          </a:xfrm>
+          <a:prstGeom prst="rect">
+            <a:avLst/>
+          </a:prstGeom>
+          <a:noFill/>
+          <a:ln/>
+        </p:spPr>
+        <p:txBody>
+          <a:bodyPr wrap="square" lIns="0" tIns="0" rIns="0" bIns="0" rtlCol="0" anchor="ctr"/>
+          <a:lstStyle/>
+          <a:p>
+            <a:pPr algn="r" indent="0" marL="0">
+              <a:buNone/>
+            </a:pPr>
+            <a:r>
+              <a:rPr lang="en-US" sz="1250" dirty="0">
+                <a:solidFill>
+                  <a:srgbClr val="111318"/>
+                </a:solidFill>
+                <a:latin typeface="Montserrat" pitchFamily="34" charset="0"/>
+                <a:ea typeface="Montserrat" pitchFamily="34" charset="-122"/>
+                <a:cs typeface="Montserrat" pitchFamily="34" charset="-120"/>
+              </a:rPr>
+              <a:t>без кешу</a:t>
+            </a:r>
+            <a:endParaRPr lang="en-US" sz="1250" dirty="0"/>
+          </a:p>
+        </p:txBody>
+      </p:sp>
+      <p:sp>
+        <p:nvSpPr>
+          <p:cNvPr id="15" name="Shape 12"/>
+          <p:cNvSpPr/>
+          <p:nvPr/>
+        </p:nvSpPr>
+        <p:spPr>
+          <a:xfrm>
+            <a:off x="2670048" y="3583716"/>
+            <a:ext cx="4297680" cy="257495"/>
           </a:xfrm>
           <a:prstGeom prst="roundRect">
             <a:avLst>
-              <a:gd name="adj" fmla="val 10435"/>
+              <a:gd name="adj" fmla="val 17756"/>
+            </a:avLst>
+          </a:prstGeom>
+          <a:solidFill>
+            <a:srgbClr val="C62A2A"/>
+          </a:solidFill>
+          <a:ln/>
+        </p:spPr>
+      </p:sp>
+      <p:sp>
+        <p:nvSpPr>
+          <p:cNvPr id="16" name="Text 13"/>
+          <p:cNvSpPr/>
+          <p:nvPr/>
+        </p:nvSpPr>
+        <p:spPr>
+          <a:xfrm>
+            <a:off x="7196328" y="3511296"/>
+            <a:ext cx="4206240" cy="402336"/>
+          </a:xfrm>
+          <a:prstGeom prst="rect">
+            <a:avLst/>
+          </a:prstGeom>
+          <a:noFill/>
+          <a:ln/>
+        </p:spPr>
+        <p:txBody>
+          <a:bodyPr wrap="square" lIns="0" tIns="0" rIns="0" bIns="0" rtlCol="0" anchor="ctr"/>
+          <a:lstStyle/>
+          <a:p>
+            <a:pPr indent="0" marL="0">
+              <a:buNone/>
+            </a:pPr>
+            <a:r>
+              <a:rPr lang="en-US" sz="1150" b="1" dirty="0">
+                <a:solidFill>
+                  <a:srgbClr val="C62A2A"/>
+                </a:solidFill>
+                <a:latin typeface="Montserrat" pitchFamily="34" charset="0"/>
+                <a:ea typeface="Montserrat" pitchFamily="34" charset="-122"/>
+                <a:cs typeface="Montserrat" pitchFamily="34" charset="-120"/>
+              </a:rPr>
+              <a:t>100 викликів у модель</a:t>
+            </a:r>
+            <a:endParaRPr lang="en-US" sz="1150" dirty="0"/>
+          </a:p>
+        </p:txBody>
+      </p:sp>
+      <p:sp>
+        <p:nvSpPr>
+          <p:cNvPr id="17" name="Text 14"/>
+          <p:cNvSpPr/>
+          <p:nvPr/>
+        </p:nvSpPr>
+        <p:spPr>
+          <a:xfrm>
+            <a:off x="566928" y="4096512"/>
+            <a:ext cx="1938528" cy="402336"/>
+          </a:xfrm>
+          <a:prstGeom prst="rect">
+            <a:avLst/>
+          </a:prstGeom>
+          <a:noFill/>
+          <a:ln/>
+        </p:spPr>
+        <p:txBody>
+          <a:bodyPr wrap="square" lIns="0" tIns="0" rIns="0" bIns="0" rtlCol="0" anchor="ctr"/>
+          <a:lstStyle/>
+          <a:p>
+            <a:pPr algn="r" indent="0" marL="0">
+              <a:buNone/>
+            </a:pPr>
+            <a:r>
+              <a:rPr lang="en-US" sz="1250" dirty="0">
+                <a:solidFill>
+                  <a:srgbClr val="111318"/>
+                </a:solidFill>
+                <a:latin typeface="Montserrat" pitchFamily="34" charset="0"/>
+                <a:ea typeface="Montserrat" pitchFamily="34" charset="-122"/>
+                <a:cs typeface="Montserrat" pitchFamily="34" charset="-120"/>
+              </a:rPr>
+              <a:t>з кешем</a:t>
+            </a:r>
+            <a:endParaRPr lang="en-US" sz="1250" dirty="0"/>
+          </a:p>
+        </p:txBody>
+      </p:sp>
+      <p:sp>
+        <p:nvSpPr>
+          <p:cNvPr id="18" name="Shape 15"/>
+          <p:cNvSpPr/>
+          <p:nvPr/>
+        </p:nvSpPr>
+        <p:spPr>
+          <a:xfrm>
+            <a:off x="2670048" y="4168932"/>
+            <a:ext cx="137160" cy="257495"/>
+          </a:xfrm>
+          <a:prstGeom prst="roundRect">
+            <a:avLst>
+              <a:gd name="adj" fmla="val 33333"/>
+            </a:avLst>
+          </a:prstGeom>
+          <a:solidFill>
+            <a:srgbClr val="1B8A5A"/>
+          </a:solidFill>
+          <a:ln/>
+        </p:spPr>
+      </p:sp>
+      <p:sp>
+        <p:nvSpPr>
+          <p:cNvPr id="19" name="Text 16"/>
+          <p:cNvSpPr/>
+          <p:nvPr/>
+        </p:nvSpPr>
+        <p:spPr>
+          <a:xfrm>
+            <a:off x="7196328" y="4096512"/>
+            <a:ext cx="4206240" cy="402336"/>
+          </a:xfrm>
+          <a:prstGeom prst="rect">
+            <a:avLst/>
+          </a:prstGeom>
+          <a:noFill/>
+          <a:ln/>
+        </p:spPr>
+        <p:txBody>
+          <a:bodyPr wrap="square" lIns="0" tIns="0" rIns="0" bIns="0" rtlCol="0" anchor="ctr"/>
+          <a:lstStyle/>
+          <a:p>
+            <a:pPr indent="0" marL="0">
+              <a:buNone/>
+            </a:pPr>
+            <a:r>
+              <a:rPr lang="en-US" sz="1150" b="1" dirty="0">
+                <a:solidFill>
+                  <a:srgbClr val="1B8A5A"/>
+                </a:solidFill>
+                <a:latin typeface="Montserrat" pitchFamily="34" charset="0"/>
+                <a:ea typeface="Montserrat" pitchFamily="34" charset="-122"/>
+                <a:cs typeface="Montserrat" pitchFamily="34" charset="-120"/>
+              </a:rPr>
+              <a:t>1 виклик + 99 hit</a:t>
+            </a:r>
+            <a:endParaRPr lang="en-US" sz="1150" dirty="0"/>
+          </a:p>
+        </p:txBody>
+      </p:sp>
+      <p:sp>
+        <p:nvSpPr>
+          <p:cNvPr id="20" name="Shape 17"/>
+          <p:cNvSpPr/>
+          <p:nvPr/>
+        </p:nvSpPr>
+        <p:spPr>
+          <a:xfrm>
+            <a:off x="566928" y="4572000"/>
+            <a:ext cx="11064240" cy="731520"/>
+          </a:xfrm>
+          <a:prstGeom prst="roundRect">
+            <a:avLst>
+              <a:gd name="adj" fmla="val 15000"/>
             </a:avLst>
           </a:prstGeom>
           <a:solidFill>
@@ -19590,13 +19829,13 @@
       </p:sp>
       <p:sp>
         <p:nvSpPr>
-          <p:cNvPr id="14" name="Text 11"/>
-          <p:cNvSpPr/>
-          <p:nvPr/>
-        </p:nvSpPr>
-        <p:spPr>
-          <a:xfrm>
-            <a:off x="786384" y="3465576"/>
+          <p:cNvPr id="21" name="Text 18"/>
+          <p:cNvSpPr/>
+          <p:nvPr/>
+        </p:nvSpPr>
+        <p:spPr>
+          <a:xfrm>
+            <a:off x="786384" y="4700016"/>
             <a:ext cx="10625328" cy="219456"/>
           </a:xfrm>
           <a:prstGeom prst="rect">
@@ -19629,14 +19868,14 @@
       </p:sp>
       <p:sp>
         <p:nvSpPr>
-          <p:cNvPr id="15" name="Text 12"/>
-          <p:cNvSpPr/>
-          <p:nvPr/>
-        </p:nvSpPr>
-        <p:spPr>
-          <a:xfrm>
-            <a:off x="786384" y="3721608"/>
-            <a:ext cx="10625328" cy="539496"/>
+          <p:cNvPr id="22" name="Text 19"/>
+          <p:cNvSpPr/>
+          <p:nvPr/>
+        </p:nvSpPr>
+        <p:spPr>
+          <a:xfrm>
+            <a:off x="786384" y="4956048"/>
+            <a:ext cx="10625328" cy="219456"/>
           </a:xfrm>
           <a:prstGeom prst="rect">
             <a:avLst/>
@@ -19671,18 +19910,18 @@
       </p:sp>
       <p:sp>
         <p:nvSpPr>
-          <p:cNvPr id="16" name="Shape 13"/>
-          <p:cNvSpPr/>
-          <p:nvPr/>
-        </p:nvSpPr>
-        <p:spPr>
-          <a:xfrm>
-            <a:off x="566928" y="4572000"/>
-            <a:ext cx="11064240" cy="1234440"/>
+          <p:cNvPr id="23" name="Shape 20"/>
+          <p:cNvSpPr/>
+          <p:nvPr/>
+        </p:nvSpPr>
+        <p:spPr>
+          <a:xfrm>
+            <a:off x="566928" y="5440680"/>
+            <a:ext cx="11064240" cy="731520"/>
           </a:xfrm>
           <a:prstGeom prst="roundRect">
             <a:avLst>
-              <a:gd name="adj" fmla="val 8889"/>
+              <a:gd name="adj" fmla="val 15000"/>
             </a:avLst>
           </a:prstGeom>
           <a:solidFill>
@@ -19693,13 +19932,13 @@
       </p:sp>
       <p:sp>
         <p:nvSpPr>
-          <p:cNvPr id="17" name="Text 14"/>
-          <p:cNvSpPr/>
-          <p:nvPr/>
-        </p:nvSpPr>
-        <p:spPr>
-          <a:xfrm>
-            <a:off x="786384" y="4700016"/>
+          <p:cNvPr id="24" name="Text 21"/>
+          <p:cNvSpPr/>
+          <p:nvPr/>
+        </p:nvSpPr>
+        <p:spPr>
+          <a:xfrm>
+            <a:off x="786384" y="5568696"/>
             <a:ext cx="10625328" cy="219456"/>
           </a:xfrm>
           <a:prstGeom prst="rect">
@@ -19732,14 +19971,14 @@
       </p:sp>
       <p:sp>
         <p:nvSpPr>
-          <p:cNvPr id="18" name="Text 15"/>
-          <p:cNvSpPr/>
-          <p:nvPr/>
-        </p:nvSpPr>
-        <p:spPr>
-          <a:xfrm>
-            <a:off x="786384" y="4956048"/>
-            <a:ext cx="10625328" cy="722376"/>
+          <p:cNvPr id="25" name="Text 22"/>
+          <p:cNvSpPr/>
+          <p:nvPr/>
+        </p:nvSpPr>
+        <p:spPr>
+          <a:xfrm>
+            <a:off x="786384" y="5824728"/>
+            <a:ext cx="10625328" cy="219456"/>
           </a:xfrm>
           <a:prstGeom prst="rect">
             <a:avLst/>

--- a/docs/decks/L05.pptx
+++ b/docs/decks/L05.pptx
@@ -21872,11 +21872,11 @@
         <p:spPr>
           <a:xfrm>
             <a:off x="566928" y="1783080"/>
-            <a:ext cx="11064240" cy="822960"/>
+            <a:ext cx="11064240" cy="658368"/>
           </a:xfrm>
           <a:prstGeom prst="roundRect">
             <a:avLst>
-              <a:gd name="adj" fmla="val 11111"/>
+              <a:gd name="adj" fmla="val 13889"/>
             </a:avLst>
           </a:prstGeom>
           <a:solidFill>
@@ -21894,7 +21894,7 @@
         <p:spPr>
           <a:xfrm>
             <a:off x="786384" y="1783080"/>
-            <a:ext cx="3761842" cy="822960"/>
+            <a:ext cx="3761842" cy="658368"/>
           </a:xfrm>
           <a:prstGeom prst="rect">
             <a:avLst/>
@@ -21933,7 +21933,7 @@
         <p:spPr>
           <a:xfrm>
             <a:off x="4548226" y="1783080"/>
-            <a:ext cx="6640373" cy="822960"/>
+            <a:ext cx="6640373" cy="658368"/>
           </a:xfrm>
           <a:prstGeom prst="rect">
             <a:avLst/>
@@ -21971,12 +21971,12 @@
         </p:nvSpPr>
         <p:spPr>
           <a:xfrm>
-            <a:off x="566928" y="2752344"/>
-            <a:ext cx="11064240" cy="822960"/>
+            <a:off x="566928" y="2587752"/>
+            <a:ext cx="11064240" cy="658368"/>
           </a:xfrm>
           <a:prstGeom prst="roundRect">
             <a:avLst>
-              <a:gd name="adj" fmla="val 11111"/>
+              <a:gd name="adj" fmla="val 13889"/>
             </a:avLst>
           </a:prstGeom>
           <a:solidFill>
@@ -21998,8 +21998,8 @@
         </p:nvSpPr>
         <p:spPr>
           <a:xfrm>
-            <a:off x="786384" y="2752344"/>
-            <a:ext cx="3761842" cy="822960"/>
+            <a:off x="786384" y="2587752"/>
+            <a:ext cx="3761842" cy="658368"/>
           </a:xfrm>
           <a:prstGeom prst="rect">
             <a:avLst/>
@@ -22037,8 +22037,8 @@
         </p:nvSpPr>
         <p:spPr>
           <a:xfrm>
-            <a:off x="4548226" y="2752344"/>
-            <a:ext cx="6640373" cy="822960"/>
+            <a:off x="4548226" y="2587752"/>
+            <a:ext cx="6640373" cy="658368"/>
           </a:xfrm>
           <a:prstGeom prst="rect">
             <a:avLst/>
@@ -22076,12 +22076,12 @@
         </p:nvSpPr>
         <p:spPr>
           <a:xfrm>
-            <a:off x="566928" y="3721608"/>
-            <a:ext cx="11064240" cy="822960"/>
+            <a:off x="566928" y="3392424"/>
+            <a:ext cx="11064240" cy="658368"/>
           </a:xfrm>
           <a:prstGeom prst="roundRect">
             <a:avLst>
-              <a:gd name="adj" fmla="val 11111"/>
+              <a:gd name="adj" fmla="val 13889"/>
             </a:avLst>
           </a:prstGeom>
           <a:solidFill>
@@ -22098,8 +22098,8 @@
         </p:nvSpPr>
         <p:spPr>
           <a:xfrm>
-            <a:off x="786384" y="3721608"/>
-            <a:ext cx="3761842" cy="822960"/>
+            <a:off x="786384" y="3392424"/>
+            <a:ext cx="3761842" cy="658368"/>
           </a:xfrm>
           <a:prstGeom prst="rect">
             <a:avLst/>
@@ -22137,8 +22137,8 @@
         </p:nvSpPr>
         <p:spPr>
           <a:xfrm>
-            <a:off x="4548226" y="3721608"/>
-            <a:ext cx="6640373" cy="822960"/>
+            <a:off x="4548226" y="3392424"/>
+            <a:ext cx="6640373" cy="658368"/>
           </a:xfrm>
           <a:prstGeom prst="rect">
             <a:avLst/>
@@ -22176,13 +22176,93 @@
         </p:nvSpPr>
         <p:spPr>
           <a:xfrm>
-            <a:off x="566928" y="4754880"/>
-            <a:ext cx="11064240" cy="1097280"/>
-          </a:xfrm>
-          <a:prstGeom prst="roundRect">
-            <a:avLst>
-              <a:gd name="adj" fmla="val 10000"/>
-            </a:avLst>
+            <a:off x="1389888" y="4443984"/>
+            <a:ext cx="9418320" cy="0"/>
+          </a:xfrm>
+          <a:prstGeom prst="line">
+            <a:avLst/>
+          </a:prstGeom>
+          <a:noFill/>
+          <a:ln w="19050">
+            <a:solidFill>
+              <a:srgbClr val="E6E7EC"/>
+            </a:solidFill>
+            <a:prstDash val="solid"/>
+          </a:ln>
+        </p:spPr>
+      </p:sp>
+      <p:sp>
+        <p:nvSpPr>
+          <p:cNvPr id="17" name="Shape 14"/>
+          <p:cNvSpPr/>
+          <p:nvPr/>
+        </p:nvSpPr>
+        <p:spPr>
+          <a:xfrm>
+            <a:off x="2079346" y="4379976"/>
+            <a:ext cx="128016" cy="128016"/>
+          </a:xfrm>
+          <a:prstGeom prst="ellipse">
+            <a:avLst/>
+          </a:prstGeom>
+          <a:solidFill>
+            <a:srgbClr val="1B8A5A"/>
+          </a:solidFill>
+          <a:ln/>
+        </p:spPr>
+      </p:sp>
+      <p:sp>
+        <p:nvSpPr>
+          <p:cNvPr id="18" name="Text 15"/>
+          <p:cNvSpPr/>
+          <p:nvPr/>
+        </p:nvSpPr>
+        <p:spPr>
+          <a:xfrm>
+            <a:off x="1137514" y="4114800"/>
+            <a:ext cx="2011680" cy="219456"/>
+          </a:xfrm>
+          <a:prstGeom prst="rect">
+            <a:avLst/>
+          </a:prstGeom>
+          <a:noFill/>
+          <a:ln/>
+        </p:spPr>
+        <p:txBody>
+          <a:bodyPr wrap="square" lIns="0" tIns="0" rIns="0" bIns="0" rtlCol="0" anchor="ctr"/>
+          <a:lstStyle/>
+          <a:p>
+            <a:pPr algn="ctr" indent="0" marL="0">
+              <a:buNone/>
+            </a:pPr>
+            <a:r>
+              <a:rPr lang="en-US" sz="900" b="1" dirty="0">
+                <a:solidFill>
+                  <a:srgbClr val="1B8A5A"/>
+                </a:solidFill>
+                <a:latin typeface="Courier New" pitchFamily="34" charset="0"/>
+                <a:ea typeface="Courier New" pitchFamily="34" charset="-122"/>
+                <a:cs typeface="Courier New" pitchFamily="34" charset="-120"/>
+              </a:rPr>
+              <a:t>пробіли</a:t>
+            </a:r>
+            <a:endParaRPr lang="en-US" sz="900" dirty="0"/>
+          </a:p>
+        </p:txBody>
+      </p:sp>
+      <p:sp>
+        <p:nvSpPr>
+          <p:cNvPr id="19" name="Shape 16"/>
+          <p:cNvSpPr/>
+          <p:nvPr/>
+        </p:nvSpPr>
+        <p:spPr>
+          <a:xfrm>
+            <a:off x="4151376" y="4379976"/>
+            <a:ext cx="128016" cy="128016"/>
+          </a:xfrm>
+          <a:prstGeom prst="ellipse">
+            <a:avLst/>
           </a:prstGeom>
           <a:solidFill>
             <a:srgbClr val="5A05F4"/>
@@ -22192,37 +22272,235 @@
       </p:sp>
       <p:sp>
         <p:nvSpPr>
-          <p:cNvPr id="17" name="Text 14"/>
-          <p:cNvSpPr/>
-          <p:nvPr/>
-        </p:nvSpPr>
-        <p:spPr>
-          <a:xfrm>
-            <a:off x="786384" y="4882896"/>
-            <a:ext cx="10625328" cy="219456"/>
-          </a:xfrm>
-          <a:prstGeom prst="rect">
-            <a:avLst/>
-          </a:prstGeom>
-          <a:noFill/>
-          <a:ln/>
-        </p:spPr>
-        <p:txBody>
-          <a:bodyPr wrap="square" lIns="0" tIns="0" rIns="0" bIns="0" rtlCol="0" anchor="ctr"/>
-          <a:lstStyle/>
-          <a:p>
-            <a:pPr indent="0" marL="0">
-              <a:buNone/>
-            </a:pPr>
-            <a:r>
-              <a:rPr lang="en-US" sz="950" b="1" spc="150" kern="0" dirty="0">
-                <a:solidFill>
-                  <a:srgbClr val="FFFFFF"/>
+          <p:cNvPr id="20" name="Text 17"/>
+          <p:cNvSpPr/>
+          <p:nvPr/>
+        </p:nvSpPr>
+        <p:spPr>
+          <a:xfrm>
+            <a:off x="3209544" y="4114800"/>
+            <a:ext cx="2011680" cy="219456"/>
+          </a:xfrm>
+          <a:prstGeom prst="rect">
+            <a:avLst/>
+          </a:prstGeom>
+          <a:noFill/>
+          <a:ln/>
+        </p:spPr>
+        <p:txBody>
+          <a:bodyPr wrap="square" lIns="0" tIns="0" rIns="0" bIns="0" rtlCol="0" anchor="ctr"/>
+          <a:lstStyle/>
+          <a:p>
+            <a:pPr algn="ctr" indent="0" marL="0">
+              <a:buNone/>
+            </a:pPr>
+            <a:r>
+              <a:rPr lang="en-US" sz="900" b="1" dirty="0">
+                <a:solidFill>
+                  <a:srgbClr val="5A05F4"/>
                 </a:solidFill>
                 <a:latin typeface="Courier New" pitchFamily="34" charset="0"/>
                 <a:ea typeface="Courier New" pitchFamily="34" charset="-122"/>
                 <a:cs typeface="Courier New" pitchFamily="34" charset="-120"/>
               </a:rPr>
+              <a:t>регістр</a:t>
+            </a:r>
+            <a:endParaRPr lang="en-US" sz="900" dirty="0"/>
+          </a:p>
+        </p:txBody>
+      </p:sp>
+      <p:sp>
+        <p:nvSpPr>
+          <p:cNvPr id="21" name="Shape 18"/>
+          <p:cNvSpPr/>
+          <p:nvPr/>
+        </p:nvSpPr>
+        <p:spPr>
+          <a:xfrm>
+            <a:off x="9614002" y="4379976"/>
+            <a:ext cx="128016" cy="128016"/>
+          </a:xfrm>
+          <a:prstGeom prst="ellipse">
+            <a:avLst/>
+          </a:prstGeom>
+          <a:solidFill>
+            <a:srgbClr val="C62A2A"/>
+          </a:solidFill>
+          <a:ln/>
+        </p:spPr>
+      </p:sp>
+      <p:sp>
+        <p:nvSpPr>
+          <p:cNvPr id="22" name="Text 19"/>
+          <p:cNvSpPr/>
+          <p:nvPr/>
+        </p:nvSpPr>
+        <p:spPr>
+          <a:xfrm>
+            <a:off x="8672170" y="4114800"/>
+            <a:ext cx="2011680" cy="219456"/>
+          </a:xfrm>
+          <a:prstGeom prst="rect">
+            <a:avLst/>
+          </a:prstGeom>
+          <a:noFill/>
+          <a:ln/>
+        </p:spPr>
+        <p:txBody>
+          <a:bodyPr wrap="square" lIns="0" tIns="0" rIns="0" bIns="0" rtlCol="0" anchor="ctr"/>
+          <a:lstStyle/>
+          <a:p>
+            <a:pPr algn="ctr" indent="0" marL="0">
+              <a:buNone/>
+            </a:pPr>
+            <a:r>
+              <a:rPr lang="en-US" sz="900" b="1" dirty="0">
+                <a:solidFill>
+                  <a:srgbClr val="C62A2A"/>
+                </a:solidFill>
+                <a:latin typeface="Courier New" pitchFamily="34" charset="0"/>
+                <a:ea typeface="Courier New" pitchFamily="34" charset="-122"/>
+                <a:cs typeface="Courier New" pitchFamily="34" charset="-120"/>
+              </a:rPr>
+              <a:t>пунктуація</a:t>
+            </a:r>
+            <a:endParaRPr lang="en-US" sz="900" dirty="0"/>
+          </a:p>
+        </p:txBody>
+      </p:sp>
+      <p:sp>
+        <p:nvSpPr>
+          <p:cNvPr id="23" name="Text 20"/>
+          <p:cNvSpPr/>
+          <p:nvPr/>
+        </p:nvSpPr>
+        <p:spPr>
+          <a:xfrm>
+            <a:off x="566928" y="4535424"/>
+            <a:ext cx="1645920" cy="201168"/>
+          </a:xfrm>
+          <a:prstGeom prst="rect">
+            <a:avLst/>
+          </a:prstGeom>
+          <a:noFill/>
+          <a:ln/>
+        </p:spPr>
+        <p:txBody>
+          <a:bodyPr wrap="square" lIns="0" tIns="0" rIns="0" bIns="0" rtlCol="0" anchor="ctr"/>
+          <a:lstStyle/>
+          <a:p>
+            <a:pPr indent="0" marL="0">
+              <a:buNone/>
+            </a:pPr>
+            <a:r>
+              <a:rPr lang="en-US" sz="850" dirty="0">
+                <a:solidFill>
+                  <a:srgbClr val="9AA1AD"/>
+                </a:solidFill>
+                <a:latin typeface="Courier New" pitchFamily="34" charset="0"/>
+                <a:ea typeface="Courier New" pitchFamily="34" charset="-122"/>
+                <a:cs typeface="Courier New" pitchFamily="34" charset="-120"/>
+              </a:rPr>
+              <a:t>безпечно</a:t>
+            </a:r>
+            <a:endParaRPr lang="en-US" sz="850" dirty="0"/>
+          </a:p>
+        </p:txBody>
+      </p:sp>
+      <p:sp>
+        <p:nvSpPr>
+          <p:cNvPr id="24" name="Text 21"/>
+          <p:cNvSpPr/>
+          <p:nvPr/>
+        </p:nvSpPr>
+        <p:spPr>
+          <a:xfrm>
+            <a:off x="9802368" y="4535424"/>
+            <a:ext cx="1828800" cy="201168"/>
+          </a:xfrm>
+          <a:prstGeom prst="rect">
+            <a:avLst/>
+          </a:prstGeom>
+          <a:noFill/>
+          <a:ln/>
+        </p:spPr>
+        <p:txBody>
+          <a:bodyPr wrap="square" lIns="0" tIns="0" rIns="0" bIns="0" rtlCol="0" anchor="ctr"/>
+          <a:lstStyle/>
+          <a:p>
+            <a:pPr algn="r" indent="0" marL="0">
+              <a:buNone/>
+            </a:pPr>
+            <a:r>
+              <a:rPr lang="en-US" sz="850" dirty="0">
+                <a:solidFill>
+                  <a:srgbClr val="9AA1AD"/>
+                </a:solidFill>
+                <a:latin typeface="Courier New" pitchFamily="34" charset="0"/>
+                <a:ea typeface="Courier New" pitchFamily="34" charset="-122"/>
+                <a:cs typeface="Courier New" pitchFamily="34" charset="-120"/>
+              </a:rPr>
+              <a:t>змінює зміст</a:t>
+            </a:r>
+            <a:endParaRPr lang="en-US" sz="850" dirty="0"/>
+          </a:p>
+        </p:txBody>
+      </p:sp>
+      <p:sp>
+        <p:nvSpPr>
+          <p:cNvPr id="25" name="Shape 22"/>
+          <p:cNvSpPr/>
+          <p:nvPr/>
+        </p:nvSpPr>
+        <p:spPr>
+          <a:xfrm>
+            <a:off x="566928" y="4956048"/>
+            <a:ext cx="11064240" cy="1005840"/>
+          </a:xfrm>
+          <a:prstGeom prst="roundRect">
+            <a:avLst>
+              <a:gd name="adj" fmla="val 10909"/>
+            </a:avLst>
+          </a:prstGeom>
+          <a:solidFill>
+            <a:srgbClr val="5A05F4"/>
+          </a:solidFill>
+          <a:ln/>
+        </p:spPr>
+      </p:sp>
+      <p:sp>
+        <p:nvSpPr>
+          <p:cNvPr id="26" name="Text 23"/>
+          <p:cNvSpPr/>
+          <p:nvPr/>
+        </p:nvSpPr>
+        <p:spPr>
+          <a:xfrm>
+            <a:off x="786384" y="5084064"/>
+            <a:ext cx="10625328" cy="219456"/>
+          </a:xfrm>
+          <a:prstGeom prst="rect">
+            <a:avLst/>
+          </a:prstGeom>
+          <a:noFill/>
+          <a:ln/>
+        </p:spPr>
+        <p:txBody>
+          <a:bodyPr wrap="square" lIns="0" tIns="0" rIns="0" bIns="0" rtlCol="0" anchor="ctr"/>
+          <a:lstStyle/>
+          <a:p>
+            <a:pPr indent="0" marL="0">
+              <a:buNone/>
+            </a:pPr>
+            <a:r>
+              <a:rPr lang="en-US" sz="950" b="1" spc="150" kern="0" dirty="0">
+                <a:solidFill>
+                  <a:srgbClr val="FFFFFF"/>
+                </a:solidFill>
+                <a:latin typeface="Courier New" pitchFamily="34" charset="0"/>
+                <a:ea typeface="Courier New" pitchFamily="34" charset="-122"/>
+                <a:cs typeface="Courier New" pitchFamily="34" charset="-120"/>
+              </a:rPr>
               <a:t>ТЕ САМЕ ПРАВИЛО, ЩО З КЛЮЧЕМ</a:t>
             </a:r>
             <a:endParaRPr lang="en-US" sz="950" dirty="0"/>
@@ -22231,14 +22509,14 @@
       </p:sp>
       <p:sp>
         <p:nvSpPr>
-          <p:cNvPr id="18" name="Text 15"/>
-          <p:cNvSpPr/>
-          <p:nvPr/>
-        </p:nvSpPr>
-        <p:spPr>
-          <a:xfrm>
-            <a:off x="786384" y="5138928"/>
-            <a:ext cx="10625328" cy="585216"/>
+          <p:cNvPr id="27" name="Text 24"/>
+          <p:cNvSpPr/>
+          <p:nvPr/>
+        </p:nvSpPr>
+        <p:spPr>
+          <a:xfrm>
+            <a:off x="786384" y="5340096"/>
+            <a:ext cx="10625328" cy="493776"/>
           </a:xfrm>
           <a:prstGeom prst="rect">
             <a:avLst/>

--- a/docs/decks/L05.pptx
+++ b/docs/decks/L05.pptx
@@ -2625,7 +2625,7 @@
         </p:nvSpPr>
         <p:spPr>
           <a:xfrm>
-            <a:off x="11368735" y="6437376"/>
+            <a:off x="11368735" y="6327648"/>
             <a:ext cx="365760" cy="274320"/>
           </a:xfrm>
           <a:prstGeom prst="rect">
@@ -2661,6 +2661,62 @@
           </a:p>
         </p:txBody>
       </p:sp>
+    </p:spTree>
+  </p:cSld>
+  <p:clrMapOvr>
+    <a:masterClrMapping/>
+  </p:clrMapOvr>
+</p:sldLayout>
+</file>
+
+<file path=ppt/slideLayouts/slideLayout2.xml><?xml version="1.0" encoding="utf-8"?>
+<p:sldLayout xmlns:a="http://schemas.openxmlformats.org/drawingml/2006/main" xmlns:r="http://schemas.openxmlformats.org/officeDocument/2006/relationships" xmlns:p="http://schemas.openxmlformats.org/presentationml/2006/main" preserve="1">
+  <p:cSld name="NEO">
+    <p:bg>
+      <p:bgPr>
+        <a:solidFill>
+          <a:srgbClr val="000000"/>
+        </a:solidFill>
+      </p:bgPr>
+    </p:bg>
+    <p:spTree>
+      <p:nvGrpSpPr>
+        <p:cNvPr id="1" name=""/>
+        <p:cNvGrpSpPr/>
+        <p:nvPr/>
+      </p:nvGrpSpPr>
+      <p:grpSpPr>
+        <a:xfrm>
+          <a:off x="0" y="0"/>
+          <a:ext cx="0" cy="0"/>
+          <a:chOff x="0" y="0"/>
+          <a:chExt cx="0" cy="0"/>
+        </a:xfrm>
+      </p:grpSpPr>
+      <p:pic>
+        <p:nvPicPr>
+          <p:cNvPr id="2" name="Image 0" descr="preencoded.png">    </p:cNvPr>
+          <p:cNvPicPr>
+            <a:picLocks noChangeAspect="1"/>
+          </p:cNvPicPr>
+          <p:nvPr/>
+        </p:nvPicPr>
+        <p:blipFill>
+          <a:blip r:embed="rId1"/>
+          <a:stretch>
+            <a:fillRect/>
+          </a:stretch>
+        </p:blipFill>
+        <p:spPr>
+          <a:xfrm>
+            <a:off x="0" y="0"/>
+            <a:ext cx="12191695" cy="6858000"/>
+          </a:xfrm>
+          <a:prstGeom prst="rect">
+            <a:avLst/>
+          </a:prstGeom>
+        </p:spPr>
+      </p:pic>
     </p:spTree>
   </p:cSld>
   <p:clrMapOvr>
@@ -2698,7 +2754,7 @@
         </p:nvSpPr>
         <p:spPr>
           <a:xfrm>
-            <a:off x="11368735" y="6437376"/>
+            <a:off x="11368735" y="6327648"/>
             <a:ext cx="365760" cy="274320"/>
           </a:xfrm>
           <a:prstGeom prst="rect">
@@ -2739,6 +2795,7 @@
   <p:clrMap bg1="lt1" tx1="dk1" bg2="lt2" tx2="dk2" accent1="accent1" accent2="accent2" accent3="accent3" accent4="accent4" accent5="accent5" accent6="accent6" hlink="hlink" folHlink="folHlink"/>
   <p:sldLayoutIdLst>
     <p:sldLayoutId id="2147483649" r:id="rId1"/>
+    <p:sldLayoutId id="2147483650" r:id="rId2"/>
   </p:sldLayoutIdLst>
   <p:hf sldNum="0" hdr="0" ftr="0" dt="0"/>
   <p:txStyles>
@@ -2997,13 +3054,6 @@
 <file path=ppt/slides/slide1.xml><?xml version="1.0" encoding="utf-8"?>
 <p:sld xmlns:a="http://schemas.openxmlformats.org/drawingml/2006/main" xmlns:r="http://schemas.openxmlformats.org/officeDocument/2006/relationships" xmlns:p="http://schemas.openxmlformats.org/presentationml/2006/main">
   <p:cSld name="Slide 1">
-    <p:bg>
-      <p:bgPr>
-        <a:solidFill>
-          <a:srgbClr val="1B0942"/>
-        </a:solidFill>
-      </p:bgPr>
-    </p:bg>
     <p:spTree>
       <p:nvGrpSpPr>
         <p:cNvPr id="1" name=""/>
@@ -3675,13 +3725,6 @@
 <file path=ppt/slides/slide10.xml><?xml version="1.0" encoding="utf-8"?>
 <p:sld xmlns:a="http://schemas.openxmlformats.org/drawingml/2006/main" xmlns:r="http://schemas.openxmlformats.org/officeDocument/2006/relationships" xmlns:p="http://schemas.openxmlformats.org/presentationml/2006/main">
   <p:cSld name="Slide 10">
-    <p:bg>
-      <p:bgPr>
-        <a:solidFill>
-          <a:srgbClr val="FFFFFF"/>
-        </a:solidFill>
-      </p:bgPr>
-    </p:bg>
     <p:spTree>
       <p:nvGrpSpPr>
         <p:cNvPr id="1" name=""/>
@@ -3698,7 +3741,29 @@
       </p:grpSpPr>
       <p:sp>
         <p:nvSpPr>
-          <p:cNvPr id="2" name="Text 0"/>
+          <p:cNvPr id="2" name="Shape 0"/>
+          <p:cNvSpPr/>
+          <p:nvPr/>
+        </p:nvSpPr>
+        <p:spPr>
+          <a:xfrm>
+            <a:off x="231343" y="194767"/>
+            <a:ext cx="11716207" cy="6473952"/>
+          </a:xfrm>
+          <a:prstGeom prst="roundRect">
+            <a:avLst>
+              <a:gd name="adj" fmla="val 3107"/>
+            </a:avLst>
+          </a:prstGeom>
+          <a:solidFill>
+            <a:srgbClr val="FFFFFF"/>
+          </a:solidFill>
+          <a:ln/>
+        </p:spPr>
+      </p:sp>
+      <p:sp>
+        <p:nvSpPr>
+          <p:cNvPr id="3" name="Text 1"/>
           <p:cNvSpPr/>
           <p:nvPr/>
         </p:nvSpPr>
@@ -3737,7 +3802,7 @@
       </p:sp>
       <p:sp>
         <p:nvSpPr>
-          <p:cNvPr id="3" name="Text 1"/>
+          <p:cNvPr id="4" name="Text 2"/>
           <p:cNvSpPr/>
           <p:nvPr/>
         </p:nvSpPr>
@@ -3776,7 +3841,7 @@
       </p:sp>
       <p:sp>
         <p:nvSpPr>
-          <p:cNvPr id="4" name="Shape 2"/>
+          <p:cNvPr id="5" name="Shape 3"/>
           <p:cNvSpPr/>
           <p:nvPr/>
         </p:nvSpPr>
@@ -3798,7 +3863,7 @@
       </p:sp>
       <p:sp>
         <p:nvSpPr>
-          <p:cNvPr id="5" name="Text 3"/>
+          <p:cNvPr id="6" name="Text 4"/>
           <p:cNvSpPr/>
           <p:nvPr/>
         </p:nvSpPr>
@@ -3837,7 +3902,7 @@
       </p:sp>
       <p:pic>
         <p:nvPicPr>
-          <p:cNvPr id="6" name="Image 0" descr="preencoded.png">    </p:cNvPr>
+          <p:cNvPr id="7" name="Image 0" descr="preencoded.png">    </p:cNvPr>
           <p:cNvPicPr>
             <a:picLocks noChangeAspect="1"/>
           </p:cNvPicPr>
@@ -3851,7 +3916,7 @@
         </p:blipFill>
         <p:spPr>
           <a:xfrm>
-            <a:off x="566928" y="6254496"/>
+            <a:off x="566928" y="6126480"/>
             <a:ext cx="1481328" cy="457200"/>
           </a:xfrm>
           <a:prstGeom prst="rect">
@@ -3861,7 +3926,7 @@
       </p:pic>
       <p:sp>
         <p:nvSpPr>
-          <p:cNvPr id="7" name="Shape 4"/>
+          <p:cNvPr id="8" name="Shape 5"/>
           <p:cNvSpPr/>
           <p:nvPr/>
         </p:nvSpPr>
@@ -3883,7 +3948,7 @@
       </p:sp>
       <p:sp>
         <p:nvSpPr>
-          <p:cNvPr id="8" name="Shape 5"/>
+          <p:cNvPr id="9" name="Shape 6"/>
           <p:cNvSpPr/>
           <p:nvPr/>
         </p:nvSpPr>
@@ -3903,7 +3968,7 @@
       </p:sp>
       <p:sp>
         <p:nvSpPr>
-          <p:cNvPr id="9" name="Text 6"/>
+          <p:cNvPr id="10" name="Text 7"/>
           <p:cNvSpPr/>
           <p:nvPr/>
         </p:nvSpPr>
@@ -3942,7 +4007,7 @@
       </p:sp>
       <p:sp>
         <p:nvSpPr>
-          <p:cNvPr id="10" name="Text 7"/>
+          <p:cNvPr id="11" name="Text 8"/>
           <p:cNvSpPr/>
           <p:nvPr/>
         </p:nvSpPr>
@@ -3981,7 +4046,7 @@
       </p:sp>
       <p:sp>
         <p:nvSpPr>
-          <p:cNvPr id="11" name="Text 8"/>
+          <p:cNvPr id="12" name="Text 9"/>
           <p:cNvSpPr/>
           <p:nvPr/>
         </p:nvSpPr>
@@ -4023,7 +4088,7 @@
       </p:sp>
       <p:sp>
         <p:nvSpPr>
-          <p:cNvPr id="12" name="Shape 9"/>
+          <p:cNvPr id="13" name="Shape 10"/>
           <p:cNvSpPr/>
           <p:nvPr/>
         </p:nvSpPr>
@@ -4045,7 +4110,7 @@
       </p:sp>
       <p:sp>
         <p:nvSpPr>
-          <p:cNvPr id="13" name="Shape 10"/>
+          <p:cNvPr id="14" name="Shape 11"/>
           <p:cNvSpPr/>
           <p:nvPr/>
         </p:nvSpPr>
@@ -4065,7 +4130,7 @@
       </p:sp>
       <p:sp>
         <p:nvSpPr>
-          <p:cNvPr id="14" name="Text 11"/>
+          <p:cNvPr id="15" name="Text 12"/>
           <p:cNvSpPr/>
           <p:nvPr/>
         </p:nvSpPr>
@@ -4104,7 +4169,7 @@
       </p:sp>
       <p:sp>
         <p:nvSpPr>
-          <p:cNvPr id="15" name="Text 12"/>
+          <p:cNvPr id="16" name="Text 13"/>
           <p:cNvSpPr/>
           <p:nvPr/>
         </p:nvSpPr>
@@ -4143,7 +4208,7 @@
       </p:sp>
       <p:sp>
         <p:nvSpPr>
-          <p:cNvPr id="16" name="Text 13"/>
+          <p:cNvPr id="17" name="Text 14"/>
           <p:cNvSpPr/>
           <p:nvPr/>
         </p:nvSpPr>
@@ -4185,7 +4250,7 @@
       </p:sp>
       <p:sp>
         <p:nvSpPr>
-          <p:cNvPr id="17" name="Shape 14"/>
+          <p:cNvPr id="18" name="Shape 15"/>
           <p:cNvSpPr/>
           <p:nvPr/>
         </p:nvSpPr>
@@ -4207,7 +4272,7 @@
       </p:sp>
       <p:sp>
         <p:nvSpPr>
-          <p:cNvPr id="18" name="Shape 15"/>
+          <p:cNvPr id="19" name="Shape 16"/>
           <p:cNvSpPr/>
           <p:nvPr/>
         </p:nvSpPr>
@@ -4227,7 +4292,7 @@
       </p:sp>
       <p:sp>
         <p:nvSpPr>
-          <p:cNvPr id="19" name="Text 16"/>
+          <p:cNvPr id="20" name="Text 17"/>
           <p:cNvSpPr/>
           <p:nvPr/>
         </p:nvSpPr>
@@ -4266,7 +4331,7 @@
       </p:sp>
       <p:sp>
         <p:nvSpPr>
-          <p:cNvPr id="20" name="Text 17"/>
+          <p:cNvPr id="21" name="Text 18"/>
           <p:cNvSpPr/>
           <p:nvPr/>
         </p:nvSpPr>
@@ -4305,7 +4370,7 @@
       </p:sp>
       <p:sp>
         <p:nvSpPr>
-          <p:cNvPr id="21" name="Text 18"/>
+          <p:cNvPr id="22" name="Text 19"/>
           <p:cNvSpPr/>
           <p:nvPr/>
         </p:nvSpPr>
@@ -4347,7 +4412,7 @@
       </p:sp>
       <p:sp>
         <p:nvSpPr>
-          <p:cNvPr id="22" name="Shape 19"/>
+          <p:cNvPr id="23" name="Shape 20"/>
           <p:cNvSpPr/>
           <p:nvPr/>
         </p:nvSpPr>
@@ -4369,7 +4434,7 @@
       </p:sp>
       <p:sp>
         <p:nvSpPr>
-          <p:cNvPr id="23" name="Text 20"/>
+          <p:cNvPr id="24" name="Text 21"/>
           <p:cNvSpPr/>
           <p:nvPr/>
         </p:nvSpPr>
@@ -4421,7 +4486,7 @@
         </p:nvSpPr>
         <p:spPr>
           <a:xfrm>
-            <a:off x="11368735" y="6437376"/>
+            <a:off x="11368735" y="6327648"/>
             <a:ext cx="365760" cy="274320"/>
           </a:xfrm>
           <a:prstGeom prst="rect">
@@ -4468,13 +4533,6 @@
 <file path=ppt/slides/slide11.xml><?xml version="1.0" encoding="utf-8"?>
 <p:sld xmlns:a="http://schemas.openxmlformats.org/drawingml/2006/main" xmlns:r="http://schemas.openxmlformats.org/officeDocument/2006/relationships" xmlns:p="http://schemas.openxmlformats.org/presentationml/2006/main">
   <p:cSld name="Slide 11">
-    <p:bg>
-      <p:bgPr>
-        <a:solidFill>
-          <a:srgbClr val="FFFFFF"/>
-        </a:solidFill>
-      </p:bgPr>
-    </p:bg>
     <p:spTree>
       <p:nvGrpSpPr>
         <p:cNvPr id="1" name=""/>
@@ -4491,7 +4549,29 @@
       </p:grpSpPr>
       <p:sp>
         <p:nvSpPr>
-          <p:cNvPr id="2" name="Text 0"/>
+          <p:cNvPr id="2" name="Shape 0"/>
+          <p:cNvSpPr/>
+          <p:nvPr/>
+        </p:nvSpPr>
+        <p:spPr>
+          <a:xfrm>
+            <a:off x="231343" y="194767"/>
+            <a:ext cx="11716207" cy="6473952"/>
+          </a:xfrm>
+          <a:prstGeom prst="roundRect">
+            <a:avLst>
+              <a:gd name="adj" fmla="val 3107"/>
+            </a:avLst>
+          </a:prstGeom>
+          <a:solidFill>
+            <a:srgbClr val="FFFFFF"/>
+          </a:solidFill>
+          <a:ln/>
+        </p:spPr>
+      </p:sp>
+      <p:sp>
+        <p:nvSpPr>
+          <p:cNvPr id="3" name="Text 1"/>
           <p:cNvSpPr/>
           <p:nvPr/>
         </p:nvSpPr>
@@ -4530,7 +4610,7 @@
       </p:sp>
       <p:sp>
         <p:nvSpPr>
-          <p:cNvPr id="3" name="Text 1"/>
+          <p:cNvPr id="4" name="Text 2"/>
           <p:cNvSpPr/>
           <p:nvPr/>
         </p:nvSpPr>
@@ -4569,7 +4649,7 @@
       </p:sp>
       <p:sp>
         <p:nvSpPr>
-          <p:cNvPr id="4" name="Shape 2"/>
+          <p:cNvPr id="5" name="Shape 3"/>
           <p:cNvSpPr/>
           <p:nvPr/>
         </p:nvSpPr>
@@ -4591,7 +4671,7 @@
       </p:sp>
       <p:sp>
         <p:nvSpPr>
-          <p:cNvPr id="5" name="Text 3"/>
+          <p:cNvPr id="6" name="Text 4"/>
           <p:cNvSpPr/>
           <p:nvPr/>
         </p:nvSpPr>
@@ -4630,7 +4710,7 @@
       </p:sp>
       <p:pic>
         <p:nvPicPr>
-          <p:cNvPr id="6" name="Image 0" descr="preencoded.png">    </p:cNvPr>
+          <p:cNvPr id="7" name="Image 0" descr="preencoded.png">    </p:cNvPr>
           <p:cNvPicPr>
             <a:picLocks noChangeAspect="1"/>
           </p:cNvPicPr>
@@ -4644,7 +4724,7 @@
         </p:blipFill>
         <p:spPr>
           <a:xfrm>
-            <a:off x="566928" y="6254496"/>
+            <a:off x="566928" y="6126480"/>
             <a:ext cx="1481328" cy="457200"/>
           </a:xfrm>
           <a:prstGeom prst="rect">
@@ -4654,7 +4734,7 @@
       </p:pic>
       <p:sp>
         <p:nvSpPr>
-          <p:cNvPr id="7" name="Shape 4"/>
+          <p:cNvPr id="8" name="Shape 5"/>
           <p:cNvSpPr/>
           <p:nvPr/>
         </p:nvSpPr>
@@ -4676,7 +4756,7 @@
       </p:sp>
       <p:sp>
         <p:nvSpPr>
-          <p:cNvPr id="8" name="Text 5"/>
+          <p:cNvPr id="9" name="Text 6"/>
           <p:cNvSpPr/>
           <p:nvPr/>
         </p:nvSpPr>
@@ -4715,7 +4795,7 @@
       </p:sp>
       <p:sp>
         <p:nvSpPr>
-          <p:cNvPr id="9" name="Text 6"/>
+          <p:cNvPr id="10" name="Text 7"/>
           <p:cNvSpPr/>
           <p:nvPr/>
         </p:nvSpPr>
@@ -4754,7 +4834,7 @@
       </p:sp>
       <p:sp>
         <p:nvSpPr>
-          <p:cNvPr id="10" name="Shape 7"/>
+          <p:cNvPr id="11" name="Shape 8"/>
           <p:cNvSpPr/>
           <p:nvPr/>
         </p:nvSpPr>
@@ -4781,7 +4861,7 @@
       </p:sp>
       <p:sp>
         <p:nvSpPr>
-          <p:cNvPr id="11" name="Text 8"/>
+          <p:cNvPr id="12" name="Text 9"/>
           <p:cNvSpPr/>
           <p:nvPr/>
         </p:nvSpPr>
@@ -4820,7 +4900,7 @@
       </p:sp>
       <p:sp>
         <p:nvSpPr>
-          <p:cNvPr id="12" name="Text 9"/>
+          <p:cNvPr id="13" name="Text 10"/>
           <p:cNvSpPr/>
           <p:nvPr/>
         </p:nvSpPr>
@@ -4862,7 +4942,7 @@
       </p:sp>
       <p:sp>
         <p:nvSpPr>
-          <p:cNvPr id="13" name="Shape 10"/>
+          <p:cNvPr id="14" name="Shape 11"/>
           <p:cNvSpPr/>
           <p:nvPr/>
         </p:nvSpPr>
@@ -4889,7 +4969,7 @@
       </p:sp>
       <p:sp>
         <p:nvSpPr>
-          <p:cNvPr id="14" name="Text 11"/>
+          <p:cNvPr id="15" name="Text 12"/>
           <p:cNvSpPr/>
           <p:nvPr/>
         </p:nvSpPr>
@@ -4928,7 +5008,7 @@
       </p:sp>
       <p:sp>
         <p:nvSpPr>
-          <p:cNvPr id="15" name="Text 12"/>
+          <p:cNvPr id="16" name="Text 13"/>
           <p:cNvSpPr/>
           <p:nvPr/>
         </p:nvSpPr>
@@ -4970,7 +5050,7 @@
       </p:sp>
       <p:sp>
         <p:nvSpPr>
-          <p:cNvPr id="16" name="Shape 13"/>
+          <p:cNvPr id="17" name="Shape 14"/>
           <p:cNvSpPr/>
           <p:nvPr/>
         </p:nvSpPr>
@@ -4997,7 +5077,7 @@
       </p:sp>
       <p:sp>
         <p:nvSpPr>
-          <p:cNvPr id="17" name="Text 14"/>
+          <p:cNvPr id="18" name="Text 15"/>
           <p:cNvSpPr/>
           <p:nvPr/>
         </p:nvSpPr>
@@ -5036,7 +5116,7 @@
       </p:sp>
       <p:sp>
         <p:nvSpPr>
-          <p:cNvPr id="18" name="Text 15"/>
+          <p:cNvPr id="19" name="Text 16"/>
           <p:cNvSpPr/>
           <p:nvPr/>
         </p:nvSpPr>
@@ -5078,7 +5158,7 @@
       </p:sp>
       <p:sp>
         <p:nvSpPr>
-          <p:cNvPr id="19" name="Shape 16"/>
+          <p:cNvPr id="20" name="Shape 17"/>
           <p:cNvSpPr/>
           <p:nvPr/>
         </p:nvSpPr>
@@ -5100,7 +5180,7 @@
       </p:sp>
       <p:sp>
         <p:nvSpPr>
-          <p:cNvPr id="20" name="Text 17"/>
+          <p:cNvPr id="21" name="Text 18"/>
           <p:cNvSpPr/>
           <p:nvPr/>
         </p:nvSpPr>
@@ -5139,7 +5219,7 @@
       </p:sp>
       <p:sp>
         <p:nvSpPr>
-          <p:cNvPr id="21" name="Text 18"/>
+          <p:cNvPr id="22" name="Text 19"/>
           <p:cNvSpPr/>
           <p:nvPr/>
         </p:nvSpPr>
@@ -5181,7 +5261,7 @@
       </p:sp>
       <p:sp>
         <p:nvSpPr>
-          <p:cNvPr id="22" name="Shape 19"/>
+          <p:cNvPr id="23" name="Shape 20"/>
           <p:cNvSpPr/>
           <p:nvPr/>
         </p:nvSpPr>
@@ -5208,7 +5288,7 @@
       </p:sp>
       <p:sp>
         <p:nvSpPr>
-          <p:cNvPr id="23" name="Text 20"/>
+          <p:cNvPr id="24" name="Text 21"/>
           <p:cNvSpPr/>
           <p:nvPr/>
         </p:nvSpPr>
@@ -5247,7 +5327,7 @@
       </p:sp>
       <p:sp>
         <p:nvSpPr>
-          <p:cNvPr id="24" name="Text 21"/>
+          <p:cNvPr id="25" name="Text 22"/>
           <p:cNvSpPr/>
           <p:nvPr/>
         </p:nvSpPr>
@@ -5299,7 +5379,7 @@
         </p:nvSpPr>
         <p:spPr>
           <a:xfrm>
-            <a:off x="11368735" y="6437376"/>
+            <a:off x="11368735" y="6327648"/>
             <a:ext cx="365760" cy="274320"/>
           </a:xfrm>
           <a:prstGeom prst="rect">
@@ -5346,13 +5426,6 @@
 <file path=ppt/slides/slide12.xml><?xml version="1.0" encoding="utf-8"?>
 <p:sld xmlns:a="http://schemas.openxmlformats.org/drawingml/2006/main" xmlns:r="http://schemas.openxmlformats.org/officeDocument/2006/relationships" xmlns:p="http://schemas.openxmlformats.org/presentationml/2006/main">
   <p:cSld name="Slide 12">
-    <p:bg>
-      <p:bgPr>
-        <a:solidFill>
-          <a:srgbClr val="FFFFFF"/>
-        </a:solidFill>
-      </p:bgPr>
-    </p:bg>
     <p:spTree>
       <p:nvGrpSpPr>
         <p:cNvPr id="1" name=""/>
@@ -5369,7 +5442,29 @@
       </p:grpSpPr>
       <p:sp>
         <p:nvSpPr>
-          <p:cNvPr id="2" name="Text 0"/>
+          <p:cNvPr id="2" name="Shape 0"/>
+          <p:cNvSpPr/>
+          <p:nvPr/>
+        </p:nvSpPr>
+        <p:spPr>
+          <a:xfrm>
+            <a:off x="231343" y="194767"/>
+            <a:ext cx="11716207" cy="6473952"/>
+          </a:xfrm>
+          <a:prstGeom prst="roundRect">
+            <a:avLst>
+              <a:gd name="adj" fmla="val 3107"/>
+            </a:avLst>
+          </a:prstGeom>
+          <a:solidFill>
+            <a:srgbClr val="FFFFFF"/>
+          </a:solidFill>
+          <a:ln/>
+        </p:spPr>
+      </p:sp>
+      <p:sp>
+        <p:nvSpPr>
+          <p:cNvPr id="3" name="Text 1"/>
           <p:cNvSpPr/>
           <p:nvPr/>
         </p:nvSpPr>
@@ -5408,7 +5503,7 @@
       </p:sp>
       <p:sp>
         <p:nvSpPr>
-          <p:cNvPr id="3" name="Text 1"/>
+          <p:cNvPr id="4" name="Text 2"/>
           <p:cNvSpPr/>
           <p:nvPr/>
         </p:nvSpPr>
@@ -5447,7 +5542,7 @@
       </p:sp>
       <p:sp>
         <p:nvSpPr>
-          <p:cNvPr id="4" name="Shape 2"/>
+          <p:cNvPr id="5" name="Shape 3"/>
           <p:cNvSpPr/>
           <p:nvPr/>
         </p:nvSpPr>
@@ -5469,7 +5564,7 @@
       </p:sp>
       <p:sp>
         <p:nvSpPr>
-          <p:cNvPr id="5" name="Text 3"/>
+          <p:cNvPr id="6" name="Text 4"/>
           <p:cNvSpPr/>
           <p:nvPr/>
         </p:nvSpPr>
@@ -5508,7 +5603,7 @@
       </p:sp>
       <p:pic>
         <p:nvPicPr>
-          <p:cNvPr id="6" name="Image 0" descr="preencoded.png">    </p:cNvPr>
+          <p:cNvPr id="7" name="Image 0" descr="preencoded.png">    </p:cNvPr>
           <p:cNvPicPr>
             <a:picLocks noChangeAspect="1"/>
           </p:cNvPicPr>
@@ -5522,7 +5617,7 @@
         </p:blipFill>
         <p:spPr>
           <a:xfrm>
-            <a:off x="566928" y="6254496"/>
+            <a:off x="566928" y="6126480"/>
             <a:ext cx="1481328" cy="457200"/>
           </a:xfrm>
           <a:prstGeom prst="rect">
@@ -6181,7 +6276,7 @@
       </p:graphicFrame>
       <p:sp>
         <p:nvSpPr>
-          <p:cNvPr id="8" name="Shape 4"/>
+          <p:cNvPr id="9" name="Shape 5"/>
           <p:cNvSpPr/>
           <p:nvPr/>
         </p:nvSpPr>
@@ -6203,7 +6298,7 @@
       </p:sp>
       <p:sp>
         <p:nvSpPr>
-          <p:cNvPr id="9" name="Text 5"/>
+          <p:cNvPr id="10" name="Text 6"/>
           <p:cNvSpPr/>
           <p:nvPr/>
         </p:nvSpPr>
@@ -6242,7 +6337,7 @@
       </p:sp>
       <p:sp>
         <p:nvSpPr>
-          <p:cNvPr id="10" name="Text 6"/>
+          <p:cNvPr id="11" name="Text 7"/>
           <p:cNvSpPr/>
           <p:nvPr/>
         </p:nvSpPr>
@@ -6284,7 +6379,7 @@
       </p:sp>
       <p:sp>
         <p:nvSpPr>
-          <p:cNvPr id="11" name="Shape 7"/>
+          <p:cNvPr id="12" name="Shape 8"/>
           <p:cNvSpPr/>
           <p:nvPr/>
         </p:nvSpPr>
@@ -6306,7 +6401,7 @@
       </p:sp>
       <p:sp>
         <p:nvSpPr>
-          <p:cNvPr id="12" name="Text 8"/>
+          <p:cNvPr id="13" name="Text 9"/>
           <p:cNvSpPr/>
           <p:nvPr/>
         </p:nvSpPr>
@@ -6345,7 +6440,7 @@
       </p:sp>
       <p:sp>
         <p:nvSpPr>
-          <p:cNvPr id="13" name="Text 9"/>
+          <p:cNvPr id="14" name="Text 10"/>
           <p:cNvSpPr/>
           <p:nvPr/>
         </p:nvSpPr>
@@ -6387,7 +6482,7 @@
       </p:sp>
       <p:sp>
         <p:nvSpPr>
-          <p:cNvPr id="14" name="Shape 10"/>
+          <p:cNvPr id="15" name="Shape 11"/>
           <p:cNvSpPr/>
           <p:nvPr/>
         </p:nvSpPr>
@@ -6409,7 +6504,7 @@
       </p:sp>
       <p:sp>
         <p:nvSpPr>
-          <p:cNvPr id="15" name="Text 11"/>
+          <p:cNvPr id="16" name="Text 12"/>
           <p:cNvSpPr/>
           <p:nvPr/>
         </p:nvSpPr>
@@ -6448,7 +6543,7 @@
       </p:sp>
       <p:sp>
         <p:nvSpPr>
-          <p:cNvPr id="16" name="Text 12"/>
+          <p:cNvPr id="17" name="Text 13"/>
           <p:cNvSpPr/>
           <p:nvPr/>
         </p:nvSpPr>
@@ -6500,7 +6595,7 @@
         </p:nvSpPr>
         <p:spPr>
           <a:xfrm>
-            <a:off x="11368735" y="6437376"/>
+            <a:off x="11368735" y="6327648"/>
             <a:ext cx="365760" cy="274320"/>
           </a:xfrm>
           <a:prstGeom prst="rect">
@@ -6547,13 +6642,6 @@
 <file path=ppt/slides/slide13.xml><?xml version="1.0" encoding="utf-8"?>
 <p:sld xmlns:a="http://schemas.openxmlformats.org/drawingml/2006/main" xmlns:r="http://schemas.openxmlformats.org/officeDocument/2006/relationships" xmlns:p="http://schemas.openxmlformats.org/presentationml/2006/main">
   <p:cSld name="Slide 13">
-    <p:bg>
-      <p:bgPr>
-        <a:solidFill>
-          <a:srgbClr val="FFFFFF"/>
-        </a:solidFill>
-      </p:bgPr>
-    </p:bg>
     <p:spTree>
       <p:nvGrpSpPr>
         <p:cNvPr id="1" name=""/>
@@ -6570,7 +6658,29 @@
       </p:grpSpPr>
       <p:sp>
         <p:nvSpPr>
-          <p:cNvPr id="2" name="Text 0"/>
+          <p:cNvPr id="2" name="Shape 0"/>
+          <p:cNvSpPr/>
+          <p:nvPr/>
+        </p:nvSpPr>
+        <p:spPr>
+          <a:xfrm>
+            <a:off x="231343" y="194767"/>
+            <a:ext cx="11716207" cy="6473952"/>
+          </a:xfrm>
+          <a:prstGeom prst="roundRect">
+            <a:avLst>
+              <a:gd name="adj" fmla="val 3107"/>
+            </a:avLst>
+          </a:prstGeom>
+          <a:solidFill>
+            <a:srgbClr val="FFFFFF"/>
+          </a:solidFill>
+          <a:ln/>
+        </p:spPr>
+      </p:sp>
+      <p:sp>
+        <p:nvSpPr>
+          <p:cNvPr id="3" name="Text 1"/>
           <p:cNvSpPr/>
           <p:nvPr/>
         </p:nvSpPr>
@@ -6609,7 +6719,7 @@
       </p:sp>
       <p:sp>
         <p:nvSpPr>
-          <p:cNvPr id="3" name="Text 1"/>
+          <p:cNvPr id="4" name="Text 2"/>
           <p:cNvSpPr/>
           <p:nvPr/>
         </p:nvSpPr>
@@ -6648,7 +6758,7 @@
       </p:sp>
       <p:sp>
         <p:nvSpPr>
-          <p:cNvPr id="4" name="Shape 2"/>
+          <p:cNvPr id="5" name="Shape 3"/>
           <p:cNvSpPr/>
           <p:nvPr/>
         </p:nvSpPr>
@@ -6670,7 +6780,7 @@
       </p:sp>
       <p:sp>
         <p:nvSpPr>
-          <p:cNvPr id="5" name="Text 3"/>
+          <p:cNvPr id="6" name="Text 4"/>
           <p:cNvSpPr/>
           <p:nvPr/>
         </p:nvSpPr>
@@ -6709,7 +6819,7 @@
       </p:sp>
       <p:pic>
         <p:nvPicPr>
-          <p:cNvPr id="6" name="Image 0" descr="preencoded.png">    </p:cNvPr>
+          <p:cNvPr id="7" name="Image 0" descr="preencoded.png">    </p:cNvPr>
           <p:cNvPicPr>
             <a:picLocks noChangeAspect="1"/>
           </p:cNvPicPr>
@@ -6723,7 +6833,7 @@
         </p:blipFill>
         <p:spPr>
           <a:xfrm>
-            <a:off x="566928" y="6254496"/>
+            <a:off x="566928" y="6126480"/>
             <a:ext cx="1481328" cy="457200"/>
           </a:xfrm>
           <a:prstGeom prst="rect">
@@ -6733,7 +6843,7 @@
       </p:pic>
       <p:sp>
         <p:nvSpPr>
-          <p:cNvPr id="7" name="Shape 4"/>
+          <p:cNvPr id="8" name="Shape 5"/>
           <p:cNvSpPr/>
           <p:nvPr/>
         </p:nvSpPr>
@@ -6755,7 +6865,7 @@
       </p:sp>
       <p:sp>
         <p:nvSpPr>
-          <p:cNvPr id="8" name="Text 5"/>
+          <p:cNvPr id="9" name="Text 6"/>
           <p:cNvSpPr/>
           <p:nvPr/>
         </p:nvSpPr>
@@ -6794,7 +6904,7 @@
       </p:sp>
       <p:sp>
         <p:nvSpPr>
-          <p:cNvPr id="9" name="Text 6"/>
+          <p:cNvPr id="10" name="Text 7"/>
           <p:cNvSpPr/>
           <p:nvPr/>
         </p:nvSpPr>
@@ -6836,7 +6946,7 @@
       </p:sp>
       <p:sp>
         <p:nvSpPr>
-          <p:cNvPr id="10" name="Shape 7"/>
+          <p:cNvPr id="11" name="Shape 8"/>
           <p:cNvSpPr/>
           <p:nvPr/>
         </p:nvSpPr>
@@ -6858,7 +6968,7 @@
       </p:sp>
       <p:sp>
         <p:nvSpPr>
-          <p:cNvPr id="11" name="Text 8"/>
+          <p:cNvPr id="12" name="Text 9"/>
           <p:cNvSpPr/>
           <p:nvPr/>
         </p:nvSpPr>
@@ -6897,7 +7007,7 @@
       </p:sp>
       <p:sp>
         <p:nvSpPr>
-          <p:cNvPr id="12" name="Text 9"/>
+          <p:cNvPr id="13" name="Text 10"/>
           <p:cNvSpPr/>
           <p:nvPr/>
         </p:nvSpPr>
@@ -6939,7 +7049,7 @@
       </p:sp>
       <p:sp>
         <p:nvSpPr>
-          <p:cNvPr id="13" name="Shape 10"/>
+          <p:cNvPr id="14" name="Shape 11"/>
           <p:cNvSpPr/>
           <p:nvPr/>
         </p:nvSpPr>
@@ -6961,7 +7071,7 @@
       </p:sp>
       <p:sp>
         <p:nvSpPr>
-          <p:cNvPr id="14" name="Text 11"/>
+          <p:cNvPr id="15" name="Text 12"/>
           <p:cNvSpPr/>
           <p:nvPr/>
         </p:nvSpPr>
@@ -7000,7 +7110,7 @@
       </p:sp>
       <p:sp>
         <p:nvSpPr>
-          <p:cNvPr id="15" name="Text 12"/>
+          <p:cNvPr id="16" name="Text 13"/>
           <p:cNvSpPr/>
           <p:nvPr/>
         </p:nvSpPr>
@@ -7042,7 +7152,7 @@
       </p:sp>
       <p:sp>
         <p:nvSpPr>
-          <p:cNvPr id="16" name="Shape 13"/>
+          <p:cNvPr id="17" name="Shape 14"/>
           <p:cNvSpPr/>
           <p:nvPr/>
         </p:nvSpPr>
@@ -7064,7 +7174,7 @@
       </p:sp>
       <p:sp>
         <p:nvSpPr>
-          <p:cNvPr id="17" name="Text 14"/>
+          <p:cNvPr id="18" name="Text 15"/>
           <p:cNvSpPr/>
           <p:nvPr/>
         </p:nvSpPr>
@@ -7116,7 +7226,7 @@
         </p:nvSpPr>
         <p:spPr>
           <a:xfrm>
-            <a:off x="11368735" y="6437376"/>
+            <a:off x="11368735" y="6327648"/>
             <a:ext cx="365760" cy="274320"/>
           </a:xfrm>
           <a:prstGeom prst="rect">
@@ -7163,13 +7273,6 @@
 <file path=ppt/slides/slide14.xml><?xml version="1.0" encoding="utf-8"?>
 <p:sld xmlns:a="http://schemas.openxmlformats.org/drawingml/2006/main" xmlns:r="http://schemas.openxmlformats.org/officeDocument/2006/relationships" xmlns:p="http://schemas.openxmlformats.org/presentationml/2006/main">
   <p:cSld name="Slide 14">
-    <p:bg>
-      <p:bgPr>
-        <a:solidFill>
-          <a:srgbClr val="FFFFFF"/>
-        </a:solidFill>
-      </p:bgPr>
-    </p:bg>
     <p:spTree>
       <p:nvGrpSpPr>
         <p:cNvPr id="1" name=""/>
@@ -7186,7 +7289,29 @@
       </p:grpSpPr>
       <p:sp>
         <p:nvSpPr>
-          <p:cNvPr id="2" name="Text 0"/>
+          <p:cNvPr id="2" name="Shape 0"/>
+          <p:cNvSpPr/>
+          <p:nvPr/>
+        </p:nvSpPr>
+        <p:spPr>
+          <a:xfrm>
+            <a:off x="231343" y="194767"/>
+            <a:ext cx="11716207" cy="6473952"/>
+          </a:xfrm>
+          <a:prstGeom prst="roundRect">
+            <a:avLst>
+              <a:gd name="adj" fmla="val 3107"/>
+            </a:avLst>
+          </a:prstGeom>
+          <a:solidFill>
+            <a:srgbClr val="FFFFFF"/>
+          </a:solidFill>
+          <a:ln/>
+        </p:spPr>
+      </p:sp>
+      <p:sp>
+        <p:nvSpPr>
+          <p:cNvPr id="3" name="Text 1"/>
           <p:cNvSpPr/>
           <p:nvPr/>
         </p:nvSpPr>
@@ -7225,7 +7350,7 @@
       </p:sp>
       <p:sp>
         <p:nvSpPr>
-          <p:cNvPr id="3" name="Text 1"/>
+          <p:cNvPr id="4" name="Text 2"/>
           <p:cNvSpPr/>
           <p:nvPr/>
         </p:nvSpPr>
@@ -7264,7 +7389,7 @@
       </p:sp>
       <p:sp>
         <p:nvSpPr>
-          <p:cNvPr id="4" name="Shape 2"/>
+          <p:cNvPr id="5" name="Shape 3"/>
           <p:cNvSpPr/>
           <p:nvPr/>
         </p:nvSpPr>
@@ -7286,7 +7411,7 @@
       </p:sp>
       <p:sp>
         <p:nvSpPr>
-          <p:cNvPr id="5" name="Text 3"/>
+          <p:cNvPr id="6" name="Text 4"/>
           <p:cNvSpPr/>
           <p:nvPr/>
         </p:nvSpPr>
@@ -7325,7 +7450,7 @@
       </p:sp>
       <p:pic>
         <p:nvPicPr>
-          <p:cNvPr id="6" name="Image 0" descr="preencoded.png">    </p:cNvPr>
+          <p:cNvPr id="7" name="Image 0" descr="preencoded.png">    </p:cNvPr>
           <p:cNvPicPr>
             <a:picLocks noChangeAspect="1"/>
           </p:cNvPicPr>
@@ -7339,7 +7464,7 @@
         </p:blipFill>
         <p:spPr>
           <a:xfrm>
-            <a:off x="566928" y="6254496"/>
+            <a:off x="566928" y="6126480"/>
             <a:ext cx="1481328" cy="457200"/>
           </a:xfrm>
           <a:prstGeom prst="rect">
@@ -7349,7 +7474,7 @@
       </p:pic>
       <p:sp>
         <p:nvSpPr>
-          <p:cNvPr id="7" name="Shape 4"/>
+          <p:cNvPr id="8" name="Shape 5"/>
           <p:cNvSpPr/>
           <p:nvPr/>
         </p:nvSpPr>
@@ -7371,7 +7496,7 @@
       </p:sp>
       <p:sp>
         <p:nvSpPr>
-          <p:cNvPr id="8" name="Text 5"/>
+          <p:cNvPr id="9" name="Text 6"/>
           <p:cNvSpPr/>
           <p:nvPr/>
         </p:nvSpPr>
@@ -7410,7 +7535,7 @@
       </p:sp>
       <p:sp>
         <p:nvSpPr>
-          <p:cNvPr id="9" name="Shape 6"/>
+          <p:cNvPr id="10" name="Shape 7"/>
           <p:cNvSpPr/>
           <p:nvPr/>
         </p:nvSpPr>
@@ -7433,7 +7558,7 @@
       </p:sp>
       <p:sp>
         <p:nvSpPr>
-          <p:cNvPr id="10" name="Shape 7"/>
+          <p:cNvPr id="11" name="Shape 8"/>
           <p:cNvSpPr/>
           <p:nvPr/>
         </p:nvSpPr>
@@ -7453,7 +7578,7 @@
       </p:sp>
       <p:sp>
         <p:nvSpPr>
-          <p:cNvPr id="11" name="Shape 8"/>
+          <p:cNvPr id="12" name="Shape 9"/>
           <p:cNvSpPr/>
           <p:nvPr/>
         </p:nvSpPr>
@@ -7475,7 +7600,7 @@
       </p:sp>
       <p:sp>
         <p:nvSpPr>
-          <p:cNvPr id="12" name="Text 9"/>
+          <p:cNvPr id="13" name="Text 10"/>
           <p:cNvSpPr/>
           <p:nvPr/>
         </p:nvSpPr>
@@ -7514,7 +7639,7 @@
       </p:sp>
       <p:sp>
         <p:nvSpPr>
-          <p:cNvPr id="13" name="Shape 10"/>
+          <p:cNvPr id="14" name="Shape 11"/>
           <p:cNvSpPr/>
           <p:nvPr/>
         </p:nvSpPr>
@@ -7537,7 +7662,7 @@
       </p:sp>
       <p:sp>
         <p:nvSpPr>
-          <p:cNvPr id="14" name="Shape 11"/>
+          <p:cNvPr id="15" name="Shape 12"/>
           <p:cNvSpPr/>
           <p:nvPr/>
         </p:nvSpPr>
@@ -7557,7 +7682,7 @@
       </p:sp>
       <p:sp>
         <p:nvSpPr>
-          <p:cNvPr id="15" name="Shape 12"/>
+          <p:cNvPr id="16" name="Shape 13"/>
           <p:cNvSpPr/>
           <p:nvPr/>
         </p:nvSpPr>
@@ -7579,7 +7704,7 @@
       </p:sp>
       <p:sp>
         <p:nvSpPr>
-          <p:cNvPr id="16" name="Text 13"/>
+          <p:cNvPr id="17" name="Text 14"/>
           <p:cNvSpPr/>
           <p:nvPr/>
         </p:nvSpPr>
@@ -7618,7 +7743,7 @@
       </p:sp>
       <p:sp>
         <p:nvSpPr>
-          <p:cNvPr id="17" name="Shape 14"/>
+          <p:cNvPr id="18" name="Shape 15"/>
           <p:cNvSpPr/>
           <p:nvPr/>
         </p:nvSpPr>
@@ -7641,7 +7766,7 @@
       </p:sp>
       <p:sp>
         <p:nvSpPr>
-          <p:cNvPr id="18" name="Shape 15"/>
+          <p:cNvPr id="19" name="Shape 16"/>
           <p:cNvSpPr/>
           <p:nvPr/>
         </p:nvSpPr>
@@ -7661,7 +7786,7 @@
       </p:sp>
       <p:sp>
         <p:nvSpPr>
-          <p:cNvPr id="19" name="Shape 16"/>
+          <p:cNvPr id="20" name="Shape 17"/>
           <p:cNvSpPr/>
           <p:nvPr/>
         </p:nvSpPr>
@@ -7683,7 +7808,7 @@
       </p:sp>
       <p:sp>
         <p:nvSpPr>
-          <p:cNvPr id="20" name="Text 17"/>
+          <p:cNvPr id="21" name="Text 18"/>
           <p:cNvSpPr/>
           <p:nvPr/>
         </p:nvSpPr>
@@ -7722,7 +7847,7 @@
       </p:sp>
       <p:sp>
         <p:nvSpPr>
-          <p:cNvPr id="21" name="Shape 18"/>
+          <p:cNvPr id="22" name="Shape 19"/>
           <p:cNvSpPr/>
           <p:nvPr/>
         </p:nvSpPr>
@@ -7745,7 +7870,7 @@
       </p:sp>
       <p:sp>
         <p:nvSpPr>
-          <p:cNvPr id="22" name="Shape 19"/>
+          <p:cNvPr id="23" name="Shape 20"/>
           <p:cNvSpPr/>
           <p:nvPr/>
         </p:nvSpPr>
@@ -7765,7 +7890,7 @@
       </p:sp>
       <p:sp>
         <p:nvSpPr>
-          <p:cNvPr id="23" name="Shape 20"/>
+          <p:cNvPr id="24" name="Shape 21"/>
           <p:cNvSpPr/>
           <p:nvPr/>
         </p:nvSpPr>
@@ -7787,7 +7912,7 @@
       </p:sp>
       <p:sp>
         <p:nvSpPr>
-          <p:cNvPr id="24" name="Text 21"/>
+          <p:cNvPr id="25" name="Text 22"/>
           <p:cNvSpPr/>
           <p:nvPr/>
         </p:nvSpPr>
@@ -7826,7 +7951,7 @@
       </p:sp>
       <p:sp>
         <p:nvSpPr>
-          <p:cNvPr id="25" name="Shape 22"/>
+          <p:cNvPr id="26" name="Shape 23"/>
           <p:cNvSpPr/>
           <p:nvPr/>
         </p:nvSpPr>
@@ -7848,7 +7973,7 @@
       </p:sp>
       <p:sp>
         <p:nvSpPr>
-          <p:cNvPr id="26" name="Text 23"/>
+          <p:cNvPr id="27" name="Text 24"/>
           <p:cNvSpPr/>
           <p:nvPr/>
         </p:nvSpPr>
@@ -7887,7 +8012,7 @@
       </p:sp>
       <p:sp>
         <p:nvSpPr>
-          <p:cNvPr id="27" name="Text 24"/>
+          <p:cNvPr id="28" name="Text 25"/>
           <p:cNvSpPr/>
           <p:nvPr/>
         </p:nvSpPr>
@@ -7929,7 +8054,7 @@
       </p:sp>
       <p:sp>
         <p:nvSpPr>
-          <p:cNvPr id="28" name="Shape 25"/>
+          <p:cNvPr id="29" name="Shape 26"/>
           <p:cNvSpPr/>
           <p:nvPr/>
         </p:nvSpPr>
@@ -7951,7 +8076,7 @@
       </p:sp>
       <p:sp>
         <p:nvSpPr>
-          <p:cNvPr id="29" name="Text 26"/>
+          <p:cNvPr id="30" name="Text 27"/>
           <p:cNvSpPr/>
           <p:nvPr/>
         </p:nvSpPr>
@@ -7990,7 +8115,7 @@
       </p:sp>
       <p:sp>
         <p:nvSpPr>
-          <p:cNvPr id="30" name="Text 27"/>
+          <p:cNvPr id="31" name="Text 28"/>
           <p:cNvSpPr/>
           <p:nvPr/>
         </p:nvSpPr>
@@ -8032,7 +8157,7 @@
       </p:sp>
       <p:sp>
         <p:nvSpPr>
-          <p:cNvPr id="31" name="Shape 28"/>
+          <p:cNvPr id="32" name="Shape 29"/>
           <p:cNvSpPr/>
           <p:nvPr/>
         </p:nvSpPr>
@@ -8059,7 +8184,7 @@
       </p:sp>
       <p:sp>
         <p:nvSpPr>
-          <p:cNvPr id="32" name="Text 29"/>
+          <p:cNvPr id="33" name="Text 30"/>
           <p:cNvSpPr/>
           <p:nvPr/>
         </p:nvSpPr>
@@ -8098,7 +8223,7 @@
       </p:sp>
       <p:sp>
         <p:nvSpPr>
-          <p:cNvPr id="33" name="Text 30"/>
+          <p:cNvPr id="34" name="Text 31"/>
           <p:cNvSpPr/>
           <p:nvPr/>
         </p:nvSpPr>
@@ -8150,7 +8275,7 @@
         </p:nvSpPr>
         <p:spPr>
           <a:xfrm>
-            <a:off x="11368735" y="6437376"/>
+            <a:off x="11368735" y="6327648"/>
             <a:ext cx="365760" cy="274320"/>
           </a:xfrm>
           <a:prstGeom prst="rect">
@@ -8197,13 +8322,6 @@
 <file path=ppt/slides/slide15.xml><?xml version="1.0" encoding="utf-8"?>
 <p:sld xmlns:a="http://schemas.openxmlformats.org/drawingml/2006/main" xmlns:r="http://schemas.openxmlformats.org/officeDocument/2006/relationships" xmlns:p="http://schemas.openxmlformats.org/presentationml/2006/main">
   <p:cSld name="Slide 15">
-    <p:bg>
-      <p:bgPr>
-        <a:solidFill>
-          <a:srgbClr val="FFFFFF"/>
-        </a:solidFill>
-      </p:bgPr>
-    </p:bg>
     <p:spTree>
       <p:nvGrpSpPr>
         <p:cNvPr id="1" name=""/>
@@ -8220,7 +8338,29 @@
       </p:grpSpPr>
       <p:sp>
         <p:nvSpPr>
-          <p:cNvPr id="2" name="Text 0"/>
+          <p:cNvPr id="2" name="Shape 0"/>
+          <p:cNvSpPr/>
+          <p:nvPr/>
+        </p:nvSpPr>
+        <p:spPr>
+          <a:xfrm>
+            <a:off x="231343" y="194767"/>
+            <a:ext cx="11716207" cy="6473952"/>
+          </a:xfrm>
+          <a:prstGeom prst="roundRect">
+            <a:avLst>
+              <a:gd name="adj" fmla="val 3107"/>
+            </a:avLst>
+          </a:prstGeom>
+          <a:solidFill>
+            <a:srgbClr val="FFFFFF"/>
+          </a:solidFill>
+          <a:ln/>
+        </p:spPr>
+      </p:sp>
+      <p:sp>
+        <p:nvSpPr>
+          <p:cNvPr id="3" name="Text 1"/>
           <p:cNvSpPr/>
           <p:nvPr/>
         </p:nvSpPr>
@@ -8259,7 +8399,7 @@
       </p:sp>
       <p:sp>
         <p:nvSpPr>
-          <p:cNvPr id="3" name="Text 1"/>
+          <p:cNvPr id="4" name="Text 2"/>
           <p:cNvSpPr/>
           <p:nvPr/>
         </p:nvSpPr>
@@ -8298,7 +8438,7 @@
       </p:sp>
       <p:sp>
         <p:nvSpPr>
-          <p:cNvPr id="4" name="Shape 2"/>
+          <p:cNvPr id="5" name="Shape 3"/>
           <p:cNvSpPr/>
           <p:nvPr/>
         </p:nvSpPr>
@@ -8320,7 +8460,7 @@
       </p:sp>
       <p:sp>
         <p:nvSpPr>
-          <p:cNvPr id="5" name="Text 3"/>
+          <p:cNvPr id="6" name="Text 4"/>
           <p:cNvSpPr/>
           <p:nvPr/>
         </p:nvSpPr>
@@ -8359,7 +8499,7 @@
       </p:sp>
       <p:pic>
         <p:nvPicPr>
-          <p:cNvPr id="6" name="Image 0" descr="preencoded.png">    </p:cNvPr>
+          <p:cNvPr id="7" name="Image 0" descr="preencoded.png">    </p:cNvPr>
           <p:cNvPicPr>
             <a:picLocks noChangeAspect="1"/>
           </p:cNvPicPr>
@@ -8373,7 +8513,7 @@
         </p:blipFill>
         <p:spPr>
           <a:xfrm>
-            <a:off x="566928" y="6254496"/>
+            <a:off x="566928" y="6126480"/>
             <a:ext cx="1481328" cy="457200"/>
           </a:xfrm>
           <a:prstGeom prst="rect">
@@ -8383,7 +8523,7 @@
       </p:pic>
       <p:sp>
         <p:nvSpPr>
-          <p:cNvPr id="7" name="Shape 4"/>
+          <p:cNvPr id="8" name="Shape 5"/>
           <p:cNvSpPr/>
           <p:nvPr/>
         </p:nvSpPr>
@@ -8405,7 +8545,7 @@
       </p:sp>
       <p:sp>
         <p:nvSpPr>
-          <p:cNvPr id="8" name="Text 5"/>
+          <p:cNvPr id="9" name="Text 6"/>
           <p:cNvSpPr/>
           <p:nvPr/>
         </p:nvSpPr>
@@ -8444,7 +8584,7 @@
       </p:sp>
       <p:sp>
         <p:nvSpPr>
-          <p:cNvPr id="9" name="Text 6"/>
+          <p:cNvPr id="10" name="Text 7"/>
           <p:cNvSpPr/>
           <p:nvPr/>
         </p:nvSpPr>
@@ -8486,7 +8626,7 @@
       </p:sp>
       <p:sp>
         <p:nvSpPr>
-          <p:cNvPr id="10" name="Shape 7"/>
+          <p:cNvPr id="11" name="Shape 8"/>
           <p:cNvSpPr/>
           <p:nvPr/>
         </p:nvSpPr>
@@ -8508,7 +8648,7 @@
       </p:sp>
       <p:sp>
         <p:nvSpPr>
-          <p:cNvPr id="11" name="Text 8"/>
+          <p:cNvPr id="12" name="Text 9"/>
           <p:cNvSpPr/>
           <p:nvPr/>
         </p:nvSpPr>
@@ -8547,7 +8687,7 @@
       </p:sp>
       <p:sp>
         <p:nvSpPr>
-          <p:cNvPr id="12" name="Text 9"/>
+          <p:cNvPr id="13" name="Text 10"/>
           <p:cNvSpPr/>
           <p:nvPr/>
         </p:nvSpPr>
@@ -8589,7 +8729,7 @@
       </p:sp>
       <p:sp>
         <p:nvSpPr>
-          <p:cNvPr id="13" name="Shape 10"/>
+          <p:cNvPr id="14" name="Shape 11"/>
           <p:cNvSpPr/>
           <p:nvPr/>
         </p:nvSpPr>
@@ -8611,7 +8751,7 @@
       </p:sp>
       <p:sp>
         <p:nvSpPr>
-          <p:cNvPr id="14" name="Text 11"/>
+          <p:cNvPr id="15" name="Text 12"/>
           <p:cNvSpPr/>
           <p:nvPr/>
         </p:nvSpPr>
@@ -8664,7 +8804,7 @@
       </p:sp>
       <p:sp>
         <p:nvSpPr>
-          <p:cNvPr id="15" name="Shape 12"/>
+          <p:cNvPr id="16" name="Shape 13"/>
           <p:cNvSpPr/>
           <p:nvPr/>
         </p:nvSpPr>
@@ -8686,7 +8826,7 @@
       </p:sp>
       <p:sp>
         <p:nvSpPr>
-          <p:cNvPr id="16" name="Text 13"/>
+          <p:cNvPr id="17" name="Text 14"/>
           <p:cNvSpPr/>
           <p:nvPr/>
         </p:nvSpPr>
@@ -8739,7 +8879,7 @@
       </p:sp>
       <p:sp>
         <p:nvSpPr>
-          <p:cNvPr id="17" name="Shape 14"/>
+          <p:cNvPr id="18" name="Shape 15"/>
           <p:cNvSpPr/>
           <p:nvPr/>
         </p:nvSpPr>
@@ -8761,7 +8901,7 @@
       </p:sp>
       <p:sp>
         <p:nvSpPr>
-          <p:cNvPr id="18" name="Text 15"/>
+          <p:cNvPr id="19" name="Text 16"/>
           <p:cNvSpPr/>
           <p:nvPr/>
         </p:nvSpPr>
@@ -8814,7 +8954,7 @@
       </p:sp>
       <p:sp>
         <p:nvSpPr>
-          <p:cNvPr id="19" name="Text 16"/>
+          <p:cNvPr id="20" name="Text 17"/>
           <p:cNvSpPr/>
           <p:nvPr/>
         </p:nvSpPr>
@@ -8853,7 +8993,7 @@
       </p:sp>
       <p:sp>
         <p:nvSpPr>
-          <p:cNvPr id="20" name="Shape 17"/>
+          <p:cNvPr id="21" name="Shape 18"/>
           <p:cNvSpPr/>
           <p:nvPr/>
         </p:nvSpPr>
@@ -8875,7 +9015,7 @@
       </p:sp>
       <p:sp>
         <p:nvSpPr>
-          <p:cNvPr id="21" name="Text 18"/>
+          <p:cNvPr id="22" name="Text 19"/>
           <p:cNvSpPr/>
           <p:nvPr/>
         </p:nvSpPr>
@@ -8914,7 +9054,7 @@
       </p:sp>
       <p:sp>
         <p:nvSpPr>
-          <p:cNvPr id="22" name="Text 19"/>
+          <p:cNvPr id="23" name="Text 20"/>
           <p:cNvSpPr/>
           <p:nvPr/>
         </p:nvSpPr>
@@ -8956,7 +9096,7 @@
       </p:sp>
       <p:sp>
         <p:nvSpPr>
-          <p:cNvPr id="23" name="Shape 20"/>
+          <p:cNvPr id="24" name="Shape 21"/>
           <p:cNvSpPr/>
           <p:nvPr/>
         </p:nvSpPr>
@@ -8978,7 +9118,7 @@
       </p:sp>
       <p:sp>
         <p:nvSpPr>
-          <p:cNvPr id="24" name="Text 21"/>
+          <p:cNvPr id="25" name="Text 22"/>
           <p:cNvSpPr/>
           <p:nvPr/>
         </p:nvSpPr>
@@ -9017,7 +9157,7 @@
       </p:sp>
       <p:sp>
         <p:nvSpPr>
-          <p:cNvPr id="25" name="Text 22"/>
+          <p:cNvPr id="26" name="Text 23"/>
           <p:cNvSpPr/>
           <p:nvPr/>
         </p:nvSpPr>
@@ -9069,7 +9209,7 @@
         </p:nvSpPr>
         <p:spPr>
           <a:xfrm>
-            <a:off x="11368735" y="6437376"/>
+            <a:off x="11368735" y="6327648"/>
             <a:ext cx="365760" cy="274320"/>
           </a:xfrm>
           <a:prstGeom prst="rect">
@@ -9116,13 +9256,6 @@
 <file path=ppt/slides/slide16.xml><?xml version="1.0" encoding="utf-8"?>
 <p:sld xmlns:a="http://schemas.openxmlformats.org/drawingml/2006/main" xmlns:r="http://schemas.openxmlformats.org/officeDocument/2006/relationships" xmlns:p="http://schemas.openxmlformats.org/presentationml/2006/main">
   <p:cSld name="Slide 16">
-    <p:bg>
-      <p:bgPr>
-        <a:solidFill>
-          <a:srgbClr val="FFFFFF"/>
-        </a:solidFill>
-      </p:bgPr>
-    </p:bg>
     <p:spTree>
       <p:nvGrpSpPr>
         <p:cNvPr id="1" name=""/>
@@ -9139,7 +9272,29 @@
       </p:grpSpPr>
       <p:sp>
         <p:nvSpPr>
-          <p:cNvPr id="2" name="Text 0"/>
+          <p:cNvPr id="2" name="Shape 0"/>
+          <p:cNvSpPr/>
+          <p:nvPr/>
+        </p:nvSpPr>
+        <p:spPr>
+          <a:xfrm>
+            <a:off x="231343" y="194767"/>
+            <a:ext cx="11716207" cy="6473952"/>
+          </a:xfrm>
+          <a:prstGeom prst="roundRect">
+            <a:avLst>
+              <a:gd name="adj" fmla="val 3107"/>
+            </a:avLst>
+          </a:prstGeom>
+          <a:solidFill>
+            <a:srgbClr val="FFFFFF"/>
+          </a:solidFill>
+          <a:ln/>
+        </p:spPr>
+      </p:sp>
+      <p:sp>
+        <p:nvSpPr>
+          <p:cNvPr id="3" name="Text 1"/>
           <p:cNvSpPr/>
           <p:nvPr/>
         </p:nvSpPr>
@@ -9178,7 +9333,7 @@
       </p:sp>
       <p:sp>
         <p:nvSpPr>
-          <p:cNvPr id="3" name="Text 1"/>
+          <p:cNvPr id="4" name="Text 2"/>
           <p:cNvSpPr/>
           <p:nvPr/>
         </p:nvSpPr>
@@ -9217,7 +9372,7 @@
       </p:sp>
       <p:sp>
         <p:nvSpPr>
-          <p:cNvPr id="4" name="Shape 2"/>
+          <p:cNvPr id="5" name="Shape 3"/>
           <p:cNvSpPr/>
           <p:nvPr/>
         </p:nvSpPr>
@@ -9239,7 +9394,7 @@
       </p:sp>
       <p:sp>
         <p:nvSpPr>
-          <p:cNvPr id="5" name="Text 3"/>
+          <p:cNvPr id="6" name="Text 4"/>
           <p:cNvSpPr/>
           <p:nvPr/>
         </p:nvSpPr>
@@ -9278,7 +9433,7 @@
       </p:sp>
       <p:pic>
         <p:nvPicPr>
-          <p:cNvPr id="6" name="Image 0" descr="preencoded.png">    </p:cNvPr>
+          <p:cNvPr id="7" name="Image 0" descr="preencoded.png">    </p:cNvPr>
           <p:cNvPicPr>
             <a:picLocks noChangeAspect="1"/>
           </p:cNvPicPr>
@@ -9292,7 +9447,7 @@
         </p:blipFill>
         <p:spPr>
           <a:xfrm>
-            <a:off x="566928" y="6254496"/>
+            <a:off x="566928" y="6126480"/>
             <a:ext cx="1481328" cy="457200"/>
           </a:xfrm>
           <a:prstGeom prst="rect">
@@ -9302,7 +9457,7 @@
       </p:pic>
       <p:sp>
         <p:nvSpPr>
-          <p:cNvPr id="7" name="Shape 4"/>
+          <p:cNvPr id="8" name="Shape 5"/>
           <p:cNvSpPr/>
           <p:nvPr/>
         </p:nvSpPr>
@@ -9324,7 +9479,7 @@
       </p:sp>
       <p:sp>
         <p:nvSpPr>
-          <p:cNvPr id="8" name="Text 5"/>
+          <p:cNvPr id="9" name="Text 6"/>
           <p:cNvSpPr/>
           <p:nvPr/>
         </p:nvSpPr>
@@ -9363,7 +9518,7 @@
       </p:sp>
       <p:sp>
         <p:nvSpPr>
-          <p:cNvPr id="9" name="Shape 6"/>
+          <p:cNvPr id="10" name="Shape 7"/>
           <p:cNvSpPr/>
           <p:nvPr/>
         </p:nvSpPr>
@@ -9386,7 +9541,7 @@
       </p:sp>
       <p:sp>
         <p:nvSpPr>
-          <p:cNvPr id="10" name="Shape 7"/>
+          <p:cNvPr id="11" name="Shape 8"/>
           <p:cNvSpPr/>
           <p:nvPr/>
         </p:nvSpPr>
@@ -9406,7 +9561,7 @@
       </p:sp>
       <p:sp>
         <p:nvSpPr>
-          <p:cNvPr id="11" name="Shape 8"/>
+          <p:cNvPr id="12" name="Shape 9"/>
           <p:cNvSpPr/>
           <p:nvPr/>
         </p:nvSpPr>
@@ -9428,7 +9583,7 @@
       </p:sp>
       <p:sp>
         <p:nvSpPr>
-          <p:cNvPr id="12" name="Text 9"/>
+          <p:cNvPr id="13" name="Text 10"/>
           <p:cNvSpPr/>
           <p:nvPr/>
         </p:nvSpPr>
@@ -9467,7 +9622,7 @@
       </p:sp>
       <p:sp>
         <p:nvSpPr>
-          <p:cNvPr id="13" name="Shape 10"/>
+          <p:cNvPr id="14" name="Shape 11"/>
           <p:cNvSpPr/>
           <p:nvPr/>
         </p:nvSpPr>
@@ -9494,7 +9649,7 @@
       </p:sp>
       <p:sp>
         <p:nvSpPr>
-          <p:cNvPr id="14" name="Text 11"/>
+          <p:cNvPr id="15" name="Text 12"/>
           <p:cNvSpPr/>
           <p:nvPr/>
         </p:nvSpPr>
@@ -9533,7 +9688,7 @@
       </p:sp>
       <p:sp>
         <p:nvSpPr>
-          <p:cNvPr id="15" name="Text 12"/>
+          <p:cNvPr id="16" name="Text 13"/>
           <p:cNvSpPr/>
           <p:nvPr/>
         </p:nvSpPr>
@@ -9575,7 +9730,7 @@
       </p:sp>
       <p:sp>
         <p:nvSpPr>
-          <p:cNvPr id="16" name="Shape 13"/>
+          <p:cNvPr id="17" name="Shape 14"/>
           <p:cNvSpPr/>
           <p:nvPr/>
         </p:nvSpPr>
@@ -9597,7 +9752,7 @@
       </p:sp>
       <p:sp>
         <p:nvSpPr>
-          <p:cNvPr id="17" name="Text 14"/>
+          <p:cNvPr id="18" name="Text 15"/>
           <p:cNvSpPr/>
           <p:nvPr/>
         </p:nvSpPr>
@@ -9636,7 +9791,7 @@
       </p:sp>
       <p:sp>
         <p:nvSpPr>
-          <p:cNvPr id="18" name="Text 15"/>
+          <p:cNvPr id="19" name="Text 16"/>
           <p:cNvSpPr/>
           <p:nvPr/>
         </p:nvSpPr>
@@ -9678,7 +9833,7 @@
       </p:sp>
       <p:sp>
         <p:nvSpPr>
-          <p:cNvPr id="19" name="Shape 16"/>
+          <p:cNvPr id="20" name="Shape 17"/>
           <p:cNvSpPr/>
           <p:nvPr/>
         </p:nvSpPr>
@@ -9700,7 +9855,7 @@
       </p:sp>
       <p:sp>
         <p:nvSpPr>
-          <p:cNvPr id="20" name="Text 17"/>
+          <p:cNvPr id="21" name="Text 18"/>
           <p:cNvSpPr/>
           <p:nvPr/>
         </p:nvSpPr>
@@ -9739,7 +9894,7 @@
       </p:sp>
       <p:sp>
         <p:nvSpPr>
-          <p:cNvPr id="21" name="Text 18"/>
+          <p:cNvPr id="22" name="Text 19"/>
           <p:cNvSpPr/>
           <p:nvPr/>
         </p:nvSpPr>
@@ -9791,7 +9946,7 @@
         </p:nvSpPr>
         <p:spPr>
           <a:xfrm>
-            <a:off x="11368735" y="6437376"/>
+            <a:off x="11368735" y="6327648"/>
             <a:ext cx="365760" cy="274320"/>
           </a:xfrm>
           <a:prstGeom prst="rect">
@@ -9838,13 +9993,6 @@
 <file path=ppt/slides/slide17.xml><?xml version="1.0" encoding="utf-8"?>
 <p:sld xmlns:a="http://schemas.openxmlformats.org/drawingml/2006/main" xmlns:r="http://schemas.openxmlformats.org/officeDocument/2006/relationships" xmlns:p="http://schemas.openxmlformats.org/presentationml/2006/main">
   <p:cSld name="Slide 17">
-    <p:bg>
-      <p:bgPr>
-        <a:solidFill>
-          <a:srgbClr val="FFFFFF"/>
-        </a:solidFill>
-      </p:bgPr>
-    </p:bg>
     <p:spTree>
       <p:nvGrpSpPr>
         <p:cNvPr id="1" name=""/>
@@ -9861,7 +10009,29 @@
       </p:grpSpPr>
       <p:sp>
         <p:nvSpPr>
-          <p:cNvPr id="2" name="Text 0"/>
+          <p:cNvPr id="2" name="Shape 0"/>
+          <p:cNvSpPr/>
+          <p:nvPr/>
+        </p:nvSpPr>
+        <p:spPr>
+          <a:xfrm>
+            <a:off x="231343" y="194767"/>
+            <a:ext cx="11716207" cy="6473952"/>
+          </a:xfrm>
+          <a:prstGeom prst="roundRect">
+            <a:avLst>
+              <a:gd name="adj" fmla="val 3107"/>
+            </a:avLst>
+          </a:prstGeom>
+          <a:solidFill>
+            <a:srgbClr val="FFFFFF"/>
+          </a:solidFill>
+          <a:ln/>
+        </p:spPr>
+      </p:sp>
+      <p:sp>
+        <p:nvSpPr>
+          <p:cNvPr id="3" name="Text 1"/>
           <p:cNvSpPr/>
           <p:nvPr/>
         </p:nvSpPr>
@@ -9900,7 +10070,7 @@
       </p:sp>
       <p:sp>
         <p:nvSpPr>
-          <p:cNvPr id="3" name="Text 1"/>
+          <p:cNvPr id="4" name="Text 2"/>
           <p:cNvSpPr/>
           <p:nvPr/>
         </p:nvSpPr>
@@ -9939,7 +10109,7 @@
       </p:sp>
       <p:sp>
         <p:nvSpPr>
-          <p:cNvPr id="4" name="Shape 2"/>
+          <p:cNvPr id="5" name="Shape 3"/>
           <p:cNvSpPr/>
           <p:nvPr/>
         </p:nvSpPr>
@@ -9961,7 +10131,7 @@
       </p:sp>
       <p:sp>
         <p:nvSpPr>
-          <p:cNvPr id="5" name="Text 3"/>
+          <p:cNvPr id="6" name="Text 4"/>
           <p:cNvSpPr/>
           <p:nvPr/>
         </p:nvSpPr>
@@ -10000,7 +10170,7 @@
       </p:sp>
       <p:sp>
         <p:nvSpPr>
-          <p:cNvPr id="6" name="Shape 4"/>
+          <p:cNvPr id="7" name="Shape 5"/>
           <p:cNvSpPr/>
           <p:nvPr/>
         </p:nvSpPr>
@@ -10022,7 +10192,7 @@
       </p:sp>
       <p:sp>
         <p:nvSpPr>
-          <p:cNvPr id="7" name="Text 5"/>
+          <p:cNvPr id="8" name="Text 6"/>
           <p:cNvSpPr/>
           <p:nvPr/>
         </p:nvSpPr>
@@ -10061,7 +10231,7 @@
       </p:sp>
       <p:pic>
         <p:nvPicPr>
-          <p:cNvPr id="8" name="Image 0" descr="preencoded.png">    </p:cNvPr>
+          <p:cNvPr id="9" name="Image 0" descr="preencoded.png">    </p:cNvPr>
           <p:cNvPicPr>
             <a:picLocks noChangeAspect="1"/>
           </p:cNvPicPr>
@@ -10075,7 +10245,7 @@
         </p:blipFill>
         <p:spPr>
           <a:xfrm>
-            <a:off x="566928" y="6254496"/>
+            <a:off x="566928" y="6126480"/>
             <a:ext cx="1481328" cy="457200"/>
           </a:xfrm>
           <a:prstGeom prst="rect">
@@ -10085,7 +10255,7 @@
       </p:pic>
       <p:sp>
         <p:nvSpPr>
-          <p:cNvPr id="9" name="Shape 6"/>
+          <p:cNvPr id="10" name="Shape 7"/>
           <p:cNvSpPr/>
           <p:nvPr/>
         </p:nvSpPr>
@@ -10107,7 +10277,7 @@
       </p:sp>
       <p:sp>
         <p:nvSpPr>
-          <p:cNvPr id="10" name="Shape 7"/>
+          <p:cNvPr id="11" name="Shape 8"/>
           <p:cNvSpPr/>
           <p:nvPr/>
         </p:nvSpPr>
@@ -10127,7 +10297,7 @@
       </p:sp>
       <p:sp>
         <p:nvSpPr>
-          <p:cNvPr id="11" name="Text 8"/>
+          <p:cNvPr id="12" name="Text 9"/>
           <p:cNvSpPr/>
           <p:nvPr/>
         </p:nvSpPr>
@@ -10166,7 +10336,7 @@
       </p:sp>
       <p:sp>
         <p:nvSpPr>
-          <p:cNvPr id="12" name="Text 9"/>
+          <p:cNvPr id="13" name="Text 10"/>
           <p:cNvSpPr/>
           <p:nvPr/>
         </p:nvSpPr>
@@ -10205,7 +10375,7 @@
       </p:sp>
       <p:sp>
         <p:nvSpPr>
-          <p:cNvPr id="13" name="Text 10"/>
+          <p:cNvPr id="14" name="Text 11"/>
           <p:cNvSpPr/>
           <p:nvPr/>
         </p:nvSpPr>
@@ -10247,7 +10417,7 @@
       </p:sp>
       <p:sp>
         <p:nvSpPr>
-          <p:cNvPr id="14" name="Shape 11"/>
+          <p:cNvPr id="15" name="Shape 12"/>
           <p:cNvSpPr/>
           <p:nvPr/>
         </p:nvSpPr>
@@ -10269,7 +10439,7 @@
       </p:sp>
       <p:sp>
         <p:nvSpPr>
-          <p:cNvPr id="15" name="Shape 12"/>
+          <p:cNvPr id="16" name="Shape 13"/>
           <p:cNvSpPr/>
           <p:nvPr/>
         </p:nvSpPr>
@@ -10289,7 +10459,7 @@
       </p:sp>
       <p:sp>
         <p:nvSpPr>
-          <p:cNvPr id="16" name="Text 13"/>
+          <p:cNvPr id="17" name="Text 14"/>
           <p:cNvSpPr/>
           <p:nvPr/>
         </p:nvSpPr>
@@ -10328,7 +10498,7 @@
       </p:sp>
       <p:sp>
         <p:nvSpPr>
-          <p:cNvPr id="17" name="Text 14"/>
+          <p:cNvPr id="18" name="Text 15"/>
           <p:cNvSpPr/>
           <p:nvPr/>
         </p:nvSpPr>
@@ -10367,7 +10537,7 @@
       </p:sp>
       <p:sp>
         <p:nvSpPr>
-          <p:cNvPr id="18" name="Text 15"/>
+          <p:cNvPr id="19" name="Text 16"/>
           <p:cNvSpPr/>
           <p:nvPr/>
         </p:nvSpPr>
@@ -10409,7 +10579,7 @@
       </p:sp>
       <p:sp>
         <p:nvSpPr>
-          <p:cNvPr id="19" name="Shape 16"/>
+          <p:cNvPr id="20" name="Shape 17"/>
           <p:cNvSpPr/>
           <p:nvPr/>
         </p:nvSpPr>
@@ -10431,7 +10601,7 @@
       </p:sp>
       <p:sp>
         <p:nvSpPr>
-          <p:cNvPr id="20" name="Shape 17"/>
+          <p:cNvPr id="21" name="Shape 18"/>
           <p:cNvSpPr/>
           <p:nvPr/>
         </p:nvSpPr>
@@ -10451,7 +10621,7 @@
       </p:sp>
       <p:sp>
         <p:nvSpPr>
-          <p:cNvPr id="21" name="Text 18"/>
+          <p:cNvPr id="22" name="Text 19"/>
           <p:cNvSpPr/>
           <p:nvPr/>
         </p:nvSpPr>
@@ -10490,7 +10660,7 @@
       </p:sp>
       <p:sp>
         <p:nvSpPr>
-          <p:cNvPr id="22" name="Text 19"/>
+          <p:cNvPr id="23" name="Text 20"/>
           <p:cNvSpPr/>
           <p:nvPr/>
         </p:nvSpPr>
@@ -10529,7 +10699,7 @@
       </p:sp>
       <p:sp>
         <p:nvSpPr>
-          <p:cNvPr id="23" name="Text 20"/>
+          <p:cNvPr id="24" name="Text 21"/>
           <p:cNvSpPr/>
           <p:nvPr/>
         </p:nvSpPr>
@@ -10571,7 +10741,7 @@
       </p:sp>
       <p:sp>
         <p:nvSpPr>
-          <p:cNvPr id="24" name="Shape 21"/>
+          <p:cNvPr id="25" name="Shape 22"/>
           <p:cNvSpPr/>
           <p:nvPr/>
         </p:nvSpPr>
@@ -10593,7 +10763,7 @@
       </p:sp>
       <p:sp>
         <p:nvSpPr>
-          <p:cNvPr id="25" name="Text 22"/>
+          <p:cNvPr id="26" name="Text 23"/>
           <p:cNvSpPr/>
           <p:nvPr/>
         </p:nvSpPr>
@@ -10632,7 +10802,7 @@
       </p:sp>
       <p:sp>
         <p:nvSpPr>
-          <p:cNvPr id="26" name="Text 23"/>
+          <p:cNvPr id="27" name="Text 24"/>
           <p:cNvSpPr/>
           <p:nvPr/>
         </p:nvSpPr>
@@ -10684,7 +10854,7 @@
         </p:nvSpPr>
         <p:spPr>
           <a:xfrm>
-            <a:off x="11368735" y="6437376"/>
+            <a:off x="11368735" y="6327648"/>
             <a:ext cx="365760" cy="274320"/>
           </a:xfrm>
           <a:prstGeom prst="rect">
@@ -10731,13 +10901,6 @@
 <file path=ppt/slides/slide18.xml><?xml version="1.0" encoding="utf-8"?>
 <p:sld xmlns:a="http://schemas.openxmlformats.org/drawingml/2006/main" xmlns:r="http://schemas.openxmlformats.org/officeDocument/2006/relationships" xmlns:p="http://schemas.openxmlformats.org/presentationml/2006/main">
   <p:cSld name="Slide 18">
-    <p:bg>
-      <p:bgPr>
-        <a:solidFill>
-          <a:srgbClr val="FFFFFF"/>
-        </a:solidFill>
-      </p:bgPr>
-    </p:bg>
     <p:spTree>
       <p:nvGrpSpPr>
         <p:cNvPr id="1" name=""/>
@@ -10754,7 +10917,29 @@
       </p:grpSpPr>
       <p:sp>
         <p:nvSpPr>
-          <p:cNvPr id="2" name="Text 0"/>
+          <p:cNvPr id="2" name="Shape 0"/>
+          <p:cNvSpPr/>
+          <p:nvPr/>
+        </p:nvSpPr>
+        <p:spPr>
+          <a:xfrm>
+            <a:off x="231343" y="194767"/>
+            <a:ext cx="11716207" cy="6473952"/>
+          </a:xfrm>
+          <a:prstGeom prst="roundRect">
+            <a:avLst>
+              <a:gd name="adj" fmla="val 3107"/>
+            </a:avLst>
+          </a:prstGeom>
+          <a:solidFill>
+            <a:srgbClr val="FFFFFF"/>
+          </a:solidFill>
+          <a:ln/>
+        </p:spPr>
+      </p:sp>
+      <p:sp>
+        <p:nvSpPr>
+          <p:cNvPr id="3" name="Text 1"/>
           <p:cNvSpPr/>
           <p:nvPr/>
         </p:nvSpPr>
@@ -10793,7 +10978,7 @@
       </p:sp>
       <p:sp>
         <p:nvSpPr>
-          <p:cNvPr id="3" name="Shape 1"/>
+          <p:cNvPr id="4" name="Shape 2"/>
           <p:cNvSpPr/>
           <p:nvPr/>
         </p:nvSpPr>
@@ -10815,7 +11000,7 @@
       </p:sp>
       <p:sp>
         <p:nvSpPr>
-          <p:cNvPr id="4" name="Text 2"/>
+          <p:cNvPr id="5" name="Text 3"/>
           <p:cNvSpPr/>
           <p:nvPr/>
         </p:nvSpPr>
@@ -10854,7 +11039,7 @@
       </p:sp>
       <p:pic>
         <p:nvPicPr>
-          <p:cNvPr id="5" name="Image 0" descr="preencoded.png">    </p:cNvPr>
+          <p:cNvPr id="6" name="Image 0" descr="preencoded.png">    </p:cNvPr>
           <p:cNvPicPr>
             <a:picLocks noChangeAspect="1"/>
           </p:cNvPicPr>
@@ -10868,7 +11053,7 @@
         </p:blipFill>
         <p:spPr>
           <a:xfrm>
-            <a:off x="566928" y="6254496"/>
+            <a:off x="566928" y="6126480"/>
             <a:ext cx="1481328" cy="457200"/>
           </a:xfrm>
           <a:prstGeom prst="rect">
@@ -10878,7 +11063,7 @@
       </p:pic>
       <p:sp>
         <p:nvSpPr>
-          <p:cNvPr id="6" name="Shape 3"/>
+          <p:cNvPr id="7" name="Shape 4"/>
           <p:cNvSpPr/>
           <p:nvPr/>
         </p:nvSpPr>
@@ -10900,7 +11085,7 @@
       </p:sp>
       <p:sp>
         <p:nvSpPr>
-          <p:cNvPr id="7" name="Shape 4"/>
+          <p:cNvPr id="8" name="Shape 5"/>
           <p:cNvSpPr/>
           <p:nvPr/>
         </p:nvSpPr>
@@ -10920,7 +11105,7 @@
       </p:sp>
       <p:sp>
         <p:nvSpPr>
-          <p:cNvPr id="8" name="Text 5"/>
+          <p:cNvPr id="9" name="Text 6"/>
           <p:cNvSpPr/>
           <p:nvPr/>
         </p:nvSpPr>
@@ -10959,7 +11144,7 @@
       </p:sp>
       <p:sp>
         <p:nvSpPr>
-          <p:cNvPr id="9" name="Text 6"/>
+          <p:cNvPr id="10" name="Text 7"/>
           <p:cNvSpPr/>
           <p:nvPr/>
         </p:nvSpPr>
@@ -10998,7 +11183,7 @@
       </p:sp>
       <p:sp>
         <p:nvSpPr>
-          <p:cNvPr id="10" name="Text 7"/>
+          <p:cNvPr id="11" name="Text 8"/>
           <p:cNvSpPr/>
           <p:nvPr/>
         </p:nvSpPr>
@@ -11040,7 +11225,7 @@
       </p:sp>
       <p:sp>
         <p:nvSpPr>
-          <p:cNvPr id="11" name="Shape 8"/>
+          <p:cNvPr id="12" name="Shape 9"/>
           <p:cNvSpPr/>
           <p:nvPr/>
         </p:nvSpPr>
@@ -11062,7 +11247,7 @@
       </p:sp>
       <p:sp>
         <p:nvSpPr>
-          <p:cNvPr id="12" name="Shape 9"/>
+          <p:cNvPr id="13" name="Shape 10"/>
           <p:cNvSpPr/>
           <p:nvPr/>
         </p:nvSpPr>
@@ -11082,7 +11267,7 @@
       </p:sp>
       <p:sp>
         <p:nvSpPr>
-          <p:cNvPr id="13" name="Text 10"/>
+          <p:cNvPr id="14" name="Text 11"/>
           <p:cNvSpPr/>
           <p:nvPr/>
         </p:nvSpPr>
@@ -11121,7 +11306,7 @@
       </p:sp>
       <p:sp>
         <p:nvSpPr>
-          <p:cNvPr id="14" name="Text 11"/>
+          <p:cNvPr id="15" name="Text 12"/>
           <p:cNvSpPr/>
           <p:nvPr/>
         </p:nvSpPr>
@@ -11160,7 +11345,7 @@
       </p:sp>
       <p:sp>
         <p:nvSpPr>
-          <p:cNvPr id="15" name="Text 12"/>
+          <p:cNvPr id="16" name="Text 13"/>
           <p:cNvSpPr/>
           <p:nvPr/>
         </p:nvSpPr>
@@ -11202,7 +11387,7 @@
       </p:sp>
       <p:sp>
         <p:nvSpPr>
-          <p:cNvPr id="16" name="Shape 13"/>
+          <p:cNvPr id="17" name="Shape 14"/>
           <p:cNvSpPr/>
           <p:nvPr/>
         </p:nvSpPr>
@@ -11224,7 +11409,7 @@
       </p:sp>
       <p:sp>
         <p:nvSpPr>
-          <p:cNvPr id="17" name="Shape 14"/>
+          <p:cNvPr id="18" name="Shape 15"/>
           <p:cNvSpPr/>
           <p:nvPr/>
         </p:nvSpPr>
@@ -11244,7 +11429,7 @@
       </p:sp>
       <p:sp>
         <p:nvSpPr>
-          <p:cNvPr id="18" name="Text 15"/>
+          <p:cNvPr id="19" name="Text 16"/>
           <p:cNvSpPr/>
           <p:nvPr/>
         </p:nvSpPr>
@@ -11283,7 +11468,7 @@
       </p:sp>
       <p:sp>
         <p:nvSpPr>
-          <p:cNvPr id="19" name="Text 16"/>
+          <p:cNvPr id="20" name="Text 17"/>
           <p:cNvSpPr/>
           <p:nvPr/>
         </p:nvSpPr>
@@ -11322,7 +11507,7 @@
       </p:sp>
       <p:sp>
         <p:nvSpPr>
-          <p:cNvPr id="20" name="Text 17"/>
+          <p:cNvPr id="21" name="Text 18"/>
           <p:cNvSpPr/>
           <p:nvPr/>
         </p:nvSpPr>
@@ -11364,7 +11549,7 @@
       </p:sp>
       <p:sp>
         <p:nvSpPr>
-          <p:cNvPr id="21" name="Shape 18"/>
+          <p:cNvPr id="22" name="Shape 19"/>
           <p:cNvSpPr/>
           <p:nvPr/>
         </p:nvSpPr>
@@ -11386,7 +11571,7 @@
       </p:sp>
       <p:sp>
         <p:nvSpPr>
-          <p:cNvPr id="22" name="Shape 19"/>
+          <p:cNvPr id="23" name="Shape 20"/>
           <p:cNvSpPr/>
           <p:nvPr/>
         </p:nvSpPr>
@@ -11406,7 +11591,7 @@
       </p:sp>
       <p:sp>
         <p:nvSpPr>
-          <p:cNvPr id="23" name="Text 20"/>
+          <p:cNvPr id="24" name="Text 21"/>
           <p:cNvSpPr/>
           <p:nvPr/>
         </p:nvSpPr>
@@ -11445,7 +11630,7 @@
       </p:sp>
       <p:sp>
         <p:nvSpPr>
-          <p:cNvPr id="24" name="Text 21"/>
+          <p:cNvPr id="25" name="Text 22"/>
           <p:cNvSpPr/>
           <p:nvPr/>
         </p:nvSpPr>
@@ -11484,7 +11669,7 @@
       </p:sp>
       <p:sp>
         <p:nvSpPr>
-          <p:cNvPr id="25" name="Text 22"/>
+          <p:cNvPr id="26" name="Text 23"/>
           <p:cNvSpPr/>
           <p:nvPr/>
         </p:nvSpPr>
@@ -11526,7 +11711,7 @@
       </p:sp>
       <p:sp>
         <p:nvSpPr>
-          <p:cNvPr id="26" name="Shape 23"/>
+          <p:cNvPr id="27" name="Shape 24"/>
           <p:cNvSpPr/>
           <p:nvPr/>
         </p:nvSpPr>
@@ -11548,7 +11733,7 @@
       </p:sp>
       <p:sp>
         <p:nvSpPr>
-          <p:cNvPr id="27" name="Text 24"/>
+          <p:cNvPr id="28" name="Text 25"/>
           <p:cNvSpPr/>
           <p:nvPr/>
         </p:nvSpPr>
@@ -11587,7 +11772,7 @@
       </p:sp>
       <p:sp>
         <p:nvSpPr>
-          <p:cNvPr id="28" name="Text 25"/>
+          <p:cNvPr id="29" name="Text 26"/>
           <p:cNvSpPr/>
           <p:nvPr/>
         </p:nvSpPr>
@@ -11639,7 +11824,7 @@
         </p:nvSpPr>
         <p:spPr>
           <a:xfrm>
-            <a:off x="11368735" y="6437376"/>
+            <a:off x="11368735" y="6327648"/>
             <a:ext cx="365760" cy="274320"/>
           </a:xfrm>
           <a:prstGeom prst="rect">
@@ -11686,13 +11871,6 @@
 <file path=ppt/slides/slide19.xml><?xml version="1.0" encoding="utf-8"?>
 <p:sld xmlns:a="http://schemas.openxmlformats.org/drawingml/2006/main" xmlns:r="http://schemas.openxmlformats.org/officeDocument/2006/relationships" xmlns:p="http://schemas.openxmlformats.org/presentationml/2006/main">
   <p:cSld name="Slide 19">
-    <p:bg>
-      <p:bgPr>
-        <a:solidFill>
-          <a:srgbClr val="FFFFFF"/>
-        </a:solidFill>
-      </p:bgPr>
-    </p:bg>
     <p:spTree>
       <p:nvGrpSpPr>
         <p:cNvPr id="1" name=""/>
@@ -11709,7 +11887,29 @@
       </p:grpSpPr>
       <p:sp>
         <p:nvSpPr>
-          <p:cNvPr id="2" name="Text 0"/>
+          <p:cNvPr id="2" name="Shape 0"/>
+          <p:cNvSpPr/>
+          <p:nvPr/>
+        </p:nvSpPr>
+        <p:spPr>
+          <a:xfrm>
+            <a:off x="231343" y="194767"/>
+            <a:ext cx="11716207" cy="6473952"/>
+          </a:xfrm>
+          <a:prstGeom prst="roundRect">
+            <a:avLst>
+              <a:gd name="adj" fmla="val 3107"/>
+            </a:avLst>
+          </a:prstGeom>
+          <a:solidFill>
+            <a:srgbClr val="FFFFFF"/>
+          </a:solidFill>
+          <a:ln/>
+        </p:spPr>
+      </p:sp>
+      <p:sp>
+        <p:nvSpPr>
+          <p:cNvPr id="3" name="Text 1"/>
           <p:cNvSpPr/>
           <p:nvPr/>
         </p:nvSpPr>
@@ -11748,7 +11948,7 @@
       </p:sp>
       <p:sp>
         <p:nvSpPr>
-          <p:cNvPr id="3" name="Shape 1"/>
+          <p:cNvPr id="4" name="Shape 2"/>
           <p:cNvSpPr/>
           <p:nvPr/>
         </p:nvSpPr>
@@ -11770,7 +11970,7 @@
       </p:sp>
       <p:sp>
         <p:nvSpPr>
-          <p:cNvPr id="4" name="Text 2"/>
+          <p:cNvPr id="5" name="Text 3"/>
           <p:cNvSpPr/>
           <p:nvPr/>
         </p:nvSpPr>
@@ -11809,7 +12009,7 @@
       </p:sp>
       <p:pic>
         <p:nvPicPr>
-          <p:cNvPr id="5" name="Image 0" descr="preencoded.png">    </p:cNvPr>
+          <p:cNvPr id="6" name="Image 0" descr="preencoded.png">    </p:cNvPr>
           <p:cNvPicPr>
             <a:picLocks noChangeAspect="1"/>
           </p:cNvPicPr>
@@ -11823,7 +12023,7 @@
         </p:blipFill>
         <p:spPr>
           <a:xfrm>
-            <a:off x="566928" y="6254496"/>
+            <a:off x="566928" y="6126480"/>
             <a:ext cx="1481328" cy="457200"/>
           </a:xfrm>
           <a:prstGeom prst="rect">
@@ -11833,7 +12033,7 @@
       </p:pic>
       <p:sp>
         <p:nvSpPr>
-          <p:cNvPr id="6" name="Shape 3"/>
+          <p:cNvPr id="7" name="Shape 4"/>
           <p:cNvSpPr/>
           <p:nvPr/>
         </p:nvSpPr>
@@ -11853,7 +12053,7 @@
       </p:sp>
       <p:sp>
         <p:nvSpPr>
-          <p:cNvPr id="7" name="Text 4"/>
+          <p:cNvPr id="8" name="Text 5"/>
           <p:cNvSpPr/>
           <p:nvPr/>
         </p:nvSpPr>
@@ -11892,7 +12092,7 @@
       </p:sp>
       <p:sp>
         <p:nvSpPr>
-          <p:cNvPr id="8" name="Text 5"/>
+          <p:cNvPr id="9" name="Text 6"/>
           <p:cNvSpPr/>
           <p:nvPr/>
         </p:nvSpPr>
@@ -11945,7 +12145,7 @@
       </p:sp>
       <p:sp>
         <p:nvSpPr>
-          <p:cNvPr id="9" name="Shape 6"/>
+          <p:cNvPr id="10" name="Shape 7"/>
           <p:cNvSpPr/>
           <p:nvPr/>
         </p:nvSpPr>
@@ -11965,7 +12165,7 @@
       </p:sp>
       <p:sp>
         <p:nvSpPr>
-          <p:cNvPr id="10" name="Text 7"/>
+          <p:cNvPr id="11" name="Text 8"/>
           <p:cNvSpPr/>
           <p:nvPr/>
         </p:nvSpPr>
@@ -12004,7 +12204,7 @@
       </p:sp>
       <p:sp>
         <p:nvSpPr>
-          <p:cNvPr id="11" name="Text 8"/>
+          <p:cNvPr id="12" name="Text 9"/>
           <p:cNvSpPr/>
           <p:nvPr/>
         </p:nvSpPr>
@@ -12057,7 +12257,7 @@
       </p:sp>
       <p:sp>
         <p:nvSpPr>
-          <p:cNvPr id="12" name="Shape 9"/>
+          <p:cNvPr id="13" name="Shape 10"/>
           <p:cNvSpPr/>
           <p:nvPr/>
         </p:nvSpPr>
@@ -12077,7 +12277,7 @@
       </p:sp>
       <p:sp>
         <p:nvSpPr>
-          <p:cNvPr id="13" name="Text 10"/>
+          <p:cNvPr id="14" name="Text 11"/>
           <p:cNvSpPr/>
           <p:nvPr/>
         </p:nvSpPr>
@@ -12116,7 +12316,7 @@
       </p:sp>
       <p:sp>
         <p:nvSpPr>
-          <p:cNvPr id="14" name="Text 11"/>
+          <p:cNvPr id="15" name="Text 12"/>
           <p:cNvSpPr/>
           <p:nvPr/>
         </p:nvSpPr>
@@ -12169,7 +12369,7 @@
       </p:sp>
       <p:sp>
         <p:nvSpPr>
-          <p:cNvPr id="15" name="Shape 12"/>
+          <p:cNvPr id="16" name="Shape 13"/>
           <p:cNvSpPr/>
           <p:nvPr/>
         </p:nvSpPr>
@@ -12189,7 +12389,7 @@
       </p:sp>
       <p:sp>
         <p:nvSpPr>
-          <p:cNvPr id="16" name="Text 13"/>
+          <p:cNvPr id="17" name="Text 14"/>
           <p:cNvSpPr/>
           <p:nvPr/>
         </p:nvSpPr>
@@ -12228,7 +12428,7 @@
       </p:sp>
       <p:sp>
         <p:nvSpPr>
-          <p:cNvPr id="17" name="Text 14"/>
+          <p:cNvPr id="18" name="Text 15"/>
           <p:cNvSpPr/>
           <p:nvPr/>
         </p:nvSpPr>
@@ -12281,7 +12481,7 @@
       </p:sp>
       <p:sp>
         <p:nvSpPr>
-          <p:cNvPr id="18" name="Shape 15"/>
+          <p:cNvPr id="19" name="Shape 16"/>
           <p:cNvSpPr/>
           <p:nvPr/>
         </p:nvSpPr>
@@ -12301,7 +12501,7 @@
       </p:sp>
       <p:sp>
         <p:nvSpPr>
-          <p:cNvPr id="19" name="Text 16"/>
+          <p:cNvPr id="20" name="Text 17"/>
           <p:cNvSpPr/>
           <p:nvPr/>
         </p:nvSpPr>
@@ -12340,7 +12540,7 @@
       </p:sp>
       <p:sp>
         <p:nvSpPr>
-          <p:cNvPr id="20" name="Text 17"/>
+          <p:cNvPr id="21" name="Text 18"/>
           <p:cNvSpPr/>
           <p:nvPr/>
         </p:nvSpPr>
@@ -12403,7 +12603,7 @@
         </p:nvSpPr>
         <p:spPr>
           <a:xfrm>
-            <a:off x="11368735" y="6437376"/>
+            <a:off x="11368735" y="6327648"/>
             <a:ext cx="365760" cy="274320"/>
           </a:xfrm>
           <a:prstGeom prst="rect">
@@ -12450,13 +12650,6 @@
 <file path=ppt/slides/slide2.xml><?xml version="1.0" encoding="utf-8"?>
 <p:sld xmlns:a="http://schemas.openxmlformats.org/drawingml/2006/main" xmlns:r="http://schemas.openxmlformats.org/officeDocument/2006/relationships" xmlns:p="http://schemas.openxmlformats.org/presentationml/2006/main">
   <p:cSld name="Slide 2">
-    <p:bg>
-      <p:bgPr>
-        <a:solidFill>
-          <a:srgbClr val="FFFFFF"/>
-        </a:solidFill>
-      </p:bgPr>
-    </p:bg>
     <p:spTree>
       <p:nvGrpSpPr>
         <p:cNvPr id="1" name=""/>
@@ -12473,7 +12666,29 @@
       </p:grpSpPr>
       <p:sp>
         <p:nvSpPr>
-          <p:cNvPr id="2" name="Text 0"/>
+          <p:cNvPr id="2" name="Shape 0"/>
+          <p:cNvSpPr/>
+          <p:nvPr/>
+        </p:nvSpPr>
+        <p:spPr>
+          <a:xfrm>
+            <a:off x="231343" y="194767"/>
+            <a:ext cx="11716207" cy="6473952"/>
+          </a:xfrm>
+          <a:prstGeom prst="roundRect">
+            <a:avLst>
+              <a:gd name="adj" fmla="val 3107"/>
+            </a:avLst>
+          </a:prstGeom>
+          <a:solidFill>
+            <a:srgbClr val="FFFFFF"/>
+          </a:solidFill>
+          <a:ln/>
+        </p:spPr>
+      </p:sp>
+      <p:sp>
+        <p:nvSpPr>
+          <p:cNvPr id="3" name="Text 1"/>
           <p:cNvSpPr/>
           <p:nvPr/>
         </p:nvSpPr>
@@ -12512,7 +12727,7 @@
       </p:sp>
       <p:sp>
         <p:nvSpPr>
-          <p:cNvPr id="3" name="Text 1"/>
+          <p:cNvPr id="4" name="Text 2"/>
           <p:cNvSpPr/>
           <p:nvPr/>
         </p:nvSpPr>
@@ -12554,7 +12769,7 @@
       </p:sp>
       <p:sp>
         <p:nvSpPr>
-          <p:cNvPr id="4" name="Shape 2"/>
+          <p:cNvPr id="5" name="Shape 3"/>
           <p:cNvSpPr/>
           <p:nvPr/>
         </p:nvSpPr>
@@ -12576,7 +12791,7 @@
       </p:sp>
       <p:sp>
         <p:nvSpPr>
-          <p:cNvPr id="5" name="Text 3"/>
+          <p:cNvPr id="6" name="Text 4"/>
           <p:cNvSpPr/>
           <p:nvPr/>
         </p:nvSpPr>
@@ -12615,7 +12830,7 @@
       </p:sp>
       <p:pic>
         <p:nvPicPr>
-          <p:cNvPr id="6" name="Image 0" descr="preencoded.png">    </p:cNvPr>
+          <p:cNvPr id="7" name="Image 0" descr="preencoded.png">    </p:cNvPr>
           <p:cNvPicPr>
             <a:picLocks noChangeAspect="1"/>
           </p:cNvPicPr>
@@ -12629,7 +12844,7 @@
         </p:blipFill>
         <p:spPr>
           <a:xfrm>
-            <a:off x="566928" y="6254496"/>
+            <a:off x="566928" y="6126480"/>
             <a:ext cx="1481328" cy="457200"/>
           </a:xfrm>
           <a:prstGeom prst="rect">
@@ -12639,7 +12854,7 @@
       </p:pic>
       <p:sp>
         <p:nvSpPr>
-          <p:cNvPr id="7" name="Shape 4"/>
+          <p:cNvPr id="8" name="Shape 5"/>
           <p:cNvSpPr/>
           <p:nvPr/>
         </p:nvSpPr>
@@ -12666,7 +12881,7 @@
       </p:sp>
       <p:sp>
         <p:nvSpPr>
-          <p:cNvPr id="8" name="Shape 5"/>
+          <p:cNvPr id="9" name="Shape 6"/>
           <p:cNvSpPr/>
           <p:nvPr/>
         </p:nvSpPr>
@@ -12686,7 +12901,7 @@
       </p:sp>
       <p:sp>
         <p:nvSpPr>
-          <p:cNvPr id="9" name="Text 6"/>
+          <p:cNvPr id="10" name="Text 7"/>
           <p:cNvSpPr/>
           <p:nvPr/>
         </p:nvSpPr>
@@ -12725,7 +12940,7 @@
       </p:sp>
       <p:sp>
         <p:nvSpPr>
-          <p:cNvPr id="10" name="Text 7"/>
+          <p:cNvPr id="11" name="Text 8"/>
           <p:cNvSpPr/>
           <p:nvPr/>
         </p:nvSpPr>
@@ -12764,7 +12979,7 @@
       </p:sp>
       <p:sp>
         <p:nvSpPr>
-          <p:cNvPr id="11" name="Text 8"/>
+          <p:cNvPr id="12" name="Text 9"/>
           <p:cNvSpPr/>
           <p:nvPr/>
         </p:nvSpPr>
@@ -12806,7 +13021,7 @@
       </p:sp>
       <p:sp>
         <p:nvSpPr>
-          <p:cNvPr id="12" name="Shape 9"/>
+          <p:cNvPr id="13" name="Shape 10"/>
           <p:cNvSpPr/>
           <p:nvPr/>
         </p:nvSpPr>
@@ -12833,7 +13048,7 @@
       </p:sp>
       <p:sp>
         <p:nvSpPr>
-          <p:cNvPr id="13" name="Shape 10"/>
+          <p:cNvPr id="14" name="Shape 11"/>
           <p:cNvSpPr/>
           <p:nvPr/>
         </p:nvSpPr>
@@ -12853,7 +13068,7 @@
       </p:sp>
       <p:sp>
         <p:nvSpPr>
-          <p:cNvPr id="14" name="Text 11"/>
+          <p:cNvPr id="15" name="Text 12"/>
           <p:cNvSpPr/>
           <p:nvPr/>
         </p:nvSpPr>
@@ -12892,7 +13107,7 @@
       </p:sp>
       <p:sp>
         <p:nvSpPr>
-          <p:cNvPr id="15" name="Text 12"/>
+          <p:cNvPr id="16" name="Text 13"/>
           <p:cNvSpPr/>
           <p:nvPr/>
         </p:nvSpPr>
@@ -12931,7 +13146,7 @@
       </p:sp>
       <p:sp>
         <p:nvSpPr>
-          <p:cNvPr id="16" name="Text 13"/>
+          <p:cNvPr id="17" name="Text 14"/>
           <p:cNvSpPr/>
           <p:nvPr/>
         </p:nvSpPr>
@@ -12973,7 +13188,7 @@
       </p:sp>
       <p:sp>
         <p:nvSpPr>
-          <p:cNvPr id="17" name="Shape 14"/>
+          <p:cNvPr id="18" name="Shape 15"/>
           <p:cNvSpPr/>
           <p:nvPr/>
         </p:nvSpPr>
@@ -13000,7 +13215,7 @@
       </p:sp>
       <p:sp>
         <p:nvSpPr>
-          <p:cNvPr id="18" name="Shape 15"/>
+          <p:cNvPr id="19" name="Shape 16"/>
           <p:cNvSpPr/>
           <p:nvPr/>
         </p:nvSpPr>
@@ -13020,7 +13235,7 @@
       </p:sp>
       <p:sp>
         <p:nvSpPr>
-          <p:cNvPr id="19" name="Text 16"/>
+          <p:cNvPr id="20" name="Text 17"/>
           <p:cNvSpPr/>
           <p:nvPr/>
         </p:nvSpPr>
@@ -13059,7 +13274,7 @@
       </p:sp>
       <p:sp>
         <p:nvSpPr>
-          <p:cNvPr id="20" name="Text 17"/>
+          <p:cNvPr id="21" name="Text 18"/>
           <p:cNvSpPr/>
           <p:nvPr/>
         </p:nvSpPr>
@@ -13098,7 +13313,7 @@
       </p:sp>
       <p:sp>
         <p:nvSpPr>
-          <p:cNvPr id="21" name="Text 18"/>
+          <p:cNvPr id="22" name="Text 19"/>
           <p:cNvSpPr/>
           <p:nvPr/>
         </p:nvSpPr>
@@ -13140,7 +13355,7 @@
       </p:sp>
       <p:sp>
         <p:nvSpPr>
-          <p:cNvPr id="22" name="Shape 19"/>
+          <p:cNvPr id="23" name="Shape 20"/>
           <p:cNvSpPr/>
           <p:nvPr/>
         </p:nvSpPr>
@@ -13167,7 +13382,7 @@
       </p:sp>
       <p:sp>
         <p:nvSpPr>
-          <p:cNvPr id="23" name="Shape 20"/>
+          <p:cNvPr id="24" name="Shape 21"/>
           <p:cNvSpPr/>
           <p:nvPr/>
         </p:nvSpPr>
@@ -13187,7 +13402,7 @@
       </p:sp>
       <p:sp>
         <p:nvSpPr>
-          <p:cNvPr id="24" name="Text 21"/>
+          <p:cNvPr id="25" name="Text 22"/>
           <p:cNvSpPr/>
           <p:nvPr/>
         </p:nvSpPr>
@@ -13226,7 +13441,7 @@
       </p:sp>
       <p:sp>
         <p:nvSpPr>
-          <p:cNvPr id="25" name="Text 22"/>
+          <p:cNvPr id="26" name="Text 23"/>
           <p:cNvSpPr/>
           <p:nvPr/>
         </p:nvSpPr>
@@ -13265,7 +13480,7 @@
       </p:sp>
       <p:sp>
         <p:nvSpPr>
-          <p:cNvPr id="26" name="Text 23"/>
+          <p:cNvPr id="27" name="Text 24"/>
           <p:cNvSpPr/>
           <p:nvPr/>
         </p:nvSpPr>
@@ -13307,7 +13522,7 @@
       </p:sp>
       <p:sp>
         <p:nvSpPr>
-          <p:cNvPr id="27" name="Shape 24"/>
+          <p:cNvPr id="28" name="Shape 25"/>
           <p:cNvSpPr/>
           <p:nvPr/>
         </p:nvSpPr>
@@ -13334,7 +13549,7 @@
       </p:sp>
       <p:sp>
         <p:nvSpPr>
-          <p:cNvPr id="28" name="Shape 25"/>
+          <p:cNvPr id="29" name="Shape 26"/>
           <p:cNvSpPr/>
           <p:nvPr/>
         </p:nvSpPr>
@@ -13354,7 +13569,7 @@
       </p:sp>
       <p:sp>
         <p:nvSpPr>
-          <p:cNvPr id="29" name="Text 26"/>
+          <p:cNvPr id="30" name="Text 27"/>
           <p:cNvSpPr/>
           <p:nvPr/>
         </p:nvSpPr>
@@ -13393,7 +13608,7 @@
       </p:sp>
       <p:sp>
         <p:nvSpPr>
-          <p:cNvPr id="30" name="Text 27"/>
+          <p:cNvPr id="31" name="Text 28"/>
           <p:cNvSpPr/>
           <p:nvPr/>
         </p:nvSpPr>
@@ -13432,7 +13647,7 @@
       </p:sp>
       <p:sp>
         <p:nvSpPr>
-          <p:cNvPr id="31" name="Text 28"/>
+          <p:cNvPr id="32" name="Text 29"/>
           <p:cNvSpPr/>
           <p:nvPr/>
         </p:nvSpPr>
@@ -13484,7 +13699,7 @@
         </p:nvSpPr>
         <p:spPr>
           <a:xfrm>
-            <a:off x="11368735" y="6437376"/>
+            <a:off x="11368735" y="6327648"/>
             <a:ext cx="365760" cy="274320"/>
           </a:xfrm>
           <a:prstGeom prst="rect">
@@ -13531,13 +13746,6 @@
 <file path=ppt/slides/slide20.xml><?xml version="1.0" encoding="utf-8"?>
 <p:sld xmlns:a="http://schemas.openxmlformats.org/drawingml/2006/main" xmlns:r="http://schemas.openxmlformats.org/officeDocument/2006/relationships" xmlns:p="http://schemas.openxmlformats.org/presentationml/2006/main">
   <p:cSld name="Slide 20">
-    <p:bg>
-      <p:bgPr>
-        <a:solidFill>
-          <a:srgbClr val="FFFFFF"/>
-        </a:solidFill>
-      </p:bgPr>
-    </p:bg>
     <p:spTree>
       <p:nvGrpSpPr>
         <p:cNvPr id="1" name=""/>
@@ -13554,7 +13762,29 @@
       </p:grpSpPr>
       <p:sp>
         <p:nvSpPr>
-          <p:cNvPr id="2" name="Text 0"/>
+          <p:cNvPr id="2" name="Shape 0"/>
+          <p:cNvSpPr/>
+          <p:nvPr/>
+        </p:nvSpPr>
+        <p:spPr>
+          <a:xfrm>
+            <a:off x="231343" y="194767"/>
+            <a:ext cx="11716207" cy="6473952"/>
+          </a:xfrm>
+          <a:prstGeom prst="roundRect">
+            <a:avLst>
+              <a:gd name="adj" fmla="val 3107"/>
+            </a:avLst>
+          </a:prstGeom>
+          <a:solidFill>
+            <a:srgbClr val="FFFFFF"/>
+          </a:solidFill>
+          <a:ln/>
+        </p:spPr>
+      </p:sp>
+      <p:sp>
+        <p:nvSpPr>
+          <p:cNvPr id="3" name="Text 1"/>
           <p:cNvSpPr/>
           <p:nvPr/>
         </p:nvSpPr>
@@ -13593,7 +13823,7 @@
       </p:sp>
       <p:sp>
         <p:nvSpPr>
-          <p:cNvPr id="3" name="Shape 1"/>
+          <p:cNvPr id="4" name="Shape 2"/>
           <p:cNvSpPr/>
           <p:nvPr/>
         </p:nvSpPr>
@@ -13615,7 +13845,7 @@
       </p:sp>
       <p:sp>
         <p:nvSpPr>
-          <p:cNvPr id="4" name="Text 2"/>
+          <p:cNvPr id="5" name="Text 3"/>
           <p:cNvSpPr/>
           <p:nvPr/>
         </p:nvSpPr>
@@ -13654,7 +13884,7 @@
       </p:sp>
       <p:pic>
         <p:nvPicPr>
-          <p:cNvPr id="5" name="Image 0" descr="preencoded.png">    </p:cNvPr>
+          <p:cNvPr id="6" name="Image 0" descr="preencoded.png">    </p:cNvPr>
           <p:cNvPicPr>
             <a:picLocks noChangeAspect="1"/>
           </p:cNvPicPr>
@@ -13668,7 +13898,7 @@
         </p:blipFill>
         <p:spPr>
           <a:xfrm>
-            <a:off x="566928" y="6254496"/>
+            <a:off x="566928" y="6126480"/>
             <a:ext cx="1481328" cy="457200"/>
           </a:xfrm>
           <a:prstGeom prst="rect">
@@ -13678,7 +13908,7 @@
       </p:pic>
       <p:sp>
         <p:nvSpPr>
-          <p:cNvPr id="6" name="Shape 3"/>
+          <p:cNvPr id="7" name="Shape 4"/>
           <p:cNvSpPr/>
           <p:nvPr/>
         </p:nvSpPr>
@@ -13700,7 +13930,7 @@
       </p:sp>
       <p:sp>
         <p:nvSpPr>
-          <p:cNvPr id="7" name="Text 4"/>
+          <p:cNvPr id="8" name="Text 5"/>
           <p:cNvSpPr/>
           <p:nvPr/>
         </p:nvSpPr>
@@ -13739,7 +13969,7 @@
       </p:sp>
       <p:sp>
         <p:nvSpPr>
-          <p:cNvPr id="8" name="Text 5"/>
+          <p:cNvPr id="9" name="Text 6"/>
           <p:cNvSpPr/>
           <p:nvPr/>
         </p:nvSpPr>
@@ -13781,7 +14011,7 @@
       </p:sp>
       <p:sp>
         <p:nvSpPr>
-          <p:cNvPr id="9" name="Shape 6"/>
+          <p:cNvPr id="10" name="Shape 7"/>
           <p:cNvSpPr/>
           <p:nvPr/>
         </p:nvSpPr>
@@ -13803,7 +14033,7 @@
       </p:sp>
       <p:sp>
         <p:nvSpPr>
-          <p:cNvPr id="10" name="Text 7"/>
+          <p:cNvPr id="11" name="Text 8"/>
           <p:cNvSpPr/>
           <p:nvPr/>
         </p:nvSpPr>
@@ -13842,7 +14072,7 @@
       </p:sp>
       <p:sp>
         <p:nvSpPr>
-          <p:cNvPr id="11" name="Text 8"/>
+          <p:cNvPr id="12" name="Text 9"/>
           <p:cNvSpPr/>
           <p:nvPr/>
         </p:nvSpPr>
@@ -13884,7 +14114,7 @@
       </p:sp>
       <p:sp>
         <p:nvSpPr>
-          <p:cNvPr id="12" name="Shape 9"/>
+          <p:cNvPr id="13" name="Shape 10"/>
           <p:cNvSpPr/>
           <p:nvPr/>
         </p:nvSpPr>
@@ -13906,7 +14136,7 @@
       </p:sp>
       <p:sp>
         <p:nvSpPr>
-          <p:cNvPr id="13" name="Text 10"/>
+          <p:cNvPr id="14" name="Text 11"/>
           <p:cNvSpPr/>
           <p:nvPr/>
         </p:nvSpPr>
@@ -13945,7 +14175,7 @@
       </p:sp>
       <p:sp>
         <p:nvSpPr>
-          <p:cNvPr id="14" name="Text 11"/>
+          <p:cNvPr id="15" name="Text 12"/>
           <p:cNvSpPr/>
           <p:nvPr/>
         </p:nvSpPr>
@@ -13987,7 +14217,7 @@
       </p:sp>
       <p:sp>
         <p:nvSpPr>
-          <p:cNvPr id="15" name="Shape 12"/>
+          <p:cNvPr id="16" name="Shape 13"/>
           <p:cNvSpPr/>
           <p:nvPr/>
         </p:nvSpPr>
@@ -14014,7 +14244,7 @@
       </p:sp>
       <p:sp>
         <p:nvSpPr>
-          <p:cNvPr id="16" name="Text 13"/>
+          <p:cNvPr id="17" name="Text 14"/>
           <p:cNvSpPr/>
           <p:nvPr/>
         </p:nvSpPr>
@@ -14066,7 +14296,7 @@
         </p:nvSpPr>
         <p:spPr>
           <a:xfrm>
-            <a:off x="11368735" y="6437376"/>
+            <a:off x="11368735" y="6327648"/>
             <a:ext cx="365760" cy="274320"/>
           </a:xfrm>
           <a:prstGeom prst="rect">
@@ -14113,13 +14343,6 @@
 <file path=ppt/slides/slide21.xml><?xml version="1.0" encoding="utf-8"?>
 <p:sld xmlns:a="http://schemas.openxmlformats.org/drawingml/2006/main" xmlns:r="http://schemas.openxmlformats.org/officeDocument/2006/relationships" xmlns:p="http://schemas.openxmlformats.org/presentationml/2006/main">
   <p:cSld name="Slide 21">
-    <p:bg>
-      <p:bgPr>
-        <a:solidFill>
-          <a:srgbClr val="FFFFFF"/>
-        </a:solidFill>
-      </p:bgPr>
-    </p:bg>
     <p:spTree>
       <p:nvGrpSpPr>
         <p:cNvPr id="1" name=""/>
@@ -14136,7 +14359,29 @@
       </p:grpSpPr>
       <p:sp>
         <p:nvSpPr>
-          <p:cNvPr id="2" name="Text 0"/>
+          <p:cNvPr id="2" name="Shape 0"/>
+          <p:cNvSpPr/>
+          <p:nvPr/>
+        </p:nvSpPr>
+        <p:spPr>
+          <a:xfrm>
+            <a:off x="231343" y="194767"/>
+            <a:ext cx="11716207" cy="6473952"/>
+          </a:xfrm>
+          <a:prstGeom prst="roundRect">
+            <a:avLst>
+              <a:gd name="adj" fmla="val 3107"/>
+            </a:avLst>
+          </a:prstGeom>
+          <a:solidFill>
+            <a:srgbClr val="FFFFFF"/>
+          </a:solidFill>
+          <a:ln/>
+        </p:spPr>
+      </p:sp>
+      <p:sp>
+        <p:nvSpPr>
+          <p:cNvPr id="3" name="Text 1"/>
           <p:cNvSpPr/>
           <p:nvPr/>
         </p:nvSpPr>
@@ -14175,7 +14420,7 @@
       </p:sp>
       <p:sp>
         <p:nvSpPr>
-          <p:cNvPr id="3" name="Shape 1"/>
+          <p:cNvPr id="4" name="Shape 2"/>
           <p:cNvSpPr/>
           <p:nvPr/>
         </p:nvSpPr>
@@ -14197,7 +14442,7 @@
       </p:sp>
       <p:sp>
         <p:nvSpPr>
-          <p:cNvPr id="4" name="Text 2"/>
+          <p:cNvPr id="5" name="Text 3"/>
           <p:cNvSpPr/>
           <p:nvPr/>
         </p:nvSpPr>
@@ -14236,7 +14481,7 @@
       </p:sp>
       <p:pic>
         <p:nvPicPr>
-          <p:cNvPr id="5" name="Image 0" descr="preencoded.png">    </p:cNvPr>
+          <p:cNvPr id="6" name="Image 0" descr="preencoded.png">    </p:cNvPr>
           <p:cNvPicPr>
             <a:picLocks noChangeAspect="1"/>
           </p:cNvPicPr>
@@ -14250,7 +14495,7 @@
         </p:blipFill>
         <p:spPr>
           <a:xfrm>
-            <a:off x="566928" y="6254496"/>
+            <a:off x="566928" y="6126480"/>
             <a:ext cx="1481328" cy="457200"/>
           </a:xfrm>
           <a:prstGeom prst="rect">
@@ -14260,7 +14505,7 @@
       </p:pic>
       <p:sp>
         <p:nvSpPr>
-          <p:cNvPr id="6" name="Shape 3"/>
+          <p:cNvPr id="7" name="Shape 4"/>
           <p:cNvSpPr/>
           <p:nvPr/>
         </p:nvSpPr>
@@ -14287,7 +14532,7 @@
       </p:sp>
       <p:sp>
         <p:nvSpPr>
-          <p:cNvPr id="7" name="Shape 4"/>
+          <p:cNvPr id="8" name="Shape 5"/>
           <p:cNvSpPr/>
           <p:nvPr/>
         </p:nvSpPr>
@@ -14314,7 +14559,7 @@
       </p:sp>
       <p:sp>
         <p:nvSpPr>
-          <p:cNvPr id="8" name="Shape 5"/>
+          <p:cNvPr id="9" name="Shape 6"/>
           <p:cNvSpPr/>
           <p:nvPr/>
         </p:nvSpPr>
@@ -14334,7 +14579,7 @@
       </p:sp>
       <p:sp>
         <p:nvSpPr>
-          <p:cNvPr id="9" name="Shape 6"/>
+          <p:cNvPr id="10" name="Shape 7"/>
           <p:cNvSpPr/>
           <p:nvPr/>
         </p:nvSpPr>
@@ -14354,7 +14599,7 @@
       </p:sp>
       <p:sp>
         <p:nvSpPr>
-          <p:cNvPr id="10" name="Text 7"/>
+          <p:cNvPr id="11" name="Text 8"/>
           <p:cNvSpPr/>
           <p:nvPr/>
         </p:nvSpPr>
@@ -14393,7 +14638,7 @@
       </p:sp>
       <p:sp>
         <p:nvSpPr>
-          <p:cNvPr id="11" name="Shape 8"/>
+          <p:cNvPr id="12" name="Shape 9"/>
           <p:cNvSpPr/>
           <p:nvPr/>
         </p:nvSpPr>
@@ -14420,7 +14665,7 @@
       </p:sp>
       <p:sp>
         <p:nvSpPr>
-          <p:cNvPr id="12" name="Shape 9"/>
+          <p:cNvPr id="13" name="Shape 10"/>
           <p:cNvSpPr/>
           <p:nvPr/>
         </p:nvSpPr>
@@ -14440,7 +14685,7 @@
       </p:sp>
       <p:sp>
         <p:nvSpPr>
-          <p:cNvPr id="13" name="Shape 10"/>
+          <p:cNvPr id="14" name="Shape 11"/>
           <p:cNvSpPr/>
           <p:nvPr/>
         </p:nvSpPr>
@@ -14460,7 +14705,7 @@
       </p:sp>
       <p:sp>
         <p:nvSpPr>
-          <p:cNvPr id="14" name="Text 11"/>
+          <p:cNvPr id="15" name="Text 12"/>
           <p:cNvSpPr/>
           <p:nvPr/>
         </p:nvSpPr>
@@ -14499,7 +14744,7 @@
       </p:sp>
       <p:sp>
         <p:nvSpPr>
-          <p:cNvPr id="15" name="Shape 12"/>
+          <p:cNvPr id="16" name="Shape 13"/>
           <p:cNvSpPr/>
           <p:nvPr/>
         </p:nvSpPr>
@@ -14526,7 +14771,7 @@
       </p:sp>
       <p:sp>
         <p:nvSpPr>
-          <p:cNvPr id="16" name="Shape 13"/>
+          <p:cNvPr id="17" name="Shape 14"/>
           <p:cNvSpPr/>
           <p:nvPr/>
         </p:nvSpPr>
@@ -14546,7 +14791,7 @@
       </p:sp>
       <p:sp>
         <p:nvSpPr>
-          <p:cNvPr id="17" name="Shape 14"/>
+          <p:cNvPr id="18" name="Shape 15"/>
           <p:cNvSpPr/>
           <p:nvPr/>
         </p:nvSpPr>
@@ -14566,7 +14811,7 @@
       </p:sp>
       <p:sp>
         <p:nvSpPr>
-          <p:cNvPr id="18" name="Text 15"/>
+          <p:cNvPr id="19" name="Text 16"/>
           <p:cNvSpPr/>
           <p:nvPr/>
         </p:nvSpPr>
@@ -14605,7 +14850,7 @@
       </p:sp>
       <p:sp>
         <p:nvSpPr>
-          <p:cNvPr id="19" name="Shape 16"/>
+          <p:cNvPr id="20" name="Shape 17"/>
           <p:cNvSpPr/>
           <p:nvPr/>
         </p:nvSpPr>
@@ -14632,7 +14877,7 @@
       </p:sp>
       <p:sp>
         <p:nvSpPr>
-          <p:cNvPr id="20" name="Shape 17"/>
+          <p:cNvPr id="21" name="Shape 18"/>
           <p:cNvSpPr/>
           <p:nvPr/>
         </p:nvSpPr>
@@ -14652,7 +14897,7 @@
       </p:sp>
       <p:sp>
         <p:nvSpPr>
-          <p:cNvPr id="21" name="Shape 18"/>
+          <p:cNvPr id="22" name="Shape 19"/>
           <p:cNvSpPr/>
           <p:nvPr/>
         </p:nvSpPr>
@@ -14672,7 +14917,7 @@
       </p:sp>
       <p:sp>
         <p:nvSpPr>
-          <p:cNvPr id="22" name="Text 19"/>
+          <p:cNvPr id="23" name="Text 20"/>
           <p:cNvSpPr/>
           <p:nvPr/>
         </p:nvSpPr>
@@ -14711,7 +14956,7 @@
       </p:sp>
       <p:sp>
         <p:nvSpPr>
-          <p:cNvPr id="23" name="Text 20"/>
+          <p:cNvPr id="24" name="Text 21"/>
           <p:cNvSpPr/>
           <p:nvPr/>
         </p:nvSpPr>
@@ -14760,7 +15005,7 @@
         </p:nvSpPr>
         <p:spPr>
           <a:xfrm>
-            <a:off x="11368735" y="6437376"/>
+            <a:off x="11368735" y="6327648"/>
             <a:ext cx="365760" cy="274320"/>
           </a:xfrm>
           <a:prstGeom prst="rect">
@@ -14807,13 +15052,6 @@
 <file path=ppt/slides/slide22.xml><?xml version="1.0" encoding="utf-8"?>
 <p:sld xmlns:a="http://schemas.openxmlformats.org/drawingml/2006/main" xmlns:r="http://schemas.openxmlformats.org/officeDocument/2006/relationships" xmlns:p="http://schemas.openxmlformats.org/presentationml/2006/main">
   <p:cSld name="Slide 22">
-    <p:bg>
-      <p:bgPr>
-        <a:solidFill>
-          <a:srgbClr val="FFFFFF"/>
-        </a:solidFill>
-      </p:bgPr>
-    </p:bg>
     <p:spTree>
       <p:nvGrpSpPr>
         <p:cNvPr id="1" name=""/>
@@ -14830,7 +15068,29 @@
       </p:grpSpPr>
       <p:sp>
         <p:nvSpPr>
-          <p:cNvPr id="2" name="Text 0"/>
+          <p:cNvPr id="2" name="Shape 0"/>
+          <p:cNvSpPr/>
+          <p:nvPr/>
+        </p:nvSpPr>
+        <p:spPr>
+          <a:xfrm>
+            <a:off x="231343" y="194767"/>
+            <a:ext cx="11716207" cy="6473952"/>
+          </a:xfrm>
+          <a:prstGeom prst="roundRect">
+            <a:avLst>
+              <a:gd name="adj" fmla="val 3107"/>
+            </a:avLst>
+          </a:prstGeom>
+          <a:solidFill>
+            <a:srgbClr val="FFFFFF"/>
+          </a:solidFill>
+          <a:ln/>
+        </p:spPr>
+      </p:sp>
+      <p:sp>
+        <p:nvSpPr>
+          <p:cNvPr id="3" name="Text 1"/>
           <p:cNvSpPr/>
           <p:nvPr/>
         </p:nvSpPr>
@@ -14869,7 +15129,7 @@
       </p:sp>
       <p:sp>
         <p:nvSpPr>
-          <p:cNvPr id="3" name="Shape 1"/>
+          <p:cNvPr id="4" name="Shape 2"/>
           <p:cNvSpPr/>
           <p:nvPr/>
         </p:nvSpPr>
@@ -14891,7 +15151,7 @@
       </p:sp>
       <p:sp>
         <p:nvSpPr>
-          <p:cNvPr id="4" name="Text 2"/>
+          <p:cNvPr id="5" name="Text 3"/>
           <p:cNvSpPr/>
           <p:nvPr/>
         </p:nvSpPr>
@@ -14930,7 +15190,7 @@
       </p:sp>
       <p:pic>
         <p:nvPicPr>
-          <p:cNvPr id="5" name="Image 0" descr="preencoded.png">    </p:cNvPr>
+          <p:cNvPr id="6" name="Image 0" descr="preencoded.png">    </p:cNvPr>
           <p:cNvPicPr>
             <a:picLocks noChangeAspect="1"/>
           </p:cNvPicPr>
@@ -14944,7 +15204,7 @@
         </p:blipFill>
         <p:spPr>
           <a:xfrm>
-            <a:off x="566928" y="6254496"/>
+            <a:off x="566928" y="6126480"/>
             <a:ext cx="1481328" cy="457200"/>
           </a:xfrm>
           <a:prstGeom prst="rect">
@@ -14954,7 +15214,7 @@
       </p:pic>
       <p:sp>
         <p:nvSpPr>
-          <p:cNvPr id="6" name="Shape 3"/>
+          <p:cNvPr id="7" name="Shape 4"/>
           <p:cNvSpPr/>
           <p:nvPr/>
         </p:nvSpPr>
@@ -14981,7 +15241,7 @@
       </p:sp>
       <p:sp>
         <p:nvSpPr>
-          <p:cNvPr id="7" name="Shape 4"/>
+          <p:cNvPr id="8" name="Shape 5"/>
           <p:cNvSpPr/>
           <p:nvPr/>
         </p:nvSpPr>
@@ -15001,7 +15261,7 @@
       </p:sp>
       <p:sp>
         <p:nvSpPr>
-          <p:cNvPr id="8" name="Shape 5"/>
+          <p:cNvPr id="9" name="Shape 6"/>
           <p:cNvSpPr/>
           <p:nvPr/>
         </p:nvSpPr>
@@ -15021,7 +15281,7 @@
       </p:sp>
       <p:sp>
         <p:nvSpPr>
-          <p:cNvPr id="9" name="Shape 6"/>
+          <p:cNvPr id="10" name="Shape 7"/>
           <p:cNvSpPr/>
           <p:nvPr/>
         </p:nvSpPr>
@@ -15041,7 +15301,7 @@
       </p:sp>
       <p:sp>
         <p:nvSpPr>
-          <p:cNvPr id="10" name="Text 7"/>
+          <p:cNvPr id="11" name="Text 8"/>
           <p:cNvSpPr/>
           <p:nvPr/>
         </p:nvSpPr>
@@ -15094,7 +15354,7 @@
       </p:sp>
       <p:sp>
         <p:nvSpPr>
-          <p:cNvPr id="11" name="Shape 8"/>
+          <p:cNvPr id="12" name="Shape 9"/>
           <p:cNvSpPr/>
           <p:nvPr/>
         </p:nvSpPr>
@@ -15121,7 +15381,7 @@
       </p:sp>
       <p:sp>
         <p:nvSpPr>
-          <p:cNvPr id="12" name="Shape 9"/>
+          <p:cNvPr id="13" name="Shape 10"/>
           <p:cNvSpPr/>
           <p:nvPr/>
         </p:nvSpPr>
@@ -15141,7 +15401,7 @@
       </p:sp>
       <p:sp>
         <p:nvSpPr>
-          <p:cNvPr id="13" name="Shape 10"/>
+          <p:cNvPr id="14" name="Shape 11"/>
           <p:cNvSpPr/>
           <p:nvPr/>
         </p:nvSpPr>
@@ -15161,7 +15421,7 @@
       </p:sp>
       <p:sp>
         <p:nvSpPr>
-          <p:cNvPr id="14" name="Shape 11"/>
+          <p:cNvPr id="15" name="Shape 12"/>
           <p:cNvSpPr/>
           <p:nvPr/>
         </p:nvSpPr>
@@ -15181,7 +15441,7 @@
       </p:sp>
       <p:sp>
         <p:nvSpPr>
-          <p:cNvPr id="15" name="Text 12"/>
+          <p:cNvPr id="16" name="Text 13"/>
           <p:cNvSpPr/>
           <p:nvPr/>
         </p:nvSpPr>
@@ -15234,7 +15494,7 @@
       </p:sp>
       <p:sp>
         <p:nvSpPr>
-          <p:cNvPr id="16" name="Shape 13"/>
+          <p:cNvPr id="17" name="Shape 14"/>
           <p:cNvSpPr/>
           <p:nvPr/>
         </p:nvSpPr>
@@ -15261,7 +15521,7 @@
       </p:sp>
       <p:sp>
         <p:nvSpPr>
-          <p:cNvPr id="17" name="Shape 14"/>
+          <p:cNvPr id="18" name="Shape 15"/>
           <p:cNvSpPr/>
           <p:nvPr/>
         </p:nvSpPr>
@@ -15281,7 +15541,7 @@
       </p:sp>
       <p:sp>
         <p:nvSpPr>
-          <p:cNvPr id="18" name="Shape 15"/>
+          <p:cNvPr id="19" name="Shape 16"/>
           <p:cNvSpPr/>
           <p:nvPr/>
         </p:nvSpPr>
@@ -15301,7 +15561,7 @@
       </p:sp>
       <p:sp>
         <p:nvSpPr>
-          <p:cNvPr id="19" name="Shape 16"/>
+          <p:cNvPr id="20" name="Shape 17"/>
           <p:cNvSpPr/>
           <p:nvPr/>
         </p:nvSpPr>
@@ -15321,7 +15581,7 @@
       </p:sp>
       <p:sp>
         <p:nvSpPr>
-          <p:cNvPr id="20" name="Text 17"/>
+          <p:cNvPr id="21" name="Text 18"/>
           <p:cNvSpPr/>
           <p:nvPr/>
         </p:nvSpPr>
@@ -15374,7 +15634,7 @@
       </p:sp>
       <p:sp>
         <p:nvSpPr>
-          <p:cNvPr id="21" name="Shape 18"/>
+          <p:cNvPr id="22" name="Shape 19"/>
           <p:cNvSpPr/>
           <p:nvPr/>
         </p:nvSpPr>
@@ -15401,7 +15661,7 @@
       </p:sp>
       <p:sp>
         <p:nvSpPr>
-          <p:cNvPr id="22" name="Shape 19"/>
+          <p:cNvPr id="23" name="Shape 20"/>
           <p:cNvSpPr/>
           <p:nvPr/>
         </p:nvSpPr>
@@ -15421,7 +15681,7 @@
       </p:sp>
       <p:sp>
         <p:nvSpPr>
-          <p:cNvPr id="23" name="Shape 20"/>
+          <p:cNvPr id="24" name="Shape 21"/>
           <p:cNvSpPr/>
           <p:nvPr/>
         </p:nvSpPr>
@@ -15441,7 +15701,7 @@
       </p:sp>
       <p:sp>
         <p:nvSpPr>
-          <p:cNvPr id="24" name="Shape 21"/>
+          <p:cNvPr id="25" name="Shape 22"/>
           <p:cNvSpPr/>
           <p:nvPr/>
         </p:nvSpPr>
@@ -15461,7 +15721,7 @@
       </p:sp>
       <p:sp>
         <p:nvSpPr>
-          <p:cNvPr id="25" name="Text 22"/>
+          <p:cNvPr id="26" name="Text 23"/>
           <p:cNvSpPr/>
           <p:nvPr/>
         </p:nvSpPr>
@@ -15524,7 +15784,7 @@
         </p:nvSpPr>
         <p:spPr>
           <a:xfrm>
-            <a:off x="11368735" y="6437376"/>
+            <a:off x="11368735" y="6327648"/>
             <a:ext cx="365760" cy="274320"/>
           </a:xfrm>
           <a:prstGeom prst="rect">
@@ -15571,13 +15831,6 @@
 <file path=ppt/slides/slide23.xml><?xml version="1.0" encoding="utf-8"?>
 <p:sld xmlns:a="http://schemas.openxmlformats.org/drawingml/2006/main" xmlns:r="http://schemas.openxmlformats.org/officeDocument/2006/relationships" xmlns:p="http://schemas.openxmlformats.org/presentationml/2006/main">
   <p:cSld name="Slide 23">
-    <p:bg>
-      <p:bgPr>
-        <a:solidFill>
-          <a:srgbClr val="FFFFFF"/>
-        </a:solidFill>
-      </p:bgPr>
-    </p:bg>
     <p:spTree>
       <p:nvGrpSpPr>
         <p:cNvPr id="1" name=""/>
@@ -15594,7 +15847,29 @@
       </p:grpSpPr>
       <p:sp>
         <p:nvSpPr>
-          <p:cNvPr id="2" name="Text 0"/>
+          <p:cNvPr id="2" name="Shape 0"/>
+          <p:cNvSpPr/>
+          <p:nvPr/>
+        </p:nvSpPr>
+        <p:spPr>
+          <a:xfrm>
+            <a:off x="231343" y="194767"/>
+            <a:ext cx="11716207" cy="6473952"/>
+          </a:xfrm>
+          <a:prstGeom prst="roundRect">
+            <a:avLst>
+              <a:gd name="adj" fmla="val 3107"/>
+            </a:avLst>
+          </a:prstGeom>
+          <a:solidFill>
+            <a:srgbClr val="FFFFFF"/>
+          </a:solidFill>
+          <a:ln/>
+        </p:spPr>
+      </p:sp>
+      <p:sp>
+        <p:nvSpPr>
+          <p:cNvPr id="3" name="Text 1"/>
           <p:cNvSpPr/>
           <p:nvPr/>
         </p:nvSpPr>
@@ -15633,7 +15908,7 @@
       </p:sp>
       <p:sp>
         <p:nvSpPr>
-          <p:cNvPr id="3" name="Shape 1"/>
+          <p:cNvPr id="4" name="Shape 2"/>
           <p:cNvSpPr/>
           <p:nvPr/>
         </p:nvSpPr>
@@ -15655,7 +15930,7 @@
       </p:sp>
       <p:sp>
         <p:nvSpPr>
-          <p:cNvPr id="4" name="Text 2"/>
+          <p:cNvPr id="5" name="Text 3"/>
           <p:cNvSpPr/>
           <p:nvPr/>
         </p:nvSpPr>
@@ -15694,7 +15969,7 @@
       </p:sp>
       <p:pic>
         <p:nvPicPr>
-          <p:cNvPr id="5" name="Image 0" descr="preencoded.png">    </p:cNvPr>
+          <p:cNvPr id="6" name="Image 0" descr="preencoded.png">    </p:cNvPr>
           <p:cNvPicPr>
             <a:picLocks noChangeAspect="1"/>
           </p:cNvPicPr>
@@ -15708,7 +15983,7 @@
         </p:blipFill>
         <p:spPr>
           <a:xfrm>
-            <a:off x="566928" y="6254496"/>
+            <a:off x="566928" y="6126480"/>
             <a:ext cx="1481328" cy="457200"/>
           </a:xfrm>
           <a:prstGeom prst="rect">
@@ -15718,7 +15993,7 @@
       </p:pic>
       <p:sp>
         <p:nvSpPr>
-          <p:cNvPr id="6" name="Shape 3"/>
+          <p:cNvPr id="7" name="Shape 4"/>
           <p:cNvSpPr/>
           <p:nvPr/>
         </p:nvSpPr>
@@ -15745,7 +16020,7 @@
       </p:sp>
       <p:sp>
         <p:nvSpPr>
-          <p:cNvPr id="7" name="Text 4"/>
+          <p:cNvPr id="8" name="Text 5"/>
           <p:cNvSpPr/>
           <p:nvPr/>
         </p:nvSpPr>
@@ -15784,7 +16059,7 @@
       </p:sp>
       <p:sp>
         <p:nvSpPr>
-          <p:cNvPr id="8" name="Text 5"/>
+          <p:cNvPr id="9" name="Text 6"/>
           <p:cNvSpPr/>
           <p:nvPr/>
         </p:nvSpPr>
@@ -15884,7 +16159,7 @@
       </p:sp>
       <p:sp>
         <p:nvSpPr>
-          <p:cNvPr id="9" name="Shape 6"/>
+          <p:cNvPr id="10" name="Shape 7"/>
           <p:cNvSpPr/>
           <p:nvPr/>
         </p:nvSpPr>
@@ -15906,7 +16181,7 @@
       </p:sp>
       <p:sp>
         <p:nvSpPr>
-          <p:cNvPr id="10" name="Text 7"/>
+          <p:cNvPr id="11" name="Text 8"/>
           <p:cNvSpPr/>
           <p:nvPr/>
         </p:nvSpPr>
@@ -15945,7 +16220,7 @@
       </p:sp>
       <p:sp>
         <p:nvSpPr>
-          <p:cNvPr id="11" name="Text 8"/>
+          <p:cNvPr id="12" name="Text 9"/>
           <p:cNvSpPr/>
           <p:nvPr/>
         </p:nvSpPr>
@@ -16016,7 +16291,7 @@
       </p:sp>
       <p:sp>
         <p:nvSpPr>
-          <p:cNvPr id="12" name="Shape 9"/>
+          <p:cNvPr id="13" name="Shape 10"/>
           <p:cNvSpPr/>
           <p:nvPr/>
         </p:nvSpPr>
@@ -16043,7 +16318,7 @@
       </p:sp>
       <p:sp>
         <p:nvSpPr>
-          <p:cNvPr id="13" name="Text 10"/>
+          <p:cNvPr id="14" name="Text 11"/>
           <p:cNvSpPr/>
           <p:nvPr/>
         </p:nvSpPr>
@@ -16082,7 +16357,7 @@
       </p:sp>
       <p:sp>
         <p:nvSpPr>
-          <p:cNvPr id="14" name="Text 11"/>
+          <p:cNvPr id="15" name="Text 12"/>
           <p:cNvSpPr/>
           <p:nvPr/>
         </p:nvSpPr>
@@ -16131,7 +16406,7 @@
         </p:nvSpPr>
         <p:spPr>
           <a:xfrm>
-            <a:off x="11368735" y="6437376"/>
+            <a:off x="11368735" y="6327648"/>
             <a:ext cx="365760" cy="274320"/>
           </a:xfrm>
           <a:prstGeom prst="rect">
@@ -16178,13 +16453,6 @@
 <file path=ppt/slides/slide24.xml><?xml version="1.0" encoding="utf-8"?>
 <p:sld xmlns:a="http://schemas.openxmlformats.org/drawingml/2006/main" xmlns:r="http://schemas.openxmlformats.org/officeDocument/2006/relationships" xmlns:p="http://schemas.openxmlformats.org/presentationml/2006/main">
   <p:cSld name="Slide 24">
-    <p:bg>
-      <p:bgPr>
-        <a:solidFill>
-          <a:srgbClr val="1B0942"/>
-        </a:solidFill>
-      </p:bgPr>
-    </p:bg>
     <p:spTree>
       <p:nvGrpSpPr>
         <p:cNvPr id="1" name=""/>
@@ -16701,13 +16969,6 @@
 <file path=ppt/slides/slide3.xml><?xml version="1.0" encoding="utf-8"?>
 <p:sld xmlns:a="http://schemas.openxmlformats.org/drawingml/2006/main" xmlns:r="http://schemas.openxmlformats.org/officeDocument/2006/relationships" xmlns:p="http://schemas.openxmlformats.org/presentationml/2006/main">
   <p:cSld name="Slide 3">
-    <p:bg>
-      <p:bgPr>
-        <a:solidFill>
-          <a:srgbClr val="FFFFFF"/>
-        </a:solidFill>
-      </p:bgPr>
-    </p:bg>
     <p:spTree>
       <p:nvGrpSpPr>
         <p:cNvPr id="1" name=""/>
@@ -16724,7 +16985,29 @@
       </p:grpSpPr>
       <p:sp>
         <p:nvSpPr>
-          <p:cNvPr id="2" name="Text 0"/>
+          <p:cNvPr id="2" name="Shape 0"/>
+          <p:cNvSpPr/>
+          <p:nvPr/>
+        </p:nvSpPr>
+        <p:spPr>
+          <a:xfrm>
+            <a:off x="231343" y="194767"/>
+            <a:ext cx="11716207" cy="6473952"/>
+          </a:xfrm>
+          <a:prstGeom prst="roundRect">
+            <a:avLst>
+              <a:gd name="adj" fmla="val 3107"/>
+            </a:avLst>
+          </a:prstGeom>
+          <a:solidFill>
+            <a:srgbClr val="FFFFFF"/>
+          </a:solidFill>
+          <a:ln/>
+        </p:spPr>
+      </p:sp>
+      <p:sp>
+        <p:nvSpPr>
+          <p:cNvPr id="3" name="Text 1"/>
           <p:cNvSpPr/>
           <p:nvPr/>
         </p:nvSpPr>
@@ -16763,7 +17046,7 @@
       </p:sp>
       <p:sp>
         <p:nvSpPr>
-          <p:cNvPr id="3" name="Shape 1"/>
+          <p:cNvPr id="4" name="Shape 2"/>
           <p:cNvSpPr/>
           <p:nvPr/>
         </p:nvSpPr>
@@ -16785,7 +17068,7 @@
       </p:sp>
       <p:sp>
         <p:nvSpPr>
-          <p:cNvPr id="4" name="Text 2"/>
+          <p:cNvPr id="5" name="Text 3"/>
           <p:cNvSpPr/>
           <p:nvPr/>
         </p:nvSpPr>
@@ -16824,7 +17107,7 @@
       </p:sp>
       <p:pic>
         <p:nvPicPr>
-          <p:cNvPr id="5" name="Image 0" descr="preencoded.png">    </p:cNvPr>
+          <p:cNvPr id="6" name="Image 0" descr="preencoded.png">    </p:cNvPr>
           <p:cNvPicPr>
             <a:picLocks noChangeAspect="1"/>
           </p:cNvPicPr>
@@ -16838,7 +17121,7 @@
         </p:blipFill>
         <p:spPr>
           <a:xfrm>
-            <a:off x="566928" y="6254496"/>
+            <a:off x="566928" y="6126480"/>
             <a:ext cx="1481328" cy="457200"/>
           </a:xfrm>
           <a:prstGeom prst="rect">
@@ -16848,7 +17131,7 @@
       </p:pic>
       <p:sp>
         <p:nvSpPr>
-          <p:cNvPr id="6" name="Shape 3"/>
+          <p:cNvPr id="7" name="Shape 4"/>
           <p:cNvSpPr/>
           <p:nvPr/>
         </p:nvSpPr>
@@ -16875,7 +17158,7 @@
       </p:sp>
       <p:sp>
         <p:nvSpPr>
-          <p:cNvPr id="7" name="Shape 4"/>
+          <p:cNvPr id="8" name="Shape 5"/>
           <p:cNvSpPr/>
           <p:nvPr/>
         </p:nvSpPr>
@@ -16895,7 +17178,7 @@
       </p:sp>
       <p:sp>
         <p:nvSpPr>
-          <p:cNvPr id="8" name="Text 5"/>
+          <p:cNvPr id="9" name="Text 6"/>
           <p:cNvSpPr/>
           <p:nvPr/>
         </p:nvSpPr>
@@ -16934,7 +17217,7 @@
       </p:sp>
       <p:sp>
         <p:nvSpPr>
-          <p:cNvPr id="9" name="Text 6"/>
+          <p:cNvPr id="10" name="Text 7"/>
           <p:cNvSpPr/>
           <p:nvPr/>
         </p:nvSpPr>
@@ -16973,7 +17256,7 @@
       </p:sp>
       <p:sp>
         <p:nvSpPr>
-          <p:cNvPr id="10" name="Shape 7"/>
+          <p:cNvPr id="11" name="Shape 8"/>
           <p:cNvSpPr/>
           <p:nvPr/>
         </p:nvSpPr>
@@ -17000,7 +17283,7 @@
       </p:sp>
       <p:sp>
         <p:nvSpPr>
-          <p:cNvPr id="11" name="Shape 8"/>
+          <p:cNvPr id="12" name="Shape 9"/>
           <p:cNvSpPr/>
           <p:nvPr/>
         </p:nvSpPr>
@@ -17020,7 +17303,7 @@
       </p:sp>
       <p:sp>
         <p:nvSpPr>
-          <p:cNvPr id="12" name="Text 9"/>
+          <p:cNvPr id="13" name="Text 10"/>
           <p:cNvSpPr/>
           <p:nvPr/>
         </p:nvSpPr>
@@ -17059,7 +17342,7 @@
       </p:sp>
       <p:sp>
         <p:nvSpPr>
-          <p:cNvPr id="13" name="Text 10"/>
+          <p:cNvPr id="14" name="Text 11"/>
           <p:cNvSpPr/>
           <p:nvPr/>
         </p:nvSpPr>
@@ -17098,7 +17381,7 @@
       </p:sp>
       <p:sp>
         <p:nvSpPr>
-          <p:cNvPr id="14" name="Shape 11"/>
+          <p:cNvPr id="15" name="Shape 12"/>
           <p:cNvSpPr/>
           <p:nvPr/>
         </p:nvSpPr>
@@ -17125,7 +17408,7 @@
       </p:sp>
       <p:sp>
         <p:nvSpPr>
-          <p:cNvPr id="15" name="Shape 12"/>
+          <p:cNvPr id="16" name="Shape 13"/>
           <p:cNvSpPr/>
           <p:nvPr/>
         </p:nvSpPr>
@@ -17145,7 +17428,7 @@
       </p:sp>
       <p:sp>
         <p:nvSpPr>
-          <p:cNvPr id="16" name="Text 13"/>
+          <p:cNvPr id="17" name="Text 14"/>
           <p:cNvSpPr/>
           <p:nvPr/>
         </p:nvSpPr>
@@ -17184,7 +17467,7 @@
       </p:sp>
       <p:sp>
         <p:nvSpPr>
-          <p:cNvPr id="17" name="Text 14"/>
+          <p:cNvPr id="18" name="Text 15"/>
           <p:cNvSpPr/>
           <p:nvPr/>
         </p:nvSpPr>
@@ -17223,7 +17506,7 @@
       </p:sp>
       <p:sp>
         <p:nvSpPr>
-          <p:cNvPr id="18" name="Shape 15"/>
+          <p:cNvPr id="19" name="Shape 16"/>
           <p:cNvSpPr/>
           <p:nvPr/>
         </p:nvSpPr>
@@ -17250,7 +17533,7 @@
       </p:sp>
       <p:sp>
         <p:nvSpPr>
-          <p:cNvPr id="19" name="Shape 16"/>
+          <p:cNvPr id="20" name="Shape 17"/>
           <p:cNvSpPr/>
           <p:nvPr/>
         </p:nvSpPr>
@@ -17270,7 +17553,7 @@
       </p:sp>
       <p:sp>
         <p:nvSpPr>
-          <p:cNvPr id="20" name="Text 17"/>
+          <p:cNvPr id="21" name="Text 18"/>
           <p:cNvSpPr/>
           <p:nvPr/>
         </p:nvSpPr>
@@ -17309,7 +17592,7 @@
       </p:sp>
       <p:sp>
         <p:nvSpPr>
-          <p:cNvPr id="21" name="Text 18"/>
+          <p:cNvPr id="22" name="Text 19"/>
           <p:cNvSpPr/>
           <p:nvPr/>
         </p:nvSpPr>
@@ -17348,7 +17631,7 @@
       </p:sp>
       <p:sp>
         <p:nvSpPr>
-          <p:cNvPr id="22" name="Shape 19"/>
+          <p:cNvPr id="23" name="Shape 20"/>
           <p:cNvSpPr/>
           <p:nvPr/>
         </p:nvSpPr>
@@ -17375,7 +17658,7 @@
       </p:sp>
       <p:sp>
         <p:nvSpPr>
-          <p:cNvPr id="23" name="Shape 20"/>
+          <p:cNvPr id="24" name="Shape 21"/>
           <p:cNvSpPr/>
           <p:nvPr/>
         </p:nvSpPr>
@@ -17395,7 +17678,7 @@
       </p:sp>
       <p:sp>
         <p:nvSpPr>
-          <p:cNvPr id="24" name="Text 21"/>
+          <p:cNvPr id="25" name="Text 22"/>
           <p:cNvSpPr/>
           <p:nvPr/>
         </p:nvSpPr>
@@ -17434,7 +17717,7 @@
       </p:sp>
       <p:sp>
         <p:nvSpPr>
-          <p:cNvPr id="25" name="Text 22"/>
+          <p:cNvPr id="26" name="Text 23"/>
           <p:cNvSpPr/>
           <p:nvPr/>
         </p:nvSpPr>
@@ -17473,7 +17756,7 @@
       </p:sp>
       <p:sp>
         <p:nvSpPr>
-          <p:cNvPr id="26" name="Shape 23"/>
+          <p:cNvPr id="27" name="Shape 24"/>
           <p:cNvSpPr/>
           <p:nvPr/>
         </p:nvSpPr>
@@ -17500,7 +17783,7 @@
       </p:sp>
       <p:sp>
         <p:nvSpPr>
-          <p:cNvPr id="27" name="Shape 24"/>
+          <p:cNvPr id="28" name="Shape 25"/>
           <p:cNvSpPr/>
           <p:nvPr/>
         </p:nvSpPr>
@@ -17520,7 +17803,7 @@
       </p:sp>
       <p:sp>
         <p:nvSpPr>
-          <p:cNvPr id="28" name="Text 25"/>
+          <p:cNvPr id="29" name="Text 26"/>
           <p:cNvSpPr/>
           <p:nvPr/>
         </p:nvSpPr>
@@ -17559,7 +17842,7 @@
       </p:sp>
       <p:sp>
         <p:nvSpPr>
-          <p:cNvPr id="29" name="Text 26"/>
+          <p:cNvPr id="30" name="Text 27"/>
           <p:cNvSpPr/>
           <p:nvPr/>
         </p:nvSpPr>
@@ -17598,7 +17881,7 @@
       </p:sp>
       <p:sp>
         <p:nvSpPr>
-          <p:cNvPr id="30" name="Shape 27"/>
+          <p:cNvPr id="31" name="Shape 28"/>
           <p:cNvSpPr/>
           <p:nvPr/>
         </p:nvSpPr>
@@ -17625,7 +17908,7 @@
       </p:sp>
       <p:sp>
         <p:nvSpPr>
-          <p:cNvPr id="31" name="Shape 28"/>
+          <p:cNvPr id="32" name="Shape 29"/>
           <p:cNvSpPr/>
           <p:nvPr/>
         </p:nvSpPr>
@@ -17645,7 +17928,7 @@
       </p:sp>
       <p:sp>
         <p:nvSpPr>
-          <p:cNvPr id="32" name="Text 29"/>
+          <p:cNvPr id="33" name="Text 30"/>
           <p:cNvSpPr/>
           <p:nvPr/>
         </p:nvSpPr>
@@ -17684,7 +17967,7 @@
       </p:sp>
       <p:sp>
         <p:nvSpPr>
-          <p:cNvPr id="33" name="Text 30"/>
+          <p:cNvPr id="34" name="Text 31"/>
           <p:cNvSpPr/>
           <p:nvPr/>
         </p:nvSpPr>
@@ -17723,7 +18006,7 @@
       </p:sp>
       <p:sp>
         <p:nvSpPr>
-          <p:cNvPr id="34" name="Shape 31"/>
+          <p:cNvPr id="35" name="Shape 32"/>
           <p:cNvSpPr/>
           <p:nvPr/>
         </p:nvSpPr>
@@ -17745,7 +18028,7 @@
       </p:sp>
       <p:sp>
         <p:nvSpPr>
-          <p:cNvPr id="35" name="Shape 32"/>
+          <p:cNvPr id="36" name="Shape 33"/>
           <p:cNvSpPr/>
           <p:nvPr/>
         </p:nvSpPr>
@@ -17765,7 +18048,7 @@
       </p:sp>
       <p:sp>
         <p:nvSpPr>
-          <p:cNvPr id="36" name="Text 33"/>
+          <p:cNvPr id="37" name="Text 34"/>
           <p:cNvSpPr/>
           <p:nvPr/>
         </p:nvSpPr>
@@ -17804,7 +18087,7 @@
       </p:sp>
       <p:sp>
         <p:nvSpPr>
-          <p:cNvPr id="37" name="Text 34"/>
+          <p:cNvPr id="38" name="Text 35"/>
           <p:cNvSpPr/>
           <p:nvPr/>
         </p:nvSpPr>
@@ -17843,7 +18126,7 @@
       </p:sp>
       <p:sp>
         <p:nvSpPr>
-          <p:cNvPr id="38" name="Shape 35"/>
+          <p:cNvPr id="39" name="Shape 36"/>
           <p:cNvSpPr/>
           <p:nvPr/>
         </p:nvSpPr>
@@ -17870,7 +18153,7 @@
       </p:sp>
       <p:sp>
         <p:nvSpPr>
-          <p:cNvPr id="39" name="Shape 36"/>
+          <p:cNvPr id="40" name="Shape 37"/>
           <p:cNvSpPr/>
           <p:nvPr/>
         </p:nvSpPr>
@@ -17890,7 +18173,7 @@
       </p:sp>
       <p:sp>
         <p:nvSpPr>
-          <p:cNvPr id="40" name="Text 37"/>
+          <p:cNvPr id="41" name="Text 38"/>
           <p:cNvSpPr/>
           <p:nvPr/>
         </p:nvSpPr>
@@ -17929,7 +18212,7 @@
       </p:sp>
       <p:sp>
         <p:nvSpPr>
-          <p:cNvPr id="41" name="Text 38"/>
+          <p:cNvPr id="42" name="Text 39"/>
           <p:cNvSpPr/>
           <p:nvPr/>
         </p:nvSpPr>
@@ -17968,7 +18251,7 @@
       </p:sp>
       <p:sp>
         <p:nvSpPr>
-          <p:cNvPr id="42" name="Shape 39"/>
+          <p:cNvPr id="43" name="Shape 40"/>
           <p:cNvSpPr/>
           <p:nvPr/>
         </p:nvSpPr>
@@ -17995,7 +18278,7 @@
       </p:sp>
       <p:sp>
         <p:nvSpPr>
-          <p:cNvPr id="43" name="Shape 40"/>
+          <p:cNvPr id="44" name="Shape 41"/>
           <p:cNvSpPr/>
           <p:nvPr/>
         </p:nvSpPr>
@@ -18015,7 +18298,7 @@
       </p:sp>
       <p:sp>
         <p:nvSpPr>
-          <p:cNvPr id="44" name="Text 41"/>
+          <p:cNvPr id="45" name="Text 42"/>
           <p:cNvSpPr/>
           <p:nvPr/>
         </p:nvSpPr>
@@ -18054,7 +18337,7 @@
       </p:sp>
       <p:sp>
         <p:nvSpPr>
-          <p:cNvPr id="45" name="Text 42"/>
+          <p:cNvPr id="46" name="Text 43"/>
           <p:cNvSpPr/>
           <p:nvPr/>
         </p:nvSpPr>
@@ -18093,7 +18376,7 @@
       </p:sp>
       <p:sp>
         <p:nvSpPr>
-          <p:cNvPr id="46" name="Shape 43"/>
+          <p:cNvPr id="47" name="Shape 44"/>
           <p:cNvSpPr/>
           <p:nvPr/>
         </p:nvSpPr>
@@ -18120,7 +18403,7 @@
       </p:sp>
       <p:sp>
         <p:nvSpPr>
-          <p:cNvPr id="47" name="Text 44"/>
+          <p:cNvPr id="48" name="Text 45"/>
           <p:cNvSpPr/>
           <p:nvPr/>
         </p:nvSpPr>
@@ -18172,7 +18455,7 @@
         </p:nvSpPr>
         <p:spPr>
           <a:xfrm>
-            <a:off x="11368735" y="6437376"/>
+            <a:off x="11368735" y="6327648"/>
             <a:ext cx="365760" cy="274320"/>
           </a:xfrm>
           <a:prstGeom prst="rect">
@@ -18219,13 +18502,6 @@
 <file path=ppt/slides/slide4.xml><?xml version="1.0" encoding="utf-8"?>
 <p:sld xmlns:a="http://schemas.openxmlformats.org/drawingml/2006/main" xmlns:r="http://schemas.openxmlformats.org/officeDocument/2006/relationships" xmlns:p="http://schemas.openxmlformats.org/presentationml/2006/main">
   <p:cSld name="Slide 4">
-    <p:bg>
-      <p:bgPr>
-        <a:solidFill>
-          <a:srgbClr val="FFFFFF"/>
-        </a:solidFill>
-      </p:bgPr>
-    </p:bg>
     <p:spTree>
       <p:nvGrpSpPr>
         <p:cNvPr id="1" name=""/>
@@ -18242,7 +18518,29 @@
       </p:grpSpPr>
       <p:sp>
         <p:nvSpPr>
-          <p:cNvPr id="2" name="Text 0"/>
+          <p:cNvPr id="2" name="Shape 0"/>
+          <p:cNvSpPr/>
+          <p:nvPr/>
+        </p:nvSpPr>
+        <p:spPr>
+          <a:xfrm>
+            <a:off x="231343" y="194767"/>
+            <a:ext cx="11716207" cy="6473952"/>
+          </a:xfrm>
+          <a:prstGeom prst="roundRect">
+            <a:avLst>
+              <a:gd name="adj" fmla="val 3107"/>
+            </a:avLst>
+          </a:prstGeom>
+          <a:solidFill>
+            <a:srgbClr val="FFFFFF"/>
+          </a:solidFill>
+          <a:ln/>
+        </p:spPr>
+      </p:sp>
+      <p:sp>
+        <p:nvSpPr>
+          <p:cNvPr id="3" name="Text 1"/>
           <p:cNvSpPr/>
           <p:nvPr/>
         </p:nvSpPr>
@@ -18281,7 +18579,7 @@
       </p:sp>
       <p:sp>
         <p:nvSpPr>
-          <p:cNvPr id="3" name="Text 1"/>
+          <p:cNvPr id="4" name="Text 2"/>
           <p:cNvSpPr/>
           <p:nvPr/>
         </p:nvSpPr>
@@ -18323,7 +18621,7 @@
       </p:sp>
       <p:sp>
         <p:nvSpPr>
-          <p:cNvPr id="4" name="Shape 2"/>
+          <p:cNvPr id="5" name="Shape 3"/>
           <p:cNvSpPr/>
           <p:nvPr/>
         </p:nvSpPr>
@@ -18345,7 +18643,7 @@
       </p:sp>
       <p:sp>
         <p:nvSpPr>
-          <p:cNvPr id="5" name="Text 3"/>
+          <p:cNvPr id="6" name="Text 4"/>
           <p:cNvSpPr/>
           <p:nvPr/>
         </p:nvSpPr>
@@ -18384,7 +18682,7 @@
       </p:sp>
       <p:pic>
         <p:nvPicPr>
-          <p:cNvPr id="6" name="Image 0" descr="preencoded.png">    </p:cNvPr>
+          <p:cNvPr id="7" name="Image 0" descr="preencoded.png">    </p:cNvPr>
           <p:cNvPicPr>
             <a:picLocks noChangeAspect="1"/>
           </p:cNvPicPr>
@@ -18398,7 +18696,7 @@
         </p:blipFill>
         <p:spPr>
           <a:xfrm>
-            <a:off x="566928" y="6254496"/>
+            <a:off x="566928" y="6126480"/>
             <a:ext cx="1481328" cy="457200"/>
           </a:xfrm>
           <a:prstGeom prst="rect">
@@ -18408,7 +18706,7 @@
       </p:pic>
       <p:sp>
         <p:nvSpPr>
-          <p:cNvPr id="7" name="Shape 4"/>
+          <p:cNvPr id="8" name="Shape 5"/>
           <p:cNvSpPr/>
           <p:nvPr/>
         </p:nvSpPr>
@@ -18435,7 +18733,7 @@
       </p:sp>
       <p:sp>
         <p:nvSpPr>
-          <p:cNvPr id="8" name="Text 5"/>
+          <p:cNvPr id="9" name="Text 6"/>
           <p:cNvSpPr/>
           <p:nvPr/>
         </p:nvSpPr>
@@ -18474,7 +18772,7 @@
       </p:sp>
       <p:sp>
         <p:nvSpPr>
-          <p:cNvPr id="9" name="Text 6"/>
+          <p:cNvPr id="10" name="Text 7"/>
           <p:cNvSpPr/>
           <p:nvPr/>
         </p:nvSpPr>
@@ -18516,7 +18814,7 @@
       </p:sp>
       <p:sp>
         <p:nvSpPr>
-          <p:cNvPr id="10" name="Shape 7"/>
+          <p:cNvPr id="11" name="Shape 8"/>
           <p:cNvSpPr/>
           <p:nvPr/>
         </p:nvSpPr>
@@ -18543,7 +18841,7 @@
       </p:sp>
       <p:sp>
         <p:nvSpPr>
-          <p:cNvPr id="11" name="Text 8"/>
+          <p:cNvPr id="12" name="Text 9"/>
           <p:cNvSpPr/>
           <p:nvPr/>
         </p:nvSpPr>
@@ -18582,7 +18880,7 @@
       </p:sp>
       <p:sp>
         <p:nvSpPr>
-          <p:cNvPr id="12" name="Text 9"/>
+          <p:cNvPr id="13" name="Text 10"/>
           <p:cNvSpPr/>
           <p:nvPr/>
         </p:nvSpPr>
@@ -18624,7 +18922,7 @@
       </p:sp>
       <p:sp>
         <p:nvSpPr>
-          <p:cNvPr id="13" name="Shape 10"/>
+          <p:cNvPr id="14" name="Shape 11"/>
           <p:cNvSpPr/>
           <p:nvPr/>
         </p:nvSpPr>
@@ -18651,7 +18949,7 @@
       </p:sp>
       <p:sp>
         <p:nvSpPr>
-          <p:cNvPr id="14" name="Text 11"/>
+          <p:cNvPr id="15" name="Text 12"/>
           <p:cNvSpPr/>
           <p:nvPr/>
         </p:nvSpPr>
@@ -18690,7 +18988,7 @@
       </p:sp>
       <p:sp>
         <p:nvSpPr>
-          <p:cNvPr id="15" name="Text 12"/>
+          <p:cNvPr id="16" name="Text 13"/>
           <p:cNvSpPr/>
           <p:nvPr/>
         </p:nvSpPr>
@@ -18732,7 +19030,7 @@
       </p:sp>
       <p:sp>
         <p:nvSpPr>
-          <p:cNvPr id="16" name="Shape 13"/>
+          <p:cNvPr id="17" name="Shape 14"/>
           <p:cNvSpPr/>
           <p:nvPr/>
         </p:nvSpPr>
@@ -18759,7 +19057,7 @@
       </p:sp>
       <p:sp>
         <p:nvSpPr>
-          <p:cNvPr id="17" name="Text 14"/>
+          <p:cNvPr id="18" name="Text 15"/>
           <p:cNvSpPr/>
           <p:nvPr/>
         </p:nvSpPr>
@@ -18798,7 +19096,7 @@
       </p:sp>
       <p:sp>
         <p:nvSpPr>
-          <p:cNvPr id="18" name="Text 15"/>
+          <p:cNvPr id="19" name="Text 16"/>
           <p:cNvSpPr/>
           <p:nvPr/>
         </p:nvSpPr>
@@ -18840,7 +19138,7 @@
       </p:sp>
       <p:sp>
         <p:nvSpPr>
-          <p:cNvPr id="19" name="Shape 16"/>
+          <p:cNvPr id="20" name="Shape 17"/>
           <p:cNvSpPr/>
           <p:nvPr/>
         </p:nvSpPr>
@@ -18867,7 +19165,7 @@
       </p:sp>
       <p:sp>
         <p:nvSpPr>
-          <p:cNvPr id="20" name="Text 17"/>
+          <p:cNvPr id="21" name="Text 18"/>
           <p:cNvSpPr/>
           <p:nvPr/>
         </p:nvSpPr>
@@ -18906,7 +19204,7 @@
       </p:sp>
       <p:sp>
         <p:nvSpPr>
-          <p:cNvPr id="21" name="Text 18"/>
+          <p:cNvPr id="22" name="Text 19"/>
           <p:cNvSpPr/>
           <p:nvPr/>
         </p:nvSpPr>
@@ -18948,7 +19246,7 @@
       </p:sp>
       <p:sp>
         <p:nvSpPr>
-          <p:cNvPr id="22" name="Shape 19"/>
+          <p:cNvPr id="23" name="Shape 20"/>
           <p:cNvSpPr/>
           <p:nvPr/>
         </p:nvSpPr>
@@ -18975,7 +19273,7 @@
       </p:sp>
       <p:sp>
         <p:nvSpPr>
-          <p:cNvPr id="23" name="Text 20"/>
+          <p:cNvPr id="24" name="Text 21"/>
           <p:cNvSpPr/>
           <p:nvPr/>
         </p:nvSpPr>
@@ -19014,7 +19312,7 @@
       </p:sp>
       <p:sp>
         <p:nvSpPr>
-          <p:cNvPr id="24" name="Text 21"/>
+          <p:cNvPr id="25" name="Text 22"/>
           <p:cNvSpPr/>
           <p:nvPr/>
         </p:nvSpPr>
@@ -19056,7 +19354,7 @@
       </p:sp>
       <p:sp>
         <p:nvSpPr>
-          <p:cNvPr id="25" name="Shape 22"/>
+          <p:cNvPr id="26" name="Shape 23"/>
           <p:cNvSpPr/>
           <p:nvPr/>
         </p:nvSpPr>
@@ -19083,7 +19381,7 @@
       </p:sp>
       <p:sp>
         <p:nvSpPr>
-          <p:cNvPr id="26" name="Text 23"/>
+          <p:cNvPr id="27" name="Text 24"/>
           <p:cNvSpPr/>
           <p:nvPr/>
         </p:nvSpPr>
@@ -19135,7 +19433,7 @@
         </p:nvSpPr>
         <p:spPr>
           <a:xfrm>
-            <a:off x="11368735" y="6437376"/>
+            <a:off x="11368735" y="6327648"/>
             <a:ext cx="365760" cy="274320"/>
           </a:xfrm>
           <a:prstGeom prst="rect">
@@ -19182,13 +19480,6 @@
 <file path=ppt/slides/slide5.xml><?xml version="1.0" encoding="utf-8"?>
 <p:sld xmlns:a="http://schemas.openxmlformats.org/drawingml/2006/main" xmlns:r="http://schemas.openxmlformats.org/officeDocument/2006/relationships" xmlns:p="http://schemas.openxmlformats.org/presentationml/2006/main">
   <p:cSld name="Slide 5">
-    <p:bg>
-      <p:bgPr>
-        <a:solidFill>
-          <a:srgbClr val="FFFFFF"/>
-        </a:solidFill>
-      </p:bgPr>
-    </p:bg>
     <p:spTree>
       <p:nvGrpSpPr>
         <p:cNvPr id="1" name=""/>
@@ -19205,7 +19496,29 @@
       </p:grpSpPr>
       <p:sp>
         <p:nvSpPr>
-          <p:cNvPr id="2" name="Text 0"/>
+          <p:cNvPr id="2" name="Shape 0"/>
+          <p:cNvSpPr/>
+          <p:nvPr/>
+        </p:nvSpPr>
+        <p:spPr>
+          <a:xfrm>
+            <a:off x="231343" y="194767"/>
+            <a:ext cx="11716207" cy="6473952"/>
+          </a:xfrm>
+          <a:prstGeom prst="roundRect">
+            <a:avLst>
+              <a:gd name="adj" fmla="val 3107"/>
+            </a:avLst>
+          </a:prstGeom>
+          <a:solidFill>
+            <a:srgbClr val="FFFFFF"/>
+          </a:solidFill>
+          <a:ln/>
+        </p:spPr>
+      </p:sp>
+      <p:sp>
+        <p:nvSpPr>
+          <p:cNvPr id="3" name="Text 1"/>
           <p:cNvSpPr/>
           <p:nvPr/>
         </p:nvSpPr>
@@ -19244,7 +19557,7 @@
       </p:sp>
       <p:sp>
         <p:nvSpPr>
-          <p:cNvPr id="3" name="Text 1"/>
+          <p:cNvPr id="4" name="Text 2"/>
           <p:cNvSpPr/>
           <p:nvPr/>
         </p:nvSpPr>
@@ -19283,7 +19596,7 @@
       </p:sp>
       <p:sp>
         <p:nvSpPr>
-          <p:cNvPr id="4" name="Shape 2"/>
+          <p:cNvPr id="5" name="Shape 3"/>
           <p:cNvSpPr/>
           <p:nvPr/>
         </p:nvSpPr>
@@ -19305,7 +19618,7 @@
       </p:sp>
       <p:sp>
         <p:nvSpPr>
-          <p:cNvPr id="5" name="Text 3"/>
+          <p:cNvPr id="6" name="Text 4"/>
           <p:cNvSpPr/>
           <p:nvPr/>
         </p:nvSpPr>
@@ -19344,7 +19657,7 @@
       </p:sp>
       <p:pic>
         <p:nvPicPr>
-          <p:cNvPr id="6" name="Image 0" descr="preencoded.png">    </p:cNvPr>
+          <p:cNvPr id="7" name="Image 0" descr="preencoded.png">    </p:cNvPr>
           <p:cNvPicPr>
             <a:picLocks noChangeAspect="1"/>
           </p:cNvPicPr>
@@ -19358,7 +19671,7 @@
         </p:blipFill>
         <p:spPr>
           <a:xfrm>
-            <a:off x="566928" y="6254496"/>
+            <a:off x="566928" y="6126480"/>
             <a:ext cx="1481328" cy="457200"/>
           </a:xfrm>
           <a:prstGeom prst="rect">
@@ -19368,7 +19681,7 @@
       </p:pic>
       <p:sp>
         <p:nvSpPr>
-          <p:cNvPr id="7" name="Shape 4"/>
+          <p:cNvPr id="8" name="Shape 5"/>
           <p:cNvSpPr/>
           <p:nvPr/>
         </p:nvSpPr>
@@ -19390,7 +19703,7 @@
       </p:sp>
       <p:sp>
         <p:nvSpPr>
-          <p:cNvPr id="8" name="Text 5"/>
+          <p:cNvPr id="9" name="Text 6"/>
           <p:cNvSpPr/>
           <p:nvPr/>
         </p:nvSpPr>
@@ -19429,7 +19742,7 @@
       </p:sp>
       <p:sp>
         <p:nvSpPr>
-          <p:cNvPr id="9" name="Text 6"/>
+          <p:cNvPr id="10" name="Text 7"/>
           <p:cNvSpPr/>
           <p:nvPr/>
         </p:nvSpPr>
@@ -19468,7 +19781,7 @@
       </p:sp>
       <p:sp>
         <p:nvSpPr>
-          <p:cNvPr id="10" name="Shape 7"/>
+          <p:cNvPr id="11" name="Shape 8"/>
           <p:cNvSpPr/>
           <p:nvPr/>
         </p:nvSpPr>
@@ -19490,7 +19803,7 @@
       </p:sp>
       <p:sp>
         <p:nvSpPr>
-          <p:cNvPr id="11" name="Text 8"/>
+          <p:cNvPr id="12" name="Text 9"/>
           <p:cNvSpPr/>
           <p:nvPr/>
         </p:nvSpPr>
@@ -19529,7 +19842,7 @@
       </p:sp>
       <p:sp>
         <p:nvSpPr>
-          <p:cNvPr id="12" name="Text 9"/>
+          <p:cNvPr id="13" name="Text 10"/>
           <p:cNvSpPr/>
           <p:nvPr/>
         </p:nvSpPr>
@@ -19568,7 +19881,7 @@
       </p:sp>
       <p:sp>
         <p:nvSpPr>
-          <p:cNvPr id="13" name="Text 10"/>
+          <p:cNvPr id="14" name="Text 11"/>
           <p:cNvSpPr/>
           <p:nvPr/>
         </p:nvSpPr>
@@ -19607,7 +19920,7 @@
       </p:sp>
       <p:sp>
         <p:nvSpPr>
-          <p:cNvPr id="14" name="Text 11"/>
+          <p:cNvPr id="15" name="Text 12"/>
           <p:cNvSpPr/>
           <p:nvPr/>
         </p:nvSpPr>
@@ -19646,7 +19959,7 @@
       </p:sp>
       <p:sp>
         <p:nvSpPr>
-          <p:cNvPr id="15" name="Shape 12"/>
+          <p:cNvPr id="16" name="Shape 13"/>
           <p:cNvSpPr/>
           <p:nvPr/>
         </p:nvSpPr>
@@ -19668,7 +19981,7 @@
       </p:sp>
       <p:sp>
         <p:nvSpPr>
-          <p:cNvPr id="16" name="Text 13"/>
+          <p:cNvPr id="17" name="Text 14"/>
           <p:cNvSpPr/>
           <p:nvPr/>
         </p:nvSpPr>
@@ -19707,7 +20020,7 @@
       </p:sp>
       <p:sp>
         <p:nvSpPr>
-          <p:cNvPr id="17" name="Text 14"/>
+          <p:cNvPr id="18" name="Text 15"/>
           <p:cNvSpPr/>
           <p:nvPr/>
         </p:nvSpPr>
@@ -19746,7 +20059,7 @@
       </p:sp>
       <p:sp>
         <p:nvSpPr>
-          <p:cNvPr id="18" name="Shape 15"/>
+          <p:cNvPr id="19" name="Shape 16"/>
           <p:cNvSpPr/>
           <p:nvPr/>
         </p:nvSpPr>
@@ -19768,7 +20081,7 @@
       </p:sp>
       <p:sp>
         <p:nvSpPr>
-          <p:cNvPr id="19" name="Text 16"/>
+          <p:cNvPr id="20" name="Text 17"/>
           <p:cNvSpPr/>
           <p:nvPr/>
         </p:nvSpPr>
@@ -19807,7 +20120,7 @@
       </p:sp>
       <p:sp>
         <p:nvSpPr>
-          <p:cNvPr id="20" name="Shape 17"/>
+          <p:cNvPr id="21" name="Shape 18"/>
           <p:cNvSpPr/>
           <p:nvPr/>
         </p:nvSpPr>
@@ -19829,7 +20142,7 @@
       </p:sp>
       <p:sp>
         <p:nvSpPr>
-          <p:cNvPr id="21" name="Text 18"/>
+          <p:cNvPr id="22" name="Text 19"/>
           <p:cNvSpPr/>
           <p:nvPr/>
         </p:nvSpPr>
@@ -19868,7 +20181,7 @@
       </p:sp>
       <p:sp>
         <p:nvSpPr>
-          <p:cNvPr id="22" name="Text 19"/>
+          <p:cNvPr id="23" name="Text 20"/>
           <p:cNvSpPr/>
           <p:nvPr/>
         </p:nvSpPr>
@@ -19910,7 +20223,7 @@
       </p:sp>
       <p:sp>
         <p:nvSpPr>
-          <p:cNvPr id="23" name="Shape 20"/>
+          <p:cNvPr id="24" name="Shape 21"/>
           <p:cNvSpPr/>
           <p:nvPr/>
         </p:nvSpPr>
@@ -19932,7 +20245,7 @@
       </p:sp>
       <p:sp>
         <p:nvSpPr>
-          <p:cNvPr id="24" name="Text 21"/>
+          <p:cNvPr id="25" name="Text 22"/>
           <p:cNvSpPr/>
           <p:nvPr/>
         </p:nvSpPr>
@@ -19971,7 +20284,7 @@
       </p:sp>
       <p:sp>
         <p:nvSpPr>
-          <p:cNvPr id="25" name="Text 22"/>
+          <p:cNvPr id="26" name="Text 23"/>
           <p:cNvSpPr/>
           <p:nvPr/>
         </p:nvSpPr>
@@ -20023,7 +20336,7 @@
         </p:nvSpPr>
         <p:spPr>
           <a:xfrm>
-            <a:off x="11368735" y="6437376"/>
+            <a:off x="11368735" y="6327648"/>
             <a:ext cx="365760" cy="274320"/>
           </a:xfrm>
           <a:prstGeom prst="rect">
@@ -20070,13 +20383,6 @@
 <file path=ppt/slides/slide6.xml><?xml version="1.0" encoding="utf-8"?>
 <p:sld xmlns:a="http://schemas.openxmlformats.org/drawingml/2006/main" xmlns:r="http://schemas.openxmlformats.org/officeDocument/2006/relationships" xmlns:p="http://schemas.openxmlformats.org/presentationml/2006/main">
   <p:cSld name="Slide 6">
-    <p:bg>
-      <p:bgPr>
-        <a:solidFill>
-          <a:srgbClr val="FFFFFF"/>
-        </a:solidFill>
-      </p:bgPr>
-    </p:bg>
     <p:spTree>
       <p:nvGrpSpPr>
         <p:cNvPr id="1" name=""/>
@@ -20093,7 +20399,29 @@
       </p:grpSpPr>
       <p:sp>
         <p:nvSpPr>
-          <p:cNvPr id="2" name="Text 0"/>
+          <p:cNvPr id="2" name="Shape 0"/>
+          <p:cNvSpPr/>
+          <p:nvPr/>
+        </p:nvSpPr>
+        <p:spPr>
+          <a:xfrm>
+            <a:off x="231343" y="194767"/>
+            <a:ext cx="11716207" cy="6473952"/>
+          </a:xfrm>
+          <a:prstGeom prst="roundRect">
+            <a:avLst>
+              <a:gd name="adj" fmla="val 3107"/>
+            </a:avLst>
+          </a:prstGeom>
+          <a:solidFill>
+            <a:srgbClr val="FFFFFF"/>
+          </a:solidFill>
+          <a:ln/>
+        </p:spPr>
+      </p:sp>
+      <p:sp>
+        <p:nvSpPr>
+          <p:cNvPr id="3" name="Text 1"/>
           <p:cNvSpPr/>
           <p:nvPr/>
         </p:nvSpPr>
@@ -20132,7 +20460,7 @@
       </p:sp>
       <p:sp>
         <p:nvSpPr>
-          <p:cNvPr id="3" name="Text 1"/>
+          <p:cNvPr id="4" name="Text 2"/>
           <p:cNvSpPr/>
           <p:nvPr/>
         </p:nvSpPr>
@@ -20171,7 +20499,7 @@
       </p:sp>
       <p:sp>
         <p:nvSpPr>
-          <p:cNvPr id="4" name="Shape 2"/>
+          <p:cNvPr id="5" name="Shape 3"/>
           <p:cNvSpPr/>
           <p:nvPr/>
         </p:nvSpPr>
@@ -20193,7 +20521,7 @@
       </p:sp>
       <p:sp>
         <p:nvSpPr>
-          <p:cNvPr id="5" name="Text 3"/>
+          <p:cNvPr id="6" name="Text 4"/>
           <p:cNvSpPr/>
           <p:nvPr/>
         </p:nvSpPr>
@@ -20232,7 +20560,7 @@
       </p:sp>
       <p:pic>
         <p:nvPicPr>
-          <p:cNvPr id="6" name="Image 0" descr="preencoded.png">    </p:cNvPr>
+          <p:cNvPr id="7" name="Image 0" descr="preencoded.png">    </p:cNvPr>
           <p:cNvPicPr>
             <a:picLocks noChangeAspect="1"/>
           </p:cNvPicPr>
@@ -20246,7 +20574,7 @@
         </p:blipFill>
         <p:spPr>
           <a:xfrm>
-            <a:off x="566928" y="6254496"/>
+            <a:off x="566928" y="6126480"/>
             <a:ext cx="1481328" cy="457200"/>
           </a:xfrm>
           <a:prstGeom prst="rect">
@@ -20256,7 +20584,7 @@
       </p:pic>
       <p:sp>
         <p:nvSpPr>
-          <p:cNvPr id="7" name="Shape 4"/>
+          <p:cNvPr id="8" name="Shape 5"/>
           <p:cNvSpPr/>
           <p:nvPr/>
         </p:nvSpPr>
@@ -20278,7 +20606,7 @@
       </p:sp>
       <p:sp>
         <p:nvSpPr>
-          <p:cNvPr id="8" name="Text 5"/>
+          <p:cNvPr id="9" name="Text 6"/>
           <p:cNvSpPr/>
           <p:nvPr/>
         </p:nvSpPr>
@@ -20317,7 +20645,7 @@
       </p:sp>
       <p:sp>
         <p:nvSpPr>
-          <p:cNvPr id="9" name="Text 6"/>
+          <p:cNvPr id="10" name="Text 7"/>
           <p:cNvSpPr/>
           <p:nvPr/>
         </p:nvSpPr>
@@ -20359,7 +20687,7 @@
       </p:sp>
       <p:sp>
         <p:nvSpPr>
-          <p:cNvPr id="10" name="Shape 7"/>
+          <p:cNvPr id="11" name="Shape 8"/>
           <p:cNvSpPr/>
           <p:nvPr/>
         </p:nvSpPr>
@@ -20381,7 +20709,7 @@
       </p:sp>
       <p:sp>
         <p:nvSpPr>
-          <p:cNvPr id="11" name="Text 8"/>
+          <p:cNvPr id="12" name="Text 9"/>
           <p:cNvSpPr/>
           <p:nvPr/>
         </p:nvSpPr>
@@ -20420,7 +20748,7 @@
       </p:sp>
       <p:sp>
         <p:nvSpPr>
-          <p:cNvPr id="12" name="Text 9"/>
+          <p:cNvPr id="13" name="Text 10"/>
           <p:cNvSpPr/>
           <p:nvPr/>
         </p:nvSpPr>
@@ -20462,7 +20790,7 @@
       </p:sp>
       <p:sp>
         <p:nvSpPr>
-          <p:cNvPr id="13" name="Shape 10"/>
+          <p:cNvPr id="14" name="Shape 11"/>
           <p:cNvSpPr/>
           <p:nvPr/>
         </p:nvSpPr>
@@ -20484,7 +20812,7 @@
       </p:sp>
       <p:sp>
         <p:nvSpPr>
-          <p:cNvPr id="14" name="Text 11"/>
+          <p:cNvPr id="15" name="Text 12"/>
           <p:cNvSpPr/>
           <p:nvPr/>
         </p:nvSpPr>
@@ -20523,7 +20851,7 @@
       </p:sp>
       <p:sp>
         <p:nvSpPr>
-          <p:cNvPr id="15" name="Text 12"/>
+          <p:cNvPr id="16" name="Text 13"/>
           <p:cNvSpPr/>
           <p:nvPr/>
         </p:nvSpPr>
@@ -20565,7 +20893,7 @@
       </p:sp>
       <p:sp>
         <p:nvSpPr>
-          <p:cNvPr id="16" name="Shape 13"/>
+          <p:cNvPr id="17" name="Shape 14"/>
           <p:cNvSpPr/>
           <p:nvPr/>
         </p:nvSpPr>
@@ -20587,7 +20915,7 @@
       </p:sp>
       <p:sp>
         <p:nvSpPr>
-          <p:cNvPr id="17" name="Text 14"/>
+          <p:cNvPr id="18" name="Text 15"/>
           <p:cNvSpPr/>
           <p:nvPr/>
         </p:nvSpPr>
@@ -20626,7 +20954,7 @@
       </p:sp>
       <p:sp>
         <p:nvSpPr>
-          <p:cNvPr id="18" name="Text 15"/>
+          <p:cNvPr id="19" name="Text 16"/>
           <p:cNvSpPr/>
           <p:nvPr/>
         </p:nvSpPr>
@@ -20668,7 +20996,7 @@
       </p:sp>
       <p:sp>
         <p:nvSpPr>
-          <p:cNvPr id="19" name="Shape 16"/>
+          <p:cNvPr id="20" name="Shape 17"/>
           <p:cNvSpPr/>
           <p:nvPr/>
         </p:nvSpPr>
@@ -20690,7 +21018,7 @@
       </p:sp>
       <p:sp>
         <p:nvSpPr>
-          <p:cNvPr id="20" name="Text 17"/>
+          <p:cNvPr id="21" name="Text 18"/>
           <p:cNvSpPr/>
           <p:nvPr/>
         </p:nvSpPr>
@@ -20729,7 +21057,7 @@
       </p:sp>
       <p:sp>
         <p:nvSpPr>
-          <p:cNvPr id="21" name="Text 18"/>
+          <p:cNvPr id="22" name="Text 19"/>
           <p:cNvSpPr/>
           <p:nvPr/>
         </p:nvSpPr>
@@ -20771,7 +21099,7 @@
       </p:sp>
       <p:sp>
         <p:nvSpPr>
-          <p:cNvPr id="22" name="Shape 19"/>
+          <p:cNvPr id="23" name="Shape 20"/>
           <p:cNvSpPr/>
           <p:nvPr/>
         </p:nvSpPr>
@@ -20798,7 +21126,7 @@
       </p:sp>
       <p:sp>
         <p:nvSpPr>
-          <p:cNvPr id="23" name="Text 20"/>
+          <p:cNvPr id="24" name="Text 21"/>
           <p:cNvSpPr/>
           <p:nvPr/>
         </p:nvSpPr>
@@ -20850,7 +21178,7 @@
         </p:nvSpPr>
         <p:spPr>
           <a:xfrm>
-            <a:off x="11368735" y="6437376"/>
+            <a:off x="11368735" y="6327648"/>
             <a:ext cx="365760" cy="274320"/>
           </a:xfrm>
           <a:prstGeom prst="rect">
@@ -20897,13 +21225,6 @@
 <file path=ppt/slides/slide7.xml><?xml version="1.0" encoding="utf-8"?>
 <p:sld xmlns:a="http://schemas.openxmlformats.org/drawingml/2006/main" xmlns:r="http://schemas.openxmlformats.org/officeDocument/2006/relationships" xmlns:p="http://schemas.openxmlformats.org/presentationml/2006/main">
   <p:cSld name="Slide 7">
-    <p:bg>
-      <p:bgPr>
-        <a:solidFill>
-          <a:srgbClr val="FFFFFF"/>
-        </a:solidFill>
-      </p:bgPr>
-    </p:bg>
     <p:spTree>
       <p:nvGrpSpPr>
         <p:cNvPr id="1" name=""/>
@@ -20920,7 +21241,29 @@
       </p:grpSpPr>
       <p:sp>
         <p:nvSpPr>
-          <p:cNvPr id="2" name="Text 0"/>
+          <p:cNvPr id="2" name="Shape 0"/>
+          <p:cNvSpPr/>
+          <p:nvPr/>
+        </p:nvSpPr>
+        <p:spPr>
+          <a:xfrm>
+            <a:off x="231343" y="194767"/>
+            <a:ext cx="11716207" cy="6473952"/>
+          </a:xfrm>
+          <a:prstGeom prst="roundRect">
+            <a:avLst>
+              <a:gd name="adj" fmla="val 3107"/>
+            </a:avLst>
+          </a:prstGeom>
+          <a:solidFill>
+            <a:srgbClr val="FFFFFF"/>
+          </a:solidFill>
+          <a:ln/>
+        </p:spPr>
+      </p:sp>
+      <p:sp>
+        <p:nvSpPr>
+          <p:cNvPr id="3" name="Text 1"/>
           <p:cNvSpPr/>
           <p:nvPr/>
         </p:nvSpPr>
@@ -20959,7 +21302,7 @@
       </p:sp>
       <p:sp>
         <p:nvSpPr>
-          <p:cNvPr id="3" name="Text 1"/>
+          <p:cNvPr id="4" name="Text 2"/>
           <p:cNvSpPr/>
           <p:nvPr/>
         </p:nvSpPr>
@@ -20998,7 +21341,7 @@
       </p:sp>
       <p:sp>
         <p:nvSpPr>
-          <p:cNvPr id="4" name="Shape 2"/>
+          <p:cNvPr id="5" name="Shape 3"/>
           <p:cNvSpPr/>
           <p:nvPr/>
         </p:nvSpPr>
@@ -21020,7 +21363,7 @@
       </p:sp>
       <p:sp>
         <p:nvSpPr>
-          <p:cNvPr id="5" name="Text 3"/>
+          <p:cNvPr id="6" name="Text 4"/>
           <p:cNvSpPr/>
           <p:nvPr/>
         </p:nvSpPr>
@@ -21059,7 +21402,7 @@
       </p:sp>
       <p:pic>
         <p:nvPicPr>
-          <p:cNvPr id="6" name="Image 0" descr="preencoded.png">    </p:cNvPr>
+          <p:cNvPr id="7" name="Image 0" descr="preencoded.png">    </p:cNvPr>
           <p:cNvPicPr>
             <a:picLocks noChangeAspect="1"/>
           </p:cNvPicPr>
@@ -21073,7 +21416,7 @@
         </p:blipFill>
         <p:spPr>
           <a:xfrm>
-            <a:off x="566928" y="6254496"/>
+            <a:off x="566928" y="6126480"/>
             <a:ext cx="1481328" cy="457200"/>
           </a:xfrm>
           <a:prstGeom prst="rect">
@@ -21083,7 +21426,7 @@
       </p:pic>
       <p:sp>
         <p:nvSpPr>
-          <p:cNvPr id="7" name="Shape 4"/>
+          <p:cNvPr id="8" name="Shape 5"/>
           <p:cNvSpPr/>
           <p:nvPr/>
         </p:nvSpPr>
@@ -21110,7 +21453,7 @@
       </p:sp>
       <p:sp>
         <p:nvSpPr>
-          <p:cNvPr id="8" name="Text 5"/>
+          <p:cNvPr id="9" name="Text 6"/>
           <p:cNvSpPr/>
           <p:nvPr/>
         </p:nvSpPr>
@@ -21186,7 +21529,7 @@
       </p:sp>
       <p:sp>
         <p:nvSpPr>
-          <p:cNvPr id="9" name="Shape 6"/>
+          <p:cNvPr id="10" name="Shape 7"/>
           <p:cNvSpPr/>
           <p:nvPr/>
         </p:nvSpPr>
@@ -21208,7 +21551,7 @@
       </p:sp>
       <p:sp>
         <p:nvSpPr>
-          <p:cNvPr id="10" name="Text 7"/>
+          <p:cNvPr id="11" name="Text 8"/>
           <p:cNvSpPr/>
           <p:nvPr/>
         </p:nvSpPr>
@@ -21247,7 +21590,7 @@
       </p:sp>
       <p:sp>
         <p:nvSpPr>
-          <p:cNvPr id="11" name="Shape 8"/>
+          <p:cNvPr id="12" name="Shape 9"/>
           <p:cNvSpPr/>
           <p:nvPr/>
         </p:nvSpPr>
@@ -21270,7 +21613,7 @@
       </p:sp>
       <p:sp>
         <p:nvSpPr>
-          <p:cNvPr id="12" name="Shape 9"/>
+          <p:cNvPr id="13" name="Shape 10"/>
           <p:cNvSpPr/>
           <p:nvPr/>
         </p:nvSpPr>
@@ -21290,7 +21633,7 @@
       </p:sp>
       <p:sp>
         <p:nvSpPr>
-          <p:cNvPr id="13" name="Shape 10"/>
+          <p:cNvPr id="14" name="Shape 11"/>
           <p:cNvSpPr/>
           <p:nvPr/>
         </p:nvSpPr>
@@ -21312,7 +21655,7 @@
       </p:sp>
       <p:sp>
         <p:nvSpPr>
-          <p:cNvPr id="14" name="Text 11"/>
+          <p:cNvPr id="15" name="Text 12"/>
           <p:cNvSpPr/>
           <p:nvPr/>
         </p:nvSpPr>
@@ -21351,7 +21694,7 @@
       </p:sp>
       <p:sp>
         <p:nvSpPr>
-          <p:cNvPr id="15" name="Shape 12"/>
+          <p:cNvPr id="16" name="Shape 13"/>
           <p:cNvSpPr/>
           <p:nvPr/>
         </p:nvSpPr>
@@ -21374,7 +21717,7 @@
       </p:sp>
       <p:sp>
         <p:nvSpPr>
-          <p:cNvPr id="16" name="Shape 13"/>
+          <p:cNvPr id="17" name="Shape 14"/>
           <p:cNvSpPr/>
           <p:nvPr/>
         </p:nvSpPr>
@@ -21394,7 +21737,7 @@
       </p:sp>
       <p:sp>
         <p:nvSpPr>
-          <p:cNvPr id="17" name="Shape 14"/>
+          <p:cNvPr id="18" name="Shape 15"/>
           <p:cNvSpPr/>
           <p:nvPr/>
         </p:nvSpPr>
@@ -21416,7 +21759,7 @@
       </p:sp>
       <p:sp>
         <p:nvSpPr>
-          <p:cNvPr id="18" name="Text 15"/>
+          <p:cNvPr id="19" name="Text 16"/>
           <p:cNvSpPr/>
           <p:nvPr/>
         </p:nvSpPr>
@@ -21455,7 +21798,7 @@
       </p:sp>
       <p:sp>
         <p:nvSpPr>
-          <p:cNvPr id="19" name="Shape 16"/>
+          <p:cNvPr id="20" name="Shape 17"/>
           <p:cNvSpPr/>
           <p:nvPr/>
         </p:nvSpPr>
@@ -21477,7 +21820,7 @@
       </p:sp>
       <p:sp>
         <p:nvSpPr>
-          <p:cNvPr id="20" name="Text 17"/>
+          <p:cNvPr id="21" name="Text 18"/>
           <p:cNvSpPr/>
           <p:nvPr/>
         </p:nvSpPr>
@@ -21516,7 +21859,7 @@
       </p:sp>
       <p:sp>
         <p:nvSpPr>
-          <p:cNvPr id="21" name="Text 18"/>
+          <p:cNvPr id="22" name="Text 19"/>
           <p:cNvSpPr/>
           <p:nvPr/>
         </p:nvSpPr>
@@ -21558,7 +21901,7 @@
       </p:sp>
       <p:sp>
         <p:nvSpPr>
-          <p:cNvPr id="22" name="Shape 19"/>
+          <p:cNvPr id="23" name="Shape 20"/>
           <p:cNvSpPr/>
           <p:nvPr/>
         </p:nvSpPr>
@@ -21580,7 +21923,7 @@
       </p:sp>
       <p:sp>
         <p:nvSpPr>
-          <p:cNvPr id="23" name="Text 20"/>
+          <p:cNvPr id="24" name="Text 21"/>
           <p:cNvSpPr/>
           <p:nvPr/>
         </p:nvSpPr>
@@ -21632,7 +21975,7 @@
         </p:nvSpPr>
         <p:spPr>
           <a:xfrm>
-            <a:off x="11368735" y="6437376"/>
+            <a:off x="11368735" y="6327648"/>
             <a:ext cx="365760" cy="274320"/>
           </a:xfrm>
           <a:prstGeom prst="rect">
@@ -21679,13 +22022,6 @@
 <file path=ppt/slides/slide8.xml><?xml version="1.0" encoding="utf-8"?>
 <p:sld xmlns:a="http://schemas.openxmlformats.org/drawingml/2006/main" xmlns:r="http://schemas.openxmlformats.org/officeDocument/2006/relationships" xmlns:p="http://schemas.openxmlformats.org/presentationml/2006/main">
   <p:cSld name="Slide 8">
-    <p:bg>
-      <p:bgPr>
-        <a:solidFill>
-          <a:srgbClr val="FFFFFF"/>
-        </a:solidFill>
-      </p:bgPr>
-    </p:bg>
     <p:spTree>
       <p:nvGrpSpPr>
         <p:cNvPr id="1" name=""/>
@@ -21702,7 +22038,29 @@
       </p:grpSpPr>
       <p:sp>
         <p:nvSpPr>
-          <p:cNvPr id="2" name="Text 0"/>
+          <p:cNvPr id="2" name="Shape 0"/>
+          <p:cNvSpPr/>
+          <p:nvPr/>
+        </p:nvSpPr>
+        <p:spPr>
+          <a:xfrm>
+            <a:off x="231343" y="194767"/>
+            <a:ext cx="11716207" cy="6473952"/>
+          </a:xfrm>
+          <a:prstGeom prst="roundRect">
+            <a:avLst>
+              <a:gd name="adj" fmla="val 3107"/>
+            </a:avLst>
+          </a:prstGeom>
+          <a:solidFill>
+            <a:srgbClr val="FFFFFF"/>
+          </a:solidFill>
+          <a:ln/>
+        </p:spPr>
+      </p:sp>
+      <p:sp>
+        <p:nvSpPr>
+          <p:cNvPr id="3" name="Text 1"/>
           <p:cNvSpPr/>
           <p:nvPr/>
         </p:nvSpPr>
@@ -21741,7 +22099,7 @@
       </p:sp>
       <p:sp>
         <p:nvSpPr>
-          <p:cNvPr id="3" name="Text 1"/>
+          <p:cNvPr id="4" name="Text 2"/>
           <p:cNvSpPr/>
           <p:nvPr/>
         </p:nvSpPr>
@@ -21780,7 +22138,7 @@
       </p:sp>
       <p:sp>
         <p:nvSpPr>
-          <p:cNvPr id="4" name="Shape 2"/>
+          <p:cNvPr id="5" name="Shape 3"/>
           <p:cNvSpPr/>
           <p:nvPr/>
         </p:nvSpPr>
@@ -21802,7 +22160,7 @@
       </p:sp>
       <p:sp>
         <p:nvSpPr>
-          <p:cNvPr id="5" name="Text 3"/>
+          <p:cNvPr id="6" name="Text 4"/>
           <p:cNvSpPr/>
           <p:nvPr/>
         </p:nvSpPr>
@@ -21841,7 +22199,7 @@
       </p:sp>
       <p:pic>
         <p:nvPicPr>
-          <p:cNvPr id="6" name="Image 0" descr="preencoded.png">    </p:cNvPr>
+          <p:cNvPr id="7" name="Image 0" descr="preencoded.png">    </p:cNvPr>
           <p:cNvPicPr>
             <a:picLocks noChangeAspect="1"/>
           </p:cNvPicPr>
@@ -21855,7 +22213,7 @@
         </p:blipFill>
         <p:spPr>
           <a:xfrm>
-            <a:off x="566928" y="6254496"/>
+            <a:off x="566928" y="6126480"/>
             <a:ext cx="1481328" cy="457200"/>
           </a:xfrm>
           <a:prstGeom prst="rect">
@@ -21865,7 +22223,7 @@
       </p:pic>
       <p:sp>
         <p:nvSpPr>
-          <p:cNvPr id="7" name="Shape 4"/>
+          <p:cNvPr id="8" name="Shape 5"/>
           <p:cNvSpPr/>
           <p:nvPr/>
         </p:nvSpPr>
@@ -21887,7 +22245,7 @@
       </p:sp>
       <p:sp>
         <p:nvSpPr>
-          <p:cNvPr id="8" name="Text 5"/>
+          <p:cNvPr id="9" name="Text 6"/>
           <p:cNvSpPr/>
           <p:nvPr/>
         </p:nvSpPr>
@@ -21926,7 +22284,7 @@
       </p:sp>
       <p:sp>
         <p:nvSpPr>
-          <p:cNvPr id="9" name="Text 6"/>
+          <p:cNvPr id="10" name="Text 7"/>
           <p:cNvSpPr/>
           <p:nvPr/>
         </p:nvSpPr>
@@ -21965,7 +22323,7 @@
       </p:sp>
       <p:sp>
         <p:nvSpPr>
-          <p:cNvPr id="10" name="Shape 7"/>
+          <p:cNvPr id="11" name="Shape 8"/>
           <p:cNvSpPr/>
           <p:nvPr/>
         </p:nvSpPr>
@@ -21992,7 +22350,7 @@
       </p:sp>
       <p:sp>
         <p:nvSpPr>
-          <p:cNvPr id="11" name="Text 8"/>
+          <p:cNvPr id="12" name="Text 9"/>
           <p:cNvSpPr/>
           <p:nvPr/>
         </p:nvSpPr>
@@ -22031,7 +22389,7 @@
       </p:sp>
       <p:sp>
         <p:nvSpPr>
-          <p:cNvPr id="12" name="Text 9"/>
+          <p:cNvPr id="13" name="Text 10"/>
           <p:cNvSpPr/>
           <p:nvPr/>
         </p:nvSpPr>
@@ -22070,7 +22428,7 @@
       </p:sp>
       <p:sp>
         <p:nvSpPr>
-          <p:cNvPr id="13" name="Shape 10"/>
+          <p:cNvPr id="14" name="Shape 11"/>
           <p:cNvSpPr/>
           <p:nvPr/>
         </p:nvSpPr>
@@ -22092,7 +22450,7 @@
       </p:sp>
       <p:sp>
         <p:nvSpPr>
-          <p:cNvPr id="14" name="Text 11"/>
+          <p:cNvPr id="15" name="Text 12"/>
           <p:cNvSpPr/>
           <p:nvPr/>
         </p:nvSpPr>
@@ -22131,7 +22489,7 @@
       </p:sp>
       <p:sp>
         <p:nvSpPr>
-          <p:cNvPr id="15" name="Text 12"/>
+          <p:cNvPr id="16" name="Text 13"/>
           <p:cNvSpPr/>
           <p:nvPr/>
         </p:nvSpPr>
@@ -22170,7 +22528,7 @@
       </p:sp>
       <p:sp>
         <p:nvSpPr>
-          <p:cNvPr id="16" name="Shape 13"/>
+          <p:cNvPr id="17" name="Shape 14"/>
           <p:cNvSpPr/>
           <p:nvPr/>
         </p:nvSpPr>
@@ -22193,7 +22551,7 @@
       </p:sp>
       <p:sp>
         <p:nvSpPr>
-          <p:cNvPr id="17" name="Shape 14"/>
+          <p:cNvPr id="18" name="Shape 15"/>
           <p:cNvSpPr/>
           <p:nvPr/>
         </p:nvSpPr>
@@ -22213,7 +22571,7 @@
       </p:sp>
       <p:sp>
         <p:nvSpPr>
-          <p:cNvPr id="18" name="Text 15"/>
+          <p:cNvPr id="19" name="Text 16"/>
           <p:cNvSpPr/>
           <p:nvPr/>
         </p:nvSpPr>
@@ -22252,7 +22610,7 @@
       </p:sp>
       <p:sp>
         <p:nvSpPr>
-          <p:cNvPr id="19" name="Shape 16"/>
+          <p:cNvPr id="20" name="Shape 17"/>
           <p:cNvSpPr/>
           <p:nvPr/>
         </p:nvSpPr>
@@ -22272,7 +22630,7 @@
       </p:sp>
       <p:sp>
         <p:nvSpPr>
-          <p:cNvPr id="20" name="Text 17"/>
+          <p:cNvPr id="21" name="Text 18"/>
           <p:cNvSpPr/>
           <p:nvPr/>
         </p:nvSpPr>
@@ -22311,7 +22669,7 @@
       </p:sp>
       <p:sp>
         <p:nvSpPr>
-          <p:cNvPr id="21" name="Shape 18"/>
+          <p:cNvPr id="22" name="Shape 19"/>
           <p:cNvSpPr/>
           <p:nvPr/>
         </p:nvSpPr>
@@ -22331,7 +22689,7 @@
       </p:sp>
       <p:sp>
         <p:nvSpPr>
-          <p:cNvPr id="22" name="Text 19"/>
+          <p:cNvPr id="23" name="Text 20"/>
           <p:cNvSpPr/>
           <p:nvPr/>
         </p:nvSpPr>
@@ -22370,7 +22728,7 @@
       </p:sp>
       <p:sp>
         <p:nvSpPr>
-          <p:cNvPr id="23" name="Text 20"/>
+          <p:cNvPr id="24" name="Text 21"/>
           <p:cNvSpPr/>
           <p:nvPr/>
         </p:nvSpPr>
@@ -22409,7 +22767,7 @@
       </p:sp>
       <p:sp>
         <p:nvSpPr>
-          <p:cNvPr id="24" name="Text 21"/>
+          <p:cNvPr id="25" name="Text 22"/>
           <p:cNvSpPr/>
           <p:nvPr/>
         </p:nvSpPr>
@@ -22448,7 +22806,7 @@
       </p:sp>
       <p:sp>
         <p:nvSpPr>
-          <p:cNvPr id="25" name="Shape 22"/>
+          <p:cNvPr id="26" name="Shape 23"/>
           <p:cNvSpPr/>
           <p:nvPr/>
         </p:nvSpPr>
@@ -22470,7 +22828,7 @@
       </p:sp>
       <p:sp>
         <p:nvSpPr>
-          <p:cNvPr id="26" name="Text 23"/>
+          <p:cNvPr id="27" name="Text 24"/>
           <p:cNvSpPr/>
           <p:nvPr/>
         </p:nvSpPr>
@@ -22509,7 +22867,7 @@
       </p:sp>
       <p:sp>
         <p:nvSpPr>
-          <p:cNvPr id="27" name="Text 24"/>
+          <p:cNvPr id="28" name="Text 25"/>
           <p:cNvSpPr/>
           <p:nvPr/>
         </p:nvSpPr>
@@ -22561,7 +22919,7 @@
         </p:nvSpPr>
         <p:spPr>
           <a:xfrm>
-            <a:off x="11368735" y="6437376"/>
+            <a:off x="11368735" y="6327648"/>
             <a:ext cx="365760" cy="274320"/>
           </a:xfrm>
           <a:prstGeom prst="rect">
@@ -22608,13 +22966,6 @@
 <file path=ppt/slides/slide9.xml><?xml version="1.0" encoding="utf-8"?>
 <p:sld xmlns:a="http://schemas.openxmlformats.org/drawingml/2006/main" xmlns:r="http://schemas.openxmlformats.org/officeDocument/2006/relationships" xmlns:p="http://schemas.openxmlformats.org/presentationml/2006/main">
   <p:cSld name="Slide 9">
-    <p:bg>
-      <p:bgPr>
-        <a:solidFill>
-          <a:srgbClr val="FFFFFF"/>
-        </a:solidFill>
-      </p:bgPr>
-    </p:bg>
     <p:spTree>
       <p:nvGrpSpPr>
         <p:cNvPr id="1" name=""/>
@@ -22631,7 +22982,29 @@
       </p:grpSpPr>
       <p:sp>
         <p:nvSpPr>
-          <p:cNvPr id="2" name="Text 0"/>
+          <p:cNvPr id="2" name="Shape 0"/>
+          <p:cNvSpPr/>
+          <p:nvPr/>
+        </p:nvSpPr>
+        <p:spPr>
+          <a:xfrm>
+            <a:off x="231343" y="194767"/>
+            <a:ext cx="11716207" cy="6473952"/>
+          </a:xfrm>
+          <a:prstGeom prst="roundRect">
+            <a:avLst>
+              <a:gd name="adj" fmla="val 3107"/>
+            </a:avLst>
+          </a:prstGeom>
+          <a:solidFill>
+            <a:srgbClr val="FFFFFF"/>
+          </a:solidFill>
+          <a:ln/>
+        </p:spPr>
+      </p:sp>
+      <p:sp>
+        <p:nvSpPr>
+          <p:cNvPr id="3" name="Text 1"/>
           <p:cNvSpPr/>
           <p:nvPr/>
         </p:nvSpPr>
@@ -22670,7 +23043,7 @@
       </p:sp>
       <p:sp>
         <p:nvSpPr>
-          <p:cNvPr id="3" name="Text 1"/>
+          <p:cNvPr id="4" name="Text 2"/>
           <p:cNvSpPr/>
           <p:nvPr/>
         </p:nvSpPr>
@@ -22709,7 +23082,7 @@
       </p:sp>
       <p:sp>
         <p:nvSpPr>
-          <p:cNvPr id="4" name="Shape 2"/>
+          <p:cNvPr id="5" name="Shape 3"/>
           <p:cNvSpPr/>
           <p:nvPr/>
         </p:nvSpPr>
@@ -22731,7 +23104,7 @@
       </p:sp>
       <p:sp>
         <p:nvSpPr>
-          <p:cNvPr id="5" name="Text 3"/>
+          <p:cNvPr id="6" name="Text 4"/>
           <p:cNvSpPr/>
           <p:nvPr/>
         </p:nvSpPr>
@@ -22770,7 +23143,7 @@
       </p:sp>
       <p:pic>
         <p:nvPicPr>
-          <p:cNvPr id="6" name="Image 0" descr="preencoded.png">    </p:cNvPr>
+          <p:cNvPr id="7" name="Image 0" descr="preencoded.png">    </p:cNvPr>
           <p:cNvPicPr>
             <a:picLocks noChangeAspect="1"/>
           </p:cNvPicPr>
@@ -22784,7 +23157,7 @@
         </p:blipFill>
         <p:spPr>
           <a:xfrm>
-            <a:off x="566928" y="6254496"/>
+            <a:off x="566928" y="6126480"/>
             <a:ext cx="1481328" cy="457200"/>
           </a:xfrm>
           <a:prstGeom prst="rect">
@@ -22794,7 +23167,7 @@
       </p:pic>
       <p:sp>
         <p:nvSpPr>
-          <p:cNvPr id="7" name="Shape 4"/>
+          <p:cNvPr id="8" name="Shape 5"/>
           <p:cNvSpPr/>
           <p:nvPr/>
         </p:nvSpPr>
@@ -22821,7 +23194,7 @@
       </p:sp>
       <p:sp>
         <p:nvSpPr>
-          <p:cNvPr id="8" name="Text 5"/>
+          <p:cNvPr id="9" name="Text 6"/>
           <p:cNvSpPr/>
           <p:nvPr/>
         </p:nvSpPr>
@@ -23023,7 +23396,7 @@
       </p:sp>
       <p:sp>
         <p:nvSpPr>
-          <p:cNvPr id="9" name="Shape 6"/>
+          <p:cNvPr id="10" name="Shape 7"/>
           <p:cNvSpPr/>
           <p:nvPr/>
         </p:nvSpPr>
@@ -23045,7 +23418,7 @@
       </p:sp>
       <p:sp>
         <p:nvSpPr>
-          <p:cNvPr id="10" name="Shape 7"/>
+          <p:cNvPr id="11" name="Shape 8"/>
           <p:cNvSpPr/>
           <p:nvPr/>
         </p:nvSpPr>
@@ -23065,7 +23438,7 @@
       </p:sp>
       <p:sp>
         <p:nvSpPr>
-          <p:cNvPr id="11" name="Text 8"/>
+          <p:cNvPr id="12" name="Text 9"/>
           <p:cNvSpPr/>
           <p:nvPr/>
         </p:nvSpPr>
@@ -23104,7 +23477,7 @@
       </p:sp>
       <p:sp>
         <p:nvSpPr>
-          <p:cNvPr id="12" name="Text 9"/>
+          <p:cNvPr id="13" name="Text 10"/>
           <p:cNvSpPr/>
           <p:nvPr/>
         </p:nvSpPr>
@@ -23143,7 +23516,7 @@
       </p:sp>
       <p:sp>
         <p:nvSpPr>
-          <p:cNvPr id="13" name="Text 10"/>
+          <p:cNvPr id="14" name="Text 11"/>
           <p:cNvSpPr/>
           <p:nvPr/>
         </p:nvSpPr>
@@ -23185,7 +23558,7 @@
       </p:sp>
       <p:sp>
         <p:nvSpPr>
-          <p:cNvPr id="14" name="Shape 11"/>
+          <p:cNvPr id="15" name="Shape 12"/>
           <p:cNvSpPr/>
           <p:nvPr/>
         </p:nvSpPr>
@@ -23207,7 +23580,7 @@
       </p:sp>
       <p:sp>
         <p:nvSpPr>
-          <p:cNvPr id="15" name="Shape 12"/>
+          <p:cNvPr id="16" name="Shape 13"/>
           <p:cNvSpPr/>
           <p:nvPr/>
         </p:nvSpPr>
@@ -23227,7 +23600,7 @@
       </p:sp>
       <p:sp>
         <p:nvSpPr>
-          <p:cNvPr id="16" name="Text 13"/>
+          <p:cNvPr id="17" name="Text 14"/>
           <p:cNvSpPr/>
           <p:nvPr/>
         </p:nvSpPr>
@@ -23266,7 +23639,7 @@
       </p:sp>
       <p:sp>
         <p:nvSpPr>
-          <p:cNvPr id="17" name="Text 14"/>
+          <p:cNvPr id="18" name="Text 15"/>
           <p:cNvSpPr/>
           <p:nvPr/>
         </p:nvSpPr>
@@ -23305,7 +23678,7 @@
       </p:sp>
       <p:sp>
         <p:nvSpPr>
-          <p:cNvPr id="18" name="Text 15"/>
+          <p:cNvPr id="19" name="Text 16"/>
           <p:cNvSpPr/>
           <p:nvPr/>
         </p:nvSpPr>
@@ -23347,7 +23720,7 @@
       </p:sp>
       <p:sp>
         <p:nvSpPr>
-          <p:cNvPr id="19" name="Shape 16"/>
+          <p:cNvPr id="20" name="Shape 17"/>
           <p:cNvSpPr/>
           <p:nvPr/>
         </p:nvSpPr>
@@ -23369,7 +23742,7 @@
       </p:sp>
       <p:sp>
         <p:nvSpPr>
-          <p:cNvPr id="20" name="Shape 17"/>
+          <p:cNvPr id="21" name="Shape 18"/>
           <p:cNvSpPr/>
           <p:nvPr/>
         </p:nvSpPr>
@@ -23389,7 +23762,7 @@
       </p:sp>
       <p:sp>
         <p:nvSpPr>
-          <p:cNvPr id="21" name="Text 18"/>
+          <p:cNvPr id="22" name="Text 19"/>
           <p:cNvSpPr/>
           <p:nvPr/>
         </p:nvSpPr>
@@ -23428,7 +23801,7 @@
       </p:sp>
       <p:sp>
         <p:nvSpPr>
-          <p:cNvPr id="22" name="Text 19"/>
+          <p:cNvPr id="23" name="Text 20"/>
           <p:cNvSpPr/>
           <p:nvPr/>
         </p:nvSpPr>
@@ -23467,7 +23840,7 @@
       </p:sp>
       <p:sp>
         <p:nvSpPr>
-          <p:cNvPr id="23" name="Text 20"/>
+          <p:cNvPr id="24" name="Text 21"/>
           <p:cNvSpPr/>
           <p:nvPr/>
         </p:nvSpPr>
@@ -23519,7 +23892,7 @@
         </p:nvSpPr>
         <p:spPr>
           <a:xfrm>
-            <a:off x="11368735" y="6437376"/>
+            <a:off x="11368735" y="6327648"/>
             <a:ext cx="365760" cy="274320"/>
           </a:xfrm>
           <a:prstGeom prst="rect">

--- a/docs/decks/L05.pptx
+++ b/docs/decks/L05.pptx
@@ -2625,7 +2625,7 @@
         </p:nvSpPr>
         <p:spPr>
           <a:xfrm>
-            <a:off x="11368735" y="6327648"/>
+            <a:off x="11368735" y="6437376"/>
             <a:ext cx="365760" cy="274320"/>
           </a:xfrm>
           <a:prstGeom prst="rect">
@@ -2754,7 +2754,7 @@
         </p:nvSpPr>
         <p:spPr>
           <a:xfrm>
-            <a:off x="11368735" y="6327648"/>
+            <a:off x="11368735" y="6437376"/>
             <a:ext cx="365760" cy="274320"/>
           </a:xfrm>
           <a:prstGeom prst="rect">
@@ -3894,7 +3894,7 @@
         </p:blipFill>
         <p:spPr>
           <a:xfrm>
-            <a:off x="566928" y="6126480"/>
+            <a:off x="566928" y="6254496"/>
             <a:ext cx="1481328" cy="457200"/>
           </a:xfrm>
           <a:prstGeom prst="rect">
@@ -4464,7 +4464,7 @@
         </p:nvSpPr>
         <p:spPr>
           <a:xfrm>
-            <a:off x="11368735" y="6327648"/>
+            <a:off x="11368735" y="6437376"/>
             <a:ext cx="365760" cy="274320"/>
           </a:xfrm>
           <a:prstGeom prst="rect">
@@ -4680,7 +4680,7 @@
         </p:blipFill>
         <p:spPr>
           <a:xfrm>
-            <a:off x="566928" y="6126480"/>
+            <a:off x="566928" y="6254496"/>
             <a:ext cx="1481328" cy="457200"/>
           </a:xfrm>
           <a:prstGeom prst="rect">
@@ -5335,7 +5335,7 @@
         </p:nvSpPr>
         <p:spPr>
           <a:xfrm>
-            <a:off x="11368735" y="6327648"/>
+            <a:off x="11368735" y="6437376"/>
             <a:ext cx="365760" cy="274320"/>
           </a:xfrm>
           <a:prstGeom prst="rect">
@@ -5551,7 +5551,7 @@
         </p:blipFill>
         <p:spPr>
           <a:xfrm>
-            <a:off x="566928" y="6126480"/>
+            <a:off x="566928" y="6254496"/>
             <a:ext cx="1481328" cy="457200"/>
           </a:xfrm>
           <a:prstGeom prst="rect">
@@ -6529,7 +6529,7 @@
         </p:nvSpPr>
         <p:spPr>
           <a:xfrm>
-            <a:off x="11368735" y="6327648"/>
+            <a:off x="11368735" y="6437376"/>
             <a:ext cx="365760" cy="274320"/>
           </a:xfrm>
           <a:prstGeom prst="rect">
@@ -6745,7 +6745,7 @@
         </p:blipFill>
         <p:spPr>
           <a:xfrm>
-            <a:off x="566928" y="6126480"/>
+            <a:off x="566928" y="6254496"/>
             <a:ext cx="1481328" cy="457200"/>
           </a:xfrm>
           <a:prstGeom prst="rect">
@@ -7138,7 +7138,7 @@
         </p:nvSpPr>
         <p:spPr>
           <a:xfrm>
-            <a:off x="11368735" y="6327648"/>
+            <a:off x="11368735" y="6437376"/>
             <a:ext cx="365760" cy="274320"/>
           </a:xfrm>
           <a:prstGeom prst="rect">
@@ -7354,7 +7354,7 @@
         </p:blipFill>
         <p:spPr>
           <a:xfrm>
-            <a:off x="566928" y="6126480"/>
+            <a:off x="566928" y="6254496"/>
             <a:ext cx="1481328" cy="457200"/>
           </a:xfrm>
           <a:prstGeom prst="rect">
@@ -8165,7 +8165,7 @@
         </p:nvSpPr>
         <p:spPr>
           <a:xfrm>
-            <a:off x="11368735" y="6327648"/>
+            <a:off x="11368735" y="6437376"/>
             <a:ext cx="365760" cy="274320"/>
           </a:xfrm>
           <a:prstGeom prst="rect">
@@ -8381,7 +8381,7 @@
         </p:blipFill>
         <p:spPr>
           <a:xfrm>
-            <a:off x="566928" y="6126480"/>
+            <a:off x="566928" y="6254496"/>
             <a:ext cx="1481328" cy="457200"/>
           </a:xfrm>
           <a:prstGeom prst="rect">
@@ -9077,7 +9077,7 @@
         </p:nvSpPr>
         <p:spPr>
           <a:xfrm>
-            <a:off x="11368735" y="6327648"/>
+            <a:off x="11368735" y="6437376"/>
             <a:ext cx="365760" cy="274320"/>
           </a:xfrm>
           <a:prstGeom prst="rect">
@@ -9293,7 +9293,7 @@
         </p:blipFill>
         <p:spPr>
           <a:xfrm>
-            <a:off x="566928" y="6126480"/>
+            <a:off x="566928" y="6254496"/>
             <a:ext cx="1481328" cy="457200"/>
           </a:xfrm>
           <a:prstGeom prst="rect">
@@ -9792,7 +9792,7 @@
         </p:nvSpPr>
         <p:spPr>
           <a:xfrm>
-            <a:off x="11368735" y="6327648"/>
+            <a:off x="11368735" y="6437376"/>
             <a:ext cx="365760" cy="274320"/>
           </a:xfrm>
           <a:prstGeom prst="rect">
@@ -10069,7 +10069,7 @@
         </p:blipFill>
         <p:spPr>
           <a:xfrm>
-            <a:off x="566928" y="6126480"/>
+            <a:off x="566928" y="6254496"/>
             <a:ext cx="1481328" cy="457200"/>
           </a:xfrm>
           <a:prstGeom prst="rect">
@@ -10678,7 +10678,7 @@
         </p:nvSpPr>
         <p:spPr>
           <a:xfrm>
-            <a:off x="11368735" y="6327648"/>
+            <a:off x="11368735" y="6437376"/>
             <a:ext cx="365760" cy="274320"/>
           </a:xfrm>
           <a:prstGeom prst="rect">
@@ -10855,7 +10855,7 @@
         </p:blipFill>
         <p:spPr>
           <a:xfrm>
-            <a:off x="566928" y="6126480"/>
+            <a:off x="566928" y="6254496"/>
             <a:ext cx="1481328" cy="457200"/>
           </a:xfrm>
           <a:prstGeom prst="rect">
@@ -11626,7 +11626,7 @@
         </p:nvSpPr>
         <p:spPr>
           <a:xfrm>
-            <a:off x="11368735" y="6327648"/>
+            <a:off x="11368735" y="6437376"/>
             <a:ext cx="365760" cy="274320"/>
           </a:xfrm>
           <a:prstGeom prst="rect">
@@ -11803,7 +11803,7 @@
         </p:blipFill>
         <p:spPr>
           <a:xfrm>
-            <a:off x="566928" y="6126480"/>
+            <a:off x="566928" y="6254496"/>
             <a:ext cx="1481328" cy="457200"/>
           </a:xfrm>
           <a:prstGeom prst="rect">
@@ -12383,7 +12383,7 @@
         </p:nvSpPr>
         <p:spPr>
           <a:xfrm>
-            <a:off x="11368735" y="6327648"/>
+            <a:off x="11368735" y="6437376"/>
             <a:ext cx="365760" cy="274320"/>
           </a:xfrm>
           <a:prstGeom prst="rect">
@@ -12602,7 +12602,7 @@
         </p:blipFill>
         <p:spPr>
           <a:xfrm>
-            <a:off x="566928" y="6126480"/>
+            <a:off x="566928" y="6254496"/>
             <a:ext cx="1481328" cy="457200"/>
           </a:xfrm>
           <a:prstGeom prst="rect">
@@ -13457,7 +13457,7 @@
         </p:nvSpPr>
         <p:spPr>
           <a:xfrm>
-            <a:off x="11368735" y="6327648"/>
+            <a:off x="11368735" y="6437376"/>
             <a:ext cx="365760" cy="274320"/>
           </a:xfrm>
           <a:prstGeom prst="rect">
@@ -13634,7 +13634,7 @@
         </p:blipFill>
         <p:spPr>
           <a:xfrm>
-            <a:off x="566928" y="6126480"/>
+            <a:off x="566928" y="6254496"/>
             <a:ext cx="1481328" cy="457200"/>
           </a:xfrm>
           <a:prstGeom prst="rect">
@@ -14032,7 +14032,7 @@
         </p:nvSpPr>
         <p:spPr>
           <a:xfrm>
-            <a:off x="11368735" y="6327648"/>
+            <a:off x="11368735" y="6437376"/>
             <a:ext cx="365760" cy="274320"/>
           </a:xfrm>
           <a:prstGeom prst="rect">
@@ -14209,7 +14209,7 @@
         </p:blipFill>
         <p:spPr>
           <a:xfrm>
-            <a:off x="566928" y="6126480"/>
+            <a:off x="566928" y="6254496"/>
             <a:ext cx="1481328" cy="457200"/>
           </a:xfrm>
           <a:prstGeom prst="rect">
@@ -14719,7 +14719,7 @@
         </p:nvSpPr>
         <p:spPr>
           <a:xfrm>
-            <a:off x="11368735" y="6327648"/>
+            <a:off x="11368735" y="6437376"/>
             <a:ext cx="365760" cy="274320"/>
           </a:xfrm>
           <a:prstGeom prst="rect">
@@ -14896,7 +14896,7 @@
         </p:blipFill>
         <p:spPr>
           <a:xfrm>
-            <a:off x="566928" y="6126480"/>
+            <a:off x="566928" y="6254496"/>
             <a:ext cx="1481328" cy="457200"/>
           </a:xfrm>
           <a:prstGeom prst="rect">
@@ -15476,7 +15476,7 @@
         </p:nvSpPr>
         <p:spPr>
           <a:xfrm>
-            <a:off x="11368735" y="6327648"/>
+            <a:off x="11368735" y="6437376"/>
             <a:ext cx="365760" cy="274320"/>
           </a:xfrm>
           <a:prstGeom prst="rect">
@@ -15653,7 +15653,7 @@
         </p:blipFill>
         <p:spPr>
           <a:xfrm>
-            <a:off x="566928" y="6126480"/>
+            <a:off x="566928" y="6254496"/>
             <a:ext cx="1481328" cy="457200"/>
           </a:xfrm>
           <a:prstGeom prst="rect">
@@ -16076,7 +16076,7 @@
         </p:nvSpPr>
         <p:spPr>
           <a:xfrm>
-            <a:off x="11368735" y="6327648"/>
+            <a:off x="11368735" y="6437376"/>
             <a:ext cx="365760" cy="274320"/>
           </a:xfrm>
           <a:prstGeom prst="rect">
@@ -16774,7 +16774,7 @@
         </p:blipFill>
         <p:spPr>
           <a:xfrm>
-            <a:off x="566928" y="6126480"/>
+            <a:off x="566928" y="6254496"/>
             <a:ext cx="1481328" cy="457200"/>
           </a:xfrm>
           <a:prstGeom prst="rect">
@@ -18108,7 +18108,7 @@
         </p:nvSpPr>
         <p:spPr>
           <a:xfrm>
-            <a:off x="11368735" y="6327648"/>
+            <a:off x="11368735" y="6437376"/>
             <a:ext cx="365760" cy="274320"/>
           </a:xfrm>
           <a:prstGeom prst="rect">
@@ -18327,7 +18327,7 @@
         </p:blipFill>
         <p:spPr>
           <a:xfrm>
-            <a:off x="566928" y="6126480"/>
+            <a:off x="566928" y="6254496"/>
             <a:ext cx="1481328" cy="457200"/>
           </a:xfrm>
           <a:prstGeom prst="rect">
@@ -19064,7 +19064,7 @@
         </p:nvSpPr>
         <p:spPr>
           <a:xfrm>
-            <a:off x="11368735" y="6327648"/>
+            <a:off x="11368735" y="6437376"/>
             <a:ext cx="365760" cy="274320"/>
           </a:xfrm>
           <a:prstGeom prst="rect">
@@ -19280,7 +19280,7 @@
         </p:blipFill>
         <p:spPr>
           <a:xfrm>
-            <a:off x="566928" y="6126480"/>
+            <a:off x="566928" y="6254496"/>
             <a:ext cx="1481328" cy="457200"/>
           </a:xfrm>
           <a:prstGeom prst="rect">
@@ -19945,7 +19945,7 @@
         </p:nvSpPr>
         <p:spPr>
           <a:xfrm>
-            <a:off x="11368735" y="6327648"/>
+            <a:off x="11368735" y="6437376"/>
             <a:ext cx="365760" cy="274320"/>
           </a:xfrm>
           <a:prstGeom prst="rect">
@@ -20161,7 +20161,7 @@
         </p:blipFill>
         <p:spPr>
           <a:xfrm>
-            <a:off x="566928" y="6126480"/>
+            <a:off x="566928" y="6254496"/>
             <a:ext cx="1481328" cy="457200"/>
           </a:xfrm>
           <a:prstGeom prst="rect">
@@ -20765,7 +20765,7 @@
         </p:nvSpPr>
         <p:spPr>
           <a:xfrm>
-            <a:off x="11368735" y="6327648"/>
+            <a:off x="11368735" y="6437376"/>
             <a:ext cx="365760" cy="274320"/>
           </a:xfrm>
           <a:prstGeom prst="rect">
@@ -20981,7 +20981,7 @@
         </p:blipFill>
         <p:spPr>
           <a:xfrm>
-            <a:off x="566928" y="6126480"/>
+            <a:off x="566928" y="6254496"/>
             <a:ext cx="1481328" cy="457200"/>
           </a:xfrm>
           <a:prstGeom prst="rect">
@@ -21540,7 +21540,7 @@
         </p:nvSpPr>
         <p:spPr>
           <a:xfrm>
-            <a:off x="11368735" y="6327648"/>
+            <a:off x="11368735" y="6437376"/>
             <a:ext cx="365760" cy="274320"/>
           </a:xfrm>
           <a:prstGeom prst="rect">
@@ -21756,7 +21756,7 @@
         </p:blipFill>
         <p:spPr>
           <a:xfrm>
-            <a:off x="566928" y="6126480"/>
+            <a:off x="566928" y="6254496"/>
             <a:ext cx="1481328" cy="457200"/>
           </a:xfrm>
           <a:prstGeom prst="rect">
@@ -22462,7 +22462,7 @@
         </p:nvSpPr>
         <p:spPr>
           <a:xfrm>
-            <a:off x="11368735" y="6327648"/>
+            <a:off x="11368735" y="6437376"/>
             <a:ext cx="365760" cy="274320"/>
           </a:xfrm>
           <a:prstGeom prst="rect">
@@ -22678,7 +22678,7 @@
         </p:blipFill>
         <p:spPr>
           <a:xfrm>
-            <a:off x="566928" y="6126480"/>
+            <a:off x="566928" y="6254496"/>
             <a:ext cx="1481328" cy="457200"/>
           </a:xfrm>
           <a:prstGeom prst="rect">
@@ -23413,7 +23413,7 @@
         </p:nvSpPr>
         <p:spPr>
           <a:xfrm>
-            <a:off x="11368735" y="6327648"/>
+            <a:off x="11368735" y="6437376"/>
             <a:ext cx="365760" cy="274320"/>
           </a:xfrm>
           <a:prstGeom prst="rect">

--- a/docs/decks/L05.pptx
+++ b/docs/decks/L05.pptx
@@ -19548,7 +19548,7 @@
           <a:bodyPr wrap="square" lIns="0" tIns="0" rIns="0" bIns="0" rtlCol="0" anchor="ctr"/>
           <a:lstStyle/>
           <a:p>
-            <a:pPr algn="r" indent="0" marL="0">
+            <a:pPr algn="l" indent="0" marL="0">
               <a:buNone/>
             </a:pPr>
             <a:r>
@@ -19648,7 +19648,7 @@
           <a:bodyPr wrap="square" lIns="0" tIns="0" rIns="0" bIns="0" rtlCol="0" anchor="ctr"/>
           <a:lstStyle/>
           <a:p>
-            <a:pPr algn="r" indent="0" marL="0">
+            <a:pPr algn="l" indent="0" marL="0">
               <a:buNone/>
             </a:pPr>
             <a:r>

--- a/docs/decks/L05.pptx
+++ b/docs/decks/L05.pptx
@@ -3252,17 +3252,17 @@
               <a:buNone/>
             </a:pPr>
             <a:r>
-              <a:rPr lang="en-US" sz="4000" b="1" dirty="0">
+              <a:rPr lang="en-US" sz="3600" dirty="0">
                 <a:solidFill>
                   <a:srgbClr val="FFFFFF"/>
                 </a:solidFill>
-                <a:latin typeface="Montserrat" pitchFamily="34" charset="0"/>
-                <a:ea typeface="Montserrat" pitchFamily="34" charset="-122"/>
-                <a:cs typeface="Montserrat" pitchFamily="34" charset="-120"/>
+                <a:latin typeface="Unbounded" pitchFamily="34" charset="0"/>
+                <a:ea typeface="Unbounded" pitchFamily="34" charset="-122"/>
+                <a:cs typeface="Unbounded" pitchFamily="34" charset="-120"/>
               </a:rPr>
               <a:t>Кешування: точний кеш,</a:t>
             </a:r>
-            <a:endParaRPr lang="en-US" sz="4000" dirty="0"/>
+            <a:endParaRPr lang="en-US" sz="3600" dirty="0"/>
           </a:p>
           <a:p>
             <a:pPr indent="0" marL="0">
@@ -3272,17 +3272,17 @@
               <a:buNone/>
             </a:pPr>
             <a:r>
-              <a:rPr lang="en-US" sz="4000" b="1" dirty="0">
+              <a:rPr lang="en-US" sz="3600" dirty="0">
                 <a:solidFill>
                   <a:srgbClr val="FFFFFF"/>
                 </a:solidFill>
-                <a:latin typeface="Montserrat" pitchFamily="34" charset="0"/>
-                <a:ea typeface="Montserrat" pitchFamily="34" charset="-122"/>
-                <a:cs typeface="Montserrat" pitchFamily="34" charset="-120"/>
+                <a:latin typeface="Unbounded" pitchFamily="34" charset="0"/>
+                <a:ea typeface="Unbounded" pitchFamily="34" charset="-122"/>
+                <a:cs typeface="Unbounded" pitchFamily="34" charset="-120"/>
               </a:rPr>
               <a:t>метрика і semantic cache</a:t>
             </a:r>
-            <a:endParaRPr lang="en-US" sz="4000" dirty="0"/>
+            <a:endParaRPr lang="en-US" sz="3600" dirty="0"/>
           </a:p>
         </p:txBody>
       </p:sp>
@@ -3803,13 +3803,13 @@
               <a:buNone/>
             </a:pPr>
             <a:r>
-              <a:rPr lang="en-US" sz="2400" b="1" dirty="0">
+              <a:rPr lang="en-US" sz="2400" dirty="0">
                 <a:solidFill>
                   <a:srgbClr val="FFFFFF"/>
                 </a:solidFill>
-                <a:latin typeface="Montserrat" pitchFamily="34" charset="0"/>
-                <a:ea typeface="Montserrat" pitchFamily="34" charset="-122"/>
-                <a:cs typeface="Montserrat" pitchFamily="34" charset="-120"/>
+                <a:latin typeface="Unbounded" pitchFamily="34" charset="0"/>
+                <a:ea typeface="Unbounded" pitchFamily="34" charset="-122"/>
+                <a:cs typeface="Unbounded" pitchFamily="34" charset="-120"/>
               </a:rPr>
               <a:t>Про що цей код мовчить</a:t>
             </a:r>
@@ -4589,13 +4589,13 @@
               <a:buNone/>
             </a:pPr>
             <a:r>
-              <a:rPr lang="en-US" sz="2400" b="1" dirty="0">
+              <a:rPr lang="en-US" sz="2400" dirty="0">
                 <a:solidFill>
                   <a:srgbClr val="FFFFFF"/>
                 </a:solidFill>
-                <a:latin typeface="Montserrat" pitchFamily="34" charset="0"/>
-                <a:ea typeface="Montserrat" pitchFamily="34" charset="-122"/>
-                <a:cs typeface="Montserrat" pitchFamily="34" charset="-120"/>
+                <a:latin typeface="Unbounded" pitchFamily="34" charset="0"/>
+                <a:ea typeface="Unbounded" pitchFamily="34" charset="-122"/>
+                <a:cs typeface="Unbounded" pitchFamily="34" charset="-120"/>
               </a:rPr>
               <a:t>Hit ratio: що рахуємо і що з цим робимо</a:t>
             </a:r>
@@ -4611,7 +4611,7 @@
         </p:nvSpPr>
         <p:spPr>
           <a:xfrm>
-            <a:off x="1280160" y="1193140"/>
+            <a:off x="1280160" y="1218895"/>
             <a:ext cx="777240" cy="256032"/>
           </a:xfrm>
           <a:prstGeom prst="roundRect">
@@ -4633,7 +4633,7 @@
         </p:nvSpPr>
         <p:spPr>
           <a:xfrm>
-            <a:off x="1280160" y="1193140"/>
+            <a:off x="1280160" y="1218895"/>
             <a:ext cx="777240" cy="256032"/>
           </a:xfrm>
           <a:prstGeom prst="rect">
@@ -5460,13 +5460,13 @@
               <a:buNone/>
             </a:pPr>
             <a:r>
-              <a:rPr lang="en-US" sz="2400" b="1" dirty="0">
+              <a:rPr lang="en-US" sz="2400" dirty="0">
                 <a:solidFill>
                   <a:srgbClr val="FFFFFF"/>
                 </a:solidFill>
-                <a:latin typeface="Montserrat" pitchFamily="34" charset="0"/>
-                <a:ea typeface="Montserrat" pitchFamily="34" charset="-122"/>
-                <a:cs typeface="Montserrat" pitchFamily="34" charset="-120"/>
+                <a:latin typeface="Unbounded" pitchFamily="34" charset="0"/>
+                <a:ea typeface="Unbounded" pitchFamily="34" charset="-122"/>
+                <a:cs typeface="Unbounded" pitchFamily="34" charset="-120"/>
               </a:rPr>
               <a:t>Дві метрики кешу — і межі здорової цифри</a:t>
             </a:r>
@@ -5482,7 +5482,7 @@
         </p:nvSpPr>
         <p:spPr>
           <a:xfrm>
-            <a:off x="1280160" y="1193140"/>
+            <a:off x="1280160" y="1218895"/>
             <a:ext cx="777240" cy="256032"/>
           </a:xfrm>
           <a:prstGeom prst="roundRect">
@@ -5504,7 +5504,7 @@
         </p:nvSpPr>
         <p:spPr>
           <a:xfrm>
-            <a:off x="1280160" y="1193140"/>
+            <a:off x="1280160" y="1218895"/>
             <a:ext cx="777240" cy="256032"/>
           </a:xfrm>
           <a:prstGeom prst="rect">
@@ -6654,13 +6654,13 @@
               <a:buNone/>
             </a:pPr>
             <a:r>
-              <a:rPr lang="en-US" sz="2400" b="1" dirty="0">
+              <a:rPr lang="en-US" sz="2400" dirty="0">
                 <a:solidFill>
                   <a:srgbClr val="FFFFFF"/>
                 </a:solidFill>
-                <a:latin typeface="Montserrat" pitchFamily="34" charset="0"/>
-                <a:ea typeface="Montserrat" pitchFamily="34" charset="-122"/>
-                <a:cs typeface="Montserrat" pitchFamily="34" charset="-120"/>
+                <a:latin typeface="Unbounded" pitchFamily="34" charset="0"/>
+                <a:ea typeface="Unbounded" pitchFamily="34" charset="-122"/>
+                <a:cs typeface="Unbounded" pitchFamily="34" charset="-120"/>
               </a:rPr>
               <a:t>Кеш детермінізує систему — і це двосічно</a:t>
             </a:r>
@@ -6676,7 +6676,7 @@
         </p:nvSpPr>
         <p:spPr>
           <a:xfrm>
-            <a:off x="1280160" y="1193140"/>
+            <a:off x="1280160" y="1218895"/>
             <a:ext cx="777240" cy="256032"/>
           </a:xfrm>
           <a:prstGeom prst="roundRect">
@@ -6698,7 +6698,7 @@
         </p:nvSpPr>
         <p:spPr>
           <a:xfrm>
-            <a:off x="1280160" y="1193140"/>
+            <a:off x="1280160" y="1218895"/>
             <a:ext cx="777240" cy="256032"/>
           </a:xfrm>
           <a:prstGeom prst="rect">
@@ -7263,13 +7263,13 @@
               <a:buNone/>
             </a:pPr>
             <a:r>
-              <a:rPr lang="en-US" sz="2400" b="1" dirty="0">
+              <a:rPr lang="en-US" sz="2400" dirty="0">
                 <a:solidFill>
                   <a:srgbClr val="FFFFFF"/>
                 </a:solidFill>
-                <a:latin typeface="Montserrat" pitchFamily="34" charset="0"/>
-                <a:ea typeface="Montserrat" pitchFamily="34" charset="-122"/>
-                <a:cs typeface="Montserrat" pitchFamily="34" charset="-120"/>
+                <a:latin typeface="Unbounded" pitchFamily="34" charset="0"/>
+                <a:ea typeface="Unbounded" pitchFamily="34" charset="-122"/>
+                <a:cs typeface="Unbounded" pitchFamily="34" charset="-120"/>
               </a:rPr>
               <a:t>Скидання кешу — операційна процедура</a:t>
             </a:r>
@@ -7285,7 +7285,7 @@
         </p:nvSpPr>
         <p:spPr>
           <a:xfrm>
-            <a:off x="1280160" y="1193140"/>
+            <a:off x="1280160" y="1218895"/>
             <a:ext cx="777240" cy="256032"/>
           </a:xfrm>
           <a:prstGeom prst="roundRect">
@@ -7307,7 +7307,7 @@
         </p:nvSpPr>
         <p:spPr>
           <a:xfrm>
-            <a:off x="1280160" y="1193140"/>
+            <a:off x="1280160" y="1218895"/>
             <a:ext cx="777240" cy="256032"/>
           </a:xfrm>
           <a:prstGeom prst="rect">
@@ -8290,13 +8290,13 @@
               <a:buNone/>
             </a:pPr>
             <a:r>
-              <a:rPr lang="en-US" sz="2400" b="1" dirty="0">
+              <a:rPr lang="en-US" sz="2400" dirty="0">
                 <a:solidFill>
                   <a:srgbClr val="FFFFFF"/>
                 </a:solidFill>
-                <a:latin typeface="Montserrat" pitchFamily="34" charset="0"/>
-                <a:ea typeface="Montserrat" pitchFamily="34" charset="-122"/>
-                <a:cs typeface="Montserrat" pitchFamily="34" charset="-120"/>
+                <a:latin typeface="Unbounded" pitchFamily="34" charset="0"/>
+                <a:ea typeface="Unbounded" pitchFamily="34" charset="-122"/>
+                <a:cs typeface="Unbounded" pitchFamily="34" charset="-120"/>
               </a:rPr>
               <a:t>Свіжість: віддати старе — і оновити у фоні</a:t>
             </a:r>
@@ -8312,7 +8312,7 @@
         </p:nvSpPr>
         <p:spPr>
           <a:xfrm>
-            <a:off x="1280160" y="1193140"/>
+            <a:off x="1280160" y="1218895"/>
             <a:ext cx="777240" cy="256032"/>
           </a:xfrm>
           <a:prstGeom prst="roundRect">
@@ -8334,7 +8334,7 @@
         </p:nvSpPr>
         <p:spPr>
           <a:xfrm>
-            <a:off x="1280160" y="1193140"/>
+            <a:off x="1280160" y="1218895"/>
             <a:ext cx="777240" cy="256032"/>
           </a:xfrm>
           <a:prstGeom prst="rect">
@@ -9202,13 +9202,13 @@
               <a:buNone/>
             </a:pPr>
             <a:r>
-              <a:rPr lang="en-US" sz="2400" b="1" dirty="0">
+              <a:rPr lang="en-US" sz="2400" dirty="0">
                 <a:solidFill>
                   <a:srgbClr val="FFFFFF"/>
                 </a:solidFill>
-                <a:latin typeface="Montserrat" pitchFamily="34" charset="0"/>
-                <a:ea typeface="Montserrat" pitchFamily="34" charset="-122"/>
-                <a:cs typeface="Montserrat" pitchFamily="34" charset="-120"/>
+                <a:latin typeface="Unbounded" pitchFamily="34" charset="0"/>
+                <a:ea typeface="Unbounded" pitchFamily="34" charset="-122"/>
+                <a:cs typeface="Unbounded" pitchFamily="34" charset="-120"/>
               </a:rPr>
               <a:t>Інвалідація і драбина сховищ</a:t>
             </a:r>
@@ -9917,13 +9917,13 @@
               <a:buNone/>
             </a:pPr>
             <a:r>
-              <a:rPr lang="en-US" sz="2400" b="1" dirty="0">
+              <a:rPr lang="en-US" sz="2400" dirty="0">
                 <a:solidFill>
                   <a:srgbClr val="FFFFFF"/>
                 </a:solidFill>
-                <a:latin typeface="Montserrat" pitchFamily="34" charset="0"/>
-                <a:ea typeface="Montserrat" pitchFamily="34" charset="-122"/>
-                <a:cs typeface="Montserrat" pitchFamily="34" charset="-120"/>
+                <a:latin typeface="Unbounded" pitchFamily="34" charset="0"/>
+                <a:ea typeface="Unbounded" pitchFamily="34" charset="-122"/>
+                <a:cs typeface="Unbounded" pitchFamily="34" charset="-120"/>
               </a:rPr>
               <a:t>Semantic cache: коли точного збігу мало</a:t>
             </a:r>
@@ -9939,7 +9939,7 @@
         </p:nvSpPr>
         <p:spPr>
           <a:xfrm>
-            <a:off x="1280160" y="1193140"/>
+            <a:off x="1280160" y="1218895"/>
             <a:ext cx="777240" cy="256032"/>
           </a:xfrm>
           <a:prstGeom prst="roundRect">
@@ -9961,7 +9961,7 @@
         </p:nvSpPr>
         <p:spPr>
           <a:xfrm>
-            <a:off x="1280160" y="1193140"/>
+            <a:off x="1280160" y="1218895"/>
             <a:ext cx="777240" cy="256032"/>
           </a:xfrm>
           <a:prstGeom prst="rect">
@@ -10000,7 +10000,7 @@
         </p:nvSpPr>
         <p:spPr>
           <a:xfrm>
-            <a:off x="2167128" y="1193140"/>
+            <a:off x="2167128" y="1218895"/>
             <a:ext cx="864108" cy="256032"/>
           </a:xfrm>
           <a:prstGeom prst="roundRect">
@@ -10022,7 +10022,7 @@
         </p:nvSpPr>
         <p:spPr>
           <a:xfrm>
-            <a:off x="2167128" y="1193140"/>
+            <a:off x="2167128" y="1218895"/>
             <a:ext cx="864108" cy="256032"/>
           </a:xfrm>
           <a:prstGeom prst="rect">
@@ -10764,13 +10764,13 @@
               <a:buNone/>
             </a:pPr>
             <a:r>
-              <a:rPr lang="en-US" sz="2400" b="1" dirty="0">
+              <a:rPr lang="en-US" sz="2400" dirty="0">
                 <a:solidFill>
                   <a:srgbClr val="FFFFFF"/>
                 </a:solidFill>
-                <a:latin typeface="Montserrat" pitchFamily="34" charset="0"/>
-                <a:ea typeface="Montserrat" pitchFamily="34" charset="-122"/>
-                <a:cs typeface="Montserrat" pitchFamily="34" charset="-120"/>
+                <a:latin typeface="Unbounded" pitchFamily="34" charset="0"/>
+                <a:ea typeface="Unbounded" pitchFamily="34" charset="-122"/>
+                <a:cs typeface="Unbounded" pitchFamily="34" charset="-120"/>
               </a:rPr>
               <a:t>Зараз ви побачите — і навіщо</a:t>
             </a:r>
@@ -11712,13 +11712,13 @@
               <a:buNone/>
             </a:pPr>
             <a:r>
-              <a:rPr lang="en-US" sz="2400" b="1" dirty="0">
+              <a:rPr lang="en-US" sz="2400" dirty="0">
                 <a:solidFill>
                   <a:srgbClr val="FFFFFF"/>
                 </a:solidFill>
-                <a:latin typeface="Montserrat" pitchFamily="34" charset="0"/>
-                <a:ea typeface="Montserrat" pitchFamily="34" charset="-122"/>
-                <a:cs typeface="Montserrat" pitchFamily="34" charset="-120"/>
+                <a:latin typeface="Unbounded" pitchFamily="34" charset="0"/>
+                <a:ea typeface="Unbounded" pitchFamily="34" charset="-122"/>
+                <a:cs typeface="Unbounded" pitchFamily="34" charset="-120"/>
               </a:rPr>
               <a:t>Лабораторна: чотири частини + опційна</a:t>
             </a:r>
@@ -11734,7 +11734,7 @@
         </p:nvSpPr>
         <p:spPr>
           <a:xfrm>
-            <a:off x="566928" y="1024128"/>
+            <a:off x="566928" y="1218895"/>
             <a:ext cx="950976" cy="256032"/>
           </a:xfrm>
           <a:prstGeom prst="roundRect">
@@ -11756,7 +11756,7 @@
         </p:nvSpPr>
         <p:spPr>
           <a:xfrm>
-            <a:off x="566928" y="1024128"/>
+            <a:off x="566928" y="1218895"/>
             <a:ext cx="950976" cy="256032"/>
           </a:xfrm>
           <a:prstGeom prst="rect">
@@ -12469,13 +12469,13 @@
               <a:buNone/>
             </a:pPr>
             <a:r>
-              <a:rPr lang="en-US" sz="2400" b="1" dirty="0">
+              <a:rPr lang="en-US" sz="2400" dirty="0">
                 <a:solidFill>
                   <a:srgbClr val="FFFFFF"/>
                 </a:solidFill>
-                <a:latin typeface="Montserrat" pitchFamily="34" charset="0"/>
-                <a:ea typeface="Montserrat" pitchFamily="34" charset="-122"/>
-                <a:cs typeface="Montserrat" pitchFamily="34" charset="-120"/>
+                <a:latin typeface="Unbounded" pitchFamily="34" charset="0"/>
+                <a:ea typeface="Unbounded" pitchFamily="34" charset="-122"/>
+                <a:cs typeface="Unbounded" pitchFamily="34" charset="-120"/>
               </a:rPr>
               <a:t>Що ви зможете після уроку</a:t>
             </a:r>
@@ -13543,13 +13543,13 @@
               <a:buNone/>
             </a:pPr>
             <a:r>
-              <a:rPr lang="en-US" sz="2400" b="1" dirty="0">
+              <a:rPr lang="en-US" sz="2400" dirty="0">
                 <a:solidFill>
                   <a:srgbClr val="FFFFFF"/>
                 </a:solidFill>
-                <a:latin typeface="Montserrat" pitchFamily="34" charset="0"/>
-                <a:ea typeface="Montserrat" pitchFamily="34" charset="-122"/>
-                <a:cs typeface="Montserrat" pitchFamily="34" charset="-120"/>
+                <a:latin typeface="Unbounded" pitchFamily="34" charset="0"/>
+                <a:ea typeface="Unbounded" pitchFamily="34" charset="-122"/>
+                <a:cs typeface="Unbounded" pitchFamily="34" charset="-120"/>
               </a:rPr>
               <a:t>Що це довело</a:t>
             </a:r>
@@ -14118,13 +14118,13 @@
               <a:buNone/>
             </a:pPr>
             <a:r>
-              <a:rPr lang="en-US" sz="2400" b="1" dirty="0">
+              <a:rPr lang="en-US" sz="2400" dirty="0">
                 <a:solidFill>
                   <a:srgbClr val="FFFFFF"/>
                 </a:solidFill>
-                <a:latin typeface="Montserrat" pitchFamily="34" charset="0"/>
-                <a:ea typeface="Montserrat" pitchFamily="34" charset="-122"/>
-                <a:cs typeface="Montserrat" pitchFamily="34" charset="-120"/>
+                <a:latin typeface="Unbounded" pitchFamily="34" charset="0"/>
+                <a:ea typeface="Unbounded" pitchFamily="34" charset="-122"/>
+                <a:cs typeface="Unbounded" pitchFamily="34" charset="-120"/>
               </a:rPr>
               <a:t>Перевір себе</a:t>
             </a:r>
@@ -14805,13 +14805,13 @@
               <a:buNone/>
             </a:pPr>
             <a:r>
-              <a:rPr lang="en-US" sz="2400" b="1" dirty="0">
+              <a:rPr lang="en-US" sz="2400" dirty="0">
                 <a:solidFill>
                   <a:srgbClr val="FFFFFF"/>
                 </a:solidFill>
-                <a:latin typeface="Montserrat" pitchFamily="34" charset="0"/>
-                <a:ea typeface="Montserrat" pitchFamily="34" charset="-122"/>
-                <a:cs typeface="Montserrat" pitchFamily="34" charset="-120"/>
+                <a:latin typeface="Unbounded" pitchFamily="34" charset="0"/>
+                <a:ea typeface="Unbounded" pitchFamily="34" charset="-122"/>
+                <a:cs typeface="Unbounded" pitchFamily="34" charset="-120"/>
               </a:rPr>
               <a:t>Антипатерни тижня</a:t>
             </a:r>
@@ -15562,13 +15562,13 @@
               <a:buNone/>
             </a:pPr>
             <a:r>
-              <a:rPr lang="en-US" sz="2400" b="1" dirty="0">
+              <a:rPr lang="en-US" sz="2400" dirty="0">
                 <a:solidFill>
                   <a:srgbClr val="FFFFFF"/>
                 </a:solidFill>
-                <a:latin typeface="Montserrat" pitchFamily="34" charset="0"/>
-                <a:ea typeface="Montserrat" pitchFamily="34" charset="-122"/>
-                <a:cs typeface="Montserrat" pitchFamily="34" charset="-120"/>
+                <a:latin typeface="Unbounded" pitchFamily="34" charset="0"/>
+                <a:ea typeface="Unbounded" pitchFamily="34" charset="-122"/>
+                <a:cs typeface="Unbounded" pitchFamily="34" charset="-120"/>
               </a:rPr>
               <a:t>Домашнє завдання</a:t>
             </a:r>
@@ -16683,13 +16683,13 @@
               <a:buNone/>
             </a:pPr>
             <a:r>
-              <a:rPr lang="en-US" sz="2400" b="1" dirty="0">
+              <a:rPr lang="en-US" sz="2400" dirty="0">
                 <a:solidFill>
                   <a:srgbClr val="FFFFFF"/>
                 </a:solidFill>
-                <a:latin typeface="Montserrat" pitchFamily="34" charset="0"/>
-                <a:ea typeface="Montserrat" pitchFamily="34" charset="-122"/>
-                <a:cs typeface="Montserrat" pitchFamily="34" charset="-120"/>
+                <a:latin typeface="Unbounded" pitchFamily="34" charset="0"/>
+                <a:ea typeface="Unbounded" pitchFamily="34" charset="-122"/>
+                <a:cs typeface="Unbounded" pitchFamily="34" charset="-120"/>
               </a:rPr>
               <a:t>Маршрут на сьогодні</a:t>
             </a:r>
@@ -18194,56 +18194,56 @@
               <a:buNone/>
             </a:pPr>
             <a:r>
-              <a:rPr lang="en-US" sz="2400" b="1" dirty="0">
+              <a:rPr lang="en-US" sz="2400" dirty="0">
                 <a:solidFill>
                   <a:srgbClr val="FFFFFF"/>
+                </a:solidFill>
+                <a:latin typeface="Unbounded" pitchFamily="34" charset="0"/>
+                <a:ea typeface="Unbounded" pitchFamily="34" charset="-122"/>
+                <a:cs typeface="Unbounded" pitchFamily="34" charset="-120"/>
+              </a:rPr>
+              <a:t>Терміни, якими користуватимемось</a:t>
+            </a:r>
+            <a:endParaRPr lang="en-US" sz="2400" dirty="0"/>
+          </a:p>
+        </p:txBody>
+      </p:sp>
+      <p:sp>
+        <p:nvSpPr>
+          <p:cNvPr id="3" name="Text 1"/>
+          <p:cNvSpPr/>
+          <p:nvPr/>
+        </p:nvSpPr>
+        <p:spPr>
+          <a:xfrm>
+            <a:off x="566928" y="1200607"/>
+            <a:ext cx="6839712" cy="256032"/>
+          </a:xfrm>
+          <a:prstGeom prst="rect">
+            <a:avLst/>
+          </a:prstGeom>
+          <a:noFill/>
+          <a:ln/>
+        </p:spPr>
+        <p:txBody>
+          <a:bodyPr wrap="square" lIns="0" tIns="0" rIns="0" bIns="0" rtlCol="0" anchor="t"/>
+          <a:lstStyle/>
+          <a:p>
+            <a:pPr indent="0" marL="0">
+              <a:lnSpc>
+                <a:spcPct val="100000"/>
+              </a:lnSpc>
+              <a:buNone/>
+            </a:pPr>
+            <a:r>
+              <a:rPr lang="en-US" sz="1300" dirty="0">
+                <a:solidFill>
+                  <a:srgbClr val="AFA9BE"/>
                 </a:solidFill>
                 <a:latin typeface="Montserrat" pitchFamily="34" charset="0"/>
                 <a:ea typeface="Montserrat" pitchFamily="34" charset="-122"/>
                 <a:cs typeface="Montserrat" pitchFamily="34" charset="-120"/>
               </a:rPr>
-              <a:t>Терміни, якими користуватимемось</a:t>
-            </a:r>
-            <a:endParaRPr lang="en-US" sz="2400" dirty="0"/>
-          </a:p>
-        </p:txBody>
-      </p:sp>
-      <p:sp>
-        <p:nvSpPr>
-          <p:cNvPr id="3" name="Text 1"/>
-          <p:cNvSpPr/>
-          <p:nvPr/>
-        </p:nvSpPr>
-        <p:spPr>
-          <a:xfrm>
-            <a:off x="566928" y="1005840"/>
-            <a:ext cx="6839712" cy="256032"/>
-          </a:xfrm>
-          <a:prstGeom prst="rect">
-            <a:avLst/>
-          </a:prstGeom>
-          <a:noFill/>
-          <a:ln/>
-        </p:spPr>
-        <p:txBody>
-          <a:bodyPr wrap="square" lIns="0" tIns="0" rIns="0" bIns="0" rtlCol="0" anchor="t"/>
-          <a:lstStyle/>
-          <a:p>
-            <a:pPr indent="0" marL="0">
-              <a:lnSpc>
-                <a:spcPct val="100000"/>
-              </a:lnSpc>
-              <a:buNone/>
-            </a:pPr>
-            <a:r>
-              <a:rPr lang="en-US" sz="1300" dirty="0">
-                <a:solidFill>
-                  <a:srgbClr val="AFA9BE"/>
-                </a:solidFill>
-                <a:latin typeface="Montserrat" pitchFamily="34" charset="0"/>
-                <a:ea typeface="Montserrat" pitchFamily="34" charset="-122"/>
-                <a:cs typeface="Montserrat" pitchFamily="34" charset="-120"/>
-              </a:rPr>
               <a:t>Шість слів сьогоднішнього уроку</a:t>
             </a:r>
             <a:endParaRPr lang="en-US" sz="1300" dirty="0"/>
@@ -18258,7 +18258,7 @@
         </p:nvSpPr>
         <p:spPr>
           <a:xfrm>
-            <a:off x="566928" y="1271016"/>
+            <a:off x="566928" y="1465783"/>
             <a:ext cx="777240" cy="256032"/>
           </a:xfrm>
           <a:prstGeom prst="roundRect">
@@ -18280,7 +18280,7 @@
         </p:nvSpPr>
         <p:spPr>
           <a:xfrm>
-            <a:off x="566928" y="1271016"/>
+            <a:off x="566928" y="1465783"/>
             <a:ext cx="777240" cy="256032"/>
           </a:xfrm>
           <a:prstGeom prst="rect">
@@ -19189,13 +19189,13 @@
               <a:buNone/>
             </a:pPr>
             <a:r>
-              <a:rPr lang="en-US" sz="2400" b="1" dirty="0">
+              <a:rPr lang="en-US" sz="2400" dirty="0">
                 <a:solidFill>
                   <a:srgbClr val="FFFFFF"/>
                 </a:solidFill>
-                <a:latin typeface="Montserrat" pitchFamily="34" charset="0"/>
-                <a:ea typeface="Montserrat" pitchFamily="34" charset="-122"/>
-                <a:cs typeface="Montserrat" pitchFamily="34" charset="-120"/>
+                <a:latin typeface="Unbounded" pitchFamily="34" charset="0"/>
+                <a:ea typeface="Unbounded" pitchFamily="34" charset="-122"/>
+                <a:cs typeface="Unbounded" pitchFamily="34" charset="-120"/>
               </a:rPr>
               <a:t>Подвійний податок на повтори</a:t>
             </a:r>
@@ -20070,13 +20070,13 @@
               <a:buNone/>
             </a:pPr>
             <a:r>
-              <a:rPr lang="en-US" sz="2400" b="1" dirty="0">
+              <a:rPr lang="en-US" sz="2400" dirty="0">
                 <a:solidFill>
                   <a:srgbClr val="FFFFFF"/>
                 </a:solidFill>
-                <a:latin typeface="Montserrat" pitchFamily="34" charset="0"/>
-                <a:ea typeface="Montserrat" pitchFamily="34" charset="-122"/>
-                <a:cs typeface="Montserrat" pitchFamily="34" charset="-120"/>
+                <a:latin typeface="Unbounded" pitchFamily="34" charset="0"/>
+                <a:ea typeface="Unbounded" pitchFamily="34" charset="-122"/>
+                <a:cs typeface="Unbounded" pitchFamily="34" charset="-120"/>
               </a:rPr>
               <a:t>Що кешувати можна — а що заборонено</a:t>
             </a:r>
@@ -20092,7 +20092,7 @@
         </p:nvSpPr>
         <p:spPr>
           <a:xfrm>
-            <a:off x="1280160" y="1193140"/>
+            <a:off x="1280160" y="1218895"/>
             <a:ext cx="777240" cy="256032"/>
           </a:xfrm>
           <a:prstGeom prst="roundRect">
@@ -20114,7 +20114,7 @@
         </p:nvSpPr>
         <p:spPr>
           <a:xfrm>
-            <a:off x="1280160" y="1193140"/>
+            <a:off x="1280160" y="1218895"/>
             <a:ext cx="777240" cy="256032"/>
           </a:xfrm>
           <a:prstGeom prst="rect">
@@ -20890,13 +20890,13 @@
               <a:buNone/>
             </a:pPr>
             <a:r>
-              <a:rPr lang="en-US" sz="2400" b="1" dirty="0">
+              <a:rPr lang="en-US" sz="2400" dirty="0">
                 <a:solidFill>
                   <a:srgbClr val="FFFFFF"/>
                 </a:solidFill>
-                <a:latin typeface="Montserrat" pitchFamily="34" charset="0"/>
-                <a:ea typeface="Montserrat" pitchFamily="34" charset="-122"/>
-                <a:cs typeface="Montserrat" pitchFamily="34" charset="-120"/>
+                <a:latin typeface="Unbounded" pitchFamily="34" charset="0"/>
+                <a:ea typeface="Unbounded" pitchFamily="34" charset="-122"/>
+                <a:cs typeface="Unbounded" pitchFamily="34" charset="-120"/>
               </a:rPr>
               <a:t>Ключ кешу — це контракт коректності</a:t>
             </a:r>
@@ -20912,7 +20912,7 @@
         </p:nvSpPr>
         <p:spPr>
           <a:xfrm>
-            <a:off x="1280160" y="1193140"/>
+            <a:off x="1280160" y="1218895"/>
             <a:ext cx="777240" cy="256032"/>
           </a:xfrm>
           <a:prstGeom prst="roundRect">
@@ -20934,7 +20934,7 @@
         </p:nvSpPr>
         <p:spPr>
           <a:xfrm>
-            <a:off x="1280160" y="1193140"/>
+            <a:off x="1280160" y="1218895"/>
             <a:ext cx="777240" cy="256032"/>
           </a:xfrm>
           <a:prstGeom prst="rect">
@@ -21665,13 +21665,13 @@
               <a:buNone/>
             </a:pPr>
             <a:r>
-              <a:rPr lang="en-US" sz="2400" b="1" dirty="0">
+              <a:rPr lang="en-US" sz="2400" dirty="0">
                 <a:solidFill>
                   <a:srgbClr val="FFFFFF"/>
                 </a:solidFill>
-                <a:latin typeface="Montserrat" pitchFamily="34" charset="0"/>
-                <a:ea typeface="Montserrat" pitchFamily="34" charset="-122"/>
-                <a:cs typeface="Montserrat" pitchFamily="34" charset="-120"/>
+                <a:latin typeface="Unbounded" pitchFamily="34" charset="0"/>
+                <a:ea typeface="Unbounded" pitchFamily="34" charset="-122"/>
+                <a:cs typeface="Unbounded" pitchFamily="34" charset="-120"/>
               </a:rPr>
               <a:t>Нормалізація — рішення про еквівалентність</a:t>
             </a:r>
@@ -21687,7 +21687,7 @@
         </p:nvSpPr>
         <p:spPr>
           <a:xfrm>
-            <a:off x="1280160" y="1193140"/>
+            <a:off x="1280160" y="1218895"/>
             <a:ext cx="777240" cy="256032"/>
           </a:xfrm>
           <a:prstGeom prst="roundRect">
@@ -21709,7 +21709,7 @@
         </p:nvSpPr>
         <p:spPr>
           <a:xfrm>
-            <a:off x="1280160" y="1193140"/>
+            <a:off x="1280160" y="1218895"/>
             <a:ext cx="777240" cy="256032"/>
           </a:xfrm>
           <a:prstGeom prst="rect">
@@ -22587,13 +22587,13 @@
               <a:buNone/>
             </a:pPr>
             <a:r>
-              <a:rPr lang="en-US" sz="2400" b="1" dirty="0">
+              <a:rPr lang="en-US" sz="2400" dirty="0">
                 <a:solidFill>
                   <a:srgbClr val="FFFFFF"/>
                 </a:solidFill>
-                <a:latin typeface="Montserrat" pitchFamily="34" charset="0"/>
-                <a:ea typeface="Montserrat" pitchFamily="34" charset="-122"/>
-                <a:cs typeface="Montserrat" pitchFamily="34" charset="-120"/>
+                <a:latin typeface="Unbounded" pitchFamily="34" charset="0"/>
+                <a:ea typeface="Unbounded" pitchFamily="34" charset="-122"/>
+                <a:cs typeface="Unbounded" pitchFamily="34" charset="-120"/>
               </a:rPr>
               <a:t>Розтин коду: виклик моделі стає гілкою miss</a:t>
             </a:r>
@@ -22609,7 +22609,7 @@
         </p:nvSpPr>
         <p:spPr>
           <a:xfrm>
-            <a:off x="1280160" y="1193140"/>
+            <a:off x="1280160" y="1218895"/>
             <a:ext cx="777240" cy="256032"/>
           </a:xfrm>
           <a:prstGeom prst="roundRect">
@@ -22631,7 +22631,7 @@
         </p:nvSpPr>
         <p:spPr>
           <a:xfrm>
-            <a:off x="1280160" y="1193140"/>
+            <a:off x="1280160" y="1218895"/>
             <a:ext cx="777240" cy="256032"/>
           </a:xfrm>
           <a:prstGeom prst="rect">

--- a/docs/decks/L05.pptx
+++ b/docs/decks/L05.pptx
@@ -2643,7 +2643,7 @@
             <a:lvl1pPr>
               <a:defRPr sz="850">
                 <a:solidFill>
-                  <a:srgbClr val="8A82A0"/>
+                  <a:srgbClr val="9A94AA"/>
                 </a:solidFill>
                 <a:latin typeface="Courier New"/>
                 <a:ea typeface="Courier New"/>
@@ -2725,6 +2725,62 @@
 </p:sldLayout>
 </file>
 
+<file path=ppt/slideLayouts/slideLayout3.xml><?xml version="1.0" encoding="utf-8"?>
+<p:sldLayout xmlns:a="http://schemas.openxmlformats.org/drawingml/2006/main" xmlns:r="http://schemas.openxmlformats.org/officeDocument/2006/relationships" xmlns:p="http://schemas.openxmlformats.org/presentationml/2006/main" preserve="1">
+  <p:cSld name="NEO_COVER">
+    <p:bg>
+      <p:bgPr>
+        <a:solidFill>
+          <a:srgbClr val="000000"/>
+        </a:solidFill>
+      </p:bgPr>
+    </p:bg>
+    <p:spTree>
+      <p:nvGrpSpPr>
+        <p:cNvPr id="1" name=""/>
+        <p:cNvGrpSpPr/>
+        <p:nvPr/>
+      </p:nvGrpSpPr>
+      <p:grpSpPr>
+        <a:xfrm>
+          <a:off x="0" y="0"/>
+          <a:ext cx="0" cy="0"/>
+          <a:chOff x="0" y="0"/>
+          <a:chExt cx="0" cy="0"/>
+        </a:xfrm>
+      </p:grpSpPr>
+      <p:pic>
+        <p:nvPicPr>
+          <p:cNvPr id="2" name="Image 0" descr="preencoded.png">    </p:cNvPr>
+          <p:cNvPicPr>
+            <a:picLocks noChangeAspect="1"/>
+          </p:cNvPicPr>
+          <p:nvPr/>
+        </p:nvPicPr>
+        <p:blipFill>
+          <a:blip r:embed="rId1"/>
+          <a:stretch>
+            <a:fillRect/>
+          </a:stretch>
+        </p:blipFill>
+        <p:spPr>
+          <a:xfrm>
+            <a:off x="0" y="0"/>
+            <a:ext cx="12191695" cy="6858000"/>
+          </a:xfrm>
+          <a:prstGeom prst="rect">
+            <a:avLst/>
+          </a:prstGeom>
+        </p:spPr>
+      </p:pic>
+    </p:spTree>
+  </p:cSld>
+  <p:clrMapOvr>
+    <a:masterClrMapping/>
+  </p:clrMapOvr>
+</p:sldLayout>
+</file>
+
 <file path=ppt/slideMasters/slideMaster1.xml><?xml version="1.0" encoding="utf-8"?>
 <p:sldMaster xmlns:a="http://schemas.openxmlformats.org/drawingml/2006/main" xmlns:r="http://schemas.openxmlformats.org/officeDocument/2006/relationships" xmlns:p="http://schemas.openxmlformats.org/presentationml/2006/main">
   <p:cSld>
@@ -2772,7 +2828,7 @@
             <a:lvl1pPr>
               <a:defRPr sz="850">
                 <a:solidFill>
-                  <a:srgbClr val="8A82A0"/>
+                  <a:srgbClr val="9A94AA"/>
                 </a:solidFill>
                 <a:latin typeface="Courier New"/>
                 <a:ea typeface="Courier New"/>
@@ -2796,6 +2852,7 @@
   <p:sldLayoutIdLst>
     <p:sldLayoutId id="2147483649" r:id="rId1"/>
     <p:sldLayoutId id="2147483650" r:id="rId2"/>
+    <p:sldLayoutId id="2147483651" r:id="rId3"/>
   </p:sldLayoutIdLst>
   <p:hf sldNum="0" hdr="0" ftr="0" dt="0"/>
   <p:txStyles>
@@ -3125,7 +3182,7 @@
           </a:prstGeom>
           <a:ln w="12700">
             <a:solidFill>
-              <a:srgbClr val="9B7BE8">
+              <a:srgbClr val="8F72E6">
                 <a:alpha val="24000"/>
               </a:srgbClr>
             </a:solidFill>
@@ -3151,7 +3208,7 @@
           </a:prstGeom>
           <a:ln w="12700">
             <a:solidFill>
-              <a:srgbClr val="9B7BE8">
+              <a:srgbClr val="8F72E6">
                 <a:alpha val="42000"/>
               </a:srgbClr>
             </a:solidFill>
@@ -3177,7 +3234,7 @@
           </a:prstGeom>
           <a:ln w="12700">
             <a:solidFill>
-              <a:srgbClr val="9B7BE8">
+              <a:srgbClr val="8F72E6">
                 <a:alpha val="66000"/>
               </a:srgbClr>
             </a:solidFill>
@@ -3212,7 +3269,7 @@
             <a:r>
               <a:rPr lang="en-US" sz="1200" b="1" spc="300" kern="0" dirty="0">
                 <a:solidFill>
-                  <a:srgbClr val="C9B8FB"/>
+                  <a:srgbClr val="C4B3F5"/>
                 </a:solidFill>
                 <a:latin typeface="Courier New" pitchFamily="34" charset="0"/>
                 <a:ea typeface="Courier New" pitchFamily="34" charset="-122"/>
@@ -3316,7 +3373,7 @@
             <a:r>
               <a:rPr lang="en-US" sz="1500" dirty="0">
                 <a:solidFill>
-                  <a:srgbClr val="C9B8FB"/>
+                  <a:srgbClr val="C4B3F5"/>
                 </a:solidFill>
                 <a:latin typeface="Montserrat" pitchFamily="34" charset="0"/>
                 <a:ea typeface="Montserrat" pitchFamily="34" charset="-122"/>
@@ -3346,7 +3403,7 @@
           </a:prstGeom>
           <a:ln w="12700">
             <a:solidFill>
-              <a:srgbClr val="9B7BE8">
+              <a:srgbClr val="8F72E6">
                 <a:alpha val="60000"/>
               </a:srgbClr>
             </a:solidFill>
@@ -3381,7 +3438,7 @@
             <a:r>
               <a:rPr lang="en-US" sz="900" dirty="0">
                 <a:solidFill>
-                  <a:srgbClr val="C9B8FB"/>
+                  <a:srgbClr val="C4B3F5"/>
                 </a:solidFill>
                 <a:latin typeface="Courier New" pitchFamily="34" charset="0"/>
                 <a:ea typeface="Courier New" pitchFamily="34" charset="-122"/>
@@ -3411,7 +3468,7 @@
           </a:prstGeom>
           <a:ln w="12700">
             <a:solidFill>
-              <a:srgbClr val="9B7BE8">
+              <a:srgbClr val="8F72E6">
                 <a:alpha val="60000"/>
               </a:srgbClr>
             </a:solidFill>
@@ -3446,7 +3503,7 @@
             <a:r>
               <a:rPr lang="en-US" sz="900" dirty="0">
                 <a:solidFill>
-                  <a:srgbClr val="C9B8FB"/>
+                  <a:srgbClr val="C4B3F5"/>
                 </a:solidFill>
                 <a:latin typeface="Courier New" pitchFamily="34" charset="0"/>
                 <a:ea typeface="Courier New" pitchFamily="34" charset="-122"/>
@@ -3537,7 +3594,7 @@
           </a:prstGeom>
           <a:ln w="12700">
             <a:solidFill>
-              <a:srgbClr val="9B7BE8">
+              <a:srgbClr val="8F72E6">
                 <a:alpha val="60000"/>
               </a:srgbClr>
             </a:solidFill>
@@ -3572,7 +3629,7 @@
             <a:r>
               <a:rPr lang="en-US" sz="900" dirty="0">
                 <a:solidFill>
-                  <a:srgbClr val="C9B8FB"/>
+                  <a:srgbClr val="C4B3F5"/>
                 </a:solidFill>
                 <a:latin typeface="Courier New" pitchFamily="34" charset="0"/>
                 <a:ea typeface="Courier New" pitchFamily="34" charset="-122"/>
@@ -3602,7 +3659,7 @@
           </a:prstGeom>
           <a:ln w="12700">
             <a:solidFill>
-              <a:srgbClr val="9B7BE8">
+              <a:srgbClr val="8F72E6">
                 <a:alpha val="60000"/>
               </a:srgbClr>
             </a:solidFill>
@@ -3637,7 +3694,7 @@
             <a:r>
               <a:rPr lang="en-US" sz="900" dirty="0">
                 <a:solidFill>
-                  <a:srgbClr val="C9B8FB"/>
+                  <a:srgbClr val="C4B3F5"/>
                 </a:solidFill>
                 <a:latin typeface="Courier New" pitchFamily="34" charset="0"/>
                 <a:ea typeface="Courier New" pitchFamily="34" charset="-122"/>
@@ -3667,7 +3724,7 @@
           </a:prstGeom>
           <a:ln w="12700">
             <a:solidFill>
-              <a:srgbClr val="9B7BE8">
+              <a:srgbClr val="8F72E6">
                 <a:alpha val="60000"/>
               </a:srgbClr>
             </a:solidFill>
@@ -3702,7 +3759,7 @@
             <a:r>
               <a:rPr lang="en-US" sz="900" dirty="0">
                 <a:solidFill>
-                  <a:srgbClr val="C9B8FB"/>
+                  <a:srgbClr val="C4B3F5"/>
                 </a:solidFill>
                 <a:latin typeface="Courier New" pitchFamily="34" charset="0"/>
                 <a:ea typeface="Courier New" pitchFamily="34" charset="-122"/>
@@ -3766,7 +3823,7 @@
             <a:r>
               <a:rPr lang="en-US" sz="2600" b="1" dirty="0">
                 <a:solidFill>
-                  <a:srgbClr val="C9A6FF"/>
+                  <a:srgbClr val="A98BFF"/>
                 </a:solidFill>
                 <a:latin typeface="Courier New" pitchFamily="34" charset="0"/>
                 <a:ea typeface="Courier New" pitchFamily="34" charset="-122"/>
@@ -3834,9 +3891,14 @@
             </a:avLst>
           </a:prstGeom>
           <a:solidFill>
-            <a:srgbClr val="C9A6FF"/>
+            <a:srgbClr val="1A0B3D"/>
           </a:solidFill>
-          <a:ln/>
+          <a:ln w="12700">
+            <a:solidFill>
+              <a:srgbClr val="5A05F4"/>
+            </a:solidFill>
+            <a:prstDash val="solid"/>
+          </a:ln>
         </p:spPr>
       </p:sp>
       <p:sp>
@@ -3866,7 +3928,7 @@
             <a:r>
               <a:rPr lang="en-US" sz="900" b="1" spc="100" kern="0" dirty="0">
                 <a:solidFill>
-                  <a:srgbClr val="1C1140"/>
+                  <a:srgbClr val="A98BFF"/>
                 </a:solidFill>
                 <a:latin typeface="Courier New" pitchFamily="34" charset="0"/>
                 <a:ea typeface="Courier New" pitchFamily="34" charset="-122"/>
@@ -3919,9 +3981,14 @@
             </a:avLst>
           </a:prstGeom>
           <a:solidFill>
-            <a:srgbClr val="2A2010"/>
+            <a:srgbClr val="0B1A38"/>
           </a:solidFill>
-          <a:ln/>
+          <a:ln w="12700">
+            <a:solidFill>
+              <a:srgbClr val="6BA0F8"/>
+            </a:solidFill>
+            <a:prstDash val="solid"/>
+          </a:ln>
         </p:spPr>
       </p:sp>
       <p:sp>
@@ -3939,7 +4006,7 @@
             <a:avLst/>
           </a:prstGeom>
           <a:solidFill>
-            <a:srgbClr val="E8A857"/>
+            <a:srgbClr val="5A05F4"/>
           </a:solidFill>
           <a:ln/>
         </p:spPr>
@@ -3971,7 +4038,7 @@
             <a:r>
               <a:rPr lang="en-US" sz="1200" b="1" dirty="0">
                 <a:solidFill>
-                  <a:srgbClr val="2A2010"/>
+                  <a:srgbClr val="FFFFFF"/>
                 </a:solidFill>
                 <a:latin typeface="Courier New" pitchFamily="34" charset="0"/>
                 <a:ea typeface="Courier New" pitchFamily="34" charset="-122"/>
@@ -4010,7 +4077,7 @@
             <a:r>
               <a:rPr lang="en-US" sz="1450" b="1" dirty="0">
                 <a:solidFill>
-                  <a:srgbClr val="E8A857"/>
+                  <a:srgbClr val="6BA0F8"/>
                 </a:solidFill>
                 <a:latin typeface="Montserrat" pitchFamily="34" charset="0"/>
                 <a:ea typeface="Montserrat" pitchFamily="34" charset="-122"/>
@@ -4052,7 +4119,7 @@
             <a:r>
               <a:rPr lang="en-US" sz="1200" dirty="0">
                 <a:solidFill>
-                  <a:srgbClr val="FFFFFF"/>
+                  <a:srgbClr val="C9C4D6"/>
                 </a:solidFill>
                 <a:latin typeface="Montserrat" pitchFamily="34" charset="0"/>
                 <a:ea typeface="Montserrat" pitchFamily="34" charset="-122"/>
@@ -4081,9 +4148,14 @@
             </a:avLst>
           </a:prstGeom>
           <a:solidFill>
-            <a:srgbClr val="2A2010"/>
+            <a:srgbClr val="0B1A38"/>
           </a:solidFill>
-          <a:ln/>
+          <a:ln w="12700">
+            <a:solidFill>
+              <a:srgbClr val="6BA0F8"/>
+            </a:solidFill>
+            <a:prstDash val="solid"/>
+          </a:ln>
         </p:spPr>
       </p:sp>
       <p:sp>
@@ -4101,7 +4173,7 @@
             <a:avLst/>
           </a:prstGeom>
           <a:solidFill>
-            <a:srgbClr val="E8A857"/>
+            <a:srgbClr val="5A05F4"/>
           </a:solidFill>
           <a:ln/>
         </p:spPr>
@@ -4133,7 +4205,7 @@
             <a:r>
               <a:rPr lang="en-US" sz="1200" b="1" dirty="0">
                 <a:solidFill>
-                  <a:srgbClr val="2A2010"/>
+                  <a:srgbClr val="FFFFFF"/>
                 </a:solidFill>
                 <a:latin typeface="Courier New" pitchFamily="34" charset="0"/>
                 <a:ea typeface="Courier New" pitchFamily="34" charset="-122"/>
@@ -4172,7 +4244,7 @@
             <a:r>
               <a:rPr lang="en-US" sz="1450" b="1" dirty="0">
                 <a:solidFill>
-                  <a:srgbClr val="E8A857"/>
+                  <a:srgbClr val="6BA0F8"/>
                 </a:solidFill>
                 <a:latin typeface="Montserrat" pitchFamily="34" charset="0"/>
                 <a:ea typeface="Montserrat" pitchFamily="34" charset="-122"/>
@@ -4214,7 +4286,7 @@
             <a:r>
               <a:rPr lang="en-US" sz="1200" dirty="0">
                 <a:solidFill>
-                  <a:srgbClr val="FFFFFF"/>
+                  <a:srgbClr val="C9C4D6"/>
                 </a:solidFill>
                 <a:latin typeface="Montserrat" pitchFamily="34" charset="0"/>
                 <a:ea typeface="Montserrat" pitchFamily="34" charset="-122"/>
@@ -4243,9 +4315,14 @@
             </a:avLst>
           </a:prstGeom>
           <a:solidFill>
-            <a:srgbClr val="2A2010"/>
+            <a:srgbClr val="0B1A38"/>
           </a:solidFill>
-          <a:ln/>
+          <a:ln w="12700">
+            <a:solidFill>
+              <a:srgbClr val="6BA0F8"/>
+            </a:solidFill>
+            <a:prstDash val="solid"/>
+          </a:ln>
         </p:spPr>
       </p:sp>
       <p:sp>
@@ -4263,7 +4340,7 @@
             <a:avLst/>
           </a:prstGeom>
           <a:solidFill>
-            <a:srgbClr val="E8A857"/>
+            <a:srgbClr val="5A05F4"/>
           </a:solidFill>
           <a:ln/>
         </p:spPr>
@@ -4295,7 +4372,7 @@
             <a:r>
               <a:rPr lang="en-US" sz="1200" b="1" dirty="0">
                 <a:solidFill>
-                  <a:srgbClr val="2A2010"/>
+                  <a:srgbClr val="FFFFFF"/>
                 </a:solidFill>
                 <a:latin typeface="Courier New" pitchFamily="34" charset="0"/>
                 <a:ea typeface="Courier New" pitchFamily="34" charset="-122"/>
@@ -4334,7 +4411,7 @@
             <a:r>
               <a:rPr lang="en-US" sz="1450" b="1" dirty="0">
                 <a:solidFill>
-                  <a:srgbClr val="E8A857"/>
+                  <a:srgbClr val="6BA0F8"/>
                 </a:solidFill>
                 <a:latin typeface="Montserrat" pitchFamily="34" charset="0"/>
                 <a:ea typeface="Montserrat" pitchFamily="34" charset="-122"/>
@@ -4376,7 +4453,7 @@
             <a:r>
               <a:rPr lang="en-US" sz="1200" dirty="0">
                 <a:solidFill>
-                  <a:srgbClr val="FFFFFF"/>
+                  <a:srgbClr val="C9C4D6"/>
                 </a:solidFill>
                 <a:latin typeface="Montserrat" pitchFamily="34" charset="0"/>
                 <a:ea typeface="Montserrat" pitchFamily="34" charset="-122"/>
@@ -4482,7 +4559,7 @@
             <a:lvl1pPr>
               <a:defRPr sz="850">
                 <a:solidFill>
-                  <a:srgbClr val="8A82A0"/>
+                  <a:srgbClr val="9A94AA"/>
                 </a:solidFill>
                 <a:latin typeface="Courier New"/>
                 <a:ea typeface="Courier New"/>
@@ -4552,7 +4629,7 @@
             <a:r>
               <a:rPr lang="en-US" sz="2600" b="1" dirty="0">
                 <a:solidFill>
-                  <a:srgbClr val="C9A6FF"/>
+                  <a:srgbClr val="A98BFF"/>
                 </a:solidFill>
                 <a:latin typeface="Courier New" pitchFamily="34" charset="0"/>
                 <a:ea typeface="Courier New" pitchFamily="34" charset="-122"/>
@@ -4620,9 +4697,14 @@
             </a:avLst>
           </a:prstGeom>
           <a:solidFill>
-            <a:srgbClr val="C9A6FF"/>
+            <a:srgbClr val="1A0B3D"/>
           </a:solidFill>
-          <a:ln/>
+          <a:ln w="12700">
+            <a:solidFill>
+              <a:srgbClr val="5A05F4"/>
+            </a:solidFill>
+            <a:prstDash val="solid"/>
+          </a:ln>
         </p:spPr>
       </p:sp>
       <p:sp>
@@ -4652,7 +4734,7 @@
             <a:r>
               <a:rPr lang="en-US" sz="900" b="1" spc="100" kern="0" dirty="0">
                 <a:solidFill>
-                  <a:srgbClr val="1C1140"/>
+                  <a:srgbClr val="A98BFF"/>
                 </a:solidFill>
                 <a:latin typeface="Courier New" pitchFamily="34" charset="0"/>
                 <a:ea typeface="Courier New" pitchFamily="34" charset="-122"/>
@@ -4705,9 +4787,14 @@
             </a:avLst>
           </a:prstGeom>
           <a:solidFill>
-            <a:srgbClr val="1C1140"/>
+            <a:srgbClr val="1A0B3D"/>
           </a:solidFill>
-          <a:ln/>
+          <a:ln w="12700">
+            <a:solidFill>
+              <a:srgbClr val="5A05F4"/>
+            </a:solidFill>
+            <a:prstDash val="solid"/>
+          </a:ln>
         </p:spPr>
       </p:sp>
       <p:sp>
@@ -4737,7 +4824,7 @@
             <a:r>
               <a:rPr lang="en-US" sz="2600" b="1" dirty="0">
                 <a:solidFill>
-                  <a:srgbClr val="C9A6FF"/>
+                  <a:srgbClr val="A98BFF"/>
                 </a:solidFill>
                 <a:latin typeface="Montserrat" pitchFamily="34" charset="0"/>
                 <a:ea typeface="Montserrat" pitchFamily="34" charset="-122"/>
@@ -4776,7 +4863,7 @@
             <a:r>
               <a:rPr lang="en-US" sz="1150" dirty="0">
                 <a:solidFill>
-                  <a:srgbClr val="C9A6FF"/>
+                  <a:srgbClr val="C9C4D6"/>
                 </a:solidFill>
                 <a:latin typeface="Montserrat" pitchFamily="34" charset="0"/>
                 <a:ea typeface="Montserrat" pitchFamily="34" charset="-122"/>
@@ -4805,11 +4892,11 @@
             </a:avLst>
           </a:prstGeom>
           <a:solidFill>
-            <a:srgbClr val="17141F"/>
+            <a:srgbClr val="000000"/>
           </a:solidFill>
           <a:ln w="12700">
             <a:solidFill>
-              <a:srgbClr val="2E2A3A"/>
+              <a:srgbClr val="5E4F85"/>
             </a:solidFill>
             <a:prstDash val="solid"/>
           </a:ln>
@@ -4884,7 +4971,7 @@
             <a:r>
               <a:rPr lang="en-US" sz="1200" dirty="0">
                 <a:solidFill>
-                  <a:srgbClr val="AFA9BE"/>
+                  <a:srgbClr val="C9C4D6"/>
                 </a:solidFill>
                 <a:latin typeface="Montserrat" pitchFamily="34" charset="0"/>
                 <a:ea typeface="Montserrat" pitchFamily="34" charset="-122"/>
@@ -4913,11 +5000,11 @@
             </a:avLst>
           </a:prstGeom>
           <a:solidFill>
-            <a:srgbClr val="17141F"/>
+            <a:srgbClr val="000000"/>
           </a:solidFill>
           <a:ln w="12700">
             <a:solidFill>
-              <a:srgbClr val="2E2A3A"/>
+              <a:srgbClr val="5E4F85"/>
             </a:solidFill>
             <a:prstDash val="solid"/>
           </a:ln>
@@ -4992,7 +5079,7 @@
             <a:r>
               <a:rPr lang="en-US" sz="1200" dirty="0">
                 <a:solidFill>
-                  <a:srgbClr val="AFA9BE"/>
+                  <a:srgbClr val="C9C4D6"/>
                 </a:solidFill>
                 <a:latin typeface="Montserrat" pitchFamily="34" charset="0"/>
                 <a:ea typeface="Montserrat" pitchFamily="34" charset="-122"/>
@@ -5021,11 +5108,11 @@
             </a:avLst>
           </a:prstGeom>
           <a:solidFill>
-            <a:srgbClr val="17141F"/>
+            <a:srgbClr val="000000"/>
           </a:solidFill>
           <a:ln w="12700">
             <a:solidFill>
-              <a:srgbClr val="2E2A3A"/>
+              <a:srgbClr val="5E4F85"/>
             </a:solidFill>
             <a:prstDash val="solid"/>
           </a:ln>
@@ -5100,7 +5187,7 @@
             <a:r>
               <a:rPr lang="en-US" sz="1200" dirty="0">
                 <a:solidFill>
-                  <a:srgbClr val="AFA9BE"/>
+                  <a:srgbClr val="C9C4D6"/>
                 </a:solidFill>
                 <a:latin typeface="Montserrat" pitchFamily="34" charset="0"/>
                 <a:ea typeface="Montserrat" pitchFamily="34" charset="-122"/>
@@ -5232,11 +5319,11 @@
             </a:avLst>
           </a:prstGeom>
           <a:solidFill>
-            <a:srgbClr val="17141F"/>
+            <a:srgbClr val="000000"/>
           </a:solidFill>
           <a:ln w="12700">
             <a:solidFill>
-              <a:srgbClr val="2E2A3A"/>
+              <a:srgbClr val="5E4F85"/>
             </a:solidFill>
             <a:prstDash val="solid"/>
           </a:ln>
@@ -5353,7 +5440,7 @@
             <a:lvl1pPr>
               <a:defRPr sz="850">
                 <a:solidFill>
-                  <a:srgbClr val="8A82A0"/>
+                  <a:srgbClr val="9A94AA"/>
                 </a:solidFill>
                 <a:latin typeface="Courier New"/>
                 <a:ea typeface="Courier New"/>
@@ -5423,7 +5510,7 @@
             <a:r>
               <a:rPr lang="en-US" sz="2600" b="1" dirty="0">
                 <a:solidFill>
-                  <a:srgbClr val="C9A6FF"/>
+                  <a:srgbClr val="A98BFF"/>
                 </a:solidFill>
                 <a:latin typeface="Courier New" pitchFamily="34" charset="0"/>
                 <a:ea typeface="Courier New" pitchFamily="34" charset="-122"/>
@@ -5491,9 +5578,14 @@
             </a:avLst>
           </a:prstGeom>
           <a:solidFill>
-            <a:srgbClr val="C9A6FF"/>
+            <a:srgbClr val="1A0B3D"/>
           </a:solidFill>
-          <a:ln/>
+          <a:ln w="12700">
+            <a:solidFill>
+              <a:srgbClr val="5A05F4"/>
+            </a:solidFill>
+            <a:prstDash val="solid"/>
+          </a:ln>
         </p:spPr>
       </p:sp>
       <p:sp>
@@ -5523,7 +5615,7 @@
             <a:r>
               <a:rPr lang="en-US" sz="900" b="1" spc="100" kern="0" dirty="0">
                 <a:solidFill>
-                  <a:srgbClr val="1C1140"/>
+                  <a:srgbClr val="A98BFF"/>
                 </a:solidFill>
                 <a:latin typeface="Courier New" pitchFamily="34" charset="0"/>
                 <a:ea typeface="Courier New" pitchFamily="34" charset="-122"/>
@@ -5598,7 +5690,7 @@
                       <a:r>
                         <a:rPr lang="en-US" sz="900" b="1" spc="100" kern="0" dirty="0">
                           <a:solidFill>
-                            <a:srgbClr val="AFA9BE"/>
+                            <a:srgbClr val="C9C4D6"/>
                           </a:solidFill>
                           <a:latin typeface="Courier New" pitchFamily="34" charset="0"/>
                           <a:ea typeface="Courier New" pitchFamily="34" charset="-122"/>
@@ -5616,7 +5708,7 @@
                   <a:tcPr marL="73152" marR="73152" marT="73152" marB="73152" anchor="ctr">
                     <a:lnL w="6350" cap="flat" cmpd="sng" algn="ctr">
                       <a:solidFill>
-                        <a:srgbClr val="2E2A3A"/>
+                        <a:srgbClr val="5E4F85"/>
                       </a:solidFill>
                       <a:prstDash val="solid"/>
                       <a:round/>
@@ -5625,7 +5717,7 @@
                     </a:lnL>
                     <a:lnR w="6350" cap="flat" cmpd="sng" algn="ctr">
                       <a:solidFill>
-                        <a:srgbClr val="2E2A3A"/>
+                        <a:srgbClr val="5E4F85"/>
                       </a:solidFill>
                       <a:prstDash val="solid"/>
                       <a:round/>
@@ -5634,7 +5726,7 @@
                     </a:lnR>
                     <a:lnT w="6350" cap="flat" cmpd="sng" algn="ctr">
                       <a:solidFill>
-                        <a:srgbClr val="2E2A3A"/>
+                        <a:srgbClr val="5E4F85"/>
                       </a:solidFill>
                       <a:prstDash val="solid"/>
                       <a:round/>
@@ -5643,7 +5735,7 @@
                     </a:lnT>
                     <a:lnB w="6350" cap="flat" cmpd="sng" algn="ctr">
                       <a:solidFill>
-                        <a:srgbClr val="2E2A3A"/>
+                        <a:srgbClr val="5E4F85"/>
                       </a:solidFill>
                       <a:prstDash val="solid"/>
                       <a:round/>
@@ -5651,7 +5743,7 @@
                       <a:tailEnd type="none" w="med" len="med"/>
                     </a:lnB>
                     <a:solidFill>
-                      <a:srgbClr val="1F1B2A"/>
+                      <a:srgbClr val="1A0B3D"/>
                     </a:solidFill>
                   </a:tcPr>
                 </a:tc>
@@ -5666,7 +5758,7 @@
                       <a:r>
                         <a:rPr lang="en-US" sz="900" b="1" spc="100" kern="0" dirty="0">
                           <a:solidFill>
-                            <a:srgbClr val="AFA9BE"/>
+                            <a:srgbClr val="C9C4D6"/>
                           </a:solidFill>
                           <a:latin typeface="Courier New" pitchFamily="34" charset="0"/>
                           <a:ea typeface="Courier New" pitchFamily="34" charset="-122"/>
@@ -5684,7 +5776,7 @@
                   <a:tcPr marL="73152" marR="73152" marT="73152" marB="73152" anchor="ctr">
                     <a:lnL w="6350" cap="flat" cmpd="sng" algn="ctr">
                       <a:solidFill>
-                        <a:srgbClr val="2E2A3A"/>
+                        <a:srgbClr val="5E4F85"/>
                       </a:solidFill>
                       <a:prstDash val="solid"/>
                       <a:round/>
@@ -5693,7 +5785,7 @@
                     </a:lnL>
                     <a:lnR w="6350" cap="flat" cmpd="sng" algn="ctr">
                       <a:solidFill>
-                        <a:srgbClr val="2E2A3A"/>
+                        <a:srgbClr val="5E4F85"/>
                       </a:solidFill>
                       <a:prstDash val="solid"/>
                       <a:round/>
@@ -5702,7 +5794,7 @@
                     </a:lnR>
                     <a:lnT w="6350" cap="flat" cmpd="sng" algn="ctr">
                       <a:solidFill>
-                        <a:srgbClr val="2E2A3A"/>
+                        <a:srgbClr val="5E4F85"/>
                       </a:solidFill>
                       <a:prstDash val="solid"/>
                       <a:round/>
@@ -5711,7 +5803,7 @@
                     </a:lnT>
                     <a:lnB w="6350" cap="flat" cmpd="sng" algn="ctr">
                       <a:solidFill>
-                        <a:srgbClr val="2E2A3A"/>
+                        <a:srgbClr val="5E4F85"/>
                       </a:solidFill>
                       <a:prstDash val="solid"/>
                       <a:round/>
@@ -5719,7 +5811,7 @@
                       <a:tailEnd type="none" w="med" len="med"/>
                     </a:lnB>
                     <a:solidFill>
-                      <a:srgbClr val="1F1B2A"/>
+                      <a:srgbClr val="1A0B3D"/>
                     </a:solidFill>
                   </a:tcPr>
                 </a:tc>
@@ -5734,7 +5826,7 @@
                       <a:r>
                         <a:rPr lang="en-US" sz="900" b="1" spc="100" kern="0" dirty="0">
                           <a:solidFill>
-                            <a:srgbClr val="AFA9BE"/>
+                            <a:srgbClr val="C9C4D6"/>
                           </a:solidFill>
                           <a:latin typeface="Courier New" pitchFamily="34" charset="0"/>
                           <a:ea typeface="Courier New" pitchFamily="34" charset="-122"/>
@@ -5752,7 +5844,7 @@
                   <a:tcPr marL="73152" marR="73152" marT="73152" marB="73152" anchor="ctr">
                     <a:lnL w="6350" cap="flat" cmpd="sng" algn="ctr">
                       <a:solidFill>
-                        <a:srgbClr val="2E2A3A"/>
+                        <a:srgbClr val="5E4F85"/>
                       </a:solidFill>
                       <a:prstDash val="solid"/>
                       <a:round/>
@@ -5761,7 +5853,7 @@
                     </a:lnL>
                     <a:lnR w="6350" cap="flat" cmpd="sng" algn="ctr">
                       <a:solidFill>
-                        <a:srgbClr val="2E2A3A"/>
+                        <a:srgbClr val="5E4F85"/>
                       </a:solidFill>
                       <a:prstDash val="solid"/>
                       <a:round/>
@@ -5770,7 +5862,7 @@
                     </a:lnR>
                     <a:lnT w="6350" cap="flat" cmpd="sng" algn="ctr">
                       <a:solidFill>
-                        <a:srgbClr val="2E2A3A"/>
+                        <a:srgbClr val="5E4F85"/>
                       </a:solidFill>
                       <a:prstDash val="solid"/>
                       <a:round/>
@@ -5779,7 +5871,7 @@
                     </a:lnT>
                     <a:lnB w="6350" cap="flat" cmpd="sng" algn="ctr">
                       <a:solidFill>
-                        <a:srgbClr val="2E2A3A"/>
+                        <a:srgbClr val="5E4F85"/>
                       </a:solidFill>
                       <a:prstDash val="solid"/>
                       <a:round/>
@@ -5787,7 +5879,7 @@
                       <a:tailEnd type="none" w="med" len="med"/>
                     </a:lnB>
                     <a:solidFill>
-                      <a:srgbClr val="1F1B2A"/>
+                      <a:srgbClr val="1A0B3D"/>
                     </a:solidFill>
                   </a:tcPr>
                 </a:tc>
@@ -5804,7 +5896,7 @@
                       <a:r>
                         <a:rPr lang="en-US" sz="1150" b="1" dirty="0">
                           <a:solidFill>
-                            <a:srgbClr val="C9A6FF"/>
+                            <a:srgbClr val="A98BFF"/>
                           </a:solidFill>
                           <a:latin typeface="Montserrat" pitchFamily="34" charset="0"/>
                           <a:ea typeface="Montserrat" pitchFamily="34" charset="-122"/>
@@ -5822,7 +5914,7 @@
                   <a:tcPr marL="73152" marR="73152" marT="73152" marB="73152" anchor="ctr">
                     <a:lnL w="6350" cap="flat" cmpd="sng" algn="ctr">
                       <a:solidFill>
-                        <a:srgbClr val="2E2A3A"/>
+                        <a:srgbClr val="5E4F85"/>
                       </a:solidFill>
                       <a:prstDash val="solid"/>
                       <a:round/>
@@ -5831,7 +5923,7 @@
                     </a:lnL>
                     <a:lnR w="6350" cap="flat" cmpd="sng" algn="ctr">
                       <a:solidFill>
-                        <a:srgbClr val="2E2A3A"/>
+                        <a:srgbClr val="5E4F85"/>
                       </a:solidFill>
                       <a:prstDash val="solid"/>
                       <a:round/>
@@ -5840,7 +5932,7 @@
                     </a:lnR>
                     <a:lnT w="6350" cap="flat" cmpd="sng" algn="ctr">
                       <a:solidFill>
-                        <a:srgbClr val="2E2A3A"/>
+                        <a:srgbClr val="5E4F85"/>
                       </a:solidFill>
                       <a:prstDash val="solid"/>
                       <a:round/>
@@ -5849,7 +5941,7 @@
                     </a:lnT>
                     <a:lnB w="6350" cap="flat" cmpd="sng" algn="ctr">
                       <a:solidFill>
-                        <a:srgbClr val="2E2A3A"/>
+                        <a:srgbClr val="5E4F85"/>
                       </a:solidFill>
                       <a:prstDash val="solid"/>
                       <a:round/>
@@ -5857,7 +5949,7 @@
                       <a:tailEnd type="none" w="med" len="med"/>
                     </a:lnB>
                     <a:solidFill>
-                      <a:srgbClr val="1C1140"/>
+                      <a:srgbClr val="1A0B3D"/>
                     </a:solidFill>
                   </a:tcPr>
                 </a:tc>
@@ -5890,7 +5982,7 @@
                   <a:tcPr marL="73152" marR="73152" marT="73152" marB="73152" anchor="ctr">
                     <a:lnL w="6350" cap="flat" cmpd="sng" algn="ctr">
                       <a:solidFill>
-                        <a:srgbClr val="2E2A3A"/>
+                        <a:srgbClr val="5E4F85"/>
                       </a:solidFill>
                       <a:prstDash val="solid"/>
                       <a:round/>
@@ -5899,7 +5991,7 @@
                     </a:lnL>
                     <a:lnR w="6350" cap="flat" cmpd="sng" algn="ctr">
                       <a:solidFill>
-                        <a:srgbClr val="2E2A3A"/>
+                        <a:srgbClr val="5E4F85"/>
                       </a:solidFill>
                       <a:prstDash val="solid"/>
                       <a:round/>
@@ -5908,7 +6000,7 @@
                     </a:lnR>
                     <a:lnT w="6350" cap="flat" cmpd="sng" algn="ctr">
                       <a:solidFill>
-                        <a:srgbClr val="2E2A3A"/>
+                        <a:srgbClr val="5E4F85"/>
                       </a:solidFill>
                       <a:prstDash val="solid"/>
                       <a:round/>
@@ -5917,7 +6009,7 @@
                     </a:lnT>
                     <a:lnB w="6350" cap="flat" cmpd="sng" algn="ctr">
                       <a:solidFill>
-                        <a:srgbClr val="2E2A3A"/>
+                        <a:srgbClr val="5E4F85"/>
                       </a:solidFill>
                       <a:prstDash val="solid"/>
                       <a:round/>
@@ -5925,7 +6017,7 @@
                       <a:tailEnd type="none" w="med" len="med"/>
                     </a:lnB>
                     <a:solidFill>
-                      <a:srgbClr val="1C1140"/>
+                      <a:srgbClr val="1A0B3D"/>
                     </a:solidFill>
                   </a:tcPr>
                 </a:tc>
@@ -5958,7 +6050,7 @@
                   <a:tcPr marL="73152" marR="73152" marT="73152" marB="73152" anchor="ctr">
                     <a:lnL w="6350" cap="flat" cmpd="sng" algn="ctr">
                       <a:solidFill>
-                        <a:srgbClr val="2E2A3A"/>
+                        <a:srgbClr val="5E4F85"/>
                       </a:solidFill>
                       <a:prstDash val="solid"/>
                       <a:round/>
@@ -5967,7 +6059,7 @@
                     </a:lnL>
                     <a:lnR w="6350" cap="flat" cmpd="sng" algn="ctr">
                       <a:solidFill>
-                        <a:srgbClr val="2E2A3A"/>
+                        <a:srgbClr val="5E4F85"/>
                       </a:solidFill>
                       <a:prstDash val="solid"/>
                       <a:round/>
@@ -5976,7 +6068,7 @@
                     </a:lnR>
                     <a:lnT w="6350" cap="flat" cmpd="sng" algn="ctr">
                       <a:solidFill>
-                        <a:srgbClr val="2E2A3A"/>
+                        <a:srgbClr val="5E4F85"/>
                       </a:solidFill>
                       <a:prstDash val="solid"/>
                       <a:round/>
@@ -5985,7 +6077,7 @@
                     </a:lnT>
                     <a:lnB w="6350" cap="flat" cmpd="sng" algn="ctr">
                       <a:solidFill>
-                        <a:srgbClr val="2E2A3A"/>
+                        <a:srgbClr val="5E4F85"/>
                       </a:solidFill>
                       <a:prstDash val="solid"/>
                       <a:round/>
@@ -5993,7 +6085,7 @@
                       <a:tailEnd type="none" w="med" len="med"/>
                     </a:lnB>
                     <a:solidFill>
-                      <a:srgbClr val="1C1140"/>
+                      <a:srgbClr val="1A0B3D"/>
                     </a:solidFill>
                   </a:tcPr>
                 </a:tc>
@@ -6028,7 +6120,7 @@
                   <a:tcPr marL="73152" marR="73152" marT="73152" marB="73152" anchor="ctr">
                     <a:lnL w="6350" cap="flat" cmpd="sng" algn="ctr">
                       <a:solidFill>
-                        <a:srgbClr val="2E2A3A"/>
+                        <a:srgbClr val="5E4F85"/>
                       </a:solidFill>
                       <a:prstDash val="solid"/>
                       <a:round/>
@@ -6037,7 +6129,7 @@
                     </a:lnL>
                     <a:lnR w="6350" cap="flat" cmpd="sng" algn="ctr">
                       <a:solidFill>
-                        <a:srgbClr val="2E2A3A"/>
+                        <a:srgbClr val="5E4F85"/>
                       </a:solidFill>
                       <a:prstDash val="solid"/>
                       <a:round/>
@@ -6046,7 +6138,7 @@
                     </a:lnR>
                     <a:lnT w="6350" cap="flat" cmpd="sng" algn="ctr">
                       <a:solidFill>
-                        <a:srgbClr val="2E2A3A"/>
+                        <a:srgbClr val="5E4F85"/>
                       </a:solidFill>
                       <a:prstDash val="solid"/>
                       <a:round/>
@@ -6055,7 +6147,7 @@
                     </a:lnT>
                     <a:lnB w="6350" cap="flat" cmpd="sng" algn="ctr">
                       <a:solidFill>
-                        <a:srgbClr val="2E2A3A"/>
+                        <a:srgbClr val="5E4F85"/>
                       </a:solidFill>
                       <a:prstDash val="solid"/>
                       <a:round/>
@@ -6063,7 +6155,7 @@
                       <a:tailEnd type="none" w="med" len="med"/>
                     </a:lnB>
                     <a:solidFill>
-                      <a:srgbClr val="17141F"/>
+                      <a:srgbClr val="000000"/>
                     </a:solidFill>
                   </a:tcPr>
                 </a:tc>
@@ -6096,7 +6188,7 @@
                   <a:tcPr marL="73152" marR="73152" marT="73152" marB="73152" anchor="ctr">
                     <a:lnL w="6350" cap="flat" cmpd="sng" algn="ctr">
                       <a:solidFill>
-                        <a:srgbClr val="2E2A3A"/>
+                        <a:srgbClr val="5E4F85"/>
                       </a:solidFill>
                       <a:prstDash val="solid"/>
                       <a:round/>
@@ -6105,7 +6197,7 @@
                     </a:lnL>
                     <a:lnR w="6350" cap="flat" cmpd="sng" algn="ctr">
                       <a:solidFill>
-                        <a:srgbClr val="2E2A3A"/>
+                        <a:srgbClr val="5E4F85"/>
                       </a:solidFill>
                       <a:prstDash val="solid"/>
                       <a:round/>
@@ -6114,7 +6206,7 @@
                     </a:lnR>
                     <a:lnT w="6350" cap="flat" cmpd="sng" algn="ctr">
                       <a:solidFill>
-                        <a:srgbClr val="2E2A3A"/>
+                        <a:srgbClr val="5E4F85"/>
                       </a:solidFill>
                       <a:prstDash val="solid"/>
                       <a:round/>
@@ -6123,7 +6215,7 @@
                     </a:lnT>
                     <a:lnB w="6350" cap="flat" cmpd="sng" algn="ctr">
                       <a:solidFill>
-                        <a:srgbClr val="2E2A3A"/>
+                        <a:srgbClr val="5E4F85"/>
                       </a:solidFill>
                       <a:prstDash val="solid"/>
                       <a:round/>
@@ -6131,7 +6223,7 @@
                       <a:tailEnd type="none" w="med" len="med"/>
                     </a:lnB>
                     <a:solidFill>
-                      <a:srgbClr val="17141F"/>
+                      <a:srgbClr val="000000"/>
                     </a:solidFill>
                   </a:tcPr>
                 </a:tc>
@@ -6164,7 +6256,7 @@
                   <a:tcPr marL="73152" marR="73152" marT="73152" marB="73152" anchor="ctr">
                     <a:lnL w="6350" cap="flat" cmpd="sng" algn="ctr">
                       <a:solidFill>
-                        <a:srgbClr val="2E2A3A"/>
+                        <a:srgbClr val="5E4F85"/>
                       </a:solidFill>
                       <a:prstDash val="solid"/>
                       <a:round/>
@@ -6173,7 +6265,7 @@
                     </a:lnL>
                     <a:lnR w="6350" cap="flat" cmpd="sng" algn="ctr">
                       <a:solidFill>
-                        <a:srgbClr val="2E2A3A"/>
+                        <a:srgbClr val="5E4F85"/>
                       </a:solidFill>
                       <a:prstDash val="solid"/>
                       <a:round/>
@@ -6182,7 +6274,7 @@
                     </a:lnR>
                     <a:lnT w="6350" cap="flat" cmpd="sng" algn="ctr">
                       <a:solidFill>
-                        <a:srgbClr val="2E2A3A"/>
+                        <a:srgbClr val="5E4F85"/>
                       </a:solidFill>
                       <a:prstDash val="solid"/>
                       <a:round/>
@@ -6191,7 +6283,7 @@
                     </a:lnT>
                     <a:lnB w="6350" cap="flat" cmpd="sng" algn="ctr">
                       <a:solidFill>
-                        <a:srgbClr val="2E2A3A"/>
+                        <a:srgbClr val="5E4F85"/>
                       </a:solidFill>
                       <a:prstDash val="solid"/>
                       <a:round/>
@@ -6199,7 +6291,7 @@
                       <a:tailEnd type="none" w="med" len="med"/>
                     </a:lnB>
                     <a:solidFill>
-                      <a:srgbClr val="17141F"/>
+                      <a:srgbClr val="000000"/>
                     </a:solidFill>
                   </a:tcPr>
                 </a:tc>
@@ -6225,9 +6317,14 @@
             </a:avLst>
           </a:prstGeom>
           <a:solidFill>
-            <a:srgbClr val="2E1418"/>
+            <a:srgbClr val="1A0808"/>
           </a:solidFill>
-          <a:ln/>
+          <a:ln w="12700">
+            <a:solidFill>
+              <a:srgbClr val="FF6B6B"/>
+            </a:solidFill>
+            <a:prstDash val="solid"/>
+          </a:ln>
         </p:spPr>
       </p:sp>
       <p:sp>
@@ -6257,7 +6354,7 @@
             <a:r>
               <a:rPr lang="en-US" sz="1450" b="1" dirty="0">
                 <a:solidFill>
-                  <a:srgbClr val="FF7B7B"/>
+                  <a:srgbClr val="FF6B6B"/>
                 </a:solidFill>
                 <a:latin typeface="Montserrat" pitchFamily="34" charset="0"/>
                 <a:ea typeface="Montserrat" pitchFamily="34" charset="-122"/>
@@ -6299,7 +6396,7 @@
             <a:r>
               <a:rPr lang="en-US" sz="1200" dirty="0">
                 <a:solidFill>
-                  <a:srgbClr val="FFFFFF"/>
+                  <a:srgbClr val="C9C4D6"/>
                 </a:solidFill>
                 <a:latin typeface="Montserrat" pitchFamily="34" charset="0"/>
                 <a:ea typeface="Montserrat" pitchFamily="34" charset="-122"/>
@@ -6328,9 +6425,14 @@
             </a:avLst>
           </a:prstGeom>
           <a:solidFill>
-            <a:srgbClr val="2A2010"/>
+            <a:srgbClr val="0B1A38"/>
           </a:solidFill>
-          <a:ln/>
+          <a:ln w="12700">
+            <a:solidFill>
+              <a:srgbClr val="6BA0F8"/>
+            </a:solidFill>
+            <a:prstDash val="solid"/>
+          </a:ln>
         </p:spPr>
       </p:sp>
       <p:sp>
@@ -6360,7 +6462,7 @@
             <a:r>
               <a:rPr lang="en-US" sz="1450" b="1" dirty="0">
                 <a:solidFill>
-                  <a:srgbClr val="E8A857"/>
+                  <a:srgbClr val="6BA0F8"/>
                 </a:solidFill>
                 <a:latin typeface="Montserrat" pitchFamily="34" charset="0"/>
                 <a:ea typeface="Montserrat" pitchFamily="34" charset="-122"/>
@@ -6402,7 +6504,7 @@
             <a:r>
               <a:rPr lang="en-US" sz="1200" dirty="0">
                 <a:solidFill>
-                  <a:srgbClr val="FFFFFF"/>
+                  <a:srgbClr val="C9C4D6"/>
                 </a:solidFill>
                 <a:latin typeface="Montserrat" pitchFamily="34" charset="0"/>
                 <a:ea typeface="Montserrat" pitchFamily="34" charset="-122"/>
@@ -6431,9 +6533,14 @@
             </a:avLst>
           </a:prstGeom>
           <a:solidFill>
-            <a:srgbClr val="102A20"/>
+            <a:srgbClr val="06180F"/>
           </a:solidFill>
-          <a:ln/>
+          <a:ln w="12700">
+            <a:solidFill>
+              <a:srgbClr val="3FCF8E"/>
+            </a:solidFill>
+            <a:prstDash val="solid"/>
+          </a:ln>
         </p:spPr>
       </p:sp>
       <p:sp>
@@ -6463,7 +6570,7 @@
             <a:r>
               <a:rPr lang="en-US" sz="950" b="1" spc="150" kern="0" dirty="0">
                 <a:solidFill>
-                  <a:srgbClr val="5FD6A0"/>
+                  <a:srgbClr val="3FCF8E"/>
                 </a:solidFill>
                 <a:latin typeface="Courier New" pitchFamily="34" charset="0"/>
                 <a:ea typeface="Courier New" pitchFamily="34" charset="-122"/>
@@ -6547,7 +6654,7 @@
             <a:lvl1pPr>
               <a:defRPr sz="850">
                 <a:solidFill>
-                  <a:srgbClr val="8A82A0"/>
+                  <a:srgbClr val="9A94AA"/>
                 </a:solidFill>
                 <a:latin typeface="Courier New"/>
                 <a:ea typeface="Courier New"/>
@@ -6617,7 +6724,7 @@
             <a:r>
               <a:rPr lang="en-US" sz="2600" b="1" dirty="0">
                 <a:solidFill>
-                  <a:srgbClr val="C9A6FF"/>
+                  <a:srgbClr val="A98BFF"/>
                 </a:solidFill>
                 <a:latin typeface="Courier New" pitchFamily="34" charset="0"/>
                 <a:ea typeface="Courier New" pitchFamily="34" charset="-122"/>
@@ -6685,9 +6792,14 @@
             </a:avLst>
           </a:prstGeom>
           <a:solidFill>
-            <a:srgbClr val="C9A6FF"/>
+            <a:srgbClr val="1A0B3D"/>
           </a:solidFill>
-          <a:ln/>
+          <a:ln w="12700">
+            <a:solidFill>
+              <a:srgbClr val="5A05F4"/>
+            </a:solidFill>
+            <a:prstDash val="solid"/>
+          </a:ln>
         </p:spPr>
       </p:sp>
       <p:sp>
@@ -6717,7 +6829,7 @@
             <a:r>
               <a:rPr lang="en-US" sz="900" b="1" spc="100" kern="0" dirty="0">
                 <a:solidFill>
-                  <a:srgbClr val="1C1140"/>
+                  <a:srgbClr val="A98BFF"/>
                 </a:solidFill>
                 <a:latin typeface="Courier New" pitchFamily="34" charset="0"/>
                 <a:ea typeface="Courier New" pitchFamily="34" charset="-122"/>
@@ -6770,9 +6882,14 @@
             </a:avLst>
           </a:prstGeom>
           <a:solidFill>
-            <a:srgbClr val="102A20"/>
+            <a:srgbClr val="06180F"/>
           </a:solidFill>
-          <a:ln/>
+          <a:ln w="12700">
+            <a:solidFill>
+              <a:srgbClr val="3FCF8E"/>
+            </a:solidFill>
+            <a:prstDash val="solid"/>
+          </a:ln>
         </p:spPr>
       </p:sp>
       <p:sp>
@@ -6802,7 +6919,7 @@
             <a:r>
               <a:rPr lang="en-US" sz="1450" b="1" dirty="0">
                 <a:solidFill>
-                  <a:srgbClr val="5FD6A0"/>
+                  <a:srgbClr val="3FCF8E"/>
                 </a:solidFill>
                 <a:latin typeface="Montserrat" pitchFamily="34" charset="0"/>
                 <a:ea typeface="Montserrat" pitchFamily="34" charset="-122"/>
@@ -6844,7 +6961,7 @@
             <a:r>
               <a:rPr lang="en-US" sz="1200" dirty="0">
                 <a:solidFill>
-                  <a:srgbClr val="FFFFFF"/>
+                  <a:srgbClr val="C9C4D6"/>
                 </a:solidFill>
                 <a:latin typeface="Montserrat" pitchFamily="34" charset="0"/>
                 <a:ea typeface="Montserrat" pitchFamily="34" charset="-122"/>
@@ -6873,9 +6990,14 @@
             </a:avLst>
           </a:prstGeom>
           <a:solidFill>
-            <a:srgbClr val="2E1418"/>
+            <a:srgbClr val="1A0808"/>
           </a:solidFill>
-          <a:ln/>
+          <a:ln w="12700">
+            <a:solidFill>
+              <a:srgbClr val="FF6B6B"/>
+            </a:solidFill>
+            <a:prstDash val="solid"/>
+          </a:ln>
         </p:spPr>
       </p:sp>
       <p:sp>
@@ -6905,7 +7027,7 @@
             <a:r>
               <a:rPr lang="en-US" sz="1450" b="1" dirty="0">
                 <a:solidFill>
-                  <a:srgbClr val="FF7B7B"/>
+                  <a:srgbClr val="FF6B6B"/>
                 </a:solidFill>
                 <a:latin typeface="Montserrat" pitchFamily="34" charset="0"/>
                 <a:ea typeface="Montserrat" pitchFamily="34" charset="-122"/>
@@ -6947,7 +7069,7 @@
             <a:r>
               <a:rPr lang="en-US" sz="1200" dirty="0">
                 <a:solidFill>
-                  <a:srgbClr val="FFFFFF"/>
+                  <a:srgbClr val="C9C4D6"/>
                 </a:solidFill>
                 <a:latin typeface="Montserrat" pitchFamily="34" charset="0"/>
                 <a:ea typeface="Montserrat" pitchFamily="34" charset="-122"/>
@@ -6976,9 +7098,14 @@
             </a:avLst>
           </a:prstGeom>
           <a:solidFill>
-            <a:srgbClr val="102A20"/>
+            <a:srgbClr val="06180F"/>
           </a:solidFill>
-          <a:ln/>
+          <a:ln w="12700">
+            <a:solidFill>
+              <a:srgbClr val="3FCF8E"/>
+            </a:solidFill>
+            <a:prstDash val="solid"/>
+          </a:ln>
         </p:spPr>
       </p:sp>
       <p:sp>
@@ -7008,7 +7135,7 @@
             <a:r>
               <a:rPr lang="en-US" sz="950" b="1" spc="150" kern="0" dirty="0">
                 <a:solidFill>
-                  <a:srgbClr val="5FD6A0"/>
+                  <a:srgbClr val="3FCF8E"/>
                 </a:solidFill>
                 <a:latin typeface="Courier New" pitchFamily="34" charset="0"/>
                 <a:ea typeface="Courier New" pitchFamily="34" charset="-122"/>
@@ -7079,9 +7206,14 @@
             </a:avLst>
           </a:prstGeom>
           <a:solidFill>
-            <a:srgbClr val="2A2010"/>
+            <a:srgbClr val="0B1A38"/>
           </a:solidFill>
-          <a:ln/>
+          <a:ln w="12700">
+            <a:solidFill>
+              <a:srgbClr val="6BA0F8"/>
+            </a:solidFill>
+            <a:prstDash val="solid"/>
+          </a:ln>
         </p:spPr>
       </p:sp>
       <p:sp>
@@ -7156,7 +7288,7 @@
             <a:lvl1pPr>
               <a:defRPr sz="850">
                 <a:solidFill>
-                  <a:srgbClr val="8A82A0"/>
+                  <a:srgbClr val="9A94AA"/>
                 </a:solidFill>
                 <a:latin typeface="Courier New"/>
                 <a:ea typeface="Courier New"/>
@@ -7226,7 +7358,7 @@
             <a:r>
               <a:rPr lang="en-US" sz="2600" b="1" dirty="0">
                 <a:solidFill>
-                  <a:srgbClr val="C9A6FF"/>
+                  <a:srgbClr val="A98BFF"/>
                 </a:solidFill>
                 <a:latin typeface="Courier New" pitchFamily="34" charset="0"/>
                 <a:ea typeface="Courier New" pitchFamily="34" charset="-122"/>
@@ -7294,9 +7426,14 @@
             </a:avLst>
           </a:prstGeom>
           <a:solidFill>
-            <a:srgbClr val="C9A6FF"/>
+            <a:srgbClr val="1A0B3D"/>
           </a:solidFill>
-          <a:ln/>
+          <a:ln w="12700">
+            <a:solidFill>
+              <a:srgbClr val="5A05F4"/>
+            </a:solidFill>
+            <a:prstDash val="solid"/>
+          </a:ln>
         </p:spPr>
       </p:sp>
       <p:sp>
@@ -7326,7 +7463,7 @@
             <a:r>
               <a:rPr lang="en-US" sz="900" b="1" spc="100" kern="0" dirty="0">
                 <a:solidFill>
-                  <a:srgbClr val="1C1140"/>
+                  <a:srgbClr val="A98BFF"/>
                 </a:solidFill>
                 <a:latin typeface="Courier New" pitchFamily="34" charset="0"/>
                 <a:ea typeface="Courier New" pitchFamily="34" charset="-122"/>
@@ -7379,9 +7516,14 @@
             </a:avLst>
           </a:prstGeom>
           <a:solidFill>
-            <a:srgbClr val="2E1418"/>
+            <a:srgbClr val="1A0808"/>
           </a:solidFill>
-          <a:ln/>
+          <a:ln w="12700">
+            <a:solidFill>
+              <a:srgbClr val="FF6B6B"/>
+            </a:solidFill>
+            <a:prstDash val="solid"/>
+          </a:ln>
         </p:spPr>
       </p:sp>
       <p:sp>
@@ -7411,7 +7553,7 @@
             <a:r>
               <a:rPr lang="en-US" sz="1050" b="1" dirty="0">
                 <a:solidFill>
-                  <a:srgbClr val="FF7B7B"/>
+                  <a:srgbClr val="FF6B6B"/>
                 </a:solidFill>
                 <a:latin typeface="Courier New" pitchFamily="34" charset="0"/>
                 <a:ea typeface="Courier New" pitchFamily="34" charset="-122"/>
@@ -7440,7 +7582,7 @@
           <a:noFill/>
           <a:ln w="15875">
             <a:solidFill>
-              <a:srgbClr val="9B7BE8"/>
+              <a:srgbClr val="8F72E6"/>
             </a:solidFill>
             <a:prstDash val="solid"/>
           </a:ln>
@@ -7461,7 +7603,7 @@
             <a:avLst/>
           </a:prstGeom>
           <a:solidFill>
-            <a:srgbClr val="9B7BE8"/>
+            <a:srgbClr val="8F72E6"/>
           </a:solidFill>
           <a:ln/>
         </p:spPr>
@@ -7483,9 +7625,14 @@
             </a:avLst>
           </a:prstGeom>
           <a:solidFill>
-            <a:srgbClr val="2A2010"/>
+            <a:srgbClr val="0B1A38"/>
           </a:solidFill>
-          <a:ln/>
+          <a:ln w="12700">
+            <a:solidFill>
+              <a:srgbClr val="6BA0F8"/>
+            </a:solidFill>
+            <a:prstDash val="solid"/>
+          </a:ln>
         </p:spPr>
       </p:sp>
       <p:sp>
@@ -7515,7 +7662,7 @@
             <a:r>
               <a:rPr lang="en-US" sz="1050" b="1" dirty="0">
                 <a:solidFill>
-                  <a:srgbClr val="E8A857"/>
+                  <a:srgbClr val="6BA0F8"/>
                 </a:solidFill>
                 <a:latin typeface="Courier New" pitchFamily="34" charset="0"/>
                 <a:ea typeface="Courier New" pitchFamily="34" charset="-122"/>
@@ -7544,7 +7691,7 @@
           <a:noFill/>
           <a:ln w="15875">
             <a:solidFill>
-              <a:srgbClr val="9B7BE8"/>
+              <a:srgbClr val="8F72E6"/>
             </a:solidFill>
             <a:prstDash val="solid"/>
           </a:ln>
@@ -7565,7 +7712,7 @@
             <a:avLst/>
           </a:prstGeom>
           <a:solidFill>
-            <a:srgbClr val="9B7BE8"/>
+            <a:srgbClr val="8F72E6"/>
           </a:solidFill>
           <a:ln/>
         </p:spPr>
@@ -7587,9 +7734,14 @@
             </a:avLst>
           </a:prstGeom>
           <a:solidFill>
-            <a:srgbClr val="2E1418"/>
+            <a:srgbClr val="1A0808"/>
           </a:solidFill>
-          <a:ln/>
+          <a:ln w="12700">
+            <a:solidFill>
+              <a:srgbClr val="FF6B6B"/>
+            </a:solidFill>
+            <a:prstDash val="solid"/>
+          </a:ln>
         </p:spPr>
       </p:sp>
       <p:sp>
@@ -7619,7 +7771,7 @@
             <a:r>
               <a:rPr lang="en-US" sz="1050" b="1" dirty="0">
                 <a:solidFill>
-                  <a:srgbClr val="FF7B7B"/>
+                  <a:srgbClr val="FF6B6B"/>
                 </a:solidFill>
                 <a:latin typeface="Courier New" pitchFamily="34" charset="0"/>
                 <a:ea typeface="Courier New" pitchFamily="34" charset="-122"/>
@@ -7648,7 +7800,7 @@
           <a:noFill/>
           <a:ln w="15875">
             <a:solidFill>
-              <a:srgbClr val="9B7BE8"/>
+              <a:srgbClr val="8F72E6"/>
             </a:solidFill>
             <a:prstDash val="solid"/>
           </a:ln>
@@ -7669,7 +7821,7 @@
             <a:avLst/>
           </a:prstGeom>
           <a:solidFill>
-            <a:srgbClr val="9B7BE8"/>
+            <a:srgbClr val="8F72E6"/>
           </a:solidFill>
           <a:ln/>
         </p:spPr>
@@ -7691,9 +7843,14 @@
             </a:avLst>
           </a:prstGeom>
           <a:solidFill>
-            <a:srgbClr val="102A20"/>
+            <a:srgbClr val="06180F"/>
           </a:solidFill>
-          <a:ln/>
+          <a:ln w="12700">
+            <a:solidFill>
+              <a:srgbClr val="3FCF8E"/>
+            </a:solidFill>
+            <a:prstDash val="solid"/>
+          </a:ln>
         </p:spPr>
       </p:sp>
       <p:sp>
@@ -7723,7 +7880,7 @@
             <a:r>
               <a:rPr lang="en-US" sz="1050" b="1" dirty="0">
                 <a:solidFill>
-                  <a:srgbClr val="5FD6A0"/>
+                  <a:srgbClr val="3FCF8E"/>
                 </a:solidFill>
                 <a:latin typeface="Courier New" pitchFamily="34" charset="0"/>
                 <a:ea typeface="Courier New" pitchFamily="34" charset="-122"/>
@@ -7752,7 +7909,7 @@
           <a:noFill/>
           <a:ln w="15875">
             <a:solidFill>
-              <a:srgbClr val="9B7BE8"/>
+              <a:srgbClr val="8F72E6"/>
             </a:solidFill>
             <a:prstDash val="solid"/>
           </a:ln>
@@ -7773,7 +7930,7 @@
             <a:avLst/>
           </a:prstGeom>
           <a:solidFill>
-            <a:srgbClr val="9B7BE8"/>
+            <a:srgbClr val="8F72E6"/>
           </a:solidFill>
           <a:ln/>
         </p:spPr>
@@ -7795,9 +7952,14 @@
             </a:avLst>
           </a:prstGeom>
           <a:solidFill>
-            <a:srgbClr val="2E1418"/>
+            <a:srgbClr val="1A0808"/>
           </a:solidFill>
-          <a:ln/>
+          <a:ln w="12700">
+            <a:solidFill>
+              <a:srgbClr val="FF6B6B"/>
+            </a:solidFill>
+            <a:prstDash val="solid"/>
+          </a:ln>
         </p:spPr>
       </p:sp>
       <p:sp>
@@ -7827,7 +7989,7 @@
             <a:r>
               <a:rPr lang="en-US" sz="1050" b="1" dirty="0">
                 <a:solidFill>
-                  <a:srgbClr val="FF7B7B"/>
+                  <a:srgbClr val="FF6B6B"/>
                 </a:solidFill>
                 <a:latin typeface="Courier New" pitchFamily="34" charset="0"/>
                 <a:ea typeface="Courier New" pitchFamily="34" charset="-122"/>
@@ -7856,9 +8018,14 @@
             </a:avLst>
           </a:prstGeom>
           <a:solidFill>
-            <a:srgbClr val="102A20"/>
+            <a:srgbClr val="06180F"/>
           </a:solidFill>
-          <a:ln/>
+          <a:ln w="12700">
+            <a:solidFill>
+              <a:srgbClr val="3FCF8E"/>
+            </a:solidFill>
+            <a:prstDash val="solid"/>
+          </a:ln>
         </p:spPr>
       </p:sp>
       <p:sp>
@@ -7888,7 +8055,7 @@
             <a:r>
               <a:rPr lang="en-US" sz="950" b="1" spc="150" kern="0" dirty="0">
                 <a:solidFill>
-                  <a:srgbClr val="5FD6A0"/>
+                  <a:srgbClr val="3FCF8E"/>
                 </a:solidFill>
                 <a:latin typeface="Courier New" pitchFamily="34" charset="0"/>
                 <a:ea typeface="Courier New" pitchFamily="34" charset="-122"/>
@@ -7959,9 +8126,14 @@
             </a:avLst>
           </a:prstGeom>
           <a:solidFill>
-            <a:srgbClr val="1C1140"/>
+            <a:srgbClr val="1A0B3D"/>
           </a:solidFill>
-          <a:ln/>
+          <a:ln w="12700">
+            <a:solidFill>
+              <a:srgbClr val="5A05F4"/>
+            </a:solidFill>
+            <a:prstDash val="solid"/>
+          </a:ln>
         </p:spPr>
       </p:sp>
       <p:sp>
@@ -7991,7 +8163,7 @@
             <a:r>
               <a:rPr lang="en-US" sz="1450" b="1" dirty="0">
                 <a:solidFill>
-                  <a:srgbClr val="C9A6FF"/>
+                  <a:srgbClr val="A98BFF"/>
                 </a:solidFill>
                 <a:latin typeface="Montserrat" pitchFamily="34" charset="0"/>
                 <a:ea typeface="Montserrat" pitchFamily="34" charset="-122"/>
@@ -8033,7 +8205,7 @@
             <a:r>
               <a:rPr lang="en-US" sz="1200" dirty="0">
                 <a:solidFill>
-                  <a:srgbClr val="FFFFFF"/>
+                  <a:srgbClr val="C9C4D6"/>
                 </a:solidFill>
                 <a:latin typeface="Montserrat" pitchFamily="34" charset="0"/>
                 <a:ea typeface="Montserrat" pitchFamily="34" charset="-122"/>
@@ -8062,11 +8234,11 @@
             </a:avLst>
           </a:prstGeom>
           <a:solidFill>
-            <a:srgbClr val="17141F"/>
+            <a:srgbClr val="000000"/>
           </a:solidFill>
           <a:ln w="12700">
             <a:solidFill>
-              <a:srgbClr val="2E2A3A"/>
+              <a:srgbClr val="5E4F85"/>
             </a:solidFill>
             <a:prstDash val="solid"/>
           </a:ln>
@@ -8141,7 +8313,7 @@
             <a:r>
               <a:rPr lang="en-US" sz="1200" dirty="0">
                 <a:solidFill>
-                  <a:srgbClr val="AFA9BE"/>
+                  <a:srgbClr val="C9C4D6"/>
                 </a:solidFill>
                 <a:latin typeface="Montserrat" pitchFamily="34" charset="0"/>
                 <a:ea typeface="Montserrat" pitchFamily="34" charset="-122"/>
@@ -8183,7 +8355,7 @@
             <a:lvl1pPr>
               <a:defRPr sz="850">
                 <a:solidFill>
-                  <a:srgbClr val="8A82A0"/>
+                  <a:srgbClr val="9A94AA"/>
                 </a:solidFill>
                 <a:latin typeface="Courier New"/>
                 <a:ea typeface="Courier New"/>
@@ -8253,7 +8425,7 @@
             <a:r>
               <a:rPr lang="en-US" sz="2600" b="1" dirty="0">
                 <a:solidFill>
-                  <a:srgbClr val="C9A6FF"/>
+                  <a:srgbClr val="A98BFF"/>
                 </a:solidFill>
                 <a:latin typeface="Courier New" pitchFamily="34" charset="0"/>
                 <a:ea typeface="Courier New" pitchFamily="34" charset="-122"/>
@@ -8321,9 +8493,14 @@
             </a:avLst>
           </a:prstGeom>
           <a:solidFill>
-            <a:srgbClr val="C9A6FF"/>
+            <a:srgbClr val="1A0B3D"/>
           </a:solidFill>
-          <a:ln/>
+          <a:ln w="12700">
+            <a:solidFill>
+              <a:srgbClr val="5A05F4"/>
+            </a:solidFill>
+            <a:prstDash val="solid"/>
+          </a:ln>
         </p:spPr>
       </p:sp>
       <p:sp>
@@ -8353,7 +8530,7 @@
             <a:r>
               <a:rPr lang="en-US" sz="900" b="1" spc="100" kern="0" dirty="0">
                 <a:solidFill>
-                  <a:srgbClr val="1C1140"/>
+                  <a:srgbClr val="A98BFF"/>
                 </a:solidFill>
                 <a:latin typeface="Courier New" pitchFamily="34" charset="0"/>
                 <a:ea typeface="Courier New" pitchFamily="34" charset="-122"/>
@@ -8406,9 +8583,14 @@
             </a:avLst>
           </a:prstGeom>
           <a:solidFill>
-            <a:srgbClr val="2A2010"/>
+            <a:srgbClr val="0B1A38"/>
           </a:solidFill>
-          <a:ln/>
+          <a:ln w="12700">
+            <a:solidFill>
+              <a:srgbClr val="6BA0F8"/>
+            </a:solidFill>
+            <a:prstDash val="solid"/>
+          </a:ln>
         </p:spPr>
       </p:sp>
       <p:sp>
@@ -8438,7 +8620,7 @@
             <a:r>
               <a:rPr lang="en-US" sz="1450" b="1" dirty="0">
                 <a:solidFill>
-                  <a:srgbClr val="E8A857"/>
+                  <a:srgbClr val="6BA0F8"/>
                 </a:solidFill>
                 <a:latin typeface="Montserrat" pitchFamily="34" charset="0"/>
                 <a:ea typeface="Montserrat" pitchFamily="34" charset="-122"/>
@@ -8480,7 +8662,7 @@
             <a:r>
               <a:rPr lang="en-US" sz="1200" dirty="0">
                 <a:solidFill>
-                  <a:srgbClr val="FFFFFF"/>
+                  <a:srgbClr val="C9C4D6"/>
                 </a:solidFill>
                 <a:latin typeface="Montserrat" pitchFamily="34" charset="0"/>
                 <a:ea typeface="Montserrat" pitchFamily="34" charset="-122"/>
@@ -8509,9 +8691,14 @@
             </a:avLst>
           </a:prstGeom>
           <a:solidFill>
-            <a:srgbClr val="102A20"/>
+            <a:srgbClr val="06180F"/>
           </a:solidFill>
-          <a:ln/>
+          <a:ln w="12700">
+            <a:solidFill>
+              <a:srgbClr val="3FCF8E"/>
+            </a:solidFill>
+            <a:prstDash val="solid"/>
+          </a:ln>
         </p:spPr>
       </p:sp>
       <p:sp>
@@ -8541,7 +8728,7 @@
             <a:r>
               <a:rPr lang="en-US" sz="1450" b="1" dirty="0">
                 <a:solidFill>
-                  <a:srgbClr val="5FD6A0"/>
+                  <a:srgbClr val="3FCF8E"/>
                 </a:solidFill>
                 <a:latin typeface="Montserrat" pitchFamily="34" charset="0"/>
                 <a:ea typeface="Montserrat" pitchFamily="34" charset="-122"/>
@@ -8583,7 +8770,7 @@
             <a:r>
               <a:rPr lang="en-US" sz="1200" dirty="0">
                 <a:solidFill>
-                  <a:srgbClr val="FFFFFF"/>
+                  <a:srgbClr val="C9C4D6"/>
                 </a:solidFill>
                 <a:latin typeface="Montserrat" pitchFamily="34" charset="0"/>
                 <a:ea typeface="Montserrat" pitchFamily="34" charset="-122"/>
@@ -8612,7 +8799,7 @@
             </a:avLst>
           </a:prstGeom>
           <a:solidFill>
-            <a:srgbClr val="102A20"/>
+            <a:srgbClr val="06180F"/>
           </a:solidFill>
           <a:ln/>
         </p:spPr>
@@ -8644,7 +8831,7 @@
             <a:r>
               <a:rPr lang="en-US" sz="1100" b="1" dirty="0">
                 <a:solidFill>
-                  <a:srgbClr val="5FD6A0"/>
+                  <a:srgbClr val="3FCF8E"/>
                 </a:solidFill>
                 <a:latin typeface="Montserrat" pitchFamily="34" charset="0"/>
                 <a:ea typeface="Montserrat" pitchFamily="34" charset="-122"/>
@@ -8658,7 +8845,7 @@
             <a:r>
               <a:rPr lang="en-US" sz="1100" dirty="0">
                 <a:solidFill>
-                  <a:srgbClr val="AFA9BE"/>
+                  <a:srgbClr val="C9C4D6"/>
                 </a:solidFill>
                 <a:latin typeface="Montserrat" pitchFamily="34" charset="0"/>
                 <a:ea typeface="Montserrat" pitchFamily="34" charset="-122"/>
@@ -8687,7 +8874,7 @@
             </a:avLst>
           </a:prstGeom>
           <a:solidFill>
-            <a:srgbClr val="2A2010"/>
+            <a:srgbClr val="0B1A38"/>
           </a:solidFill>
           <a:ln/>
         </p:spPr>
@@ -8719,7 +8906,7 @@
             <a:r>
               <a:rPr lang="en-US" sz="1100" b="1" dirty="0">
                 <a:solidFill>
-                  <a:srgbClr val="E8A857"/>
+                  <a:srgbClr val="6BA0F8"/>
                 </a:solidFill>
                 <a:latin typeface="Montserrat" pitchFamily="34" charset="0"/>
                 <a:ea typeface="Montserrat" pitchFamily="34" charset="-122"/>
@@ -8733,7 +8920,7 @@
             <a:r>
               <a:rPr lang="en-US" sz="1100" dirty="0">
                 <a:solidFill>
-                  <a:srgbClr val="AFA9BE"/>
+                  <a:srgbClr val="C9C4D6"/>
                 </a:solidFill>
                 <a:latin typeface="Montserrat" pitchFamily="34" charset="0"/>
                 <a:ea typeface="Montserrat" pitchFamily="34" charset="-122"/>
@@ -8762,7 +8949,7 @@
             </a:avLst>
           </a:prstGeom>
           <a:solidFill>
-            <a:srgbClr val="2E1418"/>
+            <a:srgbClr val="1A0808"/>
           </a:solidFill>
           <a:ln/>
         </p:spPr>
@@ -8794,7 +8981,7 @@
             <a:r>
               <a:rPr lang="en-US" sz="1100" b="1" dirty="0">
                 <a:solidFill>
-                  <a:srgbClr val="FF7B7B"/>
+                  <a:srgbClr val="FF6B6B"/>
                 </a:solidFill>
                 <a:latin typeface="Montserrat" pitchFamily="34" charset="0"/>
                 <a:ea typeface="Montserrat" pitchFamily="34" charset="-122"/>
@@ -8808,7 +8995,7 @@
             <a:r>
               <a:rPr lang="en-US" sz="1100" dirty="0">
                 <a:solidFill>
-                  <a:srgbClr val="AFA9BE"/>
+                  <a:srgbClr val="C9C4D6"/>
                 </a:solidFill>
                 <a:latin typeface="Montserrat" pitchFamily="34" charset="0"/>
                 <a:ea typeface="Montserrat" pitchFamily="34" charset="-122"/>
@@ -8847,7 +9034,7 @@
             <a:r>
               <a:rPr lang="en-US" sz="850" spc="100" kern="0" dirty="0">
                 <a:solidFill>
-                  <a:srgbClr val="8A82A0"/>
+                  <a:srgbClr val="9A94AA"/>
                 </a:solidFill>
                 <a:latin typeface="Courier New" pitchFamily="34" charset="0"/>
                 <a:ea typeface="Courier New" pitchFamily="34" charset="-122"/>
@@ -8979,9 +9166,14 @@
             </a:avLst>
           </a:prstGeom>
           <a:solidFill>
-            <a:srgbClr val="2E1418"/>
+            <a:srgbClr val="1A0808"/>
           </a:solidFill>
-          <a:ln/>
+          <a:ln w="12700">
+            <a:solidFill>
+              <a:srgbClr val="FF6B6B"/>
+            </a:solidFill>
+            <a:prstDash val="solid"/>
+          </a:ln>
         </p:spPr>
       </p:sp>
       <p:sp>
@@ -9011,7 +9203,7 @@
             <a:r>
               <a:rPr lang="en-US" sz="950" b="1" spc="150" kern="0" dirty="0">
                 <a:solidFill>
-                  <a:srgbClr val="FF7B7B"/>
+                  <a:srgbClr val="FF6B6B"/>
                 </a:solidFill>
                 <a:latin typeface="Courier New" pitchFamily="34" charset="0"/>
                 <a:ea typeface="Courier New" pitchFamily="34" charset="-122"/>
@@ -9095,7 +9287,7 @@
             <a:lvl1pPr>
               <a:defRPr sz="850">
                 <a:solidFill>
-                  <a:srgbClr val="8A82A0"/>
+                  <a:srgbClr val="9A94AA"/>
                 </a:solidFill>
                 <a:latin typeface="Courier New"/>
                 <a:ea typeface="Courier New"/>
@@ -9165,7 +9357,7 @@
             <a:r>
               <a:rPr lang="en-US" sz="2600" b="1" dirty="0">
                 <a:solidFill>
-                  <a:srgbClr val="C9A6FF"/>
+                  <a:srgbClr val="A98BFF"/>
                 </a:solidFill>
                 <a:latin typeface="Courier New" pitchFamily="34" charset="0"/>
                 <a:ea typeface="Courier New" pitchFamily="34" charset="-122"/>
@@ -9233,9 +9425,14 @@
             </a:avLst>
           </a:prstGeom>
           <a:solidFill>
-            <a:srgbClr val="C9A6FF"/>
+            <a:srgbClr val="1A0B3D"/>
           </a:solidFill>
-          <a:ln/>
+          <a:ln w="12700">
+            <a:solidFill>
+              <a:srgbClr val="5A05F4"/>
+            </a:solidFill>
+            <a:prstDash val="solid"/>
+          </a:ln>
         </p:spPr>
       </p:sp>
       <p:sp>
@@ -9265,7 +9462,7 @@
             <a:r>
               <a:rPr lang="en-US" sz="900" b="1" spc="100" kern="0" dirty="0">
                 <a:solidFill>
-                  <a:srgbClr val="1C1140"/>
+                  <a:srgbClr val="A98BFF"/>
                 </a:solidFill>
                 <a:latin typeface="Courier New" pitchFamily="34" charset="0"/>
                 <a:ea typeface="Courier New" pitchFamily="34" charset="-122"/>
@@ -9318,9 +9515,14 @@
             </a:avLst>
           </a:prstGeom>
           <a:solidFill>
-            <a:srgbClr val="1C1140"/>
+            <a:srgbClr val="1A0B3D"/>
           </a:solidFill>
-          <a:ln/>
+          <a:ln w="12700">
+            <a:solidFill>
+              <a:srgbClr val="5A05F4"/>
+            </a:solidFill>
+            <a:prstDash val="solid"/>
+          </a:ln>
         </p:spPr>
       </p:sp>
       <p:sp>
@@ -9350,7 +9552,7 @@
             <a:r>
               <a:rPr lang="en-US" sz="1200" b="1" dirty="0">
                 <a:solidFill>
-                  <a:srgbClr val="C9A6FF"/>
+                  <a:srgbClr val="A98BFF"/>
                 </a:solidFill>
                 <a:latin typeface="Courier New" pitchFamily="34" charset="0"/>
                 <a:ea typeface="Courier New" pitchFamily="34" charset="-122"/>
@@ -9379,7 +9581,7 @@
           <a:noFill/>
           <a:ln w="15875">
             <a:solidFill>
-              <a:srgbClr val="9B7BE8"/>
+              <a:srgbClr val="8F72E6"/>
             </a:solidFill>
             <a:prstDash val="solid"/>
           </a:ln>
@@ -9400,7 +9602,7 @@
             <a:avLst/>
           </a:prstGeom>
           <a:solidFill>
-            <a:srgbClr val="9B7BE8"/>
+            <a:srgbClr val="8F72E6"/>
           </a:solidFill>
           <a:ln/>
         </p:spPr>
@@ -9422,9 +9624,14 @@
             </a:avLst>
           </a:prstGeom>
           <a:solidFill>
-            <a:srgbClr val="102A20"/>
+            <a:srgbClr val="06180F"/>
           </a:solidFill>
-          <a:ln/>
+          <a:ln w="12700">
+            <a:solidFill>
+              <a:srgbClr val="3FCF8E"/>
+            </a:solidFill>
+            <a:prstDash val="solid"/>
+          </a:ln>
         </p:spPr>
       </p:sp>
       <p:sp>
@@ -9454,7 +9661,7 @@
             <a:r>
               <a:rPr lang="en-US" sz="1200" b="1" dirty="0">
                 <a:solidFill>
-                  <a:srgbClr val="5FD6A0"/>
+                  <a:srgbClr val="3FCF8E"/>
                 </a:solidFill>
                 <a:latin typeface="Courier New" pitchFamily="34" charset="0"/>
                 <a:ea typeface="Courier New" pitchFamily="34" charset="-122"/>
@@ -9483,11 +9690,11 @@
             </a:avLst>
           </a:prstGeom>
           <a:solidFill>
-            <a:srgbClr val="17141F"/>
+            <a:srgbClr val="000000"/>
           </a:solidFill>
           <a:ln w="12700">
             <a:solidFill>
-              <a:srgbClr val="2E2A3A"/>
+              <a:srgbClr val="5E4F85"/>
             </a:solidFill>
             <a:prstDash val="solid"/>
           </a:ln>
@@ -9562,7 +9769,7 @@
             <a:r>
               <a:rPr lang="en-US" sz="1200" dirty="0">
                 <a:solidFill>
-                  <a:srgbClr val="AFA9BE"/>
+                  <a:srgbClr val="C9C4D6"/>
                 </a:solidFill>
                 <a:latin typeface="Montserrat" pitchFamily="34" charset="0"/>
                 <a:ea typeface="Montserrat" pitchFamily="34" charset="-122"/>
@@ -9591,9 +9798,14 @@
             </a:avLst>
           </a:prstGeom>
           <a:solidFill>
-            <a:srgbClr val="2A2010"/>
+            <a:srgbClr val="0B1A38"/>
           </a:solidFill>
-          <a:ln/>
+          <a:ln w="12700">
+            <a:solidFill>
+              <a:srgbClr val="6BA0F8"/>
+            </a:solidFill>
+            <a:prstDash val="solid"/>
+          </a:ln>
         </p:spPr>
       </p:sp>
       <p:sp>
@@ -9623,7 +9835,7 @@
             <a:r>
               <a:rPr lang="en-US" sz="1450" b="1" dirty="0">
                 <a:solidFill>
-                  <a:srgbClr val="E8A857"/>
+                  <a:srgbClr val="6BA0F8"/>
                 </a:solidFill>
                 <a:latin typeface="Montserrat" pitchFamily="34" charset="0"/>
                 <a:ea typeface="Montserrat" pitchFamily="34" charset="-122"/>
@@ -9665,7 +9877,7 @@
             <a:r>
               <a:rPr lang="en-US" sz="1200" dirty="0">
                 <a:solidFill>
-                  <a:srgbClr val="FFFFFF"/>
+                  <a:srgbClr val="C9C4D6"/>
                 </a:solidFill>
                 <a:latin typeface="Montserrat" pitchFamily="34" charset="0"/>
                 <a:ea typeface="Montserrat" pitchFamily="34" charset="-122"/>
@@ -9694,9 +9906,14 @@
             </a:avLst>
           </a:prstGeom>
           <a:solidFill>
-            <a:srgbClr val="2E1418"/>
+            <a:srgbClr val="1A0808"/>
           </a:solidFill>
-          <a:ln/>
+          <a:ln w="12700">
+            <a:solidFill>
+              <a:srgbClr val="FF6B6B"/>
+            </a:solidFill>
+            <a:prstDash val="solid"/>
+          </a:ln>
         </p:spPr>
       </p:sp>
       <p:sp>
@@ -9726,7 +9943,7 @@
             <a:r>
               <a:rPr lang="en-US" sz="950" b="1" spc="150" kern="0" dirty="0">
                 <a:solidFill>
-                  <a:srgbClr val="FF7B7B"/>
+                  <a:srgbClr val="FF6B6B"/>
                 </a:solidFill>
                 <a:latin typeface="Courier New" pitchFamily="34" charset="0"/>
                 <a:ea typeface="Courier New" pitchFamily="34" charset="-122"/>
@@ -9810,7 +10027,7 @@
             <a:lvl1pPr>
               <a:defRPr sz="850">
                 <a:solidFill>
-                  <a:srgbClr val="8A82A0"/>
+                  <a:srgbClr val="9A94AA"/>
                 </a:solidFill>
                 <a:latin typeface="Courier New"/>
                 <a:ea typeface="Courier New"/>
@@ -9880,7 +10097,7 @@
             <a:r>
               <a:rPr lang="en-US" sz="2600" b="1" dirty="0">
                 <a:solidFill>
-                  <a:srgbClr val="C9A6FF"/>
+                  <a:srgbClr val="A98BFF"/>
                 </a:solidFill>
                 <a:latin typeface="Courier New" pitchFamily="34" charset="0"/>
                 <a:ea typeface="Courier New" pitchFamily="34" charset="-122"/>
@@ -9948,9 +10165,14 @@
             </a:avLst>
           </a:prstGeom>
           <a:solidFill>
-            <a:srgbClr val="C9A6FF"/>
+            <a:srgbClr val="1A0B3D"/>
           </a:solidFill>
-          <a:ln/>
+          <a:ln w="12700">
+            <a:solidFill>
+              <a:srgbClr val="5A05F4"/>
+            </a:solidFill>
+            <a:prstDash val="solid"/>
+          </a:ln>
         </p:spPr>
       </p:sp>
       <p:sp>
@@ -9980,7 +10202,7 @@
             <a:r>
               <a:rPr lang="en-US" sz="900" b="1" spc="100" kern="0" dirty="0">
                 <a:solidFill>
-                  <a:srgbClr val="1C1140"/>
+                  <a:srgbClr val="A98BFF"/>
                 </a:solidFill>
                 <a:latin typeface="Courier New" pitchFamily="34" charset="0"/>
                 <a:ea typeface="Courier New" pitchFamily="34" charset="-122"/>
@@ -10009,9 +10231,14 @@
             </a:avLst>
           </a:prstGeom>
           <a:solidFill>
-            <a:srgbClr val="2A2010"/>
+            <a:srgbClr val="000000"/>
           </a:solidFill>
-          <a:ln/>
+          <a:ln w="12700">
+            <a:solidFill>
+              <a:srgbClr val="5E4F85"/>
+            </a:solidFill>
+            <a:prstDash val="solid"/>
+          </a:ln>
         </p:spPr>
       </p:sp>
       <p:sp>
@@ -10041,7 +10268,7 @@
             <a:r>
               <a:rPr lang="en-US" sz="900" b="1" spc="100" kern="0" dirty="0">
                 <a:solidFill>
-                  <a:srgbClr val="E8A857"/>
+                  <a:srgbClr val="C9C4D6"/>
                 </a:solidFill>
                 <a:latin typeface="Courier New" pitchFamily="34" charset="0"/>
                 <a:ea typeface="Courier New" pitchFamily="34" charset="-122"/>
@@ -10094,9 +10321,14 @@
             </a:avLst>
           </a:prstGeom>
           <a:solidFill>
-            <a:srgbClr val="2A2010"/>
+            <a:srgbClr val="0B1A38"/>
           </a:solidFill>
-          <a:ln/>
+          <a:ln w="12700">
+            <a:solidFill>
+              <a:srgbClr val="6BA0F8"/>
+            </a:solidFill>
+            <a:prstDash val="solid"/>
+          </a:ln>
         </p:spPr>
       </p:sp>
       <p:sp>
@@ -10114,7 +10346,7 @@
             <a:avLst/>
           </a:prstGeom>
           <a:solidFill>
-            <a:srgbClr val="E8A857"/>
+            <a:srgbClr val="5A05F4"/>
           </a:solidFill>
           <a:ln/>
         </p:spPr>
@@ -10146,7 +10378,7 @@
             <a:r>
               <a:rPr lang="en-US" sz="1200" b="1" dirty="0">
                 <a:solidFill>
-                  <a:srgbClr val="2A2010"/>
+                  <a:srgbClr val="FFFFFF"/>
                 </a:solidFill>
                 <a:latin typeface="Courier New" pitchFamily="34" charset="0"/>
                 <a:ea typeface="Courier New" pitchFamily="34" charset="-122"/>
@@ -10185,7 +10417,7 @@
             <a:r>
               <a:rPr lang="en-US" sz="1450" b="1" dirty="0">
                 <a:solidFill>
-                  <a:srgbClr val="E8A857"/>
+                  <a:srgbClr val="6BA0F8"/>
                 </a:solidFill>
                 <a:latin typeface="Montserrat" pitchFamily="34" charset="0"/>
                 <a:ea typeface="Montserrat" pitchFamily="34" charset="-122"/>
@@ -10227,7 +10459,7 @@
             <a:r>
               <a:rPr lang="en-US" sz="1200" dirty="0">
                 <a:solidFill>
-                  <a:srgbClr val="FFFFFF"/>
+                  <a:srgbClr val="C9C4D6"/>
                 </a:solidFill>
                 <a:latin typeface="Montserrat" pitchFamily="34" charset="0"/>
                 <a:ea typeface="Montserrat" pitchFamily="34" charset="-122"/>
@@ -10256,9 +10488,14 @@
             </a:avLst>
           </a:prstGeom>
           <a:solidFill>
-            <a:srgbClr val="2A2010"/>
+            <a:srgbClr val="0B1A38"/>
           </a:solidFill>
-          <a:ln/>
+          <a:ln w="12700">
+            <a:solidFill>
+              <a:srgbClr val="6BA0F8"/>
+            </a:solidFill>
+            <a:prstDash val="solid"/>
+          </a:ln>
         </p:spPr>
       </p:sp>
       <p:sp>
@@ -10276,7 +10513,7 @@
             <a:avLst/>
           </a:prstGeom>
           <a:solidFill>
-            <a:srgbClr val="E8A857"/>
+            <a:srgbClr val="5A05F4"/>
           </a:solidFill>
           <a:ln/>
         </p:spPr>
@@ -10308,7 +10545,7 @@
             <a:r>
               <a:rPr lang="en-US" sz="1200" b="1" dirty="0">
                 <a:solidFill>
-                  <a:srgbClr val="2A2010"/>
+                  <a:srgbClr val="FFFFFF"/>
                 </a:solidFill>
                 <a:latin typeface="Courier New" pitchFamily="34" charset="0"/>
                 <a:ea typeface="Courier New" pitchFamily="34" charset="-122"/>
@@ -10347,7 +10584,7 @@
             <a:r>
               <a:rPr lang="en-US" sz="1450" b="1" dirty="0">
                 <a:solidFill>
-                  <a:srgbClr val="E8A857"/>
+                  <a:srgbClr val="6BA0F8"/>
                 </a:solidFill>
                 <a:latin typeface="Montserrat" pitchFamily="34" charset="0"/>
                 <a:ea typeface="Montserrat" pitchFamily="34" charset="-122"/>
@@ -10389,7 +10626,7 @@
             <a:r>
               <a:rPr lang="en-US" sz="1200" dirty="0">
                 <a:solidFill>
-                  <a:srgbClr val="FFFFFF"/>
+                  <a:srgbClr val="C9C4D6"/>
                 </a:solidFill>
                 <a:latin typeface="Montserrat" pitchFamily="34" charset="0"/>
                 <a:ea typeface="Montserrat" pitchFamily="34" charset="-122"/>
@@ -10418,9 +10655,14 @@
             </a:avLst>
           </a:prstGeom>
           <a:solidFill>
-            <a:srgbClr val="2A2010"/>
+            <a:srgbClr val="0B1A38"/>
           </a:solidFill>
-          <a:ln/>
+          <a:ln w="12700">
+            <a:solidFill>
+              <a:srgbClr val="6BA0F8"/>
+            </a:solidFill>
+            <a:prstDash val="solid"/>
+          </a:ln>
         </p:spPr>
       </p:sp>
       <p:sp>
@@ -10438,7 +10680,7 @@
             <a:avLst/>
           </a:prstGeom>
           <a:solidFill>
-            <a:srgbClr val="E8A857"/>
+            <a:srgbClr val="5A05F4"/>
           </a:solidFill>
           <a:ln/>
         </p:spPr>
@@ -10470,7 +10712,7 @@
             <a:r>
               <a:rPr lang="en-US" sz="1200" b="1" dirty="0">
                 <a:solidFill>
-                  <a:srgbClr val="2A2010"/>
+                  <a:srgbClr val="FFFFFF"/>
                 </a:solidFill>
                 <a:latin typeface="Courier New" pitchFamily="34" charset="0"/>
                 <a:ea typeface="Courier New" pitchFamily="34" charset="-122"/>
@@ -10509,7 +10751,7 @@
             <a:r>
               <a:rPr lang="en-US" sz="1450" b="1" dirty="0">
                 <a:solidFill>
-                  <a:srgbClr val="E8A857"/>
+                  <a:srgbClr val="6BA0F8"/>
                 </a:solidFill>
                 <a:latin typeface="Montserrat" pitchFamily="34" charset="0"/>
                 <a:ea typeface="Montserrat" pitchFamily="34" charset="-122"/>
@@ -10551,7 +10793,7 @@
             <a:r>
               <a:rPr lang="en-US" sz="1200" dirty="0">
                 <a:solidFill>
-                  <a:srgbClr val="FFFFFF"/>
+                  <a:srgbClr val="C9C4D6"/>
                 </a:solidFill>
                 <a:latin typeface="Montserrat" pitchFamily="34" charset="0"/>
                 <a:ea typeface="Montserrat" pitchFamily="34" charset="-122"/>
@@ -10696,7 +10938,7 @@
             <a:lvl1pPr>
               <a:defRPr sz="850">
                 <a:solidFill>
-                  <a:srgbClr val="8A82A0"/>
+                  <a:srgbClr val="9A94AA"/>
                 </a:solidFill>
                 <a:latin typeface="Courier New"/>
                 <a:ea typeface="Courier New"/>
@@ -10795,7 +11037,7 @@
             </a:avLst>
           </a:prstGeom>
           <a:solidFill>
-            <a:srgbClr val="5FD6A0"/>
+            <a:srgbClr val="5A05F4"/>
           </a:solidFill>
           <a:ln/>
         </p:spPr>
@@ -10827,7 +11069,7 @@
             <a:r>
               <a:rPr lang="en-US" sz="900" b="1" spc="100" kern="0" dirty="0">
                 <a:solidFill>
-                  <a:srgbClr val="102A20"/>
+                  <a:srgbClr val="FFFFFF"/>
                 </a:solidFill>
                 <a:latin typeface="Courier New" pitchFamily="34" charset="0"/>
                 <a:ea typeface="Courier New" pitchFamily="34" charset="-122"/>
@@ -10880,9 +11122,14 @@
             </a:avLst>
           </a:prstGeom>
           <a:solidFill>
-            <a:srgbClr val="102A20"/>
+            <a:srgbClr val="06180F"/>
           </a:solidFill>
-          <a:ln/>
+          <a:ln w="12700">
+            <a:solidFill>
+              <a:srgbClr val="3FCF8E"/>
+            </a:solidFill>
+            <a:prstDash val="solid"/>
+          </a:ln>
         </p:spPr>
       </p:sp>
       <p:sp>
@@ -10900,7 +11147,7 @@
             <a:avLst/>
           </a:prstGeom>
           <a:solidFill>
-            <a:srgbClr val="5FD6A0"/>
+            <a:srgbClr val="5A05F4"/>
           </a:solidFill>
           <a:ln/>
         </p:spPr>
@@ -10932,7 +11179,7 @@
             <a:r>
               <a:rPr lang="en-US" sz="1200" b="1" dirty="0">
                 <a:solidFill>
-                  <a:srgbClr val="102A20"/>
+                  <a:srgbClr val="FFFFFF"/>
                 </a:solidFill>
                 <a:latin typeface="Courier New" pitchFamily="34" charset="0"/>
                 <a:ea typeface="Courier New" pitchFamily="34" charset="-122"/>
@@ -10971,7 +11218,7 @@
             <a:r>
               <a:rPr lang="en-US" sz="1450" b="1" dirty="0">
                 <a:solidFill>
-                  <a:srgbClr val="5FD6A0"/>
+                  <a:srgbClr val="3FCF8E"/>
                 </a:solidFill>
                 <a:latin typeface="Montserrat" pitchFamily="34" charset="0"/>
                 <a:ea typeface="Montserrat" pitchFamily="34" charset="-122"/>
@@ -11013,7 +11260,7 @@
             <a:r>
               <a:rPr lang="en-US" sz="1200" dirty="0">
                 <a:solidFill>
-                  <a:srgbClr val="FFFFFF"/>
+                  <a:srgbClr val="C9C4D6"/>
                 </a:solidFill>
                 <a:latin typeface="Montserrat" pitchFamily="34" charset="0"/>
                 <a:ea typeface="Montserrat" pitchFamily="34" charset="-122"/>
@@ -11042,9 +11289,14 @@
             </a:avLst>
           </a:prstGeom>
           <a:solidFill>
-            <a:srgbClr val="102A20"/>
+            <a:srgbClr val="06180F"/>
           </a:solidFill>
-          <a:ln/>
+          <a:ln w="12700">
+            <a:solidFill>
+              <a:srgbClr val="3FCF8E"/>
+            </a:solidFill>
+            <a:prstDash val="solid"/>
+          </a:ln>
         </p:spPr>
       </p:sp>
       <p:sp>
@@ -11062,7 +11314,7 @@
             <a:avLst/>
           </a:prstGeom>
           <a:solidFill>
-            <a:srgbClr val="5FD6A0"/>
+            <a:srgbClr val="5A05F4"/>
           </a:solidFill>
           <a:ln/>
         </p:spPr>
@@ -11094,7 +11346,7 @@
             <a:r>
               <a:rPr lang="en-US" sz="1200" b="1" dirty="0">
                 <a:solidFill>
-                  <a:srgbClr val="102A20"/>
+                  <a:srgbClr val="FFFFFF"/>
                 </a:solidFill>
                 <a:latin typeface="Courier New" pitchFamily="34" charset="0"/>
                 <a:ea typeface="Courier New" pitchFamily="34" charset="-122"/>
@@ -11133,7 +11385,7 @@
             <a:r>
               <a:rPr lang="en-US" sz="1450" b="1" dirty="0">
                 <a:solidFill>
-                  <a:srgbClr val="5FD6A0"/>
+                  <a:srgbClr val="3FCF8E"/>
                 </a:solidFill>
                 <a:latin typeface="Montserrat" pitchFamily="34" charset="0"/>
                 <a:ea typeface="Montserrat" pitchFamily="34" charset="-122"/>
@@ -11175,7 +11427,7 @@
             <a:r>
               <a:rPr lang="en-US" sz="1200" dirty="0">
                 <a:solidFill>
-                  <a:srgbClr val="FFFFFF"/>
+                  <a:srgbClr val="C9C4D6"/>
                 </a:solidFill>
                 <a:latin typeface="Montserrat" pitchFamily="34" charset="0"/>
                 <a:ea typeface="Montserrat" pitchFamily="34" charset="-122"/>
@@ -11204,9 +11456,14 @@
             </a:avLst>
           </a:prstGeom>
           <a:solidFill>
-            <a:srgbClr val="2E1418"/>
+            <a:srgbClr val="1A0808"/>
           </a:solidFill>
-          <a:ln/>
+          <a:ln w="12700">
+            <a:solidFill>
+              <a:srgbClr val="FF6B6B"/>
+            </a:solidFill>
+            <a:prstDash val="solid"/>
+          </a:ln>
         </p:spPr>
       </p:sp>
       <p:sp>
@@ -11224,7 +11481,7 @@
             <a:avLst/>
           </a:prstGeom>
           <a:solidFill>
-            <a:srgbClr val="FF7B7B"/>
+            <a:srgbClr val="5A05F4"/>
           </a:solidFill>
           <a:ln/>
         </p:spPr>
@@ -11256,7 +11513,7 @@
             <a:r>
               <a:rPr lang="en-US" sz="1200" b="1" dirty="0">
                 <a:solidFill>
-                  <a:srgbClr val="2E1418"/>
+                  <a:srgbClr val="FFFFFF"/>
                 </a:solidFill>
                 <a:latin typeface="Courier New" pitchFamily="34" charset="0"/>
                 <a:ea typeface="Courier New" pitchFamily="34" charset="-122"/>
@@ -11295,7 +11552,7 @@
             <a:r>
               <a:rPr lang="en-US" sz="1450" b="1" dirty="0">
                 <a:solidFill>
-                  <a:srgbClr val="FF7B7B"/>
+                  <a:srgbClr val="FF6B6B"/>
                 </a:solidFill>
                 <a:latin typeface="Montserrat" pitchFamily="34" charset="0"/>
                 <a:ea typeface="Montserrat" pitchFamily="34" charset="-122"/>
@@ -11337,7 +11594,7 @@
             <a:r>
               <a:rPr lang="en-US" sz="1200" dirty="0">
                 <a:solidFill>
-                  <a:srgbClr val="FFFFFF"/>
+                  <a:srgbClr val="C9C4D6"/>
                 </a:solidFill>
                 <a:latin typeface="Montserrat" pitchFamily="34" charset="0"/>
                 <a:ea typeface="Montserrat" pitchFamily="34" charset="-122"/>
@@ -11366,9 +11623,14 @@
             </a:avLst>
           </a:prstGeom>
           <a:solidFill>
-            <a:srgbClr val="102A20"/>
+            <a:srgbClr val="06180F"/>
           </a:solidFill>
-          <a:ln/>
+          <a:ln w="12700">
+            <a:solidFill>
+              <a:srgbClr val="3FCF8E"/>
+            </a:solidFill>
+            <a:prstDash val="solid"/>
+          </a:ln>
         </p:spPr>
       </p:sp>
       <p:sp>
@@ -11386,7 +11648,7 @@
             <a:avLst/>
           </a:prstGeom>
           <a:solidFill>
-            <a:srgbClr val="5FD6A0"/>
+            <a:srgbClr val="5A05F4"/>
           </a:solidFill>
           <a:ln/>
         </p:spPr>
@@ -11418,7 +11680,7 @@
             <a:r>
               <a:rPr lang="en-US" sz="1200" b="1" dirty="0">
                 <a:solidFill>
-                  <a:srgbClr val="102A20"/>
+                  <a:srgbClr val="FFFFFF"/>
                 </a:solidFill>
                 <a:latin typeface="Courier New" pitchFamily="34" charset="0"/>
                 <a:ea typeface="Courier New" pitchFamily="34" charset="-122"/>
@@ -11457,7 +11719,7 @@
             <a:r>
               <a:rPr lang="en-US" sz="1450" b="1" dirty="0">
                 <a:solidFill>
-                  <a:srgbClr val="5FD6A0"/>
+                  <a:srgbClr val="3FCF8E"/>
                 </a:solidFill>
                 <a:latin typeface="Montserrat" pitchFamily="34" charset="0"/>
                 <a:ea typeface="Montserrat" pitchFamily="34" charset="-122"/>
@@ -11499,7 +11761,7 @@
             <a:r>
               <a:rPr lang="en-US" sz="1200" dirty="0">
                 <a:solidFill>
-                  <a:srgbClr val="FFFFFF"/>
+                  <a:srgbClr val="C9C4D6"/>
                 </a:solidFill>
                 <a:latin typeface="Montserrat" pitchFamily="34" charset="0"/>
                 <a:ea typeface="Montserrat" pitchFamily="34" charset="-122"/>
@@ -11644,7 +11906,7 @@
             <a:lvl1pPr>
               <a:defRPr sz="850">
                 <a:solidFill>
-                  <a:srgbClr val="8A82A0"/>
+                  <a:srgbClr val="9A94AA"/>
                 </a:solidFill>
                 <a:latin typeface="Courier New"/>
                 <a:ea typeface="Courier New"/>
@@ -11743,7 +12005,7 @@
             </a:avLst>
           </a:prstGeom>
           <a:solidFill>
-            <a:srgbClr val="5FD6A0"/>
+            <a:srgbClr val="5A05F4"/>
           </a:solidFill>
           <a:ln/>
         </p:spPr>
@@ -11775,7 +12037,7 @@
             <a:r>
               <a:rPr lang="en-US" sz="900" b="1" spc="100" kern="0" dirty="0">
                 <a:solidFill>
-                  <a:srgbClr val="102A20"/>
+                  <a:srgbClr val="FFFFFF"/>
                 </a:solidFill>
                 <a:latin typeface="Courier New" pitchFamily="34" charset="0"/>
                 <a:ea typeface="Courier New" pitchFamily="34" charset="-122"/>
@@ -11826,7 +12088,7 @@
             <a:avLst/>
           </a:prstGeom>
           <a:solidFill>
-            <a:srgbClr val="C9A6FF"/>
+            <a:srgbClr val="A98BFF"/>
           </a:solidFill>
           <a:ln/>
         </p:spPr>
@@ -11858,7 +12120,7 @@
             <a:r>
               <a:rPr lang="en-US" sz="1300" b="1" dirty="0">
                 <a:solidFill>
-                  <a:srgbClr val="1C1140"/>
+                  <a:srgbClr val="1A0B3D"/>
                 </a:solidFill>
                 <a:latin typeface="Courier New" pitchFamily="34" charset="0"/>
                 <a:ea typeface="Courier New" pitchFamily="34" charset="-122"/>
@@ -11911,7 +12173,7 @@
             <a:r>
               <a:rPr lang="en-US" sz="1200" dirty="0">
                 <a:solidFill>
-                  <a:srgbClr val="AFA9BE"/>
+                  <a:srgbClr val="C9C4D6"/>
                 </a:solidFill>
                 <a:latin typeface="Montserrat" pitchFamily="34" charset="0"/>
                 <a:ea typeface="Montserrat" pitchFamily="34" charset="-122"/>
@@ -11938,7 +12200,7 @@
             <a:avLst/>
           </a:prstGeom>
           <a:solidFill>
-            <a:srgbClr val="C9A6FF"/>
+            <a:srgbClr val="A98BFF"/>
           </a:solidFill>
           <a:ln/>
         </p:spPr>
@@ -11970,7 +12232,7 @@
             <a:r>
               <a:rPr lang="en-US" sz="1300" b="1" dirty="0">
                 <a:solidFill>
-                  <a:srgbClr val="1C1140"/>
+                  <a:srgbClr val="1A0B3D"/>
                 </a:solidFill>
                 <a:latin typeface="Courier New" pitchFamily="34" charset="0"/>
                 <a:ea typeface="Courier New" pitchFamily="34" charset="-122"/>
@@ -12023,7 +12285,7 @@
             <a:r>
               <a:rPr lang="en-US" sz="1200" dirty="0">
                 <a:solidFill>
-                  <a:srgbClr val="AFA9BE"/>
+                  <a:srgbClr val="C9C4D6"/>
                 </a:solidFill>
                 <a:latin typeface="Montserrat" pitchFamily="34" charset="0"/>
                 <a:ea typeface="Montserrat" pitchFamily="34" charset="-122"/>
@@ -12050,7 +12312,7 @@
             <a:avLst/>
           </a:prstGeom>
           <a:solidFill>
-            <a:srgbClr val="C9A6FF"/>
+            <a:srgbClr val="A98BFF"/>
           </a:solidFill>
           <a:ln/>
         </p:spPr>
@@ -12082,7 +12344,7 @@
             <a:r>
               <a:rPr lang="en-US" sz="1300" b="1" dirty="0">
                 <a:solidFill>
-                  <a:srgbClr val="1C1140"/>
+                  <a:srgbClr val="1A0B3D"/>
                 </a:solidFill>
                 <a:latin typeface="Courier New" pitchFamily="34" charset="0"/>
                 <a:ea typeface="Courier New" pitchFamily="34" charset="-122"/>
@@ -12135,7 +12397,7 @@
             <a:r>
               <a:rPr lang="en-US" sz="1200" dirty="0">
                 <a:solidFill>
-                  <a:srgbClr val="AFA9BE"/>
+                  <a:srgbClr val="C9C4D6"/>
                 </a:solidFill>
                 <a:latin typeface="Montserrat" pitchFamily="34" charset="0"/>
                 <a:ea typeface="Montserrat" pitchFamily="34" charset="-122"/>
@@ -12162,7 +12424,7 @@
             <a:avLst/>
           </a:prstGeom>
           <a:solidFill>
-            <a:srgbClr val="C9A6FF"/>
+            <a:srgbClr val="A98BFF"/>
           </a:solidFill>
           <a:ln/>
         </p:spPr>
@@ -12194,7 +12456,7 @@
             <a:r>
               <a:rPr lang="en-US" sz="1300" b="1" dirty="0">
                 <a:solidFill>
-                  <a:srgbClr val="1C1140"/>
+                  <a:srgbClr val="1A0B3D"/>
                 </a:solidFill>
                 <a:latin typeface="Courier New" pitchFamily="34" charset="0"/>
                 <a:ea typeface="Courier New" pitchFamily="34" charset="-122"/>
@@ -12247,7 +12509,7 @@
             <a:r>
               <a:rPr lang="en-US" sz="1200" dirty="0">
                 <a:solidFill>
-                  <a:srgbClr val="AFA9BE"/>
+                  <a:srgbClr val="C9C4D6"/>
                 </a:solidFill>
                 <a:latin typeface="Montserrat" pitchFamily="34" charset="0"/>
                 <a:ea typeface="Montserrat" pitchFamily="34" charset="-122"/>
@@ -12274,7 +12536,7 @@
             <a:avLst/>
           </a:prstGeom>
           <a:solidFill>
-            <a:srgbClr val="E8A857"/>
+            <a:srgbClr val="6BA0F8"/>
           </a:solidFill>
           <a:ln/>
         </p:spPr>
@@ -12306,7 +12568,7 @@
             <a:r>
               <a:rPr lang="en-US" sz="1300" b="1" dirty="0">
                 <a:solidFill>
-                  <a:srgbClr val="2A2010"/>
+                  <a:srgbClr val="0B1A38"/>
                 </a:solidFill>
                 <a:latin typeface="Courier New" pitchFamily="34" charset="0"/>
                 <a:ea typeface="Courier New" pitchFamily="34" charset="-122"/>
@@ -12345,7 +12607,7 @@
             <a:r>
               <a:rPr lang="en-US" sz="1400" b="1" dirty="0">
                 <a:solidFill>
-                  <a:srgbClr val="E8A857"/>
+                  <a:srgbClr val="6BA0F8"/>
                 </a:solidFill>
                 <a:latin typeface="Montserrat" pitchFamily="34" charset="0"/>
                 <a:ea typeface="Montserrat" pitchFamily="34" charset="-122"/>
@@ -12359,7 +12621,7 @@
             <a:r>
               <a:rPr lang="en-US" sz="1200" dirty="0">
                 <a:solidFill>
-                  <a:srgbClr val="AFA9BE"/>
+                  <a:srgbClr val="C9C4D6"/>
                 </a:solidFill>
                 <a:latin typeface="Montserrat" pitchFamily="34" charset="0"/>
                 <a:ea typeface="Montserrat" pitchFamily="34" charset="-122"/>
@@ -12401,7 +12663,7 @@
             <a:lvl1pPr>
               <a:defRPr sz="850">
                 <a:solidFill>
-                  <a:srgbClr val="8A82A0"/>
+                  <a:srgbClr val="9A94AA"/>
                 </a:solidFill>
                 <a:latin typeface="Courier New"/>
                 <a:ea typeface="Courier New"/>
@@ -12513,7 +12775,7 @@
             <a:r>
               <a:rPr lang="en-US" sz="1300" dirty="0">
                 <a:solidFill>
-                  <a:srgbClr val="AFA9BE"/>
+                  <a:srgbClr val="C9C4D6"/>
                 </a:solidFill>
                 <a:latin typeface="Montserrat" pitchFamily="34" charset="0"/>
                 <a:ea typeface="Montserrat" pitchFamily="34" charset="-122"/>
@@ -12542,9 +12804,14 @@
             </a:avLst>
           </a:prstGeom>
           <a:solidFill>
-            <a:srgbClr val="C9A6FF"/>
+            <a:srgbClr val="1A0B3D"/>
           </a:solidFill>
-          <a:ln/>
+          <a:ln w="12700">
+            <a:solidFill>
+              <a:srgbClr val="5A05F4"/>
+            </a:solidFill>
+            <a:prstDash val="solid"/>
+          </a:ln>
         </p:spPr>
       </p:sp>
       <p:sp>
@@ -12574,7 +12841,7 @@
             <a:r>
               <a:rPr lang="en-US" sz="900" b="1" spc="100" kern="0" dirty="0">
                 <a:solidFill>
-                  <a:srgbClr val="1C1140"/>
+                  <a:srgbClr val="A98BFF"/>
                 </a:solidFill>
                 <a:latin typeface="Courier New" pitchFamily="34" charset="0"/>
                 <a:ea typeface="Courier New" pitchFamily="34" charset="-122"/>
@@ -12627,11 +12894,11 @@
             </a:avLst>
           </a:prstGeom>
           <a:solidFill>
-            <a:srgbClr val="17141F"/>
+            <a:srgbClr val="000000"/>
           </a:solidFill>
           <a:ln w="12700">
             <a:solidFill>
-              <a:srgbClr val="2E2A3A"/>
+              <a:srgbClr val="5E4F85"/>
             </a:solidFill>
             <a:prstDash val="solid"/>
           </a:ln>
@@ -12765,7 +13032,7 @@
             <a:r>
               <a:rPr lang="en-US" sz="1200" dirty="0">
                 <a:solidFill>
-                  <a:srgbClr val="AFA9BE"/>
+                  <a:srgbClr val="C9C4D6"/>
                 </a:solidFill>
                 <a:latin typeface="Montserrat" pitchFamily="34" charset="0"/>
                 <a:ea typeface="Montserrat" pitchFamily="34" charset="-122"/>
@@ -12794,11 +13061,11 @@
             </a:avLst>
           </a:prstGeom>
           <a:solidFill>
-            <a:srgbClr val="17141F"/>
+            <a:srgbClr val="000000"/>
           </a:solidFill>
           <a:ln w="12700">
             <a:solidFill>
-              <a:srgbClr val="2E2A3A"/>
+              <a:srgbClr val="5E4F85"/>
             </a:solidFill>
             <a:prstDash val="solid"/>
           </a:ln>
@@ -12932,7 +13199,7 @@
             <a:r>
               <a:rPr lang="en-US" sz="1200" dirty="0">
                 <a:solidFill>
-                  <a:srgbClr val="AFA9BE"/>
+                  <a:srgbClr val="C9C4D6"/>
                 </a:solidFill>
                 <a:latin typeface="Montserrat" pitchFamily="34" charset="0"/>
                 <a:ea typeface="Montserrat" pitchFamily="34" charset="-122"/>
@@ -12961,11 +13228,11 @@
             </a:avLst>
           </a:prstGeom>
           <a:solidFill>
-            <a:srgbClr val="17141F"/>
+            <a:srgbClr val="000000"/>
           </a:solidFill>
           <a:ln w="12700">
             <a:solidFill>
-              <a:srgbClr val="2E2A3A"/>
+              <a:srgbClr val="5E4F85"/>
             </a:solidFill>
             <a:prstDash val="solid"/>
           </a:ln>
@@ -13099,7 +13366,7 @@
             <a:r>
               <a:rPr lang="en-US" sz="1200" dirty="0">
                 <a:solidFill>
-                  <a:srgbClr val="AFA9BE"/>
+                  <a:srgbClr val="C9C4D6"/>
                 </a:solidFill>
                 <a:latin typeface="Montserrat" pitchFamily="34" charset="0"/>
                 <a:ea typeface="Montserrat" pitchFamily="34" charset="-122"/>
@@ -13128,11 +13395,11 @@
             </a:avLst>
           </a:prstGeom>
           <a:solidFill>
-            <a:srgbClr val="17141F"/>
+            <a:srgbClr val="000000"/>
           </a:solidFill>
           <a:ln w="12700">
             <a:solidFill>
-              <a:srgbClr val="2E2A3A"/>
+              <a:srgbClr val="5E4F85"/>
             </a:solidFill>
             <a:prstDash val="solid"/>
           </a:ln>
@@ -13266,7 +13533,7 @@
             <a:r>
               <a:rPr lang="en-US" sz="1200" dirty="0">
                 <a:solidFill>
-                  <a:srgbClr val="AFA9BE"/>
+                  <a:srgbClr val="C9C4D6"/>
                 </a:solidFill>
                 <a:latin typeface="Montserrat" pitchFamily="34" charset="0"/>
                 <a:ea typeface="Montserrat" pitchFamily="34" charset="-122"/>
@@ -13295,11 +13562,11 @@
             </a:avLst>
           </a:prstGeom>
           <a:solidFill>
-            <a:srgbClr val="17141F"/>
+            <a:srgbClr val="000000"/>
           </a:solidFill>
           <a:ln w="12700">
             <a:solidFill>
-              <a:srgbClr val="2E2A3A"/>
+              <a:srgbClr val="5E4F85"/>
             </a:solidFill>
             <a:prstDash val="solid"/>
           </a:ln>
@@ -13433,7 +13700,7 @@
             <a:r>
               <a:rPr lang="en-US" sz="1200" dirty="0">
                 <a:solidFill>
-                  <a:srgbClr val="AFA9BE"/>
+                  <a:srgbClr val="C9C4D6"/>
                 </a:solidFill>
                 <a:latin typeface="Montserrat" pitchFamily="34" charset="0"/>
                 <a:ea typeface="Montserrat" pitchFamily="34" charset="-122"/>
@@ -13475,7 +13742,7 @@
             <a:lvl1pPr>
               <a:defRPr sz="850">
                 <a:solidFill>
-                  <a:srgbClr val="8A82A0"/>
+                  <a:srgbClr val="9A94AA"/>
                 </a:solidFill>
                 <a:latin typeface="Courier New"/>
                 <a:ea typeface="Courier New"/>
@@ -13574,9 +13841,14 @@
             </a:avLst>
           </a:prstGeom>
           <a:solidFill>
-            <a:srgbClr val="E8A857"/>
+            <a:srgbClr val="0B1A38"/>
           </a:solidFill>
-          <a:ln/>
+          <a:ln w="12700">
+            <a:solidFill>
+              <a:srgbClr val="6BA0F8"/>
+            </a:solidFill>
+            <a:prstDash val="solid"/>
+          </a:ln>
         </p:spPr>
       </p:sp>
       <p:sp>
@@ -13606,7 +13878,7 @@
             <a:r>
               <a:rPr lang="en-US" sz="900" b="1" spc="100" kern="0" dirty="0">
                 <a:solidFill>
-                  <a:srgbClr val="2A2010"/>
+                  <a:srgbClr val="6BA0F8"/>
                 </a:solidFill>
                 <a:latin typeface="Courier New" pitchFamily="34" charset="0"/>
                 <a:ea typeface="Courier New" pitchFamily="34" charset="-122"/>
@@ -13659,9 +13931,14 @@
             </a:avLst>
           </a:prstGeom>
           <a:solidFill>
-            <a:srgbClr val="102A20"/>
+            <a:srgbClr val="06180F"/>
           </a:solidFill>
-          <a:ln/>
+          <a:ln w="12700">
+            <a:solidFill>
+              <a:srgbClr val="3FCF8E"/>
+            </a:solidFill>
+            <a:prstDash val="solid"/>
+          </a:ln>
         </p:spPr>
       </p:sp>
       <p:sp>
@@ -13691,7 +13968,7 @@
             <a:r>
               <a:rPr lang="en-US" sz="1450" b="1" dirty="0">
                 <a:solidFill>
-                  <a:srgbClr val="5FD6A0"/>
+                  <a:srgbClr val="3FCF8E"/>
                 </a:solidFill>
                 <a:latin typeface="Montserrat" pitchFamily="34" charset="0"/>
                 <a:ea typeface="Montserrat" pitchFamily="34" charset="-122"/>
@@ -13733,7 +14010,7 @@
             <a:r>
               <a:rPr lang="en-US" sz="1200" dirty="0">
                 <a:solidFill>
-                  <a:srgbClr val="FFFFFF"/>
+                  <a:srgbClr val="C9C4D6"/>
                 </a:solidFill>
                 <a:latin typeface="Montserrat" pitchFamily="34" charset="0"/>
                 <a:ea typeface="Montserrat" pitchFamily="34" charset="-122"/>
@@ -13762,9 +14039,14 @@
             </a:avLst>
           </a:prstGeom>
           <a:solidFill>
-            <a:srgbClr val="1C1140"/>
+            <a:srgbClr val="1A0B3D"/>
           </a:solidFill>
-          <a:ln/>
+          <a:ln w="12700">
+            <a:solidFill>
+              <a:srgbClr val="5A05F4"/>
+            </a:solidFill>
+            <a:prstDash val="solid"/>
+          </a:ln>
         </p:spPr>
       </p:sp>
       <p:sp>
@@ -13794,7 +14076,7 @@
             <a:r>
               <a:rPr lang="en-US" sz="1450" b="1" dirty="0">
                 <a:solidFill>
-                  <a:srgbClr val="C9A6FF"/>
+                  <a:srgbClr val="A98BFF"/>
                 </a:solidFill>
                 <a:latin typeface="Montserrat" pitchFamily="34" charset="0"/>
                 <a:ea typeface="Montserrat" pitchFamily="34" charset="-122"/>
@@ -13836,7 +14118,7 @@
             <a:r>
               <a:rPr lang="en-US" sz="1200" dirty="0">
                 <a:solidFill>
-                  <a:srgbClr val="FFFFFF"/>
+                  <a:srgbClr val="C9C4D6"/>
                 </a:solidFill>
                 <a:latin typeface="Montserrat" pitchFamily="34" charset="0"/>
                 <a:ea typeface="Montserrat" pitchFamily="34" charset="-122"/>
@@ -13865,9 +14147,14 @@
             </a:avLst>
           </a:prstGeom>
           <a:solidFill>
-            <a:srgbClr val="2E1418"/>
+            <a:srgbClr val="1A0808"/>
           </a:solidFill>
-          <a:ln/>
+          <a:ln w="12700">
+            <a:solidFill>
+              <a:srgbClr val="FF6B6B"/>
+            </a:solidFill>
+            <a:prstDash val="solid"/>
+          </a:ln>
         </p:spPr>
       </p:sp>
       <p:sp>
@@ -13897,7 +14184,7 @@
             <a:r>
               <a:rPr lang="en-US" sz="1450" b="1" dirty="0">
                 <a:solidFill>
-                  <a:srgbClr val="FF7B7B"/>
+                  <a:srgbClr val="FF6B6B"/>
                 </a:solidFill>
                 <a:latin typeface="Montserrat" pitchFamily="34" charset="0"/>
                 <a:ea typeface="Montserrat" pitchFamily="34" charset="-122"/>
@@ -13939,7 +14226,7 @@
             <a:r>
               <a:rPr lang="en-US" sz="1200" dirty="0">
                 <a:solidFill>
-                  <a:srgbClr val="FFFFFF"/>
+                  <a:srgbClr val="C9C4D6"/>
                 </a:solidFill>
                 <a:latin typeface="Montserrat" pitchFamily="34" charset="0"/>
                 <a:ea typeface="Montserrat" pitchFamily="34" charset="-122"/>
@@ -13968,11 +14255,11 @@
             </a:avLst>
           </a:prstGeom>
           <a:solidFill>
-            <a:srgbClr val="17141F"/>
+            <a:srgbClr val="000000"/>
           </a:solidFill>
           <a:ln w="12700">
             <a:solidFill>
-              <a:srgbClr val="2E2A3A"/>
+              <a:srgbClr val="5E4F85"/>
             </a:solidFill>
             <a:prstDash val="solid"/>
           </a:ln>
@@ -14050,7 +14337,7 @@
             <a:lvl1pPr>
               <a:defRPr sz="850">
                 <a:solidFill>
-                  <a:srgbClr val="8A82A0"/>
+                  <a:srgbClr val="9A94AA"/>
                 </a:solidFill>
                 <a:latin typeface="Courier New"/>
                 <a:ea typeface="Courier New"/>
@@ -14149,9 +14436,14 @@
             </a:avLst>
           </a:prstGeom>
           <a:solidFill>
-            <a:srgbClr val="E8A857"/>
+            <a:srgbClr val="0B1A38"/>
           </a:solidFill>
-          <a:ln/>
+          <a:ln w="12700">
+            <a:solidFill>
+              <a:srgbClr val="6BA0F8"/>
+            </a:solidFill>
+            <a:prstDash val="solid"/>
+          </a:ln>
         </p:spPr>
       </p:sp>
       <p:sp>
@@ -14181,7 +14473,7 @@
             <a:r>
               <a:rPr lang="en-US" sz="900" b="1" spc="100" kern="0" dirty="0">
                 <a:solidFill>
-                  <a:srgbClr val="2A2010"/>
+                  <a:srgbClr val="6BA0F8"/>
                 </a:solidFill>
                 <a:latin typeface="Courier New" pitchFamily="34" charset="0"/>
                 <a:ea typeface="Courier New" pitchFamily="34" charset="-122"/>
@@ -14234,11 +14526,11 @@
             </a:avLst>
           </a:prstGeom>
           <a:solidFill>
-            <a:srgbClr val="17141F"/>
+            <a:srgbClr val="000000"/>
           </a:solidFill>
           <a:ln w="12700">
             <a:solidFill>
-              <a:srgbClr val="2E2A3A"/>
+              <a:srgbClr val="5E4F85"/>
             </a:solidFill>
             <a:prstDash val="solid"/>
           </a:ln>
@@ -14261,11 +14553,11 @@
             </a:avLst>
           </a:prstGeom>
           <a:solidFill>
-            <a:srgbClr val="1C1140"/>
+            <a:srgbClr val="1A0B3D"/>
           </a:solidFill>
           <a:ln w="12700">
             <a:solidFill>
-              <a:srgbClr val="C9A6FF"/>
+              <a:srgbClr val="A98BFF"/>
             </a:solidFill>
             <a:prstDash val="solid"/>
           </a:ln>
@@ -14286,7 +14578,7 @@
             <a:avLst/>
           </a:prstGeom>
           <a:solidFill>
-            <a:srgbClr val="C9A6FF"/>
+            <a:srgbClr val="A98BFF"/>
           </a:solidFill>
           <a:ln/>
         </p:spPr>
@@ -14306,7 +14598,7 @@
             <a:avLst/>
           </a:prstGeom>
           <a:solidFill>
-            <a:srgbClr val="C9A6FF"/>
+            <a:srgbClr val="A98BFF"/>
           </a:solidFill>
           <a:ln/>
         </p:spPr>
@@ -14367,11 +14659,11 @@
             </a:avLst>
           </a:prstGeom>
           <a:solidFill>
-            <a:srgbClr val="1C1140"/>
+            <a:srgbClr val="1A0B3D"/>
           </a:solidFill>
           <a:ln w="12700">
             <a:solidFill>
-              <a:srgbClr val="C9A6FF"/>
+              <a:srgbClr val="A98BFF"/>
             </a:solidFill>
             <a:prstDash val="solid"/>
           </a:ln>
@@ -14392,7 +14684,7 @@
             <a:avLst/>
           </a:prstGeom>
           <a:solidFill>
-            <a:srgbClr val="C9A6FF"/>
+            <a:srgbClr val="A98BFF"/>
           </a:solidFill>
           <a:ln/>
         </p:spPr>
@@ -14412,7 +14704,7 @@
             <a:avLst/>
           </a:prstGeom>
           <a:solidFill>
-            <a:srgbClr val="C9A6FF"/>
+            <a:srgbClr val="A98BFF"/>
           </a:solidFill>
           <a:ln/>
         </p:spPr>
@@ -14473,11 +14765,11 @@
             </a:avLst>
           </a:prstGeom>
           <a:solidFill>
-            <a:srgbClr val="1C1140"/>
+            <a:srgbClr val="1A0B3D"/>
           </a:solidFill>
           <a:ln w="12700">
             <a:solidFill>
-              <a:srgbClr val="C9A6FF"/>
+              <a:srgbClr val="A98BFF"/>
             </a:solidFill>
             <a:prstDash val="solid"/>
           </a:ln>
@@ -14498,7 +14790,7 @@
             <a:avLst/>
           </a:prstGeom>
           <a:solidFill>
-            <a:srgbClr val="C9A6FF"/>
+            <a:srgbClr val="A98BFF"/>
           </a:solidFill>
           <a:ln/>
         </p:spPr>
@@ -14518,7 +14810,7 @@
             <a:avLst/>
           </a:prstGeom>
           <a:solidFill>
-            <a:srgbClr val="C9A6FF"/>
+            <a:srgbClr val="A98BFF"/>
           </a:solidFill>
           <a:ln/>
         </p:spPr>
@@ -14579,11 +14871,11 @@
             </a:avLst>
           </a:prstGeom>
           <a:solidFill>
-            <a:srgbClr val="1C1140"/>
+            <a:srgbClr val="1A0B3D"/>
           </a:solidFill>
           <a:ln w="12700">
             <a:solidFill>
-              <a:srgbClr val="C9A6FF"/>
+              <a:srgbClr val="A98BFF"/>
             </a:solidFill>
             <a:prstDash val="solid"/>
           </a:ln>
@@ -14604,7 +14896,7 @@
             <a:avLst/>
           </a:prstGeom>
           <a:solidFill>
-            <a:srgbClr val="C9A6FF"/>
+            <a:srgbClr val="A98BFF"/>
           </a:solidFill>
           <a:ln/>
         </p:spPr>
@@ -14624,7 +14916,7 @@
             <a:avLst/>
           </a:prstGeom>
           <a:solidFill>
-            <a:srgbClr val="C9A6FF"/>
+            <a:srgbClr val="A98BFF"/>
           </a:solidFill>
           <a:ln/>
         </p:spPr>
@@ -14695,7 +14987,7 @@
             <a:r>
               <a:rPr lang="en-US" sz="1200" i="1" dirty="0">
                 <a:solidFill>
-                  <a:srgbClr val="8A82A0"/>
+                  <a:srgbClr val="9A94AA"/>
                 </a:solidFill>
                 <a:latin typeface="Montserrat" pitchFamily="34" charset="0"/>
                 <a:ea typeface="Montserrat" pitchFamily="34" charset="-122"/>
@@ -14737,7 +15029,7 @@
             <a:lvl1pPr>
               <a:defRPr sz="850">
                 <a:solidFill>
-                  <a:srgbClr val="8A82A0"/>
+                  <a:srgbClr val="9A94AA"/>
                 </a:solidFill>
                 <a:latin typeface="Courier New"/>
                 <a:ea typeface="Courier New"/>
@@ -14836,9 +15128,14 @@
             </a:avLst>
           </a:prstGeom>
           <a:solidFill>
-            <a:srgbClr val="E8A857"/>
+            <a:srgbClr val="0B1A38"/>
           </a:solidFill>
-          <a:ln/>
+          <a:ln w="12700">
+            <a:solidFill>
+              <a:srgbClr val="6BA0F8"/>
+            </a:solidFill>
+            <a:prstDash val="solid"/>
+          </a:ln>
         </p:spPr>
       </p:sp>
       <p:sp>
@@ -14868,7 +15165,7 @@
             <a:r>
               <a:rPr lang="en-US" sz="900" b="1" spc="100" kern="0" dirty="0">
                 <a:solidFill>
-                  <a:srgbClr val="2A2010"/>
+                  <a:srgbClr val="6BA0F8"/>
                 </a:solidFill>
                 <a:latin typeface="Courier New" pitchFamily="34" charset="0"/>
                 <a:ea typeface="Courier New" pitchFamily="34" charset="-122"/>
@@ -14921,11 +15218,11 @@
             </a:avLst>
           </a:prstGeom>
           <a:solidFill>
-            <a:srgbClr val="17141F"/>
+            <a:srgbClr val="000000"/>
           </a:solidFill>
           <a:ln w="12700">
             <a:solidFill>
-              <a:srgbClr val="2E2A3A"/>
+              <a:srgbClr val="5E4F85"/>
             </a:solidFill>
             <a:prstDash val="solid"/>
           </a:ln>
@@ -14946,7 +15243,7 @@
             <a:avLst/>
           </a:prstGeom>
           <a:solidFill>
-            <a:srgbClr val="2E1418"/>
+            <a:srgbClr val="1A0808"/>
           </a:solidFill>
           <a:ln/>
         </p:spPr>
@@ -14966,7 +15263,7 @@
             <a:avLst/>
           </a:prstGeom>
           <a:solidFill>
-            <a:srgbClr val="FF7B7B"/>
+            <a:srgbClr val="FF6B6B"/>
           </a:solidFill>
           <a:ln/>
         </p:spPr>
@@ -14986,7 +15283,7 @@
             <a:avLst/>
           </a:prstGeom>
           <a:solidFill>
-            <a:srgbClr val="FF7B7B"/>
+            <a:srgbClr val="FF6B6B"/>
           </a:solidFill>
           <a:ln/>
         </p:spPr>
@@ -15032,7 +15329,7 @@
             <a:r>
               <a:rPr lang="en-US" sz="1200" dirty="0">
                 <a:solidFill>
-                  <a:srgbClr val="AFA9BE"/>
+                  <a:srgbClr val="C9C4D6"/>
                 </a:solidFill>
                 <a:latin typeface="Montserrat" pitchFamily="34" charset="0"/>
                 <a:ea typeface="Montserrat" pitchFamily="34" charset="-122"/>
@@ -15061,11 +15358,11 @@
             </a:avLst>
           </a:prstGeom>
           <a:solidFill>
-            <a:srgbClr val="17141F"/>
+            <a:srgbClr val="000000"/>
           </a:solidFill>
           <a:ln w="12700">
             <a:solidFill>
-              <a:srgbClr val="2E2A3A"/>
+              <a:srgbClr val="5E4F85"/>
             </a:solidFill>
             <a:prstDash val="solid"/>
           </a:ln>
@@ -15086,7 +15383,7 @@
             <a:avLst/>
           </a:prstGeom>
           <a:solidFill>
-            <a:srgbClr val="2E1418"/>
+            <a:srgbClr val="1A0808"/>
           </a:solidFill>
           <a:ln/>
         </p:spPr>
@@ -15106,7 +15403,7 @@
             <a:avLst/>
           </a:prstGeom>
           <a:solidFill>
-            <a:srgbClr val="FF7B7B"/>
+            <a:srgbClr val="FF6B6B"/>
           </a:solidFill>
           <a:ln/>
         </p:spPr>
@@ -15126,7 +15423,7 @@
             <a:avLst/>
           </a:prstGeom>
           <a:solidFill>
-            <a:srgbClr val="FF7B7B"/>
+            <a:srgbClr val="FF6B6B"/>
           </a:solidFill>
           <a:ln/>
         </p:spPr>
@@ -15172,7 +15469,7 @@
             <a:r>
               <a:rPr lang="en-US" sz="1200" dirty="0">
                 <a:solidFill>
-                  <a:srgbClr val="AFA9BE"/>
+                  <a:srgbClr val="C9C4D6"/>
                 </a:solidFill>
                 <a:latin typeface="Montserrat" pitchFamily="34" charset="0"/>
                 <a:ea typeface="Montserrat" pitchFamily="34" charset="-122"/>
@@ -15201,11 +15498,11 @@
             </a:avLst>
           </a:prstGeom>
           <a:solidFill>
-            <a:srgbClr val="17141F"/>
+            <a:srgbClr val="000000"/>
           </a:solidFill>
           <a:ln w="12700">
             <a:solidFill>
-              <a:srgbClr val="2E2A3A"/>
+              <a:srgbClr val="5E4F85"/>
             </a:solidFill>
             <a:prstDash val="solid"/>
           </a:ln>
@@ -15226,7 +15523,7 @@
             <a:avLst/>
           </a:prstGeom>
           <a:solidFill>
-            <a:srgbClr val="2E1418"/>
+            <a:srgbClr val="1A0808"/>
           </a:solidFill>
           <a:ln/>
         </p:spPr>
@@ -15246,7 +15543,7 @@
             <a:avLst/>
           </a:prstGeom>
           <a:solidFill>
-            <a:srgbClr val="FF7B7B"/>
+            <a:srgbClr val="FF6B6B"/>
           </a:solidFill>
           <a:ln/>
         </p:spPr>
@@ -15266,7 +15563,7 @@
             <a:avLst/>
           </a:prstGeom>
           <a:solidFill>
-            <a:srgbClr val="FF7B7B"/>
+            <a:srgbClr val="FF6B6B"/>
           </a:solidFill>
           <a:ln/>
         </p:spPr>
@@ -15312,7 +15609,7 @@
             <a:r>
               <a:rPr lang="en-US" sz="1200" dirty="0">
                 <a:solidFill>
-                  <a:srgbClr val="AFA9BE"/>
+                  <a:srgbClr val="C9C4D6"/>
                 </a:solidFill>
                 <a:latin typeface="Montserrat" pitchFamily="34" charset="0"/>
                 <a:ea typeface="Montserrat" pitchFamily="34" charset="-122"/>
@@ -15341,11 +15638,11 @@
             </a:avLst>
           </a:prstGeom>
           <a:solidFill>
-            <a:srgbClr val="17141F"/>
+            <a:srgbClr val="000000"/>
           </a:solidFill>
           <a:ln w="12700">
             <a:solidFill>
-              <a:srgbClr val="2E2A3A"/>
+              <a:srgbClr val="5E4F85"/>
             </a:solidFill>
             <a:prstDash val="solid"/>
           </a:ln>
@@ -15366,7 +15663,7 @@
             <a:avLst/>
           </a:prstGeom>
           <a:solidFill>
-            <a:srgbClr val="2E1418"/>
+            <a:srgbClr val="1A0808"/>
           </a:solidFill>
           <a:ln/>
         </p:spPr>
@@ -15386,7 +15683,7 @@
             <a:avLst/>
           </a:prstGeom>
           <a:solidFill>
-            <a:srgbClr val="FF7B7B"/>
+            <a:srgbClr val="FF6B6B"/>
           </a:solidFill>
           <a:ln/>
         </p:spPr>
@@ -15406,7 +15703,7 @@
             <a:avLst/>
           </a:prstGeom>
           <a:solidFill>
-            <a:srgbClr val="FF7B7B"/>
+            <a:srgbClr val="FF6B6B"/>
           </a:solidFill>
           <a:ln/>
         </p:spPr>
@@ -15452,7 +15749,7 @@
             <a:r>
               <a:rPr lang="en-US" sz="1200" dirty="0">
                 <a:solidFill>
-                  <a:srgbClr val="AFA9BE"/>
+                  <a:srgbClr val="C9C4D6"/>
                 </a:solidFill>
                 <a:latin typeface="Montserrat" pitchFamily="34" charset="0"/>
                 <a:ea typeface="Montserrat" pitchFamily="34" charset="-122"/>
@@ -15494,7 +15791,7 @@
             <a:lvl1pPr>
               <a:defRPr sz="850">
                 <a:solidFill>
-                  <a:srgbClr val="8A82A0"/>
+                  <a:srgbClr val="9A94AA"/>
                 </a:solidFill>
                 <a:latin typeface="Courier New"/>
                 <a:ea typeface="Courier New"/>
@@ -15593,7 +15890,7 @@
             </a:avLst>
           </a:prstGeom>
           <a:solidFill>
-            <a:srgbClr val="5FD6A0"/>
+            <a:srgbClr val="5A05F4"/>
           </a:solidFill>
           <a:ln/>
         </p:spPr>
@@ -15625,7 +15922,7 @@
             <a:r>
               <a:rPr lang="en-US" sz="900" b="1" spc="100" kern="0" dirty="0">
                 <a:solidFill>
-                  <a:srgbClr val="102A20"/>
+                  <a:srgbClr val="FFFFFF"/>
                 </a:solidFill>
                 <a:latin typeface="Courier New" pitchFamily="34" charset="0"/>
                 <a:ea typeface="Courier New" pitchFamily="34" charset="-122"/>
@@ -15678,11 +15975,11 @@
             </a:avLst>
           </a:prstGeom>
           <a:solidFill>
-            <a:srgbClr val="17141F"/>
+            <a:srgbClr val="000000"/>
           </a:solidFill>
           <a:ln w="12700">
             <a:solidFill>
-              <a:srgbClr val="2E2A3A"/>
+              <a:srgbClr val="5E4F85"/>
             </a:solidFill>
             <a:prstDash val="solid"/>
           </a:ln>
@@ -15757,7 +16054,7 @@
             <a:r>
               <a:rPr lang="en-US" sz="1200" dirty="0">
                 <a:solidFill>
-                  <a:srgbClr val="AFA9BE"/>
+                  <a:srgbClr val="C9C4D6"/>
                 </a:solidFill>
                 <a:latin typeface="Montserrat" pitchFamily="34" charset="0"/>
                 <a:ea typeface="Montserrat" pitchFamily="34" charset="-122"/>
@@ -15786,7 +16083,7 @@
             <a:r>
               <a:rPr lang="en-US" sz="1200" dirty="0">
                 <a:solidFill>
-                  <a:srgbClr val="AFA9BE"/>
+                  <a:srgbClr val="C9C4D6"/>
                 </a:solidFill>
                 <a:latin typeface="Montserrat" pitchFamily="34" charset="0"/>
                 <a:ea typeface="Montserrat" pitchFamily="34" charset="-122"/>
@@ -15815,7 +16112,7 @@
             <a:r>
               <a:rPr lang="en-US" sz="1200" dirty="0">
                 <a:solidFill>
-                  <a:srgbClr val="AFA9BE"/>
+                  <a:srgbClr val="C9C4D6"/>
                 </a:solidFill>
                 <a:latin typeface="Montserrat" pitchFamily="34" charset="0"/>
                 <a:ea typeface="Montserrat" pitchFamily="34" charset="-122"/>
@@ -15844,9 +16141,14 @@
             </a:avLst>
           </a:prstGeom>
           <a:solidFill>
-            <a:srgbClr val="2A2010"/>
+            <a:srgbClr val="0B1A38"/>
           </a:solidFill>
-          <a:ln/>
+          <a:ln w="12700">
+            <a:solidFill>
+              <a:srgbClr val="6BA0F8"/>
+            </a:solidFill>
+            <a:prstDash val="solid"/>
+          </a:ln>
         </p:spPr>
       </p:sp>
       <p:sp>
@@ -15876,7 +16178,7 @@
             <a:r>
               <a:rPr lang="en-US" sz="1450" b="1" dirty="0">
                 <a:solidFill>
-                  <a:srgbClr val="E8A857"/>
+                  <a:srgbClr val="6BA0F8"/>
                 </a:solidFill>
                 <a:latin typeface="Montserrat" pitchFamily="34" charset="0"/>
                 <a:ea typeface="Montserrat" pitchFamily="34" charset="-122"/>
@@ -15918,7 +16220,7 @@
             <a:r>
               <a:rPr lang="en-US" sz="1200" dirty="0">
                 <a:solidFill>
-                  <a:srgbClr val="FFFFFF"/>
+                  <a:srgbClr val="C9C4D6"/>
                 </a:solidFill>
                 <a:latin typeface="Montserrat" pitchFamily="34" charset="0"/>
                 <a:ea typeface="Montserrat" pitchFamily="34" charset="-122"/>
@@ -15947,7 +16249,7 @@
             <a:r>
               <a:rPr lang="en-US" sz="1200" dirty="0">
                 <a:solidFill>
-                  <a:srgbClr val="FFFFFF"/>
+                  <a:srgbClr val="C9C4D6"/>
                 </a:solidFill>
                 <a:latin typeface="Montserrat" pitchFamily="34" charset="0"/>
                 <a:ea typeface="Montserrat" pitchFamily="34" charset="-122"/>
@@ -15976,11 +16278,11 @@
             </a:avLst>
           </a:prstGeom>
           <a:solidFill>
-            <a:srgbClr val="17141F"/>
+            <a:srgbClr val="000000"/>
           </a:solidFill>
           <a:ln w="19050">
             <a:solidFill>
-              <a:srgbClr val="C9A6FF"/>
+              <a:srgbClr val="A98BFF"/>
             </a:solidFill>
             <a:prstDash val="solid"/>
           </a:ln>
@@ -16013,7 +16315,7 @@
             <a:r>
               <a:rPr lang="en-US" sz="1500" b="1" dirty="0">
                 <a:solidFill>
-                  <a:srgbClr val="C9A6FF"/>
+                  <a:srgbClr val="A98BFF"/>
                 </a:solidFill>
                 <a:latin typeface="Montserrat" pitchFamily="34" charset="0"/>
                 <a:ea typeface="Montserrat" pitchFamily="34" charset="-122"/>
@@ -16094,7 +16396,7 @@
             <a:lvl1pPr>
               <a:defRPr sz="850">
                 <a:solidFill>
-                  <a:srgbClr val="8A82A0"/>
+                  <a:srgbClr val="9A94AA"/>
                 </a:solidFill>
                 <a:latin typeface="Courier New"/>
                 <a:ea typeface="Courier New"/>
@@ -16203,7 +16505,7 @@
             <a:r>
               <a:rPr lang="en-US" sz="1100" b="1" spc="300" kern="0" dirty="0">
                 <a:solidFill>
-                  <a:srgbClr val="C9B8FB"/>
+                  <a:srgbClr val="C4B3F5"/>
                 </a:solidFill>
                 <a:latin typeface="Courier New" pitchFamily="34" charset="0"/>
                 <a:ea typeface="Courier New" pitchFamily="34" charset="-122"/>
@@ -16542,11 +16844,11 @@
             </a:avLst>
           </a:prstGeom>
           <a:solidFill>
-            <a:srgbClr val="17141F"/>
+            <a:srgbClr val="000000"/>
           </a:solidFill>
           <a:ln w="12700">
             <a:solidFill>
-              <a:srgbClr val="2E2A3A"/>
+              <a:srgbClr val="5E4F85"/>
             </a:solidFill>
             <a:prstDash val="solid"/>
           </a:ln>
@@ -16579,7 +16881,7 @@
             <a:r>
               <a:rPr lang="en-US" sz="1500" b="1" dirty="0">
                 <a:solidFill>
-                  <a:srgbClr val="C9A6FF"/>
+                  <a:srgbClr val="A98BFF"/>
                 </a:solidFill>
                 <a:latin typeface="Montserrat" pitchFamily="34" charset="0"/>
                 <a:ea typeface="Montserrat" pitchFamily="34" charset="-122"/>
@@ -16714,9 +17016,14 @@
             </a:avLst>
           </a:prstGeom>
           <a:solidFill>
-            <a:srgbClr val="C9A6FF"/>
+            <a:srgbClr val="1A0B3D"/>
           </a:solidFill>
-          <a:ln/>
+          <a:ln w="12700">
+            <a:solidFill>
+              <a:srgbClr val="5A05F4"/>
+            </a:solidFill>
+            <a:prstDash val="solid"/>
+          </a:ln>
         </p:spPr>
       </p:sp>
       <p:sp>
@@ -16746,7 +17053,7 @@
             <a:r>
               <a:rPr lang="en-US" sz="900" b="1" spc="100" kern="0" dirty="0">
                 <a:solidFill>
-                  <a:srgbClr val="1C1140"/>
+                  <a:srgbClr val="A98BFF"/>
                 </a:solidFill>
                 <a:latin typeface="Courier New" pitchFamily="34" charset="0"/>
                 <a:ea typeface="Courier New" pitchFamily="34" charset="-122"/>
@@ -16799,11 +17106,11 @@
             </a:avLst>
           </a:prstGeom>
           <a:solidFill>
-            <a:srgbClr val="17141F"/>
+            <a:srgbClr val="000000"/>
           </a:solidFill>
           <a:ln w="12700">
             <a:solidFill>
-              <a:srgbClr val="2E2A3A"/>
+              <a:srgbClr val="5E4F85"/>
             </a:solidFill>
             <a:prstDash val="solid"/>
           </a:ln>
@@ -16924,11 +17231,11 @@
             </a:avLst>
           </a:prstGeom>
           <a:solidFill>
-            <a:srgbClr val="17141F"/>
+            <a:srgbClr val="000000"/>
           </a:solidFill>
           <a:ln w="12700">
             <a:solidFill>
-              <a:srgbClr val="2E2A3A"/>
+              <a:srgbClr val="5E4F85"/>
             </a:solidFill>
             <a:prstDash val="solid"/>
           </a:ln>
@@ -17049,11 +17356,11 @@
             </a:avLst>
           </a:prstGeom>
           <a:solidFill>
-            <a:srgbClr val="17141F"/>
+            <a:srgbClr val="000000"/>
           </a:solidFill>
           <a:ln w="12700">
             <a:solidFill>
-              <a:srgbClr val="2E2A3A"/>
+              <a:srgbClr val="5E4F85"/>
             </a:solidFill>
             <a:prstDash val="solid"/>
           </a:ln>
@@ -17174,11 +17481,11 @@
             </a:avLst>
           </a:prstGeom>
           <a:solidFill>
-            <a:srgbClr val="17141F"/>
+            <a:srgbClr val="000000"/>
           </a:solidFill>
           <a:ln w="12700">
             <a:solidFill>
-              <a:srgbClr val="2E2A3A"/>
+              <a:srgbClr val="5E4F85"/>
             </a:solidFill>
             <a:prstDash val="solid"/>
           </a:ln>
@@ -17299,11 +17606,11 @@
             </a:avLst>
           </a:prstGeom>
           <a:solidFill>
-            <a:srgbClr val="17141F"/>
+            <a:srgbClr val="000000"/>
           </a:solidFill>
           <a:ln w="12700">
             <a:solidFill>
-              <a:srgbClr val="2E2A3A"/>
+              <a:srgbClr val="5E4F85"/>
             </a:solidFill>
             <a:prstDash val="solid"/>
           </a:ln>
@@ -17424,11 +17731,11 @@
             </a:avLst>
           </a:prstGeom>
           <a:solidFill>
-            <a:srgbClr val="17141F"/>
+            <a:srgbClr val="000000"/>
           </a:solidFill>
           <a:ln w="12700">
             <a:solidFill>
-              <a:srgbClr val="2E2A3A"/>
+              <a:srgbClr val="5E4F85"/>
             </a:solidFill>
             <a:prstDash val="solid"/>
           </a:ln>
@@ -17549,11 +17856,11 @@
             </a:avLst>
           </a:prstGeom>
           <a:solidFill>
-            <a:srgbClr val="17141F"/>
+            <a:srgbClr val="000000"/>
           </a:solidFill>
           <a:ln w="12700">
             <a:solidFill>
-              <a:srgbClr val="2E2A3A"/>
+              <a:srgbClr val="5E4F85"/>
             </a:solidFill>
             <a:prstDash val="solid"/>
           </a:ln>
@@ -17674,9 +17981,14 @@
             </a:avLst>
           </a:prstGeom>
           <a:solidFill>
-            <a:srgbClr val="2A2010"/>
+            <a:srgbClr val="0B1A38"/>
           </a:solidFill>
-          <a:ln/>
+          <a:ln w="12700">
+            <a:solidFill>
+              <a:srgbClr val="6BA0F8"/>
+            </a:solidFill>
+            <a:prstDash val="solid"/>
+          </a:ln>
         </p:spPr>
       </p:sp>
       <p:sp>
@@ -17694,7 +18006,7 @@
             <a:avLst/>
           </a:prstGeom>
           <a:solidFill>
-            <a:srgbClr val="E8A857"/>
+            <a:srgbClr val="5A05F4"/>
           </a:solidFill>
           <a:ln/>
         </p:spPr>
@@ -17726,7 +18038,7 @@
             <a:r>
               <a:rPr lang="en-US" sz="1200" b="1" dirty="0">
                 <a:solidFill>
-                  <a:srgbClr val="2A2010"/>
+                  <a:srgbClr val="FFFFFF"/>
                 </a:solidFill>
                 <a:latin typeface="Courier New" pitchFamily="34" charset="0"/>
                 <a:ea typeface="Courier New" pitchFamily="34" charset="-122"/>
@@ -17765,7 +18077,7 @@
             <a:r>
               <a:rPr lang="en-US" sz="1450" b="1" dirty="0">
                 <a:solidFill>
-                  <a:srgbClr val="E8A857"/>
+                  <a:srgbClr val="6BA0F8"/>
                 </a:solidFill>
                 <a:latin typeface="Montserrat" pitchFamily="34" charset="0"/>
                 <a:ea typeface="Montserrat" pitchFamily="34" charset="-122"/>
@@ -17794,11 +18106,11 @@
             </a:avLst>
           </a:prstGeom>
           <a:solidFill>
-            <a:srgbClr val="17141F"/>
+            <a:srgbClr val="000000"/>
           </a:solidFill>
           <a:ln w="12700">
             <a:solidFill>
-              <a:srgbClr val="2E2A3A"/>
+              <a:srgbClr val="5E4F85"/>
             </a:solidFill>
             <a:prstDash val="solid"/>
           </a:ln>
@@ -17919,11 +18231,11 @@
             </a:avLst>
           </a:prstGeom>
           <a:solidFill>
-            <a:srgbClr val="17141F"/>
+            <a:srgbClr val="000000"/>
           </a:solidFill>
           <a:ln w="12700">
             <a:solidFill>
-              <a:srgbClr val="2E2A3A"/>
+              <a:srgbClr val="5E4F85"/>
             </a:solidFill>
             <a:prstDash val="solid"/>
           </a:ln>
@@ -18044,11 +18356,11 @@
             </a:avLst>
           </a:prstGeom>
           <a:solidFill>
-            <a:srgbClr val="17141F"/>
+            <a:srgbClr val="000000"/>
           </a:solidFill>
           <a:ln w="12700">
             <a:solidFill>
-              <a:srgbClr val="2E2A3A"/>
+              <a:srgbClr val="5E4F85"/>
             </a:solidFill>
             <a:prstDash val="solid"/>
           </a:ln>
@@ -18126,7 +18438,7 @@
             <a:lvl1pPr>
               <a:defRPr sz="850">
                 <a:solidFill>
-                  <a:srgbClr val="8A82A0"/>
+                  <a:srgbClr val="9A94AA"/>
                 </a:solidFill>
                 <a:latin typeface="Courier New"/>
                 <a:ea typeface="Courier New"/>
@@ -18238,7 +18550,7 @@
             <a:r>
               <a:rPr lang="en-US" sz="1300" dirty="0">
                 <a:solidFill>
-                  <a:srgbClr val="AFA9BE"/>
+                  <a:srgbClr val="C9C4D6"/>
                 </a:solidFill>
                 <a:latin typeface="Montserrat" pitchFamily="34" charset="0"/>
                 <a:ea typeface="Montserrat" pitchFamily="34" charset="-122"/>
@@ -18267,9 +18579,14 @@
             </a:avLst>
           </a:prstGeom>
           <a:solidFill>
-            <a:srgbClr val="C9A6FF"/>
+            <a:srgbClr val="1A0B3D"/>
           </a:solidFill>
-          <a:ln/>
+          <a:ln w="12700">
+            <a:solidFill>
+              <a:srgbClr val="5A05F4"/>
+            </a:solidFill>
+            <a:prstDash val="solid"/>
+          </a:ln>
         </p:spPr>
       </p:sp>
       <p:sp>
@@ -18299,7 +18616,7 @@
             <a:r>
               <a:rPr lang="en-US" sz="900" b="1" spc="100" kern="0" dirty="0">
                 <a:solidFill>
-                  <a:srgbClr val="1C1140"/>
+                  <a:srgbClr val="A98BFF"/>
                 </a:solidFill>
                 <a:latin typeface="Courier New" pitchFamily="34" charset="0"/>
                 <a:ea typeface="Courier New" pitchFamily="34" charset="-122"/>
@@ -18352,11 +18669,11 @@
             </a:avLst>
           </a:prstGeom>
           <a:solidFill>
-            <a:srgbClr val="17141F"/>
+            <a:srgbClr val="000000"/>
           </a:solidFill>
           <a:ln w="12700">
             <a:solidFill>
-              <a:srgbClr val="2E2A3A"/>
+              <a:srgbClr val="5E4F85"/>
             </a:solidFill>
             <a:prstDash val="solid"/>
           </a:ln>
@@ -18389,7 +18706,7 @@
             <a:r>
               <a:rPr lang="en-US" sz="1250" b="1" dirty="0">
                 <a:solidFill>
-                  <a:srgbClr val="C9A6FF"/>
+                  <a:srgbClr val="A98BFF"/>
                 </a:solidFill>
                 <a:latin typeface="Courier New" pitchFamily="34" charset="0"/>
                 <a:ea typeface="Courier New" pitchFamily="34" charset="-122"/>
@@ -18431,7 +18748,7 @@
             <a:r>
               <a:rPr lang="en-US" sz="1150" dirty="0">
                 <a:solidFill>
-                  <a:srgbClr val="AFA9BE"/>
+                  <a:srgbClr val="C9C4D6"/>
                 </a:solidFill>
                 <a:latin typeface="Montserrat" pitchFamily="34" charset="0"/>
                 <a:ea typeface="Montserrat" pitchFamily="34" charset="-122"/>
@@ -18460,11 +18777,11 @@
             </a:avLst>
           </a:prstGeom>
           <a:solidFill>
-            <a:srgbClr val="17141F"/>
+            <a:srgbClr val="000000"/>
           </a:solidFill>
           <a:ln w="12700">
             <a:solidFill>
-              <a:srgbClr val="2E2A3A"/>
+              <a:srgbClr val="5E4F85"/>
             </a:solidFill>
             <a:prstDash val="solid"/>
           </a:ln>
@@ -18497,7 +18814,7 @@
             <a:r>
               <a:rPr lang="en-US" sz="1250" b="1" dirty="0">
                 <a:solidFill>
-                  <a:srgbClr val="C9A6FF"/>
+                  <a:srgbClr val="A98BFF"/>
                 </a:solidFill>
                 <a:latin typeface="Courier New" pitchFamily="34" charset="0"/>
                 <a:ea typeface="Courier New" pitchFamily="34" charset="-122"/>
@@ -18539,7 +18856,7 @@
             <a:r>
               <a:rPr lang="en-US" sz="1150" dirty="0">
                 <a:solidFill>
-                  <a:srgbClr val="AFA9BE"/>
+                  <a:srgbClr val="C9C4D6"/>
                 </a:solidFill>
                 <a:latin typeface="Montserrat" pitchFamily="34" charset="0"/>
                 <a:ea typeface="Montserrat" pitchFamily="34" charset="-122"/>
@@ -18568,11 +18885,11 @@
             </a:avLst>
           </a:prstGeom>
           <a:solidFill>
-            <a:srgbClr val="17141F"/>
+            <a:srgbClr val="000000"/>
           </a:solidFill>
           <a:ln w="12700">
             <a:solidFill>
-              <a:srgbClr val="2E2A3A"/>
+              <a:srgbClr val="5E4F85"/>
             </a:solidFill>
             <a:prstDash val="solid"/>
           </a:ln>
@@ -18605,7 +18922,7 @@
             <a:r>
               <a:rPr lang="en-US" sz="1250" b="1" dirty="0">
                 <a:solidFill>
-                  <a:srgbClr val="C9A6FF"/>
+                  <a:srgbClr val="A98BFF"/>
                 </a:solidFill>
                 <a:latin typeface="Courier New" pitchFamily="34" charset="0"/>
                 <a:ea typeface="Courier New" pitchFamily="34" charset="-122"/>
@@ -18647,7 +18964,7 @@
             <a:r>
               <a:rPr lang="en-US" sz="1150" dirty="0">
                 <a:solidFill>
-                  <a:srgbClr val="AFA9BE"/>
+                  <a:srgbClr val="C9C4D6"/>
                 </a:solidFill>
                 <a:latin typeface="Montserrat" pitchFamily="34" charset="0"/>
                 <a:ea typeface="Montserrat" pitchFamily="34" charset="-122"/>
@@ -18676,11 +18993,11 @@
             </a:avLst>
           </a:prstGeom>
           <a:solidFill>
-            <a:srgbClr val="17141F"/>
+            <a:srgbClr val="000000"/>
           </a:solidFill>
           <a:ln w="12700">
             <a:solidFill>
-              <a:srgbClr val="2E2A3A"/>
+              <a:srgbClr val="5E4F85"/>
             </a:solidFill>
             <a:prstDash val="solid"/>
           </a:ln>
@@ -18713,7 +19030,7 @@
             <a:r>
               <a:rPr lang="en-US" sz="1250" b="1" dirty="0">
                 <a:solidFill>
-                  <a:srgbClr val="C9A6FF"/>
+                  <a:srgbClr val="A98BFF"/>
                 </a:solidFill>
                 <a:latin typeface="Courier New" pitchFamily="34" charset="0"/>
                 <a:ea typeface="Courier New" pitchFamily="34" charset="-122"/>
@@ -18755,7 +19072,7 @@
             <a:r>
               <a:rPr lang="en-US" sz="1150" dirty="0">
                 <a:solidFill>
-                  <a:srgbClr val="AFA9BE"/>
+                  <a:srgbClr val="C9C4D6"/>
                 </a:solidFill>
                 <a:latin typeface="Montserrat" pitchFamily="34" charset="0"/>
                 <a:ea typeface="Montserrat" pitchFamily="34" charset="-122"/>
@@ -18784,11 +19101,11 @@
             </a:avLst>
           </a:prstGeom>
           <a:solidFill>
-            <a:srgbClr val="17141F"/>
+            <a:srgbClr val="000000"/>
           </a:solidFill>
           <a:ln w="12700">
             <a:solidFill>
-              <a:srgbClr val="2E2A3A"/>
+              <a:srgbClr val="5E4F85"/>
             </a:solidFill>
             <a:prstDash val="solid"/>
           </a:ln>
@@ -18821,7 +19138,7 @@
             <a:r>
               <a:rPr lang="en-US" sz="1250" b="1" dirty="0">
                 <a:solidFill>
-                  <a:srgbClr val="C9A6FF"/>
+                  <a:srgbClr val="A98BFF"/>
                 </a:solidFill>
                 <a:latin typeface="Courier New" pitchFamily="34" charset="0"/>
                 <a:ea typeface="Courier New" pitchFamily="34" charset="-122"/>
@@ -18863,7 +19180,7 @@
             <a:r>
               <a:rPr lang="en-US" sz="1150" dirty="0">
                 <a:solidFill>
-                  <a:srgbClr val="AFA9BE"/>
+                  <a:srgbClr val="C9C4D6"/>
                 </a:solidFill>
                 <a:latin typeface="Montserrat" pitchFamily="34" charset="0"/>
                 <a:ea typeface="Montserrat" pitchFamily="34" charset="-122"/>
@@ -18892,11 +19209,11 @@
             </a:avLst>
           </a:prstGeom>
           <a:solidFill>
-            <a:srgbClr val="17141F"/>
+            <a:srgbClr val="000000"/>
           </a:solidFill>
           <a:ln w="12700">
             <a:solidFill>
-              <a:srgbClr val="2E2A3A"/>
+              <a:srgbClr val="5E4F85"/>
             </a:solidFill>
             <a:prstDash val="solid"/>
           </a:ln>
@@ -18929,7 +19246,7 @@
             <a:r>
               <a:rPr lang="en-US" sz="1250" b="1" dirty="0">
                 <a:solidFill>
-                  <a:srgbClr val="C9A6FF"/>
+                  <a:srgbClr val="A98BFF"/>
                 </a:solidFill>
                 <a:latin typeface="Courier New" pitchFamily="34" charset="0"/>
                 <a:ea typeface="Courier New" pitchFamily="34" charset="-122"/>
@@ -18971,7 +19288,7 @@
             <a:r>
               <a:rPr lang="en-US" sz="1150" dirty="0">
                 <a:solidFill>
-                  <a:srgbClr val="AFA9BE"/>
+                  <a:srgbClr val="C9C4D6"/>
                 </a:solidFill>
                 <a:latin typeface="Montserrat" pitchFamily="34" charset="0"/>
                 <a:ea typeface="Montserrat" pitchFamily="34" charset="-122"/>
@@ -19000,11 +19317,11 @@
             </a:avLst>
           </a:prstGeom>
           <a:solidFill>
-            <a:srgbClr val="17141F"/>
+            <a:srgbClr val="000000"/>
           </a:solidFill>
           <a:ln w="12700">
             <a:solidFill>
-              <a:srgbClr val="2E2A3A"/>
+              <a:srgbClr val="5E4F85"/>
             </a:solidFill>
             <a:prstDash val="solid"/>
           </a:ln>
@@ -19082,7 +19399,7 @@
             <a:lvl1pPr>
               <a:defRPr sz="850">
                 <a:solidFill>
-                  <a:srgbClr val="8A82A0"/>
+                  <a:srgbClr val="9A94AA"/>
                 </a:solidFill>
                 <a:latin typeface="Courier New"/>
                 <a:ea typeface="Courier New"/>
@@ -19152,7 +19469,7 @@
             <a:r>
               <a:rPr lang="en-US" sz="2600" b="1" dirty="0">
                 <a:solidFill>
-                  <a:srgbClr val="C9A6FF"/>
+                  <a:srgbClr val="A98BFF"/>
                 </a:solidFill>
                 <a:latin typeface="Courier New" pitchFamily="34" charset="0"/>
                 <a:ea typeface="Courier New" pitchFamily="34" charset="-122"/>
@@ -19220,9 +19537,14 @@
             </a:avLst>
           </a:prstGeom>
           <a:solidFill>
-            <a:srgbClr val="C9A6FF"/>
+            <a:srgbClr val="1A0B3D"/>
           </a:solidFill>
-          <a:ln/>
+          <a:ln w="12700">
+            <a:solidFill>
+              <a:srgbClr val="5A05F4"/>
+            </a:solidFill>
+            <a:prstDash val="solid"/>
+          </a:ln>
         </p:spPr>
       </p:sp>
       <p:sp>
@@ -19252,7 +19574,7 @@
             <a:r>
               <a:rPr lang="en-US" sz="900" b="1" spc="100" kern="0" dirty="0">
                 <a:solidFill>
-                  <a:srgbClr val="1C1140"/>
+                  <a:srgbClr val="A98BFF"/>
                 </a:solidFill>
                 <a:latin typeface="Courier New" pitchFamily="34" charset="0"/>
                 <a:ea typeface="Courier New" pitchFamily="34" charset="-122"/>
@@ -19305,9 +19627,14 @@
             </a:avLst>
           </a:prstGeom>
           <a:solidFill>
-            <a:srgbClr val="2E1418"/>
+            <a:srgbClr val="1A0808"/>
           </a:solidFill>
-          <a:ln/>
+          <a:ln w="12700">
+            <a:solidFill>
+              <a:srgbClr val="FF6B6B"/>
+            </a:solidFill>
+            <a:prstDash val="solid"/>
+          </a:ln>
         </p:spPr>
       </p:sp>
       <p:sp>
@@ -19337,7 +19664,7 @@
             <a:r>
               <a:rPr lang="en-US" sz="3000" b="1" dirty="0">
                 <a:solidFill>
-                  <a:srgbClr val="FF7B7B"/>
+                  <a:srgbClr val="FF6B6B"/>
                 </a:solidFill>
                 <a:latin typeface="Montserrat" pitchFamily="34" charset="0"/>
                 <a:ea typeface="Montserrat" pitchFamily="34" charset="-122"/>
@@ -19376,7 +19703,7 @@
             <a:r>
               <a:rPr lang="en-US" sz="1150" dirty="0">
                 <a:solidFill>
-                  <a:srgbClr val="FF7B7B"/>
+                  <a:srgbClr val="C9C4D6"/>
                 </a:solidFill>
                 <a:latin typeface="Montserrat" pitchFamily="34" charset="0"/>
                 <a:ea typeface="Montserrat" pitchFamily="34" charset="-122"/>
@@ -19405,9 +19732,14 @@
             </a:avLst>
           </a:prstGeom>
           <a:solidFill>
-            <a:srgbClr val="2A2010"/>
+            <a:srgbClr val="0B1A38"/>
           </a:solidFill>
-          <a:ln/>
+          <a:ln w="12700">
+            <a:solidFill>
+              <a:srgbClr val="6BA0F8"/>
+            </a:solidFill>
+            <a:prstDash val="solid"/>
+          </a:ln>
         </p:spPr>
       </p:sp>
       <p:sp>
@@ -19437,7 +19769,7 @@
             <a:r>
               <a:rPr lang="en-US" sz="3000" b="1" dirty="0">
                 <a:solidFill>
-                  <a:srgbClr val="E8A857"/>
+                  <a:srgbClr val="6BA0F8"/>
                 </a:solidFill>
                 <a:latin typeface="Montserrat" pitchFamily="34" charset="0"/>
                 <a:ea typeface="Montserrat" pitchFamily="34" charset="-122"/>
@@ -19476,7 +19808,7 @@
             <a:r>
               <a:rPr lang="en-US" sz="1150" dirty="0">
                 <a:solidFill>
-                  <a:srgbClr val="E8A857"/>
+                  <a:srgbClr val="C9C4D6"/>
                 </a:solidFill>
                 <a:latin typeface="Montserrat" pitchFamily="34" charset="0"/>
                 <a:ea typeface="Montserrat" pitchFamily="34" charset="-122"/>
@@ -19515,7 +19847,7 @@
             <a:r>
               <a:rPr lang="en-US" sz="900" b="1" spc="150" kern="0" dirty="0">
                 <a:solidFill>
-                  <a:srgbClr val="8A82A0"/>
+                  <a:srgbClr val="9A94AA"/>
                 </a:solidFill>
                 <a:latin typeface="Courier New" pitchFamily="34" charset="0"/>
                 <a:ea typeface="Courier New" pitchFamily="34" charset="-122"/>
@@ -19583,7 +19915,7 @@
             </a:avLst>
           </a:prstGeom>
           <a:solidFill>
-            <a:srgbClr val="FF7B7B"/>
+            <a:srgbClr val="FF6B6B"/>
           </a:solidFill>
           <a:ln/>
         </p:spPr>
@@ -19615,7 +19947,7 @@
             <a:r>
               <a:rPr lang="en-US" sz="1150" b="1" dirty="0">
                 <a:solidFill>
-                  <a:srgbClr val="FF7B7B"/>
+                  <a:srgbClr val="FF6B6B"/>
                 </a:solidFill>
                 <a:latin typeface="Montserrat" pitchFamily="34" charset="0"/>
                 <a:ea typeface="Montserrat" pitchFamily="34" charset="-122"/>
@@ -19683,7 +20015,7 @@
             </a:avLst>
           </a:prstGeom>
           <a:solidFill>
-            <a:srgbClr val="5FD6A0"/>
+            <a:srgbClr val="3FCF8E"/>
           </a:solidFill>
           <a:ln/>
         </p:spPr>
@@ -19715,7 +20047,7 @@
             <a:r>
               <a:rPr lang="en-US" sz="1150" b="1" dirty="0">
                 <a:solidFill>
-                  <a:srgbClr val="5FD6A0"/>
+                  <a:srgbClr val="3FCF8E"/>
                 </a:solidFill>
                 <a:latin typeface="Montserrat" pitchFamily="34" charset="0"/>
                 <a:ea typeface="Montserrat" pitchFamily="34" charset="-122"/>
@@ -19744,9 +20076,14 @@
             </a:avLst>
           </a:prstGeom>
           <a:solidFill>
-            <a:srgbClr val="2E1418"/>
+            <a:srgbClr val="1A0808"/>
           </a:solidFill>
-          <a:ln/>
+          <a:ln w="12700">
+            <a:solidFill>
+              <a:srgbClr val="FF6B6B"/>
+            </a:solidFill>
+            <a:prstDash val="solid"/>
+          </a:ln>
         </p:spPr>
       </p:sp>
       <p:sp>
@@ -19776,7 +20113,7 @@
             <a:r>
               <a:rPr lang="en-US" sz="950" b="1" spc="150" kern="0" dirty="0">
                 <a:solidFill>
-                  <a:srgbClr val="FF7B7B"/>
+                  <a:srgbClr val="FF6B6B"/>
                 </a:solidFill>
                 <a:latin typeface="Courier New" pitchFamily="34" charset="0"/>
                 <a:ea typeface="Courier New" pitchFamily="34" charset="-122"/>
@@ -19847,9 +20184,14 @@
             </a:avLst>
           </a:prstGeom>
           <a:solidFill>
-            <a:srgbClr val="102A20"/>
+            <a:srgbClr val="06180F"/>
           </a:solidFill>
-          <a:ln/>
+          <a:ln w="12700">
+            <a:solidFill>
+              <a:srgbClr val="3FCF8E"/>
+            </a:solidFill>
+            <a:prstDash val="solid"/>
+          </a:ln>
         </p:spPr>
       </p:sp>
       <p:sp>
@@ -19879,7 +20221,7 @@
             <a:r>
               <a:rPr lang="en-US" sz="950" b="1" spc="150" kern="0" dirty="0">
                 <a:solidFill>
-                  <a:srgbClr val="5FD6A0"/>
+                  <a:srgbClr val="3FCF8E"/>
                 </a:solidFill>
                 <a:latin typeface="Courier New" pitchFamily="34" charset="0"/>
                 <a:ea typeface="Courier New" pitchFamily="34" charset="-122"/>
@@ -19963,7 +20305,7 @@
             <a:lvl1pPr>
               <a:defRPr sz="850">
                 <a:solidFill>
-                  <a:srgbClr val="8A82A0"/>
+                  <a:srgbClr val="9A94AA"/>
                 </a:solidFill>
                 <a:latin typeface="Courier New"/>
                 <a:ea typeface="Courier New"/>
@@ -20033,7 +20375,7 @@
             <a:r>
               <a:rPr lang="en-US" sz="2600" b="1" dirty="0">
                 <a:solidFill>
-                  <a:srgbClr val="C9A6FF"/>
+                  <a:srgbClr val="A98BFF"/>
                 </a:solidFill>
                 <a:latin typeface="Courier New" pitchFamily="34" charset="0"/>
                 <a:ea typeface="Courier New" pitchFamily="34" charset="-122"/>
@@ -20101,9 +20443,14 @@
             </a:avLst>
           </a:prstGeom>
           <a:solidFill>
-            <a:srgbClr val="C9A6FF"/>
+            <a:srgbClr val="1A0B3D"/>
           </a:solidFill>
-          <a:ln/>
+          <a:ln w="12700">
+            <a:solidFill>
+              <a:srgbClr val="5A05F4"/>
+            </a:solidFill>
+            <a:prstDash val="solid"/>
+          </a:ln>
         </p:spPr>
       </p:sp>
       <p:sp>
@@ -20133,7 +20480,7 @@
             <a:r>
               <a:rPr lang="en-US" sz="900" b="1" spc="100" kern="0" dirty="0">
                 <a:solidFill>
-                  <a:srgbClr val="1C1140"/>
+                  <a:srgbClr val="A98BFF"/>
                 </a:solidFill>
                 <a:latin typeface="Courier New" pitchFamily="34" charset="0"/>
                 <a:ea typeface="Courier New" pitchFamily="34" charset="-122"/>
@@ -20186,9 +20533,14 @@
             </a:avLst>
           </a:prstGeom>
           <a:solidFill>
-            <a:srgbClr val="102A20"/>
+            <a:srgbClr val="06180F"/>
           </a:solidFill>
-          <a:ln/>
+          <a:ln w="12700">
+            <a:solidFill>
+              <a:srgbClr val="3FCF8E"/>
+            </a:solidFill>
+            <a:prstDash val="solid"/>
+          </a:ln>
         </p:spPr>
       </p:sp>
       <p:sp>
@@ -20218,7 +20570,7 @@
             <a:r>
               <a:rPr lang="en-US" sz="1450" b="1" dirty="0">
                 <a:solidFill>
-                  <a:srgbClr val="5FD6A0"/>
+                  <a:srgbClr val="3FCF8E"/>
                 </a:solidFill>
                 <a:latin typeface="Montserrat" pitchFamily="34" charset="0"/>
                 <a:ea typeface="Montserrat" pitchFamily="34" charset="-122"/>
@@ -20260,7 +20612,7 @@
             <a:r>
               <a:rPr lang="en-US" sz="1200" dirty="0">
                 <a:solidFill>
-                  <a:srgbClr val="FFFFFF"/>
+                  <a:srgbClr val="C9C4D6"/>
                 </a:solidFill>
                 <a:latin typeface="Montserrat" pitchFamily="34" charset="0"/>
                 <a:ea typeface="Montserrat" pitchFamily="34" charset="-122"/>
@@ -20289,9 +20641,14 @@
             </a:avLst>
           </a:prstGeom>
           <a:solidFill>
-            <a:srgbClr val="2E1418"/>
+            <a:srgbClr val="1A0808"/>
           </a:solidFill>
-          <a:ln/>
+          <a:ln w="12700">
+            <a:solidFill>
+              <a:srgbClr val="FF6B6B"/>
+            </a:solidFill>
+            <a:prstDash val="solid"/>
+          </a:ln>
         </p:spPr>
       </p:sp>
       <p:sp>
@@ -20321,7 +20678,7 @@
             <a:r>
               <a:rPr lang="en-US" sz="1450" b="1" dirty="0">
                 <a:solidFill>
-                  <a:srgbClr val="FF7B7B"/>
+                  <a:srgbClr val="FF6B6B"/>
                 </a:solidFill>
                 <a:latin typeface="Montserrat" pitchFamily="34" charset="0"/>
                 <a:ea typeface="Montserrat" pitchFamily="34" charset="-122"/>
@@ -20363,7 +20720,7 @@
             <a:r>
               <a:rPr lang="en-US" sz="1200" dirty="0">
                 <a:solidFill>
-                  <a:srgbClr val="FFFFFF"/>
+                  <a:srgbClr val="C9C4D6"/>
                 </a:solidFill>
                 <a:latin typeface="Montserrat" pitchFamily="34" charset="0"/>
                 <a:ea typeface="Montserrat" pitchFamily="34" charset="-122"/>
@@ -20392,9 +20749,14 @@
             </a:avLst>
           </a:prstGeom>
           <a:solidFill>
-            <a:srgbClr val="2E1418"/>
+            <a:srgbClr val="1A0808"/>
           </a:solidFill>
-          <a:ln/>
+          <a:ln w="12700">
+            <a:solidFill>
+              <a:srgbClr val="FF6B6B"/>
+            </a:solidFill>
+            <a:prstDash val="solid"/>
+          </a:ln>
         </p:spPr>
       </p:sp>
       <p:sp>
@@ -20424,7 +20786,7 @@
             <a:r>
               <a:rPr lang="en-US" sz="1450" b="1" dirty="0">
                 <a:solidFill>
-                  <a:srgbClr val="FF7B7B"/>
+                  <a:srgbClr val="FF6B6B"/>
                 </a:solidFill>
                 <a:latin typeface="Montserrat" pitchFamily="34" charset="0"/>
                 <a:ea typeface="Montserrat" pitchFamily="34" charset="-122"/>
@@ -20466,7 +20828,7 @@
             <a:r>
               <a:rPr lang="en-US" sz="1200" dirty="0">
                 <a:solidFill>
-                  <a:srgbClr val="FFFFFF"/>
+                  <a:srgbClr val="C9C4D6"/>
                 </a:solidFill>
                 <a:latin typeface="Montserrat" pitchFamily="34" charset="0"/>
                 <a:ea typeface="Montserrat" pitchFamily="34" charset="-122"/>
@@ -20495,9 +20857,14 @@
             </a:avLst>
           </a:prstGeom>
           <a:solidFill>
-            <a:srgbClr val="2E1418"/>
+            <a:srgbClr val="1A0808"/>
           </a:solidFill>
-          <a:ln/>
+          <a:ln w="12700">
+            <a:solidFill>
+              <a:srgbClr val="FF6B6B"/>
+            </a:solidFill>
+            <a:prstDash val="solid"/>
+          </a:ln>
         </p:spPr>
       </p:sp>
       <p:sp>
@@ -20527,7 +20894,7 @@
             <a:r>
               <a:rPr lang="en-US" sz="1450" b="1" dirty="0">
                 <a:solidFill>
-                  <a:srgbClr val="FF7B7B"/>
+                  <a:srgbClr val="FF6B6B"/>
                 </a:solidFill>
                 <a:latin typeface="Montserrat" pitchFamily="34" charset="0"/>
                 <a:ea typeface="Montserrat" pitchFamily="34" charset="-122"/>
@@ -20569,7 +20936,7 @@
             <a:r>
               <a:rPr lang="en-US" sz="1200" dirty="0">
                 <a:solidFill>
-                  <a:srgbClr val="FFFFFF"/>
+                  <a:srgbClr val="C9C4D6"/>
                 </a:solidFill>
                 <a:latin typeface="Montserrat" pitchFamily="34" charset="0"/>
                 <a:ea typeface="Montserrat" pitchFamily="34" charset="-122"/>
@@ -20701,11 +21068,11 @@
             </a:avLst>
           </a:prstGeom>
           <a:solidFill>
-            <a:srgbClr val="17141F"/>
+            <a:srgbClr val="000000"/>
           </a:solidFill>
           <a:ln w="12700">
             <a:solidFill>
-              <a:srgbClr val="2E2A3A"/>
+              <a:srgbClr val="5E4F85"/>
             </a:solidFill>
             <a:prstDash val="solid"/>
           </a:ln>
@@ -20783,7 +21150,7 @@
             <a:lvl1pPr>
               <a:defRPr sz="850">
                 <a:solidFill>
-                  <a:srgbClr val="8A82A0"/>
+                  <a:srgbClr val="9A94AA"/>
                 </a:solidFill>
                 <a:latin typeface="Courier New"/>
                 <a:ea typeface="Courier New"/>
@@ -20853,7 +21220,7 @@
             <a:r>
               <a:rPr lang="en-US" sz="2600" b="1" dirty="0">
                 <a:solidFill>
-                  <a:srgbClr val="C9A6FF"/>
+                  <a:srgbClr val="A98BFF"/>
                 </a:solidFill>
                 <a:latin typeface="Courier New" pitchFamily="34" charset="0"/>
                 <a:ea typeface="Courier New" pitchFamily="34" charset="-122"/>
@@ -20921,9 +21288,14 @@
             </a:avLst>
           </a:prstGeom>
           <a:solidFill>
-            <a:srgbClr val="C9A6FF"/>
+            <a:srgbClr val="1A0B3D"/>
           </a:solidFill>
-          <a:ln/>
+          <a:ln w="12700">
+            <a:solidFill>
+              <a:srgbClr val="5A05F4"/>
+            </a:solidFill>
+            <a:prstDash val="solid"/>
+          </a:ln>
         </p:spPr>
       </p:sp>
       <p:sp>
@@ -20953,7 +21325,7 @@
             <a:r>
               <a:rPr lang="en-US" sz="900" b="1" spc="100" kern="0" dirty="0">
                 <a:solidFill>
-                  <a:srgbClr val="1C1140"/>
+                  <a:srgbClr val="A98BFF"/>
                 </a:solidFill>
                 <a:latin typeface="Courier New" pitchFamily="34" charset="0"/>
                 <a:ea typeface="Courier New" pitchFamily="34" charset="-122"/>
@@ -21006,11 +21378,11 @@
             </a:avLst>
           </a:prstGeom>
           <a:solidFill>
-            <a:srgbClr val="12101A"/>
+            <a:srgbClr val="07060C"/>
           </a:solidFill>
           <a:ln w="12700">
             <a:solidFill>
-              <a:srgbClr val="2E2A3A"/>
+              <a:srgbClr val="5E4F85"/>
             </a:solidFill>
             <a:prstDash val="solid"/>
           </a:ln>
@@ -21063,7 +21435,7 @@
             <a:r>
               <a:rPr lang="en-US" sz="1300" dirty="0">
                 <a:solidFill>
-                  <a:srgbClr val="7FD9A6"/>
+                  <a:srgbClr val="6BA0F8"/>
                 </a:solidFill>
                 <a:latin typeface="Courier New" pitchFamily="34" charset="0"/>
                 <a:ea typeface="Courier New" pitchFamily="34" charset="-122"/>
@@ -21109,9 +21481,14 @@
             </a:avLst>
           </a:prstGeom>
           <a:solidFill>
-            <a:srgbClr val="1C1140"/>
+            <a:srgbClr val="1A0B3D"/>
           </a:solidFill>
-          <a:ln/>
+          <a:ln w="12700">
+            <a:solidFill>
+              <a:srgbClr val="5A05F4"/>
+            </a:solidFill>
+            <a:prstDash val="solid"/>
+          </a:ln>
         </p:spPr>
       </p:sp>
       <p:sp>
@@ -21141,7 +21518,7 @@
             <a:r>
               <a:rPr lang="en-US" sz="1150" b="1" dirty="0">
                 <a:solidFill>
-                  <a:srgbClr val="C9A6FF"/>
+                  <a:srgbClr val="A98BFF"/>
                 </a:solidFill>
                 <a:latin typeface="Courier New" pitchFamily="34" charset="0"/>
                 <a:ea typeface="Courier New" pitchFamily="34" charset="-122"/>
@@ -21170,7 +21547,7 @@
           <a:noFill/>
           <a:ln w="15875">
             <a:solidFill>
-              <a:srgbClr val="9B7BE8"/>
+              <a:srgbClr val="8F72E6"/>
             </a:solidFill>
             <a:prstDash val="solid"/>
           </a:ln>
@@ -21191,7 +21568,7 @@
             <a:avLst/>
           </a:prstGeom>
           <a:solidFill>
-            <a:srgbClr val="9B7BE8"/>
+            <a:srgbClr val="8F72E6"/>
           </a:solidFill>
           <a:ln/>
         </p:spPr>
@@ -21213,9 +21590,14 @@
             </a:avLst>
           </a:prstGeom>
           <a:solidFill>
-            <a:srgbClr val="1C1140"/>
+            <a:srgbClr val="1A0B3D"/>
           </a:solidFill>
-          <a:ln/>
+          <a:ln w="12700">
+            <a:solidFill>
+              <a:srgbClr val="5A05F4"/>
+            </a:solidFill>
+            <a:prstDash val="solid"/>
+          </a:ln>
         </p:spPr>
       </p:sp>
       <p:sp>
@@ -21245,7 +21627,7 @@
             <a:r>
               <a:rPr lang="en-US" sz="1150" b="1" dirty="0">
                 <a:solidFill>
-                  <a:srgbClr val="C9A6FF"/>
+                  <a:srgbClr val="A98BFF"/>
                 </a:solidFill>
                 <a:latin typeface="Courier New" pitchFamily="34" charset="0"/>
                 <a:ea typeface="Courier New" pitchFamily="34" charset="-122"/>
@@ -21274,7 +21656,7 @@
           <a:noFill/>
           <a:ln w="15875">
             <a:solidFill>
-              <a:srgbClr val="9B7BE8"/>
+              <a:srgbClr val="8F72E6"/>
             </a:solidFill>
             <a:prstDash val="solid"/>
           </a:ln>
@@ -21295,7 +21677,7 @@
             <a:avLst/>
           </a:prstGeom>
           <a:solidFill>
-            <a:srgbClr val="9B7BE8"/>
+            <a:srgbClr val="8F72E6"/>
           </a:solidFill>
           <a:ln/>
         </p:spPr>
@@ -21317,9 +21699,14 @@
             </a:avLst>
           </a:prstGeom>
           <a:solidFill>
-            <a:srgbClr val="1C1140"/>
+            <a:srgbClr val="1A0B3D"/>
           </a:solidFill>
-          <a:ln/>
+          <a:ln w="12700">
+            <a:solidFill>
+              <a:srgbClr val="5A05F4"/>
+            </a:solidFill>
+            <a:prstDash val="solid"/>
+          </a:ln>
         </p:spPr>
       </p:sp>
       <p:sp>
@@ -21349,7 +21736,7 @@
             <a:r>
               <a:rPr lang="en-US" sz="1150" b="1" dirty="0">
                 <a:solidFill>
-                  <a:srgbClr val="C9A6FF"/>
+                  <a:srgbClr val="A98BFF"/>
                 </a:solidFill>
                 <a:latin typeface="Courier New" pitchFamily="34" charset="0"/>
                 <a:ea typeface="Courier New" pitchFamily="34" charset="-122"/>
@@ -21378,9 +21765,14 @@
             </a:avLst>
           </a:prstGeom>
           <a:solidFill>
-            <a:srgbClr val="2E1418"/>
+            <a:srgbClr val="1A0808"/>
           </a:solidFill>
-          <a:ln/>
+          <a:ln w="12700">
+            <a:solidFill>
+              <a:srgbClr val="FF6B6B"/>
+            </a:solidFill>
+            <a:prstDash val="solid"/>
+          </a:ln>
         </p:spPr>
       </p:sp>
       <p:sp>
@@ -21410,7 +21802,7 @@
             <a:r>
               <a:rPr lang="en-US" sz="950" b="1" spc="150" kern="0" dirty="0">
                 <a:solidFill>
-                  <a:srgbClr val="FF7B7B"/>
+                  <a:srgbClr val="FF6B6B"/>
                 </a:solidFill>
                 <a:latin typeface="Courier New" pitchFamily="34" charset="0"/>
                 <a:ea typeface="Courier New" pitchFamily="34" charset="-122"/>
@@ -21481,9 +21873,14 @@
             </a:avLst>
           </a:prstGeom>
           <a:solidFill>
-            <a:srgbClr val="102A20"/>
+            <a:srgbClr val="06180F"/>
           </a:solidFill>
-          <a:ln/>
+          <a:ln w="12700">
+            <a:solidFill>
+              <a:srgbClr val="3FCF8E"/>
+            </a:solidFill>
+            <a:prstDash val="solid"/>
+          </a:ln>
         </p:spPr>
       </p:sp>
       <p:sp>
@@ -21558,7 +21955,7 @@
             <a:lvl1pPr>
               <a:defRPr sz="850">
                 <a:solidFill>
-                  <a:srgbClr val="8A82A0"/>
+                  <a:srgbClr val="9A94AA"/>
                 </a:solidFill>
                 <a:latin typeface="Courier New"/>
                 <a:ea typeface="Courier New"/>
@@ -21628,7 +22025,7 @@
             <a:r>
               <a:rPr lang="en-US" sz="2600" b="1" dirty="0">
                 <a:solidFill>
-                  <a:srgbClr val="C9A6FF"/>
+                  <a:srgbClr val="A98BFF"/>
                 </a:solidFill>
                 <a:latin typeface="Courier New" pitchFamily="34" charset="0"/>
                 <a:ea typeface="Courier New" pitchFamily="34" charset="-122"/>
@@ -21696,9 +22093,14 @@
             </a:avLst>
           </a:prstGeom>
           <a:solidFill>
-            <a:srgbClr val="C9A6FF"/>
+            <a:srgbClr val="1A0B3D"/>
           </a:solidFill>
-          <a:ln/>
+          <a:ln w="12700">
+            <a:solidFill>
+              <a:srgbClr val="5A05F4"/>
+            </a:solidFill>
+            <a:prstDash val="solid"/>
+          </a:ln>
         </p:spPr>
       </p:sp>
       <p:sp>
@@ -21728,7 +22130,7 @@
             <a:r>
               <a:rPr lang="en-US" sz="900" b="1" spc="100" kern="0" dirty="0">
                 <a:solidFill>
-                  <a:srgbClr val="1C1140"/>
+                  <a:srgbClr val="A98BFF"/>
                 </a:solidFill>
                 <a:latin typeface="Courier New" pitchFamily="34" charset="0"/>
                 <a:ea typeface="Courier New" pitchFamily="34" charset="-122"/>
@@ -21781,9 +22183,14 @@
             </a:avLst>
           </a:prstGeom>
           <a:solidFill>
-            <a:srgbClr val="102A20"/>
+            <a:srgbClr val="06180F"/>
           </a:solidFill>
-          <a:ln/>
+          <a:ln w="12700">
+            <a:solidFill>
+              <a:srgbClr val="3FCF8E"/>
+            </a:solidFill>
+            <a:prstDash val="solid"/>
+          </a:ln>
         </p:spPr>
       </p:sp>
       <p:sp>
@@ -21813,7 +22220,7 @@
             <a:r>
               <a:rPr lang="en-US" sz="1350" b="1" dirty="0">
                 <a:solidFill>
-                  <a:srgbClr val="5FD6A0"/>
+                  <a:srgbClr val="3FCF8E"/>
                 </a:solidFill>
                 <a:latin typeface="Montserrat" pitchFamily="34" charset="0"/>
                 <a:ea typeface="Montserrat" pitchFamily="34" charset="-122"/>
@@ -21852,7 +22259,7 @@
             <a:r>
               <a:rPr lang="en-US" sz="1150" dirty="0">
                 <a:solidFill>
-                  <a:srgbClr val="FFFFFF"/>
+                  <a:srgbClr val="C9C4D6"/>
                 </a:solidFill>
                 <a:latin typeface="Montserrat" pitchFamily="34" charset="0"/>
                 <a:ea typeface="Montserrat" pitchFamily="34" charset="-122"/>
@@ -21881,11 +22288,11 @@
             </a:avLst>
           </a:prstGeom>
           <a:solidFill>
-            <a:srgbClr val="17141F"/>
+            <a:srgbClr val="000000"/>
           </a:solidFill>
           <a:ln w="12700">
             <a:solidFill>
-              <a:srgbClr val="2E2A3A"/>
+              <a:srgbClr val="5E4F85"/>
             </a:solidFill>
             <a:prstDash val="solid"/>
           </a:ln>
@@ -21957,7 +22364,7 @@
             <a:r>
               <a:rPr lang="en-US" sz="1150" dirty="0">
                 <a:solidFill>
-                  <a:srgbClr val="AFA9BE"/>
+                  <a:srgbClr val="C9C4D6"/>
                 </a:solidFill>
                 <a:latin typeface="Montserrat" pitchFamily="34" charset="0"/>
                 <a:ea typeface="Montserrat" pitchFamily="34" charset="-122"/>
@@ -21986,9 +22393,14 @@
             </a:avLst>
           </a:prstGeom>
           <a:solidFill>
-            <a:srgbClr val="2E1418"/>
+            <a:srgbClr val="1A0808"/>
           </a:solidFill>
-          <a:ln/>
+          <a:ln w="12700">
+            <a:solidFill>
+              <a:srgbClr val="FF6B6B"/>
+            </a:solidFill>
+            <a:prstDash val="solid"/>
+          </a:ln>
         </p:spPr>
       </p:sp>
       <p:sp>
@@ -22018,7 +22430,7 @@
             <a:r>
               <a:rPr lang="en-US" sz="1350" b="1" dirty="0">
                 <a:solidFill>
-                  <a:srgbClr val="FF7B7B"/>
+                  <a:srgbClr val="FF6B6B"/>
                 </a:solidFill>
                 <a:latin typeface="Montserrat" pitchFamily="34" charset="0"/>
                 <a:ea typeface="Montserrat" pitchFamily="34" charset="-122"/>
@@ -22057,7 +22469,7 @@
             <a:r>
               <a:rPr lang="en-US" sz="1150" dirty="0">
                 <a:solidFill>
-                  <a:srgbClr val="FFFFFF"/>
+                  <a:srgbClr val="C9C4D6"/>
                 </a:solidFill>
                 <a:latin typeface="Montserrat" pitchFamily="34" charset="0"/>
                 <a:ea typeface="Montserrat" pitchFamily="34" charset="-122"/>
@@ -22086,7 +22498,7 @@
           <a:noFill/>
           <a:ln w="19050">
             <a:solidFill>
-              <a:srgbClr val="2E2A3A"/>
+              <a:srgbClr val="5E4F85"/>
             </a:solidFill>
             <a:prstDash val="solid"/>
           </a:ln>
@@ -22107,7 +22519,7 @@
             <a:avLst/>
           </a:prstGeom>
           <a:solidFill>
-            <a:srgbClr val="5FD6A0"/>
+            <a:srgbClr val="3FCF8E"/>
           </a:solidFill>
           <a:ln/>
         </p:spPr>
@@ -22139,7 +22551,7 @@
             <a:r>
               <a:rPr lang="en-US" sz="900" b="1" dirty="0">
                 <a:solidFill>
-                  <a:srgbClr val="5FD6A0"/>
+                  <a:srgbClr val="3FCF8E"/>
                 </a:solidFill>
                 <a:latin typeface="Courier New" pitchFamily="34" charset="0"/>
                 <a:ea typeface="Courier New" pitchFamily="34" charset="-122"/>
@@ -22166,7 +22578,7 @@
             <a:avLst/>
           </a:prstGeom>
           <a:solidFill>
-            <a:srgbClr val="C9A6FF"/>
+            <a:srgbClr val="A98BFF"/>
           </a:solidFill>
           <a:ln/>
         </p:spPr>
@@ -22198,7 +22610,7 @@
             <a:r>
               <a:rPr lang="en-US" sz="900" b="1" dirty="0">
                 <a:solidFill>
-                  <a:srgbClr val="C9A6FF"/>
+                  <a:srgbClr val="A98BFF"/>
                 </a:solidFill>
                 <a:latin typeface="Courier New" pitchFamily="34" charset="0"/>
                 <a:ea typeface="Courier New" pitchFamily="34" charset="-122"/>
@@ -22225,7 +22637,7 @@
             <a:avLst/>
           </a:prstGeom>
           <a:solidFill>
-            <a:srgbClr val="FF7B7B"/>
+            <a:srgbClr val="FF6B6B"/>
           </a:solidFill>
           <a:ln/>
         </p:spPr>
@@ -22257,7 +22669,7 @@
             <a:r>
               <a:rPr lang="en-US" sz="900" b="1" dirty="0">
                 <a:solidFill>
-                  <a:srgbClr val="FF7B7B"/>
+                  <a:srgbClr val="FF6B6B"/>
                 </a:solidFill>
                 <a:latin typeface="Courier New" pitchFamily="34" charset="0"/>
                 <a:ea typeface="Courier New" pitchFamily="34" charset="-122"/>
@@ -22296,7 +22708,7 @@
             <a:r>
               <a:rPr lang="en-US" sz="850" dirty="0">
                 <a:solidFill>
-                  <a:srgbClr val="8A82A0"/>
+                  <a:srgbClr val="9A94AA"/>
                 </a:solidFill>
                 <a:latin typeface="Courier New" pitchFamily="34" charset="0"/>
                 <a:ea typeface="Courier New" pitchFamily="34" charset="-122"/>
@@ -22335,7 +22747,7 @@
             <a:r>
               <a:rPr lang="en-US" sz="850" dirty="0">
                 <a:solidFill>
-                  <a:srgbClr val="8A82A0"/>
+                  <a:srgbClr val="9A94AA"/>
                 </a:solidFill>
                 <a:latin typeface="Courier New" pitchFamily="34" charset="0"/>
                 <a:ea typeface="Courier New" pitchFamily="34" charset="-122"/>
@@ -22480,7 +22892,7 @@
             <a:lvl1pPr>
               <a:defRPr sz="850">
                 <a:solidFill>
-                  <a:srgbClr val="8A82A0"/>
+                  <a:srgbClr val="9A94AA"/>
                 </a:solidFill>
                 <a:latin typeface="Courier New"/>
                 <a:ea typeface="Courier New"/>
@@ -22550,7 +22962,7 @@
             <a:r>
               <a:rPr lang="en-US" sz="2600" b="1" dirty="0">
                 <a:solidFill>
-                  <a:srgbClr val="C9A6FF"/>
+                  <a:srgbClr val="A98BFF"/>
                 </a:solidFill>
                 <a:latin typeface="Courier New" pitchFamily="34" charset="0"/>
                 <a:ea typeface="Courier New" pitchFamily="34" charset="-122"/>
@@ -22618,9 +23030,14 @@
             </a:avLst>
           </a:prstGeom>
           <a:solidFill>
-            <a:srgbClr val="C9A6FF"/>
+            <a:srgbClr val="1A0B3D"/>
           </a:solidFill>
-          <a:ln/>
+          <a:ln w="12700">
+            <a:solidFill>
+              <a:srgbClr val="5A05F4"/>
+            </a:solidFill>
+            <a:prstDash val="solid"/>
+          </a:ln>
         </p:spPr>
       </p:sp>
       <p:sp>
@@ -22650,7 +23067,7 @@
             <a:r>
               <a:rPr lang="en-US" sz="900" b="1" spc="100" kern="0" dirty="0">
                 <a:solidFill>
-                  <a:srgbClr val="1C1140"/>
+                  <a:srgbClr val="A98BFF"/>
                 </a:solidFill>
                 <a:latin typeface="Courier New" pitchFamily="34" charset="0"/>
                 <a:ea typeface="Courier New" pitchFamily="34" charset="-122"/>
@@ -22703,11 +23120,11 @@
             </a:avLst>
           </a:prstGeom>
           <a:solidFill>
-            <a:srgbClr val="12101A"/>
+            <a:srgbClr val="07060C"/>
           </a:solidFill>
           <a:ln w="12700">
             <a:solidFill>
-              <a:srgbClr val="2E2A3A"/>
+              <a:srgbClr val="5E4F85"/>
             </a:solidFill>
             <a:prstDash val="solid"/>
           </a:ln>
@@ -22743,7 +23160,7 @@
             <a:r>
               <a:rPr lang="en-US" sz="1150" dirty="0">
                 <a:solidFill>
-                  <a:srgbClr val="8A82A0"/>
+                  <a:srgbClr val="9A94AA"/>
                 </a:solidFill>
                 <a:latin typeface="Courier New" pitchFamily="34" charset="0"/>
                 <a:ea typeface="Courier New" pitchFamily="34" charset="-122"/>
@@ -22763,7 +23180,7 @@
             <a:r>
               <a:rPr lang="en-US" sz="1150" dirty="0">
                 <a:solidFill>
-                  <a:srgbClr val="C9A6FF"/>
+                  <a:srgbClr val="A98BFF"/>
                 </a:solidFill>
                 <a:latin typeface="Courier New" pitchFamily="34" charset="0"/>
                 <a:ea typeface="Courier New" pitchFamily="34" charset="-122"/>
@@ -22803,7 +23220,7 @@
             <a:r>
               <a:rPr lang="en-US" sz="1150" dirty="0">
                 <a:solidFill>
-                  <a:srgbClr val="7FD9A6"/>
+                  <a:srgbClr val="6BA0F8"/>
                 </a:solidFill>
                 <a:latin typeface="Courier New" pitchFamily="34" charset="0"/>
                 <a:ea typeface="Courier New" pitchFamily="34" charset="-122"/>
@@ -22823,7 +23240,7 @@
             <a:r>
               <a:rPr lang="en-US" sz="1150" dirty="0">
                 <a:solidFill>
-                  <a:srgbClr val="C9A6FF"/>
+                  <a:srgbClr val="A98BFF"/>
                 </a:solidFill>
                 <a:latin typeface="Courier New" pitchFamily="34" charset="0"/>
                 <a:ea typeface="Courier New" pitchFamily="34" charset="-122"/>
@@ -22843,7 +23260,7 @@
             <a:r>
               <a:rPr lang="en-US" sz="1150" dirty="0">
                 <a:solidFill>
-                  <a:srgbClr val="F0B36B"/>
+                  <a:srgbClr val="C9C4D6"/>
                 </a:solidFill>
                 <a:latin typeface="Courier New" pitchFamily="34" charset="0"/>
                 <a:ea typeface="Courier New" pitchFamily="34" charset="-122"/>
@@ -22863,7 +23280,7 @@
             <a:r>
               <a:rPr lang="en-US" sz="1150" dirty="0">
                 <a:solidFill>
-                  <a:srgbClr val="8A82A0"/>
+                  <a:srgbClr val="9A94AA"/>
                 </a:solidFill>
                 <a:latin typeface="Courier New" pitchFamily="34" charset="0"/>
                 <a:ea typeface="Courier New" pitchFamily="34" charset="-122"/>
@@ -22903,7 +23320,7 @@
             <a:r>
               <a:rPr lang="en-US" sz="1150" dirty="0">
                 <a:solidFill>
-                  <a:srgbClr val="C9A6FF"/>
+                  <a:srgbClr val="A98BFF"/>
                 </a:solidFill>
                 <a:latin typeface="Courier New" pitchFamily="34" charset="0"/>
                 <a:ea typeface="Courier New" pitchFamily="34" charset="-122"/>
@@ -22932,9 +23349,14 @@
             </a:avLst>
           </a:prstGeom>
           <a:solidFill>
-            <a:srgbClr val="102A20"/>
+            <a:srgbClr val="06180F"/>
           </a:solidFill>
-          <a:ln/>
+          <a:ln w="12700">
+            <a:solidFill>
+              <a:srgbClr val="3FCF8E"/>
+            </a:solidFill>
+            <a:prstDash val="solid"/>
+          </a:ln>
         </p:spPr>
       </p:sp>
       <p:sp>
@@ -22952,7 +23374,7 @@
             <a:avLst/>
           </a:prstGeom>
           <a:solidFill>
-            <a:srgbClr val="5FD6A0"/>
+            <a:srgbClr val="5A05F4"/>
           </a:solidFill>
           <a:ln/>
         </p:spPr>
@@ -22984,7 +23406,7 @@
             <a:r>
               <a:rPr lang="en-US" sz="1200" b="1" dirty="0">
                 <a:solidFill>
-                  <a:srgbClr val="102A20"/>
+                  <a:srgbClr val="FFFFFF"/>
                 </a:solidFill>
                 <a:latin typeface="Courier New" pitchFamily="34" charset="0"/>
                 <a:ea typeface="Courier New" pitchFamily="34" charset="-122"/>
@@ -23023,7 +23445,7 @@
             <a:r>
               <a:rPr lang="en-US" sz="1450" b="1" dirty="0">
                 <a:solidFill>
-                  <a:srgbClr val="5FD6A0"/>
+                  <a:srgbClr val="3FCF8E"/>
                 </a:solidFill>
                 <a:latin typeface="Montserrat" pitchFamily="34" charset="0"/>
                 <a:ea typeface="Montserrat" pitchFamily="34" charset="-122"/>
@@ -23065,7 +23487,7 @@
             <a:r>
               <a:rPr lang="en-US" sz="1200" dirty="0">
                 <a:solidFill>
-                  <a:srgbClr val="FFFFFF"/>
+                  <a:srgbClr val="C9C4D6"/>
                 </a:solidFill>
                 <a:latin typeface="Montserrat" pitchFamily="34" charset="0"/>
                 <a:ea typeface="Montserrat" pitchFamily="34" charset="-122"/>
@@ -23094,9 +23516,14 @@
             </a:avLst>
           </a:prstGeom>
           <a:solidFill>
-            <a:srgbClr val="102A20"/>
+            <a:srgbClr val="06180F"/>
           </a:solidFill>
-          <a:ln/>
+          <a:ln w="12700">
+            <a:solidFill>
+              <a:srgbClr val="3FCF8E"/>
+            </a:solidFill>
+            <a:prstDash val="solid"/>
+          </a:ln>
         </p:spPr>
       </p:sp>
       <p:sp>
@@ -23114,7 +23541,7 @@
             <a:avLst/>
           </a:prstGeom>
           <a:solidFill>
-            <a:srgbClr val="5FD6A0"/>
+            <a:srgbClr val="5A05F4"/>
           </a:solidFill>
           <a:ln/>
         </p:spPr>
@@ -23146,7 +23573,7 @@
             <a:r>
               <a:rPr lang="en-US" sz="1200" b="1" dirty="0">
                 <a:solidFill>
-                  <a:srgbClr val="102A20"/>
+                  <a:srgbClr val="FFFFFF"/>
                 </a:solidFill>
                 <a:latin typeface="Courier New" pitchFamily="34" charset="0"/>
                 <a:ea typeface="Courier New" pitchFamily="34" charset="-122"/>
@@ -23185,7 +23612,7 @@
             <a:r>
               <a:rPr lang="en-US" sz="1450" b="1" dirty="0">
                 <a:solidFill>
-                  <a:srgbClr val="5FD6A0"/>
+                  <a:srgbClr val="3FCF8E"/>
                 </a:solidFill>
                 <a:latin typeface="Montserrat" pitchFamily="34" charset="0"/>
                 <a:ea typeface="Montserrat" pitchFamily="34" charset="-122"/>
@@ -23227,7 +23654,7 @@
             <a:r>
               <a:rPr lang="en-US" sz="1200" dirty="0">
                 <a:solidFill>
-                  <a:srgbClr val="FFFFFF"/>
+                  <a:srgbClr val="C9C4D6"/>
                 </a:solidFill>
                 <a:latin typeface="Montserrat" pitchFamily="34" charset="0"/>
                 <a:ea typeface="Montserrat" pitchFamily="34" charset="-122"/>
@@ -23256,9 +23683,14 @@
             </a:avLst>
           </a:prstGeom>
           <a:solidFill>
-            <a:srgbClr val="102A20"/>
+            <a:srgbClr val="06180F"/>
           </a:solidFill>
-          <a:ln/>
+          <a:ln w="12700">
+            <a:solidFill>
+              <a:srgbClr val="3FCF8E"/>
+            </a:solidFill>
+            <a:prstDash val="solid"/>
+          </a:ln>
         </p:spPr>
       </p:sp>
       <p:sp>
@@ -23276,7 +23708,7 @@
             <a:avLst/>
           </a:prstGeom>
           <a:solidFill>
-            <a:srgbClr val="5FD6A0"/>
+            <a:srgbClr val="5A05F4"/>
           </a:solidFill>
           <a:ln/>
         </p:spPr>
@@ -23308,7 +23740,7 @@
             <a:r>
               <a:rPr lang="en-US" sz="1200" b="1" dirty="0">
                 <a:solidFill>
-                  <a:srgbClr val="102A20"/>
+                  <a:srgbClr val="FFFFFF"/>
                 </a:solidFill>
                 <a:latin typeface="Courier New" pitchFamily="34" charset="0"/>
                 <a:ea typeface="Courier New" pitchFamily="34" charset="-122"/>
@@ -23347,7 +23779,7 @@
             <a:r>
               <a:rPr lang="en-US" sz="1450" b="1" dirty="0">
                 <a:solidFill>
-                  <a:srgbClr val="5FD6A0"/>
+                  <a:srgbClr val="3FCF8E"/>
                 </a:solidFill>
                 <a:latin typeface="Montserrat" pitchFamily="34" charset="0"/>
                 <a:ea typeface="Montserrat" pitchFamily="34" charset="-122"/>
@@ -23389,7 +23821,7 @@
             <a:r>
               <a:rPr lang="en-US" sz="1200" dirty="0">
                 <a:solidFill>
-                  <a:srgbClr val="FFFFFF"/>
+                  <a:srgbClr val="C9C4D6"/>
                 </a:solidFill>
                 <a:latin typeface="Montserrat" pitchFamily="34" charset="0"/>
                 <a:ea typeface="Montserrat" pitchFamily="34" charset="-122"/>
@@ -23431,7 +23863,7 @@
             <a:lvl1pPr>
               <a:defRPr sz="850">
                 <a:solidFill>
-                  <a:srgbClr val="8A82A0"/>
+                  <a:srgbClr val="9A94AA"/>
                 </a:solidFill>
                 <a:latin typeface="Courier New"/>
                 <a:ea typeface="Courier New"/>

--- a/docs/decks/L05.pptx
+++ b/docs/decks/L05.pptx
@@ -10055,7 +10055,7 @@
             </a:avLst>
           </a:prstGeom>
           <a:solidFill>
-            <a:srgbClr val="F5F3FA"/>
+            <a:srgbClr val="106B41"/>
           </a:solidFill>
           <a:ln/>
         </p:spPr>
@@ -10087,7 +10087,7 @@
             <a:r>
               <a:rPr lang="en-US" sz="1100" b="1" dirty="0">
                 <a:solidFill>
-                  <a:srgbClr val="106B41"/>
+                  <a:srgbClr val="FFFFFF"/>
                 </a:solidFill>
                 <a:latin typeface="Montserrat" pitchFamily="34" charset="0"/>
                 <a:ea typeface="Montserrat" pitchFamily="34" charset="-122"/>
@@ -10101,7 +10101,7 @@
             <a:r>
               <a:rPr lang="en-US" sz="1100" dirty="0">
                 <a:solidFill>
-                  <a:srgbClr val="434343"/>
+                  <a:srgbClr val="E9E4F7"/>
                 </a:solidFill>
                 <a:latin typeface="Montserrat" pitchFamily="34" charset="0"/>
                 <a:ea typeface="Montserrat" pitchFamily="34" charset="-122"/>
@@ -10130,7 +10130,7 @@
             </a:avLst>
           </a:prstGeom>
           <a:solidFill>
-            <a:srgbClr val="F5F3FA"/>
+            <a:srgbClr val="1A4FBF"/>
           </a:solidFill>
           <a:ln/>
         </p:spPr>
@@ -10162,7 +10162,7 @@
             <a:r>
               <a:rPr lang="en-US" sz="1100" b="1" dirty="0">
                 <a:solidFill>
-                  <a:srgbClr val="1A4FBF"/>
+                  <a:srgbClr val="FFFFFF"/>
                 </a:solidFill>
                 <a:latin typeface="Montserrat" pitchFamily="34" charset="0"/>
                 <a:ea typeface="Montserrat" pitchFamily="34" charset="-122"/>
@@ -10176,7 +10176,7 @@
             <a:r>
               <a:rPr lang="en-US" sz="1100" dirty="0">
                 <a:solidFill>
-                  <a:srgbClr val="434343"/>
+                  <a:srgbClr val="E9E4F7"/>
                 </a:solidFill>
                 <a:latin typeface="Montserrat" pitchFamily="34" charset="0"/>
                 <a:ea typeface="Montserrat" pitchFamily="34" charset="-122"/>
@@ -10205,7 +10205,7 @@
             </a:avLst>
           </a:prstGeom>
           <a:solidFill>
-            <a:srgbClr val="F5F3FA"/>
+            <a:srgbClr val="B3261E"/>
           </a:solidFill>
           <a:ln/>
         </p:spPr>
@@ -10237,7 +10237,7 @@
             <a:r>
               <a:rPr lang="en-US" sz="1100" b="1" dirty="0">
                 <a:solidFill>
-                  <a:srgbClr val="B3261E"/>
+                  <a:srgbClr val="FFFFFF"/>
                 </a:solidFill>
                 <a:latin typeface="Montserrat" pitchFamily="34" charset="0"/>
                 <a:ea typeface="Montserrat" pitchFamily="34" charset="-122"/>
@@ -10251,7 +10251,7 @@
             <a:r>
               <a:rPr lang="en-US" sz="1100" dirty="0">
                 <a:solidFill>
-                  <a:srgbClr val="434343"/>
+                  <a:srgbClr val="E9E4F7"/>
                 </a:solidFill>
                 <a:latin typeface="Montserrat" pitchFamily="34" charset="0"/>
                 <a:ea typeface="Montserrat" pitchFamily="34" charset="-122"/>

--- a/docs/decks/L05.pptx
+++ b/docs/decks/L05.pptx
@@ -12651,11 +12651,11 @@
         <p:spPr>
           <a:xfrm>
             <a:off x="566928" y="1783080"/>
-            <a:ext cx="3520440" cy="1463040"/>
+            <a:ext cx="3520440" cy="1874520"/>
           </a:xfrm>
           <a:prstGeom prst="roundRect">
             <a:avLst>
-              <a:gd name="adj" fmla="val 7500"/>
+              <a:gd name="adj" fmla="val 5854"/>
             </a:avLst>
           </a:prstGeom>
           <a:solidFill>
@@ -12771,7 +12771,7 @@
         <p:spPr>
           <a:xfrm>
             <a:off x="768096" y="2468880"/>
-            <a:ext cx="3118104" cy="621792"/>
+            <a:ext cx="3118104" cy="1033272"/>
           </a:xfrm>
           <a:prstGeom prst="rect">
             <a:avLst/>
@@ -12813,11 +12813,11 @@
         <p:spPr>
           <a:xfrm>
             <a:off x="4270248" y="1783080"/>
-            <a:ext cx="3520440" cy="1463040"/>
+            <a:ext cx="3520440" cy="1874520"/>
           </a:xfrm>
           <a:prstGeom prst="roundRect">
             <a:avLst>
-              <a:gd name="adj" fmla="val 7500"/>
+              <a:gd name="adj" fmla="val 5854"/>
             </a:avLst>
           </a:prstGeom>
           <a:solidFill>
@@ -12933,7 +12933,7 @@
         <p:spPr>
           <a:xfrm>
             <a:off x="4471416" y="2468880"/>
-            <a:ext cx="3118104" cy="621792"/>
+            <a:ext cx="3118104" cy="1033272"/>
           </a:xfrm>
           <a:prstGeom prst="rect">
             <a:avLst/>
@@ -12975,11 +12975,11 @@
         <p:spPr>
           <a:xfrm>
             <a:off x="7973568" y="1783080"/>
-            <a:ext cx="3520440" cy="1463040"/>
+            <a:ext cx="3520440" cy="1874520"/>
           </a:xfrm>
           <a:prstGeom prst="roundRect">
             <a:avLst>
-              <a:gd name="adj" fmla="val 7500"/>
+              <a:gd name="adj" fmla="val 5854"/>
             </a:avLst>
           </a:prstGeom>
           <a:solidFill>
@@ -13095,7 +13095,7 @@
         <p:spPr>
           <a:xfrm>
             <a:off x="8174736" y="2468880"/>
-            <a:ext cx="3118104" cy="621792"/>
+            <a:ext cx="3118104" cy="1033272"/>
           </a:xfrm>
           <a:prstGeom prst="rect">
             <a:avLst/>
@@ -13136,12 +13136,12 @@
         </p:nvSpPr>
         <p:spPr>
           <a:xfrm>
-            <a:off x="566928" y="3520440"/>
-            <a:ext cx="3520440" cy="1463040"/>
+            <a:off x="566928" y="3886200"/>
+            <a:ext cx="3520440" cy="1874520"/>
           </a:xfrm>
           <a:prstGeom prst="roundRect">
             <a:avLst>
-              <a:gd name="adj" fmla="val 7500"/>
+              <a:gd name="adj" fmla="val 5854"/>
             </a:avLst>
           </a:prstGeom>
           <a:solidFill>
@@ -13158,7 +13158,7 @@
         </p:nvSpPr>
         <p:spPr>
           <a:xfrm>
-            <a:off x="768096" y="3703320"/>
+            <a:off x="768096" y="4069080"/>
             <a:ext cx="384048" cy="384048"/>
           </a:xfrm>
           <a:prstGeom prst="ellipse">
@@ -13178,7 +13178,7 @@
         </p:nvSpPr>
         <p:spPr>
           <a:xfrm>
-            <a:off x="768096" y="3703320"/>
+            <a:off x="768096" y="4069080"/>
             <a:ext cx="384048" cy="384048"/>
           </a:xfrm>
           <a:prstGeom prst="rect">
@@ -13217,7 +13217,7 @@
         </p:nvSpPr>
         <p:spPr>
           <a:xfrm>
-            <a:off x="1280160" y="3675888"/>
+            <a:off x="1280160" y="4041648"/>
             <a:ext cx="2606040" cy="438912"/>
           </a:xfrm>
           <a:prstGeom prst="rect">
@@ -13256,8 +13256,8 @@
         </p:nvSpPr>
         <p:spPr>
           <a:xfrm>
-            <a:off x="768096" y="4206240"/>
-            <a:ext cx="3118104" cy="621792"/>
+            <a:off x="768096" y="4572000"/>
+            <a:ext cx="3118104" cy="1033272"/>
           </a:xfrm>
           <a:prstGeom prst="rect">
             <a:avLst/>
@@ -13298,12 +13298,12 @@
         </p:nvSpPr>
         <p:spPr>
           <a:xfrm>
-            <a:off x="4270248" y="3520440"/>
-            <a:ext cx="3520440" cy="1463040"/>
+            <a:off x="4270248" y="3886200"/>
+            <a:ext cx="3520440" cy="1874520"/>
           </a:xfrm>
           <a:prstGeom prst="roundRect">
             <a:avLst>
-              <a:gd name="adj" fmla="val 7500"/>
+              <a:gd name="adj" fmla="val 5854"/>
             </a:avLst>
           </a:prstGeom>
           <a:solidFill>
@@ -13320,7 +13320,7 @@
         </p:nvSpPr>
         <p:spPr>
           <a:xfrm>
-            <a:off x="4471416" y="3703320"/>
+            <a:off x="4471416" y="4069080"/>
             <a:ext cx="384048" cy="384048"/>
           </a:xfrm>
           <a:prstGeom prst="ellipse">
@@ -13340,7 +13340,7 @@
         </p:nvSpPr>
         <p:spPr>
           <a:xfrm>
-            <a:off x="4471416" y="3703320"/>
+            <a:off x="4471416" y="4069080"/>
             <a:ext cx="384048" cy="384048"/>
           </a:xfrm>
           <a:prstGeom prst="rect">
@@ -13379,7 +13379,7 @@
         </p:nvSpPr>
         <p:spPr>
           <a:xfrm>
-            <a:off x="4983480" y="3675888"/>
+            <a:off x="4983480" y="4041648"/>
             <a:ext cx="2606040" cy="438912"/>
           </a:xfrm>
           <a:prstGeom prst="rect">
@@ -13418,8 +13418,8 @@
         </p:nvSpPr>
         <p:spPr>
           <a:xfrm>
-            <a:off x="4471416" y="4206240"/>
-            <a:ext cx="3118104" cy="621792"/>
+            <a:off x="4471416" y="4572000"/>
+            <a:ext cx="3118104" cy="1033272"/>
           </a:xfrm>
           <a:prstGeom prst="rect">
             <a:avLst/>
@@ -15576,11 +15576,11 @@
         <p:spPr>
           <a:xfrm>
             <a:off x="566928" y="1737360"/>
-            <a:ext cx="3566160" cy="1828800"/>
+            <a:ext cx="3566160" cy="2148840"/>
           </a:xfrm>
           <a:prstGeom prst="roundRect">
             <a:avLst>
-              <a:gd name="adj" fmla="val 6000"/>
+              <a:gd name="adj" fmla="val 5106"/>
             </a:avLst>
           </a:prstGeom>
           <a:solidFill>
@@ -15637,7 +15637,7 @@
         <p:spPr>
           <a:xfrm>
             <a:off x="768096" y="2423160"/>
-            <a:ext cx="3163824" cy="987552"/>
+            <a:ext cx="3163824" cy="1307592"/>
           </a:xfrm>
           <a:prstGeom prst="rect">
             <a:avLst/>
@@ -15679,11 +15679,11 @@
         <p:spPr>
           <a:xfrm>
             <a:off x="4315968" y="1737360"/>
-            <a:ext cx="3566160" cy="1828800"/>
+            <a:ext cx="3566160" cy="2148840"/>
           </a:xfrm>
           <a:prstGeom prst="roundRect">
             <a:avLst>
-              <a:gd name="adj" fmla="val 6000"/>
+              <a:gd name="adj" fmla="val 5106"/>
             </a:avLst>
           </a:prstGeom>
           <a:solidFill>
@@ -15740,7 +15740,7 @@
         <p:spPr>
           <a:xfrm>
             <a:off x="4517136" y="2423160"/>
-            <a:ext cx="3163824" cy="987552"/>
+            <a:ext cx="3163824" cy="1307592"/>
           </a:xfrm>
           <a:prstGeom prst="rect">
             <a:avLst/>
@@ -15782,11 +15782,11 @@
         <p:spPr>
           <a:xfrm>
             <a:off x="8065008" y="1737360"/>
-            <a:ext cx="3566160" cy="1828800"/>
+            <a:ext cx="3566160" cy="2148840"/>
           </a:xfrm>
           <a:prstGeom prst="roundRect">
             <a:avLst>
-              <a:gd name="adj" fmla="val 6000"/>
+              <a:gd name="adj" fmla="val 5106"/>
             </a:avLst>
           </a:prstGeom>
           <a:solidFill>
@@ -15843,7 +15843,7 @@
         <p:spPr>
           <a:xfrm>
             <a:off x="8266176" y="2423160"/>
-            <a:ext cx="3163824" cy="987552"/>
+            <a:ext cx="3163824" cy="1307592"/>
           </a:xfrm>
           <a:prstGeom prst="rect">
             <a:avLst/>
@@ -15884,12 +15884,12 @@
         </p:nvSpPr>
         <p:spPr>
           <a:xfrm>
-            <a:off x="566928" y="3977640"/>
-            <a:ext cx="11064240" cy="1234440"/>
+            <a:off x="566928" y="4297680"/>
+            <a:ext cx="11064240" cy="1600200"/>
           </a:xfrm>
           <a:prstGeom prst="roundRect">
             <a:avLst>
-              <a:gd name="adj" fmla="val 8889"/>
+              <a:gd name="adj" fmla="val 6857"/>
             </a:avLst>
           </a:prstGeom>
           <a:solidFill>
@@ -15911,8 +15911,8 @@
         </p:nvSpPr>
         <p:spPr>
           <a:xfrm>
-            <a:off x="786384" y="4123944"/>
-            <a:ext cx="10625328" cy="941832"/>
+            <a:off x="786384" y="4443984"/>
+            <a:ext cx="10625328" cy="1307592"/>
           </a:xfrm>
           <a:prstGeom prst="rect">
             <a:avLst/>
@@ -16178,11 +16178,11 @@
         <p:spPr>
           <a:xfrm>
             <a:off x="566928" y="1783080"/>
-            <a:ext cx="11064240" cy="1874520"/>
+            <a:ext cx="11064240" cy="3657600"/>
           </a:xfrm>
           <a:prstGeom prst="roundRect">
             <a:avLst>
-              <a:gd name="adj" fmla="val 5854"/>
+              <a:gd name="adj" fmla="val 3000"/>
             </a:avLst>
           </a:prstGeom>
           <a:solidFill>
@@ -16204,7 +16204,7 @@
         </p:nvSpPr>
         <p:spPr>
           <a:xfrm>
-            <a:off x="978408" y="2157984"/>
+            <a:off x="978408" y="2706624"/>
             <a:ext cx="256032" cy="256032"/>
           </a:xfrm>
           <a:prstGeom prst="roundRect">
@@ -16231,7 +16231,7 @@
         </p:nvSpPr>
         <p:spPr>
           <a:xfrm rot="2700000">
-            <a:off x="1041227" y="2297430"/>
+            <a:off x="1041227" y="2846070"/>
             <a:ext cx="58156" cy="27432"/>
           </a:xfrm>
           <a:prstGeom prst="rect">
@@ -16251,7 +16251,7 @@
         </p:nvSpPr>
         <p:spPr>
           <a:xfrm rot="-3000000">
-            <a:off x="1069025" y="2271370"/>
+            <a:off x="1069025" y="2820010"/>
             <a:ext cx="121432" cy="27432"/>
           </a:xfrm>
           <a:prstGeom prst="rect">
@@ -16271,8 +16271,8 @@
         </p:nvSpPr>
         <p:spPr>
           <a:xfrm>
-            <a:off x="1362456" y="2103120"/>
-            <a:ext cx="4617720" cy="384048"/>
+            <a:off x="1362456" y="2505456"/>
+            <a:ext cx="4617720" cy="658368"/>
           </a:xfrm>
           <a:prstGeom prst="rect">
             <a:avLst/>
@@ -16288,7 +16288,7 @@
               <a:buNone/>
             </a:pPr>
             <a:r>
-              <a:rPr lang="en-US" sz="1250" dirty="0">
+              <a:rPr lang="en-US" sz="1400" dirty="0">
                 <a:solidFill>
                   <a:srgbClr val="000000"/>
                 </a:solidFill>
@@ -16298,7 +16298,7 @@
               </a:rPr>
               <a:t>повторний запит відповідає ~миттєво</a:t>
             </a:r>
-            <a:endParaRPr lang="en-US" sz="1250" dirty="0"/>
+            <a:endParaRPr lang="en-US" sz="1400" dirty="0"/>
           </a:p>
         </p:txBody>
       </p:sp>
@@ -16310,7 +16310,7 @@
         </p:nvSpPr>
         <p:spPr>
           <a:xfrm>
-            <a:off x="978408" y="2724912"/>
+            <a:off x="978408" y="4169664"/>
             <a:ext cx="256032" cy="256032"/>
           </a:xfrm>
           <a:prstGeom prst="roundRect">
@@ -16337,7 +16337,7 @@
         </p:nvSpPr>
         <p:spPr>
           <a:xfrm rot="2700000">
-            <a:off x="1041227" y="2864358"/>
+            <a:off x="1041227" y="4309110"/>
             <a:ext cx="58156" cy="27432"/>
           </a:xfrm>
           <a:prstGeom prst="rect">
@@ -16357,7 +16357,7 @@
         </p:nvSpPr>
         <p:spPr>
           <a:xfrm rot="-3000000">
-            <a:off x="1069025" y="2838298"/>
+            <a:off x="1069025" y="4283050"/>
             <a:ext cx="121432" cy="27432"/>
           </a:xfrm>
           <a:prstGeom prst="rect">
@@ -16377,8 +16377,8 @@
         </p:nvSpPr>
         <p:spPr>
           <a:xfrm>
-            <a:off x="1362456" y="2670048"/>
-            <a:ext cx="4617720" cy="384048"/>
+            <a:off x="1362456" y="3968496"/>
+            <a:ext cx="4617720" cy="658368"/>
           </a:xfrm>
           <a:prstGeom prst="rect">
             <a:avLst/>
@@ -16394,7 +16394,7 @@
               <a:buNone/>
             </a:pPr>
             <a:r>
-              <a:rPr lang="en-US" sz="1250" dirty="0">
+              <a:rPr lang="en-US" sz="1400" dirty="0">
                 <a:solidFill>
                   <a:srgbClr val="000000"/>
                 </a:solidFill>
@@ -16404,7 +16404,7 @@
               </a:rPr>
               <a:t>лічильники hit/miss ростуть правильно</a:t>
             </a:r>
-            <a:endParaRPr lang="en-US" sz="1250" dirty="0"/>
+            <a:endParaRPr lang="en-US" sz="1400" dirty="0"/>
           </a:p>
         </p:txBody>
       </p:sp>
@@ -16416,7 +16416,7 @@
         </p:nvSpPr>
         <p:spPr>
           <a:xfrm>
-            <a:off x="6144768" y="2157984"/>
+            <a:off x="6144768" y="2706624"/>
             <a:ext cx="256032" cy="256032"/>
           </a:xfrm>
           <a:prstGeom prst="roundRect">
@@ -16443,7 +16443,7 @@
         </p:nvSpPr>
         <p:spPr>
           <a:xfrm rot="2700000">
-            <a:off x="6207587" y="2297430"/>
+            <a:off x="6207587" y="2846070"/>
             <a:ext cx="58156" cy="27432"/>
           </a:xfrm>
           <a:prstGeom prst="rect">
@@ -16463,7 +16463,7 @@
         </p:nvSpPr>
         <p:spPr>
           <a:xfrm rot="-3000000">
-            <a:off x="6235385" y="2271370"/>
+            <a:off x="6235385" y="2820010"/>
             <a:ext cx="121432" cy="27432"/>
           </a:xfrm>
           <a:prstGeom prst="rect">
@@ -16483,8 +16483,8 @@
         </p:nvSpPr>
         <p:spPr>
           <a:xfrm>
-            <a:off x="6528816" y="2103120"/>
-            <a:ext cx="4617720" cy="384048"/>
+            <a:off x="6528816" y="2505456"/>
+            <a:ext cx="4617720" cy="658368"/>
           </a:xfrm>
           <a:prstGeom prst="rect">
             <a:avLst/>
@@ -16500,7 +16500,7 @@
               <a:buNone/>
             </a:pPr>
             <a:r>
-              <a:rPr lang="en-US" sz="1250" dirty="0">
+              <a:rPr lang="en-US" sz="1400" dirty="0">
                 <a:solidFill>
                   <a:srgbClr val="000000"/>
                 </a:solidFill>
@@ -16510,7 +16510,7 @@
               </a:rPr>
               <a:t>зміна версії промпта інвалідує кеш</a:t>
             </a:r>
-            <a:endParaRPr lang="en-US" sz="1250" dirty="0"/>
+            <a:endParaRPr lang="en-US" sz="1400" dirty="0"/>
           </a:p>
         </p:txBody>
       </p:sp>
@@ -16522,7 +16522,7 @@
         </p:nvSpPr>
         <p:spPr>
           <a:xfrm>
-            <a:off x="6144768" y="2724912"/>
+            <a:off x="6144768" y="4169664"/>
             <a:ext cx="256032" cy="256032"/>
           </a:xfrm>
           <a:prstGeom prst="roundRect">
@@ -16549,7 +16549,7 @@
         </p:nvSpPr>
         <p:spPr>
           <a:xfrm rot="2700000">
-            <a:off x="6207587" y="2864358"/>
+            <a:off x="6207587" y="4309110"/>
             <a:ext cx="58156" cy="27432"/>
           </a:xfrm>
           <a:prstGeom prst="rect">
@@ -16569,7 +16569,7 @@
         </p:nvSpPr>
         <p:spPr>
           <a:xfrm rot="-3000000">
-            <a:off x="6235385" y="2838298"/>
+            <a:off x="6235385" y="4283050"/>
             <a:ext cx="121432" cy="27432"/>
           </a:xfrm>
           <a:prstGeom prst="rect">
@@ -16589,8 +16589,8 @@
         </p:nvSpPr>
         <p:spPr>
           <a:xfrm>
-            <a:off x="6528816" y="2670048"/>
-            <a:ext cx="4617720" cy="384048"/>
+            <a:off x="6528816" y="3968496"/>
+            <a:ext cx="4617720" cy="658368"/>
           </a:xfrm>
           <a:prstGeom prst="rect">
             <a:avLst/>
@@ -16606,7 +16606,7 @@
               <a:buNone/>
             </a:pPr>
             <a:r>
-              <a:rPr lang="en-US" sz="1250" dirty="0">
+              <a:rPr lang="en-US" sz="1400" dirty="0">
                 <a:solidFill>
                   <a:srgbClr val="000000"/>
                 </a:solidFill>
@@ -16616,7 +16616,7 @@
               </a:rPr>
               <a:t>назву, що кешувати заборонено — і чому</a:t>
             </a:r>
-            <a:endParaRPr lang="en-US" sz="1250" dirty="0"/>
+            <a:endParaRPr lang="en-US" sz="1400" dirty="0"/>
           </a:p>
         </p:txBody>
       </p:sp>
@@ -16628,7 +16628,7 @@
         </p:nvSpPr>
         <p:spPr>
           <a:xfrm>
-            <a:off x="566928" y="3886200"/>
+            <a:off x="566928" y="5669280"/>
             <a:ext cx="10972800" cy="320040"/>
           </a:xfrm>
           <a:prstGeom prst="rect">
@@ -20369,11 +20369,11 @@
         <p:spPr>
           <a:xfrm>
             <a:off x="566928" y="1783080"/>
-            <a:ext cx="3553968" cy="1188720"/>
+            <a:ext cx="3553968" cy="1481328"/>
           </a:xfrm>
           <a:prstGeom prst="roundRect">
             <a:avLst>
-              <a:gd name="adj" fmla="val 7692"/>
+              <a:gd name="adj" fmla="val 6173"/>
             </a:avLst>
           </a:prstGeom>
           <a:solidFill>
@@ -20435,7 +20435,7 @@
         <p:spPr>
           <a:xfrm>
             <a:off x="749808" y="2203704"/>
-            <a:ext cx="3188208" cy="658368"/>
+            <a:ext cx="3188208" cy="950976"/>
           </a:xfrm>
           <a:prstGeom prst="rect">
             <a:avLst/>
@@ -20477,11 +20477,11 @@
         <p:spPr>
           <a:xfrm>
             <a:off x="4322064" y="1783080"/>
-            <a:ext cx="3553968" cy="1188720"/>
+            <a:ext cx="3553968" cy="1481328"/>
           </a:xfrm>
           <a:prstGeom prst="roundRect">
             <a:avLst>
-              <a:gd name="adj" fmla="val 7692"/>
+              <a:gd name="adj" fmla="val 6173"/>
             </a:avLst>
           </a:prstGeom>
           <a:solidFill>
@@ -20543,7 +20543,7 @@
         <p:spPr>
           <a:xfrm>
             <a:off x="4504944" y="2203704"/>
-            <a:ext cx="3188208" cy="658368"/>
+            <a:ext cx="3188208" cy="950976"/>
           </a:xfrm>
           <a:prstGeom prst="rect">
             <a:avLst/>
@@ -20585,11 +20585,11 @@
         <p:spPr>
           <a:xfrm>
             <a:off x="8077200" y="1783080"/>
-            <a:ext cx="3553968" cy="1188720"/>
+            <a:ext cx="3553968" cy="1481328"/>
           </a:xfrm>
           <a:prstGeom prst="roundRect">
             <a:avLst>
-              <a:gd name="adj" fmla="val 7692"/>
+              <a:gd name="adj" fmla="val 6173"/>
             </a:avLst>
           </a:prstGeom>
           <a:solidFill>
@@ -20651,7 +20651,7 @@
         <p:spPr>
           <a:xfrm>
             <a:off x="8260080" y="2203704"/>
-            <a:ext cx="3188208" cy="658368"/>
+            <a:ext cx="3188208" cy="950976"/>
           </a:xfrm>
           <a:prstGeom prst="rect">
             <a:avLst/>
@@ -20692,12 +20692,12 @@
         </p:nvSpPr>
         <p:spPr>
           <a:xfrm>
-            <a:off x="566928" y="3172968"/>
-            <a:ext cx="3553968" cy="1188720"/>
+            <a:off x="566928" y="3465576"/>
+            <a:ext cx="3553968" cy="1481328"/>
           </a:xfrm>
           <a:prstGeom prst="roundRect">
             <a:avLst>
-              <a:gd name="adj" fmla="val 7692"/>
+              <a:gd name="adj" fmla="val 6173"/>
             </a:avLst>
           </a:prstGeom>
           <a:solidFill>
@@ -20719,7 +20719,7 @@
         </p:nvSpPr>
         <p:spPr>
           <a:xfrm>
-            <a:off x="749808" y="3282696"/>
+            <a:off x="749808" y="3575304"/>
             <a:ext cx="3188208" cy="310896"/>
           </a:xfrm>
           <a:prstGeom prst="rect">
@@ -20758,8 +20758,8 @@
         </p:nvSpPr>
         <p:spPr>
           <a:xfrm>
-            <a:off x="749808" y="3593592"/>
-            <a:ext cx="3188208" cy="658368"/>
+            <a:off x="749808" y="3886200"/>
+            <a:ext cx="3188208" cy="950976"/>
           </a:xfrm>
           <a:prstGeom prst="rect">
             <a:avLst/>
@@ -20800,12 +20800,12 @@
         </p:nvSpPr>
         <p:spPr>
           <a:xfrm>
-            <a:off x="4322064" y="3172968"/>
-            <a:ext cx="3553968" cy="1188720"/>
+            <a:off x="4322064" y="3465576"/>
+            <a:ext cx="3553968" cy="1481328"/>
           </a:xfrm>
           <a:prstGeom prst="roundRect">
             <a:avLst>
-              <a:gd name="adj" fmla="val 7692"/>
+              <a:gd name="adj" fmla="val 6173"/>
             </a:avLst>
           </a:prstGeom>
           <a:solidFill>
@@ -20827,7 +20827,7 @@
         </p:nvSpPr>
         <p:spPr>
           <a:xfrm>
-            <a:off x="4504944" y="3282696"/>
+            <a:off x="4504944" y="3575304"/>
             <a:ext cx="3188208" cy="310896"/>
           </a:xfrm>
           <a:prstGeom prst="rect">
@@ -20866,8 +20866,8 @@
         </p:nvSpPr>
         <p:spPr>
           <a:xfrm>
-            <a:off x="4504944" y="3593592"/>
-            <a:ext cx="3188208" cy="658368"/>
+            <a:off x="4504944" y="3886200"/>
+            <a:ext cx="3188208" cy="950976"/>
           </a:xfrm>
           <a:prstGeom prst="rect">
             <a:avLst/>
@@ -20908,12 +20908,12 @@
         </p:nvSpPr>
         <p:spPr>
           <a:xfrm>
-            <a:off x="8077200" y="3172968"/>
-            <a:ext cx="3553968" cy="1188720"/>
+            <a:off x="8077200" y="3465576"/>
+            <a:ext cx="3553968" cy="1481328"/>
           </a:xfrm>
           <a:prstGeom prst="roundRect">
             <a:avLst>
-              <a:gd name="adj" fmla="val 7692"/>
+              <a:gd name="adj" fmla="val 6173"/>
             </a:avLst>
           </a:prstGeom>
           <a:solidFill>
@@ -20935,7 +20935,7 @@
         </p:nvSpPr>
         <p:spPr>
           <a:xfrm>
-            <a:off x="8260080" y="3282696"/>
+            <a:off x="8260080" y="3575304"/>
             <a:ext cx="3188208" cy="310896"/>
           </a:xfrm>
           <a:prstGeom prst="rect">
@@ -20974,8 +20974,8 @@
         </p:nvSpPr>
         <p:spPr>
           <a:xfrm>
-            <a:off x="8260080" y="3593592"/>
-            <a:ext cx="3188208" cy="658368"/>
+            <a:off x="8260080" y="3886200"/>
+            <a:ext cx="3188208" cy="950976"/>
           </a:xfrm>
           <a:prstGeom prst="rect">
             <a:avLst/>
@@ -21016,7 +21016,7 @@
         </p:nvSpPr>
         <p:spPr>
           <a:xfrm>
-            <a:off x="566928" y="4526280"/>
+            <a:off x="566928" y="5138928"/>
             <a:ext cx="11064240" cy="777240"/>
           </a:xfrm>
           <a:prstGeom prst="roundRect">
@@ -21043,7 +21043,7 @@
         </p:nvSpPr>
         <p:spPr>
           <a:xfrm>
-            <a:off x="786384" y="4672584"/>
+            <a:off x="786384" y="5285232"/>
             <a:ext cx="10625328" cy="484632"/>
           </a:xfrm>
           <a:prstGeom prst="rect">

--- a/docs/decks/L05.pptx
+++ b/docs/decks/L05.pptx
@@ -32,9 +32,10 @@
     <p:sldId id="280" r:id="rId26"/>
     <p:sldId id="281" r:id="rId27"/>
     <p:sldId id="282" r:id="rId28"/>
+    <p:sldId id="283" r:id="rId29"/>
   </p:sldIdLst>
   <p:notesMasterIdLst>
-    <p:notesMasterId r:id="rId29"/>
+    <p:notesMasterId r:id="rId30"/>
   </p:notesMasterIdLst>
   <p:sldSz cx="12192000" cy="6858000"/>
   <p:notesSz cx="6858000" cy="12192000"/>
@@ -2224,6 +2225,94 @@
             <a:fld id="{F7021451-1387-4CA6-816F-3879F97B5CBC}" type="slidenum">
               <a:rPr lang="en-US"/>
               <a:t>27</a:t>
+            </a:fld>
+            <a:endParaRPr lang="en-US"/>
+          </a:p>
+        </p:txBody>
+      </p:sp>
+    </p:spTree>
+    <p:extLst>
+      <p:ext uri="{BB962C8B-B14F-4D97-AF65-F5344CB8AC3E}">
+        <p14:creationId xmlns:p14="http://schemas.microsoft.com/office/powerpoint/2010/main" val="1024086991"/>
+      </p:ext>
+    </p:extLst>
+  </p:cSld>
+  <p:clrMapOvr>
+    <a:masterClrMapping/>
+  </p:clrMapOvr>
+</p:notes>
+</file>
+
+<file path=ppt/notesSlides/notesSlide28.xml><?xml version="1.0" encoding="utf-8"?>
+<p:notes xmlns:a="http://schemas.openxmlformats.org/drawingml/2006/main" xmlns:r="http://schemas.openxmlformats.org/officeDocument/2006/relationships" xmlns:p="http://schemas.openxmlformats.org/presentationml/2006/main">
+  <p:cSld>
+    <p:spTree>
+      <p:nvGrpSpPr>
+        <p:cNvPr id="1" name=""/>
+        <p:cNvGrpSpPr/>
+        <p:nvPr/>
+      </p:nvGrpSpPr>
+      <p:grpSpPr>
+        <a:xfrm>
+          <a:off x="0" y="0"/>
+          <a:ext cx="0" cy="0"/>
+          <a:chOff x="0" y="0"/>
+          <a:chExt cx="0" cy="0"/>
+        </a:xfrm>
+      </p:grpSpPr>
+      <p:sp>
+        <p:nvSpPr>
+          <p:cNvPr id="2" name="Slide Image Placeholder 1"/>
+          <p:cNvSpPr>
+            <a:spLocks noGrp="1" noRot="1" noChangeAspect="1"/>
+          </p:cNvSpPr>
+          <p:nvPr>
+            <p:ph type="sldImg"/>
+          </p:nvPr>
+        </p:nvSpPr>
+        <p:spPr/>
+      </p:sp>
+      <p:sp>
+        <p:nvSpPr>
+          <p:cNvPr id="3" name="Notes Placeholder 2"/>
+          <p:cNvSpPr>
+            <a:spLocks noGrp="1"/>
+          </p:cNvSpPr>
+          <p:nvPr>
+            <p:ph type="body" idx="1"/>
+          </p:nvPr>
+        </p:nvSpPr>
+        <p:spPr/>
+        <p:txBody>
+          <a:bodyPr/>
+          <a:lstStyle/>
+          <a:p>
+            <a:r>
+              <a:rPr lang="en-US" dirty="0"/>
+              <a:t/>
+            </a:r>
+            <a:endParaRPr lang="en-US" dirty="0"/>
+          </a:p>
+        </p:txBody>
+      </p:sp>
+      <p:sp>
+        <p:nvSpPr>
+          <p:cNvPr id="4" name="Slide Number Placeholder 3"/>
+          <p:cNvSpPr>
+            <a:spLocks noGrp="1"/>
+          </p:cNvSpPr>
+          <p:nvPr>
+            <p:ph type="sldNum" sz="quarter" idx="10"/>
+          </p:nvPr>
+        </p:nvSpPr>
+        <p:spPr/>
+        <p:txBody>
+          <a:bodyPr/>
+          <a:lstStyle/>
+          <a:p>
+            <a:fld id="{F7021451-1387-4CA6-816F-3879F97B5CBC}" type="slidenum">
+              <a:rPr lang="en-US"/>
+              <a:t>28</a:t>
             </a:fld>
             <a:endParaRPr lang="en-US"/>
           </a:p>
@@ -18657,6 +18746,109 @@
 </p:sld>
 </file>
 
+<file path=ppt/slides/slide28.xml><?xml version="1.0" encoding="utf-8"?>
+<p:sld xmlns:a="http://schemas.openxmlformats.org/drawingml/2006/main" xmlns:r="http://schemas.openxmlformats.org/officeDocument/2006/relationships" xmlns:p="http://schemas.openxmlformats.org/presentationml/2006/main">
+  <p:cSld name="Slide 28">
+    <p:spTree>
+      <p:nvGrpSpPr>
+        <p:cNvPr id="1" name=""/>
+        <p:cNvGrpSpPr/>
+        <p:nvPr/>
+      </p:nvGrpSpPr>
+      <p:grpSpPr>
+        <a:xfrm>
+          <a:off x="0" y="0"/>
+          <a:ext cx="0" cy="0"/>
+          <a:chOff x="0" y="0"/>
+          <a:chExt cx="0" cy="0"/>
+        </a:xfrm>
+      </p:grpSpPr>
+      <p:sp>
+        <p:nvSpPr>
+          <p:cNvPr id="2" name="Text 0"/>
+          <p:cNvSpPr/>
+          <p:nvPr/>
+        </p:nvSpPr>
+        <p:spPr>
+          <a:xfrm>
+            <a:off x="566928" y="384048"/>
+            <a:ext cx="5486400" cy="274320"/>
+          </a:xfrm>
+          <a:prstGeom prst="rect">
+            <a:avLst/>
+          </a:prstGeom>
+          <a:noFill/>
+          <a:ln/>
+        </p:spPr>
+        <p:txBody>
+          <a:bodyPr wrap="square" lIns="0" tIns="0" rIns="0" bIns="0" rtlCol="0" anchor="ctr"/>
+          <a:lstStyle/>
+          <a:p>
+            <a:pPr indent="0" marL="0">
+              <a:buNone/>
+            </a:pPr>
+            <a:r>
+              <a:rPr lang="en-US" sz="1200" b="1" spc="400" kern="0" dirty="0">
+                <a:solidFill>
+                  <a:srgbClr val="FFFFFF"/>
+                </a:solidFill>
+                <a:latin typeface="Montserrat" pitchFamily="34" charset="0"/>
+                <a:ea typeface="Montserrat" pitchFamily="34" charset="-122"/>
+                <a:cs typeface="Montserrat" pitchFamily="34" charset="-120"/>
+              </a:rPr>
+              <a:t>NEOVERSITY</a:t>
+            </a:r>
+            <a:endParaRPr lang="en-US" sz="1200" dirty="0"/>
+          </a:p>
+        </p:txBody>
+      </p:sp>
+      <p:sp>
+        <p:nvSpPr>
+          <p:cNvPr id="3" name="Text 1"/>
+          <p:cNvSpPr/>
+          <p:nvPr/>
+        </p:nvSpPr>
+        <p:spPr>
+          <a:xfrm>
+            <a:off x="566928" y="2834640"/>
+            <a:ext cx="11064240" cy="1463040"/>
+          </a:xfrm>
+          <a:prstGeom prst="rect">
+            <a:avLst/>
+          </a:prstGeom>
+          <a:noFill/>
+          <a:ln/>
+        </p:spPr>
+        <p:txBody>
+          <a:bodyPr wrap="square" lIns="0" tIns="0" rIns="0" bIns="0" rtlCol="0" anchor="ctr"/>
+          <a:lstStyle/>
+          <a:p>
+            <a:pPr indent="0" marL="0">
+              <a:buNone/>
+            </a:pPr>
+            <a:r>
+              <a:rPr lang="en-US" sz="7300" dirty="0">
+                <a:solidFill>
+                  <a:srgbClr val="FFFFFF"/>
+                </a:solidFill>
+                <a:latin typeface="Unbounded" pitchFamily="34" charset="0"/>
+                <a:ea typeface="Unbounded" pitchFamily="34" charset="-122"/>
+                <a:cs typeface="Unbounded" pitchFamily="34" charset="-120"/>
+              </a:rPr>
+              <a:t>ДЯКУЮ</a:t>
+            </a:r>
+            <a:endParaRPr lang="en-US" sz="7300" dirty="0"/>
+          </a:p>
+        </p:txBody>
+      </p:sp>
+    </p:spTree>
+  </p:cSld>
+  <p:clrMapOvr>
+    <a:masterClrMapping/>
+  </p:clrMapOvr>
+</p:sld>
+</file>
+
 <file path=ppt/slides/slide3.xml><?xml version="1.0" encoding="utf-8"?>
 <p:sld xmlns:a="http://schemas.openxmlformats.org/drawingml/2006/main" xmlns:r="http://schemas.openxmlformats.org/officeDocument/2006/relationships" xmlns:p="http://schemas.openxmlformats.org/presentationml/2006/main">
   <p:cSld name="Slide 3">

--- a/docs/decks/L05.pptx
+++ b/docs/decks/L05.pptx
@@ -6412,7 +6412,7 @@
                 <a:ea typeface="Montserrat" pitchFamily="34" charset="-122"/>
                 <a:cs typeface="Montserrat" pitchFamily="34" charset="-120"/>
               </a:rPr>
-              <a:t>хіт ~0 мс проти сотень мілісекунд походу в модель</a:t>
+              <a:t>хіт ~0 мс проти секунд походу в модель</a:t>
             </a:r>
             <a:endParaRPr lang="en-US" sz="1200" dirty="0"/>
           </a:p>

--- a/docs/decks/L05.pptx
+++ b/docs/decks/L05.pptx
@@ -7087,7 +7087,7 @@
                       <a:tailEnd type="none" w="med" len="med"/>
                     </a:lnB>
                     <a:solidFill>
-                      <a:srgbClr val="000000"/>
+                      <a:srgbClr val="5A05F4"/>
                     </a:solidFill>
                   </a:tcPr>
                 </a:tc>
@@ -7155,7 +7155,7 @@
                       <a:tailEnd type="none" w="med" len="med"/>
                     </a:lnB>
                     <a:solidFill>
-                      <a:srgbClr val="000000"/>
+                      <a:srgbClr val="5A05F4"/>
                     </a:solidFill>
                   </a:tcPr>
                 </a:tc>
@@ -7223,7 +7223,7 @@
                       <a:tailEnd type="none" w="med" len="med"/>
                     </a:lnB>
                     <a:solidFill>
-                      <a:srgbClr val="000000"/>
+                      <a:srgbClr val="5A05F4"/>
                     </a:solidFill>
                   </a:tcPr>
                 </a:tc>
@@ -7240,7 +7240,7 @@
                       <a:r>
                         <a:rPr lang="en-US" sz="1150" b="1" dirty="0">
                           <a:solidFill>
-                            <a:srgbClr val="A98BFF"/>
+                            <a:srgbClr val="5A05F4"/>
                           </a:solidFill>
                           <a:latin typeface="Montserrat" pitchFamily="34" charset="0"/>
                           <a:ea typeface="Montserrat" pitchFamily="34" charset="-122"/>
@@ -7293,7 +7293,7 @@
                       <a:tailEnd type="none" w="med" len="med"/>
                     </a:lnB>
                     <a:solidFill>
-                      <a:srgbClr val="000000"/>
+                      <a:srgbClr val="F5F3FA"/>
                     </a:solidFill>
                   </a:tcPr>
                 </a:tc>
@@ -7308,7 +7308,7 @@
                       <a:r>
                         <a:rPr lang="en-US" sz="1150" dirty="0">
                           <a:solidFill>
-                            <a:srgbClr val="A98BFF"/>
+                            <a:srgbClr val="5A05F4"/>
                           </a:solidFill>
                           <a:latin typeface="Montserrat" pitchFamily="34" charset="0"/>
                           <a:ea typeface="Montserrat" pitchFamily="34" charset="-122"/>
@@ -7361,7 +7361,7 @@
                       <a:tailEnd type="none" w="med" len="med"/>
                     </a:lnB>
                     <a:solidFill>
-                      <a:srgbClr val="000000"/>
+                      <a:srgbClr val="F5F3FA"/>
                     </a:solidFill>
                   </a:tcPr>
                 </a:tc>
@@ -7376,7 +7376,7 @@
                       <a:r>
                         <a:rPr lang="en-US" sz="1150" dirty="0">
                           <a:solidFill>
-                            <a:srgbClr val="A98BFF"/>
+                            <a:srgbClr val="5A05F4"/>
                           </a:solidFill>
                           <a:latin typeface="Montserrat" pitchFamily="34" charset="0"/>
                           <a:ea typeface="Montserrat" pitchFamily="34" charset="-122"/>
@@ -7429,7 +7429,7 @@
                       <a:tailEnd type="none" w="med" len="med"/>
                     </a:lnB>
                     <a:solidFill>
-                      <a:srgbClr val="000000"/>
+                      <a:srgbClr val="F5F3FA"/>
                     </a:solidFill>
                   </a:tcPr>
                 </a:tc>

--- a/docs/decks/L05.pptx
+++ b/docs/decks/L05.pptx
@@ -6645,7 +6645,7 @@
           </a:solidFill>
           <a:ln w="12700">
             <a:solidFill>
-              <a:srgbClr val="D9D9D9"/>
+              <a:srgbClr val="1A4FBF"/>
             </a:solidFill>
             <a:prstDash val="solid"/>
           </a:ln>
@@ -6678,7 +6678,7 @@
             <a:r>
               <a:rPr lang="en-US" sz="950" b="1" spc="150" kern="0" dirty="0">
                 <a:solidFill>
-                  <a:srgbClr val="434343"/>
+                  <a:srgbClr val="1A4FBF"/>
                 </a:solidFill>
                 <a:latin typeface="Courier New" pitchFamily="34" charset="0"/>
                 <a:ea typeface="Courier New" pitchFamily="34" charset="-122"/>

--- a/docs/decks/L05.pptx
+++ b/docs/decks/L05.pptx
@@ -7028,7 +7028,7 @@
                     <a:bodyPr/>
                     <a:lstStyle/>
                     <a:p>
-                      <a:pPr indent="0" marL="0">
+                      <a:pPr algn="ctr" indent="0" marL="0">
                         <a:buNone/>
                       </a:pPr>
                       <a:r>
@@ -7096,7 +7096,7 @@
                     <a:bodyPr/>
                     <a:lstStyle/>
                     <a:p>
-                      <a:pPr indent="0" marL="0">
+                      <a:pPr algn="ctr" indent="0" marL="0">
                         <a:buNone/>
                       </a:pPr>
                       <a:r>
@@ -7164,7 +7164,7 @@
                     <a:bodyPr/>
                     <a:lstStyle/>
                     <a:p>
-                      <a:pPr indent="0" marL="0">
+                      <a:pPr algn="ctr" indent="0" marL="0">
                         <a:buNone/>
                       </a:pPr>
                       <a:r>

--- a/docs/decks/L05.pptx
+++ b/docs/decks/L05.pptx
@@ -4,6 +4,9 @@
   <p:sldMasterIdLst>
     <p:sldMasterId id="2147483648" r:id="rId1"/>
   </p:sldMasterIdLst>
+  <p:notesMasterIdLst>
+    <p:notesMasterId r:id="rId30"/>
+  </p:notesMasterIdLst>
   <p:sldIdLst>
     <p:sldId id="256" r:id="rId2"/>
     <p:sldId id="257" r:id="rId3"/>
@@ -34,9 +37,6 @@
     <p:sldId id="282" r:id="rId28"/>
     <p:sldId id="283" r:id="rId29"/>
   </p:sldIdLst>
-  <p:notesMasterIdLst>
-    <p:notesMasterId r:id="rId30"/>
-  </p:notesMasterIdLst>
   <p:sldSz cx="12192000" cy="6858000"/>
   <p:notesSz cx="6858000" cy="12192000"/>
   <p:defaultTextStyle>
@@ -131,6 +131,11 @@
       </a:defRPr>
     </a:lvl9pPr>
   </p:defaultTextStyle>
+  <p:extLst>
+    <p:ext uri="{EFAFB233-063F-42B5-8137-9DF3F51BA10A}">
+      <p15:sldGuideLst xmlns:p15="http://schemas.microsoft.com/office/powerpoint/2012/main"/>
+    </p:ext>
+  </p:extLst>
 </p:presentation>
 </file>
 
@@ -156,234 +161,10 @@
           <a:chExt cx="0" cy="0"/>
         </a:xfrm>
       </p:grpSpPr>
-      <p:sp>
-        <p:nvSpPr>
-          <p:cNvPr id="2" name="Header Placeholder 1"/>
-          <p:cNvSpPr>
-            <a:spLocks noGrp="1"/>
-          </p:cNvSpPr>
-          <p:nvPr>
-            <p:ph type="hdr" sz="quarter"/>
-          </p:nvPr>
-        </p:nvSpPr>
-        <p:spPr>
-          <a:xfrm>
-            <a:off x="0" y="0"/>
-            <a:ext cx="2971800" cy="458788"/>
-          </a:xfrm>
-          <a:prstGeom prst="rect">
-            <a:avLst/>
-          </a:prstGeom>
-        </p:spPr>
-        <p:txBody>
-          <a:bodyPr vert="horz" lIns="91440" tIns="45720" rIns="91440" bIns="45720" rtlCol="0"/>
-          <a:lstStyle>
-            <a:lvl1pPr algn="l">
-              <a:defRPr sz="1200"/>
-            </a:lvl1pPr>
-          </a:lstStyle>
-          <a:p>
-            <a:endParaRPr lang="en-US"/>
-          </a:p>
-        </p:txBody>
-      </p:sp>
-      <p:sp>
-        <p:nvSpPr>
-          <p:cNvPr id="3" name="Date Placeholder 2"/>
-          <p:cNvSpPr>
-            <a:spLocks noGrp="1"/>
-          </p:cNvSpPr>
-          <p:nvPr>
-            <p:ph type="dt" idx="1"/>
-          </p:nvPr>
-        </p:nvSpPr>
-        <p:spPr>
-          <a:xfrm>
-            <a:off x="3884613" y="0"/>
-            <a:ext cx="2971800" cy="458788"/>
-          </a:xfrm>
-          <a:prstGeom prst="rect">
-            <a:avLst/>
-          </a:prstGeom>
-        </p:spPr>
-        <p:txBody>
-          <a:bodyPr vert="horz" lIns="91440" tIns="45720" rIns="91440" bIns="45720" rtlCol="0"/>
-          <a:lstStyle>
-            <a:lvl1pPr algn="r">
-              <a:defRPr sz="1200"/>
-            </a:lvl1pPr>
-          </a:lstStyle>
-          <a:p>
-            <a:fld id="{5282F153-3F37-0F45-9E97-73ACFA13230C}" type="datetimeFigureOut">
-              <a:rPr lang="en-US"/>
-              <a:t>7/23/19</a:t>
-            </a:fld>
-            <a:endParaRPr lang="en-US"/>
-          </a:p>
-        </p:txBody>
-      </p:sp>
-      <p:sp>
-        <p:nvSpPr>
-          <p:cNvPr id="4" name="Slide Image Placeholder 3"/>
-          <p:cNvSpPr>
-            <a:spLocks noGrp="1" noRot="1" noChangeAspect="1"/>
-          </p:cNvSpPr>
-          <p:nvPr>
-            <p:ph type="sldImg" idx="2"/>
-          </p:nvPr>
-        </p:nvSpPr>
-        <p:spPr>
-          <a:xfrm>
-            <a:off x="685800" y="1143000"/>
-            <a:ext cx="5486400" cy="3086100"/>
-          </a:xfrm>
-          <a:prstGeom prst="rect">
-            <a:avLst/>
-          </a:prstGeom>
-          <a:noFill/>
-          <a:ln w="12700">
-            <a:solidFill>
-              <a:prstClr val="black"/>
-            </a:solidFill>
-          </a:ln>
-        </p:spPr>
-        <p:txBody>
-          <a:bodyPr vert="horz" lIns="91440" tIns="45720" rIns="91440" bIns="45720" rtlCol="0" anchor="ctr"/>
-          <a:lstStyle/>
-          <a:p>
-            <a:endParaRPr lang="en-US"/>
-          </a:p>
-        </p:txBody>
-      </p:sp>
-      <p:sp>
-        <p:nvSpPr>
-          <p:cNvPr id="5" name="Notes Placeholder 4"/>
-          <p:cNvSpPr>
-            <a:spLocks noGrp="1"/>
-          </p:cNvSpPr>
-          <p:nvPr>
-            <p:ph type="body" sz="quarter" idx="3"/>
-          </p:nvPr>
-        </p:nvSpPr>
-        <p:spPr>
-          <a:xfrm>
-            <a:off x="685800" y="4400550"/>
-            <a:ext cx="5486400" cy="3600450"/>
-          </a:xfrm>
-          <a:prstGeom prst="rect">
-            <a:avLst/>
-          </a:prstGeom>
-        </p:spPr>
-        <p:txBody>
-          <a:bodyPr vert="horz" lIns="91440" tIns="45720" rIns="91440" bIns="45720" rtlCol="0"/>
-          <a:lstStyle/>
-          <a:p>
-            <a:pPr lvl="0"/>
-            <a:r>
-              <a:rPr lang="en-US"/>
-              <a:t>Click to edit Master text styles</a:t>
-            </a:r>
-          </a:p>
-          <a:p>
-            <a:pPr lvl="1"/>
-            <a:r>
-              <a:rPr lang="en-US"/>
-              <a:t>Second level</a:t>
-            </a:r>
-          </a:p>
-          <a:p>
-            <a:pPr lvl="2"/>
-            <a:r>
-              <a:rPr lang="en-US"/>
-              <a:t>Third level</a:t>
-            </a:r>
-          </a:p>
-          <a:p>
-            <a:pPr lvl="3"/>
-            <a:r>
-              <a:rPr lang="en-US"/>
-              <a:t>Fourth level</a:t>
-            </a:r>
-          </a:p>
-          <a:p>
-            <a:pPr lvl="4"/>
-            <a:r>
-              <a:rPr lang="en-US"/>
-              <a:t>Fifth level</a:t>
-            </a:r>
-          </a:p>
-        </p:txBody>
-      </p:sp>
-      <p:sp>
-        <p:nvSpPr>
-          <p:cNvPr id="6" name="Footer Placeholder 5"/>
-          <p:cNvSpPr>
-            <a:spLocks noGrp="1"/>
-          </p:cNvSpPr>
-          <p:nvPr>
-            <p:ph type="ftr" sz="quarter" idx="4"/>
-          </p:nvPr>
-        </p:nvSpPr>
-        <p:spPr>
-          <a:xfrm>
-            <a:off x="0" y="8685213"/>
-            <a:ext cx="2971800" cy="458787"/>
-          </a:xfrm>
-          <a:prstGeom prst="rect">
-            <a:avLst/>
-          </a:prstGeom>
-        </p:spPr>
-        <p:txBody>
-          <a:bodyPr vert="horz" lIns="91440" tIns="45720" rIns="91440" bIns="45720" rtlCol="0" anchor="b"/>
-          <a:lstStyle>
-            <a:lvl1pPr algn="l">
-              <a:defRPr sz="1200"/>
-            </a:lvl1pPr>
-          </a:lstStyle>
-          <a:p>
-            <a:endParaRPr lang="en-US"/>
-          </a:p>
-        </p:txBody>
-      </p:sp>
-      <p:sp>
-        <p:nvSpPr>
-          <p:cNvPr id="7" name="Slide Number Placeholder 6"/>
-          <p:cNvSpPr>
-            <a:spLocks noGrp="1"/>
-          </p:cNvSpPr>
-          <p:nvPr>
-            <p:ph type="sldNum" sz="quarter" idx="5"/>
-          </p:nvPr>
-        </p:nvSpPr>
-        <p:spPr>
-          <a:xfrm>
-            <a:off x="3884613" y="8685213"/>
-            <a:ext cx="2971800" cy="458787"/>
-          </a:xfrm>
-          <a:prstGeom prst="rect">
-            <a:avLst/>
-          </a:prstGeom>
-        </p:spPr>
-        <p:txBody>
-          <a:bodyPr vert="horz" lIns="91440" tIns="45720" rIns="91440" bIns="45720" rtlCol="0" anchor="b"/>
-          <a:lstStyle>
-            <a:lvl1pPr algn="r">
-              <a:defRPr sz="1200"/>
-            </a:lvl1pPr>
-          </a:lstStyle>
-          <a:p>
-            <a:fld id="{CE5E9CC1-C706-0F49-92D6-E571CC5EEA8F}" type="slidenum">
-              <a:rPr lang="en-US"/>
-              <a:t>‹#›</a:t>
-            </a:fld>
-            <a:endParaRPr lang="en-US"/>
-          </a:p>
-        </p:txBody>
-      </p:sp>
     </p:spTree>
     <p:extLst>
       <p:ext uri="{BB962C8B-B14F-4D97-AF65-F5344CB8AC3E}">
-        <p14:creationId xmlns:p14="http://schemas.microsoft.com/office/powerpoint/2010/main" val="1024086991"/>
+        <p14:creationId xmlns:p14="http://schemas.microsoft.com/office/powerpoint/2010/main" val="2282826989"/>
       </p:ext>
     </p:extLst>
   </p:cSld>
@@ -527,10 +308,6 @@
           <a:bodyPr/>
           <a:lstStyle/>
           <a:p>
-            <a:r>
-              <a:rPr lang="en-US" dirty="0"/>
-              <a:t/>
-            </a:r>
             <a:endParaRPr lang="en-US" dirty="0"/>
           </a:p>
         </p:txBody>
@@ -615,10 +392,6 @@
           <a:bodyPr/>
           <a:lstStyle/>
           <a:p>
-            <a:r>
-              <a:rPr lang="en-US" dirty="0"/>
-              <a:t/>
-            </a:r>
             <a:endParaRPr lang="en-US" dirty="0"/>
           </a:p>
         </p:txBody>
@@ -703,10 +476,6 @@
           <a:bodyPr/>
           <a:lstStyle/>
           <a:p>
-            <a:r>
-              <a:rPr lang="en-US" dirty="0"/>
-              <a:t/>
-            </a:r>
             <a:endParaRPr lang="en-US" dirty="0"/>
           </a:p>
         </p:txBody>
@@ -791,10 +560,6 @@
           <a:bodyPr/>
           <a:lstStyle/>
           <a:p>
-            <a:r>
-              <a:rPr lang="en-US" dirty="0"/>
-              <a:t/>
-            </a:r>
             <a:endParaRPr lang="en-US" dirty="0"/>
           </a:p>
         </p:txBody>
@@ -879,10 +644,6 @@
           <a:bodyPr/>
           <a:lstStyle/>
           <a:p>
-            <a:r>
-              <a:rPr lang="en-US" dirty="0"/>
-              <a:t/>
-            </a:r>
             <a:endParaRPr lang="en-US" dirty="0"/>
           </a:p>
         </p:txBody>
@@ -967,10 +728,6 @@
           <a:bodyPr/>
           <a:lstStyle/>
           <a:p>
-            <a:r>
-              <a:rPr lang="en-US" dirty="0"/>
-              <a:t/>
-            </a:r>
             <a:endParaRPr lang="en-US" dirty="0"/>
           </a:p>
         </p:txBody>
@@ -1055,10 +812,6 @@
           <a:bodyPr/>
           <a:lstStyle/>
           <a:p>
-            <a:r>
-              <a:rPr lang="en-US" dirty="0"/>
-              <a:t/>
-            </a:r>
             <a:endParaRPr lang="en-US" dirty="0"/>
           </a:p>
         </p:txBody>
@@ -1143,10 +896,6 @@
           <a:bodyPr/>
           <a:lstStyle/>
           <a:p>
-            <a:r>
-              <a:rPr lang="en-US" dirty="0"/>
-              <a:t/>
-            </a:r>
             <a:endParaRPr lang="en-US" dirty="0"/>
           </a:p>
         </p:txBody>
@@ -1231,10 +980,6 @@
           <a:bodyPr/>
           <a:lstStyle/>
           <a:p>
-            <a:r>
-              <a:rPr lang="en-US" dirty="0"/>
-              <a:t/>
-            </a:r>
             <a:endParaRPr lang="en-US" dirty="0"/>
           </a:p>
         </p:txBody>
@@ -1319,10 +1064,6 @@
           <a:bodyPr/>
           <a:lstStyle/>
           <a:p>
-            <a:r>
-              <a:rPr lang="en-US" dirty="0"/>
-              <a:t/>
-            </a:r>
             <a:endParaRPr lang="en-US" dirty="0"/>
           </a:p>
         </p:txBody>
@@ -1407,10 +1148,6 @@
           <a:bodyPr/>
           <a:lstStyle/>
           <a:p>
-            <a:r>
-              <a:rPr lang="en-US" dirty="0"/>
-              <a:t/>
-            </a:r>
             <a:endParaRPr lang="en-US" dirty="0"/>
           </a:p>
         </p:txBody>
@@ -1495,10 +1232,6 @@
           <a:bodyPr/>
           <a:lstStyle/>
           <a:p>
-            <a:r>
-              <a:rPr lang="en-US" dirty="0"/>
-              <a:t/>
-            </a:r>
             <a:endParaRPr lang="en-US" dirty="0"/>
           </a:p>
         </p:txBody>
@@ -1583,10 +1316,6 @@
           <a:bodyPr/>
           <a:lstStyle/>
           <a:p>
-            <a:r>
-              <a:rPr lang="en-US" dirty="0"/>
-              <a:t/>
-            </a:r>
             <a:endParaRPr lang="en-US" dirty="0"/>
           </a:p>
         </p:txBody>
@@ -1671,10 +1400,6 @@
           <a:bodyPr/>
           <a:lstStyle/>
           <a:p>
-            <a:r>
-              <a:rPr lang="en-US" dirty="0"/>
-              <a:t/>
-            </a:r>
             <a:endParaRPr lang="en-US" dirty="0"/>
           </a:p>
         </p:txBody>
@@ -1759,10 +1484,6 @@
           <a:bodyPr/>
           <a:lstStyle/>
           <a:p>
-            <a:r>
-              <a:rPr lang="en-US" dirty="0"/>
-              <a:t/>
-            </a:r>
             <a:endParaRPr lang="en-US" dirty="0"/>
           </a:p>
         </p:txBody>
@@ -1847,10 +1568,6 @@
           <a:bodyPr/>
           <a:lstStyle/>
           <a:p>
-            <a:r>
-              <a:rPr lang="en-US" dirty="0"/>
-              <a:t/>
-            </a:r>
             <a:endParaRPr lang="en-US" dirty="0"/>
           </a:p>
         </p:txBody>
@@ -1935,10 +1652,6 @@
           <a:bodyPr/>
           <a:lstStyle/>
           <a:p>
-            <a:r>
-              <a:rPr lang="en-US" dirty="0"/>
-              <a:t/>
-            </a:r>
             <a:endParaRPr lang="en-US" dirty="0"/>
           </a:p>
         </p:txBody>
@@ -2023,10 +1736,6 @@
           <a:bodyPr/>
           <a:lstStyle/>
           <a:p>
-            <a:r>
-              <a:rPr lang="en-US" dirty="0"/>
-              <a:t/>
-            </a:r>
             <a:endParaRPr lang="en-US" dirty="0"/>
           </a:p>
         </p:txBody>
@@ -2111,10 +1820,6 @@
           <a:bodyPr/>
           <a:lstStyle/>
           <a:p>
-            <a:r>
-              <a:rPr lang="en-US" dirty="0"/>
-              <a:t/>
-            </a:r>
             <a:endParaRPr lang="en-US" dirty="0"/>
           </a:p>
         </p:txBody>
@@ -2199,10 +1904,6 @@
           <a:bodyPr/>
           <a:lstStyle/>
           <a:p>
-            <a:r>
-              <a:rPr lang="en-US" dirty="0"/>
-              <a:t/>
-            </a:r>
             <a:endParaRPr lang="en-US" dirty="0"/>
           </a:p>
         </p:txBody>
@@ -2287,10 +1988,6 @@
           <a:bodyPr/>
           <a:lstStyle/>
           <a:p>
-            <a:r>
-              <a:rPr lang="en-US" dirty="0"/>
-              <a:t/>
-            </a:r>
             <a:endParaRPr lang="en-US" dirty="0"/>
           </a:p>
         </p:txBody>
@@ -2375,10 +2072,6 @@
           <a:bodyPr/>
           <a:lstStyle/>
           <a:p>
-            <a:r>
-              <a:rPr lang="en-US" dirty="0"/>
-              <a:t/>
-            </a:r>
             <a:endParaRPr lang="en-US" dirty="0"/>
           </a:p>
         </p:txBody>
@@ -2463,10 +2156,6 @@
           <a:bodyPr/>
           <a:lstStyle/>
           <a:p>
-            <a:r>
-              <a:rPr lang="en-US" dirty="0"/>
-              <a:t/>
-            </a:r>
             <a:endParaRPr lang="en-US" dirty="0"/>
           </a:p>
         </p:txBody>
@@ -2551,10 +2240,6 @@
           <a:bodyPr/>
           <a:lstStyle/>
           <a:p>
-            <a:r>
-              <a:rPr lang="en-US" dirty="0"/>
-              <a:t/>
-            </a:r>
             <a:endParaRPr lang="en-US" dirty="0"/>
           </a:p>
         </p:txBody>
@@ -2639,10 +2324,6 @@
           <a:bodyPr/>
           <a:lstStyle/>
           <a:p>
-            <a:r>
-              <a:rPr lang="en-US" dirty="0"/>
-              <a:t/>
-            </a:r>
             <a:endParaRPr lang="en-US" dirty="0"/>
           </a:p>
         </p:txBody>
@@ -2727,10 +2408,6 @@
           <a:bodyPr/>
           <a:lstStyle/>
           <a:p>
-            <a:r>
-              <a:rPr lang="en-US" dirty="0"/>
-              <a:t/>
-            </a:r>
             <a:endParaRPr lang="en-US" dirty="0"/>
           </a:p>
         </p:txBody>
@@ -2815,10 +2492,6 @@
           <a:bodyPr/>
           <a:lstStyle/>
           <a:p>
-            <a:r>
-              <a:rPr lang="en-US" dirty="0"/>
-              <a:t/>
-            </a:r>
             <a:endParaRPr lang="en-US" dirty="0"/>
           </a:p>
         </p:txBody>
@@ -2903,10 +2576,6 @@
           <a:bodyPr/>
           <a:lstStyle/>
           <a:p>
-            <a:r>
-              <a:rPr lang="en-US" dirty="0"/>
-              <a:t/>
-            </a:r>
             <a:endParaRPr lang="en-US" dirty="0"/>
           </a:p>
         </p:txBody>
@@ -2989,7 +2658,7 @@
           </a:prstGeom>
           <a:extLst>
             <a:ext uri="{C572A759-6A51-4108-AA02-DFA0A04FC94B}">
-              <ma14:wrappingTextBoxFlag xmlns:ma14="http://schemas.microsoft.com/office/mac/drawingml/2011/main" val="0"/>
+              <ma14:wrappingTextBoxFlag xmlns="" xmlns:ma14="http://schemas.microsoft.com/office/mac/drawingml/2011/main" val="0"/>
             </a:ext>
           </a:extLst>
         </p:spPr>
@@ -3010,8 +2679,8 @@
           <a:p>
             <a:pPr algn="l"/>
             <a:fld id="{F7021451-1387-4CA6-816F-3879F97B5CBC}" type="slidenum">
-              <a:rPr b="0" lang="en-US"/>
-              <a:t>1000</a:t>
+              <a:rPr lang="en-US" b="0"/>
+              <a:t>‹#›</a:t>
             </a:fld>
             <a:endParaRPr lang="en-US"/>
           </a:p>
@@ -3033,6 +2702,7 @@
         <a:solidFill>
           <a:srgbClr val="000000"/>
         </a:solidFill>
+        <a:effectLst/>
       </p:bgPr>
     </p:bg>
     <p:spTree>
@@ -3051,14 +2721,14 @@
       </p:grpSpPr>
       <p:pic>
         <p:nvPicPr>
-          <p:cNvPr id="2" name="Image 0" descr="preencoded.png">    </p:cNvPr>
+          <p:cNvPr id="2" name="Image 0" descr="preencoded.png"/>
           <p:cNvPicPr>
             <a:picLocks noChangeAspect="1"/>
           </p:cNvPicPr>
           <p:nvPr/>
         </p:nvPicPr>
         <p:blipFill>
-          <a:blip r:embed="rId1"/>
+          <a:blip r:embed="rId2"/>
           <a:stretch>
             <a:fillRect/>
           </a:stretch>
@@ -3089,6 +2759,7 @@
         <a:solidFill>
           <a:srgbClr val="000000"/>
         </a:solidFill>
+        <a:effectLst/>
       </p:bgPr>
     </p:bg>
     <p:spTree>
@@ -3107,14 +2778,14 @@
       </p:grpSpPr>
       <p:pic>
         <p:nvPicPr>
-          <p:cNvPr id="2" name="Image 0" descr="preencoded.png">    </p:cNvPr>
+          <p:cNvPr id="2" name="Image 0" descr="preencoded.png"/>
           <p:cNvPicPr>
             <a:picLocks noChangeAspect="1"/>
           </p:cNvPicPr>
           <p:nvPr/>
         </p:nvPicPr>
         <p:blipFill>
-          <a:blip r:embed="rId1"/>
+          <a:blip r:embed="rId2"/>
           <a:stretch>
             <a:fillRect/>
           </a:stretch>
@@ -3145,6 +2816,7 @@
         <a:solidFill>
           <a:srgbClr val="000000"/>
         </a:solidFill>
+        <a:effectLst/>
       </p:bgPr>
     </p:bg>
     <p:spTree>
@@ -3163,14 +2835,14 @@
       </p:grpSpPr>
       <p:pic>
         <p:nvPicPr>
-          <p:cNvPr id="2" name="Image 0" descr="preencoded.png">    </p:cNvPr>
+          <p:cNvPr id="2" name="Image 0" descr="preencoded.png"/>
           <p:cNvPicPr>
             <a:picLocks noChangeAspect="1"/>
           </p:cNvPicPr>
           <p:nvPr/>
         </p:nvPicPr>
         <p:blipFill>
-          <a:blip r:embed="rId1"/>
+          <a:blip r:embed="rId2"/>
           <a:stretch>
             <a:fillRect/>
           </a:stretch>
@@ -3196,6 +2868,11 @@
 <file path=ppt/slideMasters/slideMaster1.xml><?xml version="1.0" encoding="utf-8"?>
 <p:sldMaster xmlns:a="http://schemas.openxmlformats.org/drawingml/2006/main" xmlns:r="http://schemas.openxmlformats.org/officeDocument/2006/relationships" xmlns:p="http://schemas.openxmlformats.org/presentationml/2006/main">
   <p:cSld>
+    <p:bg>
+      <p:bgRef idx="1001">
+        <a:schemeClr val="bg1"/>
+      </p:bgRef>
+    </p:bg>
     <p:spTree>
       <p:nvGrpSpPr>
         <p:cNvPr id="1" name=""/>
@@ -3230,7 +2907,7 @@
           </a:prstGeom>
           <a:extLst>
             <a:ext uri="{C572A759-6A51-4108-AA02-DFA0A04FC94B}">
-              <ma14:wrappingTextBoxFlag xmlns:ma14="http://schemas.microsoft.com/office/mac/drawingml/2011/main" val="0"/>
+              <ma14:wrappingTextBoxFlag xmlns="" xmlns:ma14="http://schemas.microsoft.com/office/mac/drawingml/2011/main" val="0"/>
             </a:ext>
           </a:extLst>
         </p:spPr>
@@ -3251,8 +2928,8 @@
           <a:p>
             <a:pPr algn="l"/>
             <a:fld id="{F7021451-1387-4CA6-816F-3879F97B5CBC}" type="slidenum">
-              <a:rPr b="0" lang="en-US"/>
-              <a:t>null</a:t>
+              <a:rPr lang="en-US" b="0"/>
+              <a:t>‹#›</a:t>
             </a:fld>
             <a:endParaRPr lang="en-US"/>
           </a:p>
@@ -3559,11 +3236,11 @@
           <a:bodyPr wrap="square" lIns="0" tIns="0" rIns="0" bIns="0" rtlCol="0" anchor="ctr"/>
           <a:lstStyle/>
           <a:p>
-            <a:pPr indent="0" marL="0">
-              <a:buNone/>
-            </a:pPr>
-            <a:r>
-              <a:rPr lang="en-US" sz="1200" b="1" spc="400" kern="0" dirty="0">
+            <a:pPr marL="0" indent="0">
+              <a:buNone/>
+            </a:pPr>
+            <a:r>
+              <a:rPr lang="en-US" sz="1200" b="1" kern="0" spc="400" dirty="0">
                 <a:solidFill>
                   <a:srgbClr val="FFFFFF"/>
                 </a:solidFill>
@@ -3598,11 +3275,11 @@
           <a:bodyPr wrap="square" lIns="0" tIns="0" rIns="0" bIns="0" rtlCol="0" anchor="ctr"/>
           <a:lstStyle/>
           <a:p>
-            <a:pPr indent="0" marL="0">
-              <a:buNone/>
-            </a:pPr>
-            <a:r>
-              <a:rPr lang="en-US" sz="1200" b="1" spc="300" kern="0" dirty="0">
+            <a:pPr marL="0" indent="0">
+              <a:buNone/>
+            </a:pPr>
+            <a:r>
+              <a:rPr lang="en-US" sz="1200" b="1" kern="0" spc="300" dirty="0">
                 <a:solidFill>
                   <a:srgbClr val="C4B3F5"/>
                 </a:solidFill>
@@ -3637,7 +3314,7 @@
           <a:bodyPr wrap="square" lIns="0" tIns="0" rIns="0" bIns="0" rtlCol="0" anchor="t"/>
           <a:lstStyle/>
           <a:p>
-            <a:pPr indent="0" marL="0">
+            <a:pPr marL="0" indent="0">
               <a:lnSpc>
                 <a:spcPct val="102000"/>
               </a:lnSpc>
@@ -3657,7 +3334,7 @@
             <a:endParaRPr lang="en-US" sz="3600" dirty="0"/>
           </a:p>
           <a:p>
-            <a:pPr indent="0" marL="0">
+            <a:pPr marL="0" indent="0">
               <a:lnSpc>
                 <a:spcPct val="102000"/>
               </a:lnSpc>
@@ -3699,7 +3376,7 @@
           <a:bodyPr wrap="square" lIns="0" tIns="0" rIns="0" bIns="0" rtlCol="0" anchor="ctr"/>
           <a:lstStyle/>
           <a:p>
-            <a:pPr indent="0" marL="0">
+            <a:pPr marL="0" indent="0">
               <a:lnSpc>
                 <a:spcPct val="120000"/>
               </a:lnSpc>
@@ -3767,7 +3444,7 @@
           <a:bodyPr wrap="square" lIns="0" tIns="0" rIns="0" bIns="0" rtlCol="0" anchor="ctr"/>
           <a:lstStyle/>
           <a:p>
-            <a:pPr algn="ctr" indent="0" marL="0">
+            <a:pPr marL="0" indent="0" algn="ctr">
               <a:buNone/>
             </a:pPr>
             <a:r>
@@ -3832,7 +3509,7 @@
           <a:bodyPr wrap="square" lIns="0" tIns="0" rIns="0" bIns="0" rtlCol="0" anchor="ctr"/>
           <a:lstStyle/>
           <a:p>
-            <a:pPr algn="ctr" indent="0" marL="0">
+            <a:pPr marL="0" indent="0" algn="ctr">
               <a:buNone/>
             </a:pPr>
             <a:r>
@@ -3893,7 +3570,7 @@
           <a:bodyPr wrap="square" lIns="0" tIns="0" rIns="0" bIns="0" rtlCol="0" anchor="ctr"/>
           <a:lstStyle/>
           <a:p>
-            <a:pPr algn="ctr" indent="0" marL="0">
+            <a:pPr marL="0" indent="0" algn="ctr">
               <a:buNone/>
             </a:pPr>
             <a:r>
@@ -3958,7 +3635,7 @@
           <a:bodyPr wrap="square" lIns="0" tIns="0" rIns="0" bIns="0" rtlCol="0" anchor="ctr"/>
           <a:lstStyle/>
           <a:p>
-            <a:pPr algn="ctr" indent="0" marL="0">
+            <a:pPr marL="0" indent="0" algn="ctr">
               <a:buNone/>
             </a:pPr>
             <a:r>
@@ -4023,7 +3700,7 @@
           <a:bodyPr wrap="square" lIns="0" tIns="0" rIns="0" bIns="0" rtlCol="0" anchor="ctr"/>
           <a:lstStyle/>
           <a:p>
-            <a:pPr algn="ctr" indent="0" marL="0">
+            <a:pPr marL="0" indent="0" algn="ctr">
               <a:buNone/>
             </a:pPr>
             <a:r>
@@ -4088,7 +3765,7 @@
           <a:bodyPr wrap="square" lIns="0" tIns="0" rIns="0" bIns="0" rtlCol="0" anchor="ctr"/>
           <a:lstStyle/>
           <a:p>
-            <a:pPr algn="ctr" indent="0" marL="0">
+            <a:pPr marL="0" indent="0" algn="ctr">
               <a:buNone/>
             </a:pPr>
             <a:r>
@@ -4174,7 +3851,7 @@
           <a:bodyPr wrap="square" lIns="0" tIns="0" rIns="0" bIns="0" rtlCol="0" anchor="ctr"/>
           <a:lstStyle/>
           <a:p>
-            <a:pPr algn="l" indent="0" marL="0">
+            <a:pPr marL="0" indent="0" algn="l">
               <a:buNone/>
             </a:pPr>
             <a:r>
@@ -4213,7 +3890,7 @@
           <a:bodyPr wrap="square" lIns="0" tIns="0" rIns="0" bIns="0" rtlCol="0" anchor="ctr"/>
           <a:lstStyle/>
           <a:p>
-            <a:pPr indent="0" marL="0">
+            <a:pPr marL="0" indent="0">
               <a:buNone/>
             </a:pPr>
             <a:r>
@@ -4279,11 +3956,11 @@
           <a:bodyPr wrap="square" lIns="0" tIns="0" rIns="0" bIns="0" rtlCol="0" anchor="ctr"/>
           <a:lstStyle/>
           <a:p>
-            <a:pPr algn="ctr" indent="0" marL="0">
-              <a:buNone/>
-            </a:pPr>
-            <a:r>
-              <a:rPr lang="en-US" sz="900" b="1" spc="100" kern="0" dirty="0">
+            <a:pPr marL="0" indent="0" algn="ctr">
+              <a:buNone/>
+            </a:pPr>
+            <a:r>
+              <a:rPr lang="en-US" sz="900" b="1" kern="0" spc="100" dirty="0">
                 <a:solidFill>
                   <a:srgbClr val="5A05F4"/>
                 </a:solidFill>
@@ -4299,14 +3976,14 @@
       </p:sp>
       <p:pic>
         <p:nvPicPr>
-          <p:cNvPr id="7" name="Image 0" descr="preencoded.png">    </p:cNvPr>
+          <p:cNvPr id="7" name="Image 0" descr="preencoded.png"/>
           <p:cNvPicPr>
             <a:picLocks noChangeAspect="1"/>
           </p:cNvPicPr>
           <p:nvPr/>
         </p:nvPicPr>
         <p:blipFill>
-          <a:blip r:embed="rId1"/>
+          <a:blip r:embed="rId3"/>
           <a:stretch>
             <a:fillRect/>
           </a:stretch>
@@ -4369,7 +4046,7 @@
           <a:bodyPr wrap="square" lIns="0" tIns="0" rIns="0" bIns="0" rtlCol="0" anchor="t"/>
           <a:lstStyle/>
           <a:p>
-            <a:pPr indent="0" marL="0">
+            <a:pPr marL="0" indent="0">
               <a:lnSpc>
                 <a:spcPct val="130000"/>
               </a:lnSpc>
@@ -4389,7 +4066,7 @@
             <a:endParaRPr lang="en-US" sz="1150" dirty="0"/>
           </a:p>
           <a:p>
-            <a:pPr indent="0" marL="0">
+            <a:pPr marL="0" indent="0">
               <a:lnSpc>
                 <a:spcPct val="130000"/>
               </a:lnSpc>
@@ -4409,7 +4086,7 @@
             <a:endParaRPr lang="en-US" sz="1150" dirty="0"/>
           </a:p>
           <a:p>
-            <a:pPr indent="0" marL="0">
+            <a:pPr marL="0" indent="0">
               <a:lnSpc>
                 <a:spcPct val="130000"/>
               </a:lnSpc>
@@ -4429,7 +4106,7 @@
             <a:endParaRPr lang="en-US" sz="1150" dirty="0"/>
           </a:p>
           <a:p>
-            <a:pPr indent="0" marL="0">
+            <a:pPr marL="0" indent="0">
               <a:lnSpc>
                 <a:spcPct val="130000"/>
               </a:lnSpc>
@@ -4449,7 +4126,7 @@
             <a:endParaRPr lang="en-US" sz="1150" dirty="0"/>
           </a:p>
           <a:p>
-            <a:pPr indent="0" marL="0">
+            <a:pPr marL="0" indent="0">
               <a:lnSpc>
                 <a:spcPct val="130000"/>
               </a:lnSpc>
@@ -4469,7 +4146,7 @@
             <a:endParaRPr lang="en-US" sz="1150" dirty="0"/>
           </a:p>
           <a:p>
-            <a:pPr indent="0" marL="0">
+            <a:pPr marL="0" indent="0">
               <a:lnSpc>
                 <a:spcPct val="130000"/>
               </a:lnSpc>
@@ -4489,7 +4166,7 @@
             <a:endParaRPr lang="en-US" sz="1150" dirty="0"/>
           </a:p>
           <a:p>
-            <a:pPr indent="0" marL="0">
+            <a:pPr marL="0" indent="0">
               <a:lnSpc>
                 <a:spcPct val="130000"/>
               </a:lnSpc>
@@ -4509,7 +4186,7 @@
             <a:endParaRPr lang="en-US" sz="1150" dirty="0"/>
           </a:p>
           <a:p>
-            <a:pPr indent="0" marL="0">
+            <a:pPr marL="0" indent="0">
               <a:lnSpc>
                 <a:spcPct val="130000"/>
               </a:lnSpc>
@@ -4529,7 +4206,7 @@
             <a:endParaRPr lang="en-US" sz="1150" dirty="0"/>
           </a:p>
           <a:p>
-            <a:pPr indent="0" marL="0">
+            <a:pPr marL="0" indent="0">
               <a:lnSpc>
                 <a:spcPct val="130000"/>
               </a:lnSpc>
@@ -4613,7 +4290,7 @@
           <a:bodyPr wrap="square" lIns="0" tIns="0" rIns="0" bIns="0" rtlCol="0" anchor="ctr"/>
           <a:lstStyle/>
           <a:p>
-            <a:pPr algn="ctr" indent="0" marL="0">
+            <a:pPr marL="0" indent="0" algn="ctr">
               <a:buNone/>
             </a:pPr>
             <a:r>
@@ -4652,7 +4329,7 @@
           <a:bodyPr wrap="square" lIns="0" tIns="0" rIns="0" bIns="0" rtlCol="0" anchor="ctr"/>
           <a:lstStyle/>
           <a:p>
-            <a:pPr indent="0" marL="0">
+            <a:pPr marL="0" indent="0">
               <a:buNone/>
             </a:pPr>
             <a:r>
@@ -4691,7 +4368,7 @@
           <a:bodyPr wrap="square" lIns="0" tIns="0" rIns="0" bIns="0" rtlCol="0" anchor="t"/>
           <a:lstStyle/>
           <a:p>
-            <a:pPr indent="0" marL="0">
+            <a:pPr marL="0" indent="0">
               <a:lnSpc>
                 <a:spcPct val="108000"/>
               </a:lnSpc>
@@ -4775,7 +4452,7 @@
           <a:bodyPr wrap="square" lIns="0" tIns="0" rIns="0" bIns="0" rtlCol="0" anchor="ctr"/>
           <a:lstStyle/>
           <a:p>
-            <a:pPr algn="ctr" indent="0" marL="0">
+            <a:pPr marL="0" indent="0" algn="ctr">
               <a:buNone/>
             </a:pPr>
             <a:r>
@@ -4814,7 +4491,7 @@
           <a:bodyPr wrap="square" lIns="0" tIns="0" rIns="0" bIns="0" rtlCol="0" anchor="ctr"/>
           <a:lstStyle/>
           <a:p>
-            <a:pPr indent="0" marL="0">
+            <a:pPr marL="0" indent="0">
               <a:buNone/>
             </a:pPr>
             <a:r>
@@ -4853,7 +4530,7 @@
           <a:bodyPr wrap="square" lIns="0" tIns="0" rIns="0" bIns="0" rtlCol="0" anchor="t"/>
           <a:lstStyle/>
           <a:p>
-            <a:pPr indent="0" marL="0">
+            <a:pPr marL="0" indent="0">
               <a:lnSpc>
                 <a:spcPct val="108000"/>
               </a:lnSpc>
@@ -4937,7 +4614,7 @@
           <a:bodyPr wrap="square" lIns="0" tIns="0" rIns="0" bIns="0" rtlCol="0" anchor="ctr"/>
           <a:lstStyle/>
           <a:p>
-            <a:pPr algn="ctr" indent="0" marL="0">
+            <a:pPr marL="0" indent="0" algn="ctr">
               <a:buNone/>
             </a:pPr>
             <a:r>
@@ -4976,7 +4653,7 @@
           <a:bodyPr wrap="square" lIns="0" tIns="0" rIns="0" bIns="0" rtlCol="0" anchor="ctr"/>
           <a:lstStyle/>
           <a:p>
-            <a:pPr indent="0" marL="0">
+            <a:pPr marL="0" indent="0">
               <a:buNone/>
             </a:pPr>
             <a:r>
@@ -5015,7 +4692,7 @@
           <a:bodyPr wrap="square" lIns="0" tIns="0" rIns="0" bIns="0" rtlCol="0" anchor="t"/>
           <a:lstStyle/>
           <a:p>
-            <a:pPr indent="0" marL="0">
+            <a:pPr marL="0" indent="0">
               <a:lnSpc>
                 <a:spcPct val="108000"/>
               </a:lnSpc>
@@ -5056,7 +4733,7 @@
           </a:prstGeom>
           <a:extLst>
             <a:ext uri="{C572A759-6A51-4108-AA02-DFA0A04FC94B}">
-              <ma14:wrappingTextBoxFlag xmlns:ma14="http://schemas.microsoft.com/office/mac/drawingml/2011/main" val="0"/>
+              <ma14:wrappingTextBoxFlag xmlns="" xmlns:ma14="http://schemas.microsoft.com/office/mac/drawingml/2011/main" val="0"/>
             </a:ext>
           </a:extLst>
         </p:spPr>
@@ -5077,7 +4754,7 @@
           <a:p>
             <a:pPr algn="l"/>
             <a:fld id="{F7021451-1387-4CA6-816F-3879F97B5CBC}" type="slidenum">
-              <a:rPr b="0" lang="en-US"/>
+              <a:rPr lang="en-US" b="0"/>
               <a:t>10</a:t>
             </a:fld>
             <a:endParaRPr lang="en-US"/>
@@ -5152,7 +4829,7 @@
           <a:bodyPr wrap="square" lIns="0" tIns="0" rIns="0" bIns="0" rtlCol="0" anchor="ctr"/>
           <a:lstStyle/>
           <a:p>
-            <a:pPr algn="l" indent="0" marL="0">
+            <a:pPr marL="0" indent="0" algn="l">
               <a:buNone/>
             </a:pPr>
             <a:r>
@@ -5191,7 +4868,7 @@
           <a:bodyPr wrap="square" lIns="0" tIns="0" rIns="0" bIns="0" rtlCol="0" anchor="ctr"/>
           <a:lstStyle/>
           <a:p>
-            <a:pPr indent="0" marL="0">
+            <a:pPr marL="0" indent="0">
               <a:buNone/>
             </a:pPr>
             <a:r>
@@ -5257,11 +4934,11 @@
           <a:bodyPr wrap="square" lIns="0" tIns="0" rIns="0" bIns="0" rtlCol="0" anchor="ctr"/>
           <a:lstStyle/>
           <a:p>
-            <a:pPr algn="ctr" indent="0" marL="0">
-              <a:buNone/>
-            </a:pPr>
-            <a:r>
-              <a:rPr lang="en-US" sz="900" b="1" spc="100" kern="0" dirty="0">
+            <a:pPr marL="0" indent="0" algn="ctr">
+              <a:buNone/>
+            </a:pPr>
+            <a:r>
+              <a:rPr lang="en-US" sz="900" b="1" kern="0" spc="100" dirty="0">
                 <a:solidFill>
                   <a:srgbClr val="5A05F4"/>
                 </a:solidFill>
@@ -5277,14 +4954,14 @@
       </p:sp>
       <p:pic>
         <p:nvPicPr>
-          <p:cNvPr id="7" name="Image 0" descr="preencoded.png">    </p:cNvPr>
+          <p:cNvPr id="7" name="Image 0" descr="preencoded.png"/>
           <p:cNvPicPr>
             <a:picLocks noChangeAspect="1"/>
           </p:cNvPicPr>
           <p:nvPr/>
         </p:nvPicPr>
         <p:blipFill>
-          <a:blip r:embed="rId1"/>
+          <a:blip r:embed="rId3"/>
           <a:stretch>
             <a:fillRect/>
           </a:stretch>
@@ -5362,7 +5039,7 @@
           <a:bodyPr wrap="square" lIns="0" tIns="0" rIns="0" bIns="0" rtlCol="0" anchor="ctr"/>
           <a:lstStyle/>
           <a:p>
-            <a:pPr algn="ctr" indent="0" marL="0">
+            <a:pPr marL="0" indent="0" algn="ctr">
               <a:buNone/>
             </a:pPr>
             <a:r>
@@ -5401,7 +5078,7 @@
           <a:bodyPr wrap="square" lIns="0" tIns="0" rIns="0" bIns="0" rtlCol="0" anchor="ctr"/>
           <a:lstStyle/>
           <a:p>
-            <a:pPr indent="0" marL="0">
+            <a:pPr marL="0" indent="0">
               <a:buNone/>
             </a:pPr>
             <a:r>
@@ -5440,7 +5117,7 @@
           <a:bodyPr wrap="square" lIns="0" tIns="0" rIns="0" bIns="0" rtlCol="0" anchor="t"/>
           <a:lstStyle/>
           <a:p>
-            <a:pPr indent="0" marL="0">
+            <a:pPr marL="0" indent="0">
               <a:lnSpc>
                 <a:spcPct val="108000"/>
               </a:lnSpc>
@@ -5524,7 +5201,7 @@
           <a:bodyPr wrap="square" lIns="0" tIns="0" rIns="0" bIns="0" rtlCol="0" anchor="ctr"/>
           <a:lstStyle/>
           <a:p>
-            <a:pPr algn="ctr" indent="0" marL="0">
+            <a:pPr marL="0" indent="0" algn="ctr">
               <a:buNone/>
             </a:pPr>
             <a:r>
@@ -5563,7 +5240,7 @@
           <a:bodyPr wrap="square" lIns="0" tIns="0" rIns="0" bIns="0" rtlCol="0" anchor="ctr"/>
           <a:lstStyle/>
           <a:p>
-            <a:pPr indent="0" marL="0">
+            <a:pPr marL="0" indent="0">
               <a:buNone/>
             </a:pPr>
             <a:r>
@@ -5602,7 +5279,7 @@
           <a:bodyPr wrap="square" lIns="0" tIns="0" rIns="0" bIns="0" rtlCol="0" anchor="t"/>
           <a:lstStyle/>
           <a:p>
-            <a:pPr indent="0" marL="0">
+            <a:pPr marL="0" indent="0">
               <a:lnSpc>
                 <a:spcPct val="108000"/>
               </a:lnSpc>
@@ -5686,7 +5363,7 @@
           <a:bodyPr wrap="square" lIns="0" tIns="0" rIns="0" bIns="0" rtlCol="0" anchor="ctr"/>
           <a:lstStyle/>
           <a:p>
-            <a:pPr algn="ctr" indent="0" marL="0">
+            <a:pPr marL="0" indent="0" algn="ctr">
               <a:buNone/>
             </a:pPr>
             <a:r>
@@ -5725,7 +5402,7 @@
           <a:bodyPr wrap="square" lIns="0" tIns="0" rIns="0" bIns="0" rtlCol="0" anchor="ctr"/>
           <a:lstStyle/>
           <a:p>
-            <a:pPr indent="0" marL="0">
+            <a:pPr marL="0" indent="0">
               <a:buNone/>
             </a:pPr>
             <a:r>
@@ -5764,7 +5441,7 @@
           <a:bodyPr wrap="square" lIns="0" tIns="0" rIns="0" bIns="0" rtlCol="0" anchor="t"/>
           <a:lstStyle/>
           <a:p>
-            <a:pPr indent="0" marL="0">
+            <a:pPr marL="0" indent="0">
               <a:lnSpc>
                 <a:spcPct val="108000"/>
               </a:lnSpc>
@@ -5794,7 +5471,7 @@
         <p:spPr>
           <a:xfrm>
             <a:off x="566928" y="4069080"/>
-            <a:ext cx="11064240" cy="1234440"/>
+            <a:ext cx="10927080" cy="1234440"/>
           </a:xfrm>
           <a:prstGeom prst="roundRect">
             <a:avLst>
@@ -5828,7 +5505,7 @@
           <a:bodyPr wrap="square" lIns="0" tIns="0" rIns="0" bIns="0" rtlCol="0" anchor="ctr"/>
           <a:lstStyle/>
           <a:p>
-            <a:pPr indent="0" marL="0">
+            <a:pPr marL="0" indent="0">
               <a:lnSpc>
                 <a:spcPct val="112000"/>
               </a:lnSpc>
@@ -5869,7 +5546,7 @@
           </a:prstGeom>
           <a:extLst>
             <a:ext uri="{C572A759-6A51-4108-AA02-DFA0A04FC94B}">
-              <ma14:wrappingTextBoxFlag xmlns:ma14="http://schemas.microsoft.com/office/mac/drawingml/2011/main" val="0"/>
+              <ma14:wrappingTextBoxFlag xmlns="" xmlns:ma14="http://schemas.microsoft.com/office/mac/drawingml/2011/main" val="0"/>
             </a:ext>
           </a:extLst>
         </p:spPr>
@@ -5890,7 +5567,7 @@
           <a:p>
             <a:pPr algn="l"/>
             <a:fld id="{F7021451-1387-4CA6-816F-3879F97B5CBC}" type="slidenum">
-              <a:rPr b="0" lang="en-US"/>
+              <a:rPr lang="en-US" b="0"/>
               <a:t>11</a:t>
             </a:fld>
             <a:endParaRPr lang="en-US"/>
@@ -5965,7 +5642,7 @@
           <a:bodyPr wrap="square" lIns="0" tIns="0" rIns="0" bIns="0" rtlCol="0" anchor="ctr"/>
           <a:lstStyle/>
           <a:p>
-            <a:pPr algn="l" indent="0" marL="0">
+            <a:pPr marL="0" indent="0" algn="l">
               <a:buNone/>
             </a:pPr>
             <a:r>
@@ -6004,7 +5681,7 @@
           <a:bodyPr wrap="square" lIns="0" tIns="0" rIns="0" bIns="0" rtlCol="0" anchor="ctr"/>
           <a:lstStyle/>
           <a:p>
-            <a:pPr indent="0" marL="0">
+            <a:pPr marL="0" indent="0">
               <a:buNone/>
             </a:pPr>
             <a:r>
@@ -6070,11 +5747,11 @@
           <a:bodyPr wrap="square" lIns="0" tIns="0" rIns="0" bIns="0" rtlCol="0" anchor="ctr"/>
           <a:lstStyle/>
           <a:p>
-            <a:pPr algn="ctr" indent="0" marL="0">
-              <a:buNone/>
-            </a:pPr>
-            <a:r>
-              <a:rPr lang="en-US" sz="900" b="1" spc="100" kern="0" dirty="0">
+            <a:pPr marL="0" indent="0" algn="ctr">
+              <a:buNone/>
+            </a:pPr>
+            <a:r>
+              <a:rPr lang="en-US" sz="900" b="1" kern="0" spc="100" dirty="0">
                 <a:solidFill>
                   <a:srgbClr val="5A05F4"/>
                 </a:solidFill>
@@ -6090,14 +5767,14 @@
       </p:sp>
       <p:pic>
         <p:nvPicPr>
-          <p:cNvPr id="7" name="Image 0" descr="preencoded.png">    </p:cNvPr>
+          <p:cNvPr id="7" name="Image 0" descr="preencoded.png"/>
           <p:cNvPicPr>
             <a:picLocks noChangeAspect="1"/>
           </p:cNvPicPr>
           <p:nvPr/>
         </p:nvPicPr>
         <p:blipFill>
-          <a:blip r:embed="rId1"/>
+          <a:blip r:embed="rId3"/>
           <a:stretch>
             <a:fillRect/>
           </a:stretch>
@@ -6155,7 +5832,7 @@
           <a:bodyPr wrap="square" lIns="0" tIns="0" rIns="0" bIns="0" rtlCol="0" anchor="ctr"/>
           <a:lstStyle/>
           <a:p>
-            <a:pPr indent="0" marL="0">
+            <a:pPr marL="0" indent="0">
               <a:buNone/>
             </a:pPr>
             <a:r>
@@ -6194,7 +5871,7 @@
           <a:bodyPr wrap="square" lIns="0" tIns="0" rIns="0" bIns="0" rtlCol="0" anchor="t"/>
           <a:lstStyle/>
           <a:p>
-            <a:pPr indent="0" marL="0">
+            <a:pPr marL="0" indent="0">
               <a:buNone/>
             </a:pPr>
             <a:r>
@@ -6255,7 +5932,7 @@
           <a:bodyPr wrap="square" lIns="0" tIns="0" rIns="0" bIns="0" rtlCol="0" anchor="ctr"/>
           <a:lstStyle/>
           <a:p>
-            <a:pPr indent="0" marL="0">
+            <a:pPr marL="0" indent="0">
               <a:buNone/>
             </a:pPr>
             <a:r>
@@ -6294,7 +5971,7 @@
           <a:bodyPr wrap="square" lIns="0" tIns="0" rIns="0" bIns="0" rtlCol="0" anchor="t"/>
           <a:lstStyle/>
           <a:p>
-            <a:pPr indent="0" marL="0">
+            <a:pPr marL="0" indent="0">
               <a:lnSpc>
                 <a:spcPct val="108000"/>
               </a:lnSpc>
@@ -6358,7 +6035,7 @@
           <a:bodyPr wrap="square" lIns="0" tIns="0" rIns="0" bIns="0" rtlCol="0" anchor="ctr"/>
           <a:lstStyle/>
           <a:p>
-            <a:pPr indent="0" marL="0">
+            <a:pPr marL="0" indent="0">
               <a:buNone/>
             </a:pPr>
             <a:r>
@@ -6397,7 +6074,7 @@
           <a:bodyPr wrap="square" lIns="0" tIns="0" rIns="0" bIns="0" rtlCol="0" anchor="t"/>
           <a:lstStyle/>
           <a:p>
-            <a:pPr indent="0" marL="0">
+            <a:pPr marL="0" indent="0">
               <a:lnSpc>
                 <a:spcPct val="108000"/>
               </a:lnSpc>
@@ -6461,7 +6138,7 @@
           <a:bodyPr wrap="square" lIns="0" tIns="0" rIns="0" bIns="0" rtlCol="0" anchor="ctr"/>
           <a:lstStyle/>
           <a:p>
-            <a:pPr indent="0" marL="0">
+            <a:pPr marL="0" indent="0">
               <a:buNone/>
             </a:pPr>
             <a:r>
@@ -6487,8 +6164,8 @@
         </p:nvSpPr>
         <p:spPr>
           <a:xfrm>
-            <a:off x="9363456" y="2423160"/>
-            <a:ext cx="2020824" cy="576072"/>
+            <a:off x="9363456" y="2263806"/>
+            <a:ext cx="2020824" cy="735426"/>
           </a:xfrm>
           <a:prstGeom prst="rect">
             <a:avLst/>
@@ -6500,7 +6177,7 @@
           <a:bodyPr wrap="square" lIns="0" tIns="0" rIns="0" bIns="0" rtlCol="0" anchor="t"/>
           <a:lstStyle/>
           <a:p>
-            <a:pPr indent="0" marL="0">
+            <a:pPr marL="0" indent="0">
               <a:lnSpc>
                 <a:spcPct val="108000"/>
               </a:lnSpc>
@@ -6529,8 +6206,8 @@
         </p:nvSpPr>
         <p:spPr>
           <a:xfrm>
-            <a:off x="566928" y="3703320"/>
-            <a:ext cx="11064240" cy="1005840"/>
+            <a:off x="566928" y="3517697"/>
+            <a:ext cx="11018520" cy="1005840"/>
           </a:xfrm>
           <a:prstGeom prst="roundRect">
             <a:avLst>
@@ -6551,7 +6228,7 @@
         </p:nvSpPr>
         <p:spPr>
           <a:xfrm>
-            <a:off x="786384" y="3831336"/>
+            <a:off x="786384" y="3645713"/>
             <a:ext cx="10625328" cy="219456"/>
           </a:xfrm>
           <a:prstGeom prst="rect">
@@ -6564,11 +6241,11 @@
           <a:bodyPr wrap="square" lIns="0" tIns="0" rIns="0" bIns="0" rtlCol="0" anchor="ctr"/>
           <a:lstStyle/>
           <a:p>
-            <a:pPr indent="0" marL="0">
-              <a:buNone/>
-            </a:pPr>
-            <a:r>
-              <a:rPr lang="en-US" sz="950" b="1" spc="150" kern="0" dirty="0">
+            <a:pPr marL="0" indent="0">
+              <a:buNone/>
+            </a:pPr>
+            <a:r>
+              <a:rPr lang="en-US" sz="950" b="1" kern="0" spc="150" dirty="0">
                 <a:solidFill>
                   <a:srgbClr val="FFFFFF"/>
                 </a:solidFill>
@@ -6590,7 +6267,7 @@
         </p:nvSpPr>
         <p:spPr>
           <a:xfrm>
-            <a:off x="786384" y="4087368"/>
+            <a:off x="786384" y="3901745"/>
             <a:ext cx="10625328" cy="493776"/>
           </a:xfrm>
           <a:prstGeom prst="rect">
@@ -6603,7 +6280,7 @@
           <a:bodyPr wrap="square" lIns="0" tIns="0" rIns="0" bIns="0" rtlCol="0" anchor="ctr"/>
           <a:lstStyle/>
           <a:p>
-            <a:pPr indent="0" marL="0">
+            <a:pPr marL="0" indent="0">
               <a:lnSpc>
                 <a:spcPct val="112000"/>
               </a:lnSpc>
@@ -6633,7 +6310,7 @@
         <p:spPr>
           <a:xfrm>
             <a:off x="566928" y="4892040"/>
-            <a:ext cx="11064240" cy="1005840"/>
+            <a:ext cx="11018520" cy="1005840"/>
           </a:xfrm>
           <a:prstGeom prst="roundRect">
             <a:avLst>
@@ -6672,11 +6349,11 @@
           <a:bodyPr wrap="square" lIns="0" tIns="0" rIns="0" bIns="0" rtlCol="0" anchor="ctr"/>
           <a:lstStyle/>
           <a:p>
-            <a:pPr indent="0" marL="0">
-              <a:buNone/>
-            </a:pPr>
-            <a:r>
-              <a:rPr lang="en-US" sz="950" b="1" spc="150" kern="0" dirty="0">
+            <a:pPr marL="0" indent="0">
+              <a:buNone/>
+            </a:pPr>
+            <a:r>
+              <a:rPr lang="en-US" sz="950" b="1" kern="0" spc="150" dirty="0">
                 <a:solidFill>
                   <a:srgbClr val="1A4FBF"/>
                 </a:solidFill>
@@ -6711,7 +6388,7 @@
           <a:bodyPr wrap="square" lIns="0" tIns="0" rIns="0" bIns="0" rtlCol="0" anchor="ctr"/>
           <a:lstStyle/>
           <a:p>
-            <a:pPr indent="0" marL="0">
+            <a:pPr marL="0" indent="0">
               <a:lnSpc>
                 <a:spcPct val="112000"/>
               </a:lnSpc>
@@ -6734,7 +6411,7 @@
       </p:sp>
       <p:sp>
         <p:nvSpPr>
-          <p:cNvPr id="25" name="Slide Number Placeholder 0"/>
+          <p:cNvPr id="26" name="Slide Number Placeholder 0"/>
           <p:cNvSpPr>
             <a:spLocks noGrp="1"/>
           </p:cNvSpPr>
@@ -6752,7 +6429,7 @@
           </a:prstGeom>
           <a:extLst>
             <a:ext uri="{C572A759-6A51-4108-AA02-DFA0A04FC94B}">
-              <ma14:wrappingTextBoxFlag xmlns:ma14="http://schemas.microsoft.com/office/mac/drawingml/2011/main" val="0"/>
+              <ma14:wrappingTextBoxFlag xmlns="" xmlns:ma14="http://schemas.microsoft.com/office/mac/drawingml/2011/main" val="0"/>
             </a:ext>
           </a:extLst>
         </p:spPr>
@@ -6773,7 +6450,7 @@
           <a:p>
             <a:pPr algn="l"/>
             <a:fld id="{F7021451-1387-4CA6-816F-3879F97B5CBC}" type="slidenum">
-              <a:rPr b="0" lang="en-US"/>
+              <a:rPr lang="en-US" b="0"/>
               <a:t>12</a:t>
             </a:fld>
             <a:endParaRPr lang="en-US"/>
@@ -6848,7 +6525,7 @@
           <a:bodyPr wrap="square" lIns="0" tIns="0" rIns="0" bIns="0" rtlCol="0" anchor="ctr"/>
           <a:lstStyle/>
           <a:p>
-            <a:pPr algn="l" indent="0" marL="0">
+            <a:pPr marL="0" indent="0" algn="l">
               <a:buNone/>
             </a:pPr>
             <a:r>
@@ -6887,7 +6564,7 @@
           <a:bodyPr wrap="square" lIns="0" tIns="0" rIns="0" bIns="0" rtlCol="0" anchor="ctr"/>
           <a:lstStyle/>
           <a:p>
-            <a:pPr indent="0" marL="0">
+            <a:pPr marL="0" indent="0">
               <a:buNone/>
             </a:pPr>
             <a:r>
@@ -6953,11 +6630,11 @@
           <a:bodyPr wrap="square" lIns="0" tIns="0" rIns="0" bIns="0" rtlCol="0" anchor="ctr"/>
           <a:lstStyle/>
           <a:p>
-            <a:pPr algn="ctr" indent="0" marL="0">
-              <a:buNone/>
-            </a:pPr>
-            <a:r>
-              <a:rPr lang="en-US" sz="900" b="1" spc="100" kern="0" dirty="0">
+            <a:pPr marL="0" indent="0" algn="ctr">
+              <a:buNone/>
+            </a:pPr>
+            <a:r>
+              <a:rPr lang="en-US" sz="900" b="1" kern="0" spc="100" dirty="0">
                 <a:solidFill>
                   <a:srgbClr val="5A05F4"/>
                 </a:solidFill>
@@ -6973,14 +6650,14 @@
       </p:sp>
       <p:pic>
         <p:nvPicPr>
-          <p:cNvPr id="7" name="Image 0" descr="preencoded.png">    </p:cNvPr>
+          <p:cNvPr id="7" name="Image 0" descr="preencoded.png"/>
           <p:cNvPicPr>
             <a:picLocks noChangeAspect="1"/>
           </p:cNvPicPr>
           <p:nvPr/>
         </p:nvPicPr>
         <p:blipFill>
-          <a:blip r:embed="rId1"/>
+          <a:blip r:embed="rId3"/>
           <a:stretch>
             <a:fillRect/>
           </a:stretch>
@@ -7011,16 +6688,34 @@
         </p:nvGraphicFramePr>
         <p:xfrm>
           <a:off x="566928" y="1645920"/>
-          <a:ext cx="11064240" cy="914400"/>
+          <a:ext cx="11064240" cy="1700784"/>
         </p:xfrm>
         <a:graphic>
           <a:graphicData uri="http://schemas.openxmlformats.org/drawingml/2006/table">
             <a:tbl>
               <a:tblPr/>
               <a:tblGrid>
-                <a:gridCol w="2743200"/>
-                <a:gridCol w="4572000"/>
-                <a:gridCol w="3749040"/>
+                <a:gridCol w="2743200">
+                  <a:extLst>
+                    <a:ext uri="{9D8B030D-6E8A-4147-A177-3AD203B41FA5}">
+                      <a16:colId xmlns:a16="http://schemas.microsoft.com/office/drawing/2014/main" val="20000"/>
+                    </a:ext>
+                  </a:extLst>
+                </a:gridCol>
+                <a:gridCol w="4572000">
+                  <a:extLst>
+                    <a:ext uri="{9D8B030D-6E8A-4147-A177-3AD203B41FA5}">
+                      <a16:colId xmlns:a16="http://schemas.microsoft.com/office/drawing/2014/main" val="20001"/>
+                    </a:ext>
+                  </a:extLst>
+                </a:gridCol>
+                <a:gridCol w="3749040">
+                  <a:extLst>
+                    <a:ext uri="{9D8B030D-6E8A-4147-A177-3AD203B41FA5}">
+                      <a16:colId xmlns:a16="http://schemas.microsoft.com/office/drawing/2014/main" val="20002"/>
+                    </a:ext>
+                  </a:extLst>
+                </a:gridCol>
               </a:tblGrid>
               <a:tr h="566928">
                 <a:tc>
@@ -7028,11 +6723,11 @@
                     <a:bodyPr/>
                     <a:lstStyle/>
                     <a:p>
-                      <a:pPr algn="ctr" indent="0" marL="0">
+                      <a:pPr marL="0" indent="0" algn="ctr">
                         <a:buNone/>
                       </a:pPr>
                       <a:r>
-                        <a:rPr lang="en-US" sz="900" b="1" spc="100" kern="0" dirty="0">
+                        <a:rPr lang="en-US" sz="900" b="1" kern="0" spc="100" dirty="0">
                           <a:solidFill>
                             <a:srgbClr val="FFFFFF"/>
                           </a:solidFill>
@@ -7096,11 +6791,11 @@
                     <a:bodyPr/>
                     <a:lstStyle/>
                     <a:p>
-                      <a:pPr algn="ctr" indent="0" marL="0">
+                      <a:pPr marL="0" indent="0" algn="ctr">
                         <a:buNone/>
                       </a:pPr>
                       <a:r>
-                        <a:rPr lang="en-US" sz="900" b="1" spc="100" kern="0" dirty="0">
+                        <a:rPr lang="en-US" sz="900" b="1" kern="0" spc="100" dirty="0">
                           <a:solidFill>
                             <a:srgbClr val="FFFFFF"/>
                           </a:solidFill>
@@ -7164,11 +6859,11 @@
                     <a:bodyPr/>
                     <a:lstStyle/>
                     <a:p>
-                      <a:pPr algn="ctr" indent="0" marL="0">
+                      <a:pPr marL="0" indent="0" algn="ctr">
                         <a:buNone/>
                       </a:pPr>
                       <a:r>
-                        <a:rPr lang="en-US" sz="900" b="1" spc="100" kern="0" dirty="0">
+                        <a:rPr lang="en-US" sz="900" b="1" kern="0" spc="100" dirty="0">
                           <a:solidFill>
                             <a:srgbClr val="FFFFFF"/>
                           </a:solidFill>
@@ -7227,6 +6922,11 @@
                     </a:solidFill>
                   </a:tcPr>
                 </a:tc>
+                <a:extLst>
+                  <a:ext uri="{0D108BD9-81ED-4DB2-BD59-A6C34878D82A}">
+                    <a16:rowId xmlns:a16="http://schemas.microsoft.com/office/drawing/2014/main" val="10000"/>
+                  </a:ext>
+                </a:extLst>
               </a:tr>
               <a:tr h="566928">
                 <a:tc>
@@ -7234,7 +6934,7 @@
                     <a:bodyPr/>
                     <a:lstStyle/>
                     <a:p>
-                      <a:pPr indent="0" marL="0">
+                      <a:pPr marL="0" indent="0">
                         <a:buNone/>
                       </a:pPr>
                       <a:r>
@@ -7302,7 +7002,7 @@
                     <a:bodyPr/>
                     <a:lstStyle/>
                     <a:p>
-                      <a:pPr indent="0" marL="0">
+                      <a:pPr marL="0" indent="0">
                         <a:buNone/>
                       </a:pPr>
                       <a:r>
@@ -7370,7 +7070,7 @@
                     <a:bodyPr/>
                     <a:lstStyle/>
                     <a:p>
-                      <a:pPr indent="0" marL="0">
+                      <a:pPr marL="0" indent="0">
                         <a:buNone/>
                       </a:pPr>
                       <a:r>
@@ -7433,6 +7133,11 @@
                     </a:solidFill>
                   </a:tcPr>
                 </a:tc>
+                <a:extLst>
+                  <a:ext uri="{0D108BD9-81ED-4DB2-BD59-A6C34878D82A}">
+                    <a16:rowId xmlns:a16="http://schemas.microsoft.com/office/drawing/2014/main" val="10001"/>
+                  </a:ext>
+                </a:extLst>
               </a:tr>
               <a:tr h="566928">
                 <a:tc>
@@ -7440,7 +7145,7 @@
                     <a:bodyPr/>
                     <a:lstStyle/>
                     <a:p>
-                      <a:pPr indent="0" marL="0">
+                      <a:pPr marL="0" indent="0">
                         <a:buNone/>
                       </a:pPr>
                       <a:r>
@@ -7508,7 +7213,7 @@
                     <a:bodyPr/>
                     <a:lstStyle/>
                     <a:p>
-                      <a:pPr indent="0" marL="0">
+                      <a:pPr marL="0" indent="0">
                         <a:buNone/>
                       </a:pPr>
                       <a:r>
@@ -7576,7 +7281,7 @@
                     <a:bodyPr/>
                     <a:lstStyle/>
                     <a:p>
-                      <a:pPr indent="0" marL="0">
+                      <a:pPr marL="0" indent="0">
                         <a:buNone/>
                       </a:pPr>
                       <a:r>
@@ -7639,6 +7344,11 @@
                     </a:solidFill>
                   </a:tcPr>
                 </a:tc>
+                <a:extLst>
+                  <a:ext uri="{0D108BD9-81ED-4DB2-BD59-A6C34878D82A}">
+                    <a16:rowId xmlns:a16="http://schemas.microsoft.com/office/drawing/2014/main" val="10002"/>
+                  </a:ext>
+                </a:extLst>
               </a:tr>
             </a:tbl>
           </a:graphicData>
@@ -7687,7 +7397,7 @@
           <a:bodyPr wrap="square" lIns="0" tIns="0" rIns="0" bIns="0" rtlCol="0" anchor="ctr"/>
           <a:lstStyle/>
           <a:p>
-            <a:pPr indent="0" marL="0">
+            <a:pPr marL="0" indent="0">
               <a:buNone/>
             </a:pPr>
             <a:r>
@@ -7726,7 +7436,7 @@
           <a:bodyPr wrap="square" lIns="0" tIns="0" rIns="0" bIns="0" rtlCol="0" anchor="t"/>
           <a:lstStyle/>
           <a:p>
-            <a:pPr indent="0" marL="0">
+            <a:pPr marL="0" indent="0">
               <a:lnSpc>
                 <a:spcPct val="108000"/>
               </a:lnSpc>
@@ -7790,7 +7500,7 @@
           <a:bodyPr wrap="square" lIns="0" tIns="0" rIns="0" bIns="0" rtlCol="0" anchor="ctr"/>
           <a:lstStyle/>
           <a:p>
-            <a:pPr indent="0" marL="0">
+            <a:pPr marL="0" indent="0">
               <a:buNone/>
             </a:pPr>
             <a:r>
@@ -7810,7 +7520,7 @@
       </p:sp>
       <p:sp>
         <p:nvSpPr>
-          <p:cNvPr id="14" name="Text 10"/>
+          <p:cNvPr id="8" name="Text 10"/>
           <p:cNvSpPr/>
           <p:nvPr/>
         </p:nvSpPr>
@@ -7829,7 +7539,7 @@
           <a:bodyPr wrap="square" lIns="0" tIns="0" rIns="0" bIns="0" rtlCol="0" anchor="t"/>
           <a:lstStyle/>
           <a:p>
-            <a:pPr indent="0" marL="0">
+            <a:pPr marL="0" indent="0">
               <a:lnSpc>
                 <a:spcPct val="108000"/>
               </a:lnSpc>
@@ -7898,11 +7608,11 @@
           <a:bodyPr wrap="square" lIns="0" tIns="0" rIns="0" bIns="0" rtlCol="0" anchor="ctr"/>
           <a:lstStyle/>
           <a:p>
-            <a:pPr indent="0" marL="0">
-              <a:buNone/>
-            </a:pPr>
-            <a:r>
-              <a:rPr lang="en-US" sz="950" b="1" spc="150" kern="0" dirty="0">
+            <a:pPr marL="0" indent="0">
+              <a:buNone/>
+            </a:pPr>
+            <a:r>
+              <a:rPr lang="en-US" sz="950" b="1" kern="0" spc="150" dirty="0">
                 <a:solidFill>
                   <a:srgbClr val="106B41"/>
                 </a:solidFill>
@@ -7937,7 +7647,7 @@
           <a:bodyPr wrap="square" lIns="0" tIns="0" rIns="0" bIns="0" rtlCol="0" anchor="ctr"/>
           <a:lstStyle/>
           <a:p>
-            <a:pPr indent="0" marL="0">
+            <a:pPr marL="0" indent="0">
               <a:lnSpc>
                 <a:spcPct val="112000"/>
               </a:lnSpc>
@@ -7978,7 +7688,7 @@
           </a:prstGeom>
           <a:extLst>
             <a:ext uri="{C572A759-6A51-4108-AA02-DFA0A04FC94B}">
-              <ma14:wrappingTextBoxFlag xmlns:ma14="http://schemas.microsoft.com/office/mac/drawingml/2011/main" val="0"/>
+              <ma14:wrappingTextBoxFlag xmlns="" xmlns:ma14="http://schemas.microsoft.com/office/mac/drawingml/2011/main" val="0"/>
             </a:ext>
           </a:extLst>
         </p:spPr>
@@ -7999,7 +7709,7 @@
           <a:p>
             <a:pPr algn="l"/>
             <a:fld id="{F7021451-1387-4CA6-816F-3879F97B5CBC}" type="slidenum">
-              <a:rPr b="0" lang="en-US"/>
+              <a:rPr lang="en-US" b="0"/>
               <a:t>13</a:t>
             </a:fld>
             <a:endParaRPr lang="en-US"/>
@@ -8074,7 +7784,7 @@
           <a:bodyPr wrap="square" lIns="0" tIns="0" rIns="0" bIns="0" rtlCol="0" anchor="ctr"/>
           <a:lstStyle/>
           <a:p>
-            <a:pPr algn="l" indent="0" marL="0">
+            <a:pPr marL="0" indent="0" algn="l">
               <a:buNone/>
             </a:pPr>
             <a:r>
@@ -8113,7 +7823,7 @@
           <a:bodyPr wrap="square" lIns="0" tIns="0" rIns="0" bIns="0" rtlCol="0" anchor="ctr"/>
           <a:lstStyle/>
           <a:p>
-            <a:pPr indent="0" marL="0">
+            <a:pPr marL="0" indent="0">
               <a:buNone/>
             </a:pPr>
             <a:r>
@@ -8179,11 +7889,11 @@
           <a:bodyPr wrap="square" lIns="0" tIns="0" rIns="0" bIns="0" rtlCol="0" anchor="ctr"/>
           <a:lstStyle/>
           <a:p>
-            <a:pPr algn="ctr" indent="0" marL="0">
-              <a:buNone/>
-            </a:pPr>
-            <a:r>
-              <a:rPr lang="en-US" sz="900" b="1" spc="100" kern="0" dirty="0">
+            <a:pPr marL="0" indent="0" algn="ctr">
+              <a:buNone/>
+            </a:pPr>
+            <a:r>
+              <a:rPr lang="en-US" sz="900" b="1" kern="0" spc="100" dirty="0">
                 <a:solidFill>
                   <a:srgbClr val="5A05F4"/>
                 </a:solidFill>
@@ -8199,14 +7909,14 @@
       </p:sp>
       <p:pic>
         <p:nvPicPr>
-          <p:cNvPr id="7" name="Image 0" descr="preencoded.png">    </p:cNvPr>
+          <p:cNvPr id="7" name="Image 0" descr="preencoded.png"/>
           <p:cNvPicPr>
             <a:picLocks noChangeAspect="1"/>
           </p:cNvPicPr>
           <p:nvPr/>
         </p:nvPicPr>
         <p:blipFill>
-          <a:blip r:embed="rId1"/>
+          <a:blip r:embed="rId3"/>
           <a:stretch>
             <a:fillRect/>
           </a:stretch>
@@ -8264,7 +7974,7 @@
           <a:bodyPr wrap="square" lIns="0" tIns="0" rIns="0" bIns="0" rtlCol="0" anchor="ctr"/>
           <a:lstStyle/>
           <a:p>
-            <a:pPr indent="0" marL="0">
+            <a:pPr marL="0" indent="0">
               <a:buNone/>
             </a:pPr>
             <a:r>
@@ -8303,7 +8013,7 @@
           <a:bodyPr wrap="square" lIns="0" tIns="0" rIns="0" bIns="0" rtlCol="0" anchor="t"/>
           <a:lstStyle/>
           <a:p>
-            <a:pPr indent="0" marL="0">
+            <a:pPr marL="0" indent="0">
               <a:lnSpc>
                 <a:spcPct val="108000"/>
               </a:lnSpc>
@@ -8367,7 +8077,7 @@
           <a:bodyPr wrap="square" lIns="0" tIns="0" rIns="0" bIns="0" rtlCol="0" anchor="ctr"/>
           <a:lstStyle/>
           <a:p>
-            <a:pPr indent="0" marL="0">
+            <a:pPr marL="0" indent="0">
               <a:buNone/>
             </a:pPr>
             <a:r>
@@ -8406,7 +8116,7 @@
           <a:bodyPr wrap="square" lIns="0" tIns="0" rIns="0" bIns="0" rtlCol="0" anchor="t"/>
           <a:lstStyle/>
           <a:p>
-            <a:pPr indent="0" marL="0">
+            <a:pPr marL="0" indent="0">
               <a:lnSpc>
                 <a:spcPct val="108000"/>
               </a:lnSpc>
@@ -8475,11 +8185,11 @@
           <a:bodyPr wrap="square" lIns="0" tIns="0" rIns="0" bIns="0" rtlCol="0" anchor="ctr"/>
           <a:lstStyle/>
           <a:p>
-            <a:pPr indent="0" marL="0">
-              <a:buNone/>
-            </a:pPr>
-            <a:r>
-              <a:rPr lang="en-US" sz="950" b="1" spc="150" kern="0" dirty="0">
+            <a:pPr marL="0" indent="0">
+              <a:buNone/>
+            </a:pPr>
+            <a:r>
+              <a:rPr lang="en-US" sz="950" b="1" kern="0" spc="150" dirty="0">
                 <a:solidFill>
                   <a:srgbClr val="106B41"/>
                 </a:solidFill>
@@ -8514,7 +8224,7 @@
           <a:bodyPr wrap="square" lIns="0" tIns="0" rIns="0" bIns="0" rtlCol="0" anchor="ctr"/>
           <a:lstStyle/>
           <a:p>
-            <a:pPr indent="0" marL="0">
+            <a:pPr marL="0" indent="0">
               <a:lnSpc>
                 <a:spcPct val="112000"/>
               </a:lnSpc>
@@ -8583,7 +8293,7 @@
           <a:bodyPr wrap="square" lIns="0" tIns="0" rIns="0" bIns="0" rtlCol="0" anchor="ctr"/>
           <a:lstStyle/>
           <a:p>
-            <a:pPr indent="0" marL="0">
+            <a:pPr marL="0" indent="0">
               <a:lnSpc>
                 <a:spcPct val="112000"/>
               </a:lnSpc>
@@ -8624,7 +8334,7 @@
           </a:prstGeom>
           <a:extLst>
             <a:ext uri="{C572A759-6A51-4108-AA02-DFA0A04FC94B}">
-              <ma14:wrappingTextBoxFlag xmlns:ma14="http://schemas.microsoft.com/office/mac/drawingml/2011/main" val="0"/>
+              <ma14:wrappingTextBoxFlag xmlns="" xmlns:ma14="http://schemas.microsoft.com/office/mac/drawingml/2011/main" val="0"/>
             </a:ext>
           </a:extLst>
         </p:spPr>
@@ -8645,7 +8355,7 @@
           <a:p>
             <a:pPr algn="l"/>
             <a:fld id="{F7021451-1387-4CA6-816F-3879F97B5CBC}" type="slidenum">
-              <a:rPr b="0" lang="en-US"/>
+              <a:rPr lang="en-US" b="0"/>
               <a:t>14</a:t>
             </a:fld>
             <a:endParaRPr lang="en-US"/>
@@ -8720,7 +8430,7 @@
           <a:bodyPr wrap="square" lIns="0" tIns="0" rIns="0" bIns="0" rtlCol="0" anchor="ctr"/>
           <a:lstStyle/>
           <a:p>
-            <a:pPr algn="l" indent="0" marL="0">
+            <a:pPr marL="0" indent="0" algn="l">
               <a:buNone/>
             </a:pPr>
             <a:r>
@@ -8759,7 +8469,7 @@
           <a:bodyPr wrap="square" lIns="0" tIns="0" rIns="0" bIns="0" rtlCol="0" anchor="ctr"/>
           <a:lstStyle/>
           <a:p>
-            <a:pPr indent="0" marL="0">
+            <a:pPr marL="0" indent="0">
               <a:buNone/>
             </a:pPr>
             <a:r>
@@ -8825,11 +8535,11 @@
           <a:bodyPr wrap="square" lIns="0" tIns="0" rIns="0" bIns="0" rtlCol="0" anchor="ctr"/>
           <a:lstStyle/>
           <a:p>
-            <a:pPr algn="ctr" indent="0" marL="0">
-              <a:buNone/>
-            </a:pPr>
-            <a:r>
-              <a:rPr lang="en-US" sz="900" b="1" spc="100" kern="0" dirty="0">
+            <a:pPr marL="0" indent="0" algn="ctr">
+              <a:buNone/>
+            </a:pPr>
+            <a:r>
+              <a:rPr lang="en-US" sz="900" b="1" kern="0" spc="100" dirty="0">
                 <a:solidFill>
                   <a:srgbClr val="5A05F4"/>
                 </a:solidFill>
@@ -8845,14 +8555,14 @@
       </p:sp>
       <p:pic>
         <p:nvPicPr>
-          <p:cNvPr id="7" name="Image 0" descr="preencoded.png">    </p:cNvPr>
+          <p:cNvPr id="7" name="Image 0" descr="preencoded.png"/>
           <p:cNvPicPr>
             <a:picLocks noChangeAspect="1"/>
           </p:cNvPicPr>
           <p:nvPr/>
         </p:nvPicPr>
         <p:blipFill>
-          <a:blip r:embed="rId1"/>
+          <a:blip r:embed="rId3"/>
           <a:stretch>
             <a:fillRect/>
           </a:stretch>
@@ -8910,7 +8620,7 @@
           <a:bodyPr wrap="square" lIns="0" tIns="0" rIns="0" bIns="0" rtlCol="0" anchor="ctr"/>
           <a:lstStyle/>
           <a:p>
-            <a:pPr algn="ctr" indent="0" marL="0">
+            <a:pPr marL="0" indent="0" algn="ctr">
               <a:buNone/>
             </a:pPr>
             <a:r>
@@ -9014,7 +8724,7 @@
           <a:bodyPr wrap="square" lIns="0" tIns="0" rIns="0" bIns="0" rtlCol="0" anchor="ctr"/>
           <a:lstStyle/>
           <a:p>
-            <a:pPr algn="ctr" indent="0" marL="0">
+            <a:pPr marL="0" indent="0" algn="ctr">
               <a:buNone/>
             </a:pPr>
             <a:r>
@@ -9118,7 +8828,7 @@
           <a:bodyPr wrap="square" lIns="0" tIns="0" rIns="0" bIns="0" rtlCol="0" anchor="ctr"/>
           <a:lstStyle/>
           <a:p>
-            <a:pPr algn="ctr" indent="0" marL="0">
+            <a:pPr marL="0" indent="0" algn="ctr">
               <a:buNone/>
             </a:pPr>
             <a:r>
@@ -9222,7 +8932,7 @@
           <a:bodyPr wrap="square" lIns="0" tIns="0" rIns="0" bIns="0" rtlCol="0" anchor="ctr"/>
           <a:lstStyle/>
           <a:p>
-            <a:pPr algn="ctr" indent="0" marL="0">
+            <a:pPr marL="0" indent="0" algn="ctr">
               <a:buNone/>
             </a:pPr>
             <a:r>
@@ -9326,7 +9036,7 @@
           <a:bodyPr wrap="square" lIns="0" tIns="0" rIns="0" bIns="0" rtlCol="0" anchor="ctr"/>
           <a:lstStyle/>
           <a:p>
-            <a:pPr algn="ctr" indent="0" marL="0">
+            <a:pPr marL="0" indent="0" algn="ctr">
               <a:buNone/>
             </a:pPr>
             <a:r>
@@ -9392,11 +9102,11 @@
           <a:bodyPr wrap="square" lIns="0" tIns="0" rIns="0" bIns="0" rtlCol="0" anchor="ctr"/>
           <a:lstStyle/>
           <a:p>
-            <a:pPr indent="0" marL="0">
-              <a:buNone/>
-            </a:pPr>
-            <a:r>
-              <a:rPr lang="en-US" sz="950" b="1" spc="150" kern="0" dirty="0">
+            <a:pPr marL="0" indent="0">
+              <a:buNone/>
+            </a:pPr>
+            <a:r>
+              <a:rPr lang="en-US" sz="950" b="1" kern="0" spc="150" dirty="0">
                 <a:solidFill>
                   <a:srgbClr val="106B41"/>
                 </a:solidFill>
@@ -9431,7 +9141,7 @@
           <a:bodyPr wrap="square" lIns="0" tIns="0" rIns="0" bIns="0" rtlCol="0" anchor="ctr"/>
           <a:lstStyle/>
           <a:p>
-            <a:pPr indent="0" marL="0">
+            <a:pPr marL="0" indent="0">
               <a:lnSpc>
                 <a:spcPct val="112000"/>
               </a:lnSpc>
@@ -9495,7 +9205,7 @@
           <a:bodyPr wrap="square" lIns="0" tIns="0" rIns="0" bIns="0" rtlCol="0" anchor="ctr"/>
           <a:lstStyle/>
           <a:p>
-            <a:pPr indent="0" marL="0">
+            <a:pPr marL="0" indent="0">
               <a:buNone/>
             </a:pPr>
             <a:r>
@@ -9534,7 +9244,7 @@
           <a:bodyPr wrap="square" lIns="0" tIns="0" rIns="0" bIns="0" rtlCol="0" anchor="t"/>
           <a:lstStyle/>
           <a:p>
-            <a:pPr indent="0" marL="0">
+            <a:pPr marL="0" indent="0">
               <a:lnSpc>
                 <a:spcPct val="108000"/>
               </a:lnSpc>
@@ -9598,7 +9308,7 @@
           <a:bodyPr wrap="square" lIns="0" tIns="0" rIns="0" bIns="0" rtlCol="0" anchor="ctr"/>
           <a:lstStyle/>
           <a:p>
-            <a:pPr indent="0" marL="0">
+            <a:pPr marL="0" indent="0">
               <a:buNone/>
             </a:pPr>
             <a:r>
@@ -9637,7 +9347,7 @@
           <a:bodyPr wrap="square" lIns="0" tIns="0" rIns="0" bIns="0" rtlCol="0" anchor="t"/>
           <a:lstStyle/>
           <a:p>
-            <a:pPr indent="0" marL="0">
+            <a:pPr marL="0" indent="0">
               <a:lnSpc>
                 <a:spcPct val="108000"/>
               </a:lnSpc>
@@ -9660,7 +9370,7 @@
       </p:sp>
       <p:sp>
         <p:nvSpPr>
-          <p:cNvPr id="25" name="Slide Number Placeholder 0"/>
+          <p:cNvPr id="35" name="Slide Number Placeholder 0"/>
           <p:cNvSpPr>
             <a:spLocks noGrp="1"/>
           </p:cNvSpPr>
@@ -9678,7 +9388,7 @@
           </a:prstGeom>
           <a:extLst>
             <a:ext uri="{C572A759-6A51-4108-AA02-DFA0A04FC94B}">
-              <ma14:wrappingTextBoxFlag xmlns:ma14="http://schemas.microsoft.com/office/mac/drawingml/2011/main" val="0"/>
+              <ma14:wrappingTextBoxFlag xmlns="" xmlns:ma14="http://schemas.microsoft.com/office/mac/drawingml/2011/main" val="0"/>
             </a:ext>
           </a:extLst>
         </p:spPr>
@@ -9699,7 +9409,7 @@
           <a:p>
             <a:pPr algn="l"/>
             <a:fld id="{F7021451-1387-4CA6-816F-3879F97B5CBC}" type="slidenum">
-              <a:rPr b="0" lang="en-US"/>
+              <a:rPr lang="en-US" b="0"/>
               <a:t>15</a:t>
             </a:fld>
             <a:endParaRPr lang="en-US"/>
@@ -9774,7 +9484,7 @@
           <a:bodyPr wrap="square" lIns="0" tIns="0" rIns="0" bIns="0" rtlCol="0" anchor="ctr"/>
           <a:lstStyle/>
           <a:p>
-            <a:pPr algn="l" indent="0" marL="0">
+            <a:pPr marL="0" indent="0" algn="l">
               <a:buNone/>
             </a:pPr>
             <a:r>
@@ -9813,7 +9523,7 @@
           <a:bodyPr wrap="square" lIns="0" tIns="0" rIns="0" bIns="0" rtlCol="0" anchor="ctr"/>
           <a:lstStyle/>
           <a:p>
-            <a:pPr indent="0" marL="0">
+            <a:pPr marL="0" indent="0">
               <a:buNone/>
             </a:pPr>
             <a:r>
@@ -9879,11 +9589,11 @@
           <a:bodyPr wrap="square" lIns="0" tIns="0" rIns="0" bIns="0" rtlCol="0" anchor="ctr"/>
           <a:lstStyle/>
           <a:p>
-            <a:pPr algn="ctr" indent="0" marL="0">
-              <a:buNone/>
-            </a:pPr>
-            <a:r>
-              <a:rPr lang="en-US" sz="900" b="1" spc="100" kern="0" dirty="0">
+            <a:pPr marL="0" indent="0" algn="ctr">
+              <a:buNone/>
+            </a:pPr>
+            <a:r>
+              <a:rPr lang="en-US" sz="900" b="1" kern="0" spc="100" dirty="0">
                 <a:solidFill>
                   <a:srgbClr val="5A05F4"/>
                 </a:solidFill>
@@ -9899,14 +9609,14 @@
       </p:sp>
       <p:pic>
         <p:nvPicPr>
-          <p:cNvPr id="7" name="Image 0" descr="preencoded.png">    </p:cNvPr>
+          <p:cNvPr id="7" name="Image 0" descr="preencoded.png"/>
           <p:cNvPicPr>
             <a:picLocks noChangeAspect="1"/>
           </p:cNvPicPr>
           <p:nvPr/>
         </p:nvPicPr>
         <p:blipFill>
-          <a:blip r:embed="rId1"/>
+          <a:blip r:embed="rId3"/>
           <a:stretch>
             <a:fillRect/>
           </a:stretch>
@@ -9964,7 +9674,7 @@
           <a:bodyPr wrap="square" lIns="0" tIns="0" rIns="0" bIns="0" rtlCol="0" anchor="ctr"/>
           <a:lstStyle/>
           <a:p>
-            <a:pPr indent="0" marL="0">
+            <a:pPr marL="0" indent="0">
               <a:buNone/>
             </a:pPr>
             <a:r>
@@ -10003,7 +9713,7 @@
           <a:bodyPr wrap="square" lIns="0" tIns="0" rIns="0" bIns="0" rtlCol="0" anchor="t"/>
           <a:lstStyle/>
           <a:p>
-            <a:pPr indent="0" marL="0">
+            <a:pPr marL="0" indent="0">
               <a:lnSpc>
                 <a:spcPct val="108000"/>
               </a:lnSpc>
@@ -10067,7 +9777,7 @@
           <a:bodyPr wrap="square" lIns="0" tIns="0" rIns="0" bIns="0" rtlCol="0" anchor="ctr"/>
           <a:lstStyle/>
           <a:p>
-            <a:pPr indent="0" marL="0">
+            <a:pPr marL="0" indent="0">
               <a:buNone/>
             </a:pPr>
             <a:r>
@@ -10106,7 +9816,7 @@
           <a:bodyPr wrap="square" lIns="0" tIns="0" rIns="0" bIns="0" rtlCol="0" anchor="t"/>
           <a:lstStyle/>
           <a:p>
-            <a:pPr indent="0" marL="0">
+            <a:pPr marL="0" indent="0">
               <a:lnSpc>
                 <a:spcPct val="108000"/>
               </a:lnSpc>
@@ -10170,7 +9880,7 @@
           <a:bodyPr wrap="square" lIns="0" tIns="0" rIns="0" bIns="0" rtlCol="0" anchor="ctr"/>
           <a:lstStyle/>
           <a:p>
-            <a:pPr indent="0" marL="0">
+            <a:pPr marL="0" indent="0">
               <a:buNone/>
             </a:pPr>
             <a:r>
@@ -10184,9 +9894,6 @@
               </a:rPr>
               <a:t>свіжий  </a:t>
             </a:r>
-            <a:pPr indent="0" marL="0">
-              <a:buNone/>
-            </a:pPr>
             <a:r>
               <a:rPr lang="en-US" sz="1100" dirty="0">
                 <a:solidFill>
@@ -10245,7 +9952,7 @@
           <a:bodyPr wrap="square" lIns="0" tIns="0" rIns="0" bIns="0" rtlCol="0" anchor="ctr"/>
           <a:lstStyle/>
           <a:p>
-            <a:pPr indent="0" marL="0">
+            <a:pPr marL="0" indent="0">
               <a:buNone/>
             </a:pPr>
             <a:r>
@@ -10259,9 +9966,6 @@
               </a:rPr>
               <a:t>застарілий  </a:t>
             </a:r>
-            <a:pPr indent="0" marL="0">
-              <a:buNone/>
-            </a:pPr>
             <a:r>
               <a:rPr lang="en-US" sz="1100" dirty="0">
                 <a:solidFill>
@@ -10320,7 +10024,7 @@
           <a:bodyPr wrap="square" lIns="0" tIns="0" rIns="0" bIns="0" rtlCol="0" anchor="ctr"/>
           <a:lstStyle/>
           <a:p>
-            <a:pPr indent="0" marL="0">
+            <a:pPr marL="0" indent="0">
               <a:buNone/>
             </a:pPr>
             <a:r>
@@ -10334,9 +10038,6 @@
               </a:rPr>
               <a:t>прострочений  </a:t>
             </a:r>
-            <a:pPr indent="0" marL="0">
-              <a:buNone/>
-            </a:pPr>
             <a:r>
               <a:rPr lang="en-US" sz="1100" dirty="0">
                 <a:solidFill>
@@ -10373,11 +10074,11 @@
           <a:bodyPr wrap="square" lIns="0" tIns="0" rIns="0" bIns="0" rtlCol="0" anchor="ctr"/>
           <a:lstStyle/>
           <a:p>
-            <a:pPr indent="0" marL="0">
-              <a:buNone/>
-            </a:pPr>
-            <a:r>
-              <a:rPr lang="en-US" sz="850" spc="100" kern="0" dirty="0">
+            <a:pPr marL="0" indent="0">
+              <a:buNone/>
+            </a:pPr>
+            <a:r>
+              <a:rPr lang="en-US" sz="850" kern="0" spc="100" dirty="0">
                 <a:solidFill>
                   <a:srgbClr val="6B6B6B"/>
                 </a:solidFill>
@@ -10434,11 +10135,11 @@
           <a:bodyPr wrap="square" lIns="0" tIns="0" rIns="0" bIns="0" rtlCol="0" anchor="ctr"/>
           <a:lstStyle/>
           <a:p>
-            <a:pPr indent="0" marL="0">
-              <a:buNone/>
-            </a:pPr>
-            <a:r>
-              <a:rPr lang="en-US" sz="950" b="1" spc="150" kern="0" dirty="0">
+            <a:pPr marL="0" indent="0">
+              <a:buNone/>
+            </a:pPr>
+            <a:r>
+              <a:rPr lang="en-US" sz="950" b="1" kern="0" spc="150" dirty="0">
                 <a:solidFill>
                   <a:srgbClr val="FFFFFF"/>
                 </a:solidFill>
@@ -10473,7 +10174,7 @@
           <a:bodyPr wrap="square" lIns="0" tIns="0" rIns="0" bIns="0" rtlCol="0" anchor="ctr"/>
           <a:lstStyle/>
           <a:p>
-            <a:pPr indent="0" marL="0">
+            <a:pPr marL="0" indent="0">
               <a:lnSpc>
                 <a:spcPct val="112000"/>
               </a:lnSpc>
@@ -10542,11 +10243,11 @@
           <a:bodyPr wrap="square" lIns="0" tIns="0" rIns="0" bIns="0" rtlCol="0" anchor="ctr"/>
           <a:lstStyle/>
           <a:p>
-            <a:pPr indent="0" marL="0">
-              <a:buNone/>
-            </a:pPr>
-            <a:r>
-              <a:rPr lang="en-US" sz="950" b="1" spc="150" kern="0" dirty="0">
+            <a:pPr marL="0" indent="0">
+              <a:buNone/>
+            </a:pPr>
+            <a:r>
+              <a:rPr lang="en-US" sz="950" b="1" kern="0" spc="150" dirty="0">
                 <a:solidFill>
                   <a:srgbClr val="B3261E"/>
                 </a:solidFill>
@@ -10581,7 +10282,7 @@
           <a:bodyPr wrap="square" lIns="0" tIns="0" rIns="0" bIns="0" rtlCol="0" anchor="ctr"/>
           <a:lstStyle/>
           <a:p>
-            <a:pPr indent="0" marL="0">
+            <a:pPr marL="0" indent="0">
               <a:lnSpc>
                 <a:spcPct val="112000"/>
               </a:lnSpc>
@@ -10604,7 +10305,7 @@
       </p:sp>
       <p:sp>
         <p:nvSpPr>
-          <p:cNvPr id="25" name="Slide Number Placeholder 0"/>
+          <p:cNvPr id="27" name="Slide Number Placeholder 0"/>
           <p:cNvSpPr>
             <a:spLocks noGrp="1"/>
           </p:cNvSpPr>
@@ -10622,7 +10323,7 @@
           </a:prstGeom>
           <a:extLst>
             <a:ext uri="{C572A759-6A51-4108-AA02-DFA0A04FC94B}">
-              <ma14:wrappingTextBoxFlag xmlns:ma14="http://schemas.microsoft.com/office/mac/drawingml/2011/main" val="0"/>
+              <ma14:wrappingTextBoxFlag xmlns="" xmlns:ma14="http://schemas.microsoft.com/office/mac/drawingml/2011/main" val="0"/>
             </a:ext>
           </a:extLst>
         </p:spPr>
@@ -10643,7 +10344,7 @@
           <a:p>
             <a:pPr algn="l"/>
             <a:fld id="{F7021451-1387-4CA6-816F-3879F97B5CBC}" type="slidenum">
-              <a:rPr b="0" lang="en-US"/>
+              <a:rPr lang="en-US" b="0"/>
               <a:t>16</a:t>
             </a:fld>
             <a:endParaRPr lang="en-US"/>
@@ -10718,7 +10419,7 @@
           <a:bodyPr wrap="square" lIns="0" tIns="0" rIns="0" bIns="0" rtlCol="0" anchor="ctr"/>
           <a:lstStyle/>
           <a:p>
-            <a:pPr algn="l" indent="0" marL="0">
+            <a:pPr marL="0" indent="0" algn="l">
               <a:buNone/>
             </a:pPr>
             <a:r>
@@ -10757,7 +10458,7 @@
           <a:bodyPr wrap="square" lIns="0" tIns="0" rIns="0" bIns="0" rtlCol="0" anchor="ctr"/>
           <a:lstStyle/>
           <a:p>
-            <a:pPr indent="0" marL="0">
+            <a:pPr marL="0" indent="0">
               <a:buNone/>
             </a:pPr>
             <a:r>
@@ -10823,11 +10524,11 @@
           <a:bodyPr wrap="square" lIns="0" tIns="0" rIns="0" bIns="0" rtlCol="0" anchor="ctr"/>
           <a:lstStyle/>
           <a:p>
-            <a:pPr algn="ctr" indent="0" marL="0">
-              <a:buNone/>
-            </a:pPr>
-            <a:r>
-              <a:rPr lang="en-US" sz="900" b="1" spc="100" kern="0" dirty="0">
+            <a:pPr marL="0" indent="0" algn="ctr">
+              <a:buNone/>
+            </a:pPr>
+            <a:r>
+              <a:rPr lang="en-US" sz="900" b="1" kern="0" spc="100" dirty="0">
                 <a:solidFill>
                   <a:srgbClr val="5A05F4"/>
                 </a:solidFill>
@@ -10843,14 +10544,14 @@
       </p:sp>
       <p:pic>
         <p:nvPicPr>
-          <p:cNvPr id="7" name="Image 0" descr="preencoded.png">    </p:cNvPr>
+          <p:cNvPr id="7" name="Image 0" descr="preencoded.png"/>
           <p:cNvPicPr>
             <a:picLocks noChangeAspect="1"/>
           </p:cNvPicPr>
           <p:nvPr/>
         </p:nvPicPr>
         <p:blipFill>
-          <a:blip r:embed="rId1"/>
+          <a:blip r:embed="rId3"/>
           <a:stretch>
             <a:fillRect/>
           </a:stretch>
@@ -10908,7 +10609,7 @@
           <a:bodyPr wrap="square" lIns="0" tIns="0" rIns="0" bIns="0" rtlCol="0" anchor="ctr"/>
           <a:lstStyle/>
           <a:p>
-            <a:pPr algn="ctr" indent="0" marL="0">
+            <a:pPr marL="0" indent="0" algn="ctr">
               <a:buNone/>
             </a:pPr>
             <a:r>
@@ -11012,7 +10713,7 @@
           <a:bodyPr wrap="square" lIns="0" tIns="0" rIns="0" bIns="0" rtlCol="0" anchor="ctr"/>
           <a:lstStyle/>
           <a:p>
-            <a:pPr algn="ctr" indent="0" marL="0">
+            <a:pPr marL="0" indent="0" algn="ctr">
               <a:buNone/>
             </a:pPr>
             <a:r>
@@ -11073,7 +10774,7 @@
           <a:bodyPr wrap="square" lIns="0" tIns="0" rIns="0" bIns="0" rtlCol="0" anchor="ctr"/>
           <a:lstStyle/>
           <a:p>
-            <a:pPr indent="0" marL="0">
+            <a:pPr marL="0" indent="0">
               <a:buNone/>
             </a:pPr>
             <a:r>
@@ -11112,7 +10813,7 @@
           <a:bodyPr wrap="square" lIns="0" tIns="0" rIns="0" bIns="0" rtlCol="0" anchor="t"/>
           <a:lstStyle/>
           <a:p>
-            <a:pPr indent="0" marL="0">
+            <a:pPr marL="0" indent="0">
               <a:lnSpc>
                 <a:spcPct val="108000"/>
               </a:lnSpc>
@@ -11176,7 +10877,7 @@
           <a:bodyPr wrap="square" lIns="0" tIns="0" rIns="0" bIns="0" rtlCol="0" anchor="ctr"/>
           <a:lstStyle/>
           <a:p>
-            <a:pPr indent="0" marL="0">
+            <a:pPr marL="0" indent="0">
               <a:buNone/>
             </a:pPr>
             <a:r>
@@ -11215,7 +10916,7 @@
           <a:bodyPr wrap="square" lIns="0" tIns="0" rIns="0" bIns="0" rtlCol="0" anchor="t"/>
           <a:lstStyle/>
           <a:p>
-            <a:pPr indent="0" marL="0">
+            <a:pPr marL="0" indent="0">
               <a:lnSpc>
                 <a:spcPct val="108000"/>
               </a:lnSpc>
@@ -11284,11 +10985,11 @@
           <a:bodyPr wrap="square" lIns="0" tIns="0" rIns="0" bIns="0" rtlCol="0" anchor="ctr"/>
           <a:lstStyle/>
           <a:p>
-            <a:pPr indent="0" marL="0">
-              <a:buNone/>
-            </a:pPr>
-            <a:r>
-              <a:rPr lang="en-US" sz="950" b="1" spc="150" kern="0" dirty="0">
+            <a:pPr marL="0" indent="0">
+              <a:buNone/>
+            </a:pPr>
+            <a:r>
+              <a:rPr lang="en-US" sz="950" b="1" kern="0" spc="150" dirty="0">
                 <a:solidFill>
                   <a:srgbClr val="B3261E"/>
                 </a:solidFill>
@@ -11323,7 +11024,7 @@
           <a:bodyPr wrap="square" lIns="0" tIns="0" rIns="0" bIns="0" rtlCol="0" anchor="ctr"/>
           <a:lstStyle/>
           <a:p>
-            <a:pPr indent="0" marL="0">
+            <a:pPr marL="0" indent="0">
               <a:lnSpc>
                 <a:spcPct val="112000"/>
               </a:lnSpc>
@@ -11364,7 +11065,7 @@
           </a:prstGeom>
           <a:extLst>
             <a:ext uri="{C572A759-6A51-4108-AA02-DFA0A04FC94B}">
-              <ma14:wrappingTextBoxFlag xmlns:ma14="http://schemas.microsoft.com/office/mac/drawingml/2011/main" val="0"/>
+              <ma14:wrappingTextBoxFlag xmlns="" xmlns:ma14="http://schemas.microsoft.com/office/mac/drawingml/2011/main" val="0"/>
             </a:ext>
           </a:extLst>
         </p:spPr>
@@ -11385,7 +11086,7 @@
           <a:p>
             <a:pPr algn="l"/>
             <a:fld id="{F7021451-1387-4CA6-816F-3879F97B5CBC}" type="slidenum">
-              <a:rPr b="0" lang="en-US"/>
+              <a:rPr lang="en-US" b="0"/>
               <a:t>17</a:t>
             </a:fld>
             <a:endParaRPr lang="en-US"/>
@@ -11460,7 +11161,7 @@
           <a:bodyPr wrap="square" lIns="0" tIns="0" rIns="0" bIns="0" rtlCol="0" anchor="ctr"/>
           <a:lstStyle/>
           <a:p>
-            <a:pPr algn="l" indent="0" marL="0">
+            <a:pPr marL="0" indent="0" algn="l">
               <a:buNone/>
             </a:pPr>
             <a:r>
@@ -11499,7 +11200,7 @@
           <a:bodyPr wrap="square" lIns="0" tIns="0" rIns="0" bIns="0" rtlCol="0" anchor="ctr"/>
           <a:lstStyle/>
           <a:p>
-            <a:pPr indent="0" marL="0">
+            <a:pPr marL="0" indent="0">
               <a:buNone/>
             </a:pPr>
             <a:r>
@@ -11565,11 +11266,11 @@
           <a:bodyPr wrap="square" lIns="0" tIns="0" rIns="0" bIns="0" rtlCol="0" anchor="ctr"/>
           <a:lstStyle/>
           <a:p>
-            <a:pPr algn="ctr" indent="0" marL="0">
-              <a:buNone/>
-            </a:pPr>
-            <a:r>
-              <a:rPr lang="en-US" sz="900" b="1" spc="100" kern="0" dirty="0">
+            <a:pPr marL="0" indent="0" algn="ctr">
+              <a:buNone/>
+            </a:pPr>
+            <a:r>
+              <a:rPr lang="en-US" sz="900" b="1" kern="0" spc="100" dirty="0">
                 <a:solidFill>
                   <a:srgbClr val="5A05F4"/>
                 </a:solidFill>
@@ -11631,11 +11332,11 @@
           <a:bodyPr wrap="square" lIns="0" tIns="0" rIns="0" bIns="0" rtlCol="0" anchor="ctr"/>
           <a:lstStyle/>
           <a:p>
-            <a:pPr algn="ctr" indent="0" marL="0">
-              <a:buNone/>
-            </a:pPr>
-            <a:r>
-              <a:rPr lang="en-US" sz="900" b="1" spc="100" kern="0" dirty="0">
+            <a:pPr marL="0" indent="0" algn="ctr">
+              <a:buNone/>
+            </a:pPr>
+            <a:r>
+              <a:rPr lang="en-US" sz="900" b="1" kern="0" spc="100" dirty="0">
                 <a:solidFill>
                   <a:srgbClr val="434343"/>
                 </a:solidFill>
@@ -11651,14 +11352,14 @@
       </p:sp>
       <p:pic>
         <p:nvPicPr>
-          <p:cNvPr id="9" name="Image 0" descr="preencoded.png">    </p:cNvPr>
+          <p:cNvPr id="9" name="Image 0" descr="preencoded.png"/>
           <p:cNvPicPr>
             <a:picLocks noChangeAspect="1"/>
           </p:cNvPicPr>
           <p:nvPr/>
         </p:nvPicPr>
         <p:blipFill>
-          <a:blip r:embed="rId1"/>
+          <a:blip r:embed="rId3"/>
           <a:stretch>
             <a:fillRect/>
           </a:stretch>
@@ -11736,7 +11437,7 @@
           <a:bodyPr wrap="square" lIns="0" tIns="0" rIns="0" bIns="0" rtlCol="0" anchor="ctr"/>
           <a:lstStyle/>
           <a:p>
-            <a:pPr algn="ctr" indent="0" marL="0">
+            <a:pPr marL="0" indent="0" algn="ctr">
               <a:buNone/>
             </a:pPr>
             <a:r>
@@ -11775,7 +11476,7 @@
           <a:bodyPr wrap="square" lIns="0" tIns="0" rIns="0" bIns="0" rtlCol="0" anchor="ctr"/>
           <a:lstStyle/>
           <a:p>
-            <a:pPr indent="0" marL="0">
+            <a:pPr marL="0" indent="0">
               <a:buNone/>
             </a:pPr>
             <a:r>
@@ -11814,7 +11515,7 @@
           <a:bodyPr wrap="square" lIns="0" tIns="0" rIns="0" bIns="0" rtlCol="0" anchor="t"/>
           <a:lstStyle/>
           <a:p>
-            <a:pPr indent="0" marL="0">
+            <a:pPr marL="0" indent="0">
               <a:lnSpc>
                 <a:spcPct val="108000"/>
               </a:lnSpc>
@@ -11898,7 +11599,7 @@
           <a:bodyPr wrap="square" lIns="0" tIns="0" rIns="0" bIns="0" rtlCol="0" anchor="ctr"/>
           <a:lstStyle/>
           <a:p>
-            <a:pPr algn="ctr" indent="0" marL="0">
+            <a:pPr marL="0" indent="0" algn="ctr">
               <a:buNone/>
             </a:pPr>
             <a:r>
@@ -11937,7 +11638,7 @@
           <a:bodyPr wrap="square" lIns="0" tIns="0" rIns="0" bIns="0" rtlCol="0" anchor="ctr"/>
           <a:lstStyle/>
           <a:p>
-            <a:pPr indent="0" marL="0">
+            <a:pPr marL="0" indent="0">
               <a:buNone/>
             </a:pPr>
             <a:r>
@@ -11976,7 +11677,7 @@
           <a:bodyPr wrap="square" lIns="0" tIns="0" rIns="0" bIns="0" rtlCol="0" anchor="t"/>
           <a:lstStyle/>
           <a:p>
-            <a:pPr indent="0" marL="0">
+            <a:pPr marL="0" indent="0">
               <a:lnSpc>
                 <a:spcPct val="108000"/>
               </a:lnSpc>
@@ -12060,7 +11761,7 @@
           <a:bodyPr wrap="square" lIns="0" tIns="0" rIns="0" bIns="0" rtlCol="0" anchor="ctr"/>
           <a:lstStyle/>
           <a:p>
-            <a:pPr algn="ctr" indent="0" marL="0">
+            <a:pPr marL="0" indent="0" algn="ctr">
               <a:buNone/>
             </a:pPr>
             <a:r>
@@ -12099,7 +11800,7 @@
           <a:bodyPr wrap="square" lIns="0" tIns="0" rIns="0" bIns="0" rtlCol="0" anchor="ctr"/>
           <a:lstStyle/>
           <a:p>
-            <a:pPr indent="0" marL="0">
+            <a:pPr marL="0" indent="0">
               <a:buNone/>
             </a:pPr>
             <a:r>
@@ -12138,7 +11839,7 @@
           <a:bodyPr wrap="square" lIns="0" tIns="0" rIns="0" bIns="0" rtlCol="0" anchor="t"/>
           <a:lstStyle/>
           <a:p>
-            <a:pPr indent="0" marL="0">
+            <a:pPr marL="0" indent="0">
               <a:lnSpc>
                 <a:spcPct val="108000"/>
               </a:lnSpc>
@@ -12168,7 +11869,7 @@
         <p:spPr>
           <a:xfrm>
             <a:off x="566928" y="4023360"/>
-            <a:ext cx="11064240" cy="1234440"/>
+            <a:ext cx="10927080" cy="1234440"/>
           </a:xfrm>
           <a:prstGeom prst="roundRect">
             <a:avLst>
@@ -12202,11 +11903,11 @@
           <a:bodyPr wrap="square" lIns="0" tIns="0" rIns="0" bIns="0" rtlCol="0" anchor="ctr"/>
           <a:lstStyle/>
           <a:p>
-            <a:pPr indent="0" marL="0">
-              <a:buNone/>
-            </a:pPr>
-            <a:r>
-              <a:rPr lang="en-US" sz="950" b="1" spc="150" kern="0" dirty="0">
+            <a:pPr marL="0" indent="0">
+              <a:buNone/>
+            </a:pPr>
+            <a:r>
+              <a:rPr lang="en-US" sz="950" b="1" kern="0" spc="150" dirty="0">
                 <a:solidFill>
                   <a:srgbClr val="FFFFFF"/>
                 </a:solidFill>
@@ -12241,7 +11942,7 @@
           <a:bodyPr wrap="square" lIns="0" tIns="0" rIns="0" bIns="0" rtlCol="0" anchor="ctr"/>
           <a:lstStyle/>
           <a:p>
-            <a:pPr indent="0" marL="0">
+            <a:pPr marL="0" indent="0">
               <a:lnSpc>
                 <a:spcPct val="112000"/>
               </a:lnSpc>
@@ -12264,7 +11965,7 @@
       </p:sp>
       <p:sp>
         <p:nvSpPr>
-          <p:cNvPr id="25" name="Slide Number Placeholder 0"/>
+          <p:cNvPr id="28" name="Slide Number Placeholder 0"/>
           <p:cNvSpPr>
             <a:spLocks noGrp="1"/>
           </p:cNvSpPr>
@@ -12282,7 +11983,7 @@
           </a:prstGeom>
           <a:extLst>
             <a:ext uri="{C572A759-6A51-4108-AA02-DFA0A04FC94B}">
-              <ma14:wrappingTextBoxFlag xmlns:ma14="http://schemas.microsoft.com/office/mac/drawingml/2011/main" val="0"/>
+              <ma14:wrappingTextBoxFlag xmlns="" xmlns:ma14="http://schemas.microsoft.com/office/mac/drawingml/2011/main" val="0"/>
             </a:ext>
           </a:extLst>
         </p:spPr>
@@ -12303,7 +12004,7 @@
           <a:p>
             <a:pPr algn="l"/>
             <a:fld id="{F7021451-1387-4CA6-816F-3879F97B5CBC}" type="slidenum">
-              <a:rPr b="0" lang="en-US"/>
+              <a:rPr lang="en-US" b="0"/>
               <a:t>18</a:t>
             </a:fld>
             <a:endParaRPr lang="en-US"/>
@@ -12356,11 +12057,11 @@
           <a:bodyPr wrap="square" lIns="0" tIns="0" rIns="0" bIns="0" rtlCol="0" anchor="ctr"/>
           <a:lstStyle/>
           <a:p>
-            <a:pPr indent="0" marL="0">
-              <a:buNone/>
-            </a:pPr>
-            <a:r>
-              <a:rPr lang="en-US" sz="1200" b="1" spc="400" kern="0" dirty="0">
+            <a:pPr marL="0" indent="0">
+              <a:buNone/>
+            </a:pPr>
+            <a:r>
+              <a:rPr lang="en-US" sz="1200" b="1" kern="0" spc="400" dirty="0">
                 <a:solidFill>
                   <a:srgbClr val="FFFFFF"/>
                 </a:solidFill>
@@ -12395,7 +12096,7 @@
           <a:bodyPr wrap="square" lIns="0" tIns="0" rIns="0" bIns="0" rtlCol="0" anchor="ctr"/>
           <a:lstStyle/>
           <a:p>
-            <a:pPr indent="0" marL="0">
+            <a:pPr marL="0" indent="0">
               <a:buNone/>
             </a:pPr>
             <a:r>
@@ -12434,7 +12135,7 @@
           <a:bodyPr wrap="square" lIns="0" tIns="0" rIns="0" bIns="0" rtlCol="0" anchor="t"/>
           <a:lstStyle/>
           <a:p>
-            <a:pPr indent="0" marL="0">
+            <a:pPr marL="0" indent="0">
               <a:buNone/>
             </a:pPr>
             <a:r>
@@ -12495,7 +12196,7 @@
           <a:bodyPr wrap="square" lIns="0" tIns="0" rIns="0" bIns="0" rtlCol="0" anchor="ctr"/>
           <a:lstStyle/>
           <a:p>
-            <a:pPr algn="ctr" indent="0" marL="0">
+            <a:pPr marL="0" indent="0" algn="ctr">
               <a:buNone/>
             </a:pPr>
             <a:r>
@@ -12581,7 +12282,7 @@
           <a:bodyPr wrap="square" lIns="0" tIns="0" rIns="0" bIns="0" rtlCol="0" anchor="ctr"/>
           <a:lstStyle/>
           <a:p>
-            <a:pPr indent="0" marL="0">
+            <a:pPr marL="0" indent="0">
               <a:buNone/>
             </a:pPr>
             <a:r>
@@ -12620,7 +12321,7 @@
           <a:bodyPr wrap="square" lIns="0" tIns="0" rIns="0" bIns="0" rtlCol="0" anchor="t"/>
           <a:lstStyle/>
           <a:p>
-            <a:pPr indent="0" marL="0">
+            <a:pPr marL="0" indent="0">
               <a:lnSpc>
                 <a:spcPct val="100000"/>
               </a:lnSpc>
@@ -12689,11 +12390,11 @@
           <a:bodyPr wrap="square" lIns="0" tIns="0" rIns="0" bIns="0" rtlCol="0" anchor="ctr"/>
           <a:lstStyle/>
           <a:p>
-            <a:pPr algn="ctr" indent="0" marL="0">
-              <a:buNone/>
-            </a:pPr>
-            <a:r>
-              <a:rPr lang="en-US" sz="900" b="1" spc="100" kern="0" dirty="0">
+            <a:pPr marL="0" indent="0" algn="ctr">
+              <a:buNone/>
+            </a:pPr>
+            <a:r>
+              <a:rPr lang="en-US" sz="900" b="1" kern="0" spc="100" dirty="0">
                 <a:solidFill>
                   <a:srgbClr val="5A05F4"/>
                 </a:solidFill>
@@ -12709,14 +12410,14 @@
       </p:sp>
       <p:pic>
         <p:nvPicPr>
-          <p:cNvPr id="7" name="Image 0" descr="preencoded.png">    </p:cNvPr>
+          <p:cNvPr id="7" name="Image 0" descr="preencoded.png"/>
           <p:cNvPicPr>
             <a:picLocks noChangeAspect="1"/>
           </p:cNvPicPr>
           <p:nvPr/>
         </p:nvPicPr>
         <p:blipFill>
-          <a:blip r:embed="rId1"/>
+          <a:blip r:embed="rId3"/>
           <a:stretch>
             <a:fillRect/>
           </a:stretch>
@@ -12794,7 +12495,7 @@
           <a:bodyPr wrap="square" lIns="0" tIns="0" rIns="0" bIns="0" rtlCol="0" anchor="ctr"/>
           <a:lstStyle/>
           <a:p>
-            <a:pPr algn="ctr" indent="0" marL="0">
+            <a:pPr marL="0" indent="0" algn="ctr">
               <a:buNone/>
             </a:pPr>
             <a:r>
@@ -12833,7 +12534,7 @@
           <a:bodyPr wrap="square" lIns="0" tIns="0" rIns="0" bIns="0" rtlCol="0" anchor="ctr"/>
           <a:lstStyle/>
           <a:p>
-            <a:pPr indent="0" marL="0">
+            <a:pPr marL="0" indent="0">
               <a:buNone/>
             </a:pPr>
             <a:r>
@@ -12872,7 +12573,7 @@
           <a:bodyPr wrap="square" lIns="0" tIns="0" rIns="0" bIns="0" rtlCol="0" anchor="t"/>
           <a:lstStyle/>
           <a:p>
-            <a:pPr indent="0" marL="0">
+            <a:pPr marL="0" indent="0">
               <a:lnSpc>
                 <a:spcPct val="108000"/>
               </a:lnSpc>
@@ -12956,7 +12657,7 @@
           <a:bodyPr wrap="square" lIns="0" tIns="0" rIns="0" bIns="0" rtlCol="0" anchor="ctr"/>
           <a:lstStyle/>
           <a:p>
-            <a:pPr algn="ctr" indent="0" marL="0">
+            <a:pPr marL="0" indent="0" algn="ctr">
               <a:buNone/>
             </a:pPr>
             <a:r>
@@ -12995,7 +12696,7 @@
           <a:bodyPr wrap="square" lIns="0" tIns="0" rIns="0" bIns="0" rtlCol="0" anchor="ctr"/>
           <a:lstStyle/>
           <a:p>
-            <a:pPr indent="0" marL="0">
+            <a:pPr marL="0" indent="0">
               <a:buNone/>
             </a:pPr>
             <a:r>
@@ -13034,7 +12735,7 @@
           <a:bodyPr wrap="square" lIns="0" tIns="0" rIns="0" bIns="0" rtlCol="0" anchor="t"/>
           <a:lstStyle/>
           <a:p>
-            <a:pPr indent="0" marL="0">
+            <a:pPr marL="0" indent="0">
               <a:lnSpc>
                 <a:spcPct val="108000"/>
               </a:lnSpc>
@@ -13118,7 +12819,7 @@
           <a:bodyPr wrap="square" lIns="0" tIns="0" rIns="0" bIns="0" rtlCol="0" anchor="ctr"/>
           <a:lstStyle/>
           <a:p>
-            <a:pPr algn="ctr" indent="0" marL="0">
+            <a:pPr marL="0" indent="0" algn="ctr">
               <a:buNone/>
             </a:pPr>
             <a:r>
@@ -13157,7 +12858,7 @@
           <a:bodyPr wrap="square" lIns="0" tIns="0" rIns="0" bIns="0" rtlCol="0" anchor="ctr"/>
           <a:lstStyle/>
           <a:p>
-            <a:pPr indent="0" marL="0">
+            <a:pPr marL="0" indent="0">
               <a:buNone/>
             </a:pPr>
             <a:r>
@@ -13196,7 +12897,7 @@
           <a:bodyPr wrap="square" lIns="0" tIns="0" rIns="0" bIns="0" rtlCol="0" anchor="t"/>
           <a:lstStyle/>
           <a:p>
-            <a:pPr indent="0" marL="0">
+            <a:pPr marL="0" indent="0">
               <a:lnSpc>
                 <a:spcPct val="108000"/>
               </a:lnSpc>
@@ -13280,7 +12981,7 @@
           <a:bodyPr wrap="square" lIns="0" tIns="0" rIns="0" bIns="0" rtlCol="0" anchor="ctr"/>
           <a:lstStyle/>
           <a:p>
-            <a:pPr algn="ctr" indent="0" marL="0">
+            <a:pPr marL="0" indent="0" algn="ctr">
               <a:buNone/>
             </a:pPr>
             <a:r>
@@ -13319,7 +13020,7 @@
           <a:bodyPr wrap="square" lIns="0" tIns="0" rIns="0" bIns="0" rtlCol="0" anchor="ctr"/>
           <a:lstStyle/>
           <a:p>
-            <a:pPr indent="0" marL="0">
+            <a:pPr marL="0" indent="0">
               <a:buNone/>
             </a:pPr>
             <a:r>
@@ -13358,7 +13059,7 @@
           <a:bodyPr wrap="square" lIns="0" tIns="0" rIns="0" bIns="0" rtlCol="0" anchor="t"/>
           <a:lstStyle/>
           <a:p>
-            <a:pPr indent="0" marL="0">
+            <a:pPr marL="0" indent="0">
               <a:lnSpc>
                 <a:spcPct val="108000"/>
               </a:lnSpc>
@@ -13442,7 +13143,7 @@
           <a:bodyPr wrap="square" lIns="0" tIns="0" rIns="0" bIns="0" rtlCol="0" anchor="ctr"/>
           <a:lstStyle/>
           <a:p>
-            <a:pPr algn="ctr" indent="0" marL="0">
+            <a:pPr marL="0" indent="0" algn="ctr">
               <a:buNone/>
             </a:pPr>
             <a:r>
@@ -13481,7 +13182,7 @@
           <a:bodyPr wrap="square" lIns="0" tIns="0" rIns="0" bIns="0" rtlCol="0" anchor="ctr"/>
           <a:lstStyle/>
           <a:p>
-            <a:pPr indent="0" marL="0">
+            <a:pPr marL="0" indent="0">
               <a:buNone/>
             </a:pPr>
             <a:r>
@@ -13520,7 +13221,7 @@
           <a:bodyPr wrap="square" lIns="0" tIns="0" rIns="0" bIns="0" rtlCol="0" anchor="t"/>
           <a:lstStyle/>
           <a:p>
-            <a:pPr indent="0" marL="0">
+            <a:pPr marL="0" indent="0">
               <a:lnSpc>
                 <a:spcPct val="108000"/>
               </a:lnSpc>
@@ -13543,7 +13244,7 @@
       </p:sp>
       <p:sp>
         <p:nvSpPr>
-          <p:cNvPr id="25" name="Slide Number Placeholder 0"/>
+          <p:cNvPr id="33" name="Slide Number Placeholder 0"/>
           <p:cNvSpPr>
             <a:spLocks noGrp="1"/>
           </p:cNvSpPr>
@@ -13561,7 +13262,7 @@
           </a:prstGeom>
           <a:extLst>
             <a:ext uri="{C572A759-6A51-4108-AA02-DFA0A04FC94B}">
-              <ma14:wrappingTextBoxFlag xmlns:ma14="http://schemas.microsoft.com/office/mac/drawingml/2011/main" val="0"/>
+              <ma14:wrappingTextBoxFlag xmlns="" xmlns:ma14="http://schemas.microsoft.com/office/mac/drawingml/2011/main" val="0"/>
             </a:ext>
           </a:extLst>
         </p:spPr>
@@ -13582,7 +13283,7 @@
           <a:p>
             <a:pPr algn="l"/>
             <a:fld id="{F7021451-1387-4CA6-816F-3879F97B5CBC}" type="slidenum">
-              <a:rPr b="0" lang="en-US"/>
+              <a:rPr lang="en-US" b="0"/>
               <a:t>2</a:t>
             </a:fld>
             <a:endParaRPr lang="en-US"/>
@@ -13657,7 +13358,7 @@
           <a:bodyPr wrap="square" lIns="0" tIns="0" rIns="0" bIns="0" rtlCol="0" anchor="ctr"/>
           <a:lstStyle/>
           <a:p>
-            <a:pPr indent="0" marL="0">
+            <a:pPr marL="0" indent="0">
               <a:buNone/>
             </a:pPr>
             <a:r>
@@ -13718,11 +13419,11 @@
           <a:bodyPr wrap="square" lIns="0" tIns="0" rIns="0" bIns="0" rtlCol="0" anchor="ctr"/>
           <a:lstStyle/>
           <a:p>
-            <a:pPr algn="ctr" indent="0" marL="0">
-              <a:buNone/>
-            </a:pPr>
-            <a:r>
-              <a:rPr lang="en-US" sz="900" b="1" spc="100" kern="0" dirty="0">
+            <a:pPr marL="0" indent="0" algn="ctr">
+              <a:buNone/>
+            </a:pPr>
+            <a:r>
+              <a:rPr lang="en-US" sz="900" b="1" kern="0" spc="100" dirty="0">
                 <a:solidFill>
                   <a:srgbClr val="FFFFFF"/>
                 </a:solidFill>
@@ -13738,14 +13439,14 @@
       </p:sp>
       <p:pic>
         <p:nvPicPr>
-          <p:cNvPr id="6" name="Image 0" descr="preencoded.png">    </p:cNvPr>
+          <p:cNvPr id="6" name="Image 0" descr="preencoded.png"/>
           <p:cNvPicPr>
             <a:picLocks noChangeAspect="1"/>
           </p:cNvPicPr>
           <p:nvPr/>
         </p:nvPicPr>
         <p:blipFill>
-          <a:blip r:embed="rId1"/>
+          <a:blip r:embed="rId3"/>
           <a:stretch>
             <a:fillRect/>
           </a:stretch>
@@ -13823,7 +13524,7 @@
           <a:bodyPr wrap="square" lIns="0" tIns="0" rIns="0" bIns="0" rtlCol="0" anchor="ctr"/>
           <a:lstStyle/>
           <a:p>
-            <a:pPr algn="ctr" indent="0" marL="0">
+            <a:pPr marL="0" indent="0" algn="ctr">
               <a:buNone/>
             </a:pPr>
             <a:r>
@@ -13862,7 +13563,7 @@
           <a:bodyPr wrap="square" lIns="0" tIns="0" rIns="0" bIns="0" rtlCol="0" anchor="ctr"/>
           <a:lstStyle/>
           <a:p>
-            <a:pPr indent="0" marL="0">
+            <a:pPr marL="0" indent="0">
               <a:buNone/>
             </a:pPr>
             <a:r>
@@ -13901,7 +13602,7 @@
           <a:bodyPr wrap="square" lIns="0" tIns="0" rIns="0" bIns="0" rtlCol="0" anchor="t"/>
           <a:lstStyle/>
           <a:p>
-            <a:pPr indent="0" marL="0">
+            <a:pPr marL="0" indent="0">
               <a:lnSpc>
                 <a:spcPct val="108000"/>
               </a:lnSpc>
@@ -13985,7 +13686,7 @@
           <a:bodyPr wrap="square" lIns="0" tIns="0" rIns="0" bIns="0" rtlCol="0" anchor="ctr"/>
           <a:lstStyle/>
           <a:p>
-            <a:pPr algn="ctr" indent="0" marL="0">
+            <a:pPr marL="0" indent="0" algn="ctr">
               <a:buNone/>
             </a:pPr>
             <a:r>
@@ -14024,7 +13725,7 @@
           <a:bodyPr wrap="square" lIns="0" tIns="0" rIns="0" bIns="0" rtlCol="0" anchor="ctr"/>
           <a:lstStyle/>
           <a:p>
-            <a:pPr indent="0" marL="0">
+            <a:pPr marL="0" indent="0">
               <a:buNone/>
             </a:pPr>
             <a:r>
@@ -14063,7 +13764,7 @@
           <a:bodyPr wrap="square" lIns="0" tIns="0" rIns="0" bIns="0" rtlCol="0" anchor="t"/>
           <a:lstStyle/>
           <a:p>
-            <a:pPr indent="0" marL="0">
+            <a:pPr marL="0" indent="0">
               <a:lnSpc>
                 <a:spcPct val="108000"/>
               </a:lnSpc>
@@ -14147,7 +13848,7 @@
           <a:bodyPr wrap="square" lIns="0" tIns="0" rIns="0" bIns="0" rtlCol="0" anchor="ctr"/>
           <a:lstStyle/>
           <a:p>
-            <a:pPr algn="ctr" indent="0" marL="0">
+            <a:pPr marL="0" indent="0" algn="ctr">
               <a:buNone/>
             </a:pPr>
             <a:r>
@@ -14186,7 +13887,7 @@
           <a:bodyPr wrap="square" lIns="0" tIns="0" rIns="0" bIns="0" rtlCol="0" anchor="ctr"/>
           <a:lstStyle/>
           <a:p>
-            <a:pPr indent="0" marL="0">
+            <a:pPr marL="0" indent="0">
               <a:buNone/>
             </a:pPr>
             <a:r>
@@ -14225,7 +13926,7 @@
           <a:bodyPr wrap="square" lIns="0" tIns="0" rIns="0" bIns="0" rtlCol="0" anchor="t"/>
           <a:lstStyle/>
           <a:p>
-            <a:pPr indent="0" marL="0">
+            <a:pPr marL="0" indent="0">
               <a:lnSpc>
                 <a:spcPct val="108000"/>
               </a:lnSpc>
@@ -14309,7 +14010,7 @@
           <a:bodyPr wrap="square" lIns="0" tIns="0" rIns="0" bIns="0" rtlCol="0" anchor="ctr"/>
           <a:lstStyle/>
           <a:p>
-            <a:pPr algn="ctr" indent="0" marL="0">
+            <a:pPr marL="0" indent="0" algn="ctr">
               <a:buNone/>
             </a:pPr>
             <a:r>
@@ -14348,7 +14049,7 @@
           <a:bodyPr wrap="square" lIns="0" tIns="0" rIns="0" bIns="0" rtlCol="0" anchor="ctr"/>
           <a:lstStyle/>
           <a:p>
-            <a:pPr indent="0" marL="0">
+            <a:pPr marL="0" indent="0">
               <a:buNone/>
             </a:pPr>
             <a:r>
@@ -14387,7 +14088,7 @@
           <a:bodyPr wrap="square" lIns="0" tIns="0" rIns="0" bIns="0" rtlCol="0" anchor="t"/>
           <a:lstStyle/>
           <a:p>
-            <a:pPr indent="0" marL="0">
+            <a:pPr marL="0" indent="0">
               <a:lnSpc>
                 <a:spcPct val="108000"/>
               </a:lnSpc>
@@ -14417,7 +14118,7 @@
         <p:spPr>
           <a:xfrm>
             <a:off x="566928" y="5074920"/>
-            <a:ext cx="11064240" cy="1051560"/>
+            <a:ext cx="11247120" cy="1051560"/>
           </a:xfrm>
           <a:prstGeom prst="roundRect">
             <a:avLst>
@@ -14451,11 +14152,11 @@
           <a:bodyPr wrap="square" lIns="0" tIns="0" rIns="0" bIns="0" rtlCol="0" anchor="ctr"/>
           <a:lstStyle/>
           <a:p>
-            <a:pPr indent="0" marL="0">
-              <a:buNone/>
-            </a:pPr>
-            <a:r>
-              <a:rPr lang="en-US" sz="950" b="1" spc="150" kern="0" dirty="0">
+            <a:pPr marL="0" indent="0">
+              <a:buNone/>
+            </a:pPr>
+            <a:r>
+              <a:rPr lang="en-US" sz="950" b="1" kern="0" spc="150" dirty="0">
                 <a:solidFill>
                   <a:srgbClr val="FFFFFF"/>
                 </a:solidFill>
@@ -14490,7 +14191,7 @@
           <a:bodyPr wrap="square" lIns="0" tIns="0" rIns="0" bIns="0" rtlCol="0" anchor="ctr"/>
           <a:lstStyle/>
           <a:p>
-            <a:pPr indent="0" marL="0">
+            <a:pPr marL="0" indent="0">
               <a:lnSpc>
                 <a:spcPct val="112000"/>
               </a:lnSpc>
@@ -14513,7 +14214,7 @@
       </p:sp>
       <p:sp>
         <p:nvSpPr>
-          <p:cNvPr id="25" name="Slide Number Placeholder 0"/>
+          <p:cNvPr id="30" name="Slide Number Placeholder 0"/>
           <p:cNvSpPr>
             <a:spLocks noGrp="1"/>
           </p:cNvSpPr>
@@ -14531,7 +14232,7 @@
           </a:prstGeom>
           <a:extLst>
             <a:ext uri="{C572A759-6A51-4108-AA02-DFA0A04FC94B}">
-              <ma14:wrappingTextBoxFlag xmlns:ma14="http://schemas.microsoft.com/office/mac/drawingml/2011/main" val="0"/>
+              <ma14:wrappingTextBoxFlag xmlns="" xmlns:ma14="http://schemas.microsoft.com/office/mac/drawingml/2011/main" val="0"/>
             </a:ext>
           </a:extLst>
         </p:spPr>
@@ -14552,7 +14253,7 @@
           <a:p>
             <a:pPr algn="l"/>
             <a:fld id="{F7021451-1387-4CA6-816F-3879F97B5CBC}" type="slidenum">
-              <a:rPr b="0" lang="en-US"/>
+              <a:rPr lang="en-US" b="0"/>
               <a:t>20</a:t>
             </a:fld>
             <a:endParaRPr lang="en-US"/>
@@ -14627,7 +14328,7 @@
           <a:bodyPr wrap="square" lIns="0" tIns="0" rIns="0" bIns="0" rtlCol="0" anchor="ctr"/>
           <a:lstStyle/>
           <a:p>
-            <a:pPr indent="0" marL="0">
+            <a:pPr marL="0" indent="0">
               <a:buNone/>
             </a:pPr>
             <a:r>
@@ -14688,11 +14389,11 @@
           <a:bodyPr wrap="square" lIns="0" tIns="0" rIns="0" bIns="0" rtlCol="0" anchor="ctr"/>
           <a:lstStyle/>
           <a:p>
-            <a:pPr algn="ctr" indent="0" marL="0">
-              <a:buNone/>
-            </a:pPr>
-            <a:r>
-              <a:rPr lang="en-US" sz="900" b="1" spc="100" kern="0" dirty="0">
+            <a:pPr marL="0" indent="0" algn="ctr">
+              <a:buNone/>
+            </a:pPr>
+            <a:r>
+              <a:rPr lang="en-US" sz="900" b="1" kern="0" spc="100" dirty="0">
                 <a:solidFill>
                   <a:srgbClr val="FFFFFF"/>
                 </a:solidFill>
@@ -14708,14 +14409,14 @@
       </p:sp>
       <p:pic>
         <p:nvPicPr>
-          <p:cNvPr id="6" name="Image 0" descr="preencoded.png">    </p:cNvPr>
+          <p:cNvPr id="6" name="Image 0" descr="preencoded.png"/>
           <p:cNvPicPr>
             <a:picLocks noChangeAspect="1"/>
           </p:cNvPicPr>
           <p:nvPr/>
         </p:nvPicPr>
         <p:blipFill>
-          <a:blip r:embed="rId1"/>
+          <a:blip r:embed="rId3"/>
           <a:stretch>
             <a:fillRect/>
           </a:stretch>
@@ -14771,7 +14472,7 @@
           <a:bodyPr wrap="square" lIns="0" tIns="0" rIns="0" bIns="0" rtlCol="0" anchor="ctr"/>
           <a:lstStyle/>
           <a:p>
-            <a:pPr algn="ctr" indent="0" marL="0">
+            <a:pPr marL="0" indent="0" algn="ctr">
               <a:buNone/>
             </a:pPr>
             <a:r>
@@ -14810,7 +14511,7 @@
           <a:bodyPr wrap="square" lIns="0" tIns="0" rIns="0" bIns="0" rtlCol="0" anchor="ctr"/>
           <a:lstStyle/>
           <a:p>
-            <a:pPr indent="0" marL="0">
+            <a:pPr marL="0" indent="0">
               <a:buNone/>
             </a:pPr>
             <a:r>
@@ -14824,9 +14525,6 @@
               </a:rPr>
               <a:t>Обгорнути виклик кешем  </a:t>
             </a:r>
-            <a:pPr indent="0" marL="0">
-              <a:buNone/>
-            </a:pPr>
             <a:r>
               <a:rPr lang="en-US" sz="1200" dirty="0">
                 <a:solidFill>
@@ -14883,7 +14581,7 @@
           <a:bodyPr wrap="square" lIns="0" tIns="0" rIns="0" bIns="0" rtlCol="0" anchor="ctr"/>
           <a:lstStyle/>
           <a:p>
-            <a:pPr algn="ctr" indent="0" marL="0">
+            <a:pPr marL="0" indent="0" algn="ctr">
               <a:buNone/>
             </a:pPr>
             <a:r>
@@ -14922,7 +14620,7 @@
           <a:bodyPr wrap="square" lIns="0" tIns="0" rIns="0" bIns="0" rtlCol="0" anchor="ctr"/>
           <a:lstStyle/>
           <a:p>
-            <a:pPr indent="0" marL="0">
+            <a:pPr marL="0" indent="0">
               <a:buNone/>
             </a:pPr>
             <a:r>
@@ -14936,9 +14634,6 @@
               </a:rPr>
               <a:t>Побачити ефект  </a:t>
             </a:r>
-            <a:pPr indent="0" marL="0">
-              <a:buNone/>
-            </a:pPr>
             <a:r>
               <a:rPr lang="en-US" sz="1200" dirty="0">
                 <a:solidFill>
@@ -14995,7 +14690,7 @@
           <a:bodyPr wrap="square" lIns="0" tIns="0" rIns="0" bIns="0" rtlCol="0" anchor="ctr"/>
           <a:lstStyle/>
           <a:p>
-            <a:pPr algn="ctr" indent="0" marL="0">
+            <a:pPr marL="0" indent="0" algn="ctr">
               <a:buNone/>
             </a:pPr>
             <a:r>
@@ -15034,7 +14729,7 @@
           <a:bodyPr wrap="square" lIns="0" tIns="0" rIns="0" bIns="0" rtlCol="0" anchor="ctr"/>
           <a:lstStyle/>
           <a:p>
-            <a:pPr indent="0" marL="0">
+            <a:pPr marL="0" indent="0">
               <a:buNone/>
             </a:pPr>
             <a:r>
@@ -15048,9 +14743,6 @@
               </a:rPr>
               <a:t>Rollback-тест ключа  </a:t>
             </a:r>
-            <a:pPr indent="0" marL="0">
-              <a:buNone/>
-            </a:pPr>
             <a:r>
               <a:rPr lang="en-US" sz="1200" dirty="0">
                 <a:solidFill>
@@ -15107,7 +14799,7 @@
           <a:bodyPr wrap="square" lIns="0" tIns="0" rIns="0" bIns="0" rtlCol="0" anchor="ctr"/>
           <a:lstStyle/>
           <a:p>
-            <a:pPr algn="ctr" indent="0" marL="0">
+            <a:pPr marL="0" indent="0" algn="ctr">
               <a:buNone/>
             </a:pPr>
             <a:r>
@@ -15146,7 +14838,7 @@
           <a:bodyPr wrap="square" lIns="0" tIns="0" rIns="0" bIns="0" rtlCol="0" anchor="ctr"/>
           <a:lstStyle/>
           <a:p>
-            <a:pPr indent="0" marL="0">
+            <a:pPr marL="0" indent="0">
               <a:buNone/>
             </a:pPr>
             <a:r>
@@ -15160,9 +14852,6 @@
               </a:rPr>
               <a:t>Провести межі  </a:t>
             </a:r>
-            <a:pPr indent="0" marL="0">
-              <a:buNone/>
-            </a:pPr>
             <a:r>
               <a:rPr lang="en-US" sz="1200" dirty="0">
                 <a:solidFill>
@@ -15219,7 +14908,7 @@
           <a:bodyPr wrap="square" lIns="0" tIns="0" rIns="0" bIns="0" rtlCol="0" anchor="ctr"/>
           <a:lstStyle/>
           <a:p>
-            <a:pPr algn="ctr" indent="0" marL="0">
+            <a:pPr marL="0" indent="0" algn="ctr">
               <a:buNone/>
             </a:pPr>
             <a:r>
@@ -15258,7 +14947,7 @@
           <a:bodyPr wrap="square" lIns="0" tIns="0" rIns="0" bIns="0" rtlCol="0" anchor="ctr"/>
           <a:lstStyle/>
           <a:p>
-            <a:pPr indent="0" marL="0">
+            <a:pPr marL="0" indent="0">
               <a:buNone/>
             </a:pPr>
             <a:r>
@@ -15272,9 +14961,6 @@
               </a:rPr>
               <a:t>TTL · опційно  </a:t>
             </a:r>
-            <a:pPr indent="0" marL="0">
-              <a:buNone/>
-            </a:pPr>
             <a:r>
               <a:rPr lang="en-US" sz="1200" dirty="0">
                 <a:solidFill>
@@ -15310,7 +14996,7 @@
           </a:prstGeom>
           <a:extLst>
             <a:ext uri="{C572A759-6A51-4108-AA02-DFA0A04FC94B}">
-              <ma14:wrappingTextBoxFlag xmlns:ma14="http://schemas.microsoft.com/office/mac/drawingml/2011/main" val="0"/>
+              <ma14:wrappingTextBoxFlag xmlns="" xmlns:ma14="http://schemas.microsoft.com/office/mac/drawingml/2011/main" val="0"/>
             </a:ext>
           </a:extLst>
         </p:spPr>
@@ -15331,7 +15017,7 @@
           <a:p>
             <a:pPr algn="l"/>
             <a:fld id="{F7021451-1387-4CA6-816F-3879F97B5CBC}" type="slidenum">
-              <a:rPr b="0" lang="en-US"/>
+              <a:rPr lang="en-US" b="0"/>
               <a:t>21</a:t>
             </a:fld>
             <a:endParaRPr lang="en-US"/>
@@ -15384,11 +15070,11 @@
           <a:bodyPr wrap="square" lIns="0" tIns="0" rIns="0" bIns="0" rtlCol="0" anchor="ctr"/>
           <a:lstStyle/>
           <a:p>
-            <a:pPr indent="0" marL="0">
-              <a:buNone/>
-            </a:pPr>
-            <a:r>
-              <a:rPr lang="en-US" sz="1200" b="1" spc="400" kern="0" dirty="0">
+            <a:pPr marL="0" indent="0">
+              <a:buNone/>
+            </a:pPr>
+            <a:r>
+              <a:rPr lang="en-US" sz="1200" b="1" kern="0" spc="400" dirty="0">
                 <a:solidFill>
                   <a:srgbClr val="FFFFFF"/>
                 </a:solidFill>
@@ -15423,7 +15109,7 @@
           <a:bodyPr wrap="square" lIns="0" tIns="0" rIns="0" bIns="0" rtlCol="0" anchor="ctr"/>
           <a:lstStyle/>
           <a:p>
-            <a:pPr indent="0" marL="0">
+            <a:pPr marL="0" indent="0">
               <a:buNone/>
             </a:pPr>
             <a:r>
@@ -15462,7 +15148,7 @@
           <a:bodyPr wrap="square" lIns="0" tIns="0" rIns="0" bIns="0" rtlCol="0" anchor="t"/>
           <a:lstStyle/>
           <a:p>
-            <a:pPr indent="0" marL="0">
+            <a:pPr marL="0" indent="0">
               <a:buNone/>
             </a:pPr>
             <a:r>
@@ -15548,7 +15234,7 @@
           <a:bodyPr wrap="square" lIns="0" tIns="0" rIns="0" bIns="0" rtlCol="0" anchor="ctr"/>
           <a:lstStyle/>
           <a:p>
-            <a:pPr indent="0" marL="0">
+            <a:pPr marL="0" indent="0">
               <a:buNone/>
             </a:pPr>
             <a:r>
@@ -15614,11 +15300,11 @@
           <a:bodyPr wrap="square" lIns="0" tIns="0" rIns="0" bIns="0" rtlCol="0" anchor="ctr"/>
           <a:lstStyle/>
           <a:p>
-            <a:pPr algn="ctr" indent="0" marL="0">
-              <a:buNone/>
-            </a:pPr>
-            <a:r>
-              <a:rPr lang="en-US" sz="900" b="1" spc="100" kern="0" dirty="0">
+            <a:pPr marL="0" indent="0" algn="ctr">
+              <a:buNone/>
+            </a:pPr>
+            <a:r>
+              <a:rPr lang="en-US" sz="900" b="1" kern="0" spc="100" dirty="0">
                 <a:solidFill>
                   <a:srgbClr val="1A4FBF"/>
                 </a:solidFill>
@@ -15634,14 +15320,14 @@
       </p:sp>
       <p:pic>
         <p:nvPicPr>
-          <p:cNvPr id="6" name="Image 0" descr="preencoded.png">    </p:cNvPr>
+          <p:cNvPr id="6" name="Image 0" descr="preencoded.png"/>
           <p:cNvPicPr>
             <a:picLocks noChangeAspect="1"/>
           </p:cNvPicPr>
           <p:nvPr/>
         </p:nvPicPr>
         <p:blipFill>
-          <a:blip r:embed="rId1"/>
+          <a:blip r:embed="rId3"/>
           <a:stretch>
             <a:fillRect/>
           </a:stretch>
@@ -15699,7 +15385,7 @@
           <a:bodyPr wrap="square" lIns="0" tIns="0" rIns="0" bIns="0" rtlCol="0" anchor="ctr"/>
           <a:lstStyle/>
           <a:p>
-            <a:pPr indent="0" marL="0">
+            <a:pPr marL="0" indent="0">
               <a:buNone/>
             </a:pPr>
             <a:r>
@@ -15738,7 +15424,7 @@
           <a:bodyPr wrap="square" lIns="0" tIns="0" rIns="0" bIns="0" rtlCol="0" anchor="t"/>
           <a:lstStyle/>
           <a:p>
-            <a:pPr indent="0" marL="0">
+            <a:pPr marL="0" indent="0">
               <a:lnSpc>
                 <a:spcPct val="108000"/>
               </a:lnSpc>
@@ -15802,7 +15488,7 @@
           <a:bodyPr wrap="square" lIns="0" tIns="0" rIns="0" bIns="0" rtlCol="0" anchor="ctr"/>
           <a:lstStyle/>
           <a:p>
-            <a:pPr indent="0" marL="0">
+            <a:pPr marL="0" indent="0">
               <a:buNone/>
             </a:pPr>
             <a:r>
@@ -15841,7 +15527,7 @@
           <a:bodyPr wrap="square" lIns="0" tIns="0" rIns="0" bIns="0" rtlCol="0" anchor="t"/>
           <a:lstStyle/>
           <a:p>
-            <a:pPr indent="0" marL="0">
+            <a:pPr marL="0" indent="0">
               <a:lnSpc>
                 <a:spcPct val="108000"/>
               </a:lnSpc>
@@ -15905,7 +15591,7 @@
           <a:bodyPr wrap="square" lIns="0" tIns="0" rIns="0" bIns="0" rtlCol="0" anchor="ctr"/>
           <a:lstStyle/>
           <a:p>
-            <a:pPr indent="0" marL="0">
+            <a:pPr marL="0" indent="0">
               <a:buNone/>
             </a:pPr>
             <a:r>
@@ -15944,7 +15630,7 @@
           <a:bodyPr wrap="square" lIns="0" tIns="0" rIns="0" bIns="0" rtlCol="0" anchor="t"/>
           <a:lstStyle/>
           <a:p>
-            <a:pPr indent="0" marL="0">
+            <a:pPr marL="0" indent="0">
               <a:lnSpc>
                 <a:spcPct val="108000"/>
               </a:lnSpc>
@@ -16013,7 +15699,7 @@
           <a:bodyPr wrap="square" lIns="0" tIns="0" rIns="0" bIns="0" rtlCol="0" anchor="ctr"/>
           <a:lstStyle/>
           <a:p>
-            <a:pPr indent="0" marL="0">
+            <a:pPr marL="0" indent="0">
               <a:lnSpc>
                 <a:spcPct val="112000"/>
               </a:lnSpc>
@@ -16054,7 +15740,7 @@
           </a:prstGeom>
           <a:extLst>
             <a:ext uri="{C572A759-6A51-4108-AA02-DFA0A04FC94B}">
-              <ma14:wrappingTextBoxFlag xmlns:ma14="http://schemas.microsoft.com/office/mac/drawingml/2011/main" val="0"/>
+              <ma14:wrappingTextBoxFlag xmlns="" xmlns:ma14="http://schemas.microsoft.com/office/mac/drawingml/2011/main" val="0"/>
             </a:ext>
           </a:extLst>
         </p:spPr>
@@ -16075,7 +15761,7 @@
           <a:p>
             <a:pPr algn="l"/>
             <a:fld id="{F7021451-1387-4CA6-816F-3879F97B5CBC}" type="slidenum">
-              <a:rPr b="0" lang="en-US"/>
+              <a:rPr lang="en-US" b="0"/>
               <a:t>23</a:t>
             </a:fld>
             <a:endParaRPr lang="en-US"/>
@@ -16150,7 +15836,7 @@
           <a:bodyPr wrap="square" lIns="0" tIns="0" rIns="0" bIns="0" rtlCol="0" anchor="ctr"/>
           <a:lstStyle/>
           <a:p>
-            <a:pPr indent="0" marL="0">
+            <a:pPr marL="0" indent="0">
               <a:buNone/>
             </a:pPr>
             <a:r>
@@ -16216,11 +15902,11 @@
           <a:bodyPr wrap="square" lIns="0" tIns="0" rIns="0" bIns="0" rtlCol="0" anchor="ctr"/>
           <a:lstStyle/>
           <a:p>
-            <a:pPr algn="ctr" indent="0" marL="0">
-              <a:buNone/>
-            </a:pPr>
-            <a:r>
-              <a:rPr lang="en-US" sz="900" b="1" spc="100" kern="0" dirty="0">
+            <a:pPr marL="0" indent="0" algn="ctr">
+              <a:buNone/>
+            </a:pPr>
+            <a:r>
+              <a:rPr lang="en-US" sz="900" b="1" kern="0" spc="100" dirty="0">
                 <a:solidFill>
                   <a:srgbClr val="1A4FBF"/>
                 </a:solidFill>
@@ -16236,14 +15922,14 @@
       </p:sp>
       <p:pic>
         <p:nvPicPr>
-          <p:cNvPr id="6" name="Image 0" descr="preencoded.png">    </p:cNvPr>
+          <p:cNvPr id="6" name="Image 0" descr="preencoded.png"/>
           <p:cNvPicPr>
             <a:picLocks noChangeAspect="1"/>
           </p:cNvPicPr>
           <p:nvPr/>
         </p:nvPicPr>
         <p:blipFill>
-          <a:blip r:embed="rId1"/>
+          <a:blip r:embed="rId3"/>
           <a:stretch>
             <a:fillRect/>
           </a:stretch>
@@ -16373,7 +16059,7 @@
           <a:bodyPr wrap="square" lIns="0" tIns="0" rIns="0" bIns="0" rtlCol="0" anchor="ctr"/>
           <a:lstStyle/>
           <a:p>
-            <a:pPr indent="0" marL="0">
+            <a:pPr marL="0" indent="0">
               <a:buNone/>
             </a:pPr>
             <a:r>
@@ -16479,7 +16165,7 @@
           <a:bodyPr wrap="square" lIns="0" tIns="0" rIns="0" bIns="0" rtlCol="0" anchor="ctr"/>
           <a:lstStyle/>
           <a:p>
-            <a:pPr indent="0" marL="0">
+            <a:pPr marL="0" indent="0">
               <a:buNone/>
             </a:pPr>
             <a:r>
@@ -16585,7 +16271,7 @@
           <a:bodyPr wrap="square" lIns="0" tIns="0" rIns="0" bIns="0" rtlCol="0" anchor="ctr"/>
           <a:lstStyle/>
           <a:p>
-            <a:pPr indent="0" marL="0">
+            <a:pPr marL="0" indent="0">
               <a:buNone/>
             </a:pPr>
             <a:r>
@@ -16691,7 +16377,7 @@
           <a:bodyPr wrap="square" lIns="0" tIns="0" rIns="0" bIns="0" rtlCol="0" anchor="ctr"/>
           <a:lstStyle/>
           <a:p>
-            <a:pPr indent="0" marL="0">
+            <a:pPr marL="0" indent="0">
               <a:buNone/>
             </a:pPr>
             <a:r>
@@ -16730,7 +16416,7 @@
           <a:bodyPr wrap="square" lIns="0" tIns="0" rIns="0" bIns="0" rtlCol="0" anchor="ctr"/>
           <a:lstStyle/>
           <a:p>
-            <a:pPr indent="0" marL="0">
+            <a:pPr marL="0" indent="0">
               <a:buNone/>
             </a:pPr>
             <a:r>
@@ -16768,7 +16454,7 @@
           </a:prstGeom>
           <a:extLst>
             <a:ext uri="{C572A759-6A51-4108-AA02-DFA0A04FC94B}">
-              <ma14:wrappingTextBoxFlag xmlns:ma14="http://schemas.microsoft.com/office/mac/drawingml/2011/main" val="0"/>
+              <ma14:wrappingTextBoxFlag xmlns="" xmlns:ma14="http://schemas.microsoft.com/office/mac/drawingml/2011/main" val="0"/>
             </a:ext>
           </a:extLst>
         </p:spPr>
@@ -16789,7 +16475,7 @@
           <a:p>
             <a:pPr algn="l"/>
             <a:fld id="{F7021451-1387-4CA6-816F-3879F97B5CBC}" type="slidenum">
-              <a:rPr b="0" lang="en-US"/>
+              <a:rPr lang="en-US" b="0"/>
               <a:t>24</a:t>
             </a:fld>
             <a:endParaRPr lang="en-US"/>
@@ -16864,7 +16550,7 @@
           <a:bodyPr wrap="square" lIns="0" tIns="0" rIns="0" bIns="0" rtlCol="0" anchor="ctr"/>
           <a:lstStyle/>
           <a:p>
-            <a:pPr indent="0" marL="0">
+            <a:pPr marL="0" indent="0">
               <a:buNone/>
             </a:pPr>
             <a:r>
@@ -16930,11 +16616,11 @@
           <a:bodyPr wrap="square" lIns="0" tIns="0" rIns="0" bIns="0" rtlCol="0" anchor="ctr"/>
           <a:lstStyle/>
           <a:p>
-            <a:pPr algn="ctr" indent="0" marL="0">
-              <a:buNone/>
-            </a:pPr>
-            <a:r>
-              <a:rPr lang="en-US" sz="900" b="1" spc="100" kern="0" dirty="0">
+            <a:pPr marL="0" indent="0" algn="ctr">
+              <a:buNone/>
+            </a:pPr>
+            <a:r>
+              <a:rPr lang="en-US" sz="900" b="1" kern="0" spc="100" dirty="0">
                 <a:solidFill>
                   <a:srgbClr val="1A4FBF"/>
                 </a:solidFill>
@@ -16950,14 +16636,14 @@
       </p:sp>
       <p:pic>
         <p:nvPicPr>
-          <p:cNvPr id="6" name="Image 0" descr="preencoded.png">    </p:cNvPr>
+          <p:cNvPr id="6" name="Image 0" descr="preencoded.png"/>
           <p:cNvPicPr>
             <a:picLocks noChangeAspect="1"/>
           </p:cNvPicPr>
           <p:nvPr/>
         </p:nvPicPr>
         <p:blipFill>
-          <a:blip r:embed="rId1"/>
+          <a:blip r:embed="rId3"/>
           <a:stretch>
             <a:fillRect/>
           </a:stretch>
@@ -17085,7 +16771,7 @@
           <a:bodyPr wrap="square" lIns="0" tIns="0" rIns="0" bIns="0" rtlCol="0" anchor="ctr"/>
           <a:lstStyle/>
           <a:p>
-            <a:pPr indent="0" marL="0">
+            <a:pPr marL="0" indent="0">
               <a:buNone/>
             </a:pPr>
             <a:r>
@@ -17099,9 +16785,6 @@
               </a:rPr>
               <a:t>Кеш без лічильників   </a:t>
             </a:r>
-            <a:pPr indent="0" marL="0">
-              <a:buNone/>
-            </a:pPr>
             <a:r>
               <a:rPr lang="en-US" sz="1200" dirty="0">
                 <a:solidFill>
@@ -17230,7 +16913,7 @@
           <a:bodyPr wrap="square" lIns="0" tIns="0" rIns="0" bIns="0" rtlCol="0" anchor="ctr"/>
           <a:lstStyle/>
           <a:p>
-            <a:pPr indent="0" marL="0">
+            <a:pPr marL="0" indent="0">
               <a:buNone/>
             </a:pPr>
             <a:r>
@@ -17244,9 +16927,6 @@
               </a:rPr>
               <a:t>Промпт поза ключем   </a:t>
             </a:r>
-            <a:pPr indent="0" marL="0">
-              <a:buNone/>
-            </a:pPr>
             <a:r>
               <a:rPr lang="en-US" sz="1200" dirty="0">
                 <a:solidFill>
@@ -17375,7 +17055,7 @@
           <a:bodyPr wrap="square" lIns="0" tIns="0" rIns="0" bIns="0" rtlCol="0" anchor="ctr"/>
           <a:lstStyle/>
           <a:p>
-            <a:pPr indent="0" marL="0">
+            <a:pPr marL="0" indent="0">
               <a:buNone/>
             </a:pPr>
             <a:r>
@@ -17389,9 +17069,6 @@
               </a:rPr>
               <a:t>Кешувати персональні відповіді   </a:t>
             </a:r>
-            <a:pPr indent="0" marL="0">
-              <a:buNone/>
-            </a:pPr>
             <a:r>
               <a:rPr lang="en-US" sz="1200" dirty="0">
                 <a:solidFill>
@@ -17520,7 +17197,7 @@
           <a:bodyPr wrap="square" lIns="0" tIns="0" rIns="0" bIns="0" rtlCol="0" anchor="ctr"/>
           <a:lstStyle/>
           <a:p>
-            <a:pPr indent="0" marL="0">
+            <a:pPr marL="0" indent="0">
               <a:buNone/>
             </a:pPr>
             <a:r>
@@ -17534,9 +17211,6 @@
               </a:rPr>
               <a:t>Один TTL на все   </a:t>
             </a:r>
-            <a:pPr indent="0" marL="0">
-              <a:buNone/>
-            </a:pPr>
             <a:r>
               <a:rPr lang="en-US" sz="1200" dirty="0">
                 <a:solidFill>
@@ -17554,7 +17228,7 @@
       </p:sp>
       <p:sp>
         <p:nvSpPr>
-          <p:cNvPr id="25" name="Slide Number Placeholder 0"/>
+          <p:cNvPr id="27" name="Slide Number Placeholder 0"/>
           <p:cNvSpPr>
             <a:spLocks noGrp="1"/>
           </p:cNvSpPr>
@@ -17572,7 +17246,7 @@
           </a:prstGeom>
           <a:extLst>
             <a:ext uri="{C572A759-6A51-4108-AA02-DFA0A04FC94B}">
-              <ma14:wrappingTextBoxFlag xmlns:ma14="http://schemas.microsoft.com/office/mac/drawingml/2011/main" val="0"/>
+              <ma14:wrappingTextBoxFlag xmlns="" xmlns:ma14="http://schemas.microsoft.com/office/mac/drawingml/2011/main" val="0"/>
             </a:ext>
           </a:extLst>
         </p:spPr>
@@ -17593,7 +17267,7 @@
           <a:p>
             <a:pPr algn="l"/>
             <a:fld id="{F7021451-1387-4CA6-816F-3879F97B5CBC}" type="slidenum">
-              <a:rPr b="0" lang="en-US"/>
+              <a:rPr lang="en-US" b="0"/>
               <a:t>25</a:t>
             </a:fld>
             <a:endParaRPr lang="en-US"/>
@@ -17668,7 +17342,7 @@
           <a:bodyPr wrap="square" lIns="0" tIns="0" rIns="0" bIns="0" rtlCol="0" anchor="ctr"/>
           <a:lstStyle/>
           <a:p>
-            <a:pPr indent="0" marL="0">
+            <a:pPr marL="0" indent="0">
               <a:buNone/>
             </a:pPr>
             <a:r>
@@ -17729,11 +17403,11 @@
           <a:bodyPr wrap="square" lIns="0" tIns="0" rIns="0" bIns="0" rtlCol="0" anchor="ctr"/>
           <a:lstStyle/>
           <a:p>
-            <a:pPr algn="ctr" indent="0" marL="0">
-              <a:buNone/>
-            </a:pPr>
-            <a:r>
-              <a:rPr lang="en-US" sz="900" b="1" spc="100" kern="0" dirty="0">
+            <a:pPr marL="0" indent="0" algn="ctr">
+              <a:buNone/>
+            </a:pPr>
+            <a:r>
+              <a:rPr lang="en-US" sz="900" b="1" kern="0" spc="100" dirty="0">
                 <a:solidFill>
                   <a:srgbClr val="FFFFFF"/>
                 </a:solidFill>
@@ -17749,14 +17423,14 @@
       </p:sp>
       <p:pic>
         <p:nvPicPr>
-          <p:cNvPr id="6" name="Image 0" descr="preencoded.png">    </p:cNvPr>
+          <p:cNvPr id="6" name="Image 0" descr="preencoded.png"/>
           <p:cNvPicPr>
             <a:picLocks noChangeAspect="1"/>
           </p:cNvPicPr>
           <p:nvPr/>
         </p:nvPicPr>
         <p:blipFill>
-          <a:blip r:embed="rId1"/>
+          <a:blip r:embed="rId3"/>
           <a:stretch>
             <a:fillRect/>
           </a:stretch>
@@ -17814,7 +17488,7 @@
           <a:bodyPr wrap="square" lIns="0" tIns="0" rIns="0" bIns="0" rtlCol="0" anchor="ctr"/>
           <a:lstStyle/>
           <a:p>
-            <a:pPr indent="0" marL="0">
+            <a:pPr marL="0" indent="0">
               <a:buNone/>
             </a:pPr>
             <a:r>
@@ -17853,7 +17527,7 @@
           <a:bodyPr wrap="square" lIns="0" tIns="0" rIns="0" bIns="0" rtlCol="0" anchor="t"/>
           <a:lstStyle/>
           <a:p>
-            <a:pPr indent="0" marL="0">
+            <a:pPr marL="0" indent="0">
               <a:lnSpc>
                 <a:spcPct val="108000"/>
               </a:lnSpc>
@@ -17873,7 +17547,7 @@
             <a:endParaRPr lang="en-US" sz="1200" dirty="0"/>
           </a:p>
           <a:p>
-            <a:pPr indent="0" marL="0">
+            <a:pPr marL="0" indent="0">
               <a:lnSpc>
                 <a:spcPct val="108000"/>
               </a:lnSpc>
@@ -17882,7 +17556,7 @@
             <a:endParaRPr lang="en-US" sz="1200" dirty="0"/>
           </a:p>
           <a:p>
-            <a:pPr indent="0" marL="0">
+            <a:pPr marL="0" indent="0">
               <a:lnSpc>
                 <a:spcPct val="108000"/>
               </a:lnSpc>
@@ -17902,7 +17576,7 @@
             <a:endParaRPr lang="en-US" sz="1200" dirty="0"/>
           </a:p>
           <a:p>
-            <a:pPr indent="0" marL="0">
+            <a:pPr marL="0" indent="0">
               <a:lnSpc>
                 <a:spcPct val="108000"/>
               </a:lnSpc>
@@ -17911,7 +17585,7 @@
             <a:endParaRPr lang="en-US" sz="1200" dirty="0"/>
           </a:p>
           <a:p>
-            <a:pPr indent="0" marL="0">
+            <a:pPr marL="0" indent="0">
               <a:lnSpc>
                 <a:spcPct val="108000"/>
               </a:lnSpc>
@@ -17975,7 +17649,7 @@
           <a:bodyPr wrap="square" lIns="0" tIns="0" rIns="0" bIns="0" rtlCol="0" anchor="ctr"/>
           <a:lstStyle/>
           <a:p>
-            <a:pPr indent="0" marL="0">
+            <a:pPr marL="0" indent="0">
               <a:buNone/>
             </a:pPr>
             <a:r>
@@ -18014,7 +17688,7 @@
           <a:bodyPr wrap="square" lIns="0" tIns="0" rIns="0" bIns="0" rtlCol="0" anchor="t"/>
           <a:lstStyle/>
           <a:p>
-            <a:pPr indent="0" marL="0">
+            <a:pPr marL="0" indent="0">
               <a:lnSpc>
                 <a:spcPct val="108000"/>
               </a:lnSpc>
@@ -18034,7 +17708,7 @@
             <a:endParaRPr lang="en-US" sz="1200" dirty="0"/>
           </a:p>
           <a:p>
-            <a:pPr indent="0" marL="0">
+            <a:pPr marL="0" indent="0">
               <a:lnSpc>
                 <a:spcPct val="108000"/>
               </a:lnSpc>
@@ -18043,7 +17717,7 @@
             <a:endParaRPr lang="en-US" sz="1200" dirty="0"/>
           </a:p>
           <a:p>
-            <a:pPr indent="0" marL="0">
+            <a:pPr marL="0" indent="0">
               <a:lnSpc>
                 <a:spcPct val="108000"/>
               </a:lnSpc>
@@ -18112,7 +17786,7 @@
           <a:bodyPr wrap="square" lIns="0" tIns="0" rIns="0" bIns="0" rtlCol="0" anchor="ctr"/>
           <a:lstStyle/>
           <a:p>
-            <a:pPr indent="0" marL="0">
+            <a:pPr marL="0" indent="0">
               <a:buNone/>
             </a:pPr>
             <a:r>
@@ -18151,7 +17825,7 @@
           <a:bodyPr wrap="square" lIns="0" tIns="0" rIns="0" bIns="0" rtlCol="0" anchor="t"/>
           <a:lstStyle/>
           <a:p>
-            <a:pPr indent="0" marL="0">
+            <a:pPr marL="0" indent="0">
               <a:buNone/>
             </a:pPr>
             <a:r>
@@ -18189,7 +17863,7 @@
           </a:prstGeom>
           <a:extLst>
             <a:ext uri="{C572A759-6A51-4108-AA02-DFA0A04FC94B}">
-              <ma14:wrappingTextBoxFlag xmlns:ma14="http://schemas.microsoft.com/office/mac/drawingml/2011/main" val="0"/>
+              <ma14:wrappingTextBoxFlag xmlns="" xmlns:ma14="http://schemas.microsoft.com/office/mac/drawingml/2011/main" val="0"/>
             </a:ext>
           </a:extLst>
         </p:spPr>
@@ -18210,7 +17884,7 @@
           <a:p>
             <a:pPr algn="l"/>
             <a:fld id="{F7021451-1387-4CA6-816F-3879F97B5CBC}" type="slidenum">
-              <a:rPr b="0" lang="en-US"/>
+              <a:rPr lang="en-US" b="0"/>
               <a:t>26</a:t>
             </a:fld>
             <a:endParaRPr lang="en-US"/>
@@ -18263,11 +17937,11 @@
           <a:bodyPr wrap="square" lIns="0" tIns="0" rIns="0" bIns="0" rtlCol="0" anchor="ctr"/>
           <a:lstStyle/>
           <a:p>
-            <a:pPr indent="0" marL="0">
-              <a:buNone/>
-            </a:pPr>
-            <a:r>
-              <a:rPr lang="en-US" sz="1200" b="1" spc="400" kern="0" dirty="0">
+            <a:pPr marL="0" indent="0">
+              <a:buNone/>
+            </a:pPr>
+            <a:r>
+              <a:rPr lang="en-US" sz="1200" b="1" kern="0" spc="400" dirty="0">
                 <a:solidFill>
                   <a:srgbClr val="FFFFFF"/>
                 </a:solidFill>
@@ -18302,11 +17976,11 @@
           <a:bodyPr wrap="square" lIns="0" tIns="0" rIns="0" bIns="0" rtlCol="0" anchor="ctr"/>
           <a:lstStyle/>
           <a:p>
-            <a:pPr indent="0" marL="0">
-              <a:buNone/>
-            </a:pPr>
-            <a:r>
-              <a:rPr lang="en-US" sz="1100" b="1" spc="300" kern="0" dirty="0">
+            <a:pPr marL="0" indent="0">
+              <a:buNone/>
+            </a:pPr>
+            <a:r>
+              <a:rPr lang="en-US" sz="1100" b="1" kern="0" spc="300" dirty="0">
                 <a:solidFill>
                   <a:srgbClr val="C4B3F5"/>
                 </a:solidFill>
@@ -18361,7 +18035,7 @@
           <a:bodyPr wrap="square" lIns="0" tIns="0" rIns="0" bIns="0" rtlCol="0" anchor="t"/>
           <a:lstStyle/>
           <a:p>
-            <a:pPr indent="0" marL="0">
+            <a:pPr marL="0" indent="0">
               <a:lnSpc>
                 <a:spcPct val="110000"/>
               </a:lnSpc>
@@ -18423,7 +18097,7 @@
           <a:bodyPr wrap="square" lIns="0" tIns="0" rIns="0" bIns="0" rtlCol="0" anchor="t"/>
           <a:lstStyle/>
           <a:p>
-            <a:pPr indent="0" marL="0">
+            <a:pPr marL="0" indent="0">
               <a:lnSpc>
                 <a:spcPct val="110000"/>
               </a:lnSpc>
@@ -18485,7 +18159,7 @@
           <a:bodyPr wrap="square" lIns="0" tIns="0" rIns="0" bIns="0" rtlCol="0" anchor="t"/>
           <a:lstStyle/>
           <a:p>
-            <a:pPr indent="0" marL="0">
+            <a:pPr marL="0" indent="0">
               <a:lnSpc>
                 <a:spcPct val="110000"/>
               </a:lnSpc>
@@ -18547,7 +18221,7 @@
           <a:bodyPr wrap="square" lIns="0" tIns="0" rIns="0" bIns="0" rtlCol="0" anchor="t"/>
           <a:lstStyle/>
           <a:p>
-            <a:pPr indent="0" marL="0">
+            <a:pPr marL="0" indent="0">
               <a:lnSpc>
                 <a:spcPct val="110000"/>
               </a:lnSpc>
@@ -18609,7 +18283,7 @@
           <a:bodyPr wrap="square" lIns="0" tIns="0" rIns="0" bIns="0" rtlCol="0" anchor="t"/>
           <a:lstStyle/>
           <a:p>
-            <a:pPr indent="0" marL="0">
+            <a:pPr marL="0" indent="0">
               <a:lnSpc>
                 <a:spcPct val="110000"/>
               </a:lnSpc>
@@ -18678,7 +18352,7 @@
           <a:bodyPr wrap="square" lIns="0" tIns="0" rIns="0" bIns="0" rtlCol="0" anchor="ctr"/>
           <a:lstStyle/>
           <a:p>
-            <a:pPr indent="0" marL="0">
+            <a:pPr marL="0" indent="0">
               <a:buNone/>
             </a:pPr>
             <a:r>
@@ -18717,7 +18391,7 @@
           <a:bodyPr wrap="square" lIns="0" tIns="0" rIns="0" bIns="0" rtlCol="0" anchor="t"/>
           <a:lstStyle/>
           <a:p>
-            <a:pPr indent="0" marL="0">
+            <a:pPr marL="0" indent="0">
               <a:lnSpc>
                 <a:spcPct val="115000"/>
               </a:lnSpc>
@@ -18784,11 +18458,11 @@
           <a:bodyPr wrap="square" lIns="0" tIns="0" rIns="0" bIns="0" rtlCol="0" anchor="ctr"/>
           <a:lstStyle/>
           <a:p>
-            <a:pPr indent="0" marL="0">
-              <a:buNone/>
-            </a:pPr>
-            <a:r>
-              <a:rPr lang="en-US" sz="1200" b="1" spc="400" kern="0" dirty="0">
+            <a:pPr marL="0" indent="0">
+              <a:buNone/>
+            </a:pPr>
+            <a:r>
+              <a:rPr lang="en-US" sz="1200" b="1" kern="0" spc="400" dirty="0">
                 <a:solidFill>
                   <a:srgbClr val="FFFFFF"/>
                 </a:solidFill>
@@ -18823,7 +18497,7 @@
           <a:bodyPr wrap="square" lIns="0" tIns="0" rIns="0" bIns="0" rtlCol="0" anchor="ctr"/>
           <a:lstStyle/>
           <a:p>
-            <a:pPr indent="0" marL="0">
+            <a:pPr marL="0" indent="0">
               <a:buNone/>
             </a:pPr>
             <a:r>
@@ -18909,7 +18583,7 @@
           <a:bodyPr wrap="square" lIns="0" tIns="0" rIns="0" bIns="0" rtlCol="0" anchor="ctr"/>
           <a:lstStyle/>
           <a:p>
-            <a:pPr indent="0" marL="0">
+            <a:pPr marL="0" indent="0">
               <a:buNone/>
             </a:pPr>
             <a:r>
@@ -18975,11 +18649,11 @@
           <a:bodyPr wrap="square" lIns="0" tIns="0" rIns="0" bIns="0" rtlCol="0" anchor="ctr"/>
           <a:lstStyle/>
           <a:p>
-            <a:pPr algn="ctr" indent="0" marL="0">
-              <a:buNone/>
-            </a:pPr>
-            <a:r>
-              <a:rPr lang="en-US" sz="900" b="1" spc="100" kern="0" dirty="0">
+            <a:pPr marL="0" indent="0" algn="ctr">
+              <a:buNone/>
+            </a:pPr>
+            <a:r>
+              <a:rPr lang="en-US" sz="900" b="1" kern="0" spc="100" dirty="0">
                 <a:solidFill>
                   <a:srgbClr val="5A05F4"/>
                 </a:solidFill>
@@ -18995,14 +18669,14 @@
       </p:sp>
       <p:pic>
         <p:nvPicPr>
-          <p:cNvPr id="6" name="Image 0" descr="preencoded.png">    </p:cNvPr>
+          <p:cNvPr id="6" name="Image 0" descr="preencoded.png"/>
           <p:cNvPicPr>
             <a:picLocks noChangeAspect="1"/>
           </p:cNvPicPr>
           <p:nvPr/>
         </p:nvPicPr>
         <p:blipFill>
-          <a:blip r:embed="rId1"/>
+          <a:blip r:embed="rId3"/>
           <a:stretch>
             <a:fillRect/>
           </a:stretch>
@@ -19080,7 +18754,7 @@
           <a:bodyPr wrap="square" lIns="0" tIns="0" rIns="0" bIns="0" rtlCol="0" anchor="ctr"/>
           <a:lstStyle/>
           <a:p>
-            <a:pPr algn="ctr" indent="0" marL="0">
+            <a:pPr marL="0" indent="0" algn="ctr">
               <a:buNone/>
             </a:pPr>
             <a:r>
@@ -19119,7 +18793,7 @@
           <a:bodyPr wrap="square" lIns="0" tIns="0" rIns="0" bIns="0" rtlCol="0" anchor="ctr"/>
           <a:lstStyle/>
           <a:p>
-            <a:pPr indent="0" marL="0">
+            <a:pPr marL="0" indent="0">
               <a:buNone/>
             </a:pPr>
             <a:r>
@@ -19200,7 +18874,7 @@
           <a:bodyPr wrap="square" lIns="0" tIns="0" rIns="0" bIns="0" rtlCol="0" anchor="ctr"/>
           <a:lstStyle/>
           <a:p>
-            <a:pPr algn="ctr" indent="0" marL="0">
+            <a:pPr marL="0" indent="0" algn="ctr">
               <a:buNone/>
             </a:pPr>
             <a:r>
@@ -19239,7 +18913,7 @@
           <a:bodyPr wrap="square" lIns="0" tIns="0" rIns="0" bIns="0" rtlCol="0" anchor="ctr"/>
           <a:lstStyle/>
           <a:p>
-            <a:pPr indent="0" marL="0">
+            <a:pPr marL="0" indent="0">
               <a:buNone/>
             </a:pPr>
             <a:r>
@@ -19320,7 +18994,7 @@
           <a:bodyPr wrap="square" lIns="0" tIns="0" rIns="0" bIns="0" rtlCol="0" anchor="ctr"/>
           <a:lstStyle/>
           <a:p>
-            <a:pPr algn="ctr" indent="0" marL="0">
+            <a:pPr marL="0" indent="0" algn="ctr">
               <a:buNone/>
             </a:pPr>
             <a:r>
@@ -19359,7 +19033,7 @@
           <a:bodyPr wrap="square" lIns="0" tIns="0" rIns="0" bIns="0" rtlCol="0" anchor="ctr"/>
           <a:lstStyle/>
           <a:p>
-            <a:pPr indent="0" marL="0">
+            <a:pPr marL="0" indent="0">
               <a:buNone/>
             </a:pPr>
             <a:r>
@@ -19440,7 +19114,7 @@
           <a:bodyPr wrap="square" lIns="0" tIns="0" rIns="0" bIns="0" rtlCol="0" anchor="ctr"/>
           <a:lstStyle/>
           <a:p>
-            <a:pPr algn="ctr" indent="0" marL="0">
+            <a:pPr marL="0" indent="0" algn="ctr">
               <a:buNone/>
             </a:pPr>
             <a:r>
@@ -19479,7 +19153,7 @@
           <a:bodyPr wrap="square" lIns="0" tIns="0" rIns="0" bIns="0" rtlCol="0" anchor="ctr"/>
           <a:lstStyle/>
           <a:p>
-            <a:pPr indent="0" marL="0">
+            <a:pPr marL="0" indent="0">
               <a:buNone/>
             </a:pPr>
             <a:r>
@@ -19560,7 +19234,7 @@
           <a:bodyPr wrap="square" lIns="0" tIns="0" rIns="0" bIns="0" rtlCol="0" anchor="ctr"/>
           <a:lstStyle/>
           <a:p>
-            <a:pPr algn="ctr" indent="0" marL="0">
+            <a:pPr marL="0" indent="0" algn="ctr">
               <a:buNone/>
             </a:pPr>
             <a:r>
@@ -19599,7 +19273,7 @@
           <a:bodyPr wrap="square" lIns="0" tIns="0" rIns="0" bIns="0" rtlCol="0" anchor="ctr"/>
           <a:lstStyle/>
           <a:p>
-            <a:pPr indent="0" marL="0">
+            <a:pPr marL="0" indent="0">
               <a:buNone/>
             </a:pPr>
             <a:r>
@@ -19680,7 +19354,7 @@
           <a:bodyPr wrap="square" lIns="0" tIns="0" rIns="0" bIns="0" rtlCol="0" anchor="ctr"/>
           <a:lstStyle/>
           <a:p>
-            <a:pPr algn="ctr" indent="0" marL="0">
+            <a:pPr marL="0" indent="0" algn="ctr">
               <a:buNone/>
             </a:pPr>
             <a:r>
@@ -19719,7 +19393,7 @@
           <a:bodyPr wrap="square" lIns="0" tIns="0" rIns="0" bIns="0" rtlCol="0" anchor="ctr"/>
           <a:lstStyle/>
           <a:p>
-            <a:pPr indent="0" marL="0">
+            <a:pPr marL="0" indent="0">
               <a:buNone/>
             </a:pPr>
             <a:r>
@@ -19800,7 +19474,7 @@
           <a:bodyPr wrap="square" lIns="0" tIns="0" rIns="0" bIns="0" rtlCol="0" anchor="ctr"/>
           <a:lstStyle/>
           <a:p>
-            <a:pPr algn="ctr" indent="0" marL="0">
+            <a:pPr marL="0" indent="0" algn="ctr">
               <a:buNone/>
             </a:pPr>
             <a:r>
@@ -19839,7 +19513,7 @@
           <a:bodyPr wrap="square" lIns="0" tIns="0" rIns="0" bIns="0" rtlCol="0" anchor="ctr"/>
           <a:lstStyle/>
           <a:p>
-            <a:pPr indent="0" marL="0">
+            <a:pPr marL="0" indent="0">
               <a:buNone/>
             </a:pPr>
             <a:r>
@@ -19920,7 +19594,7 @@
           <a:bodyPr wrap="square" lIns="0" tIns="0" rIns="0" bIns="0" rtlCol="0" anchor="ctr"/>
           <a:lstStyle/>
           <a:p>
-            <a:pPr algn="ctr" indent="0" marL="0">
+            <a:pPr marL="0" indent="0" algn="ctr">
               <a:buNone/>
             </a:pPr>
             <a:r>
@@ -19959,7 +19633,7 @@
           <a:bodyPr wrap="square" lIns="0" tIns="0" rIns="0" bIns="0" rtlCol="0" anchor="ctr"/>
           <a:lstStyle/>
           <a:p>
-            <a:pPr indent="0" marL="0">
+            <a:pPr marL="0" indent="0">
               <a:buNone/>
             </a:pPr>
             <a:r>
@@ -20040,7 +19714,7 @@
           <a:bodyPr wrap="square" lIns="0" tIns="0" rIns="0" bIns="0" rtlCol="0" anchor="ctr"/>
           <a:lstStyle/>
           <a:p>
-            <a:pPr algn="ctr" indent="0" marL="0">
+            <a:pPr marL="0" indent="0" algn="ctr">
               <a:buNone/>
             </a:pPr>
             <a:r>
@@ -20079,7 +19753,7 @@
           <a:bodyPr wrap="square" lIns="0" tIns="0" rIns="0" bIns="0" rtlCol="0" anchor="ctr"/>
           <a:lstStyle/>
           <a:p>
-            <a:pPr indent="0" marL="0">
+            <a:pPr marL="0" indent="0">
               <a:buNone/>
             </a:pPr>
             <a:r>
@@ -20160,7 +19834,7 @@
           <a:bodyPr wrap="square" lIns="0" tIns="0" rIns="0" bIns="0" rtlCol="0" anchor="ctr"/>
           <a:lstStyle/>
           <a:p>
-            <a:pPr algn="ctr" indent="0" marL="0">
+            <a:pPr marL="0" indent="0" algn="ctr">
               <a:buNone/>
             </a:pPr>
             <a:r>
@@ -20199,7 +19873,7 @@
           <a:bodyPr wrap="square" lIns="0" tIns="0" rIns="0" bIns="0" rtlCol="0" anchor="ctr"/>
           <a:lstStyle/>
           <a:p>
-            <a:pPr indent="0" marL="0">
+            <a:pPr marL="0" indent="0">
               <a:buNone/>
             </a:pPr>
             <a:r>
@@ -20226,7 +19900,7 @@
         <p:spPr>
           <a:xfrm>
             <a:off x="566928" y="5779008"/>
-            <a:ext cx="11064240" cy="402336"/>
+            <a:ext cx="10927080" cy="402336"/>
           </a:xfrm>
           <a:prstGeom prst="roundRect">
             <a:avLst>
@@ -20265,7 +19939,7 @@
           <a:bodyPr wrap="square" lIns="0" tIns="0" rIns="0" bIns="0" rtlCol="0" anchor="ctr"/>
           <a:lstStyle/>
           <a:p>
-            <a:pPr indent="0" marL="0">
+            <a:pPr marL="0" indent="0">
               <a:lnSpc>
                 <a:spcPct val="112000"/>
               </a:lnSpc>
@@ -20288,7 +19962,7 @@
       </p:sp>
       <p:sp>
         <p:nvSpPr>
-          <p:cNvPr id="25" name="Slide Number Placeholder 0"/>
+          <p:cNvPr id="49" name="Slide Number Placeholder 0"/>
           <p:cNvSpPr>
             <a:spLocks noGrp="1"/>
           </p:cNvSpPr>
@@ -20306,7 +19980,7 @@
           </a:prstGeom>
           <a:extLst>
             <a:ext uri="{C572A759-6A51-4108-AA02-DFA0A04FC94B}">
-              <ma14:wrappingTextBoxFlag xmlns:ma14="http://schemas.microsoft.com/office/mac/drawingml/2011/main" val="0"/>
+              <ma14:wrappingTextBoxFlag xmlns="" xmlns:ma14="http://schemas.microsoft.com/office/mac/drawingml/2011/main" val="0"/>
             </a:ext>
           </a:extLst>
         </p:spPr>
@@ -20327,7 +20001,7 @@
           <a:p>
             <a:pPr algn="l"/>
             <a:fld id="{F7021451-1387-4CA6-816F-3879F97B5CBC}" type="slidenum">
-              <a:rPr b="0" lang="en-US"/>
+              <a:rPr lang="en-US" b="0"/>
               <a:t>3</a:t>
             </a:fld>
             <a:endParaRPr lang="en-US"/>
@@ -20402,7 +20076,7 @@
           <a:bodyPr wrap="square" lIns="0" tIns="0" rIns="0" bIns="0" rtlCol="0" anchor="ctr"/>
           <a:lstStyle/>
           <a:p>
-            <a:pPr indent="0" marL="0">
+            <a:pPr marL="0" indent="0">
               <a:buNone/>
             </a:pPr>
             <a:r>
@@ -20441,7 +20115,7 @@
           <a:bodyPr wrap="square" lIns="0" tIns="0" rIns="0" bIns="0" rtlCol="0" anchor="t"/>
           <a:lstStyle/>
           <a:p>
-            <a:pPr indent="0" marL="0">
+            <a:pPr marL="0" indent="0">
               <a:lnSpc>
                 <a:spcPct val="100000"/>
               </a:lnSpc>
@@ -20510,11 +20184,11 @@
           <a:bodyPr wrap="square" lIns="0" tIns="0" rIns="0" bIns="0" rtlCol="0" anchor="ctr"/>
           <a:lstStyle/>
           <a:p>
-            <a:pPr algn="ctr" indent="0" marL="0">
-              <a:buNone/>
-            </a:pPr>
-            <a:r>
-              <a:rPr lang="en-US" sz="900" b="1" spc="100" kern="0" dirty="0">
+            <a:pPr marL="0" indent="0" algn="ctr">
+              <a:buNone/>
+            </a:pPr>
+            <a:r>
+              <a:rPr lang="en-US" sz="900" b="1" kern="0" spc="100" dirty="0">
                 <a:solidFill>
                   <a:srgbClr val="5A05F4"/>
                 </a:solidFill>
@@ -20530,14 +20204,14 @@
       </p:sp>
       <p:pic>
         <p:nvPicPr>
-          <p:cNvPr id="7" name="Image 0" descr="preencoded.png">    </p:cNvPr>
+          <p:cNvPr id="7" name="Image 0" descr="preencoded.png"/>
           <p:cNvPicPr>
             <a:picLocks noChangeAspect="1"/>
           </p:cNvPicPr>
           <p:nvPr/>
         </p:nvPicPr>
         <p:blipFill>
-          <a:blip r:embed="rId1"/>
+          <a:blip r:embed="rId3"/>
           <a:stretch>
             <a:fillRect/>
           </a:stretch>
@@ -20600,7 +20274,7 @@
           <a:bodyPr wrap="square" lIns="0" tIns="0" rIns="0" bIns="0" rtlCol="0" anchor="ctr"/>
           <a:lstStyle/>
           <a:p>
-            <a:pPr indent="0" marL="0">
+            <a:pPr marL="0" indent="0">
               <a:buNone/>
             </a:pPr>
             <a:r>
@@ -20639,7 +20313,7 @@
           <a:bodyPr wrap="square" lIns="0" tIns="0" rIns="0" bIns="0" rtlCol="0" anchor="t"/>
           <a:lstStyle/>
           <a:p>
-            <a:pPr indent="0" marL="0">
+            <a:pPr marL="0" indent="0">
               <a:lnSpc>
                 <a:spcPct val="105000"/>
               </a:lnSpc>
@@ -20708,7 +20382,7 @@
           <a:bodyPr wrap="square" lIns="0" tIns="0" rIns="0" bIns="0" rtlCol="0" anchor="ctr"/>
           <a:lstStyle/>
           <a:p>
-            <a:pPr indent="0" marL="0">
+            <a:pPr marL="0" indent="0">
               <a:buNone/>
             </a:pPr>
             <a:r>
@@ -20747,7 +20421,7 @@
           <a:bodyPr wrap="square" lIns="0" tIns="0" rIns="0" bIns="0" rtlCol="0" anchor="t"/>
           <a:lstStyle/>
           <a:p>
-            <a:pPr indent="0" marL="0">
+            <a:pPr marL="0" indent="0">
               <a:lnSpc>
                 <a:spcPct val="105000"/>
               </a:lnSpc>
@@ -20816,7 +20490,7 @@
           <a:bodyPr wrap="square" lIns="0" tIns="0" rIns="0" bIns="0" rtlCol="0" anchor="ctr"/>
           <a:lstStyle/>
           <a:p>
-            <a:pPr indent="0" marL="0">
+            <a:pPr marL="0" indent="0">
               <a:buNone/>
             </a:pPr>
             <a:r>
@@ -20855,7 +20529,7 @@
           <a:bodyPr wrap="square" lIns="0" tIns="0" rIns="0" bIns="0" rtlCol="0" anchor="t"/>
           <a:lstStyle/>
           <a:p>
-            <a:pPr indent="0" marL="0">
+            <a:pPr marL="0" indent="0">
               <a:lnSpc>
                 <a:spcPct val="105000"/>
               </a:lnSpc>
@@ -20924,7 +20598,7 @@
           <a:bodyPr wrap="square" lIns="0" tIns="0" rIns="0" bIns="0" rtlCol="0" anchor="ctr"/>
           <a:lstStyle/>
           <a:p>
-            <a:pPr indent="0" marL="0">
+            <a:pPr marL="0" indent="0">
               <a:buNone/>
             </a:pPr>
             <a:r>
@@ -20963,7 +20637,7 @@
           <a:bodyPr wrap="square" lIns="0" tIns="0" rIns="0" bIns="0" rtlCol="0" anchor="t"/>
           <a:lstStyle/>
           <a:p>
-            <a:pPr indent="0" marL="0">
+            <a:pPr marL="0" indent="0">
               <a:lnSpc>
                 <a:spcPct val="105000"/>
               </a:lnSpc>
@@ -21032,7 +20706,7 @@
           <a:bodyPr wrap="square" lIns="0" tIns="0" rIns="0" bIns="0" rtlCol="0" anchor="ctr"/>
           <a:lstStyle/>
           <a:p>
-            <a:pPr indent="0" marL="0">
+            <a:pPr marL="0" indent="0">
               <a:buNone/>
             </a:pPr>
             <a:r>
@@ -21071,7 +20745,7 @@
           <a:bodyPr wrap="square" lIns="0" tIns="0" rIns="0" bIns="0" rtlCol="0" anchor="t"/>
           <a:lstStyle/>
           <a:p>
-            <a:pPr indent="0" marL="0">
+            <a:pPr marL="0" indent="0">
               <a:lnSpc>
                 <a:spcPct val="105000"/>
               </a:lnSpc>
@@ -21140,7 +20814,7 @@
           <a:bodyPr wrap="square" lIns="0" tIns="0" rIns="0" bIns="0" rtlCol="0" anchor="ctr"/>
           <a:lstStyle/>
           <a:p>
-            <a:pPr indent="0" marL="0">
+            <a:pPr marL="0" indent="0">
               <a:buNone/>
             </a:pPr>
             <a:r>
@@ -21179,7 +20853,7 @@
           <a:bodyPr wrap="square" lIns="0" tIns="0" rIns="0" bIns="0" rtlCol="0" anchor="t"/>
           <a:lstStyle/>
           <a:p>
-            <a:pPr indent="0" marL="0">
+            <a:pPr marL="0" indent="0">
               <a:lnSpc>
                 <a:spcPct val="105000"/>
               </a:lnSpc>
@@ -21248,7 +20922,7 @@
           <a:bodyPr wrap="square" lIns="0" tIns="0" rIns="0" bIns="0" rtlCol="0" anchor="ctr"/>
           <a:lstStyle/>
           <a:p>
-            <a:pPr indent="0" marL="0">
+            <a:pPr marL="0" indent="0">
               <a:lnSpc>
                 <a:spcPct val="112000"/>
               </a:lnSpc>
@@ -21271,7 +20945,7 @@
       </p:sp>
       <p:sp>
         <p:nvSpPr>
-          <p:cNvPr id="25" name="Slide Number Placeholder 0"/>
+          <p:cNvPr id="28" name="Slide Number Placeholder 0"/>
           <p:cNvSpPr>
             <a:spLocks noGrp="1"/>
           </p:cNvSpPr>
@@ -21289,7 +20963,7 @@
           </a:prstGeom>
           <a:extLst>
             <a:ext uri="{C572A759-6A51-4108-AA02-DFA0A04FC94B}">
-              <ma14:wrappingTextBoxFlag xmlns:ma14="http://schemas.microsoft.com/office/mac/drawingml/2011/main" val="0"/>
+              <ma14:wrappingTextBoxFlag xmlns="" xmlns:ma14="http://schemas.microsoft.com/office/mac/drawingml/2011/main" val="0"/>
             </a:ext>
           </a:extLst>
         </p:spPr>
@@ -21310,7 +20984,7 @@
           <a:p>
             <a:pPr algn="l"/>
             <a:fld id="{F7021451-1387-4CA6-816F-3879F97B5CBC}" type="slidenum">
-              <a:rPr b="0" lang="en-US"/>
+              <a:rPr lang="en-US" b="0"/>
               <a:t>4</a:t>
             </a:fld>
             <a:endParaRPr lang="en-US"/>
@@ -21363,11 +21037,11 @@
           <a:bodyPr wrap="square" lIns="0" tIns="0" rIns="0" bIns="0" rtlCol="0" anchor="ctr"/>
           <a:lstStyle/>
           <a:p>
-            <a:pPr indent="0" marL="0">
-              <a:buNone/>
-            </a:pPr>
-            <a:r>
-              <a:rPr lang="en-US" sz="1200" b="1" spc="400" kern="0" dirty="0">
+            <a:pPr marL="0" indent="0">
+              <a:buNone/>
+            </a:pPr>
+            <a:r>
+              <a:rPr lang="en-US" sz="1200" b="1" kern="0" spc="400" dirty="0">
                 <a:solidFill>
                   <a:srgbClr val="FFFFFF"/>
                 </a:solidFill>
@@ -21402,7 +21076,7 @@
           <a:bodyPr wrap="square" lIns="0" tIns="0" rIns="0" bIns="0" rtlCol="0" anchor="ctr"/>
           <a:lstStyle/>
           <a:p>
-            <a:pPr indent="0" marL="0">
+            <a:pPr marL="0" indent="0">
               <a:buNone/>
             </a:pPr>
             <a:r>
@@ -21441,7 +21115,7 @@
           <a:bodyPr wrap="square" lIns="0" tIns="0" rIns="0" bIns="0" rtlCol="0" anchor="t"/>
           <a:lstStyle/>
           <a:p>
-            <a:pPr indent="0" marL="0">
+            <a:pPr marL="0" indent="0">
               <a:buNone/>
             </a:pPr>
             <a:r>
@@ -21527,7 +21201,7 @@
           <a:bodyPr wrap="square" lIns="0" tIns="0" rIns="0" bIns="0" rtlCol="0" anchor="ctr"/>
           <a:lstStyle/>
           <a:p>
-            <a:pPr algn="l" indent="0" marL="0">
+            <a:pPr marL="0" indent="0" algn="l">
               <a:buNone/>
             </a:pPr>
             <a:r>
@@ -21566,7 +21240,7 @@
           <a:bodyPr wrap="square" lIns="0" tIns="0" rIns="0" bIns="0" rtlCol="0" anchor="ctr"/>
           <a:lstStyle/>
           <a:p>
-            <a:pPr indent="0" marL="0">
+            <a:pPr marL="0" indent="0">
               <a:buNone/>
             </a:pPr>
             <a:r>
@@ -21632,11 +21306,11 @@
           <a:bodyPr wrap="square" lIns="0" tIns="0" rIns="0" bIns="0" rtlCol="0" anchor="ctr"/>
           <a:lstStyle/>
           <a:p>
-            <a:pPr algn="ctr" indent="0" marL="0">
-              <a:buNone/>
-            </a:pPr>
-            <a:r>
-              <a:rPr lang="en-US" sz="900" b="1" spc="100" kern="0" dirty="0">
+            <a:pPr marL="0" indent="0" algn="ctr">
+              <a:buNone/>
+            </a:pPr>
+            <a:r>
+              <a:rPr lang="en-US" sz="900" b="1" kern="0" spc="100" dirty="0">
                 <a:solidFill>
                   <a:srgbClr val="5A05F4"/>
                 </a:solidFill>
@@ -21652,14 +21326,14 @@
       </p:sp>
       <p:pic>
         <p:nvPicPr>
-          <p:cNvPr id="7" name="Image 0" descr="preencoded.png">    </p:cNvPr>
+          <p:cNvPr id="7" name="Image 0" descr="preencoded.png"/>
           <p:cNvPicPr>
             <a:picLocks noChangeAspect="1"/>
           </p:cNvPicPr>
           <p:nvPr/>
         </p:nvPicPr>
         <p:blipFill>
-          <a:blip r:embed="rId1"/>
+          <a:blip r:embed="rId3"/>
           <a:stretch>
             <a:fillRect/>
           </a:stretch>
@@ -21717,7 +21391,7 @@
           <a:bodyPr wrap="square" lIns="0" tIns="0" rIns="0" bIns="0" rtlCol="0" anchor="ctr"/>
           <a:lstStyle/>
           <a:p>
-            <a:pPr indent="0" marL="0">
+            <a:pPr marL="0" indent="0">
               <a:buNone/>
             </a:pPr>
             <a:r>
@@ -21756,7 +21430,7 @@
           <a:bodyPr wrap="square" lIns="0" tIns="0" rIns="0" bIns="0" rtlCol="0" anchor="t"/>
           <a:lstStyle/>
           <a:p>
-            <a:pPr indent="0" marL="0">
+            <a:pPr marL="0" indent="0">
               <a:buNone/>
             </a:pPr>
             <a:r>
@@ -21817,7 +21491,7 @@
           <a:bodyPr wrap="square" lIns="0" tIns="0" rIns="0" bIns="0" rtlCol="0" anchor="ctr"/>
           <a:lstStyle/>
           <a:p>
-            <a:pPr indent="0" marL="0">
+            <a:pPr marL="0" indent="0">
               <a:buNone/>
             </a:pPr>
             <a:r>
@@ -21856,7 +21530,7 @@
           <a:bodyPr wrap="square" lIns="0" tIns="0" rIns="0" bIns="0" rtlCol="0" anchor="t"/>
           <a:lstStyle/>
           <a:p>
-            <a:pPr indent="0" marL="0">
+            <a:pPr marL="0" indent="0">
               <a:buNone/>
             </a:pPr>
             <a:r>
@@ -21895,11 +21569,11 @@
           <a:bodyPr wrap="square" lIns="0" tIns="0" rIns="0" bIns="0" rtlCol="0" anchor="ctr"/>
           <a:lstStyle/>
           <a:p>
-            <a:pPr indent="0" marL="0">
-              <a:buNone/>
-            </a:pPr>
-            <a:r>
-              <a:rPr lang="en-US" sz="900" b="1" spc="150" kern="0" dirty="0">
+            <a:pPr marL="0" indent="0">
+              <a:buNone/>
+            </a:pPr>
+            <a:r>
+              <a:rPr lang="en-US" sz="900" b="1" kern="0" spc="150" dirty="0">
                 <a:solidFill>
                   <a:srgbClr val="6B6B6B"/>
                 </a:solidFill>
@@ -21934,7 +21608,7 @@
           <a:bodyPr wrap="square" lIns="0" tIns="0" rIns="0" bIns="0" rtlCol="0" anchor="ctr"/>
           <a:lstStyle/>
           <a:p>
-            <a:pPr algn="l" indent="0" marL="0">
+            <a:pPr marL="0" indent="0" algn="l">
               <a:buNone/>
             </a:pPr>
             <a:r>
@@ -21995,7 +21669,7 @@
           <a:bodyPr wrap="square" lIns="0" tIns="0" rIns="0" bIns="0" rtlCol="0" anchor="ctr"/>
           <a:lstStyle/>
           <a:p>
-            <a:pPr indent="0" marL="0">
+            <a:pPr marL="0" indent="0">
               <a:buNone/>
             </a:pPr>
             <a:r>
@@ -22034,7 +21708,7 @@
           <a:bodyPr wrap="square" lIns="0" tIns="0" rIns="0" bIns="0" rtlCol="0" anchor="ctr"/>
           <a:lstStyle/>
           <a:p>
-            <a:pPr algn="l" indent="0" marL="0">
+            <a:pPr marL="0" indent="0" algn="l">
               <a:buNone/>
             </a:pPr>
             <a:r>
@@ -22095,7 +21769,7 @@
           <a:bodyPr wrap="square" lIns="0" tIns="0" rIns="0" bIns="0" rtlCol="0" anchor="ctr"/>
           <a:lstStyle/>
           <a:p>
-            <a:pPr indent="0" marL="0">
+            <a:pPr marL="0" indent="0">
               <a:buNone/>
             </a:pPr>
             <a:r>
@@ -22161,11 +21835,11 @@
           <a:bodyPr wrap="square" lIns="0" tIns="0" rIns="0" bIns="0" rtlCol="0" anchor="ctr"/>
           <a:lstStyle/>
           <a:p>
-            <a:pPr indent="0" marL="0">
-              <a:buNone/>
-            </a:pPr>
-            <a:r>
-              <a:rPr lang="en-US" sz="950" b="1" spc="150" kern="0" dirty="0">
+            <a:pPr marL="0" indent="0">
+              <a:buNone/>
+            </a:pPr>
+            <a:r>
+              <a:rPr lang="en-US" sz="950" b="1" kern="0" spc="150" dirty="0">
                 <a:solidFill>
                   <a:srgbClr val="B3261E"/>
                 </a:solidFill>
@@ -22200,7 +21874,7 @@
           <a:bodyPr wrap="square" lIns="0" tIns="0" rIns="0" bIns="0" rtlCol="0" anchor="ctr"/>
           <a:lstStyle/>
           <a:p>
-            <a:pPr indent="0" marL="0">
+            <a:pPr marL="0" indent="0">
               <a:lnSpc>
                 <a:spcPct val="112000"/>
               </a:lnSpc>
@@ -22269,11 +21943,11 @@
           <a:bodyPr wrap="square" lIns="0" tIns="0" rIns="0" bIns="0" rtlCol="0" anchor="ctr"/>
           <a:lstStyle/>
           <a:p>
-            <a:pPr indent="0" marL="0">
-              <a:buNone/>
-            </a:pPr>
-            <a:r>
-              <a:rPr lang="en-US" sz="950" b="1" spc="150" kern="0" dirty="0">
+            <a:pPr marL="0" indent="0">
+              <a:buNone/>
+            </a:pPr>
+            <a:r>
+              <a:rPr lang="en-US" sz="950" b="1" kern="0" spc="150" dirty="0">
                 <a:solidFill>
                   <a:srgbClr val="106B41"/>
                 </a:solidFill>
@@ -22308,7 +21982,7 @@
           <a:bodyPr wrap="square" lIns="0" tIns="0" rIns="0" bIns="0" rtlCol="0" anchor="ctr"/>
           <a:lstStyle/>
           <a:p>
-            <a:pPr indent="0" marL="0">
+            <a:pPr marL="0" indent="0">
               <a:lnSpc>
                 <a:spcPct val="112000"/>
               </a:lnSpc>
@@ -22331,7 +22005,7 @@
       </p:sp>
       <p:sp>
         <p:nvSpPr>
-          <p:cNvPr id="25" name="Slide Number Placeholder 0"/>
+          <p:cNvPr id="27" name="Slide Number Placeholder 0"/>
           <p:cNvSpPr>
             <a:spLocks noGrp="1"/>
           </p:cNvSpPr>
@@ -22349,7 +22023,7 @@
           </a:prstGeom>
           <a:extLst>
             <a:ext uri="{C572A759-6A51-4108-AA02-DFA0A04FC94B}">
-              <ma14:wrappingTextBoxFlag xmlns:ma14="http://schemas.microsoft.com/office/mac/drawingml/2011/main" val="0"/>
+              <ma14:wrappingTextBoxFlag xmlns="" xmlns:ma14="http://schemas.microsoft.com/office/mac/drawingml/2011/main" val="0"/>
             </a:ext>
           </a:extLst>
         </p:spPr>
@@ -22370,7 +22044,7 @@
           <a:p>
             <a:pPr algn="l"/>
             <a:fld id="{F7021451-1387-4CA6-816F-3879F97B5CBC}" type="slidenum">
-              <a:rPr b="0" lang="en-US"/>
+              <a:rPr lang="en-US" b="0"/>
               <a:t>6</a:t>
             </a:fld>
             <a:endParaRPr lang="en-US"/>
@@ -22445,7 +22119,7 @@
           <a:bodyPr wrap="square" lIns="0" tIns="0" rIns="0" bIns="0" rtlCol="0" anchor="ctr"/>
           <a:lstStyle/>
           <a:p>
-            <a:pPr algn="l" indent="0" marL="0">
+            <a:pPr marL="0" indent="0" algn="l">
               <a:buNone/>
             </a:pPr>
             <a:r>
@@ -22484,7 +22158,7 @@
           <a:bodyPr wrap="square" lIns="0" tIns="0" rIns="0" bIns="0" rtlCol="0" anchor="ctr"/>
           <a:lstStyle/>
           <a:p>
-            <a:pPr indent="0" marL="0">
+            <a:pPr marL="0" indent="0">
               <a:buNone/>
             </a:pPr>
             <a:r>
@@ -22550,11 +22224,11 @@
           <a:bodyPr wrap="square" lIns="0" tIns="0" rIns="0" bIns="0" rtlCol="0" anchor="ctr"/>
           <a:lstStyle/>
           <a:p>
-            <a:pPr algn="ctr" indent="0" marL="0">
-              <a:buNone/>
-            </a:pPr>
-            <a:r>
-              <a:rPr lang="en-US" sz="900" b="1" spc="100" kern="0" dirty="0">
+            <a:pPr marL="0" indent="0" algn="ctr">
+              <a:buNone/>
+            </a:pPr>
+            <a:r>
+              <a:rPr lang="en-US" sz="900" b="1" kern="0" spc="100" dirty="0">
                 <a:solidFill>
                   <a:srgbClr val="5A05F4"/>
                 </a:solidFill>
@@ -22570,14 +22244,14 @@
       </p:sp>
       <p:pic>
         <p:nvPicPr>
-          <p:cNvPr id="7" name="Image 0" descr="preencoded.png">    </p:cNvPr>
+          <p:cNvPr id="7" name="Image 0" descr="preencoded.png"/>
           <p:cNvPicPr>
             <a:picLocks noChangeAspect="1"/>
           </p:cNvPicPr>
           <p:nvPr/>
         </p:nvPicPr>
         <p:blipFill>
-          <a:blip r:embed="rId1"/>
+          <a:blip r:embed="rId3"/>
           <a:stretch>
             <a:fillRect/>
           </a:stretch>
@@ -22635,7 +22309,7 @@
           <a:bodyPr wrap="square" lIns="0" tIns="0" rIns="0" bIns="0" rtlCol="0" anchor="ctr"/>
           <a:lstStyle/>
           <a:p>
-            <a:pPr indent="0" marL="0">
+            <a:pPr marL="0" indent="0">
               <a:buNone/>
             </a:pPr>
             <a:r>
@@ -22674,7 +22348,7 @@
           <a:bodyPr wrap="square" lIns="0" tIns="0" rIns="0" bIns="0" rtlCol="0" anchor="t"/>
           <a:lstStyle/>
           <a:p>
-            <a:pPr indent="0" marL="0">
+            <a:pPr marL="0" indent="0">
               <a:lnSpc>
                 <a:spcPct val="108000"/>
               </a:lnSpc>
@@ -22738,7 +22412,7 @@
           <a:bodyPr wrap="square" lIns="0" tIns="0" rIns="0" bIns="0" rtlCol="0" anchor="ctr"/>
           <a:lstStyle/>
           <a:p>
-            <a:pPr indent="0" marL="0">
+            <a:pPr marL="0" indent="0">
               <a:buNone/>
             </a:pPr>
             <a:r>
@@ -22777,7 +22451,7 @@
           <a:bodyPr wrap="square" lIns="0" tIns="0" rIns="0" bIns="0" rtlCol="0" anchor="t"/>
           <a:lstStyle/>
           <a:p>
-            <a:pPr indent="0" marL="0">
+            <a:pPr marL="0" indent="0">
               <a:lnSpc>
                 <a:spcPct val="108000"/>
               </a:lnSpc>
@@ -22806,7 +22480,7 @@
         </p:nvSpPr>
         <p:spPr>
           <a:xfrm>
-            <a:off x="6281928" y="3063240"/>
+            <a:off x="6275834" y="3017520"/>
             <a:ext cx="5349240" cy="1188720"/>
           </a:xfrm>
           <a:prstGeom prst="roundRect">
@@ -22828,7 +22502,7 @@
         </p:nvSpPr>
         <p:spPr>
           <a:xfrm>
-            <a:off x="6483096" y="3218688"/>
+            <a:off x="6477002" y="3172968"/>
             <a:ext cx="4946904" cy="438912"/>
           </a:xfrm>
           <a:prstGeom prst="rect">
@@ -22841,7 +22515,7 @@
           <a:bodyPr wrap="square" lIns="0" tIns="0" rIns="0" bIns="0" rtlCol="0" anchor="ctr"/>
           <a:lstStyle/>
           <a:p>
-            <a:pPr indent="0" marL="0">
+            <a:pPr marL="0" indent="0">
               <a:buNone/>
             </a:pPr>
             <a:r>
@@ -22867,7 +22541,7 @@
         </p:nvSpPr>
         <p:spPr>
           <a:xfrm>
-            <a:off x="6483096" y="3749040"/>
+            <a:off x="6477002" y="3703320"/>
             <a:ext cx="4946904" cy="347472"/>
           </a:xfrm>
           <a:prstGeom prst="rect">
@@ -22880,7 +22554,7 @@
           <a:bodyPr wrap="square" lIns="0" tIns="0" rIns="0" bIns="0" rtlCol="0" anchor="t"/>
           <a:lstStyle/>
           <a:p>
-            <a:pPr indent="0" marL="0">
+            <a:pPr marL="0" indent="0">
               <a:lnSpc>
                 <a:spcPct val="108000"/>
               </a:lnSpc>
@@ -22909,7 +22583,7 @@
         </p:nvSpPr>
         <p:spPr>
           <a:xfrm>
-            <a:off x="6281928" y="4389120"/>
+            <a:off x="6281928" y="4297680"/>
             <a:ext cx="5349240" cy="1188720"/>
           </a:xfrm>
           <a:prstGeom prst="roundRect">
@@ -22931,7 +22605,7 @@
         </p:nvSpPr>
         <p:spPr>
           <a:xfrm>
-            <a:off x="6483096" y="4544568"/>
+            <a:off x="6483096" y="4453128"/>
             <a:ext cx="4946904" cy="438912"/>
           </a:xfrm>
           <a:prstGeom prst="rect">
@@ -22944,7 +22618,7 @@
           <a:bodyPr wrap="square" lIns="0" tIns="0" rIns="0" bIns="0" rtlCol="0" anchor="ctr"/>
           <a:lstStyle/>
           <a:p>
-            <a:pPr indent="0" marL="0">
+            <a:pPr marL="0" indent="0">
               <a:buNone/>
             </a:pPr>
             <a:r>
@@ -22970,7 +22644,7 @@
         </p:nvSpPr>
         <p:spPr>
           <a:xfrm>
-            <a:off x="6483096" y="5074920"/>
+            <a:off x="6483096" y="4983480"/>
             <a:ext cx="4946904" cy="347472"/>
           </a:xfrm>
           <a:prstGeom prst="rect">
@@ -22983,7 +22657,7 @@
           <a:bodyPr wrap="square" lIns="0" tIns="0" rIns="0" bIns="0" rtlCol="0" anchor="t"/>
           <a:lstStyle/>
           <a:p>
-            <a:pPr indent="0" marL="0">
+            <a:pPr marL="0" indent="0">
               <a:lnSpc>
                 <a:spcPct val="108000"/>
               </a:lnSpc>
@@ -23047,11 +22721,11 @@
           <a:bodyPr wrap="square" lIns="0" tIns="0" rIns="0" bIns="0" rtlCol="0" anchor="ctr"/>
           <a:lstStyle/>
           <a:p>
-            <a:pPr indent="0" marL="0">
-              <a:buNone/>
-            </a:pPr>
-            <a:r>
-              <a:rPr lang="en-US" sz="950" b="1" spc="150" kern="0" dirty="0">
+            <a:pPr marL="0" indent="0">
+              <a:buNone/>
+            </a:pPr>
+            <a:r>
+              <a:rPr lang="en-US" sz="950" b="1" kern="0" spc="150" dirty="0">
                 <a:solidFill>
                   <a:srgbClr val="FFFFFF"/>
                 </a:solidFill>
@@ -23086,7 +22760,7 @@
           <a:bodyPr wrap="square" lIns="0" tIns="0" rIns="0" bIns="0" rtlCol="0" anchor="ctr"/>
           <a:lstStyle/>
           <a:p>
-            <a:pPr indent="0" marL="0">
+            <a:pPr marL="0" indent="0">
               <a:lnSpc>
                 <a:spcPct val="112000"/>
               </a:lnSpc>
@@ -23155,7 +22829,7 @@
           <a:bodyPr wrap="square" lIns="0" tIns="0" rIns="0" bIns="0" rtlCol="0" anchor="ctr"/>
           <a:lstStyle/>
           <a:p>
-            <a:pPr indent="0" marL="0">
+            <a:pPr marL="0" indent="0">
               <a:lnSpc>
                 <a:spcPct val="112000"/>
               </a:lnSpc>
@@ -23196,7 +22870,7 @@
           </a:prstGeom>
           <a:extLst>
             <a:ext uri="{C572A759-6A51-4108-AA02-DFA0A04FC94B}">
-              <ma14:wrappingTextBoxFlag xmlns:ma14="http://schemas.microsoft.com/office/mac/drawingml/2011/main" val="0"/>
+              <ma14:wrappingTextBoxFlag xmlns="" xmlns:ma14="http://schemas.microsoft.com/office/mac/drawingml/2011/main" val="0"/>
             </a:ext>
           </a:extLst>
         </p:spPr>
@@ -23217,7 +22891,7 @@
           <a:p>
             <a:pPr algn="l"/>
             <a:fld id="{F7021451-1387-4CA6-816F-3879F97B5CBC}" type="slidenum">
-              <a:rPr b="0" lang="en-US"/>
+              <a:rPr lang="en-US" b="0"/>
               <a:t>7</a:t>
             </a:fld>
             <a:endParaRPr lang="en-US"/>
@@ -23292,7 +22966,7 @@
           <a:bodyPr wrap="square" lIns="0" tIns="0" rIns="0" bIns="0" rtlCol="0" anchor="ctr"/>
           <a:lstStyle/>
           <a:p>
-            <a:pPr algn="l" indent="0" marL="0">
+            <a:pPr marL="0" indent="0" algn="l">
               <a:buNone/>
             </a:pPr>
             <a:r>
@@ -23331,7 +23005,7 @@
           <a:bodyPr wrap="square" lIns="0" tIns="0" rIns="0" bIns="0" rtlCol="0" anchor="ctr"/>
           <a:lstStyle/>
           <a:p>
-            <a:pPr indent="0" marL="0">
+            <a:pPr marL="0" indent="0">
               <a:buNone/>
             </a:pPr>
             <a:r>
@@ -23397,11 +23071,11 @@
           <a:bodyPr wrap="square" lIns="0" tIns="0" rIns="0" bIns="0" rtlCol="0" anchor="ctr"/>
           <a:lstStyle/>
           <a:p>
-            <a:pPr algn="ctr" indent="0" marL="0">
-              <a:buNone/>
-            </a:pPr>
-            <a:r>
-              <a:rPr lang="en-US" sz="900" b="1" spc="100" kern="0" dirty="0">
+            <a:pPr marL="0" indent="0" algn="ctr">
+              <a:buNone/>
+            </a:pPr>
+            <a:r>
+              <a:rPr lang="en-US" sz="900" b="1" kern="0" spc="100" dirty="0">
                 <a:solidFill>
                   <a:srgbClr val="5A05F4"/>
                 </a:solidFill>
@@ -23417,14 +23091,14 @@
       </p:sp>
       <p:pic>
         <p:nvPicPr>
-          <p:cNvPr id="7" name="Image 0" descr="preencoded.png">    </p:cNvPr>
+          <p:cNvPr id="7" name="Image 0" descr="preencoded.png"/>
           <p:cNvPicPr>
             <a:picLocks noChangeAspect="1"/>
           </p:cNvPicPr>
           <p:nvPr/>
         </p:nvPicPr>
         <p:blipFill>
-          <a:blip r:embed="rId1"/>
+          <a:blip r:embed="rId3"/>
           <a:stretch>
             <a:fillRect/>
           </a:stretch>
@@ -23487,7 +23161,7 @@
           <a:bodyPr wrap="square" lIns="0" tIns="0" rIns="0" bIns="0" rtlCol="0" anchor="t"/>
           <a:lstStyle/>
           <a:p>
-            <a:pPr indent="0" marL="0">
+            <a:pPr marL="0" indent="0">
               <a:lnSpc>
                 <a:spcPct val="130000"/>
               </a:lnSpc>
@@ -23504,12 +23178,6 @@
               </a:rPr>
               <a:t>var cacheKey = </a:t>
             </a:r>
-            <a:pPr indent="0" marL="0">
-              <a:lnSpc>
-                <a:spcPct val="130000"/>
-              </a:lnSpc>
-              <a:buNone/>
-            </a:pPr>
             <a:r>
               <a:rPr lang="en-US" sz="1300" dirty="0">
                 <a:solidFill>
@@ -23521,12 +23189,6 @@
               </a:rPr>
               <a:t>$"{model}|{systemPrompt}|{body.Message}"</a:t>
             </a:r>
-            <a:pPr indent="0" marL="0">
-              <a:lnSpc>
-                <a:spcPct val="130000"/>
-              </a:lnSpc>
-              <a:buNone/>
-            </a:pPr>
             <a:r>
               <a:rPr lang="en-US" sz="1300" dirty="0">
                 <a:solidFill>
@@ -23585,7 +23247,7 @@
           <a:bodyPr wrap="square" lIns="0" tIns="0" rIns="0" bIns="0" rtlCol="0" anchor="ctr"/>
           <a:lstStyle/>
           <a:p>
-            <a:pPr algn="ctr" indent="0" marL="0">
+            <a:pPr marL="0" indent="0" algn="ctr">
               <a:buNone/>
             </a:pPr>
             <a:r>
@@ -23689,7 +23351,7 @@
           <a:bodyPr wrap="square" lIns="0" tIns="0" rIns="0" bIns="0" rtlCol="0" anchor="ctr"/>
           <a:lstStyle/>
           <a:p>
-            <a:pPr algn="ctr" indent="0" marL="0">
+            <a:pPr marL="0" indent="0" algn="ctr">
               <a:buNone/>
             </a:pPr>
             <a:r>
@@ -23793,7 +23455,7 @@
           <a:bodyPr wrap="square" lIns="0" tIns="0" rIns="0" bIns="0" rtlCol="0" anchor="ctr"/>
           <a:lstStyle/>
           <a:p>
-            <a:pPr algn="ctr" indent="0" marL="0">
+            <a:pPr marL="0" indent="0" algn="ctr">
               <a:buNone/>
             </a:pPr>
             <a:r>
@@ -23859,11 +23521,11 @@
           <a:bodyPr wrap="square" lIns="0" tIns="0" rIns="0" bIns="0" rtlCol="0" anchor="ctr"/>
           <a:lstStyle/>
           <a:p>
-            <a:pPr indent="0" marL="0">
-              <a:buNone/>
-            </a:pPr>
-            <a:r>
-              <a:rPr lang="en-US" sz="950" b="1" spc="150" kern="0" dirty="0">
+            <a:pPr marL="0" indent="0">
+              <a:buNone/>
+            </a:pPr>
+            <a:r>
+              <a:rPr lang="en-US" sz="950" b="1" kern="0" spc="150" dirty="0">
                 <a:solidFill>
                   <a:srgbClr val="B3261E"/>
                 </a:solidFill>
@@ -23898,7 +23560,7 @@
           <a:bodyPr wrap="square" lIns="0" tIns="0" rIns="0" bIns="0" rtlCol="0" anchor="ctr"/>
           <a:lstStyle/>
           <a:p>
-            <a:pPr indent="0" marL="0">
+            <a:pPr marL="0" indent="0">
               <a:lnSpc>
                 <a:spcPct val="112000"/>
               </a:lnSpc>
@@ -23967,7 +23629,7 @@
           <a:bodyPr wrap="square" lIns="0" tIns="0" rIns="0" bIns="0" rtlCol="0" anchor="ctr"/>
           <a:lstStyle/>
           <a:p>
-            <a:pPr indent="0" marL="0">
+            <a:pPr marL="0" indent="0">
               <a:lnSpc>
                 <a:spcPct val="112000"/>
               </a:lnSpc>
@@ -24008,7 +23670,7 @@
           </a:prstGeom>
           <a:extLst>
             <a:ext uri="{C572A759-6A51-4108-AA02-DFA0A04FC94B}">
-              <ma14:wrappingTextBoxFlag xmlns:ma14="http://schemas.microsoft.com/office/mac/drawingml/2011/main" val="0"/>
+              <ma14:wrappingTextBoxFlag xmlns="" xmlns:ma14="http://schemas.microsoft.com/office/mac/drawingml/2011/main" val="0"/>
             </a:ext>
           </a:extLst>
         </p:spPr>
@@ -24029,7 +23691,7 @@
           <a:p>
             <a:pPr algn="l"/>
             <a:fld id="{F7021451-1387-4CA6-816F-3879F97B5CBC}" type="slidenum">
-              <a:rPr b="0" lang="en-US"/>
+              <a:rPr lang="en-US" b="0"/>
               <a:t>8</a:t>
             </a:fld>
             <a:endParaRPr lang="en-US"/>
@@ -24104,7 +23766,7 @@
           <a:bodyPr wrap="square" lIns="0" tIns="0" rIns="0" bIns="0" rtlCol="0" anchor="ctr"/>
           <a:lstStyle/>
           <a:p>
-            <a:pPr algn="l" indent="0" marL="0">
+            <a:pPr marL="0" indent="0" algn="l">
               <a:buNone/>
             </a:pPr>
             <a:r>
@@ -24143,7 +23805,7 @@
           <a:bodyPr wrap="square" lIns="0" tIns="0" rIns="0" bIns="0" rtlCol="0" anchor="ctr"/>
           <a:lstStyle/>
           <a:p>
-            <a:pPr indent="0" marL="0">
+            <a:pPr marL="0" indent="0">
               <a:buNone/>
             </a:pPr>
             <a:r>
@@ -24209,11 +23871,11 @@
           <a:bodyPr wrap="square" lIns="0" tIns="0" rIns="0" bIns="0" rtlCol="0" anchor="ctr"/>
           <a:lstStyle/>
           <a:p>
-            <a:pPr algn="ctr" indent="0" marL="0">
-              <a:buNone/>
-            </a:pPr>
-            <a:r>
-              <a:rPr lang="en-US" sz="900" b="1" spc="100" kern="0" dirty="0">
+            <a:pPr marL="0" indent="0" algn="ctr">
+              <a:buNone/>
+            </a:pPr>
+            <a:r>
+              <a:rPr lang="en-US" sz="900" b="1" kern="0" spc="100" dirty="0">
                 <a:solidFill>
                   <a:srgbClr val="5A05F4"/>
                 </a:solidFill>
@@ -24229,14 +23891,14 @@
       </p:sp>
       <p:pic>
         <p:nvPicPr>
-          <p:cNvPr id="7" name="Image 0" descr="preencoded.png">    </p:cNvPr>
+          <p:cNvPr id="7" name="Image 0" descr="preencoded.png"/>
           <p:cNvPicPr>
             <a:picLocks noChangeAspect="1"/>
           </p:cNvPicPr>
           <p:nvPr/>
         </p:nvPicPr>
         <p:blipFill>
-          <a:blip r:embed="rId1"/>
+          <a:blip r:embed="rId3"/>
           <a:stretch>
             <a:fillRect/>
           </a:stretch>
@@ -24294,7 +23956,7 @@
           <a:bodyPr wrap="square" lIns="0" tIns="0" rIns="0" bIns="0" rtlCol="0" anchor="ctr"/>
           <a:lstStyle/>
           <a:p>
-            <a:pPr indent="0" marL="0">
+            <a:pPr marL="0" indent="0">
               <a:buNone/>
             </a:pPr>
             <a:r>
@@ -24333,7 +23995,7 @@
           <a:bodyPr wrap="square" lIns="0" tIns="0" rIns="0" bIns="0" rtlCol="0" anchor="ctr"/>
           <a:lstStyle/>
           <a:p>
-            <a:pPr indent="0" marL="0">
+            <a:pPr marL="0" indent="0">
               <a:buNone/>
             </a:pPr>
             <a:r>
@@ -24394,7 +24056,7 @@
           <a:bodyPr wrap="square" lIns="0" tIns="0" rIns="0" bIns="0" rtlCol="0" anchor="ctr"/>
           <a:lstStyle/>
           <a:p>
-            <a:pPr indent="0" marL="0">
+            <a:pPr marL="0" indent="0">
               <a:buNone/>
             </a:pPr>
             <a:r>
@@ -24433,7 +24095,7 @@
           <a:bodyPr wrap="square" lIns="0" tIns="0" rIns="0" bIns="0" rtlCol="0" anchor="ctr"/>
           <a:lstStyle/>
           <a:p>
-            <a:pPr indent="0" marL="0">
+            <a:pPr marL="0" indent="0">
               <a:buNone/>
             </a:pPr>
             <a:r>
@@ -24494,7 +24156,7 @@
           <a:bodyPr wrap="square" lIns="0" tIns="0" rIns="0" bIns="0" rtlCol="0" anchor="ctr"/>
           <a:lstStyle/>
           <a:p>
-            <a:pPr indent="0" marL="0">
+            <a:pPr marL="0" indent="0">
               <a:buNone/>
             </a:pPr>
             <a:r>
@@ -24533,7 +24195,7 @@
           <a:bodyPr wrap="square" lIns="0" tIns="0" rIns="0" bIns="0" rtlCol="0" anchor="ctr"/>
           <a:lstStyle/>
           <a:p>
-            <a:pPr indent="0" marL="0">
+            <a:pPr marL="0" indent="0">
               <a:buNone/>
             </a:pPr>
             <a:r>
@@ -24615,7 +24277,7 @@
           <a:bodyPr wrap="square" lIns="0" tIns="0" rIns="0" bIns="0" rtlCol="0" anchor="ctr"/>
           <a:lstStyle/>
           <a:p>
-            <a:pPr algn="ctr" indent="0" marL="0">
+            <a:pPr marL="0" indent="0" algn="ctr">
               <a:buNone/>
             </a:pPr>
             <a:r>
@@ -24674,7 +24336,7 @@
           <a:bodyPr wrap="square" lIns="0" tIns="0" rIns="0" bIns="0" rtlCol="0" anchor="ctr"/>
           <a:lstStyle/>
           <a:p>
-            <a:pPr algn="ctr" indent="0" marL="0">
+            <a:pPr marL="0" indent="0" algn="ctr">
               <a:buNone/>
             </a:pPr>
             <a:r>
@@ -24733,7 +24395,7 @@
           <a:bodyPr wrap="square" lIns="0" tIns="0" rIns="0" bIns="0" rtlCol="0" anchor="ctr"/>
           <a:lstStyle/>
           <a:p>
-            <a:pPr algn="ctr" indent="0" marL="0">
+            <a:pPr marL="0" indent="0" algn="ctr">
               <a:buNone/>
             </a:pPr>
             <a:r>
@@ -24772,7 +24434,7 @@
           <a:bodyPr wrap="square" lIns="0" tIns="0" rIns="0" bIns="0" rtlCol="0" anchor="ctr"/>
           <a:lstStyle/>
           <a:p>
-            <a:pPr indent="0" marL="0">
+            <a:pPr marL="0" indent="0">
               <a:buNone/>
             </a:pPr>
             <a:r>
@@ -24811,7 +24473,7 @@
           <a:bodyPr wrap="square" lIns="0" tIns="0" rIns="0" bIns="0" rtlCol="0" anchor="ctr"/>
           <a:lstStyle/>
           <a:p>
-            <a:pPr algn="r" indent="0" marL="0">
+            <a:pPr marL="0" indent="0" algn="r">
               <a:buNone/>
             </a:pPr>
             <a:r>
@@ -24872,11 +24534,11 @@
           <a:bodyPr wrap="square" lIns="0" tIns="0" rIns="0" bIns="0" rtlCol="0" anchor="ctr"/>
           <a:lstStyle/>
           <a:p>
-            <a:pPr indent="0" marL="0">
-              <a:buNone/>
-            </a:pPr>
-            <a:r>
-              <a:rPr lang="en-US" sz="950" b="1" spc="150" kern="0" dirty="0">
+            <a:pPr marL="0" indent="0">
+              <a:buNone/>
+            </a:pPr>
+            <a:r>
+              <a:rPr lang="en-US" sz="950" b="1" kern="0" spc="150" dirty="0">
                 <a:solidFill>
                   <a:srgbClr val="FFFFFF"/>
                 </a:solidFill>
@@ -24911,7 +24573,7 @@
           <a:bodyPr wrap="square" lIns="0" tIns="0" rIns="0" bIns="0" rtlCol="0" anchor="ctr"/>
           <a:lstStyle/>
           <a:p>
-            <a:pPr indent="0" marL="0">
+            <a:pPr marL="0" indent="0">
               <a:lnSpc>
                 <a:spcPct val="112000"/>
               </a:lnSpc>
@@ -24934,7 +24596,7 @@
       </p:sp>
       <p:sp>
         <p:nvSpPr>
-          <p:cNvPr id="25" name="Slide Number Placeholder 0"/>
+          <p:cNvPr id="29" name="Slide Number Placeholder 0"/>
           <p:cNvSpPr>
             <a:spLocks noGrp="1"/>
           </p:cNvSpPr>
@@ -24952,7 +24614,7 @@
           </a:prstGeom>
           <a:extLst>
             <a:ext uri="{C572A759-6A51-4108-AA02-DFA0A04FC94B}">
-              <ma14:wrappingTextBoxFlag xmlns:ma14="http://schemas.microsoft.com/office/mac/drawingml/2011/main" val="0"/>
+              <ma14:wrappingTextBoxFlag xmlns="" xmlns:ma14="http://schemas.microsoft.com/office/mac/drawingml/2011/main" val="0"/>
             </a:ext>
           </a:extLst>
         </p:spPr>
@@ -24973,7 +24635,7 @@
           <a:p>
             <a:pPr algn="l"/>
             <a:fld id="{F7021451-1387-4CA6-816F-3879F97B5CBC}" type="slidenum">
-              <a:rPr b="0" lang="en-US"/>
+              <a:rPr lang="en-US" b="0"/>
               <a:t>9</a:t>
             </a:fld>
             <a:endParaRPr lang="en-US"/>
@@ -25281,4 +24943,299 @@
     </a:ext>
   </a:extLst>
 </a:theme>
+</file>
+
+<file path=ppt/theme/theme2.xml><?xml version="1.0" encoding="utf-8"?>
+<a:theme xmlns:a="http://schemas.openxmlformats.org/drawingml/2006/main" name="Office Theme">
+  <a:themeElements>
+    <a:clrScheme name="Office">
+      <a:dk1>
+        <a:sysClr val="windowText" lastClr="000000"/>
+      </a:dk1>
+      <a:lt1>
+        <a:sysClr val="window" lastClr="FFFFFF"/>
+      </a:lt1>
+      <a:dk2>
+        <a:srgbClr val="44546A"/>
+      </a:dk2>
+      <a:lt2>
+        <a:srgbClr val="E7E6E6"/>
+      </a:lt2>
+      <a:accent1>
+        <a:srgbClr val="4472C4"/>
+      </a:accent1>
+      <a:accent2>
+        <a:srgbClr val="ED7D31"/>
+      </a:accent2>
+      <a:accent3>
+        <a:srgbClr val="A5A5A5"/>
+      </a:accent3>
+      <a:accent4>
+        <a:srgbClr val="FFC000"/>
+      </a:accent4>
+      <a:accent5>
+        <a:srgbClr val="5B9BD5"/>
+      </a:accent5>
+      <a:accent6>
+        <a:srgbClr val="70AD47"/>
+      </a:accent6>
+      <a:hlink>
+        <a:srgbClr val="0563C1"/>
+      </a:hlink>
+      <a:folHlink>
+        <a:srgbClr val="954F72"/>
+      </a:folHlink>
+    </a:clrScheme>
+    <a:fontScheme name="Office">
+      <a:majorFont>
+        <a:latin typeface="Calibri Light" panose="020F0302020204030204"/>
+        <a:ea typeface=""/>
+        <a:cs typeface=""/>
+        <a:font script="Jpan" typeface="游ゴシック Light"/>
+        <a:font script="Hang" typeface="맑은 고딕"/>
+        <a:font script="Hans" typeface="等线 Light"/>
+        <a:font script="Hant" typeface="新細明體"/>
+        <a:font script="Arab" typeface="Times New Roman"/>
+        <a:font script="Hebr" typeface="Times New Roman"/>
+        <a:font script="Thai" typeface="Angsana New"/>
+        <a:font script="Ethi" typeface="Nyala"/>
+        <a:font script="Beng" typeface="Vrinda"/>
+        <a:font script="Gujr" typeface="Shruti"/>
+        <a:font script="Khmr" typeface="MoolBoran"/>
+        <a:font script="Knda" typeface="Tunga"/>
+        <a:font script="Guru" typeface="Raavi"/>
+        <a:font script="Cans" typeface="Euphemia"/>
+        <a:font script="Cher" typeface="Plantagenet Cherokee"/>
+        <a:font script="Yiii" typeface="Microsoft Yi Baiti"/>
+        <a:font script="Tibt" typeface="Microsoft Himalaya"/>
+        <a:font script="Thaa" typeface="MV Boli"/>
+        <a:font script="Deva" typeface="Mangal"/>
+        <a:font script="Telu" typeface="Gautami"/>
+        <a:font script="Taml" typeface="Latha"/>
+        <a:font script="Syrc" typeface="Estrangelo Edessa"/>
+        <a:font script="Orya" typeface="Kalinga"/>
+        <a:font script="Mlym" typeface="Kartika"/>
+        <a:font script="Laoo" typeface="DokChampa"/>
+        <a:font script="Sinh" typeface="Iskoola Pota"/>
+        <a:font script="Mong" typeface="Mongolian Baiti"/>
+        <a:font script="Viet" typeface="Times New Roman"/>
+        <a:font script="Uigh" typeface="Microsoft Uighur"/>
+        <a:font script="Geor" typeface="Sylfaen"/>
+        <a:font script="Armn" typeface="Arial"/>
+        <a:font script="Bugi" typeface="Leelawadee UI"/>
+        <a:font script="Bopo" typeface="Microsoft JhengHei"/>
+        <a:font script="Java" typeface="Javanese Text"/>
+        <a:font script="Lisu" typeface="Segoe UI"/>
+        <a:font script="Mymr" typeface="Myanmar Text"/>
+        <a:font script="Nkoo" typeface="Ebrima"/>
+        <a:font script="Olck" typeface="Nirmala UI"/>
+        <a:font script="Osma" typeface="Ebrima"/>
+        <a:font script="Phag" typeface="Phagspa"/>
+        <a:font script="Syrn" typeface="Estrangelo Edessa"/>
+        <a:font script="Syrj" typeface="Estrangelo Edessa"/>
+        <a:font script="Syre" typeface="Estrangelo Edessa"/>
+        <a:font script="Sora" typeface="Nirmala UI"/>
+        <a:font script="Tale" typeface="Microsoft Tai Le"/>
+        <a:font script="Talu" typeface="Microsoft New Tai Lue"/>
+        <a:font script="Tfng" typeface="Ebrima"/>
+      </a:majorFont>
+      <a:minorFont>
+        <a:latin typeface="Calibri" panose="020F0502020204030204"/>
+        <a:ea typeface=""/>
+        <a:cs typeface=""/>
+        <a:font script="Jpan" typeface="游ゴシック"/>
+        <a:font script="Hang" typeface="맑은 고딕"/>
+        <a:font script="Hans" typeface="等线"/>
+        <a:font script="Hant" typeface="新細明體"/>
+        <a:font script="Arab" typeface="Arial"/>
+        <a:font script="Hebr" typeface="Arial"/>
+        <a:font script="Thai" typeface="Cordia New"/>
+        <a:font script="Ethi" typeface="Nyala"/>
+        <a:font script="Beng" typeface="Vrinda"/>
+        <a:font script="Gujr" typeface="Shruti"/>
+        <a:font script="Khmr" typeface="DaunPenh"/>
+        <a:font script="Knda" typeface="Tunga"/>
+        <a:font script="Guru" typeface="Raavi"/>
+        <a:font script="Cans" typeface="Euphemia"/>
+        <a:font script="Cher" typeface="Plantagenet Cherokee"/>
+        <a:font script="Yiii" typeface="Microsoft Yi Baiti"/>
+        <a:font script="Tibt" typeface="Microsoft Himalaya"/>
+        <a:font script="Thaa" typeface="MV Boli"/>
+        <a:font script="Deva" typeface="Mangal"/>
+        <a:font script="Telu" typeface="Gautami"/>
+        <a:font script="Taml" typeface="Latha"/>
+        <a:font script="Syrc" typeface="Estrangelo Edessa"/>
+        <a:font script="Orya" typeface="Kalinga"/>
+        <a:font script="Mlym" typeface="Kartika"/>
+        <a:font script="Laoo" typeface="DokChampa"/>
+        <a:font script="Sinh" typeface="Iskoola Pota"/>
+        <a:font script="Mong" typeface="Mongolian Baiti"/>
+        <a:font script="Viet" typeface="Arial"/>
+        <a:font script="Uigh" typeface="Microsoft Uighur"/>
+        <a:font script="Geor" typeface="Sylfaen"/>
+        <a:font script="Armn" typeface="Arial"/>
+        <a:font script="Bugi" typeface="Leelawadee UI"/>
+        <a:font script="Bopo" typeface="Microsoft JhengHei"/>
+        <a:font script="Java" typeface="Javanese Text"/>
+        <a:font script="Lisu" typeface="Segoe UI"/>
+        <a:font script="Mymr" typeface="Myanmar Text"/>
+        <a:font script="Nkoo" typeface="Ebrima"/>
+        <a:font script="Olck" typeface="Nirmala UI"/>
+        <a:font script="Osma" typeface="Ebrima"/>
+        <a:font script="Phag" typeface="Phagspa"/>
+        <a:font script="Syrn" typeface="Estrangelo Edessa"/>
+        <a:font script="Syrj" typeface="Estrangelo Edessa"/>
+        <a:font script="Syre" typeface="Estrangelo Edessa"/>
+        <a:font script="Sora" typeface="Nirmala UI"/>
+        <a:font script="Tale" typeface="Microsoft Tai Le"/>
+        <a:font script="Talu" typeface="Microsoft New Tai Lue"/>
+        <a:font script="Tfng" typeface="Ebrima"/>
+      </a:minorFont>
+    </a:fontScheme>
+    <a:fmtScheme name="Office">
+      <a:fillStyleLst>
+        <a:solidFill>
+          <a:schemeClr val="phClr"/>
+        </a:solidFill>
+        <a:gradFill rotWithShape="1">
+          <a:gsLst>
+            <a:gs pos="0">
+              <a:schemeClr val="phClr">
+                <a:lumMod val="110000"/>
+                <a:satMod val="105000"/>
+                <a:tint val="67000"/>
+              </a:schemeClr>
+            </a:gs>
+            <a:gs pos="50000">
+              <a:schemeClr val="phClr">
+                <a:lumMod val="105000"/>
+                <a:satMod val="103000"/>
+                <a:tint val="73000"/>
+              </a:schemeClr>
+            </a:gs>
+            <a:gs pos="100000">
+              <a:schemeClr val="phClr">
+                <a:lumMod val="105000"/>
+                <a:satMod val="109000"/>
+                <a:tint val="81000"/>
+              </a:schemeClr>
+            </a:gs>
+          </a:gsLst>
+          <a:lin ang="5400000" scaled="0"/>
+        </a:gradFill>
+        <a:gradFill rotWithShape="1">
+          <a:gsLst>
+            <a:gs pos="0">
+              <a:schemeClr val="phClr">
+                <a:satMod val="103000"/>
+                <a:lumMod val="102000"/>
+                <a:tint val="94000"/>
+              </a:schemeClr>
+            </a:gs>
+            <a:gs pos="50000">
+              <a:schemeClr val="phClr">
+                <a:satMod val="110000"/>
+                <a:lumMod val="100000"/>
+                <a:shade val="100000"/>
+              </a:schemeClr>
+            </a:gs>
+            <a:gs pos="100000">
+              <a:schemeClr val="phClr">
+                <a:lumMod val="99000"/>
+                <a:satMod val="120000"/>
+                <a:shade val="78000"/>
+              </a:schemeClr>
+            </a:gs>
+          </a:gsLst>
+          <a:lin ang="5400000" scaled="0"/>
+        </a:gradFill>
+      </a:fillStyleLst>
+      <a:lnStyleLst>
+        <a:ln w="6350" cap="flat" cmpd="sng" algn="ctr">
+          <a:solidFill>
+            <a:schemeClr val="phClr"/>
+          </a:solidFill>
+          <a:prstDash val="solid"/>
+          <a:miter lim="800000"/>
+        </a:ln>
+        <a:ln w="12700" cap="flat" cmpd="sng" algn="ctr">
+          <a:solidFill>
+            <a:schemeClr val="phClr"/>
+          </a:solidFill>
+          <a:prstDash val="solid"/>
+          <a:miter lim="800000"/>
+        </a:ln>
+        <a:ln w="19050" cap="flat" cmpd="sng" algn="ctr">
+          <a:solidFill>
+            <a:schemeClr val="phClr"/>
+          </a:solidFill>
+          <a:prstDash val="solid"/>
+          <a:miter lim="800000"/>
+        </a:ln>
+      </a:lnStyleLst>
+      <a:effectStyleLst>
+        <a:effectStyle>
+          <a:effectLst/>
+        </a:effectStyle>
+        <a:effectStyle>
+          <a:effectLst/>
+        </a:effectStyle>
+        <a:effectStyle>
+          <a:effectLst>
+            <a:outerShdw blurRad="57150" dist="19050" dir="5400000" algn="ctr" rotWithShape="0">
+              <a:srgbClr val="000000">
+                <a:alpha val="63000"/>
+              </a:srgbClr>
+            </a:outerShdw>
+          </a:effectLst>
+        </a:effectStyle>
+      </a:effectStyleLst>
+      <a:bgFillStyleLst>
+        <a:solidFill>
+          <a:schemeClr val="phClr"/>
+        </a:solidFill>
+        <a:solidFill>
+          <a:schemeClr val="phClr">
+            <a:tint val="95000"/>
+            <a:satMod val="170000"/>
+          </a:schemeClr>
+        </a:solidFill>
+        <a:gradFill rotWithShape="1">
+          <a:gsLst>
+            <a:gs pos="0">
+              <a:schemeClr val="phClr">
+                <a:tint val="93000"/>
+                <a:satMod val="150000"/>
+                <a:shade val="98000"/>
+                <a:lumMod val="102000"/>
+              </a:schemeClr>
+            </a:gs>
+            <a:gs pos="50000">
+              <a:schemeClr val="phClr">
+                <a:tint val="98000"/>
+                <a:satMod val="130000"/>
+                <a:shade val="90000"/>
+                <a:lumMod val="103000"/>
+              </a:schemeClr>
+            </a:gs>
+            <a:gs pos="100000">
+              <a:schemeClr val="phClr">
+                <a:shade val="63000"/>
+                <a:satMod val="120000"/>
+              </a:schemeClr>
+            </a:gs>
+          </a:gsLst>
+          <a:lin ang="5400000" scaled="0"/>
+        </a:gradFill>
+      </a:bgFillStyleLst>
+    </a:fmtScheme>
+  </a:themeElements>
+  <a:objectDefaults/>
+  <a:extraClrSchemeLst/>
+  <a:extLst>
+    <a:ext uri="{05A4C25C-085E-4340-85A3-A5531E510DB2}">
+      <thm15:themeFamily xmlns:thm15="http://schemas.microsoft.com/office/thememl/2012/main" name="Office Theme" id="{62F939B6-93AF-4DB8-9C6B-D6C7DFDC589F}" vid="{4A3C46E8-61CC-4603-A589-7422A47A8E4A}"/>
+    </a:ext>
+  </a:extLst>
+</a:theme>
 </file>
--- a/docs/decks/L05.pptx
+++ b/docs/decks/L05.pptx
@@ -4,9 +4,6 @@
   <p:sldMasterIdLst>
     <p:sldMasterId id="2147483648" r:id="rId1"/>
   </p:sldMasterIdLst>
-  <p:notesMasterIdLst>
-    <p:notesMasterId r:id="rId30"/>
-  </p:notesMasterIdLst>
   <p:sldIdLst>
     <p:sldId id="256" r:id="rId2"/>
     <p:sldId id="257" r:id="rId3"/>
@@ -37,6 +34,9 @@
     <p:sldId id="282" r:id="rId28"/>
     <p:sldId id="283" r:id="rId29"/>
   </p:sldIdLst>
+  <p:notesMasterIdLst>
+    <p:notesMasterId r:id="rId30"/>
+  </p:notesMasterIdLst>
   <p:sldSz cx="12192000" cy="6858000"/>
   <p:notesSz cx="6858000" cy="12192000"/>
   <p:defaultTextStyle>
@@ -131,11 +131,6 @@
       </a:defRPr>
     </a:lvl9pPr>
   </p:defaultTextStyle>
-  <p:extLst>
-    <p:ext uri="{EFAFB233-063F-42B5-8137-9DF3F51BA10A}">
-      <p15:sldGuideLst xmlns:p15="http://schemas.microsoft.com/office/powerpoint/2012/main"/>
-    </p:ext>
-  </p:extLst>
 </p:presentation>
 </file>
 
@@ -161,10 +156,234 @@
           <a:chExt cx="0" cy="0"/>
         </a:xfrm>
       </p:grpSpPr>
+      <p:sp>
+        <p:nvSpPr>
+          <p:cNvPr id="2" name="Header Placeholder 1"/>
+          <p:cNvSpPr>
+            <a:spLocks noGrp="1"/>
+          </p:cNvSpPr>
+          <p:nvPr>
+            <p:ph type="hdr" sz="quarter"/>
+          </p:nvPr>
+        </p:nvSpPr>
+        <p:spPr>
+          <a:xfrm>
+            <a:off x="0" y="0"/>
+            <a:ext cx="2971800" cy="458788"/>
+          </a:xfrm>
+          <a:prstGeom prst="rect">
+            <a:avLst/>
+          </a:prstGeom>
+        </p:spPr>
+        <p:txBody>
+          <a:bodyPr vert="horz" lIns="91440" tIns="45720" rIns="91440" bIns="45720" rtlCol="0"/>
+          <a:lstStyle>
+            <a:lvl1pPr algn="l">
+              <a:defRPr sz="1200"/>
+            </a:lvl1pPr>
+          </a:lstStyle>
+          <a:p>
+            <a:endParaRPr lang="en-US"/>
+          </a:p>
+        </p:txBody>
+      </p:sp>
+      <p:sp>
+        <p:nvSpPr>
+          <p:cNvPr id="3" name="Date Placeholder 2"/>
+          <p:cNvSpPr>
+            <a:spLocks noGrp="1"/>
+          </p:cNvSpPr>
+          <p:nvPr>
+            <p:ph type="dt" idx="1"/>
+          </p:nvPr>
+        </p:nvSpPr>
+        <p:spPr>
+          <a:xfrm>
+            <a:off x="3884613" y="0"/>
+            <a:ext cx="2971800" cy="458788"/>
+          </a:xfrm>
+          <a:prstGeom prst="rect">
+            <a:avLst/>
+          </a:prstGeom>
+        </p:spPr>
+        <p:txBody>
+          <a:bodyPr vert="horz" lIns="91440" tIns="45720" rIns="91440" bIns="45720" rtlCol="0"/>
+          <a:lstStyle>
+            <a:lvl1pPr algn="r">
+              <a:defRPr sz="1200"/>
+            </a:lvl1pPr>
+          </a:lstStyle>
+          <a:p>
+            <a:fld id="{5282F153-3F37-0F45-9E97-73ACFA13230C}" type="datetimeFigureOut">
+              <a:rPr lang="en-US"/>
+              <a:t>7/23/19</a:t>
+            </a:fld>
+            <a:endParaRPr lang="en-US"/>
+          </a:p>
+        </p:txBody>
+      </p:sp>
+      <p:sp>
+        <p:nvSpPr>
+          <p:cNvPr id="4" name="Slide Image Placeholder 3"/>
+          <p:cNvSpPr>
+            <a:spLocks noGrp="1" noRot="1" noChangeAspect="1"/>
+          </p:cNvSpPr>
+          <p:nvPr>
+            <p:ph type="sldImg" idx="2"/>
+          </p:nvPr>
+        </p:nvSpPr>
+        <p:spPr>
+          <a:xfrm>
+            <a:off x="685800" y="1143000"/>
+            <a:ext cx="5486400" cy="3086100"/>
+          </a:xfrm>
+          <a:prstGeom prst="rect">
+            <a:avLst/>
+          </a:prstGeom>
+          <a:noFill/>
+          <a:ln w="12700">
+            <a:solidFill>
+              <a:prstClr val="black"/>
+            </a:solidFill>
+          </a:ln>
+        </p:spPr>
+        <p:txBody>
+          <a:bodyPr vert="horz" lIns="91440" tIns="45720" rIns="91440" bIns="45720" rtlCol="0" anchor="ctr"/>
+          <a:lstStyle/>
+          <a:p>
+            <a:endParaRPr lang="en-US"/>
+          </a:p>
+        </p:txBody>
+      </p:sp>
+      <p:sp>
+        <p:nvSpPr>
+          <p:cNvPr id="5" name="Notes Placeholder 4"/>
+          <p:cNvSpPr>
+            <a:spLocks noGrp="1"/>
+          </p:cNvSpPr>
+          <p:nvPr>
+            <p:ph type="body" sz="quarter" idx="3"/>
+          </p:nvPr>
+        </p:nvSpPr>
+        <p:spPr>
+          <a:xfrm>
+            <a:off x="685800" y="4400550"/>
+            <a:ext cx="5486400" cy="3600450"/>
+          </a:xfrm>
+          <a:prstGeom prst="rect">
+            <a:avLst/>
+          </a:prstGeom>
+        </p:spPr>
+        <p:txBody>
+          <a:bodyPr vert="horz" lIns="91440" tIns="45720" rIns="91440" bIns="45720" rtlCol="0"/>
+          <a:lstStyle/>
+          <a:p>
+            <a:pPr lvl="0"/>
+            <a:r>
+              <a:rPr lang="en-US"/>
+              <a:t>Click to edit Master text styles</a:t>
+            </a:r>
+          </a:p>
+          <a:p>
+            <a:pPr lvl="1"/>
+            <a:r>
+              <a:rPr lang="en-US"/>
+              <a:t>Second level</a:t>
+            </a:r>
+          </a:p>
+          <a:p>
+            <a:pPr lvl="2"/>
+            <a:r>
+              <a:rPr lang="en-US"/>
+              <a:t>Third level</a:t>
+            </a:r>
+          </a:p>
+          <a:p>
+            <a:pPr lvl="3"/>
+            <a:r>
+              <a:rPr lang="en-US"/>
+              <a:t>Fourth level</a:t>
+            </a:r>
+          </a:p>
+          <a:p>
+            <a:pPr lvl="4"/>
+            <a:r>
+              <a:rPr lang="en-US"/>
+              <a:t>Fifth level</a:t>
+            </a:r>
+          </a:p>
+        </p:txBody>
+      </p:sp>
+      <p:sp>
+        <p:nvSpPr>
+          <p:cNvPr id="6" name="Footer Placeholder 5"/>
+          <p:cNvSpPr>
+            <a:spLocks noGrp="1"/>
+          </p:cNvSpPr>
+          <p:nvPr>
+            <p:ph type="ftr" sz="quarter" idx="4"/>
+          </p:nvPr>
+        </p:nvSpPr>
+        <p:spPr>
+          <a:xfrm>
+            <a:off x="0" y="8685213"/>
+            <a:ext cx="2971800" cy="458787"/>
+          </a:xfrm>
+          <a:prstGeom prst="rect">
+            <a:avLst/>
+          </a:prstGeom>
+        </p:spPr>
+        <p:txBody>
+          <a:bodyPr vert="horz" lIns="91440" tIns="45720" rIns="91440" bIns="45720" rtlCol="0" anchor="b"/>
+          <a:lstStyle>
+            <a:lvl1pPr algn="l">
+              <a:defRPr sz="1200"/>
+            </a:lvl1pPr>
+          </a:lstStyle>
+          <a:p>
+            <a:endParaRPr lang="en-US"/>
+          </a:p>
+        </p:txBody>
+      </p:sp>
+      <p:sp>
+        <p:nvSpPr>
+          <p:cNvPr id="7" name="Slide Number Placeholder 6"/>
+          <p:cNvSpPr>
+            <a:spLocks noGrp="1"/>
+          </p:cNvSpPr>
+          <p:nvPr>
+            <p:ph type="sldNum" sz="quarter" idx="5"/>
+          </p:nvPr>
+        </p:nvSpPr>
+        <p:spPr>
+          <a:xfrm>
+            <a:off x="3884613" y="8685213"/>
+            <a:ext cx="2971800" cy="458787"/>
+          </a:xfrm>
+          <a:prstGeom prst="rect">
+            <a:avLst/>
+          </a:prstGeom>
+        </p:spPr>
+        <p:txBody>
+          <a:bodyPr vert="horz" lIns="91440" tIns="45720" rIns="91440" bIns="45720" rtlCol="0" anchor="b"/>
+          <a:lstStyle>
+            <a:lvl1pPr algn="r">
+              <a:defRPr sz="1200"/>
+            </a:lvl1pPr>
+          </a:lstStyle>
+          <a:p>
+            <a:fld id="{CE5E9CC1-C706-0F49-92D6-E571CC5EEA8F}" type="slidenum">
+              <a:rPr lang="en-US"/>
+              <a:t>‹#›</a:t>
+            </a:fld>
+            <a:endParaRPr lang="en-US"/>
+          </a:p>
+        </p:txBody>
+      </p:sp>
     </p:spTree>
     <p:extLst>
       <p:ext uri="{BB962C8B-B14F-4D97-AF65-F5344CB8AC3E}">
-        <p14:creationId xmlns:p14="http://schemas.microsoft.com/office/powerpoint/2010/main" val="2282826989"/>
+        <p14:creationId xmlns:p14="http://schemas.microsoft.com/office/powerpoint/2010/main" val="1024086991"/>
       </p:ext>
     </p:extLst>
   </p:cSld>
@@ -308,6 +527,10 @@
           <a:bodyPr/>
           <a:lstStyle/>
           <a:p>
+            <a:r>
+              <a:rPr lang="en-US" dirty="0"/>
+              <a:t/>
+            </a:r>
             <a:endParaRPr lang="en-US" dirty="0"/>
           </a:p>
         </p:txBody>
@@ -392,6 +615,10 @@
           <a:bodyPr/>
           <a:lstStyle/>
           <a:p>
+            <a:r>
+              <a:rPr lang="en-US" dirty="0"/>
+              <a:t/>
+            </a:r>
             <a:endParaRPr lang="en-US" dirty="0"/>
           </a:p>
         </p:txBody>
@@ -476,6 +703,10 @@
           <a:bodyPr/>
           <a:lstStyle/>
           <a:p>
+            <a:r>
+              <a:rPr lang="en-US" dirty="0"/>
+              <a:t/>
+            </a:r>
             <a:endParaRPr lang="en-US" dirty="0"/>
           </a:p>
         </p:txBody>
@@ -560,6 +791,10 @@
           <a:bodyPr/>
           <a:lstStyle/>
           <a:p>
+            <a:r>
+              <a:rPr lang="en-US" dirty="0"/>
+              <a:t/>
+            </a:r>
             <a:endParaRPr lang="en-US" dirty="0"/>
           </a:p>
         </p:txBody>
@@ -644,6 +879,10 @@
           <a:bodyPr/>
           <a:lstStyle/>
           <a:p>
+            <a:r>
+              <a:rPr lang="en-US" dirty="0"/>
+              <a:t/>
+            </a:r>
             <a:endParaRPr lang="en-US" dirty="0"/>
           </a:p>
         </p:txBody>
@@ -728,6 +967,10 @@
           <a:bodyPr/>
           <a:lstStyle/>
           <a:p>
+            <a:r>
+              <a:rPr lang="en-US" dirty="0"/>
+              <a:t/>
+            </a:r>
             <a:endParaRPr lang="en-US" dirty="0"/>
           </a:p>
         </p:txBody>
@@ -812,6 +1055,10 @@
           <a:bodyPr/>
           <a:lstStyle/>
           <a:p>
+            <a:r>
+              <a:rPr lang="en-US" dirty="0"/>
+              <a:t/>
+            </a:r>
             <a:endParaRPr lang="en-US" dirty="0"/>
           </a:p>
         </p:txBody>
@@ -896,6 +1143,10 @@
           <a:bodyPr/>
           <a:lstStyle/>
           <a:p>
+            <a:r>
+              <a:rPr lang="en-US" dirty="0"/>
+              <a:t/>
+            </a:r>
             <a:endParaRPr lang="en-US" dirty="0"/>
           </a:p>
         </p:txBody>
@@ -980,6 +1231,10 @@
           <a:bodyPr/>
           <a:lstStyle/>
           <a:p>
+            <a:r>
+              <a:rPr lang="en-US" dirty="0"/>
+              <a:t/>
+            </a:r>
             <a:endParaRPr lang="en-US" dirty="0"/>
           </a:p>
         </p:txBody>
@@ -1064,6 +1319,10 @@
           <a:bodyPr/>
           <a:lstStyle/>
           <a:p>
+            <a:r>
+              <a:rPr lang="en-US" dirty="0"/>
+              <a:t/>
+            </a:r>
             <a:endParaRPr lang="en-US" dirty="0"/>
           </a:p>
         </p:txBody>
@@ -1148,6 +1407,10 @@
           <a:bodyPr/>
           <a:lstStyle/>
           <a:p>
+            <a:r>
+              <a:rPr lang="en-US" dirty="0"/>
+              <a:t/>
+            </a:r>
             <a:endParaRPr lang="en-US" dirty="0"/>
           </a:p>
         </p:txBody>
@@ -1232,6 +1495,10 @@
           <a:bodyPr/>
           <a:lstStyle/>
           <a:p>
+            <a:r>
+              <a:rPr lang="en-US" dirty="0"/>
+              <a:t/>
+            </a:r>
             <a:endParaRPr lang="en-US" dirty="0"/>
           </a:p>
         </p:txBody>
@@ -1316,6 +1583,10 @@
           <a:bodyPr/>
           <a:lstStyle/>
           <a:p>
+            <a:r>
+              <a:rPr lang="en-US" dirty="0"/>
+              <a:t/>
+            </a:r>
             <a:endParaRPr lang="en-US" dirty="0"/>
           </a:p>
         </p:txBody>
@@ -1400,6 +1671,10 @@
           <a:bodyPr/>
           <a:lstStyle/>
           <a:p>
+            <a:r>
+              <a:rPr lang="en-US" dirty="0"/>
+              <a:t/>
+            </a:r>
             <a:endParaRPr lang="en-US" dirty="0"/>
           </a:p>
         </p:txBody>
@@ -1484,6 +1759,10 @@
           <a:bodyPr/>
           <a:lstStyle/>
           <a:p>
+            <a:r>
+              <a:rPr lang="en-US" dirty="0"/>
+              <a:t/>
+            </a:r>
             <a:endParaRPr lang="en-US" dirty="0"/>
           </a:p>
         </p:txBody>
@@ -1568,6 +1847,10 @@
           <a:bodyPr/>
           <a:lstStyle/>
           <a:p>
+            <a:r>
+              <a:rPr lang="en-US" dirty="0"/>
+              <a:t/>
+            </a:r>
             <a:endParaRPr lang="en-US" dirty="0"/>
           </a:p>
         </p:txBody>
@@ -1652,6 +1935,10 @@
           <a:bodyPr/>
           <a:lstStyle/>
           <a:p>
+            <a:r>
+              <a:rPr lang="en-US" dirty="0"/>
+              <a:t/>
+            </a:r>
             <a:endParaRPr lang="en-US" dirty="0"/>
           </a:p>
         </p:txBody>
@@ -1736,6 +2023,10 @@
           <a:bodyPr/>
           <a:lstStyle/>
           <a:p>
+            <a:r>
+              <a:rPr lang="en-US" dirty="0"/>
+              <a:t/>
+            </a:r>
             <a:endParaRPr lang="en-US" dirty="0"/>
           </a:p>
         </p:txBody>
@@ -1820,6 +2111,10 @@
           <a:bodyPr/>
           <a:lstStyle/>
           <a:p>
+            <a:r>
+              <a:rPr lang="en-US" dirty="0"/>
+              <a:t/>
+            </a:r>
             <a:endParaRPr lang="en-US" dirty="0"/>
           </a:p>
         </p:txBody>
@@ -1904,6 +2199,10 @@
           <a:bodyPr/>
           <a:lstStyle/>
           <a:p>
+            <a:r>
+              <a:rPr lang="en-US" dirty="0"/>
+              <a:t/>
+            </a:r>
             <a:endParaRPr lang="en-US" dirty="0"/>
           </a:p>
         </p:txBody>
@@ -1988,6 +2287,10 @@
           <a:bodyPr/>
           <a:lstStyle/>
           <a:p>
+            <a:r>
+              <a:rPr lang="en-US" dirty="0"/>
+              <a:t/>
+            </a:r>
             <a:endParaRPr lang="en-US" dirty="0"/>
           </a:p>
         </p:txBody>
@@ -2072,6 +2375,10 @@
           <a:bodyPr/>
           <a:lstStyle/>
           <a:p>
+            <a:r>
+              <a:rPr lang="en-US" dirty="0"/>
+              <a:t/>
+            </a:r>
             <a:endParaRPr lang="en-US" dirty="0"/>
           </a:p>
         </p:txBody>
@@ -2156,6 +2463,10 @@
           <a:bodyPr/>
           <a:lstStyle/>
           <a:p>
+            <a:r>
+              <a:rPr lang="en-US" dirty="0"/>
+              <a:t/>
+            </a:r>
             <a:endParaRPr lang="en-US" dirty="0"/>
           </a:p>
         </p:txBody>
@@ -2240,6 +2551,10 @@
           <a:bodyPr/>
           <a:lstStyle/>
           <a:p>
+            <a:r>
+              <a:rPr lang="en-US" dirty="0"/>
+              <a:t/>
+            </a:r>
             <a:endParaRPr lang="en-US" dirty="0"/>
           </a:p>
         </p:txBody>
@@ -2324,6 +2639,10 @@
           <a:bodyPr/>
           <a:lstStyle/>
           <a:p>
+            <a:r>
+              <a:rPr lang="en-US" dirty="0"/>
+              <a:t/>
+            </a:r>
             <a:endParaRPr lang="en-US" dirty="0"/>
           </a:p>
         </p:txBody>
@@ -2408,6 +2727,10 @@
           <a:bodyPr/>
           <a:lstStyle/>
           <a:p>
+            <a:r>
+              <a:rPr lang="en-US" dirty="0"/>
+              <a:t/>
+            </a:r>
             <a:endParaRPr lang="en-US" dirty="0"/>
           </a:p>
         </p:txBody>
@@ -2492,6 +2815,10 @@
           <a:bodyPr/>
           <a:lstStyle/>
           <a:p>
+            <a:r>
+              <a:rPr lang="en-US" dirty="0"/>
+              <a:t/>
+            </a:r>
             <a:endParaRPr lang="en-US" dirty="0"/>
           </a:p>
         </p:txBody>
@@ -2576,6 +2903,10 @@
           <a:bodyPr/>
           <a:lstStyle/>
           <a:p>
+            <a:r>
+              <a:rPr lang="en-US" dirty="0"/>
+              <a:t/>
+            </a:r>
             <a:endParaRPr lang="en-US" dirty="0"/>
           </a:p>
         </p:txBody>
@@ -2658,7 +2989,7 @@
           </a:prstGeom>
           <a:extLst>
             <a:ext uri="{C572A759-6A51-4108-AA02-DFA0A04FC94B}">
-              <ma14:wrappingTextBoxFlag xmlns="" xmlns:ma14="http://schemas.microsoft.com/office/mac/drawingml/2011/main" val="0"/>
+              <ma14:wrappingTextBoxFlag xmlns:ma14="http://schemas.microsoft.com/office/mac/drawingml/2011/main" val="0"/>
             </a:ext>
           </a:extLst>
         </p:spPr>
@@ -2679,8 +3010,8 @@
           <a:p>
             <a:pPr algn="l"/>
             <a:fld id="{F7021451-1387-4CA6-816F-3879F97B5CBC}" type="slidenum">
-              <a:rPr lang="en-US" b="0"/>
-              <a:t>‹#›</a:t>
+              <a:rPr b="0" lang="en-US"/>
+              <a:t>1000</a:t>
             </a:fld>
             <a:endParaRPr lang="en-US"/>
           </a:p>
@@ -2702,7 +3033,6 @@
         <a:solidFill>
           <a:srgbClr val="000000"/>
         </a:solidFill>
-        <a:effectLst/>
       </p:bgPr>
     </p:bg>
     <p:spTree>
@@ -2721,14 +3051,14 @@
       </p:grpSpPr>
       <p:pic>
         <p:nvPicPr>
-          <p:cNvPr id="2" name="Image 0" descr="preencoded.png"/>
+          <p:cNvPr id="2" name="Image 0" descr="preencoded.png">    </p:cNvPr>
           <p:cNvPicPr>
             <a:picLocks noChangeAspect="1"/>
           </p:cNvPicPr>
           <p:nvPr/>
         </p:nvPicPr>
         <p:blipFill>
-          <a:blip r:embed="rId2"/>
+          <a:blip r:embed="rId1"/>
           <a:stretch>
             <a:fillRect/>
           </a:stretch>
@@ -2759,7 +3089,6 @@
         <a:solidFill>
           <a:srgbClr val="000000"/>
         </a:solidFill>
-        <a:effectLst/>
       </p:bgPr>
     </p:bg>
     <p:spTree>
@@ -2778,14 +3107,14 @@
       </p:grpSpPr>
       <p:pic>
         <p:nvPicPr>
-          <p:cNvPr id="2" name="Image 0" descr="preencoded.png"/>
+          <p:cNvPr id="2" name="Image 0" descr="preencoded.png">    </p:cNvPr>
           <p:cNvPicPr>
             <a:picLocks noChangeAspect="1"/>
           </p:cNvPicPr>
           <p:nvPr/>
         </p:nvPicPr>
         <p:blipFill>
-          <a:blip r:embed="rId2"/>
+          <a:blip r:embed="rId1"/>
           <a:stretch>
             <a:fillRect/>
           </a:stretch>
@@ -2816,7 +3145,6 @@
         <a:solidFill>
           <a:srgbClr val="000000"/>
         </a:solidFill>
-        <a:effectLst/>
       </p:bgPr>
     </p:bg>
     <p:spTree>
@@ -2835,14 +3163,14 @@
       </p:grpSpPr>
       <p:pic>
         <p:nvPicPr>
-          <p:cNvPr id="2" name="Image 0" descr="preencoded.png"/>
+          <p:cNvPr id="2" name="Image 0" descr="preencoded.png">    </p:cNvPr>
           <p:cNvPicPr>
             <a:picLocks noChangeAspect="1"/>
           </p:cNvPicPr>
           <p:nvPr/>
         </p:nvPicPr>
         <p:blipFill>
-          <a:blip r:embed="rId2"/>
+          <a:blip r:embed="rId1"/>
           <a:stretch>
             <a:fillRect/>
           </a:stretch>
@@ -2868,11 +3196,6 @@
 <file path=ppt/slideMasters/slideMaster1.xml><?xml version="1.0" encoding="utf-8"?>
 <p:sldMaster xmlns:a="http://schemas.openxmlformats.org/drawingml/2006/main" xmlns:r="http://schemas.openxmlformats.org/officeDocument/2006/relationships" xmlns:p="http://schemas.openxmlformats.org/presentationml/2006/main">
   <p:cSld>
-    <p:bg>
-      <p:bgRef idx="1001">
-        <a:schemeClr val="bg1"/>
-      </p:bgRef>
-    </p:bg>
     <p:spTree>
       <p:nvGrpSpPr>
         <p:cNvPr id="1" name=""/>
@@ -2907,7 +3230,7 @@
           </a:prstGeom>
           <a:extLst>
             <a:ext uri="{C572A759-6A51-4108-AA02-DFA0A04FC94B}">
-              <ma14:wrappingTextBoxFlag xmlns="" xmlns:ma14="http://schemas.microsoft.com/office/mac/drawingml/2011/main" val="0"/>
+              <ma14:wrappingTextBoxFlag xmlns:ma14="http://schemas.microsoft.com/office/mac/drawingml/2011/main" val="0"/>
             </a:ext>
           </a:extLst>
         </p:spPr>
@@ -2928,8 +3251,8 @@
           <a:p>
             <a:pPr algn="l"/>
             <a:fld id="{F7021451-1387-4CA6-816F-3879F97B5CBC}" type="slidenum">
-              <a:rPr lang="en-US" b="0"/>
-              <a:t>‹#›</a:t>
+              <a:rPr b="0" lang="en-US"/>
+              <a:t>null</a:t>
             </a:fld>
             <a:endParaRPr lang="en-US"/>
           </a:p>
@@ -3236,11 +3559,11 @@
           <a:bodyPr wrap="square" lIns="0" tIns="0" rIns="0" bIns="0" rtlCol="0" anchor="ctr"/>
           <a:lstStyle/>
           <a:p>
-            <a:pPr marL="0" indent="0">
-              <a:buNone/>
-            </a:pPr>
-            <a:r>
-              <a:rPr lang="en-US" sz="1200" b="1" kern="0" spc="400" dirty="0">
+            <a:pPr indent="0" marL="0">
+              <a:buNone/>
+            </a:pPr>
+            <a:r>
+              <a:rPr lang="en-US" sz="1200" b="1" spc="400" kern="0" dirty="0">
                 <a:solidFill>
                   <a:srgbClr val="FFFFFF"/>
                 </a:solidFill>
@@ -3275,11 +3598,11 @@
           <a:bodyPr wrap="square" lIns="0" tIns="0" rIns="0" bIns="0" rtlCol="0" anchor="ctr"/>
           <a:lstStyle/>
           <a:p>
-            <a:pPr marL="0" indent="0">
-              <a:buNone/>
-            </a:pPr>
-            <a:r>
-              <a:rPr lang="en-US" sz="1200" b="1" kern="0" spc="300" dirty="0">
+            <a:pPr indent="0" marL="0">
+              <a:buNone/>
+            </a:pPr>
+            <a:r>
+              <a:rPr lang="en-US" sz="1200" b="1" spc="300" kern="0" dirty="0">
                 <a:solidFill>
                   <a:srgbClr val="C4B3F5"/>
                 </a:solidFill>
@@ -3314,7 +3637,7 @@
           <a:bodyPr wrap="square" lIns="0" tIns="0" rIns="0" bIns="0" rtlCol="0" anchor="t"/>
           <a:lstStyle/>
           <a:p>
-            <a:pPr marL="0" indent="0">
+            <a:pPr indent="0" marL="0">
               <a:lnSpc>
                 <a:spcPct val="102000"/>
               </a:lnSpc>
@@ -3334,7 +3657,7 @@
             <a:endParaRPr lang="en-US" sz="3600" dirty="0"/>
           </a:p>
           <a:p>
-            <a:pPr marL="0" indent="0">
+            <a:pPr indent="0" marL="0">
               <a:lnSpc>
                 <a:spcPct val="102000"/>
               </a:lnSpc>
@@ -3376,7 +3699,7 @@
           <a:bodyPr wrap="square" lIns="0" tIns="0" rIns="0" bIns="0" rtlCol="0" anchor="ctr"/>
           <a:lstStyle/>
           <a:p>
-            <a:pPr marL="0" indent="0">
+            <a:pPr indent="0" marL="0">
               <a:lnSpc>
                 <a:spcPct val="120000"/>
               </a:lnSpc>
@@ -3444,7 +3767,7 @@
           <a:bodyPr wrap="square" lIns="0" tIns="0" rIns="0" bIns="0" rtlCol="0" anchor="ctr"/>
           <a:lstStyle/>
           <a:p>
-            <a:pPr marL="0" indent="0" algn="ctr">
+            <a:pPr algn="ctr" indent="0" marL="0">
               <a:buNone/>
             </a:pPr>
             <a:r>
@@ -3509,7 +3832,7 @@
           <a:bodyPr wrap="square" lIns="0" tIns="0" rIns="0" bIns="0" rtlCol="0" anchor="ctr"/>
           <a:lstStyle/>
           <a:p>
-            <a:pPr marL="0" indent="0" algn="ctr">
+            <a:pPr algn="ctr" indent="0" marL="0">
               <a:buNone/>
             </a:pPr>
             <a:r>
@@ -3570,7 +3893,7 @@
           <a:bodyPr wrap="square" lIns="0" tIns="0" rIns="0" bIns="0" rtlCol="0" anchor="ctr"/>
           <a:lstStyle/>
           <a:p>
-            <a:pPr marL="0" indent="0" algn="ctr">
+            <a:pPr algn="ctr" indent="0" marL="0">
               <a:buNone/>
             </a:pPr>
             <a:r>
@@ -3635,7 +3958,7 @@
           <a:bodyPr wrap="square" lIns="0" tIns="0" rIns="0" bIns="0" rtlCol="0" anchor="ctr"/>
           <a:lstStyle/>
           <a:p>
-            <a:pPr marL="0" indent="0" algn="ctr">
+            <a:pPr algn="ctr" indent="0" marL="0">
               <a:buNone/>
             </a:pPr>
             <a:r>
@@ -3700,7 +4023,7 @@
           <a:bodyPr wrap="square" lIns="0" tIns="0" rIns="0" bIns="0" rtlCol="0" anchor="ctr"/>
           <a:lstStyle/>
           <a:p>
-            <a:pPr marL="0" indent="0" algn="ctr">
+            <a:pPr algn="ctr" indent="0" marL="0">
               <a:buNone/>
             </a:pPr>
             <a:r>
@@ -3765,7 +4088,7 @@
           <a:bodyPr wrap="square" lIns="0" tIns="0" rIns="0" bIns="0" rtlCol="0" anchor="ctr"/>
           <a:lstStyle/>
           <a:p>
-            <a:pPr marL="0" indent="0" algn="ctr">
+            <a:pPr algn="ctr" indent="0" marL="0">
               <a:buNone/>
             </a:pPr>
             <a:r>
@@ -3851,7 +4174,7 @@
           <a:bodyPr wrap="square" lIns="0" tIns="0" rIns="0" bIns="0" rtlCol="0" anchor="ctr"/>
           <a:lstStyle/>
           <a:p>
-            <a:pPr marL="0" indent="0" algn="l">
+            <a:pPr algn="l" indent="0" marL="0">
               <a:buNone/>
             </a:pPr>
             <a:r>
@@ -3890,7 +4213,7 @@
           <a:bodyPr wrap="square" lIns="0" tIns="0" rIns="0" bIns="0" rtlCol="0" anchor="ctr"/>
           <a:lstStyle/>
           <a:p>
-            <a:pPr marL="0" indent="0">
+            <a:pPr indent="0" marL="0">
               <a:buNone/>
             </a:pPr>
             <a:r>
@@ -3956,11 +4279,11 @@
           <a:bodyPr wrap="square" lIns="0" tIns="0" rIns="0" bIns="0" rtlCol="0" anchor="ctr"/>
           <a:lstStyle/>
           <a:p>
-            <a:pPr marL="0" indent="0" algn="ctr">
-              <a:buNone/>
-            </a:pPr>
-            <a:r>
-              <a:rPr lang="en-US" sz="900" b="1" kern="0" spc="100" dirty="0">
+            <a:pPr algn="ctr" indent="0" marL="0">
+              <a:buNone/>
+            </a:pPr>
+            <a:r>
+              <a:rPr lang="en-US" sz="900" b="1" spc="100" kern="0" dirty="0">
                 <a:solidFill>
                   <a:srgbClr val="5A05F4"/>
                 </a:solidFill>
@@ -3976,14 +4299,14 @@
       </p:sp>
       <p:pic>
         <p:nvPicPr>
-          <p:cNvPr id="7" name="Image 0" descr="preencoded.png"/>
+          <p:cNvPr id="7" name="Image 0" descr="preencoded.png">    </p:cNvPr>
           <p:cNvPicPr>
             <a:picLocks noChangeAspect="1"/>
           </p:cNvPicPr>
           <p:nvPr/>
         </p:nvPicPr>
         <p:blipFill>
-          <a:blip r:embed="rId3"/>
+          <a:blip r:embed="rId1"/>
           <a:stretch>
             <a:fillRect/>
           </a:stretch>
@@ -4046,7 +4369,7 @@
           <a:bodyPr wrap="square" lIns="0" tIns="0" rIns="0" bIns="0" rtlCol="0" anchor="t"/>
           <a:lstStyle/>
           <a:p>
-            <a:pPr marL="0" indent="0">
+            <a:pPr indent="0" marL="0">
               <a:lnSpc>
                 <a:spcPct val="130000"/>
               </a:lnSpc>
@@ -4066,7 +4389,7 @@
             <a:endParaRPr lang="en-US" sz="1150" dirty="0"/>
           </a:p>
           <a:p>
-            <a:pPr marL="0" indent="0">
+            <a:pPr indent="0" marL="0">
               <a:lnSpc>
                 <a:spcPct val="130000"/>
               </a:lnSpc>
@@ -4086,7 +4409,7 @@
             <a:endParaRPr lang="en-US" sz="1150" dirty="0"/>
           </a:p>
           <a:p>
-            <a:pPr marL="0" indent="0">
+            <a:pPr indent="0" marL="0">
               <a:lnSpc>
                 <a:spcPct val="130000"/>
               </a:lnSpc>
@@ -4106,7 +4429,7 @@
             <a:endParaRPr lang="en-US" sz="1150" dirty="0"/>
           </a:p>
           <a:p>
-            <a:pPr marL="0" indent="0">
+            <a:pPr indent="0" marL="0">
               <a:lnSpc>
                 <a:spcPct val="130000"/>
               </a:lnSpc>
@@ -4126,7 +4449,7 @@
             <a:endParaRPr lang="en-US" sz="1150" dirty="0"/>
           </a:p>
           <a:p>
-            <a:pPr marL="0" indent="0">
+            <a:pPr indent="0" marL="0">
               <a:lnSpc>
                 <a:spcPct val="130000"/>
               </a:lnSpc>
@@ -4146,7 +4469,7 @@
             <a:endParaRPr lang="en-US" sz="1150" dirty="0"/>
           </a:p>
           <a:p>
-            <a:pPr marL="0" indent="0">
+            <a:pPr indent="0" marL="0">
               <a:lnSpc>
                 <a:spcPct val="130000"/>
               </a:lnSpc>
@@ -4166,7 +4489,7 @@
             <a:endParaRPr lang="en-US" sz="1150" dirty="0"/>
           </a:p>
           <a:p>
-            <a:pPr marL="0" indent="0">
+            <a:pPr indent="0" marL="0">
               <a:lnSpc>
                 <a:spcPct val="130000"/>
               </a:lnSpc>
@@ -4186,7 +4509,7 @@
             <a:endParaRPr lang="en-US" sz="1150" dirty="0"/>
           </a:p>
           <a:p>
-            <a:pPr marL="0" indent="0">
+            <a:pPr indent="0" marL="0">
               <a:lnSpc>
                 <a:spcPct val="130000"/>
               </a:lnSpc>
@@ -4206,7 +4529,7 @@
             <a:endParaRPr lang="en-US" sz="1150" dirty="0"/>
           </a:p>
           <a:p>
-            <a:pPr marL="0" indent="0">
+            <a:pPr indent="0" marL="0">
               <a:lnSpc>
                 <a:spcPct val="130000"/>
               </a:lnSpc>
@@ -4290,7 +4613,7 @@
           <a:bodyPr wrap="square" lIns="0" tIns="0" rIns="0" bIns="0" rtlCol="0" anchor="ctr"/>
           <a:lstStyle/>
           <a:p>
-            <a:pPr marL="0" indent="0" algn="ctr">
+            <a:pPr algn="ctr" indent="0" marL="0">
               <a:buNone/>
             </a:pPr>
             <a:r>
@@ -4329,7 +4652,7 @@
           <a:bodyPr wrap="square" lIns="0" tIns="0" rIns="0" bIns="0" rtlCol="0" anchor="ctr"/>
           <a:lstStyle/>
           <a:p>
-            <a:pPr marL="0" indent="0">
+            <a:pPr indent="0" marL="0">
               <a:buNone/>
             </a:pPr>
             <a:r>
@@ -4368,7 +4691,7 @@
           <a:bodyPr wrap="square" lIns="0" tIns="0" rIns="0" bIns="0" rtlCol="0" anchor="t"/>
           <a:lstStyle/>
           <a:p>
-            <a:pPr marL="0" indent="0">
+            <a:pPr indent="0" marL="0">
               <a:lnSpc>
                 <a:spcPct val="108000"/>
               </a:lnSpc>
@@ -4452,7 +4775,7 @@
           <a:bodyPr wrap="square" lIns="0" tIns="0" rIns="0" bIns="0" rtlCol="0" anchor="ctr"/>
           <a:lstStyle/>
           <a:p>
-            <a:pPr marL="0" indent="0" algn="ctr">
+            <a:pPr algn="ctr" indent="0" marL="0">
               <a:buNone/>
             </a:pPr>
             <a:r>
@@ -4491,7 +4814,7 @@
           <a:bodyPr wrap="square" lIns="0" tIns="0" rIns="0" bIns="0" rtlCol="0" anchor="ctr"/>
           <a:lstStyle/>
           <a:p>
-            <a:pPr marL="0" indent="0">
+            <a:pPr indent="0" marL="0">
               <a:buNone/>
             </a:pPr>
             <a:r>
@@ -4530,7 +4853,7 @@
           <a:bodyPr wrap="square" lIns="0" tIns="0" rIns="0" bIns="0" rtlCol="0" anchor="t"/>
           <a:lstStyle/>
           <a:p>
-            <a:pPr marL="0" indent="0">
+            <a:pPr indent="0" marL="0">
               <a:lnSpc>
                 <a:spcPct val="108000"/>
               </a:lnSpc>
@@ -4614,7 +4937,7 @@
           <a:bodyPr wrap="square" lIns="0" tIns="0" rIns="0" bIns="0" rtlCol="0" anchor="ctr"/>
           <a:lstStyle/>
           <a:p>
-            <a:pPr marL="0" indent="0" algn="ctr">
+            <a:pPr algn="ctr" indent="0" marL="0">
               <a:buNone/>
             </a:pPr>
             <a:r>
@@ -4653,7 +4976,7 @@
           <a:bodyPr wrap="square" lIns="0" tIns="0" rIns="0" bIns="0" rtlCol="0" anchor="ctr"/>
           <a:lstStyle/>
           <a:p>
-            <a:pPr marL="0" indent="0">
+            <a:pPr indent="0" marL="0">
               <a:buNone/>
             </a:pPr>
             <a:r>
@@ -4692,7 +5015,7 @@
           <a:bodyPr wrap="square" lIns="0" tIns="0" rIns="0" bIns="0" rtlCol="0" anchor="t"/>
           <a:lstStyle/>
           <a:p>
-            <a:pPr marL="0" indent="0">
+            <a:pPr indent="0" marL="0">
               <a:lnSpc>
                 <a:spcPct val="108000"/>
               </a:lnSpc>
@@ -4733,7 +5056,7 @@
           </a:prstGeom>
           <a:extLst>
             <a:ext uri="{C572A759-6A51-4108-AA02-DFA0A04FC94B}">
-              <ma14:wrappingTextBoxFlag xmlns="" xmlns:ma14="http://schemas.microsoft.com/office/mac/drawingml/2011/main" val="0"/>
+              <ma14:wrappingTextBoxFlag xmlns:ma14="http://schemas.microsoft.com/office/mac/drawingml/2011/main" val="0"/>
             </a:ext>
           </a:extLst>
         </p:spPr>
@@ -4754,7 +5077,7 @@
           <a:p>
             <a:pPr algn="l"/>
             <a:fld id="{F7021451-1387-4CA6-816F-3879F97B5CBC}" type="slidenum">
-              <a:rPr lang="en-US" b="0"/>
+              <a:rPr b="0" lang="en-US"/>
               <a:t>10</a:t>
             </a:fld>
             <a:endParaRPr lang="en-US"/>
@@ -4829,7 +5152,7 @@
           <a:bodyPr wrap="square" lIns="0" tIns="0" rIns="0" bIns="0" rtlCol="0" anchor="ctr"/>
           <a:lstStyle/>
           <a:p>
-            <a:pPr marL="0" indent="0" algn="l">
+            <a:pPr algn="l" indent="0" marL="0">
               <a:buNone/>
             </a:pPr>
             <a:r>
@@ -4868,7 +5191,7 @@
           <a:bodyPr wrap="square" lIns="0" tIns="0" rIns="0" bIns="0" rtlCol="0" anchor="ctr"/>
           <a:lstStyle/>
           <a:p>
-            <a:pPr marL="0" indent="0">
+            <a:pPr indent="0" marL="0">
               <a:buNone/>
             </a:pPr>
             <a:r>
@@ -4934,11 +5257,11 @@
           <a:bodyPr wrap="square" lIns="0" tIns="0" rIns="0" bIns="0" rtlCol="0" anchor="ctr"/>
           <a:lstStyle/>
           <a:p>
-            <a:pPr marL="0" indent="0" algn="ctr">
-              <a:buNone/>
-            </a:pPr>
-            <a:r>
-              <a:rPr lang="en-US" sz="900" b="1" kern="0" spc="100" dirty="0">
+            <a:pPr algn="ctr" indent="0" marL="0">
+              <a:buNone/>
+            </a:pPr>
+            <a:r>
+              <a:rPr lang="en-US" sz="900" b="1" spc="100" kern="0" dirty="0">
                 <a:solidFill>
                   <a:srgbClr val="5A05F4"/>
                 </a:solidFill>
@@ -4954,14 +5277,14 @@
       </p:sp>
       <p:pic>
         <p:nvPicPr>
-          <p:cNvPr id="7" name="Image 0" descr="preencoded.png"/>
+          <p:cNvPr id="7" name="Image 0" descr="preencoded.png">    </p:cNvPr>
           <p:cNvPicPr>
             <a:picLocks noChangeAspect="1"/>
           </p:cNvPicPr>
           <p:nvPr/>
         </p:nvPicPr>
         <p:blipFill>
-          <a:blip r:embed="rId3"/>
+          <a:blip r:embed="rId1"/>
           <a:stretch>
             <a:fillRect/>
           </a:stretch>
@@ -5039,7 +5362,7 @@
           <a:bodyPr wrap="square" lIns="0" tIns="0" rIns="0" bIns="0" rtlCol="0" anchor="ctr"/>
           <a:lstStyle/>
           <a:p>
-            <a:pPr marL="0" indent="0" algn="ctr">
+            <a:pPr algn="ctr" indent="0" marL="0">
               <a:buNone/>
             </a:pPr>
             <a:r>
@@ -5078,7 +5401,7 @@
           <a:bodyPr wrap="square" lIns="0" tIns="0" rIns="0" bIns="0" rtlCol="0" anchor="ctr"/>
           <a:lstStyle/>
           <a:p>
-            <a:pPr marL="0" indent="0">
+            <a:pPr indent="0" marL="0">
               <a:buNone/>
             </a:pPr>
             <a:r>
@@ -5117,7 +5440,7 @@
           <a:bodyPr wrap="square" lIns="0" tIns="0" rIns="0" bIns="0" rtlCol="0" anchor="t"/>
           <a:lstStyle/>
           <a:p>
-            <a:pPr marL="0" indent="0">
+            <a:pPr indent="0" marL="0">
               <a:lnSpc>
                 <a:spcPct val="108000"/>
               </a:lnSpc>
@@ -5201,7 +5524,7 @@
           <a:bodyPr wrap="square" lIns="0" tIns="0" rIns="0" bIns="0" rtlCol="0" anchor="ctr"/>
           <a:lstStyle/>
           <a:p>
-            <a:pPr marL="0" indent="0" algn="ctr">
+            <a:pPr algn="ctr" indent="0" marL="0">
               <a:buNone/>
             </a:pPr>
             <a:r>
@@ -5240,7 +5563,7 @@
           <a:bodyPr wrap="square" lIns="0" tIns="0" rIns="0" bIns="0" rtlCol="0" anchor="ctr"/>
           <a:lstStyle/>
           <a:p>
-            <a:pPr marL="0" indent="0">
+            <a:pPr indent="0" marL="0">
               <a:buNone/>
             </a:pPr>
             <a:r>
@@ -5279,7 +5602,7 @@
           <a:bodyPr wrap="square" lIns="0" tIns="0" rIns="0" bIns="0" rtlCol="0" anchor="t"/>
           <a:lstStyle/>
           <a:p>
-            <a:pPr marL="0" indent="0">
+            <a:pPr indent="0" marL="0">
               <a:lnSpc>
                 <a:spcPct val="108000"/>
               </a:lnSpc>
@@ -5363,7 +5686,7 @@
           <a:bodyPr wrap="square" lIns="0" tIns="0" rIns="0" bIns="0" rtlCol="0" anchor="ctr"/>
           <a:lstStyle/>
           <a:p>
-            <a:pPr marL="0" indent="0" algn="ctr">
+            <a:pPr algn="ctr" indent="0" marL="0">
               <a:buNone/>
             </a:pPr>
             <a:r>
@@ -5402,7 +5725,7 @@
           <a:bodyPr wrap="square" lIns="0" tIns="0" rIns="0" bIns="0" rtlCol="0" anchor="ctr"/>
           <a:lstStyle/>
           <a:p>
-            <a:pPr marL="0" indent="0">
+            <a:pPr indent="0" marL="0">
               <a:buNone/>
             </a:pPr>
             <a:r>
@@ -5441,7 +5764,7 @@
           <a:bodyPr wrap="square" lIns="0" tIns="0" rIns="0" bIns="0" rtlCol="0" anchor="t"/>
           <a:lstStyle/>
           <a:p>
-            <a:pPr marL="0" indent="0">
+            <a:pPr indent="0" marL="0">
               <a:lnSpc>
                 <a:spcPct val="108000"/>
               </a:lnSpc>
@@ -5471,7 +5794,7 @@
         <p:spPr>
           <a:xfrm>
             <a:off x="566928" y="4069080"/>
-            <a:ext cx="10927080" cy="1234440"/>
+            <a:ext cx="11064240" cy="1234440"/>
           </a:xfrm>
           <a:prstGeom prst="roundRect">
             <a:avLst>
@@ -5505,7 +5828,7 @@
           <a:bodyPr wrap="square" lIns="0" tIns="0" rIns="0" bIns="0" rtlCol="0" anchor="ctr"/>
           <a:lstStyle/>
           <a:p>
-            <a:pPr marL="0" indent="0">
+            <a:pPr indent="0" marL="0">
               <a:lnSpc>
                 <a:spcPct val="112000"/>
               </a:lnSpc>
@@ -5546,7 +5869,7 @@
           </a:prstGeom>
           <a:extLst>
             <a:ext uri="{C572A759-6A51-4108-AA02-DFA0A04FC94B}">
-              <ma14:wrappingTextBoxFlag xmlns="" xmlns:ma14="http://schemas.microsoft.com/office/mac/drawingml/2011/main" val="0"/>
+              <ma14:wrappingTextBoxFlag xmlns:ma14="http://schemas.microsoft.com/office/mac/drawingml/2011/main" val="0"/>
             </a:ext>
           </a:extLst>
         </p:spPr>
@@ -5567,7 +5890,7 @@
           <a:p>
             <a:pPr algn="l"/>
             <a:fld id="{F7021451-1387-4CA6-816F-3879F97B5CBC}" type="slidenum">
-              <a:rPr lang="en-US" b="0"/>
+              <a:rPr b="0" lang="en-US"/>
               <a:t>11</a:t>
             </a:fld>
             <a:endParaRPr lang="en-US"/>
@@ -5642,7 +5965,7 @@
           <a:bodyPr wrap="square" lIns="0" tIns="0" rIns="0" bIns="0" rtlCol="0" anchor="ctr"/>
           <a:lstStyle/>
           <a:p>
-            <a:pPr marL="0" indent="0" algn="l">
+            <a:pPr algn="l" indent="0" marL="0">
               <a:buNone/>
             </a:pPr>
             <a:r>
@@ -5681,7 +6004,7 @@
           <a:bodyPr wrap="square" lIns="0" tIns="0" rIns="0" bIns="0" rtlCol="0" anchor="ctr"/>
           <a:lstStyle/>
           <a:p>
-            <a:pPr marL="0" indent="0">
+            <a:pPr indent="0" marL="0">
               <a:buNone/>
             </a:pPr>
             <a:r>
@@ -5747,11 +6070,11 @@
           <a:bodyPr wrap="square" lIns="0" tIns="0" rIns="0" bIns="0" rtlCol="0" anchor="ctr"/>
           <a:lstStyle/>
           <a:p>
-            <a:pPr marL="0" indent="0" algn="ctr">
-              <a:buNone/>
-            </a:pPr>
-            <a:r>
-              <a:rPr lang="en-US" sz="900" b="1" kern="0" spc="100" dirty="0">
+            <a:pPr algn="ctr" indent="0" marL="0">
+              <a:buNone/>
+            </a:pPr>
+            <a:r>
+              <a:rPr lang="en-US" sz="900" b="1" spc="100" kern="0" dirty="0">
                 <a:solidFill>
                   <a:srgbClr val="5A05F4"/>
                 </a:solidFill>
@@ -5767,14 +6090,14 @@
       </p:sp>
       <p:pic>
         <p:nvPicPr>
-          <p:cNvPr id="7" name="Image 0" descr="preencoded.png"/>
+          <p:cNvPr id="7" name="Image 0" descr="preencoded.png">    </p:cNvPr>
           <p:cNvPicPr>
             <a:picLocks noChangeAspect="1"/>
           </p:cNvPicPr>
           <p:nvPr/>
         </p:nvPicPr>
         <p:blipFill>
-          <a:blip r:embed="rId3"/>
+          <a:blip r:embed="rId1"/>
           <a:stretch>
             <a:fillRect/>
           </a:stretch>
@@ -5832,7 +6155,7 @@
           <a:bodyPr wrap="square" lIns="0" tIns="0" rIns="0" bIns="0" rtlCol="0" anchor="ctr"/>
           <a:lstStyle/>
           <a:p>
-            <a:pPr marL="0" indent="0">
+            <a:pPr indent="0" marL="0">
               <a:buNone/>
             </a:pPr>
             <a:r>
@@ -5871,7 +6194,7 @@
           <a:bodyPr wrap="square" lIns="0" tIns="0" rIns="0" bIns="0" rtlCol="0" anchor="t"/>
           <a:lstStyle/>
           <a:p>
-            <a:pPr marL="0" indent="0">
+            <a:pPr indent="0" marL="0">
               <a:buNone/>
             </a:pPr>
             <a:r>
@@ -5932,7 +6255,7 @@
           <a:bodyPr wrap="square" lIns="0" tIns="0" rIns="0" bIns="0" rtlCol="0" anchor="ctr"/>
           <a:lstStyle/>
           <a:p>
-            <a:pPr marL="0" indent="0">
+            <a:pPr indent="0" marL="0">
               <a:buNone/>
             </a:pPr>
             <a:r>
@@ -5971,7 +6294,7 @@
           <a:bodyPr wrap="square" lIns="0" tIns="0" rIns="0" bIns="0" rtlCol="0" anchor="t"/>
           <a:lstStyle/>
           <a:p>
-            <a:pPr marL="0" indent="0">
+            <a:pPr indent="0" marL="0">
               <a:lnSpc>
                 <a:spcPct val="108000"/>
               </a:lnSpc>
@@ -6035,7 +6358,7 @@
           <a:bodyPr wrap="square" lIns="0" tIns="0" rIns="0" bIns="0" rtlCol="0" anchor="ctr"/>
           <a:lstStyle/>
           <a:p>
-            <a:pPr marL="0" indent="0">
+            <a:pPr indent="0" marL="0">
               <a:buNone/>
             </a:pPr>
             <a:r>
@@ -6074,7 +6397,7 @@
           <a:bodyPr wrap="square" lIns="0" tIns="0" rIns="0" bIns="0" rtlCol="0" anchor="t"/>
           <a:lstStyle/>
           <a:p>
-            <a:pPr marL="0" indent="0">
+            <a:pPr indent="0" marL="0">
               <a:lnSpc>
                 <a:spcPct val="108000"/>
               </a:lnSpc>
@@ -6138,7 +6461,7 @@
           <a:bodyPr wrap="square" lIns="0" tIns="0" rIns="0" bIns="0" rtlCol="0" anchor="ctr"/>
           <a:lstStyle/>
           <a:p>
-            <a:pPr marL="0" indent="0">
+            <a:pPr indent="0" marL="0">
               <a:buNone/>
             </a:pPr>
             <a:r>
@@ -6164,8 +6487,8 @@
         </p:nvSpPr>
         <p:spPr>
           <a:xfrm>
-            <a:off x="9363456" y="2263806"/>
-            <a:ext cx="2020824" cy="735426"/>
+            <a:off x="9363456" y="2423160"/>
+            <a:ext cx="2020824" cy="576072"/>
           </a:xfrm>
           <a:prstGeom prst="rect">
             <a:avLst/>
@@ -6177,7 +6500,7 @@
           <a:bodyPr wrap="square" lIns="0" tIns="0" rIns="0" bIns="0" rtlCol="0" anchor="t"/>
           <a:lstStyle/>
           <a:p>
-            <a:pPr marL="0" indent="0">
+            <a:pPr indent="0" marL="0">
               <a:lnSpc>
                 <a:spcPct val="108000"/>
               </a:lnSpc>
@@ -6206,8 +6529,8 @@
         </p:nvSpPr>
         <p:spPr>
           <a:xfrm>
-            <a:off x="566928" y="3517697"/>
-            <a:ext cx="11018520" cy="1005840"/>
+            <a:off x="566928" y="3703320"/>
+            <a:ext cx="11064240" cy="1005840"/>
           </a:xfrm>
           <a:prstGeom prst="roundRect">
             <a:avLst>
@@ -6228,7 +6551,7 @@
         </p:nvSpPr>
         <p:spPr>
           <a:xfrm>
-            <a:off x="786384" y="3645713"/>
+            <a:off x="786384" y="3831336"/>
             <a:ext cx="10625328" cy="219456"/>
           </a:xfrm>
           <a:prstGeom prst="rect">
@@ -6241,11 +6564,11 @@
           <a:bodyPr wrap="square" lIns="0" tIns="0" rIns="0" bIns="0" rtlCol="0" anchor="ctr"/>
           <a:lstStyle/>
           <a:p>
-            <a:pPr marL="0" indent="0">
-              <a:buNone/>
-            </a:pPr>
-            <a:r>
-              <a:rPr lang="en-US" sz="950" b="1" kern="0" spc="150" dirty="0">
+            <a:pPr indent="0" marL="0">
+              <a:buNone/>
+            </a:pPr>
+            <a:r>
+              <a:rPr lang="en-US" sz="950" b="1" spc="150" kern="0" dirty="0">
                 <a:solidFill>
                   <a:srgbClr val="FFFFFF"/>
                 </a:solidFill>
@@ -6267,7 +6590,7 @@
         </p:nvSpPr>
         <p:spPr>
           <a:xfrm>
-            <a:off x="786384" y="3901745"/>
+            <a:off x="786384" y="4087368"/>
             <a:ext cx="10625328" cy="493776"/>
           </a:xfrm>
           <a:prstGeom prst="rect">
@@ -6280,7 +6603,7 @@
           <a:bodyPr wrap="square" lIns="0" tIns="0" rIns="0" bIns="0" rtlCol="0" anchor="ctr"/>
           <a:lstStyle/>
           <a:p>
-            <a:pPr marL="0" indent="0">
+            <a:pPr indent="0" marL="0">
               <a:lnSpc>
                 <a:spcPct val="112000"/>
               </a:lnSpc>
@@ -6310,7 +6633,7 @@
         <p:spPr>
           <a:xfrm>
             <a:off x="566928" y="4892040"/>
-            <a:ext cx="11018520" cy="1005840"/>
+            <a:ext cx="11064240" cy="1005840"/>
           </a:xfrm>
           <a:prstGeom prst="roundRect">
             <a:avLst>
@@ -6330,30 +6653,89 @@
       </p:sp>
       <p:sp>
         <p:nvSpPr>
-          <p:cNvPr id="24" name="Text 21"/>
-          <p:cNvSpPr/>
-          <p:nvPr/>
-        </p:nvSpPr>
-        <p:spPr>
-          <a:xfrm>
-            <a:off x="786384" y="5020056"/>
-            <a:ext cx="10625328" cy="219456"/>
-          </a:xfrm>
-          <a:prstGeom prst="rect">
-            <a:avLst/>
-          </a:prstGeom>
-          <a:noFill/>
-          <a:ln/>
-        </p:spPr>
-        <p:txBody>
-          <a:bodyPr wrap="square" lIns="0" tIns="0" rIns="0" bIns="0" rtlCol="0" anchor="ctr"/>
-          <a:lstStyle/>
-          <a:p>
-            <a:pPr marL="0" indent="0">
-              <a:buNone/>
-            </a:pPr>
-            <a:r>
-              <a:rPr lang="en-US" sz="950" b="1" kern="0" spc="150" dirty="0">
+          <p:cNvPr id="24" name="Shape 21"/>
+          <p:cNvSpPr/>
+          <p:nvPr/>
+        </p:nvSpPr>
+        <p:spPr>
+          <a:xfrm>
+            <a:off x="749808" y="5239512"/>
+            <a:ext cx="310896" cy="310896"/>
+          </a:xfrm>
+          <a:prstGeom prst="ellipse">
+            <a:avLst/>
+          </a:prstGeom>
+          <a:solidFill>
+            <a:srgbClr val="1A4FBF"/>
+          </a:solidFill>
+          <a:ln/>
+        </p:spPr>
+      </p:sp>
+      <p:sp>
+        <p:nvSpPr>
+          <p:cNvPr id="25" name="Text 22"/>
+          <p:cNvSpPr/>
+          <p:nvPr/>
+        </p:nvSpPr>
+        <p:spPr>
+          <a:xfrm>
+            <a:off x="749808" y="5239512"/>
+            <a:ext cx="310896" cy="310896"/>
+          </a:xfrm>
+          <a:prstGeom prst="rect">
+            <a:avLst/>
+          </a:prstGeom>
+          <a:noFill/>
+          <a:ln/>
+        </p:spPr>
+        <p:txBody>
+          <a:bodyPr wrap="square" lIns="0" tIns="0" rIns="0" bIns="0" rtlCol="0" anchor="ctr"/>
+          <a:lstStyle/>
+          <a:p>
+            <a:pPr algn="ctr" indent="0" marL="0">
+              <a:buNone/>
+            </a:pPr>
+            <a:r>
+              <a:rPr lang="en-US" sz="1200" b="1" dirty="0">
+                <a:solidFill>
+                  <a:srgbClr val="FFFFFF"/>
+                </a:solidFill>
+                <a:latin typeface="Arial" pitchFamily="34" charset="0"/>
+                <a:ea typeface="Arial" pitchFamily="34" charset="-122"/>
+                <a:cs typeface="Arial" pitchFamily="34" charset="-120"/>
+              </a:rPr>
+              <a:t>★</a:t>
+            </a:r>
+            <a:endParaRPr lang="en-US" sz="1200" dirty="0"/>
+          </a:p>
+        </p:txBody>
+      </p:sp>
+      <p:sp>
+        <p:nvSpPr>
+          <p:cNvPr id="26" name="Text 23"/>
+          <p:cNvSpPr/>
+          <p:nvPr/>
+        </p:nvSpPr>
+        <p:spPr>
+          <a:xfrm>
+            <a:off x="1243584" y="5020056"/>
+            <a:ext cx="10168128" cy="219456"/>
+          </a:xfrm>
+          <a:prstGeom prst="rect">
+            <a:avLst/>
+          </a:prstGeom>
+          <a:noFill/>
+          <a:ln/>
+        </p:spPr>
+        <p:txBody>
+          <a:bodyPr wrap="square" lIns="0" tIns="0" rIns="0" bIns="0" rtlCol="0" anchor="ctr"/>
+          <a:lstStyle/>
+          <a:p>
+            <a:pPr indent="0" marL="0">
+              <a:buNone/>
+            </a:pPr>
+            <a:r>
+              <a:rPr lang="en-US" sz="950" b="1" spc="150" kern="0" dirty="0">
                 <a:solidFill>
                   <a:srgbClr val="1A4FBF"/>
                 </a:solidFill>
@@ -6361,7 +6743,7 @@
                 <a:ea typeface="Courier New" pitchFamily="34" charset="-122"/>
                 <a:cs typeface="Courier New" pitchFamily="34" charset="-120"/>
               </a:rPr>
-              <a:t>ЛАЙФХАК</a:t>
+              <a:t>ПОРАДА</a:t>
             </a:r>
             <a:endParaRPr lang="en-US" sz="950" dirty="0"/>
           </a:p>
@@ -6369,26 +6751,26 @@
       </p:sp>
       <p:sp>
         <p:nvSpPr>
-          <p:cNvPr id="25" name="Text 22"/>
-          <p:cNvSpPr/>
-          <p:nvPr/>
-        </p:nvSpPr>
-        <p:spPr>
-          <a:xfrm>
-            <a:off x="786384" y="5276088"/>
-            <a:ext cx="10625328" cy="493776"/>
-          </a:xfrm>
-          <a:prstGeom prst="rect">
-            <a:avLst/>
-          </a:prstGeom>
-          <a:noFill/>
-          <a:ln/>
-        </p:spPr>
-        <p:txBody>
-          <a:bodyPr wrap="square" lIns="0" tIns="0" rIns="0" bIns="0" rtlCol="0" anchor="ctr"/>
-          <a:lstStyle/>
-          <a:p>
-            <a:pPr marL="0" indent="0">
+          <p:cNvPr id="27" name="Text 24"/>
+          <p:cNvSpPr/>
+          <p:nvPr/>
+        </p:nvSpPr>
+        <p:spPr>
+          <a:xfrm>
+            <a:off x="1243584" y="5276088"/>
+            <a:ext cx="10168128" cy="493776"/>
+          </a:xfrm>
+          <a:prstGeom prst="rect">
+            <a:avLst/>
+          </a:prstGeom>
+          <a:noFill/>
+          <a:ln/>
+        </p:spPr>
+        <p:txBody>
+          <a:bodyPr wrap="square" lIns="0" tIns="0" rIns="0" bIns="0" rtlCol="0" anchor="ctr"/>
+          <a:lstStyle/>
+          <a:p>
+            <a:pPr indent="0" marL="0">
               <a:lnSpc>
                 <a:spcPct val="112000"/>
               </a:lnSpc>
@@ -6411,7 +6793,7 @@
       </p:sp>
       <p:sp>
         <p:nvSpPr>
-          <p:cNvPr id="26" name="Slide Number Placeholder 0"/>
+          <p:cNvPr id="25" name="Slide Number Placeholder 0"/>
           <p:cNvSpPr>
             <a:spLocks noGrp="1"/>
           </p:cNvSpPr>
@@ -6429,7 +6811,7 @@
           </a:prstGeom>
           <a:extLst>
             <a:ext uri="{C572A759-6A51-4108-AA02-DFA0A04FC94B}">
-              <ma14:wrappingTextBoxFlag xmlns="" xmlns:ma14="http://schemas.microsoft.com/office/mac/drawingml/2011/main" val="0"/>
+              <ma14:wrappingTextBoxFlag xmlns:ma14="http://schemas.microsoft.com/office/mac/drawingml/2011/main" val="0"/>
             </a:ext>
           </a:extLst>
         </p:spPr>
@@ -6450,7 +6832,7 @@
           <a:p>
             <a:pPr algn="l"/>
             <a:fld id="{F7021451-1387-4CA6-816F-3879F97B5CBC}" type="slidenum">
-              <a:rPr lang="en-US" b="0"/>
+              <a:rPr b="0" lang="en-US"/>
               <a:t>12</a:t>
             </a:fld>
             <a:endParaRPr lang="en-US"/>
@@ -6525,7 +6907,7 @@
           <a:bodyPr wrap="square" lIns="0" tIns="0" rIns="0" bIns="0" rtlCol="0" anchor="ctr"/>
           <a:lstStyle/>
           <a:p>
-            <a:pPr marL="0" indent="0" algn="l">
+            <a:pPr algn="l" indent="0" marL="0">
               <a:buNone/>
             </a:pPr>
             <a:r>
@@ -6564,7 +6946,7 @@
           <a:bodyPr wrap="square" lIns="0" tIns="0" rIns="0" bIns="0" rtlCol="0" anchor="ctr"/>
           <a:lstStyle/>
           <a:p>
-            <a:pPr marL="0" indent="0">
+            <a:pPr indent="0" marL="0">
               <a:buNone/>
             </a:pPr>
             <a:r>
@@ -6630,11 +7012,11 @@
           <a:bodyPr wrap="square" lIns="0" tIns="0" rIns="0" bIns="0" rtlCol="0" anchor="ctr"/>
           <a:lstStyle/>
           <a:p>
-            <a:pPr marL="0" indent="0" algn="ctr">
-              <a:buNone/>
-            </a:pPr>
-            <a:r>
-              <a:rPr lang="en-US" sz="900" b="1" kern="0" spc="100" dirty="0">
+            <a:pPr algn="ctr" indent="0" marL="0">
+              <a:buNone/>
+            </a:pPr>
+            <a:r>
+              <a:rPr lang="en-US" sz="900" b="1" spc="100" kern="0" dirty="0">
                 <a:solidFill>
                   <a:srgbClr val="5A05F4"/>
                 </a:solidFill>
@@ -6650,14 +7032,14 @@
       </p:sp>
       <p:pic>
         <p:nvPicPr>
-          <p:cNvPr id="7" name="Image 0" descr="preencoded.png"/>
+          <p:cNvPr id="7" name="Image 0" descr="preencoded.png">    </p:cNvPr>
           <p:cNvPicPr>
             <a:picLocks noChangeAspect="1"/>
           </p:cNvPicPr>
           <p:nvPr/>
         </p:nvPicPr>
         <p:blipFill>
-          <a:blip r:embed="rId3"/>
+          <a:blip r:embed="rId1"/>
           <a:stretch>
             <a:fillRect/>
           </a:stretch>
@@ -6688,34 +7070,16 @@
         </p:nvGraphicFramePr>
         <p:xfrm>
           <a:off x="566928" y="1645920"/>
-          <a:ext cx="11064240" cy="1700784"/>
+          <a:ext cx="11064240" cy="914400"/>
         </p:xfrm>
         <a:graphic>
           <a:graphicData uri="http://schemas.openxmlformats.org/drawingml/2006/table">
             <a:tbl>
               <a:tblPr/>
               <a:tblGrid>
-                <a:gridCol w="2743200">
-                  <a:extLst>
-                    <a:ext uri="{9D8B030D-6E8A-4147-A177-3AD203B41FA5}">
-                      <a16:colId xmlns:a16="http://schemas.microsoft.com/office/drawing/2014/main" val="20000"/>
-                    </a:ext>
-                  </a:extLst>
-                </a:gridCol>
-                <a:gridCol w="4572000">
-                  <a:extLst>
-                    <a:ext uri="{9D8B030D-6E8A-4147-A177-3AD203B41FA5}">
-                      <a16:colId xmlns:a16="http://schemas.microsoft.com/office/drawing/2014/main" val="20001"/>
-                    </a:ext>
-                  </a:extLst>
-                </a:gridCol>
-                <a:gridCol w="3749040">
-                  <a:extLst>
-                    <a:ext uri="{9D8B030D-6E8A-4147-A177-3AD203B41FA5}">
-                      <a16:colId xmlns:a16="http://schemas.microsoft.com/office/drawing/2014/main" val="20002"/>
-                    </a:ext>
-                  </a:extLst>
-                </a:gridCol>
+                <a:gridCol w="2743200"/>
+                <a:gridCol w="4572000"/>
+                <a:gridCol w="3749040"/>
               </a:tblGrid>
               <a:tr h="566928">
                 <a:tc>
@@ -6723,11 +7087,11 @@
                     <a:bodyPr/>
                     <a:lstStyle/>
                     <a:p>
-                      <a:pPr marL="0" indent="0" algn="ctr">
+                      <a:pPr algn="ctr" indent="0" marL="0">
                         <a:buNone/>
                       </a:pPr>
                       <a:r>
-                        <a:rPr lang="en-US" sz="900" b="1" kern="0" spc="100" dirty="0">
+                        <a:rPr lang="en-US" sz="900" b="1" spc="100" kern="0" dirty="0">
                           <a:solidFill>
                             <a:srgbClr val="FFFFFF"/>
                           </a:solidFill>
@@ -6791,11 +7155,11 @@
                     <a:bodyPr/>
                     <a:lstStyle/>
                     <a:p>
-                      <a:pPr marL="0" indent="0" algn="ctr">
+                      <a:pPr algn="ctr" indent="0" marL="0">
                         <a:buNone/>
                       </a:pPr>
                       <a:r>
-                        <a:rPr lang="en-US" sz="900" b="1" kern="0" spc="100" dirty="0">
+                        <a:rPr lang="en-US" sz="900" b="1" spc="100" kern="0" dirty="0">
                           <a:solidFill>
                             <a:srgbClr val="FFFFFF"/>
                           </a:solidFill>
@@ -6859,11 +7223,11 @@
                     <a:bodyPr/>
                     <a:lstStyle/>
                     <a:p>
-                      <a:pPr marL="0" indent="0" algn="ctr">
+                      <a:pPr algn="ctr" indent="0" marL="0">
                         <a:buNone/>
                       </a:pPr>
                       <a:r>
-                        <a:rPr lang="en-US" sz="900" b="1" kern="0" spc="100" dirty="0">
+                        <a:rPr lang="en-US" sz="900" b="1" spc="100" kern="0" dirty="0">
                           <a:solidFill>
                             <a:srgbClr val="FFFFFF"/>
                           </a:solidFill>
@@ -6922,11 +7286,6 @@
                     </a:solidFill>
                   </a:tcPr>
                 </a:tc>
-                <a:extLst>
-                  <a:ext uri="{0D108BD9-81ED-4DB2-BD59-A6C34878D82A}">
-                    <a16:rowId xmlns:a16="http://schemas.microsoft.com/office/drawing/2014/main" val="10000"/>
-                  </a:ext>
-                </a:extLst>
               </a:tr>
               <a:tr h="566928">
                 <a:tc>
@@ -6934,7 +7293,7 @@
                     <a:bodyPr/>
                     <a:lstStyle/>
                     <a:p>
-                      <a:pPr marL="0" indent="0">
+                      <a:pPr indent="0" marL="0">
                         <a:buNone/>
                       </a:pPr>
                       <a:r>
@@ -7002,7 +7361,7 @@
                     <a:bodyPr/>
                     <a:lstStyle/>
                     <a:p>
-                      <a:pPr marL="0" indent="0">
+                      <a:pPr indent="0" marL="0">
                         <a:buNone/>
                       </a:pPr>
                       <a:r>
@@ -7070,7 +7429,7 @@
                     <a:bodyPr/>
                     <a:lstStyle/>
                     <a:p>
-                      <a:pPr marL="0" indent="0">
+                      <a:pPr indent="0" marL="0">
                         <a:buNone/>
                       </a:pPr>
                       <a:r>
@@ -7133,11 +7492,6 @@
                     </a:solidFill>
                   </a:tcPr>
                 </a:tc>
-                <a:extLst>
-                  <a:ext uri="{0D108BD9-81ED-4DB2-BD59-A6C34878D82A}">
-                    <a16:rowId xmlns:a16="http://schemas.microsoft.com/office/drawing/2014/main" val="10001"/>
-                  </a:ext>
-                </a:extLst>
               </a:tr>
               <a:tr h="566928">
                 <a:tc>
@@ -7145,7 +7499,7 @@
                     <a:bodyPr/>
                     <a:lstStyle/>
                     <a:p>
-                      <a:pPr marL="0" indent="0">
+                      <a:pPr indent="0" marL="0">
                         <a:buNone/>
                       </a:pPr>
                       <a:r>
@@ -7213,7 +7567,7 @@
                     <a:bodyPr/>
                     <a:lstStyle/>
                     <a:p>
-                      <a:pPr marL="0" indent="0">
+                      <a:pPr indent="0" marL="0">
                         <a:buNone/>
                       </a:pPr>
                       <a:r>
@@ -7281,7 +7635,7 @@
                     <a:bodyPr/>
                     <a:lstStyle/>
                     <a:p>
-                      <a:pPr marL="0" indent="0">
+                      <a:pPr indent="0" marL="0">
                         <a:buNone/>
                       </a:pPr>
                       <a:r>
@@ -7344,11 +7698,6 @@
                     </a:solidFill>
                   </a:tcPr>
                 </a:tc>
-                <a:extLst>
-                  <a:ext uri="{0D108BD9-81ED-4DB2-BD59-A6C34878D82A}">
-                    <a16:rowId xmlns:a16="http://schemas.microsoft.com/office/drawing/2014/main" val="10002"/>
-                  </a:ext>
-                </a:extLst>
               </a:tr>
             </a:tbl>
           </a:graphicData>
@@ -7397,7 +7746,7 @@
           <a:bodyPr wrap="square" lIns="0" tIns="0" rIns="0" bIns="0" rtlCol="0" anchor="ctr"/>
           <a:lstStyle/>
           <a:p>
-            <a:pPr marL="0" indent="0">
+            <a:pPr indent="0" marL="0">
               <a:buNone/>
             </a:pPr>
             <a:r>
@@ -7436,7 +7785,7 @@
           <a:bodyPr wrap="square" lIns="0" tIns="0" rIns="0" bIns="0" rtlCol="0" anchor="t"/>
           <a:lstStyle/>
           <a:p>
-            <a:pPr marL="0" indent="0">
+            <a:pPr indent="0" marL="0">
               <a:lnSpc>
                 <a:spcPct val="108000"/>
               </a:lnSpc>
@@ -7500,7 +7849,7 @@
           <a:bodyPr wrap="square" lIns="0" tIns="0" rIns="0" bIns="0" rtlCol="0" anchor="ctr"/>
           <a:lstStyle/>
           <a:p>
-            <a:pPr marL="0" indent="0">
+            <a:pPr indent="0" marL="0">
               <a:buNone/>
             </a:pPr>
             <a:r>
@@ -7520,7 +7869,7 @@
       </p:sp>
       <p:sp>
         <p:nvSpPr>
-          <p:cNvPr id="8" name="Text 10"/>
+          <p:cNvPr id="14" name="Text 10"/>
           <p:cNvSpPr/>
           <p:nvPr/>
         </p:nvSpPr>
@@ -7539,7 +7888,7 @@
           <a:bodyPr wrap="square" lIns="0" tIns="0" rIns="0" bIns="0" rtlCol="0" anchor="t"/>
           <a:lstStyle/>
           <a:p>
-            <a:pPr marL="0" indent="0">
+            <a:pPr indent="0" marL="0">
               <a:lnSpc>
                 <a:spcPct val="108000"/>
               </a:lnSpc>
@@ -7589,30 +7938,89 @@
       </p:sp>
       <p:sp>
         <p:nvSpPr>
-          <p:cNvPr id="16" name="Text 12"/>
-          <p:cNvSpPr/>
-          <p:nvPr/>
-        </p:nvSpPr>
-        <p:spPr>
-          <a:xfrm>
-            <a:off x="786384" y="5294376"/>
-            <a:ext cx="10625328" cy="219456"/>
-          </a:xfrm>
-          <a:prstGeom prst="rect">
-            <a:avLst/>
-          </a:prstGeom>
-          <a:noFill/>
-          <a:ln/>
-        </p:spPr>
-        <p:txBody>
-          <a:bodyPr wrap="square" lIns="0" tIns="0" rIns="0" bIns="0" rtlCol="0" anchor="ctr"/>
-          <a:lstStyle/>
-          <a:p>
-            <a:pPr marL="0" indent="0">
-              <a:buNone/>
-            </a:pPr>
-            <a:r>
-              <a:rPr lang="en-US" sz="950" b="1" kern="0" spc="150" dirty="0">
+          <p:cNvPr id="16" name="Shape 12"/>
+          <p:cNvSpPr/>
+          <p:nvPr/>
+        </p:nvSpPr>
+        <p:spPr>
+          <a:xfrm>
+            <a:off x="749808" y="5422392"/>
+            <a:ext cx="310896" cy="310896"/>
+          </a:xfrm>
+          <a:prstGeom prst="ellipse">
+            <a:avLst/>
+          </a:prstGeom>
+          <a:solidFill>
+            <a:srgbClr val="106B41"/>
+          </a:solidFill>
+          <a:ln/>
+        </p:spPr>
+      </p:sp>
+      <p:sp>
+        <p:nvSpPr>
+          <p:cNvPr id="17" name="Text 13"/>
+          <p:cNvSpPr/>
+          <p:nvPr/>
+        </p:nvSpPr>
+        <p:spPr>
+          <a:xfrm>
+            <a:off x="749808" y="5422392"/>
+            <a:ext cx="310896" cy="310896"/>
+          </a:xfrm>
+          <a:prstGeom prst="rect">
+            <a:avLst/>
+          </a:prstGeom>
+          <a:noFill/>
+          <a:ln/>
+        </p:spPr>
+        <p:txBody>
+          <a:bodyPr wrap="square" lIns="0" tIns="0" rIns="0" bIns="0" rtlCol="0" anchor="ctr"/>
+          <a:lstStyle/>
+          <a:p>
+            <a:pPr algn="ctr" indent="0" marL="0">
+              <a:buNone/>
+            </a:pPr>
+            <a:r>
+              <a:rPr lang="en-US" sz="1200" b="1" dirty="0">
+                <a:solidFill>
+                  <a:srgbClr val="FFFFFF"/>
+                </a:solidFill>
+                <a:latin typeface="Arial" pitchFamily="34" charset="0"/>
+                <a:ea typeface="Arial" pitchFamily="34" charset="-122"/>
+                <a:cs typeface="Arial" pitchFamily="34" charset="-120"/>
+              </a:rPr>
+              <a:t>◆</a:t>
+            </a:r>
+            <a:endParaRPr lang="en-US" sz="1200" dirty="0"/>
+          </a:p>
+        </p:txBody>
+      </p:sp>
+      <p:sp>
+        <p:nvSpPr>
+          <p:cNvPr id="18" name="Text 14"/>
+          <p:cNvSpPr/>
+          <p:nvPr/>
+        </p:nvSpPr>
+        <p:spPr>
+          <a:xfrm>
+            <a:off x="1243584" y="5294376"/>
+            <a:ext cx="10168128" cy="219456"/>
+          </a:xfrm>
+          <a:prstGeom prst="rect">
+            <a:avLst/>
+          </a:prstGeom>
+          <a:noFill/>
+          <a:ln/>
+        </p:spPr>
+        <p:txBody>
+          <a:bodyPr wrap="square" lIns="0" tIns="0" rIns="0" bIns="0" rtlCol="0" anchor="ctr"/>
+          <a:lstStyle/>
+          <a:p>
+            <a:pPr indent="0" marL="0">
+              <a:buNone/>
+            </a:pPr>
+            <a:r>
+              <a:rPr lang="en-US" sz="950" b="1" spc="150" kern="0" dirty="0">
                 <a:solidFill>
                   <a:srgbClr val="106B41"/>
                 </a:solidFill>
@@ -7628,26 +8036,26 @@
       </p:sp>
       <p:sp>
         <p:nvSpPr>
-          <p:cNvPr id="17" name="Text 13"/>
-          <p:cNvSpPr/>
-          <p:nvPr/>
-        </p:nvSpPr>
-        <p:spPr>
-          <a:xfrm>
-            <a:off x="786384" y="5550408"/>
-            <a:ext cx="10625328" cy="310896"/>
-          </a:xfrm>
-          <a:prstGeom prst="rect">
-            <a:avLst/>
-          </a:prstGeom>
-          <a:noFill/>
-          <a:ln/>
-        </p:spPr>
-        <p:txBody>
-          <a:bodyPr wrap="square" lIns="0" tIns="0" rIns="0" bIns="0" rtlCol="0" anchor="ctr"/>
-          <a:lstStyle/>
-          <a:p>
-            <a:pPr marL="0" indent="0">
+          <p:cNvPr id="19" name="Text 15"/>
+          <p:cNvSpPr/>
+          <p:nvPr/>
+        </p:nvSpPr>
+        <p:spPr>
+          <a:xfrm>
+            <a:off x="1243584" y="5550408"/>
+            <a:ext cx="10168128" cy="310896"/>
+          </a:xfrm>
+          <a:prstGeom prst="rect">
+            <a:avLst/>
+          </a:prstGeom>
+          <a:noFill/>
+          <a:ln/>
+        </p:spPr>
+        <p:txBody>
+          <a:bodyPr wrap="square" lIns="0" tIns="0" rIns="0" bIns="0" rtlCol="0" anchor="ctr"/>
+          <a:lstStyle/>
+          <a:p>
+            <a:pPr indent="0" marL="0">
               <a:lnSpc>
                 <a:spcPct val="112000"/>
               </a:lnSpc>
@@ -7688,7 +8096,7 @@
           </a:prstGeom>
           <a:extLst>
             <a:ext uri="{C572A759-6A51-4108-AA02-DFA0A04FC94B}">
-              <ma14:wrappingTextBoxFlag xmlns="" xmlns:ma14="http://schemas.microsoft.com/office/mac/drawingml/2011/main" val="0"/>
+              <ma14:wrappingTextBoxFlag xmlns:ma14="http://schemas.microsoft.com/office/mac/drawingml/2011/main" val="0"/>
             </a:ext>
           </a:extLst>
         </p:spPr>
@@ -7709,7 +8117,7 @@
           <a:p>
             <a:pPr algn="l"/>
             <a:fld id="{F7021451-1387-4CA6-816F-3879F97B5CBC}" type="slidenum">
-              <a:rPr lang="en-US" b="0"/>
+              <a:rPr b="0" lang="en-US"/>
               <a:t>13</a:t>
             </a:fld>
             <a:endParaRPr lang="en-US"/>
@@ -7784,7 +8192,7 @@
           <a:bodyPr wrap="square" lIns="0" tIns="0" rIns="0" bIns="0" rtlCol="0" anchor="ctr"/>
           <a:lstStyle/>
           <a:p>
-            <a:pPr marL="0" indent="0" algn="l">
+            <a:pPr algn="l" indent="0" marL="0">
               <a:buNone/>
             </a:pPr>
             <a:r>
@@ -7823,7 +8231,7 @@
           <a:bodyPr wrap="square" lIns="0" tIns="0" rIns="0" bIns="0" rtlCol="0" anchor="ctr"/>
           <a:lstStyle/>
           <a:p>
-            <a:pPr marL="0" indent="0">
+            <a:pPr indent="0" marL="0">
               <a:buNone/>
             </a:pPr>
             <a:r>
@@ -7889,11 +8297,11 @@
           <a:bodyPr wrap="square" lIns="0" tIns="0" rIns="0" bIns="0" rtlCol="0" anchor="ctr"/>
           <a:lstStyle/>
           <a:p>
-            <a:pPr marL="0" indent="0" algn="ctr">
-              <a:buNone/>
-            </a:pPr>
-            <a:r>
-              <a:rPr lang="en-US" sz="900" b="1" kern="0" spc="100" dirty="0">
+            <a:pPr algn="ctr" indent="0" marL="0">
+              <a:buNone/>
+            </a:pPr>
+            <a:r>
+              <a:rPr lang="en-US" sz="900" b="1" spc="100" kern="0" dirty="0">
                 <a:solidFill>
                   <a:srgbClr val="5A05F4"/>
                 </a:solidFill>
@@ -7909,14 +8317,14 @@
       </p:sp>
       <p:pic>
         <p:nvPicPr>
-          <p:cNvPr id="7" name="Image 0" descr="preencoded.png"/>
+          <p:cNvPr id="7" name="Image 0" descr="preencoded.png">    </p:cNvPr>
           <p:cNvPicPr>
             <a:picLocks noChangeAspect="1"/>
           </p:cNvPicPr>
           <p:nvPr/>
         </p:nvPicPr>
         <p:blipFill>
-          <a:blip r:embed="rId3"/>
+          <a:blip r:embed="rId1"/>
           <a:stretch>
             <a:fillRect/>
           </a:stretch>
@@ -7974,7 +8382,7 @@
           <a:bodyPr wrap="square" lIns="0" tIns="0" rIns="0" bIns="0" rtlCol="0" anchor="ctr"/>
           <a:lstStyle/>
           <a:p>
-            <a:pPr marL="0" indent="0">
+            <a:pPr indent="0" marL="0">
               <a:buNone/>
             </a:pPr>
             <a:r>
@@ -8013,7 +8421,7 @@
           <a:bodyPr wrap="square" lIns="0" tIns="0" rIns="0" bIns="0" rtlCol="0" anchor="t"/>
           <a:lstStyle/>
           <a:p>
-            <a:pPr marL="0" indent="0">
+            <a:pPr indent="0" marL="0">
               <a:lnSpc>
                 <a:spcPct val="108000"/>
               </a:lnSpc>
@@ -8077,7 +8485,7 @@
           <a:bodyPr wrap="square" lIns="0" tIns="0" rIns="0" bIns="0" rtlCol="0" anchor="ctr"/>
           <a:lstStyle/>
           <a:p>
-            <a:pPr marL="0" indent="0">
+            <a:pPr indent="0" marL="0">
               <a:buNone/>
             </a:pPr>
             <a:r>
@@ -8116,7 +8524,7 @@
           <a:bodyPr wrap="square" lIns="0" tIns="0" rIns="0" bIns="0" rtlCol="0" anchor="t"/>
           <a:lstStyle/>
           <a:p>
-            <a:pPr marL="0" indent="0">
+            <a:pPr indent="0" marL="0">
               <a:lnSpc>
                 <a:spcPct val="108000"/>
               </a:lnSpc>
@@ -8166,30 +8574,89 @@
       </p:sp>
       <p:sp>
         <p:nvSpPr>
-          <p:cNvPr id="15" name="Text 12"/>
-          <p:cNvSpPr/>
-          <p:nvPr/>
-        </p:nvSpPr>
-        <p:spPr>
-          <a:xfrm>
-            <a:off x="786384" y="3785616"/>
-            <a:ext cx="10625328" cy="219456"/>
-          </a:xfrm>
-          <a:prstGeom prst="rect">
-            <a:avLst/>
-          </a:prstGeom>
-          <a:noFill/>
-          <a:ln/>
-        </p:spPr>
-        <p:txBody>
-          <a:bodyPr wrap="square" lIns="0" tIns="0" rIns="0" bIns="0" rtlCol="0" anchor="ctr"/>
-          <a:lstStyle/>
-          <a:p>
-            <a:pPr marL="0" indent="0">
-              <a:buNone/>
-            </a:pPr>
-            <a:r>
-              <a:rPr lang="en-US" sz="950" b="1" kern="0" spc="150" dirty="0">
+          <p:cNvPr id="15" name="Shape 12"/>
+          <p:cNvSpPr/>
+          <p:nvPr/>
+        </p:nvSpPr>
+        <p:spPr>
+          <a:xfrm>
+            <a:off x="749808" y="4233672"/>
+            <a:ext cx="310896" cy="310896"/>
+          </a:xfrm>
+          <a:prstGeom prst="ellipse">
+            <a:avLst/>
+          </a:prstGeom>
+          <a:solidFill>
+            <a:srgbClr val="106B41"/>
+          </a:solidFill>
+          <a:ln/>
+        </p:spPr>
+      </p:sp>
+      <p:sp>
+        <p:nvSpPr>
+          <p:cNvPr id="16" name="Text 13"/>
+          <p:cNvSpPr/>
+          <p:nvPr/>
+        </p:nvSpPr>
+        <p:spPr>
+          <a:xfrm>
+            <a:off x="749808" y="4233672"/>
+            <a:ext cx="310896" cy="310896"/>
+          </a:xfrm>
+          <a:prstGeom prst="rect">
+            <a:avLst/>
+          </a:prstGeom>
+          <a:noFill/>
+          <a:ln/>
+        </p:spPr>
+        <p:txBody>
+          <a:bodyPr wrap="square" lIns="0" tIns="0" rIns="0" bIns="0" rtlCol="0" anchor="ctr"/>
+          <a:lstStyle/>
+          <a:p>
+            <a:pPr algn="ctr" indent="0" marL="0">
+              <a:buNone/>
+            </a:pPr>
+            <a:r>
+              <a:rPr lang="en-US" sz="1200" b="1" dirty="0">
+                <a:solidFill>
+                  <a:srgbClr val="FFFFFF"/>
+                </a:solidFill>
+                <a:latin typeface="Arial" pitchFamily="34" charset="0"/>
+                <a:ea typeface="Arial" pitchFamily="34" charset="-122"/>
+                <a:cs typeface="Arial" pitchFamily="34" charset="-120"/>
+              </a:rPr>
+              <a:t>◆</a:t>
+            </a:r>
+            <a:endParaRPr lang="en-US" sz="1200" dirty="0"/>
+          </a:p>
+        </p:txBody>
+      </p:sp>
+      <p:sp>
+        <p:nvSpPr>
+          <p:cNvPr id="17" name="Text 14"/>
+          <p:cNvSpPr/>
+          <p:nvPr/>
+        </p:nvSpPr>
+        <p:spPr>
+          <a:xfrm>
+            <a:off x="1243584" y="3785616"/>
+            <a:ext cx="10168128" cy="219456"/>
+          </a:xfrm>
+          <a:prstGeom prst="rect">
+            <a:avLst/>
+          </a:prstGeom>
+          <a:noFill/>
+          <a:ln/>
+        </p:spPr>
+        <p:txBody>
+          <a:bodyPr wrap="square" lIns="0" tIns="0" rIns="0" bIns="0" rtlCol="0" anchor="ctr"/>
+          <a:lstStyle/>
+          <a:p>
+            <a:pPr indent="0" marL="0">
+              <a:buNone/>
+            </a:pPr>
+            <a:r>
+              <a:rPr lang="en-US" sz="950" b="1" spc="150" kern="0" dirty="0">
                 <a:solidFill>
                   <a:srgbClr val="106B41"/>
                 </a:solidFill>
@@ -8205,26 +8672,26 @@
       </p:sp>
       <p:sp>
         <p:nvSpPr>
-          <p:cNvPr id="16" name="Text 13"/>
-          <p:cNvSpPr/>
-          <p:nvPr/>
-        </p:nvSpPr>
-        <p:spPr>
-          <a:xfrm>
-            <a:off x="786384" y="4041648"/>
-            <a:ext cx="10625328" cy="950976"/>
-          </a:xfrm>
-          <a:prstGeom prst="rect">
-            <a:avLst/>
-          </a:prstGeom>
-          <a:noFill/>
-          <a:ln/>
-        </p:spPr>
-        <p:txBody>
-          <a:bodyPr wrap="square" lIns="0" tIns="0" rIns="0" bIns="0" rtlCol="0" anchor="ctr"/>
-          <a:lstStyle/>
-          <a:p>
-            <a:pPr marL="0" indent="0">
+          <p:cNvPr id="18" name="Text 15"/>
+          <p:cNvSpPr/>
+          <p:nvPr/>
+        </p:nvSpPr>
+        <p:spPr>
+          <a:xfrm>
+            <a:off x="1243584" y="4041648"/>
+            <a:ext cx="10168128" cy="950976"/>
+          </a:xfrm>
+          <a:prstGeom prst="rect">
+            <a:avLst/>
+          </a:prstGeom>
+          <a:noFill/>
+          <a:ln/>
+        </p:spPr>
+        <p:txBody>
+          <a:bodyPr wrap="square" lIns="0" tIns="0" rIns="0" bIns="0" rtlCol="0" anchor="ctr"/>
+          <a:lstStyle/>
+          <a:p>
+            <a:pPr indent="0" marL="0">
               <a:lnSpc>
                 <a:spcPct val="112000"/>
               </a:lnSpc>
@@ -8247,7 +8714,7 @@
       </p:sp>
       <p:sp>
         <p:nvSpPr>
-          <p:cNvPr id="17" name="Shape 14"/>
+          <p:cNvPr id="19" name="Shape 16"/>
           <p:cNvSpPr/>
           <p:nvPr/>
         </p:nvSpPr>
@@ -8274,7 +8741,7 @@
       </p:sp>
       <p:sp>
         <p:nvSpPr>
-          <p:cNvPr id="18" name="Text 15"/>
+          <p:cNvPr id="20" name="Text 17"/>
           <p:cNvSpPr/>
           <p:nvPr/>
         </p:nvSpPr>
@@ -8293,7 +8760,7 @@
           <a:bodyPr wrap="square" lIns="0" tIns="0" rIns="0" bIns="0" rtlCol="0" anchor="ctr"/>
           <a:lstStyle/>
           <a:p>
-            <a:pPr marL="0" indent="0">
+            <a:pPr indent="0" marL="0">
               <a:lnSpc>
                 <a:spcPct val="112000"/>
               </a:lnSpc>
@@ -8334,7 +8801,7 @@
           </a:prstGeom>
           <a:extLst>
             <a:ext uri="{C572A759-6A51-4108-AA02-DFA0A04FC94B}">
-              <ma14:wrappingTextBoxFlag xmlns="" xmlns:ma14="http://schemas.microsoft.com/office/mac/drawingml/2011/main" val="0"/>
+              <ma14:wrappingTextBoxFlag xmlns:ma14="http://schemas.microsoft.com/office/mac/drawingml/2011/main" val="0"/>
             </a:ext>
           </a:extLst>
         </p:spPr>
@@ -8355,7 +8822,7 @@
           <a:p>
             <a:pPr algn="l"/>
             <a:fld id="{F7021451-1387-4CA6-816F-3879F97B5CBC}" type="slidenum">
-              <a:rPr lang="en-US" b="0"/>
+              <a:rPr b="0" lang="en-US"/>
               <a:t>14</a:t>
             </a:fld>
             <a:endParaRPr lang="en-US"/>
@@ -8430,7 +8897,7 @@
           <a:bodyPr wrap="square" lIns="0" tIns="0" rIns="0" bIns="0" rtlCol="0" anchor="ctr"/>
           <a:lstStyle/>
           <a:p>
-            <a:pPr marL="0" indent="0" algn="l">
+            <a:pPr algn="l" indent="0" marL="0">
               <a:buNone/>
             </a:pPr>
             <a:r>
@@ -8469,7 +8936,7 @@
           <a:bodyPr wrap="square" lIns="0" tIns="0" rIns="0" bIns="0" rtlCol="0" anchor="ctr"/>
           <a:lstStyle/>
           <a:p>
-            <a:pPr marL="0" indent="0">
+            <a:pPr indent="0" marL="0">
               <a:buNone/>
             </a:pPr>
             <a:r>
@@ -8535,11 +9002,11 @@
           <a:bodyPr wrap="square" lIns="0" tIns="0" rIns="0" bIns="0" rtlCol="0" anchor="ctr"/>
           <a:lstStyle/>
           <a:p>
-            <a:pPr marL="0" indent="0" algn="ctr">
-              <a:buNone/>
-            </a:pPr>
-            <a:r>
-              <a:rPr lang="en-US" sz="900" b="1" kern="0" spc="100" dirty="0">
+            <a:pPr algn="ctr" indent="0" marL="0">
+              <a:buNone/>
+            </a:pPr>
+            <a:r>
+              <a:rPr lang="en-US" sz="900" b="1" spc="100" kern="0" dirty="0">
                 <a:solidFill>
                   <a:srgbClr val="5A05F4"/>
                 </a:solidFill>
@@ -8555,14 +9022,14 @@
       </p:sp>
       <p:pic>
         <p:nvPicPr>
-          <p:cNvPr id="7" name="Image 0" descr="preencoded.png"/>
+          <p:cNvPr id="7" name="Image 0" descr="preencoded.png">    </p:cNvPr>
           <p:cNvPicPr>
             <a:picLocks noChangeAspect="1"/>
           </p:cNvPicPr>
           <p:nvPr/>
         </p:nvPicPr>
         <p:blipFill>
-          <a:blip r:embed="rId3"/>
+          <a:blip r:embed="rId1"/>
           <a:stretch>
             <a:fillRect/>
           </a:stretch>
@@ -8620,7 +9087,7 @@
           <a:bodyPr wrap="square" lIns="0" tIns="0" rIns="0" bIns="0" rtlCol="0" anchor="ctr"/>
           <a:lstStyle/>
           <a:p>
-            <a:pPr marL="0" indent="0" algn="ctr">
+            <a:pPr algn="ctr" indent="0" marL="0">
               <a:buNone/>
             </a:pPr>
             <a:r>
@@ -8724,7 +9191,7 @@
           <a:bodyPr wrap="square" lIns="0" tIns="0" rIns="0" bIns="0" rtlCol="0" anchor="ctr"/>
           <a:lstStyle/>
           <a:p>
-            <a:pPr marL="0" indent="0" algn="ctr">
+            <a:pPr algn="ctr" indent="0" marL="0">
               <a:buNone/>
             </a:pPr>
             <a:r>
@@ -8828,7 +9295,7 @@
           <a:bodyPr wrap="square" lIns="0" tIns="0" rIns="0" bIns="0" rtlCol="0" anchor="ctr"/>
           <a:lstStyle/>
           <a:p>
-            <a:pPr marL="0" indent="0" algn="ctr">
+            <a:pPr algn="ctr" indent="0" marL="0">
               <a:buNone/>
             </a:pPr>
             <a:r>
@@ -8932,7 +9399,7 @@
           <a:bodyPr wrap="square" lIns="0" tIns="0" rIns="0" bIns="0" rtlCol="0" anchor="ctr"/>
           <a:lstStyle/>
           <a:p>
-            <a:pPr marL="0" indent="0" algn="ctr">
+            <a:pPr algn="ctr" indent="0" marL="0">
               <a:buNone/>
             </a:pPr>
             <a:r>
@@ -9036,7 +9503,7 @@
           <a:bodyPr wrap="square" lIns="0" tIns="0" rIns="0" bIns="0" rtlCol="0" anchor="ctr"/>
           <a:lstStyle/>
           <a:p>
-            <a:pPr marL="0" indent="0" algn="ctr">
+            <a:pPr algn="ctr" indent="0" marL="0">
               <a:buNone/>
             </a:pPr>
             <a:r>
@@ -9102,11 +9569,11 @@
           <a:bodyPr wrap="square" lIns="0" tIns="0" rIns="0" bIns="0" rtlCol="0" anchor="ctr"/>
           <a:lstStyle/>
           <a:p>
-            <a:pPr marL="0" indent="0">
-              <a:buNone/>
-            </a:pPr>
-            <a:r>
-              <a:rPr lang="en-US" sz="950" b="1" kern="0" spc="150" dirty="0">
+            <a:pPr indent="0" marL="0">
+              <a:buNone/>
+            </a:pPr>
+            <a:r>
+              <a:rPr lang="en-US" sz="950" b="1" spc="150" kern="0" dirty="0">
                 <a:solidFill>
                   <a:srgbClr val="106B41"/>
                 </a:solidFill>
@@ -9141,7 +9608,7 @@
           <a:bodyPr wrap="square" lIns="0" tIns="0" rIns="0" bIns="0" rtlCol="0" anchor="ctr"/>
           <a:lstStyle/>
           <a:p>
-            <a:pPr marL="0" indent="0">
+            <a:pPr indent="0" marL="0">
               <a:lnSpc>
                 <a:spcPct val="112000"/>
               </a:lnSpc>
@@ -9205,7 +9672,7 @@
           <a:bodyPr wrap="square" lIns="0" tIns="0" rIns="0" bIns="0" rtlCol="0" anchor="ctr"/>
           <a:lstStyle/>
           <a:p>
-            <a:pPr marL="0" indent="0">
+            <a:pPr indent="0" marL="0">
               <a:buNone/>
             </a:pPr>
             <a:r>
@@ -9244,7 +9711,7 @@
           <a:bodyPr wrap="square" lIns="0" tIns="0" rIns="0" bIns="0" rtlCol="0" anchor="t"/>
           <a:lstStyle/>
           <a:p>
-            <a:pPr marL="0" indent="0">
+            <a:pPr indent="0" marL="0">
               <a:lnSpc>
                 <a:spcPct val="108000"/>
               </a:lnSpc>
@@ -9308,7 +9775,7 @@
           <a:bodyPr wrap="square" lIns="0" tIns="0" rIns="0" bIns="0" rtlCol="0" anchor="ctr"/>
           <a:lstStyle/>
           <a:p>
-            <a:pPr marL="0" indent="0">
+            <a:pPr indent="0" marL="0">
               <a:buNone/>
             </a:pPr>
             <a:r>
@@ -9347,7 +9814,7 @@
           <a:bodyPr wrap="square" lIns="0" tIns="0" rIns="0" bIns="0" rtlCol="0" anchor="t"/>
           <a:lstStyle/>
           <a:p>
-            <a:pPr marL="0" indent="0">
+            <a:pPr indent="0" marL="0">
               <a:lnSpc>
                 <a:spcPct val="108000"/>
               </a:lnSpc>
@@ -9370,7 +9837,7 @@
       </p:sp>
       <p:sp>
         <p:nvSpPr>
-          <p:cNvPr id="35" name="Slide Number Placeholder 0"/>
+          <p:cNvPr id="25" name="Slide Number Placeholder 0"/>
           <p:cNvSpPr>
             <a:spLocks noGrp="1"/>
           </p:cNvSpPr>
@@ -9388,7 +9855,7 @@
           </a:prstGeom>
           <a:extLst>
             <a:ext uri="{C572A759-6A51-4108-AA02-DFA0A04FC94B}">
-              <ma14:wrappingTextBoxFlag xmlns="" xmlns:ma14="http://schemas.microsoft.com/office/mac/drawingml/2011/main" val="0"/>
+              <ma14:wrappingTextBoxFlag xmlns:ma14="http://schemas.microsoft.com/office/mac/drawingml/2011/main" val="0"/>
             </a:ext>
           </a:extLst>
         </p:spPr>
@@ -9409,7 +9876,7 @@
           <a:p>
             <a:pPr algn="l"/>
             <a:fld id="{F7021451-1387-4CA6-816F-3879F97B5CBC}" type="slidenum">
-              <a:rPr lang="en-US" b="0"/>
+              <a:rPr b="0" lang="en-US"/>
               <a:t>15</a:t>
             </a:fld>
             <a:endParaRPr lang="en-US"/>
@@ -9484,7 +9951,7 @@
           <a:bodyPr wrap="square" lIns="0" tIns="0" rIns="0" bIns="0" rtlCol="0" anchor="ctr"/>
           <a:lstStyle/>
           <a:p>
-            <a:pPr marL="0" indent="0" algn="l">
+            <a:pPr algn="l" indent="0" marL="0">
               <a:buNone/>
             </a:pPr>
             <a:r>
@@ -9523,7 +9990,7 @@
           <a:bodyPr wrap="square" lIns="0" tIns="0" rIns="0" bIns="0" rtlCol="0" anchor="ctr"/>
           <a:lstStyle/>
           <a:p>
-            <a:pPr marL="0" indent="0">
+            <a:pPr indent="0" marL="0">
               <a:buNone/>
             </a:pPr>
             <a:r>
@@ -9589,11 +10056,11 @@
           <a:bodyPr wrap="square" lIns="0" tIns="0" rIns="0" bIns="0" rtlCol="0" anchor="ctr"/>
           <a:lstStyle/>
           <a:p>
-            <a:pPr marL="0" indent="0" algn="ctr">
-              <a:buNone/>
-            </a:pPr>
-            <a:r>
-              <a:rPr lang="en-US" sz="900" b="1" kern="0" spc="100" dirty="0">
+            <a:pPr algn="ctr" indent="0" marL="0">
+              <a:buNone/>
+            </a:pPr>
+            <a:r>
+              <a:rPr lang="en-US" sz="900" b="1" spc="100" kern="0" dirty="0">
                 <a:solidFill>
                   <a:srgbClr val="5A05F4"/>
                 </a:solidFill>
@@ -9609,14 +10076,14 @@
       </p:sp>
       <p:pic>
         <p:nvPicPr>
-          <p:cNvPr id="7" name="Image 0" descr="preencoded.png"/>
+          <p:cNvPr id="7" name="Image 0" descr="preencoded.png">    </p:cNvPr>
           <p:cNvPicPr>
             <a:picLocks noChangeAspect="1"/>
           </p:cNvPicPr>
           <p:nvPr/>
         </p:nvPicPr>
         <p:blipFill>
-          <a:blip r:embed="rId3"/>
+          <a:blip r:embed="rId1"/>
           <a:stretch>
             <a:fillRect/>
           </a:stretch>
@@ -9674,7 +10141,7 @@
           <a:bodyPr wrap="square" lIns="0" tIns="0" rIns="0" bIns="0" rtlCol="0" anchor="ctr"/>
           <a:lstStyle/>
           <a:p>
-            <a:pPr marL="0" indent="0">
+            <a:pPr indent="0" marL="0">
               <a:buNone/>
             </a:pPr>
             <a:r>
@@ -9713,7 +10180,7 @@
           <a:bodyPr wrap="square" lIns="0" tIns="0" rIns="0" bIns="0" rtlCol="0" anchor="t"/>
           <a:lstStyle/>
           <a:p>
-            <a:pPr marL="0" indent="0">
+            <a:pPr indent="0" marL="0">
               <a:lnSpc>
                 <a:spcPct val="108000"/>
               </a:lnSpc>
@@ -9777,7 +10244,7 @@
           <a:bodyPr wrap="square" lIns="0" tIns="0" rIns="0" bIns="0" rtlCol="0" anchor="ctr"/>
           <a:lstStyle/>
           <a:p>
-            <a:pPr marL="0" indent="0">
+            <a:pPr indent="0" marL="0">
               <a:buNone/>
             </a:pPr>
             <a:r>
@@ -9816,7 +10283,7 @@
           <a:bodyPr wrap="square" lIns="0" tIns="0" rIns="0" bIns="0" rtlCol="0" anchor="t"/>
           <a:lstStyle/>
           <a:p>
-            <a:pPr marL="0" indent="0">
+            <a:pPr indent="0" marL="0">
               <a:lnSpc>
                 <a:spcPct val="108000"/>
               </a:lnSpc>
@@ -9880,7 +10347,7 @@
           <a:bodyPr wrap="square" lIns="0" tIns="0" rIns="0" bIns="0" rtlCol="0" anchor="ctr"/>
           <a:lstStyle/>
           <a:p>
-            <a:pPr marL="0" indent="0">
+            <a:pPr indent="0" marL="0">
               <a:buNone/>
             </a:pPr>
             <a:r>
@@ -9894,6 +10361,9 @@
               </a:rPr>
               <a:t>свіжий  </a:t>
             </a:r>
+            <a:pPr indent="0" marL="0">
+              <a:buNone/>
+            </a:pPr>
             <a:r>
               <a:rPr lang="en-US" sz="1100" dirty="0">
                 <a:solidFill>
@@ -9952,7 +10422,7 @@
           <a:bodyPr wrap="square" lIns="0" tIns="0" rIns="0" bIns="0" rtlCol="0" anchor="ctr"/>
           <a:lstStyle/>
           <a:p>
-            <a:pPr marL="0" indent="0">
+            <a:pPr indent="0" marL="0">
               <a:buNone/>
             </a:pPr>
             <a:r>
@@ -9966,6 +10436,9 @@
               </a:rPr>
               <a:t>застарілий  </a:t>
             </a:r>
+            <a:pPr indent="0" marL="0">
+              <a:buNone/>
+            </a:pPr>
             <a:r>
               <a:rPr lang="en-US" sz="1100" dirty="0">
                 <a:solidFill>
@@ -10024,7 +10497,7 @@
           <a:bodyPr wrap="square" lIns="0" tIns="0" rIns="0" bIns="0" rtlCol="0" anchor="ctr"/>
           <a:lstStyle/>
           <a:p>
-            <a:pPr marL="0" indent="0">
+            <a:pPr indent="0" marL="0">
               <a:buNone/>
             </a:pPr>
             <a:r>
@@ -10038,6 +10511,9 @@
               </a:rPr>
               <a:t>прострочений  </a:t>
             </a:r>
+            <a:pPr indent="0" marL="0">
+              <a:buNone/>
+            </a:pPr>
             <a:r>
               <a:rPr lang="en-US" sz="1100" dirty="0">
                 <a:solidFill>
@@ -10074,11 +10550,11 @@
           <a:bodyPr wrap="square" lIns="0" tIns="0" rIns="0" bIns="0" rtlCol="0" anchor="ctr"/>
           <a:lstStyle/>
           <a:p>
-            <a:pPr marL="0" indent="0">
-              <a:buNone/>
-            </a:pPr>
-            <a:r>
-              <a:rPr lang="en-US" sz="850" kern="0" spc="100" dirty="0">
+            <a:pPr indent="0" marL="0">
+              <a:buNone/>
+            </a:pPr>
+            <a:r>
+              <a:rPr lang="en-US" sz="850" spc="100" kern="0" dirty="0">
                 <a:solidFill>
                   <a:srgbClr val="6B6B6B"/>
                 </a:solidFill>
@@ -10135,11 +10611,11 @@
           <a:bodyPr wrap="square" lIns="0" tIns="0" rIns="0" bIns="0" rtlCol="0" anchor="ctr"/>
           <a:lstStyle/>
           <a:p>
-            <a:pPr marL="0" indent="0">
-              <a:buNone/>
-            </a:pPr>
-            <a:r>
-              <a:rPr lang="en-US" sz="950" b="1" kern="0" spc="150" dirty="0">
+            <a:pPr indent="0" marL="0">
+              <a:buNone/>
+            </a:pPr>
+            <a:r>
+              <a:rPr lang="en-US" sz="950" b="1" spc="150" kern="0" dirty="0">
                 <a:solidFill>
                   <a:srgbClr val="FFFFFF"/>
                 </a:solidFill>
@@ -10174,7 +10650,7 @@
           <a:bodyPr wrap="square" lIns="0" tIns="0" rIns="0" bIns="0" rtlCol="0" anchor="ctr"/>
           <a:lstStyle/>
           <a:p>
-            <a:pPr marL="0" indent="0">
+            <a:pPr indent="0" marL="0">
               <a:lnSpc>
                 <a:spcPct val="112000"/>
               </a:lnSpc>
@@ -10224,30 +10700,89 @@
       </p:sp>
       <p:sp>
         <p:nvSpPr>
-          <p:cNvPr id="25" name="Text 22"/>
-          <p:cNvSpPr/>
-          <p:nvPr/>
-        </p:nvSpPr>
-        <p:spPr>
-          <a:xfrm>
-            <a:off x="786384" y="5294376"/>
-            <a:ext cx="10625328" cy="219456"/>
-          </a:xfrm>
-          <a:prstGeom prst="rect">
-            <a:avLst/>
-          </a:prstGeom>
-          <a:noFill/>
-          <a:ln/>
-        </p:spPr>
-        <p:txBody>
-          <a:bodyPr wrap="square" lIns="0" tIns="0" rIns="0" bIns="0" rtlCol="0" anchor="ctr"/>
-          <a:lstStyle/>
-          <a:p>
-            <a:pPr marL="0" indent="0">
-              <a:buNone/>
-            </a:pPr>
-            <a:r>
-              <a:rPr lang="en-US" sz="950" b="1" kern="0" spc="150" dirty="0">
+          <p:cNvPr id="25" name="Shape 22"/>
+          <p:cNvSpPr/>
+          <p:nvPr/>
+        </p:nvSpPr>
+        <p:spPr>
+          <a:xfrm>
+            <a:off x="749808" y="5468112"/>
+            <a:ext cx="310896" cy="310896"/>
+          </a:xfrm>
+          <a:prstGeom prst="ellipse">
+            <a:avLst/>
+          </a:prstGeom>
+          <a:solidFill>
+            <a:srgbClr val="B3261E"/>
+          </a:solidFill>
+          <a:ln/>
+        </p:spPr>
+      </p:sp>
+      <p:sp>
+        <p:nvSpPr>
+          <p:cNvPr id="26" name="Text 23"/>
+          <p:cNvSpPr/>
+          <p:nvPr/>
+        </p:nvSpPr>
+        <p:spPr>
+          <a:xfrm>
+            <a:off x="749808" y="5468112"/>
+            <a:ext cx="310896" cy="310896"/>
+          </a:xfrm>
+          <a:prstGeom prst="rect">
+            <a:avLst/>
+          </a:prstGeom>
+          <a:noFill/>
+          <a:ln/>
+        </p:spPr>
+        <p:txBody>
+          <a:bodyPr wrap="square" lIns="0" tIns="0" rIns="0" bIns="0" rtlCol="0" anchor="ctr"/>
+          <a:lstStyle/>
+          <a:p>
+            <a:pPr algn="ctr" indent="0" marL="0">
+              <a:buNone/>
+            </a:pPr>
+            <a:r>
+              <a:rPr lang="en-US" sz="1200" b="1" dirty="0">
+                <a:solidFill>
+                  <a:srgbClr val="FFFFFF"/>
+                </a:solidFill>
+                <a:latin typeface="Arial" pitchFamily="34" charset="0"/>
+                <a:ea typeface="Arial" pitchFamily="34" charset="-122"/>
+                <a:cs typeface="Arial" pitchFamily="34" charset="-120"/>
+              </a:rPr>
+              <a:t>✕</a:t>
+            </a:r>
+            <a:endParaRPr lang="en-US" sz="1200" dirty="0"/>
+          </a:p>
+        </p:txBody>
+      </p:sp>
+      <p:sp>
+        <p:nvSpPr>
+          <p:cNvPr id="27" name="Text 24"/>
+          <p:cNvSpPr/>
+          <p:nvPr/>
+        </p:nvSpPr>
+        <p:spPr>
+          <a:xfrm>
+            <a:off x="1243584" y="5294376"/>
+            <a:ext cx="10168128" cy="219456"/>
+          </a:xfrm>
+          <a:prstGeom prst="rect">
+            <a:avLst/>
+          </a:prstGeom>
+          <a:noFill/>
+          <a:ln/>
+        </p:spPr>
+        <p:txBody>
+          <a:bodyPr wrap="square" lIns="0" tIns="0" rIns="0" bIns="0" rtlCol="0" anchor="ctr"/>
+          <a:lstStyle/>
+          <a:p>
+            <a:pPr indent="0" marL="0">
+              <a:buNone/>
+            </a:pPr>
+            <a:r>
+              <a:rPr lang="en-US" sz="950" b="1" spc="150" kern="0" dirty="0">
                 <a:solidFill>
                   <a:srgbClr val="B3261E"/>
                 </a:solidFill>
@@ -10263,26 +10798,26 @@
       </p:sp>
       <p:sp>
         <p:nvSpPr>
-          <p:cNvPr id="26" name="Text 23"/>
-          <p:cNvSpPr/>
-          <p:nvPr/>
-        </p:nvSpPr>
-        <p:spPr>
-          <a:xfrm>
-            <a:off x="786384" y="5550408"/>
-            <a:ext cx="10625328" cy="402336"/>
-          </a:xfrm>
-          <a:prstGeom prst="rect">
-            <a:avLst/>
-          </a:prstGeom>
-          <a:noFill/>
-          <a:ln/>
-        </p:spPr>
-        <p:txBody>
-          <a:bodyPr wrap="square" lIns="0" tIns="0" rIns="0" bIns="0" rtlCol="0" anchor="ctr"/>
-          <a:lstStyle/>
-          <a:p>
-            <a:pPr marL="0" indent="0">
+          <p:cNvPr id="28" name="Text 25"/>
+          <p:cNvSpPr/>
+          <p:nvPr/>
+        </p:nvSpPr>
+        <p:spPr>
+          <a:xfrm>
+            <a:off x="1243584" y="5550408"/>
+            <a:ext cx="10168128" cy="402336"/>
+          </a:xfrm>
+          <a:prstGeom prst="rect">
+            <a:avLst/>
+          </a:prstGeom>
+          <a:noFill/>
+          <a:ln/>
+        </p:spPr>
+        <p:txBody>
+          <a:bodyPr wrap="square" lIns="0" tIns="0" rIns="0" bIns="0" rtlCol="0" anchor="ctr"/>
+          <a:lstStyle/>
+          <a:p>
+            <a:pPr indent="0" marL="0">
               <a:lnSpc>
                 <a:spcPct val="112000"/>
               </a:lnSpc>
@@ -10305,7 +10840,7 @@
       </p:sp>
       <p:sp>
         <p:nvSpPr>
-          <p:cNvPr id="27" name="Slide Number Placeholder 0"/>
+          <p:cNvPr id="25" name="Slide Number Placeholder 0"/>
           <p:cNvSpPr>
             <a:spLocks noGrp="1"/>
           </p:cNvSpPr>
@@ -10323,7 +10858,7 @@
           </a:prstGeom>
           <a:extLst>
             <a:ext uri="{C572A759-6A51-4108-AA02-DFA0A04FC94B}">
-              <ma14:wrappingTextBoxFlag xmlns="" xmlns:ma14="http://schemas.microsoft.com/office/mac/drawingml/2011/main" val="0"/>
+              <ma14:wrappingTextBoxFlag xmlns:ma14="http://schemas.microsoft.com/office/mac/drawingml/2011/main" val="0"/>
             </a:ext>
           </a:extLst>
         </p:spPr>
@@ -10344,7 +10879,7 @@
           <a:p>
             <a:pPr algn="l"/>
             <a:fld id="{F7021451-1387-4CA6-816F-3879F97B5CBC}" type="slidenum">
-              <a:rPr lang="en-US" b="0"/>
+              <a:rPr b="0" lang="en-US"/>
               <a:t>16</a:t>
             </a:fld>
             <a:endParaRPr lang="en-US"/>
@@ -10419,7 +10954,7 @@
           <a:bodyPr wrap="square" lIns="0" tIns="0" rIns="0" bIns="0" rtlCol="0" anchor="ctr"/>
           <a:lstStyle/>
           <a:p>
-            <a:pPr marL="0" indent="0" algn="l">
+            <a:pPr algn="l" indent="0" marL="0">
               <a:buNone/>
             </a:pPr>
             <a:r>
@@ -10458,7 +10993,7 @@
           <a:bodyPr wrap="square" lIns="0" tIns="0" rIns="0" bIns="0" rtlCol="0" anchor="ctr"/>
           <a:lstStyle/>
           <a:p>
-            <a:pPr marL="0" indent="0">
+            <a:pPr indent="0" marL="0">
               <a:buNone/>
             </a:pPr>
             <a:r>
@@ -10524,11 +11059,11 @@
           <a:bodyPr wrap="square" lIns="0" tIns="0" rIns="0" bIns="0" rtlCol="0" anchor="ctr"/>
           <a:lstStyle/>
           <a:p>
-            <a:pPr marL="0" indent="0" algn="ctr">
-              <a:buNone/>
-            </a:pPr>
-            <a:r>
-              <a:rPr lang="en-US" sz="900" b="1" kern="0" spc="100" dirty="0">
+            <a:pPr algn="ctr" indent="0" marL="0">
+              <a:buNone/>
+            </a:pPr>
+            <a:r>
+              <a:rPr lang="en-US" sz="900" b="1" spc="100" kern="0" dirty="0">
                 <a:solidFill>
                   <a:srgbClr val="5A05F4"/>
                 </a:solidFill>
@@ -10544,14 +11079,14 @@
       </p:sp>
       <p:pic>
         <p:nvPicPr>
-          <p:cNvPr id="7" name="Image 0" descr="preencoded.png"/>
+          <p:cNvPr id="7" name="Image 0" descr="preencoded.png">    </p:cNvPr>
           <p:cNvPicPr>
             <a:picLocks noChangeAspect="1"/>
           </p:cNvPicPr>
           <p:nvPr/>
         </p:nvPicPr>
         <p:blipFill>
-          <a:blip r:embed="rId3"/>
+          <a:blip r:embed="rId1"/>
           <a:stretch>
             <a:fillRect/>
           </a:stretch>
@@ -10609,7 +11144,7 @@
           <a:bodyPr wrap="square" lIns="0" tIns="0" rIns="0" bIns="0" rtlCol="0" anchor="ctr"/>
           <a:lstStyle/>
           <a:p>
-            <a:pPr marL="0" indent="0" algn="ctr">
+            <a:pPr algn="ctr" indent="0" marL="0">
               <a:buNone/>
             </a:pPr>
             <a:r>
@@ -10713,7 +11248,7 @@
           <a:bodyPr wrap="square" lIns="0" tIns="0" rIns="0" bIns="0" rtlCol="0" anchor="ctr"/>
           <a:lstStyle/>
           <a:p>
-            <a:pPr marL="0" indent="0" algn="ctr">
+            <a:pPr algn="ctr" indent="0" marL="0">
               <a:buNone/>
             </a:pPr>
             <a:r>
@@ -10774,7 +11309,7 @@
           <a:bodyPr wrap="square" lIns="0" tIns="0" rIns="0" bIns="0" rtlCol="0" anchor="ctr"/>
           <a:lstStyle/>
           <a:p>
-            <a:pPr marL="0" indent="0">
+            <a:pPr indent="0" marL="0">
               <a:buNone/>
             </a:pPr>
             <a:r>
@@ -10813,7 +11348,7 @@
           <a:bodyPr wrap="square" lIns="0" tIns="0" rIns="0" bIns="0" rtlCol="0" anchor="t"/>
           <a:lstStyle/>
           <a:p>
-            <a:pPr marL="0" indent="0">
+            <a:pPr indent="0" marL="0">
               <a:lnSpc>
                 <a:spcPct val="108000"/>
               </a:lnSpc>
@@ -10877,7 +11412,7 @@
           <a:bodyPr wrap="square" lIns="0" tIns="0" rIns="0" bIns="0" rtlCol="0" anchor="ctr"/>
           <a:lstStyle/>
           <a:p>
-            <a:pPr marL="0" indent="0">
+            <a:pPr indent="0" marL="0">
               <a:buNone/>
             </a:pPr>
             <a:r>
@@ -10916,7 +11451,7 @@
           <a:bodyPr wrap="square" lIns="0" tIns="0" rIns="0" bIns="0" rtlCol="0" anchor="t"/>
           <a:lstStyle/>
           <a:p>
-            <a:pPr marL="0" indent="0">
+            <a:pPr indent="0" marL="0">
               <a:lnSpc>
                 <a:spcPct val="108000"/>
               </a:lnSpc>
@@ -10966,30 +11501,89 @@
       </p:sp>
       <p:sp>
         <p:nvSpPr>
-          <p:cNvPr id="21" name="Text 18"/>
-          <p:cNvSpPr/>
-          <p:nvPr/>
-        </p:nvSpPr>
-        <p:spPr>
-          <a:xfrm>
-            <a:off x="786384" y="5111496"/>
-            <a:ext cx="10625328" cy="219456"/>
-          </a:xfrm>
-          <a:prstGeom prst="rect">
-            <a:avLst/>
-          </a:prstGeom>
-          <a:noFill/>
-          <a:ln/>
-        </p:spPr>
-        <p:txBody>
-          <a:bodyPr wrap="square" lIns="0" tIns="0" rIns="0" bIns="0" rtlCol="0" anchor="ctr"/>
-          <a:lstStyle/>
-          <a:p>
-            <a:pPr marL="0" indent="0">
-              <a:buNone/>
-            </a:pPr>
-            <a:r>
-              <a:rPr lang="en-US" sz="950" b="1" kern="0" spc="150" dirty="0">
+          <p:cNvPr id="21" name="Shape 18"/>
+          <p:cNvSpPr/>
+          <p:nvPr/>
+        </p:nvSpPr>
+        <p:spPr>
+          <a:xfrm>
+            <a:off x="749808" y="5262372"/>
+            <a:ext cx="310896" cy="310896"/>
+          </a:xfrm>
+          <a:prstGeom prst="ellipse">
+            <a:avLst/>
+          </a:prstGeom>
+          <a:solidFill>
+            <a:srgbClr val="B3261E"/>
+          </a:solidFill>
+          <a:ln/>
+        </p:spPr>
+      </p:sp>
+      <p:sp>
+        <p:nvSpPr>
+          <p:cNvPr id="22" name="Text 19"/>
+          <p:cNvSpPr/>
+          <p:nvPr/>
+        </p:nvSpPr>
+        <p:spPr>
+          <a:xfrm>
+            <a:off x="749808" y="5262372"/>
+            <a:ext cx="310896" cy="310896"/>
+          </a:xfrm>
+          <a:prstGeom prst="rect">
+            <a:avLst/>
+          </a:prstGeom>
+          <a:noFill/>
+          <a:ln/>
+        </p:spPr>
+        <p:txBody>
+          <a:bodyPr wrap="square" lIns="0" tIns="0" rIns="0" bIns="0" rtlCol="0" anchor="ctr"/>
+          <a:lstStyle/>
+          <a:p>
+            <a:pPr algn="ctr" indent="0" marL="0">
+              <a:buNone/>
+            </a:pPr>
+            <a:r>
+              <a:rPr lang="en-US" sz="1200" b="1" dirty="0">
+                <a:solidFill>
+                  <a:srgbClr val="FFFFFF"/>
+                </a:solidFill>
+                <a:latin typeface="Arial" pitchFamily="34" charset="0"/>
+                <a:ea typeface="Arial" pitchFamily="34" charset="-122"/>
+                <a:cs typeface="Arial" pitchFamily="34" charset="-120"/>
+              </a:rPr>
+              <a:t>✕</a:t>
+            </a:r>
+            <a:endParaRPr lang="en-US" sz="1200" dirty="0"/>
+          </a:p>
+        </p:txBody>
+      </p:sp>
+      <p:sp>
+        <p:nvSpPr>
+          <p:cNvPr id="23" name="Text 20"/>
+          <p:cNvSpPr/>
+          <p:nvPr/>
+        </p:nvSpPr>
+        <p:spPr>
+          <a:xfrm>
+            <a:off x="1243584" y="5111496"/>
+            <a:ext cx="10168128" cy="219456"/>
+          </a:xfrm>
+          <a:prstGeom prst="rect">
+            <a:avLst/>
+          </a:prstGeom>
+          <a:noFill/>
+          <a:ln/>
+        </p:spPr>
+        <p:txBody>
+          <a:bodyPr wrap="square" lIns="0" tIns="0" rIns="0" bIns="0" rtlCol="0" anchor="ctr"/>
+          <a:lstStyle/>
+          <a:p>
+            <a:pPr indent="0" marL="0">
+              <a:buNone/>
+            </a:pPr>
+            <a:r>
+              <a:rPr lang="en-US" sz="950" b="1" spc="150" kern="0" dirty="0">
                 <a:solidFill>
                   <a:srgbClr val="B3261E"/>
                 </a:solidFill>
@@ -11005,26 +11599,26 @@
       </p:sp>
       <p:sp>
         <p:nvSpPr>
-          <p:cNvPr id="22" name="Text 19"/>
-          <p:cNvSpPr/>
-          <p:nvPr/>
-        </p:nvSpPr>
-        <p:spPr>
-          <a:xfrm>
-            <a:off x="786384" y="5367528"/>
-            <a:ext cx="10625328" cy="356616"/>
-          </a:xfrm>
-          <a:prstGeom prst="rect">
-            <a:avLst/>
-          </a:prstGeom>
-          <a:noFill/>
-          <a:ln/>
-        </p:spPr>
-        <p:txBody>
-          <a:bodyPr wrap="square" lIns="0" tIns="0" rIns="0" bIns="0" rtlCol="0" anchor="ctr"/>
-          <a:lstStyle/>
-          <a:p>
-            <a:pPr marL="0" indent="0">
+          <p:cNvPr id="24" name="Text 21"/>
+          <p:cNvSpPr/>
+          <p:nvPr/>
+        </p:nvSpPr>
+        <p:spPr>
+          <a:xfrm>
+            <a:off x="1243584" y="5367528"/>
+            <a:ext cx="10168128" cy="356616"/>
+          </a:xfrm>
+          <a:prstGeom prst="rect">
+            <a:avLst/>
+          </a:prstGeom>
+          <a:noFill/>
+          <a:ln/>
+        </p:spPr>
+        <p:txBody>
+          <a:bodyPr wrap="square" lIns="0" tIns="0" rIns="0" bIns="0" rtlCol="0" anchor="ctr"/>
+          <a:lstStyle/>
+          <a:p>
+            <a:pPr indent="0" marL="0">
               <a:lnSpc>
                 <a:spcPct val="112000"/>
               </a:lnSpc>
@@ -11065,7 +11659,7 @@
           </a:prstGeom>
           <a:extLst>
             <a:ext uri="{C572A759-6A51-4108-AA02-DFA0A04FC94B}">
-              <ma14:wrappingTextBoxFlag xmlns="" xmlns:ma14="http://schemas.microsoft.com/office/mac/drawingml/2011/main" val="0"/>
+              <ma14:wrappingTextBoxFlag xmlns:ma14="http://schemas.microsoft.com/office/mac/drawingml/2011/main" val="0"/>
             </a:ext>
           </a:extLst>
         </p:spPr>
@@ -11086,7 +11680,7 @@
           <a:p>
             <a:pPr algn="l"/>
             <a:fld id="{F7021451-1387-4CA6-816F-3879F97B5CBC}" type="slidenum">
-              <a:rPr lang="en-US" b="0"/>
+              <a:rPr b="0" lang="en-US"/>
               <a:t>17</a:t>
             </a:fld>
             <a:endParaRPr lang="en-US"/>
@@ -11161,7 +11755,7 @@
           <a:bodyPr wrap="square" lIns="0" tIns="0" rIns="0" bIns="0" rtlCol="0" anchor="ctr"/>
           <a:lstStyle/>
           <a:p>
-            <a:pPr marL="0" indent="0" algn="l">
+            <a:pPr algn="l" indent="0" marL="0">
               <a:buNone/>
             </a:pPr>
             <a:r>
@@ -11200,7 +11794,7 @@
           <a:bodyPr wrap="square" lIns="0" tIns="0" rIns="0" bIns="0" rtlCol="0" anchor="ctr"/>
           <a:lstStyle/>
           <a:p>
-            <a:pPr marL="0" indent="0">
+            <a:pPr indent="0" marL="0">
               <a:buNone/>
             </a:pPr>
             <a:r>
@@ -11266,11 +11860,11 @@
           <a:bodyPr wrap="square" lIns="0" tIns="0" rIns="0" bIns="0" rtlCol="0" anchor="ctr"/>
           <a:lstStyle/>
           <a:p>
-            <a:pPr marL="0" indent="0" algn="ctr">
-              <a:buNone/>
-            </a:pPr>
-            <a:r>
-              <a:rPr lang="en-US" sz="900" b="1" kern="0" spc="100" dirty="0">
+            <a:pPr algn="ctr" indent="0" marL="0">
+              <a:buNone/>
+            </a:pPr>
+            <a:r>
+              <a:rPr lang="en-US" sz="900" b="1" spc="100" kern="0" dirty="0">
                 <a:solidFill>
                   <a:srgbClr val="5A05F4"/>
                 </a:solidFill>
@@ -11332,11 +11926,11 @@
           <a:bodyPr wrap="square" lIns="0" tIns="0" rIns="0" bIns="0" rtlCol="0" anchor="ctr"/>
           <a:lstStyle/>
           <a:p>
-            <a:pPr marL="0" indent="0" algn="ctr">
-              <a:buNone/>
-            </a:pPr>
-            <a:r>
-              <a:rPr lang="en-US" sz="900" b="1" kern="0" spc="100" dirty="0">
+            <a:pPr algn="ctr" indent="0" marL="0">
+              <a:buNone/>
+            </a:pPr>
+            <a:r>
+              <a:rPr lang="en-US" sz="900" b="1" spc="100" kern="0" dirty="0">
                 <a:solidFill>
                   <a:srgbClr val="434343"/>
                 </a:solidFill>
@@ -11352,14 +11946,14 @@
       </p:sp>
       <p:pic>
         <p:nvPicPr>
-          <p:cNvPr id="9" name="Image 0" descr="preencoded.png"/>
+          <p:cNvPr id="9" name="Image 0" descr="preencoded.png">    </p:cNvPr>
           <p:cNvPicPr>
             <a:picLocks noChangeAspect="1"/>
           </p:cNvPicPr>
           <p:nvPr/>
         </p:nvPicPr>
         <p:blipFill>
-          <a:blip r:embed="rId3"/>
+          <a:blip r:embed="rId1"/>
           <a:stretch>
             <a:fillRect/>
           </a:stretch>
@@ -11437,7 +12031,7 @@
           <a:bodyPr wrap="square" lIns="0" tIns="0" rIns="0" bIns="0" rtlCol="0" anchor="ctr"/>
           <a:lstStyle/>
           <a:p>
-            <a:pPr marL="0" indent="0" algn="ctr">
+            <a:pPr algn="ctr" indent="0" marL="0">
               <a:buNone/>
             </a:pPr>
             <a:r>
@@ -11476,7 +12070,7 @@
           <a:bodyPr wrap="square" lIns="0" tIns="0" rIns="0" bIns="0" rtlCol="0" anchor="ctr"/>
           <a:lstStyle/>
           <a:p>
-            <a:pPr marL="0" indent="0">
+            <a:pPr indent="0" marL="0">
               <a:buNone/>
             </a:pPr>
             <a:r>
@@ -11515,7 +12109,7 @@
           <a:bodyPr wrap="square" lIns="0" tIns="0" rIns="0" bIns="0" rtlCol="0" anchor="t"/>
           <a:lstStyle/>
           <a:p>
-            <a:pPr marL="0" indent="0">
+            <a:pPr indent="0" marL="0">
               <a:lnSpc>
                 <a:spcPct val="108000"/>
               </a:lnSpc>
@@ -11599,7 +12193,7 @@
           <a:bodyPr wrap="square" lIns="0" tIns="0" rIns="0" bIns="0" rtlCol="0" anchor="ctr"/>
           <a:lstStyle/>
           <a:p>
-            <a:pPr marL="0" indent="0" algn="ctr">
+            <a:pPr algn="ctr" indent="0" marL="0">
               <a:buNone/>
             </a:pPr>
             <a:r>
@@ -11638,7 +12232,7 @@
           <a:bodyPr wrap="square" lIns="0" tIns="0" rIns="0" bIns="0" rtlCol="0" anchor="ctr"/>
           <a:lstStyle/>
           <a:p>
-            <a:pPr marL="0" indent="0">
+            <a:pPr indent="0" marL="0">
               <a:buNone/>
             </a:pPr>
             <a:r>
@@ -11677,7 +12271,7 @@
           <a:bodyPr wrap="square" lIns="0" tIns="0" rIns="0" bIns="0" rtlCol="0" anchor="t"/>
           <a:lstStyle/>
           <a:p>
-            <a:pPr marL="0" indent="0">
+            <a:pPr indent="0" marL="0">
               <a:lnSpc>
                 <a:spcPct val="108000"/>
               </a:lnSpc>
@@ -11761,7 +12355,7 @@
           <a:bodyPr wrap="square" lIns="0" tIns="0" rIns="0" bIns="0" rtlCol="0" anchor="ctr"/>
           <a:lstStyle/>
           <a:p>
-            <a:pPr marL="0" indent="0" algn="ctr">
+            <a:pPr algn="ctr" indent="0" marL="0">
               <a:buNone/>
             </a:pPr>
             <a:r>
@@ -11800,7 +12394,7 @@
           <a:bodyPr wrap="square" lIns="0" tIns="0" rIns="0" bIns="0" rtlCol="0" anchor="ctr"/>
           <a:lstStyle/>
           <a:p>
-            <a:pPr marL="0" indent="0">
+            <a:pPr indent="0" marL="0">
               <a:buNone/>
             </a:pPr>
             <a:r>
@@ -11839,7 +12433,7 @@
           <a:bodyPr wrap="square" lIns="0" tIns="0" rIns="0" bIns="0" rtlCol="0" anchor="t"/>
           <a:lstStyle/>
           <a:p>
-            <a:pPr marL="0" indent="0">
+            <a:pPr indent="0" marL="0">
               <a:lnSpc>
                 <a:spcPct val="108000"/>
               </a:lnSpc>
@@ -11869,7 +12463,7 @@
         <p:spPr>
           <a:xfrm>
             <a:off x="566928" y="4023360"/>
-            <a:ext cx="10927080" cy="1234440"/>
+            <a:ext cx="11064240" cy="1234440"/>
           </a:xfrm>
           <a:prstGeom prst="roundRect">
             <a:avLst>
@@ -11903,11 +12497,11 @@
           <a:bodyPr wrap="square" lIns="0" tIns="0" rIns="0" bIns="0" rtlCol="0" anchor="ctr"/>
           <a:lstStyle/>
           <a:p>
-            <a:pPr marL="0" indent="0">
-              <a:buNone/>
-            </a:pPr>
-            <a:r>
-              <a:rPr lang="en-US" sz="950" b="1" kern="0" spc="150" dirty="0">
+            <a:pPr indent="0" marL="0">
+              <a:buNone/>
+            </a:pPr>
+            <a:r>
+              <a:rPr lang="en-US" sz="950" b="1" spc="150" kern="0" dirty="0">
                 <a:solidFill>
                   <a:srgbClr val="FFFFFF"/>
                 </a:solidFill>
@@ -11942,7 +12536,7 @@
           <a:bodyPr wrap="square" lIns="0" tIns="0" rIns="0" bIns="0" rtlCol="0" anchor="ctr"/>
           <a:lstStyle/>
           <a:p>
-            <a:pPr marL="0" indent="0">
+            <a:pPr indent="0" marL="0">
               <a:lnSpc>
                 <a:spcPct val="112000"/>
               </a:lnSpc>
@@ -11965,7 +12559,7 @@
       </p:sp>
       <p:sp>
         <p:nvSpPr>
-          <p:cNvPr id="28" name="Slide Number Placeholder 0"/>
+          <p:cNvPr id="25" name="Slide Number Placeholder 0"/>
           <p:cNvSpPr>
             <a:spLocks noGrp="1"/>
           </p:cNvSpPr>
@@ -11983,7 +12577,7 @@
           </a:prstGeom>
           <a:extLst>
             <a:ext uri="{C572A759-6A51-4108-AA02-DFA0A04FC94B}">
-              <ma14:wrappingTextBoxFlag xmlns="" xmlns:ma14="http://schemas.microsoft.com/office/mac/drawingml/2011/main" val="0"/>
+              <ma14:wrappingTextBoxFlag xmlns:ma14="http://schemas.microsoft.com/office/mac/drawingml/2011/main" val="0"/>
             </a:ext>
           </a:extLst>
         </p:spPr>
@@ -12004,7 +12598,7 @@
           <a:p>
             <a:pPr algn="l"/>
             <a:fld id="{F7021451-1387-4CA6-816F-3879F97B5CBC}" type="slidenum">
-              <a:rPr lang="en-US" b="0"/>
+              <a:rPr b="0" lang="en-US"/>
               <a:t>18</a:t>
             </a:fld>
             <a:endParaRPr lang="en-US"/>
@@ -12057,11 +12651,11 @@
           <a:bodyPr wrap="square" lIns="0" tIns="0" rIns="0" bIns="0" rtlCol="0" anchor="ctr"/>
           <a:lstStyle/>
           <a:p>
-            <a:pPr marL="0" indent="0">
-              <a:buNone/>
-            </a:pPr>
-            <a:r>
-              <a:rPr lang="en-US" sz="1200" b="1" kern="0" spc="400" dirty="0">
+            <a:pPr indent="0" marL="0">
+              <a:buNone/>
+            </a:pPr>
+            <a:r>
+              <a:rPr lang="en-US" sz="1200" b="1" spc="400" kern="0" dirty="0">
                 <a:solidFill>
                   <a:srgbClr val="FFFFFF"/>
                 </a:solidFill>
@@ -12096,7 +12690,7 @@
           <a:bodyPr wrap="square" lIns="0" tIns="0" rIns="0" bIns="0" rtlCol="0" anchor="ctr"/>
           <a:lstStyle/>
           <a:p>
-            <a:pPr marL="0" indent="0">
+            <a:pPr indent="0" marL="0">
               <a:buNone/>
             </a:pPr>
             <a:r>
@@ -12135,7 +12729,7 @@
           <a:bodyPr wrap="square" lIns="0" tIns="0" rIns="0" bIns="0" rtlCol="0" anchor="t"/>
           <a:lstStyle/>
           <a:p>
-            <a:pPr marL="0" indent="0">
+            <a:pPr indent="0" marL="0">
               <a:buNone/>
             </a:pPr>
             <a:r>
@@ -12196,7 +12790,7 @@
           <a:bodyPr wrap="square" lIns="0" tIns="0" rIns="0" bIns="0" rtlCol="0" anchor="ctr"/>
           <a:lstStyle/>
           <a:p>
-            <a:pPr marL="0" indent="0" algn="ctr">
+            <a:pPr algn="ctr" indent="0" marL="0">
               <a:buNone/>
             </a:pPr>
             <a:r>
@@ -12282,7 +12876,7 @@
           <a:bodyPr wrap="square" lIns="0" tIns="0" rIns="0" bIns="0" rtlCol="0" anchor="ctr"/>
           <a:lstStyle/>
           <a:p>
-            <a:pPr marL="0" indent="0">
+            <a:pPr indent="0" marL="0">
               <a:buNone/>
             </a:pPr>
             <a:r>
@@ -12321,7 +12915,7 @@
           <a:bodyPr wrap="square" lIns="0" tIns="0" rIns="0" bIns="0" rtlCol="0" anchor="t"/>
           <a:lstStyle/>
           <a:p>
-            <a:pPr marL="0" indent="0">
+            <a:pPr indent="0" marL="0">
               <a:lnSpc>
                 <a:spcPct val="100000"/>
               </a:lnSpc>
@@ -12390,11 +12984,11 @@
           <a:bodyPr wrap="square" lIns="0" tIns="0" rIns="0" bIns="0" rtlCol="0" anchor="ctr"/>
           <a:lstStyle/>
           <a:p>
-            <a:pPr marL="0" indent="0" algn="ctr">
-              <a:buNone/>
-            </a:pPr>
-            <a:r>
-              <a:rPr lang="en-US" sz="900" b="1" kern="0" spc="100" dirty="0">
+            <a:pPr algn="ctr" indent="0" marL="0">
+              <a:buNone/>
+            </a:pPr>
+            <a:r>
+              <a:rPr lang="en-US" sz="900" b="1" spc="100" kern="0" dirty="0">
                 <a:solidFill>
                   <a:srgbClr val="5A05F4"/>
                 </a:solidFill>
@@ -12410,14 +13004,14 @@
       </p:sp>
       <p:pic>
         <p:nvPicPr>
-          <p:cNvPr id="7" name="Image 0" descr="preencoded.png"/>
+          <p:cNvPr id="7" name="Image 0" descr="preencoded.png">    </p:cNvPr>
           <p:cNvPicPr>
             <a:picLocks noChangeAspect="1"/>
           </p:cNvPicPr>
           <p:nvPr/>
         </p:nvPicPr>
         <p:blipFill>
-          <a:blip r:embed="rId3"/>
+          <a:blip r:embed="rId1"/>
           <a:stretch>
             <a:fillRect/>
           </a:stretch>
@@ -12495,7 +13089,7 @@
           <a:bodyPr wrap="square" lIns="0" tIns="0" rIns="0" bIns="0" rtlCol="0" anchor="ctr"/>
           <a:lstStyle/>
           <a:p>
-            <a:pPr marL="0" indent="0" algn="ctr">
+            <a:pPr algn="ctr" indent="0" marL="0">
               <a:buNone/>
             </a:pPr>
             <a:r>
@@ -12534,7 +13128,7 @@
           <a:bodyPr wrap="square" lIns="0" tIns="0" rIns="0" bIns="0" rtlCol="0" anchor="ctr"/>
           <a:lstStyle/>
           <a:p>
-            <a:pPr marL="0" indent="0">
+            <a:pPr indent="0" marL="0">
               <a:buNone/>
             </a:pPr>
             <a:r>
@@ -12573,7 +13167,7 @@
           <a:bodyPr wrap="square" lIns="0" tIns="0" rIns="0" bIns="0" rtlCol="0" anchor="t"/>
           <a:lstStyle/>
           <a:p>
-            <a:pPr marL="0" indent="0">
+            <a:pPr indent="0" marL="0">
               <a:lnSpc>
                 <a:spcPct val="108000"/>
               </a:lnSpc>
@@ -12657,7 +13251,7 @@
           <a:bodyPr wrap="square" lIns="0" tIns="0" rIns="0" bIns="0" rtlCol="0" anchor="ctr"/>
           <a:lstStyle/>
           <a:p>
-            <a:pPr marL="0" indent="0" algn="ctr">
+            <a:pPr algn="ctr" indent="0" marL="0">
               <a:buNone/>
             </a:pPr>
             <a:r>
@@ -12696,7 +13290,7 @@
           <a:bodyPr wrap="square" lIns="0" tIns="0" rIns="0" bIns="0" rtlCol="0" anchor="ctr"/>
           <a:lstStyle/>
           <a:p>
-            <a:pPr marL="0" indent="0">
+            <a:pPr indent="0" marL="0">
               <a:buNone/>
             </a:pPr>
             <a:r>
@@ -12735,7 +13329,7 @@
           <a:bodyPr wrap="square" lIns="0" tIns="0" rIns="0" bIns="0" rtlCol="0" anchor="t"/>
           <a:lstStyle/>
           <a:p>
-            <a:pPr marL="0" indent="0">
+            <a:pPr indent="0" marL="0">
               <a:lnSpc>
                 <a:spcPct val="108000"/>
               </a:lnSpc>
@@ -12819,7 +13413,7 @@
           <a:bodyPr wrap="square" lIns="0" tIns="0" rIns="0" bIns="0" rtlCol="0" anchor="ctr"/>
           <a:lstStyle/>
           <a:p>
-            <a:pPr marL="0" indent="0" algn="ctr">
+            <a:pPr algn="ctr" indent="0" marL="0">
               <a:buNone/>
             </a:pPr>
             <a:r>
@@ -12858,7 +13452,7 @@
           <a:bodyPr wrap="square" lIns="0" tIns="0" rIns="0" bIns="0" rtlCol="0" anchor="ctr"/>
           <a:lstStyle/>
           <a:p>
-            <a:pPr marL="0" indent="0">
+            <a:pPr indent="0" marL="0">
               <a:buNone/>
             </a:pPr>
             <a:r>
@@ -12897,7 +13491,7 @@
           <a:bodyPr wrap="square" lIns="0" tIns="0" rIns="0" bIns="0" rtlCol="0" anchor="t"/>
           <a:lstStyle/>
           <a:p>
-            <a:pPr marL="0" indent="0">
+            <a:pPr indent="0" marL="0">
               <a:lnSpc>
                 <a:spcPct val="108000"/>
               </a:lnSpc>
@@ -12981,7 +13575,7 @@
           <a:bodyPr wrap="square" lIns="0" tIns="0" rIns="0" bIns="0" rtlCol="0" anchor="ctr"/>
           <a:lstStyle/>
           <a:p>
-            <a:pPr marL="0" indent="0" algn="ctr">
+            <a:pPr algn="ctr" indent="0" marL="0">
               <a:buNone/>
             </a:pPr>
             <a:r>
@@ -13020,7 +13614,7 @@
           <a:bodyPr wrap="square" lIns="0" tIns="0" rIns="0" bIns="0" rtlCol="0" anchor="ctr"/>
           <a:lstStyle/>
           <a:p>
-            <a:pPr marL="0" indent="0">
+            <a:pPr indent="0" marL="0">
               <a:buNone/>
             </a:pPr>
             <a:r>
@@ -13059,7 +13653,7 @@
           <a:bodyPr wrap="square" lIns="0" tIns="0" rIns="0" bIns="0" rtlCol="0" anchor="t"/>
           <a:lstStyle/>
           <a:p>
-            <a:pPr marL="0" indent="0">
+            <a:pPr indent="0" marL="0">
               <a:lnSpc>
                 <a:spcPct val="108000"/>
               </a:lnSpc>
@@ -13143,7 +13737,7 @@
           <a:bodyPr wrap="square" lIns="0" tIns="0" rIns="0" bIns="0" rtlCol="0" anchor="ctr"/>
           <a:lstStyle/>
           <a:p>
-            <a:pPr marL="0" indent="0" algn="ctr">
+            <a:pPr algn="ctr" indent="0" marL="0">
               <a:buNone/>
             </a:pPr>
             <a:r>
@@ -13182,7 +13776,7 @@
           <a:bodyPr wrap="square" lIns="0" tIns="0" rIns="0" bIns="0" rtlCol="0" anchor="ctr"/>
           <a:lstStyle/>
           <a:p>
-            <a:pPr marL="0" indent="0">
+            <a:pPr indent="0" marL="0">
               <a:buNone/>
             </a:pPr>
             <a:r>
@@ -13221,7 +13815,7 @@
           <a:bodyPr wrap="square" lIns="0" tIns="0" rIns="0" bIns="0" rtlCol="0" anchor="t"/>
           <a:lstStyle/>
           <a:p>
-            <a:pPr marL="0" indent="0">
+            <a:pPr indent="0" marL="0">
               <a:lnSpc>
                 <a:spcPct val="108000"/>
               </a:lnSpc>
@@ -13244,7 +13838,7 @@
       </p:sp>
       <p:sp>
         <p:nvSpPr>
-          <p:cNvPr id="33" name="Slide Number Placeholder 0"/>
+          <p:cNvPr id="25" name="Slide Number Placeholder 0"/>
           <p:cNvSpPr>
             <a:spLocks noGrp="1"/>
           </p:cNvSpPr>
@@ -13262,7 +13856,7 @@
           </a:prstGeom>
           <a:extLst>
             <a:ext uri="{C572A759-6A51-4108-AA02-DFA0A04FC94B}">
-              <ma14:wrappingTextBoxFlag xmlns="" xmlns:ma14="http://schemas.microsoft.com/office/mac/drawingml/2011/main" val="0"/>
+              <ma14:wrappingTextBoxFlag xmlns:ma14="http://schemas.microsoft.com/office/mac/drawingml/2011/main" val="0"/>
             </a:ext>
           </a:extLst>
         </p:spPr>
@@ -13283,7 +13877,7 @@
           <a:p>
             <a:pPr algn="l"/>
             <a:fld id="{F7021451-1387-4CA6-816F-3879F97B5CBC}" type="slidenum">
-              <a:rPr lang="en-US" b="0"/>
+              <a:rPr b="0" lang="en-US"/>
               <a:t>2</a:t>
             </a:fld>
             <a:endParaRPr lang="en-US"/>
@@ -13358,7 +13952,7 @@
           <a:bodyPr wrap="square" lIns="0" tIns="0" rIns="0" bIns="0" rtlCol="0" anchor="ctr"/>
           <a:lstStyle/>
           <a:p>
-            <a:pPr marL="0" indent="0">
+            <a:pPr indent="0" marL="0">
               <a:buNone/>
             </a:pPr>
             <a:r>
@@ -13419,11 +14013,11 @@
           <a:bodyPr wrap="square" lIns="0" tIns="0" rIns="0" bIns="0" rtlCol="0" anchor="ctr"/>
           <a:lstStyle/>
           <a:p>
-            <a:pPr marL="0" indent="0" algn="ctr">
-              <a:buNone/>
-            </a:pPr>
-            <a:r>
-              <a:rPr lang="en-US" sz="900" b="1" kern="0" spc="100" dirty="0">
+            <a:pPr algn="ctr" indent="0" marL="0">
+              <a:buNone/>
+            </a:pPr>
+            <a:r>
+              <a:rPr lang="en-US" sz="900" b="1" spc="100" kern="0" dirty="0">
                 <a:solidFill>
                   <a:srgbClr val="FFFFFF"/>
                 </a:solidFill>
@@ -13439,14 +14033,14 @@
       </p:sp>
       <p:pic>
         <p:nvPicPr>
-          <p:cNvPr id="6" name="Image 0" descr="preencoded.png"/>
+          <p:cNvPr id="6" name="Image 0" descr="preencoded.png">    </p:cNvPr>
           <p:cNvPicPr>
             <a:picLocks noChangeAspect="1"/>
           </p:cNvPicPr>
           <p:nvPr/>
         </p:nvPicPr>
         <p:blipFill>
-          <a:blip r:embed="rId3"/>
+          <a:blip r:embed="rId1"/>
           <a:stretch>
             <a:fillRect/>
           </a:stretch>
@@ -13524,7 +14118,7 @@
           <a:bodyPr wrap="square" lIns="0" tIns="0" rIns="0" bIns="0" rtlCol="0" anchor="ctr"/>
           <a:lstStyle/>
           <a:p>
-            <a:pPr marL="0" indent="0" algn="ctr">
+            <a:pPr algn="ctr" indent="0" marL="0">
               <a:buNone/>
             </a:pPr>
             <a:r>
@@ -13563,7 +14157,7 @@
           <a:bodyPr wrap="square" lIns="0" tIns="0" rIns="0" bIns="0" rtlCol="0" anchor="ctr"/>
           <a:lstStyle/>
           <a:p>
-            <a:pPr marL="0" indent="0">
+            <a:pPr indent="0" marL="0">
               <a:buNone/>
             </a:pPr>
             <a:r>
@@ -13602,7 +14196,7 @@
           <a:bodyPr wrap="square" lIns="0" tIns="0" rIns="0" bIns="0" rtlCol="0" anchor="t"/>
           <a:lstStyle/>
           <a:p>
-            <a:pPr marL="0" indent="0">
+            <a:pPr indent="0" marL="0">
               <a:lnSpc>
                 <a:spcPct val="108000"/>
               </a:lnSpc>
@@ -13686,7 +14280,7 @@
           <a:bodyPr wrap="square" lIns="0" tIns="0" rIns="0" bIns="0" rtlCol="0" anchor="ctr"/>
           <a:lstStyle/>
           <a:p>
-            <a:pPr marL="0" indent="0" algn="ctr">
+            <a:pPr algn="ctr" indent="0" marL="0">
               <a:buNone/>
             </a:pPr>
             <a:r>
@@ -13725,7 +14319,7 @@
           <a:bodyPr wrap="square" lIns="0" tIns="0" rIns="0" bIns="0" rtlCol="0" anchor="ctr"/>
           <a:lstStyle/>
           <a:p>
-            <a:pPr marL="0" indent="0">
+            <a:pPr indent="0" marL="0">
               <a:buNone/>
             </a:pPr>
             <a:r>
@@ -13764,7 +14358,7 @@
           <a:bodyPr wrap="square" lIns="0" tIns="0" rIns="0" bIns="0" rtlCol="0" anchor="t"/>
           <a:lstStyle/>
           <a:p>
-            <a:pPr marL="0" indent="0">
+            <a:pPr indent="0" marL="0">
               <a:lnSpc>
                 <a:spcPct val="108000"/>
               </a:lnSpc>
@@ -13848,7 +14442,7 @@
           <a:bodyPr wrap="square" lIns="0" tIns="0" rIns="0" bIns="0" rtlCol="0" anchor="ctr"/>
           <a:lstStyle/>
           <a:p>
-            <a:pPr marL="0" indent="0" algn="ctr">
+            <a:pPr algn="ctr" indent="0" marL="0">
               <a:buNone/>
             </a:pPr>
             <a:r>
@@ -13887,7 +14481,7 @@
           <a:bodyPr wrap="square" lIns="0" tIns="0" rIns="0" bIns="0" rtlCol="0" anchor="ctr"/>
           <a:lstStyle/>
           <a:p>
-            <a:pPr marL="0" indent="0">
+            <a:pPr indent="0" marL="0">
               <a:buNone/>
             </a:pPr>
             <a:r>
@@ -13926,7 +14520,7 @@
           <a:bodyPr wrap="square" lIns="0" tIns="0" rIns="0" bIns="0" rtlCol="0" anchor="t"/>
           <a:lstStyle/>
           <a:p>
-            <a:pPr marL="0" indent="0">
+            <a:pPr indent="0" marL="0">
               <a:lnSpc>
                 <a:spcPct val="108000"/>
               </a:lnSpc>
@@ -14010,7 +14604,7 @@
           <a:bodyPr wrap="square" lIns="0" tIns="0" rIns="0" bIns="0" rtlCol="0" anchor="ctr"/>
           <a:lstStyle/>
           <a:p>
-            <a:pPr marL="0" indent="0" algn="ctr">
+            <a:pPr algn="ctr" indent="0" marL="0">
               <a:buNone/>
             </a:pPr>
             <a:r>
@@ -14049,7 +14643,7 @@
           <a:bodyPr wrap="square" lIns="0" tIns="0" rIns="0" bIns="0" rtlCol="0" anchor="ctr"/>
           <a:lstStyle/>
           <a:p>
-            <a:pPr marL="0" indent="0">
+            <a:pPr indent="0" marL="0">
               <a:buNone/>
             </a:pPr>
             <a:r>
@@ -14088,7 +14682,7 @@
           <a:bodyPr wrap="square" lIns="0" tIns="0" rIns="0" bIns="0" rtlCol="0" anchor="t"/>
           <a:lstStyle/>
           <a:p>
-            <a:pPr marL="0" indent="0">
+            <a:pPr indent="0" marL="0">
               <a:lnSpc>
                 <a:spcPct val="108000"/>
               </a:lnSpc>
@@ -14118,7 +14712,7 @@
         <p:spPr>
           <a:xfrm>
             <a:off x="566928" y="5074920"/>
-            <a:ext cx="11247120" cy="1051560"/>
+            <a:ext cx="11064240" cy="1051560"/>
           </a:xfrm>
           <a:prstGeom prst="roundRect">
             <a:avLst>
@@ -14133,30 +14727,89 @@
       </p:sp>
       <p:sp>
         <p:nvSpPr>
-          <p:cNvPr id="28" name="Text 25"/>
-          <p:cNvSpPr/>
-          <p:nvPr/>
-        </p:nvSpPr>
-        <p:spPr>
-          <a:xfrm>
-            <a:off x="786384" y="5202936"/>
-            <a:ext cx="10625328" cy="219456"/>
-          </a:xfrm>
-          <a:prstGeom prst="rect">
-            <a:avLst/>
-          </a:prstGeom>
-          <a:noFill/>
-          <a:ln/>
-        </p:spPr>
-        <p:txBody>
-          <a:bodyPr wrap="square" lIns="0" tIns="0" rIns="0" bIns="0" rtlCol="0" anchor="ctr"/>
-          <a:lstStyle/>
-          <a:p>
-            <a:pPr marL="0" indent="0">
-              <a:buNone/>
-            </a:pPr>
-            <a:r>
-              <a:rPr lang="en-US" sz="950" b="1" kern="0" spc="150" dirty="0">
+          <p:cNvPr id="28" name="Shape 25"/>
+          <p:cNvSpPr/>
+          <p:nvPr/>
+        </p:nvSpPr>
+        <p:spPr>
+          <a:xfrm>
+            <a:off x="749808" y="5445252"/>
+            <a:ext cx="310896" cy="310896"/>
+          </a:xfrm>
+          <a:prstGeom prst="ellipse">
+            <a:avLst/>
+          </a:prstGeom>
+          <a:solidFill>
+            <a:srgbClr val="FFFFFF"/>
+          </a:solidFill>
+          <a:ln/>
+        </p:spPr>
+      </p:sp>
+      <p:sp>
+        <p:nvSpPr>
+          <p:cNvPr id="29" name="Text 26"/>
+          <p:cNvSpPr/>
+          <p:nvPr/>
+        </p:nvSpPr>
+        <p:spPr>
+          <a:xfrm>
+            <a:off x="749808" y="5445252"/>
+            <a:ext cx="310896" cy="310896"/>
+          </a:xfrm>
+          <a:prstGeom prst="rect">
+            <a:avLst/>
+          </a:prstGeom>
+          <a:noFill/>
+          <a:ln/>
+        </p:spPr>
+        <p:txBody>
+          <a:bodyPr wrap="square" lIns="0" tIns="0" rIns="0" bIns="0" rtlCol="0" anchor="ctr"/>
+          <a:lstStyle/>
+          <a:p>
+            <a:pPr algn="ctr" indent="0" marL="0">
+              <a:buNone/>
+            </a:pPr>
+            <a:r>
+              <a:rPr lang="en-US" sz="1200" b="1" dirty="0">
+                <a:solidFill>
+                  <a:srgbClr val="5A05F4"/>
+                </a:solidFill>
+                <a:latin typeface="Arial" pitchFamily="34" charset="0"/>
+                <a:ea typeface="Arial" pitchFamily="34" charset="-122"/>
+                <a:cs typeface="Arial" pitchFamily="34" charset="-120"/>
+              </a:rPr>
+              <a:t>?</a:t>
+            </a:r>
+            <a:endParaRPr lang="en-US" sz="1200" dirty="0"/>
+          </a:p>
+        </p:txBody>
+      </p:sp>
+      <p:sp>
+        <p:nvSpPr>
+          <p:cNvPr id="30" name="Text 27"/>
+          <p:cNvSpPr/>
+          <p:nvPr/>
+        </p:nvSpPr>
+        <p:spPr>
+          <a:xfrm>
+            <a:off x="1243584" y="5202936"/>
+            <a:ext cx="10168128" cy="219456"/>
+          </a:xfrm>
+          <a:prstGeom prst="rect">
+            <a:avLst/>
+          </a:prstGeom>
+          <a:noFill/>
+          <a:ln/>
+        </p:spPr>
+        <p:txBody>
+          <a:bodyPr wrap="square" lIns="0" tIns="0" rIns="0" bIns="0" rtlCol="0" anchor="ctr"/>
+          <a:lstStyle/>
+          <a:p>
+            <a:pPr indent="0" marL="0">
+              <a:buNone/>
+            </a:pPr>
+            <a:r>
+              <a:rPr lang="en-US" sz="950" b="1" spc="150" kern="0" dirty="0">
                 <a:solidFill>
                   <a:srgbClr val="FFFFFF"/>
                 </a:solidFill>
@@ -14172,26 +14825,26 @@
       </p:sp>
       <p:sp>
         <p:nvSpPr>
-          <p:cNvPr id="29" name="Text 26"/>
-          <p:cNvSpPr/>
-          <p:nvPr/>
-        </p:nvSpPr>
-        <p:spPr>
-          <a:xfrm>
-            <a:off x="786384" y="5458968"/>
-            <a:ext cx="10625328" cy="539496"/>
-          </a:xfrm>
-          <a:prstGeom prst="rect">
-            <a:avLst/>
-          </a:prstGeom>
-          <a:noFill/>
-          <a:ln/>
-        </p:spPr>
-        <p:txBody>
-          <a:bodyPr wrap="square" lIns="0" tIns="0" rIns="0" bIns="0" rtlCol="0" anchor="ctr"/>
-          <a:lstStyle/>
-          <a:p>
-            <a:pPr marL="0" indent="0">
+          <p:cNvPr id="31" name="Text 28"/>
+          <p:cNvSpPr/>
+          <p:nvPr/>
+        </p:nvSpPr>
+        <p:spPr>
+          <a:xfrm>
+            <a:off x="1243584" y="5458968"/>
+            <a:ext cx="10168128" cy="539496"/>
+          </a:xfrm>
+          <a:prstGeom prst="rect">
+            <a:avLst/>
+          </a:prstGeom>
+          <a:noFill/>
+          <a:ln/>
+        </p:spPr>
+        <p:txBody>
+          <a:bodyPr wrap="square" lIns="0" tIns="0" rIns="0" bIns="0" rtlCol="0" anchor="ctr"/>
+          <a:lstStyle/>
+          <a:p>
+            <a:pPr indent="0" marL="0">
               <a:lnSpc>
                 <a:spcPct val="112000"/>
               </a:lnSpc>
@@ -14214,7 +14867,7 @@
       </p:sp>
       <p:sp>
         <p:nvSpPr>
-          <p:cNvPr id="30" name="Slide Number Placeholder 0"/>
+          <p:cNvPr id="25" name="Slide Number Placeholder 0"/>
           <p:cNvSpPr>
             <a:spLocks noGrp="1"/>
           </p:cNvSpPr>
@@ -14232,7 +14885,7 @@
           </a:prstGeom>
           <a:extLst>
             <a:ext uri="{C572A759-6A51-4108-AA02-DFA0A04FC94B}">
-              <ma14:wrappingTextBoxFlag xmlns="" xmlns:ma14="http://schemas.microsoft.com/office/mac/drawingml/2011/main" val="0"/>
+              <ma14:wrappingTextBoxFlag xmlns:ma14="http://schemas.microsoft.com/office/mac/drawingml/2011/main" val="0"/>
             </a:ext>
           </a:extLst>
         </p:spPr>
@@ -14253,7 +14906,7 @@
           <a:p>
             <a:pPr algn="l"/>
             <a:fld id="{F7021451-1387-4CA6-816F-3879F97B5CBC}" type="slidenum">
-              <a:rPr lang="en-US" b="0"/>
+              <a:rPr b="0" lang="en-US"/>
               <a:t>20</a:t>
             </a:fld>
             <a:endParaRPr lang="en-US"/>
@@ -14328,7 +14981,7 @@
           <a:bodyPr wrap="square" lIns="0" tIns="0" rIns="0" bIns="0" rtlCol="0" anchor="ctr"/>
           <a:lstStyle/>
           <a:p>
-            <a:pPr marL="0" indent="0">
+            <a:pPr indent="0" marL="0">
               <a:buNone/>
             </a:pPr>
             <a:r>
@@ -14389,11 +15042,11 @@
           <a:bodyPr wrap="square" lIns="0" tIns="0" rIns="0" bIns="0" rtlCol="0" anchor="ctr"/>
           <a:lstStyle/>
           <a:p>
-            <a:pPr marL="0" indent="0" algn="ctr">
-              <a:buNone/>
-            </a:pPr>
-            <a:r>
-              <a:rPr lang="en-US" sz="900" b="1" kern="0" spc="100" dirty="0">
+            <a:pPr algn="ctr" indent="0" marL="0">
+              <a:buNone/>
+            </a:pPr>
+            <a:r>
+              <a:rPr lang="en-US" sz="900" b="1" spc="100" kern="0" dirty="0">
                 <a:solidFill>
                   <a:srgbClr val="FFFFFF"/>
                 </a:solidFill>
@@ -14409,14 +15062,14 @@
       </p:sp>
       <p:pic>
         <p:nvPicPr>
-          <p:cNvPr id="6" name="Image 0" descr="preencoded.png"/>
+          <p:cNvPr id="6" name="Image 0" descr="preencoded.png">    </p:cNvPr>
           <p:cNvPicPr>
             <a:picLocks noChangeAspect="1"/>
           </p:cNvPicPr>
           <p:nvPr/>
         </p:nvPicPr>
         <p:blipFill>
-          <a:blip r:embed="rId3"/>
+          <a:blip r:embed="rId1"/>
           <a:stretch>
             <a:fillRect/>
           </a:stretch>
@@ -14472,7 +15125,7 @@
           <a:bodyPr wrap="square" lIns="0" tIns="0" rIns="0" bIns="0" rtlCol="0" anchor="ctr"/>
           <a:lstStyle/>
           <a:p>
-            <a:pPr marL="0" indent="0" algn="ctr">
+            <a:pPr algn="ctr" indent="0" marL="0">
               <a:buNone/>
             </a:pPr>
             <a:r>
@@ -14511,7 +15164,7 @@
           <a:bodyPr wrap="square" lIns="0" tIns="0" rIns="0" bIns="0" rtlCol="0" anchor="ctr"/>
           <a:lstStyle/>
           <a:p>
-            <a:pPr marL="0" indent="0">
+            <a:pPr indent="0" marL="0">
               <a:buNone/>
             </a:pPr>
             <a:r>
@@ -14525,6 +15178,9 @@
               </a:rPr>
               <a:t>Обгорнути виклик кешем  </a:t>
             </a:r>
+            <a:pPr indent="0" marL="0">
+              <a:buNone/>
+            </a:pPr>
             <a:r>
               <a:rPr lang="en-US" sz="1200" dirty="0">
                 <a:solidFill>
@@ -14581,7 +15237,7 @@
           <a:bodyPr wrap="square" lIns="0" tIns="0" rIns="0" bIns="0" rtlCol="0" anchor="ctr"/>
           <a:lstStyle/>
           <a:p>
-            <a:pPr marL="0" indent="0" algn="ctr">
+            <a:pPr algn="ctr" indent="0" marL="0">
               <a:buNone/>
             </a:pPr>
             <a:r>
@@ -14620,7 +15276,7 @@
           <a:bodyPr wrap="square" lIns="0" tIns="0" rIns="0" bIns="0" rtlCol="0" anchor="ctr"/>
           <a:lstStyle/>
           <a:p>
-            <a:pPr marL="0" indent="0">
+            <a:pPr indent="0" marL="0">
               <a:buNone/>
             </a:pPr>
             <a:r>
@@ -14634,6 +15290,9 @@
               </a:rPr>
               <a:t>Побачити ефект  </a:t>
             </a:r>
+            <a:pPr indent="0" marL="0">
+              <a:buNone/>
+            </a:pPr>
             <a:r>
               <a:rPr lang="en-US" sz="1200" dirty="0">
                 <a:solidFill>
@@ -14690,7 +15349,7 @@
           <a:bodyPr wrap="square" lIns="0" tIns="0" rIns="0" bIns="0" rtlCol="0" anchor="ctr"/>
           <a:lstStyle/>
           <a:p>
-            <a:pPr marL="0" indent="0" algn="ctr">
+            <a:pPr algn="ctr" indent="0" marL="0">
               <a:buNone/>
             </a:pPr>
             <a:r>
@@ -14729,7 +15388,7 @@
           <a:bodyPr wrap="square" lIns="0" tIns="0" rIns="0" bIns="0" rtlCol="0" anchor="ctr"/>
           <a:lstStyle/>
           <a:p>
-            <a:pPr marL="0" indent="0">
+            <a:pPr indent="0" marL="0">
               <a:buNone/>
             </a:pPr>
             <a:r>
@@ -14743,6 +15402,9 @@
               </a:rPr>
               <a:t>Rollback-тест ключа  </a:t>
             </a:r>
+            <a:pPr indent="0" marL="0">
+              <a:buNone/>
+            </a:pPr>
             <a:r>
               <a:rPr lang="en-US" sz="1200" dirty="0">
                 <a:solidFill>
@@ -14799,7 +15461,7 @@
           <a:bodyPr wrap="square" lIns="0" tIns="0" rIns="0" bIns="0" rtlCol="0" anchor="ctr"/>
           <a:lstStyle/>
           <a:p>
-            <a:pPr marL="0" indent="0" algn="ctr">
+            <a:pPr algn="ctr" indent="0" marL="0">
               <a:buNone/>
             </a:pPr>
             <a:r>
@@ -14838,7 +15500,7 @@
           <a:bodyPr wrap="square" lIns="0" tIns="0" rIns="0" bIns="0" rtlCol="0" anchor="ctr"/>
           <a:lstStyle/>
           <a:p>
-            <a:pPr marL="0" indent="0">
+            <a:pPr indent="0" marL="0">
               <a:buNone/>
             </a:pPr>
             <a:r>
@@ -14852,6 +15514,9 @@
               </a:rPr>
               <a:t>Провести межі  </a:t>
             </a:r>
+            <a:pPr indent="0" marL="0">
+              <a:buNone/>
+            </a:pPr>
             <a:r>
               <a:rPr lang="en-US" sz="1200" dirty="0">
                 <a:solidFill>
@@ -14908,7 +15573,7 @@
           <a:bodyPr wrap="square" lIns="0" tIns="0" rIns="0" bIns="0" rtlCol="0" anchor="ctr"/>
           <a:lstStyle/>
           <a:p>
-            <a:pPr marL="0" indent="0" algn="ctr">
+            <a:pPr algn="ctr" indent="0" marL="0">
               <a:buNone/>
             </a:pPr>
             <a:r>
@@ -14947,7 +15612,7 @@
           <a:bodyPr wrap="square" lIns="0" tIns="0" rIns="0" bIns="0" rtlCol="0" anchor="ctr"/>
           <a:lstStyle/>
           <a:p>
-            <a:pPr marL="0" indent="0">
+            <a:pPr indent="0" marL="0">
               <a:buNone/>
             </a:pPr>
             <a:r>
@@ -14961,6 +15626,9 @@
               </a:rPr>
               <a:t>TTL · опційно  </a:t>
             </a:r>
+            <a:pPr indent="0" marL="0">
+              <a:buNone/>
+            </a:pPr>
             <a:r>
               <a:rPr lang="en-US" sz="1200" dirty="0">
                 <a:solidFill>
@@ -14996,7 +15664,7 @@
           </a:prstGeom>
           <a:extLst>
             <a:ext uri="{C572A759-6A51-4108-AA02-DFA0A04FC94B}">
-              <ma14:wrappingTextBoxFlag xmlns="" xmlns:ma14="http://schemas.microsoft.com/office/mac/drawingml/2011/main" val="0"/>
+              <ma14:wrappingTextBoxFlag xmlns:ma14="http://schemas.microsoft.com/office/mac/drawingml/2011/main" val="0"/>
             </a:ext>
           </a:extLst>
         </p:spPr>
@@ -15017,7 +15685,7 @@
           <a:p>
             <a:pPr algn="l"/>
             <a:fld id="{F7021451-1387-4CA6-816F-3879F97B5CBC}" type="slidenum">
-              <a:rPr lang="en-US" b="0"/>
+              <a:rPr b="0" lang="en-US"/>
               <a:t>21</a:t>
             </a:fld>
             <a:endParaRPr lang="en-US"/>
@@ -15070,11 +15738,11 @@
           <a:bodyPr wrap="square" lIns="0" tIns="0" rIns="0" bIns="0" rtlCol="0" anchor="ctr"/>
           <a:lstStyle/>
           <a:p>
-            <a:pPr marL="0" indent="0">
-              <a:buNone/>
-            </a:pPr>
-            <a:r>
-              <a:rPr lang="en-US" sz="1200" b="1" kern="0" spc="400" dirty="0">
+            <a:pPr indent="0" marL="0">
+              <a:buNone/>
+            </a:pPr>
+            <a:r>
+              <a:rPr lang="en-US" sz="1200" b="1" spc="400" kern="0" dirty="0">
                 <a:solidFill>
                   <a:srgbClr val="FFFFFF"/>
                 </a:solidFill>
@@ -15109,7 +15777,7 @@
           <a:bodyPr wrap="square" lIns="0" tIns="0" rIns="0" bIns="0" rtlCol="0" anchor="ctr"/>
           <a:lstStyle/>
           <a:p>
-            <a:pPr marL="0" indent="0">
+            <a:pPr indent="0" marL="0">
               <a:buNone/>
             </a:pPr>
             <a:r>
@@ -15148,7 +15816,7 @@
           <a:bodyPr wrap="square" lIns="0" tIns="0" rIns="0" bIns="0" rtlCol="0" anchor="t"/>
           <a:lstStyle/>
           <a:p>
-            <a:pPr marL="0" indent="0">
+            <a:pPr indent="0" marL="0">
               <a:buNone/>
             </a:pPr>
             <a:r>
@@ -15234,7 +15902,7 @@
           <a:bodyPr wrap="square" lIns="0" tIns="0" rIns="0" bIns="0" rtlCol="0" anchor="ctr"/>
           <a:lstStyle/>
           <a:p>
-            <a:pPr marL="0" indent="0">
+            <a:pPr indent="0" marL="0">
               <a:buNone/>
             </a:pPr>
             <a:r>
@@ -15300,11 +15968,11 @@
           <a:bodyPr wrap="square" lIns="0" tIns="0" rIns="0" bIns="0" rtlCol="0" anchor="ctr"/>
           <a:lstStyle/>
           <a:p>
-            <a:pPr marL="0" indent="0" algn="ctr">
-              <a:buNone/>
-            </a:pPr>
-            <a:r>
-              <a:rPr lang="en-US" sz="900" b="1" kern="0" spc="100" dirty="0">
+            <a:pPr algn="ctr" indent="0" marL="0">
+              <a:buNone/>
+            </a:pPr>
+            <a:r>
+              <a:rPr lang="en-US" sz="900" b="1" spc="100" kern="0" dirty="0">
                 <a:solidFill>
                   <a:srgbClr val="1A4FBF"/>
                 </a:solidFill>
@@ -15320,14 +15988,14 @@
       </p:sp>
       <p:pic>
         <p:nvPicPr>
-          <p:cNvPr id="6" name="Image 0" descr="preencoded.png"/>
+          <p:cNvPr id="6" name="Image 0" descr="preencoded.png">    </p:cNvPr>
           <p:cNvPicPr>
             <a:picLocks noChangeAspect="1"/>
           </p:cNvPicPr>
           <p:nvPr/>
         </p:nvPicPr>
         <p:blipFill>
-          <a:blip r:embed="rId3"/>
+          <a:blip r:embed="rId1"/>
           <a:stretch>
             <a:fillRect/>
           </a:stretch>
@@ -15385,7 +16053,7 @@
           <a:bodyPr wrap="square" lIns="0" tIns="0" rIns="0" bIns="0" rtlCol="0" anchor="ctr"/>
           <a:lstStyle/>
           <a:p>
-            <a:pPr marL="0" indent="0">
+            <a:pPr indent="0" marL="0">
               <a:buNone/>
             </a:pPr>
             <a:r>
@@ -15424,7 +16092,7 @@
           <a:bodyPr wrap="square" lIns="0" tIns="0" rIns="0" bIns="0" rtlCol="0" anchor="t"/>
           <a:lstStyle/>
           <a:p>
-            <a:pPr marL="0" indent="0">
+            <a:pPr indent="0" marL="0">
               <a:lnSpc>
                 <a:spcPct val="108000"/>
               </a:lnSpc>
@@ -15488,7 +16156,7 @@
           <a:bodyPr wrap="square" lIns="0" tIns="0" rIns="0" bIns="0" rtlCol="0" anchor="ctr"/>
           <a:lstStyle/>
           <a:p>
-            <a:pPr marL="0" indent="0">
+            <a:pPr indent="0" marL="0">
               <a:buNone/>
             </a:pPr>
             <a:r>
@@ -15527,7 +16195,7 @@
           <a:bodyPr wrap="square" lIns="0" tIns="0" rIns="0" bIns="0" rtlCol="0" anchor="t"/>
           <a:lstStyle/>
           <a:p>
-            <a:pPr marL="0" indent="0">
+            <a:pPr indent="0" marL="0">
               <a:lnSpc>
                 <a:spcPct val="108000"/>
               </a:lnSpc>
@@ -15591,7 +16259,7 @@
           <a:bodyPr wrap="square" lIns="0" tIns="0" rIns="0" bIns="0" rtlCol="0" anchor="ctr"/>
           <a:lstStyle/>
           <a:p>
-            <a:pPr marL="0" indent="0">
+            <a:pPr indent="0" marL="0">
               <a:buNone/>
             </a:pPr>
             <a:r>
@@ -15630,7 +16298,7 @@
           <a:bodyPr wrap="square" lIns="0" tIns="0" rIns="0" bIns="0" rtlCol="0" anchor="t"/>
           <a:lstStyle/>
           <a:p>
-            <a:pPr marL="0" indent="0">
+            <a:pPr indent="0" marL="0">
               <a:lnSpc>
                 <a:spcPct val="108000"/>
               </a:lnSpc>
@@ -15699,7 +16367,7 @@
           <a:bodyPr wrap="square" lIns="0" tIns="0" rIns="0" bIns="0" rtlCol="0" anchor="ctr"/>
           <a:lstStyle/>
           <a:p>
-            <a:pPr marL="0" indent="0">
+            <a:pPr indent="0" marL="0">
               <a:lnSpc>
                 <a:spcPct val="112000"/>
               </a:lnSpc>
@@ -15740,7 +16408,7 @@
           </a:prstGeom>
           <a:extLst>
             <a:ext uri="{C572A759-6A51-4108-AA02-DFA0A04FC94B}">
-              <ma14:wrappingTextBoxFlag xmlns="" xmlns:ma14="http://schemas.microsoft.com/office/mac/drawingml/2011/main" val="0"/>
+              <ma14:wrappingTextBoxFlag xmlns:ma14="http://schemas.microsoft.com/office/mac/drawingml/2011/main" val="0"/>
             </a:ext>
           </a:extLst>
         </p:spPr>
@@ -15761,7 +16429,7 @@
           <a:p>
             <a:pPr algn="l"/>
             <a:fld id="{F7021451-1387-4CA6-816F-3879F97B5CBC}" type="slidenum">
-              <a:rPr lang="en-US" b="0"/>
+              <a:rPr b="0" lang="en-US"/>
               <a:t>23</a:t>
             </a:fld>
             <a:endParaRPr lang="en-US"/>
@@ -15836,7 +16504,7 @@
           <a:bodyPr wrap="square" lIns="0" tIns="0" rIns="0" bIns="0" rtlCol="0" anchor="ctr"/>
           <a:lstStyle/>
           <a:p>
-            <a:pPr marL="0" indent="0">
+            <a:pPr indent="0" marL="0">
               <a:buNone/>
             </a:pPr>
             <a:r>
@@ -15902,11 +16570,11 @@
           <a:bodyPr wrap="square" lIns="0" tIns="0" rIns="0" bIns="0" rtlCol="0" anchor="ctr"/>
           <a:lstStyle/>
           <a:p>
-            <a:pPr marL="0" indent="0" algn="ctr">
-              <a:buNone/>
-            </a:pPr>
-            <a:r>
-              <a:rPr lang="en-US" sz="900" b="1" kern="0" spc="100" dirty="0">
+            <a:pPr algn="ctr" indent="0" marL="0">
+              <a:buNone/>
+            </a:pPr>
+            <a:r>
+              <a:rPr lang="en-US" sz="900" b="1" spc="100" kern="0" dirty="0">
                 <a:solidFill>
                   <a:srgbClr val="1A4FBF"/>
                 </a:solidFill>
@@ -15922,14 +16590,14 @@
       </p:sp>
       <p:pic>
         <p:nvPicPr>
-          <p:cNvPr id="6" name="Image 0" descr="preencoded.png"/>
+          <p:cNvPr id="6" name="Image 0" descr="preencoded.png">    </p:cNvPr>
           <p:cNvPicPr>
             <a:picLocks noChangeAspect="1"/>
           </p:cNvPicPr>
           <p:nvPr/>
         </p:nvPicPr>
         <p:blipFill>
-          <a:blip r:embed="rId3"/>
+          <a:blip r:embed="rId1"/>
           <a:stretch>
             <a:fillRect/>
           </a:stretch>
@@ -16059,7 +16727,7 @@
           <a:bodyPr wrap="square" lIns="0" tIns="0" rIns="0" bIns="0" rtlCol="0" anchor="ctr"/>
           <a:lstStyle/>
           <a:p>
-            <a:pPr marL="0" indent="0">
+            <a:pPr indent="0" marL="0">
               <a:buNone/>
             </a:pPr>
             <a:r>
@@ -16165,7 +16833,7 @@
           <a:bodyPr wrap="square" lIns="0" tIns="0" rIns="0" bIns="0" rtlCol="0" anchor="ctr"/>
           <a:lstStyle/>
           <a:p>
-            <a:pPr marL="0" indent="0">
+            <a:pPr indent="0" marL="0">
               <a:buNone/>
             </a:pPr>
             <a:r>
@@ -16271,7 +16939,7 @@
           <a:bodyPr wrap="square" lIns="0" tIns="0" rIns="0" bIns="0" rtlCol="0" anchor="ctr"/>
           <a:lstStyle/>
           <a:p>
-            <a:pPr marL="0" indent="0">
+            <a:pPr indent="0" marL="0">
               <a:buNone/>
             </a:pPr>
             <a:r>
@@ -16377,7 +17045,7 @@
           <a:bodyPr wrap="square" lIns="0" tIns="0" rIns="0" bIns="0" rtlCol="0" anchor="ctr"/>
           <a:lstStyle/>
           <a:p>
-            <a:pPr marL="0" indent="0">
+            <a:pPr indent="0" marL="0">
               <a:buNone/>
             </a:pPr>
             <a:r>
@@ -16416,7 +17084,7 @@
           <a:bodyPr wrap="square" lIns="0" tIns="0" rIns="0" bIns="0" rtlCol="0" anchor="ctr"/>
           <a:lstStyle/>
           <a:p>
-            <a:pPr marL="0" indent="0">
+            <a:pPr indent="0" marL="0">
               <a:buNone/>
             </a:pPr>
             <a:r>
@@ -16454,7 +17122,7 @@
           </a:prstGeom>
           <a:extLst>
             <a:ext uri="{C572A759-6A51-4108-AA02-DFA0A04FC94B}">
-              <ma14:wrappingTextBoxFlag xmlns="" xmlns:ma14="http://schemas.microsoft.com/office/mac/drawingml/2011/main" val="0"/>
+              <ma14:wrappingTextBoxFlag xmlns:ma14="http://schemas.microsoft.com/office/mac/drawingml/2011/main" val="0"/>
             </a:ext>
           </a:extLst>
         </p:spPr>
@@ -16475,7 +17143,7 @@
           <a:p>
             <a:pPr algn="l"/>
             <a:fld id="{F7021451-1387-4CA6-816F-3879F97B5CBC}" type="slidenum">
-              <a:rPr lang="en-US" b="0"/>
+              <a:rPr b="0" lang="en-US"/>
               <a:t>24</a:t>
             </a:fld>
             <a:endParaRPr lang="en-US"/>
@@ -16550,7 +17218,7 @@
           <a:bodyPr wrap="square" lIns="0" tIns="0" rIns="0" bIns="0" rtlCol="0" anchor="ctr"/>
           <a:lstStyle/>
           <a:p>
-            <a:pPr marL="0" indent="0">
+            <a:pPr indent="0" marL="0">
               <a:buNone/>
             </a:pPr>
             <a:r>
@@ -16616,11 +17284,11 @@
           <a:bodyPr wrap="square" lIns="0" tIns="0" rIns="0" bIns="0" rtlCol="0" anchor="ctr"/>
           <a:lstStyle/>
           <a:p>
-            <a:pPr marL="0" indent="0" algn="ctr">
-              <a:buNone/>
-            </a:pPr>
-            <a:r>
-              <a:rPr lang="en-US" sz="900" b="1" kern="0" spc="100" dirty="0">
+            <a:pPr algn="ctr" indent="0" marL="0">
+              <a:buNone/>
+            </a:pPr>
+            <a:r>
+              <a:rPr lang="en-US" sz="900" b="1" spc="100" kern="0" dirty="0">
                 <a:solidFill>
                   <a:srgbClr val="1A4FBF"/>
                 </a:solidFill>
@@ -16636,14 +17304,14 @@
       </p:sp>
       <p:pic>
         <p:nvPicPr>
-          <p:cNvPr id="6" name="Image 0" descr="preencoded.png"/>
+          <p:cNvPr id="6" name="Image 0" descr="preencoded.png">    </p:cNvPr>
           <p:cNvPicPr>
             <a:picLocks noChangeAspect="1"/>
           </p:cNvPicPr>
           <p:nvPr/>
         </p:nvPicPr>
         <p:blipFill>
-          <a:blip r:embed="rId3"/>
+          <a:blip r:embed="rId1"/>
           <a:stretch>
             <a:fillRect/>
           </a:stretch>
@@ -16771,7 +17439,7 @@
           <a:bodyPr wrap="square" lIns="0" tIns="0" rIns="0" bIns="0" rtlCol="0" anchor="ctr"/>
           <a:lstStyle/>
           <a:p>
-            <a:pPr marL="0" indent="0">
+            <a:pPr indent="0" marL="0">
               <a:buNone/>
             </a:pPr>
             <a:r>
@@ -16785,6 +17453,9 @@
               </a:rPr>
               <a:t>Кеш без лічильників   </a:t>
             </a:r>
+            <a:pPr indent="0" marL="0">
+              <a:buNone/>
+            </a:pPr>
             <a:r>
               <a:rPr lang="en-US" sz="1200" dirty="0">
                 <a:solidFill>
@@ -16913,7 +17584,7 @@
           <a:bodyPr wrap="square" lIns="0" tIns="0" rIns="0" bIns="0" rtlCol="0" anchor="ctr"/>
           <a:lstStyle/>
           <a:p>
-            <a:pPr marL="0" indent="0">
+            <a:pPr indent="0" marL="0">
               <a:buNone/>
             </a:pPr>
             <a:r>
@@ -16927,6 +17598,9 @@
               </a:rPr>
               <a:t>Промпт поза ключем   </a:t>
             </a:r>
+            <a:pPr indent="0" marL="0">
+              <a:buNone/>
+            </a:pPr>
             <a:r>
               <a:rPr lang="en-US" sz="1200" dirty="0">
                 <a:solidFill>
@@ -17055,7 +17729,7 @@
           <a:bodyPr wrap="square" lIns="0" tIns="0" rIns="0" bIns="0" rtlCol="0" anchor="ctr"/>
           <a:lstStyle/>
           <a:p>
-            <a:pPr marL="0" indent="0">
+            <a:pPr indent="0" marL="0">
               <a:buNone/>
             </a:pPr>
             <a:r>
@@ -17069,6 +17743,9 @@
               </a:rPr>
               <a:t>Кешувати персональні відповіді   </a:t>
             </a:r>
+            <a:pPr indent="0" marL="0">
+              <a:buNone/>
+            </a:pPr>
             <a:r>
               <a:rPr lang="en-US" sz="1200" dirty="0">
                 <a:solidFill>
@@ -17197,7 +17874,7 @@
           <a:bodyPr wrap="square" lIns="0" tIns="0" rIns="0" bIns="0" rtlCol="0" anchor="ctr"/>
           <a:lstStyle/>
           <a:p>
-            <a:pPr marL="0" indent="0">
+            <a:pPr indent="0" marL="0">
               <a:buNone/>
             </a:pPr>
             <a:r>
@@ -17211,6 +17888,9 @@
               </a:rPr>
               <a:t>Один TTL на все   </a:t>
             </a:r>
+            <a:pPr indent="0" marL="0">
+              <a:buNone/>
+            </a:pPr>
             <a:r>
               <a:rPr lang="en-US" sz="1200" dirty="0">
                 <a:solidFill>
@@ -17228,7 +17908,7 @@
       </p:sp>
       <p:sp>
         <p:nvSpPr>
-          <p:cNvPr id="27" name="Slide Number Placeholder 0"/>
+          <p:cNvPr id="25" name="Slide Number Placeholder 0"/>
           <p:cNvSpPr>
             <a:spLocks noGrp="1"/>
           </p:cNvSpPr>
@@ -17246,7 +17926,7 @@
           </a:prstGeom>
           <a:extLst>
             <a:ext uri="{C572A759-6A51-4108-AA02-DFA0A04FC94B}">
-              <ma14:wrappingTextBoxFlag xmlns="" xmlns:ma14="http://schemas.microsoft.com/office/mac/drawingml/2011/main" val="0"/>
+              <ma14:wrappingTextBoxFlag xmlns:ma14="http://schemas.microsoft.com/office/mac/drawingml/2011/main" val="0"/>
             </a:ext>
           </a:extLst>
         </p:spPr>
@@ -17267,7 +17947,7 @@
           <a:p>
             <a:pPr algn="l"/>
             <a:fld id="{F7021451-1387-4CA6-816F-3879F97B5CBC}" type="slidenum">
-              <a:rPr lang="en-US" b="0"/>
+              <a:rPr b="0" lang="en-US"/>
               <a:t>25</a:t>
             </a:fld>
             <a:endParaRPr lang="en-US"/>
@@ -17342,7 +18022,7 @@
           <a:bodyPr wrap="square" lIns="0" tIns="0" rIns="0" bIns="0" rtlCol="0" anchor="ctr"/>
           <a:lstStyle/>
           <a:p>
-            <a:pPr marL="0" indent="0">
+            <a:pPr indent="0" marL="0">
               <a:buNone/>
             </a:pPr>
             <a:r>
@@ -17403,11 +18083,11 @@
           <a:bodyPr wrap="square" lIns="0" tIns="0" rIns="0" bIns="0" rtlCol="0" anchor="ctr"/>
           <a:lstStyle/>
           <a:p>
-            <a:pPr marL="0" indent="0" algn="ctr">
-              <a:buNone/>
-            </a:pPr>
-            <a:r>
-              <a:rPr lang="en-US" sz="900" b="1" kern="0" spc="100" dirty="0">
+            <a:pPr algn="ctr" indent="0" marL="0">
+              <a:buNone/>
+            </a:pPr>
+            <a:r>
+              <a:rPr lang="en-US" sz="900" b="1" spc="100" kern="0" dirty="0">
                 <a:solidFill>
                   <a:srgbClr val="FFFFFF"/>
                 </a:solidFill>
@@ -17423,14 +18103,14 @@
       </p:sp>
       <p:pic>
         <p:nvPicPr>
-          <p:cNvPr id="6" name="Image 0" descr="preencoded.png"/>
+          <p:cNvPr id="6" name="Image 0" descr="preencoded.png">    </p:cNvPr>
           <p:cNvPicPr>
             <a:picLocks noChangeAspect="1"/>
           </p:cNvPicPr>
           <p:nvPr/>
         </p:nvPicPr>
         <p:blipFill>
-          <a:blip r:embed="rId3"/>
+          <a:blip r:embed="rId1"/>
           <a:stretch>
             <a:fillRect/>
           </a:stretch>
@@ -17488,7 +18168,7 @@
           <a:bodyPr wrap="square" lIns="0" tIns="0" rIns="0" bIns="0" rtlCol="0" anchor="ctr"/>
           <a:lstStyle/>
           <a:p>
-            <a:pPr marL="0" indent="0">
+            <a:pPr indent="0" marL="0">
               <a:buNone/>
             </a:pPr>
             <a:r>
@@ -17527,7 +18207,7 @@
           <a:bodyPr wrap="square" lIns="0" tIns="0" rIns="0" bIns="0" rtlCol="0" anchor="t"/>
           <a:lstStyle/>
           <a:p>
-            <a:pPr marL="0" indent="0">
+            <a:pPr indent="0" marL="0">
               <a:lnSpc>
                 <a:spcPct val="108000"/>
               </a:lnSpc>
@@ -17547,7 +18227,7 @@
             <a:endParaRPr lang="en-US" sz="1200" dirty="0"/>
           </a:p>
           <a:p>
-            <a:pPr marL="0" indent="0">
+            <a:pPr indent="0" marL="0">
               <a:lnSpc>
                 <a:spcPct val="108000"/>
               </a:lnSpc>
@@ -17556,7 +18236,7 @@
             <a:endParaRPr lang="en-US" sz="1200" dirty="0"/>
           </a:p>
           <a:p>
-            <a:pPr marL="0" indent="0">
+            <a:pPr indent="0" marL="0">
               <a:lnSpc>
                 <a:spcPct val="108000"/>
               </a:lnSpc>
@@ -17576,7 +18256,7 @@
             <a:endParaRPr lang="en-US" sz="1200" dirty="0"/>
           </a:p>
           <a:p>
-            <a:pPr marL="0" indent="0">
+            <a:pPr indent="0" marL="0">
               <a:lnSpc>
                 <a:spcPct val="108000"/>
               </a:lnSpc>
@@ -17585,7 +18265,7 @@
             <a:endParaRPr lang="en-US" sz="1200" dirty="0"/>
           </a:p>
           <a:p>
-            <a:pPr marL="0" indent="0">
+            <a:pPr indent="0" marL="0">
               <a:lnSpc>
                 <a:spcPct val="108000"/>
               </a:lnSpc>
@@ -17649,7 +18329,7 @@
           <a:bodyPr wrap="square" lIns="0" tIns="0" rIns="0" bIns="0" rtlCol="0" anchor="ctr"/>
           <a:lstStyle/>
           <a:p>
-            <a:pPr marL="0" indent="0">
+            <a:pPr indent="0" marL="0">
               <a:buNone/>
             </a:pPr>
             <a:r>
@@ -17688,7 +18368,7 @@
           <a:bodyPr wrap="square" lIns="0" tIns="0" rIns="0" bIns="0" rtlCol="0" anchor="t"/>
           <a:lstStyle/>
           <a:p>
-            <a:pPr marL="0" indent="0">
+            <a:pPr indent="0" marL="0">
               <a:lnSpc>
                 <a:spcPct val="108000"/>
               </a:lnSpc>
@@ -17708,7 +18388,7 @@
             <a:endParaRPr lang="en-US" sz="1200" dirty="0"/>
           </a:p>
           <a:p>
-            <a:pPr marL="0" indent="0">
+            <a:pPr indent="0" marL="0">
               <a:lnSpc>
                 <a:spcPct val="108000"/>
               </a:lnSpc>
@@ -17717,7 +18397,7 @@
             <a:endParaRPr lang="en-US" sz="1200" dirty="0"/>
           </a:p>
           <a:p>
-            <a:pPr marL="0" indent="0">
+            <a:pPr indent="0" marL="0">
               <a:lnSpc>
                 <a:spcPct val="108000"/>
               </a:lnSpc>
@@ -17786,7 +18466,7 @@
           <a:bodyPr wrap="square" lIns="0" tIns="0" rIns="0" bIns="0" rtlCol="0" anchor="ctr"/>
           <a:lstStyle/>
           <a:p>
-            <a:pPr marL="0" indent="0">
+            <a:pPr indent="0" marL="0">
               <a:buNone/>
             </a:pPr>
             <a:r>
@@ -17825,7 +18505,7 @@
           <a:bodyPr wrap="square" lIns="0" tIns="0" rIns="0" bIns="0" rtlCol="0" anchor="t"/>
           <a:lstStyle/>
           <a:p>
-            <a:pPr marL="0" indent="0">
+            <a:pPr indent="0" marL="0">
               <a:buNone/>
             </a:pPr>
             <a:r>
@@ -17863,7 +18543,7 @@
           </a:prstGeom>
           <a:extLst>
             <a:ext uri="{C572A759-6A51-4108-AA02-DFA0A04FC94B}">
-              <ma14:wrappingTextBoxFlag xmlns="" xmlns:ma14="http://schemas.microsoft.com/office/mac/drawingml/2011/main" val="0"/>
+              <ma14:wrappingTextBoxFlag xmlns:ma14="http://schemas.microsoft.com/office/mac/drawingml/2011/main" val="0"/>
             </a:ext>
           </a:extLst>
         </p:spPr>
@@ -17884,7 +18564,7 @@
           <a:p>
             <a:pPr algn="l"/>
             <a:fld id="{F7021451-1387-4CA6-816F-3879F97B5CBC}" type="slidenum">
-              <a:rPr lang="en-US" b="0"/>
+              <a:rPr b="0" lang="en-US"/>
               <a:t>26</a:t>
             </a:fld>
             <a:endParaRPr lang="en-US"/>
@@ -17937,11 +18617,11 @@
           <a:bodyPr wrap="square" lIns="0" tIns="0" rIns="0" bIns="0" rtlCol="0" anchor="ctr"/>
           <a:lstStyle/>
           <a:p>
-            <a:pPr marL="0" indent="0">
-              <a:buNone/>
-            </a:pPr>
-            <a:r>
-              <a:rPr lang="en-US" sz="1200" b="1" kern="0" spc="400" dirty="0">
+            <a:pPr indent="0" marL="0">
+              <a:buNone/>
+            </a:pPr>
+            <a:r>
+              <a:rPr lang="en-US" sz="1200" b="1" spc="400" kern="0" dirty="0">
                 <a:solidFill>
                   <a:srgbClr val="FFFFFF"/>
                 </a:solidFill>
@@ -17976,11 +18656,11 @@
           <a:bodyPr wrap="square" lIns="0" tIns="0" rIns="0" bIns="0" rtlCol="0" anchor="ctr"/>
           <a:lstStyle/>
           <a:p>
-            <a:pPr marL="0" indent="0">
-              <a:buNone/>
-            </a:pPr>
-            <a:r>
-              <a:rPr lang="en-US" sz="1100" b="1" kern="0" spc="300" dirty="0">
+            <a:pPr indent="0" marL="0">
+              <a:buNone/>
+            </a:pPr>
+            <a:r>
+              <a:rPr lang="en-US" sz="1100" b="1" spc="300" kern="0" dirty="0">
                 <a:solidFill>
                   <a:srgbClr val="C4B3F5"/>
                 </a:solidFill>
@@ -18035,7 +18715,7 @@
           <a:bodyPr wrap="square" lIns="0" tIns="0" rIns="0" bIns="0" rtlCol="0" anchor="t"/>
           <a:lstStyle/>
           <a:p>
-            <a:pPr marL="0" indent="0">
+            <a:pPr indent="0" marL="0">
               <a:lnSpc>
                 <a:spcPct val="110000"/>
               </a:lnSpc>
@@ -18097,7 +18777,7 @@
           <a:bodyPr wrap="square" lIns="0" tIns="0" rIns="0" bIns="0" rtlCol="0" anchor="t"/>
           <a:lstStyle/>
           <a:p>
-            <a:pPr marL="0" indent="0">
+            <a:pPr indent="0" marL="0">
               <a:lnSpc>
                 <a:spcPct val="110000"/>
               </a:lnSpc>
@@ -18159,7 +18839,7 @@
           <a:bodyPr wrap="square" lIns="0" tIns="0" rIns="0" bIns="0" rtlCol="0" anchor="t"/>
           <a:lstStyle/>
           <a:p>
-            <a:pPr marL="0" indent="0">
+            <a:pPr indent="0" marL="0">
               <a:lnSpc>
                 <a:spcPct val="110000"/>
               </a:lnSpc>
@@ -18221,7 +18901,7 @@
           <a:bodyPr wrap="square" lIns="0" tIns="0" rIns="0" bIns="0" rtlCol="0" anchor="t"/>
           <a:lstStyle/>
           <a:p>
-            <a:pPr marL="0" indent="0">
+            <a:pPr indent="0" marL="0">
               <a:lnSpc>
                 <a:spcPct val="110000"/>
               </a:lnSpc>
@@ -18283,7 +18963,7 @@
           <a:bodyPr wrap="square" lIns="0" tIns="0" rIns="0" bIns="0" rtlCol="0" anchor="t"/>
           <a:lstStyle/>
           <a:p>
-            <a:pPr marL="0" indent="0">
+            <a:pPr indent="0" marL="0">
               <a:lnSpc>
                 <a:spcPct val="110000"/>
               </a:lnSpc>
@@ -18352,7 +19032,7 @@
           <a:bodyPr wrap="square" lIns="0" tIns="0" rIns="0" bIns="0" rtlCol="0" anchor="ctr"/>
           <a:lstStyle/>
           <a:p>
-            <a:pPr marL="0" indent="0">
+            <a:pPr indent="0" marL="0">
               <a:buNone/>
             </a:pPr>
             <a:r>
@@ -18391,7 +19071,7 @@
           <a:bodyPr wrap="square" lIns="0" tIns="0" rIns="0" bIns="0" rtlCol="0" anchor="t"/>
           <a:lstStyle/>
           <a:p>
-            <a:pPr marL="0" indent="0">
+            <a:pPr indent="0" marL="0">
               <a:lnSpc>
                 <a:spcPct val="115000"/>
               </a:lnSpc>
@@ -18458,11 +19138,11 @@
           <a:bodyPr wrap="square" lIns="0" tIns="0" rIns="0" bIns="0" rtlCol="0" anchor="ctr"/>
           <a:lstStyle/>
           <a:p>
-            <a:pPr marL="0" indent="0">
-              <a:buNone/>
-            </a:pPr>
-            <a:r>
-              <a:rPr lang="en-US" sz="1200" b="1" kern="0" spc="400" dirty="0">
+            <a:pPr indent="0" marL="0">
+              <a:buNone/>
+            </a:pPr>
+            <a:r>
+              <a:rPr lang="en-US" sz="1200" b="1" spc="400" kern="0" dirty="0">
                 <a:solidFill>
                   <a:srgbClr val="FFFFFF"/>
                 </a:solidFill>
@@ -18497,7 +19177,7 @@
           <a:bodyPr wrap="square" lIns="0" tIns="0" rIns="0" bIns="0" rtlCol="0" anchor="ctr"/>
           <a:lstStyle/>
           <a:p>
-            <a:pPr marL="0" indent="0">
+            <a:pPr indent="0" marL="0">
               <a:buNone/>
             </a:pPr>
             <a:r>
@@ -18583,7 +19263,7 @@
           <a:bodyPr wrap="square" lIns="0" tIns="0" rIns="0" bIns="0" rtlCol="0" anchor="ctr"/>
           <a:lstStyle/>
           <a:p>
-            <a:pPr marL="0" indent="0">
+            <a:pPr indent="0" marL="0">
               <a:buNone/>
             </a:pPr>
             <a:r>
@@ -18649,11 +19329,11 @@
           <a:bodyPr wrap="square" lIns="0" tIns="0" rIns="0" bIns="0" rtlCol="0" anchor="ctr"/>
           <a:lstStyle/>
           <a:p>
-            <a:pPr marL="0" indent="0" algn="ctr">
-              <a:buNone/>
-            </a:pPr>
-            <a:r>
-              <a:rPr lang="en-US" sz="900" b="1" kern="0" spc="100" dirty="0">
+            <a:pPr algn="ctr" indent="0" marL="0">
+              <a:buNone/>
+            </a:pPr>
+            <a:r>
+              <a:rPr lang="en-US" sz="900" b="1" spc="100" kern="0" dirty="0">
                 <a:solidFill>
                   <a:srgbClr val="5A05F4"/>
                 </a:solidFill>
@@ -18669,14 +19349,14 @@
       </p:sp>
       <p:pic>
         <p:nvPicPr>
-          <p:cNvPr id="6" name="Image 0" descr="preencoded.png"/>
+          <p:cNvPr id="6" name="Image 0" descr="preencoded.png">    </p:cNvPr>
           <p:cNvPicPr>
             <a:picLocks noChangeAspect="1"/>
           </p:cNvPicPr>
           <p:nvPr/>
         </p:nvPicPr>
         <p:blipFill>
-          <a:blip r:embed="rId3"/>
+          <a:blip r:embed="rId1"/>
           <a:stretch>
             <a:fillRect/>
           </a:stretch>
@@ -18754,7 +19434,7 @@
           <a:bodyPr wrap="square" lIns="0" tIns="0" rIns="0" bIns="0" rtlCol="0" anchor="ctr"/>
           <a:lstStyle/>
           <a:p>
-            <a:pPr marL="0" indent="0" algn="ctr">
+            <a:pPr algn="ctr" indent="0" marL="0">
               <a:buNone/>
             </a:pPr>
             <a:r>
@@ -18793,7 +19473,7 @@
           <a:bodyPr wrap="square" lIns="0" tIns="0" rIns="0" bIns="0" rtlCol="0" anchor="ctr"/>
           <a:lstStyle/>
           <a:p>
-            <a:pPr marL="0" indent="0">
+            <a:pPr indent="0" marL="0">
               <a:buNone/>
             </a:pPr>
             <a:r>
@@ -18874,7 +19554,7 @@
           <a:bodyPr wrap="square" lIns="0" tIns="0" rIns="0" bIns="0" rtlCol="0" anchor="ctr"/>
           <a:lstStyle/>
           <a:p>
-            <a:pPr marL="0" indent="0" algn="ctr">
+            <a:pPr algn="ctr" indent="0" marL="0">
               <a:buNone/>
             </a:pPr>
             <a:r>
@@ -18913,7 +19593,7 @@
           <a:bodyPr wrap="square" lIns="0" tIns="0" rIns="0" bIns="0" rtlCol="0" anchor="ctr"/>
           <a:lstStyle/>
           <a:p>
-            <a:pPr marL="0" indent="0">
+            <a:pPr indent="0" marL="0">
               <a:buNone/>
             </a:pPr>
             <a:r>
@@ -18994,7 +19674,7 @@
           <a:bodyPr wrap="square" lIns="0" tIns="0" rIns="0" bIns="0" rtlCol="0" anchor="ctr"/>
           <a:lstStyle/>
           <a:p>
-            <a:pPr marL="0" indent="0" algn="ctr">
+            <a:pPr algn="ctr" indent="0" marL="0">
               <a:buNone/>
             </a:pPr>
             <a:r>
@@ -19033,7 +19713,7 @@
           <a:bodyPr wrap="square" lIns="0" tIns="0" rIns="0" bIns="0" rtlCol="0" anchor="ctr"/>
           <a:lstStyle/>
           <a:p>
-            <a:pPr marL="0" indent="0">
+            <a:pPr indent="0" marL="0">
               <a:buNone/>
             </a:pPr>
             <a:r>
@@ -19114,7 +19794,7 @@
           <a:bodyPr wrap="square" lIns="0" tIns="0" rIns="0" bIns="0" rtlCol="0" anchor="ctr"/>
           <a:lstStyle/>
           <a:p>
-            <a:pPr marL="0" indent="0" algn="ctr">
+            <a:pPr algn="ctr" indent="0" marL="0">
               <a:buNone/>
             </a:pPr>
             <a:r>
@@ -19153,7 +19833,7 @@
           <a:bodyPr wrap="square" lIns="0" tIns="0" rIns="0" bIns="0" rtlCol="0" anchor="ctr"/>
           <a:lstStyle/>
           <a:p>
-            <a:pPr marL="0" indent="0">
+            <a:pPr indent="0" marL="0">
               <a:buNone/>
             </a:pPr>
             <a:r>
@@ -19234,7 +19914,7 @@
           <a:bodyPr wrap="square" lIns="0" tIns="0" rIns="0" bIns="0" rtlCol="0" anchor="ctr"/>
           <a:lstStyle/>
           <a:p>
-            <a:pPr marL="0" indent="0" algn="ctr">
+            <a:pPr algn="ctr" indent="0" marL="0">
               <a:buNone/>
             </a:pPr>
             <a:r>
@@ -19273,7 +19953,7 @@
           <a:bodyPr wrap="square" lIns="0" tIns="0" rIns="0" bIns="0" rtlCol="0" anchor="ctr"/>
           <a:lstStyle/>
           <a:p>
-            <a:pPr marL="0" indent="0">
+            <a:pPr indent="0" marL="0">
               <a:buNone/>
             </a:pPr>
             <a:r>
@@ -19354,7 +20034,7 @@
           <a:bodyPr wrap="square" lIns="0" tIns="0" rIns="0" bIns="0" rtlCol="0" anchor="ctr"/>
           <a:lstStyle/>
           <a:p>
-            <a:pPr marL="0" indent="0" algn="ctr">
+            <a:pPr algn="ctr" indent="0" marL="0">
               <a:buNone/>
             </a:pPr>
             <a:r>
@@ -19393,7 +20073,7 @@
           <a:bodyPr wrap="square" lIns="0" tIns="0" rIns="0" bIns="0" rtlCol="0" anchor="ctr"/>
           <a:lstStyle/>
           <a:p>
-            <a:pPr marL="0" indent="0">
+            <a:pPr indent="0" marL="0">
               <a:buNone/>
             </a:pPr>
             <a:r>
@@ -19474,7 +20154,7 @@
           <a:bodyPr wrap="square" lIns="0" tIns="0" rIns="0" bIns="0" rtlCol="0" anchor="ctr"/>
           <a:lstStyle/>
           <a:p>
-            <a:pPr marL="0" indent="0" algn="ctr">
+            <a:pPr algn="ctr" indent="0" marL="0">
               <a:buNone/>
             </a:pPr>
             <a:r>
@@ -19513,7 +20193,7 @@
           <a:bodyPr wrap="square" lIns="0" tIns="0" rIns="0" bIns="0" rtlCol="0" anchor="ctr"/>
           <a:lstStyle/>
           <a:p>
-            <a:pPr marL="0" indent="0">
+            <a:pPr indent="0" marL="0">
               <a:buNone/>
             </a:pPr>
             <a:r>
@@ -19594,7 +20274,7 @@
           <a:bodyPr wrap="square" lIns="0" tIns="0" rIns="0" bIns="0" rtlCol="0" anchor="ctr"/>
           <a:lstStyle/>
           <a:p>
-            <a:pPr marL="0" indent="0" algn="ctr">
+            <a:pPr algn="ctr" indent="0" marL="0">
               <a:buNone/>
             </a:pPr>
             <a:r>
@@ -19633,7 +20313,7 @@
           <a:bodyPr wrap="square" lIns="0" tIns="0" rIns="0" bIns="0" rtlCol="0" anchor="ctr"/>
           <a:lstStyle/>
           <a:p>
-            <a:pPr marL="0" indent="0">
+            <a:pPr indent="0" marL="0">
               <a:buNone/>
             </a:pPr>
             <a:r>
@@ -19714,7 +20394,7 @@
           <a:bodyPr wrap="square" lIns="0" tIns="0" rIns="0" bIns="0" rtlCol="0" anchor="ctr"/>
           <a:lstStyle/>
           <a:p>
-            <a:pPr marL="0" indent="0" algn="ctr">
+            <a:pPr algn="ctr" indent="0" marL="0">
               <a:buNone/>
             </a:pPr>
             <a:r>
@@ -19753,7 +20433,7 @@
           <a:bodyPr wrap="square" lIns="0" tIns="0" rIns="0" bIns="0" rtlCol="0" anchor="ctr"/>
           <a:lstStyle/>
           <a:p>
-            <a:pPr marL="0" indent="0">
+            <a:pPr indent="0" marL="0">
               <a:buNone/>
             </a:pPr>
             <a:r>
@@ -19834,7 +20514,7 @@
           <a:bodyPr wrap="square" lIns="0" tIns="0" rIns="0" bIns="0" rtlCol="0" anchor="ctr"/>
           <a:lstStyle/>
           <a:p>
-            <a:pPr marL="0" indent="0" algn="ctr">
+            <a:pPr algn="ctr" indent="0" marL="0">
               <a:buNone/>
             </a:pPr>
             <a:r>
@@ -19873,7 +20553,7 @@
           <a:bodyPr wrap="square" lIns="0" tIns="0" rIns="0" bIns="0" rtlCol="0" anchor="ctr"/>
           <a:lstStyle/>
           <a:p>
-            <a:pPr marL="0" indent="0">
+            <a:pPr indent="0" marL="0">
               <a:buNone/>
             </a:pPr>
             <a:r>
@@ -19900,7 +20580,7 @@
         <p:spPr>
           <a:xfrm>
             <a:off x="566928" y="5779008"/>
-            <a:ext cx="10927080" cy="402336"/>
+            <a:ext cx="11064240" cy="402336"/>
           </a:xfrm>
           <a:prstGeom prst="roundRect">
             <a:avLst>
@@ -19939,7 +20619,7 @@
           <a:bodyPr wrap="square" lIns="0" tIns="0" rIns="0" bIns="0" rtlCol="0" anchor="ctr"/>
           <a:lstStyle/>
           <a:p>
-            <a:pPr marL="0" indent="0">
+            <a:pPr indent="0" marL="0">
               <a:lnSpc>
                 <a:spcPct val="112000"/>
               </a:lnSpc>
@@ -19962,7 +20642,7 @@
       </p:sp>
       <p:sp>
         <p:nvSpPr>
-          <p:cNvPr id="49" name="Slide Number Placeholder 0"/>
+          <p:cNvPr id="25" name="Slide Number Placeholder 0"/>
           <p:cNvSpPr>
             <a:spLocks noGrp="1"/>
           </p:cNvSpPr>
@@ -19980,7 +20660,7 @@
           </a:prstGeom>
           <a:extLst>
             <a:ext uri="{C572A759-6A51-4108-AA02-DFA0A04FC94B}">
-              <ma14:wrappingTextBoxFlag xmlns="" xmlns:ma14="http://schemas.microsoft.com/office/mac/drawingml/2011/main" val="0"/>
+              <ma14:wrappingTextBoxFlag xmlns:ma14="http://schemas.microsoft.com/office/mac/drawingml/2011/main" val="0"/>
             </a:ext>
           </a:extLst>
         </p:spPr>
@@ -20001,7 +20681,7 @@
           <a:p>
             <a:pPr algn="l"/>
             <a:fld id="{F7021451-1387-4CA6-816F-3879F97B5CBC}" type="slidenum">
-              <a:rPr lang="en-US" b="0"/>
+              <a:rPr b="0" lang="en-US"/>
               <a:t>3</a:t>
             </a:fld>
             <a:endParaRPr lang="en-US"/>
@@ -20076,7 +20756,7 @@
           <a:bodyPr wrap="square" lIns="0" tIns="0" rIns="0" bIns="0" rtlCol="0" anchor="ctr"/>
           <a:lstStyle/>
           <a:p>
-            <a:pPr marL="0" indent="0">
+            <a:pPr indent="0" marL="0">
               <a:buNone/>
             </a:pPr>
             <a:r>
@@ -20115,7 +20795,7 @@
           <a:bodyPr wrap="square" lIns="0" tIns="0" rIns="0" bIns="0" rtlCol="0" anchor="t"/>
           <a:lstStyle/>
           <a:p>
-            <a:pPr marL="0" indent="0">
+            <a:pPr indent="0" marL="0">
               <a:lnSpc>
                 <a:spcPct val="100000"/>
               </a:lnSpc>
@@ -20184,11 +20864,11 @@
           <a:bodyPr wrap="square" lIns="0" tIns="0" rIns="0" bIns="0" rtlCol="0" anchor="ctr"/>
           <a:lstStyle/>
           <a:p>
-            <a:pPr marL="0" indent="0" algn="ctr">
-              <a:buNone/>
-            </a:pPr>
-            <a:r>
-              <a:rPr lang="en-US" sz="900" b="1" kern="0" spc="100" dirty="0">
+            <a:pPr algn="ctr" indent="0" marL="0">
+              <a:buNone/>
+            </a:pPr>
+            <a:r>
+              <a:rPr lang="en-US" sz="900" b="1" spc="100" kern="0" dirty="0">
                 <a:solidFill>
                   <a:srgbClr val="5A05F4"/>
                 </a:solidFill>
@@ -20204,14 +20884,14 @@
       </p:sp>
       <p:pic>
         <p:nvPicPr>
-          <p:cNvPr id="7" name="Image 0" descr="preencoded.png"/>
+          <p:cNvPr id="7" name="Image 0" descr="preencoded.png">    </p:cNvPr>
           <p:cNvPicPr>
             <a:picLocks noChangeAspect="1"/>
           </p:cNvPicPr>
           <p:nvPr/>
         </p:nvPicPr>
         <p:blipFill>
-          <a:blip r:embed="rId3"/>
+          <a:blip r:embed="rId1"/>
           <a:stretch>
             <a:fillRect/>
           </a:stretch>
@@ -20274,7 +20954,7 @@
           <a:bodyPr wrap="square" lIns="0" tIns="0" rIns="0" bIns="0" rtlCol="0" anchor="ctr"/>
           <a:lstStyle/>
           <a:p>
-            <a:pPr marL="0" indent="0">
+            <a:pPr indent="0" marL="0">
               <a:buNone/>
             </a:pPr>
             <a:r>
@@ -20313,7 +20993,7 @@
           <a:bodyPr wrap="square" lIns="0" tIns="0" rIns="0" bIns="0" rtlCol="0" anchor="t"/>
           <a:lstStyle/>
           <a:p>
-            <a:pPr marL="0" indent="0">
+            <a:pPr indent="0" marL="0">
               <a:lnSpc>
                 <a:spcPct val="105000"/>
               </a:lnSpc>
@@ -20382,7 +21062,7 @@
           <a:bodyPr wrap="square" lIns="0" tIns="0" rIns="0" bIns="0" rtlCol="0" anchor="ctr"/>
           <a:lstStyle/>
           <a:p>
-            <a:pPr marL="0" indent="0">
+            <a:pPr indent="0" marL="0">
               <a:buNone/>
             </a:pPr>
             <a:r>
@@ -20421,7 +21101,7 @@
           <a:bodyPr wrap="square" lIns="0" tIns="0" rIns="0" bIns="0" rtlCol="0" anchor="t"/>
           <a:lstStyle/>
           <a:p>
-            <a:pPr marL="0" indent="0">
+            <a:pPr indent="0" marL="0">
               <a:lnSpc>
                 <a:spcPct val="105000"/>
               </a:lnSpc>
@@ -20490,7 +21170,7 @@
           <a:bodyPr wrap="square" lIns="0" tIns="0" rIns="0" bIns="0" rtlCol="0" anchor="ctr"/>
           <a:lstStyle/>
           <a:p>
-            <a:pPr marL="0" indent="0">
+            <a:pPr indent="0" marL="0">
               <a:buNone/>
             </a:pPr>
             <a:r>
@@ -20529,7 +21209,7 @@
           <a:bodyPr wrap="square" lIns="0" tIns="0" rIns="0" bIns="0" rtlCol="0" anchor="t"/>
           <a:lstStyle/>
           <a:p>
-            <a:pPr marL="0" indent="0">
+            <a:pPr indent="0" marL="0">
               <a:lnSpc>
                 <a:spcPct val="105000"/>
               </a:lnSpc>
@@ -20598,7 +21278,7 @@
           <a:bodyPr wrap="square" lIns="0" tIns="0" rIns="0" bIns="0" rtlCol="0" anchor="ctr"/>
           <a:lstStyle/>
           <a:p>
-            <a:pPr marL="0" indent="0">
+            <a:pPr indent="0" marL="0">
               <a:buNone/>
             </a:pPr>
             <a:r>
@@ -20637,7 +21317,7 @@
           <a:bodyPr wrap="square" lIns="0" tIns="0" rIns="0" bIns="0" rtlCol="0" anchor="t"/>
           <a:lstStyle/>
           <a:p>
-            <a:pPr marL="0" indent="0">
+            <a:pPr indent="0" marL="0">
               <a:lnSpc>
                 <a:spcPct val="105000"/>
               </a:lnSpc>
@@ -20706,7 +21386,7 @@
           <a:bodyPr wrap="square" lIns="0" tIns="0" rIns="0" bIns="0" rtlCol="0" anchor="ctr"/>
           <a:lstStyle/>
           <a:p>
-            <a:pPr marL="0" indent="0">
+            <a:pPr indent="0" marL="0">
               <a:buNone/>
             </a:pPr>
             <a:r>
@@ -20745,7 +21425,7 @@
           <a:bodyPr wrap="square" lIns="0" tIns="0" rIns="0" bIns="0" rtlCol="0" anchor="t"/>
           <a:lstStyle/>
           <a:p>
-            <a:pPr marL="0" indent="0">
+            <a:pPr indent="0" marL="0">
               <a:lnSpc>
                 <a:spcPct val="105000"/>
               </a:lnSpc>
@@ -20814,7 +21494,7 @@
           <a:bodyPr wrap="square" lIns="0" tIns="0" rIns="0" bIns="0" rtlCol="0" anchor="ctr"/>
           <a:lstStyle/>
           <a:p>
-            <a:pPr marL="0" indent="0">
+            <a:pPr indent="0" marL="0">
               <a:buNone/>
             </a:pPr>
             <a:r>
@@ -20853,7 +21533,7 @@
           <a:bodyPr wrap="square" lIns="0" tIns="0" rIns="0" bIns="0" rtlCol="0" anchor="t"/>
           <a:lstStyle/>
           <a:p>
-            <a:pPr marL="0" indent="0">
+            <a:pPr indent="0" marL="0">
               <a:lnSpc>
                 <a:spcPct val="105000"/>
               </a:lnSpc>
@@ -20922,7 +21602,7 @@
           <a:bodyPr wrap="square" lIns="0" tIns="0" rIns="0" bIns="0" rtlCol="0" anchor="ctr"/>
           <a:lstStyle/>
           <a:p>
-            <a:pPr marL="0" indent="0">
+            <a:pPr indent="0" marL="0">
               <a:lnSpc>
                 <a:spcPct val="112000"/>
               </a:lnSpc>
@@ -20945,7 +21625,7 @@
       </p:sp>
       <p:sp>
         <p:nvSpPr>
-          <p:cNvPr id="28" name="Slide Number Placeholder 0"/>
+          <p:cNvPr id="25" name="Slide Number Placeholder 0"/>
           <p:cNvSpPr>
             <a:spLocks noGrp="1"/>
           </p:cNvSpPr>
@@ -20963,7 +21643,7 @@
           </a:prstGeom>
           <a:extLst>
             <a:ext uri="{C572A759-6A51-4108-AA02-DFA0A04FC94B}">
-              <ma14:wrappingTextBoxFlag xmlns="" xmlns:ma14="http://schemas.microsoft.com/office/mac/drawingml/2011/main" val="0"/>
+              <ma14:wrappingTextBoxFlag xmlns:ma14="http://schemas.microsoft.com/office/mac/drawingml/2011/main" val="0"/>
             </a:ext>
           </a:extLst>
         </p:spPr>
@@ -20984,7 +21664,7 @@
           <a:p>
             <a:pPr algn="l"/>
             <a:fld id="{F7021451-1387-4CA6-816F-3879F97B5CBC}" type="slidenum">
-              <a:rPr lang="en-US" b="0"/>
+              <a:rPr b="0" lang="en-US"/>
               <a:t>4</a:t>
             </a:fld>
             <a:endParaRPr lang="en-US"/>
@@ -21037,11 +21717,11 @@
           <a:bodyPr wrap="square" lIns="0" tIns="0" rIns="0" bIns="0" rtlCol="0" anchor="ctr"/>
           <a:lstStyle/>
           <a:p>
-            <a:pPr marL="0" indent="0">
-              <a:buNone/>
-            </a:pPr>
-            <a:r>
-              <a:rPr lang="en-US" sz="1200" b="1" kern="0" spc="400" dirty="0">
+            <a:pPr indent="0" marL="0">
+              <a:buNone/>
+            </a:pPr>
+            <a:r>
+              <a:rPr lang="en-US" sz="1200" b="1" spc="400" kern="0" dirty="0">
                 <a:solidFill>
                   <a:srgbClr val="FFFFFF"/>
                 </a:solidFill>
@@ -21076,7 +21756,7 @@
           <a:bodyPr wrap="square" lIns="0" tIns="0" rIns="0" bIns="0" rtlCol="0" anchor="ctr"/>
           <a:lstStyle/>
           <a:p>
-            <a:pPr marL="0" indent="0">
+            <a:pPr indent="0" marL="0">
               <a:buNone/>
             </a:pPr>
             <a:r>
@@ -21115,7 +21795,7 @@
           <a:bodyPr wrap="square" lIns="0" tIns="0" rIns="0" bIns="0" rtlCol="0" anchor="t"/>
           <a:lstStyle/>
           <a:p>
-            <a:pPr marL="0" indent="0">
+            <a:pPr indent="0" marL="0">
               <a:buNone/>
             </a:pPr>
             <a:r>
@@ -21201,7 +21881,7 @@
           <a:bodyPr wrap="square" lIns="0" tIns="0" rIns="0" bIns="0" rtlCol="0" anchor="ctr"/>
           <a:lstStyle/>
           <a:p>
-            <a:pPr marL="0" indent="0" algn="l">
+            <a:pPr algn="l" indent="0" marL="0">
               <a:buNone/>
             </a:pPr>
             <a:r>
@@ -21240,7 +21920,7 @@
           <a:bodyPr wrap="square" lIns="0" tIns="0" rIns="0" bIns="0" rtlCol="0" anchor="ctr"/>
           <a:lstStyle/>
           <a:p>
-            <a:pPr marL="0" indent="0">
+            <a:pPr indent="0" marL="0">
               <a:buNone/>
             </a:pPr>
             <a:r>
@@ -21306,11 +21986,11 @@
           <a:bodyPr wrap="square" lIns="0" tIns="0" rIns="0" bIns="0" rtlCol="0" anchor="ctr"/>
           <a:lstStyle/>
           <a:p>
-            <a:pPr marL="0" indent="0" algn="ctr">
-              <a:buNone/>
-            </a:pPr>
-            <a:r>
-              <a:rPr lang="en-US" sz="900" b="1" kern="0" spc="100" dirty="0">
+            <a:pPr algn="ctr" indent="0" marL="0">
+              <a:buNone/>
+            </a:pPr>
+            <a:r>
+              <a:rPr lang="en-US" sz="900" b="1" spc="100" kern="0" dirty="0">
                 <a:solidFill>
                   <a:srgbClr val="5A05F4"/>
                 </a:solidFill>
@@ -21326,14 +22006,14 @@
       </p:sp>
       <p:pic>
         <p:nvPicPr>
-          <p:cNvPr id="7" name="Image 0" descr="preencoded.png"/>
+          <p:cNvPr id="7" name="Image 0" descr="preencoded.png">    </p:cNvPr>
           <p:cNvPicPr>
             <a:picLocks noChangeAspect="1"/>
           </p:cNvPicPr>
           <p:nvPr/>
         </p:nvPicPr>
         <p:blipFill>
-          <a:blip r:embed="rId3"/>
+          <a:blip r:embed="rId1"/>
           <a:stretch>
             <a:fillRect/>
           </a:stretch>
@@ -21391,7 +22071,7 @@
           <a:bodyPr wrap="square" lIns="0" tIns="0" rIns="0" bIns="0" rtlCol="0" anchor="ctr"/>
           <a:lstStyle/>
           <a:p>
-            <a:pPr marL="0" indent="0">
+            <a:pPr indent="0" marL="0">
               <a:buNone/>
             </a:pPr>
             <a:r>
@@ -21430,7 +22110,7 @@
           <a:bodyPr wrap="square" lIns="0" tIns="0" rIns="0" bIns="0" rtlCol="0" anchor="t"/>
           <a:lstStyle/>
           <a:p>
-            <a:pPr marL="0" indent="0">
+            <a:pPr indent="0" marL="0">
               <a:buNone/>
             </a:pPr>
             <a:r>
@@ -21491,7 +22171,7 @@
           <a:bodyPr wrap="square" lIns="0" tIns="0" rIns="0" bIns="0" rtlCol="0" anchor="ctr"/>
           <a:lstStyle/>
           <a:p>
-            <a:pPr marL="0" indent="0">
+            <a:pPr indent="0" marL="0">
               <a:buNone/>
             </a:pPr>
             <a:r>
@@ -21530,7 +22210,7 @@
           <a:bodyPr wrap="square" lIns="0" tIns="0" rIns="0" bIns="0" rtlCol="0" anchor="t"/>
           <a:lstStyle/>
           <a:p>
-            <a:pPr marL="0" indent="0">
+            <a:pPr indent="0" marL="0">
               <a:buNone/>
             </a:pPr>
             <a:r>
@@ -21569,11 +22249,11 @@
           <a:bodyPr wrap="square" lIns="0" tIns="0" rIns="0" bIns="0" rtlCol="0" anchor="ctr"/>
           <a:lstStyle/>
           <a:p>
-            <a:pPr marL="0" indent="0">
-              <a:buNone/>
-            </a:pPr>
-            <a:r>
-              <a:rPr lang="en-US" sz="900" b="1" kern="0" spc="150" dirty="0">
+            <a:pPr indent="0" marL="0">
+              <a:buNone/>
+            </a:pPr>
+            <a:r>
+              <a:rPr lang="en-US" sz="900" b="1" spc="150" kern="0" dirty="0">
                 <a:solidFill>
                   <a:srgbClr val="6B6B6B"/>
                 </a:solidFill>
@@ -21608,7 +22288,7 @@
           <a:bodyPr wrap="square" lIns="0" tIns="0" rIns="0" bIns="0" rtlCol="0" anchor="ctr"/>
           <a:lstStyle/>
           <a:p>
-            <a:pPr marL="0" indent="0" algn="l">
+            <a:pPr algn="l" indent="0" marL="0">
               <a:buNone/>
             </a:pPr>
             <a:r>
@@ -21669,7 +22349,7 @@
           <a:bodyPr wrap="square" lIns="0" tIns="0" rIns="0" bIns="0" rtlCol="0" anchor="ctr"/>
           <a:lstStyle/>
           <a:p>
-            <a:pPr marL="0" indent="0">
+            <a:pPr indent="0" marL="0">
               <a:buNone/>
             </a:pPr>
             <a:r>
@@ -21708,7 +22388,7 @@
           <a:bodyPr wrap="square" lIns="0" tIns="0" rIns="0" bIns="0" rtlCol="0" anchor="ctr"/>
           <a:lstStyle/>
           <a:p>
-            <a:pPr marL="0" indent="0" algn="l">
+            <a:pPr algn="l" indent="0" marL="0">
               <a:buNone/>
             </a:pPr>
             <a:r>
@@ -21769,7 +22449,7 @@
           <a:bodyPr wrap="square" lIns="0" tIns="0" rIns="0" bIns="0" rtlCol="0" anchor="ctr"/>
           <a:lstStyle/>
           <a:p>
-            <a:pPr marL="0" indent="0">
+            <a:pPr indent="0" marL="0">
               <a:buNone/>
             </a:pPr>
             <a:r>
@@ -21835,11 +22515,11 @@
           <a:bodyPr wrap="square" lIns="0" tIns="0" rIns="0" bIns="0" rtlCol="0" anchor="ctr"/>
           <a:lstStyle/>
           <a:p>
-            <a:pPr marL="0" indent="0">
-              <a:buNone/>
-            </a:pPr>
-            <a:r>
-              <a:rPr lang="en-US" sz="950" b="1" kern="0" spc="150" dirty="0">
+            <a:pPr indent="0" marL="0">
+              <a:buNone/>
+            </a:pPr>
+            <a:r>
+              <a:rPr lang="en-US" sz="950" b="1" spc="150" kern="0" dirty="0">
                 <a:solidFill>
                   <a:srgbClr val="B3261E"/>
                 </a:solidFill>
@@ -21874,7 +22554,7 @@
           <a:bodyPr wrap="square" lIns="0" tIns="0" rIns="0" bIns="0" rtlCol="0" anchor="ctr"/>
           <a:lstStyle/>
           <a:p>
-            <a:pPr marL="0" indent="0">
+            <a:pPr indent="0" marL="0">
               <a:lnSpc>
                 <a:spcPct val="112000"/>
               </a:lnSpc>
@@ -21943,11 +22623,11 @@
           <a:bodyPr wrap="square" lIns="0" tIns="0" rIns="0" bIns="0" rtlCol="0" anchor="ctr"/>
           <a:lstStyle/>
           <a:p>
-            <a:pPr marL="0" indent="0">
-              <a:buNone/>
-            </a:pPr>
-            <a:r>
-              <a:rPr lang="en-US" sz="950" b="1" kern="0" spc="150" dirty="0">
+            <a:pPr indent="0" marL="0">
+              <a:buNone/>
+            </a:pPr>
+            <a:r>
+              <a:rPr lang="en-US" sz="950" b="1" spc="150" kern="0" dirty="0">
                 <a:solidFill>
                   <a:srgbClr val="106B41"/>
                 </a:solidFill>
@@ -21982,7 +22662,7 @@
           <a:bodyPr wrap="square" lIns="0" tIns="0" rIns="0" bIns="0" rtlCol="0" anchor="ctr"/>
           <a:lstStyle/>
           <a:p>
-            <a:pPr marL="0" indent="0">
+            <a:pPr indent="0" marL="0">
               <a:lnSpc>
                 <a:spcPct val="112000"/>
               </a:lnSpc>
@@ -22005,7 +22685,7 @@
       </p:sp>
       <p:sp>
         <p:nvSpPr>
-          <p:cNvPr id="27" name="Slide Number Placeholder 0"/>
+          <p:cNvPr id="25" name="Slide Number Placeholder 0"/>
           <p:cNvSpPr>
             <a:spLocks noGrp="1"/>
           </p:cNvSpPr>
@@ -22023,7 +22703,7 @@
           </a:prstGeom>
           <a:extLst>
             <a:ext uri="{C572A759-6A51-4108-AA02-DFA0A04FC94B}">
-              <ma14:wrappingTextBoxFlag xmlns="" xmlns:ma14="http://schemas.microsoft.com/office/mac/drawingml/2011/main" val="0"/>
+              <ma14:wrappingTextBoxFlag xmlns:ma14="http://schemas.microsoft.com/office/mac/drawingml/2011/main" val="0"/>
             </a:ext>
           </a:extLst>
         </p:spPr>
@@ -22044,7 +22724,7 @@
           <a:p>
             <a:pPr algn="l"/>
             <a:fld id="{F7021451-1387-4CA6-816F-3879F97B5CBC}" type="slidenum">
-              <a:rPr lang="en-US" b="0"/>
+              <a:rPr b="0" lang="en-US"/>
               <a:t>6</a:t>
             </a:fld>
             <a:endParaRPr lang="en-US"/>
@@ -22119,7 +22799,7 @@
           <a:bodyPr wrap="square" lIns="0" tIns="0" rIns="0" bIns="0" rtlCol="0" anchor="ctr"/>
           <a:lstStyle/>
           <a:p>
-            <a:pPr marL="0" indent="0" algn="l">
+            <a:pPr algn="l" indent="0" marL="0">
               <a:buNone/>
             </a:pPr>
             <a:r>
@@ -22158,7 +22838,7 @@
           <a:bodyPr wrap="square" lIns="0" tIns="0" rIns="0" bIns="0" rtlCol="0" anchor="ctr"/>
           <a:lstStyle/>
           <a:p>
-            <a:pPr marL="0" indent="0">
+            <a:pPr indent="0" marL="0">
               <a:buNone/>
             </a:pPr>
             <a:r>
@@ -22224,11 +22904,11 @@
           <a:bodyPr wrap="square" lIns="0" tIns="0" rIns="0" bIns="0" rtlCol="0" anchor="ctr"/>
           <a:lstStyle/>
           <a:p>
-            <a:pPr marL="0" indent="0" algn="ctr">
-              <a:buNone/>
-            </a:pPr>
-            <a:r>
-              <a:rPr lang="en-US" sz="900" b="1" kern="0" spc="100" dirty="0">
+            <a:pPr algn="ctr" indent="0" marL="0">
+              <a:buNone/>
+            </a:pPr>
+            <a:r>
+              <a:rPr lang="en-US" sz="900" b="1" spc="100" kern="0" dirty="0">
                 <a:solidFill>
                   <a:srgbClr val="5A05F4"/>
                 </a:solidFill>
@@ -22244,14 +22924,14 @@
       </p:sp>
       <p:pic>
         <p:nvPicPr>
-          <p:cNvPr id="7" name="Image 0" descr="preencoded.png"/>
+          <p:cNvPr id="7" name="Image 0" descr="preencoded.png">    </p:cNvPr>
           <p:cNvPicPr>
             <a:picLocks noChangeAspect="1"/>
           </p:cNvPicPr>
           <p:nvPr/>
         </p:nvPicPr>
         <p:blipFill>
-          <a:blip r:embed="rId3"/>
+          <a:blip r:embed="rId1"/>
           <a:stretch>
             <a:fillRect/>
           </a:stretch>
@@ -22309,7 +22989,7 @@
           <a:bodyPr wrap="square" lIns="0" tIns="0" rIns="0" bIns="0" rtlCol="0" anchor="ctr"/>
           <a:lstStyle/>
           <a:p>
-            <a:pPr marL="0" indent="0">
+            <a:pPr indent="0" marL="0">
               <a:buNone/>
             </a:pPr>
             <a:r>
@@ -22348,7 +23028,7 @@
           <a:bodyPr wrap="square" lIns="0" tIns="0" rIns="0" bIns="0" rtlCol="0" anchor="t"/>
           <a:lstStyle/>
           <a:p>
-            <a:pPr marL="0" indent="0">
+            <a:pPr indent="0" marL="0">
               <a:lnSpc>
                 <a:spcPct val="108000"/>
               </a:lnSpc>
@@ -22412,7 +23092,7 @@
           <a:bodyPr wrap="square" lIns="0" tIns="0" rIns="0" bIns="0" rtlCol="0" anchor="ctr"/>
           <a:lstStyle/>
           <a:p>
-            <a:pPr marL="0" indent="0">
+            <a:pPr indent="0" marL="0">
               <a:buNone/>
             </a:pPr>
             <a:r>
@@ -22451,7 +23131,7 @@
           <a:bodyPr wrap="square" lIns="0" tIns="0" rIns="0" bIns="0" rtlCol="0" anchor="t"/>
           <a:lstStyle/>
           <a:p>
-            <a:pPr marL="0" indent="0">
+            <a:pPr indent="0" marL="0">
               <a:lnSpc>
                 <a:spcPct val="108000"/>
               </a:lnSpc>
@@ -22480,7 +23160,7 @@
         </p:nvSpPr>
         <p:spPr>
           <a:xfrm>
-            <a:off x="6275834" y="3017520"/>
+            <a:off x="6281928" y="3063240"/>
             <a:ext cx="5349240" cy="1188720"/>
           </a:xfrm>
           <a:prstGeom prst="roundRect">
@@ -22502,7 +23182,7 @@
         </p:nvSpPr>
         <p:spPr>
           <a:xfrm>
-            <a:off x="6477002" y="3172968"/>
+            <a:off x="6483096" y="3218688"/>
             <a:ext cx="4946904" cy="438912"/>
           </a:xfrm>
           <a:prstGeom prst="rect">
@@ -22515,7 +23195,7 @@
           <a:bodyPr wrap="square" lIns="0" tIns="0" rIns="0" bIns="0" rtlCol="0" anchor="ctr"/>
           <a:lstStyle/>
           <a:p>
-            <a:pPr marL="0" indent="0">
+            <a:pPr indent="0" marL="0">
               <a:buNone/>
             </a:pPr>
             <a:r>
@@ -22541,7 +23221,7 @@
         </p:nvSpPr>
         <p:spPr>
           <a:xfrm>
-            <a:off x="6477002" y="3703320"/>
+            <a:off x="6483096" y="3749040"/>
             <a:ext cx="4946904" cy="347472"/>
           </a:xfrm>
           <a:prstGeom prst="rect">
@@ -22554,7 +23234,7 @@
           <a:bodyPr wrap="square" lIns="0" tIns="0" rIns="0" bIns="0" rtlCol="0" anchor="t"/>
           <a:lstStyle/>
           <a:p>
-            <a:pPr marL="0" indent="0">
+            <a:pPr indent="0" marL="0">
               <a:lnSpc>
                 <a:spcPct val="108000"/>
               </a:lnSpc>
@@ -22583,7 +23263,7 @@
         </p:nvSpPr>
         <p:spPr>
           <a:xfrm>
-            <a:off x="6281928" y="4297680"/>
+            <a:off x="6281928" y="4389120"/>
             <a:ext cx="5349240" cy="1188720"/>
           </a:xfrm>
           <a:prstGeom prst="roundRect">
@@ -22605,7 +23285,7 @@
         </p:nvSpPr>
         <p:spPr>
           <a:xfrm>
-            <a:off x="6483096" y="4453128"/>
+            <a:off x="6483096" y="4544568"/>
             <a:ext cx="4946904" cy="438912"/>
           </a:xfrm>
           <a:prstGeom prst="rect">
@@ -22618,7 +23298,7 @@
           <a:bodyPr wrap="square" lIns="0" tIns="0" rIns="0" bIns="0" rtlCol="0" anchor="ctr"/>
           <a:lstStyle/>
           <a:p>
-            <a:pPr marL="0" indent="0">
+            <a:pPr indent="0" marL="0">
               <a:buNone/>
             </a:pPr>
             <a:r>
@@ -22644,7 +23324,7 @@
         </p:nvSpPr>
         <p:spPr>
           <a:xfrm>
-            <a:off x="6483096" y="4983480"/>
+            <a:off x="6483096" y="5074920"/>
             <a:ext cx="4946904" cy="347472"/>
           </a:xfrm>
           <a:prstGeom prst="rect">
@@ -22657,7 +23337,7 @@
           <a:bodyPr wrap="square" lIns="0" tIns="0" rIns="0" bIns="0" rtlCol="0" anchor="t"/>
           <a:lstStyle/>
           <a:p>
-            <a:pPr marL="0" indent="0">
+            <a:pPr indent="0" marL="0">
               <a:lnSpc>
                 <a:spcPct val="108000"/>
               </a:lnSpc>
@@ -22721,11 +23401,11 @@
           <a:bodyPr wrap="square" lIns="0" tIns="0" rIns="0" bIns="0" rtlCol="0" anchor="ctr"/>
           <a:lstStyle/>
           <a:p>
-            <a:pPr marL="0" indent="0">
-              <a:buNone/>
-            </a:pPr>
-            <a:r>
-              <a:rPr lang="en-US" sz="950" b="1" kern="0" spc="150" dirty="0">
+            <a:pPr indent="0" marL="0">
+              <a:buNone/>
+            </a:pPr>
+            <a:r>
+              <a:rPr lang="en-US" sz="950" b="1" spc="150" kern="0" dirty="0">
                 <a:solidFill>
                   <a:srgbClr val="FFFFFF"/>
                 </a:solidFill>
@@ -22760,7 +23440,7 @@
           <a:bodyPr wrap="square" lIns="0" tIns="0" rIns="0" bIns="0" rtlCol="0" anchor="ctr"/>
           <a:lstStyle/>
           <a:p>
-            <a:pPr marL="0" indent="0">
+            <a:pPr indent="0" marL="0">
               <a:lnSpc>
                 <a:spcPct val="112000"/>
               </a:lnSpc>
@@ -22829,7 +23509,7 @@
           <a:bodyPr wrap="square" lIns="0" tIns="0" rIns="0" bIns="0" rtlCol="0" anchor="ctr"/>
           <a:lstStyle/>
           <a:p>
-            <a:pPr marL="0" indent="0">
+            <a:pPr indent="0" marL="0">
               <a:lnSpc>
                 <a:spcPct val="112000"/>
               </a:lnSpc>
@@ -22870,7 +23550,7 @@
           </a:prstGeom>
           <a:extLst>
             <a:ext uri="{C572A759-6A51-4108-AA02-DFA0A04FC94B}">
-              <ma14:wrappingTextBoxFlag xmlns="" xmlns:ma14="http://schemas.microsoft.com/office/mac/drawingml/2011/main" val="0"/>
+              <ma14:wrappingTextBoxFlag xmlns:ma14="http://schemas.microsoft.com/office/mac/drawingml/2011/main" val="0"/>
             </a:ext>
           </a:extLst>
         </p:spPr>
@@ -22891,7 +23571,7 @@
           <a:p>
             <a:pPr algn="l"/>
             <a:fld id="{F7021451-1387-4CA6-816F-3879F97B5CBC}" type="slidenum">
-              <a:rPr lang="en-US" b="0"/>
+              <a:rPr b="0" lang="en-US"/>
               <a:t>7</a:t>
             </a:fld>
             <a:endParaRPr lang="en-US"/>
@@ -22966,7 +23646,7 @@
           <a:bodyPr wrap="square" lIns="0" tIns="0" rIns="0" bIns="0" rtlCol="0" anchor="ctr"/>
           <a:lstStyle/>
           <a:p>
-            <a:pPr marL="0" indent="0" algn="l">
+            <a:pPr algn="l" indent="0" marL="0">
               <a:buNone/>
             </a:pPr>
             <a:r>
@@ -23005,7 +23685,7 @@
           <a:bodyPr wrap="square" lIns="0" tIns="0" rIns="0" bIns="0" rtlCol="0" anchor="ctr"/>
           <a:lstStyle/>
           <a:p>
-            <a:pPr marL="0" indent="0">
+            <a:pPr indent="0" marL="0">
               <a:buNone/>
             </a:pPr>
             <a:r>
@@ -23071,11 +23751,11 @@
           <a:bodyPr wrap="square" lIns="0" tIns="0" rIns="0" bIns="0" rtlCol="0" anchor="ctr"/>
           <a:lstStyle/>
           <a:p>
-            <a:pPr marL="0" indent="0" algn="ctr">
-              <a:buNone/>
-            </a:pPr>
-            <a:r>
-              <a:rPr lang="en-US" sz="900" b="1" kern="0" spc="100" dirty="0">
+            <a:pPr algn="ctr" indent="0" marL="0">
+              <a:buNone/>
+            </a:pPr>
+            <a:r>
+              <a:rPr lang="en-US" sz="900" b="1" spc="100" kern="0" dirty="0">
                 <a:solidFill>
                   <a:srgbClr val="5A05F4"/>
                 </a:solidFill>
@@ -23091,14 +23771,14 @@
       </p:sp>
       <p:pic>
         <p:nvPicPr>
-          <p:cNvPr id="7" name="Image 0" descr="preencoded.png"/>
+          <p:cNvPr id="7" name="Image 0" descr="preencoded.png">    </p:cNvPr>
           <p:cNvPicPr>
             <a:picLocks noChangeAspect="1"/>
           </p:cNvPicPr>
           <p:nvPr/>
         </p:nvPicPr>
         <p:blipFill>
-          <a:blip r:embed="rId3"/>
+          <a:blip r:embed="rId1"/>
           <a:stretch>
             <a:fillRect/>
           </a:stretch>
@@ -23161,7 +23841,7 @@
           <a:bodyPr wrap="square" lIns="0" tIns="0" rIns="0" bIns="0" rtlCol="0" anchor="t"/>
           <a:lstStyle/>
           <a:p>
-            <a:pPr marL="0" indent="0">
+            <a:pPr indent="0" marL="0">
               <a:lnSpc>
                 <a:spcPct val="130000"/>
               </a:lnSpc>
@@ -23178,6 +23858,12 @@
               </a:rPr>
               <a:t>var cacheKey = </a:t>
             </a:r>
+            <a:pPr indent="0" marL="0">
+              <a:lnSpc>
+                <a:spcPct val="130000"/>
+              </a:lnSpc>
+              <a:buNone/>
+            </a:pPr>
             <a:r>
               <a:rPr lang="en-US" sz="1300" dirty="0">
                 <a:solidFill>
@@ -23189,6 +23875,12 @@
               </a:rPr>
               <a:t>$"{model}|{systemPrompt}|{body.Message}"</a:t>
             </a:r>
+            <a:pPr indent="0" marL="0">
+              <a:lnSpc>
+                <a:spcPct val="130000"/>
+              </a:lnSpc>
+              <a:buNone/>
+            </a:pPr>
             <a:r>
               <a:rPr lang="en-US" sz="1300" dirty="0">
                 <a:solidFill>
@@ -23247,7 +23939,7 @@
           <a:bodyPr wrap="square" lIns="0" tIns="0" rIns="0" bIns="0" rtlCol="0" anchor="ctr"/>
           <a:lstStyle/>
           <a:p>
-            <a:pPr marL="0" indent="0" algn="ctr">
+            <a:pPr algn="ctr" indent="0" marL="0">
               <a:buNone/>
             </a:pPr>
             <a:r>
@@ -23351,7 +24043,7 @@
           <a:bodyPr wrap="square" lIns="0" tIns="0" rIns="0" bIns="0" rtlCol="0" anchor="ctr"/>
           <a:lstStyle/>
           <a:p>
-            <a:pPr marL="0" indent="0" algn="ctr">
+            <a:pPr algn="ctr" indent="0" marL="0">
               <a:buNone/>
             </a:pPr>
             <a:r>
@@ -23455,7 +24147,7 @@
           <a:bodyPr wrap="square" lIns="0" tIns="0" rIns="0" bIns="0" rtlCol="0" anchor="ctr"/>
           <a:lstStyle/>
           <a:p>
-            <a:pPr marL="0" indent="0" algn="ctr">
+            <a:pPr algn="ctr" indent="0" marL="0">
               <a:buNone/>
             </a:pPr>
             <a:r>
@@ -23521,11 +24213,11 @@
           <a:bodyPr wrap="square" lIns="0" tIns="0" rIns="0" bIns="0" rtlCol="0" anchor="ctr"/>
           <a:lstStyle/>
           <a:p>
-            <a:pPr marL="0" indent="0">
-              <a:buNone/>
-            </a:pPr>
-            <a:r>
-              <a:rPr lang="en-US" sz="950" b="1" kern="0" spc="150" dirty="0">
+            <a:pPr indent="0" marL="0">
+              <a:buNone/>
+            </a:pPr>
+            <a:r>
+              <a:rPr lang="en-US" sz="950" b="1" spc="150" kern="0" dirty="0">
                 <a:solidFill>
                   <a:srgbClr val="B3261E"/>
                 </a:solidFill>
@@ -23560,7 +24252,7 @@
           <a:bodyPr wrap="square" lIns="0" tIns="0" rIns="0" bIns="0" rtlCol="0" anchor="ctr"/>
           <a:lstStyle/>
           <a:p>
-            <a:pPr marL="0" indent="0">
+            <a:pPr indent="0" marL="0">
               <a:lnSpc>
                 <a:spcPct val="112000"/>
               </a:lnSpc>
@@ -23629,7 +24321,7 @@
           <a:bodyPr wrap="square" lIns="0" tIns="0" rIns="0" bIns="0" rtlCol="0" anchor="ctr"/>
           <a:lstStyle/>
           <a:p>
-            <a:pPr marL="0" indent="0">
+            <a:pPr indent="0" marL="0">
               <a:lnSpc>
                 <a:spcPct val="112000"/>
               </a:lnSpc>
@@ -23670,7 +24362,7 @@
           </a:prstGeom>
           <a:extLst>
             <a:ext uri="{C572A759-6A51-4108-AA02-DFA0A04FC94B}">
-              <ma14:wrappingTextBoxFlag xmlns="" xmlns:ma14="http://schemas.microsoft.com/office/mac/drawingml/2011/main" val="0"/>
+              <ma14:wrappingTextBoxFlag xmlns:ma14="http://schemas.microsoft.com/office/mac/drawingml/2011/main" val="0"/>
             </a:ext>
           </a:extLst>
         </p:spPr>
@@ -23691,7 +24383,7 @@
           <a:p>
             <a:pPr algn="l"/>
             <a:fld id="{F7021451-1387-4CA6-816F-3879F97B5CBC}" type="slidenum">
-              <a:rPr lang="en-US" b="0"/>
+              <a:rPr b="0" lang="en-US"/>
               <a:t>8</a:t>
             </a:fld>
             <a:endParaRPr lang="en-US"/>
@@ -23766,7 +24458,7 @@
           <a:bodyPr wrap="square" lIns="0" tIns="0" rIns="0" bIns="0" rtlCol="0" anchor="ctr"/>
           <a:lstStyle/>
           <a:p>
-            <a:pPr marL="0" indent="0" algn="l">
+            <a:pPr algn="l" indent="0" marL="0">
               <a:buNone/>
             </a:pPr>
             <a:r>
@@ -23805,7 +24497,7 @@
           <a:bodyPr wrap="square" lIns="0" tIns="0" rIns="0" bIns="0" rtlCol="0" anchor="ctr"/>
           <a:lstStyle/>
           <a:p>
-            <a:pPr marL="0" indent="0">
+            <a:pPr indent="0" marL="0">
               <a:buNone/>
             </a:pPr>
             <a:r>
@@ -23871,11 +24563,11 @@
           <a:bodyPr wrap="square" lIns="0" tIns="0" rIns="0" bIns="0" rtlCol="0" anchor="ctr"/>
           <a:lstStyle/>
           <a:p>
-            <a:pPr marL="0" indent="0" algn="ctr">
-              <a:buNone/>
-            </a:pPr>
-            <a:r>
-              <a:rPr lang="en-US" sz="900" b="1" kern="0" spc="100" dirty="0">
+            <a:pPr algn="ctr" indent="0" marL="0">
+              <a:buNone/>
+            </a:pPr>
+            <a:r>
+              <a:rPr lang="en-US" sz="900" b="1" spc="100" kern="0" dirty="0">
                 <a:solidFill>
                   <a:srgbClr val="5A05F4"/>
                 </a:solidFill>
@@ -23891,14 +24583,14 @@
       </p:sp>
       <p:pic>
         <p:nvPicPr>
-          <p:cNvPr id="7" name="Image 0" descr="preencoded.png"/>
+          <p:cNvPr id="7" name="Image 0" descr="preencoded.png">    </p:cNvPr>
           <p:cNvPicPr>
             <a:picLocks noChangeAspect="1"/>
           </p:cNvPicPr>
           <p:nvPr/>
         </p:nvPicPr>
         <p:blipFill>
-          <a:blip r:embed="rId3"/>
+          <a:blip r:embed="rId1"/>
           <a:stretch>
             <a:fillRect/>
           </a:stretch>
@@ -23956,7 +24648,7 @@
           <a:bodyPr wrap="square" lIns="0" tIns="0" rIns="0" bIns="0" rtlCol="0" anchor="ctr"/>
           <a:lstStyle/>
           <a:p>
-            <a:pPr marL="0" indent="0">
+            <a:pPr indent="0" marL="0">
               <a:buNone/>
             </a:pPr>
             <a:r>
@@ -23995,7 +24687,7 @@
           <a:bodyPr wrap="square" lIns="0" tIns="0" rIns="0" bIns="0" rtlCol="0" anchor="ctr"/>
           <a:lstStyle/>
           <a:p>
-            <a:pPr marL="0" indent="0">
+            <a:pPr indent="0" marL="0">
               <a:buNone/>
             </a:pPr>
             <a:r>
@@ -24056,7 +24748,7 @@
           <a:bodyPr wrap="square" lIns="0" tIns="0" rIns="0" bIns="0" rtlCol="0" anchor="ctr"/>
           <a:lstStyle/>
           <a:p>
-            <a:pPr marL="0" indent="0">
+            <a:pPr indent="0" marL="0">
               <a:buNone/>
             </a:pPr>
             <a:r>
@@ -24095,7 +24787,7 @@
           <a:bodyPr wrap="square" lIns="0" tIns="0" rIns="0" bIns="0" rtlCol="0" anchor="ctr"/>
           <a:lstStyle/>
           <a:p>
-            <a:pPr marL="0" indent="0">
+            <a:pPr indent="0" marL="0">
               <a:buNone/>
             </a:pPr>
             <a:r>
@@ -24156,7 +24848,7 @@
           <a:bodyPr wrap="square" lIns="0" tIns="0" rIns="0" bIns="0" rtlCol="0" anchor="ctr"/>
           <a:lstStyle/>
           <a:p>
-            <a:pPr marL="0" indent="0">
+            <a:pPr indent="0" marL="0">
               <a:buNone/>
             </a:pPr>
             <a:r>
@@ -24195,7 +24887,7 @@
           <a:bodyPr wrap="square" lIns="0" tIns="0" rIns="0" bIns="0" rtlCol="0" anchor="ctr"/>
           <a:lstStyle/>
           <a:p>
-            <a:pPr marL="0" indent="0">
+            <a:pPr indent="0" marL="0">
               <a:buNone/>
             </a:pPr>
             <a:r>
@@ -24277,7 +24969,7 @@
           <a:bodyPr wrap="square" lIns="0" tIns="0" rIns="0" bIns="0" rtlCol="0" anchor="ctr"/>
           <a:lstStyle/>
           <a:p>
-            <a:pPr marL="0" indent="0" algn="ctr">
+            <a:pPr algn="ctr" indent="0" marL="0">
               <a:buNone/>
             </a:pPr>
             <a:r>
@@ -24336,7 +25028,7 @@
           <a:bodyPr wrap="square" lIns="0" tIns="0" rIns="0" bIns="0" rtlCol="0" anchor="ctr"/>
           <a:lstStyle/>
           <a:p>
-            <a:pPr marL="0" indent="0" algn="ctr">
+            <a:pPr algn="ctr" indent="0" marL="0">
               <a:buNone/>
             </a:pPr>
             <a:r>
@@ -24395,7 +25087,7 @@
           <a:bodyPr wrap="square" lIns="0" tIns="0" rIns="0" bIns="0" rtlCol="0" anchor="ctr"/>
           <a:lstStyle/>
           <a:p>
-            <a:pPr marL="0" indent="0" algn="ctr">
+            <a:pPr algn="ctr" indent="0" marL="0">
               <a:buNone/>
             </a:pPr>
             <a:r>
@@ -24434,7 +25126,7 @@
           <a:bodyPr wrap="square" lIns="0" tIns="0" rIns="0" bIns="0" rtlCol="0" anchor="ctr"/>
           <a:lstStyle/>
           <a:p>
-            <a:pPr marL="0" indent="0">
+            <a:pPr indent="0" marL="0">
               <a:buNone/>
             </a:pPr>
             <a:r>
@@ -24473,7 +25165,7 @@
           <a:bodyPr wrap="square" lIns="0" tIns="0" rIns="0" bIns="0" rtlCol="0" anchor="ctr"/>
           <a:lstStyle/>
           <a:p>
-            <a:pPr marL="0" indent="0" algn="r">
+            <a:pPr algn="r" indent="0" marL="0">
               <a:buNone/>
             </a:pPr>
             <a:r>
@@ -24534,11 +25226,11 @@
           <a:bodyPr wrap="square" lIns="0" tIns="0" rIns="0" bIns="0" rtlCol="0" anchor="ctr"/>
           <a:lstStyle/>
           <a:p>
-            <a:pPr marL="0" indent="0">
-              <a:buNone/>
-            </a:pPr>
-            <a:r>
-              <a:rPr lang="en-US" sz="950" b="1" kern="0" spc="150" dirty="0">
+            <a:pPr indent="0" marL="0">
+              <a:buNone/>
+            </a:pPr>
+            <a:r>
+              <a:rPr lang="en-US" sz="950" b="1" spc="150" kern="0" dirty="0">
                 <a:solidFill>
                   <a:srgbClr val="FFFFFF"/>
                 </a:solidFill>
@@ -24573,7 +25265,7 @@
           <a:bodyPr wrap="square" lIns="0" tIns="0" rIns="0" bIns="0" rtlCol="0" anchor="ctr"/>
           <a:lstStyle/>
           <a:p>
-            <a:pPr marL="0" indent="0">
+            <a:pPr indent="0" marL="0">
               <a:lnSpc>
                 <a:spcPct val="112000"/>
               </a:lnSpc>
@@ -24596,7 +25288,7 @@
       </p:sp>
       <p:sp>
         <p:nvSpPr>
-          <p:cNvPr id="29" name="Slide Number Placeholder 0"/>
+          <p:cNvPr id="25" name="Slide Number Placeholder 0"/>
           <p:cNvSpPr>
             <a:spLocks noGrp="1"/>
           </p:cNvSpPr>
@@ -24614,7 +25306,7 @@
           </a:prstGeom>
           <a:extLst>
             <a:ext uri="{C572A759-6A51-4108-AA02-DFA0A04FC94B}">
-              <ma14:wrappingTextBoxFlag xmlns="" xmlns:ma14="http://schemas.microsoft.com/office/mac/drawingml/2011/main" val="0"/>
+              <ma14:wrappingTextBoxFlag xmlns:ma14="http://schemas.microsoft.com/office/mac/drawingml/2011/main" val="0"/>
             </a:ext>
           </a:extLst>
         </p:spPr>
@@ -24635,7 +25327,7 @@
           <a:p>
             <a:pPr algn="l"/>
             <a:fld id="{F7021451-1387-4CA6-816F-3879F97B5CBC}" type="slidenum">
-              <a:rPr lang="en-US" b="0"/>
+              <a:rPr b="0" lang="en-US"/>
               <a:t>9</a:t>
             </a:fld>
             <a:endParaRPr lang="en-US"/>
@@ -24943,299 +25635,4 @@
     </a:ext>
   </a:extLst>
 </a:theme>
-</file>
-
-<file path=ppt/theme/theme2.xml><?xml version="1.0" encoding="utf-8"?>
-<a:theme xmlns:a="http://schemas.openxmlformats.org/drawingml/2006/main" name="Office Theme">
-  <a:themeElements>
-    <a:clrScheme name="Office">
-      <a:dk1>
-        <a:sysClr val="windowText" lastClr="000000"/>
-      </a:dk1>
-      <a:lt1>
-        <a:sysClr val="window" lastClr="FFFFFF"/>
-      </a:lt1>
-      <a:dk2>
-        <a:srgbClr val="44546A"/>
-      </a:dk2>
-      <a:lt2>
-        <a:srgbClr val="E7E6E6"/>
-      </a:lt2>
-      <a:accent1>
-        <a:srgbClr val="4472C4"/>
-      </a:accent1>
-      <a:accent2>
-        <a:srgbClr val="ED7D31"/>
-      </a:accent2>
-      <a:accent3>
-        <a:srgbClr val="A5A5A5"/>
-      </a:accent3>
-      <a:accent4>
-        <a:srgbClr val="FFC000"/>
-      </a:accent4>
-      <a:accent5>
-        <a:srgbClr val="5B9BD5"/>
-      </a:accent5>
-      <a:accent6>
-        <a:srgbClr val="70AD47"/>
-      </a:accent6>
-      <a:hlink>
-        <a:srgbClr val="0563C1"/>
-      </a:hlink>
-      <a:folHlink>
-        <a:srgbClr val="954F72"/>
-      </a:folHlink>
-    </a:clrScheme>
-    <a:fontScheme name="Office">
-      <a:majorFont>
-        <a:latin typeface="Calibri Light" panose="020F0302020204030204"/>
-        <a:ea typeface=""/>
-        <a:cs typeface=""/>
-        <a:font script="Jpan" typeface="游ゴシック Light"/>
-        <a:font script="Hang" typeface="맑은 고딕"/>
-        <a:font script="Hans" typeface="等线 Light"/>
-        <a:font script="Hant" typeface="新細明體"/>
-        <a:font script="Arab" typeface="Times New Roman"/>
-        <a:font script="Hebr" typeface="Times New Roman"/>
-        <a:font script="Thai" typeface="Angsana New"/>
-        <a:font script="Ethi" typeface="Nyala"/>
-        <a:font script="Beng" typeface="Vrinda"/>
-        <a:font script="Gujr" typeface="Shruti"/>
-        <a:font script="Khmr" typeface="MoolBoran"/>
-        <a:font script="Knda" typeface="Tunga"/>
-        <a:font script="Guru" typeface="Raavi"/>
-        <a:font script="Cans" typeface="Euphemia"/>
-        <a:font script="Cher" typeface="Plantagenet Cherokee"/>
-        <a:font script="Yiii" typeface="Microsoft Yi Baiti"/>
-        <a:font script="Tibt" typeface="Microsoft Himalaya"/>
-        <a:font script="Thaa" typeface="MV Boli"/>
-        <a:font script="Deva" typeface="Mangal"/>
-        <a:font script="Telu" typeface="Gautami"/>
-        <a:font script="Taml" typeface="Latha"/>
-        <a:font script="Syrc" typeface="Estrangelo Edessa"/>
-        <a:font script="Orya" typeface="Kalinga"/>
-        <a:font script="Mlym" typeface="Kartika"/>
-        <a:font script="Laoo" typeface="DokChampa"/>
-        <a:font script="Sinh" typeface="Iskoola Pota"/>
-        <a:font script="Mong" typeface="Mongolian Baiti"/>
-        <a:font script="Viet" typeface="Times New Roman"/>
-        <a:font script="Uigh" typeface="Microsoft Uighur"/>
-        <a:font script="Geor" typeface="Sylfaen"/>
-        <a:font script="Armn" typeface="Arial"/>
-        <a:font script="Bugi" typeface="Leelawadee UI"/>
-        <a:font script="Bopo" typeface="Microsoft JhengHei"/>
-        <a:font script="Java" typeface="Javanese Text"/>
-        <a:font script="Lisu" typeface="Segoe UI"/>
-        <a:font script="Mymr" typeface="Myanmar Text"/>
-        <a:font script="Nkoo" typeface="Ebrima"/>
-        <a:font script="Olck" typeface="Nirmala UI"/>
-        <a:font script="Osma" typeface="Ebrima"/>
-        <a:font script="Phag" typeface="Phagspa"/>
-        <a:font script="Syrn" typeface="Estrangelo Edessa"/>
-        <a:font script="Syrj" typeface="Estrangelo Edessa"/>
-        <a:font script="Syre" typeface="Estrangelo Edessa"/>
-        <a:font script="Sora" typeface="Nirmala UI"/>
-        <a:font script="Tale" typeface="Microsoft Tai Le"/>
-        <a:font script="Talu" typeface="Microsoft New Tai Lue"/>
-        <a:font script="Tfng" typeface="Ebrima"/>
-      </a:majorFont>
-      <a:minorFont>
-        <a:latin typeface="Calibri" panose="020F0502020204030204"/>
-        <a:ea typeface=""/>
-        <a:cs typeface=""/>
-        <a:font script="Jpan" typeface="游ゴシック"/>
-        <a:font script="Hang" typeface="맑은 고딕"/>
-        <a:font script="Hans" typeface="等线"/>
-        <a:font script="Hant" typeface="新細明體"/>
-        <a:font script="Arab" typeface="Arial"/>
-        <a:font script="Hebr" typeface="Arial"/>
-        <a:font script="Thai" typeface="Cordia New"/>
-        <a:font script="Ethi" typeface="Nyala"/>
-        <a:font script="Beng" typeface="Vrinda"/>
-        <a:font script="Gujr" typeface="Shruti"/>
-        <a:font script="Khmr" typeface="DaunPenh"/>
-        <a:font script="Knda" typeface="Tunga"/>
-        <a:font script="Guru" typeface="Raavi"/>
-        <a:font script="Cans" typeface="Euphemia"/>
-        <a:font script="Cher" typeface="Plantagenet Cherokee"/>
-        <a:font script="Yiii" typeface="Microsoft Yi Baiti"/>
-        <a:font script="Tibt" typeface="Microsoft Himalaya"/>
-        <a:font script="Thaa" typeface="MV Boli"/>
-        <a:font script="Deva" typeface="Mangal"/>
-        <a:font script="Telu" typeface="Gautami"/>
-        <a:font script="Taml" typeface="Latha"/>
-        <a:font script="Syrc" typeface="Estrangelo Edessa"/>
-        <a:font script="Orya" typeface="Kalinga"/>
-        <a:font script="Mlym" typeface="Kartika"/>
-        <a:font script="Laoo" typeface="DokChampa"/>
-        <a:font script="Sinh" typeface="Iskoola Pota"/>
-        <a:font script="Mong" typeface="Mongolian Baiti"/>
-        <a:font script="Viet" typeface="Arial"/>
-        <a:font script="Uigh" typeface="Microsoft Uighur"/>
-        <a:font script="Geor" typeface="Sylfaen"/>
-        <a:font script="Armn" typeface="Arial"/>
-        <a:font script="Bugi" typeface="Leelawadee UI"/>
-        <a:font script="Bopo" typeface="Microsoft JhengHei"/>
-        <a:font script="Java" typeface="Javanese Text"/>
-        <a:font script="Lisu" typeface="Segoe UI"/>
-        <a:font script="Mymr" typeface="Myanmar Text"/>
-        <a:font script="Nkoo" typeface="Ebrima"/>
-        <a:font script="Olck" typeface="Nirmala UI"/>
-        <a:font script="Osma" typeface="Ebrima"/>
-        <a:font script="Phag" typeface="Phagspa"/>
-        <a:font script="Syrn" typeface="Estrangelo Edessa"/>
-        <a:font script="Syrj" typeface="Estrangelo Edessa"/>
-        <a:font script="Syre" typeface="Estrangelo Edessa"/>
-        <a:font script="Sora" typeface="Nirmala UI"/>
-        <a:font script="Tale" typeface="Microsoft Tai Le"/>
-        <a:font script="Talu" typeface="Microsoft New Tai Lue"/>
-        <a:font script="Tfng" typeface="Ebrima"/>
-      </a:minorFont>
-    </a:fontScheme>
-    <a:fmtScheme name="Office">
-      <a:fillStyleLst>
-        <a:solidFill>
-          <a:schemeClr val="phClr"/>
-        </a:solidFill>
-        <a:gradFill rotWithShape="1">
-          <a:gsLst>
-            <a:gs pos="0">
-              <a:schemeClr val="phClr">
-                <a:lumMod val="110000"/>
-                <a:satMod val="105000"/>
-                <a:tint val="67000"/>
-              </a:schemeClr>
-            </a:gs>
-            <a:gs pos="50000">
-              <a:schemeClr val="phClr">
-                <a:lumMod val="105000"/>
-                <a:satMod val="103000"/>
-                <a:tint val="73000"/>
-              </a:schemeClr>
-            </a:gs>
-            <a:gs pos="100000">
-              <a:schemeClr val="phClr">
-                <a:lumMod val="105000"/>
-                <a:satMod val="109000"/>
-                <a:tint val="81000"/>
-              </a:schemeClr>
-            </a:gs>
-          </a:gsLst>
-          <a:lin ang="5400000" scaled="0"/>
-        </a:gradFill>
-        <a:gradFill rotWithShape="1">
-          <a:gsLst>
-            <a:gs pos="0">
-              <a:schemeClr val="phClr">
-                <a:satMod val="103000"/>
-                <a:lumMod val="102000"/>
-                <a:tint val="94000"/>
-              </a:schemeClr>
-            </a:gs>
-            <a:gs pos="50000">
-              <a:schemeClr val="phClr">
-                <a:satMod val="110000"/>
-                <a:lumMod val="100000"/>
-                <a:shade val="100000"/>
-              </a:schemeClr>
-            </a:gs>
-            <a:gs pos="100000">
-              <a:schemeClr val="phClr">
-                <a:lumMod val="99000"/>
-                <a:satMod val="120000"/>
-                <a:shade val="78000"/>
-              </a:schemeClr>
-            </a:gs>
-          </a:gsLst>
-          <a:lin ang="5400000" scaled="0"/>
-        </a:gradFill>
-      </a:fillStyleLst>
-      <a:lnStyleLst>
-        <a:ln w="6350" cap="flat" cmpd="sng" algn="ctr">
-          <a:solidFill>
-            <a:schemeClr val="phClr"/>
-          </a:solidFill>
-          <a:prstDash val="solid"/>
-          <a:miter lim="800000"/>
-        </a:ln>
-        <a:ln w="12700" cap="flat" cmpd="sng" algn="ctr">
-          <a:solidFill>
-            <a:schemeClr val="phClr"/>
-          </a:solidFill>
-          <a:prstDash val="solid"/>
-          <a:miter lim="800000"/>
-        </a:ln>
-        <a:ln w="19050" cap="flat" cmpd="sng" algn="ctr">
-          <a:solidFill>
-            <a:schemeClr val="phClr"/>
-          </a:solidFill>
-          <a:prstDash val="solid"/>
-          <a:miter lim="800000"/>
-        </a:ln>
-      </a:lnStyleLst>
-      <a:effectStyleLst>
-        <a:effectStyle>
-          <a:effectLst/>
-        </a:effectStyle>
-        <a:effectStyle>
-          <a:effectLst/>
-        </a:effectStyle>
-        <a:effectStyle>
-          <a:effectLst>
-            <a:outerShdw blurRad="57150" dist="19050" dir="5400000" algn="ctr" rotWithShape="0">
-              <a:srgbClr val="000000">
-                <a:alpha val="63000"/>
-              </a:srgbClr>
-            </a:outerShdw>
-          </a:effectLst>
-        </a:effectStyle>
-      </a:effectStyleLst>
-      <a:bgFillStyleLst>
-        <a:solidFill>
-          <a:schemeClr val="phClr"/>
-        </a:solidFill>
-        <a:solidFill>
-          <a:schemeClr val="phClr">
-            <a:tint val="95000"/>
-            <a:satMod val="170000"/>
-          </a:schemeClr>
-        </a:solidFill>
-        <a:gradFill rotWithShape="1">
-          <a:gsLst>
-            <a:gs pos="0">
-              <a:schemeClr val="phClr">
-                <a:tint val="93000"/>
-                <a:satMod val="150000"/>
-                <a:shade val="98000"/>
-                <a:lumMod val="102000"/>
-              </a:schemeClr>
-            </a:gs>
-            <a:gs pos="50000">
-              <a:schemeClr val="phClr">
-                <a:tint val="98000"/>
-                <a:satMod val="130000"/>
-                <a:shade val="90000"/>
-                <a:lumMod val="103000"/>
-              </a:schemeClr>
-            </a:gs>
-            <a:gs pos="100000">
-              <a:schemeClr val="phClr">
-                <a:shade val="63000"/>
-                <a:satMod val="120000"/>
-              </a:schemeClr>
-            </a:gs>
-          </a:gsLst>
-          <a:lin ang="5400000" scaled="0"/>
-        </a:gradFill>
-      </a:bgFillStyleLst>
-    </a:fmtScheme>
-  </a:themeElements>
-  <a:objectDefaults/>
-  <a:extraClrSchemeLst/>
-  <a:extLst>
-    <a:ext uri="{05A4C25C-085E-4340-85A3-A5531E510DB2}">
-      <thm15:themeFamily xmlns:thm15="http://schemas.microsoft.com/office/thememl/2012/main" name="Office Theme" id="{62F939B6-93AF-4DB8-9C6B-D6C7DFDC589F}" vid="{4A3C46E8-61CC-4603-A589-7422A47A8E4A}"/>
-    </a:ext>
-  </a:extLst>
-</a:theme>
 </file>
--- a/docs/decks/L05.pptx
+++ b/docs/decks/L05.pptx
@@ -3610,7 +3610,7 @@
                 <a:ea typeface="Courier New" pitchFamily="34" charset="-122"/>
                 <a:cs typeface="Courier New" pitchFamily="34" charset="-120"/>
               </a:rPr>
-              <a:t>ТИЖДЕНЬ 3 · УРОК 5 З 12</a:t>
+              <a:t>ТИЖДЕНЬ 3 · ТЕМА 5 З 12</a:t>
             </a:r>
             <a:endParaRPr lang="en-US" sz="1200" dirty="0"/>
           </a:p>
@@ -7647,7 +7647,7 @@
                           <a:ea typeface="Montserrat" pitchFamily="34" charset="-122"/>
                           <a:cs typeface="Montserrat" pitchFamily="34" charset="-120"/>
                         </a:rPr>
-                        <a:t>частка кешованих токенів у usage (урок 4)</a:t>
+                        <a:t>частка кешованих токенів у usage (Тема 4)</a:t>
                       </a:r>
                       <a:endParaRPr lang="en-US" sz="1150" dirty="0">
                         <a:latin typeface="Montserrat" charset="0"/>
@@ -9623,7 +9623,7 @@
                 <a:ea typeface="Montserrat" pitchFamily="34" charset="-122"/>
                 <a:cs typeface="Montserrat" pitchFamily="34" charset="-120"/>
               </a:rPr>
-              <a:t>Те, що народилося у fallback-гілці (урок 7), у кеш не потрапляє ніколи.</a:t>
+              <a:t>Те, що народилося у fallback-гілці (Тема 7), у кеш не потрапляє ніколи.</a:t>
             </a:r>
             <a:endParaRPr lang="en-US" sz="1300" dirty="0"/>
           </a:p>
@@ -12551,7 +12551,7 @@
                 <a:ea typeface="Montserrat" pitchFamily="34" charset="-122"/>
                 <a:cs typeface="Montserrat" pitchFamily="34" charset="-120"/>
               </a:rPr>
-              <a:t>Спершу точний кеш і нормалізація, потім вимір hit ratio, і лише якщо цифра вперлася — semantic cache. Інакше ви платите за складність наперед.</a:t>
+              <a:t>Спершу точний кеш і нормалізація, потім вимір hit ratio, і лише якщо цифра вперлася — semantic cache. Інакше Ви платите за складність наперед.</a:t>
             </a:r>
             <a:endParaRPr lang="en-US" sz="1300" dirty="0"/>
           </a:p>
@@ -12888,7 +12888,7 @@
                 <a:ea typeface="Unbounded" pitchFamily="34" charset="-122"/>
                 <a:cs typeface="Unbounded" pitchFamily="34" charset="-120"/>
               </a:rPr>
-              <a:t>Що ви зможете після уроку</a:t>
+              <a:t>Що Ви зможете після теми</a:t>
             </a:r>
             <a:endParaRPr lang="en-US" sz="2400" dirty="0"/>
           </a:p>
@@ -13964,7 +13964,7 @@
                 <a:ea typeface="Unbounded" pitchFamily="34" charset="-122"/>
                 <a:cs typeface="Unbounded" pitchFamily="34" charset="-120"/>
               </a:rPr>
-              <a:t>Зараз ви побачите — і навіщо</a:t>
+              <a:t>Зараз Ви побачите — і навіщо</a:t>
             </a:r>
             <a:endParaRPr lang="en-US" sz="2400" dirty="0"/>
           </a:p>
@@ -16382,7 +16382,7 @@
                 <a:ea typeface="Montserrat" pitchFamily="34" charset="-122"/>
                 <a:cs typeface="Montserrat" pitchFamily="34" charset="-120"/>
               </a:rPr>
-              <a:t>Найдешевший запит — той, якого не було. Наступного уроку бот почне діяти, і там межа «tool-відповіді не кешуємо» перестане бути теорією.</a:t>
+              <a:t>Найдешевший запит — той, якого не було. У наступній темі бот почне діяти, і там межа «tool-відповіді не кешуємо» перестане бути теорією.</a:t>
             </a:r>
             <a:endParaRPr lang="en-US" sz="1300" dirty="0"/>
           </a:p>
@@ -18478,7 +18478,7 @@
                 <a:ea typeface="Montserrat" pitchFamily="34" charset="-122"/>
                 <a:cs typeface="Montserrat" pitchFamily="34" charset="-120"/>
               </a:rPr>
-              <a:t>ДЗ тижня 3 — після наступного уроку</a:t>
+              <a:t>ДЗ тижня 3 — після наступної теми</a:t>
             </a:r>
             <a:endParaRPr lang="en-US" sz="1500" dirty="0"/>
           </a:p>
@@ -18517,7 +18517,7 @@
                 <a:ea typeface="Montserrat" pitchFamily="34" charset="-122"/>
                 <a:cs typeface="Montserrat" pitchFamily="34" charset="-120"/>
               </a:rPr>
-              <a:t>Воно об'єднає кеш та інструменти: сьогоднішня частина вже у вас в руках, після наступного уроку додадуться tool-виклики з таймаутом та ідемпотентністю — і тиждень здається одним PR.</a:t>
+              <a:t>Воно об'єднає кеш та інструменти: сьогоднішня частина вже у Вас в руках, після наступної теми додадуться tool-виклики з таймаутом та ідемпотентністю — і тиждень здається одним PR.</a:t>
             </a:r>
             <a:endParaRPr lang="en-US" sz="1250" dirty="0"/>
           </a:p>
@@ -18668,7 +18668,7 @@
                 <a:ea typeface="Courier New" pitchFamily="34" charset="-122"/>
                 <a:cs typeface="Courier New" pitchFamily="34" charset="-120"/>
               </a:rPr>
-              <a:t>ПІДСУМОК УРОКУ 5</a:t>
+              <a:t>ПІДСУМОК ТЕМИ 5</a:t>
             </a:r>
             <a:endParaRPr lang="en-US" sz="1100" dirty="0"/>
           </a:p>
@@ -19044,7 +19044,7 @@
                 <a:ea typeface="Montserrat" pitchFamily="34" charset="-122"/>
                 <a:cs typeface="Montserrat" pitchFamily="34" charset="-120"/>
               </a:rPr>
-              <a:t>Наступний крок → Урок 6 · Tool calls: коли модель починає діяти</a:t>
+              <a:t>Наступний крок → Тема 6 · Tool calls: коли модель починає діяти</a:t>
             </a:r>
             <a:endParaRPr lang="en-US" sz="1500" dirty="0"/>
           </a:p>
@@ -19086,7 +19086,7 @@
                 <a:ea typeface="Montserrat" pitchFamily="34" charset="-122"/>
                 <a:cs typeface="Montserrat" pitchFamily="34" charset="-120"/>
               </a:rPr>
-              <a:t>Досі бот тільки говорив — найгірше, що він міг, це відповісти неправильно. Наступного уроку він почне діяти: tool-виклики, зовнішні інтеграції, реальні наслідки. Дія потребує схеми, таймаута та ідемпотентності — а незворотна дія ще й людини, яка скаже «так».</a:t>
+              <a:t>Досі бот тільки говорив — найгірше, що він міг, це відповісти неправильно. У наступній темі він почне діяти: tool-виклики, зовнішні інтеграції, реальні наслідки. Дія потребує схеми, таймаута та ідемпотентності — а незворотна дія ще й людини, яка скаже «так».</a:t>
             </a:r>
             <a:endParaRPr lang="en-US" sz="1250" dirty="0"/>
           </a:p>
@@ -20810,7 +20810,7 @@
                 <a:ea typeface="Montserrat" pitchFamily="34" charset="-122"/>
                 <a:cs typeface="Montserrat" pitchFamily="34" charset="-120"/>
               </a:rPr>
-              <a:t>Шість слів сьогоднішнього уроку</a:t>
+              <a:t>Шість слів сьогоднішньої теми</a:t>
             </a:r>
             <a:endParaRPr lang="en-US" sz="1300" dirty="0"/>
           </a:p>
@@ -22635,7 +22635,7 @@
                 <a:ea typeface="Courier New" pitchFamily="34" charset="-122"/>
                 <a:cs typeface="Courier New" pitchFamily="34" charset="-120"/>
               </a:rPr>
-              <a:t>ПРАВИЛО УРОКУ — MEASURE-FIRST</a:t>
+              <a:t>ПРАВИЛО ТЕМИ — MEASURE-FIRST</a:t>
             </a:r>
             <a:endParaRPr lang="en-US" sz="950" dirty="0"/>
           </a:p>
@@ -22677,7 +22677,7 @@
                 <a:ea typeface="Montserrat" pitchFamily="34" charset="-122"/>
                 <a:cs typeface="Montserrat" pitchFamily="34" charset="-120"/>
               </a:rPr>
-              <a:t>Лічильники hit/miss — в один урок і в один діф із кешем. Інакше це віра.</a:t>
+              <a:t>Лічильники hit/miss — в одну тему і в один діф із кешем. Інакше це віра.</a:t>
             </a:r>
             <a:endParaRPr lang="en-US" sz="1300" dirty="0"/>
           </a:p>

--- a/docs/decks/L05.pptx
+++ b/docs/decks/L05.pptx
@@ -5308,11 +5308,11 @@
         <p:spPr>
           <a:xfrm>
             <a:off x="566928" y="1828800"/>
-            <a:ext cx="3520440" cy="1874520"/>
+            <a:ext cx="3520440" cy="1691640"/>
           </a:xfrm>
           <a:prstGeom prst="roundRect">
             <a:avLst>
-              <a:gd name="adj" fmla="val 5854"/>
+              <a:gd name="adj" fmla="val 6486"/>
             </a:avLst>
           </a:prstGeom>
           <a:solidFill>
@@ -5428,7 +5428,7 @@
         <p:spPr>
           <a:xfrm>
             <a:off x="768096" y="2514600"/>
-            <a:ext cx="3118104" cy="1033272"/>
+            <a:ext cx="3118104" cy="850392"/>
           </a:xfrm>
           <a:prstGeom prst="rect">
             <a:avLst/>
@@ -5470,11 +5470,11 @@
         <p:spPr>
           <a:xfrm>
             <a:off x="4270248" y="1828800"/>
-            <a:ext cx="3520440" cy="1874520"/>
+            <a:ext cx="3520440" cy="1691640"/>
           </a:xfrm>
           <a:prstGeom prst="roundRect">
             <a:avLst>
-              <a:gd name="adj" fmla="val 5854"/>
+              <a:gd name="adj" fmla="val 6486"/>
             </a:avLst>
           </a:prstGeom>
           <a:solidFill>
@@ -5590,7 +5590,7 @@
         <p:spPr>
           <a:xfrm>
             <a:off x="4471416" y="2514600"/>
-            <a:ext cx="3118104" cy="1033272"/>
+            <a:ext cx="3118104" cy="850392"/>
           </a:xfrm>
           <a:prstGeom prst="rect">
             <a:avLst/>
@@ -5632,11 +5632,11 @@
         <p:spPr>
           <a:xfrm>
             <a:off x="7973568" y="1828800"/>
-            <a:ext cx="3520440" cy="1874520"/>
+            <a:ext cx="3520440" cy="1691640"/>
           </a:xfrm>
           <a:prstGeom prst="roundRect">
             <a:avLst>
-              <a:gd name="adj" fmla="val 5854"/>
+              <a:gd name="adj" fmla="val 6486"/>
             </a:avLst>
           </a:prstGeom>
           <a:solidFill>
@@ -5752,7 +5752,7 @@
         <p:spPr>
           <a:xfrm>
             <a:off x="8174736" y="2514600"/>
-            <a:ext cx="3118104" cy="1033272"/>
+            <a:ext cx="3118104" cy="850392"/>
           </a:xfrm>
           <a:prstGeom prst="rect">
             <a:avLst/>
@@ -5793,15 +5793,136 @@
         </p:nvSpPr>
         <p:spPr>
           <a:xfrm>
-            <a:off x="566928" y="4069080"/>
-            <a:ext cx="11064240" cy="1234440"/>
+            <a:off x="566928" y="3749040"/>
+            <a:ext cx="2423160" cy="548640"/>
           </a:xfrm>
           <a:prstGeom prst="roundRect">
             <a:avLst>
-              <a:gd name="adj" fmla="val 8889"/>
+              <a:gd name="adj" fmla="val 16667"/>
             </a:avLst>
           </a:prstGeom>
           <a:solidFill>
+            <a:srgbClr val="000000"/>
+          </a:solidFill>
+          <a:ln/>
+        </p:spPr>
+      </p:sp>
+      <p:sp>
+        <p:nvSpPr>
+          <p:cNvPr id="24" name="Text 21"/>
+          <p:cNvSpPr/>
+          <p:nvPr/>
+        </p:nvSpPr>
+        <p:spPr>
+          <a:xfrm>
+            <a:off x="621792" y="3749040"/>
+            <a:ext cx="2313432" cy="548640"/>
+          </a:xfrm>
+          <a:prstGeom prst="rect">
+            <a:avLst/>
+          </a:prstGeom>
+          <a:noFill/>
+          <a:ln/>
+        </p:spPr>
+        <p:txBody>
+          <a:bodyPr wrap="square" lIns="0" tIns="0" rIns="0" bIns="0" rtlCol="0" anchor="ctr"/>
+          <a:lstStyle/>
+          <a:p>
+            <a:pPr algn="ctr" indent="0" marL="0">
+              <a:buNone/>
+            </a:pPr>
+            <a:r>
+              <a:rPr lang="en-US" sz="1100" b="1" dirty="0">
+                <a:solidFill>
+                  <a:srgbClr val="FF6B6B"/>
+                </a:solidFill>
+                <a:latin typeface="Courier New" pitchFamily="34" charset="0"/>
+                <a:ea typeface="Courier New" pitchFamily="34" charset="-122"/>
+                <a:cs typeface="Courier New" pitchFamily="34" charset="-120"/>
+              </a:rPr>
+              <a:t>100 запитів одночасно</a:t>
+            </a:r>
+            <a:endParaRPr lang="en-US" sz="1100" dirty="0"/>
+          </a:p>
+        </p:txBody>
+      </p:sp>
+      <p:sp>
+        <p:nvSpPr>
+          <p:cNvPr id="25" name="Text 22"/>
+          <p:cNvSpPr/>
+          <p:nvPr/>
+        </p:nvSpPr>
+        <p:spPr>
+          <a:xfrm>
+            <a:off x="566928" y="4334256"/>
+            <a:ext cx="2423160" cy="274320"/>
+          </a:xfrm>
+          <a:prstGeom prst="rect">
+            <a:avLst/>
+          </a:prstGeom>
+          <a:noFill/>
+          <a:ln/>
+        </p:spPr>
+        <p:txBody>
+          <a:bodyPr wrap="square" lIns="0" tIns="0" rIns="0" bIns="0" rtlCol="0" anchor="ctr"/>
+          <a:lstStyle/>
+          <a:p>
+            <a:pPr algn="ctr" indent="0" marL="0">
+              <a:buNone/>
+            </a:pPr>
+            <a:r>
+              <a:rPr lang="en-US" sz="1000" dirty="0">
+                <a:solidFill>
+                  <a:srgbClr val="6B6B6B"/>
+                </a:solidFill>
+                <a:latin typeface="Montserrat" pitchFamily="34" charset="0"/>
+                <a:ea typeface="Montserrat" pitchFamily="34" charset="-122"/>
+                <a:cs typeface="Montserrat" pitchFamily="34" charset="-120"/>
+              </a:rPr>
+              <a:t>холодний ключ</a:t>
+            </a:r>
+            <a:endParaRPr lang="en-US" sz="1000" dirty="0"/>
+          </a:p>
+        </p:txBody>
+      </p:sp>
+      <p:sp>
+        <p:nvSpPr>
+          <p:cNvPr id="26" name="Shape 23"/>
+          <p:cNvSpPr/>
+          <p:nvPr/>
+        </p:nvSpPr>
+        <p:spPr>
+          <a:xfrm>
+            <a:off x="3081528" y="4023360"/>
+            <a:ext cx="164592" cy="0"/>
+          </a:xfrm>
+          <a:prstGeom prst="line">
+            <a:avLst/>
+          </a:prstGeom>
+          <a:noFill/>
+          <a:ln w="15875">
+            <a:solidFill>
+              <a:srgbClr val="5A05F4"/>
+            </a:solidFill>
+            <a:prstDash val="solid"/>
+          </a:ln>
+        </p:spPr>
+      </p:sp>
+      <p:sp>
+        <p:nvSpPr>
+          <p:cNvPr id="27" name="Shape 24"/>
+          <p:cNvSpPr/>
+          <p:nvPr/>
+        </p:nvSpPr>
+        <p:spPr>
+          <a:xfrm rot="5400000">
+            <a:off x="3209544" y="3954780"/>
+            <a:ext cx="146304" cy="137160"/>
+          </a:xfrm>
+          <a:prstGeom prst="triangle">
+            <a:avLst/>
+          </a:prstGeom>
+          <a:solidFill>
             <a:srgbClr val="5A05F4"/>
           </a:solidFill>
           <a:ln/>
@@ -5809,14 +5930,383 @@
       </p:sp>
       <p:sp>
         <p:nvSpPr>
-          <p:cNvPr id="24" name="Text 21"/>
-          <p:cNvSpPr/>
-          <p:nvPr/>
-        </p:nvSpPr>
-        <p:spPr>
-          <a:xfrm>
-            <a:off x="786384" y="4215384"/>
-            <a:ext cx="10625328" cy="941832"/>
+          <p:cNvPr id="28" name="Shape 25"/>
+          <p:cNvSpPr/>
+          <p:nvPr/>
+        </p:nvSpPr>
+        <p:spPr>
+          <a:xfrm>
+            <a:off x="3447288" y="3749040"/>
+            <a:ext cx="2423160" cy="548640"/>
+          </a:xfrm>
+          <a:prstGeom prst="roundRect">
+            <a:avLst>
+              <a:gd name="adj" fmla="val 16667"/>
+            </a:avLst>
+          </a:prstGeom>
+          <a:solidFill>
+            <a:srgbClr val="000000"/>
+          </a:solidFill>
+          <a:ln/>
+        </p:spPr>
+      </p:sp>
+      <p:sp>
+        <p:nvSpPr>
+          <p:cNvPr id="29" name="Text 26"/>
+          <p:cNvSpPr/>
+          <p:nvPr/>
+        </p:nvSpPr>
+        <p:spPr>
+          <a:xfrm>
+            <a:off x="3502152" y="3749040"/>
+            <a:ext cx="2313432" cy="548640"/>
+          </a:xfrm>
+          <a:prstGeom prst="rect">
+            <a:avLst/>
+          </a:prstGeom>
+          <a:noFill/>
+          <a:ln/>
+        </p:spPr>
+        <p:txBody>
+          <a:bodyPr wrap="square" lIns="0" tIns="0" rIns="0" bIns="0" rtlCol="0" anchor="ctr"/>
+          <a:lstStyle/>
+          <a:p>
+            <a:pPr algn="ctr" indent="0" marL="0">
+              <a:buNone/>
+            </a:pPr>
+            <a:r>
+              <a:rPr lang="en-US" sz="1100" b="1" dirty="0">
+                <a:solidFill>
+                  <a:srgbClr val="A98BFF"/>
+                </a:solidFill>
+                <a:latin typeface="Courier New" pitchFamily="34" charset="0"/>
+                <a:ea typeface="Courier New" pitchFamily="34" charset="-122"/>
+                <a:cs typeface="Courier New" pitchFamily="34" charset="-120"/>
+              </a:rPr>
+              <a:t>лок або «запит-лідер»</a:t>
+            </a:r>
+            <a:endParaRPr lang="en-US" sz="1100" dirty="0"/>
+          </a:p>
+        </p:txBody>
+      </p:sp>
+      <p:sp>
+        <p:nvSpPr>
+          <p:cNvPr id="30" name="Text 27"/>
+          <p:cNvSpPr/>
+          <p:nvPr/>
+        </p:nvSpPr>
+        <p:spPr>
+          <a:xfrm>
+            <a:off x="3447288" y="4334256"/>
+            <a:ext cx="2423160" cy="274320"/>
+          </a:xfrm>
+          <a:prstGeom prst="rect">
+            <a:avLst/>
+          </a:prstGeom>
+          <a:noFill/>
+          <a:ln/>
+        </p:spPr>
+        <p:txBody>
+          <a:bodyPr wrap="square" lIns="0" tIns="0" rIns="0" bIns="0" rtlCol="0" anchor="ctr"/>
+          <a:lstStyle/>
+          <a:p>
+            <a:pPr algn="ctr" indent="0" marL="0">
+              <a:buNone/>
+            </a:pPr>
+            <a:r>
+              <a:rPr lang="en-US" sz="1000" dirty="0">
+                <a:solidFill>
+                  <a:srgbClr val="6B6B6B"/>
+                </a:solidFill>
+                <a:latin typeface="Montserrat" pitchFamily="34" charset="0"/>
+                <a:ea typeface="Montserrat" pitchFamily="34" charset="-122"/>
+                <a:cs typeface="Montserrat" pitchFamily="34" charset="-120"/>
+              </a:rPr>
+              <a:t>решта чекають</a:t>
+            </a:r>
+            <a:endParaRPr lang="en-US" sz="1000" dirty="0"/>
+          </a:p>
+        </p:txBody>
+      </p:sp>
+      <p:sp>
+        <p:nvSpPr>
+          <p:cNvPr id="31" name="Shape 28"/>
+          <p:cNvSpPr/>
+          <p:nvPr/>
+        </p:nvSpPr>
+        <p:spPr>
+          <a:xfrm>
+            <a:off x="5961888" y="4023360"/>
+            <a:ext cx="164592" cy="0"/>
+          </a:xfrm>
+          <a:prstGeom prst="line">
+            <a:avLst/>
+          </a:prstGeom>
+          <a:noFill/>
+          <a:ln w="15875">
+            <a:solidFill>
+              <a:srgbClr val="5A05F4"/>
+            </a:solidFill>
+            <a:prstDash val="solid"/>
+          </a:ln>
+        </p:spPr>
+      </p:sp>
+      <p:sp>
+        <p:nvSpPr>
+          <p:cNvPr id="32" name="Shape 29"/>
+          <p:cNvSpPr/>
+          <p:nvPr/>
+        </p:nvSpPr>
+        <p:spPr>
+          <a:xfrm rot="5400000">
+            <a:off x="6089904" y="3954780"/>
+            <a:ext cx="146304" cy="137160"/>
+          </a:xfrm>
+          <a:prstGeom prst="triangle">
+            <a:avLst/>
+          </a:prstGeom>
+          <a:solidFill>
+            <a:srgbClr val="5A05F4"/>
+          </a:solidFill>
+          <a:ln/>
+        </p:spPr>
+      </p:sp>
+      <p:sp>
+        <p:nvSpPr>
+          <p:cNvPr id="33" name="Shape 30"/>
+          <p:cNvSpPr/>
+          <p:nvPr/>
+        </p:nvSpPr>
+        <p:spPr>
+          <a:xfrm>
+            <a:off x="6327648" y="3749040"/>
+            <a:ext cx="2423160" cy="548640"/>
+          </a:xfrm>
+          <a:prstGeom prst="roundRect">
+            <a:avLst>
+              <a:gd name="adj" fmla="val 16667"/>
+            </a:avLst>
+          </a:prstGeom>
+          <a:solidFill>
+            <a:srgbClr val="000000"/>
+          </a:solidFill>
+          <a:ln/>
+        </p:spPr>
+      </p:sp>
+      <p:sp>
+        <p:nvSpPr>
+          <p:cNvPr id="34" name="Text 31"/>
+          <p:cNvSpPr/>
+          <p:nvPr/>
+        </p:nvSpPr>
+        <p:spPr>
+          <a:xfrm>
+            <a:off x="6382512" y="3749040"/>
+            <a:ext cx="2313432" cy="548640"/>
+          </a:xfrm>
+          <a:prstGeom prst="rect">
+            <a:avLst/>
+          </a:prstGeom>
+          <a:noFill/>
+          <a:ln/>
+        </p:spPr>
+        <p:txBody>
+          <a:bodyPr wrap="square" lIns="0" tIns="0" rIns="0" bIns="0" rtlCol="0" anchor="ctr"/>
+          <a:lstStyle/>
+          <a:p>
+            <a:pPr algn="ctr" indent="0" marL="0">
+              <a:buNone/>
+            </a:pPr>
+            <a:r>
+              <a:rPr lang="en-US" sz="1100" b="1" dirty="0">
+                <a:solidFill>
+                  <a:srgbClr val="3FCF8E"/>
+                </a:solidFill>
+                <a:latin typeface="Courier New" pitchFamily="34" charset="0"/>
+                <a:ea typeface="Courier New" pitchFamily="34" charset="-122"/>
+                <a:cs typeface="Courier New" pitchFamily="34" charset="-120"/>
+              </a:rPr>
+              <a:t>1 виклик моделі</a:t>
+            </a:r>
+            <a:endParaRPr lang="en-US" sz="1100" dirty="0"/>
+          </a:p>
+        </p:txBody>
+      </p:sp>
+      <p:sp>
+        <p:nvSpPr>
+          <p:cNvPr id="35" name="Text 32"/>
+          <p:cNvSpPr/>
+          <p:nvPr/>
+        </p:nvSpPr>
+        <p:spPr>
+          <a:xfrm>
+            <a:off x="6327648" y="4334256"/>
+            <a:ext cx="2423160" cy="274320"/>
+          </a:xfrm>
+          <a:prstGeom prst="rect">
+            <a:avLst/>
+          </a:prstGeom>
+          <a:noFill/>
+          <a:ln/>
+        </p:spPr>
+        <p:txBody>
+          <a:bodyPr wrap="square" lIns="0" tIns="0" rIns="0" bIns="0" rtlCol="0" anchor="ctr"/>
+          <a:lstStyle/>
+          <a:p>
+            <a:pPr algn="ctr" indent="0" marL="0">
+              <a:buNone/>
+            </a:pPr>
+            <a:r>
+              <a:rPr lang="en-US" sz="1000" dirty="0">
+                <a:solidFill>
+                  <a:srgbClr val="6B6B6B"/>
+                </a:solidFill>
+                <a:latin typeface="Montserrat" pitchFamily="34" charset="0"/>
+                <a:ea typeface="Montserrat" pitchFamily="34" charset="-122"/>
+                <a:cs typeface="Montserrat" pitchFamily="34" charset="-120"/>
+              </a:rPr>
+              <a:t>замість 100</a:t>
+            </a:r>
+            <a:endParaRPr lang="en-US" sz="1000" dirty="0"/>
+          </a:p>
+        </p:txBody>
+      </p:sp>
+      <p:sp>
+        <p:nvSpPr>
+          <p:cNvPr id="36" name="Shape 33"/>
+          <p:cNvSpPr/>
+          <p:nvPr/>
+        </p:nvSpPr>
+        <p:spPr>
+          <a:xfrm>
+            <a:off x="8842248" y="4023360"/>
+            <a:ext cx="164592" cy="0"/>
+          </a:xfrm>
+          <a:prstGeom prst="line">
+            <a:avLst/>
+          </a:prstGeom>
+          <a:noFill/>
+          <a:ln w="15875">
+            <a:solidFill>
+              <a:srgbClr val="5A05F4"/>
+            </a:solidFill>
+            <a:prstDash val="solid"/>
+          </a:ln>
+        </p:spPr>
+      </p:sp>
+      <p:sp>
+        <p:nvSpPr>
+          <p:cNvPr id="37" name="Shape 34"/>
+          <p:cNvSpPr/>
+          <p:nvPr/>
+        </p:nvSpPr>
+        <p:spPr>
+          <a:xfrm rot="5400000">
+            <a:off x="8970264" y="3954780"/>
+            <a:ext cx="146304" cy="137160"/>
+          </a:xfrm>
+          <a:prstGeom prst="triangle">
+            <a:avLst/>
+          </a:prstGeom>
+          <a:solidFill>
+            <a:srgbClr val="5A05F4"/>
+          </a:solidFill>
+          <a:ln/>
+        </p:spPr>
+      </p:sp>
+      <p:sp>
+        <p:nvSpPr>
+          <p:cNvPr id="38" name="Shape 35"/>
+          <p:cNvSpPr/>
+          <p:nvPr/>
+        </p:nvSpPr>
+        <p:spPr>
+          <a:xfrm>
+            <a:off x="9208008" y="3749040"/>
+            <a:ext cx="2423160" cy="548640"/>
+          </a:xfrm>
+          <a:prstGeom prst="roundRect">
+            <a:avLst>
+              <a:gd name="adj" fmla="val 16667"/>
+            </a:avLst>
+          </a:prstGeom>
+          <a:solidFill>
+            <a:srgbClr val="000000"/>
+          </a:solidFill>
+          <a:ln/>
+        </p:spPr>
+      </p:sp>
+      <p:sp>
+        <p:nvSpPr>
+          <p:cNvPr id="39" name="Text 36"/>
+          <p:cNvSpPr/>
+          <p:nvPr/>
+        </p:nvSpPr>
+        <p:spPr>
+          <a:xfrm>
+            <a:off x="9262872" y="3749040"/>
+            <a:ext cx="2313432" cy="548640"/>
+          </a:xfrm>
+          <a:prstGeom prst="rect">
+            <a:avLst/>
+          </a:prstGeom>
+          <a:noFill/>
+          <a:ln/>
+        </p:spPr>
+        <p:txBody>
+          <a:bodyPr wrap="square" lIns="0" tIns="0" rIns="0" bIns="0" rtlCol="0" anchor="ctr"/>
+          <a:lstStyle/>
+          <a:p>
+            <a:pPr algn="ctr" indent="0" marL="0">
+              <a:buNone/>
+            </a:pPr>
+            <a:r>
+              <a:rPr lang="en-US" sz="1100" b="1" dirty="0">
+                <a:solidFill>
+                  <a:srgbClr val="3FCF8E"/>
+                </a:solidFill>
+                <a:latin typeface="Courier New" pitchFamily="34" charset="0"/>
+                <a:ea typeface="Courier New" pitchFamily="34" charset="-122"/>
+                <a:cs typeface="Courier New" pitchFamily="34" charset="-120"/>
+              </a:rPr>
+              <a:t>99 віддано з кешу</a:t>
+            </a:r>
+            <a:endParaRPr lang="en-US" sz="1100" dirty="0"/>
+          </a:p>
+        </p:txBody>
+      </p:sp>
+      <p:sp>
+        <p:nvSpPr>
+          <p:cNvPr id="40" name="Shape 37"/>
+          <p:cNvSpPr/>
+          <p:nvPr/>
+        </p:nvSpPr>
+        <p:spPr>
+          <a:xfrm>
+            <a:off x="566928" y="4846320"/>
+            <a:ext cx="11064240" cy="1005840"/>
+          </a:xfrm>
+          <a:prstGeom prst="roundRect">
+            <a:avLst>
+              <a:gd name="adj" fmla="val 10909"/>
+            </a:avLst>
+          </a:prstGeom>
+          <a:solidFill>
+            <a:srgbClr val="5A05F4"/>
+          </a:solidFill>
+          <a:ln/>
+        </p:spPr>
+      </p:sp>
+      <p:sp>
+        <p:nvSpPr>
+          <p:cNvPr id="41" name="Text 38"/>
+          <p:cNvSpPr/>
+          <p:nvPr/>
+        </p:nvSpPr>
+        <p:spPr>
+          <a:xfrm>
+            <a:off x="786384" y="4992624"/>
+            <a:ext cx="10625328" cy="713232"/>
           </a:xfrm>
           <a:prstGeom prst="rect">
             <a:avLst/>
@@ -8553,12 +9043,541 @@
         </p:nvSpPr>
         <p:spPr>
           <a:xfrm>
-            <a:off x="566928" y="3657600"/>
-            <a:ext cx="11064240" cy="1463040"/>
+            <a:off x="566928" y="3611880"/>
+            <a:ext cx="2423160" cy="548640"/>
           </a:xfrm>
           <a:prstGeom prst="roundRect">
             <a:avLst>
-              <a:gd name="adj" fmla="val 7500"/>
+              <a:gd name="adj" fmla="val 16667"/>
+            </a:avLst>
+          </a:prstGeom>
+          <a:solidFill>
+            <a:srgbClr val="000000"/>
+          </a:solidFill>
+          <a:ln/>
+        </p:spPr>
+      </p:sp>
+      <p:sp>
+        <p:nvSpPr>
+          <p:cNvPr id="15" name="Text 12"/>
+          <p:cNvSpPr/>
+          <p:nvPr/>
+        </p:nvSpPr>
+        <p:spPr>
+          <a:xfrm>
+            <a:off x="621792" y="3611880"/>
+            <a:ext cx="2313432" cy="548640"/>
+          </a:xfrm>
+          <a:prstGeom prst="rect">
+            <a:avLst/>
+          </a:prstGeom>
+          <a:noFill/>
+          <a:ln/>
+        </p:spPr>
+        <p:txBody>
+          <a:bodyPr wrap="square" lIns="0" tIns="0" rIns="0" bIns="0" rtlCol="0" anchor="ctr"/>
+          <a:lstStyle/>
+          <a:p>
+            <a:pPr algn="ctr" indent="0" marL="0">
+              <a:buNone/>
+            </a:pPr>
+            <a:r>
+              <a:rPr lang="en-US" sz="1100" dirty="0">
+                <a:solidFill>
+                  <a:srgbClr val="FFFFFF"/>
+                </a:solidFill>
+                <a:latin typeface="Courier New" pitchFamily="34" charset="0"/>
+                <a:ea typeface="Courier New" pitchFamily="34" charset="-122"/>
+                <a:cs typeface="Courier New" pitchFamily="34" charset="-120"/>
+              </a:rPr>
+              <a:t>запит №1 → модель</a:t>
+            </a:r>
+            <a:endParaRPr lang="en-US" sz="1100" dirty="0"/>
+          </a:p>
+        </p:txBody>
+      </p:sp>
+      <p:sp>
+        <p:nvSpPr>
+          <p:cNvPr id="16" name="Text 13"/>
+          <p:cNvSpPr/>
+          <p:nvPr/>
+        </p:nvSpPr>
+        <p:spPr>
+          <a:xfrm>
+            <a:off x="566928" y="4197096"/>
+            <a:ext cx="2423160" cy="274320"/>
+          </a:xfrm>
+          <a:prstGeom prst="rect">
+            <a:avLst/>
+          </a:prstGeom>
+          <a:noFill/>
+          <a:ln/>
+        </p:spPr>
+        <p:txBody>
+          <a:bodyPr wrap="square" lIns="0" tIns="0" rIns="0" bIns="0" rtlCol="0" anchor="ctr"/>
+          <a:lstStyle/>
+          <a:p>
+            <a:pPr algn="ctr" indent="0" marL="0">
+              <a:buNone/>
+            </a:pPr>
+            <a:r>
+              <a:rPr lang="en-US" sz="1000" dirty="0">
+                <a:solidFill>
+                  <a:srgbClr val="6B6B6B"/>
+                </a:solidFill>
+                <a:latin typeface="Montserrat" pitchFamily="34" charset="0"/>
+                <a:ea typeface="Montserrat" pitchFamily="34" charset="-122"/>
+                <a:cs typeface="Montserrat" pitchFamily="34" charset="-120"/>
+              </a:rPr>
+              <a:t>відповідь X (будь-яка)</a:t>
+            </a:r>
+            <a:endParaRPr lang="en-US" sz="1000" dirty="0"/>
+          </a:p>
+        </p:txBody>
+      </p:sp>
+      <p:sp>
+        <p:nvSpPr>
+          <p:cNvPr id="17" name="Shape 14"/>
+          <p:cNvSpPr/>
+          <p:nvPr/>
+        </p:nvSpPr>
+        <p:spPr>
+          <a:xfrm>
+            <a:off x="3081528" y="3886200"/>
+            <a:ext cx="164592" cy="0"/>
+          </a:xfrm>
+          <a:prstGeom prst="line">
+            <a:avLst/>
+          </a:prstGeom>
+          <a:noFill/>
+          <a:ln w="15875">
+            <a:solidFill>
+              <a:srgbClr val="5A05F4"/>
+            </a:solidFill>
+            <a:prstDash val="solid"/>
+          </a:ln>
+        </p:spPr>
+      </p:sp>
+      <p:sp>
+        <p:nvSpPr>
+          <p:cNvPr id="18" name="Shape 15"/>
+          <p:cNvSpPr/>
+          <p:nvPr/>
+        </p:nvSpPr>
+        <p:spPr>
+          <a:xfrm rot="5400000">
+            <a:off x="3209544" y="3817620"/>
+            <a:ext cx="146304" cy="137160"/>
+          </a:xfrm>
+          <a:prstGeom prst="triangle">
+            <a:avLst/>
+          </a:prstGeom>
+          <a:solidFill>
+            <a:srgbClr val="5A05F4"/>
+          </a:solidFill>
+          <a:ln/>
+        </p:spPr>
+      </p:sp>
+      <p:sp>
+        <p:nvSpPr>
+          <p:cNvPr id="19" name="Shape 16"/>
+          <p:cNvSpPr/>
+          <p:nvPr/>
+        </p:nvSpPr>
+        <p:spPr>
+          <a:xfrm>
+            <a:off x="3447288" y="3611880"/>
+            <a:ext cx="2423160" cy="548640"/>
+          </a:xfrm>
+          <a:prstGeom prst="roundRect">
+            <a:avLst>
+              <a:gd name="adj" fmla="val 16667"/>
+            </a:avLst>
+          </a:prstGeom>
+          <a:solidFill>
+            <a:srgbClr val="000000"/>
+          </a:solidFill>
+          <a:ln/>
+        </p:spPr>
+      </p:sp>
+      <p:sp>
+        <p:nvSpPr>
+          <p:cNvPr id="20" name="Text 17"/>
+          <p:cNvSpPr/>
+          <p:nvPr/>
+        </p:nvSpPr>
+        <p:spPr>
+          <a:xfrm>
+            <a:off x="3502152" y="3611880"/>
+            <a:ext cx="2313432" cy="548640"/>
+          </a:xfrm>
+          <a:prstGeom prst="rect">
+            <a:avLst/>
+          </a:prstGeom>
+          <a:noFill/>
+          <a:ln/>
+        </p:spPr>
+        <p:txBody>
+          <a:bodyPr wrap="square" lIns="0" tIns="0" rIns="0" bIns="0" rtlCol="0" anchor="ctr"/>
+          <a:lstStyle/>
+          <a:p>
+            <a:pPr algn="ctr" indent="0" marL="0">
+              <a:buNone/>
+            </a:pPr>
+            <a:r>
+              <a:rPr lang="en-US" sz="1100" b="1" dirty="0">
+                <a:solidFill>
+                  <a:srgbClr val="A98BFF"/>
+                </a:solidFill>
+                <a:latin typeface="Courier New" pitchFamily="34" charset="0"/>
+                <a:ea typeface="Courier New" pitchFamily="34" charset="-122"/>
+                <a:cs typeface="Courier New" pitchFamily="34" charset="-120"/>
+              </a:rPr>
+              <a:t>кеш зберіг X</a:t>
+            </a:r>
+            <a:endParaRPr lang="en-US" sz="1100" dirty="0"/>
+          </a:p>
+        </p:txBody>
+      </p:sp>
+      <p:sp>
+        <p:nvSpPr>
+          <p:cNvPr id="21" name="Text 18"/>
+          <p:cNvSpPr/>
+          <p:nvPr/>
+        </p:nvSpPr>
+        <p:spPr>
+          <a:xfrm>
+            <a:off x="3447288" y="4197096"/>
+            <a:ext cx="2423160" cy="274320"/>
+          </a:xfrm>
+          <a:prstGeom prst="rect">
+            <a:avLst/>
+          </a:prstGeom>
+          <a:noFill/>
+          <a:ln/>
+        </p:spPr>
+        <p:txBody>
+          <a:bodyPr wrap="square" lIns="0" tIns="0" rIns="0" bIns="0" rtlCol="0" anchor="ctr"/>
+          <a:lstStyle/>
+          <a:p>
+            <a:pPr algn="ctr" indent="0" marL="0">
+              <a:buNone/>
+            </a:pPr>
+            <a:r>
+              <a:rPr lang="en-US" sz="1000" dirty="0">
+                <a:solidFill>
+                  <a:srgbClr val="6B6B6B"/>
+                </a:solidFill>
+                <a:latin typeface="Montserrat" pitchFamily="34" charset="0"/>
+                <a:ea typeface="Montserrat" pitchFamily="34" charset="-122"/>
+                <a:cs typeface="Montserrat" pitchFamily="34" charset="-120"/>
+              </a:rPr>
+              <a:t>лише якщо status 200</a:t>
+            </a:r>
+            <a:endParaRPr lang="en-US" sz="1000" dirty="0"/>
+          </a:p>
+        </p:txBody>
+      </p:sp>
+      <p:sp>
+        <p:nvSpPr>
+          <p:cNvPr id="22" name="Shape 19"/>
+          <p:cNvSpPr/>
+          <p:nvPr/>
+        </p:nvSpPr>
+        <p:spPr>
+          <a:xfrm>
+            <a:off x="5961888" y="3886200"/>
+            <a:ext cx="164592" cy="0"/>
+          </a:xfrm>
+          <a:prstGeom prst="line">
+            <a:avLst/>
+          </a:prstGeom>
+          <a:noFill/>
+          <a:ln w="15875">
+            <a:solidFill>
+              <a:srgbClr val="5A05F4"/>
+            </a:solidFill>
+            <a:prstDash val="solid"/>
+          </a:ln>
+        </p:spPr>
+      </p:sp>
+      <p:sp>
+        <p:nvSpPr>
+          <p:cNvPr id="23" name="Shape 20"/>
+          <p:cNvSpPr/>
+          <p:nvPr/>
+        </p:nvSpPr>
+        <p:spPr>
+          <a:xfrm rot="5400000">
+            <a:off x="6089904" y="3817620"/>
+            <a:ext cx="146304" cy="137160"/>
+          </a:xfrm>
+          <a:prstGeom prst="triangle">
+            <a:avLst/>
+          </a:prstGeom>
+          <a:solidFill>
+            <a:srgbClr val="5A05F4"/>
+          </a:solidFill>
+          <a:ln/>
+        </p:spPr>
+      </p:sp>
+      <p:sp>
+        <p:nvSpPr>
+          <p:cNvPr id="24" name="Shape 21"/>
+          <p:cNvSpPr/>
+          <p:nvPr/>
+        </p:nvSpPr>
+        <p:spPr>
+          <a:xfrm>
+            <a:off x="6327648" y="3611880"/>
+            <a:ext cx="2423160" cy="548640"/>
+          </a:xfrm>
+          <a:prstGeom prst="roundRect">
+            <a:avLst>
+              <a:gd name="adj" fmla="val 16667"/>
+            </a:avLst>
+          </a:prstGeom>
+          <a:solidFill>
+            <a:srgbClr val="000000"/>
+          </a:solidFill>
+          <a:ln/>
+        </p:spPr>
+      </p:sp>
+      <p:sp>
+        <p:nvSpPr>
+          <p:cNvPr id="25" name="Text 22"/>
+          <p:cNvSpPr/>
+          <p:nvPr/>
+        </p:nvSpPr>
+        <p:spPr>
+          <a:xfrm>
+            <a:off x="6382512" y="3611880"/>
+            <a:ext cx="2313432" cy="548640"/>
+          </a:xfrm>
+          <a:prstGeom prst="rect">
+            <a:avLst/>
+          </a:prstGeom>
+          <a:noFill/>
+          <a:ln/>
+        </p:spPr>
+        <p:txBody>
+          <a:bodyPr wrap="square" lIns="0" tIns="0" rIns="0" bIns="0" rtlCol="0" anchor="ctr"/>
+          <a:lstStyle/>
+          <a:p>
+            <a:pPr algn="ctr" indent="0" marL="0">
+              <a:buNone/>
+            </a:pPr>
+            <a:r>
+              <a:rPr lang="en-US" sz="1100" b="1" dirty="0">
+                <a:solidFill>
+                  <a:srgbClr val="3FCF8E"/>
+                </a:solidFill>
+                <a:latin typeface="Courier New" pitchFamily="34" charset="0"/>
+                <a:ea typeface="Courier New" pitchFamily="34" charset="-122"/>
+                <a:cs typeface="Courier New" pitchFamily="34" charset="-120"/>
+              </a:rPr>
+              <a:t>запити №2…n → X</a:t>
+            </a:r>
+            <a:endParaRPr lang="en-US" sz="1100" dirty="0"/>
+          </a:p>
+        </p:txBody>
+      </p:sp>
+      <p:sp>
+        <p:nvSpPr>
+          <p:cNvPr id="26" name="Text 23"/>
+          <p:cNvSpPr/>
+          <p:nvPr/>
+        </p:nvSpPr>
+        <p:spPr>
+          <a:xfrm>
+            <a:off x="6327648" y="4197096"/>
+            <a:ext cx="2423160" cy="274320"/>
+          </a:xfrm>
+          <a:prstGeom prst="rect">
+            <a:avLst/>
+          </a:prstGeom>
+          <a:noFill/>
+          <a:ln/>
+        </p:spPr>
+        <p:txBody>
+          <a:bodyPr wrap="square" lIns="0" tIns="0" rIns="0" bIns="0" rtlCol="0" anchor="ctr"/>
+          <a:lstStyle/>
+          <a:p>
+            <a:pPr algn="ctr" indent="0" marL="0">
+              <a:buNone/>
+            </a:pPr>
+            <a:r>
+              <a:rPr lang="en-US" sz="1000" dirty="0">
+                <a:solidFill>
+                  <a:srgbClr val="6B6B6B"/>
+                </a:solidFill>
+                <a:latin typeface="Montserrat" pitchFamily="34" charset="0"/>
+                <a:ea typeface="Montserrat" pitchFamily="34" charset="-122"/>
+                <a:cs typeface="Montserrat" pitchFamily="34" charset="-120"/>
+              </a:rPr>
+              <a:t>однакові, миттєві</a:t>
+            </a:r>
+            <a:endParaRPr lang="en-US" sz="1000" dirty="0"/>
+          </a:p>
+        </p:txBody>
+      </p:sp>
+      <p:sp>
+        <p:nvSpPr>
+          <p:cNvPr id="27" name="Shape 24"/>
+          <p:cNvSpPr/>
+          <p:nvPr/>
+        </p:nvSpPr>
+        <p:spPr>
+          <a:xfrm>
+            <a:off x="8842248" y="3886200"/>
+            <a:ext cx="164592" cy="0"/>
+          </a:xfrm>
+          <a:prstGeom prst="line">
+            <a:avLst/>
+          </a:prstGeom>
+          <a:noFill/>
+          <a:ln w="15875">
+            <a:solidFill>
+              <a:srgbClr val="5A05F4"/>
+            </a:solidFill>
+            <a:prstDash val="solid"/>
+          </a:ln>
+        </p:spPr>
+      </p:sp>
+      <p:sp>
+        <p:nvSpPr>
+          <p:cNvPr id="28" name="Shape 25"/>
+          <p:cNvSpPr/>
+          <p:nvPr/>
+        </p:nvSpPr>
+        <p:spPr>
+          <a:xfrm rot="5400000">
+            <a:off x="8970264" y="3817620"/>
+            <a:ext cx="146304" cy="137160"/>
+          </a:xfrm>
+          <a:prstGeom prst="triangle">
+            <a:avLst/>
+          </a:prstGeom>
+          <a:solidFill>
+            <a:srgbClr val="5A05F4"/>
+          </a:solidFill>
+          <a:ln/>
+        </p:spPr>
+      </p:sp>
+      <p:sp>
+        <p:nvSpPr>
+          <p:cNvPr id="29" name="Shape 26"/>
+          <p:cNvSpPr/>
+          <p:nvPr/>
+        </p:nvSpPr>
+        <p:spPr>
+          <a:xfrm>
+            <a:off x="9208008" y="3611880"/>
+            <a:ext cx="2423160" cy="548640"/>
+          </a:xfrm>
+          <a:prstGeom prst="roundRect">
+            <a:avLst>
+              <a:gd name="adj" fmla="val 16667"/>
+            </a:avLst>
+          </a:prstGeom>
+          <a:solidFill>
+            <a:srgbClr val="000000"/>
+          </a:solidFill>
+          <a:ln/>
+        </p:spPr>
+      </p:sp>
+      <p:sp>
+        <p:nvSpPr>
+          <p:cNvPr id="30" name="Text 27"/>
+          <p:cNvSpPr/>
+          <p:nvPr/>
+        </p:nvSpPr>
+        <p:spPr>
+          <a:xfrm>
+            <a:off x="9262872" y="3611880"/>
+            <a:ext cx="2313432" cy="548640"/>
+          </a:xfrm>
+          <a:prstGeom prst="rect">
+            <a:avLst/>
+          </a:prstGeom>
+          <a:noFill/>
+          <a:ln/>
+        </p:spPr>
+        <p:txBody>
+          <a:bodyPr wrap="square" lIns="0" tIns="0" rIns="0" bIns="0" rtlCol="0" anchor="ctr"/>
+          <a:lstStyle/>
+          <a:p>
+            <a:pPr algn="ctr" indent="0" marL="0">
+              <a:buNone/>
+            </a:pPr>
+            <a:r>
+              <a:rPr lang="en-US" sz="1100" b="1" dirty="0">
+                <a:solidFill>
+                  <a:srgbClr val="FF6B6B"/>
+                </a:solidFill>
+                <a:latin typeface="Courier New" pitchFamily="34" charset="0"/>
+                <a:ea typeface="Courier New" pitchFamily="34" charset="-122"/>
+                <a:cs typeface="Courier New" pitchFamily="34" charset="-120"/>
+              </a:rPr>
+              <a:t>X = заглушка → X назавжди</a:t>
+            </a:r>
+            <a:endParaRPr lang="en-US" sz="1100" dirty="0"/>
+          </a:p>
+        </p:txBody>
+      </p:sp>
+      <p:sp>
+        <p:nvSpPr>
+          <p:cNvPr id="31" name="Text 28"/>
+          <p:cNvSpPr/>
+          <p:nvPr/>
+        </p:nvSpPr>
+        <p:spPr>
+          <a:xfrm>
+            <a:off x="9208008" y="4197096"/>
+            <a:ext cx="2423160" cy="274320"/>
+          </a:xfrm>
+          <a:prstGeom prst="rect">
+            <a:avLst/>
+          </a:prstGeom>
+          <a:noFill/>
+          <a:ln/>
+        </p:spPr>
+        <p:txBody>
+          <a:bodyPr wrap="square" lIns="0" tIns="0" rIns="0" bIns="0" rtlCol="0" anchor="ctr"/>
+          <a:lstStyle/>
+          <a:p>
+            <a:pPr algn="ctr" indent="0" marL="0">
+              <a:buNone/>
+            </a:pPr>
+            <a:r>
+              <a:rPr lang="en-US" sz="1000" dirty="0">
+                <a:solidFill>
+                  <a:srgbClr val="6B6B6B"/>
+                </a:solidFill>
+                <a:latin typeface="Montserrat" pitchFamily="34" charset="0"/>
+                <a:ea typeface="Montserrat" pitchFamily="34" charset="-122"/>
+                <a:cs typeface="Montserrat" pitchFamily="34" charset="-120"/>
+              </a:rPr>
+              <a:t>систематична помилка</a:t>
+            </a:r>
+            <a:endParaRPr lang="en-US" sz="1000" dirty="0"/>
+          </a:p>
+        </p:txBody>
+      </p:sp>
+      <p:sp>
+        <p:nvSpPr>
+          <p:cNvPr id="32" name="Shape 29"/>
+          <p:cNvSpPr/>
+          <p:nvPr/>
+        </p:nvSpPr>
+        <p:spPr>
+          <a:xfrm>
+            <a:off x="566928" y="4526280"/>
+            <a:ext cx="11064240" cy="960120"/>
+          </a:xfrm>
+          <a:prstGeom prst="roundRect">
+            <a:avLst>
+              <a:gd name="adj" fmla="val 11429"/>
             </a:avLst>
           </a:prstGeom>
           <a:solidFill>
@@ -8574,13 +9593,13 @@
       </p:sp>
       <p:sp>
         <p:nvSpPr>
-          <p:cNvPr id="15" name="Shape 12"/>
-          <p:cNvSpPr/>
-          <p:nvPr/>
-        </p:nvSpPr>
-        <p:spPr>
-          <a:xfrm>
-            <a:off x="749808" y="4233672"/>
+          <p:cNvPr id="33" name="Shape 30"/>
+          <p:cNvSpPr/>
+          <p:nvPr/>
+        </p:nvSpPr>
+        <p:spPr>
+          <a:xfrm>
+            <a:off x="749808" y="4850892"/>
             <a:ext cx="310896" cy="310896"/>
           </a:xfrm>
           <a:prstGeom prst="ellipse">
@@ -8594,13 +9613,13 @@
       </p:sp>
       <p:sp>
         <p:nvSpPr>
-          <p:cNvPr id="16" name="Text 13"/>
-          <p:cNvSpPr/>
-          <p:nvPr/>
-        </p:nvSpPr>
-        <p:spPr>
-          <a:xfrm>
-            <a:off x="749808" y="4233672"/>
+          <p:cNvPr id="34" name="Text 31"/>
+          <p:cNvSpPr/>
+          <p:nvPr/>
+        </p:nvSpPr>
+        <p:spPr>
+          <a:xfrm>
+            <a:off x="749808" y="4850892"/>
             <a:ext cx="310896" cy="310896"/>
           </a:xfrm>
           <a:prstGeom prst="rect">
@@ -8633,13 +9652,13 @@
       </p:sp>
       <p:sp>
         <p:nvSpPr>
-          <p:cNvPr id="17" name="Text 14"/>
-          <p:cNvSpPr/>
-          <p:nvPr/>
-        </p:nvSpPr>
-        <p:spPr>
-          <a:xfrm>
-            <a:off x="1243584" y="3785616"/>
+          <p:cNvPr id="35" name="Text 32"/>
+          <p:cNvSpPr/>
+          <p:nvPr/>
+        </p:nvSpPr>
+        <p:spPr>
+          <a:xfrm>
+            <a:off x="1243584" y="4654296"/>
             <a:ext cx="10168128" cy="219456"/>
           </a:xfrm>
           <a:prstGeom prst="rect">
@@ -8672,14 +9691,14 @@
       </p:sp>
       <p:sp>
         <p:nvSpPr>
-          <p:cNvPr id="18" name="Text 15"/>
-          <p:cNvSpPr/>
-          <p:nvPr/>
-        </p:nvSpPr>
-        <p:spPr>
-          <a:xfrm>
-            <a:off x="1243584" y="4041648"/>
-            <a:ext cx="10168128" cy="950976"/>
+          <p:cNvPr id="36" name="Text 33"/>
+          <p:cNvSpPr/>
+          <p:nvPr/>
+        </p:nvSpPr>
+        <p:spPr>
+          <a:xfrm>
+            <a:off x="1243584" y="4910328"/>
+            <a:ext cx="10168128" cy="448056"/>
           </a:xfrm>
           <a:prstGeom prst="rect">
             <a:avLst/>
@@ -8714,18 +9733,18 @@
       </p:sp>
       <p:sp>
         <p:nvSpPr>
-          <p:cNvPr id="19" name="Shape 16"/>
-          <p:cNvSpPr/>
-          <p:nvPr/>
-        </p:nvSpPr>
-        <p:spPr>
-          <a:xfrm>
-            <a:off x="566928" y="5303520"/>
-            <a:ext cx="11064240" cy="566928"/>
+          <p:cNvPr id="37" name="Shape 34"/>
+          <p:cNvSpPr/>
+          <p:nvPr/>
+        </p:nvSpPr>
+        <p:spPr>
+          <a:xfrm>
+            <a:off x="566928" y="5596128"/>
+            <a:ext cx="11064240" cy="502920"/>
           </a:xfrm>
           <a:prstGeom prst="roundRect">
             <a:avLst>
-              <a:gd name="adj" fmla="val 19355"/>
+              <a:gd name="adj" fmla="val 21818"/>
             </a:avLst>
           </a:prstGeom>
           <a:solidFill>
@@ -8741,14 +9760,14 @@
       </p:sp>
       <p:sp>
         <p:nvSpPr>
-          <p:cNvPr id="20" name="Text 17"/>
-          <p:cNvSpPr/>
-          <p:nvPr/>
-        </p:nvSpPr>
-        <p:spPr>
-          <a:xfrm>
-            <a:off x="786384" y="5449824"/>
-            <a:ext cx="10625328" cy="274320"/>
+          <p:cNvPr id="38" name="Text 35"/>
+          <p:cNvSpPr/>
+          <p:nvPr/>
+        </p:nvSpPr>
+        <p:spPr>
+          <a:xfrm>
+            <a:off x="786384" y="5742432"/>
+            <a:ext cx="10625328" cy="210312"/>
           </a:xfrm>
           <a:prstGeom prst="rect">
             <a:avLst/>
@@ -11977,11 +12996,11 @@
         <p:spPr>
           <a:xfrm>
             <a:off x="566928" y="1828800"/>
-            <a:ext cx="3520440" cy="1828800"/>
+            <a:ext cx="3520440" cy="1691640"/>
           </a:xfrm>
           <a:prstGeom prst="roundRect">
             <a:avLst>
-              <a:gd name="adj" fmla="val 6000"/>
+              <a:gd name="adj" fmla="val 6486"/>
             </a:avLst>
           </a:prstGeom>
           <a:solidFill>
@@ -12097,7 +13116,7 @@
         <p:spPr>
           <a:xfrm>
             <a:off x="768096" y="2514600"/>
-            <a:ext cx="3118104" cy="987552"/>
+            <a:ext cx="3118104" cy="850392"/>
           </a:xfrm>
           <a:prstGeom prst="rect">
             <a:avLst/>
@@ -12139,11 +13158,11 @@
         <p:spPr>
           <a:xfrm>
             <a:off x="4270248" y="1828800"/>
-            <a:ext cx="3520440" cy="1828800"/>
+            <a:ext cx="3520440" cy="1691640"/>
           </a:xfrm>
           <a:prstGeom prst="roundRect">
             <a:avLst>
-              <a:gd name="adj" fmla="val 6000"/>
+              <a:gd name="adj" fmla="val 6486"/>
             </a:avLst>
           </a:prstGeom>
           <a:solidFill>
@@ -12259,7 +13278,7 @@
         <p:spPr>
           <a:xfrm>
             <a:off x="4471416" y="2514600"/>
-            <a:ext cx="3118104" cy="987552"/>
+            <a:ext cx="3118104" cy="850392"/>
           </a:xfrm>
           <a:prstGeom prst="rect">
             <a:avLst/>
@@ -12301,11 +13320,11 @@
         <p:spPr>
           <a:xfrm>
             <a:off x="7973568" y="1828800"/>
-            <a:ext cx="3520440" cy="1828800"/>
+            <a:ext cx="3520440" cy="1691640"/>
           </a:xfrm>
           <a:prstGeom prst="roundRect">
             <a:avLst>
-              <a:gd name="adj" fmla="val 6000"/>
+              <a:gd name="adj" fmla="val 6486"/>
             </a:avLst>
           </a:prstGeom>
           <a:solidFill>
@@ -12421,7 +13440,7 @@
         <p:spPr>
           <a:xfrm>
             <a:off x="8174736" y="2514600"/>
-            <a:ext cx="3118104" cy="987552"/>
+            <a:ext cx="3118104" cy="850392"/>
           </a:xfrm>
           <a:prstGeom prst="rect">
             <a:avLst/>
@@ -12462,16 +13481,16 @@
         </p:nvSpPr>
         <p:spPr>
           <a:xfrm>
-            <a:off x="566928" y="4023360"/>
-            <a:ext cx="11064240" cy="1234440"/>
+            <a:off x="566928" y="3749040"/>
+            <a:ext cx="3291840" cy="548640"/>
           </a:xfrm>
           <a:prstGeom prst="roundRect">
             <a:avLst>
-              <a:gd name="adj" fmla="val 8889"/>
+              <a:gd name="adj" fmla="val 16667"/>
             </a:avLst>
           </a:prstGeom>
           <a:solidFill>
-            <a:srgbClr val="5A05F4"/>
+            <a:srgbClr val="000000"/>
           </a:solidFill>
           <a:ln/>
         </p:spPr>
@@ -12484,24 +13503,24 @@
         </p:nvSpPr>
         <p:spPr>
           <a:xfrm>
-            <a:off x="786384" y="4151376"/>
-            <a:ext cx="10625328" cy="219456"/>
-          </a:xfrm>
-          <a:prstGeom prst="rect">
-            <a:avLst/>
-          </a:prstGeom>
-          <a:noFill/>
-          <a:ln/>
-        </p:spPr>
-        <p:txBody>
-          <a:bodyPr wrap="square" lIns="0" tIns="0" rIns="0" bIns="0" rtlCol="0" anchor="ctr"/>
-          <a:lstStyle/>
-          <a:p>
-            <a:pPr indent="0" marL="0">
-              <a:buNone/>
-            </a:pPr>
-            <a:r>
-              <a:rPr lang="en-US" sz="950" b="1" spc="150" kern="0" dirty="0">
+            <a:off x="621792" y="3749040"/>
+            <a:ext cx="3182112" cy="548640"/>
+          </a:xfrm>
+          <a:prstGeom prst="rect">
+            <a:avLst/>
+          </a:prstGeom>
+          <a:noFill/>
+          <a:ln/>
+        </p:spPr>
+        <p:txBody>
+          <a:bodyPr wrap="square" lIns="0" tIns="0" rIns="0" bIns="0" rtlCol="0" anchor="ctr"/>
+          <a:lstStyle/>
+          <a:p>
+            <a:pPr algn="ctr" indent="0" marL="0">
+              <a:buNone/>
+            </a:pPr>
+            <a:r>
+              <a:rPr lang="en-US" sz="1100" dirty="0">
                 <a:solidFill>
                   <a:srgbClr val="FFFFFF"/>
                 </a:solidFill>
@@ -12509,6 +13528,496 @@
                 <a:ea typeface="Courier New" pitchFamily="34" charset="-122"/>
                 <a:cs typeface="Courier New" pitchFamily="34" charset="-120"/>
               </a:rPr>
+              <a:t>«забув пароль, що робити?»</a:t>
+            </a:r>
+            <a:endParaRPr lang="en-US" sz="1100" dirty="0"/>
+          </a:p>
+        </p:txBody>
+      </p:sp>
+      <p:sp>
+        <p:nvSpPr>
+          <p:cNvPr id="27" name="Text 24"/>
+          <p:cNvSpPr/>
+          <p:nvPr/>
+        </p:nvSpPr>
+        <p:spPr>
+          <a:xfrm>
+            <a:off x="566928" y="4334256"/>
+            <a:ext cx="3291840" cy="274320"/>
+          </a:xfrm>
+          <a:prstGeom prst="rect">
+            <a:avLst/>
+          </a:prstGeom>
+          <a:noFill/>
+          <a:ln/>
+        </p:spPr>
+        <p:txBody>
+          <a:bodyPr wrap="square" lIns="0" tIns="0" rIns="0" bIns="0" rtlCol="0" anchor="ctr"/>
+          <a:lstStyle/>
+          <a:p>
+            <a:pPr algn="ctr" indent="0" marL="0">
+              <a:buNone/>
+            </a:pPr>
+            <a:r>
+              <a:rPr lang="en-US" sz="1000" dirty="0">
+                <a:solidFill>
+                  <a:srgbClr val="6B6B6B"/>
+                </a:solidFill>
+                <a:latin typeface="Montserrat" pitchFamily="34" charset="0"/>
+                <a:ea typeface="Montserrat" pitchFamily="34" charset="-122"/>
+                <a:cs typeface="Montserrat" pitchFamily="34" charset="-120"/>
+              </a:rPr>
+              <a:t>нове формулювання</a:t>
+            </a:r>
+            <a:endParaRPr lang="en-US" sz="1000" dirty="0"/>
+          </a:p>
+        </p:txBody>
+      </p:sp>
+      <p:sp>
+        <p:nvSpPr>
+          <p:cNvPr id="28" name="Shape 25"/>
+          <p:cNvSpPr/>
+          <p:nvPr/>
+        </p:nvSpPr>
+        <p:spPr>
+          <a:xfrm>
+            <a:off x="3950208" y="4023360"/>
+            <a:ext cx="164592" cy="0"/>
+          </a:xfrm>
+          <a:prstGeom prst="line">
+            <a:avLst/>
+          </a:prstGeom>
+          <a:noFill/>
+          <a:ln w="15875">
+            <a:solidFill>
+              <a:srgbClr val="5A05F4"/>
+            </a:solidFill>
+            <a:prstDash val="solid"/>
+          </a:ln>
+        </p:spPr>
+      </p:sp>
+      <p:sp>
+        <p:nvSpPr>
+          <p:cNvPr id="29" name="Shape 26"/>
+          <p:cNvSpPr/>
+          <p:nvPr/>
+        </p:nvSpPr>
+        <p:spPr>
+          <a:xfrm rot="5400000">
+            <a:off x="4078224" y="3954780"/>
+            <a:ext cx="146304" cy="137160"/>
+          </a:xfrm>
+          <a:prstGeom prst="triangle">
+            <a:avLst/>
+          </a:prstGeom>
+          <a:solidFill>
+            <a:srgbClr val="5A05F4"/>
+          </a:solidFill>
+          <a:ln/>
+        </p:spPr>
+      </p:sp>
+      <p:sp>
+        <p:nvSpPr>
+          <p:cNvPr id="30" name="Shape 27"/>
+          <p:cNvSpPr/>
+          <p:nvPr/>
+        </p:nvSpPr>
+        <p:spPr>
+          <a:xfrm>
+            <a:off x="4315968" y="3749040"/>
+            <a:ext cx="1554480" cy="548640"/>
+          </a:xfrm>
+          <a:prstGeom prst="roundRect">
+            <a:avLst>
+              <a:gd name="adj" fmla="val 16667"/>
+            </a:avLst>
+          </a:prstGeom>
+          <a:solidFill>
+            <a:srgbClr val="000000"/>
+          </a:solidFill>
+          <a:ln/>
+        </p:spPr>
+      </p:sp>
+      <p:sp>
+        <p:nvSpPr>
+          <p:cNvPr id="31" name="Text 28"/>
+          <p:cNvSpPr/>
+          <p:nvPr/>
+        </p:nvSpPr>
+        <p:spPr>
+          <a:xfrm>
+            <a:off x="4370832" y="3749040"/>
+            <a:ext cx="1444752" cy="548640"/>
+          </a:xfrm>
+          <a:prstGeom prst="rect">
+            <a:avLst/>
+          </a:prstGeom>
+          <a:noFill/>
+          <a:ln/>
+        </p:spPr>
+        <p:txBody>
+          <a:bodyPr wrap="square" lIns="0" tIns="0" rIns="0" bIns="0" rtlCol="0" anchor="ctr"/>
+          <a:lstStyle/>
+          <a:p>
+            <a:pPr algn="ctr" indent="0" marL="0">
+              <a:buNone/>
+            </a:pPr>
+            <a:r>
+              <a:rPr lang="en-US" sz="1100" b="1" dirty="0">
+                <a:solidFill>
+                  <a:srgbClr val="A98BFF"/>
+                </a:solidFill>
+                <a:latin typeface="Courier New" pitchFamily="34" charset="0"/>
+                <a:ea typeface="Courier New" pitchFamily="34" charset="-122"/>
+                <a:cs typeface="Courier New" pitchFamily="34" charset="-120"/>
+              </a:rPr>
+              <a:t>вектор</a:t>
+            </a:r>
+            <a:endParaRPr lang="en-US" sz="1100" dirty="0"/>
+          </a:p>
+        </p:txBody>
+      </p:sp>
+      <p:sp>
+        <p:nvSpPr>
+          <p:cNvPr id="32" name="Text 29"/>
+          <p:cNvSpPr/>
+          <p:nvPr/>
+        </p:nvSpPr>
+        <p:spPr>
+          <a:xfrm>
+            <a:off x="4315968" y="4334256"/>
+            <a:ext cx="1554480" cy="274320"/>
+          </a:xfrm>
+          <a:prstGeom prst="rect">
+            <a:avLst/>
+          </a:prstGeom>
+          <a:noFill/>
+          <a:ln/>
+        </p:spPr>
+        <p:txBody>
+          <a:bodyPr wrap="square" lIns="0" tIns="0" rIns="0" bIns="0" rtlCol="0" anchor="ctr"/>
+          <a:lstStyle/>
+          <a:p>
+            <a:pPr algn="ctr" indent="0" marL="0">
+              <a:buNone/>
+            </a:pPr>
+            <a:r>
+              <a:rPr lang="en-US" sz="1000" dirty="0">
+                <a:solidFill>
+                  <a:srgbClr val="6B6B6B"/>
+                </a:solidFill>
+                <a:latin typeface="Montserrat" pitchFamily="34" charset="0"/>
+                <a:ea typeface="Montserrat" pitchFamily="34" charset="-122"/>
+                <a:cs typeface="Montserrat" pitchFamily="34" charset="-120"/>
+              </a:rPr>
+              <a:t>ще один виклик</a:t>
+            </a:r>
+            <a:endParaRPr lang="en-US" sz="1000" dirty="0"/>
+          </a:p>
+        </p:txBody>
+      </p:sp>
+      <p:sp>
+        <p:nvSpPr>
+          <p:cNvPr id="33" name="Shape 30"/>
+          <p:cNvSpPr/>
+          <p:nvPr/>
+        </p:nvSpPr>
+        <p:spPr>
+          <a:xfrm>
+            <a:off x="5961888" y="4023360"/>
+            <a:ext cx="164592" cy="0"/>
+          </a:xfrm>
+          <a:prstGeom prst="line">
+            <a:avLst/>
+          </a:prstGeom>
+          <a:noFill/>
+          <a:ln w="15875">
+            <a:solidFill>
+              <a:srgbClr val="5A05F4"/>
+            </a:solidFill>
+            <a:prstDash val="solid"/>
+          </a:ln>
+        </p:spPr>
+      </p:sp>
+      <p:sp>
+        <p:nvSpPr>
+          <p:cNvPr id="34" name="Shape 31"/>
+          <p:cNvSpPr/>
+          <p:nvPr/>
+        </p:nvSpPr>
+        <p:spPr>
+          <a:xfrm rot="5400000">
+            <a:off x="6089904" y="3954780"/>
+            <a:ext cx="146304" cy="137160"/>
+          </a:xfrm>
+          <a:prstGeom prst="triangle">
+            <a:avLst/>
+          </a:prstGeom>
+          <a:solidFill>
+            <a:srgbClr val="5A05F4"/>
+          </a:solidFill>
+          <a:ln/>
+        </p:spPr>
+      </p:sp>
+      <p:sp>
+        <p:nvSpPr>
+          <p:cNvPr id="35" name="Shape 32"/>
+          <p:cNvSpPr/>
+          <p:nvPr/>
+        </p:nvSpPr>
+        <p:spPr>
+          <a:xfrm>
+            <a:off x="6327648" y="3749040"/>
+            <a:ext cx="1554480" cy="548640"/>
+          </a:xfrm>
+          <a:prstGeom prst="roundRect">
+            <a:avLst>
+              <a:gd name="adj" fmla="val 16667"/>
+            </a:avLst>
+          </a:prstGeom>
+          <a:solidFill>
+            <a:srgbClr val="000000"/>
+          </a:solidFill>
+          <a:ln/>
+        </p:spPr>
+      </p:sp>
+      <p:sp>
+        <p:nvSpPr>
+          <p:cNvPr id="36" name="Text 33"/>
+          <p:cNvSpPr/>
+          <p:nvPr/>
+        </p:nvSpPr>
+        <p:spPr>
+          <a:xfrm>
+            <a:off x="6382512" y="3749040"/>
+            <a:ext cx="1444752" cy="548640"/>
+          </a:xfrm>
+          <a:prstGeom prst="rect">
+            <a:avLst/>
+          </a:prstGeom>
+          <a:noFill/>
+          <a:ln/>
+        </p:spPr>
+        <p:txBody>
+          <a:bodyPr wrap="square" lIns="0" tIns="0" rIns="0" bIns="0" rtlCol="0" anchor="ctr"/>
+          <a:lstStyle/>
+          <a:p>
+            <a:pPr algn="ctr" indent="0" marL="0">
+              <a:buNone/>
+            </a:pPr>
+            <a:r>
+              <a:rPr lang="en-US" sz="1100" b="1" dirty="0">
+                <a:solidFill>
+                  <a:srgbClr val="6BA0F8"/>
+                </a:solidFill>
+                <a:latin typeface="Courier New" pitchFamily="34" charset="0"/>
+                <a:ea typeface="Courier New" pitchFamily="34" charset="-122"/>
+                <a:cs typeface="Courier New" pitchFamily="34" charset="-120"/>
+              </a:rPr>
+              <a:t>схожість ≥ поріг?</a:t>
+            </a:r>
+            <a:endParaRPr lang="en-US" sz="1100" dirty="0"/>
+          </a:p>
+        </p:txBody>
+      </p:sp>
+      <p:sp>
+        <p:nvSpPr>
+          <p:cNvPr id="37" name="Text 34"/>
+          <p:cNvSpPr/>
+          <p:nvPr/>
+        </p:nvSpPr>
+        <p:spPr>
+          <a:xfrm>
+            <a:off x="6327648" y="4334256"/>
+            <a:ext cx="1554480" cy="274320"/>
+          </a:xfrm>
+          <a:prstGeom prst="rect">
+            <a:avLst/>
+          </a:prstGeom>
+          <a:noFill/>
+          <a:ln/>
+        </p:spPr>
+        <p:txBody>
+          <a:bodyPr wrap="square" lIns="0" tIns="0" rIns="0" bIns="0" rtlCol="0" anchor="ctr"/>
+          <a:lstStyle/>
+          <a:p>
+            <a:pPr algn="ctr" indent="0" marL="0">
+              <a:buNone/>
+            </a:pPr>
+            <a:r>
+              <a:rPr lang="en-US" sz="1000" dirty="0">
+                <a:solidFill>
+                  <a:srgbClr val="6B6B6B"/>
+                </a:solidFill>
+                <a:latin typeface="Montserrat" pitchFamily="34" charset="0"/>
+                <a:ea typeface="Montserrat" pitchFamily="34" charset="-122"/>
+                <a:cs typeface="Montserrat" pitchFamily="34" charset="-120"/>
+              </a:rPr>
+              <a:t>надто низько — чужа відповідь</a:t>
+            </a:r>
+            <a:endParaRPr lang="en-US" sz="1000" dirty="0"/>
+          </a:p>
+        </p:txBody>
+      </p:sp>
+      <p:sp>
+        <p:nvSpPr>
+          <p:cNvPr id="38" name="Shape 35"/>
+          <p:cNvSpPr/>
+          <p:nvPr/>
+        </p:nvSpPr>
+        <p:spPr>
+          <a:xfrm>
+            <a:off x="7973568" y="4023360"/>
+            <a:ext cx="164592" cy="0"/>
+          </a:xfrm>
+          <a:prstGeom prst="line">
+            <a:avLst/>
+          </a:prstGeom>
+          <a:noFill/>
+          <a:ln w="15875">
+            <a:solidFill>
+              <a:srgbClr val="5A05F4"/>
+            </a:solidFill>
+            <a:prstDash val="solid"/>
+          </a:ln>
+        </p:spPr>
+      </p:sp>
+      <p:sp>
+        <p:nvSpPr>
+          <p:cNvPr id="39" name="Shape 36"/>
+          <p:cNvSpPr/>
+          <p:nvPr/>
+        </p:nvSpPr>
+        <p:spPr>
+          <a:xfrm rot="5400000">
+            <a:off x="8101584" y="3954780"/>
+            <a:ext cx="146304" cy="137160"/>
+          </a:xfrm>
+          <a:prstGeom prst="triangle">
+            <a:avLst/>
+          </a:prstGeom>
+          <a:solidFill>
+            <a:srgbClr val="5A05F4"/>
+          </a:solidFill>
+          <a:ln/>
+        </p:spPr>
+      </p:sp>
+      <p:sp>
+        <p:nvSpPr>
+          <p:cNvPr id="40" name="Shape 37"/>
+          <p:cNvSpPr/>
+          <p:nvPr/>
+        </p:nvSpPr>
+        <p:spPr>
+          <a:xfrm>
+            <a:off x="8339328" y="3749040"/>
+            <a:ext cx="3291840" cy="548640"/>
+          </a:xfrm>
+          <a:prstGeom prst="roundRect">
+            <a:avLst>
+              <a:gd name="adj" fmla="val 16667"/>
+            </a:avLst>
+          </a:prstGeom>
+          <a:solidFill>
+            <a:srgbClr val="000000"/>
+          </a:solidFill>
+          <a:ln/>
+        </p:spPr>
+      </p:sp>
+      <p:sp>
+        <p:nvSpPr>
+          <p:cNvPr id="41" name="Text 38"/>
+          <p:cNvSpPr/>
+          <p:nvPr/>
+        </p:nvSpPr>
+        <p:spPr>
+          <a:xfrm>
+            <a:off x="8394192" y="3749040"/>
+            <a:ext cx="3182112" cy="548640"/>
+          </a:xfrm>
+          <a:prstGeom prst="rect">
+            <a:avLst/>
+          </a:prstGeom>
+          <a:noFill/>
+          <a:ln/>
+        </p:spPr>
+        <p:txBody>
+          <a:bodyPr wrap="square" lIns="0" tIns="0" rIns="0" bIns="0" rtlCol="0" anchor="ctr"/>
+          <a:lstStyle/>
+          <a:p>
+            <a:pPr algn="ctr" indent="0" marL="0">
+              <a:buNone/>
+            </a:pPr>
+            <a:r>
+              <a:rPr lang="en-US" sz="1100" b="1" dirty="0">
+                <a:solidFill>
+                  <a:srgbClr val="3FCF8E"/>
+                </a:solidFill>
+                <a:latin typeface="Courier New" pitchFamily="34" charset="0"/>
+                <a:ea typeface="Courier New" pitchFamily="34" charset="-122"/>
+                <a:cs typeface="Courier New" pitchFamily="34" charset="-120"/>
+              </a:rPr>
+              <a:t>відповідь для «Як скинути пароль?»</a:t>
+            </a:r>
+            <a:endParaRPr lang="en-US" sz="1100" dirty="0"/>
+          </a:p>
+        </p:txBody>
+      </p:sp>
+      <p:sp>
+        <p:nvSpPr>
+          <p:cNvPr id="42" name="Shape 39"/>
+          <p:cNvSpPr/>
+          <p:nvPr/>
+        </p:nvSpPr>
+        <p:spPr>
+          <a:xfrm>
+            <a:off x="566928" y="4846320"/>
+            <a:ext cx="11064240" cy="1051560"/>
+          </a:xfrm>
+          <a:prstGeom prst="roundRect">
+            <a:avLst>
+              <a:gd name="adj" fmla="val 10435"/>
+            </a:avLst>
+          </a:prstGeom>
+          <a:solidFill>
+            <a:srgbClr val="5A05F4"/>
+          </a:solidFill>
+          <a:ln/>
+        </p:spPr>
+      </p:sp>
+      <p:sp>
+        <p:nvSpPr>
+          <p:cNvPr id="43" name="Text 40"/>
+          <p:cNvSpPr/>
+          <p:nvPr/>
+        </p:nvSpPr>
+        <p:spPr>
+          <a:xfrm>
+            <a:off x="786384" y="4974336"/>
+            <a:ext cx="10625328" cy="219456"/>
+          </a:xfrm>
+          <a:prstGeom prst="rect">
+            <a:avLst/>
+          </a:prstGeom>
+          <a:noFill/>
+          <a:ln/>
+        </p:spPr>
+        <p:txBody>
+          <a:bodyPr wrap="square" lIns="0" tIns="0" rIns="0" bIns="0" rtlCol="0" anchor="ctr"/>
+          <a:lstStyle/>
+          <a:p>
+            <a:pPr indent="0" marL="0">
+              <a:buNone/>
+            </a:pPr>
+            <a:r>
+              <a:rPr lang="en-US" sz="950" b="1" spc="150" kern="0" dirty="0">
+                <a:solidFill>
+                  <a:srgbClr val="FFFFFF"/>
+                </a:solidFill>
+                <a:latin typeface="Courier New" pitchFamily="34" charset="0"/>
+                <a:ea typeface="Courier New" pitchFamily="34" charset="-122"/>
+                <a:cs typeface="Courier New" pitchFamily="34" charset="-120"/>
+              </a:rPr>
               <a:t>ПОРЯДОК РІШЕНЬ</a:t>
             </a:r>
             <a:endParaRPr lang="en-US" sz="950" dirty="0"/>
@@ -12517,14 +14026,14 @@
       </p:sp>
       <p:sp>
         <p:nvSpPr>
-          <p:cNvPr id="27" name="Text 24"/>
-          <p:cNvSpPr/>
-          <p:nvPr/>
-        </p:nvSpPr>
-        <p:spPr>
-          <a:xfrm>
-            <a:off x="786384" y="4407408"/>
-            <a:ext cx="10625328" cy="722376"/>
+          <p:cNvPr id="44" name="Text 41"/>
+          <p:cNvSpPr/>
+          <p:nvPr/>
+        </p:nvSpPr>
+        <p:spPr>
+          <a:xfrm>
+            <a:off x="786384" y="5230368"/>
+            <a:ext cx="10625328" cy="539496"/>
           </a:xfrm>
           <a:prstGeom prst="rect">
             <a:avLst/>
@@ -23469,20 +24978,77 @@
         </p:nvSpPr>
         <p:spPr>
           <a:xfrm>
-            <a:off x="566928" y="5532120"/>
-            <a:ext cx="11064240" cy="566928"/>
+            <a:off x="566928" y="5669280"/>
+            <a:ext cx="2423160" cy="438912"/>
           </a:xfrm>
           <a:prstGeom prst="roundRect">
             <a:avLst>
-              <a:gd name="adj" fmla="val 19355"/>
+              <a:gd name="adj" fmla="val 20833"/>
             </a:avLst>
           </a:prstGeom>
           <a:solidFill>
-            <a:srgbClr val="FFFFFF"/>
-          </a:solidFill>
-          <a:ln w="12700">
+            <a:srgbClr val="000000"/>
+          </a:solidFill>
+          <a:ln/>
+        </p:spPr>
+      </p:sp>
+      <p:sp>
+        <p:nvSpPr>
+          <p:cNvPr id="24" name="Text 21"/>
+          <p:cNvSpPr/>
+          <p:nvPr/>
+        </p:nvSpPr>
+        <p:spPr>
+          <a:xfrm>
+            <a:off x="621792" y="5669280"/>
+            <a:ext cx="2313432" cy="438912"/>
+          </a:xfrm>
+          <a:prstGeom prst="rect">
+            <a:avLst/>
+          </a:prstGeom>
+          <a:noFill/>
+          <a:ln/>
+        </p:spPr>
+        <p:txBody>
+          <a:bodyPr wrap="square" lIns="0" tIns="0" rIns="0" bIns="0" rtlCol="0" anchor="ctr"/>
+          <a:lstStyle/>
+          <a:p>
+            <a:pPr algn="ctr" indent="0" marL="0">
+              <a:buNone/>
+            </a:pPr>
+            <a:r>
+              <a:rPr lang="en-US" sz="1000" b="1" dirty="0">
+                <a:solidFill>
+                  <a:srgbClr val="3FCF8E"/>
+                </a:solidFill>
+                <a:latin typeface="Courier New" pitchFamily="34" charset="0"/>
+                <a:ea typeface="Courier New" pitchFamily="34" charset="-122"/>
+                <a:cs typeface="Courier New" pitchFamily="34" charset="-120"/>
+              </a:rPr>
+              <a:t>«Як скинути пароль?» ✓</a:t>
+            </a:r>
+            <a:endParaRPr lang="en-US" sz="1000" dirty="0"/>
+          </a:p>
+        </p:txBody>
+      </p:sp>
+      <p:sp>
+        <p:nvSpPr>
+          <p:cNvPr id="25" name="Shape 22"/>
+          <p:cNvSpPr/>
+          <p:nvPr/>
+        </p:nvSpPr>
+        <p:spPr>
+          <a:xfrm>
+            <a:off x="3081528" y="5888736"/>
+            <a:ext cx="164592" cy="0"/>
+          </a:xfrm>
+          <a:prstGeom prst="line">
+            <a:avLst/>
+          </a:prstGeom>
+          <a:noFill/>
+          <a:ln w="15875">
             <a:solidFill>
-              <a:srgbClr val="D9D9D9"/>
+              <a:srgbClr val="5A05F4"/>
             </a:solidFill>
             <a:prstDash val="solid"/>
           </a:ln>
@@ -23490,43 +25056,290 @@
       </p:sp>
       <p:sp>
         <p:nvSpPr>
-          <p:cNvPr id="24" name="Text 21"/>
-          <p:cNvSpPr/>
-          <p:nvPr/>
-        </p:nvSpPr>
-        <p:spPr>
-          <a:xfrm>
-            <a:off x="786384" y="5678424"/>
-            <a:ext cx="10625328" cy="274320"/>
-          </a:xfrm>
-          <a:prstGeom prst="rect">
-            <a:avLst/>
-          </a:prstGeom>
-          <a:noFill/>
-          <a:ln/>
-        </p:spPr>
-        <p:txBody>
-          <a:bodyPr wrap="square" lIns="0" tIns="0" rIns="0" bIns="0" rtlCol="0" anchor="ctr"/>
-          <a:lstStyle/>
-          <a:p>
-            <a:pPr indent="0" marL="0">
-              <a:lnSpc>
-                <a:spcPct val="112000"/>
-              </a:lnSpc>
-              <a:buNone/>
-            </a:pPr>
-            <a:r>
-              <a:rPr lang="en-US" sz="1300" dirty="0">
-                <a:solidFill>
-                  <a:srgbClr val="000000"/>
-                </a:solidFill>
-                <a:latin typeface="Montserrat" pitchFamily="34" charset="0"/>
-                <a:ea typeface="Montserrat" pitchFamily="34" charset="-122"/>
-                <a:cs typeface="Montserrat" pitchFamily="34" charset="-120"/>
-              </a:rPr>
-              <a:t>Межа кешування — питання коректності, а не продуктивності.</a:t>
-            </a:r>
-            <a:endParaRPr lang="en-US" sz="1300" dirty="0"/>
+          <p:cNvPr id="26" name="Shape 23"/>
+          <p:cNvSpPr/>
+          <p:nvPr/>
+        </p:nvSpPr>
+        <p:spPr>
+          <a:xfrm rot="5400000">
+            <a:off x="3209544" y="5820156"/>
+            <a:ext cx="146304" cy="137160"/>
+          </a:xfrm>
+          <a:prstGeom prst="triangle">
+            <a:avLst/>
+          </a:prstGeom>
+          <a:solidFill>
+            <a:srgbClr val="5A05F4"/>
+          </a:solidFill>
+          <a:ln/>
+        </p:spPr>
+      </p:sp>
+      <p:sp>
+        <p:nvSpPr>
+          <p:cNvPr id="27" name="Shape 24"/>
+          <p:cNvSpPr/>
+          <p:nvPr/>
+        </p:nvSpPr>
+        <p:spPr>
+          <a:xfrm>
+            <a:off x="3447288" y="5669280"/>
+            <a:ext cx="2423160" cy="438912"/>
+          </a:xfrm>
+          <a:prstGeom prst="roundRect">
+            <a:avLst>
+              <a:gd name="adj" fmla="val 20833"/>
+            </a:avLst>
+          </a:prstGeom>
+          <a:solidFill>
+            <a:srgbClr val="000000"/>
+          </a:solidFill>
+          <a:ln/>
+        </p:spPr>
+      </p:sp>
+      <p:sp>
+        <p:nvSpPr>
+          <p:cNvPr id="28" name="Text 25"/>
+          <p:cNvSpPr/>
+          <p:nvPr/>
+        </p:nvSpPr>
+        <p:spPr>
+          <a:xfrm>
+            <a:off x="3502152" y="5669280"/>
+            <a:ext cx="2313432" cy="438912"/>
+          </a:xfrm>
+          <a:prstGeom prst="rect">
+            <a:avLst/>
+          </a:prstGeom>
+          <a:noFill/>
+          <a:ln/>
+        </p:spPr>
+        <p:txBody>
+          <a:bodyPr wrap="square" lIns="0" tIns="0" rIns="0" bIns="0" rtlCol="0" anchor="ctr"/>
+          <a:lstStyle/>
+          <a:p>
+            <a:pPr algn="ctr" indent="0" marL="0">
+              <a:buNone/>
+            </a:pPr>
+            <a:r>
+              <a:rPr lang="en-US" sz="1000" b="1" dirty="0">
+                <a:solidFill>
+                  <a:srgbClr val="FF6B6B"/>
+                </a:solidFill>
+                <a:latin typeface="Courier New" pitchFamily="34" charset="0"/>
+                <a:ea typeface="Courier New" pitchFamily="34" charset="-122"/>
+                <a:cs typeface="Courier New" pitchFamily="34" charset="-120"/>
+              </a:rPr>
+              <a:t>«Де моє замовлення?» ✕</a:t>
+            </a:r>
+            <a:endParaRPr lang="en-US" sz="1000" dirty="0"/>
+          </a:p>
+        </p:txBody>
+      </p:sp>
+      <p:sp>
+        <p:nvSpPr>
+          <p:cNvPr id="29" name="Shape 26"/>
+          <p:cNvSpPr/>
+          <p:nvPr/>
+        </p:nvSpPr>
+        <p:spPr>
+          <a:xfrm>
+            <a:off x="5961888" y="5888736"/>
+            <a:ext cx="164592" cy="0"/>
+          </a:xfrm>
+          <a:prstGeom prst="line">
+            <a:avLst/>
+          </a:prstGeom>
+          <a:noFill/>
+          <a:ln w="15875">
+            <a:solidFill>
+              <a:srgbClr val="5A05F4"/>
+            </a:solidFill>
+            <a:prstDash val="solid"/>
+          </a:ln>
+        </p:spPr>
+      </p:sp>
+      <p:sp>
+        <p:nvSpPr>
+          <p:cNvPr id="30" name="Shape 27"/>
+          <p:cNvSpPr/>
+          <p:nvPr/>
+        </p:nvSpPr>
+        <p:spPr>
+          <a:xfrm rot="5400000">
+            <a:off x="6089904" y="5820156"/>
+            <a:ext cx="146304" cy="137160"/>
+          </a:xfrm>
+          <a:prstGeom prst="triangle">
+            <a:avLst/>
+          </a:prstGeom>
+          <a:solidFill>
+            <a:srgbClr val="5A05F4"/>
+          </a:solidFill>
+          <a:ln/>
+        </p:spPr>
+      </p:sp>
+      <p:sp>
+        <p:nvSpPr>
+          <p:cNvPr id="31" name="Shape 28"/>
+          <p:cNvSpPr/>
+          <p:nvPr/>
+        </p:nvSpPr>
+        <p:spPr>
+          <a:xfrm>
+            <a:off x="6327648" y="5669280"/>
+            <a:ext cx="2423160" cy="438912"/>
+          </a:xfrm>
+          <a:prstGeom prst="roundRect">
+            <a:avLst>
+              <a:gd name="adj" fmla="val 20833"/>
+            </a:avLst>
+          </a:prstGeom>
+          <a:solidFill>
+            <a:srgbClr val="000000"/>
+          </a:solidFill>
+          <a:ln/>
+        </p:spPr>
+      </p:sp>
+      <p:sp>
+        <p:nvSpPr>
+          <p:cNvPr id="32" name="Text 29"/>
+          <p:cNvSpPr/>
+          <p:nvPr/>
+        </p:nvSpPr>
+        <p:spPr>
+          <a:xfrm>
+            <a:off x="6382512" y="5669280"/>
+            <a:ext cx="2313432" cy="438912"/>
+          </a:xfrm>
+          <a:prstGeom prst="rect">
+            <a:avLst/>
+          </a:prstGeom>
+          <a:noFill/>
+          <a:ln/>
+        </p:spPr>
+        <p:txBody>
+          <a:bodyPr wrap="square" lIns="0" tIns="0" rIns="0" bIns="0" rtlCol="0" anchor="ctr"/>
+          <a:lstStyle/>
+          <a:p>
+            <a:pPr algn="ctr" indent="0" marL="0">
+              <a:buNone/>
+            </a:pPr>
+            <a:r>
+              <a:rPr lang="en-US" sz="1000" b="1" dirty="0">
+                <a:solidFill>
+                  <a:srgbClr val="FF6B6B"/>
+                </a:solidFill>
+                <a:latin typeface="Courier New" pitchFamily="34" charset="0"/>
+                <a:ea typeface="Courier New" pitchFamily="34" charset="-122"/>
+                <a:cs typeface="Courier New" pitchFamily="34" charset="-120"/>
+              </a:rPr>
+              <a:t>результат tool-виклику ✕</a:t>
+            </a:r>
+            <a:endParaRPr lang="en-US" sz="1000" dirty="0"/>
+          </a:p>
+        </p:txBody>
+      </p:sp>
+      <p:sp>
+        <p:nvSpPr>
+          <p:cNvPr id="33" name="Shape 30"/>
+          <p:cNvSpPr/>
+          <p:nvPr/>
+        </p:nvSpPr>
+        <p:spPr>
+          <a:xfrm>
+            <a:off x="8842248" y="5888736"/>
+            <a:ext cx="164592" cy="0"/>
+          </a:xfrm>
+          <a:prstGeom prst="line">
+            <a:avLst/>
+          </a:prstGeom>
+          <a:noFill/>
+          <a:ln w="15875">
+            <a:solidFill>
+              <a:srgbClr val="5A05F4"/>
+            </a:solidFill>
+            <a:prstDash val="solid"/>
+          </a:ln>
+        </p:spPr>
+      </p:sp>
+      <p:sp>
+        <p:nvSpPr>
+          <p:cNvPr id="34" name="Shape 31"/>
+          <p:cNvSpPr/>
+          <p:nvPr/>
+        </p:nvSpPr>
+        <p:spPr>
+          <a:xfrm rot="5400000">
+            <a:off x="8970264" y="5820156"/>
+            <a:ext cx="146304" cy="137160"/>
+          </a:xfrm>
+          <a:prstGeom prst="triangle">
+            <a:avLst/>
+          </a:prstGeom>
+          <a:solidFill>
+            <a:srgbClr val="5A05F4"/>
+          </a:solidFill>
+          <a:ln/>
+        </p:spPr>
+      </p:sp>
+      <p:sp>
+        <p:nvSpPr>
+          <p:cNvPr id="35" name="Shape 32"/>
+          <p:cNvSpPr/>
+          <p:nvPr/>
+        </p:nvSpPr>
+        <p:spPr>
+          <a:xfrm>
+            <a:off x="9208008" y="5669280"/>
+            <a:ext cx="2423160" cy="438912"/>
+          </a:xfrm>
+          <a:prstGeom prst="roundRect">
+            <a:avLst>
+              <a:gd name="adj" fmla="val 20833"/>
+            </a:avLst>
+          </a:prstGeom>
+          <a:solidFill>
+            <a:srgbClr val="000000"/>
+          </a:solidFill>
+          <a:ln/>
+        </p:spPr>
+      </p:sp>
+      <p:sp>
+        <p:nvSpPr>
+          <p:cNvPr id="36" name="Text 33"/>
+          <p:cNvSpPr/>
+          <p:nvPr/>
+        </p:nvSpPr>
+        <p:spPr>
+          <a:xfrm>
+            <a:off x="9262872" y="5669280"/>
+            <a:ext cx="2313432" cy="438912"/>
+          </a:xfrm>
+          <a:prstGeom prst="rect">
+            <a:avLst/>
+          </a:prstGeom>
+          <a:noFill/>
+          <a:ln/>
+        </p:spPr>
+        <p:txBody>
+          <a:bodyPr wrap="square" lIns="0" tIns="0" rIns="0" bIns="0" rtlCol="0" anchor="ctr"/>
+          <a:lstStyle/>
+          <a:p>
+            <a:pPr algn="ctr" indent="0" marL="0">
+              <a:buNone/>
+            </a:pPr>
+            <a:r>
+              <a:rPr lang="en-US" sz="1000" b="1" dirty="0">
+                <a:solidFill>
+                  <a:srgbClr val="FF6B6B"/>
+                </a:solidFill>
+                <a:latin typeface="Courier New" pitchFamily="34" charset="0"/>
+                <a:ea typeface="Courier New" pitchFamily="34" charset="-122"/>
+                <a:cs typeface="Courier New" pitchFamily="34" charset="-120"/>
+              </a:rPr>
+              <a:t>ціни · залишки · статуси ✕</a:t>
+            </a:r>
+            <a:endParaRPr lang="en-US" sz="1000" dirty="0"/>
           </a:p>
         </p:txBody>
       </p:sp>

--- a/docs/decks/L05.pptx
+++ b/docs/decks/L05.pptx
@@ -15573,7 +15573,7 @@
         <p:spPr>
           <a:xfrm>
             <a:off x="566928" y="1737360"/>
-            <a:ext cx="5532120" cy="1463040"/>
+            <a:ext cx="3611880" cy="1463040"/>
           </a:xfrm>
           <a:prstGeom prst="roundRect">
             <a:avLst>
@@ -15654,7 +15654,7 @@
         <p:spPr>
           <a:xfrm>
             <a:off x="1280160" y="1892808"/>
-            <a:ext cx="4617720" cy="438912"/>
+            <a:ext cx="2697480" cy="438912"/>
           </a:xfrm>
           <a:prstGeom prst="rect">
             <a:avLst/>
@@ -15693,7 +15693,7 @@
         <p:spPr>
           <a:xfrm>
             <a:off x="768096" y="2423160"/>
-            <a:ext cx="5129784" cy="621792"/>
+            <a:ext cx="3209544" cy="621792"/>
           </a:xfrm>
           <a:prstGeom prst="rect">
             <a:avLst/>
@@ -15734,8 +15734,8 @@
         </p:nvSpPr>
         <p:spPr>
           <a:xfrm>
-            <a:off x="6281928" y="1737360"/>
-            <a:ext cx="5532120" cy="1463040"/>
+            <a:off x="4361688" y="1737360"/>
+            <a:ext cx="3611880" cy="1463040"/>
           </a:xfrm>
           <a:prstGeom prst="roundRect">
             <a:avLst>
@@ -15756,7 +15756,7 @@
         </p:nvSpPr>
         <p:spPr>
           <a:xfrm>
-            <a:off x="6483096" y="1920240"/>
+            <a:off x="4562856" y="1920240"/>
             <a:ext cx="384048" cy="384048"/>
           </a:xfrm>
           <a:prstGeom prst="ellipse">
@@ -15776,7 +15776,7 @@
         </p:nvSpPr>
         <p:spPr>
           <a:xfrm>
-            <a:off x="6483096" y="1920240"/>
+            <a:off x="4562856" y="1920240"/>
             <a:ext cx="384048" cy="384048"/>
           </a:xfrm>
           <a:prstGeom prst="rect">
@@ -15815,8 +15815,8 @@
         </p:nvSpPr>
         <p:spPr>
           <a:xfrm>
-            <a:off x="6995160" y="1892808"/>
-            <a:ext cx="4617720" cy="438912"/>
+            <a:off x="5074920" y="1892808"/>
+            <a:ext cx="2697480" cy="438912"/>
           </a:xfrm>
           <a:prstGeom prst="rect">
             <a:avLst/>
@@ -15854,8 +15854,8 @@
         </p:nvSpPr>
         <p:spPr>
           <a:xfrm>
-            <a:off x="6483096" y="2423160"/>
-            <a:ext cx="5129784" cy="621792"/>
+            <a:off x="4562856" y="2423160"/>
+            <a:ext cx="3209544" cy="621792"/>
           </a:xfrm>
           <a:prstGeom prst="rect">
             <a:avLst/>
@@ -15897,7 +15897,7 @@
         <p:spPr>
           <a:xfrm>
             <a:off x="566928" y="3383280"/>
-            <a:ext cx="5532120" cy="1463040"/>
+            <a:ext cx="3611880" cy="1463040"/>
           </a:xfrm>
           <a:prstGeom prst="roundRect">
             <a:avLst>
@@ -15978,7 +15978,7 @@
         <p:spPr>
           <a:xfrm>
             <a:off x="1280160" y="3538728"/>
-            <a:ext cx="4617720" cy="438912"/>
+            <a:ext cx="2697480" cy="438912"/>
           </a:xfrm>
           <a:prstGeom prst="rect">
             <a:avLst/>
@@ -16017,7 +16017,7 @@
         <p:spPr>
           <a:xfrm>
             <a:off x="768096" y="4069080"/>
-            <a:ext cx="5129784" cy="621792"/>
+            <a:ext cx="3209544" cy="621792"/>
           </a:xfrm>
           <a:prstGeom prst="rect">
             <a:avLst/>
@@ -16058,8 +16058,8 @@
         </p:nvSpPr>
         <p:spPr>
           <a:xfrm>
-            <a:off x="6281928" y="3383280"/>
-            <a:ext cx="5532120" cy="1463040"/>
+            <a:off x="4361688" y="3383280"/>
+            <a:ext cx="3611880" cy="1463040"/>
           </a:xfrm>
           <a:prstGeom prst="roundRect">
             <a:avLst>
@@ -16080,7 +16080,7 @@
         </p:nvSpPr>
         <p:spPr>
           <a:xfrm>
-            <a:off x="6483096" y="3566160"/>
+            <a:off x="4562856" y="3566160"/>
             <a:ext cx="384048" cy="384048"/>
           </a:xfrm>
           <a:prstGeom prst="ellipse">
@@ -16100,7 +16100,7 @@
         </p:nvSpPr>
         <p:spPr>
           <a:xfrm>
-            <a:off x="6483096" y="3566160"/>
+            <a:off x="4562856" y="3566160"/>
             <a:ext cx="384048" cy="384048"/>
           </a:xfrm>
           <a:prstGeom prst="rect">
@@ -16139,8 +16139,8 @@
         </p:nvSpPr>
         <p:spPr>
           <a:xfrm>
-            <a:off x="6995160" y="3538728"/>
-            <a:ext cx="4617720" cy="438912"/>
+            <a:off x="5074920" y="3538728"/>
+            <a:ext cx="2697480" cy="438912"/>
           </a:xfrm>
           <a:prstGeom prst="rect">
             <a:avLst/>
@@ -16178,8 +16178,8 @@
         </p:nvSpPr>
         <p:spPr>
           <a:xfrm>
-            <a:off x="6483096" y="4069080"/>
-            <a:ext cx="5129784" cy="621792"/>
+            <a:off x="4562856" y="4069080"/>
+            <a:ext cx="3209544" cy="621792"/>
           </a:xfrm>
           <a:prstGeom prst="rect">
             <a:avLst/>
@@ -16220,6 +16220,477 @@
         </p:nvSpPr>
         <p:spPr>
           <a:xfrm>
+            <a:off x="8156448" y="1737360"/>
+            <a:ext cx="3474720" cy="3108960"/>
+          </a:xfrm>
+          <a:prstGeom prst="roundRect">
+            <a:avLst>
+              <a:gd name="adj" fmla="val 2353"/>
+            </a:avLst>
+          </a:prstGeom>
+          <a:solidFill>
+            <a:srgbClr val="0A0810"/>
+          </a:solidFill>
+          <a:ln w="12700">
+            <a:solidFill>
+              <a:srgbClr val="D9D9D9"/>
+            </a:solidFill>
+            <a:prstDash val="solid"/>
+          </a:ln>
+        </p:spPr>
+      </p:sp>
+      <p:sp>
+        <p:nvSpPr>
+          <p:cNvPr id="28" name="Shape 25"/>
+          <p:cNvSpPr/>
+          <p:nvPr/>
+        </p:nvSpPr>
+        <p:spPr>
+          <a:xfrm>
+            <a:off x="8284464" y="1856232"/>
+            <a:ext cx="73152" cy="73152"/>
+          </a:xfrm>
+          <a:prstGeom prst="ellipse">
+            <a:avLst/>
+          </a:prstGeom>
+          <a:solidFill>
+            <a:srgbClr val="FF6B6B"/>
+          </a:solidFill>
+          <a:ln/>
+        </p:spPr>
+      </p:sp>
+      <p:sp>
+        <p:nvSpPr>
+          <p:cNvPr id="29" name="Shape 26"/>
+          <p:cNvSpPr/>
+          <p:nvPr/>
+        </p:nvSpPr>
+        <p:spPr>
+          <a:xfrm>
+            <a:off x="8430768" y="1856232"/>
+            <a:ext cx="73152" cy="73152"/>
+          </a:xfrm>
+          <a:prstGeom prst="ellipse">
+            <a:avLst/>
+          </a:prstGeom>
+          <a:solidFill>
+            <a:srgbClr val="6BA0F8"/>
+          </a:solidFill>
+          <a:ln/>
+        </p:spPr>
+      </p:sp>
+      <p:sp>
+        <p:nvSpPr>
+          <p:cNvPr id="30" name="Shape 27"/>
+          <p:cNvSpPr/>
+          <p:nvPr/>
+        </p:nvSpPr>
+        <p:spPr>
+          <a:xfrm>
+            <a:off x="8577072" y="1856232"/>
+            <a:ext cx="73152" cy="73152"/>
+          </a:xfrm>
+          <a:prstGeom prst="ellipse">
+            <a:avLst/>
+          </a:prstGeom>
+          <a:solidFill>
+            <a:srgbClr val="3FCF8E"/>
+          </a:solidFill>
+          <a:ln/>
+        </p:spPr>
+      </p:sp>
+      <p:sp>
+        <p:nvSpPr>
+          <p:cNvPr id="31" name="Text 28"/>
+          <p:cNvSpPr/>
+          <p:nvPr/>
+        </p:nvSpPr>
+        <p:spPr>
+          <a:xfrm>
+            <a:off x="8759952" y="1737360"/>
+            <a:ext cx="2761488" cy="310896"/>
+          </a:xfrm>
+          <a:prstGeom prst="rect">
+            <a:avLst/>
+          </a:prstGeom>
+          <a:noFill/>
+          <a:ln/>
+        </p:spPr>
+        <p:txBody>
+          <a:bodyPr wrap="square" lIns="0" tIns="0" rIns="0" bIns="0" rtlCol="0" anchor="ctr"/>
+          <a:lstStyle/>
+          <a:p>
+            <a:pPr indent="0" marL="0">
+              <a:buNone/>
+            </a:pPr>
+            <a:r>
+              <a:rPr lang="en-US" sz="800" dirty="0">
+                <a:solidFill>
+                  <a:srgbClr val="9A94AA"/>
+                </a:solidFill>
+                <a:latin typeface="Courier New" pitchFamily="34" charset="0"/>
+                <a:ea typeface="Courier New" pitchFamily="34" charset="-122"/>
+                <a:cs typeface="Courier New" pitchFamily="34" charset="-120"/>
+              </a:rPr>
+              <a:t>Чат · localhost:4200</a:t>
+            </a:r>
+            <a:endParaRPr lang="en-US" sz="800" dirty="0"/>
+          </a:p>
+        </p:txBody>
+      </p:sp>
+      <p:sp>
+        <p:nvSpPr>
+          <p:cNvPr id="32" name="Shape 29"/>
+          <p:cNvSpPr/>
+          <p:nvPr/>
+        </p:nvSpPr>
+        <p:spPr>
+          <a:xfrm>
+            <a:off x="8156448" y="2048256"/>
+            <a:ext cx="3474720" cy="0"/>
+          </a:xfrm>
+          <a:prstGeom prst="line">
+            <a:avLst/>
+          </a:prstGeom>
+          <a:noFill/>
+          <a:ln w="9525">
+            <a:solidFill>
+              <a:srgbClr val="2A2438"/>
+            </a:solidFill>
+            <a:prstDash val="solid"/>
+          </a:ln>
+        </p:spPr>
+      </p:sp>
+      <p:sp>
+        <p:nvSpPr>
+          <p:cNvPr id="33" name="Shape 30"/>
+          <p:cNvSpPr/>
+          <p:nvPr/>
+        </p:nvSpPr>
+        <p:spPr>
+          <a:xfrm>
+            <a:off x="8811158" y="2176272"/>
+            <a:ext cx="2710282" cy="306095"/>
+          </a:xfrm>
+          <a:prstGeom prst="roundRect">
+            <a:avLst>
+              <a:gd name="adj" fmla="val 29873"/>
+            </a:avLst>
+          </a:prstGeom>
+          <a:solidFill>
+            <a:srgbClr val="5A05F4"/>
+          </a:solidFill>
+          <a:ln/>
+        </p:spPr>
+      </p:sp>
+      <p:sp>
+        <p:nvSpPr>
+          <p:cNvPr id="34" name="Text 31"/>
+          <p:cNvSpPr/>
+          <p:nvPr/>
+        </p:nvSpPr>
+        <p:spPr>
+          <a:xfrm>
+            <a:off x="8920886" y="2176272"/>
+            <a:ext cx="2490826" cy="306095"/>
+          </a:xfrm>
+          <a:prstGeom prst="rect">
+            <a:avLst/>
+          </a:prstGeom>
+          <a:noFill/>
+          <a:ln/>
+        </p:spPr>
+        <p:txBody>
+          <a:bodyPr wrap="square" lIns="0" tIns="0" rIns="0" bIns="0" rtlCol="0" anchor="ctr"/>
+          <a:lstStyle/>
+          <a:p>
+            <a:pPr indent="0" marL="0">
+              <a:buNone/>
+            </a:pPr>
+            <a:r>
+              <a:rPr lang="en-US" sz="950" dirty="0">
+                <a:solidFill>
+                  <a:srgbClr val="FFFFFF"/>
+                </a:solidFill>
+                <a:latin typeface="Montserrat" pitchFamily="34" charset="0"/>
+                <a:ea typeface="Montserrat" pitchFamily="34" charset="-122"/>
+                <a:cs typeface="Montserrat" pitchFamily="34" charset="-120"/>
+              </a:rPr>
+              <a:t>Як скинути пароль?</a:t>
+            </a:r>
+            <a:endParaRPr lang="en-US" sz="950" dirty="0"/>
+          </a:p>
+        </p:txBody>
+      </p:sp>
+      <p:sp>
+        <p:nvSpPr>
+          <p:cNvPr id="35" name="Shape 32"/>
+          <p:cNvSpPr/>
+          <p:nvPr/>
+        </p:nvSpPr>
+        <p:spPr>
+          <a:xfrm>
+            <a:off x="8266176" y="2582951"/>
+            <a:ext cx="2710282" cy="484175"/>
+          </a:xfrm>
+          <a:prstGeom prst="roundRect">
+            <a:avLst>
+              <a:gd name="adj" fmla="val 18886"/>
+            </a:avLst>
+          </a:prstGeom>
+          <a:solidFill>
+            <a:srgbClr val="1E1A2B"/>
+          </a:solidFill>
+          <a:ln/>
+        </p:spPr>
+      </p:sp>
+      <p:sp>
+        <p:nvSpPr>
+          <p:cNvPr id="36" name="Text 33"/>
+          <p:cNvSpPr/>
+          <p:nvPr/>
+        </p:nvSpPr>
+        <p:spPr>
+          <a:xfrm>
+            <a:off x="8375904" y="2582951"/>
+            <a:ext cx="2490826" cy="484175"/>
+          </a:xfrm>
+          <a:prstGeom prst="rect">
+            <a:avLst/>
+          </a:prstGeom>
+          <a:noFill/>
+          <a:ln/>
+        </p:spPr>
+        <p:txBody>
+          <a:bodyPr wrap="square" lIns="0" tIns="0" rIns="0" bIns="0" rtlCol="0" anchor="ctr"/>
+          <a:lstStyle/>
+          <a:p>
+            <a:pPr indent="0" marL="0">
+              <a:buNone/>
+            </a:pPr>
+            <a:r>
+              <a:rPr lang="en-US" sz="950" dirty="0">
+                <a:solidFill>
+                  <a:srgbClr val="D8D4E4"/>
+                </a:solidFill>
+                <a:latin typeface="Montserrat" pitchFamily="34" charset="0"/>
+                <a:ea typeface="Montserrat" pitchFamily="34" charset="-122"/>
+                <a:cs typeface="Montserrat" pitchFamily="34" charset="-120"/>
+              </a:rPr>
+              <a:t>Надішліть запит на email підтримки — інструкція прийде листом.</a:t>
+            </a:r>
+            <a:endParaRPr lang="en-US" sz="950" dirty="0"/>
+          </a:p>
+        </p:txBody>
+      </p:sp>
+      <p:sp>
+        <p:nvSpPr>
+          <p:cNvPr id="37" name="Text 34"/>
+          <p:cNvSpPr/>
+          <p:nvPr/>
+        </p:nvSpPr>
+        <p:spPr>
+          <a:xfrm>
+            <a:off x="8302752" y="3112846"/>
+            <a:ext cx="2710282" cy="182880"/>
+          </a:xfrm>
+          <a:prstGeom prst="rect">
+            <a:avLst/>
+          </a:prstGeom>
+          <a:noFill/>
+          <a:ln/>
+        </p:spPr>
+        <p:txBody>
+          <a:bodyPr wrap="square" lIns="0" tIns="0" rIns="0" bIns="0" rtlCol="0" anchor="ctr"/>
+          <a:lstStyle/>
+          <a:p>
+            <a:pPr indent="0" marL="0">
+              <a:buNone/>
+            </a:pPr>
+            <a:r>
+              <a:rPr lang="en-US" sz="750" dirty="0">
+                <a:solidFill>
+                  <a:srgbClr val="6BA0F8"/>
+                </a:solidFill>
+                <a:latin typeface="Courier New" pitchFamily="34" charset="0"/>
+                <a:ea typeface="Courier New" pitchFamily="34" charset="-122"/>
+                <a:cs typeface="Courier New" pitchFamily="34" charset="-120"/>
+              </a:rPr>
+              <a:t>miss · 1.2 s · 84 токени</a:t>
+            </a:r>
+            <a:endParaRPr lang="en-US" sz="750" dirty="0"/>
+          </a:p>
+        </p:txBody>
+      </p:sp>
+      <p:sp>
+        <p:nvSpPr>
+          <p:cNvPr id="38" name="Shape 35"/>
+          <p:cNvSpPr/>
+          <p:nvPr/>
+        </p:nvSpPr>
+        <p:spPr>
+          <a:xfrm>
+            <a:off x="8811158" y="3368878"/>
+            <a:ext cx="2710282" cy="306095"/>
+          </a:xfrm>
+          <a:prstGeom prst="roundRect">
+            <a:avLst>
+              <a:gd name="adj" fmla="val 29873"/>
+            </a:avLst>
+          </a:prstGeom>
+          <a:solidFill>
+            <a:srgbClr val="5A05F4"/>
+          </a:solidFill>
+          <a:ln/>
+        </p:spPr>
+      </p:sp>
+      <p:sp>
+        <p:nvSpPr>
+          <p:cNvPr id="39" name="Text 36"/>
+          <p:cNvSpPr/>
+          <p:nvPr/>
+        </p:nvSpPr>
+        <p:spPr>
+          <a:xfrm>
+            <a:off x="8920886" y="3368878"/>
+            <a:ext cx="2490826" cy="306095"/>
+          </a:xfrm>
+          <a:prstGeom prst="rect">
+            <a:avLst/>
+          </a:prstGeom>
+          <a:noFill/>
+          <a:ln/>
+        </p:spPr>
+        <p:txBody>
+          <a:bodyPr wrap="square" lIns="0" tIns="0" rIns="0" bIns="0" rtlCol="0" anchor="ctr"/>
+          <a:lstStyle/>
+          <a:p>
+            <a:pPr indent="0" marL="0">
+              <a:buNone/>
+            </a:pPr>
+            <a:r>
+              <a:rPr lang="en-US" sz="950" dirty="0">
+                <a:solidFill>
+                  <a:srgbClr val="FFFFFF"/>
+                </a:solidFill>
+                <a:latin typeface="Montserrat" pitchFamily="34" charset="0"/>
+                <a:ea typeface="Montserrat" pitchFamily="34" charset="-122"/>
+                <a:cs typeface="Montserrat" pitchFamily="34" charset="-120"/>
+              </a:rPr>
+              <a:t>Як скинути пароль?</a:t>
+            </a:r>
+            <a:endParaRPr lang="en-US" sz="950" dirty="0"/>
+          </a:p>
+        </p:txBody>
+      </p:sp>
+      <p:sp>
+        <p:nvSpPr>
+          <p:cNvPr id="40" name="Shape 37"/>
+          <p:cNvSpPr/>
+          <p:nvPr/>
+        </p:nvSpPr>
+        <p:spPr>
+          <a:xfrm>
+            <a:off x="8266176" y="3775558"/>
+            <a:ext cx="2710282" cy="484175"/>
+          </a:xfrm>
+          <a:prstGeom prst="roundRect">
+            <a:avLst>
+              <a:gd name="adj" fmla="val 18886"/>
+            </a:avLst>
+          </a:prstGeom>
+          <a:solidFill>
+            <a:srgbClr val="1E1A2B"/>
+          </a:solidFill>
+          <a:ln/>
+        </p:spPr>
+      </p:sp>
+      <p:sp>
+        <p:nvSpPr>
+          <p:cNvPr id="41" name="Text 38"/>
+          <p:cNvSpPr/>
+          <p:nvPr/>
+        </p:nvSpPr>
+        <p:spPr>
+          <a:xfrm>
+            <a:off x="8375904" y="3775558"/>
+            <a:ext cx="2490826" cy="484175"/>
+          </a:xfrm>
+          <a:prstGeom prst="rect">
+            <a:avLst/>
+          </a:prstGeom>
+          <a:noFill/>
+          <a:ln/>
+        </p:spPr>
+        <p:txBody>
+          <a:bodyPr wrap="square" lIns="0" tIns="0" rIns="0" bIns="0" rtlCol="0" anchor="ctr"/>
+          <a:lstStyle/>
+          <a:p>
+            <a:pPr indent="0" marL="0">
+              <a:buNone/>
+            </a:pPr>
+            <a:r>
+              <a:rPr lang="en-US" sz="950" dirty="0">
+                <a:solidFill>
+                  <a:srgbClr val="D8D4E4"/>
+                </a:solidFill>
+                <a:latin typeface="Montserrat" pitchFamily="34" charset="0"/>
+                <a:ea typeface="Montserrat" pitchFamily="34" charset="-122"/>
+                <a:cs typeface="Montserrat" pitchFamily="34" charset="-120"/>
+              </a:rPr>
+              <a:t>Надішліть запит на email підтримки — інструкція прийде листом.</a:t>
+            </a:r>
+            <a:endParaRPr lang="en-US" sz="950" dirty="0"/>
+          </a:p>
+        </p:txBody>
+      </p:sp>
+      <p:sp>
+        <p:nvSpPr>
+          <p:cNvPr id="42" name="Text 39"/>
+          <p:cNvSpPr/>
+          <p:nvPr/>
+        </p:nvSpPr>
+        <p:spPr>
+          <a:xfrm>
+            <a:off x="8302752" y="4305452"/>
+            <a:ext cx="2710282" cy="182880"/>
+          </a:xfrm>
+          <a:prstGeom prst="rect">
+            <a:avLst/>
+          </a:prstGeom>
+          <a:noFill/>
+          <a:ln/>
+        </p:spPr>
+        <p:txBody>
+          <a:bodyPr wrap="square" lIns="0" tIns="0" rIns="0" bIns="0" rtlCol="0" anchor="ctr"/>
+          <a:lstStyle/>
+          <a:p>
+            <a:pPr indent="0" marL="0">
+              <a:buNone/>
+            </a:pPr>
+            <a:r>
+              <a:rPr lang="en-US" sz="750" dirty="0">
+                <a:solidFill>
+                  <a:srgbClr val="3FCF8E"/>
+                </a:solidFill>
+                <a:latin typeface="Courier New" pitchFamily="34" charset="0"/>
+                <a:ea typeface="Courier New" pitchFamily="34" charset="-122"/>
+                <a:cs typeface="Courier New" pitchFamily="34" charset="-120"/>
+              </a:rPr>
+              <a:t>hit · 0 мс · 0 токенів</a:t>
+            </a:r>
+            <a:endParaRPr lang="en-US" sz="750" dirty="0"/>
+          </a:p>
+        </p:txBody>
+      </p:sp>
+      <p:sp>
+        <p:nvSpPr>
+          <p:cNvPr id="43" name="Shape 40"/>
+          <p:cNvSpPr/>
+          <p:nvPr/>
+        </p:nvSpPr>
+        <p:spPr>
+          <a:xfrm>
             <a:off x="566928" y="5074920"/>
             <a:ext cx="11064240" cy="1051560"/>
           </a:xfrm>
@@ -16236,7 +16707,7 @@
       </p:sp>
       <p:sp>
         <p:nvSpPr>
-          <p:cNvPr id="28" name="Shape 25"/>
+          <p:cNvPr id="44" name="Shape 41"/>
           <p:cNvSpPr/>
           <p:nvPr/>
         </p:nvSpPr>
@@ -16256,7 +16727,7 @@
       </p:sp>
       <p:sp>
         <p:nvSpPr>
-          <p:cNvPr id="29" name="Text 26"/>
+          <p:cNvPr id="45" name="Text 42"/>
           <p:cNvSpPr/>
           <p:nvPr/>
         </p:nvSpPr>
@@ -16295,7 +16766,7 @@
       </p:sp>
       <p:sp>
         <p:nvSpPr>
-          <p:cNvPr id="30" name="Text 27"/>
+          <p:cNvPr id="46" name="Text 43"/>
           <p:cNvSpPr/>
           <p:nvPr/>
         </p:nvSpPr>
@@ -16334,7 +16805,7 @@
       </p:sp>
       <p:sp>
         <p:nvSpPr>
-          <p:cNvPr id="31" name="Text 28"/>
+          <p:cNvPr id="47" name="Text 44"/>
           <p:cNvSpPr/>
           <p:nvPr/>
         </p:nvSpPr>
@@ -17528,11 +17999,11 @@
         <p:spPr>
           <a:xfrm>
             <a:off x="566928" y="1737360"/>
-            <a:ext cx="3566160" cy="2148840"/>
+            <a:ext cx="7223760" cy="1051560"/>
           </a:xfrm>
           <a:prstGeom prst="roundRect">
             <a:avLst>
-              <a:gd name="adj" fmla="val 5106"/>
+              <a:gd name="adj" fmla="val 10435"/>
             </a:avLst>
           </a:prstGeom>
           <a:solidFill>
@@ -17550,7 +18021,7 @@
         <p:spPr>
           <a:xfrm>
             <a:off x="768096" y="1892808"/>
-            <a:ext cx="3163824" cy="438912"/>
+            <a:ext cx="6821424" cy="438912"/>
           </a:xfrm>
           <a:prstGeom prst="rect">
             <a:avLst/>
@@ -17589,7 +18060,7 @@
         <p:spPr>
           <a:xfrm>
             <a:off x="768096" y="2423160"/>
-            <a:ext cx="3163824" cy="1307592"/>
+            <a:ext cx="6821424" cy="210312"/>
           </a:xfrm>
           <a:prstGeom prst="rect">
             <a:avLst/>
@@ -17630,12 +18101,12 @@
         </p:nvSpPr>
         <p:spPr>
           <a:xfrm>
-            <a:off x="4315968" y="1737360"/>
-            <a:ext cx="3566160" cy="2148840"/>
+            <a:off x="566928" y="2926080"/>
+            <a:ext cx="7223760" cy="1051560"/>
           </a:xfrm>
           <a:prstGeom prst="roundRect">
             <a:avLst>
-              <a:gd name="adj" fmla="val 5106"/>
+              <a:gd name="adj" fmla="val 10435"/>
             </a:avLst>
           </a:prstGeom>
           <a:solidFill>
@@ -17652,8 +18123,8 @@
         </p:nvSpPr>
         <p:spPr>
           <a:xfrm>
-            <a:off x="4517136" y="1892808"/>
-            <a:ext cx="3163824" cy="438912"/>
+            <a:off x="768096" y="3081528"/>
+            <a:ext cx="6821424" cy="438912"/>
           </a:xfrm>
           <a:prstGeom prst="rect">
             <a:avLst/>
@@ -17691,8 +18162,8 @@
         </p:nvSpPr>
         <p:spPr>
           <a:xfrm>
-            <a:off x="4517136" y="2423160"/>
-            <a:ext cx="3163824" cy="1307592"/>
+            <a:off x="768096" y="3611880"/>
+            <a:ext cx="6821424" cy="210312"/>
           </a:xfrm>
           <a:prstGeom prst="rect">
             <a:avLst/>
@@ -17733,12 +18204,12 @@
         </p:nvSpPr>
         <p:spPr>
           <a:xfrm>
-            <a:off x="8065008" y="1737360"/>
-            <a:ext cx="3566160" cy="2148840"/>
+            <a:off x="566928" y="4114800"/>
+            <a:ext cx="7223760" cy="1051560"/>
           </a:xfrm>
           <a:prstGeom prst="roundRect">
             <a:avLst>
-              <a:gd name="adj" fmla="val 5106"/>
+              <a:gd name="adj" fmla="val 10435"/>
             </a:avLst>
           </a:prstGeom>
           <a:solidFill>
@@ -17755,8 +18226,8 @@
         </p:nvSpPr>
         <p:spPr>
           <a:xfrm>
-            <a:off x="8266176" y="1892808"/>
-            <a:ext cx="3163824" cy="438912"/>
+            <a:off x="768096" y="4270248"/>
+            <a:ext cx="6821424" cy="438912"/>
           </a:xfrm>
           <a:prstGeom prst="rect">
             <a:avLst/>
@@ -17794,8 +18265,8 @@
         </p:nvSpPr>
         <p:spPr>
           <a:xfrm>
-            <a:off x="8266176" y="2423160"/>
-            <a:ext cx="3163824" cy="1307592"/>
+            <a:off x="768096" y="4800600"/>
+            <a:ext cx="6821424" cy="210312"/>
           </a:xfrm>
           <a:prstGeom prst="rect">
             <a:avLst/>
@@ -17836,16 +18307,16 @@
         </p:nvSpPr>
         <p:spPr>
           <a:xfrm>
-            <a:off x="566928" y="4297680"/>
-            <a:ext cx="11064240" cy="1600200"/>
+            <a:off x="8156448" y="1737360"/>
+            <a:ext cx="3474720" cy="3429000"/>
           </a:xfrm>
           <a:prstGeom prst="roundRect">
             <a:avLst>
-              <a:gd name="adj" fmla="val 6857"/>
+              <a:gd name="adj" fmla="val 2133"/>
             </a:avLst>
           </a:prstGeom>
           <a:solidFill>
-            <a:srgbClr val="FFFFFF"/>
+            <a:srgbClr val="0A0810"/>
           </a:solidFill>
           <a:ln w="12700">
             <a:solidFill>
@@ -17857,14 +18328,793 @@
       </p:sp>
       <p:sp>
         <p:nvSpPr>
-          <p:cNvPr id="17" name="Text 14"/>
-          <p:cNvSpPr/>
-          <p:nvPr/>
-        </p:nvSpPr>
-        <p:spPr>
-          <a:xfrm>
-            <a:off x="786384" y="4443984"/>
-            <a:ext cx="10625328" cy="1307592"/>
+          <p:cNvPr id="17" name="Shape 14"/>
+          <p:cNvSpPr/>
+          <p:nvPr/>
+        </p:nvSpPr>
+        <p:spPr>
+          <a:xfrm>
+            <a:off x="8284464" y="1856232"/>
+            <a:ext cx="73152" cy="73152"/>
+          </a:xfrm>
+          <a:prstGeom prst="ellipse">
+            <a:avLst/>
+          </a:prstGeom>
+          <a:solidFill>
+            <a:srgbClr val="FF6B6B"/>
+          </a:solidFill>
+          <a:ln/>
+        </p:spPr>
+      </p:sp>
+      <p:sp>
+        <p:nvSpPr>
+          <p:cNvPr id="18" name="Shape 15"/>
+          <p:cNvSpPr/>
+          <p:nvPr/>
+        </p:nvSpPr>
+        <p:spPr>
+          <a:xfrm>
+            <a:off x="8430768" y="1856232"/>
+            <a:ext cx="73152" cy="73152"/>
+          </a:xfrm>
+          <a:prstGeom prst="ellipse">
+            <a:avLst/>
+          </a:prstGeom>
+          <a:solidFill>
+            <a:srgbClr val="6BA0F8"/>
+          </a:solidFill>
+          <a:ln/>
+        </p:spPr>
+      </p:sp>
+      <p:sp>
+        <p:nvSpPr>
+          <p:cNvPr id="19" name="Shape 16"/>
+          <p:cNvSpPr/>
+          <p:nvPr/>
+        </p:nvSpPr>
+        <p:spPr>
+          <a:xfrm>
+            <a:off x="8577072" y="1856232"/>
+            <a:ext cx="73152" cy="73152"/>
+          </a:xfrm>
+          <a:prstGeom prst="ellipse">
+            <a:avLst/>
+          </a:prstGeom>
+          <a:solidFill>
+            <a:srgbClr val="3FCF8E"/>
+          </a:solidFill>
+          <a:ln/>
+        </p:spPr>
+      </p:sp>
+      <p:sp>
+        <p:nvSpPr>
+          <p:cNvPr id="20" name="Text 17"/>
+          <p:cNvSpPr/>
+          <p:nvPr/>
+        </p:nvSpPr>
+        <p:spPr>
+          <a:xfrm>
+            <a:off x="8759952" y="1737360"/>
+            <a:ext cx="2761488" cy="310896"/>
+          </a:xfrm>
+          <a:prstGeom prst="rect">
+            <a:avLst/>
+          </a:prstGeom>
+          <a:noFill/>
+          <a:ln/>
+        </p:spPr>
+        <p:txBody>
+          <a:bodyPr wrap="square" lIns="0" tIns="0" rIns="0" bIns="0" rtlCol="0" anchor="ctr"/>
+          <a:lstStyle/>
+          <a:p>
+            <a:pPr indent="0" marL="0">
+              <a:buNone/>
+            </a:pPr>
+            <a:r>
+              <a:rPr lang="en-US" sz="800" dirty="0">
+                <a:solidFill>
+                  <a:srgbClr val="9A94AA"/>
+                </a:solidFill>
+                <a:latin typeface="Courier New" pitchFamily="34" charset="0"/>
+                <a:ea typeface="Courier New" pitchFamily="34" charset="-122"/>
+                <a:cs typeface="Courier New" pitchFamily="34" charset="-120"/>
+              </a:rPr>
+              <a:t>консоль · після Теми 5</a:t>
+            </a:r>
+            <a:endParaRPr lang="en-US" sz="800" dirty="0"/>
+          </a:p>
+        </p:txBody>
+      </p:sp>
+      <p:sp>
+        <p:nvSpPr>
+          <p:cNvPr id="21" name="Shape 18"/>
+          <p:cNvSpPr/>
+          <p:nvPr/>
+        </p:nvSpPr>
+        <p:spPr>
+          <a:xfrm>
+            <a:off x="8156448" y="2048256"/>
+            <a:ext cx="3474720" cy="0"/>
+          </a:xfrm>
+          <a:prstGeom prst="line">
+            <a:avLst/>
+          </a:prstGeom>
+          <a:noFill/>
+          <a:ln w="9525">
+            <a:solidFill>
+              <a:srgbClr val="2A2438"/>
+            </a:solidFill>
+            <a:prstDash val="solid"/>
+          </a:ln>
+        </p:spPr>
+      </p:sp>
+      <p:sp>
+        <p:nvSpPr>
+          <p:cNvPr id="22" name="Shape 19"/>
+          <p:cNvSpPr/>
+          <p:nvPr/>
+        </p:nvSpPr>
+        <p:spPr>
+          <a:xfrm>
+            <a:off x="8266176" y="2139696"/>
+            <a:ext cx="1011936" cy="1421892"/>
+          </a:xfrm>
+          <a:prstGeom prst="roundRect">
+            <a:avLst>
+              <a:gd name="adj" fmla="val 4518"/>
+            </a:avLst>
+          </a:prstGeom>
+          <a:solidFill>
+            <a:srgbClr val="0A0810"/>
+          </a:solidFill>
+          <a:ln w="12700">
+            <a:solidFill>
+              <a:srgbClr val="2A2438"/>
+            </a:solidFill>
+            <a:prstDash val="solid"/>
+          </a:ln>
+        </p:spPr>
+      </p:sp>
+      <p:sp>
+        <p:nvSpPr>
+          <p:cNvPr id="23" name="Text 20"/>
+          <p:cNvSpPr/>
+          <p:nvPr/>
+        </p:nvSpPr>
+        <p:spPr>
+          <a:xfrm>
+            <a:off x="8339328" y="2176272"/>
+            <a:ext cx="865632" cy="369692"/>
+          </a:xfrm>
+          <a:prstGeom prst="rect">
+            <a:avLst/>
+          </a:prstGeom>
+          <a:noFill/>
+          <a:ln/>
+        </p:spPr>
+        <p:txBody>
+          <a:bodyPr wrap="square" lIns="0" tIns="0" rIns="0" bIns="0" rtlCol="0" anchor="t"/>
+          <a:lstStyle/>
+          <a:p>
+            <a:pPr indent="0" marL="0">
+              <a:buNone/>
+            </a:pPr>
+            <a:r>
+              <a:rPr lang="en-US" sz="750" dirty="0">
+                <a:solidFill>
+                  <a:srgbClr val="9A94AA"/>
+                </a:solidFill>
+                <a:latin typeface="Courier New" pitchFamily="34" charset="0"/>
+                <a:ea typeface="Courier New" pitchFamily="34" charset="-122"/>
+                <a:cs typeface="Courier New" pitchFamily="34" charset="-120"/>
+              </a:rPr>
+              <a:t>requests</a:t>
+            </a:r>
+            <a:endParaRPr lang="en-US" sz="750" dirty="0"/>
+          </a:p>
+        </p:txBody>
+      </p:sp>
+      <p:sp>
+        <p:nvSpPr>
+          <p:cNvPr id="24" name="Text 21"/>
+          <p:cNvSpPr/>
+          <p:nvPr/>
+        </p:nvSpPr>
+        <p:spPr>
+          <a:xfrm>
+            <a:off x="8339328" y="2623139"/>
+            <a:ext cx="865632" cy="824697"/>
+          </a:xfrm>
+          <a:prstGeom prst="rect">
+            <a:avLst/>
+          </a:prstGeom>
+          <a:noFill/>
+          <a:ln/>
+        </p:spPr>
+        <p:txBody>
+          <a:bodyPr wrap="square" lIns="0" tIns="0" rIns="0" bIns="0" rtlCol="0" anchor="ctr"/>
+          <a:lstStyle/>
+          <a:p>
+            <a:pPr indent="0" marL="0">
+              <a:buNone/>
+            </a:pPr>
+            <a:r>
+              <a:rPr lang="en-US" sz="1300" b="1" dirty="0">
+                <a:solidFill>
+                  <a:srgbClr val="D8D4E4"/>
+                </a:solidFill>
+                <a:latin typeface="Courier New" pitchFamily="34" charset="0"/>
+                <a:ea typeface="Courier New" pitchFamily="34" charset="-122"/>
+                <a:cs typeface="Courier New" pitchFamily="34" charset="-120"/>
+              </a:rPr>
+              <a:t>12</a:t>
+            </a:r>
+            <a:endParaRPr lang="en-US" sz="1300" dirty="0"/>
+          </a:p>
+        </p:txBody>
+      </p:sp>
+      <p:sp>
+        <p:nvSpPr>
+          <p:cNvPr id="25" name="Shape 22"/>
+          <p:cNvSpPr/>
+          <p:nvPr/>
+        </p:nvSpPr>
+        <p:spPr>
+          <a:xfrm>
+            <a:off x="9387840" y="2139696"/>
+            <a:ext cx="1011936" cy="1421892"/>
+          </a:xfrm>
+          <a:prstGeom prst="roundRect">
+            <a:avLst>
+              <a:gd name="adj" fmla="val 4518"/>
+            </a:avLst>
+          </a:prstGeom>
+          <a:solidFill>
+            <a:srgbClr val="0A0810"/>
+          </a:solidFill>
+          <a:ln w="12700">
+            <a:solidFill>
+              <a:srgbClr val="2A2438"/>
+            </a:solidFill>
+            <a:prstDash val="solid"/>
+          </a:ln>
+        </p:spPr>
+      </p:sp>
+      <p:sp>
+        <p:nvSpPr>
+          <p:cNvPr id="26" name="Text 23"/>
+          <p:cNvSpPr/>
+          <p:nvPr/>
+        </p:nvSpPr>
+        <p:spPr>
+          <a:xfrm>
+            <a:off x="9460992" y="2176272"/>
+            <a:ext cx="865632" cy="369692"/>
+          </a:xfrm>
+          <a:prstGeom prst="rect">
+            <a:avLst/>
+          </a:prstGeom>
+          <a:noFill/>
+          <a:ln/>
+        </p:spPr>
+        <p:txBody>
+          <a:bodyPr wrap="square" lIns="0" tIns="0" rIns="0" bIns="0" rtlCol="0" anchor="t"/>
+          <a:lstStyle/>
+          <a:p>
+            <a:pPr indent="0" marL="0">
+              <a:buNone/>
+            </a:pPr>
+            <a:r>
+              <a:rPr lang="en-US" sz="750" dirty="0">
+                <a:solidFill>
+                  <a:srgbClr val="9A94AA"/>
+                </a:solidFill>
+                <a:latin typeface="Courier New" pitchFamily="34" charset="0"/>
+                <a:ea typeface="Courier New" pitchFamily="34" charset="-122"/>
+                <a:cs typeface="Courier New" pitchFamily="34" charset="-120"/>
+              </a:rPr>
+              <a:t>cost</a:t>
+            </a:r>
+            <a:endParaRPr lang="en-US" sz="750" dirty="0"/>
+          </a:p>
+        </p:txBody>
+      </p:sp>
+      <p:sp>
+        <p:nvSpPr>
+          <p:cNvPr id="27" name="Text 24"/>
+          <p:cNvSpPr/>
+          <p:nvPr/>
+        </p:nvSpPr>
+        <p:spPr>
+          <a:xfrm>
+            <a:off x="9460992" y="2623139"/>
+            <a:ext cx="865632" cy="824697"/>
+          </a:xfrm>
+          <a:prstGeom prst="rect">
+            <a:avLst/>
+          </a:prstGeom>
+          <a:noFill/>
+          <a:ln/>
+        </p:spPr>
+        <p:txBody>
+          <a:bodyPr wrap="square" lIns="0" tIns="0" rIns="0" bIns="0" rtlCol="0" anchor="ctr"/>
+          <a:lstStyle/>
+          <a:p>
+            <a:pPr indent="0" marL="0">
+              <a:buNone/>
+            </a:pPr>
+            <a:r>
+              <a:rPr lang="en-US" sz="1300" b="1" dirty="0">
+                <a:solidFill>
+                  <a:srgbClr val="D8D4E4"/>
+                </a:solidFill>
+                <a:latin typeface="Courier New" pitchFamily="34" charset="0"/>
+                <a:ea typeface="Courier New" pitchFamily="34" charset="-122"/>
+                <a:cs typeface="Courier New" pitchFamily="34" charset="-120"/>
+              </a:rPr>
+              <a:t>$0.0045 / $5</a:t>
+            </a:r>
+            <a:endParaRPr lang="en-US" sz="1300" dirty="0"/>
+          </a:p>
+        </p:txBody>
+      </p:sp>
+      <p:sp>
+        <p:nvSpPr>
+          <p:cNvPr id="28" name="Shape 25"/>
+          <p:cNvSpPr/>
+          <p:nvPr/>
+        </p:nvSpPr>
+        <p:spPr>
+          <a:xfrm>
+            <a:off x="10509504" y="2139696"/>
+            <a:ext cx="1011936" cy="1421892"/>
+          </a:xfrm>
+          <a:prstGeom prst="roundRect">
+            <a:avLst>
+              <a:gd name="adj" fmla="val 4518"/>
+            </a:avLst>
+          </a:prstGeom>
+          <a:solidFill>
+            <a:srgbClr val="0A0810"/>
+          </a:solidFill>
+          <a:ln w="12700">
+            <a:solidFill>
+              <a:srgbClr val="2A2438"/>
+            </a:solidFill>
+            <a:prstDash val="solid"/>
+          </a:ln>
+        </p:spPr>
+      </p:sp>
+      <p:sp>
+        <p:nvSpPr>
+          <p:cNvPr id="29" name="Text 26"/>
+          <p:cNvSpPr/>
+          <p:nvPr/>
+        </p:nvSpPr>
+        <p:spPr>
+          <a:xfrm>
+            <a:off x="10582656" y="2176272"/>
+            <a:ext cx="865632" cy="369692"/>
+          </a:xfrm>
+          <a:prstGeom prst="rect">
+            <a:avLst/>
+          </a:prstGeom>
+          <a:noFill/>
+          <a:ln/>
+        </p:spPr>
+        <p:txBody>
+          <a:bodyPr wrap="square" lIns="0" tIns="0" rIns="0" bIns="0" rtlCol="0" anchor="t"/>
+          <a:lstStyle/>
+          <a:p>
+            <a:pPr indent="0" marL="0">
+              <a:buNone/>
+            </a:pPr>
+            <a:r>
+              <a:rPr lang="en-US" sz="750" dirty="0">
+                <a:solidFill>
+                  <a:srgbClr val="9A94AA"/>
+                </a:solidFill>
+                <a:latin typeface="Courier New" pitchFamily="34" charset="0"/>
+                <a:ea typeface="Courier New" pitchFamily="34" charset="-122"/>
+                <a:cs typeface="Courier New" pitchFamily="34" charset="-120"/>
+              </a:rPr>
+              <a:t>p95</a:t>
+            </a:r>
+            <a:endParaRPr lang="en-US" sz="750" dirty="0"/>
+          </a:p>
+        </p:txBody>
+      </p:sp>
+      <p:sp>
+        <p:nvSpPr>
+          <p:cNvPr id="30" name="Text 27"/>
+          <p:cNvSpPr/>
+          <p:nvPr/>
+        </p:nvSpPr>
+        <p:spPr>
+          <a:xfrm>
+            <a:off x="10582656" y="2623139"/>
+            <a:ext cx="865632" cy="824697"/>
+          </a:xfrm>
+          <a:prstGeom prst="rect">
+            <a:avLst/>
+          </a:prstGeom>
+          <a:noFill/>
+          <a:ln/>
+        </p:spPr>
+        <p:txBody>
+          <a:bodyPr wrap="square" lIns="0" tIns="0" rIns="0" bIns="0" rtlCol="0" anchor="ctr"/>
+          <a:lstStyle/>
+          <a:p>
+            <a:pPr indent="0" marL="0">
+              <a:buNone/>
+            </a:pPr>
+            <a:r>
+              <a:rPr lang="en-US" sz="1500" dirty="0">
+                <a:solidFill>
+                  <a:srgbClr val="9A94AA"/>
+                </a:solidFill>
+                <a:latin typeface="Courier New" pitchFamily="34" charset="0"/>
+                <a:ea typeface="Courier New" pitchFamily="34" charset="-122"/>
+                <a:cs typeface="Courier New" pitchFamily="34" charset="-120"/>
+              </a:rPr>
+              <a:t>—</a:t>
+            </a:r>
+            <a:endParaRPr lang="en-US" sz="1500" dirty="0"/>
+          </a:p>
+        </p:txBody>
+      </p:sp>
+      <p:sp>
+        <p:nvSpPr>
+          <p:cNvPr id="31" name="Shape 28"/>
+          <p:cNvSpPr/>
+          <p:nvPr/>
+        </p:nvSpPr>
+        <p:spPr>
+          <a:xfrm>
+            <a:off x="8266176" y="3653028"/>
+            <a:ext cx="1011936" cy="1421892"/>
+          </a:xfrm>
+          <a:prstGeom prst="roundRect">
+            <a:avLst>
+              <a:gd name="adj" fmla="val 4518"/>
+            </a:avLst>
+          </a:prstGeom>
+          <a:solidFill>
+            <a:srgbClr val="0A0810"/>
+          </a:solidFill>
+          <a:ln w="12700">
+            <a:solidFill>
+              <a:srgbClr val="2A2438"/>
+            </a:solidFill>
+            <a:prstDash val="solid"/>
+          </a:ln>
+        </p:spPr>
+      </p:sp>
+      <p:sp>
+        <p:nvSpPr>
+          <p:cNvPr id="32" name="Text 29"/>
+          <p:cNvSpPr/>
+          <p:nvPr/>
+        </p:nvSpPr>
+        <p:spPr>
+          <a:xfrm>
+            <a:off x="8339328" y="3689604"/>
+            <a:ext cx="865632" cy="369692"/>
+          </a:xfrm>
+          <a:prstGeom prst="rect">
+            <a:avLst/>
+          </a:prstGeom>
+          <a:noFill/>
+          <a:ln/>
+        </p:spPr>
+        <p:txBody>
+          <a:bodyPr wrap="square" lIns="0" tIns="0" rIns="0" bIns="0" rtlCol="0" anchor="t"/>
+          <a:lstStyle/>
+          <a:p>
+            <a:pPr indent="0" marL="0">
+              <a:buNone/>
+            </a:pPr>
+            <a:r>
+              <a:rPr lang="en-US" sz="750" dirty="0">
+                <a:solidFill>
+                  <a:srgbClr val="9A94AA"/>
+                </a:solidFill>
+                <a:latin typeface="Courier New" pitchFamily="34" charset="0"/>
+                <a:ea typeface="Courier New" pitchFamily="34" charset="-122"/>
+                <a:cs typeface="Courier New" pitchFamily="34" charset="-120"/>
+              </a:rPr>
+              <a:t>error</a:t>
+            </a:r>
+            <a:endParaRPr lang="en-US" sz="750" dirty="0"/>
+          </a:p>
+        </p:txBody>
+      </p:sp>
+      <p:sp>
+        <p:nvSpPr>
+          <p:cNvPr id="33" name="Text 30"/>
+          <p:cNvSpPr/>
+          <p:nvPr/>
+        </p:nvSpPr>
+        <p:spPr>
+          <a:xfrm>
+            <a:off x="8339328" y="4136471"/>
+            <a:ext cx="865632" cy="824697"/>
+          </a:xfrm>
+          <a:prstGeom prst="rect">
+            <a:avLst/>
+          </a:prstGeom>
+          <a:noFill/>
+          <a:ln/>
+        </p:spPr>
+        <p:txBody>
+          <a:bodyPr wrap="square" lIns="0" tIns="0" rIns="0" bIns="0" rtlCol="0" anchor="ctr"/>
+          <a:lstStyle/>
+          <a:p>
+            <a:pPr indent="0" marL="0">
+              <a:buNone/>
+            </a:pPr>
+            <a:r>
+              <a:rPr lang="en-US" sz="1500" dirty="0">
+                <a:solidFill>
+                  <a:srgbClr val="9A94AA"/>
+                </a:solidFill>
+                <a:latin typeface="Courier New" pitchFamily="34" charset="0"/>
+                <a:ea typeface="Courier New" pitchFamily="34" charset="-122"/>
+                <a:cs typeface="Courier New" pitchFamily="34" charset="-120"/>
+              </a:rPr>
+              <a:t>—</a:t>
+            </a:r>
+            <a:endParaRPr lang="en-US" sz="1500" dirty="0"/>
+          </a:p>
+        </p:txBody>
+      </p:sp>
+      <p:sp>
+        <p:nvSpPr>
+          <p:cNvPr id="34" name="Shape 31"/>
+          <p:cNvSpPr/>
+          <p:nvPr/>
+        </p:nvSpPr>
+        <p:spPr>
+          <a:xfrm>
+            <a:off x="9387840" y="3653028"/>
+            <a:ext cx="1011936" cy="1421892"/>
+          </a:xfrm>
+          <a:prstGeom prst="roundRect">
+            <a:avLst>
+              <a:gd name="adj" fmla="val 4518"/>
+            </a:avLst>
+          </a:prstGeom>
+          <a:solidFill>
+            <a:srgbClr val="0A0810"/>
+          </a:solidFill>
+          <a:ln w="12700">
+            <a:solidFill>
+              <a:srgbClr val="2A2438"/>
+            </a:solidFill>
+            <a:prstDash val="solid"/>
+          </a:ln>
+        </p:spPr>
+      </p:sp>
+      <p:sp>
+        <p:nvSpPr>
+          <p:cNvPr id="35" name="Text 32"/>
+          <p:cNvSpPr/>
+          <p:nvPr/>
+        </p:nvSpPr>
+        <p:spPr>
+          <a:xfrm>
+            <a:off x="9460992" y="3689604"/>
+            <a:ext cx="865632" cy="369692"/>
+          </a:xfrm>
+          <a:prstGeom prst="rect">
+            <a:avLst/>
+          </a:prstGeom>
+          <a:noFill/>
+          <a:ln/>
+        </p:spPr>
+        <p:txBody>
+          <a:bodyPr wrap="square" lIns="0" tIns="0" rIns="0" bIns="0" rtlCol="0" anchor="t"/>
+          <a:lstStyle/>
+          <a:p>
+            <a:pPr indent="0" marL="0">
+              <a:buNone/>
+            </a:pPr>
+            <a:r>
+              <a:rPr lang="en-US" sz="750" dirty="0">
+                <a:solidFill>
+                  <a:srgbClr val="9A94AA"/>
+                </a:solidFill>
+                <a:latin typeface="Courier New" pitchFamily="34" charset="0"/>
+                <a:ea typeface="Courier New" pitchFamily="34" charset="-122"/>
+                <a:cs typeface="Courier New" pitchFamily="34" charset="-120"/>
+              </a:rPr>
+              <a:t>cache-hit</a:t>
+            </a:r>
+            <a:endParaRPr lang="en-US" sz="750" dirty="0"/>
+          </a:p>
+        </p:txBody>
+      </p:sp>
+      <p:sp>
+        <p:nvSpPr>
+          <p:cNvPr id="36" name="Text 33"/>
+          <p:cNvSpPr/>
+          <p:nvPr/>
+        </p:nvSpPr>
+        <p:spPr>
+          <a:xfrm>
+            <a:off x="9460992" y="4136471"/>
+            <a:ext cx="865632" cy="824697"/>
+          </a:xfrm>
+          <a:prstGeom prst="rect">
+            <a:avLst/>
+          </a:prstGeom>
+          <a:noFill/>
+          <a:ln/>
+        </p:spPr>
+        <p:txBody>
+          <a:bodyPr wrap="square" lIns="0" tIns="0" rIns="0" bIns="0" rtlCol="0" anchor="ctr"/>
+          <a:lstStyle/>
+          <a:p>
+            <a:pPr indent="0" marL="0">
+              <a:buNone/>
+            </a:pPr>
+            <a:r>
+              <a:rPr lang="en-US" sz="1300" b="1" dirty="0">
+                <a:solidFill>
+                  <a:srgbClr val="D8D4E4"/>
+                </a:solidFill>
+                <a:latin typeface="Courier New" pitchFamily="34" charset="0"/>
+                <a:ea typeface="Courier New" pitchFamily="34" charset="-122"/>
+                <a:cs typeface="Courier New" pitchFamily="34" charset="-120"/>
+              </a:rPr>
+              <a:t>50%</a:t>
+            </a:r>
+            <a:endParaRPr lang="en-US" sz="1300" dirty="0"/>
+          </a:p>
+        </p:txBody>
+      </p:sp>
+      <p:sp>
+        <p:nvSpPr>
+          <p:cNvPr id="37" name="Shape 34"/>
+          <p:cNvSpPr/>
+          <p:nvPr/>
+        </p:nvSpPr>
+        <p:spPr>
+          <a:xfrm>
+            <a:off x="10509504" y="3653028"/>
+            <a:ext cx="1011936" cy="1421892"/>
+          </a:xfrm>
+          <a:prstGeom prst="roundRect">
+            <a:avLst>
+              <a:gd name="adj" fmla="val 4518"/>
+            </a:avLst>
+          </a:prstGeom>
+          <a:solidFill>
+            <a:srgbClr val="0A0810"/>
+          </a:solidFill>
+          <a:ln w="12700">
+            <a:solidFill>
+              <a:srgbClr val="2A2438"/>
+            </a:solidFill>
+            <a:prstDash val="solid"/>
+          </a:ln>
+        </p:spPr>
+      </p:sp>
+      <p:sp>
+        <p:nvSpPr>
+          <p:cNvPr id="38" name="Text 35"/>
+          <p:cNvSpPr/>
+          <p:nvPr/>
+        </p:nvSpPr>
+        <p:spPr>
+          <a:xfrm>
+            <a:off x="10582656" y="3689604"/>
+            <a:ext cx="865632" cy="369692"/>
+          </a:xfrm>
+          <a:prstGeom prst="rect">
+            <a:avLst/>
+          </a:prstGeom>
+          <a:noFill/>
+          <a:ln/>
+        </p:spPr>
+        <p:txBody>
+          <a:bodyPr wrap="square" lIns="0" tIns="0" rIns="0" bIns="0" rtlCol="0" anchor="t"/>
+          <a:lstStyle/>
+          <a:p>
+            <a:pPr indent="0" marL="0">
+              <a:buNone/>
+            </a:pPr>
+            <a:r>
+              <a:rPr lang="en-US" sz="750" dirty="0">
+                <a:solidFill>
+                  <a:srgbClr val="9A94AA"/>
+                </a:solidFill>
+                <a:latin typeface="Courier New" pitchFamily="34" charset="0"/>
+                <a:ea typeface="Courier New" pitchFamily="34" charset="-122"/>
+                <a:cs typeface="Courier New" pitchFamily="34" charset="-120"/>
+              </a:rPr>
+              <a:t>fallback</a:t>
+            </a:r>
+            <a:endParaRPr lang="en-US" sz="750" dirty="0"/>
+          </a:p>
+        </p:txBody>
+      </p:sp>
+      <p:sp>
+        <p:nvSpPr>
+          <p:cNvPr id="39" name="Text 36"/>
+          <p:cNvSpPr/>
+          <p:nvPr/>
+        </p:nvSpPr>
+        <p:spPr>
+          <a:xfrm>
+            <a:off x="10582656" y="4136471"/>
+            <a:ext cx="865632" cy="824697"/>
+          </a:xfrm>
+          <a:prstGeom prst="rect">
+            <a:avLst/>
+          </a:prstGeom>
+          <a:noFill/>
+          <a:ln/>
+        </p:spPr>
+        <p:txBody>
+          <a:bodyPr wrap="square" lIns="0" tIns="0" rIns="0" bIns="0" rtlCol="0" anchor="ctr"/>
+          <a:lstStyle/>
+          <a:p>
+            <a:pPr indent="0" marL="0">
+              <a:buNone/>
+            </a:pPr>
+            <a:r>
+              <a:rPr lang="en-US" sz="1500" dirty="0">
+                <a:solidFill>
+                  <a:srgbClr val="9A94AA"/>
+                </a:solidFill>
+                <a:latin typeface="Courier New" pitchFamily="34" charset="0"/>
+                <a:ea typeface="Courier New" pitchFamily="34" charset="-122"/>
+                <a:cs typeface="Courier New" pitchFamily="34" charset="-120"/>
+              </a:rPr>
+              <a:t>—</a:t>
+            </a:r>
+            <a:endParaRPr lang="en-US" sz="1500" dirty="0"/>
+          </a:p>
+        </p:txBody>
+      </p:sp>
+      <p:sp>
+        <p:nvSpPr>
+          <p:cNvPr id="40" name="Shape 37"/>
+          <p:cNvSpPr/>
+          <p:nvPr/>
+        </p:nvSpPr>
+        <p:spPr>
+          <a:xfrm>
+            <a:off x="566928" y="5349240"/>
+            <a:ext cx="11064240" cy="731520"/>
+          </a:xfrm>
+          <a:prstGeom prst="roundRect">
+            <a:avLst>
+              <a:gd name="adj" fmla="val 15000"/>
+            </a:avLst>
+          </a:prstGeom>
+          <a:solidFill>
+            <a:srgbClr val="FFFFFF"/>
+          </a:solidFill>
+          <a:ln w="12700">
+            <a:solidFill>
+              <a:srgbClr val="D9D9D9"/>
+            </a:solidFill>
+            <a:prstDash val="solid"/>
+          </a:ln>
+        </p:spPr>
+      </p:sp>
+      <p:sp>
+        <p:nvSpPr>
+          <p:cNvPr id="41" name="Text 38"/>
+          <p:cNvSpPr/>
+          <p:nvPr/>
+        </p:nvSpPr>
+        <p:spPr>
+          <a:xfrm>
+            <a:off x="786384" y="5495544"/>
+            <a:ext cx="10625328" cy="438912"/>
           </a:xfrm>
           <a:prstGeom prst="rect">
             <a:avLst/>

--- a/docs/decks/L05.pptx
+++ b/docs/decks/L05.pptx
@@ -17808,7 +17808,7 @@
                 <a:ea typeface="Montserrat" pitchFamily="34" charset="-122"/>
                 <a:cs typeface="Montserrat" pitchFamily="34" charset="-120"/>
               </a:rPr>
-              <a:t>що це довело · перевір себе · антипатерни тижня</a:t>
+              <a:t>що це довело · перевірте себе · антипатерни тижня</a:t>
             </a:r>
             <a:endParaRPr lang="en-US" sz="1500" dirty="0"/>
           </a:p>
@@ -19275,7 +19275,7 @@
                 <a:ea typeface="Unbounded" pitchFamily="34" charset="-122"/>
                 <a:cs typeface="Unbounded" pitchFamily="34" charset="-120"/>
               </a:rPr>
-              <a:t>Перевір себе</a:t>
+              <a:t>Перевірте себе</a:t>
             </a:r>
             <a:endParaRPr lang="en-US" sz="2400" dirty="0"/>
           </a:p>
